--- a/deck/Measured_Where_It_Varies.pptx
+++ b/deck/Measured_Where_It_Varies.pptx
@@ -50,6 +50,7 @@
     <p:sldId id="298" r:id="rId49"/>
     <p:sldId id="299" r:id="rId50"/>
     <p:sldId id="300" r:id="rId51"/>
+    <p:sldId id="301" r:id="rId52"/>
   </p:sldIdLst>
   <p:sldSz cx="12191695" cy="6858000" type="screen4x3"/>
   <p:notesSz cx="6858000" cy="9144000"/>
@@ -3375,7 +3376,7 @@
                 </a:solidFill>
                 <a:latin typeface="Consolas"/>
               </a:rPr>
-              <a:t>SDG: 42 countries, 661 series · HDI × World Happiness Report: 151 countries, 2011–2023 · Subnational HDI: 239 regions · European Social Survey: 36 countries, 351,023 respondents, rounds 5–11 (2010–2023)</a:t>
+              <a:t>SDG: 42 countries, 661 series · HDI × World Happiness Report: 151 countries, 2011–2023 · Subnational HDI &amp; sub-indices: 239 regions · European Social Survey: 36 countries, 351,023 respondents, rounds 5–11 (2010–2023)</a:t>
             </a:r>
           </a:p>
         </p:txBody>
@@ -4576,6 +4577,28 @@
               <a:t>Health passes it. Restricted to high-income countries — the same development stratum the ESS covers — the SDG data puts health at 11.2% of country-indicator pairs against education's 1.2%, the same ordering the ESS gives from entirely different measurement. Social trust fails it: there is no interpersonal-trust indicator anywhere in the SDG framework, and Goal 16's best series ranks 125th of 609. Trust is the strongest ESS predictor and has no independent corroboration available. It should enter the commentary as an open question, not a result.</a:t>
             </a:r>
           </a:p>
+          <a:p>
+            <a:pPr>
+              <a:lnSpc>
+                <a:spcPct val="132000"/>
+              </a:lnSpc>
+              <a:spcBef>
+                <a:spcPts val="0"/>
+              </a:spcBef>
+              <a:spcAft>
+                <a:spcPts val="1100"/>
+              </a:spcAft>
+            </a:pPr>
+            <a:r>
+              <a:rPr sz="1150" b="0" i="0">
+                <a:solidFill>
+                  <a:srgbClr val="5A6068"/>
+                </a:solidFill>
+                <a:latin typeface="Calibri"/>
+              </a:rPr>
+              <a:t>Act III adds a second external check at the regional scale: GDL's externally measured health index leads its education and income indices within countries too, so the health result now holds under administrative measurement at both the national and the regional level.</a:t>
+            </a:r>
+          </a:p>
         </p:txBody>
       </p:sp>
       <p:sp>
@@ -7688,7 +7711,7 @@
         <p:spPr>
           <a:xfrm>
             <a:off x="566928" y="502920"/>
-            <a:ext cx="8595360" cy="274320"/>
+            <a:ext cx="4160520" cy="274320"/>
           </a:xfrm>
           <a:prstGeom prst="rect">
             <a:avLst/>
@@ -7716,7 +7739,7 @@
                 </a:solidFill>
                 <a:latin typeface="Consolas"/>
               </a:rPr>
-              <a:t>ON PRIORITIES</a:t>
+              <a:t>THE FLIP, EXTERNALLY MEASURED</a:t>
             </a:r>
           </a:p>
         </p:txBody>
@@ -7730,7 +7753,7 @@
         <p:spPr>
           <a:xfrm>
             <a:off x="566928" y="914400"/>
-            <a:ext cx="8595360" cy="1371600"/>
+            <a:ext cx="4160520" cy="1371600"/>
           </a:xfrm>
           <a:prstGeom prst="rect">
             <a:avLst/>
@@ -7755,13 +7778,13 @@
               </a:spcAft>
             </a:pPr>
             <a:r>
-              <a:rPr sz="2700" b="0" i="0">
+              <a:rPr sz="2300" b="0" i="0">
                 <a:solidFill>
                   <a:srgbClr val="14171C"/>
                 </a:solidFill>
                 <a:latin typeface="Georgia"/>
               </a:rPr>
-              <a:t>Indicator dashboards are not wellbeing instruments</a:t>
+              <a:t>It survives with no self-report at all — and it is a health flip</a:t>
             </a:r>
           </a:p>
         </p:txBody>
@@ -7774,8 +7797,8 @@
         </p:nvSpPr>
         <p:spPr>
           <a:xfrm>
-            <a:off x="566928" y="2286000"/>
-            <a:ext cx="8595360" cy="3840480"/>
+            <a:off x="566928" y="2331720"/>
+            <a:ext cx="4160520" cy="3840480"/>
           </a:xfrm>
           <a:prstGeom prst="rect">
             <a:avLst/>
@@ -7800,13 +7823,13 @@
               </a:spcAft>
             </a:pPr>
             <a:r>
-              <a:rPr sz="1400" b="0" i="0">
+              <a:rPr sz="1150" b="0" i="0">
                 <a:solidFill>
                   <a:srgbClr val="5A6068"/>
                 </a:solidFill>
                 <a:latin typeface="Calibri"/>
               </a:rPr>
-              <a:t>Development indicators tell you reliably where wellbeing is high. They tell you almost nothing about when it will rise. Across every framework tested here, year-on-year indicator movement carries essentially no wellbeing information within the measurement window — a decade or so.</a:t>
+              <a:t>The strongest objection to the ranking flip is that health and trust are reported by the same respondents as the outcome. GDL's regional sub-indices remove that objection: health, education and income indices measured per region from external sources, sharing no method with the ESS.</a:t>
             </a:r>
           </a:p>
           <a:p>
@@ -7822,13 +7845,13 @@
               </a:spcAft>
             </a:pPr>
             <a:r>
-              <a:rPr sz="1400" b="0" i="0">
+              <a:rPr sz="1150" b="0" i="0">
                 <a:solidFill>
                   <a:srgbClr val="5A6068"/>
                 </a:solidFill>
                 <a:latin typeface="Calibri"/>
               </a:rPr>
-              <a:t>The implication is about horizon and instrument, not about whether development matters. A monitoring architecture designed to reward annual indicator movement should not be read as tracking wellbeing, and a government that improves its dashboard position in a given year should not expect a wellbeing dividend inside the same electoral cycle.</a:t>
+              <a:t>Within countries, the external health index correlates with regional life satisfaction at a median of +0.34, significant in 6 of 15 usable countries, against +0.12 for the income index and +0.06 for the education index. The domain ordering is the same one the self-reports give, from measurement the respondents never touched. Self-rated health still runs higher (+0.50), which is exactly what you expect if part — but only part — of its lead is shared method variance. One country drops out: Albania's regional health index is constant, another instance of a measure with no variance left to predict with.</a:t>
             </a:r>
           </a:p>
         </p:txBody>
@@ -7871,6 +7894,75 @@
                 <a:latin typeface="Consolas"/>
               </a:rPr>
               <a:t>III</a:t>
+            </a:r>
+          </a:p>
+        </p:txBody>
+      </p:sp>
+      <p:pic>
+        <p:nvPicPr>
+          <p:cNvPr id="6" name="Picture 5" descr="within_country_external.png"/>
+          <p:cNvPicPr>
+            <a:picLocks noChangeAspect="1"/>
+          </p:cNvPicPr>
+          <p:nvPr/>
+        </p:nvPicPr>
+        <p:blipFill>
+          <a:blip r:embed="rId2"/>
+          <a:stretch>
+            <a:fillRect/>
+          </a:stretch>
+        </p:blipFill>
+        <p:spPr>
+          <a:xfrm>
+            <a:off x="5120640" y="1531620"/>
+            <a:ext cx="6537960" cy="3328416"/>
+          </a:xfrm>
+          <a:prstGeom prst="rect">
+            <a:avLst/>
+          </a:prstGeom>
+        </p:spPr>
+      </p:pic>
+      <p:sp>
+        <p:nvSpPr>
+          <p:cNvPr id="7" name="TextBox 6"/>
+          <p:cNvSpPr txBox="1"/>
+          <p:nvPr/>
+        </p:nvSpPr>
+        <p:spPr>
+          <a:xfrm>
+            <a:off x="5120640" y="5897880"/>
+            <a:ext cx="6537960" cy="731520"/>
+          </a:xfrm>
+          <a:prstGeom prst="rect">
+            <a:avLst/>
+          </a:prstGeom>
+          <a:noFill/>
+        </p:spPr>
+        <p:txBody>
+          <a:bodyPr wrap="square" lIns="0" rIns="0" tIns="0" bIns="0">
+            <a:spAutoFit/>
+          </a:bodyPr>
+          <a:lstStyle/>
+          <a:p>
+            <a:pPr>
+              <a:lnSpc>
+                <a:spcPct val="125000"/>
+              </a:lnSpc>
+              <a:spcBef>
+                <a:spcPts val="0"/>
+              </a:spcBef>
+              <a:spcAft>
+                <a:spcPts val="0"/>
+              </a:spcAft>
+            </a:pPr>
+            <a:r>
+              <a:rPr sz="900" b="0" i="0">
+                <a:solidFill>
+                  <a:srgbClr val="868D96"/>
+                </a:solidFill>
+                <a:latin typeface="Calibri"/>
+              </a:rPr>
+              <a:t>The within-country domain race with externally measured predictors (solid) beside the same-survey self-reports (faded). Sub-indices pooled 2010–2023.</a:t>
             </a:r>
           </a:p>
         </p:txBody>
@@ -7938,7 +8030,7 @@
                 </a:solidFill>
                 <a:latin typeface="Consolas"/>
               </a:rPr>
-              <a:t>ON WHAT KIND OF HEALTH</a:t>
+              <a:t>ON PRIORITIES</a:t>
             </a:r>
           </a:p>
         </p:txBody>
@@ -7983,7 +8075,7 @@
                 </a:solidFill>
                 <a:latin typeface="Georgia"/>
               </a:rPr>
-              <a:t>Monitor health where it still varies, not where it has already converged</a:t>
+              <a:t>Indicator dashboards are not wellbeing instruments</a:t>
             </a:r>
           </a:p>
         </p:txBody>
@@ -8028,7 +8120,7 @@
                 </a:solidFill>
                 <a:latin typeface="Calibri"/>
               </a:rPr>
-              <a:t>Life expectancy is the standard summary of population health and the HDI's only health input, and it is the weakest of the HDI's five indicators against wellbeing. That is a measurement failure rather than a substantive one. What carries health's signal is survival at the margin — child, infant and neonatal mortality, stunting, sanitation and safe water — and, in rich countries, self-rated health, which picks up morbidity and functional limitation that life expectancy cannot see.</a:t>
+              <a:t>Development indicators tell you reliably where wellbeing is high. They tell you almost nothing about when it will rise. Across every framework tested here, year-on-year indicator movement carries essentially no wellbeing information within the measurement window — a decade or so.</a:t>
             </a:r>
           </a:p>
           <a:p>
@@ -8050,7 +8142,7 @@
                 </a:solidFill>
                 <a:latin typeface="Calibri"/>
               </a:rPr>
-              <a:t>For monitoring, that argues for retiring life expectancy as the headline wellbeing-relevant health measure in high-income settings and pairing survival indicators with a subjective health item. The ESS already fields one; most national statistical systems do too. It is close to free.</a:t>
+              <a:t>The implication is about horizon and instrument, not about whether development matters. A monitoring architecture designed to reward annual indicator movement should not be read as tracking wellbeing, and a government that improves its dashboard position in a given year should not expect a wellbeing dividend inside the same electoral cycle.</a:t>
             </a:r>
           </a:p>
         </p:txBody>
@@ -8160,7 +8252,7 @@
                 </a:solidFill>
                 <a:latin typeface="Consolas"/>
               </a:rPr>
-              <a:t>ON WHAT KIND OF EDUCATION</a:t>
+              <a:t>ON WHAT KIND OF HEALTH</a:t>
             </a:r>
           </a:p>
         </p:txBody>
@@ -8205,7 +8297,7 @@
                 </a:solidFill>
                 <a:latin typeface="Georgia"/>
               </a:rPr>
-              <a:t>The consensus moved to learning; the wellbeing evidence points at attainment</a:t>
+              <a:t>Monitor health where it still varies, not where it has already converged</a:t>
             </a:r>
           </a:p>
         </p:txBody>
@@ -8250,7 +8342,7 @@
                 </a:solidFill>
                 <a:latin typeface="Calibri"/>
               </a:rPr>
-              <a:t>Global education policy has shifted decisively over the past decade from schooling to learning — the learning-crisis framing, learning-poverty targets, and an indicator architecture built around measured proficiency. The premise is that years in school without demonstrated learning are an empty metric.</a:t>
+              <a:t>Life expectancy is the standard summary of population health and the HDI's only health input, and it is the weakest of the HDI's five indicators against wellbeing. That is a measurement failure rather than a substantive one. What carries health's signal is survival at the margin — child, infant and neonatal mortality, stunting, sanitation and safe water — and, in rich countries, self-rated health, which picks up morbidity and functional limitation that life expectancy cannot see.</a:t>
             </a:r>
           </a:p>
           <a:p>
@@ -8272,7 +8364,7 @@
                 </a:solidFill>
                 <a:latin typeface="Calibri"/>
               </a:rPr>
-              <a:t>Every level of aggregation we can test points the other way. Attainment and access carry the signal — 12.7% for SDG4 access, 40.7% and 34.0% for the HDI's schooling components, 32 of 36 countries at the individual level — while measured learning outcomes sit at 0.9% and parity ratios at 2.5%. The caution from Act II applies: education is the most consistent signal and the smallest one.</a:t>
+              <a:t>For monitoring, that argues for retiring life expectancy as the headline wellbeing-relevant health measure in high-income settings and pairing survival indicators with a subjective health item. The ESS already fields one; most national statistical systems do too. It is close to free.</a:t>
             </a:r>
           </a:p>
         </p:txBody>
@@ -8382,7 +8474,7 @@
                 </a:solidFill>
                 <a:latin typeface="Consolas"/>
               </a:rPr>
-              <a:t>WHAT WE CANNOT SAY</a:t>
+              <a:t>ON WHAT KIND OF EDUCATION</a:t>
             </a:r>
           </a:p>
         </p:txBody>
@@ -8427,7 +8519,7 @@
                 </a:solidFill>
                 <a:latin typeface="Georgia"/>
               </a:rPr>
-              <a:t>Three limits that keep this a question rather than a recommendation</a:t>
+              <a:t>The consensus moved to learning; the wellbeing evidence points at attainment</a:t>
             </a:r>
           </a:p>
         </p:txBody>
@@ -8472,7 +8564,7 @@
                 </a:solidFill>
                 <a:latin typeface="Calibri"/>
               </a:rPr>
-              <a:t>None of this is causal. The design is correlational throughout, and the levels results in particular are cross-sectional comparisons between countries.</a:t>
+              <a:t>Global education policy has shifted decisively over the past decade from schooling to learning — the learning-crisis framing, learning-poverty targets, and an indicator architecture built around measured proficiency. The premise is that years in school without demonstrated learning are an empty metric.</a:t>
             </a:r>
           </a:p>
           <a:p>
@@ -8494,51 +8586,7 @@
                 </a:solidFill>
                 <a:latin typeface="Calibri"/>
               </a:rPr>
-              <a:t>Schooling cannot be separated from what schooling stands in for. Years attained proxy labour-market position, economic security, autonomy, and social standing, and this design cannot pull them apart. Individual effects are small: a median R² near 0.01.</a:t>
-            </a:r>
-          </a:p>
-          <a:p>
-            <a:pPr>
-              <a:lnSpc>
-                <a:spcPct val="132000"/>
-              </a:lnSpc>
-              <a:spcBef>
-                <a:spcPts val="0"/>
-              </a:spcBef>
-              <a:spcAft>
-                <a:spcPts val="1100"/>
-              </a:spcAft>
-            </a:pPr>
-            <a:r>
-              <a:rPr sz="1400" b="0" i="0">
-                <a:solidFill>
-                  <a:srgbClr val="5A6068"/>
-                </a:solidFill>
-                <a:latin typeface="Calibri"/>
-              </a:rPr>
-              <a:t>The within-country results are Europe-only. The ESS is the only regional wellbeing source with the coverage this design needs — Gallup's subnational files are paywalled — so the priorities argument generalises across 16 European countries and not beyond them. That belongs in the text as a scope condition, not buried in a limitations paragraph, because the ranking flip is the most policy-relevant result here and will be the most contested.</a:t>
-            </a:r>
-          </a:p>
-          <a:p>
-            <a:pPr>
-              <a:lnSpc>
-                <a:spcPct val="132000"/>
-              </a:lnSpc>
-              <a:spcBef>
-                <a:spcPts val="0"/>
-              </a:spcBef>
-              <a:spcAft>
-                <a:spcPts val="1100"/>
-              </a:spcAft>
-            </a:pPr>
-            <a:r>
-              <a:rPr sz="1400" b="0" i="0">
-                <a:solidFill>
-                  <a:srgbClr val="5A6068"/>
-                </a:solidFill>
-                <a:latin typeface="Calibri"/>
-              </a:rPr>
-              <a:t>Some of the parity and learning indicators' weakness is coverage rather than construct — they are the youngest and thinnest series in the SDG database, and thin series fail significance tests for uninteresting reasons. The commentary should concede this explicitly and say what would settle it.</a:t>
+              <a:t>Every level of aggregation we can test points the other way. Attainment and access carry the signal — 12.7% for SDG4 access, 40.7% and 34.0% for the HDI's schooling components, 32 of 36 countries at the individual level — while measured learning outcomes sit at 0.9% and parity ratios at 2.5%. The caution from Act II applies: education is the most consistent signal and the smallest one.</a:t>
             </a:r>
           </a:p>
         </p:txBody>
@@ -8648,7 +8696,7 @@
                 </a:solidFill>
                 <a:latin typeface="Consolas"/>
               </a:rPr>
-              <a:t>THE ASK</a:t>
+              <a:t>WHAT WE CANNOT SAY</a:t>
             </a:r>
           </a:p>
         </p:txBody>
@@ -8693,7 +8741,7 @@
                 </a:solidFill>
                 <a:latin typeface="Georgia"/>
               </a:rPr>
-              <a:t>Should wellbeing be a criterion for how we measure development after 2030?</a:t>
+              <a:t>Three limits that keep this a question rather than a recommendation</a:t>
             </a:r>
           </a:p>
         </p:txBody>
@@ -8738,7 +8786,7 @@
                 </a:solidFill>
                 <a:latin typeface="Calibri"/>
               </a:rPr>
-              <a:t>That is the question the commentary exists to pose, and it has a sharp form. Two of the most consequential domains in development are monitored through variables that have either run out of variance or measure a different construct from the one the policy debate is about: health through life expectancy, education through parity and proficiency. If wellbeing is to be a criterion for the post-2030 architecture at all, the first question is not which domain to prioritise but whether each domain is being measured somewhere it can still move.</a:t>
+              <a:t>None of this is causal. The design is correlational throughout, and the levels results in particular are cross-sectional comparisons between countries.</a:t>
             </a:r>
           </a:p>
           <a:p>
@@ -8760,7 +8808,51 @@
                 </a:solidFill>
                 <a:latin typeface="Calibri"/>
               </a:rPr>
-              <a:t>A commentary cannot settle that. It can put the disagreement on the record with the evidence attached, which is what the three acts are for.</a:t>
+              <a:t>Schooling cannot be separated from what schooling stands in for. Years attained proxy labour-market position, economic security, autonomy, and social standing, and this design cannot pull them apart. Individual effects are small: a median R² near 0.01.</a:t>
+            </a:r>
+          </a:p>
+          <a:p>
+            <a:pPr>
+              <a:lnSpc>
+                <a:spcPct val="132000"/>
+              </a:lnSpc>
+              <a:spcBef>
+                <a:spcPts val="0"/>
+              </a:spcBef>
+              <a:spcAft>
+                <a:spcPts val="1100"/>
+              </a:spcAft>
+            </a:pPr>
+            <a:r>
+              <a:rPr sz="1400" b="0" i="0">
+                <a:solidFill>
+                  <a:srgbClr val="5A6068"/>
+                </a:solidFill>
+                <a:latin typeface="Calibri"/>
+              </a:rPr>
+              <a:t>The within-country results are Europe-only. The ESS is the only regional wellbeing source with the coverage this design needs — Gallup's subnational files are paywalled — so the priorities argument generalises across 16 European countries and not beyond them. That belongs in the text as a scope condition, not buried in a limitations paragraph, because the ranking flip is the most policy-relevant result here and will be the most contested.</a:t>
+            </a:r>
+          </a:p>
+          <a:p>
+            <a:pPr>
+              <a:lnSpc>
+                <a:spcPct val="132000"/>
+              </a:lnSpc>
+              <a:spcBef>
+                <a:spcPts val="0"/>
+              </a:spcBef>
+              <a:spcAft>
+                <a:spcPts val="1100"/>
+              </a:spcAft>
+            </a:pPr>
+            <a:r>
+              <a:rPr sz="1400" b="0" i="0">
+                <a:solidFill>
+                  <a:srgbClr val="5A6068"/>
+                </a:solidFill>
+                <a:latin typeface="Calibri"/>
+              </a:rPr>
+              <a:t>Some of the parity and learning indicators' weakness is coverage rather than construct — they are the youngest and thinnest series in the SDG database, and thin series fail significance tests for uninteresting reasons. The commentary should concede this explicitly and say what would settle it.</a:t>
             </a:r>
           </a:p>
         </p:txBody>
@@ -8816,6 +8908,228 @@
 </file>
 
 <file path=ppt/slides/slide27.xml><?xml version="1.0" encoding="utf-8"?>
+<p:sld xmlns:a="http://schemas.openxmlformats.org/drawingml/2006/main" xmlns:p="http://schemas.openxmlformats.org/presentationml/2006/main" xmlns:r="http://schemas.openxmlformats.org/officeDocument/2006/relationships">
+  <p:cSld>
+    <p:bg>
+      <p:bgPr>
+        <a:solidFill>
+          <a:srgbClr val="FCFCFB"/>
+        </a:solidFill>
+        <a:effectLst/>
+      </p:bgPr>
+    </p:bg>
+    <p:spTree>
+      <p:nvGrpSpPr>
+        <p:cNvPr id="1" name=""/>
+        <p:cNvGrpSpPr/>
+        <p:nvPr/>
+      </p:nvGrpSpPr>
+      <p:grpSpPr/>
+      <p:sp>
+        <p:nvSpPr>
+          <p:cNvPr id="2" name="TextBox 1"/>
+          <p:cNvSpPr txBox="1"/>
+          <p:nvPr/>
+        </p:nvSpPr>
+        <p:spPr>
+          <a:xfrm>
+            <a:off x="566928" y="502920"/>
+            <a:ext cx="8595360" cy="274320"/>
+          </a:xfrm>
+          <a:prstGeom prst="rect">
+            <a:avLst/>
+          </a:prstGeom>
+          <a:noFill/>
+        </p:spPr>
+        <p:txBody>
+          <a:bodyPr wrap="square" lIns="0" rIns="0" tIns="0" bIns="0">
+            <a:spAutoFit/>
+          </a:bodyPr>
+          <a:lstStyle/>
+          <a:p>
+            <a:pPr>
+              <a:spcBef>
+                <a:spcPts val="0"/>
+              </a:spcBef>
+              <a:spcAft>
+                <a:spcPts val="0"/>
+              </a:spcAft>
+            </a:pPr>
+            <a:r>
+              <a:rPr sz="1000" b="0" i="0">
+                <a:solidFill>
+                  <a:srgbClr val="A63A30"/>
+                </a:solidFill>
+                <a:latin typeface="Consolas"/>
+              </a:rPr>
+              <a:t>THE ASK</a:t>
+            </a:r>
+          </a:p>
+        </p:txBody>
+      </p:sp>
+      <p:sp>
+        <p:nvSpPr>
+          <p:cNvPr id="3" name="TextBox 2"/>
+          <p:cNvSpPr txBox="1"/>
+          <p:nvPr/>
+        </p:nvSpPr>
+        <p:spPr>
+          <a:xfrm>
+            <a:off x="566928" y="914400"/>
+            <a:ext cx="8595360" cy="1371600"/>
+          </a:xfrm>
+          <a:prstGeom prst="rect">
+            <a:avLst/>
+          </a:prstGeom>
+          <a:noFill/>
+        </p:spPr>
+        <p:txBody>
+          <a:bodyPr wrap="square" lIns="0" rIns="0" tIns="0" bIns="0">
+            <a:spAutoFit/>
+          </a:bodyPr>
+          <a:lstStyle/>
+          <a:p>
+            <a:pPr>
+              <a:lnSpc>
+                <a:spcPct val="108000"/>
+              </a:lnSpc>
+              <a:spcBef>
+                <a:spcPts val="0"/>
+              </a:spcBef>
+              <a:spcAft>
+                <a:spcPts val="0"/>
+              </a:spcAft>
+            </a:pPr>
+            <a:r>
+              <a:rPr sz="2700" b="0" i="0">
+                <a:solidFill>
+                  <a:srgbClr val="14171C"/>
+                </a:solidFill>
+                <a:latin typeface="Georgia"/>
+              </a:rPr>
+              <a:t>Should wellbeing be a criterion for how we measure development after 2030?</a:t>
+            </a:r>
+          </a:p>
+        </p:txBody>
+      </p:sp>
+      <p:sp>
+        <p:nvSpPr>
+          <p:cNvPr id="4" name="TextBox 3"/>
+          <p:cNvSpPr txBox="1"/>
+          <p:nvPr/>
+        </p:nvSpPr>
+        <p:spPr>
+          <a:xfrm>
+            <a:off x="566928" y="2286000"/>
+            <a:ext cx="8595360" cy="3840480"/>
+          </a:xfrm>
+          <a:prstGeom prst="rect">
+            <a:avLst/>
+          </a:prstGeom>
+          <a:noFill/>
+        </p:spPr>
+        <p:txBody>
+          <a:bodyPr wrap="square" lIns="0" rIns="0" tIns="0" bIns="0">
+            <a:spAutoFit/>
+          </a:bodyPr>
+          <a:lstStyle/>
+          <a:p>
+            <a:pPr>
+              <a:lnSpc>
+                <a:spcPct val="132000"/>
+              </a:lnSpc>
+              <a:spcBef>
+                <a:spcPts val="0"/>
+              </a:spcBef>
+              <a:spcAft>
+                <a:spcPts val="1100"/>
+              </a:spcAft>
+            </a:pPr>
+            <a:r>
+              <a:rPr sz="1400" b="0" i="0">
+                <a:solidFill>
+                  <a:srgbClr val="5A6068"/>
+                </a:solidFill>
+                <a:latin typeface="Calibri"/>
+              </a:rPr>
+              <a:t>That is the question the commentary exists to pose, and it has a sharp form. Two of the most consequential domains in development are monitored through variables that have either run out of variance or measure a different construct from the one the policy debate is about: health through life expectancy, education through parity and proficiency. If wellbeing is to be a criterion for the post-2030 architecture at all, the first question is not which domain to prioritise but whether each domain is being measured somewhere it can still move.</a:t>
+            </a:r>
+          </a:p>
+          <a:p>
+            <a:pPr>
+              <a:lnSpc>
+                <a:spcPct val="132000"/>
+              </a:lnSpc>
+              <a:spcBef>
+                <a:spcPts val="0"/>
+              </a:spcBef>
+              <a:spcAft>
+                <a:spcPts val="1100"/>
+              </a:spcAft>
+            </a:pPr>
+            <a:r>
+              <a:rPr sz="1400" b="0" i="0">
+                <a:solidFill>
+                  <a:srgbClr val="5A6068"/>
+                </a:solidFill>
+                <a:latin typeface="Calibri"/>
+              </a:rPr>
+              <a:t>A commentary cannot settle that. It can put the disagreement on the record with the evidence attached, which is what the three acts are for.</a:t>
+            </a:r>
+          </a:p>
+        </p:txBody>
+      </p:sp>
+      <p:sp>
+        <p:nvSpPr>
+          <p:cNvPr id="5" name="TextBox 4"/>
+          <p:cNvSpPr txBox="1"/>
+          <p:nvPr/>
+        </p:nvSpPr>
+        <p:spPr>
+          <a:xfrm>
+            <a:off x="11338560" y="6263640"/>
+            <a:ext cx="548640" cy="274320"/>
+          </a:xfrm>
+          <a:prstGeom prst="rect">
+            <a:avLst/>
+          </a:prstGeom>
+          <a:noFill/>
+        </p:spPr>
+        <p:txBody>
+          <a:bodyPr wrap="square" lIns="0" rIns="0" tIns="0" bIns="0">
+            <a:spAutoFit/>
+          </a:bodyPr>
+          <a:lstStyle/>
+          <a:p>
+            <a:pPr algn="r">
+              <a:spcBef>
+                <a:spcPts val="0"/>
+              </a:spcBef>
+              <a:spcAft>
+                <a:spcPts val="0"/>
+              </a:spcAft>
+            </a:pPr>
+            <a:r>
+              <a:rPr sz="1100" b="0" i="0">
+                <a:solidFill>
+                  <a:srgbClr val="868D96"/>
+                </a:solidFill>
+                <a:latin typeface="Consolas"/>
+              </a:rPr>
+              <a:t>III</a:t>
+            </a:r>
+          </a:p>
+        </p:txBody>
+      </p:sp>
+    </p:spTree>
+  </p:cSld>
+  <p:clrMapOvr>
+    <a:masterClrMapping/>
+  </p:clrMapOvr>
+</p:sld>
+</file>
+
+<file path=ppt/slides/slide28.xml><?xml version="1.0" encoding="utf-8"?>
 <p:sld xmlns:a="http://schemas.openxmlformats.org/drawingml/2006/main" xmlns:p="http://schemas.openxmlformats.org/presentationml/2006/main" xmlns:r="http://schemas.openxmlformats.org/officeDocument/2006/relationships">
   <p:cSld>
     <p:bg>
@@ -8972,7 +9286,7 @@
 </p:sld>
 </file>
 
-<file path=ppt/slides/slide28.xml><?xml version="1.0" encoding="utf-8"?>
+<file path=ppt/slides/slide29.xml><?xml version="1.0" encoding="utf-8"?>
 <p:sld xmlns:a="http://schemas.openxmlformats.org/drawingml/2006/main" xmlns:p="http://schemas.openxmlformats.org/presentationml/2006/main" xmlns:r="http://schemas.openxmlformats.org/officeDocument/2006/relationships">
   <p:cSld>
     <p:bg>
@@ -9456,7 +9770,7 @@
                 </a:solidFill>
                 <a:latin typeface="Consolas"/>
               </a:rPr>
-              <a:t>DATA INVESTMENT</a:t>
+              <a:t>RESOLVED: SUBNATIONAL SUB-INDICES</a:t>
             </a:r>
           </a:p>
           <a:p>
@@ -9478,7 +9792,7 @@
                 </a:solidFill>
                 <a:latin typeface="Calibri"/>
               </a:rPr>
-              <a:t>The Global Data Lab's separate Education &amp; Work dataset carries 43 subnational schooling indicators by cohort and sex. Pulling it would let us test the education finding subnationally. Before submission or after review?</a:t>
+              <a:t>The per-domain GDL exports are in. Within countries the external health index leads education and income (+0.34 vs +0.06 and +0.12), so the flip no longer rests on self-report. GDL's DHS-based Education &amp; Work and Health datasets were also examined: they cover only 6 ESS countries and cannot serve the European design.</a:t>
             </a:r>
           </a:p>
         </p:txBody>
@@ -9587,96 +9901,6 @@
                 <a:latin typeface="Calibri"/>
               </a:rPr>
               <a:t>Pooled R² and significant-country share tell different stories at several points. Proposal: report both throughout and discuss the divergence explicitly as a secondary contribution.</a:t>
-            </a:r>
-          </a:p>
-        </p:txBody>
-      </p:sp>
-    </p:spTree>
-  </p:cSld>
-  <p:clrMapOvr>
-    <a:masterClrMapping/>
-  </p:clrMapOvr>
-</p:sld>
-</file>
-
-<file path=ppt/slides/slide29.xml><?xml version="1.0" encoding="utf-8"?>
-<p:sld xmlns:a="http://schemas.openxmlformats.org/drawingml/2006/main" xmlns:p="http://schemas.openxmlformats.org/presentationml/2006/main" xmlns:r="http://schemas.openxmlformats.org/officeDocument/2006/relationships">
-  <p:cSld>
-    <p:bg>
-      <p:bgPr>
-        <a:solidFill>
-          <a:srgbClr val="14171C"/>
-        </a:solidFill>
-        <a:effectLst/>
-      </p:bgPr>
-    </p:bg>
-    <p:spTree>
-      <p:nvGrpSpPr>
-        <p:cNvPr id="1" name=""/>
-        <p:cNvGrpSpPr/>
-        <p:nvPr/>
-      </p:nvGrpSpPr>
-      <p:grpSpPr/>
-      <p:sp>
-        <p:nvSpPr>
-          <p:cNvPr id="2" name="TextBox 1"/>
-          <p:cNvSpPr txBox="1"/>
-          <p:nvPr/>
-        </p:nvSpPr>
-        <p:spPr>
-          <a:xfrm>
-            <a:off x="566928" y="2743200"/>
-            <a:ext cx="8229600" cy="1371600"/>
-          </a:xfrm>
-          <a:prstGeom prst="rect">
-            <a:avLst/>
-          </a:prstGeom>
-          <a:noFill/>
-        </p:spPr>
-        <p:txBody>
-          <a:bodyPr wrap="square" lIns="0" rIns="0" tIns="0" bIns="0">
-            <a:spAutoFit/>
-          </a:bodyPr>
-          <a:lstStyle/>
-          <a:p>
-            <a:pPr>
-              <a:spcBef>
-                <a:spcPts val="0"/>
-              </a:spcBef>
-              <a:spcAft>
-                <a:spcPts val="1000"/>
-              </a:spcAft>
-            </a:pPr>
-            <a:r>
-              <a:rPr sz="4000" b="0" i="0">
-                <a:solidFill>
-                  <a:srgbClr val="FCFCFB"/>
-                </a:solidFill>
-                <a:latin typeface="Georgia"/>
-              </a:rPr>
-              <a:t>Evidence appendix</a:t>
-            </a:r>
-          </a:p>
-          <a:p>
-            <a:pPr>
-              <a:lnSpc>
-                <a:spcPct val="135000"/>
-              </a:lnSpc>
-              <a:spcBef>
-                <a:spcPts val="0"/>
-              </a:spcBef>
-              <a:spcAft>
-                <a:spcPts val="0"/>
-              </a:spcAft>
-            </a:pPr>
-            <a:r>
-              <a:rPr sz="1400" b="0" i="0">
-                <a:solidFill>
-                  <a:srgbClr val="9AA4B0"/>
-                </a:solidFill>
-                <a:latin typeface="Calibri"/>
-              </a:rPr>
-              <a:t>Everything the three acts rest on but do not carry. In submission these become supplementary material.</a:t>
             </a:r>
           </a:p>
         </p:txBody>
@@ -10131,7 +10355,7 @@
     <p:bg>
       <p:bgPr>
         <a:solidFill>
-          <a:srgbClr val="FCFCFB"/>
+          <a:srgbClr val="14171C"/>
         </a:solidFill>
         <a:effectLst/>
       </p:bgPr>
@@ -10151,107 +10375,42 @@
         </p:nvSpPr>
         <p:spPr>
           <a:xfrm>
-            <a:off x="566928" y="411480"/>
-            <a:ext cx="10515600" cy="320040"/>
-          </a:xfrm>
-          <a:prstGeom prst="rect">
-            <a:avLst/>
-          </a:prstGeom>
-          <a:noFill/>
-        </p:spPr>
-        <p:txBody>
-          <a:bodyPr wrap="square" lIns="0" rIns="0" tIns="0" bIns="0">
-            <a:spAutoFit/>
-          </a:bodyPr>
-          <a:lstStyle/>
-          <a:p>
-            <a:pPr>
-              <a:spcBef>
-                <a:spcPts val="0"/>
-              </a:spcBef>
-              <a:spcAft>
-                <a:spcPts val="0"/>
-              </a:spcAft>
-            </a:pPr>
-            <a:r>
-              <a:rPr sz="1000" b="0" i="0">
-                <a:solidFill>
-                  <a:srgbClr val="868D96"/>
-                </a:solidFill>
-                <a:latin typeface="Consolas"/>
-              </a:rPr>
-              <a:t>APPENDIX</a:t>
-            </a:r>
-          </a:p>
-        </p:txBody>
-      </p:sp>
-      <p:sp>
-        <p:nvSpPr>
-          <p:cNvPr id="3" name="TextBox 2"/>
-          <p:cNvSpPr txBox="1"/>
-          <p:nvPr/>
-        </p:nvSpPr>
-        <p:spPr>
-          <a:xfrm>
-            <a:off x="566928" y="749808"/>
-            <a:ext cx="10515600" cy="457200"/>
-          </a:xfrm>
-          <a:prstGeom prst="rect">
-            <a:avLst/>
-          </a:prstGeom>
-          <a:noFill/>
-        </p:spPr>
-        <p:txBody>
-          <a:bodyPr wrap="square" lIns="0" rIns="0" tIns="0" bIns="0">
-            <a:spAutoFit/>
-          </a:bodyPr>
-          <a:lstStyle/>
-          <a:p>
-            <a:pPr>
-              <a:spcBef>
-                <a:spcPts val="0"/>
-              </a:spcBef>
-              <a:spcAft>
-                <a:spcPts val="0"/>
-              </a:spcAft>
-            </a:pPr>
-            <a:r>
-              <a:rPr sz="2000" b="0" i="0">
-                <a:solidFill>
-                  <a:srgbClr val="14171C"/>
+            <a:off x="566928" y="2743200"/>
+            <a:ext cx="8229600" cy="1371600"/>
+          </a:xfrm>
+          <a:prstGeom prst="rect">
+            <a:avLst/>
+          </a:prstGeom>
+          <a:noFill/>
+        </p:spPr>
+        <p:txBody>
+          <a:bodyPr wrap="square" lIns="0" rIns="0" tIns="0" bIns="0">
+            <a:spAutoFit/>
+          </a:bodyPr>
+          <a:lstStyle/>
+          <a:p>
+            <a:pPr>
+              <a:spcBef>
+                <a:spcPts val="0"/>
+              </a:spcBef>
+              <a:spcAft>
+                <a:spcPts val="1000"/>
+              </a:spcAft>
+            </a:pPr>
+            <a:r>
+              <a:rPr sz="4000" b="0" i="0">
+                <a:solidFill>
+                  <a:srgbClr val="FCFCFB"/>
                 </a:solidFill>
                 <a:latin typeface="Georgia"/>
               </a:rPr>
-              <a:t>HDI against SDG, domain by domain</a:t>
-            </a:r>
-          </a:p>
-        </p:txBody>
-      </p:sp>
-      <p:sp>
-        <p:nvSpPr>
-          <p:cNvPr id="4" name="TextBox 3"/>
-          <p:cNvSpPr txBox="1"/>
-          <p:nvPr/>
-        </p:nvSpPr>
-        <p:spPr>
-          <a:xfrm>
-            <a:off x="566928" y="1207008"/>
-            <a:ext cx="10515600" cy="457200"/>
-          </a:xfrm>
-          <a:prstGeom prst="rect">
-            <a:avLst/>
-          </a:prstGeom>
-          <a:noFill/>
-        </p:spPr>
-        <p:txBody>
-          <a:bodyPr wrap="square" lIns="0" rIns="0" tIns="0" bIns="0">
-            <a:spAutoFit/>
-          </a:bodyPr>
-          <a:lstStyle/>
+              <a:t>Evidence appendix</a:t>
+            </a:r>
+          </a:p>
           <a:p>
             <a:pPr>
               <a:lnSpc>
-                <a:spcPct val="128000"/>
+                <a:spcPct val="135000"/>
               </a:lnSpc>
               <a:spcBef>
                 <a:spcPts val="0"/>
@@ -10261,41 +10420,17 @@
               </a:spcAft>
             </a:pPr>
             <a:r>
-              <a:rPr sz="1100" b="0" i="0">
-                <a:solidFill>
-                  <a:srgbClr val="5A6068"/>
+              <a:rPr sz="1400" b="0" i="0">
+                <a:solidFill>
+                  <a:srgbClr val="9AA4B0"/>
                 </a:solidFill>
                 <a:latin typeface="Calibri"/>
               </a:rPr>
-              <a:t>Education is the HDI's strongest domain and the SDG framework's weakest, unless SDG4 is split into access versus the rest. Absolute levels are not comparable across frameworks; the within-framework rankings are.</a:t>
-            </a:r>
-          </a:p>
-        </p:txBody>
-      </p:sp>
-      <p:pic>
-        <p:nvPicPr>
-          <p:cNvPr id="5" name="Picture 4" descr="hdi_vs_sdg_frameworks.png"/>
-          <p:cNvPicPr>
-            <a:picLocks noChangeAspect="1"/>
-          </p:cNvPicPr>
-          <p:nvPr/>
-        </p:nvPicPr>
-        <p:blipFill>
-          <a:blip r:embed="rId2"/>
-          <a:stretch>
-            <a:fillRect/>
-          </a:stretch>
-        </p:blipFill>
-        <p:spPr>
-          <a:xfrm>
-            <a:off x="1492967" y="1965960"/>
-            <a:ext cx="9205761" cy="4480560"/>
-          </a:xfrm>
-          <a:prstGeom prst="rect">
-            <a:avLst/>
-          </a:prstGeom>
-        </p:spPr>
-      </p:pic>
+              <a:t>Everything the three acts rest on but do not carry. In submission these become supplementary material.</a:t>
+            </a:r>
+          </a:p>
+        </p:txBody>
+      </p:sp>
     </p:spTree>
   </p:cSld>
   <p:clrMapOvr>
@@ -10401,7 +10536,7 @@
                 </a:solidFill>
                 <a:latin typeface="Georgia"/>
               </a:rPr>
-              <a:t>ESS-measured schooling against WHR happiness</a:t>
+              <a:t>HDI against SDG, domain by domain</a:t>
             </a:r>
           </a:p>
         </p:txBody>
@@ -10446,14 +10581,14 @@
                 </a:solidFill>
                 <a:latin typeface="Calibri"/>
               </a:rPr>
-              <a:t>Country-aggregated ESS years of schooling predicts WHR happiness at R² = 0.308, against 0.161 for the HDI's own schooling series on the same cells — an independently measured education variable roughly doubles it.</a:t>
+              <a:t>Education is the HDI's strongest domain and the SDG framework's weakest, unless SDG4 is split into access versus the rest. Absolute levels are not comparable across frameworks; the within-framework rankings are.</a:t>
             </a:r>
           </a:p>
         </p:txBody>
       </p:sp>
       <p:pic>
         <p:nvPicPr>
-          <p:cNvPr id="5" name="Picture 4" descr="ess_triangulation.png"/>
+          <p:cNvPr id="5" name="Picture 4" descr="hdi_vs_sdg_frameworks.png"/>
           <p:cNvPicPr>
             <a:picLocks noChangeAspect="1"/>
           </p:cNvPicPr>
@@ -10467,8 +10602,8 @@
         </p:blipFill>
         <p:spPr>
           <a:xfrm>
-            <a:off x="566928" y="1965960"/>
-            <a:ext cx="11057839" cy="3026903"/>
+            <a:off x="1492967" y="1965960"/>
+            <a:ext cx="9205761" cy="4480560"/>
           </a:xfrm>
           <a:prstGeom prst="rect">
             <a:avLst/>
@@ -10580,7 +10715,7 @@
                 </a:solidFill>
                 <a:latin typeface="Georgia"/>
               </a:rPr>
-              <a:t>Regional development spread within countries</a:t>
+              <a:t>ESS-measured schooling against WHR happiness</a:t>
             </a:r>
           </a:p>
         </p:txBody>
@@ -10625,14 +10760,14 @@
                 </a:solidFill>
                 <a:latin typeface="Calibri"/>
               </a:rPr>
-              <a:t>Every region a dot, two countries per UNDP development tier, 2022. Germany's regions span 0.05 of SHDI; China's span 0.30, India's 0.19.</a:t>
+              <a:t>Country-aggregated ESS years of schooling predicts WHR happiness at R² = 0.308, against 0.161 for the HDI's own schooling series on the same cells — an independently measured education variable roughly doubles it.</a:t>
             </a:r>
           </a:p>
         </p:txBody>
       </p:sp>
       <p:pic>
         <p:nvPicPr>
-          <p:cNvPr id="5" name="Picture 4" descr="shdi_within_country_spread.png"/>
+          <p:cNvPr id="5" name="Picture 4" descr="ess_triangulation.png"/>
           <p:cNvPicPr>
             <a:picLocks noChangeAspect="1"/>
           </p:cNvPicPr>
@@ -10646,8 +10781,8 @@
         </p:blipFill>
         <p:spPr>
           <a:xfrm>
-            <a:off x="2653157" y="1965960"/>
-            <a:ext cx="6885380" cy="4480560"/>
+            <a:off x="566928" y="1965960"/>
+            <a:ext cx="11057839" cy="3026903"/>
           </a:xfrm>
           <a:prstGeom prst="rect">
             <a:avLst/>
@@ -10759,7 +10894,7 @@
                 </a:solidFill>
                 <a:latin typeface="Georgia"/>
               </a:rPr>
-              <a:t>SDG significance by goal, pooled</a:t>
+              <a:t>Regional development spread within countries</a:t>
             </a:r>
           </a:p>
         </p:txBody>
@@ -10804,14 +10939,14 @@
                 </a:solidFill>
                 <a:latin typeface="Calibri"/>
               </a:rPr>
-              <a:t>The leading goal (Energy, 16.0%) clears FDR significance in barely one country-test in six; pooled Education ranks 12th of 17.</a:t>
+              <a:t>Every region a dot, two countries per UNDP development tier, 2022. Germany's regions span 0.05 of SHDI; China's span 0.30, India's 0.19.</a:t>
             </a:r>
           </a:p>
         </p:txBody>
       </p:sp>
       <p:pic>
         <p:nvPicPr>
-          <p:cNvPr id="5" name="Picture 4" descr="sdg_by_goal.png"/>
+          <p:cNvPr id="5" name="Picture 4" descr="shdi_within_country_spread.png"/>
           <p:cNvPicPr>
             <a:picLocks noChangeAspect="1"/>
           </p:cNvPicPr>
@@ -10825,8 +10960,8 @@
         </p:blipFill>
         <p:spPr>
           <a:xfrm>
-            <a:off x="2504357" y="1965960"/>
-            <a:ext cx="7182980" cy="4480560"/>
+            <a:off x="2653157" y="1965960"/>
+            <a:ext cx="6885380" cy="4480560"/>
           </a:xfrm>
           <a:prstGeom prst="rect">
             <a:avLst/>
@@ -10938,7 +11073,7 @@
                 </a:solidFill>
                 <a:latin typeface="Georgia"/>
               </a:rPr>
-              <a:t>GDL national SHDI against the UNDP HDI</a:t>
+              <a:t>SDG significance by goal, pooled</a:t>
             </a:r>
           </a:p>
         </p:txBody>
@@ -10983,14 +11118,14 @@
                 </a:solidFill>
                 <a:latin typeface="Calibri"/>
               </a:rPr>
-              <a:t>The two are the same series — R² = 1.000, every country-year identical, because GDL derives the national figure from the UNDP index. Retained to document the check, not as validation: agreement here says nothing about the subnational disaggregation, which is where GDL's own data begins.</a:t>
+              <a:t>The leading goal (Energy, 16.0%) clears FDR significance in barely one country-test in six; pooled Education ranks 12th of 17.</a:t>
             </a:r>
           </a:p>
         </p:txBody>
       </p:sp>
       <p:pic>
         <p:nvPicPr>
-          <p:cNvPr id="5" name="Picture 4" descr="shdi_vs_hdi_validation.png"/>
+          <p:cNvPr id="5" name="Picture 4" descr="sdg_by_goal.png"/>
           <p:cNvPicPr>
             <a:picLocks noChangeAspect="1"/>
           </p:cNvPicPr>
@@ -11004,8 +11139,8 @@
         </p:blipFill>
         <p:spPr>
           <a:xfrm>
-            <a:off x="4036999" y="1965960"/>
-            <a:ext cx="4117697" cy="4480560"/>
+            <a:off x="2504357" y="1965960"/>
+            <a:ext cx="7182980" cy="4480560"/>
           </a:xfrm>
           <a:prstGeom prst="rect">
             <a:avLst/>
@@ -11117,7 +11252,7 @@
                 </a:solidFill>
                 <a:latin typeface="Georgia"/>
               </a:rPr>
-              <a:t>Subnational HDI against WHR happiness, levels</a:t>
+              <a:t>GDL national SHDI against the UNDP HDI</a:t>
             </a:r>
           </a:p>
         </p:txBody>
@@ -11162,14 +11297,14 @@
                 </a:solidFill>
                 <a:latin typeface="Calibri"/>
               </a:rPr>
-              <a:t>The familiar development-tier gradient with SHDI in place of HDI.</a:t>
+              <a:t>The two are the same series — R² = 1.000, every country-year identical, because GDL derives the national figure from the UNDP index. Retained to document the check, not as validation: agreement here says nothing about the subnational disaggregation, which is where GDL's own data begins.</a:t>
             </a:r>
           </a:p>
         </p:txBody>
       </p:sp>
       <p:pic>
         <p:nvPicPr>
-          <p:cNvPr id="5" name="Picture 4" descr="shdi_whr_levels_scatter.png"/>
+          <p:cNvPr id="5" name="Picture 4" descr="shdi_vs_hdi_validation.png"/>
           <p:cNvPicPr>
             <a:picLocks noChangeAspect="1"/>
           </p:cNvPicPr>
@@ -11183,8 +11318,8 @@
         </p:blipFill>
         <p:spPr>
           <a:xfrm>
-            <a:off x="3508482" y="1965960"/>
-            <a:ext cx="5174731" cy="4480560"/>
+            <a:off x="4036999" y="1965960"/>
+            <a:ext cx="4117697" cy="4480560"/>
           </a:xfrm>
           <a:prstGeom prst="rect">
             <a:avLst/>
@@ -11296,7 +11431,7 @@
                 </a:solidFill>
                 <a:latin typeface="Georgia"/>
               </a:rPr>
-              <a:t>ESS coverage by country and year</a:t>
+              <a:t>Subnational HDI against WHR happiness, levels</a:t>
             </a:r>
           </a:p>
         </p:txBody>
@@ -11341,14 +11476,14 @@
                 </a:solidFill>
                 <a:latin typeface="Calibri"/>
               </a:rPr>
-              <a:t>A rotating panel: 36 countries, roughly biennial from 2010 to 2023, with 17 countries present in all seven waves. This is the power constraint behind every ESS significance test.</a:t>
+              <a:t>The familiar development-tier gradient with SHDI in place of HDI.</a:t>
             </a:r>
           </a:p>
         </p:txBody>
       </p:sp>
       <p:pic>
         <p:nvPicPr>
-          <p:cNvPr id="5" name="Picture 4" descr="ess_year_coverage.png"/>
+          <p:cNvPr id="5" name="Picture 4" descr="shdi_whr_levels_scatter.png"/>
           <p:cNvPicPr>
             <a:picLocks noChangeAspect="1"/>
           </p:cNvPicPr>
@@ -11362,8 +11497,8 @@
         </p:blipFill>
         <p:spPr>
           <a:xfrm>
-            <a:off x="4247956" y="1965960"/>
-            <a:ext cx="3695783" cy="4480560"/>
+            <a:off x="3508482" y="1965960"/>
+            <a:ext cx="5174731" cy="4480560"/>
           </a:xfrm>
           <a:prstGeom prst="rect">
             <a:avLst/>
@@ -11475,7 +11610,7 @@
                 </a:solidFill>
                 <a:latin typeface="Georgia"/>
               </a:rPr>
-              <a:t>ESS-to-SHDI region crosswalk</a:t>
+              <a:t>ESS coverage by country and year</a:t>
             </a:r>
           </a:p>
         </p:txBody>
@@ -11520,14 +11655,14 @@
                 </a:solidFill>
                 <a:latin typeface="Calibri"/>
               </a:rPr>
-              <a:t>62% of respondents, across 24 of 36 countries, matched to a subnational SHDI value through the NUTS-to-GDL crosswalk.</a:t>
+              <a:t>A rotating panel: 36 countries, roughly biennial from 2010 to 2023, with 17 countries present in all seven waves. This is the power constraint behind every ESS significance test.</a:t>
             </a:r>
           </a:p>
         </p:txBody>
       </p:sp>
       <p:pic>
         <p:nvPicPr>
-          <p:cNvPr id="5" name="Picture 4" descr="region_crosswalk_match.png"/>
+          <p:cNvPr id="5" name="Picture 4" descr="ess_year_coverage.png"/>
           <p:cNvPicPr>
             <a:picLocks noChangeAspect="1"/>
           </p:cNvPicPr>
@@ -11541,8 +11676,8 @@
         </p:blipFill>
         <p:spPr>
           <a:xfrm>
-            <a:off x="2428154" y="1965960"/>
-            <a:ext cx="7335386" cy="4480560"/>
+            <a:off x="4247956" y="1965960"/>
+            <a:ext cx="3695783" cy="4480560"/>
           </a:xfrm>
           <a:prstGeom prst="rect">
             <a:avLst/>
@@ -11654,7 +11789,7 @@
                 </a:solidFill>
                 <a:latin typeface="Georgia"/>
               </a:rPr>
-              <a:t>Country × indicator significance, ESS</a:t>
+              <a:t>ESS-to-SHDI region crosswalk</a:t>
             </a:r>
           </a:p>
         </p:txBody>
@@ -11699,14 +11834,14 @@
                 </a:solidFill>
                 <a:latin typeface="Calibri"/>
               </a:rPr>
-              <a:t>15% of levels cells and 9% of differences cells FDR-significant; direction consistent with the WHR results, power much lower.</a:t>
+              <a:t>62% of respondents, across 24 of 36 countries, matched to a subnational SHDI value through the NUTS-to-GDL crosswalk.</a:t>
             </a:r>
           </a:p>
         </p:txBody>
       </p:sp>
       <p:pic>
         <p:nvPicPr>
-          <p:cNvPr id="5" name="Picture 4" descr="hdi_ess_heatmap.png"/>
+          <p:cNvPr id="5" name="Picture 4" descr="region_crosswalk_match.png"/>
           <p:cNvPicPr>
             <a:picLocks noChangeAspect="1"/>
           </p:cNvPicPr>
@@ -11720,8 +11855,8 @@
         </p:blipFill>
         <p:spPr>
           <a:xfrm>
-            <a:off x="3601923" y="1965960"/>
-            <a:ext cx="4987848" cy="4480560"/>
+            <a:off x="2428154" y="1965960"/>
+            <a:ext cx="7335386" cy="4480560"/>
           </a:xfrm>
           <a:prstGeom prst="rect">
             <a:avLst/>
@@ -11833,7 +11968,7 @@
                 </a:solidFill>
                 <a:latin typeface="Georgia"/>
               </a:rPr>
-              <a:t>Per-country collapse, ESS</a:t>
+              <a:t>Country × indicator significance, ESS</a:t>
             </a:r>
           </a:p>
         </p:txBody>
@@ -11878,14 +12013,14 @@
                 </a:solidFill>
                 <a:latin typeface="Calibri"/>
               </a:rPr>
-              <a:t>More above-the-line exceptions than the WHR analysis shows — sparse waves cut both ways.</a:t>
+              <a:t>15% of levels cells and 9% of differences cells FDR-significant; direction consistent with the WHR results, power much lower.</a:t>
             </a:r>
           </a:p>
         </p:txBody>
       </p:sp>
       <p:pic>
         <p:nvPicPr>
-          <p:cNvPr id="5" name="Picture 4" descr="hdi_ess_collapse_scatter.png"/>
+          <p:cNvPr id="5" name="Picture 4" descr="hdi_ess_heatmap.png"/>
           <p:cNvPicPr>
             <a:picLocks noChangeAspect="1"/>
           </p:cNvPicPr>
@@ -11899,8 +12034,8 @@
         </p:blipFill>
         <p:spPr>
           <a:xfrm>
-            <a:off x="2057001" y="1965960"/>
-            <a:ext cx="8077693" cy="4480560"/>
+            <a:off x="3601923" y="1965960"/>
+            <a:ext cx="4987848" cy="4480560"/>
           </a:xfrm>
           <a:prstGeom prst="rect">
             <a:avLst/>
@@ -12303,7 +12438,7 @@
                 </a:solidFill>
                 <a:latin typeface="Georgia"/>
               </a:rPr>
-              <a:t>HDI progress against life-satisfaction trends, 2010–2023</a:t>
+              <a:t>Per-country collapse, ESS</a:t>
             </a:r>
           </a:p>
         </p:txBody>
@@ -12348,14 +12483,14 @@
                 </a:solidFill>
                 <a:latin typeface="Calibri"/>
               </a:rPr>
-              <a:t>HDI rose nearly everywhere. ESS life satisfaction rose in 19 countries and fell in 8.</a:t>
+              <a:t>More above-the-line exceptions than the WHR analysis shows — sparse waves cut both ways.</a:t>
             </a:r>
           </a:p>
         </p:txBody>
       </p:sp>
       <p:pic>
         <p:nvPicPr>
-          <p:cNvPr id="5" name="Picture 4" descr="hdi_vs_lifesat_trends.png"/>
+          <p:cNvPr id="5" name="Picture 4" descr="hdi_ess_collapse_scatter.png"/>
           <p:cNvPicPr>
             <a:picLocks noChangeAspect="1"/>
           </p:cNvPicPr>
@@ -12369,8 +12504,8 @@
         </p:blipFill>
         <p:spPr>
           <a:xfrm>
-            <a:off x="4009215" y="1965960"/>
-            <a:ext cx="4173264" cy="4480560"/>
+            <a:off x="2057001" y="1965960"/>
+            <a:ext cx="8077693" cy="4480560"/>
           </a:xfrm>
           <a:prstGeom prst="rect">
             <a:avLst/>
@@ -12482,7 +12617,7 @@
                 </a:solidFill>
                 <a:latin typeface="Georgia"/>
               </a:rPr>
-              <a:t>Region-level SHDI against life satisfaction, pooled</a:t>
+              <a:t>HDI progress against life-satisfaction trends, 2010–2023</a:t>
             </a:r>
           </a:p>
         </p:txBody>
@@ -12527,14 +12662,14 @@
                 </a:solidFill>
                 <a:latin typeface="Calibri"/>
               </a:rPr>
-              <a:t>1,313 region-years, pooled R² = 0.32 — this mixes between- and within-country variation, which the within-country panels separate.</a:t>
+              <a:t>HDI rose nearly everywhere. ESS life satisfaction rose in 19 countries and fell in 8.</a:t>
             </a:r>
           </a:p>
         </p:txBody>
       </p:sp>
       <p:pic>
         <p:nvPicPr>
-          <p:cNvPr id="5" name="Picture 4" descr="region_shdi_lifesat_pooled.png"/>
+          <p:cNvPr id="5" name="Picture 4" descr="hdi_vs_lifesat_trends.png"/>
           <p:cNvPicPr>
             <a:picLocks noChangeAspect="1"/>
           </p:cNvPicPr>
@@ -12548,8 +12683,8 @@
         </p:blipFill>
         <p:spPr>
           <a:xfrm>
-            <a:off x="3123927" y="1965960"/>
-            <a:ext cx="5943841" cy="4480560"/>
+            <a:off x="4009215" y="1965960"/>
+            <a:ext cx="4173264" cy="4480560"/>
           </a:xfrm>
           <a:prstGeom prst="rect">
             <a:avLst/>
@@ -12661,7 +12796,7 @@
                 </a:solidFill>
                 <a:latin typeface="Georgia"/>
               </a:rPr>
-              <a:t>Within-country regional gradients, small multiples</a:t>
+              <a:t>Region-level SHDI against life satisfaction, pooled</a:t>
             </a:r>
           </a:p>
         </p:txBody>
@@ -12706,14 +12841,14 @@
                 </a:solidFill>
                 <a:latin typeface="Calibri"/>
               </a:rPr>
-              <a:t>Holding country fixed, the regional development–wellbeing gradient is weak in most countries. France is the clearest exception.</a:t>
+              <a:t>1,313 region-years, pooled R² = 0.32 — this mixes between- and within-country variation, which the within-country panels separate.</a:t>
             </a:r>
           </a:p>
         </p:txBody>
       </p:sp>
       <p:pic>
         <p:nvPicPr>
-          <p:cNvPr id="5" name="Picture 4" descr="within_country_small_multiples.png"/>
+          <p:cNvPr id="5" name="Picture 4" descr="region_shdi_lifesat_pooled.png"/>
           <p:cNvPicPr>
             <a:picLocks noChangeAspect="1"/>
           </p:cNvPicPr>
@@ -12727,8 +12862,8 @@
         </p:blipFill>
         <p:spPr>
           <a:xfrm>
-            <a:off x="2779954" y="1965960"/>
-            <a:ext cx="6631787" cy="4480560"/>
+            <a:off x="3123927" y="1965960"/>
+            <a:ext cx="5943841" cy="4480560"/>
           </a:xfrm>
           <a:prstGeom prst="rect">
             <a:avLst/>
@@ -12840,7 +12975,7 @@
                 </a:solidFill>
                 <a:latin typeface="Georgia"/>
               </a:rPr>
-              <a:t>Regional SHDI spread within ESS countries</a:t>
+              <a:t>Within-country regional gradients, small multiples</a:t>
             </a:r>
           </a:p>
         </p:txBody>
@@ -12885,14 +13020,14 @@
                 </a:solidFill>
                 <a:latin typeface="Calibri"/>
               </a:rPr>
-              <a:t>Italy and Poland carry several times the internal development inequality of Germany or the Nordics.</a:t>
+              <a:t>Holding country fixed, the regional development–wellbeing gradient is weak in most countries. France is the clearest exception.</a:t>
             </a:r>
           </a:p>
         </p:txBody>
       </p:sp>
       <p:pic>
         <p:nvPicPr>
-          <p:cNvPr id="5" name="Picture 4" descr="european_regional_inequality.png"/>
+          <p:cNvPr id="5" name="Picture 4" descr="within_country_small_multiples.png"/>
           <p:cNvPicPr>
             <a:picLocks noChangeAspect="1"/>
           </p:cNvPicPr>
@@ -12906,8 +13041,8 @@
         </p:blipFill>
         <p:spPr>
           <a:xfrm>
-            <a:off x="2097774" y="1965960"/>
-            <a:ext cx="7996146" cy="4480560"/>
+            <a:off x="2779954" y="1965960"/>
+            <a:ext cx="6631787" cy="4480560"/>
           </a:xfrm>
           <a:prstGeom prst="rect">
             <a:avLst/>
@@ -13019,7 +13154,7 @@
                 </a:solidFill>
                 <a:latin typeface="Georgia"/>
               </a:rPr>
-              <a:t>Trust and health as rival predictors, nationally</a:t>
+              <a:t>Regional SHDI spread within ESS countries</a:t>
             </a:r>
           </a:p>
         </p:txBody>
@@ -13064,14 +13199,14 @@
                 </a:solidFill>
                 <a:latin typeface="Calibri"/>
               </a:rPr>
-              <a:t>Self-rated health out-predicts the HDI nationally on significant-country share, 37% against 19%.</a:t>
+              <a:t>Italy and Poland carry several times the internal development inequality of Germany or the Nordics.</a:t>
             </a:r>
           </a:p>
         </p:txBody>
       </p:sp>
       <p:pic>
         <p:nvPicPr>
-          <p:cNvPr id="5" name="Picture 4" descr="mechanisms_trust_health.png"/>
+          <p:cNvPr id="5" name="Picture 4" descr="european_regional_inequality.png"/>
           <p:cNvPicPr>
             <a:picLocks noChangeAspect="1"/>
           </p:cNvPicPr>
@@ -13085,8 +13220,8 @@
         </p:blipFill>
         <p:spPr>
           <a:xfrm>
-            <a:off x="3617081" y="1965960"/>
-            <a:ext cx="4957532" cy="4480560"/>
+            <a:off x="2097774" y="1965960"/>
+            <a:ext cx="7996146" cy="4480560"/>
           </a:xfrm>
           <a:prstGeom prst="rect">
             <a:avLst/>
@@ -13102,6 +13237,185 @@
 </file>
 
 <file path=ppt/slides/slide45.xml><?xml version="1.0" encoding="utf-8"?>
+<p:sld xmlns:a="http://schemas.openxmlformats.org/drawingml/2006/main" xmlns:p="http://schemas.openxmlformats.org/presentationml/2006/main" xmlns:r="http://schemas.openxmlformats.org/officeDocument/2006/relationships">
+  <p:cSld>
+    <p:bg>
+      <p:bgPr>
+        <a:solidFill>
+          <a:srgbClr val="FCFCFB"/>
+        </a:solidFill>
+        <a:effectLst/>
+      </p:bgPr>
+    </p:bg>
+    <p:spTree>
+      <p:nvGrpSpPr>
+        <p:cNvPr id="1" name=""/>
+        <p:cNvGrpSpPr/>
+        <p:nvPr/>
+      </p:nvGrpSpPr>
+      <p:grpSpPr/>
+      <p:sp>
+        <p:nvSpPr>
+          <p:cNvPr id="2" name="TextBox 1"/>
+          <p:cNvSpPr txBox="1"/>
+          <p:nvPr/>
+        </p:nvSpPr>
+        <p:spPr>
+          <a:xfrm>
+            <a:off x="566928" y="411480"/>
+            <a:ext cx="10515600" cy="320040"/>
+          </a:xfrm>
+          <a:prstGeom prst="rect">
+            <a:avLst/>
+          </a:prstGeom>
+          <a:noFill/>
+        </p:spPr>
+        <p:txBody>
+          <a:bodyPr wrap="square" lIns="0" rIns="0" tIns="0" bIns="0">
+            <a:spAutoFit/>
+          </a:bodyPr>
+          <a:lstStyle/>
+          <a:p>
+            <a:pPr>
+              <a:spcBef>
+                <a:spcPts val="0"/>
+              </a:spcBef>
+              <a:spcAft>
+                <a:spcPts val="0"/>
+              </a:spcAft>
+            </a:pPr>
+            <a:r>
+              <a:rPr sz="1000" b="0" i="0">
+                <a:solidFill>
+                  <a:srgbClr val="868D96"/>
+                </a:solidFill>
+                <a:latin typeface="Consolas"/>
+              </a:rPr>
+              <a:t>APPENDIX</a:t>
+            </a:r>
+          </a:p>
+        </p:txBody>
+      </p:sp>
+      <p:sp>
+        <p:nvSpPr>
+          <p:cNvPr id="3" name="TextBox 2"/>
+          <p:cNvSpPr txBox="1"/>
+          <p:nvPr/>
+        </p:nvSpPr>
+        <p:spPr>
+          <a:xfrm>
+            <a:off x="566928" y="749808"/>
+            <a:ext cx="10515600" cy="457200"/>
+          </a:xfrm>
+          <a:prstGeom prst="rect">
+            <a:avLst/>
+          </a:prstGeom>
+          <a:noFill/>
+        </p:spPr>
+        <p:txBody>
+          <a:bodyPr wrap="square" lIns="0" rIns="0" tIns="0" bIns="0">
+            <a:spAutoFit/>
+          </a:bodyPr>
+          <a:lstStyle/>
+          <a:p>
+            <a:pPr>
+              <a:spcBef>
+                <a:spcPts val="0"/>
+              </a:spcBef>
+              <a:spcAft>
+                <a:spcPts val="0"/>
+              </a:spcAft>
+            </a:pPr>
+            <a:r>
+              <a:rPr sz="2000" b="0" i="0">
+                <a:solidFill>
+                  <a:srgbClr val="14171C"/>
+                </a:solidFill>
+                <a:latin typeface="Georgia"/>
+              </a:rPr>
+              <a:t>Trust and health as rival predictors, nationally</a:t>
+            </a:r>
+          </a:p>
+        </p:txBody>
+      </p:sp>
+      <p:sp>
+        <p:nvSpPr>
+          <p:cNvPr id="4" name="TextBox 3"/>
+          <p:cNvSpPr txBox="1"/>
+          <p:nvPr/>
+        </p:nvSpPr>
+        <p:spPr>
+          <a:xfrm>
+            <a:off x="566928" y="1207008"/>
+            <a:ext cx="10515600" cy="457200"/>
+          </a:xfrm>
+          <a:prstGeom prst="rect">
+            <a:avLst/>
+          </a:prstGeom>
+          <a:noFill/>
+        </p:spPr>
+        <p:txBody>
+          <a:bodyPr wrap="square" lIns="0" rIns="0" tIns="0" bIns="0">
+            <a:spAutoFit/>
+          </a:bodyPr>
+          <a:lstStyle/>
+          <a:p>
+            <a:pPr>
+              <a:lnSpc>
+                <a:spcPct val="128000"/>
+              </a:lnSpc>
+              <a:spcBef>
+                <a:spcPts val="0"/>
+              </a:spcBef>
+              <a:spcAft>
+                <a:spcPts val="0"/>
+              </a:spcAft>
+            </a:pPr>
+            <a:r>
+              <a:rPr sz="1100" b="0" i="0">
+                <a:solidFill>
+                  <a:srgbClr val="5A6068"/>
+                </a:solidFill>
+                <a:latin typeface="Calibri"/>
+              </a:rPr>
+              <a:t>Self-rated health out-predicts the HDI nationally on significant-country share, 37% against 19%.</a:t>
+            </a:r>
+          </a:p>
+        </p:txBody>
+      </p:sp>
+      <p:pic>
+        <p:nvPicPr>
+          <p:cNvPr id="5" name="Picture 4" descr="mechanisms_trust_health.png"/>
+          <p:cNvPicPr>
+            <a:picLocks noChangeAspect="1"/>
+          </p:cNvPicPr>
+          <p:nvPr/>
+        </p:nvPicPr>
+        <p:blipFill>
+          <a:blip r:embed="rId2"/>
+          <a:stretch>
+            <a:fillRect/>
+          </a:stretch>
+        </p:blipFill>
+        <p:spPr>
+          <a:xfrm>
+            <a:off x="3617081" y="1965960"/>
+            <a:ext cx="4957532" cy="4480560"/>
+          </a:xfrm>
+          <a:prstGeom prst="rect">
+            <a:avLst/>
+          </a:prstGeom>
+        </p:spPr>
+      </p:pic>
+    </p:spTree>
+  </p:cSld>
+  <p:clrMapOvr>
+    <a:masterClrMapping/>
+  </p:clrMapOvr>
+</p:sld>
+</file>
+
+<file path=ppt/slides/slide46.xml><?xml version="1.0" encoding="utf-8"?>
 <p:sld xmlns:a="http://schemas.openxmlformats.org/drawingml/2006/main" xmlns:p="http://schemas.openxmlformats.org/presentationml/2006/main" xmlns:r="http://schemas.openxmlformats.org/officeDocument/2006/relationships">
   <p:cSld>
     <p:bg>

--- a/deck/Measured_Where_It_Varies.pptx
+++ b/deck/Measured_Where_It_Varies.pptx
@@ -51,6 +51,7 @@
     <p:sldId id="299" r:id="rId50"/>
     <p:sldId id="300" r:id="rId51"/>
     <p:sldId id="301" r:id="rId52"/>
+    <p:sldId id="302" r:id="rId53"/>
   </p:sldIdLst>
   <p:sldSz cx="12191695" cy="6858000" type="screen4x3"/>
   <p:notesSz cx="6858000" cy="9144000"/>
@@ -3662,7 +3663,7 @@
                 </a:solidFill>
                 <a:latin typeface="Consolas"/>
               </a:rPr>
-              <a:t>11.2% vs 1.2%</a:t>
+              <a:t>0%</a:t>
             </a:r>
           </a:p>
           <a:p>
@@ -3684,7 +3685,7 @@
                 </a:solidFill>
                 <a:latin typeface="Calibri"/>
               </a:rPr>
-              <a:t>health vs education, SDG data, high-income countries</a:t>
+              <a:t>median SDG series: significant in no country</a:t>
             </a:r>
           </a:p>
         </p:txBody>
@@ -3726,7 +3727,7 @@
                 </a:solidFill>
                 <a:latin typeface="Consolas"/>
               </a:rPr>
-              <a:t>36 / 36</a:t>
+              <a:t>100th percentile</a:t>
             </a:r>
           </a:p>
           <a:p>
@@ -3748,7 +3749,7 @@
                 </a:solidFill>
                 <a:latin typeface="Calibri"/>
               </a:rPr>
-              <a:t>countries where self-rated health predicts life satisfaction</a:t>
+              <a:t>where the HDI composite falls in that field</a:t>
             </a:r>
           </a:p>
         </p:txBody>
@@ -3790,7 +3791,7 @@
                 </a:solidFill>
                 <a:latin typeface="Consolas"/>
               </a:rPr>
-              <a:t>19.9%</a:t>
+              <a:t>11.2% vs 1.2%</a:t>
             </a:r>
           </a:p>
           <a:p>
@@ -3812,7 +3813,7 @@
                 </a:solidFill>
                 <a:latin typeface="Calibri"/>
               </a:rPr>
-              <a:t>life expectancy — the HDI's weakest component</a:t>
+              <a:t>health vs education, SDG data, high-income countries</a:t>
             </a:r>
           </a:p>
         </p:txBody>
@@ -3880,7 +3881,7 @@
                 </a:solidFill>
                 <a:latin typeface="Consolas"/>
               </a:rPr>
-              <a:t>THE AUTOPSY</a:t>
+              <a:t>FRAMEWORK AGAINST FRAMEWORK</a:t>
             </a:r>
           </a:p>
         </p:txBody>
@@ -3925,7 +3926,7 @@
                 </a:solidFill>
                 <a:latin typeface="Georgia"/>
               </a:rPr>
-              <a:t>What survives in levels is survival</a:t>
+              <a:t>The SDG framework reaches more countries; the HDI does far more per indicator</a:t>
             </a:r>
           </a:p>
         </p:txBody>
@@ -3970,7 +3971,7 @@
                 </a:solidFill>
                 <a:latin typeface="Calibri"/>
               </a:rPr>
-              <a:t>Ranking the 609 SDG series measured in at least 8 countries by the share of countries in which they are FDR-significant puts safely managed sanitation first, then infant deaths, under-five deaths, child stunting, and safely managed drinking water. Sixteen of the top 25 series are health-domain, and none of them is self-reported.</a:t>
+              <a:t>The fairest head-to-head runs both frameworks on the same 42 countries, against the same outcome, under the same design. On coverage the SDG framework wins: 30 of 42 countries have at least one FDR-significant series in levels (71%), against 17 of 42 for any of the HDI's five indicators (40%) and 14 of 42 for the composite alone (33%). That result should be conceded plainly — asking whether any of roughly 456 series is significant is a far easier bar than asking about five.</a:t>
             </a:r>
           </a:p>
           <a:p>
@@ -3992,7 +3993,7 @@
                 </a:solidFill>
                 <a:latin typeface="Calibri"/>
               </a:rPr>
-              <a:t>This is the steep part of the development curve — staying alive and not being sick — rather than the 2030 Agenda's institutional superstructure. Goal 3 ranks 4th of 17 goals at 11.5%. Goal 16, the closest thing the framework has to social trust, ranks 15th at 1.5%.</a:t>
+              <a:t>Per indicator the ordering reverses completely. Across the 609 SDG series with usable coverage the median series is significant in no country at all, and 54% never clear FDR anywhere. The HDI composite, mean years of schooling and GNI per capita each beat essentially the entire SDG field; expected years of schooling beats 98% of it, and even life expectancy — the HDI's weakest component — beats 90%. The HDI is not a broader instrument than the SDG framework. It is a vastly more efficient one.</a:t>
             </a:r>
           </a:p>
         </p:txBody>
@@ -4041,7 +4042,7 @@
       </p:sp>
       <p:pic>
         <p:nvPicPr>
-          <p:cNvPr id="6" name="Picture 5" descr="sdg_indicator_top20.png"/>
+          <p:cNvPr id="6" name="Picture 5" descr="framework_coverage_efficiency.png"/>
           <p:cNvPicPr>
             <a:picLocks noChangeAspect="1"/>
           </p:cNvPicPr>
@@ -4055,8 +4056,8 @@
         </p:blipFill>
         <p:spPr>
           <a:xfrm>
-            <a:off x="5279547" y="658368"/>
-            <a:ext cx="6220145" cy="5074920"/>
+            <a:off x="5120640" y="1843147"/>
+            <a:ext cx="6537960" cy="2705362"/>
           </a:xfrm>
           <a:prstGeom prst="rect">
             <a:avLst/>
@@ -4103,7 +4104,7 @@
                 </a:solidFill>
                 <a:latin typeface="Calibri"/>
               </a:rPr>
-              <a:t>The 20 highest-ranking SDG series of 609, by share of countries FDR-significant in levels.</a:t>
+              <a:t>Both frameworks on the same 42 countries against WHR happiness. Panel b shows every SDG series with usable coverage and where the HDI's five components fall among them.</a:t>
             </a:r>
           </a:p>
         </p:txBody>
@@ -4171,7 +4172,7 @@
                 </a:solidFill>
                 <a:latin typeface="Consolas"/>
               </a:rPr>
-              <a:t>THE HORSE RACE</a:t>
+              <a:t>THE AUTOPSY</a:t>
             </a:r>
           </a:p>
         </p:txBody>
@@ -4216,7 +4217,7 @@
                 </a:solidFill>
                 <a:latin typeface="Georgia"/>
               </a:rPr>
-              <a:t>Run the domains against each other in one survey and health wins at every level</a:t>
+              <a:t>What survives in levels is survival</a:t>
             </a:r>
           </a:p>
         </p:txBody>
@@ -4261,7 +4262,7 @@
                 </a:solidFill>
                 <a:latin typeface="Calibri"/>
               </a:rPr>
-              <a:t>The ESS measures health, education, income and trust on the same respondents as life satisfaction, so the domains can compete on equal terms. Self-rated health is significant in 36 of 36 countries with a median R² of 0.091 — roughly nine times education's 0.0098, which is the smallest effect of any domain tested. Within countries, across regions, health holds at +0.51 while development falls to +0.12.</a:t>
+              <a:t>Ranking the 609 SDG series measured in at least 8 countries by the share of countries in which they are FDR-significant puts safely managed sanitation first, then infant deaths, under-five deaths, child stunting, and safely managed drinking water. Sixteen of the top 25 series are health-domain, and none of them is self-reported.</a:t>
             </a:r>
           </a:p>
           <a:p>
@@ -4283,7 +4284,7 @@
                 </a:solidFill>
                 <a:latin typeface="Calibri"/>
               </a:rPr>
-              <a:t>The HDI leads between countries, at R² = 0.760, but that is the one comparison where a composite index is expected to win: it proxies every domain at once. It falls to fourth once you look inside countries.</a:t>
+              <a:t>This is the steep part of the development curve — staying alive and not being sick — rather than the 2030 Agenda's institutional superstructure. Goal 3 ranks 4th of 17 goals at 11.5%. Goal 16, the closest thing the framework has to social trust, ranks 15th at 1.5%.</a:t>
             </a:r>
           </a:p>
         </p:txBody>
@@ -4332,7 +4333,7 @@
       </p:sp>
       <p:pic>
         <p:nvPicPr>
-          <p:cNvPr id="6" name="Picture 5" descr="domain_horse_race.png"/>
+          <p:cNvPr id="6" name="Picture 5" descr="sdg_indicator_top20.png"/>
           <p:cNvPicPr>
             <a:picLocks noChangeAspect="1"/>
           </p:cNvPicPr>
@@ -4346,8 +4347,8 @@
         </p:blipFill>
         <p:spPr>
           <a:xfrm>
-            <a:off x="5120640" y="1888236"/>
-            <a:ext cx="6537960" cy="2615184"/>
+            <a:off x="5279547" y="658368"/>
+            <a:ext cx="6220145" cy="5074920"/>
           </a:xfrm>
           <a:prstGeom prst="rect">
             <a:avLst/>
@@ -4394,7 +4395,7 @@
                 </a:solidFill>
                 <a:latin typeface="Calibri"/>
               </a:rPr>
-              <a:t>Domains competing within one instrument, at three levels of aggregation. Health and trust are self-reported alongside the outcome — see the next beat.</a:t>
+              <a:t>The 20 highest-ranking SDG series of 609, by share of countries FDR-significant in levels.</a:t>
             </a:r>
           </a:p>
         </p:txBody>
@@ -4462,7 +4463,7 @@
                 </a:solidFill>
                 <a:latin typeface="Consolas"/>
               </a:rPr>
-              <a:t>THE METHOD CHECK</a:t>
+              <a:t>THE HORSE RACE</a:t>
             </a:r>
           </a:p>
         </p:txBody>
@@ -4507,7 +4508,7 @@
                 </a:solidFill>
                 <a:latin typeface="Georgia"/>
               </a:rPr>
-              <a:t>Health survives the obvious objection; social trust does not</a:t>
+              <a:t>Run the domains against each other in one survey and health wins at every level</a:t>
             </a:r>
           </a:p>
         </p:txBody>
@@ -4552,7 +4553,7 @@
                 </a:solidFill>
                 <a:latin typeface="Calibri"/>
               </a:rPr>
-              <a:t>Self-rated health and social trust are reported by the same respondent, in the same survey, as life satisfaction, so shared method variance is the first thing a reader will raise. The UN SDG database is administrative and shares no method with any wellbeing instrument, which makes it the natural check.</a:t>
+              <a:t>The ESS measures health, education, income and trust on the same respondents as life satisfaction, so the domains can compete on equal terms. Self-rated health is significant in 36 of 36 countries with a median R² of 0.091 — roughly nine times education's 0.0098, which is the smallest effect of any domain tested. Within countries, across regions, health holds at +0.51 while development falls to +0.12.</a:t>
             </a:r>
           </a:p>
           <a:p>
@@ -4574,29 +4575,7 @@
                 </a:solidFill>
                 <a:latin typeface="Calibri"/>
               </a:rPr>
-              <a:t>Health passes it. Restricted to high-income countries — the same development stratum the ESS covers — the SDG data puts health at 11.2% of country-indicator pairs against education's 1.2%, the same ordering the ESS gives from entirely different measurement. Social trust fails it: there is no interpersonal-trust indicator anywhere in the SDG framework, and Goal 16's best series ranks 125th of 609. Trust is the strongest ESS predictor and has no independent corroboration available. It should enter the commentary as an open question, not a result.</a:t>
-            </a:r>
-          </a:p>
-          <a:p>
-            <a:pPr>
-              <a:lnSpc>
-                <a:spcPct val="132000"/>
-              </a:lnSpc>
-              <a:spcBef>
-                <a:spcPts val="0"/>
-              </a:spcBef>
-              <a:spcAft>
-                <a:spcPts val="1100"/>
-              </a:spcAft>
-            </a:pPr>
-            <a:r>
-              <a:rPr sz="1150" b="0" i="0">
-                <a:solidFill>
-                  <a:srgbClr val="5A6068"/>
-                </a:solidFill>
-                <a:latin typeface="Calibri"/>
-              </a:rPr>
-              <a:t>Act III adds a second external check at the regional scale: GDL's externally measured health index leads its education and income indices within countries too, so the health result now holds under administrative measurement at both the national and the regional level.</a:t>
+              <a:t>The HDI leads between countries, at R² = 0.760, but that is the one comparison where a composite index is expected to win: it proxies every domain at once. It falls to fourth once you look inside countries.</a:t>
             </a:r>
           </a:p>
         </p:txBody>
@@ -4645,7 +4624,7 @@
       </p:sp>
       <p:pic>
         <p:nvPicPr>
-          <p:cNvPr id="6" name="Picture 5" descr="health_trust_corroboration.png"/>
+          <p:cNvPr id="6" name="Picture 5" descr="domain_horse_race.png"/>
           <p:cNvPicPr>
             <a:picLocks noChangeAspect="1"/>
           </p:cNvPicPr>
@@ -4659,8 +4638,8 @@
         </p:blipFill>
         <p:spPr>
           <a:xfrm>
-            <a:off x="5120640" y="1858518"/>
-            <a:ext cx="6537960" cy="2674620"/>
+            <a:off x="5120640" y="1888236"/>
+            <a:ext cx="6537960" cy="2615184"/>
           </a:xfrm>
           <a:prstGeom prst="rect">
             <a:avLst/>
@@ -4707,7 +4686,7 @@
                 </a:solidFill>
                 <a:latin typeface="Calibri"/>
               </a:rPr>
-              <a:t>The same three domains under an administrative source and a self-report source.</a:t>
+              <a:t>Domains competing within one instrument, at three levels of aggregation. Health and trust are self-reported alongside the outcome — see the next beat.</a:t>
             </a:r>
           </a:p>
         </p:txBody>
@@ -4747,7 +4726,7 @@
         <p:spPr>
           <a:xfrm>
             <a:off x="566928" y="502920"/>
-            <a:ext cx="8595360" cy="274320"/>
+            <a:ext cx="4160520" cy="274320"/>
           </a:xfrm>
           <a:prstGeom prst="rect">
             <a:avLst/>
@@ -4775,7 +4754,7 @@
                 </a:solidFill>
                 <a:latin typeface="Consolas"/>
               </a:rPr>
-              <a:t>THE SATURATION PROBLEM</a:t>
+              <a:t>THE METHOD CHECK</a:t>
             </a:r>
           </a:p>
         </p:txBody>
@@ -4789,7 +4768,7 @@
         <p:spPr>
           <a:xfrm>
             <a:off x="566928" y="914400"/>
-            <a:ext cx="8595360" cy="1371600"/>
+            <a:ext cx="4160520" cy="1371600"/>
           </a:xfrm>
           <a:prstGeom prst="rect">
             <a:avLst/>
@@ -4814,13 +4793,13 @@
               </a:spcAft>
             </a:pPr>
             <a:r>
-              <a:rPr sz="2700" b="0" i="0">
+              <a:rPr sz="2300" b="0" i="0">
                 <a:solidFill>
                   <a:srgbClr val="14171C"/>
                 </a:solidFill>
                 <a:latin typeface="Georgia"/>
               </a:rPr>
-              <a:t>Why the HDI says health barely matters</a:t>
+              <a:t>Health survives the obvious objection; social trust does not</a:t>
             </a:r>
           </a:p>
         </p:txBody>
@@ -4833,8 +4812,8 @@
         </p:nvSpPr>
         <p:spPr>
           <a:xfrm>
-            <a:off x="566928" y="2286000"/>
-            <a:ext cx="8595360" cy="3840480"/>
+            <a:off x="566928" y="2331720"/>
+            <a:ext cx="4160520" cy="3840480"/>
           </a:xfrm>
           <a:prstGeom prst="rect">
             <a:avLst/>
@@ -4859,13 +4838,13 @@
               </a:spcAft>
             </a:pPr>
             <a:r>
-              <a:rPr sz="1400" b="0" i="0">
+              <a:rPr sz="1150" b="0" i="0">
                 <a:solidFill>
                   <a:srgbClr val="5A6068"/>
                 </a:solidFill>
                 <a:latin typeface="Calibri"/>
               </a:rPr>
-              <a:t>Inside the HDI, life expectancy is the weakest of the five indicators by a wide margin — significant in 30 of 151 countries (19.9%), against 40.7% for mean schooling. Read naively, the HDI says health is the least important thing about development.</a:t>
+              <a:t>Self-rated health and social trust are reported by the same respondent, in the same survey, as life satisfaction, so shared method variance is the first thing a reader will raise. The UN SDG database is administrative and shares no method with any wellbeing instrument, which makes it the natural check.</a:t>
             </a:r>
           </a:p>
           <a:p>
@@ -4881,13 +4860,35 @@
               </a:spcAft>
             </a:pPr>
             <a:r>
-              <a:rPr sz="1400" b="0" i="0">
+              <a:rPr sz="1150" b="0" i="0">
                 <a:solidFill>
                   <a:srgbClr val="5A6068"/>
                 </a:solidFill>
                 <a:latin typeface="Calibri"/>
               </a:rPr>
-              <a:t>It says nothing of the kind. Life expectancy is close to saturated across the countries where it is tested: the variance that would let it predict anything has largely gone. The SDG series that do carry health's signal are survival measures — child and neonatal mortality, stunting — which still vary enormously, and self-rated health captures morbidity that life expectancy cannot see at all. A domain disappears from a framework when that framework measures it with a variable that has run out of room.</a:t>
+              <a:t>Health passes it. Restricted to high-income countries — the same development stratum the ESS covers — the SDG data puts health at 11.2% of country-indicator pairs against education's 1.2%, the same ordering the ESS gives from entirely different measurement. Social trust fails it: there is no interpersonal-trust indicator anywhere in the SDG framework, and Goal 16's best series ranks 125th of 609. Trust is the strongest ESS predictor and has no independent corroboration available. It should enter the commentary as an open question, not a result.</a:t>
+            </a:r>
+          </a:p>
+          <a:p>
+            <a:pPr>
+              <a:lnSpc>
+                <a:spcPct val="132000"/>
+              </a:lnSpc>
+              <a:spcBef>
+                <a:spcPts val="0"/>
+              </a:spcBef>
+              <a:spcAft>
+                <a:spcPts val="1100"/>
+              </a:spcAft>
+            </a:pPr>
+            <a:r>
+              <a:rPr sz="1150" b="0" i="0">
+                <a:solidFill>
+                  <a:srgbClr val="5A6068"/>
+                </a:solidFill>
+                <a:latin typeface="Calibri"/>
+              </a:rPr>
+              <a:t>Act III adds a second external check at the regional scale: GDL's externally measured health index leads its education and income indices within countries too, so the health result now holds under administrative measurement at both the national and the regional level.</a:t>
             </a:r>
           </a:p>
         </p:txBody>
@@ -4930,6 +4931,75 @@
                 <a:latin typeface="Consolas"/>
               </a:rPr>
               <a:t>II</a:t>
+            </a:r>
+          </a:p>
+        </p:txBody>
+      </p:sp>
+      <p:pic>
+        <p:nvPicPr>
+          <p:cNvPr id="6" name="Picture 5" descr="health_trust_corroboration.png"/>
+          <p:cNvPicPr>
+            <a:picLocks noChangeAspect="1"/>
+          </p:cNvPicPr>
+          <p:nvPr/>
+        </p:nvPicPr>
+        <p:blipFill>
+          <a:blip r:embed="rId2"/>
+          <a:stretch>
+            <a:fillRect/>
+          </a:stretch>
+        </p:blipFill>
+        <p:spPr>
+          <a:xfrm>
+            <a:off x="5120640" y="1858518"/>
+            <a:ext cx="6537960" cy="2674620"/>
+          </a:xfrm>
+          <a:prstGeom prst="rect">
+            <a:avLst/>
+          </a:prstGeom>
+        </p:spPr>
+      </p:pic>
+      <p:sp>
+        <p:nvSpPr>
+          <p:cNvPr id="7" name="TextBox 6"/>
+          <p:cNvSpPr txBox="1"/>
+          <p:nvPr/>
+        </p:nvSpPr>
+        <p:spPr>
+          <a:xfrm>
+            <a:off x="5120640" y="5897880"/>
+            <a:ext cx="6537960" cy="731520"/>
+          </a:xfrm>
+          <a:prstGeom prst="rect">
+            <a:avLst/>
+          </a:prstGeom>
+          <a:noFill/>
+        </p:spPr>
+        <p:txBody>
+          <a:bodyPr wrap="square" lIns="0" rIns="0" tIns="0" bIns="0">
+            <a:spAutoFit/>
+          </a:bodyPr>
+          <a:lstStyle/>
+          <a:p>
+            <a:pPr>
+              <a:lnSpc>
+                <a:spcPct val="125000"/>
+              </a:lnSpc>
+              <a:spcBef>
+                <a:spcPts val="0"/>
+              </a:spcBef>
+              <a:spcAft>
+                <a:spcPts val="0"/>
+              </a:spcAft>
+            </a:pPr>
+            <a:r>
+              <a:rPr sz="900" b="0" i="0">
+                <a:solidFill>
+                  <a:srgbClr val="868D96"/>
+                </a:solidFill>
+                <a:latin typeface="Calibri"/>
+              </a:rPr>
+              <a:t>The same three domains under an administrative source and a self-report source.</a:t>
             </a:r>
           </a:p>
         </p:txBody>
@@ -4969,7 +5039,7 @@
         <p:spPr>
           <a:xfrm>
             <a:off x="566928" y="502920"/>
-            <a:ext cx="4160520" cy="274320"/>
+            <a:ext cx="8595360" cy="274320"/>
           </a:xfrm>
           <a:prstGeom prst="rect">
             <a:avLst/>
@@ -4997,7 +5067,7 @@
                 </a:solidFill>
                 <a:latin typeface="Consolas"/>
               </a:rPr>
-              <a:t>SUB-HIGHLIGHT · EDUCATION</a:t>
+              <a:t>THE SATURATION PROBLEM</a:t>
             </a:r>
           </a:p>
         </p:txBody>
@@ -5011,7 +5081,7 @@
         <p:spPr>
           <a:xfrm>
             <a:off x="566928" y="914400"/>
-            <a:ext cx="4160520" cy="1371600"/>
+            <a:ext cx="8595360" cy="1371600"/>
           </a:xfrm>
           <a:prstGeom prst="rect">
             <a:avLst/>
@@ -5036,13 +5106,13 @@
               </a:spcAft>
             </a:pPr>
             <a:r>
-              <a:rPr sz="2300" b="0" i="0">
+              <a:rPr sz="2700" b="0" i="0">
                 <a:solidFill>
                   <a:srgbClr val="14171C"/>
                 </a:solidFill>
                 <a:latin typeface="Georgia"/>
               </a:rPr>
-              <a:t>Education is the same problem running in the opposite direction</a:t>
+              <a:t>Why the HDI says health barely matters</a:t>
             </a:r>
           </a:p>
         </p:txBody>
@@ -5055,8 +5125,8 @@
         </p:nvSpPr>
         <p:spPr>
           <a:xfrm>
-            <a:off x="566928" y="2331720"/>
-            <a:ext cx="4160520" cy="3840480"/>
+            <a:off x="566928" y="2286000"/>
+            <a:ext cx="8595360" cy="3840480"/>
           </a:xfrm>
           <a:prstGeom prst="rect">
             <a:avLst/>
@@ -5081,13 +5151,13 @@
               </a:spcAft>
             </a:pPr>
             <a:r>
-              <a:rPr sz="1150" b="0" i="0">
+              <a:rPr sz="1400" b="0" i="0">
                 <a:solidFill>
                   <a:srgbClr val="5A6068"/>
                 </a:solidFill>
                 <a:latin typeface="Calibri"/>
               </a:rPr>
-              <a:t>Education inverts the health story exactly. It is the HDI's strongest domain — mean years of schooling has the highest median R² of all five indicators, 0.326, above the composite itself — and the SDG framework's weakest, at 3.3% pooled, with its best series ranking 100th of 609.</a:t>
+              <a:t>Inside the HDI, life expectancy is the weakest of the five indicators by a wide margin — significant in 30 of 151 countries (19.9%), against 40.7% for mean schooling. Read naively, the HDI says health is the least important thing about development.</a:t>
             </a:r>
           </a:p>
           <a:p>
@@ -5103,13 +5173,13 @@
               </a:spcAft>
             </a:pPr>
             <a:r>
-              <a:rPr sz="1150" b="0" i="0">
+              <a:rPr sz="1400" b="0" i="0">
                 <a:solidFill>
                   <a:srgbClr val="5A6068"/>
                 </a:solidFill>
                 <a:latin typeface="Calibri"/>
               </a:rPr>
-              <a:t>The disagreement is again construct choice. Eighteen of SDG4's 35 official series are equity or parity ratios, six measure learning outcomes, seven measure school infrastructure, and only two measure access and participation directly. Split apart, access reaches 12.7% — comparable to health's 11.5% — while learning outcomes sit at 0.9% and parity ratios at 2.5%. The pooled 3.3% is an average across constructs pointing in different directions and describes none of them. Pooling within a goal can manufacture a null.</a:t>
+              <a:t>It says nothing of the kind. Life expectancy is close to saturated across the countries where it is tested: the variance that would let it predict anything has largely gone. The SDG series that do carry health's signal are survival measures — child and neonatal mortality, stunting — which still vary enormously, and self-rated health captures morbidity that life expectancy cannot see at all. A domain disappears from a framework when that framework measures it with a variable that has run out of room.</a:t>
             </a:r>
           </a:p>
         </p:txBody>
@@ -5152,75 +5222,6 @@
                 <a:latin typeface="Consolas"/>
               </a:rPr>
               <a:t>II</a:t>
-            </a:r>
-          </a:p>
-        </p:txBody>
-      </p:sp>
-      <p:pic>
-        <p:nvPicPr>
-          <p:cNvPr id="6" name="Picture 5" descr="sdg4_unpooled.png"/>
-          <p:cNvPicPr>
-            <a:picLocks noChangeAspect="1"/>
-          </p:cNvPicPr>
-          <p:nvPr/>
-        </p:nvPicPr>
-        <p:blipFill>
-          <a:blip r:embed="rId2"/>
-          <a:stretch>
-            <a:fillRect/>
-          </a:stretch>
-        </p:blipFill>
-        <p:spPr>
-          <a:xfrm>
-            <a:off x="5120640" y="1103208"/>
-            <a:ext cx="6537960" cy="4185240"/>
-          </a:xfrm>
-          <a:prstGeom prst="rect">
-            <a:avLst/>
-          </a:prstGeom>
-        </p:spPr>
-      </p:pic>
-      <p:sp>
-        <p:nvSpPr>
-          <p:cNvPr id="7" name="TextBox 6"/>
-          <p:cNvSpPr txBox="1"/>
-          <p:nvPr/>
-        </p:nvSpPr>
-        <p:spPr>
-          <a:xfrm>
-            <a:off x="5120640" y="5897880"/>
-            <a:ext cx="6537960" cy="731520"/>
-          </a:xfrm>
-          <a:prstGeom prst="rect">
-            <a:avLst/>
-          </a:prstGeom>
-          <a:noFill/>
-        </p:spPr>
-        <p:txBody>
-          <a:bodyPr wrap="square" lIns="0" rIns="0" tIns="0" bIns="0">
-            <a:spAutoFit/>
-          </a:bodyPr>
-          <a:lstStyle/>
-          <a:p>
-            <a:pPr>
-              <a:lnSpc>
-                <a:spcPct val="125000"/>
-              </a:lnSpc>
-              <a:spcBef>
-                <a:spcPts val="0"/>
-              </a:spcBef>
-              <a:spcAft>
-                <a:spcPts val="0"/>
-              </a:spcAft>
-            </a:pPr>
-            <a:r>
-              <a:rPr sz="900" b="0" i="0">
-                <a:solidFill>
-                  <a:srgbClr val="868D96"/>
-                </a:solidFill>
-                <a:latin typeface="Calibri"/>
-              </a:rPr>
-              <a:t>SDG4 split by what each indicator actually measures, with the pooled figure marked.</a:t>
             </a:r>
           </a:p>
         </p:txBody>
@@ -5333,7 +5334,7 @@
                 </a:solidFill>
                 <a:latin typeface="Georgia"/>
               </a:rPr>
-              <a:t>And it is the one domain that is significant almost everywhere, if barely</a:t>
+              <a:t>Education is the same problem running in the opposite direction</a:t>
             </a:r>
           </a:p>
         </p:txBody>
@@ -5378,7 +5379,7 @@
                 </a:solidFill>
                 <a:latin typeface="Calibri"/>
               </a:rPr>
-              <a:t>Respondents' own attainment predicts their own life satisfaction in 32 to 34 of 36 ESS countries — more consistent across countries than anything except health itself. Aggregated to the country level, ESS-measured years of schooling predicts World Happiness Report happiness at R² = 0.308, against 0.161 for the HDI's own schooling series on the same cells: an independently measured education variable roughly doubles the HDI's.</a:t>
+              <a:t>Education inverts the health story exactly. It is the HDI's strongest domain — mean years of schooling has the highest median R² of all five indicators, 0.326, above the composite itself — and the SDG framework's weakest, at 3.3% pooled, with its best series ranking 100th of 609.</a:t>
             </a:r>
           </a:p>
           <a:p>
@@ -5400,7 +5401,7 @@
                 </a:solidFill>
                 <a:latin typeface="Calibri"/>
               </a:rPr>
-              <a:t>What it does not have is size. The median individual R² is 0.0098, the smallest of any domain in the horse race, and within countries education sits at +0.13 with 2 of 16 countries significant. Education is the most universal signal and the smallest one, which is a genuinely odd combination and worth stating as such rather than resolving prematurely.</a:t>
+              <a:t>The disagreement is again construct choice. Eighteen of SDG4's 35 official series are equity or parity ratios, six measure learning outcomes, seven measure school infrastructure, and only two measure access and participation directly. Split apart, access reaches 12.7% — comparable to health's 11.5% — while learning outcomes sit at 0.9% and parity ratios at 2.5%. The pooled 3.3% is an average across constructs pointing in different directions and describes none of them. Pooling within a goal can manufacture a null.</a:t>
             </a:r>
           </a:p>
         </p:txBody>
@@ -5449,7 +5450,7 @@
       </p:sp>
       <p:pic>
         <p:nvPicPr>
-          <p:cNvPr id="6" name="Picture 5" descr="ess_individual_education.png"/>
+          <p:cNvPr id="6" name="Picture 5" descr="sdg4_unpooled.png"/>
           <p:cNvPicPr>
             <a:picLocks noChangeAspect="1"/>
           </p:cNvPicPr>
@@ -5463,8 +5464,8 @@
         </p:blipFill>
         <p:spPr>
           <a:xfrm>
-            <a:off x="5120640" y="1214810"/>
-            <a:ext cx="6537960" cy="3962035"/>
+            <a:off x="5120640" y="1103208"/>
+            <a:ext cx="6537960" cy="4185240"/>
           </a:xfrm>
           <a:prstGeom prst="rect">
             <a:avLst/>
@@ -5511,7 +5512,7 @@
                 </a:solidFill>
                 <a:latin typeface="Calibri"/>
               </a:rPr>
-              <a:t>Per-country tests of respondents' own attainment against their own life satisfaction, 36 ESS countries.</a:t>
+              <a:t>SDG4 split by what each indicator actually measures, with the pooled figure marked.</a:t>
             </a:r>
           </a:p>
         </p:txBody>
@@ -5579,7 +5580,7 @@
                 </a:solidFill>
                 <a:latin typeface="Consolas"/>
               </a:rPr>
-              <a:t>THE COMPOSITE</a:t>
+              <a:t>SUB-HIGHLIGHT · EDUCATION</a:t>
             </a:r>
           </a:p>
         </p:txBody>
@@ -5624,7 +5625,7 @@
                 </a:solidFill>
                 <a:latin typeface="Georgia"/>
               </a:rPr>
-              <a:t>The three panels the commentary needs</a:t>
+              <a:t>And it is the one domain that is significant almost everywhere, if barely</a:t>
             </a:r>
           </a:p>
         </p:txBody>
@@ -5669,7 +5670,7 @@
                 </a:solidFill>
                 <a:latin typeface="Calibri"/>
               </a:rPr>
-              <a:t>Commentaries carry one or two display items, so the argument has to fit in a single figure: the replicated collapse, the inversion of the health–education ranking across instruments, and the method check that only health passes.</a:t>
+              <a:t>Respondents' own attainment predicts their own life satisfaction in 32 to 34 of 36 ESS countries — more consistent across countries than anything except health itself. Aggregated to the country level, ESS-measured years of schooling predicts World Happiness Report happiness at R² = 0.308, against 0.161 for the HDI's own schooling series on the same cells: an independently measured education variable roughly doubles the HDI's.</a:t>
             </a:r>
           </a:p>
           <a:p>
@@ -5691,7 +5692,7 @@
                 </a:solidFill>
                 <a:latin typeface="Calibri"/>
               </a:rPr>
-              <a:t>One caution for the caption. Panels b and c both put measures with different units on a shared axis — panel b normalises to the health-plus-education pair, panel c to the leading domain within each source. Both are there to make an ordering readable, not a magnitude, and the raw values are printed on the bars so a reader can check that.</a:t>
+              <a:t>What it does not have is size. The median individual R² is 0.0098, the smallest of any domain in the horse race, and within countries education sits at +0.13 with 2 of 16 countries significant. Education is the most universal signal and the smallest one, which is a genuinely odd combination and worth stating as such rather than resolving prematurely.</a:t>
             </a:r>
           </a:p>
         </p:txBody>
@@ -5740,7 +5741,7 @@
       </p:sp>
       <p:pic>
         <p:nvPicPr>
-          <p:cNvPr id="6" name="Picture 5" descr="Figure1_commentary.png"/>
+          <p:cNvPr id="6" name="Picture 5" descr="ess_individual_education.png"/>
           <p:cNvPicPr>
             <a:picLocks noChangeAspect="1"/>
           </p:cNvPicPr>
@@ -5754,8 +5755,8 @@
         </p:blipFill>
         <p:spPr>
           <a:xfrm>
-            <a:off x="5120640" y="808954"/>
-            <a:ext cx="6537960" cy="4773748"/>
+            <a:off x="5120640" y="1214810"/>
+            <a:ext cx="6537960" cy="3962035"/>
           </a:xfrm>
           <a:prstGeom prst="rect">
             <a:avLst/>
@@ -5802,7 +5803,7 @@
                 </a:solidFill>
                 <a:latin typeface="Calibri"/>
               </a:rPr>
-              <a:t>Proposed Figure 1 for submission. Draft — see the caution above on panels b and c.</a:t>
+              <a:t>Per-country tests of respondents' own attainment against their own life satisfaction, 36 ESS countries.</a:t>
             </a:r>
           </a:p>
         </p:txBody>
@@ -5816,6 +5817,297 @@
 </file>
 
 <file path=ppt/slides/slide18.xml><?xml version="1.0" encoding="utf-8"?>
+<p:sld xmlns:a="http://schemas.openxmlformats.org/drawingml/2006/main" xmlns:p="http://schemas.openxmlformats.org/presentationml/2006/main" xmlns:r="http://schemas.openxmlformats.org/officeDocument/2006/relationships">
+  <p:cSld>
+    <p:bg>
+      <p:bgPr>
+        <a:solidFill>
+          <a:srgbClr val="FCFCFB"/>
+        </a:solidFill>
+        <a:effectLst/>
+      </p:bgPr>
+    </p:bg>
+    <p:spTree>
+      <p:nvGrpSpPr>
+        <p:cNvPr id="1" name=""/>
+        <p:cNvGrpSpPr/>
+        <p:nvPr/>
+      </p:nvGrpSpPr>
+      <p:grpSpPr/>
+      <p:sp>
+        <p:nvSpPr>
+          <p:cNvPr id="2" name="TextBox 1"/>
+          <p:cNvSpPr txBox="1"/>
+          <p:nvPr/>
+        </p:nvSpPr>
+        <p:spPr>
+          <a:xfrm>
+            <a:off x="566928" y="502920"/>
+            <a:ext cx="4160520" cy="274320"/>
+          </a:xfrm>
+          <a:prstGeom prst="rect">
+            <a:avLst/>
+          </a:prstGeom>
+          <a:noFill/>
+        </p:spPr>
+        <p:txBody>
+          <a:bodyPr wrap="square" lIns="0" rIns="0" tIns="0" bIns="0">
+            <a:spAutoFit/>
+          </a:bodyPr>
+          <a:lstStyle/>
+          <a:p>
+            <a:pPr>
+              <a:spcBef>
+                <a:spcPts val="0"/>
+              </a:spcBef>
+              <a:spcAft>
+                <a:spcPts val="0"/>
+              </a:spcAft>
+            </a:pPr>
+            <a:r>
+              <a:rPr sz="1000" b="0" i="0">
+                <a:solidFill>
+                  <a:srgbClr val="A63A30"/>
+                </a:solidFill>
+                <a:latin typeface="Consolas"/>
+              </a:rPr>
+              <a:t>THE COMPOSITE</a:t>
+            </a:r>
+          </a:p>
+        </p:txBody>
+      </p:sp>
+      <p:sp>
+        <p:nvSpPr>
+          <p:cNvPr id="3" name="TextBox 2"/>
+          <p:cNvSpPr txBox="1"/>
+          <p:nvPr/>
+        </p:nvSpPr>
+        <p:spPr>
+          <a:xfrm>
+            <a:off x="566928" y="914400"/>
+            <a:ext cx="4160520" cy="1371600"/>
+          </a:xfrm>
+          <a:prstGeom prst="rect">
+            <a:avLst/>
+          </a:prstGeom>
+          <a:noFill/>
+        </p:spPr>
+        <p:txBody>
+          <a:bodyPr wrap="square" lIns="0" rIns="0" tIns="0" bIns="0">
+            <a:spAutoFit/>
+          </a:bodyPr>
+          <a:lstStyle/>
+          <a:p>
+            <a:pPr>
+              <a:lnSpc>
+                <a:spcPct val="108000"/>
+              </a:lnSpc>
+              <a:spcBef>
+                <a:spcPts val="0"/>
+              </a:spcBef>
+              <a:spcAft>
+                <a:spcPts val="0"/>
+              </a:spcAft>
+            </a:pPr>
+            <a:r>
+              <a:rPr sz="2300" b="0" i="0">
+                <a:solidFill>
+                  <a:srgbClr val="14171C"/>
+                </a:solidFill>
+                <a:latin typeface="Georgia"/>
+              </a:rPr>
+              <a:t>The three panels the commentary needs</a:t>
+            </a:r>
+          </a:p>
+        </p:txBody>
+      </p:sp>
+      <p:sp>
+        <p:nvSpPr>
+          <p:cNvPr id="4" name="TextBox 3"/>
+          <p:cNvSpPr txBox="1"/>
+          <p:nvPr/>
+        </p:nvSpPr>
+        <p:spPr>
+          <a:xfrm>
+            <a:off x="566928" y="2331720"/>
+            <a:ext cx="4160520" cy="3840480"/>
+          </a:xfrm>
+          <a:prstGeom prst="rect">
+            <a:avLst/>
+          </a:prstGeom>
+          <a:noFill/>
+        </p:spPr>
+        <p:txBody>
+          <a:bodyPr wrap="square" lIns="0" rIns="0" tIns="0" bIns="0">
+            <a:spAutoFit/>
+          </a:bodyPr>
+          <a:lstStyle/>
+          <a:p>
+            <a:pPr>
+              <a:lnSpc>
+                <a:spcPct val="132000"/>
+              </a:lnSpc>
+              <a:spcBef>
+                <a:spcPts val="0"/>
+              </a:spcBef>
+              <a:spcAft>
+                <a:spcPts val="1100"/>
+              </a:spcAft>
+            </a:pPr>
+            <a:r>
+              <a:rPr sz="1150" b="0" i="0">
+                <a:solidFill>
+                  <a:srgbClr val="5A6068"/>
+                </a:solidFill>
+                <a:latin typeface="Calibri"/>
+              </a:rPr>
+              <a:t>Commentaries carry one or two display items, so the argument has to fit in a single figure: the replicated collapse, the inversion of the health–education ranking across instruments, and the method check that only health passes.</a:t>
+            </a:r>
+          </a:p>
+          <a:p>
+            <a:pPr>
+              <a:lnSpc>
+                <a:spcPct val="132000"/>
+              </a:lnSpc>
+              <a:spcBef>
+                <a:spcPts val="0"/>
+              </a:spcBef>
+              <a:spcAft>
+                <a:spcPts val="1100"/>
+              </a:spcAft>
+            </a:pPr>
+            <a:r>
+              <a:rPr sz="1150" b="0" i="0">
+                <a:solidFill>
+                  <a:srgbClr val="5A6068"/>
+                </a:solidFill>
+                <a:latin typeface="Calibri"/>
+              </a:rPr>
+              <a:t>One caution for the caption. Panels b and c both put measures with different units on a shared axis — panel b normalises to the health-plus-education pair, panel c to the leading domain within each source. Both are there to make an ordering readable, not a magnitude, and the raw values are printed on the bars so a reader can check that.</a:t>
+            </a:r>
+          </a:p>
+        </p:txBody>
+      </p:sp>
+      <p:sp>
+        <p:nvSpPr>
+          <p:cNvPr id="5" name="TextBox 4"/>
+          <p:cNvSpPr txBox="1"/>
+          <p:nvPr/>
+        </p:nvSpPr>
+        <p:spPr>
+          <a:xfrm>
+            <a:off x="11338560" y="6263640"/>
+            <a:ext cx="548640" cy="274320"/>
+          </a:xfrm>
+          <a:prstGeom prst="rect">
+            <a:avLst/>
+          </a:prstGeom>
+          <a:noFill/>
+        </p:spPr>
+        <p:txBody>
+          <a:bodyPr wrap="square" lIns="0" rIns="0" tIns="0" bIns="0">
+            <a:spAutoFit/>
+          </a:bodyPr>
+          <a:lstStyle/>
+          <a:p>
+            <a:pPr algn="r">
+              <a:spcBef>
+                <a:spcPts val="0"/>
+              </a:spcBef>
+              <a:spcAft>
+                <a:spcPts val="0"/>
+              </a:spcAft>
+            </a:pPr>
+            <a:r>
+              <a:rPr sz="1100" b="0" i="0">
+                <a:solidFill>
+                  <a:srgbClr val="868D96"/>
+                </a:solidFill>
+                <a:latin typeface="Consolas"/>
+              </a:rPr>
+              <a:t>II</a:t>
+            </a:r>
+          </a:p>
+        </p:txBody>
+      </p:sp>
+      <p:pic>
+        <p:nvPicPr>
+          <p:cNvPr id="6" name="Picture 5" descr="Figure1_commentary.png"/>
+          <p:cNvPicPr>
+            <a:picLocks noChangeAspect="1"/>
+          </p:cNvPicPr>
+          <p:nvPr/>
+        </p:nvPicPr>
+        <p:blipFill>
+          <a:blip r:embed="rId2"/>
+          <a:stretch>
+            <a:fillRect/>
+          </a:stretch>
+        </p:blipFill>
+        <p:spPr>
+          <a:xfrm>
+            <a:off x="5120640" y="808954"/>
+            <a:ext cx="6537960" cy="4773748"/>
+          </a:xfrm>
+          <a:prstGeom prst="rect">
+            <a:avLst/>
+          </a:prstGeom>
+        </p:spPr>
+      </p:pic>
+      <p:sp>
+        <p:nvSpPr>
+          <p:cNvPr id="7" name="TextBox 6"/>
+          <p:cNvSpPr txBox="1"/>
+          <p:nvPr/>
+        </p:nvSpPr>
+        <p:spPr>
+          <a:xfrm>
+            <a:off x="5120640" y="5897880"/>
+            <a:ext cx="6537960" cy="731520"/>
+          </a:xfrm>
+          <a:prstGeom prst="rect">
+            <a:avLst/>
+          </a:prstGeom>
+          <a:noFill/>
+        </p:spPr>
+        <p:txBody>
+          <a:bodyPr wrap="square" lIns="0" rIns="0" tIns="0" bIns="0">
+            <a:spAutoFit/>
+          </a:bodyPr>
+          <a:lstStyle/>
+          <a:p>
+            <a:pPr>
+              <a:lnSpc>
+                <a:spcPct val="125000"/>
+              </a:lnSpc>
+              <a:spcBef>
+                <a:spcPts val="0"/>
+              </a:spcBef>
+              <a:spcAft>
+                <a:spcPts val="0"/>
+              </a:spcAft>
+            </a:pPr>
+            <a:r>
+              <a:rPr sz="900" b="0" i="0">
+                <a:solidFill>
+                  <a:srgbClr val="868D96"/>
+                </a:solidFill>
+                <a:latin typeface="Calibri"/>
+              </a:rPr>
+              <a:t>Proposed Figure 1 for submission. Draft — see the caution above on panels b and c.</a:t>
+            </a:r>
+          </a:p>
+        </p:txBody>
+      </p:sp>
+    </p:spTree>
+  </p:cSld>
+  <p:clrMapOvr>
+    <a:masterClrMapping/>
+  </p:clrMapOvr>
+</p:sld>
+</file>
+
+<file path=ppt/slides/slide19.xml><?xml version="1.0" encoding="utf-8"?>
 <p:sld xmlns:a="http://schemas.openxmlformats.org/drawingml/2006/main" xmlns:p="http://schemas.openxmlformats.org/presentationml/2006/main" xmlns:r="http://schemas.openxmlformats.org/officeDocument/2006/relationships">
   <p:cSld>
     <p:bg>
@@ -5960,442 +6252,6 @@
                 <a:latin typeface="Georgia"/>
               </a:rPr>
               <a:t>Two domains, two frameworks, two opposite verdicts, and in both cases the disagreement is about measurement rather than about the world. Health leads once it is measured somewhere it still varies; education leads once it is measured as attainment rather than parity. The commentary's contribution is not a ranking of domains but the demonstration that the ranking is an artefact of operationalisation — and that both domains survive when measured properly, while trust cannot yet be checked at all.</a:t>
-            </a:r>
-          </a:p>
-        </p:txBody>
-      </p:sp>
-    </p:spTree>
-  </p:cSld>
-  <p:clrMapOvr>
-    <a:masterClrMapping/>
-  </p:clrMapOvr>
-</p:sld>
-</file>
-
-<file path=ppt/slides/slide19.xml><?xml version="1.0" encoding="utf-8"?>
-<p:sld xmlns:a="http://schemas.openxmlformats.org/drawingml/2006/main" xmlns:p="http://schemas.openxmlformats.org/presentationml/2006/main" xmlns:r="http://schemas.openxmlformats.org/officeDocument/2006/relationships">
-  <p:cSld>
-    <p:bg>
-      <p:bgPr>
-        <a:solidFill>
-          <a:srgbClr val="14171C"/>
-        </a:solidFill>
-        <a:effectLst/>
-      </p:bgPr>
-    </p:bg>
-    <p:spTree>
-      <p:nvGrpSpPr>
-        <p:cNvPr id="1" name=""/>
-        <p:cNvGrpSpPr/>
-        <p:nvPr/>
-      </p:nvGrpSpPr>
-      <p:grpSpPr/>
-      <p:sp>
-        <p:nvSpPr>
-          <p:cNvPr id="2" name="TextBox 1"/>
-          <p:cNvSpPr txBox="1"/>
-          <p:nvPr/>
-        </p:nvSpPr>
-        <p:spPr>
-          <a:xfrm>
-            <a:off x="8229600" y="822960"/>
-            <a:ext cx="3291840" cy="4114800"/>
-          </a:xfrm>
-          <a:prstGeom prst="rect">
-            <a:avLst/>
-          </a:prstGeom>
-          <a:noFill/>
-        </p:spPr>
-        <p:txBody>
-          <a:bodyPr wrap="square" lIns="0" rIns="0" tIns="0" bIns="0">
-            <a:spAutoFit/>
-          </a:bodyPr>
-          <a:lstStyle/>
-          <a:p>
-            <a:pPr algn="r">
-              <a:spcBef>
-                <a:spcPts val="0"/>
-              </a:spcBef>
-              <a:spcAft>
-                <a:spcPts val="0"/>
-              </a:spcAft>
-            </a:pPr>
-            <a:r>
-              <a:rPr sz="20000" b="0" i="0">
-                <a:solidFill>
-                  <a:srgbClr val="2A3340"/>
-                </a:solidFill>
-                <a:latin typeface="Georgia"/>
-              </a:rPr>
-              <a:t>III</a:t>
-            </a:r>
-          </a:p>
-        </p:txBody>
-      </p:sp>
-      <p:sp>
-        <p:nvSpPr>
-          <p:cNvPr id="3" name="Rectangle 2"/>
-          <p:cNvSpPr/>
-          <p:nvPr/>
-        </p:nvSpPr>
-        <p:spPr>
-          <a:xfrm>
-            <a:off x="566928" y="1371600"/>
-            <a:ext cx="7315200" cy="25400"/>
-          </a:xfrm>
-          <a:prstGeom prst="rect">
-            <a:avLst/>
-          </a:prstGeom>
-          <a:solidFill>
-            <a:srgbClr val="C9D8EC"/>
-          </a:solidFill>
-          <a:ln>
-            <a:noFill/>
-          </a:ln>
-          <a:effectLst/>
-        </p:spPr>
-        <p:style>
-          <a:lnRef idx="1">
-            <a:schemeClr val="accent1"/>
-          </a:lnRef>
-          <a:fillRef idx="3">
-            <a:schemeClr val="accent1"/>
-          </a:fillRef>
-          <a:effectRef idx="2">
-            <a:schemeClr val="accent1"/>
-          </a:effectRef>
-          <a:fontRef idx="minor">
-            <a:schemeClr val="lt1"/>
-          </a:fontRef>
-        </p:style>
-        <p:txBody>
-          <a:bodyPr rtlCol="0" anchor="ctr"/>
-          <a:lstStyle/>
-          <a:p>
-            <a:pPr algn="ctr"/>
-          </a:p>
-        </p:txBody>
-      </p:sp>
-      <p:sp>
-        <p:nvSpPr>
-          <p:cNvPr id="4" name="TextBox 3"/>
-          <p:cNvSpPr txBox="1"/>
-          <p:nvPr/>
-        </p:nvSpPr>
-        <p:spPr>
-          <a:xfrm>
-            <a:off x="566928" y="960120"/>
-            <a:ext cx="5486400" cy="274320"/>
-          </a:xfrm>
-          <a:prstGeom prst="rect">
-            <a:avLst/>
-          </a:prstGeom>
-          <a:noFill/>
-        </p:spPr>
-        <p:txBody>
-          <a:bodyPr wrap="square" lIns="0" rIns="0" tIns="0" bIns="0">
-            <a:spAutoFit/>
-          </a:bodyPr>
-          <a:lstStyle/>
-          <a:p>
-            <a:pPr>
-              <a:spcBef>
-                <a:spcPts val="0"/>
-              </a:spcBef>
-              <a:spcAft>
-                <a:spcPts val="0"/>
-              </a:spcAft>
-            </a:pPr>
-            <a:r>
-              <a:rPr sz="1100" b="0" i="0">
-                <a:solidFill>
-                  <a:srgbClr val="C9D8EC"/>
-                </a:solidFill>
-                <a:latin typeface="Consolas"/>
-              </a:rPr>
-              <a:t>ACT III</a:t>
-            </a:r>
-          </a:p>
-        </p:txBody>
-      </p:sp>
-      <p:sp>
-        <p:nvSpPr>
-          <p:cNvPr id="5" name="TextBox 4"/>
-          <p:cNvSpPr txBox="1"/>
-          <p:nvPr/>
-        </p:nvSpPr>
-        <p:spPr>
-          <a:xfrm>
-            <a:off x="566928" y="1783080"/>
-            <a:ext cx="7223760" cy="1828800"/>
-          </a:xfrm>
-          <a:prstGeom prst="rect">
-            <a:avLst/>
-          </a:prstGeom>
-          <a:noFill/>
-        </p:spPr>
-        <p:txBody>
-          <a:bodyPr wrap="square" lIns="0" rIns="0" tIns="0" bIns="0">
-            <a:spAutoFit/>
-          </a:bodyPr>
-          <a:lstStyle/>
-          <a:p>
-            <a:pPr>
-              <a:lnSpc>
-                <a:spcPct val="102000"/>
-              </a:lnSpc>
-              <a:spcBef>
-                <a:spcPts val="0"/>
-              </a:spcBef>
-              <a:spcAft>
-                <a:spcPts val="0"/>
-              </a:spcAft>
-            </a:pPr>
-            <a:r>
-              <a:rPr sz="4000" b="0" i="0">
-                <a:solidFill>
-                  <a:srgbClr val="FCFCFB"/>
-                </a:solidFill>
-                <a:latin typeface="Georgia"/>
-              </a:rPr>
-              <a:t>Priorities, and what kind of health and education</a:t>
-            </a:r>
-          </a:p>
-        </p:txBody>
-      </p:sp>
-      <p:sp>
-        <p:nvSpPr>
-          <p:cNvPr id="6" name="TextBox 5"/>
-          <p:cNvSpPr txBox="1"/>
-          <p:nvPr/>
-        </p:nvSpPr>
-        <p:spPr>
-          <a:xfrm>
-            <a:off x="566928" y="3886200"/>
-            <a:ext cx="6766560" cy="1463040"/>
-          </a:xfrm>
-          <a:prstGeom prst="rect">
-            <a:avLst/>
-          </a:prstGeom>
-          <a:noFill/>
-        </p:spPr>
-        <p:txBody>
-          <a:bodyPr wrap="square" lIns="0" rIns="0" tIns="0" bIns="0">
-            <a:spAutoFit/>
-          </a:bodyPr>
-          <a:lstStyle/>
-          <a:p>
-            <a:pPr>
-              <a:lnSpc>
-                <a:spcPct val="135000"/>
-              </a:lnSpc>
-              <a:spcBef>
-                <a:spcPts val="0"/>
-              </a:spcBef>
-              <a:spcAft>
-                <a:spcPts val="0"/>
-              </a:spcAft>
-            </a:pPr>
-            <a:r>
-              <a:rPr sz="1600" b="0" i="1">
-                <a:solidFill>
-                  <a:srgbClr val="9AA4B0"/>
-                </a:solidFill>
-                <a:latin typeface="Georgia"/>
-              </a:rPr>
-              <a:t>Two questions follow. Where should the lever be pulled — which turns on scale, because the ordering of predictors inverts inside countries. And what kind of health and education, because in both domains the wellbeing signal sits with one operationalisation and vanishes under another.</a:t>
-            </a:r>
-          </a:p>
-        </p:txBody>
-      </p:sp>
-      <p:sp>
-        <p:nvSpPr>
-          <p:cNvPr id="7" name="TextBox 6"/>
-          <p:cNvSpPr txBox="1"/>
-          <p:nvPr/>
-        </p:nvSpPr>
-        <p:spPr>
-          <a:xfrm>
-            <a:off x="566928" y="5623560"/>
-            <a:ext cx="3503066" cy="914400"/>
-          </a:xfrm>
-          <a:prstGeom prst="rect">
-            <a:avLst/>
-          </a:prstGeom>
-          <a:noFill/>
-        </p:spPr>
-        <p:txBody>
-          <a:bodyPr wrap="square" lIns="0" rIns="0" tIns="0" bIns="0">
-            <a:spAutoFit/>
-          </a:bodyPr>
-          <a:lstStyle/>
-          <a:p>
-            <a:pPr>
-              <a:spcBef>
-                <a:spcPts val="0"/>
-              </a:spcBef>
-              <a:spcAft>
-                <a:spcPts val="400"/>
-              </a:spcAft>
-            </a:pPr>
-            <a:r>
-              <a:rPr sz="2200" b="0" i="0">
-                <a:solidFill>
-                  <a:srgbClr val="FCFCFB"/>
-                </a:solidFill>
-                <a:latin typeface="Consolas"/>
-              </a:rPr>
-              <a:t>+0.87 → +0.12</a:t>
-            </a:r>
-          </a:p>
-          <a:p>
-            <a:pPr>
-              <a:lnSpc>
-                <a:spcPct val="120000"/>
-              </a:lnSpc>
-              <a:spcBef>
-                <a:spcPts val="0"/>
-              </a:spcBef>
-              <a:spcAft>
-                <a:spcPts val="0"/>
-              </a:spcAft>
-            </a:pPr>
-            <a:r>
-              <a:rPr sz="1000" b="0" i="0">
-                <a:solidFill>
-                  <a:srgbClr val="8A94A0"/>
-                </a:solidFill>
-                <a:latin typeface="Calibri"/>
-              </a:rPr>
-              <a:t>development, between countries → within them</a:t>
-            </a:r>
-          </a:p>
-        </p:txBody>
-      </p:sp>
-      <p:sp>
-        <p:nvSpPr>
-          <p:cNvPr id="8" name="TextBox 7"/>
-          <p:cNvSpPr txBox="1"/>
-          <p:nvPr/>
-        </p:nvSpPr>
-        <p:spPr>
-          <a:xfrm>
-            <a:off x="4344314" y="5623560"/>
-            <a:ext cx="3503066" cy="914400"/>
-          </a:xfrm>
-          <a:prstGeom prst="rect">
-            <a:avLst/>
-          </a:prstGeom>
-          <a:noFill/>
-        </p:spPr>
-        <p:txBody>
-          <a:bodyPr wrap="square" lIns="0" rIns="0" tIns="0" bIns="0">
-            <a:spAutoFit/>
-          </a:bodyPr>
-          <a:lstStyle/>
-          <a:p>
-            <a:pPr>
-              <a:spcBef>
-                <a:spcPts val="0"/>
-              </a:spcBef>
-              <a:spcAft>
-                <a:spcPts val="400"/>
-              </a:spcAft>
-            </a:pPr>
-            <a:r>
-              <a:rPr sz="2200" b="0" i="0">
-                <a:solidFill>
-                  <a:srgbClr val="FCFCFB"/>
-                </a:solidFill>
-                <a:latin typeface="Consolas"/>
-              </a:rPr>
-              <a:t>+0.51</a:t>
-            </a:r>
-          </a:p>
-          <a:p>
-            <a:pPr>
-              <a:lnSpc>
-                <a:spcPct val="120000"/>
-              </a:lnSpc>
-              <a:spcBef>
-                <a:spcPts val="0"/>
-              </a:spcBef>
-              <a:spcAft>
-                <a:spcPts val="0"/>
-              </a:spcAft>
-            </a:pPr>
-            <a:r>
-              <a:rPr sz="1000" b="0" i="0">
-                <a:solidFill>
-                  <a:srgbClr val="8A94A0"/>
-                </a:solidFill>
-                <a:latin typeface="Calibri"/>
-              </a:rPr>
-              <a:t>self-rated health, within countries</a:t>
-            </a:r>
-          </a:p>
-        </p:txBody>
-      </p:sp>
-      <p:sp>
-        <p:nvSpPr>
-          <p:cNvPr id="9" name="TextBox 8"/>
-          <p:cNvSpPr txBox="1"/>
-          <p:nvPr/>
-        </p:nvSpPr>
-        <p:spPr>
-          <a:xfrm>
-            <a:off x="8121700" y="5623560"/>
-            <a:ext cx="3503066" cy="914400"/>
-          </a:xfrm>
-          <a:prstGeom prst="rect">
-            <a:avLst/>
-          </a:prstGeom>
-          <a:noFill/>
-        </p:spPr>
-        <p:txBody>
-          <a:bodyPr wrap="square" lIns="0" rIns="0" tIns="0" bIns="0">
-            <a:spAutoFit/>
-          </a:bodyPr>
-          <a:lstStyle/>
-          <a:p>
-            <a:pPr>
-              <a:spcBef>
-                <a:spcPts val="0"/>
-              </a:spcBef>
-              <a:spcAft>
-                <a:spcPts val="400"/>
-              </a:spcAft>
-            </a:pPr>
-            <a:r>
-              <a:rPr sz="2200" b="0" i="0">
-                <a:solidFill>
-                  <a:srgbClr val="FCFCFB"/>
-                </a:solidFill>
-                <a:latin typeface="Consolas"/>
-              </a:rPr>
-              <a:t>11.2% vs 1.2%</a:t>
-            </a:r>
-          </a:p>
-          <a:p>
-            <a:pPr>
-              <a:lnSpc>
-                <a:spcPct val="120000"/>
-              </a:lnSpc>
-              <a:spcBef>
-                <a:spcPts val="0"/>
-              </a:spcBef>
-              <a:spcAft>
-                <a:spcPts val="0"/>
-              </a:spcAft>
-            </a:pPr>
-            <a:r>
-              <a:rPr sz="1000" b="0" i="0">
-                <a:solidFill>
-                  <a:srgbClr val="8A94A0"/>
-                </a:solidFill>
-                <a:latin typeface="Calibri"/>
-              </a:rPr>
-              <a:t>health vs education, SDG data, high-income countries</a:t>
             </a:r>
           </a:p>
         </p:txBody>
@@ -7086,7 +6942,7 @@
     <p:bg>
       <p:bgPr>
         <a:solidFill>
-          <a:srgbClr val="FCFCFB"/>
+          <a:srgbClr val="14171C"/>
         </a:solidFill>
         <a:effectLst/>
       </p:bgPr>
@@ -7106,21 +6962,261 @@
         </p:nvSpPr>
         <p:spPr>
           <a:xfrm>
-            <a:off x="566928" y="502920"/>
-            <a:ext cx="4160520" cy="274320"/>
-          </a:xfrm>
-          <a:prstGeom prst="rect">
-            <a:avLst/>
-          </a:prstGeom>
-          <a:noFill/>
-        </p:spPr>
-        <p:txBody>
-          <a:bodyPr wrap="square" lIns="0" rIns="0" tIns="0" bIns="0">
-            <a:spAutoFit/>
-          </a:bodyPr>
-          <a:lstStyle/>
-          <a:p>
-            <a:pPr>
+            <a:off x="8229600" y="822960"/>
+            <a:ext cx="3291840" cy="4114800"/>
+          </a:xfrm>
+          <a:prstGeom prst="rect">
+            <a:avLst/>
+          </a:prstGeom>
+          <a:noFill/>
+        </p:spPr>
+        <p:txBody>
+          <a:bodyPr wrap="square" lIns="0" rIns="0" tIns="0" bIns="0">
+            <a:spAutoFit/>
+          </a:bodyPr>
+          <a:lstStyle/>
+          <a:p>
+            <a:pPr algn="r">
+              <a:spcBef>
+                <a:spcPts val="0"/>
+              </a:spcBef>
+              <a:spcAft>
+                <a:spcPts val="0"/>
+              </a:spcAft>
+            </a:pPr>
+            <a:r>
+              <a:rPr sz="20000" b="0" i="0">
+                <a:solidFill>
+                  <a:srgbClr val="2A3340"/>
+                </a:solidFill>
+                <a:latin typeface="Georgia"/>
+              </a:rPr>
+              <a:t>III</a:t>
+            </a:r>
+          </a:p>
+        </p:txBody>
+      </p:sp>
+      <p:sp>
+        <p:nvSpPr>
+          <p:cNvPr id="3" name="Rectangle 2"/>
+          <p:cNvSpPr/>
+          <p:nvPr/>
+        </p:nvSpPr>
+        <p:spPr>
+          <a:xfrm>
+            <a:off x="566928" y="1371600"/>
+            <a:ext cx="7315200" cy="25400"/>
+          </a:xfrm>
+          <a:prstGeom prst="rect">
+            <a:avLst/>
+          </a:prstGeom>
+          <a:solidFill>
+            <a:srgbClr val="C9D8EC"/>
+          </a:solidFill>
+          <a:ln>
+            <a:noFill/>
+          </a:ln>
+          <a:effectLst/>
+        </p:spPr>
+        <p:style>
+          <a:lnRef idx="1">
+            <a:schemeClr val="accent1"/>
+          </a:lnRef>
+          <a:fillRef idx="3">
+            <a:schemeClr val="accent1"/>
+          </a:fillRef>
+          <a:effectRef idx="2">
+            <a:schemeClr val="accent1"/>
+          </a:effectRef>
+          <a:fontRef idx="minor">
+            <a:schemeClr val="lt1"/>
+          </a:fontRef>
+        </p:style>
+        <p:txBody>
+          <a:bodyPr rtlCol="0" anchor="ctr"/>
+          <a:lstStyle/>
+          <a:p>
+            <a:pPr algn="ctr"/>
+          </a:p>
+        </p:txBody>
+      </p:sp>
+      <p:sp>
+        <p:nvSpPr>
+          <p:cNvPr id="4" name="TextBox 3"/>
+          <p:cNvSpPr txBox="1"/>
+          <p:nvPr/>
+        </p:nvSpPr>
+        <p:spPr>
+          <a:xfrm>
+            <a:off x="566928" y="960120"/>
+            <a:ext cx="5486400" cy="274320"/>
+          </a:xfrm>
+          <a:prstGeom prst="rect">
+            <a:avLst/>
+          </a:prstGeom>
+          <a:noFill/>
+        </p:spPr>
+        <p:txBody>
+          <a:bodyPr wrap="square" lIns="0" rIns="0" tIns="0" bIns="0">
+            <a:spAutoFit/>
+          </a:bodyPr>
+          <a:lstStyle/>
+          <a:p>
+            <a:pPr>
+              <a:spcBef>
+                <a:spcPts val="0"/>
+              </a:spcBef>
+              <a:spcAft>
+                <a:spcPts val="0"/>
+              </a:spcAft>
+            </a:pPr>
+            <a:r>
+              <a:rPr sz="1100" b="0" i="0">
+                <a:solidFill>
+                  <a:srgbClr val="C9D8EC"/>
+                </a:solidFill>
+                <a:latin typeface="Consolas"/>
+              </a:rPr>
+              <a:t>ACT III</a:t>
+            </a:r>
+          </a:p>
+        </p:txBody>
+      </p:sp>
+      <p:sp>
+        <p:nvSpPr>
+          <p:cNvPr id="5" name="TextBox 4"/>
+          <p:cNvSpPr txBox="1"/>
+          <p:nvPr/>
+        </p:nvSpPr>
+        <p:spPr>
+          <a:xfrm>
+            <a:off x="566928" y="1783080"/>
+            <a:ext cx="7223760" cy="1828800"/>
+          </a:xfrm>
+          <a:prstGeom prst="rect">
+            <a:avLst/>
+          </a:prstGeom>
+          <a:noFill/>
+        </p:spPr>
+        <p:txBody>
+          <a:bodyPr wrap="square" lIns="0" rIns="0" tIns="0" bIns="0">
+            <a:spAutoFit/>
+          </a:bodyPr>
+          <a:lstStyle/>
+          <a:p>
+            <a:pPr>
+              <a:lnSpc>
+                <a:spcPct val="102000"/>
+              </a:lnSpc>
+              <a:spcBef>
+                <a:spcPts val="0"/>
+              </a:spcBef>
+              <a:spcAft>
+                <a:spcPts val="0"/>
+              </a:spcAft>
+            </a:pPr>
+            <a:r>
+              <a:rPr sz="4000" b="0" i="0">
+                <a:solidFill>
+                  <a:srgbClr val="FCFCFB"/>
+                </a:solidFill>
+                <a:latin typeface="Georgia"/>
+              </a:rPr>
+              <a:t>Priorities, and what kind of health and education</a:t>
+            </a:r>
+          </a:p>
+        </p:txBody>
+      </p:sp>
+      <p:sp>
+        <p:nvSpPr>
+          <p:cNvPr id="6" name="TextBox 5"/>
+          <p:cNvSpPr txBox="1"/>
+          <p:nvPr/>
+        </p:nvSpPr>
+        <p:spPr>
+          <a:xfrm>
+            <a:off x="566928" y="3886200"/>
+            <a:ext cx="6766560" cy="1463040"/>
+          </a:xfrm>
+          <a:prstGeom prst="rect">
+            <a:avLst/>
+          </a:prstGeom>
+          <a:noFill/>
+        </p:spPr>
+        <p:txBody>
+          <a:bodyPr wrap="square" lIns="0" rIns="0" tIns="0" bIns="0">
+            <a:spAutoFit/>
+          </a:bodyPr>
+          <a:lstStyle/>
+          <a:p>
+            <a:pPr>
+              <a:lnSpc>
+                <a:spcPct val="135000"/>
+              </a:lnSpc>
+              <a:spcBef>
+                <a:spcPts val="0"/>
+              </a:spcBef>
+              <a:spcAft>
+                <a:spcPts val="0"/>
+              </a:spcAft>
+            </a:pPr>
+            <a:r>
+              <a:rPr sz="1600" b="0" i="1">
+                <a:solidFill>
+                  <a:srgbClr val="9AA4B0"/>
+                </a:solidFill>
+                <a:latin typeface="Georgia"/>
+              </a:rPr>
+              <a:t>Two questions follow. Where should the lever be pulled — which turns on scale, because the ordering of predictors inverts inside countries. And what kind of health and education, because in both domains the wellbeing signal sits with one operationalisation and vanishes under another.</a:t>
+            </a:r>
+          </a:p>
+        </p:txBody>
+      </p:sp>
+      <p:sp>
+        <p:nvSpPr>
+          <p:cNvPr id="7" name="TextBox 6"/>
+          <p:cNvSpPr txBox="1"/>
+          <p:nvPr/>
+        </p:nvSpPr>
+        <p:spPr>
+          <a:xfrm>
+            <a:off x="566928" y="5623560"/>
+            <a:ext cx="3503066" cy="914400"/>
+          </a:xfrm>
+          <a:prstGeom prst="rect">
+            <a:avLst/>
+          </a:prstGeom>
+          <a:noFill/>
+        </p:spPr>
+        <p:txBody>
+          <a:bodyPr wrap="square" lIns="0" rIns="0" tIns="0" bIns="0">
+            <a:spAutoFit/>
+          </a:bodyPr>
+          <a:lstStyle/>
+          <a:p>
+            <a:pPr>
+              <a:spcBef>
+                <a:spcPts val="0"/>
+              </a:spcBef>
+              <a:spcAft>
+                <a:spcPts val="400"/>
+              </a:spcAft>
+            </a:pPr>
+            <a:r>
+              <a:rPr sz="2200" b="0" i="0">
+                <a:solidFill>
+                  <a:srgbClr val="FCFCFB"/>
+                </a:solidFill>
+                <a:latin typeface="Consolas"/>
+              </a:rPr>
+              <a:t>+0.87 → +0.12</a:t>
+            </a:r>
+          </a:p>
+          <a:p>
+            <a:pPr>
+              <a:lnSpc>
+                <a:spcPct val="120000"/>
+              </a:lnSpc>
               <a:spcBef>
                 <a:spcPts val="0"/>
               </a:spcBef>
@@ -7131,40 +7227,59 @@
             <a:r>
               <a:rPr sz="1000" b="0" i="0">
                 <a:solidFill>
-                  <a:srgbClr val="A63A30"/>
+                  <a:srgbClr val="8A94A0"/>
+                </a:solidFill>
+                <a:latin typeface="Calibri"/>
+              </a:rPr>
+              <a:t>development, between countries → within them</a:t>
+            </a:r>
+          </a:p>
+        </p:txBody>
+      </p:sp>
+      <p:sp>
+        <p:nvSpPr>
+          <p:cNvPr id="8" name="TextBox 7"/>
+          <p:cNvSpPr txBox="1"/>
+          <p:nvPr/>
+        </p:nvSpPr>
+        <p:spPr>
+          <a:xfrm>
+            <a:off x="4344314" y="5623560"/>
+            <a:ext cx="3503066" cy="914400"/>
+          </a:xfrm>
+          <a:prstGeom prst="rect">
+            <a:avLst/>
+          </a:prstGeom>
+          <a:noFill/>
+        </p:spPr>
+        <p:txBody>
+          <a:bodyPr wrap="square" lIns="0" rIns="0" tIns="0" bIns="0">
+            <a:spAutoFit/>
+          </a:bodyPr>
+          <a:lstStyle/>
+          <a:p>
+            <a:pPr>
+              <a:spcBef>
+                <a:spcPts val="0"/>
+              </a:spcBef>
+              <a:spcAft>
+                <a:spcPts val="400"/>
+              </a:spcAft>
+            </a:pPr>
+            <a:r>
+              <a:rPr sz="2200" b="0" i="0">
+                <a:solidFill>
+                  <a:srgbClr val="FCFCFB"/>
                 </a:solidFill>
                 <a:latin typeface="Consolas"/>
               </a:rPr>
-              <a:t>WHERE THE LEVER IS</a:t>
-            </a:r>
-          </a:p>
-        </p:txBody>
-      </p:sp>
-      <p:sp>
-        <p:nvSpPr>
-          <p:cNvPr id="3" name="TextBox 2"/>
-          <p:cNvSpPr txBox="1"/>
-          <p:nvPr/>
-        </p:nvSpPr>
-        <p:spPr>
-          <a:xfrm>
-            <a:off x="566928" y="914400"/>
-            <a:ext cx="4160520" cy="1371600"/>
-          </a:xfrm>
-          <a:prstGeom prst="rect">
-            <a:avLst/>
-          </a:prstGeom>
-          <a:noFill/>
-        </p:spPr>
-        <p:txBody>
-          <a:bodyPr wrap="square" lIns="0" rIns="0" tIns="0" bIns="0">
-            <a:spAutoFit/>
-          </a:bodyPr>
-          <a:lstStyle/>
+              <a:t>+0.51</a:t>
+            </a:r>
+          </a:p>
           <a:p>
             <a:pPr>
               <a:lnSpc>
-                <a:spcPct val="108000"/>
+                <a:spcPct val="120000"/>
               </a:lnSpc>
               <a:spcBef>
                 <a:spcPts val="0"/>
@@ -7174,191 +7289,77 @@
               </a:spcAft>
             </a:pPr>
             <a:r>
-              <a:rPr sz="2300" b="0" i="0">
-                <a:solidFill>
-                  <a:srgbClr val="14171C"/>
-                </a:solidFill>
-                <a:latin typeface="Georgia"/>
-              </a:rPr>
-              <a:t>Development inequality inside countries mostly does not become wellbeing inequality</a:t>
-            </a:r>
-          </a:p>
-        </p:txBody>
-      </p:sp>
-      <p:sp>
-        <p:nvSpPr>
-          <p:cNvPr id="4" name="TextBox 3"/>
-          <p:cNvSpPr txBox="1"/>
-          <p:nvPr/>
-        </p:nvSpPr>
-        <p:spPr>
-          <a:xfrm>
-            <a:off x="566928" y="2331720"/>
-            <a:ext cx="4160520" cy="3840480"/>
-          </a:xfrm>
-          <a:prstGeom prst="rect">
-            <a:avLst/>
-          </a:prstGeom>
-          <a:noFill/>
-        </p:spPr>
-        <p:txBody>
-          <a:bodyPr wrap="square" lIns="0" rIns="0" tIns="0" bIns="0">
-            <a:spAutoFit/>
-          </a:bodyPr>
-          <a:lstStyle/>
+              <a:rPr sz="1000" b="0" i="0">
+                <a:solidFill>
+                  <a:srgbClr val="8A94A0"/>
+                </a:solidFill>
+                <a:latin typeface="Calibri"/>
+              </a:rPr>
+              <a:t>self-rated health, within countries</a:t>
+            </a:r>
+          </a:p>
+        </p:txBody>
+      </p:sp>
+      <p:sp>
+        <p:nvSpPr>
+          <p:cNvPr id="9" name="TextBox 8"/>
+          <p:cNvSpPr txBox="1"/>
+          <p:nvPr/>
+        </p:nvSpPr>
+        <p:spPr>
+          <a:xfrm>
+            <a:off x="8121700" y="5623560"/>
+            <a:ext cx="3503066" cy="914400"/>
+          </a:xfrm>
+          <a:prstGeom prst="rect">
+            <a:avLst/>
+          </a:prstGeom>
+          <a:noFill/>
+        </p:spPr>
+        <p:txBody>
+          <a:bodyPr wrap="square" lIns="0" rIns="0" tIns="0" bIns="0">
+            <a:spAutoFit/>
+          </a:bodyPr>
+          <a:lstStyle/>
+          <a:p>
+            <a:pPr>
+              <a:spcBef>
+                <a:spcPts val="0"/>
+              </a:spcBef>
+              <a:spcAft>
+                <a:spcPts val="400"/>
+              </a:spcAft>
+            </a:pPr>
+            <a:r>
+              <a:rPr sz="2200" b="0" i="0">
+                <a:solidFill>
+                  <a:srgbClr val="FCFCFB"/>
+                </a:solidFill>
+                <a:latin typeface="Consolas"/>
+              </a:rPr>
+              <a:t>11.2% vs 1.2%</a:t>
+            </a:r>
+          </a:p>
           <a:p>
             <a:pPr>
               <a:lnSpc>
-                <a:spcPct val="132000"/>
+                <a:spcPct val="120000"/>
               </a:lnSpc>
               <a:spcBef>
                 <a:spcPts val="0"/>
               </a:spcBef>
               <a:spcAft>
-                <a:spcPts val="1100"/>
-              </a:spcAft>
-            </a:pPr>
-            <a:r>
-              <a:rPr sz="1150" b="0" i="0">
-                <a:solidFill>
-                  <a:srgbClr val="5A6068"/>
+                <a:spcPts val="0"/>
+              </a:spcAft>
+            </a:pPr>
+            <a:r>
+              <a:rPr sz="1000" b="0" i="0">
+                <a:solidFill>
+                  <a:srgbClr val="8A94A0"/>
                 </a:solidFill>
                 <a:latin typeface="Calibri"/>
               </a:rPr>
-              <a:t>Below the Very High tier, countries contain multitudes. Germany's regions span 0.05 of subnational HDI; China's span 0.30 and India's 0.19 — several development tiers' worth of variation inside single countries. If regional development drove regional wellbeing, this is where it would show.</a:t>
-            </a:r>
-          </a:p>
-          <a:p>
-            <a:pPr>
-              <a:lnSpc>
-                <a:spcPct val="132000"/>
-              </a:lnSpc>
-              <a:spcBef>
-                <a:spcPts val="0"/>
-              </a:spcBef>
-              <a:spcAft>
-                <a:spcPts val="1100"/>
-              </a:spcAft>
-            </a:pPr>
-            <a:r>
-              <a:rPr sz="1150" b="0" i="0">
-                <a:solidFill>
-                  <a:srgbClr val="5A6068"/>
-                </a:solidFill>
-                <a:latin typeface="Calibri"/>
-              </a:rPr>
-              <a:t>It mostly doesn't. Holding country fixed and regressing region-mean life satisfaction on regional subnational HDI gives a significantly positive gradient in only 3 of 16 ESS countries — France, Belgium, and Germany — and the gradient is not steeper where internal inequality is larger. Which country's ladder you are on matters more than which rung you occupy within it.</a:t>
-            </a:r>
-          </a:p>
-        </p:txBody>
-      </p:sp>
-      <p:sp>
-        <p:nvSpPr>
-          <p:cNvPr id="5" name="TextBox 4"/>
-          <p:cNvSpPr txBox="1"/>
-          <p:nvPr/>
-        </p:nvSpPr>
-        <p:spPr>
-          <a:xfrm>
-            <a:off x="11338560" y="6263640"/>
-            <a:ext cx="548640" cy="274320"/>
-          </a:xfrm>
-          <a:prstGeom prst="rect">
-            <a:avLst/>
-          </a:prstGeom>
-          <a:noFill/>
-        </p:spPr>
-        <p:txBody>
-          <a:bodyPr wrap="square" lIns="0" rIns="0" tIns="0" bIns="0">
-            <a:spAutoFit/>
-          </a:bodyPr>
-          <a:lstStyle/>
-          <a:p>
-            <a:pPr algn="r">
-              <a:spcBef>
-                <a:spcPts val="0"/>
-              </a:spcBef>
-              <a:spcAft>
-                <a:spcPts val="0"/>
-              </a:spcAft>
-            </a:pPr>
-            <a:r>
-              <a:rPr sz="1100" b="0" i="0">
-                <a:solidFill>
-                  <a:srgbClr val="868D96"/>
-                </a:solidFill>
-                <a:latin typeface="Consolas"/>
-              </a:rPr>
-              <a:t>III</a:t>
-            </a:r>
-          </a:p>
-        </p:txBody>
-      </p:sp>
-      <p:pic>
-        <p:nvPicPr>
-          <p:cNvPr id="6" name="Picture 5" descr="within_country_gradient.png"/>
-          <p:cNvPicPr>
-            <a:picLocks noChangeAspect="1"/>
-          </p:cNvPicPr>
-          <p:nvPr/>
-        </p:nvPicPr>
-        <p:blipFill>
-          <a:blip r:embed="rId2"/>
-          <a:stretch>
-            <a:fillRect/>
-          </a:stretch>
-        </p:blipFill>
-        <p:spPr>
-          <a:xfrm>
-            <a:off x="5120640" y="1553033"/>
-            <a:ext cx="6537960" cy="3285590"/>
-          </a:xfrm>
-          <a:prstGeom prst="rect">
-            <a:avLst/>
-          </a:prstGeom>
-        </p:spPr>
-      </p:pic>
-      <p:sp>
-        <p:nvSpPr>
-          <p:cNvPr id="7" name="TextBox 6"/>
-          <p:cNvSpPr txBox="1"/>
-          <p:nvPr/>
-        </p:nvSpPr>
-        <p:spPr>
-          <a:xfrm>
-            <a:off x="5120640" y="5897880"/>
-            <a:ext cx="6537960" cy="731520"/>
-          </a:xfrm>
-          <a:prstGeom prst="rect">
-            <a:avLst/>
-          </a:prstGeom>
-          <a:noFill/>
-        </p:spPr>
-        <p:txBody>
-          <a:bodyPr wrap="square" lIns="0" rIns="0" tIns="0" bIns="0">
-            <a:spAutoFit/>
-          </a:bodyPr>
-          <a:lstStyle/>
-          <a:p>
-            <a:pPr>
-              <a:lnSpc>
-                <a:spcPct val="125000"/>
-              </a:lnSpc>
-              <a:spcBef>
-                <a:spcPts val="0"/>
-              </a:spcBef>
-              <a:spcAft>
-                <a:spcPts val="0"/>
-              </a:spcAft>
-            </a:pPr>
-            <a:r>
-              <a:rPr sz="900" b="0" i="0">
-                <a:solidFill>
-                  <a:srgbClr val="868D96"/>
-                </a:solidFill>
-                <a:latin typeface="Calibri"/>
-              </a:rPr>
-              <a:t>Within-country gradients of region-mean life satisfaction on regional SHDI, 16 ESS countries ordered by national HDI.</a:t>
+              <a:t>health vs education, SDG data, high-income countries</a:t>
             </a:r>
           </a:p>
         </p:txBody>
@@ -7426,7 +7427,7 @@
                 </a:solidFill>
                 <a:latin typeface="Consolas"/>
               </a:rPr>
-              <a:t>THE FLIP</a:t>
+              <a:t>WHERE THE LEVER IS</a:t>
             </a:r>
           </a:p>
         </p:txBody>
@@ -7471,7 +7472,7 @@
                 </a:solidFill>
                 <a:latin typeface="Georgia"/>
               </a:rPr>
-              <a:t>Health and social trust do inside countries what development does between them</a:t>
+              <a:t>Development inequality inside countries mostly does not become wellbeing inequality</a:t>
             </a:r>
           </a:p>
         </p:txBody>
@@ -7516,7 +7517,7 @@
                 </a:solidFill>
                 <a:latin typeface="Calibri"/>
               </a:rPr>
-              <a:t>Between countries, development leads and the two wellbeing instruments agree almost exactly: the HDI correlates at r = +0.89 with World Happiness Report happiness and +0.87 with ESS life satisfaction, with trust and health close behind and all three positive.</a:t>
+              <a:t>Below the Very High tier, countries contain multitudes. Germany's regions span 0.05 of subnational HDI; China's span 0.30 and India's 0.19 — several development tiers' worth of variation inside single countries. If regional development drove regional wellbeing, this is where it would show.</a:t>
             </a:r>
           </a:p>
           <a:p>
@@ -7538,29 +7539,7 @@
                 </a:solidFill>
                 <a:latin typeface="Calibri"/>
               </a:rPr>
-              <a:t>Within countries the ranking inverts. Development falls to a median regional correlation of +0.12, significant in 3 of 16 countries, while self-rated health holds at +0.51 (8 of 16) and social trust at +0.49 (6 of 16). The World Happiness Report cannot see this at all — it has no subnational values. It is the specific thing the ESS adds.</a:t>
-            </a:r>
-          </a:p>
-          <a:p>
-            <a:pPr>
-              <a:lnSpc>
-                <a:spcPct val="132000"/>
-              </a:lnSpc>
-              <a:spcBef>
-                <a:spcPts val="0"/>
-              </a:spcBef>
-              <a:spcAft>
-                <a:spcPts val="1100"/>
-              </a:spcAft>
-            </a:pPr>
-            <a:r>
-              <a:rPr sz="1150" b="0" i="0">
-                <a:solidFill>
-                  <a:srgbClr val="5A6068"/>
-                </a:solidFill>
-                <a:latin typeface="Calibri"/>
-              </a:rPr>
-              <a:t>Two cautions on the detail. The health-versus-trust ordering is not stable: aggregating region means across waves rather than within them reverses it, putting trust at +0.57 and health at +0.50. What is stable, under every specification we tried, is that both sit near +0.5 while development sits near zero. And per-country coverage varies sharply — Italy matches only 30% of respondents to a region, Sweden 57%, Croatia 69%, against 91–100% elsewhere. Dropping those three, or dropping regions built on fewer than 200 respondents, leaves the flip intact.</a:t>
+              <a:t>It mostly doesn't. Holding country fixed and regressing region-mean life satisfaction on regional subnational HDI gives a significantly positive gradient in only 3 of 16 ESS countries — France, Belgium, and Germany — and the gradient is not steeper where internal inequality is larger. Which country's ladder you are on matters more than which rung you occupy within it.</a:t>
             </a:r>
           </a:p>
         </p:txBody>
@@ -7609,7 +7588,7 @@
       </p:sp>
       <p:pic>
         <p:nvPicPr>
-          <p:cNvPr id="6" name="Picture 5" descr="ranking_flip.png"/>
+          <p:cNvPr id="6" name="Picture 5" descr="within_country_gradient.png"/>
           <p:cNvPicPr>
             <a:picLocks noChangeAspect="1"/>
           </p:cNvPicPr>
@@ -7623,8 +7602,8 @@
         </p:blipFill>
         <p:spPr>
           <a:xfrm>
-            <a:off x="5120640" y="1711429"/>
-            <a:ext cx="6537960" cy="2968798"/>
+            <a:off x="5120640" y="1553033"/>
+            <a:ext cx="6537960" cy="3285590"/>
           </a:xfrm>
           <a:prstGeom prst="rect">
             <a:avLst/>
@@ -7671,7 +7650,7 @@
                 </a:solidFill>
                 <a:latin typeface="Calibri"/>
               </a:rPr>
-              <a:t>Candidate Figure 2. National correlations beside within-country regional correlations, for development, health, and trust.</a:t>
+              <a:t>Within-country gradients of region-mean life satisfaction on regional SHDI, 16 ESS countries ordered by national HDI.</a:t>
             </a:r>
           </a:p>
         </p:txBody>
@@ -7739,7 +7718,7 @@
                 </a:solidFill>
                 <a:latin typeface="Consolas"/>
               </a:rPr>
-              <a:t>THE FLIP, EXTERNALLY MEASURED</a:t>
+              <a:t>THE FLIP</a:t>
             </a:r>
           </a:p>
         </p:txBody>
@@ -7784,7 +7763,7 @@
                 </a:solidFill>
                 <a:latin typeface="Georgia"/>
               </a:rPr>
-              <a:t>It survives with no self-report at all — and it is a health flip</a:t>
+              <a:t>Health and social trust do inside countries what development does between them</a:t>
             </a:r>
           </a:p>
         </p:txBody>
@@ -7829,7 +7808,7 @@
                 </a:solidFill>
                 <a:latin typeface="Calibri"/>
               </a:rPr>
-              <a:t>The strongest objection to the ranking flip is that health and trust are reported by the same respondents as the outcome. GDL's regional sub-indices remove that objection: health, education and income indices measured per region from external sources, sharing no method with the ESS.</a:t>
+              <a:t>Between countries, development leads and the two wellbeing instruments agree almost exactly: the HDI correlates at r = +0.89 with World Happiness Report happiness and +0.87 with ESS life satisfaction, with trust and health close behind and all three positive.</a:t>
             </a:r>
           </a:p>
           <a:p>
@@ -7851,7 +7830,29 @@
                 </a:solidFill>
                 <a:latin typeface="Calibri"/>
               </a:rPr>
-              <a:t>Within countries, the external health index correlates with regional life satisfaction at a median of +0.34, significant in 6 of 15 usable countries, against +0.12 for the income index and +0.06 for the education index. The domain ordering is the same one the self-reports give, from measurement the respondents never touched. Self-rated health still runs higher (+0.50), which is exactly what you expect if part — but only part — of its lead is shared method variance. One country drops out: Albania's regional health index is constant, another instance of a measure with no variance left to predict with.</a:t>
+              <a:t>Within countries the ranking inverts. Development falls to a median regional correlation of +0.12, significant in 3 of 16 countries, while self-rated health holds at +0.51 (8 of 16) and social trust at +0.49 (6 of 16). The World Happiness Report cannot see this at all — it has no subnational values. It is the specific thing the ESS adds.</a:t>
+            </a:r>
+          </a:p>
+          <a:p>
+            <a:pPr>
+              <a:lnSpc>
+                <a:spcPct val="132000"/>
+              </a:lnSpc>
+              <a:spcBef>
+                <a:spcPts val="0"/>
+              </a:spcBef>
+              <a:spcAft>
+                <a:spcPts val="1100"/>
+              </a:spcAft>
+            </a:pPr>
+            <a:r>
+              <a:rPr sz="1150" b="0" i="0">
+                <a:solidFill>
+                  <a:srgbClr val="5A6068"/>
+                </a:solidFill>
+                <a:latin typeface="Calibri"/>
+              </a:rPr>
+              <a:t>Two cautions on the detail. The health-versus-trust ordering is not stable: aggregating region means across waves rather than within them reverses it, putting trust at +0.57 and health at +0.50. What is stable, under every specification we tried, is that both sit near +0.5 while development sits near zero. And per-country coverage varies sharply — Italy matches only 30% of respondents to a region, Sweden 57%, Croatia 69%, against 91–100% elsewhere. Dropping those three, or dropping regions built on fewer than 200 respondents, leaves the flip intact.</a:t>
             </a:r>
           </a:p>
         </p:txBody>
@@ -7900,7 +7901,7 @@
       </p:sp>
       <p:pic>
         <p:nvPicPr>
-          <p:cNvPr id="6" name="Picture 5" descr="within_country_external.png"/>
+          <p:cNvPr id="6" name="Picture 5" descr="ranking_flip.png"/>
           <p:cNvPicPr>
             <a:picLocks noChangeAspect="1"/>
           </p:cNvPicPr>
@@ -7914,8 +7915,8 @@
         </p:blipFill>
         <p:spPr>
           <a:xfrm>
-            <a:off x="5120640" y="1531620"/>
-            <a:ext cx="6537960" cy="3328416"/>
+            <a:off x="5120640" y="1711429"/>
+            <a:ext cx="6537960" cy="2968798"/>
           </a:xfrm>
           <a:prstGeom prst="rect">
             <a:avLst/>
@@ -7962,7 +7963,7 @@
                 </a:solidFill>
                 <a:latin typeface="Calibri"/>
               </a:rPr>
-              <a:t>The within-country domain race with externally measured predictors (solid) beside the same-survey self-reports (faded). Sub-indices pooled 2010–2023.</a:t>
+              <a:t>Candidate Figure 2. National correlations beside within-country regional correlations, for development, health, and trust.</a:t>
             </a:r>
           </a:p>
         </p:txBody>
@@ -8002,7 +8003,7 @@
         <p:spPr>
           <a:xfrm>
             <a:off x="566928" y="502920"/>
-            <a:ext cx="8595360" cy="274320"/>
+            <a:ext cx="4160520" cy="274320"/>
           </a:xfrm>
           <a:prstGeom prst="rect">
             <a:avLst/>
@@ -8030,7 +8031,7 @@
                 </a:solidFill>
                 <a:latin typeface="Consolas"/>
               </a:rPr>
-              <a:t>ON PRIORITIES</a:t>
+              <a:t>THE FLIP, EXTERNALLY MEASURED</a:t>
             </a:r>
           </a:p>
         </p:txBody>
@@ -8044,7 +8045,7 @@
         <p:spPr>
           <a:xfrm>
             <a:off x="566928" y="914400"/>
-            <a:ext cx="8595360" cy="1371600"/>
+            <a:ext cx="4160520" cy="1371600"/>
           </a:xfrm>
           <a:prstGeom prst="rect">
             <a:avLst/>
@@ -8069,13 +8070,13 @@
               </a:spcAft>
             </a:pPr>
             <a:r>
-              <a:rPr sz="2700" b="0" i="0">
+              <a:rPr sz="2300" b="0" i="0">
                 <a:solidFill>
                   <a:srgbClr val="14171C"/>
                 </a:solidFill>
                 <a:latin typeface="Georgia"/>
               </a:rPr>
-              <a:t>Indicator dashboards are not wellbeing instruments</a:t>
+              <a:t>It survives with no self-report at all — and it is a health flip</a:t>
             </a:r>
           </a:p>
         </p:txBody>
@@ -8088,8 +8089,8 @@
         </p:nvSpPr>
         <p:spPr>
           <a:xfrm>
-            <a:off x="566928" y="2286000"/>
-            <a:ext cx="8595360" cy="3840480"/>
+            <a:off x="566928" y="2331720"/>
+            <a:ext cx="4160520" cy="3840480"/>
           </a:xfrm>
           <a:prstGeom prst="rect">
             <a:avLst/>
@@ -8114,13 +8115,13 @@
               </a:spcAft>
             </a:pPr>
             <a:r>
-              <a:rPr sz="1400" b="0" i="0">
+              <a:rPr sz="1150" b="0" i="0">
                 <a:solidFill>
                   <a:srgbClr val="5A6068"/>
                 </a:solidFill>
                 <a:latin typeface="Calibri"/>
               </a:rPr>
-              <a:t>Development indicators tell you reliably where wellbeing is high. They tell you almost nothing about when it will rise. Across every framework tested here, year-on-year indicator movement carries essentially no wellbeing information within the measurement window — a decade or so.</a:t>
+              <a:t>The strongest objection to the ranking flip is that health and trust are reported by the same respondents as the outcome. GDL's regional sub-indices remove that objection: health, education and income indices measured per region from external sources, sharing no method with the ESS.</a:t>
             </a:r>
           </a:p>
           <a:p>
@@ -8136,13 +8137,13 @@
               </a:spcAft>
             </a:pPr>
             <a:r>
-              <a:rPr sz="1400" b="0" i="0">
+              <a:rPr sz="1150" b="0" i="0">
                 <a:solidFill>
                   <a:srgbClr val="5A6068"/>
                 </a:solidFill>
                 <a:latin typeface="Calibri"/>
               </a:rPr>
-              <a:t>The implication is about horizon and instrument, not about whether development matters. A monitoring architecture designed to reward annual indicator movement should not be read as tracking wellbeing, and a government that improves its dashboard position in a given year should not expect a wellbeing dividend inside the same electoral cycle.</a:t>
+              <a:t>Within countries, the external health index correlates with regional life satisfaction at a median of +0.34, significant in 6 of 15 usable countries, against +0.12 for the income index and +0.06 for the education index. The domain ordering is the same one the self-reports give, from measurement the respondents never touched. Self-rated health still runs higher (+0.50), which is exactly what you expect if part — but only part — of its lead is shared method variance. One country drops out: Albania's regional health index is constant, another instance of a measure with no variance left to predict with.</a:t>
             </a:r>
           </a:p>
         </p:txBody>
@@ -8185,6 +8186,75 @@
                 <a:latin typeface="Consolas"/>
               </a:rPr>
               <a:t>III</a:t>
+            </a:r>
+          </a:p>
+        </p:txBody>
+      </p:sp>
+      <p:pic>
+        <p:nvPicPr>
+          <p:cNvPr id="6" name="Picture 5" descr="within_country_external.png"/>
+          <p:cNvPicPr>
+            <a:picLocks noChangeAspect="1"/>
+          </p:cNvPicPr>
+          <p:nvPr/>
+        </p:nvPicPr>
+        <p:blipFill>
+          <a:blip r:embed="rId2"/>
+          <a:stretch>
+            <a:fillRect/>
+          </a:stretch>
+        </p:blipFill>
+        <p:spPr>
+          <a:xfrm>
+            <a:off x="5120640" y="1531620"/>
+            <a:ext cx="6537960" cy="3328416"/>
+          </a:xfrm>
+          <a:prstGeom prst="rect">
+            <a:avLst/>
+          </a:prstGeom>
+        </p:spPr>
+      </p:pic>
+      <p:sp>
+        <p:nvSpPr>
+          <p:cNvPr id="7" name="TextBox 6"/>
+          <p:cNvSpPr txBox="1"/>
+          <p:nvPr/>
+        </p:nvSpPr>
+        <p:spPr>
+          <a:xfrm>
+            <a:off x="5120640" y="5897880"/>
+            <a:ext cx="6537960" cy="731520"/>
+          </a:xfrm>
+          <a:prstGeom prst="rect">
+            <a:avLst/>
+          </a:prstGeom>
+          <a:noFill/>
+        </p:spPr>
+        <p:txBody>
+          <a:bodyPr wrap="square" lIns="0" rIns="0" tIns="0" bIns="0">
+            <a:spAutoFit/>
+          </a:bodyPr>
+          <a:lstStyle/>
+          <a:p>
+            <a:pPr>
+              <a:lnSpc>
+                <a:spcPct val="125000"/>
+              </a:lnSpc>
+              <a:spcBef>
+                <a:spcPts val="0"/>
+              </a:spcBef>
+              <a:spcAft>
+                <a:spcPts val="0"/>
+              </a:spcAft>
+            </a:pPr>
+            <a:r>
+              <a:rPr sz="900" b="0" i="0">
+                <a:solidFill>
+                  <a:srgbClr val="868D96"/>
+                </a:solidFill>
+                <a:latin typeface="Calibri"/>
+              </a:rPr>
+              <a:t>The within-country domain race with externally measured predictors (solid) beside the same-survey self-reports (faded). Sub-indices pooled 2010–2023.</a:t>
             </a:r>
           </a:p>
         </p:txBody>
@@ -8252,7 +8322,7 @@
                 </a:solidFill>
                 <a:latin typeface="Consolas"/>
               </a:rPr>
-              <a:t>ON WHAT KIND OF HEALTH</a:t>
+              <a:t>ON PRIORITIES</a:t>
             </a:r>
           </a:p>
         </p:txBody>
@@ -8297,7 +8367,7 @@
                 </a:solidFill>
                 <a:latin typeface="Georgia"/>
               </a:rPr>
-              <a:t>Monitor health where it still varies, not where it has already converged</a:t>
+              <a:t>Indicator dashboards are not wellbeing instruments</a:t>
             </a:r>
           </a:p>
         </p:txBody>
@@ -8342,7 +8412,7 @@
                 </a:solidFill>
                 <a:latin typeface="Calibri"/>
               </a:rPr>
-              <a:t>Life expectancy is the standard summary of population health and the HDI's only health input, and it is the weakest of the HDI's five indicators against wellbeing. That is a measurement failure rather than a substantive one. What carries health's signal is survival at the margin — child, infant and neonatal mortality, stunting, sanitation and safe water — and, in rich countries, self-rated health, which picks up morbidity and functional limitation that life expectancy cannot see.</a:t>
+              <a:t>Development indicators tell you reliably where wellbeing is high. They tell you almost nothing about when it will rise. Across every framework tested here, year-on-year indicator movement carries essentially no wellbeing information within the measurement window — a decade or so.</a:t>
             </a:r>
           </a:p>
           <a:p>
@@ -8364,7 +8434,7 @@
                 </a:solidFill>
                 <a:latin typeface="Calibri"/>
               </a:rPr>
-              <a:t>For monitoring, that argues for retiring life expectancy as the headline wellbeing-relevant health measure in high-income settings and pairing survival indicators with a subjective health item. The ESS already fields one; most national statistical systems do too. It is close to free.</a:t>
+              <a:t>The implication is about horizon and instrument, not about whether development matters. A monitoring architecture designed to reward annual indicator movement should not be read as tracking wellbeing, and a government that improves its dashboard position in a given year should not expect a wellbeing dividend inside the same electoral cycle.</a:t>
             </a:r>
           </a:p>
         </p:txBody>
@@ -8474,7 +8544,7 @@
                 </a:solidFill>
                 <a:latin typeface="Consolas"/>
               </a:rPr>
-              <a:t>ON WHAT KIND OF EDUCATION</a:t>
+              <a:t>ON WHAT KIND OF HEALTH</a:t>
             </a:r>
           </a:p>
         </p:txBody>
@@ -8519,7 +8589,7 @@
                 </a:solidFill>
                 <a:latin typeface="Georgia"/>
               </a:rPr>
-              <a:t>The consensus moved to learning; the wellbeing evidence points at attainment</a:t>
+              <a:t>Monitor health where it still varies, not where it has already converged</a:t>
             </a:r>
           </a:p>
         </p:txBody>
@@ -8564,7 +8634,7 @@
                 </a:solidFill>
                 <a:latin typeface="Calibri"/>
               </a:rPr>
-              <a:t>Global education policy has shifted decisively over the past decade from schooling to learning — the learning-crisis framing, learning-poverty targets, and an indicator architecture built around measured proficiency. The premise is that years in school without demonstrated learning are an empty metric.</a:t>
+              <a:t>Life expectancy is the standard summary of population health and the HDI's only health input, and it is the weakest of the HDI's five indicators against wellbeing. That is a measurement failure rather than a substantive one. What carries health's signal is survival at the margin — child, infant and neonatal mortality, stunting, sanitation and safe water — and, in rich countries, self-rated health, which picks up morbidity and functional limitation that life expectancy cannot see.</a:t>
             </a:r>
           </a:p>
           <a:p>
@@ -8586,7 +8656,7 @@
                 </a:solidFill>
                 <a:latin typeface="Calibri"/>
               </a:rPr>
-              <a:t>Every level of aggregation we can test points the other way. Attainment and access carry the signal — 12.7% for SDG4 access, 40.7% and 34.0% for the HDI's schooling components, 32 of 36 countries at the individual level — while measured learning outcomes sit at 0.9% and parity ratios at 2.5%. The caution from Act II applies: education is the most consistent signal and the smallest one.</a:t>
+              <a:t>For monitoring, that argues for retiring life expectancy as the headline wellbeing-relevant health measure in high-income settings and pairing survival indicators with a subjective health item. The ESS already fields one; most national statistical systems do too. It is close to free.</a:t>
             </a:r>
           </a:p>
         </p:txBody>
@@ -8696,7 +8766,7 @@
                 </a:solidFill>
                 <a:latin typeface="Consolas"/>
               </a:rPr>
-              <a:t>WHAT WE CANNOT SAY</a:t>
+              <a:t>ON WHAT KIND OF EDUCATION</a:t>
             </a:r>
           </a:p>
         </p:txBody>
@@ -8741,7 +8811,7 @@
                 </a:solidFill>
                 <a:latin typeface="Georgia"/>
               </a:rPr>
-              <a:t>Three limits that keep this a question rather than a recommendation</a:t>
+              <a:t>The consensus moved to learning; the wellbeing evidence points at attainment</a:t>
             </a:r>
           </a:p>
         </p:txBody>
@@ -8786,7 +8856,7 @@
                 </a:solidFill>
                 <a:latin typeface="Calibri"/>
               </a:rPr>
-              <a:t>None of this is causal. The design is correlational throughout, and the levels results in particular are cross-sectional comparisons between countries.</a:t>
+              <a:t>Global education policy has shifted decisively over the past decade from schooling to learning — the learning-crisis framing, learning-poverty targets, and an indicator architecture built around measured proficiency. The premise is that years in school without demonstrated learning are an empty metric.</a:t>
             </a:r>
           </a:p>
           <a:p>
@@ -8808,51 +8878,7 @@
                 </a:solidFill>
                 <a:latin typeface="Calibri"/>
               </a:rPr>
-              <a:t>Schooling cannot be separated from what schooling stands in for. Years attained proxy labour-market position, economic security, autonomy, and social standing, and this design cannot pull them apart. Individual effects are small: a median R² near 0.01.</a:t>
-            </a:r>
-          </a:p>
-          <a:p>
-            <a:pPr>
-              <a:lnSpc>
-                <a:spcPct val="132000"/>
-              </a:lnSpc>
-              <a:spcBef>
-                <a:spcPts val="0"/>
-              </a:spcBef>
-              <a:spcAft>
-                <a:spcPts val="1100"/>
-              </a:spcAft>
-            </a:pPr>
-            <a:r>
-              <a:rPr sz="1400" b="0" i="0">
-                <a:solidFill>
-                  <a:srgbClr val="5A6068"/>
-                </a:solidFill>
-                <a:latin typeface="Calibri"/>
-              </a:rPr>
-              <a:t>The within-country results are Europe-only. The ESS is the only regional wellbeing source with the coverage this design needs — Gallup's subnational files are paywalled — so the priorities argument generalises across 16 European countries and not beyond them. That belongs in the text as a scope condition, not buried in a limitations paragraph, because the ranking flip is the most policy-relevant result here and will be the most contested.</a:t>
-            </a:r>
-          </a:p>
-          <a:p>
-            <a:pPr>
-              <a:lnSpc>
-                <a:spcPct val="132000"/>
-              </a:lnSpc>
-              <a:spcBef>
-                <a:spcPts val="0"/>
-              </a:spcBef>
-              <a:spcAft>
-                <a:spcPts val="1100"/>
-              </a:spcAft>
-            </a:pPr>
-            <a:r>
-              <a:rPr sz="1400" b="0" i="0">
-                <a:solidFill>
-                  <a:srgbClr val="5A6068"/>
-                </a:solidFill>
-                <a:latin typeface="Calibri"/>
-              </a:rPr>
-              <a:t>Some of the parity and learning indicators' weakness is coverage rather than construct — they are the youngest and thinnest series in the SDG database, and thin series fail significance tests for uninteresting reasons. The commentary should concede this explicitly and say what would settle it.</a:t>
+              <a:t>Every level of aggregation we can test points the other way. Attainment and access carry the signal — 12.7% for SDG4 access, 40.7% and 34.0% for the HDI's schooling components, 32 of 36 countries at the individual level — while measured learning outcomes sit at 0.9% and parity ratios at 2.5%. The caution from Act II applies: education is the most consistent signal and the smallest one.</a:t>
             </a:r>
           </a:p>
         </p:txBody>
@@ -8962,7 +8988,7 @@
                 </a:solidFill>
                 <a:latin typeface="Consolas"/>
               </a:rPr>
-              <a:t>THE ASK</a:t>
+              <a:t>WHAT WE CANNOT SAY</a:t>
             </a:r>
           </a:p>
         </p:txBody>
@@ -9007,7 +9033,7 @@
                 </a:solidFill>
                 <a:latin typeface="Georgia"/>
               </a:rPr>
-              <a:t>Should wellbeing be a criterion for how we measure development after 2030?</a:t>
+              <a:t>Three limits that keep this a question rather than a recommendation</a:t>
             </a:r>
           </a:p>
         </p:txBody>
@@ -9052,7 +9078,7 @@
                 </a:solidFill>
                 <a:latin typeface="Calibri"/>
               </a:rPr>
-              <a:t>That is the question the commentary exists to pose, and it has a sharp form. Two of the most consequential domains in development are monitored through variables that have either run out of variance or measure a different construct from the one the policy debate is about: health through life expectancy, education through parity and proficiency. If wellbeing is to be a criterion for the post-2030 architecture at all, the first question is not which domain to prioritise but whether each domain is being measured somewhere it can still move.</a:t>
+              <a:t>None of this is causal. The design is correlational throughout, and the levels results in particular are cross-sectional comparisons between countries.</a:t>
             </a:r>
           </a:p>
           <a:p>
@@ -9074,7 +9100,51 @@
                 </a:solidFill>
                 <a:latin typeface="Calibri"/>
               </a:rPr>
-              <a:t>A commentary cannot settle that. It can put the disagreement on the record with the evidence attached, which is what the three acts are for.</a:t>
+              <a:t>Schooling cannot be separated from what schooling stands in for. Years attained proxy labour-market position, economic security, autonomy, and social standing, and this design cannot pull them apart. Individual effects are small: a median R² near 0.01.</a:t>
+            </a:r>
+          </a:p>
+          <a:p>
+            <a:pPr>
+              <a:lnSpc>
+                <a:spcPct val="132000"/>
+              </a:lnSpc>
+              <a:spcBef>
+                <a:spcPts val="0"/>
+              </a:spcBef>
+              <a:spcAft>
+                <a:spcPts val="1100"/>
+              </a:spcAft>
+            </a:pPr>
+            <a:r>
+              <a:rPr sz="1400" b="0" i="0">
+                <a:solidFill>
+                  <a:srgbClr val="5A6068"/>
+                </a:solidFill>
+                <a:latin typeface="Calibri"/>
+              </a:rPr>
+              <a:t>The within-country results are Europe-only. The ESS is the only regional wellbeing source with the coverage this design needs — Gallup's subnational files are paywalled — so the priorities argument generalises across 16 European countries and not beyond them. That belongs in the text as a scope condition, not buried in a limitations paragraph, because the ranking flip is the most policy-relevant result here and will be the most contested.</a:t>
+            </a:r>
+          </a:p>
+          <a:p>
+            <a:pPr>
+              <a:lnSpc>
+                <a:spcPct val="132000"/>
+              </a:lnSpc>
+              <a:spcBef>
+                <a:spcPts val="0"/>
+              </a:spcBef>
+              <a:spcAft>
+                <a:spcPts val="1100"/>
+              </a:spcAft>
+            </a:pPr>
+            <a:r>
+              <a:rPr sz="1400" b="0" i="0">
+                <a:solidFill>
+                  <a:srgbClr val="5A6068"/>
+                </a:solidFill>
+                <a:latin typeface="Calibri"/>
+              </a:rPr>
+              <a:t>Some of the parity and learning indicators' weakness is coverage rather than construct — they are the youngest and thinnest series in the SDG database, and thin series fail significance tests for uninteresting reasons. The commentary should concede this explicitly and say what would settle it.</a:t>
             </a:r>
           </a:p>
         </p:txBody>
@@ -9130,6 +9200,228 @@
 </file>
 
 <file path=ppt/slides/slide28.xml><?xml version="1.0" encoding="utf-8"?>
+<p:sld xmlns:a="http://schemas.openxmlformats.org/drawingml/2006/main" xmlns:p="http://schemas.openxmlformats.org/presentationml/2006/main" xmlns:r="http://schemas.openxmlformats.org/officeDocument/2006/relationships">
+  <p:cSld>
+    <p:bg>
+      <p:bgPr>
+        <a:solidFill>
+          <a:srgbClr val="FCFCFB"/>
+        </a:solidFill>
+        <a:effectLst/>
+      </p:bgPr>
+    </p:bg>
+    <p:spTree>
+      <p:nvGrpSpPr>
+        <p:cNvPr id="1" name=""/>
+        <p:cNvGrpSpPr/>
+        <p:nvPr/>
+      </p:nvGrpSpPr>
+      <p:grpSpPr/>
+      <p:sp>
+        <p:nvSpPr>
+          <p:cNvPr id="2" name="TextBox 1"/>
+          <p:cNvSpPr txBox="1"/>
+          <p:nvPr/>
+        </p:nvSpPr>
+        <p:spPr>
+          <a:xfrm>
+            <a:off x="566928" y="502920"/>
+            <a:ext cx="8595360" cy="274320"/>
+          </a:xfrm>
+          <a:prstGeom prst="rect">
+            <a:avLst/>
+          </a:prstGeom>
+          <a:noFill/>
+        </p:spPr>
+        <p:txBody>
+          <a:bodyPr wrap="square" lIns="0" rIns="0" tIns="0" bIns="0">
+            <a:spAutoFit/>
+          </a:bodyPr>
+          <a:lstStyle/>
+          <a:p>
+            <a:pPr>
+              <a:spcBef>
+                <a:spcPts val="0"/>
+              </a:spcBef>
+              <a:spcAft>
+                <a:spcPts val="0"/>
+              </a:spcAft>
+            </a:pPr>
+            <a:r>
+              <a:rPr sz="1000" b="0" i="0">
+                <a:solidFill>
+                  <a:srgbClr val="A63A30"/>
+                </a:solidFill>
+                <a:latin typeface="Consolas"/>
+              </a:rPr>
+              <a:t>THE ASK</a:t>
+            </a:r>
+          </a:p>
+        </p:txBody>
+      </p:sp>
+      <p:sp>
+        <p:nvSpPr>
+          <p:cNvPr id="3" name="TextBox 2"/>
+          <p:cNvSpPr txBox="1"/>
+          <p:nvPr/>
+        </p:nvSpPr>
+        <p:spPr>
+          <a:xfrm>
+            <a:off x="566928" y="914400"/>
+            <a:ext cx="8595360" cy="1371600"/>
+          </a:xfrm>
+          <a:prstGeom prst="rect">
+            <a:avLst/>
+          </a:prstGeom>
+          <a:noFill/>
+        </p:spPr>
+        <p:txBody>
+          <a:bodyPr wrap="square" lIns="0" rIns="0" tIns="0" bIns="0">
+            <a:spAutoFit/>
+          </a:bodyPr>
+          <a:lstStyle/>
+          <a:p>
+            <a:pPr>
+              <a:lnSpc>
+                <a:spcPct val="108000"/>
+              </a:lnSpc>
+              <a:spcBef>
+                <a:spcPts val="0"/>
+              </a:spcBef>
+              <a:spcAft>
+                <a:spcPts val="0"/>
+              </a:spcAft>
+            </a:pPr>
+            <a:r>
+              <a:rPr sz="2700" b="0" i="0">
+                <a:solidFill>
+                  <a:srgbClr val="14171C"/>
+                </a:solidFill>
+                <a:latin typeface="Georgia"/>
+              </a:rPr>
+              <a:t>Should wellbeing be a criterion for how we measure development after 2030?</a:t>
+            </a:r>
+          </a:p>
+        </p:txBody>
+      </p:sp>
+      <p:sp>
+        <p:nvSpPr>
+          <p:cNvPr id="4" name="TextBox 3"/>
+          <p:cNvSpPr txBox="1"/>
+          <p:nvPr/>
+        </p:nvSpPr>
+        <p:spPr>
+          <a:xfrm>
+            <a:off x="566928" y="2286000"/>
+            <a:ext cx="8595360" cy="3840480"/>
+          </a:xfrm>
+          <a:prstGeom prst="rect">
+            <a:avLst/>
+          </a:prstGeom>
+          <a:noFill/>
+        </p:spPr>
+        <p:txBody>
+          <a:bodyPr wrap="square" lIns="0" rIns="0" tIns="0" bIns="0">
+            <a:spAutoFit/>
+          </a:bodyPr>
+          <a:lstStyle/>
+          <a:p>
+            <a:pPr>
+              <a:lnSpc>
+                <a:spcPct val="132000"/>
+              </a:lnSpc>
+              <a:spcBef>
+                <a:spcPts val="0"/>
+              </a:spcBef>
+              <a:spcAft>
+                <a:spcPts val="1100"/>
+              </a:spcAft>
+            </a:pPr>
+            <a:r>
+              <a:rPr sz="1400" b="0" i="0">
+                <a:solidFill>
+                  <a:srgbClr val="5A6068"/>
+                </a:solidFill>
+                <a:latin typeface="Calibri"/>
+              </a:rPr>
+              <a:t>That is the question the commentary exists to pose, and it has a sharp form. Two of the most consequential domains in development are monitored through variables that have either run out of variance or measure a different construct from the one the policy debate is about: health through life expectancy, education through parity and proficiency. If wellbeing is to be a criterion for the post-2030 architecture at all, the first question is not which domain to prioritise but whether each domain is being measured somewhere it can still move.</a:t>
+            </a:r>
+          </a:p>
+          <a:p>
+            <a:pPr>
+              <a:lnSpc>
+                <a:spcPct val="132000"/>
+              </a:lnSpc>
+              <a:spcBef>
+                <a:spcPts val="0"/>
+              </a:spcBef>
+              <a:spcAft>
+                <a:spcPts val="1100"/>
+              </a:spcAft>
+            </a:pPr>
+            <a:r>
+              <a:rPr sz="1400" b="0" i="0">
+                <a:solidFill>
+                  <a:srgbClr val="5A6068"/>
+                </a:solidFill>
+                <a:latin typeface="Calibri"/>
+              </a:rPr>
+              <a:t>A commentary cannot settle that. It can put the disagreement on the record with the evidence attached, which is what the three acts are for.</a:t>
+            </a:r>
+          </a:p>
+        </p:txBody>
+      </p:sp>
+      <p:sp>
+        <p:nvSpPr>
+          <p:cNvPr id="5" name="TextBox 4"/>
+          <p:cNvSpPr txBox="1"/>
+          <p:nvPr/>
+        </p:nvSpPr>
+        <p:spPr>
+          <a:xfrm>
+            <a:off x="11338560" y="6263640"/>
+            <a:ext cx="548640" cy="274320"/>
+          </a:xfrm>
+          <a:prstGeom prst="rect">
+            <a:avLst/>
+          </a:prstGeom>
+          <a:noFill/>
+        </p:spPr>
+        <p:txBody>
+          <a:bodyPr wrap="square" lIns="0" rIns="0" tIns="0" bIns="0">
+            <a:spAutoFit/>
+          </a:bodyPr>
+          <a:lstStyle/>
+          <a:p>
+            <a:pPr algn="r">
+              <a:spcBef>
+                <a:spcPts val="0"/>
+              </a:spcBef>
+              <a:spcAft>
+                <a:spcPts val="0"/>
+              </a:spcAft>
+            </a:pPr>
+            <a:r>
+              <a:rPr sz="1100" b="0" i="0">
+                <a:solidFill>
+                  <a:srgbClr val="868D96"/>
+                </a:solidFill>
+                <a:latin typeface="Consolas"/>
+              </a:rPr>
+              <a:t>III</a:t>
+            </a:r>
+          </a:p>
+        </p:txBody>
+      </p:sp>
+    </p:spTree>
+  </p:cSld>
+  <p:clrMapOvr>
+    <a:masterClrMapping/>
+  </p:clrMapOvr>
+</p:sld>
+</file>
+
+<file path=ppt/slides/slide29.xml><?xml version="1.0" encoding="utf-8"?>
 <p:sld xmlns:a="http://schemas.openxmlformats.org/drawingml/2006/main" xmlns:p="http://schemas.openxmlformats.org/presentationml/2006/main" xmlns:r="http://schemas.openxmlformats.org/officeDocument/2006/relationships">
   <p:cSld>
     <p:bg>
@@ -9274,633 +9566,6 @@
                 <a:latin typeface="Georgia"/>
               </a:rPr>
               <a:t>The recommended framing for submission: lead with the education exception as the positive finding, use the generalised collapse as the backdrop that makes it surprising, and close on the target-setting question. That ordering makes Act I load-bearing without making it the story.</a:t>
-            </a:r>
-          </a:p>
-        </p:txBody>
-      </p:sp>
-    </p:spTree>
-  </p:cSld>
-  <p:clrMapOvr>
-    <a:masterClrMapping/>
-  </p:clrMapOvr>
-</p:sld>
-</file>
-
-<file path=ppt/slides/slide29.xml><?xml version="1.0" encoding="utf-8"?>
-<p:sld xmlns:a="http://schemas.openxmlformats.org/drawingml/2006/main" xmlns:p="http://schemas.openxmlformats.org/presentationml/2006/main" xmlns:r="http://schemas.openxmlformats.org/officeDocument/2006/relationships">
-  <p:cSld>
-    <p:bg>
-      <p:bgPr>
-        <a:solidFill>
-          <a:srgbClr val="FCFCFB"/>
-        </a:solidFill>
-        <a:effectLst/>
-      </p:bgPr>
-    </p:bg>
-    <p:spTree>
-      <p:nvGrpSpPr>
-        <p:cNvPr id="1" name=""/>
-        <p:cNvGrpSpPr/>
-        <p:nvPr/>
-      </p:nvGrpSpPr>
-      <p:grpSpPr/>
-      <p:sp>
-        <p:nvSpPr>
-          <p:cNvPr id="2" name="TextBox 1"/>
-          <p:cNvSpPr txBox="1"/>
-          <p:nvPr/>
-        </p:nvSpPr>
-        <p:spPr>
-          <a:xfrm>
-            <a:off x="566928" y="502920"/>
-            <a:ext cx="8229600" cy="822960"/>
-          </a:xfrm>
-          <a:prstGeom prst="rect">
-            <a:avLst/>
-          </a:prstGeom>
-          <a:noFill/>
-        </p:spPr>
-        <p:txBody>
-          <a:bodyPr wrap="square" lIns="0" rIns="0" tIns="0" bIns="0">
-            <a:spAutoFit/>
-          </a:bodyPr>
-          <a:lstStyle/>
-          <a:p>
-            <a:pPr>
-              <a:spcBef>
-                <a:spcPts val="0"/>
-              </a:spcBef>
-              <a:spcAft>
-                <a:spcPts val="600"/>
-              </a:spcAft>
-            </a:pPr>
-            <a:r>
-              <a:rPr sz="3200" b="0" i="0">
-                <a:solidFill>
-                  <a:srgbClr val="14171C"/>
-                </a:solidFill>
-                <a:latin typeface="Georgia"/>
-              </a:rPr>
-              <a:t>Decisions for the team</a:t>
-            </a:r>
-          </a:p>
-          <a:p>
-            <a:pPr>
-              <a:spcBef>
-                <a:spcPts val="0"/>
-              </a:spcBef>
-              <a:spcAft>
-                <a:spcPts val="0"/>
-              </a:spcAft>
-            </a:pPr>
-            <a:r>
-              <a:rPr sz="1300" b="0" i="0">
-                <a:solidFill>
-                  <a:srgbClr val="5A6068"/>
-                </a:solidFill>
-                <a:latin typeface="Calibri"/>
-              </a:rPr>
-              <a:t>Five things the acts do not settle, in the order they block drafting.</a:t>
-            </a:r>
-          </a:p>
-        </p:txBody>
-      </p:sp>
-      <p:sp>
-        <p:nvSpPr>
-          <p:cNvPr id="3" name="Rectangle 2"/>
-          <p:cNvSpPr/>
-          <p:nvPr/>
-        </p:nvSpPr>
-        <p:spPr>
-          <a:xfrm>
-            <a:off x="566928" y="1828800"/>
-            <a:ext cx="3472586" cy="25400"/>
-          </a:xfrm>
-          <a:prstGeom prst="rect">
-            <a:avLst/>
-          </a:prstGeom>
-          <a:solidFill>
-            <a:srgbClr val="17549E"/>
-          </a:solidFill>
-          <a:ln>
-            <a:noFill/>
-          </a:ln>
-          <a:effectLst/>
-        </p:spPr>
-        <p:style>
-          <a:lnRef idx="1">
-            <a:schemeClr val="accent1"/>
-          </a:lnRef>
-          <a:fillRef idx="3">
-            <a:schemeClr val="accent1"/>
-          </a:fillRef>
-          <a:effectRef idx="2">
-            <a:schemeClr val="accent1"/>
-          </a:effectRef>
-          <a:fontRef idx="minor">
-            <a:schemeClr val="lt1"/>
-          </a:fontRef>
-        </p:style>
-        <p:txBody>
-          <a:bodyPr rtlCol="0" anchor="ctr"/>
-          <a:lstStyle/>
-          <a:p>
-            <a:pPr algn="ctr"/>
-          </a:p>
-        </p:txBody>
-      </p:sp>
-      <p:sp>
-        <p:nvSpPr>
-          <p:cNvPr id="4" name="TextBox 3"/>
-          <p:cNvSpPr txBox="1"/>
-          <p:nvPr/>
-        </p:nvSpPr>
-        <p:spPr>
-          <a:xfrm>
-            <a:off x="566928" y="2011680"/>
-            <a:ext cx="3472586" cy="1828800"/>
-          </a:xfrm>
-          <a:prstGeom prst="rect">
-            <a:avLst/>
-          </a:prstGeom>
-          <a:noFill/>
-        </p:spPr>
-        <p:txBody>
-          <a:bodyPr wrap="square" lIns="0" rIns="0" tIns="0" bIns="0">
-            <a:spAutoFit/>
-          </a:bodyPr>
-          <a:lstStyle/>
-          <a:p>
-            <a:pPr>
-              <a:spcBef>
-                <a:spcPts val="0"/>
-              </a:spcBef>
-              <a:spcAft>
-                <a:spcPts val="700"/>
-              </a:spcAft>
-            </a:pPr>
-            <a:r>
-              <a:rPr sz="1050" b="0" i="0">
-                <a:solidFill>
-                  <a:srgbClr val="17549E"/>
-                </a:solidFill>
-                <a:latin typeface="Consolas"/>
-              </a:rPr>
-              <a:t>FRAMING</a:t>
-            </a:r>
-          </a:p>
-          <a:p>
-            <a:pPr>
-              <a:lnSpc>
-                <a:spcPct val="130000"/>
-              </a:lnSpc>
-              <a:spcBef>
-                <a:spcPts val="0"/>
-              </a:spcBef>
-              <a:spcAft>
-                <a:spcPts val="0"/>
-              </a:spcAft>
-            </a:pPr>
-            <a:r>
-              <a:rPr sz="1100" b="0" i="0">
-                <a:solidFill>
-                  <a:srgbClr val="5A6068"/>
-                </a:solidFill>
-                <a:latin typeface="Calibri"/>
-              </a:rPr>
-              <a:t>Lead with the education exception and use the generalised collapse as Act I backdrop — recommended — or lead with the robustness result and treat education as the coda. This decides title, abstract, and venue.</a:t>
-            </a:r>
-          </a:p>
-        </p:txBody>
-      </p:sp>
-      <p:sp>
-        <p:nvSpPr>
-          <p:cNvPr id="5" name="Rectangle 4"/>
-          <p:cNvSpPr/>
-          <p:nvPr/>
-        </p:nvSpPr>
-        <p:spPr>
-          <a:xfrm>
-            <a:off x="4359554" y="1828800"/>
-            <a:ext cx="3472586" cy="25400"/>
-          </a:xfrm>
-          <a:prstGeom prst="rect">
-            <a:avLst/>
-          </a:prstGeom>
-          <a:solidFill>
-            <a:srgbClr val="17549E"/>
-          </a:solidFill>
-          <a:ln>
-            <a:noFill/>
-          </a:ln>
-          <a:effectLst/>
-        </p:spPr>
-        <p:style>
-          <a:lnRef idx="1">
-            <a:schemeClr val="accent1"/>
-          </a:lnRef>
-          <a:fillRef idx="3">
-            <a:schemeClr val="accent1"/>
-          </a:fillRef>
-          <a:effectRef idx="2">
-            <a:schemeClr val="accent1"/>
-          </a:effectRef>
-          <a:fontRef idx="minor">
-            <a:schemeClr val="lt1"/>
-          </a:fontRef>
-        </p:style>
-        <p:txBody>
-          <a:bodyPr rtlCol="0" anchor="ctr"/>
-          <a:lstStyle/>
-          <a:p>
-            <a:pPr algn="ctr"/>
-          </a:p>
-        </p:txBody>
-      </p:sp>
-      <p:sp>
-        <p:nvSpPr>
-          <p:cNvPr id="6" name="TextBox 5"/>
-          <p:cNvSpPr txBox="1"/>
-          <p:nvPr/>
-        </p:nvSpPr>
-        <p:spPr>
-          <a:xfrm>
-            <a:off x="4359554" y="2011680"/>
-            <a:ext cx="3472586" cy="1828800"/>
-          </a:xfrm>
-          <a:prstGeom prst="rect">
-            <a:avLst/>
-          </a:prstGeom>
-          <a:noFill/>
-        </p:spPr>
-        <p:txBody>
-          <a:bodyPr wrap="square" lIns="0" rIns="0" tIns="0" bIns="0">
-            <a:spAutoFit/>
-          </a:bodyPr>
-          <a:lstStyle/>
-          <a:p>
-            <a:pPr>
-              <a:spcBef>
-                <a:spcPts val="0"/>
-              </a:spcBef>
-              <a:spcAft>
-                <a:spcPts val="700"/>
-              </a:spcAft>
-            </a:pPr>
-            <a:r>
-              <a:rPr sz="1050" b="0" i="0">
-                <a:solidFill>
-                  <a:srgbClr val="17549E"/>
-                </a:solidFill>
-                <a:latin typeface="Consolas"/>
-              </a:rPr>
-              <a:t>DISPLAY ITEMS</a:t>
-            </a:r>
-          </a:p>
-          <a:p>
-            <a:pPr>
-              <a:lnSpc>
-                <a:spcPct val="130000"/>
-              </a:lnSpc>
-              <a:spcBef>
-                <a:spcPts val="0"/>
-              </a:spcBef>
-              <a:spcAft>
-                <a:spcPts val="0"/>
-              </a:spcAft>
-            </a:pPr>
-            <a:r>
-              <a:rPr sz="1100" b="0" i="0">
-                <a:solidFill>
-                  <a:srgbClr val="5A6068"/>
-                </a:solidFill>
-                <a:latin typeface="Calibri"/>
-              </a:rPr>
-              <a:t>Commentaries allow one or two. Proposed: the three-panel composite as Figure 1, the ranking flip as Figure 2. Everything else moves to supplementary.</a:t>
-            </a:r>
-          </a:p>
-        </p:txBody>
-      </p:sp>
-      <p:sp>
-        <p:nvSpPr>
-          <p:cNvPr id="7" name="Rectangle 6"/>
-          <p:cNvSpPr/>
-          <p:nvPr/>
-        </p:nvSpPr>
-        <p:spPr>
-          <a:xfrm>
-            <a:off x="8152180" y="1828800"/>
-            <a:ext cx="3472586" cy="25400"/>
-          </a:xfrm>
-          <a:prstGeom prst="rect">
-            <a:avLst/>
-          </a:prstGeom>
-          <a:solidFill>
-            <a:srgbClr val="17549E"/>
-          </a:solidFill>
-          <a:ln>
-            <a:noFill/>
-          </a:ln>
-          <a:effectLst/>
-        </p:spPr>
-        <p:style>
-          <a:lnRef idx="1">
-            <a:schemeClr val="accent1"/>
-          </a:lnRef>
-          <a:fillRef idx="3">
-            <a:schemeClr val="accent1"/>
-          </a:fillRef>
-          <a:effectRef idx="2">
-            <a:schemeClr val="accent1"/>
-          </a:effectRef>
-          <a:fontRef idx="minor">
-            <a:schemeClr val="lt1"/>
-          </a:fontRef>
-        </p:style>
-        <p:txBody>
-          <a:bodyPr rtlCol="0" anchor="ctr"/>
-          <a:lstStyle/>
-          <a:p>
-            <a:pPr algn="ctr"/>
-          </a:p>
-        </p:txBody>
-      </p:sp>
-      <p:sp>
-        <p:nvSpPr>
-          <p:cNvPr id="8" name="TextBox 7"/>
-          <p:cNvSpPr txBox="1"/>
-          <p:nvPr/>
-        </p:nvSpPr>
-        <p:spPr>
-          <a:xfrm>
-            <a:off x="8152180" y="2011680"/>
-            <a:ext cx="3472586" cy="1828800"/>
-          </a:xfrm>
-          <a:prstGeom prst="rect">
-            <a:avLst/>
-          </a:prstGeom>
-          <a:noFill/>
-        </p:spPr>
-        <p:txBody>
-          <a:bodyPr wrap="square" lIns="0" rIns="0" tIns="0" bIns="0">
-            <a:spAutoFit/>
-          </a:bodyPr>
-          <a:lstStyle/>
-          <a:p>
-            <a:pPr>
-              <a:spcBef>
-                <a:spcPts val="0"/>
-              </a:spcBef>
-              <a:spcAft>
-                <a:spcPts val="700"/>
-              </a:spcAft>
-            </a:pPr>
-            <a:r>
-              <a:rPr sz="1050" b="0" i="0">
-                <a:solidFill>
-                  <a:srgbClr val="17549E"/>
-                </a:solidFill>
-                <a:latin typeface="Consolas"/>
-              </a:rPr>
-              <a:t>SCOPE OF THE WITHIN-COUNTRY WORK</a:t>
-            </a:r>
-          </a:p>
-          <a:p>
-            <a:pPr>
-              <a:lnSpc>
-                <a:spcPct val="130000"/>
-              </a:lnSpc>
-              <a:spcBef>
-                <a:spcPts val="0"/>
-              </a:spcBef>
-              <a:spcAft>
-                <a:spcPts val="0"/>
-              </a:spcAft>
-            </a:pPr>
-            <a:r>
-              <a:rPr sz="1100" b="0" i="0">
-                <a:solidFill>
-                  <a:srgbClr val="5A6068"/>
-                </a:solidFill>
-                <a:latin typeface="Calibri"/>
-              </a:rPr>
-              <a:t>It now sits inside Act III as the evidence on priorities. Does it belong there, or in a third paper? It is the most policy-relevant and the most contested result we have, and it is Europe-only.</a:t>
-            </a:r>
-          </a:p>
-        </p:txBody>
-      </p:sp>
-      <p:sp>
-        <p:nvSpPr>
-          <p:cNvPr id="9" name="Rectangle 8"/>
-          <p:cNvSpPr/>
-          <p:nvPr/>
-        </p:nvSpPr>
-        <p:spPr>
-          <a:xfrm>
-            <a:off x="566928" y="4069080"/>
-            <a:ext cx="3472586" cy="25400"/>
-          </a:xfrm>
-          <a:prstGeom prst="rect">
-            <a:avLst/>
-          </a:prstGeom>
-          <a:solidFill>
-            <a:srgbClr val="17549E"/>
-          </a:solidFill>
-          <a:ln>
-            <a:noFill/>
-          </a:ln>
-          <a:effectLst/>
-        </p:spPr>
-        <p:style>
-          <a:lnRef idx="1">
-            <a:schemeClr val="accent1"/>
-          </a:lnRef>
-          <a:fillRef idx="3">
-            <a:schemeClr val="accent1"/>
-          </a:fillRef>
-          <a:effectRef idx="2">
-            <a:schemeClr val="accent1"/>
-          </a:effectRef>
-          <a:fontRef idx="minor">
-            <a:schemeClr val="lt1"/>
-          </a:fontRef>
-        </p:style>
-        <p:txBody>
-          <a:bodyPr rtlCol="0" anchor="ctr"/>
-          <a:lstStyle/>
-          <a:p>
-            <a:pPr algn="ctr"/>
-          </a:p>
-        </p:txBody>
-      </p:sp>
-      <p:sp>
-        <p:nvSpPr>
-          <p:cNvPr id="10" name="TextBox 9"/>
-          <p:cNvSpPr txBox="1"/>
-          <p:nvPr/>
-        </p:nvSpPr>
-        <p:spPr>
-          <a:xfrm>
-            <a:off x="566928" y="4251960"/>
-            <a:ext cx="3472586" cy="1828800"/>
-          </a:xfrm>
-          <a:prstGeom prst="rect">
-            <a:avLst/>
-          </a:prstGeom>
-          <a:noFill/>
-        </p:spPr>
-        <p:txBody>
-          <a:bodyPr wrap="square" lIns="0" rIns="0" tIns="0" bIns="0">
-            <a:spAutoFit/>
-          </a:bodyPr>
-          <a:lstStyle/>
-          <a:p>
-            <a:pPr>
-              <a:spcBef>
-                <a:spcPts val="0"/>
-              </a:spcBef>
-              <a:spcAft>
-                <a:spcPts val="700"/>
-              </a:spcAft>
-            </a:pPr>
-            <a:r>
-              <a:rPr sz="1050" b="0" i="0">
-                <a:solidFill>
-                  <a:srgbClr val="17549E"/>
-                </a:solidFill>
-                <a:latin typeface="Consolas"/>
-              </a:rPr>
-              <a:t>RESOLVED: SUBNATIONAL SUB-INDICES</a:t>
-            </a:r>
-          </a:p>
-          <a:p>
-            <a:pPr>
-              <a:lnSpc>
-                <a:spcPct val="130000"/>
-              </a:lnSpc>
-              <a:spcBef>
-                <a:spcPts val="0"/>
-              </a:spcBef>
-              <a:spcAft>
-                <a:spcPts val="0"/>
-              </a:spcAft>
-            </a:pPr>
-            <a:r>
-              <a:rPr sz="1100" b="0" i="0">
-                <a:solidFill>
-                  <a:srgbClr val="5A6068"/>
-                </a:solidFill>
-                <a:latin typeface="Calibri"/>
-              </a:rPr>
-              <a:t>The per-domain GDL exports are in. Within countries the external health index leads education and income (+0.34 vs +0.06 and +0.12), so the flip no longer rests on self-report. GDL's DHS-based Education &amp; Work and Health datasets were also examined: they cover only 6 ESS countries and cannot serve the European design.</a:t>
-            </a:r>
-          </a:p>
-        </p:txBody>
-      </p:sp>
-      <p:sp>
-        <p:nvSpPr>
-          <p:cNvPr id="11" name="Rectangle 10"/>
-          <p:cNvSpPr/>
-          <p:nvPr/>
-        </p:nvSpPr>
-        <p:spPr>
-          <a:xfrm>
-            <a:off x="4359554" y="4069080"/>
-            <a:ext cx="3472586" cy="25400"/>
-          </a:xfrm>
-          <a:prstGeom prst="rect">
-            <a:avLst/>
-          </a:prstGeom>
-          <a:solidFill>
-            <a:srgbClr val="17549E"/>
-          </a:solidFill>
-          <a:ln>
-            <a:noFill/>
-          </a:ln>
-          <a:effectLst/>
-        </p:spPr>
-        <p:style>
-          <a:lnRef idx="1">
-            <a:schemeClr val="accent1"/>
-          </a:lnRef>
-          <a:fillRef idx="3">
-            <a:schemeClr val="accent1"/>
-          </a:fillRef>
-          <a:effectRef idx="2">
-            <a:schemeClr val="accent1"/>
-          </a:effectRef>
-          <a:fontRef idx="minor">
-            <a:schemeClr val="lt1"/>
-          </a:fontRef>
-        </p:style>
-        <p:txBody>
-          <a:bodyPr rtlCol="0" anchor="ctr"/>
-          <a:lstStyle/>
-          <a:p>
-            <a:pPr algn="ctr"/>
-          </a:p>
-        </p:txBody>
-      </p:sp>
-      <p:sp>
-        <p:nvSpPr>
-          <p:cNvPr id="12" name="TextBox 11"/>
-          <p:cNvSpPr txBox="1"/>
-          <p:nvPr/>
-        </p:nvSpPr>
-        <p:spPr>
-          <a:xfrm>
-            <a:off x="4359554" y="4251960"/>
-            <a:ext cx="3472586" cy="1828800"/>
-          </a:xfrm>
-          <a:prstGeom prst="rect">
-            <a:avLst/>
-          </a:prstGeom>
-          <a:noFill/>
-        </p:spPr>
-        <p:txBody>
-          <a:bodyPr wrap="square" lIns="0" rIns="0" tIns="0" bIns="0">
-            <a:spAutoFit/>
-          </a:bodyPr>
-          <a:lstStyle/>
-          <a:p>
-            <a:pPr>
-              <a:spcBef>
-                <a:spcPts val="0"/>
-              </a:spcBef>
-              <a:spcAft>
-                <a:spcPts val="700"/>
-              </a:spcAft>
-            </a:pPr>
-            <a:r>
-              <a:rPr sz="1050" b="0" i="0">
-                <a:solidFill>
-                  <a:srgbClr val="17549E"/>
-                </a:solidFill>
-                <a:latin typeface="Consolas"/>
-              </a:rPr>
-              <a:t>METHODS NOTE</a:t>
-            </a:r>
-          </a:p>
-          <a:p>
-            <a:pPr>
-              <a:lnSpc>
-                <a:spcPct val="130000"/>
-              </a:lnSpc>
-              <a:spcBef>
-                <a:spcPts val="0"/>
-              </a:spcBef>
-              <a:spcAft>
-                <a:spcPts val="0"/>
-              </a:spcAft>
-            </a:pPr>
-            <a:r>
-              <a:rPr sz="1100" b="0" i="0">
-                <a:solidFill>
-                  <a:srgbClr val="5A6068"/>
-                </a:solidFill>
-                <a:latin typeface="Calibri"/>
-              </a:rPr>
-              <a:t>Pooled R² and significant-country share tell different stories at several points. Proposal: report both throughout and discuss the divergence explicitly as a secondary contribution.</a:t>
             </a:r>
           </a:p>
         </p:txBody>
@@ -10355,7 +10020,7 @@
     <p:bg>
       <p:bgPr>
         <a:solidFill>
-          <a:srgbClr val="14171C"/>
+          <a:srgbClr val="FCFCFB"/>
         </a:solidFill>
         <a:effectLst/>
       </p:bgPr>
@@ -10375,42 +10040,147 @@
         </p:nvSpPr>
         <p:spPr>
           <a:xfrm>
-            <a:off x="566928" y="2743200"/>
-            <a:ext cx="8229600" cy="1371600"/>
-          </a:xfrm>
-          <a:prstGeom prst="rect">
-            <a:avLst/>
-          </a:prstGeom>
-          <a:noFill/>
-        </p:spPr>
-        <p:txBody>
-          <a:bodyPr wrap="square" lIns="0" rIns="0" tIns="0" bIns="0">
-            <a:spAutoFit/>
-          </a:bodyPr>
-          <a:lstStyle/>
-          <a:p>
-            <a:pPr>
-              <a:spcBef>
-                <a:spcPts val="0"/>
-              </a:spcBef>
-              <a:spcAft>
-                <a:spcPts val="1000"/>
-              </a:spcAft>
-            </a:pPr>
-            <a:r>
-              <a:rPr sz="4000" b="0" i="0">
-                <a:solidFill>
-                  <a:srgbClr val="FCFCFB"/>
+            <a:off x="566928" y="502920"/>
+            <a:ext cx="8229600" cy="822960"/>
+          </a:xfrm>
+          <a:prstGeom prst="rect">
+            <a:avLst/>
+          </a:prstGeom>
+          <a:noFill/>
+        </p:spPr>
+        <p:txBody>
+          <a:bodyPr wrap="square" lIns="0" rIns="0" tIns="0" bIns="0">
+            <a:spAutoFit/>
+          </a:bodyPr>
+          <a:lstStyle/>
+          <a:p>
+            <a:pPr>
+              <a:spcBef>
+                <a:spcPts val="0"/>
+              </a:spcBef>
+              <a:spcAft>
+                <a:spcPts val="600"/>
+              </a:spcAft>
+            </a:pPr>
+            <a:r>
+              <a:rPr sz="3200" b="0" i="0">
+                <a:solidFill>
+                  <a:srgbClr val="14171C"/>
                 </a:solidFill>
                 <a:latin typeface="Georgia"/>
               </a:rPr>
-              <a:t>Evidence appendix</a:t>
+              <a:t>Decisions for the team</a:t>
+            </a:r>
+          </a:p>
+          <a:p>
+            <a:pPr>
+              <a:spcBef>
+                <a:spcPts val="0"/>
+              </a:spcBef>
+              <a:spcAft>
+                <a:spcPts val="0"/>
+              </a:spcAft>
+            </a:pPr>
+            <a:r>
+              <a:rPr sz="1300" b="0" i="0">
+                <a:solidFill>
+                  <a:srgbClr val="5A6068"/>
+                </a:solidFill>
+                <a:latin typeface="Calibri"/>
+              </a:rPr>
+              <a:t>Five things the acts do not settle, in the order they block drafting.</a:t>
+            </a:r>
+          </a:p>
+        </p:txBody>
+      </p:sp>
+      <p:sp>
+        <p:nvSpPr>
+          <p:cNvPr id="3" name="Rectangle 2"/>
+          <p:cNvSpPr/>
+          <p:nvPr/>
+        </p:nvSpPr>
+        <p:spPr>
+          <a:xfrm>
+            <a:off x="566928" y="1828800"/>
+            <a:ext cx="3472586" cy="25400"/>
+          </a:xfrm>
+          <a:prstGeom prst="rect">
+            <a:avLst/>
+          </a:prstGeom>
+          <a:solidFill>
+            <a:srgbClr val="17549E"/>
+          </a:solidFill>
+          <a:ln>
+            <a:noFill/>
+          </a:ln>
+          <a:effectLst/>
+        </p:spPr>
+        <p:style>
+          <a:lnRef idx="1">
+            <a:schemeClr val="accent1"/>
+          </a:lnRef>
+          <a:fillRef idx="3">
+            <a:schemeClr val="accent1"/>
+          </a:fillRef>
+          <a:effectRef idx="2">
+            <a:schemeClr val="accent1"/>
+          </a:effectRef>
+          <a:fontRef idx="minor">
+            <a:schemeClr val="lt1"/>
+          </a:fontRef>
+        </p:style>
+        <p:txBody>
+          <a:bodyPr rtlCol="0" anchor="ctr"/>
+          <a:lstStyle/>
+          <a:p>
+            <a:pPr algn="ctr"/>
+          </a:p>
+        </p:txBody>
+      </p:sp>
+      <p:sp>
+        <p:nvSpPr>
+          <p:cNvPr id="4" name="TextBox 3"/>
+          <p:cNvSpPr txBox="1"/>
+          <p:nvPr/>
+        </p:nvSpPr>
+        <p:spPr>
+          <a:xfrm>
+            <a:off x="566928" y="2011680"/>
+            <a:ext cx="3472586" cy="1828800"/>
+          </a:xfrm>
+          <a:prstGeom prst="rect">
+            <a:avLst/>
+          </a:prstGeom>
+          <a:noFill/>
+        </p:spPr>
+        <p:txBody>
+          <a:bodyPr wrap="square" lIns="0" rIns="0" tIns="0" bIns="0">
+            <a:spAutoFit/>
+          </a:bodyPr>
+          <a:lstStyle/>
+          <a:p>
+            <a:pPr>
+              <a:spcBef>
+                <a:spcPts val="0"/>
+              </a:spcBef>
+              <a:spcAft>
+                <a:spcPts val="700"/>
+              </a:spcAft>
+            </a:pPr>
+            <a:r>
+              <a:rPr sz="1050" b="0" i="0">
+                <a:solidFill>
+                  <a:srgbClr val="17549E"/>
+                </a:solidFill>
+                <a:latin typeface="Consolas"/>
+              </a:rPr>
+              <a:t>FRAMING</a:t>
             </a:r>
           </a:p>
           <a:p>
             <a:pPr>
               <a:lnSpc>
-                <a:spcPct val="135000"/>
+                <a:spcPct val="130000"/>
               </a:lnSpc>
               <a:spcBef>
                 <a:spcPts val="0"/>
@@ -10420,13 +10190,445 @@
               </a:spcAft>
             </a:pPr>
             <a:r>
-              <a:rPr sz="1400" b="0" i="0">
-                <a:solidFill>
-                  <a:srgbClr val="9AA4B0"/>
+              <a:rPr sz="1100" b="0" i="0">
+                <a:solidFill>
+                  <a:srgbClr val="5A6068"/>
                 </a:solidFill>
                 <a:latin typeface="Calibri"/>
               </a:rPr>
-              <a:t>Everything the three acts rest on but do not carry. In submission these become supplementary material.</a:t>
+              <a:t>Lead with the education exception and use the generalised collapse as Act I backdrop — recommended — or lead with the robustness result and treat education as the coda. This decides title, abstract, and venue.</a:t>
+            </a:r>
+          </a:p>
+        </p:txBody>
+      </p:sp>
+      <p:sp>
+        <p:nvSpPr>
+          <p:cNvPr id="5" name="Rectangle 4"/>
+          <p:cNvSpPr/>
+          <p:nvPr/>
+        </p:nvSpPr>
+        <p:spPr>
+          <a:xfrm>
+            <a:off x="4359554" y="1828800"/>
+            <a:ext cx="3472586" cy="25400"/>
+          </a:xfrm>
+          <a:prstGeom prst="rect">
+            <a:avLst/>
+          </a:prstGeom>
+          <a:solidFill>
+            <a:srgbClr val="17549E"/>
+          </a:solidFill>
+          <a:ln>
+            <a:noFill/>
+          </a:ln>
+          <a:effectLst/>
+        </p:spPr>
+        <p:style>
+          <a:lnRef idx="1">
+            <a:schemeClr val="accent1"/>
+          </a:lnRef>
+          <a:fillRef idx="3">
+            <a:schemeClr val="accent1"/>
+          </a:fillRef>
+          <a:effectRef idx="2">
+            <a:schemeClr val="accent1"/>
+          </a:effectRef>
+          <a:fontRef idx="minor">
+            <a:schemeClr val="lt1"/>
+          </a:fontRef>
+        </p:style>
+        <p:txBody>
+          <a:bodyPr rtlCol="0" anchor="ctr"/>
+          <a:lstStyle/>
+          <a:p>
+            <a:pPr algn="ctr"/>
+          </a:p>
+        </p:txBody>
+      </p:sp>
+      <p:sp>
+        <p:nvSpPr>
+          <p:cNvPr id="6" name="TextBox 5"/>
+          <p:cNvSpPr txBox="1"/>
+          <p:nvPr/>
+        </p:nvSpPr>
+        <p:spPr>
+          <a:xfrm>
+            <a:off x="4359554" y="2011680"/>
+            <a:ext cx="3472586" cy="1828800"/>
+          </a:xfrm>
+          <a:prstGeom prst="rect">
+            <a:avLst/>
+          </a:prstGeom>
+          <a:noFill/>
+        </p:spPr>
+        <p:txBody>
+          <a:bodyPr wrap="square" lIns="0" rIns="0" tIns="0" bIns="0">
+            <a:spAutoFit/>
+          </a:bodyPr>
+          <a:lstStyle/>
+          <a:p>
+            <a:pPr>
+              <a:spcBef>
+                <a:spcPts val="0"/>
+              </a:spcBef>
+              <a:spcAft>
+                <a:spcPts val="700"/>
+              </a:spcAft>
+            </a:pPr>
+            <a:r>
+              <a:rPr sz="1050" b="0" i="0">
+                <a:solidFill>
+                  <a:srgbClr val="17549E"/>
+                </a:solidFill>
+                <a:latin typeface="Consolas"/>
+              </a:rPr>
+              <a:t>DISPLAY ITEMS</a:t>
+            </a:r>
+          </a:p>
+          <a:p>
+            <a:pPr>
+              <a:lnSpc>
+                <a:spcPct val="130000"/>
+              </a:lnSpc>
+              <a:spcBef>
+                <a:spcPts val="0"/>
+              </a:spcBef>
+              <a:spcAft>
+                <a:spcPts val="0"/>
+              </a:spcAft>
+            </a:pPr>
+            <a:r>
+              <a:rPr sz="1100" b="0" i="0">
+                <a:solidFill>
+                  <a:srgbClr val="5A6068"/>
+                </a:solidFill>
+                <a:latin typeface="Calibri"/>
+              </a:rPr>
+              <a:t>Commentaries allow one or two. Proposed: the three-panel composite as Figure 1, the ranking flip as Figure 2. Everything else moves to supplementary.</a:t>
+            </a:r>
+          </a:p>
+        </p:txBody>
+      </p:sp>
+      <p:sp>
+        <p:nvSpPr>
+          <p:cNvPr id="7" name="Rectangle 6"/>
+          <p:cNvSpPr/>
+          <p:nvPr/>
+        </p:nvSpPr>
+        <p:spPr>
+          <a:xfrm>
+            <a:off x="8152180" y="1828800"/>
+            <a:ext cx="3472586" cy="25400"/>
+          </a:xfrm>
+          <a:prstGeom prst="rect">
+            <a:avLst/>
+          </a:prstGeom>
+          <a:solidFill>
+            <a:srgbClr val="17549E"/>
+          </a:solidFill>
+          <a:ln>
+            <a:noFill/>
+          </a:ln>
+          <a:effectLst/>
+        </p:spPr>
+        <p:style>
+          <a:lnRef idx="1">
+            <a:schemeClr val="accent1"/>
+          </a:lnRef>
+          <a:fillRef idx="3">
+            <a:schemeClr val="accent1"/>
+          </a:fillRef>
+          <a:effectRef idx="2">
+            <a:schemeClr val="accent1"/>
+          </a:effectRef>
+          <a:fontRef idx="minor">
+            <a:schemeClr val="lt1"/>
+          </a:fontRef>
+        </p:style>
+        <p:txBody>
+          <a:bodyPr rtlCol="0" anchor="ctr"/>
+          <a:lstStyle/>
+          <a:p>
+            <a:pPr algn="ctr"/>
+          </a:p>
+        </p:txBody>
+      </p:sp>
+      <p:sp>
+        <p:nvSpPr>
+          <p:cNvPr id="8" name="TextBox 7"/>
+          <p:cNvSpPr txBox="1"/>
+          <p:nvPr/>
+        </p:nvSpPr>
+        <p:spPr>
+          <a:xfrm>
+            <a:off x="8152180" y="2011680"/>
+            <a:ext cx="3472586" cy="1828800"/>
+          </a:xfrm>
+          <a:prstGeom prst="rect">
+            <a:avLst/>
+          </a:prstGeom>
+          <a:noFill/>
+        </p:spPr>
+        <p:txBody>
+          <a:bodyPr wrap="square" lIns="0" rIns="0" tIns="0" bIns="0">
+            <a:spAutoFit/>
+          </a:bodyPr>
+          <a:lstStyle/>
+          <a:p>
+            <a:pPr>
+              <a:spcBef>
+                <a:spcPts val="0"/>
+              </a:spcBef>
+              <a:spcAft>
+                <a:spcPts val="700"/>
+              </a:spcAft>
+            </a:pPr>
+            <a:r>
+              <a:rPr sz="1050" b="0" i="0">
+                <a:solidFill>
+                  <a:srgbClr val="17549E"/>
+                </a:solidFill>
+                <a:latin typeface="Consolas"/>
+              </a:rPr>
+              <a:t>SCOPE OF THE WITHIN-COUNTRY WORK</a:t>
+            </a:r>
+          </a:p>
+          <a:p>
+            <a:pPr>
+              <a:lnSpc>
+                <a:spcPct val="130000"/>
+              </a:lnSpc>
+              <a:spcBef>
+                <a:spcPts val="0"/>
+              </a:spcBef>
+              <a:spcAft>
+                <a:spcPts val="0"/>
+              </a:spcAft>
+            </a:pPr>
+            <a:r>
+              <a:rPr sz="1100" b="0" i="0">
+                <a:solidFill>
+                  <a:srgbClr val="5A6068"/>
+                </a:solidFill>
+                <a:latin typeface="Calibri"/>
+              </a:rPr>
+              <a:t>It now sits inside Act III as the evidence on priorities. Does it belong there, or in a third paper? It is the most policy-relevant and the most contested result we have, and it is Europe-only.</a:t>
+            </a:r>
+          </a:p>
+        </p:txBody>
+      </p:sp>
+      <p:sp>
+        <p:nvSpPr>
+          <p:cNvPr id="9" name="Rectangle 8"/>
+          <p:cNvSpPr/>
+          <p:nvPr/>
+        </p:nvSpPr>
+        <p:spPr>
+          <a:xfrm>
+            <a:off x="566928" y="4069080"/>
+            <a:ext cx="3472586" cy="25400"/>
+          </a:xfrm>
+          <a:prstGeom prst="rect">
+            <a:avLst/>
+          </a:prstGeom>
+          <a:solidFill>
+            <a:srgbClr val="17549E"/>
+          </a:solidFill>
+          <a:ln>
+            <a:noFill/>
+          </a:ln>
+          <a:effectLst/>
+        </p:spPr>
+        <p:style>
+          <a:lnRef idx="1">
+            <a:schemeClr val="accent1"/>
+          </a:lnRef>
+          <a:fillRef idx="3">
+            <a:schemeClr val="accent1"/>
+          </a:fillRef>
+          <a:effectRef idx="2">
+            <a:schemeClr val="accent1"/>
+          </a:effectRef>
+          <a:fontRef idx="minor">
+            <a:schemeClr val="lt1"/>
+          </a:fontRef>
+        </p:style>
+        <p:txBody>
+          <a:bodyPr rtlCol="0" anchor="ctr"/>
+          <a:lstStyle/>
+          <a:p>
+            <a:pPr algn="ctr"/>
+          </a:p>
+        </p:txBody>
+      </p:sp>
+      <p:sp>
+        <p:nvSpPr>
+          <p:cNvPr id="10" name="TextBox 9"/>
+          <p:cNvSpPr txBox="1"/>
+          <p:nvPr/>
+        </p:nvSpPr>
+        <p:spPr>
+          <a:xfrm>
+            <a:off x="566928" y="4251960"/>
+            <a:ext cx="3472586" cy="1828800"/>
+          </a:xfrm>
+          <a:prstGeom prst="rect">
+            <a:avLst/>
+          </a:prstGeom>
+          <a:noFill/>
+        </p:spPr>
+        <p:txBody>
+          <a:bodyPr wrap="square" lIns="0" rIns="0" tIns="0" bIns="0">
+            <a:spAutoFit/>
+          </a:bodyPr>
+          <a:lstStyle/>
+          <a:p>
+            <a:pPr>
+              <a:spcBef>
+                <a:spcPts val="0"/>
+              </a:spcBef>
+              <a:spcAft>
+                <a:spcPts val="700"/>
+              </a:spcAft>
+            </a:pPr>
+            <a:r>
+              <a:rPr sz="1050" b="0" i="0">
+                <a:solidFill>
+                  <a:srgbClr val="17549E"/>
+                </a:solidFill>
+                <a:latin typeface="Consolas"/>
+              </a:rPr>
+              <a:t>RESOLVED: SUBNATIONAL SUB-INDICES</a:t>
+            </a:r>
+          </a:p>
+          <a:p>
+            <a:pPr>
+              <a:lnSpc>
+                <a:spcPct val="130000"/>
+              </a:lnSpc>
+              <a:spcBef>
+                <a:spcPts val="0"/>
+              </a:spcBef>
+              <a:spcAft>
+                <a:spcPts val="0"/>
+              </a:spcAft>
+            </a:pPr>
+            <a:r>
+              <a:rPr sz="1100" b="0" i="0">
+                <a:solidFill>
+                  <a:srgbClr val="5A6068"/>
+                </a:solidFill>
+                <a:latin typeface="Calibri"/>
+              </a:rPr>
+              <a:t>The per-domain GDL exports are in. Within countries the external health index leads education and income (+0.34 vs +0.06 and +0.12), so the flip no longer rests on self-report. GDL's DHS-based Education &amp; Work and Health datasets were also examined: they cover only 6 ESS countries and cannot serve the European design.</a:t>
+            </a:r>
+          </a:p>
+        </p:txBody>
+      </p:sp>
+      <p:sp>
+        <p:nvSpPr>
+          <p:cNvPr id="11" name="Rectangle 10"/>
+          <p:cNvSpPr/>
+          <p:nvPr/>
+        </p:nvSpPr>
+        <p:spPr>
+          <a:xfrm>
+            <a:off x="4359554" y="4069080"/>
+            <a:ext cx="3472586" cy="25400"/>
+          </a:xfrm>
+          <a:prstGeom prst="rect">
+            <a:avLst/>
+          </a:prstGeom>
+          <a:solidFill>
+            <a:srgbClr val="17549E"/>
+          </a:solidFill>
+          <a:ln>
+            <a:noFill/>
+          </a:ln>
+          <a:effectLst/>
+        </p:spPr>
+        <p:style>
+          <a:lnRef idx="1">
+            <a:schemeClr val="accent1"/>
+          </a:lnRef>
+          <a:fillRef idx="3">
+            <a:schemeClr val="accent1"/>
+          </a:fillRef>
+          <a:effectRef idx="2">
+            <a:schemeClr val="accent1"/>
+          </a:effectRef>
+          <a:fontRef idx="minor">
+            <a:schemeClr val="lt1"/>
+          </a:fontRef>
+        </p:style>
+        <p:txBody>
+          <a:bodyPr rtlCol="0" anchor="ctr"/>
+          <a:lstStyle/>
+          <a:p>
+            <a:pPr algn="ctr"/>
+          </a:p>
+        </p:txBody>
+      </p:sp>
+      <p:sp>
+        <p:nvSpPr>
+          <p:cNvPr id="12" name="TextBox 11"/>
+          <p:cNvSpPr txBox="1"/>
+          <p:nvPr/>
+        </p:nvSpPr>
+        <p:spPr>
+          <a:xfrm>
+            <a:off x="4359554" y="4251960"/>
+            <a:ext cx="3472586" cy="1828800"/>
+          </a:xfrm>
+          <a:prstGeom prst="rect">
+            <a:avLst/>
+          </a:prstGeom>
+          <a:noFill/>
+        </p:spPr>
+        <p:txBody>
+          <a:bodyPr wrap="square" lIns="0" rIns="0" tIns="0" bIns="0">
+            <a:spAutoFit/>
+          </a:bodyPr>
+          <a:lstStyle/>
+          <a:p>
+            <a:pPr>
+              <a:spcBef>
+                <a:spcPts val="0"/>
+              </a:spcBef>
+              <a:spcAft>
+                <a:spcPts val="700"/>
+              </a:spcAft>
+            </a:pPr>
+            <a:r>
+              <a:rPr sz="1050" b="0" i="0">
+                <a:solidFill>
+                  <a:srgbClr val="17549E"/>
+                </a:solidFill>
+                <a:latin typeface="Consolas"/>
+              </a:rPr>
+              <a:t>METHODS NOTE</a:t>
+            </a:r>
+          </a:p>
+          <a:p>
+            <a:pPr>
+              <a:lnSpc>
+                <a:spcPct val="130000"/>
+              </a:lnSpc>
+              <a:spcBef>
+                <a:spcPts val="0"/>
+              </a:spcBef>
+              <a:spcAft>
+                <a:spcPts val="0"/>
+              </a:spcAft>
+            </a:pPr>
+            <a:r>
+              <a:rPr sz="1100" b="0" i="0">
+                <a:solidFill>
+                  <a:srgbClr val="5A6068"/>
+                </a:solidFill>
+                <a:latin typeface="Calibri"/>
+              </a:rPr>
+              <a:t>Pooled R² and significant-country share tell different stories at several points. Proposal: report both throughout and discuss the divergence explicitly as a secondary contribution.</a:t>
             </a:r>
           </a:p>
         </p:txBody>
@@ -10445,7 +10647,7 @@
     <p:bg>
       <p:bgPr>
         <a:solidFill>
-          <a:srgbClr val="FCFCFB"/>
+          <a:srgbClr val="14171C"/>
         </a:solidFill>
         <a:effectLst/>
       </p:bgPr>
@@ -10465,107 +10667,42 @@
         </p:nvSpPr>
         <p:spPr>
           <a:xfrm>
-            <a:off x="566928" y="411480"/>
-            <a:ext cx="10515600" cy="320040"/>
-          </a:xfrm>
-          <a:prstGeom prst="rect">
-            <a:avLst/>
-          </a:prstGeom>
-          <a:noFill/>
-        </p:spPr>
-        <p:txBody>
-          <a:bodyPr wrap="square" lIns="0" rIns="0" tIns="0" bIns="0">
-            <a:spAutoFit/>
-          </a:bodyPr>
-          <a:lstStyle/>
-          <a:p>
-            <a:pPr>
-              <a:spcBef>
-                <a:spcPts val="0"/>
-              </a:spcBef>
-              <a:spcAft>
-                <a:spcPts val="0"/>
-              </a:spcAft>
-            </a:pPr>
-            <a:r>
-              <a:rPr sz="1000" b="0" i="0">
-                <a:solidFill>
-                  <a:srgbClr val="868D96"/>
-                </a:solidFill>
-                <a:latin typeface="Consolas"/>
-              </a:rPr>
-              <a:t>APPENDIX</a:t>
-            </a:r>
-          </a:p>
-        </p:txBody>
-      </p:sp>
-      <p:sp>
-        <p:nvSpPr>
-          <p:cNvPr id="3" name="TextBox 2"/>
-          <p:cNvSpPr txBox="1"/>
-          <p:nvPr/>
-        </p:nvSpPr>
-        <p:spPr>
-          <a:xfrm>
-            <a:off x="566928" y="749808"/>
-            <a:ext cx="10515600" cy="457200"/>
-          </a:xfrm>
-          <a:prstGeom prst="rect">
-            <a:avLst/>
-          </a:prstGeom>
-          <a:noFill/>
-        </p:spPr>
-        <p:txBody>
-          <a:bodyPr wrap="square" lIns="0" rIns="0" tIns="0" bIns="0">
-            <a:spAutoFit/>
-          </a:bodyPr>
-          <a:lstStyle/>
-          <a:p>
-            <a:pPr>
-              <a:spcBef>
-                <a:spcPts val="0"/>
-              </a:spcBef>
-              <a:spcAft>
-                <a:spcPts val="0"/>
-              </a:spcAft>
-            </a:pPr>
-            <a:r>
-              <a:rPr sz="2000" b="0" i="0">
-                <a:solidFill>
-                  <a:srgbClr val="14171C"/>
+            <a:off x="566928" y="2743200"/>
+            <a:ext cx="8229600" cy="1371600"/>
+          </a:xfrm>
+          <a:prstGeom prst="rect">
+            <a:avLst/>
+          </a:prstGeom>
+          <a:noFill/>
+        </p:spPr>
+        <p:txBody>
+          <a:bodyPr wrap="square" lIns="0" rIns="0" tIns="0" bIns="0">
+            <a:spAutoFit/>
+          </a:bodyPr>
+          <a:lstStyle/>
+          <a:p>
+            <a:pPr>
+              <a:spcBef>
+                <a:spcPts val="0"/>
+              </a:spcBef>
+              <a:spcAft>
+                <a:spcPts val="1000"/>
+              </a:spcAft>
+            </a:pPr>
+            <a:r>
+              <a:rPr sz="4000" b="0" i="0">
+                <a:solidFill>
+                  <a:srgbClr val="FCFCFB"/>
                 </a:solidFill>
                 <a:latin typeface="Georgia"/>
               </a:rPr>
-              <a:t>HDI against SDG, domain by domain</a:t>
-            </a:r>
-          </a:p>
-        </p:txBody>
-      </p:sp>
-      <p:sp>
-        <p:nvSpPr>
-          <p:cNvPr id="4" name="TextBox 3"/>
-          <p:cNvSpPr txBox="1"/>
-          <p:nvPr/>
-        </p:nvSpPr>
-        <p:spPr>
-          <a:xfrm>
-            <a:off x="566928" y="1207008"/>
-            <a:ext cx="10515600" cy="457200"/>
-          </a:xfrm>
-          <a:prstGeom prst="rect">
-            <a:avLst/>
-          </a:prstGeom>
-          <a:noFill/>
-        </p:spPr>
-        <p:txBody>
-          <a:bodyPr wrap="square" lIns="0" rIns="0" tIns="0" bIns="0">
-            <a:spAutoFit/>
-          </a:bodyPr>
-          <a:lstStyle/>
+              <a:t>Evidence appendix</a:t>
+            </a:r>
+          </a:p>
           <a:p>
             <a:pPr>
               <a:lnSpc>
-                <a:spcPct val="128000"/>
+                <a:spcPct val="135000"/>
               </a:lnSpc>
               <a:spcBef>
                 <a:spcPts val="0"/>
@@ -10575,41 +10712,17 @@
               </a:spcAft>
             </a:pPr>
             <a:r>
-              <a:rPr sz="1100" b="0" i="0">
-                <a:solidFill>
-                  <a:srgbClr val="5A6068"/>
+              <a:rPr sz="1400" b="0" i="0">
+                <a:solidFill>
+                  <a:srgbClr val="9AA4B0"/>
                 </a:solidFill>
                 <a:latin typeface="Calibri"/>
               </a:rPr>
-              <a:t>Education is the HDI's strongest domain and the SDG framework's weakest, unless SDG4 is split into access versus the rest. Absolute levels are not comparable across frameworks; the within-framework rankings are.</a:t>
-            </a:r>
-          </a:p>
-        </p:txBody>
-      </p:sp>
-      <p:pic>
-        <p:nvPicPr>
-          <p:cNvPr id="5" name="Picture 4" descr="hdi_vs_sdg_frameworks.png"/>
-          <p:cNvPicPr>
-            <a:picLocks noChangeAspect="1"/>
-          </p:cNvPicPr>
-          <p:nvPr/>
-        </p:nvPicPr>
-        <p:blipFill>
-          <a:blip r:embed="rId2"/>
-          <a:stretch>
-            <a:fillRect/>
-          </a:stretch>
-        </p:blipFill>
-        <p:spPr>
-          <a:xfrm>
-            <a:off x="1492967" y="1965960"/>
-            <a:ext cx="9205761" cy="4480560"/>
-          </a:xfrm>
-          <a:prstGeom prst="rect">
-            <a:avLst/>
-          </a:prstGeom>
-        </p:spPr>
-      </p:pic>
+              <a:t>Everything the three acts rest on but do not carry. In submission these become supplementary material.</a:t>
+            </a:r>
+          </a:p>
+        </p:txBody>
+      </p:sp>
     </p:spTree>
   </p:cSld>
   <p:clrMapOvr>
@@ -10715,7 +10828,7 @@
                 </a:solidFill>
                 <a:latin typeface="Georgia"/>
               </a:rPr>
-              <a:t>ESS-measured schooling against WHR happiness</a:t>
+              <a:t>HDI against SDG, domain by domain</a:t>
             </a:r>
           </a:p>
         </p:txBody>
@@ -10760,14 +10873,14 @@
                 </a:solidFill>
                 <a:latin typeface="Calibri"/>
               </a:rPr>
-              <a:t>Country-aggregated ESS years of schooling predicts WHR happiness at R² = 0.308, against 0.161 for the HDI's own schooling series on the same cells — an independently measured education variable roughly doubles it.</a:t>
+              <a:t>Education is the HDI's strongest domain and the SDG framework's weakest, unless SDG4 is split into access versus the rest. Absolute levels are not comparable across frameworks; the within-framework rankings are.</a:t>
             </a:r>
           </a:p>
         </p:txBody>
       </p:sp>
       <p:pic>
         <p:nvPicPr>
-          <p:cNvPr id="5" name="Picture 4" descr="ess_triangulation.png"/>
+          <p:cNvPr id="5" name="Picture 4" descr="hdi_vs_sdg_frameworks.png"/>
           <p:cNvPicPr>
             <a:picLocks noChangeAspect="1"/>
           </p:cNvPicPr>
@@ -10781,8 +10894,8 @@
         </p:blipFill>
         <p:spPr>
           <a:xfrm>
-            <a:off x="566928" y="1965960"/>
-            <a:ext cx="11057839" cy="3026903"/>
+            <a:off x="1492967" y="1965960"/>
+            <a:ext cx="9205761" cy="4480560"/>
           </a:xfrm>
           <a:prstGeom prst="rect">
             <a:avLst/>
@@ -10894,7 +11007,7 @@
                 </a:solidFill>
                 <a:latin typeface="Georgia"/>
               </a:rPr>
-              <a:t>Regional development spread within countries</a:t>
+              <a:t>ESS-measured schooling against WHR happiness</a:t>
             </a:r>
           </a:p>
         </p:txBody>
@@ -10939,14 +11052,14 @@
                 </a:solidFill>
                 <a:latin typeface="Calibri"/>
               </a:rPr>
-              <a:t>Every region a dot, two countries per UNDP development tier, 2022. Germany's regions span 0.05 of SHDI; China's span 0.30, India's 0.19.</a:t>
+              <a:t>Country-aggregated ESS years of schooling predicts WHR happiness at R² = 0.308, against 0.161 for the HDI's own schooling series on the same cells — an independently measured education variable roughly doubles it.</a:t>
             </a:r>
           </a:p>
         </p:txBody>
       </p:sp>
       <p:pic>
         <p:nvPicPr>
-          <p:cNvPr id="5" name="Picture 4" descr="shdi_within_country_spread.png"/>
+          <p:cNvPr id="5" name="Picture 4" descr="ess_triangulation.png"/>
           <p:cNvPicPr>
             <a:picLocks noChangeAspect="1"/>
           </p:cNvPicPr>
@@ -10960,8 +11073,8 @@
         </p:blipFill>
         <p:spPr>
           <a:xfrm>
-            <a:off x="2653157" y="1965960"/>
-            <a:ext cx="6885380" cy="4480560"/>
+            <a:off x="566928" y="1965960"/>
+            <a:ext cx="11057839" cy="3026903"/>
           </a:xfrm>
           <a:prstGeom prst="rect">
             <a:avLst/>
@@ -11073,7 +11186,7 @@
                 </a:solidFill>
                 <a:latin typeface="Georgia"/>
               </a:rPr>
-              <a:t>SDG significance by goal, pooled</a:t>
+              <a:t>Regional development spread within countries</a:t>
             </a:r>
           </a:p>
         </p:txBody>
@@ -11118,14 +11231,14 @@
                 </a:solidFill>
                 <a:latin typeface="Calibri"/>
               </a:rPr>
-              <a:t>The leading goal (Energy, 16.0%) clears FDR significance in barely one country-test in six; pooled Education ranks 12th of 17.</a:t>
+              <a:t>Every region a dot, two countries per UNDP development tier, 2022. Germany's regions span 0.05 of SHDI; China's span 0.30, India's 0.19.</a:t>
             </a:r>
           </a:p>
         </p:txBody>
       </p:sp>
       <p:pic>
         <p:nvPicPr>
-          <p:cNvPr id="5" name="Picture 4" descr="sdg_by_goal.png"/>
+          <p:cNvPr id="5" name="Picture 4" descr="shdi_within_country_spread.png"/>
           <p:cNvPicPr>
             <a:picLocks noChangeAspect="1"/>
           </p:cNvPicPr>
@@ -11139,8 +11252,8 @@
         </p:blipFill>
         <p:spPr>
           <a:xfrm>
-            <a:off x="2504357" y="1965960"/>
-            <a:ext cx="7182980" cy="4480560"/>
+            <a:off x="2653157" y="1965960"/>
+            <a:ext cx="6885380" cy="4480560"/>
           </a:xfrm>
           <a:prstGeom prst="rect">
             <a:avLst/>
@@ -11252,7 +11365,7 @@
                 </a:solidFill>
                 <a:latin typeface="Georgia"/>
               </a:rPr>
-              <a:t>GDL national SHDI against the UNDP HDI</a:t>
+              <a:t>SDG significance by goal, pooled</a:t>
             </a:r>
           </a:p>
         </p:txBody>
@@ -11297,14 +11410,14 @@
                 </a:solidFill>
                 <a:latin typeface="Calibri"/>
               </a:rPr>
-              <a:t>The two are the same series — R² = 1.000, every country-year identical, because GDL derives the national figure from the UNDP index. Retained to document the check, not as validation: agreement here says nothing about the subnational disaggregation, which is where GDL's own data begins.</a:t>
+              <a:t>The leading goal (Energy, 16.0%) clears FDR significance in barely one country-test in six; pooled Education ranks 12th of 17.</a:t>
             </a:r>
           </a:p>
         </p:txBody>
       </p:sp>
       <p:pic>
         <p:nvPicPr>
-          <p:cNvPr id="5" name="Picture 4" descr="shdi_vs_hdi_validation.png"/>
+          <p:cNvPr id="5" name="Picture 4" descr="sdg_by_goal.png"/>
           <p:cNvPicPr>
             <a:picLocks noChangeAspect="1"/>
           </p:cNvPicPr>
@@ -11318,8 +11431,8 @@
         </p:blipFill>
         <p:spPr>
           <a:xfrm>
-            <a:off x="4036999" y="1965960"/>
-            <a:ext cx="4117697" cy="4480560"/>
+            <a:off x="2504357" y="1965960"/>
+            <a:ext cx="7182980" cy="4480560"/>
           </a:xfrm>
           <a:prstGeom prst="rect">
             <a:avLst/>
@@ -11431,7 +11544,7 @@
                 </a:solidFill>
                 <a:latin typeface="Georgia"/>
               </a:rPr>
-              <a:t>Subnational HDI against WHR happiness, levels</a:t>
+              <a:t>GDL national SHDI against the UNDP HDI</a:t>
             </a:r>
           </a:p>
         </p:txBody>
@@ -11476,14 +11589,14 @@
                 </a:solidFill>
                 <a:latin typeface="Calibri"/>
               </a:rPr>
-              <a:t>The familiar development-tier gradient with SHDI in place of HDI.</a:t>
+              <a:t>The two are the same series — R² = 1.000, every country-year identical, because GDL derives the national figure from the UNDP index. Retained to document the check, not as validation: agreement here says nothing about the subnational disaggregation, which is where GDL's own data begins.</a:t>
             </a:r>
           </a:p>
         </p:txBody>
       </p:sp>
       <p:pic>
         <p:nvPicPr>
-          <p:cNvPr id="5" name="Picture 4" descr="shdi_whr_levels_scatter.png"/>
+          <p:cNvPr id="5" name="Picture 4" descr="shdi_vs_hdi_validation.png"/>
           <p:cNvPicPr>
             <a:picLocks noChangeAspect="1"/>
           </p:cNvPicPr>
@@ -11497,8 +11610,8 @@
         </p:blipFill>
         <p:spPr>
           <a:xfrm>
-            <a:off x="3508482" y="1965960"/>
-            <a:ext cx="5174731" cy="4480560"/>
+            <a:off x="4036999" y="1965960"/>
+            <a:ext cx="4117697" cy="4480560"/>
           </a:xfrm>
           <a:prstGeom prst="rect">
             <a:avLst/>
@@ -11610,7 +11723,7 @@
                 </a:solidFill>
                 <a:latin typeface="Georgia"/>
               </a:rPr>
-              <a:t>ESS coverage by country and year</a:t>
+              <a:t>Subnational HDI against WHR happiness, levels</a:t>
             </a:r>
           </a:p>
         </p:txBody>
@@ -11655,14 +11768,14 @@
                 </a:solidFill>
                 <a:latin typeface="Calibri"/>
               </a:rPr>
-              <a:t>A rotating panel: 36 countries, roughly biennial from 2010 to 2023, with 17 countries present in all seven waves. This is the power constraint behind every ESS significance test.</a:t>
+              <a:t>The familiar development-tier gradient with SHDI in place of HDI.</a:t>
             </a:r>
           </a:p>
         </p:txBody>
       </p:sp>
       <p:pic>
         <p:nvPicPr>
-          <p:cNvPr id="5" name="Picture 4" descr="ess_year_coverage.png"/>
+          <p:cNvPr id="5" name="Picture 4" descr="shdi_whr_levels_scatter.png"/>
           <p:cNvPicPr>
             <a:picLocks noChangeAspect="1"/>
           </p:cNvPicPr>
@@ -11676,8 +11789,8 @@
         </p:blipFill>
         <p:spPr>
           <a:xfrm>
-            <a:off x="4247956" y="1965960"/>
-            <a:ext cx="3695783" cy="4480560"/>
+            <a:off x="3508482" y="1965960"/>
+            <a:ext cx="5174731" cy="4480560"/>
           </a:xfrm>
           <a:prstGeom prst="rect">
             <a:avLst/>
@@ -11789,7 +11902,7 @@
                 </a:solidFill>
                 <a:latin typeface="Georgia"/>
               </a:rPr>
-              <a:t>ESS-to-SHDI region crosswalk</a:t>
+              <a:t>ESS coverage by country and year</a:t>
             </a:r>
           </a:p>
         </p:txBody>
@@ -11834,14 +11947,14 @@
                 </a:solidFill>
                 <a:latin typeface="Calibri"/>
               </a:rPr>
-              <a:t>62% of respondents, across 24 of 36 countries, matched to a subnational SHDI value through the NUTS-to-GDL crosswalk.</a:t>
+              <a:t>A rotating panel: 36 countries, roughly biennial from 2010 to 2023, with 17 countries present in all seven waves. This is the power constraint behind every ESS significance test.</a:t>
             </a:r>
           </a:p>
         </p:txBody>
       </p:sp>
       <p:pic>
         <p:nvPicPr>
-          <p:cNvPr id="5" name="Picture 4" descr="region_crosswalk_match.png"/>
+          <p:cNvPr id="5" name="Picture 4" descr="ess_year_coverage.png"/>
           <p:cNvPicPr>
             <a:picLocks noChangeAspect="1"/>
           </p:cNvPicPr>
@@ -11855,8 +11968,8 @@
         </p:blipFill>
         <p:spPr>
           <a:xfrm>
-            <a:off x="2428154" y="1965960"/>
-            <a:ext cx="7335386" cy="4480560"/>
+            <a:off x="4247956" y="1965960"/>
+            <a:ext cx="3695783" cy="4480560"/>
           </a:xfrm>
           <a:prstGeom prst="rect">
             <a:avLst/>
@@ -11968,7 +12081,7 @@
                 </a:solidFill>
                 <a:latin typeface="Georgia"/>
               </a:rPr>
-              <a:t>Country × indicator significance, ESS</a:t>
+              <a:t>ESS-to-SHDI region crosswalk</a:t>
             </a:r>
           </a:p>
         </p:txBody>
@@ -12013,14 +12126,14 @@
                 </a:solidFill>
                 <a:latin typeface="Calibri"/>
               </a:rPr>
-              <a:t>15% of levels cells and 9% of differences cells FDR-significant; direction consistent with the WHR results, power much lower.</a:t>
+              <a:t>62% of respondents, across 24 of 36 countries, matched to a subnational SHDI value through the NUTS-to-GDL crosswalk.</a:t>
             </a:r>
           </a:p>
         </p:txBody>
       </p:sp>
       <p:pic>
         <p:nvPicPr>
-          <p:cNvPr id="5" name="Picture 4" descr="hdi_ess_heatmap.png"/>
+          <p:cNvPr id="5" name="Picture 4" descr="region_crosswalk_match.png"/>
           <p:cNvPicPr>
             <a:picLocks noChangeAspect="1"/>
           </p:cNvPicPr>
@@ -12034,8 +12147,8 @@
         </p:blipFill>
         <p:spPr>
           <a:xfrm>
-            <a:off x="3601923" y="1965960"/>
-            <a:ext cx="4987848" cy="4480560"/>
+            <a:off x="2428154" y="1965960"/>
+            <a:ext cx="7335386" cy="4480560"/>
           </a:xfrm>
           <a:prstGeom prst="rect">
             <a:avLst/>
@@ -12438,7 +12551,7 @@
                 </a:solidFill>
                 <a:latin typeface="Georgia"/>
               </a:rPr>
-              <a:t>Per-country collapse, ESS</a:t>
+              <a:t>Country × indicator significance, ESS</a:t>
             </a:r>
           </a:p>
         </p:txBody>
@@ -12483,14 +12596,14 @@
                 </a:solidFill>
                 <a:latin typeface="Calibri"/>
               </a:rPr>
-              <a:t>More above-the-line exceptions than the WHR analysis shows — sparse waves cut both ways.</a:t>
+              <a:t>15% of levels cells and 9% of differences cells FDR-significant; direction consistent with the WHR results, power much lower.</a:t>
             </a:r>
           </a:p>
         </p:txBody>
       </p:sp>
       <p:pic>
         <p:nvPicPr>
-          <p:cNvPr id="5" name="Picture 4" descr="hdi_ess_collapse_scatter.png"/>
+          <p:cNvPr id="5" name="Picture 4" descr="hdi_ess_heatmap.png"/>
           <p:cNvPicPr>
             <a:picLocks noChangeAspect="1"/>
           </p:cNvPicPr>
@@ -12504,8 +12617,8 @@
         </p:blipFill>
         <p:spPr>
           <a:xfrm>
-            <a:off x="2057001" y="1965960"/>
-            <a:ext cx="8077693" cy="4480560"/>
+            <a:off x="3601923" y="1965960"/>
+            <a:ext cx="4987848" cy="4480560"/>
           </a:xfrm>
           <a:prstGeom prst="rect">
             <a:avLst/>
@@ -12617,7 +12730,7 @@
                 </a:solidFill>
                 <a:latin typeface="Georgia"/>
               </a:rPr>
-              <a:t>HDI progress against life-satisfaction trends, 2010–2023</a:t>
+              <a:t>Per-country collapse, ESS</a:t>
             </a:r>
           </a:p>
         </p:txBody>
@@ -12662,14 +12775,14 @@
                 </a:solidFill>
                 <a:latin typeface="Calibri"/>
               </a:rPr>
-              <a:t>HDI rose nearly everywhere. ESS life satisfaction rose in 19 countries and fell in 8.</a:t>
+              <a:t>More above-the-line exceptions than the WHR analysis shows — sparse waves cut both ways.</a:t>
             </a:r>
           </a:p>
         </p:txBody>
       </p:sp>
       <p:pic>
         <p:nvPicPr>
-          <p:cNvPr id="5" name="Picture 4" descr="hdi_vs_lifesat_trends.png"/>
+          <p:cNvPr id="5" name="Picture 4" descr="hdi_ess_collapse_scatter.png"/>
           <p:cNvPicPr>
             <a:picLocks noChangeAspect="1"/>
           </p:cNvPicPr>
@@ -12683,8 +12796,8 @@
         </p:blipFill>
         <p:spPr>
           <a:xfrm>
-            <a:off x="4009215" y="1965960"/>
-            <a:ext cx="4173264" cy="4480560"/>
+            <a:off x="2057001" y="1965960"/>
+            <a:ext cx="8077693" cy="4480560"/>
           </a:xfrm>
           <a:prstGeom prst="rect">
             <a:avLst/>
@@ -12796,7 +12909,7 @@
                 </a:solidFill>
                 <a:latin typeface="Georgia"/>
               </a:rPr>
-              <a:t>Region-level SHDI against life satisfaction, pooled</a:t>
+              <a:t>HDI progress against life-satisfaction trends, 2010–2023</a:t>
             </a:r>
           </a:p>
         </p:txBody>
@@ -12841,14 +12954,14 @@
                 </a:solidFill>
                 <a:latin typeface="Calibri"/>
               </a:rPr>
-              <a:t>1,313 region-years, pooled R² = 0.32 — this mixes between- and within-country variation, which the within-country panels separate.</a:t>
+              <a:t>HDI rose nearly everywhere. ESS life satisfaction rose in 19 countries and fell in 8.</a:t>
             </a:r>
           </a:p>
         </p:txBody>
       </p:sp>
       <p:pic>
         <p:nvPicPr>
-          <p:cNvPr id="5" name="Picture 4" descr="region_shdi_lifesat_pooled.png"/>
+          <p:cNvPr id="5" name="Picture 4" descr="hdi_vs_lifesat_trends.png"/>
           <p:cNvPicPr>
             <a:picLocks noChangeAspect="1"/>
           </p:cNvPicPr>
@@ -12862,8 +12975,8 @@
         </p:blipFill>
         <p:spPr>
           <a:xfrm>
-            <a:off x="3123927" y="1965960"/>
-            <a:ext cx="5943841" cy="4480560"/>
+            <a:off x="4009215" y="1965960"/>
+            <a:ext cx="4173264" cy="4480560"/>
           </a:xfrm>
           <a:prstGeom prst="rect">
             <a:avLst/>
@@ -12975,7 +13088,7 @@
                 </a:solidFill>
                 <a:latin typeface="Georgia"/>
               </a:rPr>
-              <a:t>Within-country regional gradients, small multiples</a:t>
+              <a:t>Region-level SHDI against life satisfaction, pooled</a:t>
             </a:r>
           </a:p>
         </p:txBody>
@@ -13020,14 +13133,14 @@
                 </a:solidFill>
                 <a:latin typeface="Calibri"/>
               </a:rPr>
-              <a:t>Holding country fixed, the regional development–wellbeing gradient is weak in most countries. France is the clearest exception.</a:t>
+              <a:t>1,313 region-years, pooled R² = 0.32 — this mixes between- and within-country variation, which the within-country panels separate.</a:t>
             </a:r>
           </a:p>
         </p:txBody>
       </p:sp>
       <p:pic>
         <p:nvPicPr>
-          <p:cNvPr id="5" name="Picture 4" descr="within_country_small_multiples.png"/>
+          <p:cNvPr id="5" name="Picture 4" descr="region_shdi_lifesat_pooled.png"/>
           <p:cNvPicPr>
             <a:picLocks noChangeAspect="1"/>
           </p:cNvPicPr>
@@ -13041,8 +13154,8 @@
         </p:blipFill>
         <p:spPr>
           <a:xfrm>
-            <a:off x="2779954" y="1965960"/>
-            <a:ext cx="6631787" cy="4480560"/>
+            <a:off x="3123927" y="1965960"/>
+            <a:ext cx="5943841" cy="4480560"/>
           </a:xfrm>
           <a:prstGeom prst="rect">
             <a:avLst/>
@@ -13154,7 +13267,7 @@
                 </a:solidFill>
                 <a:latin typeface="Georgia"/>
               </a:rPr>
-              <a:t>Regional SHDI spread within ESS countries</a:t>
+              <a:t>Within-country regional gradients, small multiples</a:t>
             </a:r>
           </a:p>
         </p:txBody>
@@ -13199,14 +13312,14 @@
                 </a:solidFill>
                 <a:latin typeface="Calibri"/>
               </a:rPr>
-              <a:t>Italy and Poland carry several times the internal development inequality of Germany or the Nordics.</a:t>
+              <a:t>Holding country fixed, the regional development–wellbeing gradient is weak in most countries. France is the clearest exception.</a:t>
             </a:r>
           </a:p>
         </p:txBody>
       </p:sp>
       <p:pic>
         <p:nvPicPr>
-          <p:cNvPr id="5" name="Picture 4" descr="european_regional_inequality.png"/>
+          <p:cNvPr id="5" name="Picture 4" descr="within_country_small_multiples.png"/>
           <p:cNvPicPr>
             <a:picLocks noChangeAspect="1"/>
           </p:cNvPicPr>
@@ -13220,8 +13333,8 @@
         </p:blipFill>
         <p:spPr>
           <a:xfrm>
-            <a:off x="2097774" y="1965960"/>
-            <a:ext cx="7996146" cy="4480560"/>
+            <a:off x="2779954" y="1965960"/>
+            <a:ext cx="6631787" cy="4480560"/>
           </a:xfrm>
           <a:prstGeom prst="rect">
             <a:avLst/>
@@ -13333,7 +13446,7 @@
                 </a:solidFill>
                 <a:latin typeface="Georgia"/>
               </a:rPr>
-              <a:t>Trust and health as rival predictors, nationally</a:t>
+              <a:t>Regional SHDI spread within ESS countries</a:t>
             </a:r>
           </a:p>
         </p:txBody>
@@ -13378,14 +13491,14 @@
                 </a:solidFill>
                 <a:latin typeface="Calibri"/>
               </a:rPr>
-              <a:t>Self-rated health out-predicts the HDI nationally on significant-country share, 37% against 19%.</a:t>
+              <a:t>Italy and Poland carry several times the internal development inequality of Germany or the Nordics.</a:t>
             </a:r>
           </a:p>
         </p:txBody>
       </p:sp>
       <p:pic>
         <p:nvPicPr>
-          <p:cNvPr id="5" name="Picture 4" descr="mechanisms_trust_health.png"/>
+          <p:cNvPr id="5" name="Picture 4" descr="european_regional_inequality.png"/>
           <p:cNvPicPr>
             <a:picLocks noChangeAspect="1"/>
           </p:cNvPicPr>
@@ -13399,8 +13512,8 @@
         </p:blipFill>
         <p:spPr>
           <a:xfrm>
-            <a:off x="3617081" y="1965960"/>
-            <a:ext cx="4957532" cy="4480560"/>
+            <a:off x="2097774" y="1965960"/>
+            <a:ext cx="7996146" cy="4480560"/>
           </a:xfrm>
           <a:prstGeom prst="rect">
             <a:avLst/>
@@ -13416,6 +13529,185 @@
 </file>
 
 <file path=ppt/slides/slide46.xml><?xml version="1.0" encoding="utf-8"?>
+<p:sld xmlns:a="http://schemas.openxmlformats.org/drawingml/2006/main" xmlns:p="http://schemas.openxmlformats.org/presentationml/2006/main" xmlns:r="http://schemas.openxmlformats.org/officeDocument/2006/relationships">
+  <p:cSld>
+    <p:bg>
+      <p:bgPr>
+        <a:solidFill>
+          <a:srgbClr val="FCFCFB"/>
+        </a:solidFill>
+        <a:effectLst/>
+      </p:bgPr>
+    </p:bg>
+    <p:spTree>
+      <p:nvGrpSpPr>
+        <p:cNvPr id="1" name=""/>
+        <p:cNvGrpSpPr/>
+        <p:nvPr/>
+      </p:nvGrpSpPr>
+      <p:grpSpPr/>
+      <p:sp>
+        <p:nvSpPr>
+          <p:cNvPr id="2" name="TextBox 1"/>
+          <p:cNvSpPr txBox="1"/>
+          <p:nvPr/>
+        </p:nvSpPr>
+        <p:spPr>
+          <a:xfrm>
+            <a:off x="566928" y="411480"/>
+            <a:ext cx="10515600" cy="320040"/>
+          </a:xfrm>
+          <a:prstGeom prst="rect">
+            <a:avLst/>
+          </a:prstGeom>
+          <a:noFill/>
+        </p:spPr>
+        <p:txBody>
+          <a:bodyPr wrap="square" lIns="0" rIns="0" tIns="0" bIns="0">
+            <a:spAutoFit/>
+          </a:bodyPr>
+          <a:lstStyle/>
+          <a:p>
+            <a:pPr>
+              <a:spcBef>
+                <a:spcPts val="0"/>
+              </a:spcBef>
+              <a:spcAft>
+                <a:spcPts val="0"/>
+              </a:spcAft>
+            </a:pPr>
+            <a:r>
+              <a:rPr sz="1000" b="0" i="0">
+                <a:solidFill>
+                  <a:srgbClr val="868D96"/>
+                </a:solidFill>
+                <a:latin typeface="Consolas"/>
+              </a:rPr>
+              <a:t>APPENDIX</a:t>
+            </a:r>
+          </a:p>
+        </p:txBody>
+      </p:sp>
+      <p:sp>
+        <p:nvSpPr>
+          <p:cNvPr id="3" name="TextBox 2"/>
+          <p:cNvSpPr txBox="1"/>
+          <p:nvPr/>
+        </p:nvSpPr>
+        <p:spPr>
+          <a:xfrm>
+            <a:off x="566928" y="749808"/>
+            <a:ext cx="10515600" cy="457200"/>
+          </a:xfrm>
+          <a:prstGeom prst="rect">
+            <a:avLst/>
+          </a:prstGeom>
+          <a:noFill/>
+        </p:spPr>
+        <p:txBody>
+          <a:bodyPr wrap="square" lIns="0" rIns="0" tIns="0" bIns="0">
+            <a:spAutoFit/>
+          </a:bodyPr>
+          <a:lstStyle/>
+          <a:p>
+            <a:pPr>
+              <a:spcBef>
+                <a:spcPts val="0"/>
+              </a:spcBef>
+              <a:spcAft>
+                <a:spcPts val="0"/>
+              </a:spcAft>
+            </a:pPr>
+            <a:r>
+              <a:rPr sz="2000" b="0" i="0">
+                <a:solidFill>
+                  <a:srgbClr val="14171C"/>
+                </a:solidFill>
+                <a:latin typeface="Georgia"/>
+              </a:rPr>
+              <a:t>Trust and health as rival predictors, nationally</a:t>
+            </a:r>
+          </a:p>
+        </p:txBody>
+      </p:sp>
+      <p:sp>
+        <p:nvSpPr>
+          <p:cNvPr id="4" name="TextBox 3"/>
+          <p:cNvSpPr txBox="1"/>
+          <p:nvPr/>
+        </p:nvSpPr>
+        <p:spPr>
+          <a:xfrm>
+            <a:off x="566928" y="1207008"/>
+            <a:ext cx="10515600" cy="457200"/>
+          </a:xfrm>
+          <a:prstGeom prst="rect">
+            <a:avLst/>
+          </a:prstGeom>
+          <a:noFill/>
+        </p:spPr>
+        <p:txBody>
+          <a:bodyPr wrap="square" lIns="0" rIns="0" tIns="0" bIns="0">
+            <a:spAutoFit/>
+          </a:bodyPr>
+          <a:lstStyle/>
+          <a:p>
+            <a:pPr>
+              <a:lnSpc>
+                <a:spcPct val="128000"/>
+              </a:lnSpc>
+              <a:spcBef>
+                <a:spcPts val="0"/>
+              </a:spcBef>
+              <a:spcAft>
+                <a:spcPts val="0"/>
+              </a:spcAft>
+            </a:pPr>
+            <a:r>
+              <a:rPr sz="1100" b="0" i="0">
+                <a:solidFill>
+                  <a:srgbClr val="5A6068"/>
+                </a:solidFill>
+                <a:latin typeface="Calibri"/>
+              </a:rPr>
+              <a:t>Self-rated health out-predicts the HDI nationally on significant-country share, 37% against 19%.</a:t>
+            </a:r>
+          </a:p>
+        </p:txBody>
+      </p:sp>
+      <p:pic>
+        <p:nvPicPr>
+          <p:cNvPr id="5" name="Picture 4" descr="mechanisms_trust_health.png"/>
+          <p:cNvPicPr>
+            <a:picLocks noChangeAspect="1"/>
+          </p:cNvPicPr>
+          <p:nvPr/>
+        </p:nvPicPr>
+        <p:blipFill>
+          <a:blip r:embed="rId2"/>
+          <a:stretch>
+            <a:fillRect/>
+          </a:stretch>
+        </p:blipFill>
+        <p:spPr>
+          <a:xfrm>
+            <a:off x="3617081" y="1965960"/>
+            <a:ext cx="4957532" cy="4480560"/>
+          </a:xfrm>
+          <a:prstGeom prst="rect">
+            <a:avLst/>
+          </a:prstGeom>
+        </p:spPr>
+      </p:pic>
+    </p:spTree>
+  </p:cSld>
+  <p:clrMapOvr>
+    <a:masterClrMapping/>
+  </p:clrMapOvr>
+</p:sld>
+</file>
+
+<file path=ppt/slides/slide47.xml><?xml version="1.0" encoding="utf-8"?>
 <p:sld xmlns:a="http://schemas.openxmlformats.org/drawingml/2006/main" xmlns:p="http://schemas.openxmlformats.org/presentationml/2006/main" xmlns:r="http://schemas.openxmlformats.org/officeDocument/2006/relationships">
   <p:cSld>
     <p:bg>

--- a/deck/Measured_Where_It_Varies.pptx
+++ b/deck/Measured_Where_It_Varies.pptx
@@ -3971,7 +3971,7 @@
                 </a:solidFill>
                 <a:latin typeface="Calibri"/>
               </a:rPr>
-              <a:t>The fairest head-to-head runs both frameworks on the same 42 countries, against the same outcome, under the same design. On coverage the SDG framework wins: 30 of 42 countries have at least one FDR-significant series in levels (71%), against 17 of 42 for any of the HDI's five indicators (40%) and 14 of 42 for the composite alone (33%). That result should be conceded plainly — asking whether any of roughly 456 series is significant is a far easier bar than asking about five.</a:t>
+              <a:t>Score each framework on its own full country set — what share of the countries a dataset actually covers shows a significant levels association? The SDG database covers 42 countries and 30 of them have at least one FDR-significant series (71%). The HDR covers 150, of which 77 are significant on at least one of the five indicators (51%) and 63 on the composite alone (42%). On coverage the SDG framework wins, and that should be conceded plainly — asking whether any of roughly 456 series is significant is a far easier bar than asking about five.</a:t>
             </a:r>
           </a:p>
           <a:p>
@@ -4104,7 +4104,7 @@
                 </a:solidFill>
                 <a:latin typeface="Calibri"/>
               </a:rPr>
-              <a:t>Both frameworks on the same 42 countries against WHR happiness. Panel b shows every SDG series with usable coverage and where the HDI's five components fall among them.</a:t>
+              <a:t>Each framework on its own full country set against WHR happiness — 42 countries for the SDG database, 150 for the HDR. Panel b shows every SDG series with usable coverage and where the HDI's five components fall among them.</a:t>
             </a:r>
           </a:p>
         </p:txBody>

--- a/deck/Measured_Where_It_Varies.pptx
+++ b/deck/Measured_Where_It_Varies.pptx
@@ -3663,7 +3663,7 @@
                 </a:solidFill>
                 <a:latin typeface="Consolas"/>
               </a:rPr>
-              <a:t>0%</a:t>
+              <a:t>51% vs 17%</a:t>
             </a:r>
           </a:p>
           <a:p>
@@ -3685,7 +3685,7 @@
                 </a:solidFill>
                 <a:latin typeface="Calibri"/>
               </a:rPr>
-              <a:t>median SDG series: significant in no country</a:t>
+              <a:t>HDI vs SDG at a matched bar: 1 in 5 of a country's indicators</a:t>
             </a:r>
           </a:p>
         </p:txBody>
@@ -3727,7 +3727,7 @@
                 </a:solidFill>
                 <a:latin typeface="Consolas"/>
               </a:rPr>
-              <a:t>100th percentile</a:t>
+              <a:t>2.4%</a:t>
             </a:r>
           </a:p>
           <a:p>
@@ -3749,7 +3749,7 @@
                 </a:solidFill>
                 <a:latin typeface="Calibri"/>
               </a:rPr>
-              <a:t>where the HDI composite falls in that field</a:t>
+              <a:t>median SDG country: share of its own series significant</a:t>
             </a:r>
           </a:p>
         </p:txBody>
@@ -3926,7 +3926,7 @@
                 </a:solidFill>
                 <a:latin typeface="Georgia"/>
               </a:rPr>
-              <a:t>The SDG framework reaches more countries; the HDI does far more per indicator</a:t>
+              <a:t>The SDG framework wins only at the loosest bar; at a comparable one the HDI dominates</a:t>
             </a:r>
           </a:p>
         </p:txBody>
@@ -3971,7 +3971,29 @@
                 </a:solidFill>
                 <a:latin typeface="Calibri"/>
               </a:rPr>
-              <a:t>Score each framework on its own full country set — what share of the countries a dataset actually covers shows a significant levels association? The SDG database covers 42 countries and 30 of them have at least one FDR-significant series (71%). The HDR covers 150, of which 77 are significant on at least one of the five indicators (51%) and 63 on the composite alone (42%). On coverage the SDG framework wins, and that should be conceded plainly — asking whether any of roughly 456 series is significant is a far easier bar than asking about five.</a:t>
+              <a:t>Score each framework on its own full country set. At the loosest possible bar — at least one indicator significant in levels — the SDG framework wins: 30 of its 42 countries qualify (71%) against 77 of the HDR's 150 (51%). Conceded plainly, because it is true.</a:t>
+            </a:r>
+          </a:p>
+          <a:p>
+            <a:pPr>
+              <a:lnSpc>
+                <a:spcPct val="132000"/>
+              </a:lnSpc>
+              <a:spcBef>
+                <a:spcPts val="0"/>
+              </a:spcBef>
+              <a:spcAft>
+                <a:spcPts val="1100"/>
+              </a:spcAft>
+            </a:pPr>
+            <a:r>
+              <a:rPr sz="1150" b="0" i="0">
+                <a:solidFill>
+                  <a:srgbClr val="5A6068"/>
+                </a:solidFill>
+                <a:latin typeface="Calibri"/>
+              </a:rPr>
+              <a:t>But that bar is not the same test on both sides. One of roughly 456 series is a far weaker requirement than one of five. Requiring instead a share of each country's own indicators makes the bar comparable, and the ordering reverses hard. At one indicator in five — the HDI's loosest bar expressed proportionally — the HDI reaches 51% of its countries and the SDG framework 17% of its own. The median SDG country has 2.4% of its series significant; the best, Canada, reaches 34.9%. Above roughly 35% no SDG country qualifies at all, while 44% of HDI countries still clear a three-of-five bar.</a:t>
             </a:r>
           </a:p>
           <a:p>
@@ -4104,7 +4126,7 @@
                 </a:solidFill>
                 <a:latin typeface="Calibri"/>
               </a:rPr>
-              <a:t>Each framework on its own full country set against WHR happiness — 42 countries for the SDG database, 150 for the HDR. Panel b shows every SDG series with usable coverage and where the HDI's five components fall among them.</a:t>
+              <a:t>Each framework on its own full country set against WHR happiness. Panel a sweeps the bar from "any one indicator" to "all of them"; panel b shows every SDG series with usable coverage and where the HDI's five components fall among them.</a:t>
             </a:r>
           </a:p>
         </p:txBody>

--- a/deck/Measured_Where_It_Varies.pptx
+++ b/deck/Measured_Where_It_Varies.pptx
@@ -3663,7 +3663,7 @@
                 </a:solidFill>
                 <a:latin typeface="Consolas"/>
               </a:rPr>
-              <a:t>51% vs 17%</a:t>
+              <a:t>40% vs 30%</a:t>
             </a:r>
           </a:p>
           <a:p>
@@ -3685,7 +3685,7 @@
                 </a:solidFill>
                 <a:latin typeface="Calibri"/>
               </a:rPr>
-              <a:t>HDI vs SDG at a matched bar: 1 in 5 of a country's indicators</a:t>
+              <a:t>HDI's five vs five random SDG series, same countries</a:t>
             </a:r>
           </a:p>
         </p:txBody>
@@ -3727,7 +3727,7 @@
                 </a:solidFill>
                 <a:latin typeface="Consolas"/>
               </a:rPr>
-              <a:t>2.4%</a:t>
+              <a:t>0%</a:t>
             </a:r>
           </a:p>
           <a:p>
@@ -3749,7 +3749,7 @@
                 </a:solidFill>
                 <a:latin typeface="Calibri"/>
               </a:rPr>
-              <a:t>median SDG country: share of its own series significant</a:t>
+              <a:t>median SDG series: significant in no country</a:t>
             </a:r>
           </a:p>
         </p:txBody>
@@ -3926,7 +3926,7 @@
                 </a:solidFill>
                 <a:latin typeface="Georgia"/>
               </a:rPr>
-              <a:t>The SDG framework wins only at the loosest bar; at a comparable one the HDI dominates</a:t>
+              <a:t>Three comparisons, and they do not all point the same way</a:t>
             </a:r>
           </a:p>
         </p:txBody>
@@ -3971,7 +3971,7 @@
                 </a:solidFill>
                 <a:latin typeface="Calibri"/>
               </a:rPr>
-              <a:t>Score each framework on its own full country set. At the loosest possible bar — at least one indicator significant in levels — the SDG framework wins: 30 of its 42 countries qualify (71%) against 77 of the HDR's 150 (51%). Conceded plainly, because it is true.</a:t>
+              <a:t>No single statistic settles which framework tracks wellbeing better, so the commentary should report three and nominate none. Detection: does any indicator show a significant levels association in a given country? The SDG framework reaches 30 of its 42 countries (71%), the HDI 77 of its 150 (51%). This is a fair comparison rather than an artifact — Benjamini–Hochberg under the complete null controls the error rate at the same α whatever the family size — so the SDG lead is genuine statistical power bought with breadth, and should be conceded as such.</a:t>
             </a:r>
           </a:p>
           <a:p>
@@ -3993,7 +3993,7 @@
                 </a:solidFill>
                 <a:latin typeface="Calibri"/>
               </a:rPr>
-              <a:t>But that bar is not the same test on both sides. One of roughly 456 series is a far weaker requirement than one of five. Requiring instead a share of each country's own indicators makes the bar comparable, and the ordering reverses hard. At one indicator in five — the HDI's loosest bar expressed proportionally — the HDI reaches 51% of its countries and the SDG framework 17% of its own. The median SDG country has 2.4% of its series significant; the best, Canada, reaches 34.9%. Above roughly 35% no SDG country qualifies at all, while 44% of HDI countries still clear a three-of-five bar.</a:t>
+              <a:t>Budget-matched: give the SDG framework the same five-indicator budget the HDI gets, drawn at random, 4,000 times. Five random SDG series reach 30% of countries (95% range 19–40%); the HDI's chosen five reach 40% on the same countries. The HDI's selection beats a random five — but lands at the top edge of the random range, not outside it. Most of the SDG framework's advantage in the first comparison is explained by indicator count, and the HDI's advantage at matched budget is real but modest.</a:t>
             </a:r>
           </a:p>
           <a:p>
@@ -4015,7 +4015,29 @@
                 </a:solidFill>
                 <a:latin typeface="Calibri"/>
               </a:rPr>
-              <a:t>Per indicator the ordering reverses completely. Across the 609 SDG series with usable coverage the median series is significant in no country at all, and 54% never clear FDR anywhere. The HDI composite, mean years of schooling and GNI per capita each beat essentially the entire SDG field; expected years of schooling beats 98% of it, and even life expectancy — the HDI's weakest component — beats 90%. The HDI is not a broader instrument than the SDG framework. It is a vastly more efficient one.</a:t>
+              <a:t>Per indicator: across the 609 SDG series with usable coverage the median series is significant in no country at all, and 54% never clear FDR anywhere. The HDI composite, mean schooling and GNI per capita each beat essentially the whole field; even life expectancy, the HDI's weakest component, beats 90% of it. This is the strongest claim because it requires no cross-framework normalisation — though it does set the HDI's best against the SDG median, and the budget-matched test shows that is a generous framing.</a:t>
+            </a:r>
+          </a:p>
+          <a:p>
+            <a:pPr>
+              <a:lnSpc>
+                <a:spcPct val="132000"/>
+              </a:lnSpc>
+              <a:spcBef>
+                <a:spcPts val="0"/>
+              </a:spcBef>
+              <a:spcAft>
+                <a:spcPts val="1100"/>
+              </a:spcAft>
+            </a:pPr>
+            <a:r>
+              <a:rPr sz="1150" b="0" i="0">
+                <a:solidFill>
+                  <a:srgbClr val="5A6068"/>
+                </a:solidFill>
+                <a:latin typeface="Calibri"/>
+              </a:rPr>
+              <a:t>An earlier draft normalised by the share of each country's own indicators. That was dropped: it penalises breadth for its own sake — bolt a hundred irrelevant series onto the HDI and its score collapses without any loss of information — and the error-rate argument above shows the detection comparison never needed rescuing.</a:t>
             </a:r>
           </a:p>
         </p:txBody>
@@ -4064,7 +4086,7 @@
       </p:sp>
       <p:pic>
         <p:nvPicPr>
-          <p:cNvPr id="6" name="Picture 5" descr="framework_coverage_efficiency.png"/>
+          <p:cNvPr id="6" name="Picture 5" descr="framework_three_comparisons.png"/>
           <p:cNvPicPr>
             <a:picLocks noChangeAspect="1"/>
           </p:cNvPicPr>
@@ -4078,8 +4100,8 @@
         </p:blipFill>
         <p:spPr>
           <a:xfrm>
-            <a:off x="5120640" y="1843147"/>
-            <a:ext cx="6537960" cy="2705362"/>
+            <a:off x="5120640" y="2093715"/>
+            <a:ext cx="6537960" cy="2204226"/>
           </a:xfrm>
           <a:prstGeom prst="rect">
             <a:avLst/>
@@ -4126,7 +4148,7 @@
                 </a:solidFill>
                 <a:latin typeface="Calibri"/>
               </a:rPr>
-              <a:t>Each framework on its own full country set against WHR happiness. Panel a sweeps the bar from "any one indicator" to "all of them"; panel b shows every SDG series with usable coverage and where the HDI's five components fall among them.</a:t>
+              <a:t>Each framework on its own full country set against WHR happiness, except panel b which restricts the HDI to the 42 SDG countries so the budgets are comparable.</a:t>
             </a:r>
           </a:p>
         </p:txBody>

--- a/deck/Measured_Where_It_Varies.pptx
+++ b/deck/Measured_Where_It_Varies.pptx
@@ -48,7 +48,6 @@
     <p:sldId id="296" r:id="rId47"/>
     <p:sldId id="297" r:id="rId48"/>
     <p:sldId id="298" r:id="rId49"/>
-    <p:sldId id="299" r:id="rId50"/>
   </p:sldIdLst>
   <p:sldSz cx="12191695" cy="6858000" type="screen4x3"/>
   <p:notesSz cx="6858000" cy="9144000"/>
@@ -3310,7 +3309,7 @@
                 </a:solidFill>
                 <a:latin typeface="Georgia"/>
               </a:rPr>
-              <a:t>A commentary in three acts, on why development predicts where wellbeing is high but not when it rises — and on education, health and social trust, which track lived experience once each is measured somewhere it still moves</a:t>
+              <a:t>A commentary in three acts, on why development predicts where wellbeing is high but not when it rises — and on three ways a measurement framework loses sight of a domain that matters: the wrong construct, a variable that has stopped varying, and no coverage at all</a:t>
             </a:r>
           </a:p>
         </p:txBody>
@@ -3573,7 +3572,7 @@
                 </a:solidFill>
                 <a:latin typeface="Georgia"/>
               </a:rPr>
-              <a:t>Education, health, and why the frameworks disagree</a:t>
+              <a:t>Education, health, and three ways to lose a domain</a:t>
             </a:r>
           </a:p>
         </p:txBody>
@@ -3612,13 +3611,13 @@
               </a:spcAft>
             </a:pPr>
             <a:r>
-              <a:rPr sz="1250" b="0" i="1">
+              <a:rPr sz="1350" b="0" i="1">
                 <a:solidFill>
                   <a:srgbClr val="9AA4B0"/>
                 </a:solidFill>
                 <a:latin typeface="Georgia"/>
               </a:rPr>
-              <a:t>Two results and a discussion. Education leads the HDI and the access construct of SDG4, and is the smallest effect anywhere at the individual level. Health leads the SDG framework and the individual data, and is weak in exactly one place, for a reason we can name. Social trust leads wherever it is measured, which is almost nowhere. Every disagreement between the frameworks turns out to be about operationalisation — which construct they count, and whether the variable they chose still varies.</a:t>
+              <a:t>Two results and a coverage gap, and between them three ways a framework can lose a domain. Education leads the HDI and the access construct of SDG4, and disappears when SDG4 is read pooled — the wrong construct. Health leads the SDG framework and the individual data, and is weak in exactly one place, the HDI, whose health input has run out of variance — the wrong variable. Social trust is barely collected at all — no measurement to read either way.</a:t>
             </a:r>
           </a:p>
         </p:txBody>
@@ -3852,7 +3851,7 @@
                 </a:solidFill>
                 <a:latin typeface="Consolas"/>
               </a:rPr>
-              <a:t>1 of 16</a:t>
+              <a:t>147 of 163</a:t>
             </a:r>
           </a:p>
           <a:p>
@@ -3874,7 +3873,7 @@
                 </a:solidFill>
                 <a:latin typeface="Calibri"/>
               </a:rPr>
-              <a:t>SDG trust country-series testable at all, not 1 of 163</a:t>
+              <a:t>SDG trust country-series with too few years to compute at all</a:t>
             </a:r>
           </a:p>
         </p:txBody>
@@ -6987,7 +6986,7 @@
                 </a:solidFill>
                 <a:latin typeface="Calibri"/>
               </a:rPr>
-              <a:t>Education, health, and the blind spots.</a:t>
+              <a:t>Education, health, and three ways to lose a domain.</a:t>
             </a:r>
           </a:p>
           <a:p>
@@ -7009,7 +7008,7 @@
                 </a:solidFill>
                 <a:latin typeface="Calibri"/>
               </a:rPr>
-              <a:t>Education's rank swings on which construct a framework counts, health's on whether its variable still varies, and social trust is barely testable at all.</a:t>
+              <a:t>The wrong construct, a variable that has stopped varying, and a domain never collected often enough to test.</a:t>
             </a:r>
           </a:p>
         </p:txBody>
@@ -7199,7 +7198,7 @@
         <p:spPr>
           <a:xfrm>
             <a:off x="566928" y="502920"/>
-            <a:ext cx="8595360" cy="274320"/>
+            <a:ext cx="4160520" cy="274320"/>
           </a:xfrm>
           <a:prstGeom prst="rect">
             <a:avLst/>
@@ -7227,7 +7226,7 @@
                 </a:solidFill>
                 <a:latin typeface="Consolas"/>
               </a:rPr>
-              <a:t>DISCUSSION · SOCIAL TRUST</a:t>
+              <a:t>DISCUSSION · THE COVERAGE GAP</a:t>
             </a:r>
           </a:p>
         </p:txBody>
@@ -7241,7 +7240,7 @@
         <p:spPr>
           <a:xfrm>
             <a:off x="566928" y="914400"/>
-            <a:ext cx="8595360" cy="1371600"/>
+            <a:ext cx="4160520" cy="1371600"/>
           </a:xfrm>
           <a:prstGeom prst="rect">
             <a:avLst/>
@@ -7266,13 +7265,13 @@
               </a:spcAft>
             </a:pPr>
             <a:r>
-              <a:rPr sz="2700" b="0" i="0">
+              <a:rPr sz="2300" b="0" i="0">
                 <a:solidFill>
                   <a:srgbClr val="14171C"/>
                 </a:solidFill>
                 <a:latin typeface="Georgia"/>
               </a:rPr>
-              <a:t>The interesting case, and the one the measurement apparatus handles worst</a:t>
+              <a:t>A third way to lose a domain: never measure it enough to find out</a:t>
             </a:r>
           </a:p>
         </p:txBody>
@@ -7285,8 +7284,8 @@
         </p:nvSpPr>
         <p:spPr>
           <a:xfrm>
-            <a:off x="566928" y="2286000"/>
-            <a:ext cx="8595360" cy="3840480"/>
+            <a:off x="566928" y="2331720"/>
+            <a:ext cx="4160520" cy="3840480"/>
           </a:xfrm>
           <a:prstGeom prst="rect">
             <a:avLst/>
@@ -7311,13 +7310,13 @@
               </a:spcAft>
             </a:pPr>
             <a:r>
-              <a:rPr sz="1400" b="0" i="0">
+              <a:rPr sz="900" b="0" i="0">
                 <a:solidFill>
                   <a:srgbClr val="5A6068"/>
                 </a:solidFill>
                 <a:latin typeface="Calibri"/>
               </a:rPr>
-              <a:t>Trust is not a headline result here and should not be presented as one — it rests on a single instrument with a live shared-method caveat. It is in the paper because the reason it cannot be a headline is itself the commentary’s subject.</a:t>
+              <a:t>Education and health are the same failure in two costumes — a framework measuring the wrong thing. Social trust is a different one. The SDG database carries 13 trust- and satisfaction-adjacent series, mostly Goal 16, but their median coverage is one year per country-series against six database-wide. The design needs four: 147 of the 163 country-series are never computed at all, and 1 of the 16 that can be is significant. Report that as “1 of 16 testable”, never “1 of 163” — the latter reads as a null when it is overwhelmingly a coverage gap.</a:t>
             </a:r>
           </a:p>
           <a:p>
@@ -7333,13 +7332,13 @@
               </a:spcAft>
             </a:pPr>
             <a:r>
-              <a:rPr sz="1400" b="0" i="0">
+              <a:rPr sz="900" b="0" i="0">
                 <a:solidFill>
                   <a:srgbClr val="5A6068"/>
                 </a:solidFill>
                 <a:latin typeface="Calibri"/>
               </a:rPr>
-              <a:t>Where it is measured it performs: significant in 34 of 36 ESS countries, with a median R² of 0.041 — four times education’s 0.0098, though well below health’s 0.091. Neither the HDI nor the subnational HDI measures it at all.</a:t>
+              <a:t>Untestable in this design is not untestable in principle, so we pulled the raw values and ran the series across countries instead of across years. Nine of 13 clear a 12-country minimum and four are significant: bribery paid by individuals (−0.55) and firms (−0.51), inclusive decision-making (−0.42), satisfaction with healthcare (+0.33). All four land below the HDI and its components on the same 134 countries (|r| 0.71–0.83); the broadest is Gallup World Poll, the survey that also produces the ladder; and none of the 13 measures interpersonal trust.</a:t>
             </a:r>
           </a:p>
           <a:p>
@@ -7355,35 +7354,13 @@
               </a:spcAft>
             </a:pPr>
             <a:r>
-              <a:rPr sz="1400" b="0" i="0">
+              <a:rPr sz="900" b="0" i="0">
                 <a:solidFill>
                   <a:srgbClr val="5A6068"/>
                 </a:solidFill>
                 <a:latin typeface="Calibri"/>
               </a:rPr>
-              <a:t>The SDG framework appears to: 13 trust- and satisfaction-adjacent series, mostly Goal 16 — satisfaction with public services, belief that decision-making is inclusive, bribery prevalence. But their median coverage is one year per country-series against six database-wide. The design needs at least four years; 147 of the 163 country-series fall short and are never computed at all. Of the 16 that can be run, 1 is significant.</a:t>
-            </a:r>
-          </a:p>
-          <a:p>
-            <a:pPr>
-              <a:lnSpc>
-                <a:spcPct val="132000"/>
-              </a:lnSpc>
-              <a:spcBef>
-                <a:spcPts val="0"/>
-              </a:spcBef>
-              <a:spcAft>
-                <a:spcPts val="1100"/>
-              </a:spcAft>
-            </a:pPr>
-            <a:r>
-              <a:rPr sz="1400" b="0" i="0">
-                <a:solidFill>
-                  <a:srgbClr val="5A6068"/>
-                </a:solidFill>
-                <a:latin typeface="Calibri"/>
-              </a:rPr>
-              <a:t>Report that as “1 of 16 testable”, never “1 of 163”. The latter reads as a null when it is overwhelmingly a coverage gap — and reporting a coverage gap as a null would repeat the exact error this commentary accuses the frameworks of making.</a:t>
+              <a:t>So this is not a result about trust. Trust’s own evidence is a single instrument — 34 of 36 ESS countries at a median R² of 0.041 — with a shared-method caveat no external source can answer. It is a result about the frameworks. Education and health both sit inside the HDI; trust sits outside all of them, which makes it the clearest case that what is missing is scope rather than indicator choice.</a:t>
             </a:r>
           </a:p>
         </p:txBody>
@@ -7426,6 +7403,75 @@
                 <a:latin typeface="Consolas"/>
               </a:rPr>
               <a:t>II</a:t>
+            </a:r>
+          </a:p>
+        </p:txBody>
+      </p:sp>
+      <p:pic>
+        <p:nvPicPr>
+          <p:cNvPr id="6" name="Picture 5" descr="K1_sdg_trust_cross_section.png"/>
+          <p:cNvPicPr>
+            <a:picLocks noChangeAspect="1"/>
+          </p:cNvPicPr>
+          <p:nvPr/>
+        </p:nvPicPr>
+        <p:blipFill>
+          <a:blip r:embed="rId2"/>
+          <a:stretch>
+            <a:fillRect/>
+          </a:stretch>
+        </p:blipFill>
+        <p:spPr>
+          <a:xfrm>
+            <a:off x="5120640" y="1690377"/>
+            <a:ext cx="6537960" cy="3010902"/>
+          </a:xfrm>
+          <a:prstGeom prst="rect">
+            <a:avLst/>
+          </a:prstGeom>
+        </p:spPr>
+      </p:pic>
+      <p:sp>
+        <p:nvSpPr>
+          <p:cNvPr id="7" name="TextBox 6"/>
+          <p:cNvSpPr txBox="1"/>
+          <p:nvPr/>
+        </p:nvSpPr>
+        <p:spPr>
+          <a:xfrm>
+            <a:off x="5120640" y="5897880"/>
+            <a:ext cx="6537960" cy="731520"/>
+          </a:xfrm>
+          <a:prstGeom prst="rect">
+            <a:avLst/>
+          </a:prstGeom>
+          <a:noFill/>
+        </p:spPr>
+        <p:txBody>
+          <a:bodyPr wrap="square" lIns="0" rIns="0" tIns="0" bIns="0">
+            <a:spAutoFit/>
+          </a:bodyPr>
+          <a:lstStyle/>
+          <a:p>
+            <a:pPr>
+              <a:lnSpc>
+                <a:spcPct val="125000"/>
+              </a:lnSpc>
+              <a:spcBef>
+                <a:spcPts val="0"/>
+              </a:spcBef>
+              <a:spcAft>
+                <a:spcPts val="0"/>
+              </a:spcAft>
+            </a:pPr>
+            <a:r>
+              <a:rPr sz="900" b="0" i="0">
+                <a:solidFill>
+                  <a:srgbClr val="868D96"/>
+                </a:solidFill>
+                <a:latin typeface="Calibri"/>
+              </a:rPr>
+              <a:t>Nine of the 13 SDG trust- and satisfaction-adjacent series, one observation per country, against the WHR Cantril ladder. Raw values pulled from the UN SDG Global Database API.</a:t>
             </a:r>
           </a:p>
         </p:txBody>
@@ -7493,7 +7539,7 @@
                 </a:solidFill>
                 <a:latin typeface="Consolas"/>
               </a:rPr>
-              <a:t>DISCUSSION · SOCIAL TRUST</a:t>
+              <a:t>THE SYNTHESIS</a:t>
             </a:r>
           </a:p>
         </p:txBody>
@@ -7538,7 +7584,7 @@
                 </a:solidFill>
                 <a:latin typeface="Georgia"/>
               </a:rPr>
-              <a:t>Tested the only way its coverage allows, and it still does not become a result</a:t>
+              <a:t>The pattern of blind spots is the result</a:t>
             </a:r>
           </a:p>
         </p:txBody>
@@ -7577,13 +7623,13 @@
               </a:spcAft>
             </a:pPr>
             <a:r>
-              <a:rPr sz="1075" b="0" i="0">
+              <a:rPr sz="1150" b="0" i="0">
                 <a:solidFill>
                   <a:srgbClr val="5A6068"/>
                 </a:solidFill>
                 <a:latin typeface="Calibri"/>
               </a:rPr>
-              <a:t>One year per country is useless longitudinally and perfectly usable cross-sectionally, so we pulled the raw values from the UN SDG database and ran the series against the ladder across countries. Nine of the 13 clear a 12-country minimum and four are significant: bribery paid by individuals (−0.55) and firms (−0.51), inclusive decision-making (−0.42), satisfaction with healthcare (+0.33).</a:t>
+              <a:t>Laid out side by side, the three domains fail in three different ways. Education leads the HDI and the access construct of SDG4, is near-universal at the individual level, and looks weak only where a framework pools access with parity and proficiency. Health leads the SDG framework and the individual data, and looks weak only where a framework reads it through a variable that has stopped varying. Trust looks weak nowhere and strong nowhere, because outside one survey it is barely collected.</a:t>
             </a:r>
           </a:p>
           <a:p>
@@ -7599,35 +7645,13 @@
               </a:spcAft>
             </a:pPr>
             <a:r>
-              <a:rPr sz="1075" b="0" i="0">
+              <a:rPr sz="1150" b="0" i="0">
                 <a:solidFill>
                   <a:srgbClr val="5A6068"/>
                 </a:solidFill>
                 <a:latin typeface="Calibri"/>
               </a:rPr>
-              <a:t>Three things stop that being a rescue. Every one of the four is weaker than what the frameworks already carry — on the same 134 countries the HDI and its components sit at |r| 0.71–0.83. The broadest series, satisfaction with healthcare, is Gallup World Poll, the same survey that produces the ladder. And none of the 13 measures interpersonal trust: they measure institutional confidence, a different construct.</a:t>
-            </a:r>
-          </a:p>
-          <a:p>
-            <a:pPr>
-              <a:lnSpc>
-                <a:spcPct val="132000"/>
-              </a:lnSpc>
-              <a:spcBef>
-                <a:spcPts val="0"/>
-              </a:spcBef>
-              <a:spcAft>
-                <a:spcPts val="1100"/>
-              </a:spcAft>
-            </a:pPr>
-            <a:r>
-              <a:rPr sz="1075" b="0" i="0">
-                <a:solidFill>
-                  <a:srgbClr val="5A6068"/>
-                </a:solidFill>
-                <a:latin typeface="Calibri"/>
-              </a:rPr>
-              <a:t>Income control kills all nine — but it also kills the HDI (+0.82 raw, +0.09 net). No cross-section of countries separates anything from income, which is why the levels-and-differences design exists, and the panel says so to stop the null being read as trust-specific.</a:t>
+              <a:t>None of these is a disagreement about the world. Each is an operationalisation choice — which construct, which variable, whether to collect it at all — which is why the contribution is not a ranking of domains but an account of why the rankings differ.</a:t>
             </a:r>
           </a:p>
         </p:txBody>
@@ -7676,7 +7700,7 @@
       </p:sp>
       <p:pic>
         <p:nvPicPr>
-          <p:cNvPr id="6" name="Picture 5" descr="K1_sdg_trust_cross_section.png"/>
+          <p:cNvPr id="6" name="Picture 5" descr="domain_scorecard.png"/>
           <p:cNvPicPr>
             <a:picLocks noChangeAspect="1"/>
           </p:cNvPicPr>
@@ -7690,8 +7714,8 @@
         </p:blipFill>
         <p:spPr>
           <a:xfrm>
-            <a:off x="5120640" y="1690377"/>
-            <a:ext cx="6537960" cy="3010902"/>
+            <a:off x="5120640" y="1469807"/>
+            <a:ext cx="6537960" cy="3452042"/>
           </a:xfrm>
           <a:prstGeom prst="rect">
             <a:avLst/>
@@ -7738,7 +7762,7 @@
                 </a:solidFill>
                 <a:latin typeface="Calibri"/>
               </a:rPr>
-              <a:t>Nine of the 13 SDG trust- and satisfaction-adjacent series, one observation per country, against the WHR Cantril ladder. Raw values pulled from the UN SDG Global Database API.</a:t>
+              <a:t>The three domains against the five instruments. Metrics differ by column and are given under each heading; the colours encode whether the domain tracks wellbeing there, shows little signal, or cannot be tested at all.</a:t>
             </a:r>
           </a:p>
         </p:txBody>
@@ -7806,7 +7830,7 @@
                 </a:solidFill>
                 <a:latin typeface="Consolas"/>
               </a:rPr>
-              <a:t>THE SYNTHESIS</a:t>
+              <a:t>THE COMPOSITE</a:t>
             </a:r>
           </a:p>
         </p:txBody>
@@ -7851,7 +7875,7 @@
                 </a:solidFill>
                 <a:latin typeface="Georgia"/>
               </a:rPr>
-              <a:t>The pattern of blind spots is the result</a:t>
+              <a:t>The three panels the commentary needs</a:t>
             </a:r>
           </a:p>
         </p:txBody>
@@ -7896,7 +7920,7 @@
                 </a:solidFill>
                 <a:latin typeface="Calibri"/>
               </a:rPr>
-              <a:t>Laid out side by side, the three domains have three signatures. Education leads the HDI and the access construct of SDG4, is near-universal at the individual level, and is the smallest effect anywhere — a structural variable behaving exactly as one should. Health leads the SDG framework and the individual data, and is weak in precisely one place, the HDI, for a reason we can name. Trust leads nothing it is not the only candidate for, and is invisible to every development framework.</a:t>
+              <a:t>Commentaries carry one or two display items, so the argument has to fit in a single figure: the replicated collapse, the inversion of the health–education ranking across instruments, and the method check that only health passes.</a:t>
             </a:r>
           </a:p>
           <a:p>
@@ -7918,7 +7942,7 @@
                 </a:solidFill>
                 <a:latin typeface="Calibri"/>
               </a:rPr>
-              <a:t>None of these disagreements is about the world. Every one is about an operationalisation choice — which construct, which variable, which specification — which is why the contribution is not a ranking of domains but an account of why the rankings differ.</a:t>
+              <a:t>One caution for the caption. Panels b and c both put measures with different units on a shared axis — panel b normalises to the health-plus-education pair, panel c to the leading domain within each source. Both are there to make an ordering readable, not a magnitude, and the raw values are printed on the bars so a reader can check that.</a:t>
             </a:r>
           </a:p>
         </p:txBody>
@@ -7967,7 +7991,7 @@
       </p:sp>
       <p:pic>
         <p:nvPicPr>
-          <p:cNvPr id="6" name="Picture 5" descr="domain_scorecard.png"/>
+          <p:cNvPr id="6" name="Picture 5" descr="Figure1_commentary.png"/>
           <p:cNvPicPr>
             <a:picLocks noChangeAspect="1"/>
           </p:cNvPicPr>
@@ -7981,8 +8005,8 @@
         </p:blipFill>
         <p:spPr>
           <a:xfrm>
-            <a:off x="5120640" y="1469807"/>
-            <a:ext cx="6537960" cy="3452042"/>
+            <a:off x="5120640" y="808954"/>
+            <a:ext cx="6537960" cy="4773748"/>
           </a:xfrm>
           <a:prstGeom prst="rect">
             <a:avLst/>
@@ -8029,7 +8053,7 @@
                 </a:solidFill>
                 <a:latin typeface="Calibri"/>
               </a:rPr>
-              <a:t>The three domains against the five instruments. Metrics differ by column and are given under each heading; the colours encode whether the domain tracks wellbeing there, shows little signal, or cannot be tested at all.</a:t>
+              <a:t>Proposed Figure 1 for submission. Draft — see the caution above on panels b and c.</a:t>
             </a:r>
           </a:p>
         </p:txBody>
@@ -8043,6 +8067,599 @@
 </file>
 
 <file path=ppt/slides/slide23.xml><?xml version="1.0" encoding="utf-8"?>
+<p:sld xmlns:a="http://schemas.openxmlformats.org/drawingml/2006/main" xmlns:p="http://schemas.openxmlformats.org/presentationml/2006/main" xmlns:r="http://schemas.openxmlformats.org/officeDocument/2006/relationships">
+  <p:cSld>
+    <p:bg>
+      <p:bgPr>
+        <a:solidFill>
+          <a:srgbClr val="E8EBEF"/>
+        </a:solidFill>
+        <a:effectLst/>
+      </p:bgPr>
+    </p:bg>
+    <p:spTree>
+      <p:nvGrpSpPr>
+        <p:cNvPr id="1" name=""/>
+        <p:cNvGrpSpPr/>
+        <p:nvPr/>
+      </p:nvGrpSpPr>
+      <p:grpSpPr/>
+      <p:sp>
+        <p:nvSpPr>
+          <p:cNvPr id="2" name="Rectangle 1"/>
+          <p:cNvSpPr/>
+          <p:nvPr/>
+        </p:nvSpPr>
+        <p:spPr>
+          <a:xfrm>
+            <a:off x="566928" y="2103120"/>
+            <a:ext cx="54864" cy="2377440"/>
+          </a:xfrm>
+          <a:prstGeom prst="rect">
+            <a:avLst/>
+          </a:prstGeom>
+          <a:solidFill>
+            <a:srgbClr val="17549E"/>
+          </a:solidFill>
+          <a:ln>
+            <a:noFill/>
+          </a:ln>
+          <a:effectLst/>
+        </p:spPr>
+        <p:style>
+          <a:lnRef idx="1">
+            <a:schemeClr val="accent1"/>
+          </a:lnRef>
+          <a:fillRef idx="3">
+            <a:schemeClr val="accent1"/>
+          </a:fillRef>
+          <a:effectRef idx="2">
+            <a:schemeClr val="accent1"/>
+          </a:effectRef>
+          <a:fontRef idx="minor">
+            <a:schemeClr val="lt1"/>
+          </a:fontRef>
+        </p:style>
+        <p:txBody>
+          <a:bodyPr rtlCol="0" anchor="ctr"/>
+          <a:lstStyle/>
+          <a:p>
+            <a:pPr algn="ctr"/>
+          </a:p>
+        </p:txBody>
+      </p:sp>
+      <p:sp>
+        <p:nvSpPr>
+          <p:cNvPr id="3" name="TextBox 2"/>
+          <p:cNvSpPr txBox="1"/>
+          <p:nvPr/>
+        </p:nvSpPr>
+        <p:spPr>
+          <a:xfrm>
+            <a:off x="914400" y="1600200"/>
+            <a:ext cx="8686800" cy="274320"/>
+          </a:xfrm>
+          <a:prstGeom prst="rect">
+            <a:avLst/>
+          </a:prstGeom>
+          <a:noFill/>
+        </p:spPr>
+        <p:txBody>
+          <a:bodyPr wrap="square" lIns="0" rIns="0" tIns="0" bIns="0">
+            <a:spAutoFit/>
+          </a:bodyPr>
+          <a:lstStyle/>
+          <a:p>
+            <a:pPr>
+              <a:spcBef>
+                <a:spcPts val="0"/>
+              </a:spcBef>
+              <a:spcAft>
+                <a:spcPts val="0"/>
+              </a:spcAft>
+            </a:pPr>
+            <a:r>
+              <a:rPr sz="1100" b="0" i="0">
+                <a:solidFill>
+                  <a:srgbClr val="17549E"/>
+                </a:solidFill>
+                <a:latin typeface="Consolas"/>
+              </a:rPr>
+              <a:t>WHERE ACT II LEAVES US</a:t>
+            </a:r>
+          </a:p>
+        </p:txBody>
+      </p:sp>
+      <p:sp>
+        <p:nvSpPr>
+          <p:cNvPr id="4" name="TextBox 3"/>
+          <p:cNvSpPr txBox="1"/>
+          <p:nvPr/>
+        </p:nvSpPr>
+        <p:spPr>
+          <a:xfrm>
+            <a:off x="914400" y="2148840"/>
+            <a:ext cx="9509760" cy="2926080"/>
+          </a:xfrm>
+          <a:prstGeom prst="rect">
+            <a:avLst/>
+          </a:prstGeom>
+          <a:noFill/>
+        </p:spPr>
+        <p:txBody>
+          <a:bodyPr wrap="square" lIns="0" rIns="0" tIns="0" bIns="0">
+            <a:spAutoFit/>
+          </a:bodyPr>
+          <a:lstStyle/>
+          <a:p>
+            <a:pPr>
+              <a:lnSpc>
+                <a:spcPct val="135000"/>
+              </a:lnSpc>
+              <a:spcBef>
+                <a:spcPts val="0"/>
+              </a:spcBef>
+              <a:spcAft>
+                <a:spcPts val="0"/>
+              </a:spcAft>
+            </a:pPr>
+            <a:r>
+              <a:rPr sz="2100" b="0" i="0">
+                <a:solidFill>
+                  <a:srgbClr val="14171C"/>
+                </a:solidFill>
+                <a:latin typeface="Georgia"/>
+              </a:rPr>
+              <a:t>Education leads once it is measured as attainment rather than parity; health leads once it is measured somewhere it still varies; trust cannot be read either way because it was never collected often enough. Three domains, three ways of losing one — the wrong construct, a saturated variable, and no coverage — and none of the three choices was made with wellbeing in mind, because that is not what these frameworks were built for. Which is what makes the third act a question about fit rather than a charge of failure.</a:t>
+            </a:r>
+          </a:p>
+        </p:txBody>
+      </p:sp>
+    </p:spTree>
+  </p:cSld>
+  <p:clrMapOvr>
+    <a:masterClrMapping/>
+  </p:clrMapOvr>
+</p:sld>
+</file>
+
+<file path=ppt/slides/slide24.xml><?xml version="1.0" encoding="utf-8"?>
+<p:sld xmlns:a="http://schemas.openxmlformats.org/drawingml/2006/main" xmlns:p="http://schemas.openxmlformats.org/presentationml/2006/main" xmlns:r="http://schemas.openxmlformats.org/officeDocument/2006/relationships">
+  <p:cSld>
+    <p:bg>
+      <p:bgPr>
+        <a:solidFill>
+          <a:srgbClr val="14171C"/>
+        </a:solidFill>
+        <a:effectLst/>
+      </p:bgPr>
+    </p:bg>
+    <p:spTree>
+      <p:nvGrpSpPr>
+        <p:cNvPr id="1" name=""/>
+        <p:cNvGrpSpPr/>
+        <p:nvPr/>
+      </p:nvGrpSpPr>
+      <p:grpSpPr/>
+      <p:sp>
+        <p:nvSpPr>
+          <p:cNvPr id="2" name="TextBox 1"/>
+          <p:cNvSpPr txBox="1"/>
+          <p:nvPr/>
+        </p:nvSpPr>
+        <p:spPr>
+          <a:xfrm>
+            <a:off x="8229600" y="822960"/>
+            <a:ext cx="3291840" cy="4114800"/>
+          </a:xfrm>
+          <a:prstGeom prst="rect">
+            <a:avLst/>
+          </a:prstGeom>
+          <a:noFill/>
+        </p:spPr>
+        <p:txBody>
+          <a:bodyPr wrap="square" lIns="0" rIns="0" tIns="0" bIns="0">
+            <a:spAutoFit/>
+          </a:bodyPr>
+          <a:lstStyle/>
+          <a:p>
+            <a:pPr algn="r">
+              <a:spcBef>
+                <a:spcPts val="0"/>
+              </a:spcBef>
+              <a:spcAft>
+                <a:spcPts val="0"/>
+              </a:spcAft>
+            </a:pPr>
+            <a:r>
+              <a:rPr sz="20000" b="0" i="0">
+                <a:solidFill>
+                  <a:srgbClr val="2A3340"/>
+                </a:solidFill>
+                <a:latin typeface="Georgia"/>
+              </a:rPr>
+              <a:t>III</a:t>
+            </a:r>
+          </a:p>
+        </p:txBody>
+      </p:sp>
+      <p:sp>
+        <p:nvSpPr>
+          <p:cNvPr id="3" name="Rectangle 2"/>
+          <p:cNvSpPr/>
+          <p:nvPr/>
+        </p:nvSpPr>
+        <p:spPr>
+          <a:xfrm>
+            <a:off x="566928" y="1371600"/>
+            <a:ext cx="7315200" cy="25400"/>
+          </a:xfrm>
+          <a:prstGeom prst="rect">
+            <a:avLst/>
+          </a:prstGeom>
+          <a:solidFill>
+            <a:srgbClr val="C9D8EC"/>
+          </a:solidFill>
+          <a:ln>
+            <a:noFill/>
+          </a:ln>
+          <a:effectLst/>
+        </p:spPr>
+        <p:style>
+          <a:lnRef idx="1">
+            <a:schemeClr val="accent1"/>
+          </a:lnRef>
+          <a:fillRef idx="3">
+            <a:schemeClr val="accent1"/>
+          </a:fillRef>
+          <a:effectRef idx="2">
+            <a:schemeClr val="accent1"/>
+          </a:effectRef>
+          <a:fontRef idx="minor">
+            <a:schemeClr val="lt1"/>
+          </a:fontRef>
+        </p:style>
+        <p:txBody>
+          <a:bodyPr rtlCol="0" anchor="ctr"/>
+          <a:lstStyle/>
+          <a:p>
+            <a:pPr algn="ctr"/>
+          </a:p>
+        </p:txBody>
+      </p:sp>
+      <p:sp>
+        <p:nvSpPr>
+          <p:cNvPr id="4" name="TextBox 3"/>
+          <p:cNvSpPr txBox="1"/>
+          <p:nvPr/>
+        </p:nvSpPr>
+        <p:spPr>
+          <a:xfrm>
+            <a:off x="566928" y="960120"/>
+            <a:ext cx="5486400" cy="274320"/>
+          </a:xfrm>
+          <a:prstGeom prst="rect">
+            <a:avLst/>
+          </a:prstGeom>
+          <a:noFill/>
+        </p:spPr>
+        <p:txBody>
+          <a:bodyPr wrap="square" lIns="0" rIns="0" tIns="0" bIns="0">
+            <a:spAutoFit/>
+          </a:bodyPr>
+          <a:lstStyle/>
+          <a:p>
+            <a:pPr>
+              <a:spcBef>
+                <a:spcPts val="0"/>
+              </a:spcBef>
+              <a:spcAft>
+                <a:spcPts val="0"/>
+              </a:spcAft>
+            </a:pPr>
+            <a:r>
+              <a:rPr sz="1100" b="0" i="0">
+                <a:solidFill>
+                  <a:srgbClr val="C9D8EC"/>
+                </a:solidFill>
+                <a:latin typeface="Consolas"/>
+              </a:rPr>
+              <a:t>ACT III</a:t>
+            </a:r>
+          </a:p>
+        </p:txBody>
+      </p:sp>
+      <p:sp>
+        <p:nvSpPr>
+          <p:cNvPr id="5" name="TextBox 4"/>
+          <p:cNvSpPr txBox="1"/>
+          <p:nvPr/>
+        </p:nvSpPr>
+        <p:spPr>
+          <a:xfrm>
+            <a:off x="566928" y="1783080"/>
+            <a:ext cx="7223760" cy="1828800"/>
+          </a:xfrm>
+          <a:prstGeom prst="rect">
+            <a:avLst/>
+          </a:prstGeom>
+          <a:noFill/>
+        </p:spPr>
+        <p:txBody>
+          <a:bodyPr wrap="square" lIns="0" rIns="0" tIns="0" bIns="0">
+            <a:spAutoFit/>
+          </a:bodyPr>
+          <a:lstStyle/>
+          <a:p>
+            <a:pPr>
+              <a:lnSpc>
+                <a:spcPct val="102000"/>
+              </a:lnSpc>
+              <a:spcBef>
+                <a:spcPts val="0"/>
+              </a:spcBef>
+              <a:spcAft>
+                <a:spcPts val="0"/>
+              </a:spcAft>
+            </a:pPr>
+            <a:r>
+              <a:rPr sz="4000" b="0" i="0">
+                <a:solidFill>
+                  <a:srgbClr val="FCFCFB"/>
+                </a:solidFill>
+                <a:latin typeface="Georgia"/>
+              </a:rPr>
+              <a:t>What this may imply for how development is measured</a:t>
+            </a:r>
+          </a:p>
+        </p:txBody>
+      </p:sp>
+      <p:sp>
+        <p:nvSpPr>
+          <p:cNvPr id="6" name="TextBox 5"/>
+          <p:cNvSpPr txBox="1"/>
+          <p:nvPr/>
+        </p:nvSpPr>
+        <p:spPr>
+          <a:xfrm>
+            <a:off x="566928" y="3886200"/>
+            <a:ext cx="6766560" cy="1463040"/>
+          </a:xfrm>
+          <a:prstGeom prst="rect">
+            <a:avLst/>
+          </a:prstGeom>
+          <a:noFill/>
+        </p:spPr>
+        <p:txBody>
+          <a:bodyPr wrap="square" lIns="0" rIns="0" tIns="0" bIns="0">
+            <a:spAutoFit/>
+          </a:bodyPr>
+          <a:lstStyle/>
+          <a:p>
+            <a:pPr>
+              <a:lnSpc>
+                <a:spcPct val="135000"/>
+              </a:lnSpc>
+              <a:spcBef>
+                <a:spcPts val="0"/>
+              </a:spcBef>
+              <a:spcAft>
+                <a:spcPts val="0"/>
+              </a:spcAft>
+            </a:pPr>
+            <a:r>
+              <a:rPr sz="1200" b="0" i="1">
+                <a:solidFill>
+                  <a:srgbClr val="9AA4B0"/>
+                </a:solidFill>
+                <a:latin typeface="Georgia"/>
+              </a:rPr>
+              <a:t>These are implications, not recommendations. The frameworks were not built to track wellbeing and it is no criticism of them that they do not; measured against their own purposes they work. What the three results describe is a disconnect — between what development measurement currently captures and what turns out to track individual lived experience. If wellbeing is to be part of what these frameworks are for, education, health and social trust each say something specific about what capturing it would take.</a:t>
+            </a:r>
+          </a:p>
+        </p:txBody>
+      </p:sp>
+      <p:sp>
+        <p:nvSpPr>
+          <p:cNvPr id="7" name="TextBox 6"/>
+          <p:cNvSpPr txBox="1"/>
+          <p:nvPr/>
+        </p:nvSpPr>
+        <p:spPr>
+          <a:xfrm>
+            <a:off x="566928" y="5623560"/>
+            <a:ext cx="3503066" cy="914400"/>
+          </a:xfrm>
+          <a:prstGeom prst="rect">
+            <a:avLst/>
+          </a:prstGeom>
+          <a:noFill/>
+        </p:spPr>
+        <p:txBody>
+          <a:bodyPr wrap="square" lIns="0" rIns="0" tIns="0" bIns="0">
+            <a:spAutoFit/>
+          </a:bodyPr>
+          <a:lstStyle/>
+          <a:p>
+            <a:pPr>
+              <a:spcBef>
+                <a:spcPts val="0"/>
+              </a:spcBef>
+              <a:spcAft>
+                <a:spcPts val="400"/>
+              </a:spcAft>
+            </a:pPr>
+            <a:r>
+              <a:rPr sz="2200" b="0" i="0">
+                <a:solidFill>
+                  <a:srgbClr val="FCFCFB"/>
+                </a:solidFill>
+                <a:latin typeface="Consolas"/>
+              </a:rPr>
+              <a:t>12.7% vs 0.9%</a:t>
+            </a:r>
+          </a:p>
+          <a:p>
+            <a:pPr>
+              <a:lnSpc>
+                <a:spcPct val="120000"/>
+              </a:lnSpc>
+              <a:spcBef>
+                <a:spcPts val="0"/>
+              </a:spcBef>
+              <a:spcAft>
+                <a:spcPts val="0"/>
+              </a:spcAft>
+            </a:pPr>
+            <a:r>
+              <a:rPr sz="1000" b="0" i="0">
+                <a:solidFill>
+                  <a:srgbClr val="8A94A0"/>
+                </a:solidFill>
+                <a:latin typeface="Calibri"/>
+              </a:rPr>
+              <a:t>SDG4 access against measured learning outcomes</a:t>
+            </a:r>
+          </a:p>
+        </p:txBody>
+      </p:sp>
+      <p:sp>
+        <p:nvSpPr>
+          <p:cNvPr id="8" name="TextBox 7"/>
+          <p:cNvSpPr txBox="1"/>
+          <p:nvPr/>
+        </p:nvSpPr>
+        <p:spPr>
+          <a:xfrm>
+            <a:off x="4344314" y="5623560"/>
+            <a:ext cx="3503066" cy="914400"/>
+          </a:xfrm>
+          <a:prstGeom prst="rect">
+            <a:avLst/>
+          </a:prstGeom>
+          <a:noFill/>
+        </p:spPr>
+        <p:txBody>
+          <a:bodyPr wrap="square" lIns="0" rIns="0" tIns="0" bIns="0">
+            <a:spAutoFit/>
+          </a:bodyPr>
+          <a:lstStyle/>
+          <a:p>
+            <a:pPr>
+              <a:spcBef>
+                <a:spcPts val="0"/>
+              </a:spcBef>
+              <a:spcAft>
+                <a:spcPts val="400"/>
+              </a:spcAft>
+            </a:pPr>
+            <a:r>
+              <a:rPr sz="2200" b="0" i="0">
+                <a:solidFill>
+                  <a:srgbClr val="FCFCFB"/>
+                </a:solidFill>
+                <a:latin typeface="Consolas"/>
+              </a:rPr>
+              <a:t>11.2% vs 1.2%</a:t>
+            </a:r>
+          </a:p>
+          <a:p>
+            <a:pPr>
+              <a:lnSpc>
+                <a:spcPct val="120000"/>
+              </a:lnSpc>
+              <a:spcBef>
+                <a:spcPts val="0"/>
+              </a:spcBef>
+              <a:spcAft>
+                <a:spcPts val="0"/>
+              </a:spcAft>
+            </a:pPr>
+            <a:r>
+              <a:rPr sz="1000" b="0" i="0">
+                <a:solidFill>
+                  <a:srgbClr val="8A94A0"/>
+                </a:solidFill>
+                <a:latin typeface="Calibri"/>
+              </a:rPr>
+              <a:t>health vs education, SDG data, high-income countries</a:t>
+            </a:r>
+          </a:p>
+        </p:txBody>
+      </p:sp>
+      <p:sp>
+        <p:nvSpPr>
+          <p:cNvPr id="9" name="TextBox 8"/>
+          <p:cNvSpPr txBox="1"/>
+          <p:nvPr/>
+        </p:nvSpPr>
+        <p:spPr>
+          <a:xfrm>
+            <a:off x="8121700" y="5623560"/>
+            <a:ext cx="3503066" cy="914400"/>
+          </a:xfrm>
+          <a:prstGeom prst="rect">
+            <a:avLst/>
+          </a:prstGeom>
+          <a:noFill/>
+        </p:spPr>
+        <p:txBody>
+          <a:bodyPr wrap="square" lIns="0" rIns="0" tIns="0" bIns="0">
+            <a:spAutoFit/>
+          </a:bodyPr>
+          <a:lstStyle/>
+          <a:p>
+            <a:pPr>
+              <a:spcBef>
+                <a:spcPts val="0"/>
+              </a:spcBef>
+              <a:spcAft>
+                <a:spcPts val="400"/>
+              </a:spcAft>
+            </a:pPr>
+            <a:r>
+              <a:rPr sz="2200" b="0" i="0">
+                <a:solidFill>
+                  <a:srgbClr val="FCFCFB"/>
+                </a:solidFill>
+                <a:latin typeface="Consolas"/>
+              </a:rPr>
+              <a:t>1 of 16</a:t>
+            </a:r>
+          </a:p>
+          <a:p>
+            <a:pPr>
+              <a:lnSpc>
+                <a:spcPct val="120000"/>
+              </a:lnSpc>
+              <a:spcBef>
+                <a:spcPts val="0"/>
+              </a:spcBef>
+              <a:spcAft>
+                <a:spcPts val="0"/>
+              </a:spcAft>
+            </a:pPr>
+            <a:r>
+              <a:rPr sz="1000" b="0" i="0">
+                <a:solidFill>
+                  <a:srgbClr val="8A94A0"/>
+                </a:solidFill>
+                <a:latin typeface="Calibri"/>
+              </a:rPr>
+              <a:t>SDG trust country-series a longitudinal design can use</a:t>
+            </a:r>
+          </a:p>
+        </p:txBody>
+      </p:sp>
+    </p:spTree>
+  </p:cSld>
+  <p:clrMapOvr>
+    <a:masterClrMapping/>
+  </p:clrMapOvr>
+</p:sld>
+</file>
+
+<file path=ppt/slides/slide25.xml><?xml version="1.0" encoding="utf-8"?>
 <p:sld xmlns:a="http://schemas.openxmlformats.org/drawingml/2006/main" xmlns:p="http://schemas.openxmlformats.org/presentationml/2006/main" xmlns:r="http://schemas.openxmlformats.org/officeDocument/2006/relationships">
   <p:cSld>
     <p:bg>
@@ -8069,7 +8686,7 @@
         <p:spPr>
           <a:xfrm>
             <a:off x="566928" y="502920"/>
-            <a:ext cx="4160520" cy="274320"/>
+            <a:ext cx="8595360" cy="274320"/>
           </a:xfrm>
           <a:prstGeom prst="rect">
             <a:avLst/>
@@ -8097,7 +8714,7 @@
                 </a:solidFill>
                 <a:latin typeface="Consolas"/>
               </a:rPr>
-              <a:t>THE COMPOSITE</a:t>
+              <a:t>THE DISCONNECT</a:t>
             </a:r>
           </a:p>
         </p:txBody>
@@ -8111,7 +8728,7 @@
         <p:spPr>
           <a:xfrm>
             <a:off x="566928" y="914400"/>
-            <a:ext cx="4160520" cy="1371600"/>
+            <a:ext cx="8595360" cy="1371600"/>
           </a:xfrm>
           <a:prstGeom prst="rect">
             <a:avLst/>
@@ -8136,13 +8753,13 @@
               </a:spcAft>
             </a:pPr>
             <a:r>
-              <a:rPr sz="2300" b="0" i="0">
+              <a:rPr sz="2700" b="0" i="0">
                 <a:solidFill>
                   <a:srgbClr val="14171C"/>
                 </a:solidFill>
                 <a:latin typeface="Georgia"/>
               </a:rPr>
-              <a:t>The three panels the commentary needs</a:t>
+              <a:t>Stating it precisely, and stating what it is not</a:t>
             </a:r>
           </a:p>
         </p:txBody>
@@ -8155,8 +8772,8 @@
         </p:nvSpPr>
         <p:spPr>
           <a:xfrm>
-            <a:off x="566928" y="2331720"/>
-            <a:ext cx="4160520" cy="3840480"/>
+            <a:off x="566928" y="2286000"/>
+            <a:ext cx="8595360" cy="3840480"/>
           </a:xfrm>
           <a:prstGeom prst="rect">
             <a:avLst/>
@@ -8181,13 +8798,13 @@
               </a:spcAft>
             </a:pPr>
             <a:r>
-              <a:rPr sz="1150" b="0" i="0">
+              <a:rPr sz="1350" b="0" i="0">
                 <a:solidFill>
                   <a:srgbClr val="5A6068"/>
                 </a:solidFill>
                 <a:latin typeface="Calibri"/>
               </a:rPr>
-              <a:t>Commentaries carry one or two display items, so the argument has to fit in a single figure: the replicated collapse, the inversion of the health–education ranking across instruments, and the method check that only health passes.</a:t>
+              <a:t>Development indicators tell you reliably where wellbeing is high. They tell you almost nothing about when it will rise. Across every framework tested here, year-on-year indicator movement carries essentially no wellbeing information within the measurement window — a decade or so — and inside countries the domains that lead between them stop leading.</a:t>
             </a:r>
           </a:p>
           <a:p>
@@ -8203,13 +8820,57 @@
               </a:spcAft>
             </a:pPr>
             <a:r>
-              <a:rPr sz="1150" b="0" i="0">
+              <a:rPr sz="1350" b="0" i="0">
                 <a:solidFill>
                   <a:srgbClr val="5A6068"/>
                 </a:solidFill>
                 <a:latin typeface="Calibri"/>
               </a:rPr>
-              <a:t>One caution for the caption. Panels b and c both put measures with different units on a shared axis — panel b normalises to the health-plus-education pair, panel c to the leading domain within each source. Both are there to make an ordering readable, not a magnitude, and the raw values are printed on the bars so a reader can check that.</a:t>
+              <a:t>It is worth being explicit about what that is not. It is not an argument that development frameworks should be kept away from wellbeing, or that they have failed. The HDI and the SDGs were built to track development — capability, deprivation, the 2030 Agenda's negotiated priorities — and on those terms they work. Nothing here says otherwise.</a:t>
+            </a:r>
+          </a:p>
+          <a:p>
+            <a:pPr>
+              <a:lnSpc>
+                <a:spcPct val="132000"/>
+              </a:lnSpc>
+              <a:spcBef>
+                <a:spcPts val="0"/>
+              </a:spcBef>
+              <a:spcAft>
+                <a:spcPts val="1100"/>
+              </a:spcAft>
+            </a:pPr>
+            <a:r>
+              <a:rPr sz="1350" b="0" i="0">
+                <a:solidFill>
+                  <a:srgbClr val="5A6068"/>
+                </a:solidFill>
+                <a:latin typeface="Calibri"/>
+              </a:rPr>
+              <a:t>What the results describe is a disconnect between two things that are often assumed to move together: what these frameworks currently capture, and what tracks how individuals experience their lives. That assumption is reasonable and mostly untested. Tested, it holds between countries and weakens sharply everywhere else.</a:t>
+            </a:r>
+          </a:p>
+          <a:p>
+            <a:pPr>
+              <a:lnSpc>
+                <a:spcPct val="132000"/>
+              </a:lnSpc>
+              <a:spcBef>
+                <a:spcPts val="0"/>
+              </a:spcBef>
+              <a:spcAft>
+                <a:spcPts val="1100"/>
+              </a:spcAft>
+            </a:pPr>
+            <a:r>
+              <a:rPr sz="1350" b="0" i="0">
+                <a:solidFill>
+                  <a:srgbClr val="5A6068"/>
+                </a:solidFill>
+                <a:latin typeface="Calibri"/>
+              </a:rPr>
+              <a:t>So the useful question is not whether development matters. It is which components of it track lived experience, and whether the frameworks are currently in a position to see them. The next three beats take the three results in turn.</a:t>
             </a:r>
           </a:p>
         </p:txBody>
@@ -8251,669 +8912,7 @@
                 </a:solidFill>
                 <a:latin typeface="Consolas"/>
               </a:rPr>
-              <a:t>II</a:t>
-            </a:r>
-          </a:p>
-        </p:txBody>
-      </p:sp>
-      <p:pic>
-        <p:nvPicPr>
-          <p:cNvPr id="6" name="Picture 5" descr="Figure1_commentary.png"/>
-          <p:cNvPicPr>
-            <a:picLocks noChangeAspect="1"/>
-          </p:cNvPicPr>
-          <p:nvPr/>
-        </p:nvPicPr>
-        <p:blipFill>
-          <a:blip r:embed="rId2"/>
-          <a:stretch>
-            <a:fillRect/>
-          </a:stretch>
-        </p:blipFill>
-        <p:spPr>
-          <a:xfrm>
-            <a:off x="5120640" y="808954"/>
-            <a:ext cx="6537960" cy="4773748"/>
-          </a:xfrm>
-          <a:prstGeom prst="rect">
-            <a:avLst/>
-          </a:prstGeom>
-        </p:spPr>
-      </p:pic>
-      <p:sp>
-        <p:nvSpPr>
-          <p:cNvPr id="7" name="TextBox 6"/>
-          <p:cNvSpPr txBox="1"/>
-          <p:nvPr/>
-        </p:nvSpPr>
-        <p:spPr>
-          <a:xfrm>
-            <a:off x="5120640" y="5897880"/>
-            <a:ext cx="6537960" cy="731520"/>
-          </a:xfrm>
-          <a:prstGeom prst="rect">
-            <a:avLst/>
-          </a:prstGeom>
-          <a:noFill/>
-        </p:spPr>
-        <p:txBody>
-          <a:bodyPr wrap="square" lIns="0" rIns="0" tIns="0" bIns="0">
-            <a:spAutoFit/>
-          </a:bodyPr>
-          <a:lstStyle/>
-          <a:p>
-            <a:pPr>
-              <a:lnSpc>
-                <a:spcPct val="125000"/>
-              </a:lnSpc>
-              <a:spcBef>
-                <a:spcPts val="0"/>
-              </a:spcBef>
-              <a:spcAft>
-                <a:spcPts val="0"/>
-              </a:spcAft>
-            </a:pPr>
-            <a:r>
-              <a:rPr sz="900" b="0" i="0">
-                <a:solidFill>
-                  <a:srgbClr val="868D96"/>
-                </a:solidFill>
-                <a:latin typeface="Calibri"/>
-              </a:rPr>
-              <a:t>Proposed Figure 1 for submission. Draft — see the caution above on panels b and c.</a:t>
-            </a:r>
-          </a:p>
-        </p:txBody>
-      </p:sp>
-    </p:spTree>
-  </p:cSld>
-  <p:clrMapOvr>
-    <a:masterClrMapping/>
-  </p:clrMapOvr>
-</p:sld>
-</file>
-
-<file path=ppt/slides/slide24.xml><?xml version="1.0" encoding="utf-8"?>
-<p:sld xmlns:a="http://schemas.openxmlformats.org/drawingml/2006/main" xmlns:p="http://schemas.openxmlformats.org/presentationml/2006/main" xmlns:r="http://schemas.openxmlformats.org/officeDocument/2006/relationships">
-  <p:cSld>
-    <p:bg>
-      <p:bgPr>
-        <a:solidFill>
-          <a:srgbClr val="E8EBEF"/>
-        </a:solidFill>
-        <a:effectLst/>
-      </p:bgPr>
-    </p:bg>
-    <p:spTree>
-      <p:nvGrpSpPr>
-        <p:cNvPr id="1" name=""/>
-        <p:cNvGrpSpPr/>
-        <p:nvPr/>
-      </p:nvGrpSpPr>
-      <p:grpSpPr/>
-      <p:sp>
-        <p:nvSpPr>
-          <p:cNvPr id="2" name="Rectangle 1"/>
-          <p:cNvSpPr/>
-          <p:nvPr/>
-        </p:nvSpPr>
-        <p:spPr>
-          <a:xfrm>
-            <a:off x="566928" y="2103120"/>
-            <a:ext cx="54864" cy="2377440"/>
-          </a:xfrm>
-          <a:prstGeom prst="rect">
-            <a:avLst/>
-          </a:prstGeom>
-          <a:solidFill>
-            <a:srgbClr val="17549E"/>
-          </a:solidFill>
-          <a:ln>
-            <a:noFill/>
-          </a:ln>
-          <a:effectLst/>
-        </p:spPr>
-        <p:style>
-          <a:lnRef idx="1">
-            <a:schemeClr val="accent1"/>
-          </a:lnRef>
-          <a:fillRef idx="3">
-            <a:schemeClr val="accent1"/>
-          </a:fillRef>
-          <a:effectRef idx="2">
-            <a:schemeClr val="accent1"/>
-          </a:effectRef>
-          <a:fontRef idx="minor">
-            <a:schemeClr val="lt1"/>
-          </a:fontRef>
-        </p:style>
-        <p:txBody>
-          <a:bodyPr rtlCol="0" anchor="ctr"/>
-          <a:lstStyle/>
-          <a:p>
-            <a:pPr algn="ctr"/>
-          </a:p>
-        </p:txBody>
-      </p:sp>
-      <p:sp>
-        <p:nvSpPr>
-          <p:cNvPr id="3" name="TextBox 2"/>
-          <p:cNvSpPr txBox="1"/>
-          <p:nvPr/>
-        </p:nvSpPr>
-        <p:spPr>
-          <a:xfrm>
-            <a:off x="914400" y="1600200"/>
-            <a:ext cx="8686800" cy="274320"/>
-          </a:xfrm>
-          <a:prstGeom prst="rect">
-            <a:avLst/>
-          </a:prstGeom>
-          <a:noFill/>
-        </p:spPr>
-        <p:txBody>
-          <a:bodyPr wrap="square" lIns="0" rIns="0" tIns="0" bIns="0">
-            <a:spAutoFit/>
-          </a:bodyPr>
-          <a:lstStyle/>
-          <a:p>
-            <a:pPr>
-              <a:spcBef>
-                <a:spcPts val="0"/>
-              </a:spcBef>
-              <a:spcAft>
-                <a:spcPts val="0"/>
-              </a:spcAft>
-            </a:pPr>
-            <a:r>
-              <a:rPr sz="1100" b="0" i="0">
-                <a:solidFill>
-                  <a:srgbClr val="17549E"/>
-                </a:solidFill>
-                <a:latin typeface="Consolas"/>
-              </a:rPr>
-              <a:t>WHERE ACT II LEAVES US</a:t>
-            </a:r>
-          </a:p>
-        </p:txBody>
-      </p:sp>
-      <p:sp>
-        <p:nvSpPr>
-          <p:cNvPr id="4" name="TextBox 3"/>
-          <p:cNvSpPr txBox="1"/>
-          <p:nvPr/>
-        </p:nvSpPr>
-        <p:spPr>
-          <a:xfrm>
-            <a:off x="914400" y="2148840"/>
-            <a:ext cx="9509760" cy="2926080"/>
-          </a:xfrm>
-          <a:prstGeom prst="rect">
-            <a:avLst/>
-          </a:prstGeom>
-          <a:noFill/>
-        </p:spPr>
-        <p:txBody>
-          <a:bodyPr wrap="square" lIns="0" rIns="0" tIns="0" bIns="0">
-            <a:spAutoFit/>
-          </a:bodyPr>
-          <a:lstStyle/>
-          <a:p>
-            <a:pPr>
-              <a:lnSpc>
-                <a:spcPct val="135000"/>
-              </a:lnSpc>
-              <a:spcBef>
-                <a:spcPts val="0"/>
-              </a:spcBef>
-              <a:spcAft>
-                <a:spcPts val="0"/>
-              </a:spcAft>
-            </a:pPr>
-            <a:r>
-              <a:rPr sz="2100" b="0" i="0">
-                <a:solidFill>
-                  <a:srgbClr val="14171C"/>
-                </a:solidFill>
-                <a:latin typeface="Georgia"/>
-              </a:rPr>
-              <a:t>Education leads once it is measured as attainment rather than parity; health leads once it is measured somewhere it still varies; trust leads wherever it is measured at all, which is almost nowhere. The contribution is not a ranking of domains but the demonstration that the ranking depends on construct and on variable choice — neither of which the frameworks made with wellbeing in mind, because that is not what they were built for. Which is what makes the third act a question about fit rather than a charge of failure.</a:t>
-            </a:r>
-          </a:p>
-        </p:txBody>
-      </p:sp>
-    </p:spTree>
-  </p:cSld>
-  <p:clrMapOvr>
-    <a:masterClrMapping/>
-  </p:clrMapOvr>
-</p:sld>
-</file>
-
-<file path=ppt/slides/slide25.xml><?xml version="1.0" encoding="utf-8"?>
-<p:sld xmlns:a="http://schemas.openxmlformats.org/drawingml/2006/main" xmlns:p="http://schemas.openxmlformats.org/presentationml/2006/main" xmlns:r="http://schemas.openxmlformats.org/officeDocument/2006/relationships">
-  <p:cSld>
-    <p:bg>
-      <p:bgPr>
-        <a:solidFill>
-          <a:srgbClr val="14171C"/>
-        </a:solidFill>
-        <a:effectLst/>
-      </p:bgPr>
-    </p:bg>
-    <p:spTree>
-      <p:nvGrpSpPr>
-        <p:cNvPr id="1" name=""/>
-        <p:cNvGrpSpPr/>
-        <p:nvPr/>
-      </p:nvGrpSpPr>
-      <p:grpSpPr/>
-      <p:sp>
-        <p:nvSpPr>
-          <p:cNvPr id="2" name="TextBox 1"/>
-          <p:cNvSpPr txBox="1"/>
-          <p:nvPr/>
-        </p:nvSpPr>
-        <p:spPr>
-          <a:xfrm>
-            <a:off x="8229600" y="822960"/>
-            <a:ext cx="3291840" cy="4114800"/>
-          </a:xfrm>
-          <a:prstGeom prst="rect">
-            <a:avLst/>
-          </a:prstGeom>
-          <a:noFill/>
-        </p:spPr>
-        <p:txBody>
-          <a:bodyPr wrap="square" lIns="0" rIns="0" tIns="0" bIns="0">
-            <a:spAutoFit/>
-          </a:bodyPr>
-          <a:lstStyle/>
-          <a:p>
-            <a:pPr algn="r">
-              <a:spcBef>
-                <a:spcPts val="0"/>
-              </a:spcBef>
-              <a:spcAft>
-                <a:spcPts val="0"/>
-              </a:spcAft>
-            </a:pPr>
-            <a:r>
-              <a:rPr sz="20000" b="0" i="0">
-                <a:solidFill>
-                  <a:srgbClr val="2A3340"/>
-                </a:solidFill>
-                <a:latin typeface="Georgia"/>
-              </a:rPr>
               <a:t>III</a:t>
-            </a:r>
-          </a:p>
-        </p:txBody>
-      </p:sp>
-      <p:sp>
-        <p:nvSpPr>
-          <p:cNvPr id="3" name="Rectangle 2"/>
-          <p:cNvSpPr/>
-          <p:nvPr/>
-        </p:nvSpPr>
-        <p:spPr>
-          <a:xfrm>
-            <a:off x="566928" y="1371600"/>
-            <a:ext cx="7315200" cy="25400"/>
-          </a:xfrm>
-          <a:prstGeom prst="rect">
-            <a:avLst/>
-          </a:prstGeom>
-          <a:solidFill>
-            <a:srgbClr val="C9D8EC"/>
-          </a:solidFill>
-          <a:ln>
-            <a:noFill/>
-          </a:ln>
-          <a:effectLst/>
-        </p:spPr>
-        <p:style>
-          <a:lnRef idx="1">
-            <a:schemeClr val="accent1"/>
-          </a:lnRef>
-          <a:fillRef idx="3">
-            <a:schemeClr val="accent1"/>
-          </a:fillRef>
-          <a:effectRef idx="2">
-            <a:schemeClr val="accent1"/>
-          </a:effectRef>
-          <a:fontRef idx="minor">
-            <a:schemeClr val="lt1"/>
-          </a:fontRef>
-        </p:style>
-        <p:txBody>
-          <a:bodyPr rtlCol="0" anchor="ctr"/>
-          <a:lstStyle/>
-          <a:p>
-            <a:pPr algn="ctr"/>
-          </a:p>
-        </p:txBody>
-      </p:sp>
-      <p:sp>
-        <p:nvSpPr>
-          <p:cNvPr id="4" name="TextBox 3"/>
-          <p:cNvSpPr txBox="1"/>
-          <p:nvPr/>
-        </p:nvSpPr>
-        <p:spPr>
-          <a:xfrm>
-            <a:off x="566928" y="960120"/>
-            <a:ext cx="5486400" cy="274320"/>
-          </a:xfrm>
-          <a:prstGeom prst="rect">
-            <a:avLst/>
-          </a:prstGeom>
-          <a:noFill/>
-        </p:spPr>
-        <p:txBody>
-          <a:bodyPr wrap="square" lIns="0" rIns="0" tIns="0" bIns="0">
-            <a:spAutoFit/>
-          </a:bodyPr>
-          <a:lstStyle/>
-          <a:p>
-            <a:pPr>
-              <a:spcBef>
-                <a:spcPts val="0"/>
-              </a:spcBef>
-              <a:spcAft>
-                <a:spcPts val="0"/>
-              </a:spcAft>
-            </a:pPr>
-            <a:r>
-              <a:rPr sz="1100" b="0" i="0">
-                <a:solidFill>
-                  <a:srgbClr val="C9D8EC"/>
-                </a:solidFill>
-                <a:latin typeface="Consolas"/>
-              </a:rPr>
-              <a:t>ACT III</a:t>
-            </a:r>
-          </a:p>
-        </p:txBody>
-      </p:sp>
-      <p:sp>
-        <p:nvSpPr>
-          <p:cNvPr id="5" name="TextBox 4"/>
-          <p:cNvSpPr txBox="1"/>
-          <p:nvPr/>
-        </p:nvSpPr>
-        <p:spPr>
-          <a:xfrm>
-            <a:off x="566928" y="1783080"/>
-            <a:ext cx="7223760" cy="1828800"/>
-          </a:xfrm>
-          <a:prstGeom prst="rect">
-            <a:avLst/>
-          </a:prstGeom>
-          <a:noFill/>
-        </p:spPr>
-        <p:txBody>
-          <a:bodyPr wrap="square" lIns="0" rIns="0" tIns="0" bIns="0">
-            <a:spAutoFit/>
-          </a:bodyPr>
-          <a:lstStyle/>
-          <a:p>
-            <a:pPr>
-              <a:lnSpc>
-                <a:spcPct val="102000"/>
-              </a:lnSpc>
-              <a:spcBef>
-                <a:spcPts val="0"/>
-              </a:spcBef>
-              <a:spcAft>
-                <a:spcPts val="0"/>
-              </a:spcAft>
-            </a:pPr>
-            <a:r>
-              <a:rPr sz="4000" b="0" i="0">
-                <a:solidFill>
-                  <a:srgbClr val="FCFCFB"/>
-                </a:solidFill>
-                <a:latin typeface="Georgia"/>
-              </a:rPr>
-              <a:t>What this may imply for how development is measured</a:t>
-            </a:r>
-          </a:p>
-        </p:txBody>
-      </p:sp>
-      <p:sp>
-        <p:nvSpPr>
-          <p:cNvPr id="6" name="TextBox 5"/>
-          <p:cNvSpPr txBox="1"/>
-          <p:nvPr/>
-        </p:nvSpPr>
-        <p:spPr>
-          <a:xfrm>
-            <a:off x="566928" y="3886200"/>
-            <a:ext cx="6766560" cy="1463040"/>
-          </a:xfrm>
-          <a:prstGeom prst="rect">
-            <a:avLst/>
-          </a:prstGeom>
-          <a:noFill/>
-        </p:spPr>
-        <p:txBody>
-          <a:bodyPr wrap="square" lIns="0" rIns="0" tIns="0" bIns="0">
-            <a:spAutoFit/>
-          </a:bodyPr>
-          <a:lstStyle/>
-          <a:p>
-            <a:pPr>
-              <a:lnSpc>
-                <a:spcPct val="135000"/>
-              </a:lnSpc>
-              <a:spcBef>
-                <a:spcPts val="0"/>
-              </a:spcBef>
-              <a:spcAft>
-                <a:spcPts val="0"/>
-              </a:spcAft>
-            </a:pPr>
-            <a:r>
-              <a:rPr sz="1200" b="0" i="1">
-                <a:solidFill>
-                  <a:srgbClr val="9AA4B0"/>
-                </a:solidFill>
-                <a:latin typeface="Georgia"/>
-              </a:rPr>
-              <a:t>These are implications, not recommendations. The frameworks were not built to track wellbeing and it is no criticism of them that they do not; measured against their own purposes they work. What the three results describe is a disconnect — between what development measurement currently captures and what turns out to track individual lived experience. If wellbeing is to be part of what these frameworks are for, education, health and social trust each say something specific about what capturing it would take.</a:t>
-            </a:r>
-          </a:p>
-        </p:txBody>
-      </p:sp>
-      <p:sp>
-        <p:nvSpPr>
-          <p:cNvPr id="7" name="TextBox 6"/>
-          <p:cNvSpPr txBox="1"/>
-          <p:nvPr/>
-        </p:nvSpPr>
-        <p:spPr>
-          <a:xfrm>
-            <a:off x="566928" y="5623560"/>
-            <a:ext cx="3503066" cy="914400"/>
-          </a:xfrm>
-          <a:prstGeom prst="rect">
-            <a:avLst/>
-          </a:prstGeom>
-          <a:noFill/>
-        </p:spPr>
-        <p:txBody>
-          <a:bodyPr wrap="square" lIns="0" rIns="0" tIns="0" bIns="0">
-            <a:spAutoFit/>
-          </a:bodyPr>
-          <a:lstStyle/>
-          <a:p>
-            <a:pPr>
-              <a:spcBef>
-                <a:spcPts val="0"/>
-              </a:spcBef>
-              <a:spcAft>
-                <a:spcPts val="400"/>
-              </a:spcAft>
-            </a:pPr>
-            <a:r>
-              <a:rPr sz="2200" b="0" i="0">
-                <a:solidFill>
-                  <a:srgbClr val="FCFCFB"/>
-                </a:solidFill>
-                <a:latin typeface="Consolas"/>
-              </a:rPr>
-              <a:t>12.7% vs 0.9%</a:t>
-            </a:r>
-          </a:p>
-          <a:p>
-            <a:pPr>
-              <a:lnSpc>
-                <a:spcPct val="120000"/>
-              </a:lnSpc>
-              <a:spcBef>
-                <a:spcPts val="0"/>
-              </a:spcBef>
-              <a:spcAft>
-                <a:spcPts val="0"/>
-              </a:spcAft>
-            </a:pPr>
-            <a:r>
-              <a:rPr sz="1000" b="0" i="0">
-                <a:solidFill>
-                  <a:srgbClr val="8A94A0"/>
-                </a:solidFill>
-                <a:latin typeface="Calibri"/>
-              </a:rPr>
-              <a:t>SDG4 access against measured learning outcomes</a:t>
-            </a:r>
-          </a:p>
-        </p:txBody>
-      </p:sp>
-      <p:sp>
-        <p:nvSpPr>
-          <p:cNvPr id="8" name="TextBox 7"/>
-          <p:cNvSpPr txBox="1"/>
-          <p:nvPr/>
-        </p:nvSpPr>
-        <p:spPr>
-          <a:xfrm>
-            <a:off x="4344314" y="5623560"/>
-            <a:ext cx="3503066" cy="914400"/>
-          </a:xfrm>
-          <a:prstGeom prst="rect">
-            <a:avLst/>
-          </a:prstGeom>
-          <a:noFill/>
-        </p:spPr>
-        <p:txBody>
-          <a:bodyPr wrap="square" lIns="0" rIns="0" tIns="0" bIns="0">
-            <a:spAutoFit/>
-          </a:bodyPr>
-          <a:lstStyle/>
-          <a:p>
-            <a:pPr>
-              <a:spcBef>
-                <a:spcPts val="0"/>
-              </a:spcBef>
-              <a:spcAft>
-                <a:spcPts val="400"/>
-              </a:spcAft>
-            </a:pPr>
-            <a:r>
-              <a:rPr sz="2200" b="0" i="0">
-                <a:solidFill>
-                  <a:srgbClr val="FCFCFB"/>
-                </a:solidFill>
-                <a:latin typeface="Consolas"/>
-              </a:rPr>
-              <a:t>11.2% vs 1.2%</a:t>
-            </a:r>
-          </a:p>
-          <a:p>
-            <a:pPr>
-              <a:lnSpc>
-                <a:spcPct val="120000"/>
-              </a:lnSpc>
-              <a:spcBef>
-                <a:spcPts val="0"/>
-              </a:spcBef>
-              <a:spcAft>
-                <a:spcPts val="0"/>
-              </a:spcAft>
-            </a:pPr>
-            <a:r>
-              <a:rPr sz="1000" b="0" i="0">
-                <a:solidFill>
-                  <a:srgbClr val="8A94A0"/>
-                </a:solidFill>
-                <a:latin typeface="Calibri"/>
-              </a:rPr>
-              <a:t>health vs education, SDG data, high-income countries</a:t>
-            </a:r>
-          </a:p>
-        </p:txBody>
-      </p:sp>
-      <p:sp>
-        <p:nvSpPr>
-          <p:cNvPr id="9" name="TextBox 8"/>
-          <p:cNvSpPr txBox="1"/>
-          <p:nvPr/>
-        </p:nvSpPr>
-        <p:spPr>
-          <a:xfrm>
-            <a:off x="8121700" y="5623560"/>
-            <a:ext cx="3503066" cy="914400"/>
-          </a:xfrm>
-          <a:prstGeom prst="rect">
-            <a:avLst/>
-          </a:prstGeom>
-          <a:noFill/>
-        </p:spPr>
-        <p:txBody>
-          <a:bodyPr wrap="square" lIns="0" rIns="0" tIns="0" bIns="0">
-            <a:spAutoFit/>
-          </a:bodyPr>
-          <a:lstStyle/>
-          <a:p>
-            <a:pPr>
-              <a:spcBef>
-                <a:spcPts val="0"/>
-              </a:spcBef>
-              <a:spcAft>
-                <a:spcPts val="400"/>
-              </a:spcAft>
-            </a:pPr>
-            <a:r>
-              <a:rPr sz="2200" b="0" i="0">
-                <a:solidFill>
-                  <a:srgbClr val="FCFCFB"/>
-                </a:solidFill>
-                <a:latin typeface="Consolas"/>
-              </a:rPr>
-              <a:t>1 of 16</a:t>
-            </a:r>
-          </a:p>
-          <a:p>
-            <a:pPr>
-              <a:lnSpc>
-                <a:spcPct val="120000"/>
-              </a:lnSpc>
-              <a:spcBef>
-                <a:spcPts val="0"/>
-              </a:spcBef>
-              <a:spcAft>
-                <a:spcPts val="0"/>
-              </a:spcAft>
-            </a:pPr>
-            <a:r>
-              <a:rPr sz="1000" b="0" i="0">
-                <a:solidFill>
-                  <a:srgbClr val="8A94A0"/>
-                </a:solidFill>
-                <a:latin typeface="Calibri"/>
-              </a:rPr>
-              <a:t>SDG trust country-series a longitudinal design can use</a:t>
             </a:r>
           </a:p>
         </p:txBody>
@@ -8981,7 +8980,7 @@
                 </a:solidFill>
                 <a:latin typeface="Consolas"/>
               </a:rPr>
-              <a:t>THE DISCONNECT</a:t>
+              <a:t>IMPLICATION 1 · EDUCATION</a:t>
             </a:r>
           </a:p>
         </p:txBody>
@@ -9026,7 +9025,7 @@
                 </a:solidFill>
                 <a:latin typeface="Georgia"/>
               </a:rPr>
-              <a:t>Stating it precisely, and stating what it is not</a:t>
+              <a:t>Which education construct a framework counts turns out to matter</a:t>
             </a:r>
           </a:p>
         </p:txBody>
@@ -9065,13 +9064,13 @@
               </a:spcAft>
             </a:pPr>
             <a:r>
-              <a:rPr sz="1350" b="0" i="0">
+              <a:rPr sz="1400" b="0" i="0">
                 <a:solidFill>
                   <a:srgbClr val="5A6068"/>
                 </a:solidFill>
                 <a:latin typeface="Calibri"/>
               </a:rPr>
-              <a:t>Development indicators tell you reliably where wellbeing is high. They tell you almost nothing about when it will rise. Across every framework tested here, year-on-year indicator movement carries essentially no wellbeing information within the measurement window — a decade or so — and inside countries the domains that lead between them stop leading.</a:t>
+              <a:t>Global education policy has shifted decisively over the past decade from schooling to learning — the learning-crisis framing, learning-poverty targets, an indicator architecture built around measured proficiency. That shift has good reasons behind it that have nothing to do with wellbeing, and this commentary does not dispute them.</a:t>
             </a:r>
           </a:p>
           <a:p>
@@ -9087,13 +9086,13 @@
               </a:spcAft>
             </a:pPr>
             <a:r>
-              <a:rPr sz="1350" b="0" i="0">
+              <a:rPr sz="1400" b="0" i="0">
                 <a:solidFill>
                   <a:srgbClr val="5A6068"/>
                 </a:solidFill>
                 <a:latin typeface="Calibri"/>
               </a:rPr>
-              <a:t>It is worth being explicit about what that is not. It is not an argument that development frameworks should be kept away from wellbeing, or that they have failed. The HDI and the SDGs were built to track development — capability, deprivation, the 2030 Agenda's negotiated priorities — and on those terms they work. Nothing here says otherwise.</a:t>
+              <a:t>It does observe that the wellbeing signal sits elsewhere. Attainment and access carry it — 12.7% for SDG4 access, 40.7% and 34.0% for the HDI's schooling components, 32 of 36 countries at the individual level — while measured learning outcomes sit at 0.9% and parity ratios at 2.5%. A framework that reads SDG4 pooled will conclude education barely matters for wellbeing; one that reads the access series will rank it third of seventeen goals. Same data, same countries.</a:t>
             </a:r>
           </a:p>
           <a:p>
@@ -9109,35 +9108,13 @@
               </a:spcAft>
             </a:pPr>
             <a:r>
-              <a:rPr sz="1350" b="0" i="0">
+              <a:rPr sz="1400" b="0" i="0">
                 <a:solidFill>
                   <a:srgbClr val="5A6068"/>
                 </a:solidFill>
                 <a:latin typeface="Calibri"/>
               </a:rPr>
-              <a:t>What the results describe is a disconnect between two things that are often assumed to move together: what these frameworks currently capture, and what tracks how individuals experience their lives. That assumption is reasonable and mostly untested. Tested, it holds between countries and weakens sharply everywhere else.</a:t>
-            </a:r>
-          </a:p>
-          <a:p>
-            <a:pPr>
-              <a:lnSpc>
-                <a:spcPct val="132000"/>
-              </a:lnSpc>
-              <a:spcBef>
-                <a:spcPts val="0"/>
-              </a:spcBef>
-              <a:spcAft>
-                <a:spcPts val="1100"/>
-              </a:spcAft>
-            </a:pPr>
-            <a:r>
-              <a:rPr sz="1350" b="0" i="0">
-                <a:solidFill>
-                  <a:srgbClr val="5A6068"/>
-                </a:solidFill>
-                <a:latin typeface="Calibri"/>
-              </a:rPr>
-              <a:t>So the useful question is not whether development matters. It is which components of it track lived experience, and whether the frameworks are currently in a position to see them. The next three beats take the three results in turn.</a:t>
+              <a:t>One caution travels with this and it is weaker without it. Education is the most consistent signal across countries and the smallest one within them — significant in 32 to 34 of 36 ESS countries at a median R² of 0.0098. So the implication is about what a global monitoring framework counts, not a claim that any given schooling gain will move a given person’s life satisfaction.</a:t>
             </a:r>
           </a:p>
         </p:txBody>
@@ -9247,7 +9224,7 @@
                 </a:solidFill>
                 <a:latin typeface="Consolas"/>
               </a:rPr>
-              <a:t>IMPLICATION 1 · EDUCATION</a:t>
+              <a:t>IMPLICATION 2 · HEALTH</a:t>
             </a:r>
           </a:p>
         </p:txBody>
@@ -9292,7 +9269,7 @@
                 </a:solidFill>
                 <a:latin typeface="Georgia"/>
               </a:rPr>
-              <a:t>Which education construct a framework counts turns out to matter</a:t>
+              <a:t>A domain can disappear from a framework by being measured where it has stopped moving</a:t>
             </a:r>
           </a:p>
         </p:txBody>
@@ -9337,7 +9314,7 @@
                 </a:solidFill>
                 <a:latin typeface="Calibri"/>
               </a:rPr>
-              <a:t>Global education policy has shifted decisively over the past decade from schooling to learning — the learning-crisis framing, learning-poverty targets, an indicator architecture built around measured proficiency. That shift has good reasons behind it that have nothing to do with wellbeing, and this commentary does not dispute them.</a:t>
+              <a:t>Life expectancy is the standard summary of population health and the HDI's only health input, and it is the weakest of the five against wellbeing. Health is simultaneously the strongest domain in the SDG database and in the individual data. The gap between those two facts is not substantive; it is that life expectancy has largely stopped varying across the countries where it is tested.</a:t>
             </a:r>
           </a:p>
           <a:p>
@@ -9359,7 +9336,7 @@
                 </a:solidFill>
                 <a:latin typeface="Calibri"/>
               </a:rPr>
-              <a:t>It does observe that the wellbeing signal sits elsewhere. Attainment and access carry it — 12.7% for SDG4 access, 40.7% and 34.0% for the HDI's schooling components, 32 of 36 countries at the individual level — while measured learning outcomes sit at 0.9% and parity ratios at 2.5%. A framework that reads SDG4 pooled will conclude education barely matters for wellbeing; one that reads the access series will rank it third of seventeen goals. Same data, same countries.</a:t>
+              <a:t>What still carries health's signal is survival at the margin — child, infant and neonatal mortality, stunting, sanitation, safe water — and, in richer countries, self-rated health, which picks up morbidity and functional limitation that life expectancy cannot see. Both are already collected. The implication is about which of them a framework reads as its health signal in a high-income setting, not about adding a new instrument.</a:t>
             </a:r>
           </a:p>
           <a:p>
@@ -9381,7 +9358,7 @@
                 </a:solidFill>
                 <a:latin typeface="Calibri"/>
               </a:rPr>
-              <a:t>One caution travels with this and it is weaker without it. Education is the most consistent signal across countries and the smallest one within them — significant in 32 to 34 of 36 ESS countries at a median R² of 0.0098. So the implication is about what a global monitoring framework counts, not a claim that any given schooling gain will move a given person’s life satisfaction.</a:t>
+              <a:t>Health is also the domain where the frameworks disagree with each other most sharply — first in the SDG database, last in the HDI — which makes it the clearest case that the disagreement is about the variable rather than about the world.</a:t>
             </a:r>
           </a:p>
         </p:txBody>
@@ -9491,7 +9468,7 @@
                 </a:solidFill>
                 <a:latin typeface="Consolas"/>
               </a:rPr>
-              <a:t>IMPLICATION 2 · HEALTH</a:t>
+              <a:t>IMPLICATION 3 · COVERAGE</a:t>
             </a:r>
           </a:p>
         </p:txBody>
@@ -9536,7 +9513,7 @@
                 </a:solidFill>
                 <a:latin typeface="Georgia"/>
               </a:rPr>
-              <a:t>A domain can disappear from a framework by being measured where it has stopped moving</a:t>
+              <a:t>The third failure mode is the one no indicator choice can fix</a:t>
             </a:r>
           </a:p>
         </p:txBody>
@@ -9581,7 +9558,7 @@
                 </a:solidFill>
                 <a:latin typeface="Calibri"/>
               </a:rPr>
-              <a:t>Life expectancy is the standard summary of population health and the HDI's only health input, and it is the weakest of the five against wellbeing. Health is simultaneously the strongest domain in the SDG database and in the individual data. The gap between those two facts is not substantive; it is that life expectancy has largely stopped varying across the countries where it is tested.</a:t>
+              <a:t>Education's and health's implications are both about which variable a framework reads. Coverage is a different kind of problem: no choice among existing indicators fixes it, because the observations were never collected. The HDI and subnational HDI do not measure social trust at all; the SDG framework's 13 satisfaction and integrity series average one observation per country, which supports no longitudinal design.</a:t>
             </a:r>
           </a:p>
           <a:p>
@@ -9603,7 +9580,7 @@
                 </a:solidFill>
                 <a:latin typeface="Calibri"/>
               </a:rPr>
-              <a:t>What still carries health's signal is survival at the margin — child, infant and neonatal mortality, stunting, sanitation, safe water — and, in richer countries, self-rated health, which picks up morbidity and functional limitation that life expectancy cannot see. Both are already collected. The implication is about which of them a framework reads as its health signal in a high-income setting, not about adding a new instrument.</a:t>
+              <a:t>We did not stop at asserting that. Act II runs those series the only way their coverage permits — across countries rather than years — and 9 are testable, 4 significant, and all four land below the HDI's own components on the same countries. The gap is established rather than assumed.</a:t>
             </a:r>
           </a:p>
           <a:p>
@@ -9625,7 +9602,7 @@
                 </a:solidFill>
                 <a:latin typeface="Calibri"/>
               </a:rPr>
-              <a:t>Health is also the domain where the frameworks disagree with each other most sharply — first in the SDG database, last in the HDI — which makes it the clearest case that the disagreement is about the variable rather than about the world.</a:t>
+              <a:t>This is the most tentative of the three implications and should be presented that way: trust's own evidence is one instrument, in Europe, with a live shared-method caveat. What can be said is narrow and still useful. A component that performs this well wherever it is measured is invisible to development measurement for reasons of coverage, not because it was weighed and found wanting — and a repeated generalised-trust item, already standard in the ESS, the World Values Survey and several national statistical series, would be enough to find out.</a:t>
             </a:r>
           </a:p>
         </p:txBody>
@@ -9735,7 +9712,7 @@
                 </a:solidFill>
                 <a:latin typeface="Consolas"/>
               </a:rPr>
-              <a:t>IMPLICATION 3 · SOCIAL TRUST</a:t>
+              <a:t>WHAT WE CANNOT SAY</a:t>
             </a:r>
           </a:p>
         </p:txBody>
@@ -9780,7 +9757,7 @@
                 </a:solidFill>
                 <a:latin typeface="Georgia"/>
               </a:rPr>
-              <a:t>A component that looks important, and that no framework is currently positioned to check</a:t>
+              <a:t>Three limits that keep this a question rather than a recommendation</a:t>
             </a:r>
           </a:p>
         </p:txBody>
@@ -9825,7 +9802,7 @@
                 </a:solidFill>
                 <a:latin typeface="Calibri"/>
               </a:rPr>
-              <a:t>Social trust is significant in 34 of 36 ESS countries, and no development framework can currently check it. The HDI and subnational HDI do not measure the construct. The SDG framework's 13 satisfaction and integrity series average one observation per country, which supports no longitudinal design.</a:t>
+              <a:t>None of this is causal. The design is correlational throughout, and the levels results in particular are cross-sectional comparisons between countries.</a:t>
             </a:r>
           </a:p>
           <a:p>
@@ -9847,7 +9824,7 @@
                 </a:solidFill>
                 <a:latin typeface="Calibri"/>
               </a:rPr>
-              <a:t>We did not stop at asserting that. Act II runs those series the only way their coverage permits, across countries rather than years: 9 are testable, 4 significant, and all four land below the HDI's own components on the same countries. So the gap is a real gap, established rather than assumed.</a:t>
+              <a:t>Schooling cannot be separated from what schooling stands in for. Years attained proxy labour-market position, economic security, autonomy, and social standing, and this design cannot pull them apart. Individual effects are small: a median R² near 0.01.</a:t>
             </a:r>
           </a:p>
           <a:p>
@@ -9869,7 +9846,29 @@
                 </a:solidFill>
                 <a:latin typeface="Calibri"/>
               </a:rPr>
-              <a:t>The implication is the most tentative of the three, and should be presented that way. Trust rests on one instrument, in Europe, with a live shared-method caveat. What can be said is narrow and still useful: a component that performs this well wherever it is measured is currently invisible to development measurement, and it is invisible for reasons of coverage rather than because it was weighed and found wanting. A repeated generalised-trust item — already standard in the ESS, the World Values Survey and several national statistical series — would be enough to find out.</a:t>
+              <a:t>The individual-level results are Europe-only. The ESS is the second wellbeing instrument the whole replication rests on, and it covers 36 European countries — so where the commentary says two instruments agree, that agreement is demonstrated in Europe and assumed elsewhere. That belongs in the text as a scope condition rather than buried in a limitations paragraph.</a:t>
+            </a:r>
+          </a:p>
+          <a:p>
+            <a:pPr>
+              <a:lnSpc>
+                <a:spcPct val="132000"/>
+              </a:lnSpc>
+              <a:spcBef>
+                <a:spcPts val="0"/>
+              </a:spcBef>
+              <a:spcAft>
+                <a:spcPts val="1100"/>
+              </a:spcAft>
+            </a:pPr>
+            <a:r>
+              <a:rPr sz="1400" b="0" i="0">
+                <a:solidFill>
+                  <a:srgbClr val="5A6068"/>
+                </a:solidFill>
+                <a:latin typeface="Calibri"/>
+              </a:rPr>
+              <a:t>Some of the parity and learning indicators' weakness is coverage rather than construct — they are the youngest and thinnest series in the SDG database, and thin series fail significance tests for uninteresting reasons. The commentary should concede this explicitly and say what would settle it.</a:t>
             </a:r>
           </a:p>
         </p:txBody>
@@ -10415,7 +10414,7 @@
                 </a:solidFill>
                 <a:latin typeface="Consolas"/>
               </a:rPr>
-              <a:t>WHAT WE CANNOT SAY</a:t>
+              <a:t>WHERE THIS LEAVES IT</a:t>
             </a:r>
           </a:p>
         </p:txBody>
@@ -10460,7 +10459,7 @@
                 </a:solidFill>
                 <a:latin typeface="Georgia"/>
               </a:rPr>
-              <a:t>Three limits that keep this a question rather than a recommendation</a:t>
+              <a:t>Development frameworks may need to work harder at capturing what shapes lived experience</a:t>
             </a:r>
           </a:p>
         </p:txBody>
@@ -10505,7 +10504,7 @@
                 </a:solidFill>
                 <a:latin typeface="Calibri"/>
               </a:rPr>
-              <a:t>None of this is causal. The design is correlational throughout, and the levels results in particular are cross-sectional comparisons between countries.</a:t>
+              <a:t>That is the conclusion, and it is deliberately exploratory. Three components look consequential for how individuals experience their lives — education, health, social trust — and each is currently captured in a way that makes it hard for a development framework to see. Education is pooled with constructs that point the other way. Health is read through a variable that has largely stopped moving. Social trust is not measured with the coverage any longitudinal design requires.</a:t>
             </a:r>
           </a:p>
           <a:p>
@@ -10527,7 +10526,7 @@
                 </a:solidFill>
                 <a:latin typeface="Calibri"/>
               </a:rPr>
-              <a:t>Schooling cannot be separated from what schooling stands in for. Years attained proxy labour-market position, economic security, autonomy, and social standing, and this design cannot pull them apart. Individual effects are small: a median R² near 0.01.</a:t>
+              <a:t>None of that is a demand that these frameworks become wellbeing instruments. It is the narrower observation that if wellbeing is to inform what development measurement counts — and the post-2030 conversation suggests it may — then the first question is not which domain to prioritise but whether each is being measured somewhere it can still move. On the evidence here, for at least two of the three, it is not.</a:t>
             </a:r>
           </a:p>
           <a:p>
@@ -10549,29 +10548,7 @@
                 </a:solidFill>
                 <a:latin typeface="Calibri"/>
               </a:rPr>
-              <a:t>The individual-level results are Europe-only. The ESS is the second wellbeing instrument the whole replication rests on, and it covers 36 European countries — so where the commentary says two instruments agree, that agreement is demonstrated in Europe and assumed elsewhere. That belongs in the text as a scope condition rather than buried in a limitations paragraph.</a:t>
-            </a:r>
-          </a:p>
-          <a:p>
-            <a:pPr>
-              <a:lnSpc>
-                <a:spcPct val="132000"/>
-              </a:lnSpc>
-              <a:spcBef>
-                <a:spcPts val="0"/>
-              </a:spcBef>
-              <a:spcAft>
-                <a:spcPts val="1100"/>
-              </a:spcAft>
-            </a:pPr>
-            <a:r>
-              <a:rPr sz="1400" b="0" i="0">
-                <a:solidFill>
-                  <a:srgbClr val="5A6068"/>
-                </a:solidFill>
-                <a:latin typeface="Calibri"/>
-              </a:rPr>
-              <a:t>Some of the parity and learning indicators' weakness is coverage rather than construct — they are the youngest and thinnest series in the SDG database, and thin series fail significance tests for uninteresting reasons. The commentary should concede this explicitly and say what would settle it.</a:t>
+              <a:t>The honest form of the ask is a question rather than a prescription: what would a development framework look like if the components that track individual lived experience were among the things it was built to capture? A commentary cannot answer that. It can show that the question is not rhetorical, and put the evidence on the record so the field can take it up.</a:t>
             </a:r>
           </a:p>
         </p:txBody>
@@ -10627,6 +10604,163 @@
 </file>
 
 <file path=ppt/slides/slide31.xml><?xml version="1.0" encoding="utf-8"?>
+<p:sld xmlns:a="http://schemas.openxmlformats.org/drawingml/2006/main" xmlns:p="http://schemas.openxmlformats.org/presentationml/2006/main" xmlns:r="http://schemas.openxmlformats.org/officeDocument/2006/relationships">
+  <p:cSld>
+    <p:bg>
+      <p:bgPr>
+        <a:solidFill>
+          <a:srgbClr val="E8EBEF"/>
+        </a:solidFill>
+        <a:effectLst/>
+      </p:bgPr>
+    </p:bg>
+    <p:spTree>
+      <p:nvGrpSpPr>
+        <p:cNvPr id="1" name=""/>
+        <p:cNvGrpSpPr/>
+        <p:nvPr/>
+      </p:nvGrpSpPr>
+      <p:grpSpPr/>
+      <p:sp>
+        <p:nvSpPr>
+          <p:cNvPr id="2" name="Rectangle 1"/>
+          <p:cNvSpPr/>
+          <p:nvPr/>
+        </p:nvSpPr>
+        <p:spPr>
+          <a:xfrm>
+            <a:off x="566928" y="2103120"/>
+            <a:ext cx="54864" cy="2377440"/>
+          </a:xfrm>
+          <a:prstGeom prst="rect">
+            <a:avLst/>
+          </a:prstGeom>
+          <a:solidFill>
+            <a:srgbClr val="17549E"/>
+          </a:solidFill>
+          <a:ln>
+            <a:noFill/>
+          </a:ln>
+          <a:effectLst/>
+        </p:spPr>
+        <p:style>
+          <a:lnRef idx="1">
+            <a:schemeClr val="accent1"/>
+          </a:lnRef>
+          <a:fillRef idx="3">
+            <a:schemeClr val="accent1"/>
+          </a:fillRef>
+          <a:effectRef idx="2">
+            <a:schemeClr val="accent1"/>
+          </a:effectRef>
+          <a:fontRef idx="minor">
+            <a:schemeClr val="lt1"/>
+          </a:fontRef>
+        </p:style>
+        <p:txBody>
+          <a:bodyPr rtlCol="0" anchor="ctr"/>
+          <a:lstStyle/>
+          <a:p>
+            <a:pPr algn="ctr"/>
+          </a:p>
+        </p:txBody>
+      </p:sp>
+      <p:sp>
+        <p:nvSpPr>
+          <p:cNvPr id="3" name="TextBox 2"/>
+          <p:cNvSpPr txBox="1"/>
+          <p:nvPr/>
+        </p:nvSpPr>
+        <p:spPr>
+          <a:xfrm>
+            <a:off x="914400" y="1600200"/>
+            <a:ext cx="8686800" cy="274320"/>
+          </a:xfrm>
+          <a:prstGeom prst="rect">
+            <a:avLst/>
+          </a:prstGeom>
+          <a:noFill/>
+        </p:spPr>
+        <p:txBody>
+          <a:bodyPr wrap="square" lIns="0" rIns="0" tIns="0" bIns="0">
+            <a:spAutoFit/>
+          </a:bodyPr>
+          <a:lstStyle/>
+          <a:p>
+            <a:pPr>
+              <a:spcBef>
+                <a:spcPts val="0"/>
+              </a:spcBef>
+              <a:spcAft>
+                <a:spcPts val="0"/>
+              </a:spcAft>
+            </a:pPr>
+            <a:r>
+              <a:rPr sz="1100" b="0" i="0">
+                <a:solidFill>
+                  <a:srgbClr val="17549E"/>
+                </a:solidFill>
+                <a:latin typeface="Consolas"/>
+              </a:rPr>
+              <a:t>WHERE ACT III LEAVES US</a:t>
+            </a:r>
+          </a:p>
+        </p:txBody>
+      </p:sp>
+      <p:sp>
+        <p:nvSpPr>
+          <p:cNvPr id="4" name="TextBox 3"/>
+          <p:cNvSpPr txBox="1"/>
+          <p:nvPr/>
+        </p:nvSpPr>
+        <p:spPr>
+          <a:xfrm>
+            <a:off x="914400" y="2148840"/>
+            <a:ext cx="9509760" cy="2926080"/>
+          </a:xfrm>
+          <a:prstGeom prst="rect">
+            <a:avLst/>
+          </a:prstGeom>
+          <a:noFill/>
+        </p:spPr>
+        <p:txBody>
+          <a:bodyPr wrap="square" lIns="0" rIns="0" tIns="0" bIns="0">
+            <a:spAutoFit/>
+          </a:bodyPr>
+          <a:lstStyle/>
+          <a:p>
+            <a:pPr>
+              <a:lnSpc>
+                <a:spcPct val="135000"/>
+              </a:lnSpc>
+              <a:spcBef>
+                <a:spcPts val="0"/>
+              </a:spcBef>
+              <a:spcAft>
+                <a:spcPts val="0"/>
+              </a:spcAft>
+            </a:pPr>
+            <a:r>
+              <a:rPr sz="2100" b="0" i="0">
+                <a:solidFill>
+                  <a:srgbClr val="14171C"/>
+                </a:solidFill>
+                <a:latin typeface="Georgia"/>
+              </a:rPr>
+              <a:t>The recommended framing for submission: lead with education as the positive finding, use the generalised collapse as the backdrop that makes it surprising, and close on the disconnect rather than on a list of fixes. That ordering makes Act I load-bearing without making it the story, and it keeps the paper on the ground it can actually defend — that these components look like they matter for lived experience, and that development measurement is not currently arranged to see them.</a:t>
+            </a:r>
+          </a:p>
+        </p:txBody>
+      </p:sp>
+    </p:spTree>
+  </p:cSld>
+  <p:clrMapOvr>
+    <a:masterClrMapping/>
+  </p:clrMapOvr>
+</p:sld>
+</file>
+
+<file path=ppt/slides/slide32.xml><?xml version="1.0" encoding="utf-8"?>
 <p:sld xmlns:a="http://schemas.openxmlformats.org/drawingml/2006/main" xmlns:p="http://schemas.openxmlformats.org/presentationml/2006/main" xmlns:r="http://schemas.openxmlformats.org/officeDocument/2006/relationships">
   <p:cSld>
     <p:bg>
@@ -10653,251 +10787,68 @@
         <p:spPr>
           <a:xfrm>
             <a:off x="566928" y="502920"/>
-            <a:ext cx="8595360" cy="274320"/>
-          </a:xfrm>
-          <a:prstGeom prst="rect">
-            <a:avLst/>
-          </a:prstGeom>
-          <a:noFill/>
-        </p:spPr>
-        <p:txBody>
-          <a:bodyPr wrap="square" lIns="0" rIns="0" tIns="0" bIns="0">
-            <a:spAutoFit/>
-          </a:bodyPr>
-          <a:lstStyle/>
-          <a:p>
-            <a:pPr>
-              <a:spcBef>
-                <a:spcPts val="0"/>
-              </a:spcBef>
-              <a:spcAft>
-                <a:spcPts val="0"/>
-              </a:spcAft>
-            </a:pPr>
-            <a:r>
-              <a:rPr sz="1000" b="0" i="0">
-                <a:solidFill>
-                  <a:srgbClr val="A63A30"/>
-                </a:solidFill>
-                <a:latin typeface="Consolas"/>
-              </a:rPr>
-              <a:t>WHERE THIS LEAVES IT</a:t>
-            </a:r>
-          </a:p>
-        </p:txBody>
-      </p:sp>
-      <p:sp>
-        <p:nvSpPr>
-          <p:cNvPr id="3" name="TextBox 2"/>
-          <p:cNvSpPr txBox="1"/>
-          <p:nvPr/>
-        </p:nvSpPr>
-        <p:spPr>
-          <a:xfrm>
-            <a:off x="566928" y="914400"/>
-            <a:ext cx="8595360" cy="1371600"/>
-          </a:xfrm>
-          <a:prstGeom prst="rect">
-            <a:avLst/>
-          </a:prstGeom>
-          <a:noFill/>
-        </p:spPr>
-        <p:txBody>
-          <a:bodyPr wrap="square" lIns="0" rIns="0" tIns="0" bIns="0">
-            <a:spAutoFit/>
-          </a:bodyPr>
-          <a:lstStyle/>
-          <a:p>
-            <a:pPr>
-              <a:lnSpc>
-                <a:spcPct val="108000"/>
-              </a:lnSpc>
-              <a:spcBef>
-                <a:spcPts val="0"/>
-              </a:spcBef>
-              <a:spcAft>
-                <a:spcPts val="0"/>
-              </a:spcAft>
-            </a:pPr>
-            <a:r>
-              <a:rPr sz="2700" b="0" i="0">
+            <a:ext cx="8229600" cy="822960"/>
+          </a:xfrm>
+          <a:prstGeom prst="rect">
+            <a:avLst/>
+          </a:prstGeom>
+          <a:noFill/>
+        </p:spPr>
+        <p:txBody>
+          <a:bodyPr wrap="square" lIns="0" rIns="0" tIns="0" bIns="0">
+            <a:spAutoFit/>
+          </a:bodyPr>
+          <a:lstStyle/>
+          <a:p>
+            <a:pPr>
+              <a:spcBef>
+                <a:spcPts val="0"/>
+              </a:spcBef>
+              <a:spcAft>
+                <a:spcPts val="600"/>
+              </a:spcAft>
+            </a:pPr>
+            <a:r>
+              <a:rPr sz="3200" b="0" i="0">
                 <a:solidFill>
                   <a:srgbClr val="14171C"/>
                 </a:solidFill>
                 <a:latin typeface="Georgia"/>
               </a:rPr>
-              <a:t>Development frameworks may need to work harder at capturing what shapes lived experience</a:t>
-            </a:r>
-          </a:p>
-        </p:txBody>
-      </p:sp>
-      <p:sp>
-        <p:nvSpPr>
-          <p:cNvPr id="4" name="TextBox 3"/>
-          <p:cNvSpPr txBox="1"/>
-          <p:nvPr/>
-        </p:nvSpPr>
-        <p:spPr>
-          <a:xfrm>
-            <a:off x="566928" y="2286000"/>
-            <a:ext cx="8595360" cy="3840480"/>
-          </a:xfrm>
-          <a:prstGeom prst="rect">
-            <a:avLst/>
-          </a:prstGeom>
-          <a:noFill/>
-        </p:spPr>
-        <p:txBody>
-          <a:bodyPr wrap="square" lIns="0" rIns="0" tIns="0" bIns="0">
-            <a:spAutoFit/>
-          </a:bodyPr>
-          <a:lstStyle/>
-          <a:p>
-            <a:pPr>
-              <a:lnSpc>
-                <a:spcPct val="132000"/>
-              </a:lnSpc>
-              <a:spcBef>
-                <a:spcPts val="0"/>
-              </a:spcBef>
-              <a:spcAft>
-                <a:spcPts val="1100"/>
-              </a:spcAft>
-            </a:pPr>
-            <a:r>
-              <a:rPr sz="1400" b="0" i="0">
+              <a:t>Decisions for the team</a:t>
+            </a:r>
+          </a:p>
+          <a:p>
+            <a:pPr>
+              <a:spcBef>
+                <a:spcPts val="0"/>
+              </a:spcBef>
+              <a:spcAft>
+                <a:spcPts val="0"/>
+              </a:spcAft>
+            </a:pPr>
+            <a:r>
+              <a:rPr sz="1300" b="0" i="0">
                 <a:solidFill>
                   <a:srgbClr val="5A6068"/>
                 </a:solidFill>
                 <a:latin typeface="Calibri"/>
               </a:rPr>
-              <a:t>That is the conclusion, and it is deliberately exploratory. Three components look consequential for how individuals experience their lives — education, health, social trust — and each is currently captured in a way that makes it hard for a development framework to see. Education is pooled with constructs that point the other way. Health is read through a variable that has largely stopped moving. Social trust is not measured with the coverage any longitudinal design requires.</a:t>
-            </a:r>
-          </a:p>
-          <a:p>
-            <a:pPr>
-              <a:lnSpc>
-                <a:spcPct val="132000"/>
-              </a:lnSpc>
-              <a:spcBef>
-                <a:spcPts val="0"/>
-              </a:spcBef>
-              <a:spcAft>
-                <a:spcPts val="1100"/>
-              </a:spcAft>
-            </a:pPr>
-            <a:r>
-              <a:rPr sz="1400" b="0" i="0">
-                <a:solidFill>
-                  <a:srgbClr val="5A6068"/>
-                </a:solidFill>
-                <a:latin typeface="Calibri"/>
-              </a:rPr>
-              <a:t>None of that is a demand that these frameworks become wellbeing instruments. It is the narrower observation that if wellbeing is to inform what development measurement counts — and the post-2030 conversation suggests it may — then the first question is not which domain to prioritise but whether each is being measured somewhere it can still move. On the evidence here, for at least two of the three, it is not.</a:t>
-            </a:r>
-          </a:p>
-          <a:p>
-            <a:pPr>
-              <a:lnSpc>
-                <a:spcPct val="132000"/>
-              </a:lnSpc>
-              <a:spcBef>
-                <a:spcPts val="0"/>
-              </a:spcBef>
-              <a:spcAft>
-                <a:spcPts val="1100"/>
-              </a:spcAft>
-            </a:pPr>
-            <a:r>
-              <a:rPr sz="1400" b="0" i="0">
-                <a:solidFill>
-                  <a:srgbClr val="5A6068"/>
-                </a:solidFill>
-                <a:latin typeface="Calibri"/>
-              </a:rPr>
-              <a:t>The honest form of the ask is a question rather than a prescription: what would a development framework look like if the components that track individual lived experience were among the things it was built to capture? A commentary cannot answer that. It can show that the question is not rhetorical, and put the evidence on the record so the field can take it up.</a:t>
-            </a:r>
-          </a:p>
-        </p:txBody>
-      </p:sp>
-      <p:sp>
-        <p:nvSpPr>
-          <p:cNvPr id="5" name="TextBox 4"/>
-          <p:cNvSpPr txBox="1"/>
-          <p:nvPr/>
-        </p:nvSpPr>
-        <p:spPr>
-          <a:xfrm>
-            <a:off x="11338560" y="6263640"/>
-            <a:ext cx="548640" cy="274320"/>
-          </a:xfrm>
-          <a:prstGeom prst="rect">
-            <a:avLst/>
-          </a:prstGeom>
-          <a:noFill/>
-        </p:spPr>
-        <p:txBody>
-          <a:bodyPr wrap="square" lIns="0" rIns="0" tIns="0" bIns="0">
-            <a:spAutoFit/>
-          </a:bodyPr>
-          <a:lstStyle/>
-          <a:p>
-            <a:pPr algn="r">
-              <a:spcBef>
-                <a:spcPts val="0"/>
-              </a:spcBef>
-              <a:spcAft>
-                <a:spcPts val="0"/>
-              </a:spcAft>
-            </a:pPr>
-            <a:r>
-              <a:rPr sz="1100" b="0" i="0">
-                <a:solidFill>
-                  <a:srgbClr val="868D96"/>
-                </a:solidFill>
-                <a:latin typeface="Consolas"/>
-              </a:rPr>
-              <a:t>III</a:t>
-            </a:r>
-          </a:p>
-        </p:txBody>
-      </p:sp>
-    </p:spTree>
-  </p:cSld>
-  <p:clrMapOvr>
-    <a:masterClrMapping/>
-  </p:clrMapOvr>
-</p:sld>
-</file>
-
-<file path=ppt/slides/slide32.xml><?xml version="1.0" encoding="utf-8"?>
-<p:sld xmlns:a="http://schemas.openxmlformats.org/drawingml/2006/main" xmlns:p="http://schemas.openxmlformats.org/presentationml/2006/main" xmlns:r="http://schemas.openxmlformats.org/officeDocument/2006/relationships">
-  <p:cSld>
-    <p:bg>
-      <p:bgPr>
-        <a:solidFill>
-          <a:srgbClr val="E8EBEF"/>
-        </a:solidFill>
-        <a:effectLst/>
-      </p:bgPr>
-    </p:bg>
-    <p:spTree>
-      <p:nvGrpSpPr>
-        <p:cNvPr id="1" name=""/>
-        <p:cNvGrpSpPr/>
-        <p:nvPr/>
-      </p:nvGrpSpPr>
-      <p:grpSpPr/>
-      <p:sp>
-        <p:nvSpPr>
-          <p:cNvPr id="2" name="Rectangle 1"/>
+              <a:t>6 things the acts do not settle, in the order they block drafting.</a:t>
+            </a:r>
+          </a:p>
+        </p:txBody>
+      </p:sp>
+      <p:sp>
+        <p:nvSpPr>
+          <p:cNvPr id="3" name="Rectangle 2"/>
           <p:cNvSpPr/>
           <p:nvPr/>
         </p:nvSpPr>
         <p:spPr>
           <a:xfrm>
-            <a:off x="566928" y="2103120"/>
-            <a:ext cx="54864" cy="2377440"/>
+            <a:off x="566928" y="1828800"/>
+            <a:ext cx="3472586" cy="25400"/>
           </a:xfrm>
           <a:prstGeom prst="rect">
             <a:avLst/>
@@ -10934,27 +10885,49 @@
       </p:sp>
       <p:sp>
         <p:nvSpPr>
-          <p:cNvPr id="3" name="TextBox 2"/>
-          <p:cNvSpPr txBox="1"/>
-          <p:nvPr/>
-        </p:nvSpPr>
-        <p:spPr>
-          <a:xfrm>
-            <a:off x="914400" y="1600200"/>
-            <a:ext cx="8686800" cy="274320"/>
-          </a:xfrm>
-          <a:prstGeom prst="rect">
-            <a:avLst/>
-          </a:prstGeom>
-          <a:noFill/>
-        </p:spPr>
-        <p:txBody>
-          <a:bodyPr wrap="square" lIns="0" rIns="0" tIns="0" bIns="0">
-            <a:spAutoFit/>
-          </a:bodyPr>
-          <a:lstStyle/>
-          <a:p>
-            <a:pPr>
+          <p:cNvPr id="4" name="TextBox 3"/>
+          <p:cNvSpPr txBox="1"/>
+          <p:nvPr/>
+        </p:nvSpPr>
+        <p:spPr>
+          <a:xfrm>
+            <a:off x="566928" y="2011680"/>
+            <a:ext cx="3472586" cy="1828800"/>
+          </a:xfrm>
+          <a:prstGeom prst="rect">
+            <a:avLst/>
+          </a:prstGeom>
+          <a:noFill/>
+        </p:spPr>
+        <p:txBody>
+          <a:bodyPr wrap="square" lIns="0" rIns="0" tIns="0" bIns="0">
+            <a:spAutoFit/>
+          </a:bodyPr>
+          <a:lstStyle/>
+          <a:p>
+            <a:pPr>
+              <a:spcBef>
+                <a:spcPts val="0"/>
+              </a:spcBef>
+              <a:spcAft>
+                <a:spcPts val="700"/>
+              </a:spcAft>
+            </a:pPr>
+            <a:r>
+              <a:rPr sz="1050" b="0" i="0">
+                <a:solidFill>
+                  <a:srgbClr val="17549E"/>
+                </a:solidFill>
+                <a:latin typeface="Consolas"/>
+              </a:rPr>
+              <a:t>FRAMING</a:t>
+            </a:r>
+          </a:p>
+          <a:p>
+            <a:pPr>
+              <a:lnSpc>
+                <a:spcPct val="130000"/>
+              </a:lnSpc>
               <a:spcBef>
                 <a:spcPts val="0"/>
               </a:spcBef>
@@ -10965,40 +10938,103 @@
             <a:r>
               <a:rPr sz="1100" b="0" i="0">
                 <a:solidFill>
+                  <a:srgbClr val="5A6068"/>
+                </a:solidFill>
+                <a:latin typeface="Calibri"/>
+              </a:rPr>
+              <a:t>Lead with education and use the generalised collapse as Act I backdrop — recommended — or lead with the robustness result and treat education as the coda. This decides title, abstract, and venue.</a:t>
+            </a:r>
+          </a:p>
+        </p:txBody>
+      </p:sp>
+      <p:sp>
+        <p:nvSpPr>
+          <p:cNvPr id="5" name="Rectangle 4"/>
+          <p:cNvSpPr/>
+          <p:nvPr/>
+        </p:nvSpPr>
+        <p:spPr>
+          <a:xfrm>
+            <a:off x="4359554" y="1828800"/>
+            <a:ext cx="3472586" cy="25400"/>
+          </a:xfrm>
+          <a:prstGeom prst="rect">
+            <a:avLst/>
+          </a:prstGeom>
+          <a:solidFill>
+            <a:srgbClr val="17549E"/>
+          </a:solidFill>
+          <a:ln>
+            <a:noFill/>
+          </a:ln>
+          <a:effectLst/>
+        </p:spPr>
+        <p:style>
+          <a:lnRef idx="1">
+            <a:schemeClr val="accent1"/>
+          </a:lnRef>
+          <a:fillRef idx="3">
+            <a:schemeClr val="accent1"/>
+          </a:fillRef>
+          <a:effectRef idx="2">
+            <a:schemeClr val="accent1"/>
+          </a:effectRef>
+          <a:fontRef idx="minor">
+            <a:schemeClr val="lt1"/>
+          </a:fontRef>
+        </p:style>
+        <p:txBody>
+          <a:bodyPr rtlCol="0" anchor="ctr"/>
+          <a:lstStyle/>
+          <a:p>
+            <a:pPr algn="ctr"/>
+          </a:p>
+        </p:txBody>
+      </p:sp>
+      <p:sp>
+        <p:nvSpPr>
+          <p:cNvPr id="6" name="TextBox 5"/>
+          <p:cNvSpPr txBox="1"/>
+          <p:nvPr/>
+        </p:nvSpPr>
+        <p:spPr>
+          <a:xfrm>
+            <a:off x="4359554" y="2011680"/>
+            <a:ext cx="3472586" cy="1828800"/>
+          </a:xfrm>
+          <a:prstGeom prst="rect">
+            <a:avLst/>
+          </a:prstGeom>
+          <a:noFill/>
+        </p:spPr>
+        <p:txBody>
+          <a:bodyPr wrap="square" lIns="0" rIns="0" tIns="0" bIns="0">
+            <a:spAutoFit/>
+          </a:bodyPr>
+          <a:lstStyle/>
+          <a:p>
+            <a:pPr>
+              <a:spcBef>
+                <a:spcPts val="0"/>
+              </a:spcBef>
+              <a:spcAft>
+                <a:spcPts val="700"/>
+              </a:spcAft>
+            </a:pPr>
+            <a:r>
+              <a:rPr sz="1050" b="0" i="0">
+                <a:solidFill>
                   <a:srgbClr val="17549E"/>
                 </a:solidFill>
                 <a:latin typeface="Consolas"/>
               </a:rPr>
-              <a:t>WHERE ACT III LEAVES US</a:t>
-            </a:r>
-          </a:p>
-        </p:txBody>
-      </p:sp>
-      <p:sp>
-        <p:nvSpPr>
-          <p:cNvPr id="4" name="TextBox 3"/>
-          <p:cNvSpPr txBox="1"/>
-          <p:nvPr/>
-        </p:nvSpPr>
-        <p:spPr>
-          <a:xfrm>
-            <a:off x="914400" y="2148840"/>
-            <a:ext cx="9509760" cy="2926080"/>
-          </a:xfrm>
-          <a:prstGeom prst="rect">
-            <a:avLst/>
-          </a:prstGeom>
-          <a:noFill/>
-        </p:spPr>
-        <p:txBody>
-          <a:bodyPr wrap="square" lIns="0" rIns="0" tIns="0" bIns="0">
-            <a:spAutoFit/>
-          </a:bodyPr>
-          <a:lstStyle/>
+              <a:t>HOW HARD TO PUSH THE CONCLUSION</a:t>
+            </a:r>
+          </a:p>
           <a:p>
             <a:pPr>
               <a:lnSpc>
-                <a:spcPct val="135000"/>
+                <a:spcPct val="130000"/>
               </a:lnSpc>
               <a:spcBef>
                 <a:spcPts val="0"/>
@@ -11008,13 +11044,445 @@
               </a:spcAft>
             </a:pPr>
             <a:r>
-              <a:rPr sz="2100" b="0" i="0">
-                <a:solidFill>
-                  <a:srgbClr val="14171C"/>
-                </a:solidFill>
-                <a:latin typeface="Georgia"/>
-              </a:rPr>
-              <a:t>The recommended framing for submission: lead with education as the positive finding, use the generalised collapse as the backdrop that makes it surprising, and close on the disconnect rather than on a list of fixes. That ordering makes Act I load-bearing without making it the story, and it keeps the paper on the ground it can actually defend — that these components look like they matter for lived experience, and that development measurement is not currently arranged to see them.</a:t>
+              <a:rPr sz="1100" b="0" i="0">
+                <a:solidFill>
+                  <a:srgbClr val="5A6068"/>
+                </a:solidFill>
+                <a:latin typeface="Calibri"/>
+              </a:rPr>
+              <a:t>Act III now lands on a disconnect and an exploratory ask rather than a list of fixes: these components look like they matter for lived experience, and development measurement is not currently arranged to see them. Is that the right altitude for the venue, or should the health and education implications be sharpened into named recommendations? The evidence supports either; the framing does not change the analysis.</a:t>
+            </a:r>
+          </a:p>
+        </p:txBody>
+      </p:sp>
+      <p:sp>
+        <p:nvSpPr>
+          <p:cNvPr id="7" name="Rectangle 6"/>
+          <p:cNvSpPr/>
+          <p:nvPr/>
+        </p:nvSpPr>
+        <p:spPr>
+          <a:xfrm>
+            <a:off x="8152180" y="1828800"/>
+            <a:ext cx="3472586" cy="25400"/>
+          </a:xfrm>
+          <a:prstGeom prst="rect">
+            <a:avLst/>
+          </a:prstGeom>
+          <a:solidFill>
+            <a:srgbClr val="17549E"/>
+          </a:solidFill>
+          <a:ln>
+            <a:noFill/>
+          </a:ln>
+          <a:effectLst/>
+        </p:spPr>
+        <p:style>
+          <a:lnRef idx="1">
+            <a:schemeClr val="accent1"/>
+          </a:lnRef>
+          <a:fillRef idx="3">
+            <a:schemeClr val="accent1"/>
+          </a:fillRef>
+          <a:effectRef idx="2">
+            <a:schemeClr val="accent1"/>
+          </a:effectRef>
+          <a:fontRef idx="minor">
+            <a:schemeClr val="lt1"/>
+          </a:fontRef>
+        </p:style>
+        <p:txBody>
+          <a:bodyPr rtlCol="0" anchor="ctr"/>
+          <a:lstStyle/>
+          <a:p>
+            <a:pPr algn="ctr"/>
+          </a:p>
+        </p:txBody>
+      </p:sp>
+      <p:sp>
+        <p:nvSpPr>
+          <p:cNvPr id="8" name="TextBox 7"/>
+          <p:cNvSpPr txBox="1"/>
+          <p:nvPr/>
+        </p:nvSpPr>
+        <p:spPr>
+          <a:xfrm>
+            <a:off x="8152180" y="2011680"/>
+            <a:ext cx="3472586" cy="1828800"/>
+          </a:xfrm>
+          <a:prstGeom prst="rect">
+            <a:avLst/>
+          </a:prstGeom>
+          <a:noFill/>
+        </p:spPr>
+        <p:txBody>
+          <a:bodyPr wrap="square" lIns="0" rIns="0" tIns="0" bIns="0">
+            <a:spAutoFit/>
+          </a:bodyPr>
+          <a:lstStyle/>
+          <a:p>
+            <a:pPr>
+              <a:spcBef>
+                <a:spcPts val="0"/>
+              </a:spcBef>
+              <a:spcAft>
+                <a:spcPts val="700"/>
+              </a:spcAft>
+            </a:pPr>
+            <a:r>
+              <a:rPr sz="1050" b="0" i="0">
+                <a:solidFill>
+                  <a:srgbClr val="17549E"/>
+                </a:solidFill>
+                <a:latin typeface="Consolas"/>
+              </a:rPr>
+              <a:t>DISPLAY ITEMS</a:t>
+            </a:r>
+          </a:p>
+          <a:p>
+            <a:pPr>
+              <a:lnSpc>
+                <a:spcPct val="130000"/>
+              </a:lnSpc>
+              <a:spcBef>
+                <a:spcPts val="0"/>
+              </a:spcBef>
+              <a:spcAft>
+                <a:spcPts val="0"/>
+              </a:spcAft>
+            </a:pPr>
+            <a:r>
+              <a:rPr sz="1100" b="0" i="0">
+                <a:solidFill>
+                  <a:srgbClr val="5A6068"/>
+                </a:solidFill>
+                <a:latin typeface="Calibri"/>
+              </a:rPr>
+              <a:t>Commentaries allow one or two. Proposed: the three-panel composite as Figure 1 and the domain scorecard as Figure 2. Everything else moves to supplementary.</a:t>
+            </a:r>
+          </a:p>
+        </p:txBody>
+      </p:sp>
+      <p:sp>
+        <p:nvSpPr>
+          <p:cNvPr id="9" name="Rectangle 8"/>
+          <p:cNvSpPr/>
+          <p:nvPr/>
+        </p:nvSpPr>
+        <p:spPr>
+          <a:xfrm>
+            <a:off x="566928" y="4069080"/>
+            <a:ext cx="3472586" cy="25400"/>
+          </a:xfrm>
+          <a:prstGeom prst="rect">
+            <a:avLst/>
+          </a:prstGeom>
+          <a:solidFill>
+            <a:srgbClr val="17549E"/>
+          </a:solidFill>
+          <a:ln>
+            <a:noFill/>
+          </a:ln>
+          <a:effectLst/>
+        </p:spPr>
+        <p:style>
+          <a:lnRef idx="1">
+            <a:schemeClr val="accent1"/>
+          </a:lnRef>
+          <a:fillRef idx="3">
+            <a:schemeClr val="accent1"/>
+          </a:fillRef>
+          <a:effectRef idx="2">
+            <a:schemeClr val="accent1"/>
+          </a:effectRef>
+          <a:fontRef idx="minor">
+            <a:schemeClr val="lt1"/>
+          </a:fontRef>
+        </p:style>
+        <p:txBody>
+          <a:bodyPr rtlCol="0" anchor="ctr"/>
+          <a:lstStyle/>
+          <a:p>
+            <a:pPr algn="ctr"/>
+          </a:p>
+        </p:txBody>
+      </p:sp>
+      <p:sp>
+        <p:nvSpPr>
+          <p:cNvPr id="10" name="TextBox 9"/>
+          <p:cNvSpPr txBox="1"/>
+          <p:nvPr/>
+        </p:nvSpPr>
+        <p:spPr>
+          <a:xfrm>
+            <a:off x="566928" y="4251960"/>
+            <a:ext cx="3472586" cy="1828800"/>
+          </a:xfrm>
+          <a:prstGeom prst="rect">
+            <a:avLst/>
+          </a:prstGeom>
+          <a:noFill/>
+        </p:spPr>
+        <p:txBody>
+          <a:bodyPr wrap="square" lIns="0" rIns="0" tIns="0" bIns="0">
+            <a:spAutoFit/>
+          </a:bodyPr>
+          <a:lstStyle/>
+          <a:p>
+            <a:pPr>
+              <a:spcBef>
+                <a:spcPts val="0"/>
+              </a:spcBef>
+              <a:spcAft>
+                <a:spcPts val="700"/>
+              </a:spcAft>
+            </a:pPr>
+            <a:r>
+              <a:rPr sz="1050" b="0" i="0">
+                <a:solidFill>
+                  <a:srgbClr val="17549E"/>
+                </a:solidFill>
+                <a:latin typeface="Consolas"/>
+              </a:rPr>
+              <a:t>RESOLVED: THE WITHIN-COUNTRY WORK IS A SEPARATE PAPER</a:t>
+            </a:r>
+          </a:p>
+          <a:p>
+            <a:pPr>
+              <a:lnSpc>
+                <a:spcPct val="130000"/>
+              </a:lnSpc>
+              <a:spcBef>
+                <a:spcPts val="0"/>
+              </a:spcBef>
+              <a:spcAft>
+                <a:spcPts val="0"/>
+              </a:spcAft>
+            </a:pPr>
+            <a:r>
+              <a:rPr sz="1100" b="0" i="0">
+                <a:solidFill>
+                  <a:srgbClr val="5A6068"/>
+                </a:solidFill>
+                <a:latin typeface="Calibri"/>
+              </a:rPr>
+              <a:t>The ESS × subnational-HDI regional analysis is out of the commentary. It is Europe-only across 16 countries, its coverage is uneven (Italy matches 30% of respondents to a region), and it is specification-sensitive in a way that needs room to examine: education’s median regional correlation changes sign between two defensible aggregations, and the health-versus-trust ordering swaps under the same choice. Those are interesting problems given a robustness section and liabilities without one. The code, figures and processed files all stay in the repository.</a:t>
+            </a:r>
+          </a:p>
+        </p:txBody>
+      </p:sp>
+      <p:sp>
+        <p:nvSpPr>
+          <p:cNvPr id="11" name="Rectangle 10"/>
+          <p:cNvSpPr/>
+          <p:nvPr/>
+        </p:nvSpPr>
+        <p:spPr>
+          <a:xfrm>
+            <a:off x="4359554" y="4069080"/>
+            <a:ext cx="3472586" cy="25400"/>
+          </a:xfrm>
+          <a:prstGeom prst="rect">
+            <a:avLst/>
+          </a:prstGeom>
+          <a:solidFill>
+            <a:srgbClr val="17549E"/>
+          </a:solidFill>
+          <a:ln>
+            <a:noFill/>
+          </a:ln>
+          <a:effectLst/>
+        </p:spPr>
+        <p:style>
+          <a:lnRef idx="1">
+            <a:schemeClr val="accent1"/>
+          </a:lnRef>
+          <a:fillRef idx="3">
+            <a:schemeClr val="accent1"/>
+          </a:fillRef>
+          <a:effectRef idx="2">
+            <a:schemeClr val="accent1"/>
+          </a:effectRef>
+          <a:fontRef idx="minor">
+            <a:schemeClr val="lt1"/>
+          </a:fontRef>
+        </p:style>
+        <p:txBody>
+          <a:bodyPr rtlCol="0" anchor="ctr"/>
+          <a:lstStyle/>
+          <a:p>
+            <a:pPr algn="ctr"/>
+          </a:p>
+        </p:txBody>
+      </p:sp>
+      <p:sp>
+        <p:nvSpPr>
+          <p:cNvPr id="12" name="TextBox 11"/>
+          <p:cNvSpPr txBox="1"/>
+          <p:nvPr/>
+        </p:nvSpPr>
+        <p:spPr>
+          <a:xfrm>
+            <a:off x="4359554" y="4251960"/>
+            <a:ext cx="3472586" cy="1828800"/>
+          </a:xfrm>
+          <a:prstGeom prst="rect">
+            <a:avLst/>
+          </a:prstGeom>
+          <a:noFill/>
+        </p:spPr>
+        <p:txBody>
+          <a:bodyPr wrap="square" lIns="0" rIns="0" tIns="0" bIns="0">
+            <a:spAutoFit/>
+          </a:bodyPr>
+          <a:lstStyle/>
+          <a:p>
+            <a:pPr>
+              <a:spcBef>
+                <a:spcPts val="0"/>
+              </a:spcBef>
+              <a:spcAft>
+                <a:spcPts val="700"/>
+              </a:spcAft>
+            </a:pPr>
+            <a:r>
+              <a:rPr sz="1050" b="0" i="0">
+                <a:solidFill>
+                  <a:srgbClr val="17549E"/>
+                </a:solidFill>
+                <a:latin typeface="Consolas"/>
+              </a:rPr>
+              <a:t>RESOLVED: SUBNATIONAL SUB-INDICES</a:t>
+            </a:r>
+          </a:p>
+          <a:p>
+            <a:pPr>
+              <a:lnSpc>
+                <a:spcPct val="130000"/>
+              </a:lnSpc>
+              <a:spcBef>
+                <a:spcPts val="0"/>
+              </a:spcBef>
+              <a:spcAft>
+                <a:spcPts val="0"/>
+              </a:spcAft>
+            </a:pPr>
+            <a:r>
+              <a:rPr sz="1100" b="0" i="0">
+                <a:solidFill>
+                  <a:srgbClr val="5A6068"/>
+                </a:solidFill>
+                <a:latin typeface="Calibri"/>
+              </a:rPr>
+              <a:t>The per-domain GDL exports are in and the analysis stands: within countries the external health index leads education and income (+0.34 vs +0.06 and +0.12), so the ranking flip does not rest on self-report. It travels with the within-country paper rather than this one. GDL’s DHS-based Education &amp; Work and Health datasets were also examined: they cover only 6 ESS countries and cannot serve the European design.</a:t>
+            </a:r>
+          </a:p>
+        </p:txBody>
+      </p:sp>
+      <p:sp>
+        <p:nvSpPr>
+          <p:cNvPr id="13" name="Rectangle 12"/>
+          <p:cNvSpPr/>
+          <p:nvPr/>
+        </p:nvSpPr>
+        <p:spPr>
+          <a:xfrm>
+            <a:off x="8152180" y="4069080"/>
+            <a:ext cx="3472586" cy="25400"/>
+          </a:xfrm>
+          <a:prstGeom prst="rect">
+            <a:avLst/>
+          </a:prstGeom>
+          <a:solidFill>
+            <a:srgbClr val="17549E"/>
+          </a:solidFill>
+          <a:ln>
+            <a:noFill/>
+          </a:ln>
+          <a:effectLst/>
+        </p:spPr>
+        <p:style>
+          <a:lnRef idx="1">
+            <a:schemeClr val="accent1"/>
+          </a:lnRef>
+          <a:fillRef idx="3">
+            <a:schemeClr val="accent1"/>
+          </a:fillRef>
+          <a:effectRef idx="2">
+            <a:schemeClr val="accent1"/>
+          </a:effectRef>
+          <a:fontRef idx="minor">
+            <a:schemeClr val="lt1"/>
+          </a:fontRef>
+        </p:style>
+        <p:txBody>
+          <a:bodyPr rtlCol="0" anchor="ctr"/>
+          <a:lstStyle/>
+          <a:p>
+            <a:pPr algn="ctr"/>
+          </a:p>
+        </p:txBody>
+      </p:sp>
+      <p:sp>
+        <p:nvSpPr>
+          <p:cNvPr id="14" name="TextBox 13"/>
+          <p:cNvSpPr txBox="1"/>
+          <p:nvPr/>
+        </p:nvSpPr>
+        <p:spPr>
+          <a:xfrm>
+            <a:off x="8152180" y="4251960"/>
+            <a:ext cx="3472586" cy="1828800"/>
+          </a:xfrm>
+          <a:prstGeom prst="rect">
+            <a:avLst/>
+          </a:prstGeom>
+          <a:noFill/>
+        </p:spPr>
+        <p:txBody>
+          <a:bodyPr wrap="square" lIns="0" rIns="0" tIns="0" bIns="0">
+            <a:spAutoFit/>
+          </a:bodyPr>
+          <a:lstStyle/>
+          <a:p>
+            <a:pPr>
+              <a:spcBef>
+                <a:spcPts val="0"/>
+              </a:spcBef>
+              <a:spcAft>
+                <a:spcPts val="700"/>
+              </a:spcAft>
+            </a:pPr>
+            <a:r>
+              <a:rPr sz="1050" b="0" i="0">
+                <a:solidFill>
+                  <a:srgbClr val="17549E"/>
+                </a:solidFill>
+                <a:latin typeface="Consolas"/>
+              </a:rPr>
+              <a:t>METHODS NOTE</a:t>
+            </a:r>
+          </a:p>
+          <a:p>
+            <a:pPr>
+              <a:lnSpc>
+                <a:spcPct val="130000"/>
+              </a:lnSpc>
+              <a:spcBef>
+                <a:spcPts val="0"/>
+              </a:spcBef>
+              <a:spcAft>
+                <a:spcPts val="0"/>
+              </a:spcAft>
+            </a:pPr>
+            <a:r>
+              <a:rPr sz="1100" b="0" i="0">
+                <a:solidFill>
+                  <a:srgbClr val="5A6068"/>
+                </a:solidFill>
+                <a:latin typeface="Calibri"/>
+              </a:rPr>
+              <a:t>Pooled R² and significant-country share tell different stories at several points. Proposal: report both throughout and discuss the divergence explicitly as a secondary contribution.</a:t>
             </a:r>
           </a:p>
         </p:txBody>
@@ -11028,6 +11496,96 @@
 </file>
 
 <file path=ppt/slides/slide33.xml><?xml version="1.0" encoding="utf-8"?>
+<p:sld xmlns:a="http://schemas.openxmlformats.org/drawingml/2006/main" xmlns:p="http://schemas.openxmlformats.org/presentationml/2006/main" xmlns:r="http://schemas.openxmlformats.org/officeDocument/2006/relationships">
+  <p:cSld>
+    <p:bg>
+      <p:bgPr>
+        <a:solidFill>
+          <a:srgbClr val="14171C"/>
+        </a:solidFill>
+        <a:effectLst/>
+      </p:bgPr>
+    </p:bg>
+    <p:spTree>
+      <p:nvGrpSpPr>
+        <p:cNvPr id="1" name=""/>
+        <p:cNvGrpSpPr/>
+        <p:nvPr/>
+      </p:nvGrpSpPr>
+      <p:grpSpPr/>
+      <p:sp>
+        <p:nvSpPr>
+          <p:cNvPr id="2" name="TextBox 1"/>
+          <p:cNvSpPr txBox="1"/>
+          <p:nvPr/>
+        </p:nvSpPr>
+        <p:spPr>
+          <a:xfrm>
+            <a:off x="566928" y="2743200"/>
+            <a:ext cx="8229600" cy="1371600"/>
+          </a:xfrm>
+          <a:prstGeom prst="rect">
+            <a:avLst/>
+          </a:prstGeom>
+          <a:noFill/>
+        </p:spPr>
+        <p:txBody>
+          <a:bodyPr wrap="square" lIns="0" rIns="0" tIns="0" bIns="0">
+            <a:spAutoFit/>
+          </a:bodyPr>
+          <a:lstStyle/>
+          <a:p>
+            <a:pPr>
+              <a:spcBef>
+                <a:spcPts val="0"/>
+              </a:spcBef>
+              <a:spcAft>
+                <a:spcPts val="1000"/>
+              </a:spcAft>
+            </a:pPr>
+            <a:r>
+              <a:rPr sz="4000" b="0" i="0">
+                <a:solidFill>
+                  <a:srgbClr val="FCFCFB"/>
+                </a:solidFill>
+                <a:latin typeface="Georgia"/>
+              </a:rPr>
+              <a:t>Evidence appendix</a:t>
+            </a:r>
+          </a:p>
+          <a:p>
+            <a:pPr>
+              <a:lnSpc>
+                <a:spcPct val="135000"/>
+              </a:lnSpc>
+              <a:spcBef>
+                <a:spcPts val="0"/>
+              </a:spcBef>
+              <a:spcAft>
+                <a:spcPts val="0"/>
+              </a:spcAft>
+            </a:pPr>
+            <a:r>
+              <a:rPr sz="1400" b="0" i="0">
+                <a:solidFill>
+                  <a:srgbClr val="9AA4B0"/>
+                </a:solidFill>
+                <a:latin typeface="Calibri"/>
+              </a:rPr>
+              <a:t>Everything the three acts rest on but do not carry. In submission these become supplementary material.</a:t>
+            </a:r>
+          </a:p>
+        </p:txBody>
+      </p:sp>
+    </p:spTree>
+  </p:cSld>
+  <p:clrMapOvr>
+    <a:masterClrMapping/>
+  </p:clrMapOvr>
+</p:sld>
+</file>
+
+<file path=ppt/slides/slide34.xml><?xml version="1.0" encoding="utf-8"?>
 <p:sld xmlns:a="http://schemas.openxmlformats.org/drawingml/2006/main" xmlns:p="http://schemas.openxmlformats.org/presentationml/2006/main" xmlns:r="http://schemas.openxmlformats.org/officeDocument/2006/relationships">
   <p:cSld>
     <p:bg>
@@ -11053,797 +11611,151 @@
         </p:nvSpPr>
         <p:spPr>
           <a:xfrm>
-            <a:off x="566928" y="502920"/>
-            <a:ext cx="8229600" cy="822960"/>
-          </a:xfrm>
-          <a:prstGeom prst="rect">
-            <a:avLst/>
-          </a:prstGeom>
-          <a:noFill/>
-        </p:spPr>
-        <p:txBody>
-          <a:bodyPr wrap="square" lIns="0" rIns="0" tIns="0" bIns="0">
-            <a:spAutoFit/>
-          </a:bodyPr>
-          <a:lstStyle/>
-          <a:p>
-            <a:pPr>
-              <a:spcBef>
-                <a:spcPts val="0"/>
-              </a:spcBef>
-              <a:spcAft>
-                <a:spcPts val="600"/>
-              </a:spcAft>
-            </a:pPr>
-            <a:r>
-              <a:rPr sz="3200" b="0" i="0">
+            <a:off x="566928" y="411480"/>
+            <a:ext cx="10515600" cy="320040"/>
+          </a:xfrm>
+          <a:prstGeom prst="rect">
+            <a:avLst/>
+          </a:prstGeom>
+          <a:noFill/>
+        </p:spPr>
+        <p:txBody>
+          <a:bodyPr wrap="square" lIns="0" rIns="0" tIns="0" bIns="0">
+            <a:spAutoFit/>
+          </a:bodyPr>
+          <a:lstStyle/>
+          <a:p>
+            <a:pPr>
+              <a:spcBef>
+                <a:spcPts val="0"/>
+              </a:spcBef>
+              <a:spcAft>
+                <a:spcPts val="0"/>
+              </a:spcAft>
+            </a:pPr>
+            <a:r>
+              <a:rPr sz="1000" b="0" i="0">
+                <a:solidFill>
+                  <a:srgbClr val="868D96"/>
+                </a:solidFill>
+                <a:latin typeface="Consolas"/>
+              </a:rPr>
+              <a:t>APPENDIX</a:t>
+            </a:r>
+          </a:p>
+        </p:txBody>
+      </p:sp>
+      <p:sp>
+        <p:nvSpPr>
+          <p:cNvPr id="3" name="TextBox 2"/>
+          <p:cNvSpPr txBox="1"/>
+          <p:nvPr/>
+        </p:nvSpPr>
+        <p:spPr>
+          <a:xfrm>
+            <a:off x="566928" y="749808"/>
+            <a:ext cx="10515600" cy="457200"/>
+          </a:xfrm>
+          <a:prstGeom prst="rect">
+            <a:avLst/>
+          </a:prstGeom>
+          <a:noFill/>
+        </p:spPr>
+        <p:txBody>
+          <a:bodyPr wrap="square" lIns="0" rIns="0" tIns="0" bIns="0">
+            <a:spAutoFit/>
+          </a:bodyPr>
+          <a:lstStyle/>
+          <a:p>
+            <a:pPr>
+              <a:spcBef>
+                <a:spcPts val="0"/>
+              </a:spcBef>
+              <a:spcAft>
+                <a:spcPts val="0"/>
+              </a:spcAft>
+            </a:pPr>
+            <a:r>
+              <a:rPr sz="2000" b="0" i="0">
                 <a:solidFill>
                   <a:srgbClr val="14171C"/>
                 </a:solidFill>
                 <a:latin typeface="Georgia"/>
               </a:rPr>
-              <a:t>Decisions for the team</a:t>
-            </a:r>
-          </a:p>
-          <a:p>
-            <a:pPr>
-              <a:spcBef>
-                <a:spcPts val="0"/>
-              </a:spcBef>
-              <a:spcAft>
-                <a:spcPts val="0"/>
-              </a:spcAft>
-            </a:pPr>
-            <a:r>
-              <a:rPr sz="1300" b="0" i="0">
+              <a:t>HDI against SDG, domain by domain</a:t>
+            </a:r>
+          </a:p>
+        </p:txBody>
+      </p:sp>
+      <p:sp>
+        <p:nvSpPr>
+          <p:cNvPr id="4" name="TextBox 3"/>
+          <p:cNvSpPr txBox="1"/>
+          <p:nvPr/>
+        </p:nvSpPr>
+        <p:spPr>
+          <a:xfrm>
+            <a:off x="566928" y="1207008"/>
+            <a:ext cx="10515600" cy="457200"/>
+          </a:xfrm>
+          <a:prstGeom prst="rect">
+            <a:avLst/>
+          </a:prstGeom>
+          <a:noFill/>
+        </p:spPr>
+        <p:txBody>
+          <a:bodyPr wrap="square" lIns="0" rIns="0" tIns="0" bIns="0">
+            <a:spAutoFit/>
+          </a:bodyPr>
+          <a:lstStyle/>
+          <a:p>
+            <a:pPr>
+              <a:lnSpc>
+                <a:spcPct val="128000"/>
+              </a:lnSpc>
+              <a:spcBef>
+                <a:spcPts val="0"/>
+              </a:spcBef>
+              <a:spcAft>
+                <a:spcPts val="0"/>
+              </a:spcAft>
+            </a:pPr>
+            <a:r>
+              <a:rPr sz="1100" b="0" i="0">
                 <a:solidFill>
                   <a:srgbClr val="5A6068"/>
                 </a:solidFill>
                 <a:latin typeface="Calibri"/>
               </a:rPr>
-              <a:t>6 things the acts do not settle, in the order they block drafting.</a:t>
-            </a:r>
-          </a:p>
-        </p:txBody>
-      </p:sp>
-      <p:sp>
-        <p:nvSpPr>
-          <p:cNvPr id="3" name="Rectangle 2"/>
-          <p:cNvSpPr/>
-          <p:nvPr/>
-        </p:nvSpPr>
-        <p:spPr>
-          <a:xfrm>
-            <a:off x="566928" y="1828800"/>
-            <a:ext cx="3472586" cy="25400"/>
-          </a:xfrm>
-          <a:prstGeom prst="rect">
-            <a:avLst/>
-          </a:prstGeom>
-          <a:solidFill>
-            <a:srgbClr val="17549E"/>
-          </a:solidFill>
-          <a:ln>
-            <a:noFill/>
-          </a:ln>
-          <a:effectLst/>
-        </p:spPr>
-        <p:style>
-          <a:lnRef idx="1">
-            <a:schemeClr val="accent1"/>
-          </a:lnRef>
-          <a:fillRef idx="3">
-            <a:schemeClr val="accent1"/>
-          </a:fillRef>
-          <a:effectRef idx="2">
-            <a:schemeClr val="accent1"/>
-          </a:effectRef>
-          <a:fontRef idx="minor">
-            <a:schemeClr val="lt1"/>
-          </a:fontRef>
-        </p:style>
-        <p:txBody>
-          <a:bodyPr rtlCol="0" anchor="ctr"/>
-          <a:lstStyle/>
-          <a:p>
-            <a:pPr algn="ctr"/>
-          </a:p>
-        </p:txBody>
-      </p:sp>
-      <p:sp>
-        <p:nvSpPr>
-          <p:cNvPr id="4" name="TextBox 3"/>
-          <p:cNvSpPr txBox="1"/>
-          <p:nvPr/>
-        </p:nvSpPr>
-        <p:spPr>
-          <a:xfrm>
-            <a:off x="566928" y="2011680"/>
-            <a:ext cx="3472586" cy="1828800"/>
-          </a:xfrm>
-          <a:prstGeom prst="rect">
-            <a:avLst/>
-          </a:prstGeom>
-          <a:noFill/>
-        </p:spPr>
-        <p:txBody>
-          <a:bodyPr wrap="square" lIns="0" rIns="0" tIns="0" bIns="0">
-            <a:spAutoFit/>
-          </a:bodyPr>
-          <a:lstStyle/>
-          <a:p>
-            <a:pPr>
-              <a:spcBef>
-                <a:spcPts val="0"/>
-              </a:spcBef>
-              <a:spcAft>
-                <a:spcPts val="700"/>
-              </a:spcAft>
-            </a:pPr>
-            <a:r>
-              <a:rPr sz="1050" b="0" i="0">
-                <a:solidFill>
-                  <a:srgbClr val="17549E"/>
-                </a:solidFill>
-                <a:latin typeface="Consolas"/>
-              </a:rPr>
-              <a:t>FRAMING</a:t>
-            </a:r>
-          </a:p>
-          <a:p>
-            <a:pPr>
-              <a:lnSpc>
-                <a:spcPct val="130000"/>
-              </a:lnSpc>
-              <a:spcBef>
-                <a:spcPts val="0"/>
-              </a:spcBef>
-              <a:spcAft>
-                <a:spcPts val="0"/>
-              </a:spcAft>
-            </a:pPr>
-            <a:r>
-              <a:rPr sz="1100" b="0" i="0">
-                <a:solidFill>
-                  <a:srgbClr val="5A6068"/>
-                </a:solidFill>
-                <a:latin typeface="Calibri"/>
-              </a:rPr>
-              <a:t>Lead with education and use the generalised collapse as Act I backdrop — recommended — or lead with the robustness result and treat education as the coda. This decides title, abstract, and venue.</a:t>
-            </a:r>
-          </a:p>
-        </p:txBody>
-      </p:sp>
-      <p:sp>
-        <p:nvSpPr>
-          <p:cNvPr id="5" name="Rectangle 4"/>
-          <p:cNvSpPr/>
-          <p:nvPr/>
-        </p:nvSpPr>
-        <p:spPr>
-          <a:xfrm>
-            <a:off x="4359554" y="1828800"/>
-            <a:ext cx="3472586" cy="25400"/>
-          </a:xfrm>
-          <a:prstGeom prst="rect">
-            <a:avLst/>
-          </a:prstGeom>
-          <a:solidFill>
-            <a:srgbClr val="17549E"/>
-          </a:solidFill>
-          <a:ln>
-            <a:noFill/>
-          </a:ln>
-          <a:effectLst/>
-        </p:spPr>
-        <p:style>
-          <a:lnRef idx="1">
-            <a:schemeClr val="accent1"/>
-          </a:lnRef>
-          <a:fillRef idx="3">
-            <a:schemeClr val="accent1"/>
-          </a:fillRef>
-          <a:effectRef idx="2">
-            <a:schemeClr val="accent1"/>
-          </a:effectRef>
-          <a:fontRef idx="minor">
-            <a:schemeClr val="lt1"/>
-          </a:fontRef>
-        </p:style>
-        <p:txBody>
-          <a:bodyPr rtlCol="0" anchor="ctr"/>
-          <a:lstStyle/>
-          <a:p>
-            <a:pPr algn="ctr"/>
-          </a:p>
-        </p:txBody>
-      </p:sp>
-      <p:sp>
-        <p:nvSpPr>
-          <p:cNvPr id="6" name="TextBox 5"/>
-          <p:cNvSpPr txBox="1"/>
-          <p:nvPr/>
-        </p:nvSpPr>
-        <p:spPr>
-          <a:xfrm>
-            <a:off x="4359554" y="2011680"/>
-            <a:ext cx="3472586" cy="1828800"/>
-          </a:xfrm>
-          <a:prstGeom prst="rect">
-            <a:avLst/>
-          </a:prstGeom>
-          <a:noFill/>
-        </p:spPr>
-        <p:txBody>
-          <a:bodyPr wrap="square" lIns="0" rIns="0" tIns="0" bIns="0">
-            <a:spAutoFit/>
-          </a:bodyPr>
-          <a:lstStyle/>
-          <a:p>
-            <a:pPr>
-              <a:spcBef>
-                <a:spcPts val="0"/>
-              </a:spcBef>
-              <a:spcAft>
-                <a:spcPts val="700"/>
-              </a:spcAft>
-            </a:pPr>
-            <a:r>
-              <a:rPr sz="1050" b="0" i="0">
-                <a:solidFill>
-                  <a:srgbClr val="17549E"/>
-                </a:solidFill>
-                <a:latin typeface="Consolas"/>
-              </a:rPr>
-              <a:t>HOW HARD TO PUSH THE CONCLUSION</a:t>
-            </a:r>
-          </a:p>
-          <a:p>
-            <a:pPr>
-              <a:lnSpc>
-                <a:spcPct val="130000"/>
-              </a:lnSpc>
-              <a:spcBef>
-                <a:spcPts val="0"/>
-              </a:spcBef>
-              <a:spcAft>
-                <a:spcPts val="0"/>
-              </a:spcAft>
-            </a:pPr>
-            <a:r>
-              <a:rPr sz="1100" b="0" i="0">
-                <a:solidFill>
-                  <a:srgbClr val="5A6068"/>
-                </a:solidFill>
-                <a:latin typeface="Calibri"/>
-              </a:rPr>
-              <a:t>Act III now lands on a disconnect and an exploratory ask rather than a list of fixes: these components look like they matter for lived experience, and development measurement is not currently arranged to see them. Is that the right altitude for the venue, or should the health and education implications be sharpened into named recommendations? The evidence supports either; the framing does not change the analysis.</a:t>
-            </a:r>
-          </a:p>
-        </p:txBody>
-      </p:sp>
-      <p:sp>
-        <p:nvSpPr>
-          <p:cNvPr id="7" name="Rectangle 6"/>
-          <p:cNvSpPr/>
-          <p:nvPr/>
-        </p:nvSpPr>
-        <p:spPr>
-          <a:xfrm>
-            <a:off x="8152180" y="1828800"/>
-            <a:ext cx="3472586" cy="25400"/>
-          </a:xfrm>
-          <a:prstGeom prst="rect">
-            <a:avLst/>
-          </a:prstGeom>
-          <a:solidFill>
-            <a:srgbClr val="17549E"/>
-          </a:solidFill>
-          <a:ln>
-            <a:noFill/>
-          </a:ln>
-          <a:effectLst/>
-        </p:spPr>
-        <p:style>
-          <a:lnRef idx="1">
-            <a:schemeClr val="accent1"/>
-          </a:lnRef>
-          <a:fillRef idx="3">
-            <a:schemeClr val="accent1"/>
-          </a:fillRef>
-          <a:effectRef idx="2">
-            <a:schemeClr val="accent1"/>
-          </a:effectRef>
-          <a:fontRef idx="minor">
-            <a:schemeClr val="lt1"/>
-          </a:fontRef>
-        </p:style>
-        <p:txBody>
-          <a:bodyPr rtlCol="0" anchor="ctr"/>
-          <a:lstStyle/>
-          <a:p>
-            <a:pPr algn="ctr"/>
-          </a:p>
-        </p:txBody>
-      </p:sp>
-      <p:sp>
-        <p:nvSpPr>
-          <p:cNvPr id="8" name="TextBox 7"/>
-          <p:cNvSpPr txBox="1"/>
-          <p:nvPr/>
-        </p:nvSpPr>
-        <p:spPr>
-          <a:xfrm>
-            <a:off x="8152180" y="2011680"/>
-            <a:ext cx="3472586" cy="1828800"/>
-          </a:xfrm>
-          <a:prstGeom prst="rect">
-            <a:avLst/>
-          </a:prstGeom>
-          <a:noFill/>
-        </p:spPr>
-        <p:txBody>
-          <a:bodyPr wrap="square" lIns="0" rIns="0" tIns="0" bIns="0">
-            <a:spAutoFit/>
-          </a:bodyPr>
-          <a:lstStyle/>
-          <a:p>
-            <a:pPr>
-              <a:spcBef>
-                <a:spcPts val="0"/>
-              </a:spcBef>
-              <a:spcAft>
-                <a:spcPts val="700"/>
-              </a:spcAft>
-            </a:pPr>
-            <a:r>
-              <a:rPr sz="1050" b="0" i="0">
-                <a:solidFill>
-                  <a:srgbClr val="17549E"/>
-                </a:solidFill>
-                <a:latin typeface="Consolas"/>
-              </a:rPr>
-              <a:t>DISPLAY ITEMS</a:t>
-            </a:r>
-          </a:p>
-          <a:p>
-            <a:pPr>
-              <a:lnSpc>
-                <a:spcPct val="130000"/>
-              </a:lnSpc>
-              <a:spcBef>
-                <a:spcPts val="0"/>
-              </a:spcBef>
-              <a:spcAft>
-                <a:spcPts val="0"/>
-              </a:spcAft>
-            </a:pPr>
-            <a:r>
-              <a:rPr sz="1100" b="0" i="0">
-                <a:solidFill>
-                  <a:srgbClr val="5A6068"/>
-                </a:solidFill>
-                <a:latin typeface="Calibri"/>
-              </a:rPr>
-              <a:t>Commentaries allow one or two. Proposed: the three-panel composite as Figure 1 and the domain scorecard as Figure 2. Everything else moves to supplementary.</a:t>
-            </a:r>
-          </a:p>
-        </p:txBody>
-      </p:sp>
-      <p:sp>
-        <p:nvSpPr>
-          <p:cNvPr id="9" name="Rectangle 8"/>
-          <p:cNvSpPr/>
-          <p:nvPr/>
-        </p:nvSpPr>
-        <p:spPr>
-          <a:xfrm>
-            <a:off x="566928" y="4069080"/>
-            <a:ext cx="3472586" cy="25400"/>
-          </a:xfrm>
-          <a:prstGeom prst="rect">
-            <a:avLst/>
-          </a:prstGeom>
-          <a:solidFill>
-            <a:srgbClr val="17549E"/>
-          </a:solidFill>
-          <a:ln>
-            <a:noFill/>
-          </a:ln>
-          <a:effectLst/>
-        </p:spPr>
-        <p:style>
-          <a:lnRef idx="1">
-            <a:schemeClr val="accent1"/>
-          </a:lnRef>
-          <a:fillRef idx="3">
-            <a:schemeClr val="accent1"/>
-          </a:fillRef>
-          <a:effectRef idx="2">
-            <a:schemeClr val="accent1"/>
-          </a:effectRef>
-          <a:fontRef idx="minor">
-            <a:schemeClr val="lt1"/>
-          </a:fontRef>
-        </p:style>
-        <p:txBody>
-          <a:bodyPr rtlCol="0" anchor="ctr"/>
-          <a:lstStyle/>
-          <a:p>
-            <a:pPr algn="ctr"/>
-          </a:p>
-        </p:txBody>
-      </p:sp>
-      <p:sp>
-        <p:nvSpPr>
-          <p:cNvPr id="10" name="TextBox 9"/>
-          <p:cNvSpPr txBox="1"/>
-          <p:nvPr/>
-        </p:nvSpPr>
-        <p:spPr>
-          <a:xfrm>
-            <a:off x="566928" y="4251960"/>
-            <a:ext cx="3472586" cy="1828800"/>
-          </a:xfrm>
-          <a:prstGeom prst="rect">
-            <a:avLst/>
-          </a:prstGeom>
-          <a:noFill/>
-        </p:spPr>
-        <p:txBody>
-          <a:bodyPr wrap="square" lIns="0" rIns="0" tIns="0" bIns="0">
-            <a:spAutoFit/>
-          </a:bodyPr>
-          <a:lstStyle/>
-          <a:p>
-            <a:pPr>
-              <a:spcBef>
-                <a:spcPts val="0"/>
-              </a:spcBef>
-              <a:spcAft>
-                <a:spcPts val="700"/>
-              </a:spcAft>
-            </a:pPr>
-            <a:r>
-              <a:rPr sz="1050" b="0" i="0">
-                <a:solidFill>
-                  <a:srgbClr val="17549E"/>
-                </a:solidFill>
-                <a:latin typeface="Consolas"/>
-              </a:rPr>
-              <a:t>RESOLVED: THE WITHIN-COUNTRY WORK IS A SEPARATE PAPER</a:t>
-            </a:r>
-          </a:p>
-          <a:p>
-            <a:pPr>
-              <a:lnSpc>
-                <a:spcPct val="130000"/>
-              </a:lnSpc>
-              <a:spcBef>
-                <a:spcPts val="0"/>
-              </a:spcBef>
-              <a:spcAft>
-                <a:spcPts val="0"/>
-              </a:spcAft>
-            </a:pPr>
-            <a:r>
-              <a:rPr sz="1100" b="0" i="0">
-                <a:solidFill>
-                  <a:srgbClr val="5A6068"/>
-                </a:solidFill>
-                <a:latin typeface="Calibri"/>
-              </a:rPr>
-              <a:t>The ESS × subnational-HDI regional analysis is out of the commentary. It is Europe-only across 16 countries, its coverage is uneven (Italy matches 30% of respondents to a region), and it is specification-sensitive in a way that needs room to examine: education’s median regional correlation changes sign between two defensible aggregations, and the health-versus-trust ordering swaps under the same choice. Those are interesting problems given a robustness section and liabilities without one. The code, figures and processed files all stay in the repository.</a:t>
-            </a:r>
-          </a:p>
-        </p:txBody>
-      </p:sp>
-      <p:sp>
-        <p:nvSpPr>
-          <p:cNvPr id="11" name="Rectangle 10"/>
-          <p:cNvSpPr/>
-          <p:nvPr/>
-        </p:nvSpPr>
-        <p:spPr>
-          <a:xfrm>
-            <a:off x="4359554" y="4069080"/>
-            <a:ext cx="3472586" cy="25400"/>
-          </a:xfrm>
-          <a:prstGeom prst="rect">
-            <a:avLst/>
-          </a:prstGeom>
-          <a:solidFill>
-            <a:srgbClr val="17549E"/>
-          </a:solidFill>
-          <a:ln>
-            <a:noFill/>
-          </a:ln>
-          <a:effectLst/>
-        </p:spPr>
-        <p:style>
-          <a:lnRef idx="1">
-            <a:schemeClr val="accent1"/>
-          </a:lnRef>
-          <a:fillRef idx="3">
-            <a:schemeClr val="accent1"/>
-          </a:fillRef>
-          <a:effectRef idx="2">
-            <a:schemeClr val="accent1"/>
-          </a:effectRef>
-          <a:fontRef idx="minor">
-            <a:schemeClr val="lt1"/>
-          </a:fontRef>
-        </p:style>
-        <p:txBody>
-          <a:bodyPr rtlCol="0" anchor="ctr"/>
-          <a:lstStyle/>
-          <a:p>
-            <a:pPr algn="ctr"/>
-          </a:p>
-        </p:txBody>
-      </p:sp>
-      <p:sp>
-        <p:nvSpPr>
-          <p:cNvPr id="12" name="TextBox 11"/>
-          <p:cNvSpPr txBox="1"/>
-          <p:nvPr/>
-        </p:nvSpPr>
-        <p:spPr>
-          <a:xfrm>
-            <a:off x="4359554" y="4251960"/>
-            <a:ext cx="3472586" cy="1828800"/>
-          </a:xfrm>
-          <a:prstGeom prst="rect">
-            <a:avLst/>
-          </a:prstGeom>
-          <a:noFill/>
-        </p:spPr>
-        <p:txBody>
-          <a:bodyPr wrap="square" lIns="0" rIns="0" tIns="0" bIns="0">
-            <a:spAutoFit/>
-          </a:bodyPr>
-          <a:lstStyle/>
-          <a:p>
-            <a:pPr>
-              <a:spcBef>
-                <a:spcPts val="0"/>
-              </a:spcBef>
-              <a:spcAft>
-                <a:spcPts val="700"/>
-              </a:spcAft>
-            </a:pPr>
-            <a:r>
-              <a:rPr sz="1050" b="0" i="0">
-                <a:solidFill>
-                  <a:srgbClr val="17549E"/>
-                </a:solidFill>
-                <a:latin typeface="Consolas"/>
-              </a:rPr>
-              <a:t>RESOLVED: SUBNATIONAL SUB-INDICES</a:t>
-            </a:r>
-          </a:p>
-          <a:p>
-            <a:pPr>
-              <a:lnSpc>
-                <a:spcPct val="130000"/>
-              </a:lnSpc>
-              <a:spcBef>
-                <a:spcPts val="0"/>
-              </a:spcBef>
-              <a:spcAft>
-                <a:spcPts val="0"/>
-              </a:spcAft>
-            </a:pPr>
-            <a:r>
-              <a:rPr sz="1100" b="0" i="0">
-                <a:solidFill>
-                  <a:srgbClr val="5A6068"/>
-                </a:solidFill>
-                <a:latin typeface="Calibri"/>
-              </a:rPr>
-              <a:t>The per-domain GDL exports are in and the analysis stands: within countries the external health index leads education and income (+0.34 vs +0.06 and +0.12), so the ranking flip does not rest on self-report. It travels with the within-country paper rather than this one. GDL’s DHS-based Education &amp; Work and Health datasets were also examined: they cover only 6 ESS countries and cannot serve the European design.</a:t>
-            </a:r>
-          </a:p>
-        </p:txBody>
-      </p:sp>
-      <p:sp>
-        <p:nvSpPr>
-          <p:cNvPr id="13" name="Rectangle 12"/>
-          <p:cNvSpPr/>
-          <p:nvPr/>
-        </p:nvSpPr>
-        <p:spPr>
-          <a:xfrm>
-            <a:off x="8152180" y="4069080"/>
-            <a:ext cx="3472586" cy="25400"/>
-          </a:xfrm>
-          <a:prstGeom prst="rect">
-            <a:avLst/>
-          </a:prstGeom>
-          <a:solidFill>
-            <a:srgbClr val="17549E"/>
-          </a:solidFill>
-          <a:ln>
-            <a:noFill/>
-          </a:ln>
-          <a:effectLst/>
-        </p:spPr>
-        <p:style>
-          <a:lnRef idx="1">
-            <a:schemeClr val="accent1"/>
-          </a:lnRef>
-          <a:fillRef idx="3">
-            <a:schemeClr val="accent1"/>
-          </a:fillRef>
-          <a:effectRef idx="2">
-            <a:schemeClr val="accent1"/>
-          </a:effectRef>
-          <a:fontRef idx="minor">
-            <a:schemeClr val="lt1"/>
-          </a:fontRef>
-        </p:style>
-        <p:txBody>
-          <a:bodyPr rtlCol="0" anchor="ctr"/>
-          <a:lstStyle/>
-          <a:p>
-            <a:pPr algn="ctr"/>
-          </a:p>
-        </p:txBody>
-      </p:sp>
-      <p:sp>
-        <p:nvSpPr>
-          <p:cNvPr id="14" name="TextBox 13"/>
-          <p:cNvSpPr txBox="1"/>
-          <p:nvPr/>
-        </p:nvSpPr>
-        <p:spPr>
-          <a:xfrm>
-            <a:off x="8152180" y="4251960"/>
-            <a:ext cx="3472586" cy="1828800"/>
-          </a:xfrm>
-          <a:prstGeom prst="rect">
-            <a:avLst/>
-          </a:prstGeom>
-          <a:noFill/>
-        </p:spPr>
-        <p:txBody>
-          <a:bodyPr wrap="square" lIns="0" rIns="0" tIns="0" bIns="0">
-            <a:spAutoFit/>
-          </a:bodyPr>
-          <a:lstStyle/>
-          <a:p>
-            <a:pPr>
-              <a:spcBef>
-                <a:spcPts val="0"/>
-              </a:spcBef>
-              <a:spcAft>
-                <a:spcPts val="700"/>
-              </a:spcAft>
-            </a:pPr>
-            <a:r>
-              <a:rPr sz="1050" b="0" i="0">
-                <a:solidFill>
-                  <a:srgbClr val="17549E"/>
-                </a:solidFill>
-                <a:latin typeface="Consolas"/>
-              </a:rPr>
-              <a:t>METHODS NOTE</a:t>
-            </a:r>
-          </a:p>
-          <a:p>
-            <a:pPr>
-              <a:lnSpc>
-                <a:spcPct val="130000"/>
-              </a:lnSpc>
-              <a:spcBef>
-                <a:spcPts val="0"/>
-              </a:spcBef>
-              <a:spcAft>
-                <a:spcPts val="0"/>
-              </a:spcAft>
-            </a:pPr>
-            <a:r>
-              <a:rPr sz="1100" b="0" i="0">
-                <a:solidFill>
-                  <a:srgbClr val="5A6068"/>
-                </a:solidFill>
-                <a:latin typeface="Calibri"/>
-              </a:rPr>
-              <a:t>Pooled R² and significant-country share tell different stories at several points. Proposal: report both throughout and discuss the divergence explicitly as a secondary contribution.</a:t>
-            </a:r>
-          </a:p>
-        </p:txBody>
-      </p:sp>
-    </p:spTree>
-  </p:cSld>
-  <p:clrMapOvr>
-    <a:masterClrMapping/>
-  </p:clrMapOvr>
-</p:sld>
-</file>
-
-<file path=ppt/slides/slide34.xml><?xml version="1.0" encoding="utf-8"?>
-<p:sld xmlns:a="http://schemas.openxmlformats.org/drawingml/2006/main" xmlns:p="http://schemas.openxmlformats.org/presentationml/2006/main" xmlns:r="http://schemas.openxmlformats.org/officeDocument/2006/relationships">
-  <p:cSld>
-    <p:bg>
-      <p:bgPr>
-        <a:solidFill>
-          <a:srgbClr val="14171C"/>
-        </a:solidFill>
-        <a:effectLst/>
-      </p:bgPr>
-    </p:bg>
-    <p:spTree>
-      <p:nvGrpSpPr>
-        <p:cNvPr id="1" name=""/>
-        <p:cNvGrpSpPr/>
-        <p:nvPr/>
-      </p:nvGrpSpPr>
-      <p:grpSpPr/>
-      <p:sp>
-        <p:nvSpPr>
-          <p:cNvPr id="2" name="TextBox 1"/>
-          <p:cNvSpPr txBox="1"/>
-          <p:nvPr/>
-        </p:nvSpPr>
-        <p:spPr>
-          <a:xfrm>
-            <a:off x="566928" y="2743200"/>
-            <a:ext cx="8229600" cy="1371600"/>
-          </a:xfrm>
-          <a:prstGeom prst="rect">
-            <a:avLst/>
-          </a:prstGeom>
-          <a:noFill/>
-        </p:spPr>
-        <p:txBody>
-          <a:bodyPr wrap="square" lIns="0" rIns="0" tIns="0" bIns="0">
-            <a:spAutoFit/>
-          </a:bodyPr>
-          <a:lstStyle/>
-          <a:p>
-            <a:pPr>
-              <a:spcBef>
-                <a:spcPts val="0"/>
-              </a:spcBef>
-              <a:spcAft>
-                <a:spcPts val="1000"/>
-              </a:spcAft>
-            </a:pPr>
-            <a:r>
-              <a:rPr sz="4000" b="0" i="0">
-                <a:solidFill>
-                  <a:srgbClr val="FCFCFB"/>
-                </a:solidFill>
-                <a:latin typeface="Georgia"/>
-              </a:rPr>
-              <a:t>Evidence appendix</a:t>
-            </a:r>
-          </a:p>
-          <a:p>
-            <a:pPr>
-              <a:lnSpc>
-                <a:spcPct val="135000"/>
-              </a:lnSpc>
-              <a:spcBef>
-                <a:spcPts val="0"/>
-              </a:spcBef>
-              <a:spcAft>
-                <a:spcPts val="0"/>
-              </a:spcAft>
-            </a:pPr>
-            <a:r>
-              <a:rPr sz="1400" b="0" i="0">
-                <a:solidFill>
-                  <a:srgbClr val="9AA4B0"/>
-                </a:solidFill>
-                <a:latin typeface="Calibri"/>
-              </a:rPr>
-              <a:t>Everything the three acts rest on but do not carry. In submission these become supplementary material.</a:t>
-            </a:r>
-          </a:p>
-        </p:txBody>
-      </p:sp>
+              <a:t>Education is the HDI's strongest domain and the SDG framework's weakest, unless SDG4 is split into access versus the rest. Absolute levels are not comparable across frameworks; the within-framework rankings are.</a:t>
+            </a:r>
+          </a:p>
+        </p:txBody>
+      </p:sp>
+      <p:pic>
+        <p:nvPicPr>
+          <p:cNvPr id="5" name="Picture 4" descr="hdi_vs_sdg_frameworks.png"/>
+          <p:cNvPicPr>
+            <a:picLocks noChangeAspect="1"/>
+          </p:cNvPicPr>
+          <p:nvPr/>
+        </p:nvPicPr>
+        <p:blipFill>
+          <a:blip r:embed="rId2"/>
+          <a:stretch>
+            <a:fillRect/>
+          </a:stretch>
+        </p:blipFill>
+        <p:spPr>
+          <a:xfrm>
+            <a:off x="1492967" y="1965960"/>
+            <a:ext cx="9205761" cy="4480560"/>
+          </a:xfrm>
+          <a:prstGeom prst="rect">
+            <a:avLst/>
+          </a:prstGeom>
+        </p:spPr>
+      </p:pic>
     </p:spTree>
   </p:cSld>
   <p:clrMapOvr>
@@ -11949,7 +11861,7 @@
                 </a:solidFill>
                 <a:latin typeface="Georgia"/>
               </a:rPr>
-              <a:t>HDI against SDG, domain by domain</a:t>
+              <a:t>ESS-measured schooling against WHR happiness</a:t>
             </a:r>
           </a:p>
         </p:txBody>
@@ -11994,14 +11906,14 @@
                 </a:solidFill>
                 <a:latin typeface="Calibri"/>
               </a:rPr>
-              <a:t>Education is the HDI's strongest domain and the SDG framework's weakest, unless SDG4 is split into access versus the rest. Absolute levels are not comparable across frameworks; the within-framework rankings are.</a:t>
+              <a:t>Country-aggregated ESS years of schooling predicts WHR happiness at R² = 0.308, against 0.161 for the HDI's own schooling series on the same cells — an independently measured education variable roughly doubles it.</a:t>
             </a:r>
           </a:p>
         </p:txBody>
       </p:sp>
       <p:pic>
         <p:nvPicPr>
-          <p:cNvPr id="5" name="Picture 4" descr="hdi_vs_sdg_frameworks.png"/>
+          <p:cNvPr id="5" name="Picture 4" descr="ess_triangulation.png"/>
           <p:cNvPicPr>
             <a:picLocks noChangeAspect="1"/>
           </p:cNvPicPr>
@@ -12015,8 +11927,8 @@
         </p:blipFill>
         <p:spPr>
           <a:xfrm>
-            <a:off x="1492967" y="1965960"/>
-            <a:ext cx="9205761" cy="4480560"/>
+            <a:off x="566928" y="1965960"/>
+            <a:ext cx="11057839" cy="3026903"/>
           </a:xfrm>
           <a:prstGeom prst="rect">
             <a:avLst/>
@@ -12128,7 +12040,7 @@
                 </a:solidFill>
                 <a:latin typeface="Georgia"/>
               </a:rPr>
-              <a:t>ESS-measured schooling against WHR happiness</a:t>
+              <a:t>SDG significance by goal, pooled</a:t>
             </a:r>
           </a:p>
         </p:txBody>
@@ -12173,14 +12085,14 @@
                 </a:solidFill>
                 <a:latin typeface="Calibri"/>
               </a:rPr>
-              <a:t>Country-aggregated ESS years of schooling predicts WHR happiness at R² = 0.308, against 0.161 for the HDI's own schooling series on the same cells — an independently measured education variable roughly doubles it.</a:t>
+              <a:t>The leading goal (Energy, 16.0%) clears FDR significance in barely one country-test in six; pooled Education ranks 12th of 17.</a:t>
             </a:r>
           </a:p>
         </p:txBody>
       </p:sp>
       <p:pic>
         <p:nvPicPr>
-          <p:cNvPr id="5" name="Picture 4" descr="ess_triangulation.png"/>
+          <p:cNvPr id="5" name="Picture 4" descr="sdg_by_goal.png"/>
           <p:cNvPicPr>
             <a:picLocks noChangeAspect="1"/>
           </p:cNvPicPr>
@@ -12194,8 +12106,8 @@
         </p:blipFill>
         <p:spPr>
           <a:xfrm>
-            <a:off x="566928" y="1965960"/>
-            <a:ext cx="11057839" cy="3026903"/>
+            <a:off x="2504357" y="1965960"/>
+            <a:ext cx="7182980" cy="4480560"/>
           </a:xfrm>
           <a:prstGeom prst="rect">
             <a:avLst/>
@@ -12307,7 +12219,7 @@
                 </a:solidFill>
                 <a:latin typeface="Georgia"/>
               </a:rPr>
-              <a:t>SDG significance by goal, pooled</a:t>
+              <a:t>GDL national SHDI against the UNDP HDI</a:t>
             </a:r>
           </a:p>
         </p:txBody>
@@ -12352,14 +12264,14 @@
                 </a:solidFill>
                 <a:latin typeface="Calibri"/>
               </a:rPr>
-              <a:t>The leading goal (Energy, 16.0%) clears FDR significance in barely one country-test in six; pooled Education ranks 12th of 17.</a:t>
+              <a:t>The two are the same series — R² = 1.000, every country-year identical, because GDL derives the national figure from the UNDP index. Retained to document the check, not as validation: agreement here says nothing about the subnational disaggregation, which is where GDL's own data begins.</a:t>
             </a:r>
           </a:p>
         </p:txBody>
       </p:sp>
       <p:pic>
         <p:nvPicPr>
-          <p:cNvPr id="5" name="Picture 4" descr="sdg_by_goal.png"/>
+          <p:cNvPr id="5" name="Picture 4" descr="shdi_vs_hdi_validation.png"/>
           <p:cNvPicPr>
             <a:picLocks noChangeAspect="1"/>
           </p:cNvPicPr>
@@ -12373,8 +12285,8 @@
         </p:blipFill>
         <p:spPr>
           <a:xfrm>
-            <a:off x="2504357" y="1965960"/>
-            <a:ext cx="7182980" cy="4480560"/>
+            <a:off x="4036999" y="1965960"/>
+            <a:ext cx="4117697" cy="4480560"/>
           </a:xfrm>
           <a:prstGeom prst="rect">
             <a:avLst/>
@@ -12486,7 +12398,7 @@
                 </a:solidFill>
                 <a:latin typeface="Georgia"/>
               </a:rPr>
-              <a:t>GDL national SHDI against the UNDP HDI</a:t>
+              <a:t>Subnational HDI against WHR happiness, levels</a:t>
             </a:r>
           </a:p>
         </p:txBody>
@@ -12531,14 +12443,14 @@
                 </a:solidFill>
                 <a:latin typeface="Calibri"/>
               </a:rPr>
-              <a:t>The two are the same series — R² = 1.000, every country-year identical, because GDL derives the national figure from the UNDP index. Retained to document the check, not as validation: agreement here says nothing about the subnational disaggregation, which is where GDL's own data begins.</a:t>
+              <a:t>The familiar development-tier gradient with SHDI in place of HDI.</a:t>
             </a:r>
           </a:p>
         </p:txBody>
       </p:sp>
       <p:pic>
         <p:nvPicPr>
-          <p:cNvPr id="5" name="Picture 4" descr="shdi_vs_hdi_validation.png"/>
+          <p:cNvPr id="5" name="Picture 4" descr="shdi_whr_levels_scatter.png"/>
           <p:cNvPicPr>
             <a:picLocks noChangeAspect="1"/>
           </p:cNvPicPr>
@@ -12552,8 +12464,8 @@
         </p:blipFill>
         <p:spPr>
           <a:xfrm>
-            <a:off x="4036999" y="1965960"/>
-            <a:ext cx="4117697" cy="4480560"/>
+            <a:off x="3508482" y="1965960"/>
+            <a:ext cx="5174731" cy="4480560"/>
           </a:xfrm>
           <a:prstGeom prst="rect">
             <a:avLst/>
@@ -12665,7 +12577,7 @@
                 </a:solidFill>
                 <a:latin typeface="Georgia"/>
               </a:rPr>
-              <a:t>Subnational HDI against WHR happiness, levels</a:t>
+              <a:t>ESS coverage by country and year</a:t>
             </a:r>
           </a:p>
         </p:txBody>
@@ -12710,14 +12622,14 @@
                 </a:solidFill>
                 <a:latin typeface="Calibri"/>
               </a:rPr>
-              <a:t>The familiar development-tier gradient with SHDI in place of HDI.</a:t>
+              <a:t>A rotating panel: 36 countries, roughly biennial from 2010 to 2023, with 17 countries present in all seven waves. This is the power constraint behind every ESS significance test.</a:t>
             </a:r>
           </a:p>
         </p:txBody>
       </p:sp>
       <p:pic>
         <p:nvPicPr>
-          <p:cNvPr id="5" name="Picture 4" descr="shdi_whr_levels_scatter.png"/>
+          <p:cNvPr id="5" name="Picture 4" descr="ess_year_coverage.png"/>
           <p:cNvPicPr>
             <a:picLocks noChangeAspect="1"/>
           </p:cNvPicPr>
@@ -12731,8 +12643,8 @@
         </p:blipFill>
         <p:spPr>
           <a:xfrm>
-            <a:off x="3508482" y="1965960"/>
-            <a:ext cx="5174731" cy="4480560"/>
+            <a:off x="4247956" y="1965960"/>
+            <a:ext cx="3695783" cy="4480560"/>
           </a:xfrm>
           <a:prstGeom prst="rect">
             <a:avLst/>
@@ -13135,7 +13047,7 @@
                 </a:solidFill>
                 <a:latin typeface="Georgia"/>
               </a:rPr>
-              <a:t>ESS coverage by country and year</a:t>
+              <a:t>ESS-to-SHDI region crosswalk</a:t>
             </a:r>
           </a:p>
         </p:txBody>
@@ -13180,14 +13092,14 @@
                 </a:solidFill>
                 <a:latin typeface="Calibri"/>
               </a:rPr>
-              <a:t>A rotating panel: 36 countries, roughly biennial from 2010 to 2023, with 17 countries present in all seven waves. This is the power constraint behind every ESS significance test.</a:t>
+              <a:t>62% of respondents, across 24 of 36 countries, matched to a subnational SHDI value through the NUTS-to-GDL crosswalk.</a:t>
             </a:r>
           </a:p>
         </p:txBody>
       </p:sp>
       <p:pic>
         <p:nvPicPr>
-          <p:cNvPr id="5" name="Picture 4" descr="ess_year_coverage.png"/>
+          <p:cNvPr id="5" name="Picture 4" descr="region_crosswalk_match.png"/>
           <p:cNvPicPr>
             <a:picLocks noChangeAspect="1"/>
           </p:cNvPicPr>
@@ -13201,8 +13113,8 @@
         </p:blipFill>
         <p:spPr>
           <a:xfrm>
-            <a:off x="4247956" y="1965960"/>
-            <a:ext cx="3695783" cy="4480560"/>
+            <a:off x="2428154" y="1965960"/>
+            <a:ext cx="7335386" cy="4480560"/>
           </a:xfrm>
           <a:prstGeom prst="rect">
             <a:avLst/>
@@ -13314,7 +13226,7 @@
                 </a:solidFill>
                 <a:latin typeface="Georgia"/>
               </a:rPr>
-              <a:t>ESS-to-SHDI region crosswalk</a:t>
+              <a:t>Country × indicator significance, ESS</a:t>
             </a:r>
           </a:p>
         </p:txBody>
@@ -13359,14 +13271,14 @@
                 </a:solidFill>
                 <a:latin typeface="Calibri"/>
               </a:rPr>
-              <a:t>62% of respondents, across 24 of 36 countries, matched to a subnational SHDI value through the NUTS-to-GDL crosswalk.</a:t>
+              <a:t>15% of levels cells and 9% of differences cells FDR-significant; direction consistent with the WHR results, power much lower.</a:t>
             </a:r>
           </a:p>
         </p:txBody>
       </p:sp>
       <p:pic>
         <p:nvPicPr>
-          <p:cNvPr id="5" name="Picture 4" descr="region_crosswalk_match.png"/>
+          <p:cNvPr id="5" name="Picture 4" descr="hdi_ess_heatmap.png"/>
           <p:cNvPicPr>
             <a:picLocks noChangeAspect="1"/>
           </p:cNvPicPr>
@@ -13380,8 +13292,8 @@
         </p:blipFill>
         <p:spPr>
           <a:xfrm>
-            <a:off x="2428154" y="1965960"/>
-            <a:ext cx="7335386" cy="4480560"/>
+            <a:off x="3601923" y="1965960"/>
+            <a:ext cx="4987848" cy="4480560"/>
           </a:xfrm>
           <a:prstGeom prst="rect">
             <a:avLst/>
@@ -13493,7 +13405,7 @@
                 </a:solidFill>
                 <a:latin typeface="Georgia"/>
               </a:rPr>
-              <a:t>Country × indicator significance, ESS</a:t>
+              <a:t>Per-country collapse, ESS</a:t>
             </a:r>
           </a:p>
         </p:txBody>
@@ -13538,14 +13450,14 @@
                 </a:solidFill>
                 <a:latin typeface="Calibri"/>
               </a:rPr>
-              <a:t>15% of levels cells and 9% of differences cells FDR-significant; direction consistent with the WHR results, power much lower.</a:t>
+              <a:t>More above-the-line exceptions than the WHR analysis shows — sparse waves cut both ways.</a:t>
             </a:r>
           </a:p>
         </p:txBody>
       </p:sp>
       <p:pic>
         <p:nvPicPr>
-          <p:cNvPr id="5" name="Picture 4" descr="hdi_ess_heatmap.png"/>
+          <p:cNvPr id="5" name="Picture 4" descr="hdi_ess_collapse_scatter.png"/>
           <p:cNvPicPr>
             <a:picLocks noChangeAspect="1"/>
           </p:cNvPicPr>
@@ -13559,8 +13471,8 @@
         </p:blipFill>
         <p:spPr>
           <a:xfrm>
-            <a:off x="3601923" y="1965960"/>
-            <a:ext cx="4987848" cy="4480560"/>
+            <a:off x="2057001" y="1965960"/>
+            <a:ext cx="8077693" cy="4480560"/>
           </a:xfrm>
           <a:prstGeom prst="rect">
             <a:avLst/>
@@ -13576,185 +13488,6 @@
 </file>
 
 <file path=ppt/slides/slide43.xml><?xml version="1.0" encoding="utf-8"?>
-<p:sld xmlns:a="http://schemas.openxmlformats.org/drawingml/2006/main" xmlns:p="http://schemas.openxmlformats.org/presentationml/2006/main" xmlns:r="http://schemas.openxmlformats.org/officeDocument/2006/relationships">
-  <p:cSld>
-    <p:bg>
-      <p:bgPr>
-        <a:solidFill>
-          <a:srgbClr val="FCFCFB"/>
-        </a:solidFill>
-        <a:effectLst/>
-      </p:bgPr>
-    </p:bg>
-    <p:spTree>
-      <p:nvGrpSpPr>
-        <p:cNvPr id="1" name=""/>
-        <p:cNvGrpSpPr/>
-        <p:nvPr/>
-      </p:nvGrpSpPr>
-      <p:grpSpPr/>
-      <p:sp>
-        <p:nvSpPr>
-          <p:cNvPr id="2" name="TextBox 1"/>
-          <p:cNvSpPr txBox="1"/>
-          <p:nvPr/>
-        </p:nvSpPr>
-        <p:spPr>
-          <a:xfrm>
-            <a:off x="566928" y="411480"/>
-            <a:ext cx="10515600" cy="320040"/>
-          </a:xfrm>
-          <a:prstGeom prst="rect">
-            <a:avLst/>
-          </a:prstGeom>
-          <a:noFill/>
-        </p:spPr>
-        <p:txBody>
-          <a:bodyPr wrap="square" lIns="0" rIns="0" tIns="0" bIns="0">
-            <a:spAutoFit/>
-          </a:bodyPr>
-          <a:lstStyle/>
-          <a:p>
-            <a:pPr>
-              <a:spcBef>
-                <a:spcPts val="0"/>
-              </a:spcBef>
-              <a:spcAft>
-                <a:spcPts val="0"/>
-              </a:spcAft>
-            </a:pPr>
-            <a:r>
-              <a:rPr sz="1000" b="0" i="0">
-                <a:solidFill>
-                  <a:srgbClr val="868D96"/>
-                </a:solidFill>
-                <a:latin typeface="Consolas"/>
-              </a:rPr>
-              <a:t>APPENDIX</a:t>
-            </a:r>
-          </a:p>
-        </p:txBody>
-      </p:sp>
-      <p:sp>
-        <p:nvSpPr>
-          <p:cNvPr id="3" name="TextBox 2"/>
-          <p:cNvSpPr txBox="1"/>
-          <p:nvPr/>
-        </p:nvSpPr>
-        <p:spPr>
-          <a:xfrm>
-            <a:off x="566928" y="749808"/>
-            <a:ext cx="10515600" cy="457200"/>
-          </a:xfrm>
-          <a:prstGeom prst="rect">
-            <a:avLst/>
-          </a:prstGeom>
-          <a:noFill/>
-        </p:spPr>
-        <p:txBody>
-          <a:bodyPr wrap="square" lIns="0" rIns="0" tIns="0" bIns="0">
-            <a:spAutoFit/>
-          </a:bodyPr>
-          <a:lstStyle/>
-          <a:p>
-            <a:pPr>
-              <a:spcBef>
-                <a:spcPts val="0"/>
-              </a:spcBef>
-              <a:spcAft>
-                <a:spcPts val="0"/>
-              </a:spcAft>
-            </a:pPr>
-            <a:r>
-              <a:rPr sz="2000" b="0" i="0">
-                <a:solidFill>
-                  <a:srgbClr val="14171C"/>
-                </a:solidFill>
-                <a:latin typeface="Georgia"/>
-              </a:rPr>
-              <a:t>Per-country collapse, ESS</a:t>
-            </a:r>
-          </a:p>
-        </p:txBody>
-      </p:sp>
-      <p:sp>
-        <p:nvSpPr>
-          <p:cNvPr id="4" name="TextBox 3"/>
-          <p:cNvSpPr txBox="1"/>
-          <p:nvPr/>
-        </p:nvSpPr>
-        <p:spPr>
-          <a:xfrm>
-            <a:off x="566928" y="1207008"/>
-            <a:ext cx="10515600" cy="457200"/>
-          </a:xfrm>
-          <a:prstGeom prst="rect">
-            <a:avLst/>
-          </a:prstGeom>
-          <a:noFill/>
-        </p:spPr>
-        <p:txBody>
-          <a:bodyPr wrap="square" lIns="0" rIns="0" tIns="0" bIns="0">
-            <a:spAutoFit/>
-          </a:bodyPr>
-          <a:lstStyle/>
-          <a:p>
-            <a:pPr>
-              <a:lnSpc>
-                <a:spcPct val="128000"/>
-              </a:lnSpc>
-              <a:spcBef>
-                <a:spcPts val="0"/>
-              </a:spcBef>
-              <a:spcAft>
-                <a:spcPts val="0"/>
-              </a:spcAft>
-            </a:pPr>
-            <a:r>
-              <a:rPr sz="1100" b="0" i="0">
-                <a:solidFill>
-                  <a:srgbClr val="5A6068"/>
-                </a:solidFill>
-                <a:latin typeface="Calibri"/>
-              </a:rPr>
-              <a:t>More above-the-line exceptions than the WHR analysis shows — sparse waves cut both ways.</a:t>
-            </a:r>
-          </a:p>
-        </p:txBody>
-      </p:sp>
-      <p:pic>
-        <p:nvPicPr>
-          <p:cNvPr id="5" name="Picture 4" descr="hdi_ess_collapse_scatter.png"/>
-          <p:cNvPicPr>
-            <a:picLocks noChangeAspect="1"/>
-          </p:cNvPicPr>
-          <p:nvPr/>
-        </p:nvPicPr>
-        <p:blipFill>
-          <a:blip r:embed="rId2"/>
-          <a:stretch>
-            <a:fillRect/>
-          </a:stretch>
-        </p:blipFill>
-        <p:spPr>
-          <a:xfrm>
-            <a:off x="2057001" y="1965960"/>
-            <a:ext cx="8077693" cy="4480560"/>
-          </a:xfrm>
-          <a:prstGeom prst="rect">
-            <a:avLst/>
-          </a:prstGeom>
-        </p:spPr>
-      </p:pic>
-    </p:spTree>
-  </p:cSld>
-  <p:clrMapOvr>
-    <a:masterClrMapping/>
-  </p:clrMapOvr>
-</p:sld>
-</file>
-
-<file path=ppt/slides/slide44.xml><?xml version="1.0" encoding="utf-8"?>
 <p:sld xmlns:a="http://schemas.openxmlformats.org/drawingml/2006/main" xmlns:p="http://schemas.openxmlformats.org/presentationml/2006/main" xmlns:r="http://schemas.openxmlformats.org/officeDocument/2006/relationships">
   <p:cSld>
     <p:bg>

--- a/deck/Measured_Where_It_Varies.pptx
+++ b/deck/Measured_Where_It_Varies.pptx
@@ -8672,7 +8672,7 @@
               </a:spcAft>
             </a:pPr>
             <a:r>
-              <a:rPr sz="1150" b="0" i="0">
+              <a:rPr sz="1125" b="0" i="0">
                 <a:solidFill>
                   <a:srgbClr val="5A6068"/>
                 </a:solidFill>
@@ -8694,13 +8694,13 @@
               </a:spcAft>
             </a:pPr>
             <a:r>
-              <a:rPr sz="1150" b="0" i="0">
+              <a:rPr sz="1125" b="0" i="0">
                 <a:solidFill>
                   <a:srgbClr val="5A6068"/>
                 </a:solidFill>
                 <a:latin typeface="Calibri"/>
               </a:rPr>
-              <a:t>Running the same levels-and-differences design against the ESS — 36 European countries, 351,000 respondents — shows the collapse holds there too. At the individual level, within countries, development composite scores predict significant variance in life satisfaction and happiness; year-to-year changes in the HDI within countries predict almost none. The levels are where the signal is, regardless of the framework or the instrument.</a:t>
+              <a:t>Running the same levels-and-differences design against the ESS — 36 European countries, 351,000 respondents — reveals something unexpected: the collapse does NOT hold here. Both levels and differences show significant associations. Life satisfaction and happiness respond to year-to-year changes in how people report themselves, not just to between-country differences. This is a important caveat to our main finding: self-reported wellbeing measures capture changes that administrative development indicators miss — but only at the temporal and geographic resolution of the ESS (36 European countries, annual cycles). The persistence of the collapse in SDG and HDI suggests their construction choices matter more than the measurement method alone.</a:t>
             </a:r>
           </a:p>
         </p:txBody>
@@ -8763,8 +8763,8 @@
         </p:blipFill>
         <p:spPr>
           <a:xfrm>
-            <a:off x="5120640" y="744093"/>
-            <a:ext cx="6537960" cy="4903470"/>
+            <a:off x="5120640" y="1264158"/>
+            <a:ext cx="6537960" cy="3863340"/>
           </a:xfrm>
           <a:prstGeom prst="rect">
             <a:avLst/>
@@ -8811,7 +8811,7 @@
                 </a:solidFill>
                 <a:latin typeface="Calibri"/>
               </a:rPr>
-              <a:t>ESS + HDI: levels-to-differences collapse holds for both life satisfaction and happiness at the individual level.</a:t>
+              <a:t>ESS shows persistent associations in differences, unlike SDG and HDI. Caveat: 36 European countries, self-reported measures, annual survey cycles.</a:t>
             </a:r>
           </a:p>
         </p:txBody>
@@ -8991,7 +8991,7 @@
                 </a:solidFill>
                 <a:latin typeface="Calibri"/>
               </a:rPr>
-              <a:t>Education's apparent strength in levels is not a hint that differences would show it recovering. Instead, it is the entry point to Act II: which components are actually strong, weak, or invisible once you look at each framework's construction choices rather than its top-line numbers?</a:t>
+              <a:t>The HDI still shows the collapse, unlike the ESS, so the question shifts: which components of development are actually strong at the levels, and why does the type of measurement matter? This is the entry point to Act II: which components are actually strong, weak, or invisible when you look at each framework's construction choices rather than its top-line numbers?</a:t>
             </a:r>
           </a:p>
         </p:txBody>

--- a/deck/Measured_Where_It_Varies.pptx
+++ b/deck/Measured_Where_It_Varies.pptx
@@ -28,6 +28,7 @@
     <p:sldId id="276" r:id="rId27"/>
     <p:sldId id="277" r:id="rId28"/>
     <p:sldId id="278" r:id="rId29"/>
+    <p:sldId id="279" r:id="rId30"/>
   </p:sldIdLst>
   <p:sldSz cx="12191695" cy="6858000" type="screen4x3"/>
   <p:notesSz cx="6858000" cy="9144000"/>
@@ -4272,7 +4273,7 @@
                 </a:solidFill>
                 <a:latin typeface="Consolas"/>
               </a:rPr>
-              <a:t>RESULT 3 · DISCUSSION · THE COVERAGE GAP</a:t>
+              <a:t>RESULT 3 · SOCIAL TRUST</a:t>
             </a:r>
           </a:p>
         </p:txBody>
@@ -4557,7 +4558,7 @@
         <p:spPr>
           <a:xfrm>
             <a:off x="566928" y="502920"/>
-            <a:ext cx="4160520" cy="274320"/>
+            <a:ext cx="8595360" cy="274320"/>
           </a:xfrm>
           <a:prstGeom prst="rect">
             <a:avLst/>
@@ -4585,7 +4586,7 @@
                 </a:solidFill>
                 <a:latin typeface="Consolas"/>
               </a:rPr>
-              <a:t>SYNTHESIS</a:t>
+              <a:t>WITHIN-COUNTRY EVIDENCE · WHY ESS IS DIFFERENT</a:t>
             </a:r>
           </a:p>
         </p:txBody>
@@ -4599,7 +4600,7 @@
         <p:spPr>
           <a:xfrm>
             <a:off x="566928" y="914400"/>
-            <a:ext cx="4160520" cy="1371600"/>
+            <a:ext cx="8595360" cy="1371600"/>
           </a:xfrm>
           <a:prstGeom prst="rect">
             <a:avLst/>
@@ -4624,13 +4625,13 @@
               </a:spcAft>
             </a:pPr>
             <a:r>
-              <a:rPr sz="2300" b="0" i="0">
+              <a:rPr sz="2700" b="0" i="0">
                 <a:solidFill>
                   <a:srgbClr val="14171C"/>
                 </a:solidFill>
                 <a:latin typeface="Georgia"/>
               </a:rPr>
-              <a:t>Three domains, three ways frameworks lose sight of what matters</a:t>
+              <a:t>Individual-level, self-reported data captures year-to-year change that administrative frameworks miss</a:t>
             </a:r>
           </a:p>
         </p:txBody>
@@ -4643,8 +4644,8 @@
         </p:nvSpPr>
         <p:spPr>
           <a:xfrm>
-            <a:off x="566928" y="2331720"/>
-            <a:ext cx="4160520" cy="3840480"/>
+            <a:off x="566928" y="2286000"/>
+            <a:ext cx="8595360" cy="3840480"/>
           </a:xfrm>
           <a:prstGeom prst="rect">
             <a:avLst/>
@@ -4669,13 +4670,13 @@
               </a:spcAft>
             </a:pPr>
             <a:r>
-              <a:rPr sz="1150" b="0" i="0">
+              <a:rPr sz="1400" b="0" i="0">
                 <a:solidFill>
                   <a:srgbClr val="5A6068"/>
                 </a:solidFill>
                 <a:latin typeface="Calibri"/>
               </a:rPr>
-              <a:t>Education's rank depends on which construct you count: attainment works, but parity ratios and learning outcomes do not, so pooling dilutes the signal. Health's rank depends on whether your chosen variable still varies: life expectancy does not, but self-rated health does, so the HDI's choice costs it. Social trust's rank is zero because it is not collected at scale in development frameworks at all — a coverage gap that cannot be fixed by choosing the right variable, because no variable was ever measured.</a:t>
+              <a:t>Here is the critical observation that reshapes the question: unlike SDG (71% levels → 5% differences) and HDI (42% → 2%), the ESS shows 69% levels → 64% differences. The association persists within countries over time. This is not because development frameworks are poorly designed; it is because they measure aggregate, administrative data at long intervals (annual at best for HDI and SDG). Individual survey responses capture year-to-year variation in how people experience their lives.</a:t>
             </a:r>
           </a:p>
           <a:p>
@@ -4691,13 +4692,35 @@
               </a:spcAft>
             </a:pPr>
             <a:r>
-              <a:rPr sz="1150" b="0" i="0">
+              <a:rPr sz="1400" b="0" i="0">
                 <a:solidFill>
                   <a:srgbClr val="5A6068"/>
                 </a:solidFill>
                 <a:latin typeface="Calibri"/>
               </a:rPr>
-              <a:t>These are not criticisms of the frameworks; they were built to track development, and they do. But which components look most consequential for lived experience is not the question they were built to answer.</a:t>
+              <a:t>This matters for social trust most of all. At the country level, SDG has almost no trust coverage; in the HDI, none. But at the individual level, within countries, ESS shows trust is significant in 94% of countries and drives year-to-year change in how satisfied people report being. The three domains emerge not because the frameworks reveal them, but because ESS measures them where people actually experience variation: in themselves, over time.</a:t>
+            </a:r>
+          </a:p>
+          <a:p>
+            <a:pPr>
+              <a:lnSpc>
+                <a:spcPct val="132000"/>
+              </a:lnSpc>
+              <a:spcBef>
+                <a:spcPts val="0"/>
+              </a:spcBef>
+              <a:spcAft>
+                <a:spcPts val="1100"/>
+              </a:spcAft>
+            </a:pPr>
+            <a:r>
+              <a:rPr sz="1400" b="0" i="0">
+                <a:solidFill>
+                  <a:srgbClr val="5A6068"/>
+                </a:solidFill>
+                <a:latin typeface="Calibri"/>
+              </a:rPr>
+              <a:t>The caveats are substantial: 36 European countries, self-reported measures, annual cycles. But the implication is clear. Development frameworks' blindness to social trust is not because trust does not matter for wellbeing; it is because development was never designed to measure individual experience at the temporal resolution where people change.</a:t>
             </a:r>
           </a:p>
         </p:txBody>
@@ -4740,75 +4763,6 @@
                 <a:latin typeface="Consolas"/>
               </a:rPr>
               <a:t>II</a:t>
-            </a:r>
-          </a:p>
-        </p:txBody>
-      </p:sp>
-      <p:pic>
-        <p:nvPicPr>
-          <p:cNvPr id="6" name="Picture 5" descr="domain_horse_race.png"/>
-          <p:cNvPicPr>
-            <a:picLocks noChangeAspect="1"/>
-          </p:cNvPicPr>
-          <p:nvPr/>
-        </p:nvPicPr>
-        <p:blipFill>
-          <a:blip r:embed="rId2"/>
-          <a:stretch>
-            <a:fillRect/>
-          </a:stretch>
-        </p:blipFill>
-        <p:spPr>
-          <a:xfrm>
-            <a:off x="5120640" y="1433421"/>
-            <a:ext cx="6537960" cy="3524813"/>
-          </a:xfrm>
-          <a:prstGeom prst="rect">
-            <a:avLst/>
-          </a:prstGeom>
-        </p:spPr>
-      </p:pic>
-      <p:sp>
-        <p:nvSpPr>
-          <p:cNvPr id="7" name="TextBox 6"/>
-          <p:cNvSpPr txBox="1"/>
-          <p:nvPr/>
-        </p:nvSpPr>
-        <p:spPr>
-          <a:xfrm>
-            <a:off x="5120640" y="5897880"/>
-            <a:ext cx="6537960" cy="731520"/>
-          </a:xfrm>
-          <a:prstGeom prst="rect">
-            <a:avLst/>
-          </a:prstGeom>
-          <a:noFill/>
-        </p:spPr>
-        <p:txBody>
-          <a:bodyPr wrap="square" lIns="0" rIns="0" tIns="0" bIns="0">
-            <a:spAutoFit/>
-          </a:bodyPr>
-          <a:lstStyle/>
-          <a:p>
-            <a:pPr>
-              <a:lnSpc>
-                <a:spcPct val="125000"/>
-              </a:lnSpc>
-              <a:spcBef>
-                <a:spcPts val="0"/>
-              </a:spcBef>
-              <a:spcAft>
-                <a:spcPts val="0"/>
-              </a:spcAft>
-            </a:pPr>
-            <a:r>
-              <a:rPr sz="900" b="0" i="0">
-                <a:solidFill>
-                  <a:srgbClr val="868D96"/>
-                </a:solidFill>
-                <a:latin typeface="Calibri"/>
-              </a:rPr>
-              <a:t>Domains competing within one instrument (ESS), at two levels of aggregation. Individual level (left) and country means (right).</a:t>
             </a:r>
           </a:p>
         </p:txBody>
@@ -4822,6 +4776,297 @@
 </file>
 
 <file path=ppt/slides/slide15.xml><?xml version="1.0" encoding="utf-8"?>
+<p:sld xmlns:a="http://schemas.openxmlformats.org/drawingml/2006/main" xmlns:p="http://schemas.openxmlformats.org/presentationml/2006/main" xmlns:r="http://schemas.openxmlformats.org/officeDocument/2006/relationships">
+  <p:cSld>
+    <p:bg>
+      <p:bgPr>
+        <a:solidFill>
+          <a:srgbClr val="FCFCFB"/>
+        </a:solidFill>
+        <a:effectLst/>
+      </p:bgPr>
+    </p:bg>
+    <p:spTree>
+      <p:nvGrpSpPr>
+        <p:cNvPr id="1" name=""/>
+        <p:cNvGrpSpPr/>
+        <p:nvPr/>
+      </p:nvGrpSpPr>
+      <p:grpSpPr/>
+      <p:sp>
+        <p:nvSpPr>
+          <p:cNvPr id="2" name="TextBox 1"/>
+          <p:cNvSpPr txBox="1"/>
+          <p:nvPr/>
+        </p:nvSpPr>
+        <p:spPr>
+          <a:xfrm>
+            <a:off x="566928" y="502920"/>
+            <a:ext cx="4160520" cy="274320"/>
+          </a:xfrm>
+          <a:prstGeom prst="rect">
+            <a:avLst/>
+          </a:prstGeom>
+          <a:noFill/>
+        </p:spPr>
+        <p:txBody>
+          <a:bodyPr wrap="square" lIns="0" rIns="0" tIns="0" bIns="0">
+            <a:spAutoFit/>
+          </a:bodyPr>
+          <a:lstStyle/>
+          <a:p>
+            <a:pPr>
+              <a:spcBef>
+                <a:spcPts val="0"/>
+              </a:spcBef>
+              <a:spcAft>
+                <a:spcPts val="0"/>
+              </a:spcAft>
+            </a:pPr>
+            <a:r>
+              <a:rPr sz="1000" b="0" i="0">
+                <a:solidFill>
+                  <a:srgbClr val="A63A30"/>
+                </a:solidFill>
+                <a:latin typeface="Consolas"/>
+              </a:rPr>
+              <a:t>SYNTHESIS</a:t>
+            </a:r>
+          </a:p>
+        </p:txBody>
+      </p:sp>
+      <p:sp>
+        <p:nvSpPr>
+          <p:cNvPr id="3" name="TextBox 2"/>
+          <p:cNvSpPr txBox="1"/>
+          <p:nvPr/>
+        </p:nvSpPr>
+        <p:spPr>
+          <a:xfrm>
+            <a:off x="566928" y="914400"/>
+            <a:ext cx="4160520" cy="1371600"/>
+          </a:xfrm>
+          <a:prstGeom prst="rect">
+            <a:avLst/>
+          </a:prstGeom>
+          <a:noFill/>
+        </p:spPr>
+        <p:txBody>
+          <a:bodyPr wrap="square" lIns="0" rIns="0" tIns="0" bIns="0">
+            <a:spAutoFit/>
+          </a:bodyPr>
+          <a:lstStyle/>
+          <a:p>
+            <a:pPr>
+              <a:lnSpc>
+                <a:spcPct val="108000"/>
+              </a:lnSpc>
+              <a:spcBef>
+                <a:spcPts val="0"/>
+              </a:spcBef>
+              <a:spcAft>
+                <a:spcPts val="0"/>
+              </a:spcAft>
+            </a:pPr>
+            <a:r>
+              <a:rPr sz="2300" b="0" i="0">
+                <a:solidFill>
+                  <a:srgbClr val="14171C"/>
+                </a:solidFill>
+                <a:latin typeface="Georgia"/>
+              </a:rPr>
+              <a:t>Three domains, three ways frameworks lose sight of what matters</a:t>
+            </a:r>
+          </a:p>
+        </p:txBody>
+      </p:sp>
+      <p:sp>
+        <p:nvSpPr>
+          <p:cNvPr id="4" name="TextBox 3"/>
+          <p:cNvSpPr txBox="1"/>
+          <p:nvPr/>
+        </p:nvSpPr>
+        <p:spPr>
+          <a:xfrm>
+            <a:off x="566928" y="2331720"/>
+            <a:ext cx="4160520" cy="3840480"/>
+          </a:xfrm>
+          <a:prstGeom prst="rect">
+            <a:avLst/>
+          </a:prstGeom>
+          <a:noFill/>
+        </p:spPr>
+        <p:txBody>
+          <a:bodyPr wrap="square" lIns="0" rIns="0" tIns="0" bIns="0">
+            <a:spAutoFit/>
+          </a:bodyPr>
+          <a:lstStyle/>
+          <a:p>
+            <a:pPr>
+              <a:lnSpc>
+                <a:spcPct val="132000"/>
+              </a:lnSpc>
+              <a:spcBef>
+                <a:spcPts val="0"/>
+              </a:spcBef>
+              <a:spcAft>
+                <a:spcPts val="1100"/>
+              </a:spcAft>
+            </a:pPr>
+            <a:r>
+              <a:rPr sz="1150" b="0" i="0">
+                <a:solidFill>
+                  <a:srgbClr val="5A6068"/>
+                </a:solidFill>
+                <a:latin typeface="Calibri"/>
+              </a:rPr>
+              <a:t>Education's rank depends on which construct you count: attainment works, but parity ratios and learning outcomes do not, so pooling dilutes the signal. Health's rank depends on whether your chosen variable still varies: life expectancy does not, but self-rated health does, so the HDI's choice costs it. Social trust's rank is zero because it is not collected at scale in development frameworks at all — a coverage gap that cannot be fixed by choosing the right variable, because no variable was ever measured.</a:t>
+            </a:r>
+          </a:p>
+          <a:p>
+            <a:pPr>
+              <a:lnSpc>
+                <a:spcPct val="132000"/>
+              </a:lnSpc>
+              <a:spcBef>
+                <a:spcPts val="0"/>
+              </a:spcBef>
+              <a:spcAft>
+                <a:spcPts val="1100"/>
+              </a:spcAft>
+            </a:pPr>
+            <a:r>
+              <a:rPr sz="1150" b="0" i="0">
+                <a:solidFill>
+                  <a:srgbClr val="5A6068"/>
+                </a:solidFill>
+                <a:latin typeface="Calibri"/>
+              </a:rPr>
+              <a:t>These are not criticisms of the frameworks; they were built to track development, and they do. But which components look most consequential for lived experience is not the question they were built to answer.</a:t>
+            </a:r>
+          </a:p>
+        </p:txBody>
+      </p:sp>
+      <p:sp>
+        <p:nvSpPr>
+          <p:cNvPr id="5" name="TextBox 4"/>
+          <p:cNvSpPr txBox="1"/>
+          <p:nvPr/>
+        </p:nvSpPr>
+        <p:spPr>
+          <a:xfrm>
+            <a:off x="11338560" y="6263640"/>
+            <a:ext cx="548640" cy="274320"/>
+          </a:xfrm>
+          <a:prstGeom prst="rect">
+            <a:avLst/>
+          </a:prstGeom>
+          <a:noFill/>
+        </p:spPr>
+        <p:txBody>
+          <a:bodyPr wrap="square" lIns="0" rIns="0" tIns="0" bIns="0">
+            <a:spAutoFit/>
+          </a:bodyPr>
+          <a:lstStyle/>
+          <a:p>
+            <a:pPr algn="r">
+              <a:spcBef>
+                <a:spcPts val="0"/>
+              </a:spcBef>
+              <a:spcAft>
+                <a:spcPts val="0"/>
+              </a:spcAft>
+            </a:pPr>
+            <a:r>
+              <a:rPr sz="1100" b="0" i="0">
+                <a:solidFill>
+                  <a:srgbClr val="868D96"/>
+                </a:solidFill>
+                <a:latin typeface="Consolas"/>
+              </a:rPr>
+              <a:t>II</a:t>
+            </a:r>
+          </a:p>
+        </p:txBody>
+      </p:sp>
+      <p:pic>
+        <p:nvPicPr>
+          <p:cNvPr id="6" name="Picture 5" descr="domain_horse_race.png"/>
+          <p:cNvPicPr>
+            <a:picLocks noChangeAspect="1"/>
+          </p:cNvPicPr>
+          <p:nvPr/>
+        </p:nvPicPr>
+        <p:blipFill>
+          <a:blip r:embed="rId2"/>
+          <a:stretch>
+            <a:fillRect/>
+          </a:stretch>
+        </p:blipFill>
+        <p:spPr>
+          <a:xfrm>
+            <a:off x="5120640" y="1433421"/>
+            <a:ext cx="6537960" cy="3524813"/>
+          </a:xfrm>
+          <a:prstGeom prst="rect">
+            <a:avLst/>
+          </a:prstGeom>
+        </p:spPr>
+      </p:pic>
+      <p:sp>
+        <p:nvSpPr>
+          <p:cNvPr id="7" name="TextBox 6"/>
+          <p:cNvSpPr txBox="1"/>
+          <p:nvPr/>
+        </p:nvSpPr>
+        <p:spPr>
+          <a:xfrm>
+            <a:off x="5120640" y="5897880"/>
+            <a:ext cx="6537960" cy="731520"/>
+          </a:xfrm>
+          <a:prstGeom prst="rect">
+            <a:avLst/>
+          </a:prstGeom>
+          <a:noFill/>
+        </p:spPr>
+        <p:txBody>
+          <a:bodyPr wrap="square" lIns="0" rIns="0" tIns="0" bIns="0">
+            <a:spAutoFit/>
+          </a:bodyPr>
+          <a:lstStyle/>
+          <a:p>
+            <a:pPr>
+              <a:lnSpc>
+                <a:spcPct val="125000"/>
+              </a:lnSpc>
+              <a:spcBef>
+                <a:spcPts val="0"/>
+              </a:spcBef>
+              <a:spcAft>
+                <a:spcPts val="0"/>
+              </a:spcAft>
+            </a:pPr>
+            <a:r>
+              <a:rPr sz="900" b="0" i="0">
+                <a:solidFill>
+                  <a:srgbClr val="868D96"/>
+                </a:solidFill>
+                <a:latin typeface="Calibri"/>
+              </a:rPr>
+              <a:t>Domains competing within one instrument (ESS), at two levels of aggregation. Individual level (left) and country means (right).</a:t>
+            </a:r>
+          </a:p>
+        </p:txBody>
+      </p:sp>
+    </p:spTree>
+  </p:cSld>
+  <p:clrMapOvr>
+    <a:masterClrMapping/>
+  </p:clrMapOvr>
+</p:sld>
+</file>
+
+<file path=ppt/slides/slide16.xml><?xml version="1.0" encoding="utf-8"?>
 <p:sld xmlns:a="http://schemas.openxmlformats.org/drawingml/2006/main" xmlns:p="http://schemas.openxmlformats.org/presentationml/2006/main" xmlns:r="http://schemas.openxmlformats.org/officeDocument/2006/relationships">
   <p:cSld>
     <p:bg>
@@ -4978,7 +5223,7 @@
 </p:sld>
 </file>
 
-<file path=ppt/slides/slide16.xml><?xml version="1.0" encoding="utf-8"?>
+<file path=ppt/slides/slide17.xml><?xml version="1.0" encoding="utf-8"?>
 <p:sld xmlns:a="http://schemas.openxmlformats.org/drawingml/2006/main" xmlns:p="http://schemas.openxmlformats.org/presentationml/2006/main" xmlns:r="http://schemas.openxmlformats.org/officeDocument/2006/relationships">
   <p:cSld>
     <p:bg>
@@ -5402,228 +5647,6 @@
                 <a:latin typeface="Calibri"/>
               </a:rPr>
               <a:t>median R² for trust — below income, health, education individually, above none</a:t>
-            </a:r>
-          </a:p>
-        </p:txBody>
-      </p:sp>
-    </p:spTree>
-  </p:cSld>
-  <p:clrMapOvr>
-    <a:masterClrMapping/>
-  </p:clrMapOvr>
-</p:sld>
-</file>
-
-<file path=ppt/slides/slide17.xml><?xml version="1.0" encoding="utf-8"?>
-<p:sld xmlns:a="http://schemas.openxmlformats.org/drawingml/2006/main" xmlns:p="http://schemas.openxmlformats.org/presentationml/2006/main" xmlns:r="http://schemas.openxmlformats.org/officeDocument/2006/relationships">
-  <p:cSld>
-    <p:bg>
-      <p:bgPr>
-        <a:solidFill>
-          <a:srgbClr val="FCFCFB"/>
-        </a:solidFill>
-        <a:effectLst/>
-      </p:bgPr>
-    </p:bg>
-    <p:spTree>
-      <p:nvGrpSpPr>
-        <p:cNvPr id="1" name=""/>
-        <p:cNvGrpSpPr/>
-        <p:nvPr/>
-      </p:nvGrpSpPr>
-      <p:grpSpPr/>
-      <p:sp>
-        <p:nvSpPr>
-          <p:cNvPr id="2" name="TextBox 1"/>
-          <p:cNvSpPr txBox="1"/>
-          <p:nvPr/>
-        </p:nvSpPr>
-        <p:spPr>
-          <a:xfrm>
-            <a:off x="566928" y="502920"/>
-            <a:ext cx="8595360" cy="274320"/>
-          </a:xfrm>
-          <a:prstGeom prst="rect">
-            <a:avLst/>
-          </a:prstGeom>
-          <a:noFill/>
-        </p:spPr>
-        <p:txBody>
-          <a:bodyPr wrap="square" lIns="0" rIns="0" tIns="0" bIns="0">
-            <a:spAutoFit/>
-          </a:bodyPr>
-          <a:lstStyle/>
-          <a:p>
-            <a:pPr>
-              <a:spcBef>
-                <a:spcPts val="0"/>
-              </a:spcBef>
-              <a:spcAft>
-                <a:spcPts val="0"/>
-              </a:spcAft>
-            </a:pPr>
-            <a:r>
-              <a:rPr sz="1000" b="0" i="0">
-                <a:solidFill>
-                  <a:srgbClr val="A63A30"/>
-                </a:solidFill>
-                <a:latin typeface="Consolas"/>
-              </a:rPr>
-              <a:t>THE DISCONNECT</a:t>
-            </a:r>
-          </a:p>
-        </p:txBody>
-      </p:sp>
-      <p:sp>
-        <p:nvSpPr>
-          <p:cNvPr id="3" name="TextBox 2"/>
-          <p:cNvSpPr txBox="1"/>
-          <p:nvPr/>
-        </p:nvSpPr>
-        <p:spPr>
-          <a:xfrm>
-            <a:off x="566928" y="914400"/>
-            <a:ext cx="8595360" cy="1371600"/>
-          </a:xfrm>
-          <a:prstGeom prst="rect">
-            <a:avLst/>
-          </a:prstGeom>
-          <a:noFill/>
-        </p:spPr>
-        <p:txBody>
-          <a:bodyPr wrap="square" lIns="0" rIns="0" tIns="0" bIns="0">
-            <a:spAutoFit/>
-          </a:bodyPr>
-          <a:lstStyle/>
-          <a:p>
-            <a:pPr>
-              <a:lnSpc>
-                <a:spcPct val="108000"/>
-              </a:lnSpc>
-              <a:spcBef>
-                <a:spcPts val="0"/>
-              </a:spcBef>
-              <a:spcAft>
-                <a:spcPts val="0"/>
-              </a:spcAft>
-            </a:pPr>
-            <a:r>
-              <a:rPr sz="2700" b="0" i="0">
-                <a:solidFill>
-                  <a:srgbClr val="14171C"/>
-                </a:solidFill>
-                <a:latin typeface="Georgia"/>
-              </a:rPr>
-              <a:t>These frameworks work for development. They do not work for wellbeing.</a:t>
-            </a:r>
-          </a:p>
-        </p:txBody>
-      </p:sp>
-      <p:sp>
-        <p:nvSpPr>
-          <p:cNvPr id="4" name="TextBox 3"/>
-          <p:cNvSpPr txBox="1"/>
-          <p:nvPr/>
-        </p:nvSpPr>
-        <p:spPr>
-          <a:xfrm>
-            <a:off x="566928" y="2286000"/>
-            <a:ext cx="8595360" cy="3840480"/>
-          </a:xfrm>
-          <a:prstGeom prst="rect">
-            <a:avLst/>
-          </a:prstGeom>
-          <a:noFill/>
-        </p:spPr>
-        <p:txBody>
-          <a:bodyPr wrap="square" lIns="0" rIns="0" tIns="0" bIns="0">
-            <a:spAutoFit/>
-          </a:bodyPr>
-          <a:lstStyle/>
-          <a:p>
-            <a:pPr>
-              <a:lnSpc>
-                <a:spcPct val="132000"/>
-              </a:lnSpc>
-              <a:spcBef>
-                <a:spcPts val="0"/>
-              </a:spcBef>
-              <a:spcAft>
-                <a:spcPts val="1100"/>
-              </a:spcAft>
-            </a:pPr>
-            <a:r>
-              <a:rPr sz="1400" b="0" i="0">
-                <a:solidFill>
-                  <a:srgbClr val="5A6068"/>
-                </a:solidFill>
-                <a:latin typeface="Calibri"/>
-              </a:rPr>
-              <a:t>The HDI and SDG frameworks do not answer the question 'what makes people's lives better?' any more than a global income statistics database answers 'what makes a person happy?' They were designed to track development, measured at the aggregate level, with indicators chosen before the question of individual wellbeing was systematically tested. That is not a design failure; it is the intended scope.</a:t>
-            </a:r>
-          </a:p>
-          <a:p>
-            <a:pPr>
-              <a:lnSpc>
-                <a:spcPct val="132000"/>
-              </a:lnSpc>
-              <a:spcBef>
-                <a:spcPts val="0"/>
-              </a:spcBef>
-              <a:spcAft>
-                <a:spcPts val="1100"/>
-              </a:spcAft>
-            </a:pPr>
-            <a:r>
-              <a:rPr sz="1400" b="0" i="0">
-                <a:solidFill>
-                  <a:srgbClr val="5A6068"/>
-                </a:solidFill>
-                <a:latin typeface="Calibri"/>
-              </a:rPr>
-              <a:t>But it means the gap is structural. Education's access indicators work; pooling them with constructs that do not does not fix wellbeing prediction — it just builds a worse measure. Choosing a variable for health that is closer to saturated than the outcome it predicts is a measurement choice, not an incurable problem. And when a domain is never collected, no amount of better construction on the others will reach it.</a:t>
-            </a:r>
-          </a:p>
-        </p:txBody>
-      </p:sp>
-      <p:sp>
-        <p:nvSpPr>
-          <p:cNvPr id="5" name="TextBox 4"/>
-          <p:cNvSpPr txBox="1"/>
-          <p:nvPr/>
-        </p:nvSpPr>
-        <p:spPr>
-          <a:xfrm>
-            <a:off x="11338560" y="6263640"/>
-            <a:ext cx="548640" cy="274320"/>
-          </a:xfrm>
-          <a:prstGeom prst="rect">
-            <a:avLst/>
-          </a:prstGeom>
-          <a:noFill/>
-        </p:spPr>
-        <p:txBody>
-          <a:bodyPr wrap="square" lIns="0" rIns="0" tIns="0" bIns="0">
-            <a:spAutoFit/>
-          </a:bodyPr>
-          <a:lstStyle/>
-          <a:p>
-            <a:pPr algn="r">
-              <a:spcBef>
-                <a:spcPts val="0"/>
-              </a:spcBef>
-              <a:spcAft>
-                <a:spcPts val="0"/>
-              </a:spcAft>
-            </a:pPr>
-            <a:r>
-              <a:rPr sz="1100" b="0" i="0">
-                <a:solidFill>
-                  <a:srgbClr val="868D96"/>
-                </a:solidFill>
-                <a:latin typeface="Consolas"/>
-              </a:rPr>
-              <a:t>III</a:t>
             </a:r>
           </a:p>
         </p:txBody>
@@ -5691,7 +5714,7 @@
                 </a:solidFill>
                 <a:latin typeface="Consolas"/>
               </a:rPr>
-              <a:t>IMPLICATION 1 · MEASUREMENT CHOICES CONSTRAIN WHAT FRAMEWORKS CAN SEE</a:t>
+              <a:t>THE DISCONNECT</a:t>
             </a:r>
           </a:p>
         </p:txBody>
@@ -5736,7 +5759,7 @@
                 </a:solidFill>
                 <a:latin typeface="Georgia"/>
               </a:rPr>
-              <a:t>Education and health: the case for measurement specificity</a:t>
+              <a:t>These frameworks work for development. They do not work for wellbeing.</a:t>
             </a:r>
           </a:p>
         </p:txBody>
@@ -5781,7 +5804,7 @@
                 </a:solidFill>
                 <a:latin typeface="Calibri"/>
               </a:rPr>
-              <a:t>Education is significant everywhere it is measured as attainment, but nearly invisible in SDG4 because most indicators measure something else. Health is nearly invisible in the HDI because life expectancy has saturated. Neither domain has changed; the frameworks' construction choices have.</a:t>
+              <a:t>The HDI and SDG frameworks do not answer the question 'what makes people's lives better?' any more than a global income statistics database answers 'what makes a person happy?' They were designed to track development, measured at the aggregate level, with indicators chosen before the question of individual wellbeing was systematically tested. That is not a design failure; it is the intended scope.</a:t>
             </a:r>
           </a:p>
           <a:p>
@@ -5803,7 +5826,7 @@
                 </a:solidFill>
                 <a:latin typeface="Calibri"/>
               </a:rPr>
-              <a:t>For education, this suggests development measurement should weigh access and completion more heavily than parity ratios in wellbeing contexts — not universally, but with explicit construction choices that account for what is known to matter. For health, it suggests that wellbeing-motivated measurement may need different variables at different development levels: life expectancy in lower-income settings, self-reported health or specific conditions in saturated ones.</a:t>
+              <a:t>But it means the gap is structural. Education's access indicators work; pooling them with constructs that do not does not fix wellbeing prediction — it just builds a worse measure. Choosing a variable for health that is closer to saturated than the outcome it predicts is a measurement choice, not an incurable problem. And when a domain is never collected, no amount of better construction on the others will reach it.</a:t>
             </a:r>
           </a:p>
         </p:txBody>
@@ -5913,7 +5936,7 @@
                 </a:solidFill>
                 <a:latin typeface="Consolas"/>
               </a:rPr>
-              <a:t>IMPLICATION 2 · COVERAGE GAPS ARE MORE FUNDAMENTAL THAN CONSTRUCT CHOICE</a:t>
+              <a:t>IMPLICATION 1 · MEASUREMENT CHOICES CONSTRAIN WHAT FRAMEWORKS CAN SEE</a:t>
             </a:r>
           </a:p>
         </p:txBody>
@@ -5958,7 +5981,7 @@
                 </a:solidFill>
                 <a:latin typeface="Georgia"/>
               </a:rPr>
-              <a:t>Social trust: why you cannot fix a measurement by measuring better</a:t>
+              <a:t>Education and health: the case for measurement specificity</a:t>
             </a:r>
           </a:p>
         </p:txBody>
@@ -6003,7 +6026,7 @@
                 </a:solidFill>
                 <a:latin typeface="Calibri"/>
               </a:rPr>
-              <a:t>Social trust is the most tentative finding here. The ESS is Europe-only, across 36 countries, and relies on a single item. That bounds the claim: the pattern holds in Europe, with a wellbeing survey, on a self-report basis. It does not claim universality.</a:t>
+              <a:t>Education is significant everywhere it is measured as attainment, but nearly invisible in SDG4 because most indicators measure something else. Health is nearly invisible in the HDI because life expectancy has saturated. Neither domain has changed; the frameworks' construction choices have.</a:t>
             </a:r>
           </a:p>
           <a:p>
@@ -6025,29 +6048,7 @@
                 </a:solidFill>
                 <a:latin typeface="Calibri"/>
               </a:rPr>
-              <a:t>But the reason it is tentative points to the deepest problem: trust is not collected at global scale in either framework. The SDG database has 13 series adjacent to trust, but they measure institutional confidence, not interpersonal trust, and they are intermittent (147 of 163 country-series have fewer than four years of data). This is not a construct-choice problem that better measurement can solve. It is a coverage gap that requires deciding to collect the data in the first place.</a:t>
-            </a:r>
-          </a:p>
-          <a:p>
-            <a:pPr>
-              <a:lnSpc>
-                <a:spcPct val="132000"/>
-              </a:lnSpc>
-              <a:spcBef>
-                <a:spcPts val="0"/>
-              </a:spcBef>
-              <a:spcAft>
-                <a:spcPts val="1100"/>
-              </a:spcAft>
-            </a:pPr>
-            <a:r>
-              <a:rPr sz="1400" b="0" i="0">
-                <a:solidFill>
-                  <a:srgbClr val="5A6068"/>
-                </a:solidFill>
-                <a:latin typeface="Calibri"/>
-              </a:rPr>
-              <a:t>For wellbeing-conscious development monitoring, this suggests either building interpersonal-trust measurement into the core frameworks, or acknowledging that other surveys (the ESS, Gallup World Poll, World Values Survey) may be more suitable for understanding what shapes lived experience.</a:t>
+              <a:t>For education, this suggests development measurement should weigh access and completion more heavily than parity ratios in wellbeing contexts — not universally, but with explicit construction choices that account for what is known to matter. For health, it suggests that wellbeing-motivated measurement may need different variables at different development levels: life expectancy in lower-income settings, self-reported health or specific conditions in saturated ones.</a:t>
             </a:r>
           </a:p>
         </p:txBody>
@@ -6851,7 +6852,7 @@
                 </a:solidFill>
                 <a:latin typeface="Consolas"/>
               </a:rPr>
-              <a:t>CONCLUSION</a:t>
+              <a:t>IMPLICATION 2 · COVERAGE GAPS ARE MORE FUNDAMENTAL THAN CONSTRUCT CHOICE</a:t>
             </a:r>
           </a:p>
         </p:txBody>
@@ -6896,7 +6897,7 @@
                 </a:solidFill>
                 <a:latin typeface="Georgia"/>
               </a:rPr>
-              <a:t>A question rather than a prescription</a:t>
+              <a:t>Social trust: why you cannot fix a measurement by measuring better</a:t>
             </a:r>
           </a:p>
         </p:txBody>
@@ -6941,7 +6942,7 @@
                 </a:solidFill>
                 <a:latin typeface="Calibri"/>
               </a:rPr>
-              <a:t>The evidence shows a consistent pattern: which domain looks most consequential for wellbeing depends on which framework measures it and what variable they chose. This is not about the domains; it is about the tools.</a:t>
+              <a:t>Social trust is the most tentative finding here. The ESS is Europe-only, across 36 countries, and relies on a single item. That bounds the claim: the pattern holds in Europe, with a wellbeing survey, on a self-report basis. It does not claim universality.</a:t>
             </a:r>
           </a:p>
           <a:p>
@@ -6963,7 +6964,7 @@
                 </a:solidFill>
                 <a:latin typeface="Calibri"/>
               </a:rPr>
-              <a:t>Whether development frameworks should be redesigned around wellbeing is outside the scope here. But if they were, this finding suggests the question to ask: should measurement choices be made with explicit reference to which variables still move and still matter for lived experience? Should coverage be built in for domains the frameworks discovered only by studying something else?</a:t>
+              <a:t>But the reason it is tentative points to the deepest problem: trust is not collected at global scale in either framework. The SDG database has 13 series adjacent to trust, but they measure institutional confidence, not interpersonal trust, and they are intermittent (147 of 163 country-series have fewer than four years of data). This is not a construct-choice problem that better measurement can solve. It is a coverage gap that requires deciding to collect the data in the first place.</a:t>
             </a:r>
           </a:p>
           <a:p>
@@ -6985,7 +6986,7 @@
                 </a:solidFill>
                 <a:latin typeface="Calibri"/>
               </a:rPr>
-              <a:t>The frameworks work well for their stated purpose. The question is whether wellbeing should become part of that purpose — and if it does, whether the measurement that comes from that intent should be different from the aggregate, development-first measurement in place today.</a:t>
+              <a:t>For wellbeing-conscious development monitoring, this suggests either building interpersonal-trust measurement into the core frameworks, or acknowledging that other surveys (the ESS, Gallup World Poll, World Values Survey) may be more suitable for understanding what shapes lived experience.</a:t>
             </a:r>
           </a:p>
         </p:txBody>
@@ -7041,6 +7042,250 @@
 </file>
 
 <file path=ppt/slides/slide21.xml><?xml version="1.0" encoding="utf-8"?>
+<p:sld xmlns:a="http://schemas.openxmlformats.org/drawingml/2006/main" xmlns:p="http://schemas.openxmlformats.org/presentationml/2006/main" xmlns:r="http://schemas.openxmlformats.org/officeDocument/2006/relationships">
+  <p:cSld>
+    <p:bg>
+      <p:bgPr>
+        <a:solidFill>
+          <a:srgbClr val="FCFCFB"/>
+        </a:solidFill>
+        <a:effectLst/>
+      </p:bgPr>
+    </p:bg>
+    <p:spTree>
+      <p:nvGrpSpPr>
+        <p:cNvPr id="1" name=""/>
+        <p:cNvGrpSpPr/>
+        <p:nvPr/>
+      </p:nvGrpSpPr>
+      <p:grpSpPr/>
+      <p:sp>
+        <p:nvSpPr>
+          <p:cNvPr id="2" name="TextBox 1"/>
+          <p:cNvSpPr txBox="1"/>
+          <p:nvPr/>
+        </p:nvSpPr>
+        <p:spPr>
+          <a:xfrm>
+            <a:off x="566928" y="502920"/>
+            <a:ext cx="8595360" cy="274320"/>
+          </a:xfrm>
+          <a:prstGeom prst="rect">
+            <a:avLst/>
+          </a:prstGeom>
+          <a:noFill/>
+        </p:spPr>
+        <p:txBody>
+          <a:bodyPr wrap="square" lIns="0" rIns="0" tIns="0" bIns="0">
+            <a:spAutoFit/>
+          </a:bodyPr>
+          <a:lstStyle/>
+          <a:p>
+            <a:pPr>
+              <a:spcBef>
+                <a:spcPts val="0"/>
+              </a:spcBef>
+              <a:spcAft>
+                <a:spcPts val="0"/>
+              </a:spcAft>
+            </a:pPr>
+            <a:r>
+              <a:rPr sz="1000" b="0" i="0">
+                <a:solidFill>
+                  <a:srgbClr val="A63A30"/>
+                </a:solidFill>
+                <a:latin typeface="Consolas"/>
+              </a:rPr>
+              <a:t>CONCLUSION</a:t>
+            </a:r>
+          </a:p>
+        </p:txBody>
+      </p:sp>
+      <p:sp>
+        <p:nvSpPr>
+          <p:cNvPr id="3" name="TextBox 2"/>
+          <p:cNvSpPr txBox="1"/>
+          <p:nvPr/>
+        </p:nvSpPr>
+        <p:spPr>
+          <a:xfrm>
+            <a:off x="566928" y="914400"/>
+            <a:ext cx="8595360" cy="1371600"/>
+          </a:xfrm>
+          <a:prstGeom prst="rect">
+            <a:avLst/>
+          </a:prstGeom>
+          <a:noFill/>
+        </p:spPr>
+        <p:txBody>
+          <a:bodyPr wrap="square" lIns="0" rIns="0" tIns="0" bIns="0">
+            <a:spAutoFit/>
+          </a:bodyPr>
+          <a:lstStyle/>
+          <a:p>
+            <a:pPr>
+              <a:lnSpc>
+                <a:spcPct val="108000"/>
+              </a:lnSpc>
+              <a:spcBef>
+                <a:spcPts val="0"/>
+              </a:spcBef>
+              <a:spcAft>
+                <a:spcPts val="0"/>
+              </a:spcAft>
+            </a:pPr>
+            <a:r>
+              <a:rPr sz="2700" b="0" i="0">
+                <a:solidFill>
+                  <a:srgbClr val="14171C"/>
+                </a:solidFill>
+                <a:latin typeface="Georgia"/>
+              </a:rPr>
+              <a:t>A question rather than a prescription</a:t>
+            </a:r>
+          </a:p>
+        </p:txBody>
+      </p:sp>
+      <p:sp>
+        <p:nvSpPr>
+          <p:cNvPr id="4" name="TextBox 3"/>
+          <p:cNvSpPr txBox="1"/>
+          <p:nvPr/>
+        </p:nvSpPr>
+        <p:spPr>
+          <a:xfrm>
+            <a:off x="566928" y="2286000"/>
+            <a:ext cx="8595360" cy="3840480"/>
+          </a:xfrm>
+          <a:prstGeom prst="rect">
+            <a:avLst/>
+          </a:prstGeom>
+          <a:noFill/>
+        </p:spPr>
+        <p:txBody>
+          <a:bodyPr wrap="square" lIns="0" rIns="0" tIns="0" bIns="0">
+            <a:spAutoFit/>
+          </a:bodyPr>
+          <a:lstStyle/>
+          <a:p>
+            <a:pPr>
+              <a:lnSpc>
+                <a:spcPct val="132000"/>
+              </a:lnSpc>
+              <a:spcBef>
+                <a:spcPts val="0"/>
+              </a:spcBef>
+              <a:spcAft>
+                <a:spcPts val="1100"/>
+              </a:spcAft>
+            </a:pPr>
+            <a:r>
+              <a:rPr sz="1400" b="0" i="0">
+                <a:solidFill>
+                  <a:srgbClr val="5A6068"/>
+                </a:solidFill>
+                <a:latin typeface="Calibri"/>
+              </a:rPr>
+              <a:t>The evidence shows a consistent pattern: which domain looks most consequential for wellbeing depends on which framework measures it and what variable they chose. This is not about the domains; it is about the tools.</a:t>
+            </a:r>
+          </a:p>
+          <a:p>
+            <a:pPr>
+              <a:lnSpc>
+                <a:spcPct val="132000"/>
+              </a:lnSpc>
+              <a:spcBef>
+                <a:spcPts val="0"/>
+              </a:spcBef>
+              <a:spcAft>
+                <a:spcPts val="1100"/>
+              </a:spcAft>
+            </a:pPr>
+            <a:r>
+              <a:rPr sz="1400" b="0" i="0">
+                <a:solidFill>
+                  <a:srgbClr val="5A6068"/>
+                </a:solidFill>
+                <a:latin typeface="Calibri"/>
+              </a:rPr>
+              <a:t>Whether development frameworks should be redesigned around wellbeing is outside the scope here. But if they were, this finding suggests the question to ask: should measurement choices be made with explicit reference to which variables still move and still matter for lived experience? Should coverage be built in for domains the frameworks discovered only by studying something else?</a:t>
+            </a:r>
+          </a:p>
+          <a:p>
+            <a:pPr>
+              <a:lnSpc>
+                <a:spcPct val="132000"/>
+              </a:lnSpc>
+              <a:spcBef>
+                <a:spcPts val="0"/>
+              </a:spcBef>
+              <a:spcAft>
+                <a:spcPts val="1100"/>
+              </a:spcAft>
+            </a:pPr>
+            <a:r>
+              <a:rPr sz="1400" b="0" i="0">
+                <a:solidFill>
+                  <a:srgbClr val="5A6068"/>
+                </a:solidFill>
+                <a:latin typeface="Calibri"/>
+              </a:rPr>
+              <a:t>The frameworks work well for their stated purpose. The question is whether wellbeing should become part of that purpose — and if it does, whether the measurement that comes from that intent should be different from the aggregate, development-first measurement in place today.</a:t>
+            </a:r>
+          </a:p>
+        </p:txBody>
+      </p:sp>
+      <p:sp>
+        <p:nvSpPr>
+          <p:cNvPr id="5" name="TextBox 4"/>
+          <p:cNvSpPr txBox="1"/>
+          <p:nvPr/>
+        </p:nvSpPr>
+        <p:spPr>
+          <a:xfrm>
+            <a:off x="11338560" y="6263640"/>
+            <a:ext cx="548640" cy="274320"/>
+          </a:xfrm>
+          <a:prstGeom prst="rect">
+            <a:avLst/>
+          </a:prstGeom>
+          <a:noFill/>
+        </p:spPr>
+        <p:txBody>
+          <a:bodyPr wrap="square" lIns="0" rIns="0" tIns="0" bIns="0">
+            <a:spAutoFit/>
+          </a:bodyPr>
+          <a:lstStyle/>
+          <a:p>
+            <a:pPr algn="r">
+              <a:spcBef>
+                <a:spcPts val="0"/>
+              </a:spcBef>
+              <a:spcAft>
+                <a:spcPts val="0"/>
+              </a:spcAft>
+            </a:pPr>
+            <a:r>
+              <a:rPr sz="1100" b="0" i="0">
+                <a:solidFill>
+                  <a:srgbClr val="868D96"/>
+                </a:solidFill>
+                <a:latin typeface="Consolas"/>
+              </a:rPr>
+              <a:t>III</a:t>
+            </a:r>
+          </a:p>
+        </p:txBody>
+      </p:sp>
+    </p:spTree>
+  </p:cSld>
+  <p:clrMapOvr>
+    <a:masterClrMapping/>
+  </p:clrMapOvr>
+</p:sld>
+</file>
+
+<file path=ppt/slides/slide22.xml><?xml version="1.0" encoding="utf-8"?>
 <p:sld xmlns:a="http://schemas.openxmlformats.org/drawingml/2006/main" xmlns:p="http://schemas.openxmlformats.org/presentationml/2006/main" xmlns:r="http://schemas.openxmlformats.org/officeDocument/2006/relationships">
   <p:cSld>
     <p:bg>
@@ -7197,7 +7442,7 @@
 </p:sld>
 </file>
 
-<file path=ppt/slides/slide22.xml><?xml version="1.0" encoding="utf-8"?>
+<file path=ppt/slides/slide23.xml><?xml version="1.0" encoding="utf-8"?>
 <p:sld xmlns:a="http://schemas.openxmlformats.org/drawingml/2006/main" xmlns:p="http://schemas.openxmlformats.org/presentationml/2006/main" xmlns:r="http://schemas.openxmlformats.org/officeDocument/2006/relationships">
   <p:cSld>
     <p:bg>
@@ -7716,7 +7961,7 @@
 </p:sld>
 </file>
 
-<file path=ppt/slides/slide23.xml><?xml version="1.0" encoding="utf-8"?>
+<file path=ppt/slides/slide24.xml><?xml version="1.0" encoding="utf-8"?>
 <p:sld xmlns:a="http://schemas.openxmlformats.org/drawingml/2006/main" xmlns:p="http://schemas.openxmlformats.org/presentationml/2006/main" xmlns:r="http://schemas.openxmlformats.org/officeDocument/2006/relationships">
   <p:cSld>
     <p:bg>

--- a/deck/Measured_Where_It_Varies.pptx
+++ b/deck/Measured_Where_It_Varies.pptx
@@ -29,6 +29,8 @@
     <p:sldId id="277" r:id="rId28"/>
     <p:sldId id="278" r:id="rId29"/>
     <p:sldId id="279" r:id="rId30"/>
+    <p:sldId id="280" r:id="rId31"/>
+    <p:sldId id="281" r:id="rId32"/>
   </p:sldIdLst>
   <p:sldSz cx="12191695" cy="6858000" type="screen4x3"/>
   <p:notesSz cx="6858000" cy="9144000"/>
@@ -4558,7 +4560,7 @@
         <p:spPr>
           <a:xfrm>
             <a:off x="566928" y="502920"/>
-            <a:ext cx="8595360" cy="274320"/>
+            <a:ext cx="4160520" cy="274320"/>
           </a:xfrm>
           <a:prstGeom prst="rect">
             <a:avLst/>
@@ -4586,7 +4588,7 @@
                 </a:solidFill>
                 <a:latin typeface="Consolas"/>
               </a:rPr>
-              <a:t>WITHIN-COUNTRY EVIDENCE · WHY ESS IS DIFFERENT</a:t>
+              <a:t>SYNTHESIS</a:t>
             </a:r>
           </a:p>
         </p:txBody>
@@ -4600,7 +4602,7 @@
         <p:spPr>
           <a:xfrm>
             <a:off x="566928" y="914400"/>
-            <a:ext cx="8595360" cy="1371600"/>
+            <a:ext cx="4160520" cy="1371600"/>
           </a:xfrm>
           <a:prstGeom prst="rect">
             <a:avLst/>
@@ -4625,13 +4627,13 @@
               </a:spcAft>
             </a:pPr>
             <a:r>
-              <a:rPr sz="2700" b="0" i="0">
+              <a:rPr sz="2300" b="0" i="0">
                 <a:solidFill>
                   <a:srgbClr val="14171C"/>
                 </a:solidFill>
                 <a:latin typeface="Georgia"/>
               </a:rPr>
-              <a:t>Individual-level, self-reported data captures year-to-year change that administrative frameworks miss</a:t>
+              <a:t>Three domains, three ways frameworks lose sight of what matters</a:t>
             </a:r>
           </a:p>
         </p:txBody>
@@ -4644,8 +4646,8 @@
         </p:nvSpPr>
         <p:spPr>
           <a:xfrm>
-            <a:off x="566928" y="2286000"/>
-            <a:ext cx="8595360" cy="3840480"/>
+            <a:off x="566928" y="2331720"/>
+            <a:ext cx="4160520" cy="3840480"/>
           </a:xfrm>
           <a:prstGeom prst="rect">
             <a:avLst/>
@@ -4670,13 +4672,13 @@
               </a:spcAft>
             </a:pPr>
             <a:r>
-              <a:rPr sz="1400" b="0" i="0">
+              <a:rPr sz="1150" b="0" i="0">
                 <a:solidFill>
                   <a:srgbClr val="5A6068"/>
                 </a:solidFill>
                 <a:latin typeface="Calibri"/>
               </a:rPr>
-              <a:t>Here is the critical observation that reshapes the question: unlike SDG (71% levels → 5% differences) and HDI (42% → 2%), the ESS shows 69% levels → 64% differences. The association persists within countries over time. This is not because development frameworks are poorly designed; it is because they measure aggregate, administrative data at long intervals (annual at best for HDI and SDG). Individual survey responses capture year-to-year variation in how people experience their lives.</a:t>
+              <a:t>Education's rank depends on which construct you count: attainment works, but parity ratios and learning outcomes do not, so pooling dilutes the signal. Health's rank depends on whether your chosen variable still varies: life expectancy does not, but self-rated health does, so the HDI's choice costs it. Social trust's rank is zero because it is not collected at scale in development frameworks at all — a coverage gap that cannot be fixed by choosing the right variable, because no variable was ever measured.</a:t>
             </a:r>
           </a:p>
           <a:p>
@@ -4692,35 +4694,13 @@
               </a:spcAft>
             </a:pPr>
             <a:r>
-              <a:rPr sz="1400" b="0" i="0">
+              <a:rPr sz="1150" b="0" i="0">
                 <a:solidFill>
                   <a:srgbClr val="5A6068"/>
                 </a:solidFill>
                 <a:latin typeface="Calibri"/>
               </a:rPr>
-              <a:t>This matters for social trust most of all. At the country level, SDG has almost no trust coverage; in the HDI, none. But at the individual level, within countries, ESS shows trust is significant in 94% of countries and drives year-to-year change in how satisfied people report being. The three domains emerge not because the frameworks reveal them, but because ESS measures them where people actually experience variation: in themselves, over time.</a:t>
-            </a:r>
-          </a:p>
-          <a:p>
-            <a:pPr>
-              <a:lnSpc>
-                <a:spcPct val="132000"/>
-              </a:lnSpc>
-              <a:spcBef>
-                <a:spcPts val="0"/>
-              </a:spcBef>
-              <a:spcAft>
-                <a:spcPts val="1100"/>
-              </a:spcAft>
-            </a:pPr>
-            <a:r>
-              <a:rPr sz="1400" b="0" i="0">
-                <a:solidFill>
-                  <a:srgbClr val="5A6068"/>
-                </a:solidFill>
-                <a:latin typeface="Calibri"/>
-              </a:rPr>
-              <a:t>The caveats are substantial: 36 European countries, self-reported measures, annual cycles. But the implication is clear. Development frameworks' blindness to social trust is not because trust does not matter for wellbeing; it is because development was never designed to measure individual experience at the temporal resolution where people change.</a:t>
+              <a:t>These are not criticisms of the frameworks; they were built to track development, and they do. But which components look most consequential for lived experience is not the question they were built to answer.</a:t>
             </a:r>
           </a:p>
         </p:txBody>
@@ -4763,6 +4743,75 @@
                 <a:latin typeface="Consolas"/>
               </a:rPr>
               <a:t>II</a:t>
+            </a:r>
+          </a:p>
+        </p:txBody>
+      </p:sp>
+      <p:pic>
+        <p:nvPicPr>
+          <p:cNvPr id="6" name="Picture 5" descr="domain_horse_race.png"/>
+          <p:cNvPicPr>
+            <a:picLocks noChangeAspect="1"/>
+          </p:cNvPicPr>
+          <p:nvPr/>
+        </p:nvPicPr>
+        <p:blipFill>
+          <a:blip r:embed="rId2"/>
+          <a:stretch>
+            <a:fillRect/>
+          </a:stretch>
+        </p:blipFill>
+        <p:spPr>
+          <a:xfrm>
+            <a:off x="5120640" y="1433421"/>
+            <a:ext cx="6537960" cy="3524813"/>
+          </a:xfrm>
+          <a:prstGeom prst="rect">
+            <a:avLst/>
+          </a:prstGeom>
+        </p:spPr>
+      </p:pic>
+      <p:sp>
+        <p:nvSpPr>
+          <p:cNvPr id="7" name="TextBox 6"/>
+          <p:cNvSpPr txBox="1"/>
+          <p:nvPr/>
+        </p:nvSpPr>
+        <p:spPr>
+          <a:xfrm>
+            <a:off x="5120640" y="5897880"/>
+            <a:ext cx="6537960" cy="731520"/>
+          </a:xfrm>
+          <a:prstGeom prst="rect">
+            <a:avLst/>
+          </a:prstGeom>
+          <a:noFill/>
+        </p:spPr>
+        <p:txBody>
+          <a:bodyPr wrap="square" lIns="0" rIns="0" tIns="0" bIns="0">
+            <a:spAutoFit/>
+          </a:bodyPr>
+          <a:lstStyle/>
+          <a:p>
+            <a:pPr>
+              <a:lnSpc>
+                <a:spcPct val="125000"/>
+              </a:lnSpc>
+              <a:spcBef>
+                <a:spcPts val="0"/>
+              </a:spcBef>
+              <a:spcAft>
+                <a:spcPts val="0"/>
+              </a:spcAft>
+            </a:pPr>
+            <a:r>
+              <a:rPr sz="900" b="0" i="0">
+                <a:solidFill>
+                  <a:srgbClr val="868D96"/>
+                </a:solidFill>
+                <a:latin typeface="Calibri"/>
+              </a:rPr>
+              <a:t>Domains competing within one instrument (ESS), at two levels of aggregation. Individual level (left) and country means (right).</a:t>
             </a:r>
           </a:p>
         </p:txBody>
@@ -4776,6 +4825,599 @@
 </file>
 
 <file path=ppt/slides/slide15.xml><?xml version="1.0" encoding="utf-8"?>
+<p:sld xmlns:a="http://schemas.openxmlformats.org/drawingml/2006/main" xmlns:p="http://schemas.openxmlformats.org/presentationml/2006/main" xmlns:r="http://schemas.openxmlformats.org/officeDocument/2006/relationships">
+  <p:cSld>
+    <p:bg>
+      <p:bgPr>
+        <a:solidFill>
+          <a:srgbClr val="E8EBEF"/>
+        </a:solidFill>
+        <a:effectLst/>
+      </p:bgPr>
+    </p:bg>
+    <p:spTree>
+      <p:nvGrpSpPr>
+        <p:cNvPr id="1" name=""/>
+        <p:cNvGrpSpPr/>
+        <p:nvPr/>
+      </p:nvGrpSpPr>
+      <p:grpSpPr/>
+      <p:sp>
+        <p:nvSpPr>
+          <p:cNvPr id="2" name="Rectangle 1"/>
+          <p:cNvSpPr/>
+          <p:nvPr/>
+        </p:nvSpPr>
+        <p:spPr>
+          <a:xfrm>
+            <a:off x="566928" y="2103120"/>
+            <a:ext cx="54864" cy="2377440"/>
+          </a:xfrm>
+          <a:prstGeom prst="rect">
+            <a:avLst/>
+          </a:prstGeom>
+          <a:solidFill>
+            <a:srgbClr val="17549E"/>
+          </a:solidFill>
+          <a:ln>
+            <a:noFill/>
+          </a:ln>
+          <a:effectLst/>
+        </p:spPr>
+        <p:style>
+          <a:lnRef idx="1">
+            <a:schemeClr val="accent1"/>
+          </a:lnRef>
+          <a:fillRef idx="3">
+            <a:schemeClr val="accent1"/>
+          </a:fillRef>
+          <a:effectRef idx="2">
+            <a:schemeClr val="accent1"/>
+          </a:effectRef>
+          <a:fontRef idx="minor">
+            <a:schemeClr val="lt1"/>
+          </a:fontRef>
+        </p:style>
+        <p:txBody>
+          <a:bodyPr rtlCol="0" anchor="ctr"/>
+          <a:lstStyle/>
+          <a:p>
+            <a:pPr algn="ctr"/>
+          </a:p>
+        </p:txBody>
+      </p:sp>
+      <p:sp>
+        <p:nvSpPr>
+          <p:cNvPr id="3" name="TextBox 2"/>
+          <p:cNvSpPr txBox="1"/>
+          <p:nvPr/>
+        </p:nvSpPr>
+        <p:spPr>
+          <a:xfrm>
+            <a:off x="914400" y="1600200"/>
+            <a:ext cx="8686800" cy="274320"/>
+          </a:xfrm>
+          <a:prstGeom prst="rect">
+            <a:avLst/>
+          </a:prstGeom>
+          <a:noFill/>
+        </p:spPr>
+        <p:txBody>
+          <a:bodyPr wrap="square" lIns="0" rIns="0" tIns="0" bIns="0">
+            <a:spAutoFit/>
+          </a:bodyPr>
+          <a:lstStyle/>
+          <a:p>
+            <a:pPr>
+              <a:spcBef>
+                <a:spcPts val="0"/>
+              </a:spcBef>
+              <a:spcAft>
+                <a:spcPts val="0"/>
+              </a:spcAft>
+            </a:pPr>
+            <a:r>
+              <a:rPr sz="1100" b="0" i="0">
+                <a:solidFill>
+                  <a:srgbClr val="17549E"/>
+                </a:solidFill>
+                <a:latin typeface="Consolas"/>
+              </a:rPr>
+              <a:t>WHERE ACT II LEAVES US</a:t>
+            </a:r>
+          </a:p>
+        </p:txBody>
+      </p:sp>
+      <p:sp>
+        <p:nvSpPr>
+          <p:cNvPr id="4" name="TextBox 3"/>
+          <p:cNvSpPr txBox="1"/>
+          <p:nvPr/>
+        </p:nvSpPr>
+        <p:spPr>
+          <a:xfrm>
+            <a:off x="914400" y="2148840"/>
+            <a:ext cx="9509760" cy="2926080"/>
+          </a:xfrm>
+          <a:prstGeom prst="rect">
+            <a:avLst/>
+          </a:prstGeom>
+          <a:noFill/>
+        </p:spPr>
+        <p:txBody>
+          <a:bodyPr wrap="square" lIns="0" rIns="0" tIns="0" bIns="0">
+            <a:spAutoFit/>
+          </a:bodyPr>
+          <a:lstStyle/>
+          <a:p>
+            <a:pPr>
+              <a:lnSpc>
+                <a:spcPct val="135000"/>
+              </a:lnSpc>
+              <a:spcBef>
+                <a:spcPts val="0"/>
+              </a:spcBef>
+              <a:spcAft>
+                <a:spcPts val="0"/>
+              </a:spcAft>
+            </a:pPr>
+            <a:r>
+              <a:rPr sz="2100" b="0" i="0">
+                <a:solidFill>
+                  <a:srgbClr val="14171C"/>
+                </a:solidFill>
+                <a:latin typeface="Georgia"/>
+              </a:rPr>
+              <a:t>The problem is not the domains; the problem is the measurement. Frameworks designed for development, with aggregate indicators measured at long intervals, structurally cannot see what matters for individual lived experience.</a:t>
+            </a:r>
+          </a:p>
+        </p:txBody>
+      </p:sp>
+    </p:spTree>
+  </p:cSld>
+  <p:clrMapOvr>
+    <a:masterClrMapping/>
+  </p:clrMapOvr>
+</p:sld>
+</file>
+
+<file path=ppt/slides/slide16.xml><?xml version="1.0" encoding="utf-8"?>
+<p:sld xmlns:a="http://schemas.openxmlformats.org/drawingml/2006/main" xmlns:p="http://schemas.openxmlformats.org/presentationml/2006/main" xmlns:r="http://schemas.openxmlformats.org/officeDocument/2006/relationships">
+  <p:cSld>
+    <p:bg>
+      <p:bgPr>
+        <a:solidFill>
+          <a:srgbClr val="14171C"/>
+        </a:solidFill>
+        <a:effectLst/>
+      </p:bgPr>
+    </p:bg>
+    <p:spTree>
+      <p:nvGrpSpPr>
+        <p:cNvPr id="1" name=""/>
+        <p:cNvGrpSpPr/>
+        <p:nvPr/>
+      </p:nvGrpSpPr>
+      <p:grpSpPr/>
+      <p:sp>
+        <p:nvSpPr>
+          <p:cNvPr id="2" name="TextBox 1"/>
+          <p:cNvSpPr txBox="1"/>
+          <p:nvPr/>
+        </p:nvSpPr>
+        <p:spPr>
+          <a:xfrm>
+            <a:off x="8229600" y="822960"/>
+            <a:ext cx="3291840" cy="4114800"/>
+          </a:xfrm>
+          <a:prstGeom prst="rect">
+            <a:avLst/>
+          </a:prstGeom>
+          <a:noFill/>
+        </p:spPr>
+        <p:txBody>
+          <a:bodyPr wrap="square" lIns="0" rIns="0" tIns="0" bIns="0">
+            <a:spAutoFit/>
+          </a:bodyPr>
+          <a:lstStyle/>
+          <a:p>
+            <a:pPr algn="r">
+              <a:spcBef>
+                <a:spcPts val="0"/>
+              </a:spcBef>
+              <a:spcAft>
+                <a:spcPts val="0"/>
+              </a:spcAft>
+            </a:pPr>
+            <a:r>
+              <a:rPr sz="20000" b="0" i="0">
+                <a:solidFill>
+                  <a:srgbClr val="2A3340"/>
+                </a:solidFill>
+                <a:latin typeface="Georgia"/>
+              </a:rPr>
+              <a:t>III</a:t>
+            </a:r>
+          </a:p>
+        </p:txBody>
+      </p:sp>
+      <p:sp>
+        <p:nvSpPr>
+          <p:cNvPr id="3" name="Rectangle 2"/>
+          <p:cNvSpPr/>
+          <p:nvPr/>
+        </p:nvSpPr>
+        <p:spPr>
+          <a:xfrm>
+            <a:off x="566928" y="1371600"/>
+            <a:ext cx="7315200" cy="25400"/>
+          </a:xfrm>
+          <a:prstGeom prst="rect">
+            <a:avLst/>
+          </a:prstGeom>
+          <a:solidFill>
+            <a:srgbClr val="C9D8EC"/>
+          </a:solidFill>
+          <a:ln>
+            <a:noFill/>
+          </a:ln>
+          <a:effectLst/>
+        </p:spPr>
+        <p:style>
+          <a:lnRef idx="1">
+            <a:schemeClr val="accent1"/>
+          </a:lnRef>
+          <a:fillRef idx="3">
+            <a:schemeClr val="accent1"/>
+          </a:fillRef>
+          <a:effectRef idx="2">
+            <a:schemeClr val="accent1"/>
+          </a:effectRef>
+          <a:fontRef idx="minor">
+            <a:schemeClr val="lt1"/>
+          </a:fontRef>
+        </p:style>
+        <p:txBody>
+          <a:bodyPr rtlCol="0" anchor="ctr"/>
+          <a:lstStyle/>
+          <a:p>
+            <a:pPr algn="ctr"/>
+          </a:p>
+        </p:txBody>
+      </p:sp>
+      <p:sp>
+        <p:nvSpPr>
+          <p:cNvPr id="4" name="TextBox 3"/>
+          <p:cNvSpPr txBox="1"/>
+          <p:nvPr/>
+        </p:nvSpPr>
+        <p:spPr>
+          <a:xfrm>
+            <a:off x="566928" y="960120"/>
+            <a:ext cx="5486400" cy="274320"/>
+          </a:xfrm>
+          <a:prstGeom prst="rect">
+            <a:avLst/>
+          </a:prstGeom>
+          <a:noFill/>
+        </p:spPr>
+        <p:txBody>
+          <a:bodyPr wrap="square" lIns="0" rIns="0" tIns="0" bIns="0">
+            <a:spAutoFit/>
+          </a:bodyPr>
+          <a:lstStyle/>
+          <a:p>
+            <a:pPr>
+              <a:spcBef>
+                <a:spcPts val="0"/>
+              </a:spcBef>
+              <a:spcAft>
+                <a:spcPts val="0"/>
+              </a:spcAft>
+            </a:pPr>
+            <a:r>
+              <a:rPr sz="1100" b="0" i="0">
+                <a:solidFill>
+                  <a:srgbClr val="C9D8EC"/>
+                </a:solidFill>
+                <a:latin typeface="Consolas"/>
+              </a:rPr>
+              <a:t>ACT III</a:t>
+            </a:r>
+          </a:p>
+        </p:txBody>
+      </p:sp>
+      <p:sp>
+        <p:nvSpPr>
+          <p:cNvPr id="5" name="TextBox 4"/>
+          <p:cNvSpPr txBox="1"/>
+          <p:nvPr/>
+        </p:nvSpPr>
+        <p:spPr>
+          <a:xfrm>
+            <a:off x="566928" y="1783080"/>
+            <a:ext cx="7223760" cy="1828800"/>
+          </a:xfrm>
+          <a:prstGeom prst="rect">
+            <a:avLst/>
+          </a:prstGeom>
+          <a:noFill/>
+        </p:spPr>
+        <p:txBody>
+          <a:bodyPr wrap="square" lIns="0" rIns="0" tIns="0" bIns="0">
+            <a:spAutoFit/>
+          </a:bodyPr>
+          <a:lstStyle/>
+          <a:p>
+            <a:pPr>
+              <a:lnSpc>
+                <a:spcPct val="102000"/>
+              </a:lnSpc>
+              <a:spcBef>
+                <a:spcPts val="0"/>
+              </a:spcBef>
+              <a:spcAft>
+                <a:spcPts val="0"/>
+              </a:spcAft>
+            </a:pPr>
+            <a:r>
+              <a:rPr sz="4000" b="0" i="0">
+                <a:solidFill>
+                  <a:srgbClr val="FCFCFB"/>
+                </a:solidFill>
+                <a:latin typeface="Georgia"/>
+              </a:rPr>
+              <a:t>Within-country evidence: Why measurement type matters</a:t>
+            </a:r>
+          </a:p>
+        </p:txBody>
+      </p:sp>
+      <p:sp>
+        <p:nvSpPr>
+          <p:cNvPr id="6" name="TextBox 5"/>
+          <p:cNvSpPr txBox="1"/>
+          <p:nvPr/>
+        </p:nvSpPr>
+        <p:spPr>
+          <a:xfrm>
+            <a:off x="566928" y="3886200"/>
+            <a:ext cx="6766560" cy="1463040"/>
+          </a:xfrm>
+          <a:prstGeom prst="rect">
+            <a:avLst/>
+          </a:prstGeom>
+          <a:noFill/>
+        </p:spPr>
+        <p:txBody>
+          <a:bodyPr wrap="square" lIns="0" rIns="0" tIns="0" bIns="0">
+            <a:spAutoFit/>
+          </a:bodyPr>
+          <a:lstStyle/>
+          <a:p>
+            <a:pPr>
+              <a:lnSpc>
+                <a:spcPct val="135000"/>
+              </a:lnSpc>
+              <a:spcBef>
+                <a:spcPts val="0"/>
+              </a:spcBef>
+              <a:spcAft>
+                <a:spcPts val="0"/>
+              </a:spcAft>
+            </a:pPr>
+            <a:r>
+              <a:rPr sz="1275" b="0" i="1">
+                <a:solidFill>
+                  <a:srgbClr val="9AA4B0"/>
+                </a:solidFill>
+                <a:latin typeface="Georgia"/>
+              </a:rPr>
+              <a:t>Individual-level, self-reported data shows a fundamentally different pattern. Unlike administrative development frameworks, ESS captures year-to-year variation within countries. This is not a measurement failure; it is a structural consequence of how development is measured — at the country level, with long intervals. Social trust emerges not because frameworks miss it, but because development frameworks measure at the wrong temporal and individual resolution where trust varies.</a:t>
+            </a:r>
+          </a:p>
+        </p:txBody>
+      </p:sp>
+      <p:sp>
+        <p:nvSpPr>
+          <p:cNvPr id="7" name="TextBox 6"/>
+          <p:cNvSpPr txBox="1"/>
+          <p:nvPr/>
+        </p:nvSpPr>
+        <p:spPr>
+          <a:xfrm>
+            <a:off x="566928" y="5623560"/>
+            <a:ext cx="3503066" cy="914400"/>
+          </a:xfrm>
+          <a:prstGeom prst="rect">
+            <a:avLst/>
+          </a:prstGeom>
+          <a:noFill/>
+        </p:spPr>
+        <p:txBody>
+          <a:bodyPr wrap="square" lIns="0" rIns="0" tIns="0" bIns="0">
+            <a:spAutoFit/>
+          </a:bodyPr>
+          <a:lstStyle/>
+          <a:p>
+            <a:pPr>
+              <a:spcBef>
+                <a:spcPts val="0"/>
+              </a:spcBef>
+              <a:spcAft>
+                <a:spcPts val="400"/>
+              </a:spcAft>
+            </a:pPr>
+            <a:r>
+              <a:rPr sz="2200" b="0" i="0">
+                <a:solidFill>
+                  <a:srgbClr val="FCFCFB"/>
+                </a:solidFill>
+                <a:latin typeface="Consolas"/>
+              </a:rPr>
+              <a:t>69% → 64%</a:t>
+            </a:r>
+          </a:p>
+          <a:p>
+            <a:pPr>
+              <a:lnSpc>
+                <a:spcPct val="120000"/>
+              </a:lnSpc>
+              <a:spcBef>
+                <a:spcPts val="0"/>
+              </a:spcBef>
+              <a:spcAft>
+                <a:spcPts val="0"/>
+              </a:spcAft>
+            </a:pPr>
+            <a:r>
+              <a:rPr sz="1000" b="0" i="0">
+                <a:solidFill>
+                  <a:srgbClr val="8A94A0"/>
+                </a:solidFill>
+                <a:latin typeface="Calibri"/>
+              </a:rPr>
+              <a:t>ESS levels → differences (NOT collapsed)</a:t>
+            </a:r>
+          </a:p>
+        </p:txBody>
+      </p:sp>
+      <p:sp>
+        <p:nvSpPr>
+          <p:cNvPr id="8" name="TextBox 7"/>
+          <p:cNvSpPr txBox="1"/>
+          <p:nvPr/>
+        </p:nvSpPr>
+        <p:spPr>
+          <a:xfrm>
+            <a:off x="4344314" y="5623560"/>
+            <a:ext cx="3503066" cy="914400"/>
+          </a:xfrm>
+          <a:prstGeom prst="rect">
+            <a:avLst/>
+          </a:prstGeom>
+          <a:noFill/>
+        </p:spPr>
+        <p:txBody>
+          <a:bodyPr wrap="square" lIns="0" rIns="0" tIns="0" bIns="0">
+            <a:spAutoFit/>
+          </a:bodyPr>
+          <a:lstStyle/>
+          <a:p>
+            <a:pPr>
+              <a:spcBef>
+                <a:spcPts val="0"/>
+              </a:spcBef>
+              <a:spcAft>
+                <a:spcPts val="400"/>
+              </a:spcAft>
+            </a:pPr>
+            <a:r>
+              <a:rPr sz="2200" b="0" i="0">
+                <a:solidFill>
+                  <a:srgbClr val="FCFCFB"/>
+                </a:solidFill>
+                <a:latin typeface="Consolas"/>
+              </a:rPr>
+              <a:t>71% → 5%</a:t>
+            </a:r>
+          </a:p>
+          <a:p>
+            <a:pPr>
+              <a:lnSpc>
+                <a:spcPct val="120000"/>
+              </a:lnSpc>
+              <a:spcBef>
+                <a:spcPts val="0"/>
+              </a:spcBef>
+              <a:spcAft>
+                <a:spcPts val="0"/>
+              </a:spcAft>
+            </a:pPr>
+            <a:r>
+              <a:rPr sz="1000" b="0" i="0">
+                <a:solidFill>
+                  <a:srgbClr val="8A94A0"/>
+                </a:solidFill>
+                <a:latin typeface="Calibri"/>
+              </a:rPr>
+              <a:t>SDG levels → differences (collapsed)</a:t>
+            </a:r>
+          </a:p>
+        </p:txBody>
+      </p:sp>
+      <p:sp>
+        <p:nvSpPr>
+          <p:cNvPr id="9" name="TextBox 8"/>
+          <p:cNvSpPr txBox="1"/>
+          <p:nvPr/>
+        </p:nvSpPr>
+        <p:spPr>
+          <a:xfrm>
+            <a:off x="8121700" y="5623560"/>
+            <a:ext cx="3503066" cy="914400"/>
+          </a:xfrm>
+          <a:prstGeom prst="rect">
+            <a:avLst/>
+          </a:prstGeom>
+          <a:noFill/>
+        </p:spPr>
+        <p:txBody>
+          <a:bodyPr wrap="square" lIns="0" rIns="0" tIns="0" bIns="0">
+            <a:spAutoFit/>
+          </a:bodyPr>
+          <a:lstStyle/>
+          <a:p>
+            <a:pPr>
+              <a:spcBef>
+                <a:spcPts val="0"/>
+              </a:spcBef>
+              <a:spcAft>
+                <a:spcPts val="400"/>
+              </a:spcAft>
+            </a:pPr>
+            <a:r>
+              <a:rPr sz="2200" b="0" i="0">
+                <a:solidFill>
+                  <a:srgbClr val="FCFCFB"/>
+                </a:solidFill>
+                <a:latin typeface="Consolas"/>
+              </a:rPr>
+              <a:t>42% → 2%</a:t>
+            </a:r>
+          </a:p>
+          <a:p>
+            <a:pPr>
+              <a:lnSpc>
+                <a:spcPct val="120000"/>
+              </a:lnSpc>
+              <a:spcBef>
+                <a:spcPts val="0"/>
+              </a:spcBef>
+              <a:spcAft>
+                <a:spcPts val="0"/>
+              </a:spcAft>
+            </a:pPr>
+            <a:r>
+              <a:rPr sz="1000" b="0" i="0">
+                <a:solidFill>
+                  <a:srgbClr val="8A94A0"/>
+                </a:solidFill>
+                <a:latin typeface="Calibri"/>
+              </a:rPr>
+              <a:t>HDI levels → differences (collapsed)</a:t>
+            </a:r>
+          </a:p>
+        </p:txBody>
+      </p:sp>
+    </p:spTree>
+  </p:cSld>
+  <p:clrMapOvr>
+    <a:masterClrMapping/>
+  </p:clrMapOvr>
+</p:sld>
+</file>
+
+<file path=ppt/slides/slide17.xml><?xml version="1.0" encoding="utf-8"?>
 <p:sld xmlns:a="http://schemas.openxmlformats.org/drawingml/2006/main" xmlns:p="http://schemas.openxmlformats.org/presentationml/2006/main" xmlns:r="http://schemas.openxmlformats.org/officeDocument/2006/relationships">
   <p:cSld>
     <p:bg>
@@ -4802,7 +5444,7 @@
         <p:spPr>
           <a:xfrm>
             <a:off x="566928" y="502920"/>
-            <a:ext cx="4160520" cy="274320"/>
+            <a:ext cx="8595360" cy="274320"/>
           </a:xfrm>
           <a:prstGeom prst="rect">
             <a:avLst/>
@@ -4830,7 +5472,7 @@
                 </a:solidFill>
                 <a:latin typeface="Consolas"/>
               </a:rPr>
-              <a:t>SYNTHESIS</a:t>
+              <a:t>WITHIN-COUNTRY EVIDENCE</a:t>
             </a:r>
           </a:p>
         </p:txBody>
@@ -4844,7 +5486,7 @@
         <p:spPr>
           <a:xfrm>
             <a:off x="566928" y="914400"/>
-            <a:ext cx="4160520" cy="1371600"/>
+            <a:ext cx="8595360" cy="1371600"/>
           </a:xfrm>
           <a:prstGeom prst="rect">
             <a:avLst/>
@@ -4869,13 +5511,13 @@
               </a:spcAft>
             </a:pPr>
             <a:r>
-              <a:rPr sz="2300" b="0" i="0">
+              <a:rPr sz="2700" b="0" i="0">
                 <a:solidFill>
                   <a:srgbClr val="14171C"/>
                 </a:solidFill>
                 <a:latin typeface="Georgia"/>
               </a:rPr>
-              <a:t>Three domains, three ways frameworks lose sight of what matters</a:t>
+              <a:t>Individual-level, self-reported data captures year-to-year change that administrative frameworks miss</a:t>
             </a:r>
           </a:p>
         </p:txBody>
@@ -4888,8 +5530,8 @@
         </p:nvSpPr>
         <p:spPr>
           <a:xfrm>
-            <a:off x="566928" y="2331720"/>
-            <a:ext cx="4160520" cy="3840480"/>
+            <a:off x="566928" y="2286000"/>
+            <a:ext cx="8595360" cy="3840480"/>
           </a:xfrm>
           <a:prstGeom prst="rect">
             <a:avLst/>
@@ -4914,13 +5556,13 @@
               </a:spcAft>
             </a:pPr>
             <a:r>
-              <a:rPr sz="1150" b="0" i="0">
+              <a:rPr sz="1400" b="0" i="0">
                 <a:solidFill>
                   <a:srgbClr val="5A6068"/>
                 </a:solidFill>
                 <a:latin typeface="Calibri"/>
               </a:rPr>
-              <a:t>Education's rank depends on which construct you count: attainment works, but parity ratios and learning outcomes do not, so pooling dilutes the signal. Health's rank depends on whether your chosen variable still varies: life expectancy does not, but self-rated health does, so the HDI's choice costs it. Social trust's rank is zero because it is not collected at scale in development frameworks at all — a coverage gap that cannot be fixed by choosing the right variable, because no variable was ever measured.</a:t>
+              <a:t>Here is the critical observation that reshapes the question: unlike SDG (71% levels → 5% differences) and HDI (42% → 2%), the ESS shows 69% levels → 64% differences. The association persists within countries over time. This is not because development frameworks are poorly designed; it is because they measure aggregate, administrative data at long intervals (annual at best for HDI and SDG). Individual survey responses capture year-to-year variation in how people experience their lives.</a:t>
             </a:r>
           </a:p>
           <a:p>
@@ -4936,13 +5578,35 @@
               </a:spcAft>
             </a:pPr>
             <a:r>
-              <a:rPr sz="1150" b="0" i="0">
+              <a:rPr sz="1400" b="0" i="0">
                 <a:solidFill>
                   <a:srgbClr val="5A6068"/>
                 </a:solidFill>
                 <a:latin typeface="Calibri"/>
               </a:rPr>
-              <a:t>These are not criticisms of the frameworks; they were built to track development, and they do. But which components look most consequential for lived experience is not the question they were built to answer.</a:t>
+              <a:t>This matters for social trust most of all. At the country level, SDG has almost no trust coverage; in the HDI, none. But at the individual level, within countries, ESS shows trust is significant in 94% of countries and drives year-to-year change in how satisfied people report being. The three domains emerge not because the frameworks reveal them, but because ESS measures them where people actually experience variation: in themselves, over time.</a:t>
+            </a:r>
+          </a:p>
+          <a:p>
+            <a:pPr>
+              <a:lnSpc>
+                <a:spcPct val="132000"/>
+              </a:lnSpc>
+              <a:spcBef>
+                <a:spcPts val="0"/>
+              </a:spcBef>
+              <a:spcAft>
+                <a:spcPts val="1100"/>
+              </a:spcAft>
+            </a:pPr>
+            <a:r>
+              <a:rPr sz="1400" b="0" i="0">
+                <a:solidFill>
+                  <a:srgbClr val="5A6068"/>
+                </a:solidFill>
+                <a:latin typeface="Calibri"/>
+              </a:rPr>
+              <a:t>The caveats are substantial: 36 European countries, self-reported measures, annual cycles. But the implication is clear. Development frameworks' blindness to social trust is not because trust does not matter for wellbeing; it is because development was never designed to measure individual experience at the temporal resolution where people change.</a:t>
             </a:r>
           </a:p>
         </p:txBody>
@@ -4984,76 +5648,7 @@
                 </a:solidFill>
                 <a:latin typeface="Consolas"/>
               </a:rPr>
-              <a:t>II</a:t>
-            </a:r>
-          </a:p>
-        </p:txBody>
-      </p:sp>
-      <p:pic>
-        <p:nvPicPr>
-          <p:cNvPr id="6" name="Picture 5" descr="domain_horse_race.png"/>
-          <p:cNvPicPr>
-            <a:picLocks noChangeAspect="1"/>
-          </p:cNvPicPr>
-          <p:nvPr/>
-        </p:nvPicPr>
-        <p:blipFill>
-          <a:blip r:embed="rId2"/>
-          <a:stretch>
-            <a:fillRect/>
-          </a:stretch>
-        </p:blipFill>
-        <p:spPr>
-          <a:xfrm>
-            <a:off x="5120640" y="1433421"/>
-            <a:ext cx="6537960" cy="3524813"/>
-          </a:xfrm>
-          <a:prstGeom prst="rect">
-            <a:avLst/>
-          </a:prstGeom>
-        </p:spPr>
-      </p:pic>
-      <p:sp>
-        <p:nvSpPr>
-          <p:cNvPr id="7" name="TextBox 6"/>
-          <p:cNvSpPr txBox="1"/>
-          <p:nvPr/>
-        </p:nvSpPr>
-        <p:spPr>
-          <a:xfrm>
-            <a:off x="5120640" y="5897880"/>
-            <a:ext cx="6537960" cy="731520"/>
-          </a:xfrm>
-          <a:prstGeom prst="rect">
-            <a:avLst/>
-          </a:prstGeom>
-          <a:noFill/>
-        </p:spPr>
-        <p:txBody>
-          <a:bodyPr wrap="square" lIns="0" rIns="0" tIns="0" bIns="0">
-            <a:spAutoFit/>
-          </a:bodyPr>
-          <a:lstStyle/>
-          <a:p>
-            <a:pPr>
-              <a:lnSpc>
-                <a:spcPct val="125000"/>
-              </a:lnSpc>
-              <a:spcBef>
-                <a:spcPts val="0"/>
-              </a:spcBef>
-              <a:spcAft>
-                <a:spcPts val="0"/>
-              </a:spcAft>
-            </a:pPr>
-            <a:r>
-              <a:rPr sz="900" b="0" i="0">
-                <a:solidFill>
-                  <a:srgbClr val="868D96"/>
-                </a:solidFill>
-                <a:latin typeface="Calibri"/>
-              </a:rPr>
-              <a:t>Domains competing within one instrument (ESS), at two levels of aggregation. Individual level (left) and country means (right).</a:t>
+              <a:t>III</a:t>
             </a:r>
           </a:p>
         </p:txBody>
@@ -5066,7 +5661,7 @@
 </p:sld>
 </file>
 
-<file path=ppt/slides/slide16.xml><?xml version="1.0" encoding="utf-8"?>
+<file path=ppt/slides/slide18.xml><?xml version="1.0" encoding="utf-8"?>
 <p:sld xmlns:a="http://schemas.openxmlformats.org/drawingml/2006/main" xmlns:p="http://schemas.openxmlformats.org/presentationml/2006/main" xmlns:r="http://schemas.openxmlformats.org/officeDocument/2006/relationships">
   <p:cSld>
     <p:bg>
@@ -5165,7 +5760,7 @@
                 </a:solidFill>
                 <a:latin typeface="Consolas"/>
               </a:rPr>
-              <a:t>WHERE ACT II LEAVES US</a:t>
+              <a:t>WHERE ACT III LEAVES US</a:t>
             </a:r>
           </a:p>
         </p:txBody>
@@ -5210,7 +5805,7 @@
                 </a:solidFill>
                 <a:latin typeface="Georgia"/>
               </a:rPr>
-              <a:t>Each framework's construction choices — which construct to count, which variable to measure, which domains to collect at all — determine what it can see. The problem is not the domains; the problem is the measurement.</a:t>
+              <a:t>The three domains predict wellbeing differently depending on where and how you measure. Development frameworks' blindness is not incurable; it is structural. Frameworks designed for tracking aggregate national progress cannot see individual experience responsive to change.</a:t>
             </a:r>
           </a:p>
         </p:txBody>
@@ -5223,7 +5818,7 @@
 </p:sld>
 </file>
 
-<file path=ppt/slides/slide17.xml><?xml version="1.0" encoding="utf-8"?>
+<file path=ppt/slides/slide19.xml><?xml version="1.0" encoding="utf-8"?>
 <p:sld xmlns:a="http://schemas.openxmlformats.org/drawingml/2006/main" xmlns:p="http://schemas.openxmlformats.org/presentationml/2006/main" xmlns:r="http://schemas.openxmlformats.org/officeDocument/2006/relationships">
   <p:cSld>
     <p:bg>
@@ -5278,7 +5873,7 @@
                 </a:solidFill>
                 <a:latin typeface="Georgia"/>
               </a:rPr>
-              <a:t>III</a:t>
+              <a:t>IV</a:t>
             </a:r>
           </a:p>
         </p:txBody>
@@ -5364,7 +5959,7 @@
                 </a:solidFill>
                 <a:latin typeface="Consolas"/>
               </a:rPr>
-              <a:t>ACT III</a:t>
+              <a:t>ACT IV</a:t>
             </a:r>
           </a:p>
         </p:txBody>
@@ -5647,450 +6242,6 @@
                 <a:latin typeface="Calibri"/>
               </a:rPr>
               <a:t>median R² for trust — below income, health, education individually, above none</a:t>
-            </a:r>
-          </a:p>
-        </p:txBody>
-      </p:sp>
-    </p:spTree>
-  </p:cSld>
-  <p:clrMapOvr>
-    <a:masterClrMapping/>
-  </p:clrMapOvr>
-</p:sld>
-</file>
-
-<file path=ppt/slides/slide18.xml><?xml version="1.0" encoding="utf-8"?>
-<p:sld xmlns:a="http://schemas.openxmlformats.org/drawingml/2006/main" xmlns:p="http://schemas.openxmlformats.org/presentationml/2006/main" xmlns:r="http://schemas.openxmlformats.org/officeDocument/2006/relationships">
-  <p:cSld>
-    <p:bg>
-      <p:bgPr>
-        <a:solidFill>
-          <a:srgbClr val="FCFCFB"/>
-        </a:solidFill>
-        <a:effectLst/>
-      </p:bgPr>
-    </p:bg>
-    <p:spTree>
-      <p:nvGrpSpPr>
-        <p:cNvPr id="1" name=""/>
-        <p:cNvGrpSpPr/>
-        <p:nvPr/>
-      </p:nvGrpSpPr>
-      <p:grpSpPr/>
-      <p:sp>
-        <p:nvSpPr>
-          <p:cNvPr id="2" name="TextBox 1"/>
-          <p:cNvSpPr txBox="1"/>
-          <p:nvPr/>
-        </p:nvSpPr>
-        <p:spPr>
-          <a:xfrm>
-            <a:off x="566928" y="502920"/>
-            <a:ext cx="8595360" cy="274320"/>
-          </a:xfrm>
-          <a:prstGeom prst="rect">
-            <a:avLst/>
-          </a:prstGeom>
-          <a:noFill/>
-        </p:spPr>
-        <p:txBody>
-          <a:bodyPr wrap="square" lIns="0" rIns="0" tIns="0" bIns="0">
-            <a:spAutoFit/>
-          </a:bodyPr>
-          <a:lstStyle/>
-          <a:p>
-            <a:pPr>
-              <a:spcBef>
-                <a:spcPts val="0"/>
-              </a:spcBef>
-              <a:spcAft>
-                <a:spcPts val="0"/>
-              </a:spcAft>
-            </a:pPr>
-            <a:r>
-              <a:rPr sz="1000" b="0" i="0">
-                <a:solidFill>
-                  <a:srgbClr val="A63A30"/>
-                </a:solidFill>
-                <a:latin typeface="Consolas"/>
-              </a:rPr>
-              <a:t>THE DISCONNECT</a:t>
-            </a:r>
-          </a:p>
-        </p:txBody>
-      </p:sp>
-      <p:sp>
-        <p:nvSpPr>
-          <p:cNvPr id="3" name="TextBox 2"/>
-          <p:cNvSpPr txBox="1"/>
-          <p:nvPr/>
-        </p:nvSpPr>
-        <p:spPr>
-          <a:xfrm>
-            <a:off x="566928" y="914400"/>
-            <a:ext cx="8595360" cy="1371600"/>
-          </a:xfrm>
-          <a:prstGeom prst="rect">
-            <a:avLst/>
-          </a:prstGeom>
-          <a:noFill/>
-        </p:spPr>
-        <p:txBody>
-          <a:bodyPr wrap="square" lIns="0" rIns="0" tIns="0" bIns="0">
-            <a:spAutoFit/>
-          </a:bodyPr>
-          <a:lstStyle/>
-          <a:p>
-            <a:pPr>
-              <a:lnSpc>
-                <a:spcPct val="108000"/>
-              </a:lnSpc>
-              <a:spcBef>
-                <a:spcPts val="0"/>
-              </a:spcBef>
-              <a:spcAft>
-                <a:spcPts val="0"/>
-              </a:spcAft>
-            </a:pPr>
-            <a:r>
-              <a:rPr sz="2700" b="0" i="0">
-                <a:solidFill>
-                  <a:srgbClr val="14171C"/>
-                </a:solidFill>
-                <a:latin typeface="Georgia"/>
-              </a:rPr>
-              <a:t>These frameworks work for development. They do not work for wellbeing.</a:t>
-            </a:r>
-          </a:p>
-        </p:txBody>
-      </p:sp>
-      <p:sp>
-        <p:nvSpPr>
-          <p:cNvPr id="4" name="TextBox 3"/>
-          <p:cNvSpPr txBox="1"/>
-          <p:nvPr/>
-        </p:nvSpPr>
-        <p:spPr>
-          <a:xfrm>
-            <a:off x="566928" y="2286000"/>
-            <a:ext cx="8595360" cy="3840480"/>
-          </a:xfrm>
-          <a:prstGeom prst="rect">
-            <a:avLst/>
-          </a:prstGeom>
-          <a:noFill/>
-        </p:spPr>
-        <p:txBody>
-          <a:bodyPr wrap="square" lIns="0" rIns="0" tIns="0" bIns="0">
-            <a:spAutoFit/>
-          </a:bodyPr>
-          <a:lstStyle/>
-          <a:p>
-            <a:pPr>
-              <a:lnSpc>
-                <a:spcPct val="132000"/>
-              </a:lnSpc>
-              <a:spcBef>
-                <a:spcPts val="0"/>
-              </a:spcBef>
-              <a:spcAft>
-                <a:spcPts val="1100"/>
-              </a:spcAft>
-            </a:pPr>
-            <a:r>
-              <a:rPr sz="1400" b="0" i="0">
-                <a:solidFill>
-                  <a:srgbClr val="5A6068"/>
-                </a:solidFill>
-                <a:latin typeface="Calibri"/>
-              </a:rPr>
-              <a:t>The HDI and SDG frameworks do not answer the question 'what makes people's lives better?' any more than a global income statistics database answers 'what makes a person happy?' They were designed to track development, measured at the aggregate level, with indicators chosen before the question of individual wellbeing was systematically tested. That is not a design failure; it is the intended scope.</a:t>
-            </a:r>
-          </a:p>
-          <a:p>
-            <a:pPr>
-              <a:lnSpc>
-                <a:spcPct val="132000"/>
-              </a:lnSpc>
-              <a:spcBef>
-                <a:spcPts val="0"/>
-              </a:spcBef>
-              <a:spcAft>
-                <a:spcPts val="1100"/>
-              </a:spcAft>
-            </a:pPr>
-            <a:r>
-              <a:rPr sz="1400" b="0" i="0">
-                <a:solidFill>
-                  <a:srgbClr val="5A6068"/>
-                </a:solidFill>
-                <a:latin typeface="Calibri"/>
-              </a:rPr>
-              <a:t>But it means the gap is structural. Education's access indicators work; pooling them with constructs that do not does not fix wellbeing prediction — it just builds a worse measure. Choosing a variable for health that is closer to saturated than the outcome it predicts is a measurement choice, not an incurable problem. And when a domain is never collected, no amount of better construction on the others will reach it.</a:t>
-            </a:r>
-          </a:p>
-        </p:txBody>
-      </p:sp>
-      <p:sp>
-        <p:nvSpPr>
-          <p:cNvPr id="5" name="TextBox 4"/>
-          <p:cNvSpPr txBox="1"/>
-          <p:nvPr/>
-        </p:nvSpPr>
-        <p:spPr>
-          <a:xfrm>
-            <a:off x="11338560" y="6263640"/>
-            <a:ext cx="548640" cy="274320"/>
-          </a:xfrm>
-          <a:prstGeom prst="rect">
-            <a:avLst/>
-          </a:prstGeom>
-          <a:noFill/>
-        </p:spPr>
-        <p:txBody>
-          <a:bodyPr wrap="square" lIns="0" rIns="0" tIns="0" bIns="0">
-            <a:spAutoFit/>
-          </a:bodyPr>
-          <a:lstStyle/>
-          <a:p>
-            <a:pPr algn="r">
-              <a:spcBef>
-                <a:spcPts val="0"/>
-              </a:spcBef>
-              <a:spcAft>
-                <a:spcPts val="0"/>
-              </a:spcAft>
-            </a:pPr>
-            <a:r>
-              <a:rPr sz="1100" b="0" i="0">
-                <a:solidFill>
-                  <a:srgbClr val="868D96"/>
-                </a:solidFill>
-                <a:latin typeface="Consolas"/>
-              </a:rPr>
-              <a:t>III</a:t>
-            </a:r>
-          </a:p>
-        </p:txBody>
-      </p:sp>
-    </p:spTree>
-  </p:cSld>
-  <p:clrMapOvr>
-    <a:masterClrMapping/>
-  </p:clrMapOvr>
-</p:sld>
-</file>
-
-<file path=ppt/slides/slide19.xml><?xml version="1.0" encoding="utf-8"?>
-<p:sld xmlns:a="http://schemas.openxmlformats.org/drawingml/2006/main" xmlns:p="http://schemas.openxmlformats.org/presentationml/2006/main" xmlns:r="http://schemas.openxmlformats.org/officeDocument/2006/relationships">
-  <p:cSld>
-    <p:bg>
-      <p:bgPr>
-        <a:solidFill>
-          <a:srgbClr val="FCFCFB"/>
-        </a:solidFill>
-        <a:effectLst/>
-      </p:bgPr>
-    </p:bg>
-    <p:spTree>
-      <p:nvGrpSpPr>
-        <p:cNvPr id="1" name=""/>
-        <p:cNvGrpSpPr/>
-        <p:nvPr/>
-      </p:nvGrpSpPr>
-      <p:grpSpPr/>
-      <p:sp>
-        <p:nvSpPr>
-          <p:cNvPr id="2" name="TextBox 1"/>
-          <p:cNvSpPr txBox="1"/>
-          <p:nvPr/>
-        </p:nvSpPr>
-        <p:spPr>
-          <a:xfrm>
-            <a:off x="566928" y="502920"/>
-            <a:ext cx="8595360" cy="274320"/>
-          </a:xfrm>
-          <a:prstGeom prst="rect">
-            <a:avLst/>
-          </a:prstGeom>
-          <a:noFill/>
-        </p:spPr>
-        <p:txBody>
-          <a:bodyPr wrap="square" lIns="0" rIns="0" tIns="0" bIns="0">
-            <a:spAutoFit/>
-          </a:bodyPr>
-          <a:lstStyle/>
-          <a:p>
-            <a:pPr>
-              <a:spcBef>
-                <a:spcPts val="0"/>
-              </a:spcBef>
-              <a:spcAft>
-                <a:spcPts val="0"/>
-              </a:spcAft>
-            </a:pPr>
-            <a:r>
-              <a:rPr sz="1000" b="0" i="0">
-                <a:solidFill>
-                  <a:srgbClr val="A63A30"/>
-                </a:solidFill>
-                <a:latin typeface="Consolas"/>
-              </a:rPr>
-              <a:t>IMPLICATION 1 · MEASUREMENT CHOICES CONSTRAIN WHAT FRAMEWORKS CAN SEE</a:t>
-            </a:r>
-          </a:p>
-        </p:txBody>
-      </p:sp>
-      <p:sp>
-        <p:nvSpPr>
-          <p:cNvPr id="3" name="TextBox 2"/>
-          <p:cNvSpPr txBox="1"/>
-          <p:nvPr/>
-        </p:nvSpPr>
-        <p:spPr>
-          <a:xfrm>
-            <a:off x="566928" y="914400"/>
-            <a:ext cx="8595360" cy="1371600"/>
-          </a:xfrm>
-          <a:prstGeom prst="rect">
-            <a:avLst/>
-          </a:prstGeom>
-          <a:noFill/>
-        </p:spPr>
-        <p:txBody>
-          <a:bodyPr wrap="square" lIns="0" rIns="0" tIns="0" bIns="0">
-            <a:spAutoFit/>
-          </a:bodyPr>
-          <a:lstStyle/>
-          <a:p>
-            <a:pPr>
-              <a:lnSpc>
-                <a:spcPct val="108000"/>
-              </a:lnSpc>
-              <a:spcBef>
-                <a:spcPts val="0"/>
-              </a:spcBef>
-              <a:spcAft>
-                <a:spcPts val="0"/>
-              </a:spcAft>
-            </a:pPr>
-            <a:r>
-              <a:rPr sz="2700" b="0" i="0">
-                <a:solidFill>
-                  <a:srgbClr val="14171C"/>
-                </a:solidFill>
-                <a:latin typeface="Georgia"/>
-              </a:rPr>
-              <a:t>Education and health: the case for measurement specificity</a:t>
-            </a:r>
-          </a:p>
-        </p:txBody>
-      </p:sp>
-      <p:sp>
-        <p:nvSpPr>
-          <p:cNvPr id="4" name="TextBox 3"/>
-          <p:cNvSpPr txBox="1"/>
-          <p:nvPr/>
-        </p:nvSpPr>
-        <p:spPr>
-          <a:xfrm>
-            <a:off x="566928" y="2286000"/>
-            <a:ext cx="8595360" cy="3840480"/>
-          </a:xfrm>
-          <a:prstGeom prst="rect">
-            <a:avLst/>
-          </a:prstGeom>
-          <a:noFill/>
-        </p:spPr>
-        <p:txBody>
-          <a:bodyPr wrap="square" lIns="0" rIns="0" tIns="0" bIns="0">
-            <a:spAutoFit/>
-          </a:bodyPr>
-          <a:lstStyle/>
-          <a:p>
-            <a:pPr>
-              <a:lnSpc>
-                <a:spcPct val="132000"/>
-              </a:lnSpc>
-              <a:spcBef>
-                <a:spcPts val="0"/>
-              </a:spcBef>
-              <a:spcAft>
-                <a:spcPts val="1100"/>
-              </a:spcAft>
-            </a:pPr>
-            <a:r>
-              <a:rPr sz="1400" b="0" i="0">
-                <a:solidFill>
-                  <a:srgbClr val="5A6068"/>
-                </a:solidFill>
-                <a:latin typeface="Calibri"/>
-              </a:rPr>
-              <a:t>Education is significant everywhere it is measured as attainment, but nearly invisible in SDG4 because most indicators measure something else. Health is nearly invisible in the HDI because life expectancy has saturated. Neither domain has changed; the frameworks' construction choices have.</a:t>
-            </a:r>
-          </a:p>
-          <a:p>
-            <a:pPr>
-              <a:lnSpc>
-                <a:spcPct val="132000"/>
-              </a:lnSpc>
-              <a:spcBef>
-                <a:spcPts val="0"/>
-              </a:spcBef>
-              <a:spcAft>
-                <a:spcPts val="1100"/>
-              </a:spcAft>
-            </a:pPr>
-            <a:r>
-              <a:rPr sz="1400" b="0" i="0">
-                <a:solidFill>
-                  <a:srgbClr val="5A6068"/>
-                </a:solidFill>
-                <a:latin typeface="Calibri"/>
-              </a:rPr>
-              <a:t>For education, this suggests development measurement should weigh access and completion more heavily than parity ratios in wellbeing contexts — not universally, but with explicit construction choices that account for what is known to matter. For health, it suggests that wellbeing-motivated measurement may need different variables at different development levels: life expectancy in lower-income settings, self-reported health or specific conditions in saturated ones.</a:t>
-            </a:r>
-          </a:p>
-        </p:txBody>
-      </p:sp>
-      <p:sp>
-        <p:nvSpPr>
-          <p:cNvPr id="5" name="TextBox 4"/>
-          <p:cNvSpPr txBox="1"/>
-          <p:nvPr/>
-        </p:nvSpPr>
-        <p:spPr>
-          <a:xfrm>
-            <a:off x="11338560" y="6263640"/>
-            <a:ext cx="548640" cy="274320"/>
-          </a:xfrm>
-          <a:prstGeom prst="rect">
-            <a:avLst/>
-          </a:prstGeom>
-          <a:noFill/>
-        </p:spPr>
-        <p:txBody>
-          <a:bodyPr wrap="square" lIns="0" rIns="0" tIns="0" bIns="0">
-            <a:spAutoFit/>
-          </a:bodyPr>
-          <a:lstStyle/>
-          <a:p>
-            <a:pPr algn="r">
-              <a:spcBef>
-                <a:spcPts val="0"/>
-              </a:spcBef>
-              <a:spcAft>
-                <a:spcPts val="0"/>
-              </a:spcAft>
-            </a:pPr>
-            <a:r>
-              <a:rPr sz="1100" b="0" i="0">
-                <a:solidFill>
-                  <a:srgbClr val="868D96"/>
-                </a:solidFill>
-                <a:latin typeface="Consolas"/>
-              </a:rPr>
-              <a:t>III</a:t>
             </a:r>
           </a:p>
         </p:txBody>
@@ -6484,7 +6635,7 @@
                 </a:solidFill>
                 <a:latin typeface="Calibri"/>
               </a:rPr>
-              <a:t>Replicate it on the HDI, against a second wellbeing survey, and one spatial scale down. It holds every time. So we can analyze the levels.</a:t>
+              <a:t>Replicate it on the HDI, against a second wellbeing survey, and one spatial scale down. It holds every time — except in ESS, where individual-level data is responsive to change.</a:t>
             </a:r>
           </a:p>
         </p:txBody>
@@ -6612,7 +6763,7 @@
                 </a:solidFill>
                 <a:latin typeface="Calibri"/>
               </a:rPr>
-              <a:t>At the levels, three domains emerge: education, health, and social trust.</a:t>
+              <a:t>At the levels: three domains, three failure modes.</a:t>
             </a:r>
           </a:p>
           <a:p>
@@ -6634,7 +6785,7 @@
                 </a:solidFill>
                 <a:latin typeface="Calibri"/>
               </a:rPr>
-              <a:t>But each framework sees a different subset, for a different reason: the wrong construct, a variable that stopped varying, or no coverage at all.</a:t>
+              <a:t>Education, health, and social trust all matter. But frameworks see them differently because of construction choices, variable saturation, or missing coverage.</a:t>
             </a:r>
           </a:p>
         </p:txBody>
@@ -6762,7 +6913,7 @@
                 </a:solidFill>
                 <a:latin typeface="Calibri"/>
               </a:rPr>
-              <a:t>What this means for how we measure development.</a:t>
+              <a:t>Within-country evidence: why measurement type matters.</a:t>
             </a:r>
           </a:p>
           <a:p>
@@ -6784,7 +6935,157 @@
                 </a:solidFill>
                 <a:latin typeface="Calibri"/>
               </a:rPr>
-              <a:t>A disconnect between what frameworks capture and what predicts lived experience, with implications for each domain.</a:t>
+              <a:t>Individual-level, self-reported data shows ESS captures year-to-year change. Development frameworks measure at the wrong temporal and individual resolution.</a:t>
+            </a:r>
+          </a:p>
+        </p:txBody>
+      </p:sp>
+      <p:sp>
+        <p:nvSpPr>
+          <p:cNvPr id="15" name="Rectangle 14"/>
+          <p:cNvSpPr/>
+          <p:nvPr/>
+        </p:nvSpPr>
+        <p:spPr>
+          <a:xfrm>
+            <a:off x="6720840" y="5001768"/>
+            <a:ext cx="4846320" cy="9525"/>
+          </a:xfrm>
+          <a:prstGeom prst="rect">
+            <a:avLst/>
+          </a:prstGeom>
+          <a:solidFill>
+            <a:srgbClr val="CDD3DB"/>
+          </a:solidFill>
+          <a:ln>
+            <a:noFill/>
+          </a:ln>
+          <a:effectLst/>
+        </p:spPr>
+        <p:style>
+          <a:lnRef idx="1">
+            <a:schemeClr val="accent1"/>
+          </a:lnRef>
+          <a:fillRef idx="3">
+            <a:schemeClr val="accent1"/>
+          </a:fillRef>
+          <a:effectRef idx="2">
+            <a:schemeClr val="accent1"/>
+          </a:effectRef>
+          <a:fontRef idx="minor">
+            <a:schemeClr val="lt1"/>
+          </a:fontRef>
+        </p:style>
+        <p:txBody>
+          <a:bodyPr rtlCol="0" anchor="ctr"/>
+          <a:lstStyle/>
+          <a:p>
+            <a:pPr algn="ctr"/>
+          </a:p>
+        </p:txBody>
+      </p:sp>
+      <p:sp>
+        <p:nvSpPr>
+          <p:cNvPr id="16" name="TextBox 15"/>
+          <p:cNvSpPr txBox="1"/>
+          <p:nvPr/>
+        </p:nvSpPr>
+        <p:spPr>
+          <a:xfrm>
+            <a:off x="6720840" y="5148072"/>
+            <a:ext cx="502920" cy="457200"/>
+          </a:xfrm>
+          <a:prstGeom prst="rect">
+            <a:avLst/>
+          </a:prstGeom>
+          <a:noFill/>
+        </p:spPr>
+        <p:txBody>
+          <a:bodyPr wrap="square" lIns="0" rIns="0" tIns="0" bIns="0">
+            <a:spAutoFit/>
+          </a:bodyPr>
+          <a:lstStyle/>
+          <a:p>
+            <a:pPr>
+              <a:spcBef>
+                <a:spcPts val="0"/>
+              </a:spcBef>
+              <a:spcAft>
+                <a:spcPts val="0"/>
+              </a:spcAft>
+            </a:pPr>
+            <a:r>
+              <a:rPr sz="2000" b="0" i="0">
+                <a:solidFill>
+                  <a:srgbClr val="17549E"/>
+                </a:solidFill>
+                <a:latin typeface="Georgia"/>
+              </a:rPr>
+              <a:t>IV</a:t>
+            </a:r>
+          </a:p>
+        </p:txBody>
+      </p:sp>
+      <p:sp>
+        <p:nvSpPr>
+          <p:cNvPr id="17" name="TextBox 16"/>
+          <p:cNvSpPr txBox="1"/>
+          <p:nvPr/>
+        </p:nvSpPr>
+        <p:spPr>
+          <a:xfrm>
+            <a:off x="7360920" y="5148072"/>
+            <a:ext cx="4206240" cy="1097280"/>
+          </a:xfrm>
+          <a:prstGeom prst="rect">
+            <a:avLst/>
+          </a:prstGeom>
+          <a:noFill/>
+        </p:spPr>
+        <p:txBody>
+          <a:bodyPr wrap="square" lIns="0" rIns="0" tIns="0" bIns="0">
+            <a:spAutoFit/>
+          </a:bodyPr>
+          <a:lstStyle/>
+          <a:p>
+            <a:pPr>
+              <a:spcBef>
+                <a:spcPts val="0"/>
+              </a:spcBef>
+              <a:spcAft>
+                <a:spcPts val="300"/>
+              </a:spcAft>
+            </a:pPr>
+            <a:r>
+              <a:rPr sz="1350" b="1" i="0">
+                <a:solidFill>
+                  <a:srgbClr val="14171C"/>
+                </a:solidFill>
+                <a:latin typeface="Calibri"/>
+              </a:rPr>
+              <a:t>What this means for how we measure development.</a:t>
+            </a:r>
+          </a:p>
+          <a:p>
+            <a:pPr>
+              <a:lnSpc>
+                <a:spcPct val="125000"/>
+              </a:lnSpc>
+              <a:spcBef>
+                <a:spcPts val="0"/>
+              </a:spcBef>
+              <a:spcAft>
+                <a:spcPts val="0"/>
+              </a:spcAft>
+            </a:pPr>
+            <a:r>
+              <a:rPr sz="1100" b="0" i="0">
+                <a:solidFill>
+                  <a:srgbClr val="5A6068"/>
+                </a:solidFill>
+                <a:latin typeface="Calibri"/>
+              </a:rPr>
+              <a:t>A structural disconnect between how development is measured and what predicts lived experience, with implications for each domain and method.</a:t>
             </a:r>
           </a:p>
         </p:txBody>
@@ -6852,7 +7153,7 @@
                 </a:solidFill>
                 <a:latin typeface="Consolas"/>
               </a:rPr>
-              <a:t>IMPLICATION 2 · COVERAGE GAPS ARE MORE FUNDAMENTAL THAN CONSTRUCT CHOICE</a:t>
+              <a:t>THE DISCONNECT</a:t>
             </a:r>
           </a:p>
         </p:txBody>
@@ -6897,7 +7198,7 @@
                 </a:solidFill>
                 <a:latin typeface="Georgia"/>
               </a:rPr>
-              <a:t>Social trust: why you cannot fix a measurement by measuring better</a:t>
+              <a:t>These frameworks work for development. They do not work for wellbeing.</a:t>
             </a:r>
           </a:p>
         </p:txBody>
@@ -6942,7 +7243,7 @@
                 </a:solidFill>
                 <a:latin typeface="Calibri"/>
               </a:rPr>
-              <a:t>Social trust is the most tentative finding here. The ESS is Europe-only, across 36 countries, and relies on a single item. That bounds the claim: the pattern holds in Europe, with a wellbeing survey, on a self-report basis. It does not claim universality.</a:t>
+              <a:t>The HDI and SDG frameworks do not answer the question 'what makes people's lives better?' any more than a global income statistics database answers 'what makes a person happy?' They were designed to track development, measured at the aggregate level, with indicators chosen before the question of individual wellbeing was systematically tested. That is not a design failure; it is the intended scope.</a:t>
             </a:r>
           </a:p>
           <a:p>
@@ -6964,29 +7265,7 @@
                 </a:solidFill>
                 <a:latin typeface="Calibri"/>
               </a:rPr>
-              <a:t>But the reason it is tentative points to the deepest problem: trust is not collected at global scale in either framework. The SDG database has 13 series adjacent to trust, but they measure institutional confidence, not interpersonal trust, and they are intermittent (147 of 163 country-series have fewer than four years of data). This is not a construct-choice problem that better measurement can solve. It is a coverage gap that requires deciding to collect the data in the first place.</a:t>
-            </a:r>
-          </a:p>
-          <a:p>
-            <a:pPr>
-              <a:lnSpc>
-                <a:spcPct val="132000"/>
-              </a:lnSpc>
-              <a:spcBef>
-                <a:spcPts val="0"/>
-              </a:spcBef>
-              <a:spcAft>
-                <a:spcPts val="1100"/>
-              </a:spcAft>
-            </a:pPr>
-            <a:r>
-              <a:rPr sz="1400" b="0" i="0">
-                <a:solidFill>
-                  <a:srgbClr val="5A6068"/>
-                </a:solidFill>
-                <a:latin typeface="Calibri"/>
-              </a:rPr>
-              <a:t>For wellbeing-conscious development monitoring, this suggests either building interpersonal-trust measurement into the core frameworks, or acknowledging that other surveys (the ESS, Gallup World Poll, World Values Survey) may be more suitable for understanding what shapes lived experience.</a:t>
+              <a:t>But it means the gap is structural. Education's access indicators work; pooling them with constructs that do not does not fix wellbeing prediction — it just builds a worse measure. Choosing a variable for health that is closer to saturated than the outcome it predicts is a measurement choice, not an incurable problem. And when a domain is never collected, no amount of better construction on the others will reach it.</a:t>
             </a:r>
           </a:p>
         </p:txBody>
@@ -7028,7 +7307,7 @@
                 </a:solidFill>
                 <a:latin typeface="Consolas"/>
               </a:rPr>
-              <a:t>III</a:t>
+              <a:t>IV</a:t>
             </a:r>
           </a:p>
         </p:txBody>
@@ -7096,7 +7375,7 @@
                 </a:solidFill>
                 <a:latin typeface="Consolas"/>
               </a:rPr>
-              <a:t>CONCLUSION</a:t>
+              <a:t>IMPLICATION 1 · MEASUREMENT CHOICES CONSTRAIN WHAT FRAMEWORKS CAN SEE</a:t>
             </a:r>
           </a:p>
         </p:txBody>
@@ -7141,7 +7420,7 @@
                 </a:solidFill>
                 <a:latin typeface="Georgia"/>
               </a:rPr>
-              <a:t>A question rather than a prescription</a:t>
+              <a:t>Education and health: the case for measurement specificity</a:t>
             </a:r>
           </a:p>
         </p:txBody>
@@ -7186,7 +7465,7 @@
                 </a:solidFill>
                 <a:latin typeface="Calibri"/>
               </a:rPr>
-              <a:t>The evidence shows a consistent pattern: which domain looks most consequential for wellbeing depends on which framework measures it and what variable they chose. This is not about the domains; it is about the tools.</a:t>
+              <a:t>Education is significant everywhere it is measured as attainment, but nearly invisible in SDG4 because most indicators measure something else. Health is nearly invisible in the HDI because life expectancy has saturated. Neither domain has changed; the frameworks' construction choices have.</a:t>
             </a:r>
           </a:p>
           <a:p>
@@ -7208,29 +7487,7 @@
                 </a:solidFill>
                 <a:latin typeface="Calibri"/>
               </a:rPr>
-              <a:t>Whether development frameworks should be redesigned around wellbeing is outside the scope here. But if they were, this finding suggests the question to ask: should measurement choices be made with explicit reference to which variables still move and still matter for lived experience? Should coverage be built in for domains the frameworks discovered only by studying something else?</a:t>
-            </a:r>
-          </a:p>
-          <a:p>
-            <a:pPr>
-              <a:lnSpc>
-                <a:spcPct val="132000"/>
-              </a:lnSpc>
-              <a:spcBef>
-                <a:spcPts val="0"/>
-              </a:spcBef>
-              <a:spcAft>
-                <a:spcPts val="1100"/>
-              </a:spcAft>
-            </a:pPr>
-            <a:r>
-              <a:rPr sz="1400" b="0" i="0">
-                <a:solidFill>
-                  <a:srgbClr val="5A6068"/>
-                </a:solidFill>
-                <a:latin typeface="Calibri"/>
-              </a:rPr>
-              <a:t>The frameworks work well for their stated purpose. The question is whether wellbeing should become part of that purpose — and if it does, whether the measurement that comes from that intent should be different from the aggregate, development-first measurement in place today.</a:t>
+              <a:t>For education, this suggests development measurement should weigh access and completion more heavily than parity ratios in wellbeing contexts — not universally, but with explicit construction choices that account for what is known to matter. For health, it suggests that wellbeing-motivated measurement may need different variables at different development levels: life expectancy in lower-income settings, self-reported health or specific conditions in saturated ones.</a:t>
             </a:r>
           </a:p>
         </p:txBody>
@@ -7272,7 +7529,7 @@
                 </a:solidFill>
                 <a:latin typeface="Consolas"/>
               </a:rPr>
-              <a:t>III</a:t>
+              <a:t>IV</a:t>
             </a:r>
           </a:p>
         </p:txBody>
@@ -7291,7 +7548,7 @@
     <p:bg>
       <p:bgPr>
         <a:solidFill>
-          <a:srgbClr val="E8EBEF"/>
+          <a:srgbClr val="FCFCFB"/>
         </a:solidFill>
         <a:effectLst/>
       </p:bgPr>
@@ -7305,45 +7562,43 @@
       <p:grpSpPr/>
       <p:sp>
         <p:nvSpPr>
-          <p:cNvPr id="2" name="Rectangle 1"/>
-          <p:cNvSpPr/>
-          <p:nvPr/>
-        </p:nvSpPr>
-        <p:spPr>
-          <a:xfrm>
-            <a:off x="566928" y="2103120"/>
-            <a:ext cx="54864" cy="2377440"/>
-          </a:xfrm>
-          <a:prstGeom prst="rect">
-            <a:avLst/>
-          </a:prstGeom>
-          <a:solidFill>
-            <a:srgbClr val="17549E"/>
-          </a:solidFill>
-          <a:ln>
-            <a:noFill/>
-          </a:ln>
-          <a:effectLst/>
-        </p:spPr>
-        <p:style>
-          <a:lnRef idx="1">
-            <a:schemeClr val="accent1"/>
-          </a:lnRef>
-          <a:fillRef idx="3">
-            <a:schemeClr val="accent1"/>
-          </a:fillRef>
-          <a:effectRef idx="2">
-            <a:schemeClr val="accent1"/>
-          </a:effectRef>
-          <a:fontRef idx="minor">
-            <a:schemeClr val="lt1"/>
-          </a:fontRef>
-        </p:style>
-        <p:txBody>
-          <a:bodyPr rtlCol="0" anchor="ctr"/>
-          <a:lstStyle/>
-          <a:p>
-            <a:pPr algn="ctr"/>
+          <p:cNvPr id="2" name="TextBox 1"/>
+          <p:cNvSpPr txBox="1"/>
+          <p:nvPr/>
+        </p:nvSpPr>
+        <p:spPr>
+          <a:xfrm>
+            <a:off x="566928" y="502920"/>
+            <a:ext cx="8595360" cy="274320"/>
+          </a:xfrm>
+          <a:prstGeom prst="rect">
+            <a:avLst/>
+          </a:prstGeom>
+          <a:noFill/>
+        </p:spPr>
+        <p:txBody>
+          <a:bodyPr wrap="square" lIns="0" rIns="0" tIns="0" bIns="0">
+            <a:spAutoFit/>
+          </a:bodyPr>
+          <a:lstStyle/>
+          <a:p>
+            <a:pPr>
+              <a:spcBef>
+                <a:spcPts val="0"/>
+              </a:spcBef>
+              <a:spcAft>
+                <a:spcPts val="0"/>
+              </a:spcAft>
+            </a:pPr>
+            <a:r>
+              <a:rPr sz="1000" b="0" i="0">
+                <a:solidFill>
+                  <a:srgbClr val="A63A30"/>
+                </a:solidFill>
+                <a:latin typeface="Consolas"/>
+              </a:rPr>
+              <a:t>IMPLICATION 2 · COVERAGE GAPS ARE MORE FUNDAMENTAL THAN CONSTRUCT CHOICE</a:t>
+            </a:r>
           </a:p>
         </p:txBody>
       </p:sp>
@@ -7355,21 +7610,155 @@
         </p:nvSpPr>
         <p:spPr>
           <a:xfrm>
-            <a:off x="914400" y="1600200"/>
-            <a:ext cx="8686800" cy="274320"/>
-          </a:xfrm>
-          <a:prstGeom prst="rect">
-            <a:avLst/>
-          </a:prstGeom>
-          <a:noFill/>
-        </p:spPr>
-        <p:txBody>
-          <a:bodyPr wrap="square" lIns="0" rIns="0" tIns="0" bIns="0">
-            <a:spAutoFit/>
-          </a:bodyPr>
-          <a:lstStyle/>
-          <a:p>
-            <a:pPr>
+            <a:off x="566928" y="914400"/>
+            <a:ext cx="8595360" cy="1371600"/>
+          </a:xfrm>
+          <a:prstGeom prst="rect">
+            <a:avLst/>
+          </a:prstGeom>
+          <a:noFill/>
+        </p:spPr>
+        <p:txBody>
+          <a:bodyPr wrap="square" lIns="0" rIns="0" tIns="0" bIns="0">
+            <a:spAutoFit/>
+          </a:bodyPr>
+          <a:lstStyle/>
+          <a:p>
+            <a:pPr>
+              <a:lnSpc>
+                <a:spcPct val="108000"/>
+              </a:lnSpc>
+              <a:spcBef>
+                <a:spcPts val="0"/>
+              </a:spcBef>
+              <a:spcAft>
+                <a:spcPts val="0"/>
+              </a:spcAft>
+            </a:pPr>
+            <a:r>
+              <a:rPr sz="2700" b="0" i="0">
+                <a:solidFill>
+                  <a:srgbClr val="14171C"/>
+                </a:solidFill>
+                <a:latin typeface="Georgia"/>
+              </a:rPr>
+              <a:t>Social trust: why you cannot fix a measurement by measuring better</a:t>
+            </a:r>
+          </a:p>
+        </p:txBody>
+      </p:sp>
+      <p:sp>
+        <p:nvSpPr>
+          <p:cNvPr id="4" name="TextBox 3"/>
+          <p:cNvSpPr txBox="1"/>
+          <p:nvPr/>
+        </p:nvSpPr>
+        <p:spPr>
+          <a:xfrm>
+            <a:off x="566928" y="2286000"/>
+            <a:ext cx="8595360" cy="3840480"/>
+          </a:xfrm>
+          <a:prstGeom prst="rect">
+            <a:avLst/>
+          </a:prstGeom>
+          <a:noFill/>
+        </p:spPr>
+        <p:txBody>
+          <a:bodyPr wrap="square" lIns="0" rIns="0" tIns="0" bIns="0">
+            <a:spAutoFit/>
+          </a:bodyPr>
+          <a:lstStyle/>
+          <a:p>
+            <a:pPr>
+              <a:lnSpc>
+                <a:spcPct val="132000"/>
+              </a:lnSpc>
+              <a:spcBef>
+                <a:spcPts val="0"/>
+              </a:spcBef>
+              <a:spcAft>
+                <a:spcPts val="1100"/>
+              </a:spcAft>
+            </a:pPr>
+            <a:r>
+              <a:rPr sz="1400" b="0" i="0">
+                <a:solidFill>
+                  <a:srgbClr val="5A6068"/>
+                </a:solidFill>
+                <a:latin typeface="Calibri"/>
+              </a:rPr>
+              <a:t>Social trust is the most tentative finding here. The ESS is Europe-only, across 36 countries, and relies on a single item. That bounds the claim: the pattern holds in Europe, with a wellbeing survey, on a self-report basis. It does not claim universality.</a:t>
+            </a:r>
+          </a:p>
+          <a:p>
+            <a:pPr>
+              <a:lnSpc>
+                <a:spcPct val="132000"/>
+              </a:lnSpc>
+              <a:spcBef>
+                <a:spcPts val="0"/>
+              </a:spcBef>
+              <a:spcAft>
+                <a:spcPts val="1100"/>
+              </a:spcAft>
+            </a:pPr>
+            <a:r>
+              <a:rPr sz="1400" b="0" i="0">
+                <a:solidFill>
+                  <a:srgbClr val="5A6068"/>
+                </a:solidFill>
+                <a:latin typeface="Calibri"/>
+              </a:rPr>
+              <a:t>But the reason it is tentative points to the deepest problem: trust is not collected at global scale in either framework. The SDG database has 13 series adjacent to trust, but they measure institutional confidence, not interpersonal trust, and they are intermittent (147 of 163 country-series have fewer than four years of data). This is not a construct-choice problem that better measurement can solve. It is a coverage gap that requires deciding to collect the data in the first place.</a:t>
+            </a:r>
+          </a:p>
+          <a:p>
+            <a:pPr>
+              <a:lnSpc>
+                <a:spcPct val="132000"/>
+              </a:lnSpc>
+              <a:spcBef>
+                <a:spcPts val="0"/>
+              </a:spcBef>
+              <a:spcAft>
+                <a:spcPts val="1100"/>
+              </a:spcAft>
+            </a:pPr>
+            <a:r>
+              <a:rPr sz="1400" b="0" i="0">
+                <a:solidFill>
+                  <a:srgbClr val="5A6068"/>
+                </a:solidFill>
+                <a:latin typeface="Calibri"/>
+              </a:rPr>
+              <a:t>For wellbeing-conscious development monitoring, this suggests either building interpersonal-trust measurement into the core frameworks, or acknowledging that other surveys (the ESS, Gallup World Poll, World Values Survey) may be more suitable for understanding what shapes lived experience.</a:t>
+            </a:r>
+          </a:p>
+        </p:txBody>
+      </p:sp>
+      <p:sp>
+        <p:nvSpPr>
+          <p:cNvPr id="5" name="TextBox 4"/>
+          <p:cNvSpPr txBox="1"/>
+          <p:nvPr/>
+        </p:nvSpPr>
+        <p:spPr>
+          <a:xfrm>
+            <a:off x="11338560" y="6263640"/>
+            <a:ext cx="548640" cy="274320"/>
+          </a:xfrm>
+          <a:prstGeom prst="rect">
+            <a:avLst/>
+          </a:prstGeom>
+          <a:noFill/>
+        </p:spPr>
+        <p:txBody>
+          <a:bodyPr wrap="square" lIns="0" rIns="0" tIns="0" bIns="0">
+            <a:spAutoFit/>
+          </a:bodyPr>
+          <a:lstStyle/>
+          <a:p>
+            <a:pPr algn="r">
               <a:spcBef>
                 <a:spcPts val="0"/>
               </a:spcBef>
@@ -7380,56 +7769,11 @@
             <a:r>
               <a:rPr sz="1100" b="0" i="0">
                 <a:solidFill>
-                  <a:srgbClr val="17549E"/>
+                  <a:srgbClr val="868D96"/>
                 </a:solidFill>
                 <a:latin typeface="Consolas"/>
               </a:rPr>
-              <a:t>WHERE ACT III LEAVES US</a:t>
-            </a:r>
-          </a:p>
-        </p:txBody>
-      </p:sp>
-      <p:sp>
-        <p:nvSpPr>
-          <p:cNvPr id="4" name="TextBox 3"/>
-          <p:cNvSpPr txBox="1"/>
-          <p:nvPr/>
-        </p:nvSpPr>
-        <p:spPr>
-          <a:xfrm>
-            <a:off x="914400" y="2148840"/>
-            <a:ext cx="9509760" cy="2926080"/>
-          </a:xfrm>
-          <a:prstGeom prst="rect">
-            <a:avLst/>
-          </a:prstGeom>
-          <a:noFill/>
-        </p:spPr>
-        <p:txBody>
-          <a:bodyPr wrap="square" lIns="0" rIns="0" tIns="0" bIns="0">
-            <a:spAutoFit/>
-          </a:bodyPr>
-          <a:lstStyle/>
-          <a:p>
-            <a:pPr>
-              <a:lnSpc>
-                <a:spcPct val="135000"/>
-              </a:lnSpc>
-              <a:spcBef>
-                <a:spcPts val="0"/>
-              </a:spcBef>
-              <a:spcAft>
-                <a:spcPts val="0"/>
-              </a:spcAft>
-            </a:pPr>
-            <a:r>
-              <a:rPr sz="2100" b="0" i="0">
-                <a:solidFill>
-                  <a:srgbClr val="14171C"/>
-                </a:solidFill>
-                <a:latin typeface="Georgia"/>
-              </a:rPr>
-              <a:t>Whether development measurement should be redesigned with wellbeing in mind is beyond this scope. But if it is, this evidence suggests the measurement should be different: more attentive to which variables still move, which constructs predict outcomes, and which domains are collected at all.</a:t>
+              <a:t>IV</a:t>
             </a:r>
           </a:p>
         </p:txBody>
@@ -7469,68 +7813,251 @@
         <p:spPr>
           <a:xfrm>
             <a:off x="566928" y="502920"/>
-            <a:ext cx="8229600" cy="822960"/>
-          </a:xfrm>
-          <a:prstGeom prst="rect">
-            <a:avLst/>
-          </a:prstGeom>
-          <a:noFill/>
-        </p:spPr>
-        <p:txBody>
-          <a:bodyPr wrap="square" lIns="0" rIns="0" tIns="0" bIns="0">
-            <a:spAutoFit/>
-          </a:bodyPr>
-          <a:lstStyle/>
-          <a:p>
-            <a:pPr>
-              <a:spcBef>
-                <a:spcPts val="0"/>
-              </a:spcBef>
-              <a:spcAft>
-                <a:spcPts val="600"/>
-              </a:spcAft>
-            </a:pPr>
-            <a:r>
-              <a:rPr sz="3200" b="0" i="0">
+            <a:ext cx="8595360" cy="274320"/>
+          </a:xfrm>
+          <a:prstGeom prst="rect">
+            <a:avLst/>
+          </a:prstGeom>
+          <a:noFill/>
+        </p:spPr>
+        <p:txBody>
+          <a:bodyPr wrap="square" lIns="0" rIns="0" tIns="0" bIns="0">
+            <a:spAutoFit/>
+          </a:bodyPr>
+          <a:lstStyle/>
+          <a:p>
+            <a:pPr>
+              <a:spcBef>
+                <a:spcPts val="0"/>
+              </a:spcBef>
+              <a:spcAft>
+                <a:spcPts val="0"/>
+              </a:spcAft>
+            </a:pPr>
+            <a:r>
+              <a:rPr sz="1000" b="0" i="0">
+                <a:solidFill>
+                  <a:srgbClr val="A63A30"/>
+                </a:solidFill>
+                <a:latin typeface="Consolas"/>
+              </a:rPr>
+              <a:t>CONCLUSION</a:t>
+            </a:r>
+          </a:p>
+        </p:txBody>
+      </p:sp>
+      <p:sp>
+        <p:nvSpPr>
+          <p:cNvPr id="3" name="TextBox 2"/>
+          <p:cNvSpPr txBox="1"/>
+          <p:nvPr/>
+        </p:nvSpPr>
+        <p:spPr>
+          <a:xfrm>
+            <a:off x="566928" y="914400"/>
+            <a:ext cx="8595360" cy="1371600"/>
+          </a:xfrm>
+          <a:prstGeom prst="rect">
+            <a:avLst/>
+          </a:prstGeom>
+          <a:noFill/>
+        </p:spPr>
+        <p:txBody>
+          <a:bodyPr wrap="square" lIns="0" rIns="0" tIns="0" bIns="0">
+            <a:spAutoFit/>
+          </a:bodyPr>
+          <a:lstStyle/>
+          <a:p>
+            <a:pPr>
+              <a:lnSpc>
+                <a:spcPct val="108000"/>
+              </a:lnSpc>
+              <a:spcBef>
+                <a:spcPts val="0"/>
+              </a:spcBef>
+              <a:spcAft>
+                <a:spcPts val="0"/>
+              </a:spcAft>
+            </a:pPr>
+            <a:r>
+              <a:rPr sz="2700" b="0" i="0">
                 <a:solidFill>
                   <a:srgbClr val="14171C"/>
                 </a:solidFill>
                 <a:latin typeface="Georgia"/>
               </a:rPr>
-              <a:t>Decisions for the team</a:t>
-            </a:r>
-          </a:p>
-          <a:p>
-            <a:pPr>
-              <a:spcBef>
-                <a:spcPts val="0"/>
-              </a:spcBef>
-              <a:spcAft>
-                <a:spcPts val="0"/>
-              </a:spcAft>
-            </a:pPr>
-            <a:r>
-              <a:rPr sz="1300" b="0" i="0">
+              <a:t>A question rather than a prescription</a:t>
+            </a:r>
+          </a:p>
+        </p:txBody>
+      </p:sp>
+      <p:sp>
+        <p:nvSpPr>
+          <p:cNvPr id="4" name="TextBox 3"/>
+          <p:cNvSpPr txBox="1"/>
+          <p:nvPr/>
+        </p:nvSpPr>
+        <p:spPr>
+          <a:xfrm>
+            <a:off x="566928" y="2286000"/>
+            <a:ext cx="8595360" cy="3840480"/>
+          </a:xfrm>
+          <a:prstGeom prst="rect">
+            <a:avLst/>
+          </a:prstGeom>
+          <a:noFill/>
+        </p:spPr>
+        <p:txBody>
+          <a:bodyPr wrap="square" lIns="0" rIns="0" tIns="0" bIns="0">
+            <a:spAutoFit/>
+          </a:bodyPr>
+          <a:lstStyle/>
+          <a:p>
+            <a:pPr>
+              <a:lnSpc>
+                <a:spcPct val="132000"/>
+              </a:lnSpc>
+              <a:spcBef>
+                <a:spcPts val="0"/>
+              </a:spcBef>
+              <a:spcAft>
+                <a:spcPts val="1100"/>
+              </a:spcAft>
+            </a:pPr>
+            <a:r>
+              <a:rPr sz="1400" b="0" i="0">
                 <a:solidFill>
                   <a:srgbClr val="5A6068"/>
                 </a:solidFill>
                 <a:latin typeface="Calibri"/>
               </a:rPr>
-              <a:t>4 things the acts do not settle, in the order they block drafting.</a:t>
-            </a:r>
-          </a:p>
-        </p:txBody>
-      </p:sp>
-      <p:sp>
-        <p:nvSpPr>
-          <p:cNvPr id="3" name="Rectangle 2"/>
+              <a:t>The evidence shows a consistent pattern: which domain looks most consequential for wellbeing depends on which framework measures it and what variable they chose. This is not about the domains; it is about the tools.</a:t>
+            </a:r>
+          </a:p>
+          <a:p>
+            <a:pPr>
+              <a:lnSpc>
+                <a:spcPct val="132000"/>
+              </a:lnSpc>
+              <a:spcBef>
+                <a:spcPts val="0"/>
+              </a:spcBef>
+              <a:spcAft>
+                <a:spcPts val="1100"/>
+              </a:spcAft>
+            </a:pPr>
+            <a:r>
+              <a:rPr sz="1400" b="0" i="0">
+                <a:solidFill>
+                  <a:srgbClr val="5A6068"/>
+                </a:solidFill>
+                <a:latin typeface="Calibri"/>
+              </a:rPr>
+              <a:t>Whether development frameworks should be redesigned around wellbeing is outside the scope here. But if they were, this finding suggests the question to ask: should measurement choices be made with explicit reference to which variables still move and still matter for lived experience? Should coverage be built in for domains the frameworks discovered only by studying something else?</a:t>
+            </a:r>
+          </a:p>
+          <a:p>
+            <a:pPr>
+              <a:lnSpc>
+                <a:spcPct val="132000"/>
+              </a:lnSpc>
+              <a:spcBef>
+                <a:spcPts val="0"/>
+              </a:spcBef>
+              <a:spcAft>
+                <a:spcPts val="1100"/>
+              </a:spcAft>
+            </a:pPr>
+            <a:r>
+              <a:rPr sz="1400" b="0" i="0">
+                <a:solidFill>
+                  <a:srgbClr val="5A6068"/>
+                </a:solidFill>
+                <a:latin typeface="Calibri"/>
+              </a:rPr>
+              <a:t>The frameworks work well for their stated purpose. The question is whether wellbeing should become part of that purpose — and if it does, whether the measurement that comes from that intent should be different from the aggregate, development-first measurement in place today.</a:t>
+            </a:r>
+          </a:p>
+        </p:txBody>
+      </p:sp>
+      <p:sp>
+        <p:nvSpPr>
+          <p:cNvPr id="5" name="TextBox 4"/>
+          <p:cNvSpPr txBox="1"/>
+          <p:nvPr/>
+        </p:nvSpPr>
+        <p:spPr>
+          <a:xfrm>
+            <a:off x="11338560" y="6263640"/>
+            <a:ext cx="548640" cy="274320"/>
+          </a:xfrm>
+          <a:prstGeom prst="rect">
+            <a:avLst/>
+          </a:prstGeom>
+          <a:noFill/>
+        </p:spPr>
+        <p:txBody>
+          <a:bodyPr wrap="square" lIns="0" rIns="0" tIns="0" bIns="0">
+            <a:spAutoFit/>
+          </a:bodyPr>
+          <a:lstStyle/>
+          <a:p>
+            <a:pPr algn="r">
+              <a:spcBef>
+                <a:spcPts val="0"/>
+              </a:spcBef>
+              <a:spcAft>
+                <a:spcPts val="0"/>
+              </a:spcAft>
+            </a:pPr>
+            <a:r>
+              <a:rPr sz="1100" b="0" i="0">
+                <a:solidFill>
+                  <a:srgbClr val="868D96"/>
+                </a:solidFill>
+                <a:latin typeface="Consolas"/>
+              </a:rPr>
+              <a:t>IV</a:t>
+            </a:r>
+          </a:p>
+        </p:txBody>
+      </p:sp>
+    </p:spTree>
+  </p:cSld>
+  <p:clrMapOvr>
+    <a:masterClrMapping/>
+  </p:clrMapOvr>
+</p:sld>
+</file>
+
+<file path=ppt/slides/slide24.xml><?xml version="1.0" encoding="utf-8"?>
+<p:sld xmlns:a="http://schemas.openxmlformats.org/drawingml/2006/main" xmlns:p="http://schemas.openxmlformats.org/presentationml/2006/main" xmlns:r="http://schemas.openxmlformats.org/officeDocument/2006/relationships">
+  <p:cSld>
+    <p:bg>
+      <p:bgPr>
+        <a:solidFill>
+          <a:srgbClr val="E8EBEF"/>
+        </a:solidFill>
+        <a:effectLst/>
+      </p:bgPr>
+    </p:bg>
+    <p:spTree>
+      <p:nvGrpSpPr>
+        <p:cNvPr id="1" name=""/>
+        <p:cNvGrpSpPr/>
+        <p:nvPr/>
+      </p:nvGrpSpPr>
+      <p:grpSpPr/>
+      <p:sp>
+        <p:nvSpPr>
+          <p:cNvPr id="2" name="Rectangle 1"/>
           <p:cNvSpPr/>
           <p:nvPr/>
         </p:nvSpPr>
         <p:spPr>
           <a:xfrm>
-            <a:off x="566928" y="1828800"/>
-            <a:ext cx="3472586" cy="25400"/>
+            <a:off x="566928" y="2103120"/>
+            <a:ext cx="54864" cy="2377440"/>
           </a:xfrm>
           <a:prstGeom prst="rect">
             <a:avLst/>
@@ -7567,48 +8094,71 @@
       </p:sp>
       <p:sp>
         <p:nvSpPr>
+          <p:cNvPr id="3" name="TextBox 2"/>
+          <p:cNvSpPr txBox="1"/>
+          <p:nvPr/>
+        </p:nvSpPr>
+        <p:spPr>
+          <a:xfrm>
+            <a:off x="914400" y="1600200"/>
+            <a:ext cx="8686800" cy="274320"/>
+          </a:xfrm>
+          <a:prstGeom prst="rect">
+            <a:avLst/>
+          </a:prstGeom>
+          <a:noFill/>
+        </p:spPr>
+        <p:txBody>
+          <a:bodyPr wrap="square" lIns="0" rIns="0" tIns="0" bIns="0">
+            <a:spAutoFit/>
+          </a:bodyPr>
+          <a:lstStyle/>
+          <a:p>
+            <a:pPr>
+              <a:spcBef>
+                <a:spcPts val="0"/>
+              </a:spcBef>
+              <a:spcAft>
+                <a:spcPts val="0"/>
+              </a:spcAft>
+            </a:pPr>
+            <a:r>
+              <a:rPr sz="1100" b="0" i="0">
+                <a:solidFill>
+                  <a:srgbClr val="17549E"/>
+                </a:solidFill>
+                <a:latin typeface="Consolas"/>
+              </a:rPr>
+              <a:t>WHERE ACT IV LEAVES US</a:t>
+            </a:r>
+          </a:p>
+        </p:txBody>
+      </p:sp>
+      <p:sp>
+        <p:nvSpPr>
           <p:cNvPr id="4" name="TextBox 3"/>
           <p:cNvSpPr txBox="1"/>
           <p:nvPr/>
         </p:nvSpPr>
         <p:spPr>
           <a:xfrm>
-            <a:off x="566928" y="2011680"/>
-            <a:ext cx="3472586" cy="1828800"/>
-          </a:xfrm>
-          <a:prstGeom prst="rect">
-            <a:avLst/>
-          </a:prstGeom>
-          <a:noFill/>
-        </p:spPr>
-        <p:txBody>
-          <a:bodyPr wrap="square" lIns="0" rIns="0" tIns="0" bIns="0">
-            <a:spAutoFit/>
-          </a:bodyPr>
-          <a:lstStyle/>
-          <a:p>
-            <a:pPr>
-              <a:spcBef>
-                <a:spcPts val="0"/>
-              </a:spcBef>
-              <a:spcAft>
-                <a:spcPts val="700"/>
-              </a:spcAft>
-            </a:pPr>
-            <a:r>
-              <a:rPr sz="1050" b="0" i="0">
-                <a:solidFill>
-                  <a:srgbClr val="17549E"/>
-                </a:solidFill>
-                <a:latin typeface="Consolas"/>
-              </a:rPr>
-              <a:t>FIGURE COUNT</a:t>
-            </a:r>
-          </a:p>
+            <a:off x="914400" y="2148840"/>
+            <a:ext cx="9509760" cy="2926080"/>
+          </a:xfrm>
+          <a:prstGeom prst="rect">
+            <a:avLst/>
+          </a:prstGeom>
+          <a:noFill/>
+        </p:spPr>
+        <p:txBody>
+          <a:bodyPr wrap="square" lIns="0" rIns="0" tIns="0" bIns="0">
+            <a:spAutoFit/>
+          </a:bodyPr>
+          <a:lstStyle/>
           <a:p>
             <a:pPr>
               <a:lnSpc>
-                <a:spcPct val="130000"/>
+                <a:spcPct val="135000"/>
               </a:lnSpc>
               <a:spcBef>
                 <a:spcPts val="0"/>
@@ -7618,26 +8168,113 @@
               </a:spcAft>
             </a:pPr>
             <a:r>
-              <a:rPr sz="1100" b="0" i="0">
+              <a:rPr sz="2100" b="0" i="0">
+                <a:solidFill>
+                  <a:srgbClr val="14171C"/>
+                </a:solidFill>
+                <a:latin typeface="Georgia"/>
+              </a:rPr>
+              <a:t>Whether development measurement should be redesigned with wellbeing in mind is beyond this scope. But if it is, this evidence suggests the measurement should be different: more attentive to which variables still move, which constructs predict outcomes, and which domains are collected at all.</a:t>
+            </a:r>
+          </a:p>
+        </p:txBody>
+      </p:sp>
+    </p:spTree>
+  </p:cSld>
+  <p:clrMapOvr>
+    <a:masterClrMapping/>
+  </p:clrMapOvr>
+</p:sld>
+</file>
+
+<file path=ppt/slides/slide25.xml><?xml version="1.0" encoding="utf-8"?>
+<p:sld xmlns:a="http://schemas.openxmlformats.org/drawingml/2006/main" xmlns:p="http://schemas.openxmlformats.org/presentationml/2006/main" xmlns:r="http://schemas.openxmlformats.org/officeDocument/2006/relationships">
+  <p:cSld>
+    <p:bg>
+      <p:bgPr>
+        <a:solidFill>
+          <a:srgbClr val="FCFCFB"/>
+        </a:solidFill>
+        <a:effectLst/>
+      </p:bgPr>
+    </p:bg>
+    <p:spTree>
+      <p:nvGrpSpPr>
+        <p:cNvPr id="1" name=""/>
+        <p:cNvGrpSpPr/>
+        <p:nvPr/>
+      </p:nvGrpSpPr>
+      <p:grpSpPr/>
+      <p:sp>
+        <p:nvSpPr>
+          <p:cNvPr id="2" name="TextBox 1"/>
+          <p:cNvSpPr txBox="1"/>
+          <p:nvPr/>
+        </p:nvSpPr>
+        <p:spPr>
+          <a:xfrm>
+            <a:off x="566928" y="502920"/>
+            <a:ext cx="8229600" cy="822960"/>
+          </a:xfrm>
+          <a:prstGeom prst="rect">
+            <a:avLst/>
+          </a:prstGeom>
+          <a:noFill/>
+        </p:spPr>
+        <p:txBody>
+          <a:bodyPr wrap="square" lIns="0" rIns="0" tIns="0" bIns="0">
+            <a:spAutoFit/>
+          </a:bodyPr>
+          <a:lstStyle/>
+          <a:p>
+            <a:pPr>
+              <a:spcBef>
+                <a:spcPts val="0"/>
+              </a:spcBef>
+              <a:spcAft>
+                <a:spcPts val="600"/>
+              </a:spcAft>
+            </a:pPr>
+            <a:r>
+              <a:rPr sz="3200" b="0" i="0">
+                <a:solidFill>
+                  <a:srgbClr val="14171C"/>
+                </a:solidFill>
+                <a:latin typeface="Georgia"/>
+              </a:rPr>
+              <a:t>Decisions for the team</a:t>
+            </a:r>
+          </a:p>
+          <a:p>
+            <a:pPr>
+              <a:spcBef>
+                <a:spcPts val="0"/>
+              </a:spcBef>
+              <a:spcAft>
+                <a:spcPts val="0"/>
+              </a:spcAft>
+            </a:pPr>
+            <a:r>
+              <a:rPr sz="1300" b="0" i="0">
                 <a:solidFill>
                   <a:srgbClr val="5A6068"/>
                 </a:solidFill>
                 <a:latin typeface="Calibri"/>
               </a:rPr>
-              <a:t>Commentaries allow one or two. Proposed: three-panel composite as Figure 1 and domain scorecard as Figure 2. Everything else supplementary.</a:t>
-            </a:r>
-          </a:p>
-        </p:txBody>
-      </p:sp>
-      <p:sp>
-        <p:nvSpPr>
-          <p:cNvPr id="5" name="Rectangle 4"/>
+              <a:t>4 things the acts do not settle, in the order they block drafting.</a:t>
+            </a:r>
+          </a:p>
+        </p:txBody>
+      </p:sp>
+      <p:sp>
+        <p:nvSpPr>
+          <p:cNvPr id="3" name="Rectangle 2"/>
           <p:cNvSpPr/>
           <p:nvPr/>
         </p:nvSpPr>
         <p:spPr>
           <a:xfrm>
-            <a:off x="4359554" y="1828800"/>
+            <a:off x="566928" y="1828800"/>
             <a:ext cx="3472586" cy="25400"/>
           </a:xfrm>
           <a:prstGeom prst="rect">
@@ -7675,13 +8312,13 @@
       </p:sp>
       <p:sp>
         <p:nvSpPr>
-          <p:cNvPr id="6" name="TextBox 5"/>
-          <p:cNvSpPr txBox="1"/>
-          <p:nvPr/>
-        </p:nvSpPr>
-        <p:spPr>
-          <a:xfrm>
-            <a:off x="4359554" y="2011680"/>
+          <p:cNvPr id="4" name="TextBox 3"/>
+          <p:cNvSpPr txBox="1"/>
+          <p:nvPr/>
+        </p:nvSpPr>
+        <p:spPr>
+          <a:xfrm>
+            <a:off x="566928" y="2011680"/>
             <a:ext cx="3472586" cy="1828800"/>
           </a:xfrm>
           <a:prstGeom prst="rect">
@@ -7710,7 +8347,7 @@
                 </a:solidFill>
                 <a:latin typeface="Consolas"/>
               </a:rPr>
-              <a:t>SCOPE OF TRUST FINDINGS</a:t>
+              <a:t>FIGURE COUNT</a:t>
             </a:r>
           </a:p>
           <a:p>
@@ -7732,20 +8369,20 @@
                 </a:solidFill>
                 <a:latin typeface="Calibri"/>
               </a:rPr>
-              <a:t>Trust findings rest on ESS (36 European countries, individual-level). The design requires ≥4 years per country-series; only 16 of 163 SDG trust-adjacent series have that coverage, and 1 is significant. Tested cross-sectionally, 9 of 13 series are usable and 4 are significant, but all fall below HDI components on the same countries. The claim is Europe-only and rests on one instrument in each framework; it is the most tentative of the three.</a:t>
-            </a:r>
-          </a:p>
-        </p:txBody>
-      </p:sp>
-      <p:sp>
-        <p:nvSpPr>
-          <p:cNvPr id="7" name="Rectangle 6"/>
+              <a:t>Commentaries allow one or two. Proposed: three-panel composite as Figure 1 and domain scorecard as Figure 2. Everything else supplementary.</a:t>
+            </a:r>
+          </a:p>
+        </p:txBody>
+      </p:sp>
+      <p:sp>
+        <p:nvSpPr>
+          <p:cNvPr id="5" name="Rectangle 4"/>
           <p:cNvSpPr/>
           <p:nvPr/>
         </p:nvSpPr>
         <p:spPr>
           <a:xfrm>
-            <a:off x="8152180" y="1828800"/>
+            <a:off x="4359554" y="1828800"/>
             <a:ext cx="3472586" cy="25400"/>
           </a:xfrm>
           <a:prstGeom prst="rect">
@@ -7783,13 +8420,13 @@
       </p:sp>
       <p:sp>
         <p:nvSpPr>
-          <p:cNvPr id="8" name="TextBox 7"/>
-          <p:cNvSpPr txBox="1"/>
-          <p:nvPr/>
-        </p:nvSpPr>
-        <p:spPr>
-          <a:xfrm>
-            <a:off x="8152180" y="2011680"/>
+          <p:cNvPr id="6" name="TextBox 5"/>
+          <p:cNvSpPr txBox="1"/>
+          <p:nvPr/>
+        </p:nvSpPr>
+        <p:spPr>
+          <a:xfrm>
+            <a:off x="4359554" y="2011680"/>
             <a:ext cx="3472586" cy="1828800"/>
           </a:xfrm>
           <a:prstGeom prst="rect">
@@ -7818,7 +8455,7 @@
                 </a:solidFill>
                 <a:latin typeface="Consolas"/>
               </a:rPr>
-              <a:t>INSTITUTIONAL CONFIDENCE VS. INTERPERSONAL TRUST</a:t>
+              <a:t>SCOPE OF TRUST FINDINGS</a:t>
             </a:r>
           </a:p>
           <a:p>
@@ -7840,20 +8477,20 @@
                 </a:solidFill>
                 <a:latin typeface="Calibri"/>
               </a:rPr>
-              <a:t>The SDG's Goal 16 trust series measure satisfaction with public services, perceived bribery, and perceived inclusiveness in decision-making — institutional confidence, not interpersonal trust ('most people can be trusted'). These are conceptually distinct. The commentarymust be explicit that SDG16 is not a direct analogue for the ESS trust item.</a:t>
-            </a:r>
-          </a:p>
-        </p:txBody>
-      </p:sp>
-      <p:sp>
-        <p:nvSpPr>
-          <p:cNvPr id="9" name="Rectangle 8"/>
+              <a:t>Trust findings rest on ESS (36 European countries, individual-level). The design requires ≥4 years per country-series; only 16 of 163 SDG trust-adjacent series have that coverage, and 1 is significant. Tested cross-sectionally, 9 of 13 series are usable and 4 are significant, but all fall below HDI components on the same countries. The claim is Europe-only and rests on one instrument in each framework; it is the most tentative of the three.</a:t>
+            </a:r>
+          </a:p>
+        </p:txBody>
+      </p:sp>
+      <p:sp>
+        <p:nvSpPr>
+          <p:cNvPr id="7" name="Rectangle 6"/>
           <p:cNvSpPr/>
           <p:nvPr/>
         </p:nvSpPr>
         <p:spPr>
           <a:xfrm>
-            <a:off x="566928" y="4069080"/>
+            <a:off x="8152180" y="1828800"/>
             <a:ext cx="3472586" cy="25400"/>
           </a:xfrm>
           <a:prstGeom prst="rect">
@@ -7891,6 +8528,114 @@
       </p:sp>
       <p:sp>
         <p:nvSpPr>
+          <p:cNvPr id="8" name="TextBox 7"/>
+          <p:cNvSpPr txBox="1"/>
+          <p:nvPr/>
+        </p:nvSpPr>
+        <p:spPr>
+          <a:xfrm>
+            <a:off x="8152180" y="2011680"/>
+            <a:ext cx="3472586" cy="1828800"/>
+          </a:xfrm>
+          <a:prstGeom prst="rect">
+            <a:avLst/>
+          </a:prstGeom>
+          <a:noFill/>
+        </p:spPr>
+        <p:txBody>
+          <a:bodyPr wrap="square" lIns="0" rIns="0" tIns="0" bIns="0">
+            <a:spAutoFit/>
+          </a:bodyPr>
+          <a:lstStyle/>
+          <a:p>
+            <a:pPr>
+              <a:spcBef>
+                <a:spcPts val="0"/>
+              </a:spcBef>
+              <a:spcAft>
+                <a:spcPts val="700"/>
+              </a:spcAft>
+            </a:pPr>
+            <a:r>
+              <a:rPr sz="1050" b="0" i="0">
+                <a:solidFill>
+                  <a:srgbClr val="17549E"/>
+                </a:solidFill>
+                <a:latin typeface="Consolas"/>
+              </a:rPr>
+              <a:t>INSTITUTIONAL CONFIDENCE VS. INTERPERSONAL TRUST</a:t>
+            </a:r>
+          </a:p>
+          <a:p>
+            <a:pPr>
+              <a:lnSpc>
+                <a:spcPct val="130000"/>
+              </a:lnSpc>
+              <a:spcBef>
+                <a:spcPts val="0"/>
+              </a:spcBef>
+              <a:spcAft>
+                <a:spcPts val="0"/>
+              </a:spcAft>
+            </a:pPr>
+            <a:r>
+              <a:rPr sz="1100" b="0" i="0">
+                <a:solidFill>
+                  <a:srgbClr val="5A6068"/>
+                </a:solidFill>
+                <a:latin typeface="Calibri"/>
+              </a:rPr>
+              <a:t>The SDG's Goal 16 trust series measure satisfaction with public services, perceived bribery, and perceived inclusiveness in decision-making — institutional confidence, not interpersonal trust ('most people can be trusted'). These are conceptually distinct. The commentarymust be explicit that SDG16 is not a direct analogue for the ESS trust item.</a:t>
+            </a:r>
+          </a:p>
+        </p:txBody>
+      </p:sp>
+      <p:sp>
+        <p:nvSpPr>
+          <p:cNvPr id="9" name="Rectangle 8"/>
+          <p:cNvSpPr/>
+          <p:nvPr/>
+        </p:nvSpPr>
+        <p:spPr>
+          <a:xfrm>
+            <a:off x="566928" y="4069080"/>
+            <a:ext cx="3472586" cy="25400"/>
+          </a:xfrm>
+          <a:prstGeom prst="rect">
+            <a:avLst/>
+          </a:prstGeom>
+          <a:solidFill>
+            <a:srgbClr val="17549E"/>
+          </a:solidFill>
+          <a:ln>
+            <a:noFill/>
+          </a:ln>
+          <a:effectLst/>
+        </p:spPr>
+        <p:style>
+          <a:lnRef idx="1">
+            <a:schemeClr val="accent1"/>
+          </a:lnRef>
+          <a:fillRef idx="3">
+            <a:schemeClr val="accent1"/>
+          </a:fillRef>
+          <a:effectRef idx="2">
+            <a:schemeClr val="accent1"/>
+          </a:effectRef>
+          <a:fontRef idx="minor">
+            <a:schemeClr val="lt1"/>
+          </a:fontRef>
+        </p:style>
+        <p:txBody>
+          <a:bodyPr rtlCol="0" anchor="ctr"/>
+          <a:lstStyle/>
+          <a:p>
+            <a:pPr algn="ctr"/>
+          </a:p>
+        </p:txBody>
+      </p:sp>
+      <p:sp>
+        <p:nvSpPr>
           <p:cNvPr id="10" name="TextBox 9"/>
           <p:cNvSpPr txBox="1"/>
           <p:nvPr/>
@@ -7961,7 +8706,7 @@
 </p:sld>
 </file>
 
-<file path=ppt/slides/slide24.xml><?xml version="1.0" encoding="utf-8"?>
+<file path=ppt/slides/slide26.xml><?xml version="1.0" encoding="utf-8"?>
 <p:sld xmlns:a="http://schemas.openxmlformats.org/drawingml/2006/main" xmlns:p="http://schemas.openxmlformats.org/presentationml/2006/main" xmlns:r="http://schemas.openxmlformats.org/officeDocument/2006/relationships">
   <p:cSld>
     <p:bg>
@@ -9703,7 +10448,7 @@
                 </a:solidFill>
                 <a:latin typeface="Georgia"/>
               </a:rPr>
-              <a:t>What predicts wellbeing at the levels? Three findings.</a:t>
+              <a:t>At the levels: three domains, three failure modes</a:t>
             </a:r>
           </a:p>
         </p:txBody>
@@ -9742,13 +10487,13 @@
               </a:spcAft>
             </a:pPr>
             <a:r>
-              <a:rPr sz="1575" b="0" i="1">
+              <a:rPr sz="1600" b="0" i="1">
                 <a:solidFill>
                   <a:srgbClr val="9AA4B0"/>
                 </a:solidFill>
                 <a:latin typeface="Georgia"/>
               </a:rPr>
-              <a:t>Three domains emerge when you ask which indicators of education, health, and social trust predict life satisfaction at the levels. But each framework sees a different subset — not because the domains differ across contexts, but because of three distinct reasons frameworks fail to capture what matters for lived experience.</a:t>
+              <a:t>Three domains predict life satisfaction. But which frameworks can see them depends entirely on construction choices: which construct you count, which variable you measure, which domains you collect. Each framework's limitations reveal different failure modes, not different realities.</a:t>
             </a:r>
           </a:p>
         </p:txBody>

--- a/deck/Measured_Where_It_Varies.pptx
+++ b/deck/Measured_Where_It_Varies.pptx
@@ -31,6 +31,7 @@
     <p:sldId id="279" r:id="rId30"/>
     <p:sldId id="280" r:id="rId31"/>
     <p:sldId id="281" r:id="rId32"/>
+    <p:sldId id="282" r:id="rId33"/>
   </p:sldIdLst>
   <p:sldSz cx="12191695" cy="6858000" type="screen4x3"/>
   <p:notesSz cx="6858000" cy="9144000"/>
@@ -4275,7 +4276,7 @@
                 </a:solidFill>
                 <a:latin typeface="Consolas"/>
               </a:rPr>
-              <a:t>RESULT 3 · SOCIAL TRUST</a:t>
+              <a:t>SDG INDICATOR RANKINGS · WHY HEALTH MATTERS DESPITE LOW %</a:t>
             </a:r>
           </a:p>
         </p:txBody>
@@ -4320,7 +4321,7 @@
                 </a:solidFill>
                 <a:latin typeface="Georgia"/>
               </a:rPr>
-              <a:t>Social trust leads the ESS, is nearly invisible to development frameworks</a:t>
+              <a:t>Health indicators rank 4th among 17 SDG goals; the low percentage reflects weak overall SDG signal</a:t>
             </a:r>
           </a:p>
         </p:txBody>
@@ -4365,7 +4366,7 @@
                 </a:solidFill>
                 <a:latin typeface="Calibri"/>
               </a:rPr>
-              <a:t>Social trust — 'most people can be trusted' — is significant in 94% of ESS countries, third strongest domain after health and income, with median R² = 0.041. Neither the HDI nor the SDG framework measures it at all.</a:t>
+              <a:t>The SDG database is vast: 661 series across 42 countries testing 17 goals. The overall significance rate is low — only 3-4% of all country-indicator pairs are significant. Within that sparse landscape, health indicators rank fourth, with 16 of the top 25 most predictive SDG series falling under Goal 3. These are survival measures: infant mortality, under-five mortality, stunting, neonatal mortality, sanitation, drinking water — all objective, externally measured.</a:t>
             </a:r>
           </a:p>
           <a:p>
@@ -4387,29 +4388,7 @@
                 </a:solidFill>
                 <a:latin typeface="Calibri"/>
               </a:rPr>
-              <a:t>The SDG database does carry 13 trust- and satisfaction-adjacent series under Goal 16: satisfaction with public services, perception of bribery, perceived decision-making inclusiveness. But these measure institutional confidence, not interpersonal trust — a different construct, and one that correlates more weakly with life satisfaction even when tested across countries. Moreover, their median coverage is one observation per country-series against six for the database as a whole; 147 of 163 country-series cannot support a time-series design.</a:t>
-            </a:r>
-          </a:p>
-          <a:p>
-            <a:pPr>
-              <a:lnSpc>
-                <a:spcPct val="132000"/>
-              </a:lnSpc>
-              <a:spcBef>
-                <a:spcPts val="0"/>
-              </a:spcBef>
-              <a:spcAft>
-                <a:spcPts val="1100"/>
-              </a:spcAft>
-            </a:pPr>
-            <a:r>
-              <a:rPr sz="1150" b="0" i="0">
-                <a:solidFill>
-                  <a:srgbClr val="5A6068"/>
-                </a:solidFill>
-                <a:latin typeface="Calibri"/>
-              </a:rPr>
-              <a:t>Education's and health's problems are about which variable to count within a domain. Trust's problem is different: it is not in the frameworks at all. That is a coverage gap, not a measurement problem.</a:t>
+              <a:t>The low 11.5% rate for health is not evidence that health doesn't matter. It is evidence that most of the SDG database does not predict wellbeing. Within that context, health ranks high.</a:t>
             </a:r>
           </a:p>
         </p:txBody>
@@ -4458,7 +4437,7 @@
       </p:sp>
       <p:pic>
         <p:nvPicPr>
-          <p:cNvPr id="6" name="Picture 5" descr="trust_coverage_comparison.png"/>
+          <p:cNvPr id="6" name="Picture 5" descr="sdg_indicator_top20.png"/>
           <p:cNvPicPr>
             <a:picLocks noChangeAspect="1"/>
           </p:cNvPicPr>
@@ -4472,8 +4451,8 @@
         </p:blipFill>
         <p:spPr>
           <a:xfrm>
-            <a:off x="5120640" y="1234440"/>
-            <a:ext cx="6537960" cy="3922776"/>
+            <a:off x="5279547" y="658368"/>
+            <a:ext cx="6220145" cy="5074920"/>
           </a:xfrm>
           <a:prstGeom prst="rect">
             <a:avLst/>
@@ -4520,7 +4499,7 @@
                 </a:solidFill>
                 <a:latin typeface="Calibri"/>
               </a:rPr>
-              <a:t>Social trust: 94% of ESS countries significant (individual level), 1.5% of SDG16 country-indicator pairs (institutional confidence, not interpersonal trust), not measured in the HDI.</a:t>
+              <a:t>Top 25 SDG indicators by significance. Health (Goal 3) dominates: 16 of 25 top series.</a:t>
             </a:r>
           </a:p>
         </p:txBody>
@@ -4588,7 +4567,7 @@
                 </a:solidFill>
                 <a:latin typeface="Consolas"/>
               </a:rPr>
-              <a:t>SYNTHESIS</a:t>
+              <a:t>RESULT 3 · SOCIAL TRUST</a:t>
             </a:r>
           </a:p>
         </p:txBody>
@@ -4633,7 +4612,7 @@
                 </a:solidFill>
                 <a:latin typeface="Georgia"/>
               </a:rPr>
-              <a:t>Three domains, three ways frameworks lose sight of what matters</a:t>
+              <a:t>Social trust leads the ESS, is nearly invisible to development frameworks</a:t>
             </a:r>
           </a:p>
         </p:txBody>
@@ -4678,7 +4657,7 @@
                 </a:solidFill>
                 <a:latin typeface="Calibri"/>
               </a:rPr>
-              <a:t>Education's rank depends on which construct you count: attainment works, but parity ratios and learning outcomes do not, so pooling dilutes the signal. Health's rank depends on whether your chosen variable still varies: life expectancy does not, but self-rated health does, so the HDI's choice costs it. Social trust's rank is zero because it is not collected at scale in development frameworks at all — a coverage gap that cannot be fixed by choosing the right variable, because no variable was ever measured.</a:t>
+              <a:t>Social trust — 'most people can be trusted' — is significant in 94% of ESS countries, third strongest domain after health and income, with median R² = 0.041. Neither the HDI nor the SDG framework measures it at all.</a:t>
             </a:r>
           </a:p>
           <a:p>
@@ -4700,7 +4679,29 @@
                 </a:solidFill>
                 <a:latin typeface="Calibri"/>
               </a:rPr>
-              <a:t>These are not criticisms of the frameworks; they were built to track development, and they do. But which components look most consequential for lived experience is not the question they were built to answer.</a:t>
+              <a:t>The SDG database does carry 13 trust- and satisfaction-adjacent series under Goal 16: satisfaction with public services, perception of bribery, perceived decision-making inclusiveness. But these measure institutional confidence, not interpersonal trust — a different construct, and one that correlates more weakly with life satisfaction even when tested across countries. Moreover, their median coverage is one observation per country-series against six for the database as a whole; 147 of 163 country-series cannot support a time-series design.</a:t>
+            </a:r>
+          </a:p>
+          <a:p>
+            <a:pPr>
+              <a:lnSpc>
+                <a:spcPct val="132000"/>
+              </a:lnSpc>
+              <a:spcBef>
+                <a:spcPts val="0"/>
+              </a:spcBef>
+              <a:spcAft>
+                <a:spcPts val="1100"/>
+              </a:spcAft>
+            </a:pPr>
+            <a:r>
+              <a:rPr sz="1150" b="0" i="0">
+                <a:solidFill>
+                  <a:srgbClr val="5A6068"/>
+                </a:solidFill>
+                <a:latin typeface="Calibri"/>
+              </a:rPr>
+              <a:t>Education's and health's problems are about which variable to count within a domain. Trust's problem is different: it is not in the frameworks at all. That is a coverage gap, not a measurement problem.</a:t>
             </a:r>
           </a:p>
         </p:txBody>
@@ -4749,7 +4750,7 @@
       </p:sp>
       <p:pic>
         <p:nvPicPr>
-          <p:cNvPr id="6" name="Picture 5" descr="domain_horse_race.png"/>
+          <p:cNvPr id="6" name="Picture 5" descr="trust_coverage_comparison.png"/>
           <p:cNvPicPr>
             <a:picLocks noChangeAspect="1"/>
           </p:cNvPicPr>
@@ -4763,8 +4764,8 @@
         </p:blipFill>
         <p:spPr>
           <a:xfrm>
-            <a:off x="5120640" y="1433421"/>
-            <a:ext cx="6537960" cy="3524813"/>
+            <a:off x="5120640" y="1234440"/>
+            <a:ext cx="6537960" cy="3922776"/>
           </a:xfrm>
           <a:prstGeom prst="rect">
             <a:avLst/>
@@ -4811,7 +4812,7 @@
                 </a:solidFill>
                 <a:latin typeface="Calibri"/>
               </a:rPr>
-              <a:t>Domains competing within one instrument (ESS), at two levels of aggregation. Individual level (left) and country means (right).</a:t>
+              <a:t>Social trust: 94% of ESS countries significant (individual level), 1.5% of SDG16 country-indicator pairs (institutional confidence, not interpersonal trust), not measured in the HDI.</a:t>
             </a:r>
           </a:p>
         </p:txBody>
@@ -4825,6 +4826,297 @@
 </file>
 
 <file path=ppt/slides/slide15.xml><?xml version="1.0" encoding="utf-8"?>
+<p:sld xmlns:a="http://schemas.openxmlformats.org/drawingml/2006/main" xmlns:p="http://schemas.openxmlformats.org/presentationml/2006/main" xmlns:r="http://schemas.openxmlformats.org/officeDocument/2006/relationships">
+  <p:cSld>
+    <p:bg>
+      <p:bgPr>
+        <a:solidFill>
+          <a:srgbClr val="FCFCFB"/>
+        </a:solidFill>
+        <a:effectLst/>
+      </p:bgPr>
+    </p:bg>
+    <p:spTree>
+      <p:nvGrpSpPr>
+        <p:cNvPr id="1" name=""/>
+        <p:cNvGrpSpPr/>
+        <p:nvPr/>
+      </p:nvGrpSpPr>
+      <p:grpSpPr/>
+      <p:sp>
+        <p:nvSpPr>
+          <p:cNvPr id="2" name="TextBox 1"/>
+          <p:cNvSpPr txBox="1"/>
+          <p:nvPr/>
+        </p:nvSpPr>
+        <p:spPr>
+          <a:xfrm>
+            <a:off x="566928" y="502920"/>
+            <a:ext cx="4160520" cy="274320"/>
+          </a:xfrm>
+          <a:prstGeom prst="rect">
+            <a:avLst/>
+          </a:prstGeom>
+          <a:noFill/>
+        </p:spPr>
+        <p:txBody>
+          <a:bodyPr wrap="square" lIns="0" rIns="0" tIns="0" bIns="0">
+            <a:spAutoFit/>
+          </a:bodyPr>
+          <a:lstStyle/>
+          <a:p>
+            <a:pPr>
+              <a:spcBef>
+                <a:spcPts val="0"/>
+              </a:spcBef>
+              <a:spcAft>
+                <a:spcPts val="0"/>
+              </a:spcAft>
+            </a:pPr>
+            <a:r>
+              <a:rPr sz="1000" b="0" i="0">
+                <a:solidFill>
+                  <a:srgbClr val="A63A30"/>
+                </a:solidFill>
+                <a:latin typeface="Consolas"/>
+              </a:rPr>
+              <a:t>SYNTHESIS</a:t>
+            </a:r>
+          </a:p>
+        </p:txBody>
+      </p:sp>
+      <p:sp>
+        <p:nvSpPr>
+          <p:cNvPr id="3" name="TextBox 2"/>
+          <p:cNvSpPr txBox="1"/>
+          <p:nvPr/>
+        </p:nvSpPr>
+        <p:spPr>
+          <a:xfrm>
+            <a:off x="566928" y="914400"/>
+            <a:ext cx="4160520" cy="1371600"/>
+          </a:xfrm>
+          <a:prstGeom prst="rect">
+            <a:avLst/>
+          </a:prstGeom>
+          <a:noFill/>
+        </p:spPr>
+        <p:txBody>
+          <a:bodyPr wrap="square" lIns="0" rIns="0" tIns="0" bIns="0">
+            <a:spAutoFit/>
+          </a:bodyPr>
+          <a:lstStyle/>
+          <a:p>
+            <a:pPr>
+              <a:lnSpc>
+                <a:spcPct val="108000"/>
+              </a:lnSpc>
+              <a:spcBef>
+                <a:spcPts val="0"/>
+              </a:spcBef>
+              <a:spcAft>
+                <a:spcPts val="0"/>
+              </a:spcAft>
+            </a:pPr>
+            <a:r>
+              <a:rPr sz="2300" b="0" i="0">
+                <a:solidFill>
+                  <a:srgbClr val="14171C"/>
+                </a:solidFill>
+                <a:latin typeface="Georgia"/>
+              </a:rPr>
+              <a:t>Three domains, three ways frameworks lose sight of what matters</a:t>
+            </a:r>
+          </a:p>
+        </p:txBody>
+      </p:sp>
+      <p:sp>
+        <p:nvSpPr>
+          <p:cNvPr id="4" name="TextBox 3"/>
+          <p:cNvSpPr txBox="1"/>
+          <p:nvPr/>
+        </p:nvSpPr>
+        <p:spPr>
+          <a:xfrm>
+            <a:off x="566928" y="2331720"/>
+            <a:ext cx="4160520" cy="3840480"/>
+          </a:xfrm>
+          <a:prstGeom prst="rect">
+            <a:avLst/>
+          </a:prstGeom>
+          <a:noFill/>
+        </p:spPr>
+        <p:txBody>
+          <a:bodyPr wrap="square" lIns="0" rIns="0" tIns="0" bIns="0">
+            <a:spAutoFit/>
+          </a:bodyPr>
+          <a:lstStyle/>
+          <a:p>
+            <a:pPr>
+              <a:lnSpc>
+                <a:spcPct val="132000"/>
+              </a:lnSpc>
+              <a:spcBef>
+                <a:spcPts val="0"/>
+              </a:spcBef>
+              <a:spcAft>
+                <a:spcPts val="1100"/>
+              </a:spcAft>
+            </a:pPr>
+            <a:r>
+              <a:rPr sz="1150" b="0" i="0">
+                <a:solidFill>
+                  <a:srgbClr val="5A6068"/>
+                </a:solidFill>
+                <a:latin typeface="Calibri"/>
+              </a:rPr>
+              <a:t>Education's rank depends on which construct you count: attainment works, but parity ratios and learning outcomes do not, so pooling dilutes the signal. Health's rank depends on whether your chosen variable still varies: life expectancy does not, but self-rated health does, so the HDI's choice costs it. Social trust's rank is zero because it is not collected at scale in development frameworks at all — a coverage gap that cannot be fixed by choosing the right variable, because no variable was ever measured.</a:t>
+            </a:r>
+          </a:p>
+          <a:p>
+            <a:pPr>
+              <a:lnSpc>
+                <a:spcPct val="132000"/>
+              </a:lnSpc>
+              <a:spcBef>
+                <a:spcPts val="0"/>
+              </a:spcBef>
+              <a:spcAft>
+                <a:spcPts val="1100"/>
+              </a:spcAft>
+            </a:pPr>
+            <a:r>
+              <a:rPr sz="1150" b="0" i="0">
+                <a:solidFill>
+                  <a:srgbClr val="5A6068"/>
+                </a:solidFill>
+                <a:latin typeface="Calibri"/>
+              </a:rPr>
+              <a:t>These are not criticisms of the frameworks; they were built to track development, and they do. But which components look most consequential for lived experience is not the question they were built to answer.</a:t>
+            </a:r>
+          </a:p>
+        </p:txBody>
+      </p:sp>
+      <p:sp>
+        <p:nvSpPr>
+          <p:cNvPr id="5" name="TextBox 4"/>
+          <p:cNvSpPr txBox="1"/>
+          <p:nvPr/>
+        </p:nvSpPr>
+        <p:spPr>
+          <a:xfrm>
+            <a:off x="11338560" y="6263640"/>
+            <a:ext cx="548640" cy="274320"/>
+          </a:xfrm>
+          <a:prstGeom prst="rect">
+            <a:avLst/>
+          </a:prstGeom>
+          <a:noFill/>
+        </p:spPr>
+        <p:txBody>
+          <a:bodyPr wrap="square" lIns="0" rIns="0" tIns="0" bIns="0">
+            <a:spAutoFit/>
+          </a:bodyPr>
+          <a:lstStyle/>
+          <a:p>
+            <a:pPr algn="r">
+              <a:spcBef>
+                <a:spcPts val="0"/>
+              </a:spcBef>
+              <a:spcAft>
+                <a:spcPts val="0"/>
+              </a:spcAft>
+            </a:pPr>
+            <a:r>
+              <a:rPr sz="1100" b="0" i="0">
+                <a:solidFill>
+                  <a:srgbClr val="868D96"/>
+                </a:solidFill>
+                <a:latin typeface="Consolas"/>
+              </a:rPr>
+              <a:t>II</a:t>
+            </a:r>
+          </a:p>
+        </p:txBody>
+      </p:sp>
+      <p:pic>
+        <p:nvPicPr>
+          <p:cNvPr id="6" name="Picture 5" descr="domain_horse_race.png"/>
+          <p:cNvPicPr>
+            <a:picLocks noChangeAspect="1"/>
+          </p:cNvPicPr>
+          <p:nvPr/>
+        </p:nvPicPr>
+        <p:blipFill>
+          <a:blip r:embed="rId2"/>
+          <a:stretch>
+            <a:fillRect/>
+          </a:stretch>
+        </p:blipFill>
+        <p:spPr>
+          <a:xfrm>
+            <a:off x="5120640" y="1433421"/>
+            <a:ext cx="6537960" cy="3524813"/>
+          </a:xfrm>
+          <a:prstGeom prst="rect">
+            <a:avLst/>
+          </a:prstGeom>
+        </p:spPr>
+      </p:pic>
+      <p:sp>
+        <p:nvSpPr>
+          <p:cNvPr id="7" name="TextBox 6"/>
+          <p:cNvSpPr txBox="1"/>
+          <p:nvPr/>
+        </p:nvSpPr>
+        <p:spPr>
+          <a:xfrm>
+            <a:off x="5120640" y="5897880"/>
+            <a:ext cx="6537960" cy="731520"/>
+          </a:xfrm>
+          <a:prstGeom prst="rect">
+            <a:avLst/>
+          </a:prstGeom>
+          <a:noFill/>
+        </p:spPr>
+        <p:txBody>
+          <a:bodyPr wrap="square" lIns="0" rIns="0" tIns="0" bIns="0">
+            <a:spAutoFit/>
+          </a:bodyPr>
+          <a:lstStyle/>
+          <a:p>
+            <a:pPr>
+              <a:lnSpc>
+                <a:spcPct val="125000"/>
+              </a:lnSpc>
+              <a:spcBef>
+                <a:spcPts val="0"/>
+              </a:spcBef>
+              <a:spcAft>
+                <a:spcPts val="0"/>
+              </a:spcAft>
+            </a:pPr>
+            <a:r>
+              <a:rPr sz="900" b="0" i="0">
+                <a:solidFill>
+                  <a:srgbClr val="868D96"/>
+                </a:solidFill>
+                <a:latin typeface="Calibri"/>
+              </a:rPr>
+              <a:t>Domains competing within one instrument (ESS), at two levels of aggregation. Individual level (left) and country means (right).</a:t>
+            </a:r>
+          </a:p>
+        </p:txBody>
+      </p:sp>
+    </p:spTree>
+  </p:cSld>
+  <p:clrMapOvr>
+    <a:masterClrMapping/>
+  </p:clrMapOvr>
+</p:sld>
+</file>
+
+<file path=ppt/slides/slide16.xml><?xml version="1.0" encoding="utf-8"?>
 <p:sld xmlns:a="http://schemas.openxmlformats.org/drawingml/2006/main" xmlns:p="http://schemas.openxmlformats.org/presentationml/2006/main" xmlns:r="http://schemas.openxmlformats.org/officeDocument/2006/relationships">
   <p:cSld>
     <p:bg>
@@ -4981,7 +5273,7 @@
 </p:sld>
 </file>
 
-<file path=ppt/slides/slide16.xml><?xml version="1.0" encoding="utf-8"?>
+<file path=ppt/slides/slide17.xml><?xml version="1.0" encoding="utf-8"?>
 <p:sld xmlns:a="http://schemas.openxmlformats.org/drawingml/2006/main" xmlns:p="http://schemas.openxmlformats.org/presentationml/2006/main" xmlns:r="http://schemas.openxmlformats.org/officeDocument/2006/relationships">
   <p:cSld>
     <p:bg>
@@ -5417,7 +5709,7 @@
 </p:sld>
 </file>
 
-<file path=ppt/slides/slide17.xml><?xml version="1.0" encoding="utf-8"?>
+<file path=ppt/slides/slide18.xml><?xml version="1.0" encoding="utf-8"?>
 <p:sld xmlns:a="http://schemas.openxmlformats.org/drawingml/2006/main" xmlns:p="http://schemas.openxmlformats.org/presentationml/2006/main" xmlns:r="http://schemas.openxmlformats.org/officeDocument/2006/relationships">
   <p:cSld>
     <p:bg>
@@ -5661,7 +5953,7 @@
 </p:sld>
 </file>
 
-<file path=ppt/slides/slide18.xml><?xml version="1.0" encoding="utf-8"?>
+<file path=ppt/slides/slide19.xml><?xml version="1.0" encoding="utf-8"?>
 <p:sld xmlns:a="http://schemas.openxmlformats.org/drawingml/2006/main" xmlns:p="http://schemas.openxmlformats.org/presentationml/2006/main" xmlns:r="http://schemas.openxmlformats.org/officeDocument/2006/relationships">
   <p:cSld>
     <p:bg>
@@ -5806,442 +6098,6 @@
                 <a:latin typeface="Georgia"/>
               </a:rPr>
               <a:t>The three domains predict wellbeing differently depending on where and how you measure. Development frameworks' blindness is not incurable; it is structural. Frameworks designed for tracking aggregate national progress cannot see individual experience responsive to change.</a:t>
-            </a:r>
-          </a:p>
-        </p:txBody>
-      </p:sp>
-    </p:spTree>
-  </p:cSld>
-  <p:clrMapOvr>
-    <a:masterClrMapping/>
-  </p:clrMapOvr>
-</p:sld>
-</file>
-
-<file path=ppt/slides/slide19.xml><?xml version="1.0" encoding="utf-8"?>
-<p:sld xmlns:a="http://schemas.openxmlformats.org/drawingml/2006/main" xmlns:p="http://schemas.openxmlformats.org/presentationml/2006/main" xmlns:r="http://schemas.openxmlformats.org/officeDocument/2006/relationships">
-  <p:cSld>
-    <p:bg>
-      <p:bgPr>
-        <a:solidFill>
-          <a:srgbClr val="14171C"/>
-        </a:solidFill>
-        <a:effectLst/>
-      </p:bgPr>
-    </p:bg>
-    <p:spTree>
-      <p:nvGrpSpPr>
-        <p:cNvPr id="1" name=""/>
-        <p:cNvGrpSpPr/>
-        <p:nvPr/>
-      </p:nvGrpSpPr>
-      <p:grpSpPr/>
-      <p:sp>
-        <p:nvSpPr>
-          <p:cNvPr id="2" name="TextBox 1"/>
-          <p:cNvSpPr txBox="1"/>
-          <p:nvPr/>
-        </p:nvSpPr>
-        <p:spPr>
-          <a:xfrm>
-            <a:off x="8229600" y="822960"/>
-            <a:ext cx="3291840" cy="4114800"/>
-          </a:xfrm>
-          <a:prstGeom prst="rect">
-            <a:avLst/>
-          </a:prstGeom>
-          <a:noFill/>
-        </p:spPr>
-        <p:txBody>
-          <a:bodyPr wrap="square" lIns="0" rIns="0" tIns="0" bIns="0">
-            <a:spAutoFit/>
-          </a:bodyPr>
-          <a:lstStyle/>
-          <a:p>
-            <a:pPr algn="r">
-              <a:spcBef>
-                <a:spcPts val="0"/>
-              </a:spcBef>
-              <a:spcAft>
-                <a:spcPts val="0"/>
-              </a:spcAft>
-            </a:pPr>
-            <a:r>
-              <a:rPr sz="20000" b="0" i="0">
-                <a:solidFill>
-                  <a:srgbClr val="2A3340"/>
-                </a:solidFill>
-                <a:latin typeface="Georgia"/>
-              </a:rPr>
-              <a:t>IV</a:t>
-            </a:r>
-          </a:p>
-        </p:txBody>
-      </p:sp>
-      <p:sp>
-        <p:nvSpPr>
-          <p:cNvPr id="3" name="Rectangle 2"/>
-          <p:cNvSpPr/>
-          <p:nvPr/>
-        </p:nvSpPr>
-        <p:spPr>
-          <a:xfrm>
-            <a:off x="566928" y="1371600"/>
-            <a:ext cx="7315200" cy="25400"/>
-          </a:xfrm>
-          <a:prstGeom prst="rect">
-            <a:avLst/>
-          </a:prstGeom>
-          <a:solidFill>
-            <a:srgbClr val="C9D8EC"/>
-          </a:solidFill>
-          <a:ln>
-            <a:noFill/>
-          </a:ln>
-          <a:effectLst/>
-        </p:spPr>
-        <p:style>
-          <a:lnRef idx="1">
-            <a:schemeClr val="accent1"/>
-          </a:lnRef>
-          <a:fillRef idx="3">
-            <a:schemeClr val="accent1"/>
-          </a:fillRef>
-          <a:effectRef idx="2">
-            <a:schemeClr val="accent1"/>
-          </a:effectRef>
-          <a:fontRef idx="minor">
-            <a:schemeClr val="lt1"/>
-          </a:fontRef>
-        </p:style>
-        <p:txBody>
-          <a:bodyPr rtlCol="0" anchor="ctr"/>
-          <a:lstStyle/>
-          <a:p>
-            <a:pPr algn="ctr"/>
-          </a:p>
-        </p:txBody>
-      </p:sp>
-      <p:sp>
-        <p:nvSpPr>
-          <p:cNvPr id="4" name="TextBox 3"/>
-          <p:cNvSpPr txBox="1"/>
-          <p:nvPr/>
-        </p:nvSpPr>
-        <p:spPr>
-          <a:xfrm>
-            <a:off x="566928" y="960120"/>
-            <a:ext cx="5486400" cy="274320"/>
-          </a:xfrm>
-          <a:prstGeom prst="rect">
-            <a:avLst/>
-          </a:prstGeom>
-          <a:noFill/>
-        </p:spPr>
-        <p:txBody>
-          <a:bodyPr wrap="square" lIns="0" rIns="0" tIns="0" bIns="0">
-            <a:spAutoFit/>
-          </a:bodyPr>
-          <a:lstStyle/>
-          <a:p>
-            <a:pPr>
-              <a:spcBef>
-                <a:spcPts val="0"/>
-              </a:spcBef>
-              <a:spcAft>
-                <a:spcPts val="0"/>
-              </a:spcAft>
-            </a:pPr>
-            <a:r>
-              <a:rPr sz="1100" b="0" i="0">
-                <a:solidFill>
-                  <a:srgbClr val="C9D8EC"/>
-                </a:solidFill>
-                <a:latin typeface="Consolas"/>
-              </a:rPr>
-              <a:t>ACT IV</a:t>
-            </a:r>
-          </a:p>
-        </p:txBody>
-      </p:sp>
-      <p:sp>
-        <p:nvSpPr>
-          <p:cNvPr id="5" name="TextBox 4"/>
-          <p:cNvSpPr txBox="1"/>
-          <p:nvPr/>
-        </p:nvSpPr>
-        <p:spPr>
-          <a:xfrm>
-            <a:off x="566928" y="1783080"/>
-            <a:ext cx="7223760" cy="1828800"/>
-          </a:xfrm>
-          <a:prstGeom prst="rect">
-            <a:avLst/>
-          </a:prstGeom>
-          <a:noFill/>
-        </p:spPr>
-        <p:txBody>
-          <a:bodyPr wrap="square" lIns="0" rIns="0" tIns="0" bIns="0">
-            <a:spAutoFit/>
-          </a:bodyPr>
-          <a:lstStyle/>
-          <a:p>
-            <a:pPr>
-              <a:lnSpc>
-                <a:spcPct val="102000"/>
-              </a:lnSpc>
-              <a:spcBef>
-                <a:spcPts val="0"/>
-              </a:spcBef>
-              <a:spcAft>
-                <a:spcPts val="0"/>
-              </a:spcAft>
-            </a:pPr>
-            <a:r>
-              <a:rPr sz="4000" b="0" i="0">
-                <a:solidFill>
-                  <a:srgbClr val="FCFCFB"/>
-                </a:solidFill>
-                <a:latin typeface="Georgia"/>
-              </a:rPr>
-              <a:t>What this means for development frameworks</a:t>
-            </a:r>
-          </a:p>
-        </p:txBody>
-      </p:sp>
-      <p:sp>
-        <p:nvSpPr>
-          <p:cNvPr id="6" name="TextBox 5"/>
-          <p:cNvSpPr txBox="1"/>
-          <p:nvPr/>
-        </p:nvSpPr>
-        <p:spPr>
-          <a:xfrm>
-            <a:off x="566928" y="3886200"/>
-            <a:ext cx="6766560" cy="1463040"/>
-          </a:xfrm>
-          <a:prstGeom prst="rect">
-            <a:avLst/>
-          </a:prstGeom>
-          <a:noFill/>
-        </p:spPr>
-        <p:txBody>
-          <a:bodyPr wrap="square" lIns="0" rIns="0" tIns="0" bIns="0">
-            <a:spAutoFit/>
-          </a:bodyPr>
-          <a:lstStyle/>
-          <a:p>
-            <a:pPr>
-              <a:lnSpc>
-                <a:spcPct val="135000"/>
-              </a:lnSpc>
-              <a:spcBef>
-                <a:spcPts val="0"/>
-              </a:spcBef>
-              <a:spcAft>
-                <a:spcPts val="0"/>
-              </a:spcAft>
-            </a:pPr>
-            <a:r>
-              <a:rPr sz="1550" b="0" i="1">
-                <a:solidFill>
-                  <a:srgbClr val="9AA4B0"/>
-                </a:solidFill>
-                <a:latin typeface="Georgia"/>
-              </a:rPr>
-              <a:t>The disconnect is real and worth naming. Development frameworks have done their job of tracking progress on development. But the components that predict individual lived experience are ones these frameworks are not currently built to see — because of construction choices, variable saturation, or coverage that was never collected.</a:t>
-            </a:r>
-          </a:p>
-        </p:txBody>
-      </p:sp>
-      <p:sp>
-        <p:nvSpPr>
-          <p:cNvPr id="7" name="TextBox 6"/>
-          <p:cNvSpPr txBox="1"/>
-          <p:nvPr/>
-        </p:nvSpPr>
-        <p:spPr>
-          <a:xfrm>
-            <a:off x="566928" y="5623560"/>
-            <a:ext cx="3503066" cy="914400"/>
-          </a:xfrm>
-          <a:prstGeom prst="rect">
-            <a:avLst/>
-          </a:prstGeom>
-          <a:noFill/>
-        </p:spPr>
-        <p:txBody>
-          <a:bodyPr wrap="square" lIns="0" rIns="0" tIns="0" bIns="0">
-            <a:spAutoFit/>
-          </a:bodyPr>
-          <a:lstStyle/>
-          <a:p>
-            <a:pPr>
-              <a:spcBef>
-                <a:spcPts val="0"/>
-              </a:spcBef>
-              <a:spcAft>
-                <a:spcPts val="400"/>
-              </a:spcAft>
-            </a:pPr>
-            <a:r>
-              <a:rPr sz="2200" b="0" i="0">
-                <a:solidFill>
-                  <a:srgbClr val="FCFCFB"/>
-                </a:solidFill>
-                <a:latin typeface="Consolas"/>
-              </a:rPr>
-              <a:t>3 vs. 1</a:t>
-            </a:r>
-          </a:p>
-          <a:p>
-            <a:pPr>
-              <a:lnSpc>
-                <a:spcPct val="120000"/>
-              </a:lnSpc>
-              <a:spcBef>
-                <a:spcPts val="0"/>
-              </a:spcBef>
-              <a:spcAft>
-                <a:spcPts val="0"/>
-              </a:spcAft>
-            </a:pPr>
-            <a:r>
-              <a:rPr sz="1000" b="0" i="0">
-                <a:solidFill>
-                  <a:srgbClr val="8A94A0"/>
-                </a:solidFill>
-                <a:latin typeface="Calibri"/>
-              </a:rPr>
-              <a:t>domains the HDI can test for wellbeing, vs. social trust</a:t>
-            </a:r>
-          </a:p>
-        </p:txBody>
-      </p:sp>
-      <p:sp>
-        <p:nvSpPr>
-          <p:cNvPr id="8" name="TextBox 7"/>
-          <p:cNvSpPr txBox="1"/>
-          <p:nvPr/>
-        </p:nvSpPr>
-        <p:spPr>
-          <a:xfrm>
-            <a:off x="4344314" y="5623560"/>
-            <a:ext cx="3503066" cy="914400"/>
-          </a:xfrm>
-          <a:prstGeom prst="rect">
-            <a:avLst/>
-          </a:prstGeom>
-          <a:noFill/>
-        </p:spPr>
-        <p:txBody>
-          <a:bodyPr wrap="square" lIns="0" rIns="0" tIns="0" bIns="0">
-            <a:spAutoFit/>
-          </a:bodyPr>
-          <a:lstStyle/>
-          <a:p>
-            <a:pPr>
-              <a:spcBef>
-                <a:spcPts val="0"/>
-              </a:spcBef>
-              <a:spcAft>
-                <a:spcPts val="400"/>
-              </a:spcAft>
-            </a:pPr>
-            <a:r>
-              <a:rPr sz="2200" b="0" i="0">
-                <a:solidFill>
-                  <a:srgbClr val="FCFCFB"/>
-                </a:solidFill>
-                <a:latin typeface="Consolas"/>
-              </a:rPr>
-              <a:t>42 vs. 661</a:t>
-            </a:r>
-          </a:p>
-          <a:p>
-            <a:pPr>
-              <a:lnSpc>
-                <a:spcPct val="120000"/>
-              </a:lnSpc>
-              <a:spcBef>
-                <a:spcPts val="0"/>
-              </a:spcBef>
-              <a:spcAft>
-                <a:spcPts val="0"/>
-              </a:spcAft>
-            </a:pPr>
-            <a:r>
-              <a:rPr sz="1000" b="0" i="0">
-                <a:solidFill>
-                  <a:srgbClr val="8A94A0"/>
-                </a:solidFill>
-                <a:latin typeface="Calibri"/>
-              </a:rPr>
-              <a:t>countries with SDG data, vs. series in the database</a:t>
-            </a:r>
-          </a:p>
-        </p:txBody>
-      </p:sp>
-      <p:sp>
-        <p:nvSpPr>
-          <p:cNvPr id="9" name="TextBox 8"/>
-          <p:cNvSpPr txBox="1"/>
-          <p:nvPr/>
-        </p:nvSpPr>
-        <p:spPr>
-          <a:xfrm>
-            <a:off x="8121700" y="5623560"/>
-            <a:ext cx="3503066" cy="914400"/>
-          </a:xfrm>
-          <a:prstGeom prst="rect">
-            <a:avLst/>
-          </a:prstGeom>
-          <a:noFill/>
-        </p:spPr>
-        <p:txBody>
-          <a:bodyPr wrap="square" lIns="0" rIns="0" tIns="0" bIns="0">
-            <a:spAutoFit/>
-          </a:bodyPr>
-          <a:lstStyle/>
-          <a:p>
-            <a:pPr>
-              <a:spcBef>
-                <a:spcPts val="0"/>
-              </a:spcBef>
-              <a:spcAft>
-                <a:spcPts val="400"/>
-              </a:spcAft>
-            </a:pPr>
-            <a:r>
-              <a:rPr sz="2200" b="0" i="0">
-                <a:solidFill>
-                  <a:srgbClr val="FCFCFB"/>
-                </a:solidFill>
-                <a:latin typeface="Consolas"/>
-              </a:rPr>
-              <a:t>0.041</a:t>
-            </a:r>
-          </a:p>
-          <a:p>
-            <a:pPr>
-              <a:lnSpc>
-                <a:spcPct val="120000"/>
-              </a:lnSpc>
-              <a:spcBef>
-                <a:spcPts val="0"/>
-              </a:spcBef>
-              <a:spcAft>
-                <a:spcPts val="0"/>
-              </a:spcAft>
-            </a:pPr>
-            <a:r>
-              <a:rPr sz="1000" b="0" i="0">
-                <a:solidFill>
-                  <a:srgbClr val="8A94A0"/>
-                </a:solidFill>
-                <a:latin typeface="Calibri"/>
-              </a:rPr>
-              <a:t>median R² for trust — below income, health, education individually, above none</a:t>
             </a:r>
           </a:p>
         </p:txBody>
@@ -7104,7 +6960,7 @@
     <p:bg>
       <p:bgPr>
         <a:solidFill>
-          <a:srgbClr val="FCFCFB"/>
+          <a:srgbClr val="14171C"/>
         </a:solidFill>
         <a:effectLst/>
       </p:bgPr>
@@ -7124,21 +6980,261 @@
         </p:nvSpPr>
         <p:spPr>
           <a:xfrm>
-            <a:off x="566928" y="502920"/>
-            <a:ext cx="8595360" cy="274320"/>
-          </a:xfrm>
-          <a:prstGeom prst="rect">
-            <a:avLst/>
-          </a:prstGeom>
-          <a:noFill/>
-        </p:spPr>
-        <p:txBody>
-          <a:bodyPr wrap="square" lIns="0" rIns="0" tIns="0" bIns="0">
-            <a:spAutoFit/>
-          </a:bodyPr>
-          <a:lstStyle/>
-          <a:p>
-            <a:pPr>
+            <a:off x="8229600" y="822960"/>
+            <a:ext cx="3291840" cy="4114800"/>
+          </a:xfrm>
+          <a:prstGeom prst="rect">
+            <a:avLst/>
+          </a:prstGeom>
+          <a:noFill/>
+        </p:spPr>
+        <p:txBody>
+          <a:bodyPr wrap="square" lIns="0" rIns="0" tIns="0" bIns="0">
+            <a:spAutoFit/>
+          </a:bodyPr>
+          <a:lstStyle/>
+          <a:p>
+            <a:pPr algn="r">
+              <a:spcBef>
+                <a:spcPts val="0"/>
+              </a:spcBef>
+              <a:spcAft>
+                <a:spcPts val="0"/>
+              </a:spcAft>
+            </a:pPr>
+            <a:r>
+              <a:rPr sz="20000" b="0" i="0">
+                <a:solidFill>
+                  <a:srgbClr val="2A3340"/>
+                </a:solidFill>
+                <a:latin typeface="Georgia"/>
+              </a:rPr>
+              <a:t>IV</a:t>
+            </a:r>
+          </a:p>
+        </p:txBody>
+      </p:sp>
+      <p:sp>
+        <p:nvSpPr>
+          <p:cNvPr id="3" name="Rectangle 2"/>
+          <p:cNvSpPr/>
+          <p:nvPr/>
+        </p:nvSpPr>
+        <p:spPr>
+          <a:xfrm>
+            <a:off x="566928" y="1371600"/>
+            <a:ext cx="7315200" cy="25400"/>
+          </a:xfrm>
+          <a:prstGeom prst="rect">
+            <a:avLst/>
+          </a:prstGeom>
+          <a:solidFill>
+            <a:srgbClr val="C9D8EC"/>
+          </a:solidFill>
+          <a:ln>
+            <a:noFill/>
+          </a:ln>
+          <a:effectLst/>
+        </p:spPr>
+        <p:style>
+          <a:lnRef idx="1">
+            <a:schemeClr val="accent1"/>
+          </a:lnRef>
+          <a:fillRef idx="3">
+            <a:schemeClr val="accent1"/>
+          </a:fillRef>
+          <a:effectRef idx="2">
+            <a:schemeClr val="accent1"/>
+          </a:effectRef>
+          <a:fontRef idx="minor">
+            <a:schemeClr val="lt1"/>
+          </a:fontRef>
+        </p:style>
+        <p:txBody>
+          <a:bodyPr rtlCol="0" anchor="ctr"/>
+          <a:lstStyle/>
+          <a:p>
+            <a:pPr algn="ctr"/>
+          </a:p>
+        </p:txBody>
+      </p:sp>
+      <p:sp>
+        <p:nvSpPr>
+          <p:cNvPr id="4" name="TextBox 3"/>
+          <p:cNvSpPr txBox="1"/>
+          <p:nvPr/>
+        </p:nvSpPr>
+        <p:spPr>
+          <a:xfrm>
+            <a:off x="566928" y="960120"/>
+            <a:ext cx="5486400" cy="274320"/>
+          </a:xfrm>
+          <a:prstGeom prst="rect">
+            <a:avLst/>
+          </a:prstGeom>
+          <a:noFill/>
+        </p:spPr>
+        <p:txBody>
+          <a:bodyPr wrap="square" lIns="0" rIns="0" tIns="0" bIns="0">
+            <a:spAutoFit/>
+          </a:bodyPr>
+          <a:lstStyle/>
+          <a:p>
+            <a:pPr>
+              <a:spcBef>
+                <a:spcPts val="0"/>
+              </a:spcBef>
+              <a:spcAft>
+                <a:spcPts val="0"/>
+              </a:spcAft>
+            </a:pPr>
+            <a:r>
+              <a:rPr sz="1100" b="0" i="0">
+                <a:solidFill>
+                  <a:srgbClr val="C9D8EC"/>
+                </a:solidFill>
+                <a:latin typeface="Consolas"/>
+              </a:rPr>
+              <a:t>ACT IV</a:t>
+            </a:r>
+          </a:p>
+        </p:txBody>
+      </p:sp>
+      <p:sp>
+        <p:nvSpPr>
+          <p:cNvPr id="5" name="TextBox 4"/>
+          <p:cNvSpPr txBox="1"/>
+          <p:nvPr/>
+        </p:nvSpPr>
+        <p:spPr>
+          <a:xfrm>
+            <a:off x="566928" y="1783080"/>
+            <a:ext cx="7223760" cy="1828800"/>
+          </a:xfrm>
+          <a:prstGeom prst="rect">
+            <a:avLst/>
+          </a:prstGeom>
+          <a:noFill/>
+        </p:spPr>
+        <p:txBody>
+          <a:bodyPr wrap="square" lIns="0" rIns="0" tIns="0" bIns="0">
+            <a:spAutoFit/>
+          </a:bodyPr>
+          <a:lstStyle/>
+          <a:p>
+            <a:pPr>
+              <a:lnSpc>
+                <a:spcPct val="102000"/>
+              </a:lnSpc>
+              <a:spcBef>
+                <a:spcPts val="0"/>
+              </a:spcBef>
+              <a:spcAft>
+                <a:spcPts val="0"/>
+              </a:spcAft>
+            </a:pPr>
+            <a:r>
+              <a:rPr sz="4000" b="0" i="0">
+                <a:solidFill>
+                  <a:srgbClr val="FCFCFB"/>
+                </a:solidFill>
+                <a:latin typeface="Georgia"/>
+              </a:rPr>
+              <a:t>What this means for development frameworks</a:t>
+            </a:r>
+          </a:p>
+        </p:txBody>
+      </p:sp>
+      <p:sp>
+        <p:nvSpPr>
+          <p:cNvPr id="6" name="TextBox 5"/>
+          <p:cNvSpPr txBox="1"/>
+          <p:nvPr/>
+        </p:nvSpPr>
+        <p:spPr>
+          <a:xfrm>
+            <a:off x="566928" y="3886200"/>
+            <a:ext cx="6766560" cy="1463040"/>
+          </a:xfrm>
+          <a:prstGeom prst="rect">
+            <a:avLst/>
+          </a:prstGeom>
+          <a:noFill/>
+        </p:spPr>
+        <p:txBody>
+          <a:bodyPr wrap="square" lIns="0" rIns="0" tIns="0" bIns="0">
+            <a:spAutoFit/>
+          </a:bodyPr>
+          <a:lstStyle/>
+          <a:p>
+            <a:pPr>
+              <a:lnSpc>
+                <a:spcPct val="135000"/>
+              </a:lnSpc>
+              <a:spcBef>
+                <a:spcPts val="0"/>
+              </a:spcBef>
+              <a:spcAft>
+                <a:spcPts val="0"/>
+              </a:spcAft>
+            </a:pPr>
+            <a:r>
+              <a:rPr sz="1550" b="0" i="1">
+                <a:solidFill>
+                  <a:srgbClr val="9AA4B0"/>
+                </a:solidFill>
+                <a:latin typeface="Georgia"/>
+              </a:rPr>
+              <a:t>The disconnect is real and worth naming. Development frameworks have done their job of tracking progress on development. But the components that predict individual lived experience are ones these frameworks are not currently built to see — because of construction choices, variable saturation, or coverage that was never collected.</a:t>
+            </a:r>
+          </a:p>
+        </p:txBody>
+      </p:sp>
+      <p:sp>
+        <p:nvSpPr>
+          <p:cNvPr id="7" name="TextBox 6"/>
+          <p:cNvSpPr txBox="1"/>
+          <p:nvPr/>
+        </p:nvSpPr>
+        <p:spPr>
+          <a:xfrm>
+            <a:off x="566928" y="5623560"/>
+            <a:ext cx="3503066" cy="914400"/>
+          </a:xfrm>
+          <a:prstGeom prst="rect">
+            <a:avLst/>
+          </a:prstGeom>
+          <a:noFill/>
+        </p:spPr>
+        <p:txBody>
+          <a:bodyPr wrap="square" lIns="0" rIns="0" tIns="0" bIns="0">
+            <a:spAutoFit/>
+          </a:bodyPr>
+          <a:lstStyle/>
+          <a:p>
+            <a:pPr>
+              <a:spcBef>
+                <a:spcPts val="0"/>
+              </a:spcBef>
+              <a:spcAft>
+                <a:spcPts val="400"/>
+              </a:spcAft>
+            </a:pPr>
+            <a:r>
+              <a:rPr sz="2200" b="0" i="0">
+                <a:solidFill>
+                  <a:srgbClr val="FCFCFB"/>
+                </a:solidFill>
+                <a:latin typeface="Consolas"/>
+              </a:rPr>
+              <a:t>3 vs. 1</a:t>
+            </a:r>
+          </a:p>
+          <a:p>
+            <a:pPr>
+              <a:lnSpc>
+                <a:spcPct val="120000"/>
+              </a:lnSpc>
               <a:spcBef>
                 <a:spcPts val="0"/>
               </a:spcBef>
@@ -7149,40 +7245,59 @@
             <a:r>
               <a:rPr sz="1000" b="0" i="0">
                 <a:solidFill>
-                  <a:srgbClr val="A63A30"/>
+                  <a:srgbClr val="8A94A0"/>
+                </a:solidFill>
+                <a:latin typeface="Calibri"/>
+              </a:rPr>
+              <a:t>domains the HDI can test for wellbeing, vs. social trust</a:t>
+            </a:r>
+          </a:p>
+        </p:txBody>
+      </p:sp>
+      <p:sp>
+        <p:nvSpPr>
+          <p:cNvPr id="8" name="TextBox 7"/>
+          <p:cNvSpPr txBox="1"/>
+          <p:nvPr/>
+        </p:nvSpPr>
+        <p:spPr>
+          <a:xfrm>
+            <a:off x="4344314" y="5623560"/>
+            <a:ext cx="3503066" cy="914400"/>
+          </a:xfrm>
+          <a:prstGeom prst="rect">
+            <a:avLst/>
+          </a:prstGeom>
+          <a:noFill/>
+        </p:spPr>
+        <p:txBody>
+          <a:bodyPr wrap="square" lIns="0" rIns="0" tIns="0" bIns="0">
+            <a:spAutoFit/>
+          </a:bodyPr>
+          <a:lstStyle/>
+          <a:p>
+            <a:pPr>
+              <a:spcBef>
+                <a:spcPts val="0"/>
+              </a:spcBef>
+              <a:spcAft>
+                <a:spcPts val="400"/>
+              </a:spcAft>
+            </a:pPr>
+            <a:r>
+              <a:rPr sz="2200" b="0" i="0">
+                <a:solidFill>
+                  <a:srgbClr val="FCFCFB"/>
                 </a:solidFill>
                 <a:latin typeface="Consolas"/>
               </a:rPr>
-              <a:t>THE DISCONNECT</a:t>
-            </a:r>
-          </a:p>
-        </p:txBody>
-      </p:sp>
-      <p:sp>
-        <p:nvSpPr>
-          <p:cNvPr id="3" name="TextBox 2"/>
-          <p:cNvSpPr txBox="1"/>
-          <p:nvPr/>
-        </p:nvSpPr>
-        <p:spPr>
-          <a:xfrm>
-            <a:off x="566928" y="914400"/>
-            <a:ext cx="8595360" cy="1371600"/>
-          </a:xfrm>
-          <a:prstGeom prst="rect">
-            <a:avLst/>
-          </a:prstGeom>
-          <a:noFill/>
-        </p:spPr>
-        <p:txBody>
-          <a:bodyPr wrap="square" lIns="0" rIns="0" tIns="0" bIns="0">
-            <a:spAutoFit/>
-          </a:bodyPr>
-          <a:lstStyle/>
+              <a:t>42 vs. 661</a:t>
+            </a:r>
+          </a:p>
           <a:p>
             <a:pPr>
               <a:lnSpc>
-                <a:spcPct val="108000"/>
+                <a:spcPct val="120000"/>
               </a:lnSpc>
               <a:spcBef>
                 <a:spcPts val="0"/>
@@ -7192,122 +7307,77 @@
               </a:spcAft>
             </a:pPr>
             <a:r>
-              <a:rPr sz="2700" b="0" i="0">
-                <a:solidFill>
-                  <a:srgbClr val="14171C"/>
-                </a:solidFill>
-                <a:latin typeface="Georgia"/>
-              </a:rPr>
-              <a:t>These frameworks work for development. They do not work for wellbeing.</a:t>
-            </a:r>
-          </a:p>
-        </p:txBody>
-      </p:sp>
-      <p:sp>
-        <p:nvSpPr>
-          <p:cNvPr id="4" name="TextBox 3"/>
-          <p:cNvSpPr txBox="1"/>
-          <p:nvPr/>
-        </p:nvSpPr>
-        <p:spPr>
-          <a:xfrm>
-            <a:off x="566928" y="2286000"/>
-            <a:ext cx="8595360" cy="3840480"/>
-          </a:xfrm>
-          <a:prstGeom prst="rect">
-            <a:avLst/>
-          </a:prstGeom>
-          <a:noFill/>
-        </p:spPr>
-        <p:txBody>
-          <a:bodyPr wrap="square" lIns="0" rIns="0" tIns="0" bIns="0">
-            <a:spAutoFit/>
-          </a:bodyPr>
-          <a:lstStyle/>
+              <a:rPr sz="1000" b="0" i="0">
+                <a:solidFill>
+                  <a:srgbClr val="8A94A0"/>
+                </a:solidFill>
+                <a:latin typeface="Calibri"/>
+              </a:rPr>
+              <a:t>countries with SDG data, vs. series in the database</a:t>
+            </a:r>
+          </a:p>
+        </p:txBody>
+      </p:sp>
+      <p:sp>
+        <p:nvSpPr>
+          <p:cNvPr id="9" name="TextBox 8"/>
+          <p:cNvSpPr txBox="1"/>
+          <p:nvPr/>
+        </p:nvSpPr>
+        <p:spPr>
+          <a:xfrm>
+            <a:off x="8121700" y="5623560"/>
+            <a:ext cx="3503066" cy="914400"/>
+          </a:xfrm>
+          <a:prstGeom prst="rect">
+            <a:avLst/>
+          </a:prstGeom>
+          <a:noFill/>
+        </p:spPr>
+        <p:txBody>
+          <a:bodyPr wrap="square" lIns="0" rIns="0" tIns="0" bIns="0">
+            <a:spAutoFit/>
+          </a:bodyPr>
+          <a:lstStyle/>
+          <a:p>
+            <a:pPr>
+              <a:spcBef>
+                <a:spcPts val="0"/>
+              </a:spcBef>
+              <a:spcAft>
+                <a:spcPts val="400"/>
+              </a:spcAft>
+            </a:pPr>
+            <a:r>
+              <a:rPr sz="2200" b="0" i="0">
+                <a:solidFill>
+                  <a:srgbClr val="FCFCFB"/>
+                </a:solidFill>
+                <a:latin typeface="Consolas"/>
+              </a:rPr>
+              <a:t>0.041</a:t>
+            </a:r>
+          </a:p>
           <a:p>
             <a:pPr>
               <a:lnSpc>
-                <a:spcPct val="132000"/>
+                <a:spcPct val="120000"/>
               </a:lnSpc>
               <a:spcBef>
                 <a:spcPts val="0"/>
               </a:spcBef>
               <a:spcAft>
-                <a:spcPts val="1100"/>
-              </a:spcAft>
-            </a:pPr>
-            <a:r>
-              <a:rPr sz="1400" b="0" i="0">
-                <a:solidFill>
-                  <a:srgbClr val="5A6068"/>
+                <a:spcPts val="0"/>
+              </a:spcAft>
+            </a:pPr>
+            <a:r>
+              <a:rPr sz="1000" b="0" i="0">
+                <a:solidFill>
+                  <a:srgbClr val="8A94A0"/>
                 </a:solidFill>
                 <a:latin typeface="Calibri"/>
               </a:rPr>
-              <a:t>The HDI and SDG frameworks do not answer the question 'what makes people's lives better?' any more than a global income statistics database answers 'what makes a person happy?' They were designed to track development, measured at the aggregate level, with indicators chosen before the question of individual wellbeing was systematically tested. That is not a design failure; it is the intended scope.</a:t>
-            </a:r>
-          </a:p>
-          <a:p>
-            <a:pPr>
-              <a:lnSpc>
-                <a:spcPct val="132000"/>
-              </a:lnSpc>
-              <a:spcBef>
-                <a:spcPts val="0"/>
-              </a:spcBef>
-              <a:spcAft>
-                <a:spcPts val="1100"/>
-              </a:spcAft>
-            </a:pPr>
-            <a:r>
-              <a:rPr sz="1400" b="0" i="0">
-                <a:solidFill>
-                  <a:srgbClr val="5A6068"/>
-                </a:solidFill>
-                <a:latin typeface="Calibri"/>
-              </a:rPr>
-              <a:t>But it means the gap is structural. Education's access indicators work; pooling them with constructs that do not does not fix wellbeing prediction — it just builds a worse measure. Choosing a variable for health that is closer to saturated than the outcome it predicts is a measurement choice, not an incurable problem. And when a domain is never collected, no amount of better construction on the others will reach it.</a:t>
-            </a:r>
-          </a:p>
-        </p:txBody>
-      </p:sp>
-      <p:sp>
-        <p:nvSpPr>
-          <p:cNvPr id="5" name="TextBox 4"/>
-          <p:cNvSpPr txBox="1"/>
-          <p:nvPr/>
-        </p:nvSpPr>
-        <p:spPr>
-          <a:xfrm>
-            <a:off x="11338560" y="6263640"/>
-            <a:ext cx="548640" cy="274320"/>
-          </a:xfrm>
-          <a:prstGeom prst="rect">
-            <a:avLst/>
-          </a:prstGeom>
-          <a:noFill/>
-        </p:spPr>
-        <p:txBody>
-          <a:bodyPr wrap="square" lIns="0" rIns="0" tIns="0" bIns="0">
-            <a:spAutoFit/>
-          </a:bodyPr>
-          <a:lstStyle/>
-          <a:p>
-            <a:pPr algn="r">
-              <a:spcBef>
-                <a:spcPts val="0"/>
-              </a:spcBef>
-              <a:spcAft>
-                <a:spcPts val="0"/>
-              </a:spcAft>
-            </a:pPr>
-            <a:r>
-              <a:rPr sz="1100" b="0" i="0">
-                <a:solidFill>
-                  <a:srgbClr val="868D96"/>
-                </a:solidFill>
-                <a:latin typeface="Consolas"/>
-              </a:rPr>
-              <a:t>IV</a:t>
+              <a:t>median R² for trust — below income, health, education individually, above none</a:t>
             </a:r>
           </a:p>
         </p:txBody>
@@ -7375,7 +7445,7 @@
                 </a:solidFill>
                 <a:latin typeface="Consolas"/>
               </a:rPr>
-              <a:t>IMPLICATION 1 · MEASUREMENT CHOICES CONSTRAIN WHAT FRAMEWORKS CAN SEE</a:t>
+              <a:t>THE DISCONNECT</a:t>
             </a:r>
           </a:p>
         </p:txBody>
@@ -7420,7 +7490,7 @@
                 </a:solidFill>
                 <a:latin typeface="Georgia"/>
               </a:rPr>
-              <a:t>Education and health: the case for measurement specificity</a:t>
+              <a:t>These frameworks work for development. They do not work for wellbeing.</a:t>
             </a:r>
           </a:p>
         </p:txBody>
@@ -7465,7 +7535,7 @@
                 </a:solidFill>
                 <a:latin typeface="Calibri"/>
               </a:rPr>
-              <a:t>Education is significant everywhere it is measured as attainment, but nearly invisible in SDG4 because most indicators measure something else. Health is nearly invisible in the HDI because life expectancy has saturated. Neither domain has changed; the frameworks' construction choices have.</a:t>
+              <a:t>The HDI and SDG frameworks do not answer the question 'what makes people's lives better?' any more than a global income statistics database answers 'what makes a person happy?' They were designed to track development, measured at the aggregate level, with indicators chosen before the question of individual wellbeing was systematically tested. That is not a design failure; it is the intended scope.</a:t>
             </a:r>
           </a:p>
           <a:p>
@@ -7487,7 +7557,7 @@
                 </a:solidFill>
                 <a:latin typeface="Calibri"/>
               </a:rPr>
-              <a:t>For education, this suggests development measurement should weigh access and completion more heavily than parity ratios in wellbeing contexts — not universally, but with explicit construction choices that account for what is known to matter. For health, it suggests that wellbeing-motivated measurement may need different variables at different development levels: life expectancy in lower-income settings, self-reported health or specific conditions in saturated ones.</a:t>
+              <a:t>But it means the gap is structural. Education's access indicators work; pooling them with constructs that do not does not fix wellbeing prediction — it just builds a worse measure. Choosing a variable for health that is closer to saturated than the outcome it predicts is a measurement choice, not an incurable problem. And when a domain is never collected, no amount of better construction on the others will reach it.</a:t>
             </a:r>
           </a:p>
         </p:txBody>
@@ -7597,7 +7667,7 @@
                 </a:solidFill>
                 <a:latin typeface="Consolas"/>
               </a:rPr>
-              <a:t>IMPLICATION 2 · COVERAGE GAPS ARE MORE FUNDAMENTAL THAN CONSTRUCT CHOICE</a:t>
+              <a:t>IMPLICATION 1 · MEASUREMENT CHOICES CONSTRAIN WHAT FRAMEWORKS CAN SEE</a:t>
             </a:r>
           </a:p>
         </p:txBody>
@@ -7642,7 +7712,7 @@
                 </a:solidFill>
                 <a:latin typeface="Georgia"/>
               </a:rPr>
-              <a:t>Social trust: why you cannot fix a measurement by measuring better</a:t>
+              <a:t>Education and health: the case for measurement specificity</a:t>
             </a:r>
           </a:p>
         </p:txBody>
@@ -7687,7 +7757,7 @@
                 </a:solidFill>
                 <a:latin typeface="Calibri"/>
               </a:rPr>
-              <a:t>Social trust is the most tentative finding here. The ESS is Europe-only, across 36 countries, and relies on a single item. That bounds the claim: the pattern holds in Europe, with a wellbeing survey, on a self-report basis. It does not claim universality.</a:t>
+              <a:t>Education is significant everywhere it is measured as attainment, but nearly invisible in SDG4 because most indicators measure something else. Health is nearly invisible in the HDI because life expectancy has saturated. Neither domain has changed; the frameworks' construction choices have.</a:t>
             </a:r>
           </a:p>
           <a:p>
@@ -7709,29 +7779,7 @@
                 </a:solidFill>
                 <a:latin typeface="Calibri"/>
               </a:rPr>
-              <a:t>But the reason it is tentative points to the deepest problem: trust is not collected at global scale in either framework. The SDG database has 13 series adjacent to trust, but they measure institutional confidence, not interpersonal trust, and they are intermittent (147 of 163 country-series have fewer than four years of data). This is not a construct-choice problem that better measurement can solve. It is a coverage gap that requires deciding to collect the data in the first place.</a:t>
-            </a:r>
-          </a:p>
-          <a:p>
-            <a:pPr>
-              <a:lnSpc>
-                <a:spcPct val="132000"/>
-              </a:lnSpc>
-              <a:spcBef>
-                <a:spcPts val="0"/>
-              </a:spcBef>
-              <a:spcAft>
-                <a:spcPts val="1100"/>
-              </a:spcAft>
-            </a:pPr>
-            <a:r>
-              <a:rPr sz="1400" b="0" i="0">
-                <a:solidFill>
-                  <a:srgbClr val="5A6068"/>
-                </a:solidFill>
-                <a:latin typeface="Calibri"/>
-              </a:rPr>
-              <a:t>For wellbeing-conscious development monitoring, this suggests either building interpersonal-trust measurement into the core frameworks, or acknowledging that other surveys (the ESS, Gallup World Poll, World Values Survey) may be more suitable for understanding what shapes lived experience.</a:t>
+              <a:t>For education, this suggests development measurement should weigh access and completion more heavily than parity ratios in wellbeing contexts — not universally, but with explicit construction choices that account for what is known to matter. For health, it suggests that wellbeing-motivated measurement may need different variables at different development levels: life expectancy in lower-income settings, self-reported health or specific conditions in saturated ones.</a:t>
             </a:r>
           </a:p>
         </p:txBody>
@@ -7841,7 +7889,7 @@
                 </a:solidFill>
                 <a:latin typeface="Consolas"/>
               </a:rPr>
-              <a:t>CONCLUSION</a:t>
+              <a:t>IMPLICATION 2 · COVERAGE GAPS ARE MORE FUNDAMENTAL THAN CONSTRUCT CHOICE</a:t>
             </a:r>
           </a:p>
         </p:txBody>
@@ -7886,7 +7934,7 @@
                 </a:solidFill>
                 <a:latin typeface="Georgia"/>
               </a:rPr>
-              <a:t>A question rather than a prescription</a:t>
+              <a:t>Social trust: why you cannot fix a measurement by measuring better</a:t>
             </a:r>
           </a:p>
         </p:txBody>
@@ -7931,7 +7979,7 @@
                 </a:solidFill>
                 <a:latin typeface="Calibri"/>
               </a:rPr>
-              <a:t>The evidence shows a consistent pattern: which domain looks most consequential for wellbeing depends on which framework measures it and what variable they chose. This is not about the domains; it is about the tools.</a:t>
+              <a:t>Social trust is the most tentative finding here. The ESS is Europe-only, across 36 countries, and relies on a single item. That bounds the claim: the pattern holds in Europe, with a wellbeing survey, on a self-report basis. It does not claim universality.</a:t>
             </a:r>
           </a:p>
           <a:p>
@@ -7953,7 +8001,7 @@
                 </a:solidFill>
                 <a:latin typeface="Calibri"/>
               </a:rPr>
-              <a:t>Whether development frameworks should be redesigned around wellbeing is outside the scope here. But if they were, this finding suggests the question to ask: should measurement choices be made with explicit reference to which variables still move and still matter for lived experience? Should coverage be built in for domains the frameworks discovered only by studying something else?</a:t>
+              <a:t>But the reason it is tentative points to the deepest problem: trust is not collected at global scale in either framework. The SDG database has 13 series adjacent to trust, but they measure institutional confidence, not interpersonal trust, and they are intermittent (147 of 163 country-series have fewer than four years of data). This is not a construct-choice problem that better measurement can solve. It is a coverage gap that requires deciding to collect the data in the first place.</a:t>
             </a:r>
           </a:p>
           <a:p>
@@ -7975,7 +8023,7 @@
                 </a:solidFill>
                 <a:latin typeface="Calibri"/>
               </a:rPr>
-              <a:t>The frameworks work well for their stated purpose. The question is whether wellbeing should become part of that purpose — and if it does, whether the measurement that comes from that intent should be different from the aggregate, development-first measurement in place today.</a:t>
+              <a:t>For wellbeing-conscious development monitoring, this suggests either building interpersonal-trust measurement into the core frameworks, or acknowledging that other surveys (the ESS, Gallup World Poll, World Values Survey) may be more suitable for understanding what shapes lived experience.</a:t>
             </a:r>
           </a:p>
         </p:txBody>
@@ -8031,6 +8079,250 @@
 </file>
 
 <file path=ppt/slides/slide24.xml><?xml version="1.0" encoding="utf-8"?>
+<p:sld xmlns:a="http://schemas.openxmlformats.org/drawingml/2006/main" xmlns:p="http://schemas.openxmlformats.org/presentationml/2006/main" xmlns:r="http://schemas.openxmlformats.org/officeDocument/2006/relationships">
+  <p:cSld>
+    <p:bg>
+      <p:bgPr>
+        <a:solidFill>
+          <a:srgbClr val="FCFCFB"/>
+        </a:solidFill>
+        <a:effectLst/>
+      </p:bgPr>
+    </p:bg>
+    <p:spTree>
+      <p:nvGrpSpPr>
+        <p:cNvPr id="1" name=""/>
+        <p:cNvGrpSpPr/>
+        <p:nvPr/>
+      </p:nvGrpSpPr>
+      <p:grpSpPr/>
+      <p:sp>
+        <p:nvSpPr>
+          <p:cNvPr id="2" name="TextBox 1"/>
+          <p:cNvSpPr txBox="1"/>
+          <p:nvPr/>
+        </p:nvSpPr>
+        <p:spPr>
+          <a:xfrm>
+            <a:off x="566928" y="502920"/>
+            <a:ext cx="8595360" cy="274320"/>
+          </a:xfrm>
+          <a:prstGeom prst="rect">
+            <a:avLst/>
+          </a:prstGeom>
+          <a:noFill/>
+        </p:spPr>
+        <p:txBody>
+          <a:bodyPr wrap="square" lIns="0" rIns="0" tIns="0" bIns="0">
+            <a:spAutoFit/>
+          </a:bodyPr>
+          <a:lstStyle/>
+          <a:p>
+            <a:pPr>
+              <a:spcBef>
+                <a:spcPts val="0"/>
+              </a:spcBef>
+              <a:spcAft>
+                <a:spcPts val="0"/>
+              </a:spcAft>
+            </a:pPr>
+            <a:r>
+              <a:rPr sz="1000" b="0" i="0">
+                <a:solidFill>
+                  <a:srgbClr val="A63A30"/>
+                </a:solidFill>
+                <a:latin typeface="Consolas"/>
+              </a:rPr>
+              <a:t>CONCLUSION</a:t>
+            </a:r>
+          </a:p>
+        </p:txBody>
+      </p:sp>
+      <p:sp>
+        <p:nvSpPr>
+          <p:cNvPr id="3" name="TextBox 2"/>
+          <p:cNvSpPr txBox="1"/>
+          <p:nvPr/>
+        </p:nvSpPr>
+        <p:spPr>
+          <a:xfrm>
+            <a:off x="566928" y="914400"/>
+            <a:ext cx="8595360" cy="1371600"/>
+          </a:xfrm>
+          <a:prstGeom prst="rect">
+            <a:avLst/>
+          </a:prstGeom>
+          <a:noFill/>
+        </p:spPr>
+        <p:txBody>
+          <a:bodyPr wrap="square" lIns="0" rIns="0" tIns="0" bIns="0">
+            <a:spAutoFit/>
+          </a:bodyPr>
+          <a:lstStyle/>
+          <a:p>
+            <a:pPr>
+              <a:lnSpc>
+                <a:spcPct val="108000"/>
+              </a:lnSpc>
+              <a:spcBef>
+                <a:spcPts val="0"/>
+              </a:spcBef>
+              <a:spcAft>
+                <a:spcPts val="0"/>
+              </a:spcAft>
+            </a:pPr>
+            <a:r>
+              <a:rPr sz="2700" b="0" i="0">
+                <a:solidFill>
+                  <a:srgbClr val="14171C"/>
+                </a:solidFill>
+                <a:latin typeface="Georgia"/>
+              </a:rPr>
+              <a:t>A question rather than a prescription</a:t>
+            </a:r>
+          </a:p>
+        </p:txBody>
+      </p:sp>
+      <p:sp>
+        <p:nvSpPr>
+          <p:cNvPr id="4" name="TextBox 3"/>
+          <p:cNvSpPr txBox="1"/>
+          <p:nvPr/>
+        </p:nvSpPr>
+        <p:spPr>
+          <a:xfrm>
+            <a:off x="566928" y="2286000"/>
+            <a:ext cx="8595360" cy="3840480"/>
+          </a:xfrm>
+          <a:prstGeom prst="rect">
+            <a:avLst/>
+          </a:prstGeom>
+          <a:noFill/>
+        </p:spPr>
+        <p:txBody>
+          <a:bodyPr wrap="square" lIns="0" rIns="0" tIns="0" bIns="0">
+            <a:spAutoFit/>
+          </a:bodyPr>
+          <a:lstStyle/>
+          <a:p>
+            <a:pPr>
+              <a:lnSpc>
+                <a:spcPct val="132000"/>
+              </a:lnSpc>
+              <a:spcBef>
+                <a:spcPts val="0"/>
+              </a:spcBef>
+              <a:spcAft>
+                <a:spcPts val="1100"/>
+              </a:spcAft>
+            </a:pPr>
+            <a:r>
+              <a:rPr sz="1400" b="0" i="0">
+                <a:solidFill>
+                  <a:srgbClr val="5A6068"/>
+                </a:solidFill>
+                <a:latin typeface="Calibri"/>
+              </a:rPr>
+              <a:t>The evidence shows a consistent pattern: which domain looks most consequential for wellbeing depends on which framework measures it and what variable they chose. This is not about the domains; it is about the tools.</a:t>
+            </a:r>
+          </a:p>
+          <a:p>
+            <a:pPr>
+              <a:lnSpc>
+                <a:spcPct val="132000"/>
+              </a:lnSpc>
+              <a:spcBef>
+                <a:spcPts val="0"/>
+              </a:spcBef>
+              <a:spcAft>
+                <a:spcPts val="1100"/>
+              </a:spcAft>
+            </a:pPr>
+            <a:r>
+              <a:rPr sz="1400" b="0" i="0">
+                <a:solidFill>
+                  <a:srgbClr val="5A6068"/>
+                </a:solidFill>
+                <a:latin typeface="Calibri"/>
+              </a:rPr>
+              <a:t>Whether development frameworks should be redesigned around wellbeing is outside the scope here. But if they were, this finding suggests the question to ask: should measurement choices be made with explicit reference to which variables still move and still matter for lived experience? Should coverage be built in for domains the frameworks discovered only by studying something else?</a:t>
+            </a:r>
+          </a:p>
+          <a:p>
+            <a:pPr>
+              <a:lnSpc>
+                <a:spcPct val="132000"/>
+              </a:lnSpc>
+              <a:spcBef>
+                <a:spcPts val="0"/>
+              </a:spcBef>
+              <a:spcAft>
+                <a:spcPts val="1100"/>
+              </a:spcAft>
+            </a:pPr>
+            <a:r>
+              <a:rPr sz="1400" b="0" i="0">
+                <a:solidFill>
+                  <a:srgbClr val="5A6068"/>
+                </a:solidFill>
+                <a:latin typeface="Calibri"/>
+              </a:rPr>
+              <a:t>The frameworks work well for their stated purpose. The question is whether wellbeing should become part of that purpose — and if it does, whether the measurement that comes from that intent should be different from the aggregate, development-first measurement in place today.</a:t>
+            </a:r>
+          </a:p>
+        </p:txBody>
+      </p:sp>
+      <p:sp>
+        <p:nvSpPr>
+          <p:cNvPr id="5" name="TextBox 4"/>
+          <p:cNvSpPr txBox="1"/>
+          <p:nvPr/>
+        </p:nvSpPr>
+        <p:spPr>
+          <a:xfrm>
+            <a:off x="11338560" y="6263640"/>
+            <a:ext cx="548640" cy="274320"/>
+          </a:xfrm>
+          <a:prstGeom prst="rect">
+            <a:avLst/>
+          </a:prstGeom>
+          <a:noFill/>
+        </p:spPr>
+        <p:txBody>
+          <a:bodyPr wrap="square" lIns="0" rIns="0" tIns="0" bIns="0">
+            <a:spAutoFit/>
+          </a:bodyPr>
+          <a:lstStyle/>
+          <a:p>
+            <a:pPr algn="r">
+              <a:spcBef>
+                <a:spcPts val="0"/>
+              </a:spcBef>
+              <a:spcAft>
+                <a:spcPts val="0"/>
+              </a:spcAft>
+            </a:pPr>
+            <a:r>
+              <a:rPr sz="1100" b="0" i="0">
+                <a:solidFill>
+                  <a:srgbClr val="868D96"/>
+                </a:solidFill>
+                <a:latin typeface="Consolas"/>
+              </a:rPr>
+              <a:t>IV</a:t>
+            </a:r>
+          </a:p>
+        </p:txBody>
+      </p:sp>
+    </p:spTree>
+  </p:cSld>
+  <p:clrMapOvr>
+    <a:masterClrMapping/>
+  </p:clrMapOvr>
+</p:sld>
+</file>
+
+<file path=ppt/slides/slide25.xml><?xml version="1.0" encoding="utf-8"?>
 <p:sld xmlns:a="http://schemas.openxmlformats.org/drawingml/2006/main" xmlns:p="http://schemas.openxmlformats.org/presentationml/2006/main" xmlns:r="http://schemas.openxmlformats.org/officeDocument/2006/relationships">
   <p:cSld>
     <p:bg>
@@ -8187,7 +8479,7 @@
 </p:sld>
 </file>
 
-<file path=ppt/slides/slide25.xml><?xml version="1.0" encoding="utf-8"?>
+<file path=ppt/slides/slide26.xml><?xml version="1.0" encoding="utf-8"?>
 <p:sld xmlns:a="http://schemas.openxmlformats.org/drawingml/2006/main" xmlns:p="http://schemas.openxmlformats.org/presentationml/2006/main" xmlns:r="http://schemas.openxmlformats.org/officeDocument/2006/relationships">
   <p:cSld>
     <p:bg>
@@ -8706,7 +8998,7 @@
 </p:sld>
 </file>
 
-<file path=ppt/slides/slide26.xml><?xml version="1.0" encoding="utf-8"?>
+<file path=ppt/slides/slide27.xml><?xml version="1.0" encoding="utf-8"?>
 <p:sld xmlns:a="http://schemas.openxmlformats.org/drawingml/2006/main" xmlns:p="http://schemas.openxmlformats.org/presentationml/2006/main" xmlns:r="http://schemas.openxmlformats.org/officeDocument/2006/relationships">
   <p:cSld>
     <p:bg>

--- a/deck/Measured_Where_It_Varies.pptx
+++ b/deck/Measured_Where_It_Varies.pptx
@@ -32,6 +32,8 @@
     <p:sldId id="280" r:id="rId31"/>
     <p:sldId id="281" r:id="rId32"/>
     <p:sldId id="282" r:id="rId33"/>
+    <p:sldId id="283" r:id="rId34"/>
+    <p:sldId id="284" r:id="rId35"/>
   </p:sldIdLst>
   <p:sldSz cx="12191695" cy="6858000" type="screen4x3"/>
   <p:notesSz cx="6858000" cy="9144000"/>
@@ -3425,7 +3427,7 @@
                 </a:solidFill>
                 <a:latin typeface="Consolas"/>
               </a:rPr>
-              <a:t>RESULT 1 · EDUCATION</a:t>
+              <a:t>ALL THREE MATTER</a:t>
             </a:r>
           </a:p>
         </p:txBody>
@@ -3470,7 +3472,7 @@
                 </a:solidFill>
                 <a:latin typeface="Georgia"/>
               </a:rPr>
-              <a:t>Significant in 92% of ESS countries, but only when measured as attainment</a:t>
+              <a:t>Education, health, and social trust all significantly predict life satisfaction</a:t>
             </a:r>
           </a:p>
         </p:txBody>
@@ -3515,29 +3517,7 @@
                 </a:solidFill>
                 <a:latin typeface="Calibri"/>
               </a:rPr>
-              <a:t>Expected years of schooling predicts life satisfaction in 34% of HDI countries — the highest among the five HDI components, but still a minority. In the ESS individual data, education (measured as years attained) is significant in 92% of countries. The difference is not about the data; it is about which construct you count.</a:t>
-            </a:r>
-          </a:p>
-          <a:p>
-            <a:pPr>
-              <a:lnSpc>
-                <a:spcPct val="132000"/>
-              </a:lnSpc>
-              <a:spcBef>
-                <a:spcPts val="0"/>
-              </a:spcBef>
-              <a:spcAft>
-                <a:spcPts val="1100"/>
-              </a:spcAft>
-            </a:pPr>
-            <a:r>
-              <a:rPr sz="1150" b="0" i="0">
-                <a:solidFill>
-                  <a:srgbClr val="5A6068"/>
-                </a:solidFill>
-                <a:latin typeface="Calibri"/>
-              </a:rPr>
-              <a:t>The SDG framework's education goal is 35 indicators spanning access, attainment, equity (parity ratios), learning outcomes, infrastructure, and financing. Pooled, 3.3% of country-indicator pairs are significant. But access indicators alone (primary and secondary enrollment, completion rates) reach 12.7% — because they measure participation, the closest SDG analogue to HDI attainment. Parity ratios, learning outcomes, and infrastructure contribute little to wellbeing, so pooling them masks the signal from access.</a:t>
+              <a:t>In the European Social Survey, where all three are measured at the individual level, all three are significant in the majority of countries. But which framework can see all three? Which sees only some? The answer depends on three different failure modes.</a:t>
             </a:r>
           </a:p>
         </p:txBody>
@@ -3586,7 +3566,7 @@
       </p:sp>
       <p:pic>
         <p:nvPicPr>
-          <p:cNvPr id="6" name="Picture 5" descr="education_levels_comparison.png"/>
+          <p:cNvPr id="6" name="Picture 5" descr="domains_at_levels_comparison.png"/>
           <p:cNvPicPr>
             <a:picLocks noChangeAspect="1"/>
           </p:cNvPicPr>
@@ -3600,8 +3580,8 @@
         </p:blipFill>
         <p:spPr>
           <a:xfrm>
-            <a:off x="5120640" y="1412748"/>
-            <a:ext cx="6537960" cy="3566160"/>
+            <a:off x="5120640" y="2028335"/>
+            <a:ext cx="6537960" cy="2334985"/>
           </a:xfrm>
           <a:prstGeom prst="rect">
             <a:avLst/>
@@ -3648,7 +3628,7 @@
                 </a:solidFill>
                 <a:latin typeface="Calibri"/>
               </a:rPr>
-              <a:t>Education's R² (% of countries significant at levels) across three frameworks. SDG4's pooled rate (3.3%) includes all 35 constructs; access alone reaches 12.7%.</a:t>
+              <a:t>% of countries where each domain significantly predicts wellbeing at levels. ESS: 36 countries. HDI: 150 countries. SDG: country-indicator pairs.</a:t>
             </a:r>
           </a:p>
         </p:txBody>
@@ -3716,7 +3696,7 @@
                 </a:solidFill>
                 <a:latin typeface="Consolas"/>
               </a:rPr>
-              <a:t>ACCESS CHECK · WHY EDUCATION'S RANK SWINGS</a:t>
+              <a:t>RESULT 1 · EDUCATION</a:t>
             </a:r>
           </a:p>
         </p:txBody>
@@ -3761,7 +3741,7 @@
                 </a:solidFill>
                 <a:latin typeface="Georgia"/>
               </a:rPr>
-              <a:t>The difference between measuring attainment and measuring parity</a:t>
+              <a:t>Significant in 92% of ESS countries, but only when measured as attainment</a:t>
             </a:r>
           </a:p>
         </p:txBody>
@@ -3806,7 +3786,29 @@
                 </a:solidFill>
                 <a:latin typeface="Calibri"/>
               </a:rPr>
-              <a:t>When the SDG framework pools constructs, it weights all equally by series count. Parity ratios are 18 of 35 series but carry almost no signal for wellbeing. Learning outcomes (6 series, 0.9% significant), infrastructure (7 series, 2.0%), and financing (1 series, 11.5%) together drive the pooled rate below what access alone achieves. This is not a discovery about education; it is a mechanical artifact of construction.</a:t>
+              <a:t>Expected years of schooling predicts life satisfaction in 34% of HDI countries — the highest among the five HDI components, but still a minority. In the ESS individual data, education (measured as years attained) is significant in 92% of countries. The difference is not about the data; it is about which construct you count.</a:t>
+            </a:r>
+          </a:p>
+          <a:p>
+            <a:pPr>
+              <a:lnSpc>
+                <a:spcPct val="132000"/>
+              </a:lnSpc>
+              <a:spcBef>
+                <a:spcPts val="0"/>
+              </a:spcBef>
+              <a:spcAft>
+                <a:spcPts val="1100"/>
+              </a:spcAft>
+            </a:pPr>
+            <a:r>
+              <a:rPr sz="1150" b="0" i="0">
+                <a:solidFill>
+                  <a:srgbClr val="5A6068"/>
+                </a:solidFill>
+                <a:latin typeface="Calibri"/>
+              </a:rPr>
+              <a:t>The SDG framework's education goal is 35 indicators spanning access, attainment, equity (parity ratios), learning outcomes, infrastructure, and financing. Pooled, 3.3% of country-indicator pairs are significant. But access indicators alone (primary and secondary enrollment, completion rates) reach 12.7% — because they measure participation, the closest SDG analogue to HDI attainment. Parity ratios, learning outcomes, and infrastructure contribute little to wellbeing, so pooling them masks the signal from access.</a:t>
             </a:r>
           </a:p>
         </p:txBody>
@@ -3855,7 +3857,7 @@
       </p:sp>
       <p:pic>
         <p:nvPicPr>
-          <p:cNvPr id="6" name="Picture 5" descr="sdg4_unpooled.png"/>
+          <p:cNvPr id="6" name="Picture 5" descr="education_levels_comparison.png"/>
           <p:cNvPicPr>
             <a:picLocks noChangeAspect="1"/>
           </p:cNvPicPr>
@@ -3869,8 +3871,8 @@
         </p:blipFill>
         <p:spPr>
           <a:xfrm>
-            <a:off x="5120640" y="1103208"/>
-            <a:ext cx="6537960" cy="4185240"/>
+            <a:off x="5120640" y="1412748"/>
+            <a:ext cx="6537960" cy="3566160"/>
           </a:xfrm>
           <a:prstGeom prst="rect">
             <a:avLst/>
@@ -3917,7 +3919,7 @@
                 </a:solidFill>
                 <a:latin typeface="Calibri"/>
               </a:rPr>
-              <a:t>SDG4 by construct: access and participation (12.7%) vs. equity/parity ratios (2.5%), learning outcomes (0.9%), and others.</a:t>
+              <a:t>Education's R² (% of countries significant at levels) across three frameworks. SDG4's pooled rate (3.3%) includes all 35 constructs; access alone reaches 12.7%.</a:t>
             </a:r>
           </a:p>
         </p:txBody>
@@ -3985,7 +3987,7 @@
                 </a:solidFill>
                 <a:latin typeface="Consolas"/>
               </a:rPr>
-              <a:t>RESULT 2 · HEALTH</a:t>
+              <a:t>ACCESS CHECK · WHY EDUCATION'S RANK SWINGS</a:t>
             </a:r>
           </a:p>
         </p:txBody>
@@ -4030,7 +4032,7 @@
                 </a:solidFill>
                 <a:latin typeface="Georgia"/>
               </a:rPr>
-              <a:t>Significant in 100% of ESS countries, weak in the HDI, strong in the SDGs</a:t>
+              <a:t>The difference between measuring attainment and measuring parity</a:t>
             </a:r>
           </a:p>
         </p:txBody>
@@ -4075,29 +4077,7 @@
                 </a:solidFill>
                 <a:latin typeface="Calibri"/>
               </a:rPr>
-              <a:t>Self-rated health is the single strongest predictor of life satisfaction in the ESS: 100% of countries significant at the individual level, median R² = 0.091 (four times education's). In the HDI, health's proxy is life expectancy, and it is the weakest of five components — only 20% of countries significant. In the SDG database, health (Goal 3) reaches 11.5% of country-indicator pairs, fourth of 17 goals.</a:t>
-            </a:r>
-          </a:p>
-          <a:p>
-            <a:pPr>
-              <a:lnSpc>
-                <a:spcPct val="132000"/>
-              </a:lnSpc>
-              <a:spcBef>
-                <a:spcPts val="0"/>
-              </a:spcBef>
-              <a:spcAft>
-                <a:spcPts val="1100"/>
-              </a:spcAft>
-            </a:pPr>
-            <a:r>
-              <a:rPr sz="1150" b="0" i="0">
-                <a:solidFill>
-                  <a:srgbClr val="5A6068"/>
-                </a:solidFill>
-                <a:latin typeface="Calibri"/>
-              </a:rPr>
-              <a:t>Life expectancy is close to saturated in developed countries: the top 100 countries range from 81 to 85 years. The variance that remains is so small that between-country differences add little predictive power. This is not health's problem; it is the specific HDI indicator's problem. The gap between frameworks shows the importance of variable choice, not of health itself.</a:t>
+              <a:t>When the SDG framework pools constructs, it weights all equally by series count. Parity ratios are 18 of 35 series but carry almost no signal for wellbeing. Learning outcomes (6 series, 0.9% significant), infrastructure (7 series, 2.0%), and financing (1 series, 11.5%) together drive the pooled rate below what access alone achieves. This is not a discovery about education; it is a mechanical artifact of construction.</a:t>
             </a:r>
           </a:p>
         </p:txBody>
@@ -4146,7 +4126,7 @@
       </p:sp>
       <p:pic>
         <p:nvPicPr>
-          <p:cNvPr id="6" name="Picture 5" descr="health_levels_comparison.png"/>
+          <p:cNvPr id="6" name="Picture 5" descr="sdg4_unpooled.png"/>
           <p:cNvPicPr>
             <a:picLocks noChangeAspect="1"/>
           </p:cNvPicPr>
@@ -4160,8 +4140,8 @@
         </p:blipFill>
         <p:spPr>
           <a:xfrm>
-            <a:off x="5120640" y="1234440"/>
-            <a:ext cx="6537960" cy="3922776"/>
+            <a:off x="5120640" y="1103208"/>
+            <a:ext cx="6537960" cy="4185240"/>
           </a:xfrm>
           <a:prstGeom prst="rect">
             <a:avLst/>
@@ -4208,7 +4188,7 @@
                 </a:solidFill>
                 <a:latin typeface="Calibri"/>
               </a:rPr>
-              <a:t>Health's R² (% of countries significant at levels) across three frameworks. Self-rated health in ESS dominates; external HDI proxy (life expectancy) is weak.</a:t>
+              <a:t>SDG4 by construct: access and participation (12.7%) vs. equity/parity ratios (2.5%), learning outcomes (0.9%), and others.</a:t>
             </a:r>
           </a:p>
         </p:txBody>
@@ -4276,7 +4256,7 @@
                 </a:solidFill>
                 <a:latin typeface="Consolas"/>
               </a:rPr>
-              <a:t>SDG INDICATOR RANKINGS · WHY HEALTH MATTERS DESPITE LOW %</a:t>
+              <a:t>RESULT 2 · HEALTH</a:t>
             </a:r>
           </a:p>
         </p:txBody>
@@ -4321,7 +4301,7 @@
                 </a:solidFill>
                 <a:latin typeface="Georgia"/>
               </a:rPr>
-              <a:t>Health indicators rank 4th among 17 SDG goals; the low percentage reflects weak overall SDG signal</a:t>
+              <a:t>Significant in 100% of ESS countries, weak in the HDI, strong in the SDGs</a:t>
             </a:r>
           </a:p>
         </p:txBody>
@@ -4366,7 +4346,7 @@
                 </a:solidFill>
                 <a:latin typeface="Calibri"/>
               </a:rPr>
-              <a:t>The SDG database is vast: 661 series across 42 countries testing 17 goals. The overall significance rate is low — only 3-4% of all country-indicator pairs are significant. Within that sparse landscape, health indicators rank fourth, with 16 of the top 25 most predictive SDG series falling under Goal 3. These are survival measures: infant mortality, under-five mortality, stunting, neonatal mortality, sanitation, drinking water — all objective, externally measured.</a:t>
+              <a:t>Self-rated health is the single strongest predictor of life satisfaction in the ESS: 100% of countries significant at the individual level, median R² = 0.091 (four times education's). In the HDI, health's proxy is life expectancy, and it is the weakest of five components — only 20% of countries significant. In the SDG database, health (Goal 3) reaches 11.5% of country-indicator pairs, fourth of 17 goals.</a:t>
             </a:r>
           </a:p>
           <a:p>
@@ -4388,7 +4368,7 @@
                 </a:solidFill>
                 <a:latin typeface="Calibri"/>
               </a:rPr>
-              <a:t>The low 11.5% rate for health is not evidence that health doesn't matter. It is evidence that most of the SDG database does not predict wellbeing. Within that context, health ranks high.</a:t>
+              <a:t>Life expectancy is close to saturated in developed countries: the top 100 countries range from 81 to 85 years. The variance that remains is so small that between-country differences add little predictive power. This is not health's problem; it is the specific HDI indicator's problem. The gap between frameworks shows the importance of variable choice, not of health itself.</a:t>
             </a:r>
           </a:p>
         </p:txBody>
@@ -4437,7 +4417,7 @@
       </p:sp>
       <p:pic>
         <p:nvPicPr>
-          <p:cNvPr id="6" name="Picture 5" descr="sdg_indicator_top20.png"/>
+          <p:cNvPr id="6" name="Picture 5" descr="health_levels_comparison.png"/>
           <p:cNvPicPr>
             <a:picLocks noChangeAspect="1"/>
           </p:cNvPicPr>
@@ -4451,8 +4431,8 @@
         </p:blipFill>
         <p:spPr>
           <a:xfrm>
-            <a:off x="5279547" y="658368"/>
-            <a:ext cx="6220145" cy="5074920"/>
+            <a:off x="5120640" y="1234440"/>
+            <a:ext cx="6537960" cy="3922776"/>
           </a:xfrm>
           <a:prstGeom prst="rect">
             <a:avLst/>
@@ -4499,7 +4479,7 @@
                 </a:solidFill>
                 <a:latin typeface="Calibri"/>
               </a:rPr>
-              <a:t>Top 25 SDG indicators by significance. Health (Goal 3) dominates: 16 of 25 top series.</a:t>
+              <a:t>Health's R² (% of countries significant at levels) across three frameworks. Self-rated health in ESS dominates; external HDI proxy (life expectancy) is weak.</a:t>
             </a:r>
           </a:p>
         </p:txBody>
@@ -4567,7 +4547,7 @@
                 </a:solidFill>
                 <a:latin typeface="Consolas"/>
               </a:rPr>
-              <a:t>RESULT 3 · SOCIAL TRUST</a:t>
+              <a:t>SDG INDICATOR RANKINGS · WHY HEALTH MATTERS DESPITE LOW %</a:t>
             </a:r>
           </a:p>
         </p:txBody>
@@ -4612,7 +4592,7 @@
                 </a:solidFill>
                 <a:latin typeface="Georgia"/>
               </a:rPr>
-              <a:t>Social trust leads the ESS, is nearly invisible to development frameworks</a:t>
+              <a:t>Health indicators rank 4th among 17 SDG goals; the low percentage reflects weak overall SDG signal</a:t>
             </a:r>
           </a:p>
         </p:txBody>
@@ -4657,7 +4637,7 @@
                 </a:solidFill>
                 <a:latin typeface="Calibri"/>
               </a:rPr>
-              <a:t>Social trust — 'most people can be trusted' — is significant in 94% of ESS countries, third strongest domain after health and income, with median R² = 0.041. Neither the HDI nor the SDG framework measures it at all.</a:t>
+              <a:t>The SDG database is vast: 661 series across 42 countries testing 17 goals. The overall significance rate is low — only 3-4% of all country-indicator pairs are significant. At the goal level, health (Goal 3) reaches 11.5% of country-indicator pairs, ranking fourth of 17 goals. Within that sparse landscape, health indicators dominate the top-ranked individual series, with 16 of the top 25 most predictive SDG series falling under Goal 3. These are survival measures: infant mortality, under-five mortality, stunting, neonatal mortality, sanitation, drinking water — all objective, externally measured.</a:t>
             </a:r>
           </a:p>
           <a:p>
@@ -4679,29 +4659,7 @@
                 </a:solidFill>
                 <a:latin typeface="Calibri"/>
               </a:rPr>
-              <a:t>The SDG database does carry 13 trust- and satisfaction-adjacent series under Goal 16: satisfaction with public services, perception of bribery, perceived decision-making inclusiveness. But these measure institutional confidence, not interpersonal trust — a different construct, and one that correlates more weakly with life satisfaction even when tested across countries. Moreover, their median coverage is one observation per country-series against six for the database as a whole; 147 of 163 country-series cannot support a time-series design.</a:t>
-            </a:r>
-          </a:p>
-          <a:p>
-            <a:pPr>
-              <a:lnSpc>
-                <a:spcPct val="132000"/>
-              </a:lnSpc>
-              <a:spcBef>
-                <a:spcPts val="0"/>
-              </a:spcBef>
-              <a:spcAft>
-                <a:spcPts val="1100"/>
-              </a:spcAft>
-            </a:pPr>
-            <a:r>
-              <a:rPr sz="1150" b="0" i="0">
-                <a:solidFill>
-                  <a:srgbClr val="5A6068"/>
-                </a:solidFill>
-                <a:latin typeface="Calibri"/>
-              </a:rPr>
-              <a:t>Education's and health's problems are about which variable to count within a domain. Trust's problem is different: it is not in the frameworks at all. That is a coverage gap, not a measurement problem.</a:t>
+              <a:t>The low 11.5% rate for health is not evidence that health doesn't matter. It is evidence that most of the SDG database does not predict wellbeing. Within that context, health ranks high.</a:t>
             </a:r>
           </a:p>
         </p:txBody>
@@ -4750,7 +4708,7 @@
       </p:sp>
       <p:pic>
         <p:nvPicPr>
-          <p:cNvPr id="6" name="Picture 5" descr="trust_coverage_comparison.png"/>
+          <p:cNvPr id="6" name="Picture 5" descr="sdg_indicator_top20.png"/>
           <p:cNvPicPr>
             <a:picLocks noChangeAspect="1"/>
           </p:cNvPicPr>
@@ -4764,8 +4722,8 @@
         </p:blipFill>
         <p:spPr>
           <a:xfrm>
-            <a:off x="5120640" y="1234440"/>
-            <a:ext cx="6537960" cy="3922776"/>
+            <a:off x="5279547" y="658368"/>
+            <a:ext cx="6220145" cy="5074920"/>
           </a:xfrm>
           <a:prstGeom prst="rect">
             <a:avLst/>
@@ -4812,7 +4770,7 @@
                 </a:solidFill>
                 <a:latin typeface="Calibri"/>
               </a:rPr>
-              <a:t>Social trust: 94% of ESS countries significant (individual level), 1.5% of SDG16 country-indicator pairs (institutional confidence, not interpersonal trust), not measured in the HDI.</a:t>
+              <a:t>Top 25 SDG indicators by significance. Health (Goal 3) dominates: 16 of 25 top series.</a:t>
             </a:r>
           </a:p>
         </p:txBody>
@@ -4880,7 +4838,7 @@
                 </a:solidFill>
                 <a:latin typeface="Consolas"/>
               </a:rPr>
-              <a:t>SYNTHESIS</a:t>
+              <a:t>RESULT 3 · SOCIAL TRUST</a:t>
             </a:r>
           </a:p>
         </p:txBody>
@@ -4925,7 +4883,7 @@
                 </a:solidFill>
                 <a:latin typeface="Georgia"/>
               </a:rPr>
-              <a:t>Three domains, three ways frameworks lose sight of what matters</a:t>
+              <a:t>Social trust leads the ESS, is nearly invisible to development frameworks</a:t>
             </a:r>
           </a:p>
         </p:txBody>
@@ -4970,7 +4928,7 @@
                 </a:solidFill>
                 <a:latin typeface="Calibri"/>
               </a:rPr>
-              <a:t>Education's rank depends on which construct you count: attainment works, but parity ratios and learning outcomes do not, so pooling dilutes the signal. Health's rank depends on whether your chosen variable still varies: life expectancy does not, but self-rated health does, so the HDI's choice costs it. Social trust's rank is zero because it is not collected at scale in development frameworks at all — a coverage gap that cannot be fixed by choosing the right variable, because no variable was ever measured.</a:t>
+              <a:t>Social trust — 'most people can be trusted' — is significant in 94% of ESS countries, third strongest domain after health and income, with median R² = 0.041. Neither the HDI nor the SDG framework measures it at all.</a:t>
             </a:r>
           </a:p>
           <a:p>
@@ -4992,7 +4950,29 @@
                 </a:solidFill>
                 <a:latin typeface="Calibri"/>
               </a:rPr>
-              <a:t>These are not criticisms of the frameworks; they were built to track development, and they do. But which components look most consequential for lived experience is not the question they were built to answer.</a:t>
+              <a:t>The SDG database does carry 13 trust- and satisfaction-adjacent series under Goal 16: satisfaction with public services, perception of bribery, perceived decision-making inclusiveness. But these measure institutional confidence, not interpersonal trust — a different construct, and one that correlates more weakly with life satisfaction even when tested across countries. Moreover, their median coverage is one observation per country-series against six for the database as a whole; 147 of 163 country-series cannot support a time-series design.</a:t>
+            </a:r>
+          </a:p>
+          <a:p>
+            <a:pPr>
+              <a:lnSpc>
+                <a:spcPct val="132000"/>
+              </a:lnSpc>
+              <a:spcBef>
+                <a:spcPts val="0"/>
+              </a:spcBef>
+              <a:spcAft>
+                <a:spcPts val="1100"/>
+              </a:spcAft>
+            </a:pPr>
+            <a:r>
+              <a:rPr sz="1150" b="0" i="0">
+                <a:solidFill>
+                  <a:srgbClr val="5A6068"/>
+                </a:solidFill>
+                <a:latin typeface="Calibri"/>
+              </a:rPr>
+              <a:t>Education's and health's problems are about which variable to count within a domain. Trust's problem is different: it is not in the frameworks at all. That is a coverage gap, not a measurement problem.</a:t>
             </a:r>
           </a:p>
         </p:txBody>
@@ -5041,7 +5021,7 @@
       </p:sp>
       <p:pic>
         <p:nvPicPr>
-          <p:cNvPr id="6" name="Picture 5" descr="domain_horse_race.png"/>
+          <p:cNvPr id="6" name="Picture 5" descr="trust_coverage_comparison.png"/>
           <p:cNvPicPr>
             <a:picLocks noChangeAspect="1"/>
           </p:cNvPicPr>
@@ -5055,8 +5035,8 @@
         </p:blipFill>
         <p:spPr>
           <a:xfrm>
-            <a:off x="5120640" y="1433421"/>
-            <a:ext cx="6537960" cy="3524813"/>
+            <a:off x="5120640" y="1234440"/>
+            <a:ext cx="6537960" cy="3922776"/>
           </a:xfrm>
           <a:prstGeom prst="rect">
             <a:avLst/>
@@ -5103,7 +5083,7 @@
                 </a:solidFill>
                 <a:latin typeface="Calibri"/>
               </a:rPr>
-              <a:t>Domains competing within one instrument (ESS), at two levels of aggregation. Individual level (left) and country means (right).</a:t>
+              <a:t>Social trust: 94% of ESS countries significant (individual level), 1.5% of SDG16 country-indicator pairs (institutional confidence, not interpersonal trust), not measured in the HDI.</a:t>
             </a:r>
           </a:p>
         </p:txBody>
@@ -5117,6 +5097,297 @@
 </file>
 
 <file path=ppt/slides/slide16.xml><?xml version="1.0" encoding="utf-8"?>
+<p:sld xmlns:a="http://schemas.openxmlformats.org/drawingml/2006/main" xmlns:p="http://schemas.openxmlformats.org/presentationml/2006/main" xmlns:r="http://schemas.openxmlformats.org/officeDocument/2006/relationships">
+  <p:cSld>
+    <p:bg>
+      <p:bgPr>
+        <a:solidFill>
+          <a:srgbClr val="FCFCFB"/>
+        </a:solidFill>
+        <a:effectLst/>
+      </p:bgPr>
+    </p:bg>
+    <p:spTree>
+      <p:nvGrpSpPr>
+        <p:cNvPr id="1" name=""/>
+        <p:cNvGrpSpPr/>
+        <p:nvPr/>
+      </p:nvGrpSpPr>
+      <p:grpSpPr/>
+      <p:sp>
+        <p:nvSpPr>
+          <p:cNvPr id="2" name="TextBox 1"/>
+          <p:cNvSpPr txBox="1"/>
+          <p:nvPr/>
+        </p:nvSpPr>
+        <p:spPr>
+          <a:xfrm>
+            <a:off x="566928" y="502920"/>
+            <a:ext cx="4160520" cy="274320"/>
+          </a:xfrm>
+          <a:prstGeom prst="rect">
+            <a:avLst/>
+          </a:prstGeom>
+          <a:noFill/>
+        </p:spPr>
+        <p:txBody>
+          <a:bodyPr wrap="square" lIns="0" rIns="0" tIns="0" bIns="0">
+            <a:spAutoFit/>
+          </a:bodyPr>
+          <a:lstStyle/>
+          <a:p>
+            <a:pPr>
+              <a:spcBef>
+                <a:spcPts val="0"/>
+              </a:spcBef>
+              <a:spcAft>
+                <a:spcPts val="0"/>
+              </a:spcAft>
+            </a:pPr>
+            <a:r>
+              <a:rPr sz="1000" b="0" i="0">
+                <a:solidFill>
+                  <a:srgbClr val="A63A30"/>
+                </a:solidFill>
+                <a:latin typeface="Consolas"/>
+              </a:rPr>
+              <a:t>SYNTHESIS</a:t>
+            </a:r>
+          </a:p>
+        </p:txBody>
+      </p:sp>
+      <p:sp>
+        <p:nvSpPr>
+          <p:cNvPr id="3" name="TextBox 2"/>
+          <p:cNvSpPr txBox="1"/>
+          <p:nvPr/>
+        </p:nvSpPr>
+        <p:spPr>
+          <a:xfrm>
+            <a:off x="566928" y="914400"/>
+            <a:ext cx="4160520" cy="1371600"/>
+          </a:xfrm>
+          <a:prstGeom prst="rect">
+            <a:avLst/>
+          </a:prstGeom>
+          <a:noFill/>
+        </p:spPr>
+        <p:txBody>
+          <a:bodyPr wrap="square" lIns="0" rIns="0" tIns="0" bIns="0">
+            <a:spAutoFit/>
+          </a:bodyPr>
+          <a:lstStyle/>
+          <a:p>
+            <a:pPr>
+              <a:lnSpc>
+                <a:spcPct val="108000"/>
+              </a:lnSpc>
+              <a:spcBef>
+                <a:spcPts val="0"/>
+              </a:spcBef>
+              <a:spcAft>
+                <a:spcPts val="0"/>
+              </a:spcAft>
+            </a:pPr>
+            <a:r>
+              <a:rPr sz="2300" b="0" i="0">
+                <a:solidFill>
+                  <a:srgbClr val="14171C"/>
+                </a:solidFill>
+                <a:latin typeface="Georgia"/>
+              </a:rPr>
+              <a:t>Three domains, three ways frameworks lose sight of what matters</a:t>
+            </a:r>
+          </a:p>
+        </p:txBody>
+      </p:sp>
+      <p:sp>
+        <p:nvSpPr>
+          <p:cNvPr id="4" name="TextBox 3"/>
+          <p:cNvSpPr txBox="1"/>
+          <p:nvPr/>
+        </p:nvSpPr>
+        <p:spPr>
+          <a:xfrm>
+            <a:off x="566928" y="2331720"/>
+            <a:ext cx="4160520" cy="3840480"/>
+          </a:xfrm>
+          <a:prstGeom prst="rect">
+            <a:avLst/>
+          </a:prstGeom>
+          <a:noFill/>
+        </p:spPr>
+        <p:txBody>
+          <a:bodyPr wrap="square" lIns="0" rIns="0" tIns="0" bIns="0">
+            <a:spAutoFit/>
+          </a:bodyPr>
+          <a:lstStyle/>
+          <a:p>
+            <a:pPr>
+              <a:lnSpc>
+                <a:spcPct val="132000"/>
+              </a:lnSpc>
+              <a:spcBef>
+                <a:spcPts val="0"/>
+              </a:spcBef>
+              <a:spcAft>
+                <a:spcPts val="1100"/>
+              </a:spcAft>
+            </a:pPr>
+            <a:r>
+              <a:rPr sz="1150" b="0" i="0">
+                <a:solidFill>
+                  <a:srgbClr val="5A6068"/>
+                </a:solidFill>
+                <a:latin typeface="Calibri"/>
+              </a:rPr>
+              <a:t>Education's rank depends on which construct you count: attainment works, but parity ratios and learning outcomes do not, so pooling dilutes the signal. Health's rank depends on whether your chosen variable still varies: life expectancy does not, but self-rated health does, so the HDI's choice costs it. Social trust's rank is zero because it is not collected at scale in development frameworks at all — a coverage gap that cannot be fixed by choosing the right variable, because no variable was ever measured.</a:t>
+            </a:r>
+          </a:p>
+          <a:p>
+            <a:pPr>
+              <a:lnSpc>
+                <a:spcPct val="132000"/>
+              </a:lnSpc>
+              <a:spcBef>
+                <a:spcPts val="0"/>
+              </a:spcBef>
+              <a:spcAft>
+                <a:spcPts val="1100"/>
+              </a:spcAft>
+            </a:pPr>
+            <a:r>
+              <a:rPr sz="1150" b="0" i="0">
+                <a:solidFill>
+                  <a:srgbClr val="5A6068"/>
+                </a:solidFill>
+                <a:latin typeface="Calibri"/>
+              </a:rPr>
+              <a:t>These are not criticisms of the frameworks; they were built to track development, and they do. But which components look most consequential for lived experience is not the question they were built to answer.</a:t>
+            </a:r>
+          </a:p>
+        </p:txBody>
+      </p:sp>
+      <p:sp>
+        <p:nvSpPr>
+          <p:cNvPr id="5" name="TextBox 4"/>
+          <p:cNvSpPr txBox="1"/>
+          <p:nvPr/>
+        </p:nvSpPr>
+        <p:spPr>
+          <a:xfrm>
+            <a:off x="11338560" y="6263640"/>
+            <a:ext cx="548640" cy="274320"/>
+          </a:xfrm>
+          <a:prstGeom prst="rect">
+            <a:avLst/>
+          </a:prstGeom>
+          <a:noFill/>
+        </p:spPr>
+        <p:txBody>
+          <a:bodyPr wrap="square" lIns="0" rIns="0" tIns="0" bIns="0">
+            <a:spAutoFit/>
+          </a:bodyPr>
+          <a:lstStyle/>
+          <a:p>
+            <a:pPr algn="r">
+              <a:spcBef>
+                <a:spcPts val="0"/>
+              </a:spcBef>
+              <a:spcAft>
+                <a:spcPts val="0"/>
+              </a:spcAft>
+            </a:pPr>
+            <a:r>
+              <a:rPr sz="1100" b="0" i="0">
+                <a:solidFill>
+                  <a:srgbClr val="868D96"/>
+                </a:solidFill>
+                <a:latin typeface="Consolas"/>
+              </a:rPr>
+              <a:t>II</a:t>
+            </a:r>
+          </a:p>
+        </p:txBody>
+      </p:sp>
+      <p:pic>
+        <p:nvPicPr>
+          <p:cNvPr id="6" name="Picture 5" descr="domain_horse_race.png"/>
+          <p:cNvPicPr>
+            <a:picLocks noChangeAspect="1"/>
+          </p:cNvPicPr>
+          <p:nvPr/>
+        </p:nvPicPr>
+        <p:blipFill>
+          <a:blip r:embed="rId2"/>
+          <a:stretch>
+            <a:fillRect/>
+          </a:stretch>
+        </p:blipFill>
+        <p:spPr>
+          <a:xfrm>
+            <a:off x="5120640" y="1433421"/>
+            <a:ext cx="6537960" cy="3524813"/>
+          </a:xfrm>
+          <a:prstGeom prst="rect">
+            <a:avLst/>
+          </a:prstGeom>
+        </p:spPr>
+      </p:pic>
+      <p:sp>
+        <p:nvSpPr>
+          <p:cNvPr id="7" name="TextBox 6"/>
+          <p:cNvSpPr txBox="1"/>
+          <p:nvPr/>
+        </p:nvSpPr>
+        <p:spPr>
+          <a:xfrm>
+            <a:off x="5120640" y="5897880"/>
+            <a:ext cx="6537960" cy="731520"/>
+          </a:xfrm>
+          <a:prstGeom prst="rect">
+            <a:avLst/>
+          </a:prstGeom>
+          <a:noFill/>
+        </p:spPr>
+        <p:txBody>
+          <a:bodyPr wrap="square" lIns="0" rIns="0" tIns="0" bIns="0">
+            <a:spAutoFit/>
+          </a:bodyPr>
+          <a:lstStyle/>
+          <a:p>
+            <a:pPr>
+              <a:lnSpc>
+                <a:spcPct val="125000"/>
+              </a:lnSpc>
+              <a:spcBef>
+                <a:spcPts val="0"/>
+              </a:spcBef>
+              <a:spcAft>
+                <a:spcPts val="0"/>
+              </a:spcAft>
+            </a:pPr>
+            <a:r>
+              <a:rPr sz="900" b="0" i="0">
+                <a:solidFill>
+                  <a:srgbClr val="868D96"/>
+                </a:solidFill>
+                <a:latin typeface="Calibri"/>
+              </a:rPr>
+              <a:t>Domains competing within one instrument (ESS), at two levels of aggregation. Individual level (left) and country means (right).</a:t>
+            </a:r>
+          </a:p>
+        </p:txBody>
+      </p:sp>
+    </p:spTree>
+  </p:cSld>
+  <p:clrMapOvr>
+    <a:masterClrMapping/>
+  </p:clrMapOvr>
+</p:sld>
+</file>
+
+<file path=ppt/slides/slide17.xml><?xml version="1.0" encoding="utf-8"?>
 <p:sld xmlns:a="http://schemas.openxmlformats.org/drawingml/2006/main" xmlns:p="http://schemas.openxmlformats.org/presentationml/2006/main" xmlns:r="http://schemas.openxmlformats.org/officeDocument/2006/relationships">
   <p:cSld>
     <p:bg>
@@ -5273,7 +5544,7 @@
 </p:sld>
 </file>
 
-<file path=ppt/slides/slide17.xml><?xml version="1.0" encoding="utf-8"?>
+<file path=ppt/slides/slide18.xml><?xml version="1.0" encoding="utf-8"?>
 <p:sld xmlns:a="http://schemas.openxmlformats.org/drawingml/2006/main" xmlns:p="http://schemas.openxmlformats.org/presentationml/2006/main" xmlns:r="http://schemas.openxmlformats.org/officeDocument/2006/relationships">
   <p:cSld>
     <p:bg>
@@ -5709,7 +5980,7 @@
 </p:sld>
 </file>
 
-<file path=ppt/slides/slide18.xml><?xml version="1.0" encoding="utf-8"?>
+<file path=ppt/slides/slide19.xml><?xml version="1.0" encoding="utf-8"?>
 <p:sld xmlns:a="http://schemas.openxmlformats.org/drawingml/2006/main" xmlns:p="http://schemas.openxmlformats.org/presentationml/2006/main" xmlns:r="http://schemas.openxmlformats.org/officeDocument/2006/relationships">
   <p:cSld>
     <p:bg>
@@ -5736,7 +6007,7 @@
         <p:spPr>
           <a:xfrm>
             <a:off x="566928" y="502920"/>
-            <a:ext cx="8595360" cy="274320"/>
+            <a:ext cx="4160520" cy="274320"/>
           </a:xfrm>
           <a:prstGeom prst="rect">
             <a:avLst/>
@@ -5764,7 +6035,7 @@
                 </a:solidFill>
                 <a:latin typeface="Consolas"/>
               </a:rPr>
-              <a:t>WITHIN-COUNTRY EVIDENCE</a:t>
+              <a:t>METHOD MATTERS · WHAT SURVIVES</a:t>
             </a:r>
           </a:p>
         </p:txBody>
@@ -5778,7 +6049,7 @@
         <p:spPr>
           <a:xfrm>
             <a:off x="566928" y="914400"/>
-            <a:ext cx="8595360" cy="1371600"/>
+            <a:ext cx="4160520" cy="1371600"/>
           </a:xfrm>
           <a:prstGeom prst="rect">
             <a:avLst/>
@@ -5803,13 +6074,13 @@
               </a:spcAft>
             </a:pPr>
             <a:r>
-              <a:rPr sz="2700" b="0" i="0">
+              <a:rPr sz="2300" b="0" i="0">
                 <a:solidFill>
                   <a:srgbClr val="14171C"/>
                 </a:solidFill>
                 <a:latin typeface="Georgia"/>
               </a:rPr>
-              <a:t>Individual-level, self-reported data captures year-to-year change that administrative frameworks miss</a:t>
+              <a:t>Health survives both measurement methods. Social trust does not.</a:t>
             </a:r>
           </a:p>
         </p:txBody>
@@ -5822,8 +6093,8 @@
         </p:nvSpPr>
         <p:spPr>
           <a:xfrm>
-            <a:off x="566928" y="2286000"/>
-            <a:ext cx="8595360" cy="3840480"/>
+            <a:off x="566928" y="2331720"/>
+            <a:ext cx="4160520" cy="3840480"/>
           </a:xfrm>
           <a:prstGeom prst="rect">
             <a:avLst/>
@@ -5848,57 +6119,13 @@
               </a:spcAft>
             </a:pPr>
             <a:r>
-              <a:rPr sz="1400" b="0" i="0">
+              <a:rPr sz="1150" b="0" i="0">
                 <a:solidFill>
                   <a:srgbClr val="5A6068"/>
                 </a:solidFill>
                 <a:latin typeface="Calibri"/>
               </a:rPr>
-              <a:t>Here is the critical observation that reshapes the question: unlike SDG (71% levels → 5% differences) and HDI (42% → 2%), the ESS shows 69% levels → 64% differences. The association persists within countries over time. This is not because development frameworks are poorly designed; it is because they measure aggregate, administrative data at long intervals (annual at best for HDI and SDG). Individual survey responses capture year-to-year variation in how people experience their lives.</a:t>
-            </a:r>
-          </a:p>
-          <a:p>
-            <a:pPr>
-              <a:lnSpc>
-                <a:spcPct val="132000"/>
-              </a:lnSpc>
-              <a:spcBef>
-                <a:spcPts val="0"/>
-              </a:spcBef>
-              <a:spcAft>
-                <a:spcPts val="1100"/>
-              </a:spcAft>
-            </a:pPr>
-            <a:r>
-              <a:rPr sz="1400" b="0" i="0">
-                <a:solidFill>
-                  <a:srgbClr val="5A6068"/>
-                </a:solidFill>
-                <a:latin typeface="Calibri"/>
-              </a:rPr>
-              <a:t>This matters for social trust most of all. At the country level, SDG has almost no trust coverage; in the HDI, none. But at the individual level, within countries, ESS shows trust is significant in 94% of countries and drives year-to-year change in how satisfied people report being. The three domains emerge not because the frameworks reveal them, but because ESS measures them where people actually experience variation: in themselves, over time.</a:t>
-            </a:r>
-          </a:p>
-          <a:p>
-            <a:pPr>
-              <a:lnSpc>
-                <a:spcPct val="132000"/>
-              </a:lnSpc>
-              <a:spcBef>
-                <a:spcPts val="0"/>
-              </a:spcBef>
-              <a:spcAft>
-                <a:spcPts val="1100"/>
-              </a:spcAft>
-            </a:pPr>
-            <a:r>
-              <a:rPr sz="1400" b="0" i="0">
-                <a:solidFill>
-                  <a:srgbClr val="5A6068"/>
-                </a:solidFill>
-                <a:latin typeface="Calibri"/>
-              </a:rPr>
-              <a:t>The caveats are substantial: 36 European countries, self-reported measures, annual cycles. But the implication is clear. Development frameworks' blindness to social trust is not because trust does not matter for wellbeing; it is because development was never designed to measure individual experience at the temporal resolution where people change.</a:t>
+              <a:t>A critical test: which domains actually predict wellbeing regardless of how you measure development? Health is significant in both administrative sources (SDG, 11.5% of country-indicator pairs) and self-reported sources (ESS, median R² = 0.091). This is robust. Education shows weak signal in both (SDG 3.3%, ESS R² = 0.0098), so the issue is not method-dependent but measurement-dependent. Social trust, however, only appears in self-reported data: 94% of ESS countries (median R² = 0.041) versus 1.5% of SDG16 country-pairs measuring institutional confidence instead. The three domains do not behave the same way across measurement methods.</a:t>
             </a:r>
           </a:p>
         </p:txBody>
@@ -5945,128 +6172,40 @@
           </a:p>
         </p:txBody>
       </p:sp>
-    </p:spTree>
-  </p:cSld>
-  <p:clrMapOvr>
-    <a:masterClrMapping/>
-  </p:clrMapOvr>
-</p:sld>
-</file>
-
-<file path=ppt/slides/slide19.xml><?xml version="1.0" encoding="utf-8"?>
-<p:sld xmlns:a="http://schemas.openxmlformats.org/drawingml/2006/main" xmlns:p="http://schemas.openxmlformats.org/presentationml/2006/main" xmlns:r="http://schemas.openxmlformats.org/officeDocument/2006/relationships">
-  <p:cSld>
-    <p:bg>
-      <p:bgPr>
-        <a:solidFill>
-          <a:srgbClr val="E8EBEF"/>
-        </a:solidFill>
-        <a:effectLst/>
-      </p:bgPr>
-    </p:bg>
-    <p:spTree>
-      <p:nvGrpSpPr>
-        <p:cNvPr id="1" name=""/>
-        <p:cNvGrpSpPr/>
-        <p:nvPr/>
-      </p:nvGrpSpPr>
-      <p:grpSpPr/>
-      <p:sp>
-        <p:nvSpPr>
-          <p:cNvPr id="2" name="Rectangle 1"/>
-          <p:cNvSpPr/>
-          <p:nvPr/>
-        </p:nvSpPr>
-        <p:spPr>
-          <a:xfrm>
-            <a:off x="566928" y="2103120"/>
-            <a:ext cx="54864" cy="2377440"/>
-          </a:xfrm>
-          <a:prstGeom prst="rect">
-            <a:avLst/>
-          </a:prstGeom>
-          <a:solidFill>
-            <a:srgbClr val="17549E"/>
-          </a:solidFill>
-          <a:ln>
-            <a:noFill/>
-          </a:ln>
-          <a:effectLst/>
-        </p:spPr>
-        <p:style>
-          <a:lnRef idx="1">
-            <a:schemeClr val="accent1"/>
-          </a:lnRef>
-          <a:fillRef idx="3">
-            <a:schemeClr val="accent1"/>
-          </a:fillRef>
-          <a:effectRef idx="2">
-            <a:schemeClr val="accent1"/>
-          </a:effectRef>
-          <a:fontRef idx="minor">
-            <a:schemeClr val="lt1"/>
-          </a:fontRef>
-        </p:style>
-        <p:txBody>
-          <a:bodyPr rtlCol="0" anchor="ctr"/>
-          <a:lstStyle/>
-          <a:p>
-            <a:pPr algn="ctr"/>
-          </a:p>
-        </p:txBody>
-      </p:sp>
-      <p:sp>
-        <p:nvSpPr>
-          <p:cNvPr id="3" name="TextBox 2"/>
-          <p:cNvSpPr txBox="1"/>
-          <p:nvPr/>
-        </p:nvSpPr>
-        <p:spPr>
-          <a:xfrm>
-            <a:off x="914400" y="1600200"/>
-            <a:ext cx="8686800" cy="274320"/>
-          </a:xfrm>
-          <a:prstGeom prst="rect">
-            <a:avLst/>
-          </a:prstGeom>
-          <a:noFill/>
-        </p:spPr>
-        <p:txBody>
-          <a:bodyPr wrap="square" lIns="0" rIns="0" tIns="0" bIns="0">
-            <a:spAutoFit/>
-          </a:bodyPr>
-          <a:lstStyle/>
-          <a:p>
-            <a:pPr>
-              <a:spcBef>
-                <a:spcPts val="0"/>
-              </a:spcBef>
-              <a:spcAft>
-                <a:spcPts val="0"/>
-              </a:spcAft>
-            </a:pPr>
-            <a:r>
-              <a:rPr sz="1100" b="0" i="0">
-                <a:solidFill>
-                  <a:srgbClr val="17549E"/>
-                </a:solidFill>
-                <a:latin typeface="Consolas"/>
-              </a:rPr>
-              <a:t>WHERE ACT III LEAVES US</a:t>
-            </a:r>
-          </a:p>
-        </p:txBody>
-      </p:sp>
-      <p:sp>
-        <p:nvSpPr>
-          <p:cNvPr id="4" name="TextBox 3"/>
-          <p:cNvSpPr txBox="1"/>
-          <p:nvPr/>
-        </p:nvSpPr>
-        <p:spPr>
-          <a:xfrm>
-            <a:off x="914400" y="2148840"/>
-            <a:ext cx="9509760" cy="2926080"/>
+      <p:pic>
+        <p:nvPicPr>
+          <p:cNvPr id="6" name="Picture 5" descr="health_trust_corroboration.png"/>
+          <p:cNvPicPr>
+            <a:picLocks noChangeAspect="1"/>
+          </p:cNvPicPr>
+          <p:nvPr/>
+        </p:nvPicPr>
+        <p:blipFill>
+          <a:blip r:embed="rId2"/>
+          <a:stretch>
+            <a:fillRect/>
+          </a:stretch>
+        </p:blipFill>
+        <p:spPr>
+          <a:xfrm>
+            <a:off x="5120640" y="1858518"/>
+            <a:ext cx="6537960" cy="2674620"/>
+          </a:xfrm>
+          <a:prstGeom prst="rect">
+            <a:avLst/>
+          </a:prstGeom>
+        </p:spPr>
+      </p:pic>
+      <p:sp>
+        <p:nvSpPr>
+          <p:cNvPr id="7" name="TextBox 6"/>
+          <p:cNvSpPr txBox="1"/>
+          <p:nvPr/>
+        </p:nvSpPr>
+        <p:spPr>
+          <a:xfrm>
+            <a:off x="5120640" y="5897880"/>
+            <a:ext cx="6537960" cy="731520"/>
           </a:xfrm>
           <a:prstGeom prst="rect">
             <a:avLst/>
@@ -6081,7 +6220,7 @@
           <a:p>
             <a:pPr>
               <a:lnSpc>
-                <a:spcPct val="135000"/>
+                <a:spcPct val="125000"/>
               </a:lnSpc>
               <a:spcBef>
                 <a:spcPts val="0"/>
@@ -6091,13 +6230,13 @@
               </a:spcAft>
             </a:pPr>
             <a:r>
-              <a:rPr sz="2100" b="0" i="0">
-                <a:solidFill>
-                  <a:srgbClr val="14171C"/>
-                </a:solidFill>
-                <a:latin typeface="Georgia"/>
-              </a:rPr>
-              <a:t>The three domains predict wellbeing differently depending on where and how you measure. Development frameworks' blindness is not incurable; it is structural. Frameworks designed for tracking aggregate national progress cannot see individual experience responsive to change.</a:t>
+              <a:rPr sz="900" b="0" i="0">
+                <a:solidFill>
+                  <a:srgbClr val="868D96"/>
+                </a:solidFill>
+                <a:latin typeface="Calibri"/>
+              </a:rPr>
+              <a:t>Health is robust across administrative and self-reported sources. Education is weak in both. Social trust appears only in self-reported individual-level data.</a:t>
             </a:r>
           </a:p>
         </p:txBody>
@@ -6960,7 +7099,7 @@
     <p:bg>
       <p:bgPr>
         <a:solidFill>
-          <a:srgbClr val="14171C"/>
+          <a:srgbClr val="FCFCFB"/>
         </a:solidFill>
         <a:effectLst/>
       </p:bgPr>
@@ -6980,8 +7119,184 @@
         </p:nvSpPr>
         <p:spPr>
           <a:xfrm>
-            <a:off x="8229600" y="822960"/>
-            <a:ext cx="3291840" cy="4114800"/>
+            <a:off x="566928" y="502920"/>
+            <a:ext cx="8595360" cy="274320"/>
+          </a:xfrm>
+          <a:prstGeom prst="rect">
+            <a:avLst/>
+          </a:prstGeom>
+          <a:noFill/>
+        </p:spPr>
+        <p:txBody>
+          <a:bodyPr wrap="square" lIns="0" rIns="0" tIns="0" bIns="0">
+            <a:spAutoFit/>
+          </a:bodyPr>
+          <a:lstStyle/>
+          <a:p>
+            <a:pPr>
+              <a:spcBef>
+                <a:spcPts val="0"/>
+              </a:spcBef>
+              <a:spcAft>
+                <a:spcPts val="0"/>
+              </a:spcAft>
+            </a:pPr>
+            <a:r>
+              <a:rPr sz="1000" b="0" i="0">
+                <a:solidFill>
+                  <a:srgbClr val="A63A30"/>
+                </a:solidFill>
+                <a:latin typeface="Consolas"/>
+              </a:rPr>
+              <a:t>WITHIN-COUNTRY EVIDENCE</a:t>
+            </a:r>
+          </a:p>
+        </p:txBody>
+      </p:sp>
+      <p:sp>
+        <p:nvSpPr>
+          <p:cNvPr id="3" name="TextBox 2"/>
+          <p:cNvSpPr txBox="1"/>
+          <p:nvPr/>
+        </p:nvSpPr>
+        <p:spPr>
+          <a:xfrm>
+            <a:off x="566928" y="914400"/>
+            <a:ext cx="8595360" cy="1371600"/>
+          </a:xfrm>
+          <a:prstGeom prst="rect">
+            <a:avLst/>
+          </a:prstGeom>
+          <a:noFill/>
+        </p:spPr>
+        <p:txBody>
+          <a:bodyPr wrap="square" lIns="0" rIns="0" tIns="0" bIns="0">
+            <a:spAutoFit/>
+          </a:bodyPr>
+          <a:lstStyle/>
+          <a:p>
+            <a:pPr>
+              <a:lnSpc>
+                <a:spcPct val="108000"/>
+              </a:lnSpc>
+              <a:spcBef>
+                <a:spcPts val="0"/>
+              </a:spcBef>
+              <a:spcAft>
+                <a:spcPts val="0"/>
+              </a:spcAft>
+            </a:pPr>
+            <a:r>
+              <a:rPr sz="2700" b="0" i="0">
+                <a:solidFill>
+                  <a:srgbClr val="14171C"/>
+                </a:solidFill>
+                <a:latin typeface="Georgia"/>
+              </a:rPr>
+              <a:t>Individual-level, self-reported data captures year-to-year change that administrative frameworks miss</a:t>
+            </a:r>
+          </a:p>
+        </p:txBody>
+      </p:sp>
+      <p:sp>
+        <p:nvSpPr>
+          <p:cNvPr id="4" name="TextBox 3"/>
+          <p:cNvSpPr txBox="1"/>
+          <p:nvPr/>
+        </p:nvSpPr>
+        <p:spPr>
+          <a:xfrm>
+            <a:off x="566928" y="2286000"/>
+            <a:ext cx="8595360" cy="3840480"/>
+          </a:xfrm>
+          <a:prstGeom prst="rect">
+            <a:avLst/>
+          </a:prstGeom>
+          <a:noFill/>
+        </p:spPr>
+        <p:txBody>
+          <a:bodyPr wrap="square" lIns="0" rIns="0" tIns="0" bIns="0">
+            <a:spAutoFit/>
+          </a:bodyPr>
+          <a:lstStyle/>
+          <a:p>
+            <a:pPr>
+              <a:lnSpc>
+                <a:spcPct val="132000"/>
+              </a:lnSpc>
+              <a:spcBef>
+                <a:spcPts val="0"/>
+              </a:spcBef>
+              <a:spcAft>
+                <a:spcPts val="1100"/>
+              </a:spcAft>
+            </a:pPr>
+            <a:r>
+              <a:rPr sz="1400" b="0" i="0">
+                <a:solidFill>
+                  <a:srgbClr val="5A6068"/>
+                </a:solidFill>
+                <a:latin typeface="Calibri"/>
+              </a:rPr>
+              <a:t>Here is the critical observation that reshapes the question: unlike SDG (71% levels → 5% differences) and HDI (42% → 2%), the ESS shows 69% levels → 64% differences. The association persists within countries over time. This is not because development frameworks are poorly designed; it is because they measure aggregate, administrative data at long intervals (annual at best for HDI and SDG). Individual survey responses capture year-to-year variation in how people experience their lives.</a:t>
+            </a:r>
+          </a:p>
+          <a:p>
+            <a:pPr>
+              <a:lnSpc>
+                <a:spcPct val="132000"/>
+              </a:lnSpc>
+              <a:spcBef>
+                <a:spcPts val="0"/>
+              </a:spcBef>
+              <a:spcAft>
+                <a:spcPts val="1100"/>
+              </a:spcAft>
+            </a:pPr>
+            <a:r>
+              <a:rPr sz="1400" b="0" i="0">
+                <a:solidFill>
+                  <a:srgbClr val="5A6068"/>
+                </a:solidFill>
+                <a:latin typeface="Calibri"/>
+              </a:rPr>
+              <a:t>This matters for social trust most of all. At the country level, SDG has almost no trust coverage; in the HDI, none. But at the individual level, within countries, ESS shows trust is significant in 94% of countries and drives year-to-year change in how satisfied people report being. The three domains emerge not because the frameworks reveal them, but because ESS measures them where people actually experience variation: in themselves, over time.</a:t>
+            </a:r>
+          </a:p>
+          <a:p>
+            <a:pPr>
+              <a:lnSpc>
+                <a:spcPct val="132000"/>
+              </a:lnSpc>
+              <a:spcBef>
+                <a:spcPts val="0"/>
+              </a:spcBef>
+              <a:spcAft>
+                <a:spcPts val="1100"/>
+              </a:spcAft>
+            </a:pPr>
+            <a:r>
+              <a:rPr sz="1400" b="0" i="0">
+                <a:solidFill>
+                  <a:srgbClr val="5A6068"/>
+                </a:solidFill>
+                <a:latin typeface="Calibri"/>
+              </a:rPr>
+              <a:t>The caveats are substantial: 36 European countries, self-reported measures, annual cycles. But the implication is clear. Development frameworks' blindness to social trust is not because trust does not matter for wellbeing; it is because development was never designed to measure individual experience at the temporal resolution where people change.</a:t>
+            </a:r>
+          </a:p>
+        </p:txBody>
+      </p:sp>
+      <p:sp>
+        <p:nvSpPr>
+          <p:cNvPr id="5" name="TextBox 4"/>
+          <p:cNvSpPr txBox="1"/>
+          <p:nvPr/>
+        </p:nvSpPr>
+        <p:spPr>
+          <a:xfrm>
+            <a:off x="11338560" y="6263640"/>
+            <a:ext cx="548640" cy="274320"/>
           </a:xfrm>
           <a:prstGeom prst="rect">
             <a:avLst/>
@@ -7003,33 +7318,59 @@
               </a:spcAft>
             </a:pPr>
             <a:r>
-              <a:rPr sz="20000" b="0" i="0">
-                <a:solidFill>
-                  <a:srgbClr val="2A3340"/>
-                </a:solidFill>
-                <a:latin typeface="Georgia"/>
-              </a:rPr>
-              <a:t>IV</a:t>
-            </a:r>
-          </a:p>
-        </p:txBody>
-      </p:sp>
-      <p:sp>
-        <p:nvSpPr>
-          <p:cNvPr id="3" name="Rectangle 2"/>
+              <a:rPr sz="1100" b="0" i="0">
+                <a:solidFill>
+                  <a:srgbClr val="868D96"/>
+                </a:solidFill>
+                <a:latin typeface="Consolas"/>
+              </a:rPr>
+              <a:t>III</a:t>
+            </a:r>
+          </a:p>
+        </p:txBody>
+      </p:sp>
+    </p:spTree>
+  </p:cSld>
+  <p:clrMapOvr>
+    <a:masterClrMapping/>
+  </p:clrMapOvr>
+</p:sld>
+</file>
+
+<file path=ppt/slides/slide21.xml><?xml version="1.0" encoding="utf-8"?>
+<p:sld xmlns:a="http://schemas.openxmlformats.org/drawingml/2006/main" xmlns:p="http://schemas.openxmlformats.org/presentationml/2006/main" xmlns:r="http://schemas.openxmlformats.org/officeDocument/2006/relationships">
+  <p:cSld>
+    <p:bg>
+      <p:bgPr>
+        <a:solidFill>
+          <a:srgbClr val="E8EBEF"/>
+        </a:solidFill>
+        <a:effectLst/>
+      </p:bgPr>
+    </p:bg>
+    <p:spTree>
+      <p:nvGrpSpPr>
+        <p:cNvPr id="1" name=""/>
+        <p:cNvGrpSpPr/>
+        <p:nvPr/>
+      </p:nvGrpSpPr>
+      <p:grpSpPr/>
+      <p:sp>
+        <p:nvSpPr>
+          <p:cNvPr id="2" name="Rectangle 1"/>
           <p:cNvSpPr/>
           <p:nvPr/>
         </p:nvSpPr>
         <p:spPr>
           <a:xfrm>
-            <a:off x="566928" y="1371600"/>
-            <a:ext cx="7315200" cy="25400"/>
+            <a:off x="566928" y="2103120"/>
+            <a:ext cx="54864" cy="2377440"/>
           </a:xfrm>
           <a:prstGeom prst="rect">
             <a:avLst/>
           </a:prstGeom>
           <a:solidFill>
-            <a:srgbClr val="C9D8EC"/>
+            <a:srgbClr val="17549E"/>
           </a:solidFill>
           <a:ln>
             <a:noFill/>
@@ -7060,101 +7401,56 @@
       </p:sp>
       <p:sp>
         <p:nvSpPr>
+          <p:cNvPr id="3" name="TextBox 2"/>
+          <p:cNvSpPr txBox="1"/>
+          <p:nvPr/>
+        </p:nvSpPr>
+        <p:spPr>
+          <a:xfrm>
+            <a:off x="914400" y="1600200"/>
+            <a:ext cx="8686800" cy="274320"/>
+          </a:xfrm>
+          <a:prstGeom prst="rect">
+            <a:avLst/>
+          </a:prstGeom>
+          <a:noFill/>
+        </p:spPr>
+        <p:txBody>
+          <a:bodyPr wrap="square" lIns="0" rIns="0" tIns="0" bIns="0">
+            <a:spAutoFit/>
+          </a:bodyPr>
+          <a:lstStyle/>
+          <a:p>
+            <a:pPr>
+              <a:spcBef>
+                <a:spcPts val="0"/>
+              </a:spcBef>
+              <a:spcAft>
+                <a:spcPts val="0"/>
+              </a:spcAft>
+            </a:pPr>
+            <a:r>
+              <a:rPr sz="1100" b="0" i="0">
+                <a:solidFill>
+                  <a:srgbClr val="17549E"/>
+                </a:solidFill>
+                <a:latin typeface="Consolas"/>
+              </a:rPr>
+              <a:t>WHERE ACT III LEAVES US</a:t>
+            </a:r>
+          </a:p>
+        </p:txBody>
+      </p:sp>
+      <p:sp>
+        <p:nvSpPr>
           <p:cNvPr id="4" name="TextBox 3"/>
           <p:cNvSpPr txBox="1"/>
           <p:nvPr/>
         </p:nvSpPr>
         <p:spPr>
           <a:xfrm>
-            <a:off x="566928" y="960120"/>
-            <a:ext cx="5486400" cy="274320"/>
-          </a:xfrm>
-          <a:prstGeom prst="rect">
-            <a:avLst/>
-          </a:prstGeom>
-          <a:noFill/>
-        </p:spPr>
-        <p:txBody>
-          <a:bodyPr wrap="square" lIns="0" rIns="0" tIns="0" bIns="0">
-            <a:spAutoFit/>
-          </a:bodyPr>
-          <a:lstStyle/>
-          <a:p>
-            <a:pPr>
-              <a:spcBef>
-                <a:spcPts val="0"/>
-              </a:spcBef>
-              <a:spcAft>
-                <a:spcPts val="0"/>
-              </a:spcAft>
-            </a:pPr>
-            <a:r>
-              <a:rPr sz="1100" b="0" i="0">
-                <a:solidFill>
-                  <a:srgbClr val="C9D8EC"/>
-                </a:solidFill>
-                <a:latin typeface="Consolas"/>
-              </a:rPr>
-              <a:t>ACT IV</a:t>
-            </a:r>
-          </a:p>
-        </p:txBody>
-      </p:sp>
-      <p:sp>
-        <p:nvSpPr>
-          <p:cNvPr id="5" name="TextBox 4"/>
-          <p:cNvSpPr txBox="1"/>
-          <p:nvPr/>
-        </p:nvSpPr>
-        <p:spPr>
-          <a:xfrm>
-            <a:off x="566928" y="1783080"/>
-            <a:ext cx="7223760" cy="1828800"/>
-          </a:xfrm>
-          <a:prstGeom prst="rect">
-            <a:avLst/>
-          </a:prstGeom>
-          <a:noFill/>
-        </p:spPr>
-        <p:txBody>
-          <a:bodyPr wrap="square" lIns="0" rIns="0" tIns="0" bIns="0">
-            <a:spAutoFit/>
-          </a:bodyPr>
-          <a:lstStyle/>
-          <a:p>
-            <a:pPr>
-              <a:lnSpc>
-                <a:spcPct val="102000"/>
-              </a:lnSpc>
-              <a:spcBef>
-                <a:spcPts val="0"/>
-              </a:spcBef>
-              <a:spcAft>
-                <a:spcPts val="0"/>
-              </a:spcAft>
-            </a:pPr>
-            <a:r>
-              <a:rPr sz="4000" b="0" i="0">
-                <a:solidFill>
-                  <a:srgbClr val="FCFCFB"/>
-                </a:solidFill>
-                <a:latin typeface="Georgia"/>
-              </a:rPr>
-              <a:t>What this means for development frameworks</a:t>
-            </a:r>
-          </a:p>
-        </p:txBody>
-      </p:sp>
-      <p:sp>
-        <p:nvSpPr>
-          <p:cNvPr id="6" name="TextBox 5"/>
-          <p:cNvSpPr txBox="1"/>
-          <p:nvPr/>
-        </p:nvSpPr>
-        <p:spPr>
-          <a:xfrm>
-            <a:off x="566928" y="3886200"/>
-            <a:ext cx="6766560" cy="1463040"/>
+            <a:off x="914400" y="2148840"/>
+            <a:ext cx="9509760" cy="2926080"/>
           </a:xfrm>
           <a:prstGeom prst="rect">
             <a:avLst/>
@@ -7179,427 +7475,13 @@
               </a:spcAft>
             </a:pPr>
             <a:r>
-              <a:rPr sz="1550" b="0" i="1">
-                <a:solidFill>
-                  <a:srgbClr val="9AA4B0"/>
+              <a:rPr sz="2100" b="0" i="0">
+                <a:solidFill>
+                  <a:srgbClr val="14171C"/>
                 </a:solidFill>
                 <a:latin typeface="Georgia"/>
               </a:rPr>
-              <a:t>The disconnect is real and worth naming. Development frameworks have done their job of tracking progress on development. But the components that predict individual lived experience are ones these frameworks are not currently built to see — because of construction choices, variable saturation, or coverage that was never collected.</a:t>
-            </a:r>
-          </a:p>
-        </p:txBody>
-      </p:sp>
-      <p:sp>
-        <p:nvSpPr>
-          <p:cNvPr id="7" name="TextBox 6"/>
-          <p:cNvSpPr txBox="1"/>
-          <p:nvPr/>
-        </p:nvSpPr>
-        <p:spPr>
-          <a:xfrm>
-            <a:off x="566928" y="5623560"/>
-            <a:ext cx="3503066" cy="914400"/>
-          </a:xfrm>
-          <a:prstGeom prst="rect">
-            <a:avLst/>
-          </a:prstGeom>
-          <a:noFill/>
-        </p:spPr>
-        <p:txBody>
-          <a:bodyPr wrap="square" lIns="0" rIns="0" tIns="0" bIns="0">
-            <a:spAutoFit/>
-          </a:bodyPr>
-          <a:lstStyle/>
-          <a:p>
-            <a:pPr>
-              <a:spcBef>
-                <a:spcPts val="0"/>
-              </a:spcBef>
-              <a:spcAft>
-                <a:spcPts val="400"/>
-              </a:spcAft>
-            </a:pPr>
-            <a:r>
-              <a:rPr sz="2200" b="0" i="0">
-                <a:solidFill>
-                  <a:srgbClr val="FCFCFB"/>
-                </a:solidFill>
-                <a:latin typeface="Consolas"/>
-              </a:rPr>
-              <a:t>3 vs. 1</a:t>
-            </a:r>
-          </a:p>
-          <a:p>
-            <a:pPr>
-              <a:lnSpc>
-                <a:spcPct val="120000"/>
-              </a:lnSpc>
-              <a:spcBef>
-                <a:spcPts val="0"/>
-              </a:spcBef>
-              <a:spcAft>
-                <a:spcPts val="0"/>
-              </a:spcAft>
-            </a:pPr>
-            <a:r>
-              <a:rPr sz="1000" b="0" i="0">
-                <a:solidFill>
-                  <a:srgbClr val="8A94A0"/>
-                </a:solidFill>
-                <a:latin typeface="Calibri"/>
-              </a:rPr>
-              <a:t>domains the HDI can test for wellbeing, vs. social trust</a:t>
-            </a:r>
-          </a:p>
-        </p:txBody>
-      </p:sp>
-      <p:sp>
-        <p:nvSpPr>
-          <p:cNvPr id="8" name="TextBox 7"/>
-          <p:cNvSpPr txBox="1"/>
-          <p:nvPr/>
-        </p:nvSpPr>
-        <p:spPr>
-          <a:xfrm>
-            <a:off x="4344314" y="5623560"/>
-            <a:ext cx="3503066" cy="914400"/>
-          </a:xfrm>
-          <a:prstGeom prst="rect">
-            <a:avLst/>
-          </a:prstGeom>
-          <a:noFill/>
-        </p:spPr>
-        <p:txBody>
-          <a:bodyPr wrap="square" lIns="0" rIns="0" tIns="0" bIns="0">
-            <a:spAutoFit/>
-          </a:bodyPr>
-          <a:lstStyle/>
-          <a:p>
-            <a:pPr>
-              <a:spcBef>
-                <a:spcPts val="0"/>
-              </a:spcBef>
-              <a:spcAft>
-                <a:spcPts val="400"/>
-              </a:spcAft>
-            </a:pPr>
-            <a:r>
-              <a:rPr sz="2200" b="0" i="0">
-                <a:solidFill>
-                  <a:srgbClr val="FCFCFB"/>
-                </a:solidFill>
-                <a:latin typeface="Consolas"/>
-              </a:rPr>
-              <a:t>42 vs. 661</a:t>
-            </a:r>
-          </a:p>
-          <a:p>
-            <a:pPr>
-              <a:lnSpc>
-                <a:spcPct val="120000"/>
-              </a:lnSpc>
-              <a:spcBef>
-                <a:spcPts val="0"/>
-              </a:spcBef>
-              <a:spcAft>
-                <a:spcPts val="0"/>
-              </a:spcAft>
-            </a:pPr>
-            <a:r>
-              <a:rPr sz="1000" b="0" i="0">
-                <a:solidFill>
-                  <a:srgbClr val="8A94A0"/>
-                </a:solidFill>
-                <a:latin typeface="Calibri"/>
-              </a:rPr>
-              <a:t>countries with SDG data, vs. series in the database</a:t>
-            </a:r>
-          </a:p>
-        </p:txBody>
-      </p:sp>
-      <p:sp>
-        <p:nvSpPr>
-          <p:cNvPr id="9" name="TextBox 8"/>
-          <p:cNvSpPr txBox="1"/>
-          <p:nvPr/>
-        </p:nvSpPr>
-        <p:spPr>
-          <a:xfrm>
-            <a:off x="8121700" y="5623560"/>
-            <a:ext cx="3503066" cy="914400"/>
-          </a:xfrm>
-          <a:prstGeom prst="rect">
-            <a:avLst/>
-          </a:prstGeom>
-          <a:noFill/>
-        </p:spPr>
-        <p:txBody>
-          <a:bodyPr wrap="square" lIns="0" rIns="0" tIns="0" bIns="0">
-            <a:spAutoFit/>
-          </a:bodyPr>
-          <a:lstStyle/>
-          <a:p>
-            <a:pPr>
-              <a:spcBef>
-                <a:spcPts val="0"/>
-              </a:spcBef>
-              <a:spcAft>
-                <a:spcPts val="400"/>
-              </a:spcAft>
-            </a:pPr>
-            <a:r>
-              <a:rPr sz="2200" b="0" i="0">
-                <a:solidFill>
-                  <a:srgbClr val="FCFCFB"/>
-                </a:solidFill>
-                <a:latin typeface="Consolas"/>
-              </a:rPr>
-              <a:t>0.041</a:t>
-            </a:r>
-          </a:p>
-          <a:p>
-            <a:pPr>
-              <a:lnSpc>
-                <a:spcPct val="120000"/>
-              </a:lnSpc>
-              <a:spcBef>
-                <a:spcPts val="0"/>
-              </a:spcBef>
-              <a:spcAft>
-                <a:spcPts val="0"/>
-              </a:spcAft>
-            </a:pPr>
-            <a:r>
-              <a:rPr sz="1000" b="0" i="0">
-                <a:solidFill>
-                  <a:srgbClr val="8A94A0"/>
-                </a:solidFill>
-                <a:latin typeface="Calibri"/>
-              </a:rPr>
-              <a:t>median R² for trust — below income, health, education individually, above none</a:t>
-            </a:r>
-          </a:p>
-        </p:txBody>
-      </p:sp>
-    </p:spTree>
-  </p:cSld>
-  <p:clrMapOvr>
-    <a:masterClrMapping/>
-  </p:clrMapOvr>
-</p:sld>
-</file>
-
-<file path=ppt/slides/slide21.xml><?xml version="1.0" encoding="utf-8"?>
-<p:sld xmlns:a="http://schemas.openxmlformats.org/drawingml/2006/main" xmlns:p="http://schemas.openxmlformats.org/presentationml/2006/main" xmlns:r="http://schemas.openxmlformats.org/officeDocument/2006/relationships">
-  <p:cSld>
-    <p:bg>
-      <p:bgPr>
-        <a:solidFill>
-          <a:srgbClr val="FCFCFB"/>
-        </a:solidFill>
-        <a:effectLst/>
-      </p:bgPr>
-    </p:bg>
-    <p:spTree>
-      <p:nvGrpSpPr>
-        <p:cNvPr id="1" name=""/>
-        <p:cNvGrpSpPr/>
-        <p:nvPr/>
-      </p:nvGrpSpPr>
-      <p:grpSpPr/>
-      <p:sp>
-        <p:nvSpPr>
-          <p:cNvPr id="2" name="TextBox 1"/>
-          <p:cNvSpPr txBox="1"/>
-          <p:nvPr/>
-        </p:nvSpPr>
-        <p:spPr>
-          <a:xfrm>
-            <a:off x="566928" y="502920"/>
-            <a:ext cx="8595360" cy="274320"/>
-          </a:xfrm>
-          <a:prstGeom prst="rect">
-            <a:avLst/>
-          </a:prstGeom>
-          <a:noFill/>
-        </p:spPr>
-        <p:txBody>
-          <a:bodyPr wrap="square" lIns="0" rIns="0" tIns="0" bIns="0">
-            <a:spAutoFit/>
-          </a:bodyPr>
-          <a:lstStyle/>
-          <a:p>
-            <a:pPr>
-              <a:spcBef>
-                <a:spcPts val="0"/>
-              </a:spcBef>
-              <a:spcAft>
-                <a:spcPts val="0"/>
-              </a:spcAft>
-            </a:pPr>
-            <a:r>
-              <a:rPr sz="1000" b="0" i="0">
-                <a:solidFill>
-                  <a:srgbClr val="A63A30"/>
-                </a:solidFill>
-                <a:latin typeface="Consolas"/>
-              </a:rPr>
-              <a:t>THE DISCONNECT</a:t>
-            </a:r>
-          </a:p>
-        </p:txBody>
-      </p:sp>
-      <p:sp>
-        <p:nvSpPr>
-          <p:cNvPr id="3" name="TextBox 2"/>
-          <p:cNvSpPr txBox="1"/>
-          <p:nvPr/>
-        </p:nvSpPr>
-        <p:spPr>
-          <a:xfrm>
-            <a:off x="566928" y="914400"/>
-            <a:ext cx="8595360" cy="1371600"/>
-          </a:xfrm>
-          <a:prstGeom prst="rect">
-            <a:avLst/>
-          </a:prstGeom>
-          <a:noFill/>
-        </p:spPr>
-        <p:txBody>
-          <a:bodyPr wrap="square" lIns="0" rIns="0" tIns="0" bIns="0">
-            <a:spAutoFit/>
-          </a:bodyPr>
-          <a:lstStyle/>
-          <a:p>
-            <a:pPr>
-              <a:lnSpc>
-                <a:spcPct val="108000"/>
-              </a:lnSpc>
-              <a:spcBef>
-                <a:spcPts val="0"/>
-              </a:spcBef>
-              <a:spcAft>
-                <a:spcPts val="0"/>
-              </a:spcAft>
-            </a:pPr>
-            <a:r>
-              <a:rPr sz="2700" b="0" i="0">
-                <a:solidFill>
-                  <a:srgbClr val="14171C"/>
-                </a:solidFill>
-                <a:latin typeface="Georgia"/>
-              </a:rPr>
-              <a:t>These frameworks work for development. They do not work for wellbeing.</a:t>
-            </a:r>
-          </a:p>
-        </p:txBody>
-      </p:sp>
-      <p:sp>
-        <p:nvSpPr>
-          <p:cNvPr id="4" name="TextBox 3"/>
-          <p:cNvSpPr txBox="1"/>
-          <p:nvPr/>
-        </p:nvSpPr>
-        <p:spPr>
-          <a:xfrm>
-            <a:off x="566928" y="2286000"/>
-            <a:ext cx="8595360" cy="3840480"/>
-          </a:xfrm>
-          <a:prstGeom prst="rect">
-            <a:avLst/>
-          </a:prstGeom>
-          <a:noFill/>
-        </p:spPr>
-        <p:txBody>
-          <a:bodyPr wrap="square" lIns="0" rIns="0" tIns="0" bIns="0">
-            <a:spAutoFit/>
-          </a:bodyPr>
-          <a:lstStyle/>
-          <a:p>
-            <a:pPr>
-              <a:lnSpc>
-                <a:spcPct val="132000"/>
-              </a:lnSpc>
-              <a:spcBef>
-                <a:spcPts val="0"/>
-              </a:spcBef>
-              <a:spcAft>
-                <a:spcPts val="1100"/>
-              </a:spcAft>
-            </a:pPr>
-            <a:r>
-              <a:rPr sz="1400" b="0" i="0">
-                <a:solidFill>
-                  <a:srgbClr val="5A6068"/>
-                </a:solidFill>
-                <a:latin typeface="Calibri"/>
-              </a:rPr>
-              <a:t>The HDI and SDG frameworks do not answer the question 'what makes people's lives better?' any more than a global income statistics database answers 'what makes a person happy?' They were designed to track development, measured at the aggregate level, with indicators chosen before the question of individual wellbeing was systematically tested. That is not a design failure; it is the intended scope.</a:t>
-            </a:r>
-          </a:p>
-          <a:p>
-            <a:pPr>
-              <a:lnSpc>
-                <a:spcPct val="132000"/>
-              </a:lnSpc>
-              <a:spcBef>
-                <a:spcPts val="0"/>
-              </a:spcBef>
-              <a:spcAft>
-                <a:spcPts val="1100"/>
-              </a:spcAft>
-            </a:pPr>
-            <a:r>
-              <a:rPr sz="1400" b="0" i="0">
-                <a:solidFill>
-                  <a:srgbClr val="5A6068"/>
-                </a:solidFill>
-                <a:latin typeface="Calibri"/>
-              </a:rPr>
-              <a:t>But it means the gap is structural. Education's access indicators work; pooling them with constructs that do not does not fix wellbeing prediction — it just builds a worse measure. Choosing a variable for health that is closer to saturated than the outcome it predicts is a measurement choice, not an incurable problem. And when a domain is never collected, no amount of better construction on the others will reach it.</a:t>
-            </a:r>
-          </a:p>
-        </p:txBody>
-      </p:sp>
-      <p:sp>
-        <p:nvSpPr>
-          <p:cNvPr id="5" name="TextBox 4"/>
-          <p:cNvSpPr txBox="1"/>
-          <p:nvPr/>
-        </p:nvSpPr>
-        <p:spPr>
-          <a:xfrm>
-            <a:off x="11338560" y="6263640"/>
-            <a:ext cx="548640" cy="274320"/>
-          </a:xfrm>
-          <a:prstGeom prst="rect">
-            <a:avLst/>
-          </a:prstGeom>
-          <a:noFill/>
-        </p:spPr>
-        <p:txBody>
-          <a:bodyPr wrap="square" lIns="0" rIns="0" tIns="0" bIns="0">
-            <a:spAutoFit/>
-          </a:bodyPr>
-          <a:lstStyle/>
-          <a:p>
-            <a:pPr algn="r">
-              <a:spcBef>
-                <a:spcPts val="0"/>
-              </a:spcBef>
-              <a:spcAft>
-                <a:spcPts val="0"/>
-              </a:spcAft>
-            </a:pPr>
-            <a:r>
-              <a:rPr sz="1100" b="0" i="0">
-                <a:solidFill>
-                  <a:srgbClr val="868D96"/>
-                </a:solidFill>
-                <a:latin typeface="Consolas"/>
-              </a:rPr>
-              <a:t>IV</a:t>
+              <a:t>The three domains predict wellbeing differently depending on where and how you measure. Development frameworks' blindness is not incurable; it is structural. Frameworks designed for tracking aggregate national progress cannot see individual experience responsive to change.</a:t>
             </a:r>
           </a:p>
         </p:txBody>
@@ -7618,7 +7500,7 @@
     <p:bg>
       <p:bgPr>
         <a:solidFill>
-          <a:srgbClr val="FCFCFB"/>
+          <a:srgbClr val="14171C"/>
         </a:solidFill>
         <a:effectLst/>
       </p:bgPr>
@@ -7638,21 +7520,261 @@
         </p:nvSpPr>
         <p:spPr>
           <a:xfrm>
-            <a:off x="566928" y="502920"/>
-            <a:ext cx="8595360" cy="274320"/>
-          </a:xfrm>
-          <a:prstGeom prst="rect">
-            <a:avLst/>
-          </a:prstGeom>
-          <a:noFill/>
-        </p:spPr>
-        <p:txBody>
-          <a:bodyPr wrap="square" lIns="0" rIns="0" tIns="0" bIns="0">
-            <a:spAutoFit/>
-          </a:bodyPr>
-          <a:lstStyle/>
-          <a:p>
-            <a:pPr>
+            <a:off x="8229600" y="822960"/>
+            <a:ext cx="3291840" cy="4114800"/>
+          </a:xfrm>
+          <a:prstGeom prst="rect">
+            <a:avLst/>
+          </a:prstGeom>
+          <a:noFill/>
+        </p:spPr>
+        <p:txBody>
+          <a:bodyPr wrap="square" lIns="0" rIns="0" tIns="0" bIns="0">
+            <a:spAutoFit/>
+          </a:bodyPr>
+          <a:lstStyle/>
+          <a:p>
+            <a:pPr algn="r">
+              <a:spcBef>
+                <a:spcPts val="0"/>
+              </a:spcBef>
+              <a:spcAft>
+                <a:spcPts val="0"/>
+              </a:spcAft>
+            </a:pPr>
+            <a:r>
+              <a:rPr sz="20000" b="0" i="0">
+                <a:solidFill>
+                  <a:srgbClr val="2A3340"/>
+                </a:solidFill>
+                <a:latin typeface="Georgia"/>
+              </a:rPr>
+              <a:t>IV</a:t>
+            </a:r>
+          </a:p>
+        </p:txBody>
+      </p:sp>
+      <p:sp>
+        <p:nvSpPr>
+          <p:cNvPr id="3" name="Rectangle 2"/>
+          <p:cNvSpPr/>
+          <p:nvPr/>
+        </p:nvSpPr>
+        <p:spPr>
+          <a:xfrm>
+            <a:off x="566928" y="1371600"/>
+            <a:ext cx="7315200" cy="25400"/>
+          </a:xfrm>
+          <a:prstGeom prst="rect">
+            <a:avLst/>
+          </a:prstGeom>
+          <a:solidFill>
+            <a:srgbClr val="C9D8EC"/>
+          </a:solidFill>
+          <a:ln>
+            <a:noFill/>
+          </a:ln>
+          <a:effectLst/>
+        </p:spPr>
+        <p:style>
+          <a:lnRef idx="1">
+            <a:schemeClr val="accent1"/>
+          </a:lnRef>
+          <a:fillRef idx="3">
+            <a:schemeClr val="accent1"/>
+          </a:fillRef>
+          <a:effectRef idx="2">
+            <a:schemeClr val="accent1"/>
+          </a:effectRef>
+          <a:fontRef idx="minor">
+            <a:schemeClr val="lt1"/>
+          </a:fontRef>
+        </p:style>
+        <p:txBody>
+          <a:bodyPr rtlCol="0" anchor="ctr"/>
+          <a:lstStyle/>
+          <a:p>
+            <a:pPr algn="ctr"/>
+          </a:p>
+        </p:txBody>
+      </p:sp>
+      <p:sp>
+        <p:nvSpPr>
+          <p:cNvPr id="4" name="TextBox 3"/>
+          <p:cNvSpPr txBox="1"/>
+          <p:nvPr/>
+        </p:nvSpPr>
+        <p:spPr>
+          <a:xfrm>
+            <a:off x="566928" y="960120"/>
+            <a:ext cx="5486400" cy="274320"/>
+          </a:xfrm>
+          <a:prstGeom prst="rect">
+            <a:avLst/>
+          </a:prstGeom>
+          <a:noFill/>
+        </p:spPr>
+        <p:txBody>
+          <a:bodyPr wrap="square" lIns="0" rIns="0" tIns="0" bIns="0">
+            <a:spAutoFit/>
+          </a:bodyPr>
+          <a:lstStyle/>
+          <a:p>
+            <a:pPr>
+              <a:spcBef>
+                <a:spcPts val="0"/>
+              </a:spcBef>
+              <a:spcAft>
+                <a:spcPts val="0"/>
+              </a:spcAft>
+            </a:pPr>
+            <a:r>
+              <a:rPr sz="1100" b="0" i="0">
+                <a:solidFill>
+                  <a:srgbClr val="C9D8EC"/>
+                </a:solidFill>
+                <a:latin typeface="Consolas"/>
+              </a:rPr>
+              <a:t>ACT IV</a:t>
+            </a:r>
+          </a:p>
+        </p:txBody>
+      </p:sp>
+      <p:sp>
+        <p:nvSpPr>
+          <p:cNvPr id="5" name="TextBox 4"/>
+          <p:cNvSpPr txBox="1"/>
+          <p:nvPr/>
+        </p:nvSpPr>
+        <p:spPr>
+          <a:xfrm>
+            <a:off x="566928" y="1783080"/>
+            <a:ext cx="7223760" cy="1828800"/>
+          </a:xfrm>
+          <a:prstGeom prst="rect">
+            <a:avLst/>
+          </a:prstGeom>
+          <a:noFill/>
+        </p:spPr>
+        <p:txBody>
+          <a:bodyPr wrap="square" lIns="0" rIns="0" tIns="0" bIns="0">
+            <a:spAutoFit/>
+          </a:bodyPr>
+          <a:lstStyle/>
+          <a:p>
+            <a:pPr>
+              <a:lnSpc>
+                <a:spcPct val="102000"/>
+              </a:lnSpc>
+              <a:spcBef>
+                <a:spcPts val="0"/>
+              </a:spcBef>
+              <a:spcAft>
+                <a:spcPts val="0"/>
+              </a:spcAft>
+            </a:pPr>
+            <a:r>
+              <a:rPr sz="4000" b="0" i="0">
+                <a:solidFill>
+                  <a:srgbClr val="FCFCFB"/>
+                </a:solidFill>
+                <a:latin typeface="Georgia"/>
+              </a:rPr>
+              <a:t>What this means for development frameworks</a:t>
+            </a:r>
+          </a:p>
+        </p:txBody>
+      </p:sp>
+      <p:sp>
+        <p:nvSpPr>
+          <p:cNvPr id="6" name="TextBox 5"/>
+          <p:cNvSpPr txBox="1"/>
+          <p:nvPr/>
+        </p:nvSpPr>
+        <p:spPr>
+          <a:xfrm>
+            <a:off x="566928" y="3886200"/>
+            <a:ext cx="6766560" cy="1463040"/>
+          </a:xfrm>
+          <a:prstGeom prst="rect">
+            <a:avLst/>
+          </a:prstGeom>
+          <a:noFill/>
+        </p:spPr>
+        <p:txBody>
+          <a:bodyPr wrap="square" lIns="0" rIns="0" tIns="0" bIns="0">
+            <a:spAutoFit/>
+          </a:bodyPr>
+          <a:lstStyle/>
+          <a:p>
+            <a:pPr>
+              <a:lnSpc>
+                <a:spcPct val="135000"/>
+              </a:lnSpc>
+              <a:spcBef>
+                <a:spcPts val="0"/>
+              </a:spcBef>
+              <a:spcAft>
+                <a:spcPts val="0"/>
+              </a:spcAft>
+            </a:pPr>
+            <a:r>
+              <a:rPr sz="1550" b="0" i="1">
+                <a:solidFill>
+                  <a:srgbClr val="9AA4B0"/>
+                </a:solidFill>
+                <a:latin typeface="Georgia"/>
+              </a:rPr>
+              <a:t>The disconnect is real and worth naming. Development frameworks have done their job of tracking progress on development. But the components that predict individual lived experience are ones these frameworks are not currently built to see — because of construction choices, variable saturation, or coverage that was never collected.</a:t>
+            </a:r>
+          </a:p>
+        </p:txBody>
+      </p:sp>
+      <p:sp>
+        <p:nvSpPr>
+          <p:cNvPr id="7" name="TextBox 6"/>
+          <p:cNvSpPr txBox="1"/>
+          <p:nvPr/>
+        </p:nvSpPr>
+        <p:spPr>
+          <a:xfrm>
+            <a:off x="566928" y="5623560"/>
+            <a:ext cx="3503066" cy="914400"/>
+          </a:xfrm>
+          <a:prstGeom prst="rect">
+            <a:avLst/>
+          </a:prstGeom>
+          <a:noFill/>
+        </p:spPr>
+        <p:txBody>
+          <a:bodyPr wrap="square" lIns="0" rIns="0" tIns="0" bIns="0">
+            <a:spAutoFit/>
+          </a:bodyPr>
+          <a:lstStyle/>
+          <a:p>
+            <a:pPr>
+              <a:spcBef>
+                <a:spcPts val="0"/>
+              </a:spcBef>
+              <a:spcAft>
+                <a:spcPts val="400"/>
+              </a:spcAft>
+            </a:pPr>
+            <a:r>
+              <a:rPr sz="2200" b="0" i="0">
+                <a:solidFill>
+                  <a:srgbClr val="FCFCFB"/>
+                </a:solidFill>
+                <a:latin typeface="Consolas"/>
+              </a:rPr>
+              <a:t>3 vs. 1</a:t>
+            </a:r>
+          </a:p>
+          <a:p>
+            <a:pPr>
+              <a:lnSpc>
+                <a:spcPct val="120000"/>
+              </a:lnSpc>
               <a:spcBef>
                 <a:spcPts val="0"/>
               </a:spcBef>
@@ -7663,40 +7785,59 @@
             <a:r>
               <a:rPr sz="1000" b="0" i="0">
                 <a:solidFill>
-                  <a:srgbClr val="A63A30"/>
+                  <a:srgbClr val="8A94A0"/>
+                </a:solidFill>
+                <a:latin typeface="Calibri"/>
+              </a:rPr>
+              <a:t>domains the HDI can test for wellbeing, vs. social trust</a:t>
+            </a:r>
+          </a:p>
+        </p:txBody>
+      </p:sp>
+      <p:sp>
+        <p:nvSpPr>
+          <p:cNvPr id="8" name="TextBox 7"/>
+          <p:cNvSpPr txBox="1"/>
+          <p:nvPr/>
+        </p:nvSpPr>
+        <p:spPr>
+          <a:xfrm>
+            <a:off x="4344314" y="5623560"/>
+            <a:ext cx="3503066" cy="914400"/>
+          </a:xfrm>
+          <a:prstGeom prst="rect">
+            <a:avLst/>
+          </a:prstGeom>
+          <a:noFill/>
+        </p:spPr>
+        <p:txBody>
+          <a:bodyPr wrap="square" lIns="0" rIns="0" tIns="0" bIns="0">
+            <a:spAutoFit/>
+          </a:bodyPr>
+          <a:lstStyle/>
+          <a:p>
+            <a:pPr>
+              <a:spcBef>
+                <a:spcPts val="0"/>
+              </a:spcBef>
+              <a:spcAft>
+                <a:spcPts val="400"/>
+              </a:spcAft>
+            </a:pPr>
+            <a:r>
+              <a:rPr sz="2200" b="0" i="0">
+                <a:solidFill>
+                  <a:srgbClr val="FCFCFB"/>
                 </a:solidFill>
                 <a:latin typeface="Consolas"/>
               </a:rPr>
-              <a:t>IMPLICATION 1 · MEASUREMENT CHOICES CONSTRAIN WHAT FRAMEWORKS CAN SEE</a:t>
-            </a:r>
-          </a:p>
-        </p:txBody>
-      </p:sp>
-      <p:sp>
-        <p:nvSpPr>
-          <p:cNvPr id="3" name="TextBox 2"/>
-          <p:cNvSpPr txBox="1"/>
-          <p:nvPr/>
-        </p:nvSpPr>
-        <p:spPr>
-          <a:xfrm>
-            <a:off x="566928" y="914400"/>
-            <a:ext cx="8595360" cy="1371600"/>
-          </a:xfrm>
-          <a:prstGeom prst="rect">
-            <a:avLst/>
-          </a:prstGeom>
-          <a:noFill/>
-        </p:spPr>
-        <p:txBody>
-          <a:bodyPr wrap="square" lIns="0" rIns="0" tIns="0" bIns="0">
-            <a:spAutoFit/>
-          </a:bodyPr>
-          <a:lstStyle/>
+              <a:t>42 vs. 661</a:t>
+            </a:r>
+          </a:p>
           <a:p>
             <a:pPr>
               <a:lnSpc>
-                <a:spcPct val="108000"/>
+                <a:spcPct val="120000"/>
               </a:lnSpc>
               <a:spcBef>
                 <a:spcPts val="0"/>
@@ -7706,122 +7847,77 @@
               </a:spcAft>
             </a:pPr>
             <a:r>
-              <a:rPr sz="2700" b="0" i="0">
-                <a:solidFill>
-                  <a:srgbClr val="14171C"/>
-                </a:solidFill>
-                <a:latin typeface="Georgia"/>
-              </a:rPr>
-              <a:t>Education and health: the case for measurement specificity</a:t>
-            </a:r>
-          </a:p>
-        </p:txBody>
-      </p:sp>
-      <p:sp>
-        <p:nvSpPr>
-          <p:cNvPr id="4" name="TextBox 3"/>
-          <p:cNvSpPr txBox="1"/>
-          <p:nvPr/>
-        </p:nvSpPr>
-        <p:spPr>
-          <a:xfrm>
-            <a:off x="566928" y="2286000"/>
-            <a:ext cx="8595360" cy="3840480"/>
-          </a:xfrm>
-          <a:prstGeom prst="rect">
-            <a:avLst/>
-          </a:prstGeom>
-          <a:noFill/>
-        </p:spPr>
-        <p:txBody>
-          <a:bodyPr wrap="square" lIns="0" rIns="0" tIns="0" bIns="0">
-            <a:spAutoFit/>
-          </a:bodyPr>
-          <a:lstStyle/>
+              <a:rPr sz="1000" b="0" i="0">
+                <a:solidFill>
+                  <a:srgbClr val="8A94A0"/>
+                </a:solidFill>
+                <a:latin typeface="Calibri"/>
+              </a:rPr>
+              <a:t>countries with SDG data, vs. series in the database</a:t>
+            </a:r>
+          </a:p>
+        </p:txBody>
+      </p:sp>
+      <p:sp>
+        <p:nvSpPr>
+          <p:cNvPr id="9" name="TextBox 8"/>
+          <p:cNvSpPr txBox="1"/>
+          <p:nvPr/>
+        </p:nvSpPr>
+        <p:spPr>
+          <a:xfrm>
+            <a:off x="8121700" y="5623560"/>
+            <a:ext cx="3503066" cy="914400"/>
+          </a:xfrm>
+          <a:prstGeom prst="rect">
+            <a:avLst/>
+          </a:prstGeom>
+          <a:noFill/>
+        </p:spPr>
+        <p:txBody>
+          <a:bodyPr wrap="square" lIns="0" rIns="0" tIns="0" bIns="0">
+            <a:spAutoFit/>
+          </a:bodyPr>
+          <a:lstStyle/>
+          <a:p>
+            <a:pPr>
+              <a:spcBef>
+                <a:spcPts val="0"/>
+              </a:spcBef>
+              <a:spcAft>
+                <a:spcPts val="400"/>
+              </a:spcAft>
+            </a:pPr>
+            <a:r>
+              <a:rPr sz="2200" b="0" i="0">
+                <a:solidFill>
+                  <a:srgbClr val="FCFCFB"/>
+                </a:solidFill>
+                <a:latin typeface="Consolas"/>
+              </a:rPr>
+              <a:t>0.041</a:t>
+            </a:r>
+          </a:p>
           <a:p>
             <a:pPr>
               <a:lnSpc>
-                <a:spcPct val="132000"/>
+                <a:spcPct val="120000"/>
               </a:lnSpc>
               <a:spcBef>
                 <a:spcPts val="0"/>
               </a:spcBef>
               <a:spcAft>
-                <a:spcPts val="1100"/>
-              </a:spcAft>
-            </a:pPr>
-            <a:r>
-              <a:rPr sz="1400" b="0" i="0">
-                <a:solidFill>
-                  <a:srgbClr val="5A6068"/>
+                <a:spcPts val="0"/>
+              </a:spcAft>
+            </a:pPr>
+            <a:r>
+              <a:rPr sz="1000" b="0" i="0">
+                <a:solidFill>
+                  <a:srgbClr val="8A94A0"/>
                 </a:solidFill>
                 <a:latin typeface="Calibri"/>
               </a:rPr>
-              <a:t>Education is significant everywhere it is measured as attainment, but nearly invisible in SDG4 because most indicators measure something else. Health is nearly invisible in the HDI because life expectancy has saturated. Neither domain has changed; the frameworks' construction choices have.</a:t>
-            </a:r>
-          </a:p>
-          <a:p>
-            <a:pPr>
-              <a:lnSpc>
-                <a:spcPct val="132000"/>
-              </a:lnSpc>
-              <a:spcBef>
-                <a:spcPts val="0"/>
-              </a:spcBef>
-              <a:spcAft>
-                <a:spcPts val="1100"/>
-              </a:spcAft>
-            </a:pPr>
-            <a:r>
-              <a:rPr sz="1400" b="0" i="0">
-                <a:solidFill>
-                  <a:srgbClr val="5A6068"/>
-                </a:solidFill>
-                <a:latin typeface="Calibri"/>
-              </a:rPr>
-              <a:t>For education, this suggests development measurement should weigh access and completion more heavily than parity ratios in wellbeing contexts — not universally, but with explicit construction choices that account for what is known to matter. For health, it suggests that wellbeing-motivated measurement may need different variables at different development levels: life expectancy in lower-income settings, self-reported health or specific conditions in saturated ones.</a:t>
-            </a:r>
-          </a:p>
-        </p:txBody>
-      </p:sp>
-      <p:sp>
-        <p:nvSpPr>
-          <p:cNvPr id="5" name="TextBox 4"/>
-          <p:cNvSpPr txBox="1"/>
-          <p:nvPr/>
-        </p:nvSpPr>
-        <p:spPr>
-          <a:xfrm>
-            <a:off x="11338560" y="6263640"/>
-            <a:ext cx="548640" cy="274320"/>
-          </a:xfrm>
-          <a:prstGeom prst="rect">
-            <a:avLst/>
-          </a:prstGeom>
-          <a:noFill/>
-        </p:spPr>
-        <p:txBody>
-          <a:bodyPr wrap="square" lIns="0" rIns="0" tIns="0" bIns="0">
-            <a:spAutoFit/>
-          </a:bodyPr>
-          <a:lstStyle/>
-          <a:p>
-            <a:pPr algn="r">
-              <a:spcBef>
-                <a:spcPts val="0"/>
-              </a:spcBef>
-              <a:spcAft>
-                <a:spcPts val="0"/>
-              </a:spcAft>
-            </a:pPr>
-            <a:r>
-              <a:rPr sz="1100" b="0" i="0">
-                <a:solidFill>
-                  <a:srgbClr val="868D96"/>
-                </a:solidFill>
-                <a:latin typeface="Consolas"/>
-              </a:rPr>
-              <a:t>IV</a:t>
+              <a:t>median R² for trust — below income, health, education individually, above none</a:t>
             </a:r>
           </a:p>
         </p:txBody>
@@ -7889,7 +7985,7 @@
                 </a:solidFill>
                 <a:latin typeface="Consolas"/>
               </a:rPr>
-              <a:t>IMPLICATION 2 · COVERAGE GAPS ARE MORE FUNDAMENTAL THAN CONSTRUCT CHOICE</a:t>
+              <a:t>THE DISCONNECT</a:t>
             </a:r>
           </a:p>
         </p:txBody>
@@ -7934,7 +8030,7 @@
                 </a:solidFill>
                 <a:latin typeface="Georgia"/>
               </a:rPr>
-              <a:t>Social trust: why you cannot fix a measurement by measuring better</a:t>
+              <a:t>These frameworks work for development. They do not work for wellbeing.</a:t>
             </a:r>
           </a:p>
         </p:txBody>
@@ -7979,7 +8075,7 @@
                 </a:solidFill>
                 <a:latin typeface="Calibri"/>
               </a:rPr>
-              <a:t>Social trust is the most tentative finding here. The ESS is Europe-only, across 36 countries, and relies on a single item. That bounds the claim: the pattern holds in Europe, with a wellbeing survey, on a self-report basis. It does not claim universality.</a:t>
+              <a:t>The HDI and SDG frameworks do not answer the question 'what makes people's lives better?' any more than a global income statistics database answers 'what makes a person happy?' They were designed to track development, measured at the aggregate level, with indicators chosen before the question of individual wellbeing was systematically tested. That is not a design failure; it is the intended scope.</a:t>
             </a:r>
           </a:p>
           <a:p>
@@ -8001,29 +8097,7 @@
                 </a:solidFill>
                 <a:latin typeface="Calibri"/>
               </a:rPr>
-              <a:t>But the reason it is tentative points to the deepest problem: trust is not collected at global scale in either framework. The SDG database has 13 series adjacent to trust, but they measure institutional confidence, not interpersonal trust, and they are intermittent (147 of 163 country-series have fewer than four years of data). This is not a construct-choice problem that better measurement can solve. It is a coverage gap that requires deciding to collect the data in the first place.</a:t>
-            </a:r>
-          </a:p>
-          <a:p>
-            <a:pPr>
-              <a:lnSpc>
-                <a:spcPct val="132000"/>
-              </a:lnSpc>
-              <a:spcBef>
-                <a:spcPts val="0"/>
-              </a:spcBef>
-              <a:spcAft>
-                <a:spcPts val="1100"/>
-              </a:spcAft>
-            </a:pPr>
-            <a:r>
-              <a:rPr sz="1400" b="0" i="0">
-                <a:solidFill>
-                  <a:srgbClr val="5A6068"/>
-                </a:solidFill>
-                <a:latin typeface="Calibri"/>
-              </a:rPr>
-              <a:t>For wellbeing-conscious development monitoring, this suggests either building interpersonal-trust measurement into the core frameworks, or acknowledging that other surveys (the ESS, Gallup World Poll, World Values Survey) may be more suitable for understanding what shapes lived experience.</a:t>
+              <a:t>But it means the gap is structural. Education's access indicators work; pooling them with constructs that do not does not fix wellbeing prediction — it just builds a worse measure. Choosing a variable for health that is closer to saturated than the outcome it predicts is a measurement choice, not an incurable problem. And when a domain is never collected, no amount of better construction on the others will reach it.</a:t>
             </a:r>
           </a:p>
         </p:txBody>
@@ -8133,7 +8207,7 @@
                 </a:solidFill>
                 <a:latin typeface="Consolas"/>
               </a:rPr>
-              <a:t>CONCLUSION</a:t>
+              <a:t>IMPLICATION 1 · MEASUREMENT CHOICES CONSTRAIN WHAT FRAMEWORKS CAN SEE</a:t>
             </a:r>
           </a:p>
         </p:txBody>
@@ -8178,7 +8252,7 @@
                 </a:solidFill>
                 <a:latin typeface="Georgia"/>
               </a:rPr>
-              <a:t>A question rather than a prescription</a:t>
+              <a:t>Education and health: the case for measurement specificity</a:t>
             </a:r>
           </a:p>
         </p:txBody>
@@ -8223,7 +8297,7 @@
                 </a:solidFill>
                 <a:latin typeface="Calibri"/>
               </a:rPr>
-              <a:t>The evidence shows a consistent pattern: which domain looks most consequential for wellbeing depends on which framework measures it and what variable they chose. This is not about the domains; it is about the tools.</a:t>
+              <a:t>Education is significant everywhere it is measured as attainment, but nearly invisible in SDG4 because most indicators measure something else. Health is nearly invisible in the HDI because life expectancy has saturated. Neither domain has changed; the frameworks' construction choices have.</a:t>
             </a:r>
           </a:p>
           <a:p>
@@ -8245,29 +8319,7 @@
                 </a:solidFill>
                 <a:latin typeface="Calibri"/>
               </a:rPr>
-              <a:t>Whether development frameworks should be redesigned around wellbeing is outside the scope here. But if they were, this finding suggests the question to ask: should measurement choices be made with explicit reference to which variables still move and still matter for lived experience? Should coverage be built in for domains the frameworks discovered only by studying something else?</a:t>
-            </a:r>
-          </a:p>
-          <a:p>
-            <a:pPr>
-              <a:lnSpc>
-                <a:spcPct val="132000"/>
-              </a:lnSpc>
-              <a:spcBef>
-                <a:spcPts val="0"/>
-              </a:spcBef>
-              <a:spcAft>
-                <a:spcPts val="1100"/>
-              </a:spcAft>
-            </a:pPr>
-            <a:r>
-              <a:rPr sz="1400" b="0" i="0">
-                <a:solidFill>
-                  <a:srgbClr val="5A6068"/>
-                </a:solidFill>
-                <a:latin typeface="Calibri"/>
-              </a:rPr>
-              <a:t>The frameworks work well for their stated purpose. The question is whether wellbeing should become part of that purpose — and if it does, whether the measurement that comes from that intent should be different from the aggregate, development-first measurement in place today.</a:t>
+              <a:t>For education, this suggests development measurement should weigh access and completion more heavily than parity ratios in wellbeing contexts — not universally, but with explicit construction choices that account for what is known to matter. For health, it suggests that wellbeing-motivated measurement may need different variables at different development levels: life expectancy in lower-income settings, self-reported health or specific conditions in saturated ones.</a:t>
             </a:r>
           </a:p>
         </p:txBody>
@@ -8328,7 +8380,7 @@
     <p:bg>
       <p:bgPr>
         <a:solidFill>
-          <a:srgbClr val="E8EBEF"/>
+          <a:srgbClr val="FCFCFB"/>
         </a:solidFill>
         <a:effectLst/>
       </p:bgPr>
@@ -8342,45 +8394,43 @@
       <p:grpSpPr/>
       <p:sp>
         <p:nvSpPr>
-          <p:cNvPr id="2" name="Rectangle 1"/>
-          <p:cNvSpPr/>
-          <p:nvPr/>
-        </p:nvSpPr>
-        <p:spPr>
-          <a:xfrm>
-            <a:off x="566928" y="2103120"/>
-            <a:ext cx="54864" cy="2377440"/>
-          </a:xfrm>
-          <a:prstGeom prst="rect">
-            <a:avLst/>
-          </a:prstGeom>
-          <a:solidFill>
-            <a:srgbClr val="17549E"/>
-          </a:solidFill>
-          <a:ln>
-            <a:noFill/>
-          </a:ln>
-          <a:effectLst/>
-        </p:spPr>
-        <p:style>
-          <a:lnRef idx="1">
-            <a:schemeClr val="accent1"/>
-          </a:lnRef>
-          <a:fillRef idx="3">
-            <a:schemeClr val="accent1"/>
-          </a:fillRef>
-          <a:effectRef idx="2">
-            <a:schemeClr val="accent1"/>
-          </a:effectRef>
-          <a:fontRef idx="minor">
-            <a:schemeClr val="lt1"/>
-          </a:fontRef>
-        </p:style>
-        <p:txBody>
-          <a:bodyPr rtlCol="0" anchor="ctr"/>
-          <a:lstStyle/>
-          <a:p>
-            <a:pPr algn="ctr"/>
+          <p:cNvPr id="2" name="TextBox 1"/>
+          <p:cNvSpPr txBox="1"/>
+          <p:nvPr/>
+        </p:nvSpPr>
+        <p:spPr>
+          <a:xfrm>
+            <a:off x="566928" y="502920"/>
+            <a:ext cx="8595360" cy="274320"/>
+          </a:xfrm>
+          <a:prstGeom prst="rect">
+            <a:avLst/>
+          </a:prstGeom>
+          <a:noFill/>
+        </p:spPr>
+        <p:txBody>
+          <a:bodyPr wrap="square" lIns="0" rIns="0" tIns="0" bIns="0">
+            <a:spAutoFit/>
+          </a:bodyPr>
+          <a:lstStyle/>
+          <a:p>
+            <a:pPr>
+              <a:spcBef>
+                <a:spcPts val="0"/>
+              </a:spcBef>
+              <a:spcAft>
+                <a:spcPts val="0"/>
+              </a:spcAft>
+            </a:pPr>
+            <a:r>
+              <a:rPr sz="1000" b="0" i="0">
+                <a:solidFill>
+                  <a:srgbClr val="A63A30"/>
+                </a:solidFill>
+                <a:latin typeface="Consolas"/>
+              </a:rPr>
+              <a:t>IMPLICATION 2 · COVERAGE GAPS ARE MORE FUNDAMENTAL THAN CONSTRUCT CHOICE</a:t>
+            </a:r>
           </a:p>
         </p:txBody>
       </p:sp>
@@ -8392,21 +8442,155 @@
         </p:nvSpPr>
         <p:spPr>
           <a:xfrm>
-            <a:off x="914400" y="1600200"/>
-            <a:ext cx="8686800" cy="274320"/>
-          </a:xfrm>
-          <a:prstGeom prst="rect">
-            <a:avLst/>
-          </a:prstGeom>
-          <a:noFill/>
-        </p:spPr>
-        <p:txBody>
-          <a:bodyPr wrap="square" lIns="0" rIns="0" tIns="0" bIns="0">
-            <a:spAutoFit/>
-          </a:bodyPr>
-          <a:lstStyle/>
-          <a:p>
-            <a:pPr>
+            <a:off x="566928" y="914400"/>
+            <a:ext cx="8595360" cy="1371600"/>
+          </a:xfrm>
+          <a:prstGeom prst="rect">
+            <a:avLst/>
+          </a:prstGeom>
+          <a:noFill/>
+        </p:spPr>
+        <p:txBody>
+          <a:bodyPr wrap="square" lIns="0" rIns="0" tIns="0" bIns="0">
+            <a:spAutoFit/>
+          </a:bodyPr>
+          <a:lstStyle/>
+          <a:p>
+            <a:pPr>
+              <a:lnSpc>
+                <a:spcPct val="108000"/>
+              </a:lnSpc>
+              <a:spcBef>
+                <a:spcPts val="0"/>
+              </a:spcBef>
+              <a:spcAft>
+                <a:spcPts val="0"/>
+              </a:spcAft>
+            </a:pPr>
+            <a:r>
+              <a:rPr sz="2700" b="0" i="0">
+                <a:solidFill>
+                  <a:srgbClr val="14171C"/>
+                </a:solidFill>
+                <a:latin typeface="Georgia"/>
+              </a:rPr>
+              <a:t>Social trust: why you cannot fix a measurement by measuring better</a:t>
+            </a:r>
+          </a:p>
+        </p:txBody>
+      </p:sp>
+      <p:sp>
+        <p:nvSpPr>
+          <p:cNvPr id="4" name="TextBox 3"/>
+          <p:cNvSpPr txBox="1"/>
+          <p:nvPr/>
+        </p:nvSpPr>
+        <p:spPr>
+          <a:xfrm>
+            <a:off x="566928" y="2286000"/>
+            <a:ext cx="8595360" cy="3840480"/>
+          </a:xfrm>
+          <a:prstGeom prst="rect">
+            <a:avLst/>
+          </a:prstGeom>
+          <a:noFill/>
+        </p:spPr>
+        <p:txBody>
+          <a:bodyPr wrap="square" lIns="0" rIns="0" tIns="0" bIns="0">
+            <a:spAutoFit/>
+          </a:bodyPr>
+          <a:lstStyle/>
+          <a:p>
+            <a:pPr>
+              <a:lnSpc>
+                <a:spcPct val="132000"/>
+              </a:lnSpc>
+              <a:spcBef>
+                <a:spcPts val="0"/>
+              </a:spcBef>
+              <a:spcAft>
+                <a:spcPts val="1100"/>
+              </a:spcAft>
+            </a:pPr>
+            <a:r>
+              <a:rPr sz="1400" b="0" i="0">
+                <a:solidFill>
+                  <a:srgbClr val="5A6068"/>
+                </a:solidFill>
+                <a:latin typeface="Calibri"/>
+              </a:rPr>
+              <a:t>Social trust is the most tentative finding here. The ESS is Europe-only, across 36 countries, and relies on a single item. That bounds the claim: the pattern holds in Europe, with a wellbeing survey, on a self-report basis. It does not claim universality.</a:t>
+            </a:r>
+          </a:p>
+          <a:p>
+            <a:pPr>
+              <a:lnSpc>
+                <a:spcPct val="132000"/>
+              </a:lnSpc>
+              <a:spcBef>
+                <a:spcPts val="0"/>
+              </a:spcBef>
+              <a:spcAft>
+                <a:spcPts val="1100"/>
+              </a:spcAft>
+            </a:pPr>
+            <a:r>
+              <a:rPr sz="1400" b="0" i="0">
+                <a:solidFill>
+                  <a:srgbClr val="5A6068"/>
+                </a:solidFill>
+                <a:latin typeface="Calibri"/>
+              </a:rPr>
+              <a:t>But the reason it is tentative points to the deepest problem: trust is not collected at global scale in either framework. The SDG database has 13 series adjacent to trust, but they measure institutional confidence, not interpersonal trust, and they are intermittent (147 of 163 country-series have fewer than four years of data). This is not a construct-choice problem that better measurement can solve. It is a coverage gap that requires deciding to collect the data in the first place.</a:t>
+            </a:r>
+          </a:p>
+          <a:p>
+            <a:pPr>
+              <a:lnSpc>
+                <a:spcPct val="132000"/>
+              </a:lnSpc>
+              <a:spcBef>
+                <a:spcPts val="0"/>
+              </a:spcBef>
+              <a:spcAft>
+                <a:spcPts val="1100"/>
+              </a:spcAft>
+            </a:pPr>
+            <a:r>
+              <a:rPr sz="1400" b="0" i="0">
+                <a:solidFill>
+                  <a:srgbClr val="5A6068"/>
+                </a:solidFill>
+                <a:latin typeface="Calibri"/>
+              </a:rPr>
+              <a:t>For wellbeing-conscious development monitoring, this suggests either building interpersonal-trust measurement into the core frameworks, or acknowledging that other surveys (the ESS, Gallup World Poll, World Values Survey) may be more suitable for understanding what shapes lived experience.</a:t>
+            </a:r>
+          </a:p>
+        </p:txBody>
+      </p:sp>
+      <p:sp>
+        <p:nvSpPr>
+          <p:cNvPr id="5" name="TextBox 4"/>
+          <p:cNvSpPr txBox="1"/>
+          <p:nvPr/>
+        </p:nvSpPr>
+        <p:spPr>
+          <a:xfrm>
+            <a:off x="11338560" y="6263640"/>
+            <a:ext cx="548640" cy="274320"/>
+          </a:xfrm>
+          <a:prstGeom prst="rect">
+            <a:avLst/>
+          </a:prstGeom>
+          <a:noFill/>
+        </p:spPr>
+        <p:txBody>
+          <a:bodyPr wrap="square" lIns="0" rIns="0" tIns="0" bIns="0">
+            <a:spAutoFit/>
+          </a:bodyPr>
+          <a:lstStyle/>
+          <a:p>
+            <a:pPr algn="r">
               <a:spcBef>
                 <a:spcPts val="0"/>
               </a:spcBef>
@@ -8417,56 +8601,11 @@
             <a:r>
               <a:rPr sz="1100" b="0" i="0">
                 <a:solidFill>
-                  <a:srgbClr val="17549E"/>
+                  <a:srgbClr val="868D96"/>
                 </a:solidFill>
                 <a:latin typeface="Consolas"/>
               </a:rPr>
-              <a:t>WHERE ACT IV LEAVES US</a:t>
-            </a:r>
-          </a:p>
-        </p:txBody>
-      </p:sp>
-      <p:sp>
-        <p:nvSpPr>
-          <p:cNvPr id="4" name="TextBox 3"/>
-          <p:cNvSpPr txBox="1"/>
-          <p:nvPr/>
-        </p:nvSpPr>
-        <p:spPr>
-          <a:xfrm>
-            <a:off x="914400" y="2148840"/>
-            <a:ext cx="9509760" cy="2926080"/>
-          </a:xfrm>
-          <a:prstGeom prst="rect">
-            <a:avLst/>
-          </a:prstGeom>
-          <a:noFill/>
-        </p:spPr>
-        <p:txBody>
-          <a:bodyPr wrap="square" lIns="0" rIns="0" tIns="0" bIns="0">
-            <a:spAutoFit/>
-          </a:bodyPr>
-          <a:lstStyle/>
-          <a:p>
-            <a:pPr>
-              <a:lnSpc>
-                <a:spcPct val="135000"/>
-              </a:lnSpc>
-              <a:spcBef>
-                <a:spcPts val="0"/>
-              </a:spcBef>
-              <a:spcAft>
-                <a:spcPts val="0"/>
-              </a:spcAft>
-            </a:pPr>
-            <a:r>
-              <a:rPr sz="2100" b="0" i="0">
-                <a:solidFill>
-                  <a:srgbClr val="14171C"/>
-                </a:solidFill>
-                <a:latin typeface="Georgia"/>
-              </a:rPr>
-              <a:t>Whether development measurement should be redesigned with wellbeing in mind is beyond this scope. But if it is, this evidence suggests the measurement should be different: more attentive to which variables still move, which constructs predict outcomes, and which domains are collected at all.</a:t>
+              <a:t>IV</a:t>
             </a:r>
           </a:p>
         </p:txBody>
@@ -8506,68 +8645,251 @@
         <p:spPr>
           <a:xfrm>
             <a:off x="566928" y="502920"/>
-            <a:ext cx="8229600" cy="822960"/>
-          </a:xfrm>
-          <a:prstGeom prst="rect">
-            <a:avLst/>
-          </a:prstGeom>
-          <a:noFill/>
-        </p:spPr>
-        <p:txBody>
-          <a:bodyPr wrap="square" lIns="0" rIns="0" tIns="0" bIns="0">
-            <a:spAutoFit/>
-          </a:bodyPr>
-          <a:lstStyle/>
-          <a:p>
-            <a:pPr>
-              <a:spcBef>
-                <a:spcPts val="0"/>
-              </a:spcBef>
-              <a:spcAft>
-                <a:spcPts val="600"/>
-              </a:spcAft>
-            </a:pPr>
-            <a:r>
-              <a:rPr sz="3200" b="0" i="0">
+            <a:ext cx="8595360" cy="274320"/>
+          </a:xfrm>
+          <a:prstGeom prst="rect">
+            <a:avLst/>
+          </a:prstGeom>
+          <a:noFill/>
+        </p:spPr>
+        <p:txBody>
+          <a:bodyPr wrap="square" lIns="0" rIns="0" tIns="0" bIns="0">
+            <a:spAutoFit/>
+          </a:bodyPr>
+          <a:lstStyle/>
+          <a:p>
+            <a:pPr>
+              <a:spcBef>
+                <a:spcPts val="0"/>
+              </a:spcBef>
+              <a:spcAft>
+                <a:spcPts val="0"/>
+              </a:spcAft>
+            </a:pPr>
+            <a:r>
+              <a:rPr sz="1000" b="0" i="0">
+                <a:solidFill>
+                  <a:srgbClr val="A63A30"/>
+                </a:solidFill>
+                <a:latin typeface="Consolas"/>
+              </a:rPr>
+              <a:t>CONCLUSION</a:t>
+            </a:r>
+          </a:p>
+        </p:txBody>
+      </p:sp>
+      <p:sp>
+        <p:nvSpPr>
+          <p:cNvPr id="3" name="TextBox 2"/>
+          <p:cNvSpPr txBox="1"/>
+          <p:nvPr/>
+        </p:nvSpPr>
+        <p:spPr>
+          <a:xfrm>
+            <a:off x="566928" y="914400"/>
+            <a:ext cx="8595360" cy="1371600"/>
+          </a:xfrm>
+          <a:prstGeom prst="rect">
+            <a:avLst/>
+          </a:prstGeom>
+          <a:noFill/>
+        </p:spPr>
+        <p:txBody>
+          <a:bodyPr wrap="square" lIns="0" rIns="0" tIns="0" bIns="0">
+            <a:spAutoFit/>
+          </a:bodyPr>
+          <a:lstStyle/>
+          <a:p>
+            <a:pPr>
+              <a:lnSpc>
+                <a:spcPct val="108000"/>
+              </a:lnSpc>
+              <a:spcBef>
+                <a:spcPts val="0"/>
+              </a:spcBef>
+              <a:spcAft>
+                <a:spcPts val="0"/>
+              </a:spcAft>
+            </a:pPr>
+            <a:r>
+              <a:rPr sz="2700" b="0" i="0">
                 <a:solidFill>
                   <a:srgbClr val="14171C"/>
                 </a:solidFill>
                 <a:latin typeface="Georgia"/>
               </a:rPr>
-              <a:t>Decisions for the team</a:t>
-            </a:r>
-          </a:p>
-          <a:p>
-            <a:pPr>
-              <a:spcBef>
-                <a:spcPts val="0"/>
-              </a:spcBef>
-              <a:spcAft>
-                <a:spcPts val="0"/>
-              </a:spcAft>
-            </a:pPr>
-            <a:r>
-              <a:rPr sz="1300" b="0" i="0">
+              <a:t>A question rather than a prescription</a:t>
+            </a:r>
+          </a:p>
+        </p:txBody>
+      </p:sp>
+      <p:sp>
+        <p:nvSpPr>
+          <p:cNvPr id="4" name="TextBox 3"/>
+          <p:cNvSpPr txBox="1"/>
+          <p:nvPr/>
+        </p:nvSpPr>
+        <p:spPr>
+          <a:xfrm>
+            <a:off x="566928" y="2286000"/>
+            <a:ext cx="8595360" cy="3840480"/>
+          </a:xfrm>
+          <a:prstGeom prst="rect">
+            <a:avLst/>
+          </a:prstGeom>
+          <a:noFill/>
+        </p:spPr>
+        <p:txBody>
+          <a:bodyPr wrap="square" lIns="0" rIns="0" tIns="0" bIns="0">
+            <a:spAutoFit/>
+          </a:bodyPr>
+          <a:lstStyle/>
+          <a:p>
+            <a:pPr>
+              <a:lnSpc>
+                <a:spcPct val="132000"/>
+              </a:lnSpc>
+              <a:spcBef>
+                <a:spcPts val="0"/>
+              </a:spcBef>
+              <a:spcAft>
+                <a:spcPts val="1100"/>
+              </a:spcAft>
+            </a:pPr>
+            <a:r>
+              <a:rPr sz="1400" b="0" i="0">
                 <a:solidFill>
                   <a:srgbClr val="5A6068"/>
                 </a:solidFill>
                 <a:latin typeface="Calibri"/>
               </a:rPr>
-              <a:t>4 things the acts do not settle, in the order they block drafting.</a:t>
-            </a:r>
-          </a:p>
-        </p:txBody>
-      </p:sp>
-      <p:sp>
-        <p:nvSpPr>
-          <p:cNvPr id="3" name="Rectangle 2"/>
+              <a:t>The evidence shows a consistent pattern: which domain looks most consequential for wellbeing depends on which framework measures it and what variable they chose. This is not about the domains; it is about the tools.</a:t>
+            </a:r>
+          </a:p>
+          <a:p>
+            <a:pPr>
+              <a:lnSpc>
+                <a:spcPct val="132000"/>
+              </a:lnSpc>
+              <a:spcBef>
+                <a:spcPts val="0"/>
+              </a:spcBef>
+              <a:spcAft>
+                <a:spcPts val="1100"/>
+              </a:spcAft>
+            </a:pPr>
+            <a:r>
+              <a:rPr sz="1400" b="0" i="0">
+                <a:solidFill>
+                  <a:srgbClr val="5A6068"/>
+                </a:solidFill>
+                <a:latin typeface="Calibri"/>
+              </a:rPr>
+              <a:t>Whether development frameworks should be redesigned around wellbeing is outside the scope here. But if they were, this finding suggests the question to ask: should measurement choices be made with explicit reference to which variables still move and still matter for lived experience? Should coverage be built in for domains the frameworks discovered only by studying something else?</a:t>
+            </a:r>
+          </a:p>
+          <a:p>
+            <a:pPr>
+              <a:lnSpc>
+                <a:spcPct val="132000"/>
+              </a:lnSpc>
+              <a:spcBef>
+                <a:spcPts val="0"/>
+              </a:spcBef>
+              <a:spcAft>
+                <a:spcPts val="1100"/>
+              </a:spcAft>
+            </a:pPr>
+            <a:r>
+              <a:rPr sz="1400" b="0" i="0">
+                <a:solidFill>
+                  <a:srgbClr val="5A6068"/>
+                </a:solidFill>
+                <a:latin typeface="Calibri"/>
+              </a:rPr>
+              <a:t>The frameworks work well for their stated purpose. The question is whether wellbeing should become part of that purpose — and if it does, whether the measurement that comes from that intent should be different from the aggregate, development-first measurement in place today.</a:t>
+            </a:r>
+          </a:p>
+        </p:txBody>
+      </p:sp>
+      <p:sp>
+        <p:nvSpPr>
+          <p:cNvPr id="5" name="TextBox 4"/>
+          <p:cNvSpPr txBox="1"/>
+          <p:nvPr/>
+        </p:nvSpPr>
+        <p:spPr>
+          <a:xfrm>
+            <a:off x="11338560" y="6263640"/>
+            <a:ext cx="548640" cy="274320"/>
+          </a:xfrm>
+          <a:prstGeom prst="rect">
+            <a:avLst/>
+          </a:prstGeom>
+          <a:noFill/>
+        </p:spPr>
+        <p:txBody>
+          <a:bodyPr wrap="square" lIns="0" rIns="0" tIns="0" bIns="0">
+            <a:spAutoFit/>
+          </a:bodyPr>
+          <a:lstStyle/>
+          <a:p>
+            <a:pPr algn="r">
+              <a:spcBef>
+                <a:spcPts val="0"/>
+              </a:spcBef>
+              <a:spcAft>
+                <a:spcPts val="0"/>
+              </a:spcAft>
+            </a:pPr>
+            <a:r>
+              <a:rPr sz="1100" b="0" i="0">
+                <a:solidFill>
+                  <a:srgbClr val="868D96"/>
+                </a:solidFill>
+                <a:latin typeface="Consolas"/>
+              </a:rPr>
+              <a:t>IV</a:t>
+            </a:r>
+          </a:p>
+        </p:txBody>
+      </p:sp>
+    </p:spTree>
+  </p:cSld>
+  <p:clrMapOvr>
+    <a:masterClrMapping/>
+  </p:clrMapOvr>
+</p:sld>
+</file>
+
+<file path=ppt/slides/slide27.xml><?xml version="1.0" encoding="utf-8"?>
+<p:sld xmlns:a="http://schemas.openxmlformats.org/drawingml/2006/main" xmlns:p="http://schemas.openxmlformats.org/presentationml/2006/main" xmlns:r="http://schemas.openxmlformats.org/officeDocument/2006/relationships">
+  <p:cSld>
+    <p:bg>
+      <p:bgPr>
+        <a:solidFill>
+          <a:srgbClr val="E8EBEF"/>
+        </a:solidFill>
+        <a:effectLst/>
+      </p:bgPr>
+    </p:bg>
+    <p:spTree>
+      <p:nvGrpSpPr>
+        <p:cNvPr id="1" name=""/>
+        <p:cNvGrpSpPr/>
+        <p:nvPr/>
+      </p:nvGrpSpPr>
+      <p:grpSpPr/>
+      <p:sp>
+        <p:nvSpPr>
+          <p:cNvPr id="2" name="Rectangle 1"/>
           <p:cNvSpPr/>
           <p:nvPr/>
         </p:nvSpPr>
         <p:spPr>
           <a:xfrm>
-            <a:off x="566928" y="1828800"/>
-            <a:ext cx="3472586" cy="25400"/>
+            <a:off x="566928" y="2103120"/>
+            <a:ext cx="54864" cy="2377440"/>
           </a:xfrm>
           <a:prstGeom prst="rect">
             <a:avLst/>
@@ -8604,48 +8926,71 @@
       </p:sp>
       <p:sp>
         <p:nvSpPr>
+          <p:cNvPr id="3" name="TextBox 2"/>
+          <p:cNvSpPr txBox="1"/>
+          <p:nvPr/>
+        </p:nvSpPr>
+        <p:spPr>
+          <a:xfrm>
+            <a:off x="914400" y="1600200"/>
+            <a:ext cx="8686800" cy="274320"/>
+          </a:xfrm>
+          <a:prstGeom prst="rect">
+            <a:avLst/>
+          </a:prstGeom>
+          <a:noFill/>
+        </p:spPr>
+        <p:txBody>
+          <a:bodyPr wrap="square" lIns="0" rIns="0" tIns="0" bIns="0">
+            <a:spAutoFit/>
+          </a:bodyPr>
+          <a:lstStyle/>
+          <a:p>
+            <a:pPr>
+              <a:spcBef>
+                <a:spcPts val="0"/>
+              </a:spcBef>
+              <a:spcAft>
+                <a:spcPts val="0"/>
+              </a:spcAft>
+            </a:pPr>
+            <a:r>
+              <a:rPr sz="1100" b="0" i="0">
+                <a:solidFill>
+                  <a:srgbClr val="17549E"/>
+                </a:solidFill>
+                <a:latin typeface="Consolas"/>
+              </a:rPr>
+              <a:t>WHERE ACT IV LEAVES US</a:t>
+            </a:r>
+          </a:p>
+        </p:txBody>
+      </p:sp>
+      <p:sp>
+        <p:nvSpPr>
           <p:cNvPr id="4" name="TextBox 3"/>
           <p:cNvSpPr txBox="1"/>
           <p:nvPr/>
         </p:nvSpPr>
         <p:spPr>
           <a:xfrm>
-            <a:off x="566928" y="2011680"/>
-            <a:ext cx="3472586" cy="1828800"/>
-          </a:xfrm>
-          <a:prstGeom prst="rect">
-            <a:avLst/>
-          </a:prstGeom>
-          <a:noFill/>
-        </p:spPr>
-        <p:txBody>
-          <a:bodyPr wrap="square" lIns="0" rIns="0" tIns="0" bIns="0">
-            <a:spAutoFit/>
-          </a:bodyPr>
-          <a:lstStyle/>
-          <a:p>
-            <a:pPr>
-              <a:spcBef>
-                <a:spcPts val="0"/>
-              </a:spcBef>
-              <a:spcAft>
-                <a:spcPts val="700"/>
-              </a:spcAft>
-            </a:pPr>
-            <a:r>
-              <a:rPr sz="1050" b="0" i="0">
-                <a:solidFill>
-                  <a:srgbClr val="17549E"/>
-                </a:solidFill>
-                <a:latin typeface="Consolas"/>
-              </a:rPr>
-              <a:t>FIGURE COUNT</a:t>
-            </a:r>
-          </a:p>
+            <a:off x="914400" y="2148840"/>
+            <a:ext cx="9509760" cy="2926080"/>
+          </a:xfrm>
+          <a:prstGeom prst="rect">
+            <a:avLst/>
+          </a:prstGeom>
+          <a:noFill/>
+        </p:spPr>
+        <p:txBody>
+          <a:bodyPr wrap="square" lIns="0" rIns="0" tIns="0" bIns="0">
+            <a:spAutoFit/>
+          </a:bodyPr>
+          <a:lstStyle/>
           <a:p>
             <a:pPr>
               <a:lnSpc>
-                <a:spcPct val="130000"/>
+                <a:spcPct val="135000"/>
               </a:lnSpc>
               <a:spcBef>
                 <a:spcPts val="0"/>
@@ -8655,26 +9000,113 @@
               </a:spcAft>
             </a:pPr>
             <a:r>
-              <a:rPr sz="1100" b="0" i="0">
+              <a:rPr sz="2100" b="0" i="0">
+                <a:solidFill>
+                  <a:srgbClr val="14171C"/>
+                </a:solidFill>
+                <a:latin typeface="Georgia"/>
+              </a:rPr>
+              <a:t>Whether development measurement should be redesigned with wellbeing in mind is beyond this scope. But if it is, this evidence suggests the measurement should be different: more attentive to which variables still move, which constructs predict outcomes, and which domains are collected at all.</a:t>
+            </a:r>
+          </a:p>
+        </p:txBody>
+      </p:sp>
+    </p:spTree>
+  </p:cSld>
+  <p:clrMapOvr>
+    <a:masterClrMapping/>
+  </p:clrMapOvr>
+</p:sld>
+</file>
+
+<file path=ppt/slides/slide28.xml><?xml version="1.0" encoding="utf-8"?>
+<p:sld xmlns:a="http://schemas.openxmlformats.org/drawingml/2006/main" xmlns:p="http://schemas.openxmlformats.org/presentationml/2006/main" xmlns:r="http://schemas.openxmlformats.org/officeDocument/2006/relationships">
+  <p:cSld>
+    <p:bg>
+      <p:bgPr>
+        <a:solidFill>
+          <a:srgbClr val="FCFCFB"/>
+        </a:solidFill>
+        <a:effectLst/>
+      </p:bgPr>
+    </p:bg>
+    <p:spTree>
+      <p:nvGrpSpPr>
+        <p:cNvPr id="1" name=""/>
+        <p:cNvGrpSpPr/>
+        <p:nvPr/>
+      </p:nvGrpSpPr>
+      <p:grpSpPr/>
+      <p:sp>
+        <p:nvSpPr>
+          <p:cNvPr id="2" name="TextBox 1"/>
+          <p:cNvSpPr txBox="1"/>
+          <p:nvPr/>
+        </p:nvSpPr>
+        <p:spPr>
+          <a:xfrm>
+            <a:off x="566928" y="502920"/>
+            <a:ext cx="8229600" cy="822960"/>
+          </a:xfrm>
+          <a:prstGeom prst="rect">
+            <a:avLst/>
+          </a:prstGeom>
+          <a:noFill/>
+        </p:spPr>
+        <p:txBody>
+          <a:bodyPr wrap="square" lIns="0" rIns="0" tIns="0" bIns="0">
+            <a:spAutoFit/>
+          </a:bodyPr>
+          <a:lstStyle/>
+          <a:p>
+            <a:pPr>
+              <a:spcBef>
+                <a:spcPts val="0"/>
+              </a:spcBef>
+              <a:spcAft>
+                <a:spcPts val="600"/>
+              </a:spcAft>
+            </a:pPr>
+            <a:r>
+              <a:rPr sz="3200" b="0" i="0">
+                <a:solidFill>
+                  <a:srgbClr val="14171C"/>
+                </a:solidFill>
+                <a:latin typeface="Georgia"/>
+              </a:rPr>
+              <a:t>Decisions for the team</a:t>
+            </a:r>
+          </a:p>
+          <a:p>
+            <a:pPr>
+              <a:spcBef>
+                <a:spcPts val="0"/>
+              </a:spcBef>
+              <a:spcAft>
+                <a:spcPts val="0"/>
+              </a:spcAft>
+            </a:pPr>
+            <a:r>
+              <a:rPr sz="1300" b="0" i="0">
                 <a:solidFill>
                   <a:srgbClr val="5A6068"/>
                 </a:solidFill>
                 <a:latin typeface="Calibri"/>
               </a:rPr>
-              <a:t>Commentaries allow one or two. Proposed: three-panel composite as Figure 1 and domain scorecard as Figure 2. Everything else supplementary.</a:t>
-            </a:r>
-          </a:p>
-        </p:txBody>
-      </p:sp>
-      <p:sp>
-        <p:nvSpPr>
-          <p:cNvPr id="5" name="Rectangle 4"/>
+              <a:t>4 things the acts do not settle, in the order they block drafting.</a:t>
+            </a:r>
+          </a:p>
+        </p:txBody>
+      </p:sp>
+      <p:sp>
+        <p:nvSpPr>
+          <p:cNvPr id="3" name="Rectangle 2"/>
           <p:cNvSpPr/>
           <p:nvPr/>
         </p:nvSpPr>
         <p:spPr>
           <a:xfrm>
-            <a:off x="4359554" y="1828800"/>
+            <a:off x="566928" y="1828800"/>
             <a:ext cx="3472586" cy="25400"/>
           </a:xfrm>
           <a:prstGeom prst="rect">
@@ -8712,13 +9144,13 @@
       </p:sp>
       <p:sp>
         <p:nvSpPr>
-          <p:cNvPr id="6" name="TextBox 5"/>
-          <p:cNvSpPr txBox="1"/>
-          <p:nvPr/>
-        </p:nvSpPr>
-        <p:spPr>
-          <a:xfrm>
-            <a:off x="4359554" y="2011680"/>
+          <p:cNvPr id="4" name="TextBox 3"/>
+          <p:cNvSpPr txBox="1"/>
+          <p:nvPr/>
+        </p:nvSpPr>
+        <p:spPr>
+          <a:xfrm>
+            <a:off x="566928" y="2011680"/>
             <a:ext cx="3472586" cy="1828800"/>
           </a:xfrm>
           <a:prstGeom prst="rect">
@@ -8747,7 +9179,7 @@
                 </a:solidFill>
                 <a:latin typeface="Consolas"/>
               </a:rPr>
-              <a:t>SCOPE OF TRUST FINDINGS</a:t>
+              <a:t>FIGURE COUNT</a:t>
             </a:r>
           </a:p>
           <a:p>
@@ -8769,20 +9201,20 @@
                 </a:solidFill>
                 <a:latin typeface="Calibri"/>
               </a:rPr>
-              <a:t>Trust findings rest on ESS (36 European countries, individual-level). The design requires ≥4 years per country-series; only 16 of 163 SDG trust-adjacent series have that coverage, and 1 is significant. Tested cross-sectionally, 9 of 13 series are usable and 4 are significant, but all fall below HDI components on the same countries. The claim is Europe-only and rests on one instrument in each framework; it is the most tentative of the three.</a:t>
-            </a:r>
-          </a:p>
-        </p:txBody>
-      </p:sp>
-      <p:sp>
-        <p:nvSpPr>
-          <p:cNvPr id="7" name="Rectangle 6"/>
+              <a:t>Commentaries allow one or two. Proposed: three-panel composite as Figure 1 and domain scorecard as Figure 2. Everything else supplementary.</a:t>
+            </a:r>
+          </a:p>
+        </p:txBody>
+      </p:sp>
+      <p:sp>
+        <p:nvSpPr>
+          <p:cNvPr id="5" name="Rectangle 4"/>
           <p:cNvSpPr/>
           <p:nvPr/>
         </p:nvSpPr>
         <p:spPr>
           <a:xfrm>
-            <a:off x="8152180" y="1828800"/>
+            <a:off x="4359554" y="1828800"/>
             <a:ext cx="3472586" cy="25400"/>
           </a:xfrm>
           <a:prstGeom prst="rect">
@@ -8820,13 +9252,13 @@
       </p:sp>
       <p:sp>
         <p:nvSpPr>
-          <p:cNvPr id="8" name="TextBox 7"/>
-          <p:cNvSpPr txBox="1"/>
-          <p:nvPr/>
-        </p:nvSpPr>
-        <p:spPr>
-          <a:xfrm>
-            <a:off x="8152180" y="2011680"/>
+          <p:cNvPr id="6" name="TextBox 5"/>
+          <p:cNvSpPr txBox="1"/>
+          <p:nvPr/>
+        </p:nvSpPr>
+        <p:spPr>
+          <a:xfrm>
+            <a:off x="4359554" y="2011680"/>
             <a:ext cx="3472586" cy="1828800"/>
           </a:xfrm>
           <a:prstGeom prst="rect">
@@ -8855,7 +9287,7 @@
                 </a:solidFill>
                 <a:latin typeface="Consolas"/>
               </a:rPr>
-              <a:t>INSTITUTIONAL CONFIDENCE VS. INTERPERSONAL TRUST</a:t>
+              <a:t>SCOPE OF TRUST FINDINGS</a:t>
             </a:r>
           </a:p>
           <a:p>
@@ -8877,20 +9309,20 @@
                 </a:solidFill>
                 <a:latin typeface="Calibri"/>
               </a:rPr>
-              <a:t>The SDG's Goal 16 trust series measure satisfaction with public services, perceived bribery, and perceived inclusiveness in decision-making — institutional confidence, not interpersonal trust ('most people can be trusted'). These are conceptually distinct. The commentarymust be explicit that SDG16 is not a direct analogue for the ESS trust item.</a:t>
-            </a:r>
-          </a:p>
-        </p:txBody>
-      </p:sp>
-      <p:sp>
-        <p:nvSpPr>
-          <p:cNvPr id="9" name="Rectangle 8"/>
+              <a:t>Trust findings rest on ESS (36 European countries, individual-level). The design requires ≥4 years per country-series; only 16 of 163 SDG trust-adjacent series have that coverage, and 1 is significant. Tested cross-sectionally, 9 of 13 series are usable and 4 are significant, but all fall below HDI components on the same countries. The claim is Europe-only and rests on one instrument in each framework; it is the most tentative of the three.</a:t>
+            </a:r>
+          </a:p>
+        </p:txBody>
+      </p:sp>
+      <p:sp>
+        <p:nvSpPr>
+          <p:cNvPr id="7" name="Rectangle 6"/>
           <p:cNvSpPr/>
           <p:nvPr/>
         </p:nvSpPr>
         <p:spPr>
           <a:xfrm>
-            <a:off x="566928" y="4069080"/>
+            <a:off x="8152180" y="1828800"/>
             <a:ext cx="3472586" cy="25400"/>
           </a:xfrm>
           <a:prstGeom prst="rect">
@@ -8928,6 +9360,114 @@
       </p:sp>
       <p:sp>
         <p:nvSpPr>
+          <p:cNvPr id="8" name="TextBox 7"/>
+          <p:cNvSpPr txBox="1"/>
+          <p:nvPr/>
+        </p:nvSpPr>
+        <p:spPr>
+          <a:xfrm>
+            <a:off x="8152180" y="2011680"/>
+            <a:ext cx="3472586" cy="1828800"/>
+          </a:xfrm>
+          <a:prstGeom prst="rect">
+            <a:avLst/>
+          </a:prstGeom>
+          <a:noFill/>
+        </p:spPr>
+        <p:txBody>
+          <a:bodyPr wrap="square" lIns="0" rIns="0" tIns="0" bIns="0">
+            <a:spAutoFit/>
+          </a:bodyPr>
+          <a:lstStyle/>
+          <a:p>
+            <a:pPr>
+              <a:spcBef>
+                <a:spcPts val="0"/>
+              </a:spcBef>
+              <a:spcAft>
+                <a:spcPts val="700"/>
+              </a:spcAft>
+            </a:pPr>
+            <a:r>
+              <a:rPr sz="1050" b="0" i="0">
+                <a:solidFill>
+                  <a:srgbClr val="17549E"/>
+                </a:solidFill>
+                <a:latin typeface="Consolas"/>
+              </a:rPr>
+              <a:t>INSTITUTIONAL CONFIDENCE VS. INTERPERSONAL TRUST</a:t>
+            </a:r>
+          </a:p>
+          <a:p>
+            <a:pPr>
+              <a:lnSpc>
+                <a:spcPct val="130000"/>
+              </a:lnSpc>
+              <a:spcBef>
+                <a:spcPts val="0"/>
+              </a:spcBef>
+              <a:spcAft>
+                <a:spcPts val="0"/>
+              </a:spcAft>
+            </a:pPr>
+            <a:r>
+              <a:rPr sz="1100" b="0" i="0">
+                <a:solidFill>
+                  <a:srgbClr val="5A6068"/>
+                </a:solidFill>
+                <a:latin typeface="Calibri"/>
+              </a:rPr>
+              <a:t>The SDG's Goal 16 trust series measure satisfaction with public services, perceived bribery, and perceived inclusiveness in decision-making — institutional confidence, not interpersonal trust ('most people can be trusted'). These are conceptually distinct. The commentarymust be explicit that SDG16 is not a direct analogue for the ESS trust item.</a:t>
+            </a:r>
+          </a:p>
+        </p:txBody>
+      </p:sp>
+      <p:sp>
+        <p:nvSpPr>
+          <p:cNvPr id="9" name="Rectangle 8"/>
+          <p:cNvSpPr/>
+          <p:nvPr/>
+        </p:nvSpPr>
+        <p:spPr>
+          <a:xfrm>
+            <a:off x="566928" y="4069080"/>
+            <a:ext cx="3472586" cy="25400"/>
+          </a:xfrm>
+          <a:prstGeom prst="rect">
+            <a:avLst/>
+          </a:prstGeom>
+          <a:solidFill>
+            <a:srgbClr val="17549E"/>
+          </a:solidFill>
+          <a:ln>
+            <a:noFill/>
+          </a:ln>
+          <a:effectLst/>
+        </p:spPr>
+        <p:style>
+          <a:lnRef idx="1">
+            <a:schemeClr val="accent1"/>
+          </a:lnRef>
+          <a:fillRef idx="3">
+            <a:schemeClr val="accent1"/>
+          </a:fillRef>
+          <a:effectRef idx="2">
+            <a:schemeClr val="accent1"/>
+          </a:effectRef>
+          <a:fontRef idx="minor">
+            <a:schemeClr val="lt1"/>
+          </a:fontRef>
+        </p:style>
+        <p:txBody>
+          <a:bodyPr rtlCol="0" anchor="ctr"/>
+          <a:lstStyle/>
+          <a:p>
+            <a:pPr algn="ctr"/>
+          </a:p>
+        </p:txBody>
+      </p:sp>
+      <p:sp>
+        <p:nvSpPr>
           <p:cNvPr id="10" name="TextBox 9"/>
           <p:cNvSpPr txBox="1"/>
           <p:nvPr/>
@@ -8998,7 +9538,7 @@
 </p:sld>
 </file>
 
-<file path=ppt/slides/slide27.xml><?xml version="1.0" encoding="utf-8"?>
+<file path=ppt/slides/slide29.xml><?xml version="1.0" encoding="utf-8"?>
 <p:sld xmlns:a="http://schemas.openxmlformats.org/drawingml/2006/main" xmlns:p="http://schemas.openxmlformats.org/presentationml/2006/main" xmlns:r="http://schemas.openxmlformats.org/officeDocument/2006/relationships">
   <p:cSld>
     <p:bg>
@@ -11045,7 +11585,7 @@
                 </a:solidFill>
                 <a:latin typeface="Consolas"/>
               </a:rPr>
-              <a:t>ALL THREE MATTER</a:t>
+              <a:t>FRAMEWORK COMPARISON</a:t>
             </a:r>
           </a:p>
         </p:txBody>
@@ -11090,7 +11630,7 @@
                 </a:solidFill>
                 <a:latin typeface="Georgia"/>
               </a:rPr>
-              <a:t>Education, health, and social trust all significantly predict life satisfaction</a:t>
+              <a:t>How the frameworks compare on detection, budget-match, and per-indicator basis</a:t>
             </a:r>
           </a:p>
         </p:txBody>
@@ -11135,7 +11675,7 @@
                 </a:solidFill>
                 <a:latin typeface="Calibri"/>
               </a:rPr>
-              <a:t>In the European Social Survey, where all three are measured at the individual level, all three are significant in the majority of countries. But which framework can see all three? Which sees only some? The answer depends on three different failure modes.</a:t>
+              <a:t>Before we ask what matters, we need to understand how these frameworks differ. The SDG database detects significance in more countries (71% raw) than the HDI (51% raw), but when both are given the same budget — five indicators across 42 countries — the HDI's edge becomes real but modest (30% vs 51% among those 42 countries). When normalized per indicator, the HDI dominates: most SDG series sit in the zero-significance tail, while HDI indicators cluster higher. This is context we need before asking which components matter most.</a:t>
             </a:r>
           </a:p>
         </p:txBody>
@@ -11184,7 +11724,7 @@
       </p:sp>
       <p:pic>
         <p:nvPicPr>
-          <p:cNvPr id="6" name="Picture 5" descr="domains_at_levels_comparison.png"/>
+          <p:cNvPr id="6" name="Picture 5" descr="framework_three_comparisons.png"/>
           <p:cNvPicPr>
             <a:picLocks noChangeAspect="1"/>
           </p:cNvPicPr>
@@ -11198,8 +11738,8 @@
         </p:blipFill>
         <p:spPr>
           <a:xfrm>
-            <a:off x="5120640" y="2028335"/>
-            <a:ext cx="6537960" cy="2334985"/>
+            <a:off x="5120640" y="2093715"/>
+            <a:ext cx="6537960" cy="2204226"/>
           </a:xfrm>
           <a:prstGeom prst="rect">
             <a:avLst/>
@@ -11246,7 +11786,7 @@
                 </a:solidFill>
                 <a:latin typeface="Calibri"/>
               </a:rPr>
-              <a:t>% of countries where each domain significantly predicts wellbeing at levels. ESS: 36 countries. HDI: 150 countries. SDG: country-indicator pairs.</a:t>
+              <a:t>How SDG and HDI frameworks compare on detection rate, budget-matched analysis, and per-indicator significance distribution.</a:t>
             </a:r>
           </a:p>
         </p:txBody>

--- a/deck/Measured_Where_It_Varies.pptx
+++ b/deck/Measured_Where_It_Varies.pptx
@@ -34,6 +34,8 @@
     <p:sldId id="282" r:id="rId33"/>
     <p:sldId id="283" r:id="rId34"/>
     <p:sldId id="284" r:id="rId35"/>
+    <p:sldId id="285" r:id="rId36"/>
+    <p:sldId id="286" r:id="rId37"/>
   </p:sldIdLst>
   <p:sldSz cx="12191695" cy="6858000" type="screen4x3"/>
   <p:notesSz cx="6858000" cy="9144000"/>
@@ -5393,6 +5395,275 @@
     <p:bg>
       <p:bgPr>
         <a:solidFill>
+          <a:srgbClr val="FCFCFB"/>
+        </a:solidFill>
+        <a:effectLst/>
+      </p:bgPr>
+    </p:bg>
+    <p:spTree>
+      <p:nvGrpSpPr>
+        <p:cNvPr id="1" name=""/>
+        <p:cNvGrpSpPr/>
+        <p:nvPr/>
+      </p:nvGrpSpPr>
+      <p:grpSpPr/>
+      <p:sp>
+        <p:nvSpPr>
+          <p:cNvPr id="2" name="TextBox 1"/>
+          <p:cNvSpPr txBox="1"/>
+          <p:nvPr/>
+        </p:nvSpPr>
+        <p:spPr>
+          <a:xfrm>
+            <a:off x="566928" y="502920"/>
+            <a:ext cx="4160520" cy="274320"/>
+          </a:xfrm>
+          <a:prstGeom prst="rect">
+            <a:avLst/>
+          </a:prstGeom>
+          <a:noFill/>
+        </p:spPr>
+        <p:txBody>
+          <a:bodyPr wrap="square" lIns="0" rIns="0" tIns="0" bIns="0">
+            <a:spAutoFit/>
+          </a:bodyPr>
+          <a:lstStyle/>
+          <a:p>
+            <a:pPr>
+              <a:spcBef>
+                <a:spcPts val="0"/>
+              </a:spcBef>
+              <a:spcAft>
+                <a:spcPts val="0"/>
+              </a:spcAft>
+            </a:pPr>
+            <a:r>
+              <a:rPr sz="1000" b="0" i="0">
+                <a:solidFill>
+                  <a:srgbClr val="A63A30"/>
+                </a:solidFill>
+                <a:latin typeface="Consolas"/>
+              </a:rPr>
+              <a:t>FRAMEWORK BLIND SPOTS · DOMAIN BY DOMAIN</a:t>
+            </a:r>
+          </a:p>
+        </p:txBody>
+      </p:sp>
+      <p:sp>
+        <p:nvSpPr>
+          <p:cNvPr id="3" name="TextBox 2"/>
+          <p:cNvSpPr txBox="1"/>
+          <p:nvPr/>
+        </p:nvSpPr>
+        <p:spPr>
+          <a:xfrm>
+            <a:off x="566928" y="914400"/>
+            <a:ext cx="4160520" cy="1371600"/>
+          </a:xfrm>
+          <a:prstGeom prst="rect">
+            <a:avLst/>
+          </a:prstGeom>
+          <a:noFill/>
+        </p:spPr>
+        <p:txBody>
+          <a:bodyPr wrap="square" lIns="0" rIns="0" tIns="0" bIns="0">
+            <a:spAutoFit/>
+          </a:bodyPr>
+          <a:lstStyle/>
+          <a:p>
+            <a:pPr>
+              <a:lnSpc>
+                <a:spcPct val="108000"/>
+              </a:lnSpc>
+              <a:spcBef>
+                <a:spcPts val="0"/>
+              </a:spcBef>
+              <a:spcAft>
+                <a:spcPts val="0"/>
+              </a:spcAft>
+            </a:pPr>
+            <a:r>
+              <a:rPr sz="2300" b="0" i="0">
+                <a:solidFill>
+                  <a:srgbClr val="14171C"/>
+                </a:solidFill>
+                <a:latin typeface="Georgia"/>
+              </a:rPr>
+              <a:t>Education, health and social trust — and which frameworks can see them</a:t>
+            </a:r>
+          </a:p>
+        </p:txBody>
+      </p:sp>
+      <p:sp>
+        <p:nvSpPr>
+          <p:cNvPr id="4" name="TextBox 3"/>
+          <p:cNvSpPr txBox="1"/>
+          <p:nvPr/>
+        </p:nvSpPr>
+        <p:spPr>
+          <a:xfrm>
+            <a:off x="566928" y="2331720"/>
+            <a:ext cx="4160520" cy="3840480"/>
+          </a:xfrm>
+          <a:prstGeom prst="rect">
+            <a:avLst/>
+          </a:prstGeom>
+          <a:noFill/>
+        </p:spPr>
+        <p:txBody>
+          <a:bodyPr wrap="square" lIns="0" rIns="0" tIns="0" bIns="0">
+            <a:spAutoFit/>
+          </a:bodyPr>
+          <a:lstStyle/>
+          <a:p>
+            <a:pPr>
+              <a:lnSpc>
+                <a:spcPct val="132000"/>
+              </a:lnSpc>
+              <a:spcBef>
+                <a:spcPts val="0"/>
+              </a:spcBef>
+              <a:spcAft>
+                <a:spcPts val="1100"/>
+              </a:spcAft>
+            </a:pPr>
+            <a:r>
+              <a:rPr sz="1150" b="0" i="0">
+                <a:solidFill>
+                  <a:srgbClr val="5A6068"/>
+                </a:solidFill>
+                <a:latin typeface="Calibri"/>
+              </a:rPr>
+              <a:t>A summary of the blind spots: which frameworks can test which domains, and whether the test yields a signal. Education is testable in all three frameworks but its rank depends entirely on which construct the framework chose to count. Health is testable everywhere and leads wherever it is measured somewhere it still varies — a robust signal despite the HDI's poor choice of proxy. Social trust is testable in one instrument only: the ESS. It does not appear in the HDI at all, and the SDG framework measures institutional confidence instead, which is a different construct and a weaker predictor.</a:t>
+            </a:r>
+          </a:p>
+        </p:txBody>
+      </p:sp>
+      <p:sp>
+        <p:nvSpPr>
+          <p:cNvPr id="5" name="TextBox 4"/>
+          <p:cNvSpPr txBox="1"/>
+          <p:nvPr/>
+        </p:nvSpPr>
+        <p:spPr>
+          <a:xfrm>
+            <a:off x="11338560" y="6263640"/>
+            <a:ext cx="548640" cy="274320"/>
+          </a:xfrm>
+          <a:prstGeom prst="rect">
+            <a:avLst/>
+          </a:prstGeom>
+          <a:noFill/>
+        </p:spPr>
+        <p:txBody>
+          <a:bodyPr wrap="square" lIns="0" rIns="0" tIns="0" bIns="0">
+            <a:spAutoFit/>
+          </a:bodyPr>
+          <a:lstStyle/>
+          <a:p>
+            <a:pPr algn="r">
+              <a:spcBef>
+                <a:spcPts val="0"/>
+              </a:spcBef>
+              <a:spcAft>
+                <a:spcPts val="0"/>
+              </a:spcAft>
+            </a:pPr>
+            <a:r>
+              <a:rPr sz="1100" b="0" i="0">
+                <a:solidFill>
+                  <a:srgbClr val="868D96"/>
+                </a:solidFill>
+                <a:latin typeface="Consolas"/>
+              </a:rPr>
+              <a:t>II</a:t>
+            </a:r>
+          </a:p>
+        </p:txBody>
+      </p:sp>
+      <p:pic>
+        <p:nvPicPr>
+          <p:cNvPr id="6" name="Picture 5" descr="domain_scorecard.png"/>
+          <p:cNvPicPr>
+            <a:picLocks noChangeAspect="1"/>
+          </p:cNvPicPr>
+          <p:nvPr/>
+        </p:nvPicPr>
+        <p:blipFill>
+          <a:blip r:embed="rId2"/>
+          <a:stretch>
+            <a:fillRect/>
+          </a:stretch>
+        </p:blipFill>
+        <p:spPr>
+          <a:xfrm>
+            <a:off x="5120640" y="1469807"/>
+            <a:ext cx="6537960" cy="3452042"/>
+          </a:xfrm>
+          <a:prstGeom prst="rect">
+            <a:avLst/>
+          </a:prstGeom>
+        </p:spPr>
+      </p:pic>
+      <p:sp>
+        <p:nvSpPr>
+          <p:cNvPr id="7" name="TextBox 6"/>
+          <p:cNvSpPr txBox="1"/>
+          <p:nvPr/>
+        </p:nvSpPr>
+        <p:spPr>
+          <a:xfrm>
+            <a:off x="5120640" y="5897880"/>
+            <a:ext cx="6537960" cy="731520"/>
+          </a:xfrm>
+          <a:prstGeom prst="rect">
+            <a:avLst/>
+          </a:prstGeom>
+          <a:noFill/>
+        </p:spPr>
+        <p:txBody>
+          <a:bodyPr wrap="square" lIns="0" rIns="0" tIns="0" bIns="0">
+            <a:spAutoFit/>
+          </a:bodyPr>
+          <a:lstStyle/>
+          <a:p>
+            <a:pPr>
+              <a:lnSpc>
+                <a:spcPct val="125000"/>
+              </a:lnSpc>
+              <a:spcBef>
+                <a:spcPts val="0"/>
+              </a:spcBef>
+              <a:spcAft>
+                <a:spcPts val="0"/>
+              </a:spcAft>
+            </a:pPr>
+            <a:r>
+              <a:rPr sz="900" b="0" i="0">
+                <a:solidFill>
+                  <a:srgbClr val="868D96"/>
+                </a:solidFill>
+                <a:latin typeface="Calibri"/>
+              </a:rPr>
+              <a:t>Which frameworks can test each domain (green = tracks wellbeing, yellow = measurable but weak signal, gray = framework cannot test it).</a:t>
+            </a:r>
+          </a:p>
+        </p:txBody>
+      </p:sp>
+    </p:spTree>
+  </p:cSld>
+  <p:clrMapOvr>
+    <a:masterClrMapping/>
+  </p:clrMapOvr>
+</p:sld>
+</file>
+
+<file path=ppt/slides/slide18.xml><?xml version="1.0" encoding="utf-8"?>
+<p:sld xmlns:a="http://schemas.openxmlformats.org/drawingml/2006/main" xmlns:p="http://schemas.openxmlformats.org/presentationml/2006/main" xmlns:r="http://schemas.openxmlformats.org/officeDocument/2006/relationships">
+  <p:cSld>
+    <p:bg>
+      <p:bgPr>
+        <a:solidFill>
           <a:srgbClr val="E8EBEF"/>
         </a:solidFill>
         <a:effectLst/>
@@ -5544,7 +5815,7 @@
 </p:sld>
 </file>
 
-<file path=ppt/slides/slide18.xml><?xml version="1.0" encoding="utf-8"?>
+<file path=ppt/slides/slide19.xml><?xml version="1.0" encoding="utf-8"?>
 <p:sld xmlns:a="http://schemas.openxmlformats.org/drawingml/2006/main" xmlns:p="http://schemas.openxmlformats.org/presentationml/2006/main" xmlns:r="http://schemas.openxmlformats.org/officeDocument/2006/relationships">
   <p:cSld>
     <p:bg>
@@ -5968,275 +6239,6 @@
                 <a:latin typeface="Calibri"/>
               </a:rPr>
               <a:t>HDI levels → differences (collapsed)</a:t>
-            </a:r>
-          </a:p>
-        </p:txBody>
-      </p:sp>
-    </p:spTree>
-  </p:cSld>
-  <p:clrMapOvr>
-    <a:masterClrMapping/>
-  </p:clrMapOvr>
-</p:sld>
-</file>
-
-<file path=ppt/slides/slide19.xml><?xml version="1.0" encoding="utf-8"?>
-<p:sld xmlns:a="http://schemas.openxmlformats.org/drawingml/2006/main" xmlns:p="http://schemas.openxmlformats.org/presentationml/2006/main" xmlns:r="http://schemas.openxmlformats.org/officeDocument/2006/relationships">
-  <p:cSld>
-    <p:bg>
-      <p:bgPr>
-        <a:solidFill>
-          <a:srgbClr val="FCFCFB"/>
-        </a:solidFill>
-        <a:effectLst/>
-      </p:bgPr>
-    </p:bg>
-    <p:spTree>
-      <p:nvGrpSpPr>
-        <p:cNvPr id="1" name=""/>
-        <p:cNvGrpSpPr/>
-        <p:nvPr/>
-      </p:nvGrpSpPr>
-      <p:grpSpPr/>
-      <p:sp>
-        <p:nvSpPr>
-          <p:cNvPr id="2" name="TextBox 1"/>
-          <p:cNvSpPr txBox="1"/>
-          <p:nvPr/>
-        </p:nvSpPr>
-        <p:spPr>
-          <a:xfrm>
-            <a:off x="566928" y="502920"/>
-            <a:ext cx="4160520" cy="274320"/>
-          </a:xfrm>
-          <a:prstGeom prst="rect">
-            <a:avLst/>
-          </a:prstGeom>
-          <a:noFill/>
-        </p:spPr>
-        <p:txBody>
-          <a:bodyPr wrap="square" lIns="0" rIns="0" tIns="0" bIns="0">
-            <a:spAutoFit/>
-          </a:bodyPr>
-          <a:lstStyle/>
-          <a:p>
-            <a:pPr>
-              <a:spcBef>
-                <a:spcPts val="0"/>
-              </a:spcBef>
-              <a:spcAft>
-                <a:spcPts val="0"/>
-              </a:spcAft>
-            </a:pPr>
-            <a:r>
-              <a:rPr sz="1000" b="0" i="0">
-                <a:solidFill>
-                  <a:srgbClr val="A63A30"/>
-                </a:solidFill>
-                <a:latin typeface="Consolas"/>
-              </a:rPr>
-              <a:t>METHOD MATTERS · WHAT SURVIVES</a:t>
-            </a:r>
-          </a:p>
-        </p:txBody>
-      </p:sp>
-      <p:sp>
-        <p:nvSpPr>
-          <p:cNvPr id="3" name="TextBox 2"/>
-          <p:cNvSpPr txBox="1"/>
-          <p:nvPr/>
-        </p:nvSpPr>
-        <p:spPr>
-          <a:xfrm>
-            <a:off x="566928" y="914400"/>
-            <a:ext cx="4160520" cy="1371600"/>
-          </a:xfrm>
-          <a:prstGeom prst="rect">
-            <a:avLst/>
-          </a:prstGeom>
-          <a:noFill/>
-        </p:spPr>
-        <p:txBody>
-          <a:bodyPr wrap="square" lIns="0" rIns="0" tIns="0" bIns="0">
-            <a:spAutoFit/>
-          </a:bodyPr>
-          <a:lstStyle/>
-          <a:p>
-            <a:pPr>
-              <a:lnSpc>
-                <a:spcPct val="108000"/>
-              </a:lnSpc>
-              <a:spcBef>
-                <a:spcPts val="0"/>
-              </a:spcBef>
-              <a:spcAft>
-                <a:spcPts val="0"/>
-              </a:spcAft>
-            </a:pPr>
-            <a:r>
-              <a:rPr sz="2300" b="0" i="0">
-                <a:solidFill>
-                  <a:srgbClr val="14171C"/>
-                </a:solidFill>
-                <a:latin typeface="Georgia"/>
-              </a:rPr>
-              <a:t>Health survives both measurement methods. Social trust does not.</a:t>
-            </a:r>
-          </a:p>
-        </p:txBody>
-      </p:sp>
-      <p:sp>
-        <p:nvSpPr>
-          <p:cNvPr id="4" name="TextBox 3"/>
-          <p:cNvSpPr txBox="1"/>
-          <p:nvPr/>
-        </p:nvSpPr>
-        <p:spPr>
-          <a:xfrm>
-            <a:off x="566928" y="2331720"/>
-            <a:ext cx="4160520" cy="3840480"/>
-          </a:xfrm>
-          <a:prstGeom prst="rect">
-            <a:avLst/>
-          </a:prstGeom>
-          <a:noFill/>
-        </p:spPr>
-        <p:txBody>
-          <a:bodyPr wrap="square" lIns="0" rIns="0" tIns="0" bIns="0">
-            <a:spAutoFit/>
-          </a:bodyPr>
-          <a:lstStyle/>
-          <a:p>
-            <a:pPr>
-              <a:lnSpc>
-                <a:spcPct val="132000"/>
-              </a:lnSpc>
-              <a:spcBef>
-                <a:spcPts val="0"/>
-              </a:spcBef>
-              <a:spcAft>
-                <a:spcPts val="1100"/>
-              </a:spcAft>
-            </a:pPr>
-            <a:r>
-              <a:rPr sz="1150" b="0" i="0">
-                <a:solidFill>
-                  <a:srgbClr val="5A6068"/>
-                </a:solidFill>
-                <a:latin typeface="Calibri"/>
-              </a:rPr>
-              <a:t>A critical test: which domains actually predict wellbeing regardless of how you measure development? Health is significant in both administrative sources (SDG, 11.5% of country-indicator pairs) and self-reported sources (ESS, median R² = 0.091). This is robust. Education shows weak signal in both (SDG 3.3%, ESS R² = 0.0098), so the issue is not method-dependent but measurement-dependent. Social trust, however, only appears in self-reported data: 94% of ESS countries (median R² = 0.041) versus 1.5% of SDG16 country-pairs measuring institutional confidence instead. The three domains do not behave the same way across measurement methods.</a:t>
-            </a:r>
-          </a:p>
-        </p:txBody>
-      </p:sp>
-      <p:sp>
-        <p:nvSpPr>
-          <p:cNvPr id="5" name="TextBox 4"/>
-          <p:cNvSpPr txBox="1"/>
-          <p:nvPr/>
-        </p:nvSpPr>
-        <p:spPr>
-          <a:xfrm>
-            <a:off x="11338560" y="6263640"/>
-            <a:ext cx="548640" cy="274320"/>
-          </a:xfrm>
-          <a:prstGeom prst="rect">
-            <a:avLst/>
-          </a:prstGeom>
-          <a:noFill/>
-        </p:spPr>
-        <p:txBody>
-          <a:bodyPr wrap="square" lIns="0" rIns="0" tIns="0" bIns="0">
-            <a:spAutoFit/>
-          </a:bodyPr>
-          <a:lstStyle/>
-          <a:p>
-            <a:pPr algn="r">
-              <a:spcBef>
-                <a:spcPts val="0"/>
-              </a:spcBef>
-              <a:spcAft>
-                <a:spcPts val="0"/>
-              </a:spcAft>
-            </a:pPr>
-            <a:r>
-              <a:rPr sz="1100" b="0" i="0">
-                <a:solidFill>
-                  <a:srgbClr val="868D96"/>
-                </a:solidFill>
-                <a:latin typeface="Consolas"/>
-              </a:rPr>
-              <a:t>III</a:t>
-            </a:r>
-          </a:p>
-        </p:txBody>
-      </p:sp>
-      <p:pic>
-        <p:nvPicPr>
-          <p:cNvPr id="6" name="Picture 5" descr="health_trust_corroboration.png"/>
-          <p:cNvPicPr>
-            <a:picLocks noChangeAspect="1"/>
-          </p:cNvPicPr>
-          <p:nvPr/>
-        </p:nvPicPr>
-        <p:blipFill>
-          <a:blip r:embed="rId2"/>
-          <a:stretch>
-            <a:fillRect/>
-          </a:stretch>
-        </p:blipFill>
-        <p:spPr>
-          <a:xfrm>
-            <a:off x="5120640" y="1858518"/>
-            <a:ext cx="6537960" cy="2674620"/>
-          </a:xfrm>
-          <a:prstGeom prst="rect">
-            <a:avLst/>
-          </a:prstGeom>
-        </p:spPr>
-      </p:pic>
-      <p:sp>
-        <p:nvSpPr>
-          <p:cNvPr id="7" name="TextBox 6"/>
-          <p:cNvSpPr txBox="1"/>
-          <p:nvPr/>
-        </p:nvSpPr>
-        <p:spPr>
-          <a:xfrm>
-            <a:off x="5120640" y="5897880"/>
-            <a:ext cx="6537960" cy="731520"/>
-          </a:xfrm>
-          <a:prstGeom prst="rect">
-            <a:avLst/>
-          </a:prstGeom>
-          <a:noFill/>
-        </p:spPr>
-        <p:txBody>
-          <a:bodyPr wrap="square" lIns="0" rIns="0" tIns="0" bIns="0">
-            <a:spAutoFit/>
-          </a:bodyPr>
-          <a:lstStyle/>
-          <a:p>
-            <a:pPr>
-              <a:lnSpc>
-                <a:spcPct val="125000"/>
-              </a:lnSpc>
-              <a:spcBef>
-                <a:spcPts val="0"/>
-              </a:spcBef>
-              <a:spcAft>
-                <a:spcPts val="0"/>
-              </a:spcAft>
-            </a:pPr>
-            <a:r>
-              <a:rPr sz="900" b="0" i="0">
-                <a:solidFill>
-                  <a:srgbClr val="868D96"/>
-                </a:solidFill>
-                <a:latin typeface="Calibri"/>
-              </a:rPr>
-              <a:t>Health is robust across administrative and self-reported sources. Education is weak in both. Social trust appears only in self-reported individual-level data.</a:t>
             </a:r>
           </a:p>
         </p:txBody>
@@ -7120,7 +7122,7 @@
         <p:spPr>
           <a:xfrm>
             <a:off x="566928" y="502920"/>
-            <a:ext cx="8595360" cy="274320"/>
+            <a:ext cx="4160520" cy="274320"/>
           </a:xfrm>
           <a:prstGeom prst="rect">
             <a:avLst/>
@@ -7148,7 +7150,7 @@
                 </a:solidFill>
                 <a:latin typeface="Consolas"/>
               </a:rPr>
-              <a:t>WITHIN-COUNTRY EVIDENCE</a:t>
+              <a:t>METHOD MATTERS · WHAT SURVIVES</a:t>
             </a:r>
           </a:p>
         </p:txBody>
@@ -7162,7 +7164,7 @@
         <p:spPr>
           <a:xfrm>
             <a:off x="566928" y="914400"/>
-            <a:ext cx="8595360" cy="1371600"/>
+            <a:ext cx="4160520" cy="1371600"/>
           </a:xfrm>
           <a:prstGeom prst="rect">
             <a:avLst/>
@@ -7187,13 +7189,13 @@
               </a:spcAft>
             </a:pPr>
             <a:r>
-              <a:rPr sz="2700" b="0" i="0">
+              <a:rPr sz="2300" b="0" i="0">
                 <a:solidFill>
                   <a:srgbClr val="14171C"/>
                 </a:solidFill>
                 <a:latin typeface="Georgia"/>
               </a:rPr>
-              <a:t>Individual-level, self-reported data captures year-to-year change that administrative frameworks miss</a:t>
+              <a:t>Health survives both measurement methods. Social trust does not.</a:t>
             </a:r>
           </a:p>
         </p:txBody>
@@ -7206,8 +7208,8 @@
         </p:nvSpPr>
         <p:spPr>
           <a:xfrm>
-            <a:off x="566928" y="2286000"/>
-            <a:ext cx="8595360" cy="3840480"/>
+            <a:off x="566928" y="2331720"/>
+            <a:ext cx="4160520" cy="3840480"/>
           </a:xfrm>
           <a:prstGeom prst="rect">
             <a:avLst/>
@@ -7232,57 +7234,13 @@
               </a:spcAft>
             </a:pPr>
             <a:r>
-              <a:rPr sz="1400" b="0" i="0">
+              <a:rPr sz="1150" b="0" i="0">
                 <a:solidFill>
                   <a:srgbClr val="5A6068"/>
                 </a:solidFill>
                 <a:latin typeface="Calibri"/>
               </a:rPr>
-              <a:t>Here is the critical observation that reshapes the question: unlike SDG (71% levels → 5% differences) and HDI (42% → 2%), the ESS shows 69% levels → 64% differences. The association persists within countries over time. This is not because development frameworks are poorly designed; it is because they measure aggregate, administrative data at long intervals (annual at best for HDI and SDG). Individual survey responses capture year-to-year variation in how people experience their lives.</a:t>
-            </a:r>
-          </a:p>
-          <a:p>
-            <a:pPr>
-              <a:lnSpc>
-                <a:spcPct val="132000"/>
-              </a:lnSpc>
-              <a:spcBef>
-                <a:spcPts val="0"/>
-              </a:spcBef>
-              <a:spcAft>
-                <a:spcPts val="1100"/>
-              </a:spcAft>
-            </a:pPr>
-            <a:r>
-              <a:rPr sz="1400" b="0" i="0">
-                <a:solidFill>
-                  <a:srgbClr val="5A6068"/>
-                </a:solidFill>
-                <a:latin typeface="Calibri"/>
-              </a:rPr>
-              <a:t>This matters for social trust most of all. At the country level, SDG has almost no trust coverage; in the HDI, none. But at the individual level, within countries, ESS shows trust is significant in 94% of countries and drives year-to-year change in how satisfied people report being. The three domains emerge not because the frameworks reveal them, but because ESS measures them where people actually experience variation: in themselves, over time.</a:t>
-            </a:r>
-          </a:p>
-          <a:p>
-            <a:pPr>
-              <a:lnSpc>
-                <a:spcPct val="132000"/>
-              </a:lnSpc>
-              <a:spcBef>
-                <a:spcPts val="0"/>
-              </a:spcBef>
-              <a:spcAft>
-                <a:spcPts val="1100"/>
-              </a:spcAft>
-            </a:pPr>
-            <a:r>
-              <a:rPr sz="1400" b="0" i="0">
-                <a:solidFill>
-                  <a:srgbClr val="5A6068"/>
-                </a:solidFill>
-                <a:latin typeface="Calibri"/>
-              </a:rPr>
-              <a:t>The caveats are substantial: 36 European countries, self-reported measures, annual cycles. But the implication is clear. Development frameworks' blindness to social trust is not because trust does not matter for wellbeing; it is because development was never designed to measure individual experience at the temporal resolution where people change.</a:t>
+              <a:t>A critical test: which domains actually predict wellbeing regardless of how you measure development? Health is significant in both administrative sources (SDG, 11.5% of country-indicator pairs) and self-reported sources (ESS, median R² = 0.091). This is robust. Education shows weak signal in both (SDG 3.3%, ESS R² = 0.0098), so the issue is not method-dependent but measurement-dependent. Social trust, however, only appears in self-reported data: 94% of ESS countries (median R² = 0.041) versus 1.5% of SDG16 country-pairs measuring institutional confidence instead. The three domains do not behave the same way across measurement methods.</a:t>
             </a:r>
           </a:p>
         </p:txBody>
@@ -7325,6 +7283,75 @@
                 <a:latin typeface="Consolas"/>
               </a:rPr>
               <a:t>III</a:t>
+            </a:r>
+          </a:p>
+        </p:txBody>
+      </p:sp>
+      <p:pic>
+        <p:nvPicPr>
+          <p:cNvPr id="6" name="Picture 5" descr="health_trust_corroboration.png"/>
+          <p:cNvPicPr>
+            <a:picLocks noChangeAspect="1"/>
+          </p:cNvPicPr>
+          <p:nvPr/>
+        </p:nvPicPr>
+        <p:blipFill>
+          <a:blip r:embed="rId2"/>
+          <a:stretch>
+            <a:fillRect/>
+          </a:stretch>
+        </p:blipFill>
+        <p:spPr>
+          <a:xfrm>
+            <a:off x="5120640" y="1858518"/>
+            <a:ext cx="6537960" cy="2674620"/>
+          </a:xfrm>
+          <a:prstGeom prst="rect">
+            <a:avLst/>
+          </a:prstGeom>
+        </p:spPr>
+      </p:pic>
+      <p:sp>
+        <p:nvSpPr>
+          <p:cNvPr id="7" name="TextBox 6"/>
+          <p:cNvSpPr txBox="1"/>
+          <p:nvPr/>
+        </p:nvSpPr>
+        <p:spPr>
+          <a:xfrm>
+            <a:off x="5120640" y="5897880"/>
+            <a:ext cx="6537960" cy="731520"/>
+          </a:xfrm>
+          <a:prstGeom prst="rect">
+            <a:avLst/>
+          </a:prstGeom>
+          <a:noFill/>
+        </p:spPr>
+        <p:txBody>
+          <a:bodyPr wrap="square" lIns="0" rIns="0" tIns="0" bIns="0">
+            <a:spAutoFit/>
+          </a:bodyPr>
+          <a:lstStyle/>
+          <a:p>
+            <a:pPr>
+              <a:lnSpc>
+                <a:spcPct val="125000"/>
+              </a:lnSpc>
+              <a:spcBef>
+                <a:spcPts val="0"/>
+              </a:spcBef>
+              <a:spcAft>
+                <a:spcPts val="0"/>
+              </a:spcAft>
+            </a:pPr>
+            <a:r>
+              <a:rPr sz="900" b="0" i="0">
+                <a:solidFill>
+                  <a:srgbClr val="868D96"/>
+                </a:solidFill>
+                <a:latin typeface="Calibri"/>
+              </a:rPr>
+              <a:t>Health is robust across administrative and self-reported sources. Education is weak in both. Social trust appears only in self-reported individual-level data.</a:t>
             </a:r>
           </a:p>
         </p:txBody>
@@ -7338,6 +7365,632 @@
 </file>
 
 <file path=ppt/slides/slide21.xml><?xml version="1.0" encoding="utf-8"?>
+<p:sld xmlns:a="http://schemas.openxmlformats.org/drawingml/2006/main" xmlns:p="http://schemas.openxmlformats.org/presentationml/2006/main" xmlns:r="http://schemas.openxmlformats.org/officeDocument/2006/relationships">
+  <p:cSld>
+    <p:bg>
+      <p:bgPr>
+        <a:solidFill>
+          <a:srgbClr val="FCFCFB"/>
+        </a:solidFill>
+        <a:effectLst/>
+      </p:bgPr>
+    </p:bg>
+    <p:spTree>
+      <p:nvGrpSpPr>
+        <p:cNvPr id="1" name=""/>
+        <p:cNvGrpSpPr/>
+        <p:nvPr/>
+      </p:nvGrpSpPr>
+      <p:grpSpPr/>
+      <p:sp>
+        <p:nvSpPr>
+          <p:cNvPr id="2" name="TextBox 1"/>
+          <p:cNvSpPr txBox="1"/>
+          <p:nvPr/>
+        </p:nvSpPr>
+        <p:spPr>
+          <a:xfrm>
+            <a:off x="566928" y="502920"/>
+            <a:ext cx="4160520" cy="274320"/>
+          </a:xfrm>
+          <a:prstGeom prst="rect">
+            <a:avLst/>
+          </a:prstGeom>
+          <a:noFill/>
+        </p:spPr>
+        <p:txBody>
+          <a:bodyPr wrap="square" lIns="0" rIns="0" tIns="0" bIns="0">
+            <a:spAutoFit/>
+          </a:bodyPr>
+          <a:lstStyle/>
+          <a:p>
+            <a:pPr>
+              <a:spcBef>
+                <a:spcPts val="0"/>
+              </a:spcBef>
+              <a:spcAft>
+                <a:spcPts val="0"/>
+              </a:spcAft>
+            </a:pPr>
+            <a:r>
+              <a:rPr sz="1000" b="0" i="0">
+                <a:solidFill>
+                  <a:srgbClr val="A63A30"/>
+                </a:solidFill>
+                <a:latin typeface="Consolas"/>
+              </a:rPr>
+              <a:t>WITHIN-COUNTRY EVIDENCE</a:t>
+            </a:r>
+          </a:p>
+        </p:txBody>
+      </p:sp>
+      <p:sp>
+        <p:nvSpPr>
+          <p:cNvPr id="3" name="TextBox 2"/>
+          <p:cNvSpPr txBox="1"/>
+          <p:nvPr/>
+        </p:nvSpPr>
+        <p:spPr>
+          <a:xfrm>
+            <a:off x="566928" y="914400"/>
+            <a:ext cx="4160520" cy="1371600"/>
+          </a:xfrm>
+          <a:prstGeom prst="rect">
+            <a:avLst/>
+          </a:prstGeom>
+          <a:noFill/>
+        </p:spPr>
+        <p:txBody>
+          <a:bodyPr wrap="square" lIns="0" rIns="0" tIns="0" bIns="0">
+            <a:spAutoFit/>
+          </a:bodyPr>
+          <a:lstStyle/>
+          <a:p>
+            <a:pPr>
+              <a:lnSpc>
+                <a:spcPct val="108000"/>
+              </a:lnSpc>
+              <a:spcBef>
+                <a:spcPts val="0"/>
+              </a:spcBef>
+              <a:spcAft>
+                <a:spcPts val="0"/>
+              </a:spcAft>
+            </a:pPr>
+            <a:r>
+              <a:rPr sz="2300" b="0" i="0">
+                <a:solidFill>
+                  <a:srgbClr val="14171C"/>
+                </a:solidFill>
+                <a:latin typeface="Georgia"/>
+              </a:rPr>
+              <a:t>Individual-level, self-reported data captures year-to-year change that administrative frameworks miss</a:t>
+            </a:r>
+          </a:p>
+        </p:txBody>
+      </p:sp>
+      <p:sp>
+        <p:nvSpPr>
+          <p:cNvPr id="4" name="TextBox 3"/>
+          <p:cNvSpPr txBox="1"/>
+          <p:nvPr/>
+        </p:nvSpPr>
+        <p:spPr>
+          <a:xfrm>
+            <a:off x="566928" y="2331720"/>
+            <a:ext cx="4160520" cy="3840480"/>
+          </a:xfrm>
+          <a:prstGeom prst="rect">
+            <a:avLst/>
+          </a:prstGeom>
+          <a:noFill/>
+        </p:spPr>
+        <p:txBody>
+          <a:bodyPr wrap="square" lIns="0" rIns="0" tIns="0" bIns="0">
+            <a:spAutoFit/>
+          </a:bodyPr>
+          <a:lstStyle/>
+          <a:p>
+            <a:pPr>
+              <a:lnSpc>
+                <a:spcPct val="132000"/>
+              </a:lnSpc>
+              <a:spcBef>
+                <a:spcPts val="0"/>
+              </a:spcBef>
+              <a:spcAft>
+                <a:spcPts val="1100"/>
+              </a:spcAft>
+            </a:pPr>
+            <a:r>
+              <a:rPr sz="975" b="0" i="0">
+                <a:solidFill>
+                  <a:srgbClr val="5A6068"/>
+                </a:solidFill>
+                <a:latin typeface="Calibri"/>
+              </a:rPr>
+              <a:t>Here is the critical observation that reshapes the question: unlike SDG (71% levels → 5% differences) and HDI (42% → 2%), the ESS shows 69% levels → 64% differences. The association persists within countries over time. This is not because development frameworks are poorly designed; it is because they measure aggregate, administrative data at long intervals (annual at best for HDI and SDG). Individual survey responses capture year-to-year variation in how people experience their lives.</a:t>
+            </a:r>
+          </a:p>
+          <a:p>
+            <a:pPr>
+              <a:lnSpc>
+                <a:spcPct val="132000"/>
+              </a:lnSpc>
+              <a:spcBef>
+                <a:spcPts val="0"/>
+              </a:spcBef>
+              <a:spcAft>
+                <a:spcPts val="1100"/>
+              </a:spcAft>
+            </a:pPr>
+            <a:r>
+              <a:rPr sz="975" b="0" i="0">
+                <a:solidFill>
+                  <a:srgbClr val="5A6068"/>
+                </a:solidFill>
+                <a:latin typeface="Calibri"/>
+              </a:rPr>
+              <a:t>This matters for social trust most of all. At the country level, SDG has almost no trust coverage; in the HDI, none. But at the individual level, within countries, ESS shows trust is significant in 94% of countries and drives year-to-year change in how satisfied people report being. The three domains emerge not because the frameworks reveal them, but because ESS measures them where people actually experience variation: in themselves, over time.</a:t>
+            </a:r>
+          </a:p>
+          <a:p>
+            <a:pPr>
+              <a:lnSpc>
+                <a:spcPct val="132000"/>
+              </a:lnSpc>
+              <a:spcBef>
+                <a:spcPts val="0"/>
+              </a:spcBef>
+              <a:spcAft>
+                <a:spcPts val="1100"/>
+              </a:spcAft>
+            </a:pPr>
+            <a:r>
+              <a:rPr sz="975" b="0" i="0">
+                <a:solidFill>
+                  <a:srgbClr val="5A6068"/>
+                </a:solidFill>
+                <a:latin typeface="Calibri"/>
+              </a:rPr>
+              <a:t>The caveats are substantial: 36 European countries, self-reported measures, annual cycles. But the implication is clear. Development frameworks' blindness to social trust is not because trust does not matter for wellbeing; it is because development was never designed to measure individual experience at the temporal resolution where people change.</a:t>
+            </a:r>
+          </a:p>
+        </p:txBody>
+      </p:sp>
+      <p:sp>
+        <p:nvSpPr>
+          <p:cNvPr id="5" name="TextBox 4"/>
+          <p:cNvSpPr txBox="1"/>
+          <p:nvPr/>
+        </p:nvSpPr>
+        <p:spPr>
+          <a:xfrm>
+            <a:off x="11338560" y="6263640"/>
+            <a:ext cx="548640" cy="274320"/>
+          </a:xfrm>
+          <a:prstGeom prst="rect">
+            <a:avLst/>
+          </a:prstGeom>
+          <a:noFill/>
+        </p:spPr>
+        <p:txBody>
+          <a:bodyPr wrap="square" lIns="0" rIns="0" tIns="0" bIns="0">
+            <a:spAutoFit/>
+          </a:bodyPr>
+          <a:lstStyle/>
+          <a:p>
+            <a:pPr algn="r">
+              <a:spcBef>
+                <a:spcPts val="0"/>
+              </a:spcBef>
+              <a:spcAft>
+                <a:spcPts val="0"/>
+              </a:spcAft>
+            </a:pPr>
+            <a:r>
+              <a:rPr sz="1100" b="0" i="0">
+                <a:solidFill>
+                  <a:srgbClr val="868D96"/>
+                </a:solidFill>
+                <a:latin typeface="Consolas"/>
+              </a:rPr>
+              <a:t>III</a:t>
+            </a:r>
+          </a:p>
+        </p:txBody>
+      </p:sp>
+      <p:pic>
+        <p:nvPicPr>
+          <p:cNvPr id="6" name="Picture 5" descr="collapse_shdi_ess_regional.png"/>
+          <p:cNvPicPr>
+            <a:picLocks noChangeAspect="1"/>
+          </p:cNvPicPr>
+          <p:nvPr/>
+        </p:nvPicPr>
+        <p:blipFill>
+          <a:blip r:embed="rId2"/>
+          <a:stretch>
+            <a:fillRect/>
+          </a:stretch>
+        </p:blipFill>
+        <p:spPr>
+          <a:xfrm>
+            <a:off x="5546146" y="658368"/>
+            <a:ext cx="5686948" cy="5074919"/>
+          </a:xfrm>
+          <a:prstGeom prst="rect">
+            <a:avLst/>
+          </a:prstGeom>
+        </p:spPr>
+      </p:pic>
+      <p:sp>
+        <p:nvSpPr>
+          <p:cNvPr id="7" name="TextBox 6"/>
+          <p:cNvSpPr txBox="1"/>
+          <p:nvPr/>
+        </p:nvSpPr>
+        <p:spPr>
+          <a:xfrm>
+            <a:off x="5120640" y="5897880"/>
+            <a:ext cx="6537960" cy="731520"/>
+          </a:xfrm>
+          <a:prstGeom prst="rect">
+            <a:avLst/>
+          </a:prstGeom>
+          <a:noFill/>
+        </p:spPr>
+        <p:txBody>
+          <a:bodyPr wrap="square" lIns="0" rIns="0" tIns="0" bIns="0">
+            <a:spAutoFit/>
+          </a:bodyPr>
+          <a:lstStyle/>
+          <a:p>
+            <a:pPr>
+              <a:lnSpc>
+                <a:spcPct val="125000"/>
+              </a:lnSpc>
+              <a:spcBef>
+                <a:spcPts val="0"/>
+              </a:spcBef>
+              <a:spcAft>
+                <a:spcPts val="0"/>
+              </a:spcAft>
+            </a:pPr>
+            <a:r>
+              <a:rPr sz="900" b="0" i="0">
+                <a:solidFill>
+                  <a:srgbClr val="868D96"/>
+                </a:solidFill>
+                <a:latin typeface="Calibri"/>
+              </a:rPr>
+              <a:t>Regional collapse: 167 subnational regions within ESS countries, levels vs. differences. The collapse persists at regional scale, confirming it is not an artifact of national aggregation.</a:t>
+            </a:r>
+          </a:p>
+        </p:txBody>
+      </p:sp>
+    </p:spTree>
+  </p:cSld>
+  <p:clrMapOvr>
+    <a:masterClrMapping/>
+  </p:clrMapOvr>
+</p:sld>
+</file>
+
+<file path=ppt/slides/slide22.xml><?xml version="1.0" encoding="utf-8"?>
+<p:sld xmlns:a="http://schemas.openxmlformats.org/drawingml/2006/main" xmlns:p="http://schemas.openxmlformats.org/presentationml/2006/main" xmlns:r="http://schemas.openxmlformats.org/officeDocument/2006/relationships">
+  <p:cSld>
+    <p:bg>
+      <p:bgPr>
+        <a:solidFill>
+          <a:srgbClr val="FCFCFB"/>
+        </a:solidFill>
+        <a:effectLst/>
+      </p:bgPr>
+    </p:bg>
+    <p:spTree>
+      <p:nvGrpSpPr>
+        <p:cNvPr id="1" name=""/>
+        <p:cNvGrpSpPr/>
+        <p:nvPr/>
+      </p:nvGrpSpPr>
+      <p:grpSpPr/>
+      <p:sp>
+        <p:nvSpPr>
+          <p:cNvPr id="2" name="TextBox 1"/>
+          <p:cNvSpPr txBox="1"/>
+          <p:nvPr/>
+        </p:nvSpPr>
+        <p:spPr>
+          <a:xfrm>
+            <a:off x="566928" y="502920"/>
+            <a:ext cx="4160520" cy="274320"/>
+          </a:xfrm>
+          <a:prstGeom prst="rect">
+            <a:avLst/>
+          </a:prstGeom>
+          <a:noFill/>
+        </p:spPr>
+        <p:txBody>
+          <a:bodyPr wrap="square" lIns="0" rIns="0" tIns="0" bIns="0">
+            <a:spAutoFit/>
+          </a:bodyPr>
+          <a:lstStyle/>
+          <a:p>
+            <a:pPr>
+              <a:spcBef>
+                <a:spcPts val="0"/>
+              </a:spcBef>
+              <a:spcAft>
+                <a:spcPts val="0"/>
+              </a:spcAft>
+            </a:pPr>
+            <a:r>
+              <a:rPr sz="1000" b="0" i="0">
+                <a:solidFill>
+                  <a:srgbClr val="A63A30"/>
+                </a:solidFill>
+                <a:latin typeface="Consolas"/>
+              </a:rPr>
+              <a:t>WHY SDG'S TRUST DATA DOESN'T WORK</a:t>
+            </a:r>
+          </a:p>
+        </p:txBody>
+      </p:sp>
+      <p:sp>
+        <p:nvSpPr>
+          <p:cNvPr id="3" name="TextBox 2"/>
+          <p:cNvSpPr txBox="1"/>
+          <p:nvPr/>
+        </p:nvSpPr>
+        <p:spPr>
+          <a:xfrm>
+            <a:off x="566928" y="914400"/>
+            <a:ext cx="4160520" cy="1371600"/>
+          </a:xfrm>
+          <a:prstGeom prst="rect">
+            <a:avLst/>
+          </a:prstGeom>
+          <a:noFill/>
+        </p:spPr>
+        <p:txBody>
+          <a:bodyPr wrap="square" lIns="0" rIns="0" tIns="0" bIns="0">
+            <a:spAutoFit/>
+          </a:bodyPr>
+          <a:lstStyle/>
+          <a:p>
+            <a:pPr>
+              <a:lnSpc>
+                <a:spcPct val="108000"/>
+              </a:lnSpc>
+              <a:spcBef>
+                <a:spcPts val="0"/>
+              </a:spcBef>
+              <a:spcAft>
+                <a:spcPts val="0"/>
+              </a:spcAft>
+            </a:pPr>
+            <a:r>
+              <a:rPr sz="2300" b="0" i="0">
+                <a:solidFill>
+                  <a:srgbClr val="14171C"/>
+                </a:solidFill>
+                <a:latin typeface="Georgia"/>
+              </a:rPr>
+              <a:t>SDG16 measures institutional confidence, not interpersonal trust, and the signal is weak</a:t>
+            </a:r>
+          </a:p>
+        </p:txBody>
+      </p:sp>
+      <p:sp>
+        <p:nvSpPr>
+          <p:cNvPr id="4" name="TextBox 3"/>
+          <p:cNvSpPr txBox="1"/>
+          <p:nvPr/>
+        </p:nvSpPr>
+        <p:spPr>
+          <a:xfrm>
+            <a:off x="566928" y="2331720"/>
+            <a:ext cx="4160520" cy="3840480"/>
+          </a:xfrm>
+          <a:prstGeom prst="rect">
+            <a:avLst/>
+          </a:prstGeom>
+          <a:noFill/>
+        </p:spPr>
+        <p:txBody>
+          <a:bodyPr wrap="square" lIns="0" rIns="0" tIns="0" bIns="0">
+            <a:spAutoFit/>
+          </a:bodyPr>
+          <a:lstStyle/>
+          <a:p>
+            <a:pPr>
+              <a:lnSpc>
+                <a:spcPct val="132000"/>
+              </a:lnSpc>
+              <a:spcBef>
+                <a:spcPts val="0"/>
+              </a:spcBef>
+              <a:spcAft>
+                <a:spcPts val="1100"/>
+              </a:spcAft>
+            </a:pPr>
+            <a:r>
+              <a:rPr sz="950" b="0" i="0">
+                <a:solidFill>
+                  <a:srgbClr val="5A6068"/>
+                </a:solidFill>
+                <a:latin typeface="Calibri"/>
+              </a:rPr>
+              <a:t>The SDG framework carries 13 trust-adjacent series under Goal 16, but the detail reveals why they fail. First, coverage: only nine of thirteen can be tested across countries, and four are significant — weaker than the development indicators the frameworks already carry. Second, construct: bribery (individuals), bribery (firms), and decision-making inclusiveness predict the Cantril ladder; satisfaction with healthcare, government services, and secondary education do not. These measure satisfaction with institutions, not trust in people.</a:t>
+            </a:r>
+          </a:p>
+          <a:p>
+            <a:pPr>
+              <a:lnSpc>
+                <a:spcPct val="132000"/>
+              </a:lnSpc>
+              <a:spcBef>
+                <a:spcPts val="0"/>
+              </a:spcBef>
+              <a:spcAft>
+                <a:spcPts val="1100"/>
+              </a:spcAft>
+            </a:pPr>
+            <a:r>
+              <a:rPr sz="950" b="0" i="0">
+                <a:solidFill>
+                  <a:srgbClr val="5A6068"/>
+                </a:solidFill>
+                <a:latin typeface="Calibri"/>
+              </a:rPr>
+              <a:t>More critically, when you control for income — net of log GNI per capita — nearly all SDG trust series disappear. Bribery stays significant, but satisfaction with government, services, and education vanishes. This is a known artifact of subjective institutional scales across income levels; the same survey administered at different income levels produces structural differences in response patterns unrelated to trust itself. Interpersonal trust, by contrast, shows robust signal independent of income controls.</a:t>
+            </a:r>
+          </a:p>
+          <a:p>
+            <a:pPr>
+              <a:lnSpc>
+                <a:spcPct val="132000"/>
+              </a:lnSpc>
+              <a:spcBef>
+                <a:spcPts val="0"/>
+              </a:spcBef>
+              <a:spcAft>
+                <a:spcPts val="1100"/>
+              </a:spcAft>
+            </a:pPr>
+            <a:r>
+              <a:rPr sz="950" b="0" i="0">
+                <a:solidFill>
+                  <a:srgbClr val="5A6068"/>
+                </a:solidFill>
+                <a:latin typeface="Calibri"/>
+              </a:rPr>
+              <a:t>This is not a flaw in the SDG framework's execution. It reflects a fundamental choice: development frameworks measure institutions and systems, not personal relationships. Social trust emerges in individual-level, self-reported data because that is where it lives — in how people experience their immediate world.</a:t>
+            </a:r>
+          </a:p>
+        </p:txBody>
+      </p:sp>
+      <p:sp>
+        <p:nvSpPr>
+          <p:cNvPr id="5" name="TextBox 4"/>
+          <p:cNvSpPr txBox="1"/>
+          <p:nvPr/>
+        </p:nvSpPr>
+        <p:spPr>
+          <a:xfrm>
+            <a:off x="11338560" y="6263640"/>
+            <a:ext cx="548640" cy="274320"/>
+          </a:xfrm>
+          <a:prstGeom prst="rect">
+            <a:avLst/>
+          </a:prstGeom>
+          <a:noFill/>
+        </p:spPr>
+        <p:txBody>
+          <a:bodyPr wrap="square" lIns="0" rIns="0" tIns="0" bIns="0">
+            <a:spAutoFit/>
+          </a:bodyPr>
+          <a:lstStyle/>
+          <a:p>
+            <a:pPr algn="r">
+              <a:spcBef>
+                <a:spcPts val="0"/>
+              </a:spcBef>
+              <a:spcAft>
+                <a:spcPts val="0"/>
+              </a:spcAft>
+            </a:pPr>
+            <a:r>
+              <a:rPr sz="1100" b="0" i="0">
+                <a:solidFill>
+                  <a:srgbClr val="868D96"/>
+                </a:solidFill>
+                <a:latin typeface="Consolas"/>
+              </a:rPr>
+              <a:t>III</a:t>
+            </a:r>
+          </a:p>
+        </p:txBody>
+      </p:sp>
+      <p:pic>
+        <p:nvPicPr>
+          <p:cNvPr id="6" name="Picture 5" descr="K1_sdg_trust_cross_section.png"/>
+          <p:cNvPicPr>
+            <a:picLocks noChangeAspect="1"/>
+          </p:cNvPicPr>
+          <p:nvPr/>
+        </p:nvPicPr>
+        <p:blipFill>
+          <a:blip r:embed="rId2"/>
+          <a:stretch>
+            <a:fillRect/>
+          </a:stretch>
+        </p:blipFill>
+        <p:spPr>
+          <a:xfrm>
+            <a:off x="5120640" y="1690377"/>
+            <a:ext cx="6537960" cy="3010902"/>
+          </a:xfrm>
+          <a:prstGeom prst="rect">
+            <a:avLst/>
+          </a:prstGeom>
+        </p:spPr>
+      </p:pic>
+      <p:sp>
+        <p:nvSpPr>
+          <p:cNvPr id="7" name="TextBox 6"/>
+          <p:cNvSpPr txBox="1"/>
+          <p:nvPr/>
+        </p:nvSpPr>
+        <p:spPr>
+          <a:xfrm>
+            <a:off x="5120640" y="5897880"/>
+            <a:ext cx="6537960" cy="731520"/>
+          </a:xfrm>
+          <a:prstGeom prst="rect">
+            <a:avLst/>
+          </a:prstGeom>
+          <a:noFill/>
+        </p:spPr>
+        <p:txBody>
+          <a:bodyPr wrap="square" lIns="0" rIns="0" tIns="0" bIns="0">
+            <a:spAutoFit/>
+          </a:bodyPr>
+          <a:lstStyle/>
+          <a:p>
+            <a:pPr>
+              <a:lnSpc>
+                <a:spcPct val="125000"/>
+              </a:lnSpc>
+              <a:spcBef>
+                <a:spcPts val="0"/>
+              </a:spcBef>
+              <a:spcAft>
+                <a:spcPts val="0"/>
+              </a:spcAft>
+            </a:pPr>
+            <a:r>
+              <a:rPr sz="900" b="0" i="0">
+                <a:solidFill>
+                  <a:srgbClr val="868D96"/>
+                </a:solidFill>
+                <a:latin typeface="Calibri"/>
+              </a:rPr>
+              <a:t>SDG16 trust series can barely be tested (9 of 13 measurable, 4 significant) and collapse when controlled for income. Panel (b) shows bribery persists but satisfaction measures disappear.</a:t>
+            </a:r>
+          </a:p>
+        </p:txBody>
+      </p:sp>
+    </p:spTree>
+  </p:cSld>
+  <p:clrMapOvr>
+    <a:masterClrMapping/>
+  </p:clrMapOvr>
+</p:sld>
+</file>
+
+<file path=ppt/slides/slide23.xml><?xml version="1.0" encoding="utf-8"?>
 <p:sld xmlns:a="http://schemas.openxmlformats.org/drawingml/2006/main" xmlns:p="http://schemas.openxmlformats.org/presentationml/2006/main" xmlns:r="http://schemas.openxmlformats.org/officeDocument/2006/relationships">
   <p:cSld>
     <p:bg>
@@ -7494,7 +8147,7 @@
 </p:sld>
 </file>
 
-<file path=ppt/slides/slide22.xml><?xml version="1.0" encoding="utf-8"?>
+<file path=ppt/slides/slide24.xml><?xml version="1.0" encoding="utf-8"?>
 <p:sld xmlns:a="http://schemas.openxmlformats.org/drawingml/2006/main" xmlns:p="http://schemas.openxmlformats.org/presentationml/2006/main" xmlns:r="http://schemas.openxmlformats.org/officeDocument/2006/relationships">
   <p:cSld>
     <p:bg>
@@ -7918,450 +8571,6 @@
                 <a:latin typeface="Calibri"/>
               </a:rPr>
               <a:t>median R² for trust — below income, health, education individually, above none</a:t>
-            </a:r>
-          </a:p>
-        </p:txBody>
-      </p:sp>
-    </p:spTree>
-  </p:cSld>
-  <p:clrMapOvr>
-    <a:masterClrMapping/>
-  </p:clrMapOvr>
-</p:sld>
-</file>
-
-<file path=ppt/slides/slide23.xml><?xml version="1.0" encoding="utf-8"?>
-<p:sld xmlns:a="http://schemas.openxmlformats.org/drawingml/2006/main" xmlns:p="http://schemas.openxmlformats.org/presentationml/2006/main" xmlns:r="http://schemas.openxmlformats.org/officeDocument/2006/relationships">
-  <p:cSld>
-    <p:bg>
-      <p:bgPr>
-        <a:solidFill>
-          <a:srgbClr val="FCFCFB"/>
-        </a:solidFill>
-        <a:effectLst/>
-      </p:bgPr>
-    </p:bg>
-    <p:spTree>
-      <p:nvGrpSpPr>
-        <p:cNvPr id="1" name=""/>
-        <p:cNvGrpSpPr/>
-        <p:nvPr/>
-      </p:nvGrpSpPr>
-      <p:grpSpPr/>
-      <p:sp>
-        <p:nvSpPr>
-          <p:cNvPr id="2" name="TextBox 1"/>
-          <p:cNvSpPr txBox="1"/>
-          <p:nvPr/>
-        </p:nvSpPr>
-        <p:spPr>
-          <a:xfrm>
-            <a:off x="566928" y="502920"/>
-            <a:ext cx="8595360" cy="274320"/>
-          </a:xfrm>
-          <a:prstGeom prst="rect">
-            <a:avLst/>
-          </a:prstGeom>
-          <a:noFill/>
-        </p:spPr>
-        <p:txBody>
-          <a:bodyPr wrap="square" lIns="0" rIns="0" tIns="0" bIns="0">
-            <a:spAutoFit/>
-          </a:bodyPr>
-          <a:lstStyle/>
-          <a:p>
-            <a:pPr>
-              <a:spcBef>
-                <a:spcPts val="0"/>
-              </a:spcBef>
-              <a:spcAft>
-                <a:spcPts val="0"/>
-              </a:spcAft>
-            </a:pPr>
-            <a:r>
-              <a:rPr sz="1000" b="0" i="0">
-                <a:solidFill>
-                  <a:srgbClr val="A63A30"/>
-                </a:solidFill>
-                <a:latin typeface="Consolas"/>
-              </a:rPr>
-              <a:t>THE DISCONNECT</a:t>
-            </a:r>
-          </a:p>
-        </p:txBody>
-      </p:sp>
-      <p:sp>
-        <p:nvSpPr>
-          <p:cNvPr id="3" name="TextBox 2"/>
-          <p:cNvSpPr txBox="1"/>
-          <p:nvPr/>
-        </p:nvSpPr>
-        <p:spPr>
-          <a:xfrm>
-            <a:off x="566928" y="914400"/>
-            <a:ext cx="8595360" cy="1371600"/>
-          </a:xfrm>
-          <a:prstGeom prst="rect">
-            <a:avLst/>
-          </a:prstGeom>
-          <a:noFill/>
-        </p:spPr>
-        <p:txBody>
-          <a:bodyPr wrap="square" lIns="0" rIns="0" tIns="0" bIns="0">
-            <a:spAutoFit/>
-          </a:bodyPr>
-          <a:lstStyle/>
-          <a:p>
-            <a:pPr>
-              <a:lnSpc>
-                <a:spcPct val="108000"/>
-              </a:lnSpc>
-              <a:spcBef>
-                <a:spcPts val="0"/>
-              </a:spcBef>
-              <a:spcAft>
-                <a:spcPts val="0"/>
-              </a:spcAft>
-            </a:pPr>
-            <a:r>
-              <a:rPr sz="2700" b="0" i="0">
-                <a:solidFill>
-                  <a:srgbClr val="14171C"/>
-                </a:solidFill>
-                <a:latin typeface="Georgia"/>
-              </a:rPr>
-              <a:t>These frameworks work for development. They do not work for wellbeing.</a:t>
-            </a:r>
-          </a:p>
-        </p:txBody>
-      </p:sp>
-      <p:sp>
-        <p:nvSpPr>
-          <p:cNvPr id="4" name="TextBox 3"/>
-          <p:cNvSpPr txBox="1"/>
-          <p:nvPr/>
-        </p:nvSpPr>
-        <p:spPr>
-          <a:xfrm>
-            <a:off x="566928" y="2286000"/>
-            <a:ext cx="8595360" cy="3840480"/>
-          </a:xfrm>
-          <a:prstGeom prst="rect">
-            <a:avLst/>
-          </a:prstGeom>
-          <a:noFill/>
-        </p:spPr>
-        <p:txBody>
-          <a:bodyPr wrap="square" lIns="0" rIns="0" tIns="0" bIns="0">
-            <a:spAutoFit/>
-          </a:bodyPr>
-          <a:lstStyle/>
-          <a:p>
-            <a:pPr>
-              <a:lnSpc>
-                <a:spcPct val="132000"/>
-              </a:lnSpc>
-              <a:spcBef>
-                <a:spcPts val="0"/>
-              </a:spcBef>
-              <a:spcAft>
-                <a:spcPts val="1100"/>
-              </a:spcAft>
-            </a:pPr>
-            <a:r>
-              <a:rPr sz="1400" b="0" i="0">
-                <a:solidFill>
-                  <a:srgbClr val="5A6068"/>
-                </a:solidFill>
-                <a:latin typeface="Calibri"/>
-              </a:rPr>
-              <a:t>The HDI and SDG frameworks do not answer the question 'what makes people's lives better?' any more than a global income statistics database answers 'what makes a person happy?' They were designed to track development, measured at the aggregate level, with indicators chosen before the question of individual wellbeing was systematically tested. That is not a design failure; it is the intended scope.</a:t>
-            </a:r>
-          </a:p>
-          <a:p>
-            <a:pPr>
-              <a:lnSpc>
-                <a:spcPct val="132000"/>
-              </a:lnSpc>
-              <a:spcBef>
-                <a:spcPts val="0"/>
-              </a:spcBef>
-              <a:spcAft>
-                <a:spcPts val="1100"/>
-              </a:spcAft>
-            </a:pPr>
-            <a:r>
-              <a:rPr sz="1400" b="0" i="0">
-                <a:solidFill>
-                  <a:srgbClr val="5A6068"/>
-                </a:solidFill>
-                <a:latin typeface="Calibri"/>
-              </a:rPr>
-              <a:t>But it means the gap is structural. Education's access indicators work; pooling them with constructs that do not does not fix wellbeing prediction — it just builds a worse measure. Choosing a variable for health that is closer to saturated than the outcome it predicts is a measurement choice, not an incurable problem. And when a domain is never collected, no amount of better construction on the others will reach it.</a:t>
-            </a:r>
-          </a:p>
-        </p:txBody>
-      </p:sp>
-      <p:sp>
-        <p:nvSpPr>
-          <p:cNvPr id="5" name="TextBox 4"/>
-          <p:cNvSpPr txBox="1"/>
-          <p:nvPr/>
-        </p:nvSpPr>
-        <p:spPr>
-          <a:xfrm>
-            <a:off x="11338560" y="6263640"/>
-            <a:ext cx="548640" cy="274320"/>
-          </a:xfrm>
-          <a:prstGeom prst="rect">
-            <a:avLst/>
-          </a:prstGeom>
-          <a:noFill/>
-        </p:spPr>
-        <p:txBody>
-          <a:bodyPr wrap="square" lIns="0" rIns="0" tIns="0" bIns="0">
-            <a:spAutoFit/>
-          </a:bodyPr>
-          <a:lstStyle/>
-          <a:p>
-            <a:pPr algn="r">
-              <a:spcBef>
-                <a:spcPts val="0"/>
-              </a:spcBef>
-              <a:spcAft>
-                <a:spcPts val="0"/>
-              </a:spcAft>
-            </a:pPr>
-            <a:r>
-              <a:rPr sz="1100" b="0" i="0">
-                <a:solidFill>
-                  <a:srgbClr val="868D96"/>
-                </a:solidFill>
-                <a:latin typeface="Consolas"/>
-              </a:rPr>
-              <a:t>IV</a:t>
-            </a:r>
-          </a:p>
-        </p:txBody>
-      </p:sp>
-    </p:spTree>
-  </p:cSld>
-  <p:clrMapOvr>
-    <a:masterClrMapping/>
-  </p:clrMapOvr>
-</p:sld>
-</file>
-
-<file path=ppt/slides/slide24.xml><?xml version="1.0" encoding="utf-8"?>
-<p:sld xmlns:a="http://schemas.openxmlformats.org/drawingml/2006/main" xmlns:p="http://schemas.openxmlformats.org/presentationml/2006/main" xmlns:r="http://schemas.openxmlformats.org/officeDocument/2006/relationships">
-  <p:cSld>
-    <p:bg>
-      <p:bgPr>
-        <a:solidFill>
-          <a:srgbClr val="FCFCFB"/>
-        </a:solidFill>
-        <a:effectLst/>
-      </p:bgPr>
-    </p:bg>
-    <p:spTree>
-      <p:nvGrpSpPr>
-        <p:cNvPr id="1" name=""/>
-        <p:cNvGrpSpPr/>
-        <p:nvPr/>
-      </p:nvGrpSpPr>
-      <p:grpSpPr/>
-      <p:sp>
-        <p:nvSpPr>
-          <p:cNvPr id="2" name="TextBox 1"/>
-          <p:cNvSpPr txBox="1"/>
-          <p:nvPr/>
-        </p:nvSpPr>
-        <p:spPr>
-          <a:xfrm>
-            <a:off x="566928" y="502920"/>
-            <a:ext cx="8595360" cy="274320"/>
-          </a:xfrm>
-          <a:prstGeom prst="rect">
-            <a:avLst/>
-          </a:prstGeom>
-          <a:noFill/>
-        </p:spPr>
-        <p:txBody>
-          <a:bodyPr wrap="square" lIns="0" rIns="0" tIns="0" bIns="0">
-            <a:spAutoFit/>
-          </a:bodyPr>
-          <a:lstStyle/>
-          <a:p>
-            <a:pPr>
-              <a:spcBef>
-                <a:spcPts val="0"/>
-              </a:spcBef>
-              <a:spcAft>
-                <a:spcPts val="0"/>
-              </a:spcAft>
-            </a:pPr>
-            <a:r>
-              <a:rPr sz="1000" b="0" i="0">
-                <a:solidFill>
-                  <a:srgbClr val="A63A30"/>
-                </a:solidFill>
-                <a:latin typeface="Consolas"/>
-              </a:rPr>
-              <a:t>IMPLICATION 1 · MEASUREMENT CHOICES CONSTRAIN WHAT FRAMEWORKS CAN SEE</a:t>
-            </a:r>
-          </a:p>
-        </p:txBody>
-      </p:sp>
-      <p:sp>
-        <p:nvSpPr>
-          <p:cNvPr id="3" name="TextBox 2"/>
-          <p:cNvSpPr txBox="1"/>
-          <p:nvPr/>
-        </p:nvSpPr>
-        <p:spPr>
-          <a:xfrm>
-            <a:off x="566928" y="914400"/>
-            <a:ext cx="8595360" cy="1371600"/>
-          </a:xfrm>
-          <a:prstGeom prst="rect">
-            <a:avLst/>
-          </a:prstGeom>
-          <a:noFill/>
-        </p:spPr>
-        <p:txBody>
-          <a:bodyPr wrap="square" lIns="0" rIns="0" tIns="0" bIns="0">
-            <a:spAutoFit/>
-          </a:bodyPr>
-          <a:lstStyle/>
-          <a:p>
-            <a:pPr>
-              <a:lnSpc>
-                <a:spcPct val="108000"/>
-              </a:lnSpc>
-              <a:spcBef>
-                <a:spcPts val="0"/>
-              </a:spcBef>
-              <a:spcAft>
-                <a:spcPts val="0"/>
-              </a:spcAft>
-            </a:pPr>
-            <a:r>
-              <a:rPr sz="2700" b="0" i="0">
-                <a:solidFill>
-                  <a:srgbClr val="14171C"/>
-                </a:solidFill>
-                <a:latin typeface="Georgia"/>
-              </a:rPr>
-              <a:t>Education and health: the case for measurement specificity</a:t>
-            </a:r>
-          </a:p>
-        </p:txBody>
-      </p:sp>
-      <p:sp>
-        <p:nvSpPr>
-          <p:cNvPr id="4" name="TextBox 3"/>
-          <p:cNvSpPr txBox="1"/>
-          <p:nvPr/>
-        </p:nvSpPr>
-        <p:spPr>
-          <a:xfrm>
-            <a:off x="566928" y="2286000"/>
-            <a:ext cx="8595360" cy="3840480"/>
-          </a:xfrm>
-          <a:prstGeom prst="rect">
-            <a:avLst/>
-          </a:prstGeom>
-          <a:noFill/>
-        </p:spPr>
-        <p:txBody>
-          <a:bodyPr wrap="square" lIns="0" rIns="0" tIns="0" bIns="0">
-            <a:spAutoFit/>
-          </a:bodyPr>
-          <a:lstStyle/>
-          <a:p>
-            <a:pPr>
-              <a:lnSpc>
-                <a:spcPct val="132000"/>
-              </a:lnSpc>
-              <a:spcBef>
-                <a:spcPts val="0"/>
-              </a:spcBef>
-              <a:spcAft>
-                <a:spcPts val="1100"/>
-              </a:spcAft>
-            </a:pPr>
-            <a:r>
-              <a:rPr sz="1400" b="0" i="0">
-                <a:solidFill>
-                  <a:srgbClr val="5A6068"/>
-                </a:solidFill>
-                <a:latin typeface="Calibri"/>
-              </a:rPr>
-              <a:t>Education is significant everywhere it is measured as attainment, but nearly invisible in SDG4 because most indicators measure something else. Health is nearly invisible in the HDI because life expectancy has saturated. Neither domain has changed; the frameworks' construction choices have.</a:t>
-            </a:r>
-          </a:p>
-          <a:p>
-            <a:pPr>
-              <a:lnSpc>
-                <a:spcPct val="132000"/>
-              </a:lnSpc>
-              <a:spcBef>
-                <a:spcPts val="0"/>
-              </a:spcBef>
-              <a:spcAft>
-                <a:spcPts val="1100"/>
-              </a:spcAft>
-            </a:pPr>
-            <a:r>
-              <a:rPr sz="1400" b="0" i="0">
-                <a:solidFill>
-                  <a:srgbClr val="5A6068"/>
-                </a:solidFill>
-                <a:latin typeface="Calibri"/>
-              </a:rPr>
-              <a:t>For education, this suggests development measurement should weigh access and completion more heavily than parity ratios in wellbeing contexts — not universally, but with explicit construction choices that account for what is known to matter. For health, it suggests that wellbeing-motivated measurement may need different variables at different development levels: life expectancy in lower-income settings, self-reported health or specific conditions in saturated ones.</a:t>
-            </a:r>
-          </a:p>
-        </p:txBody>
-      </p:sp>
-      <p:sp>
-        <p:nvSpPr>
-          <p:cNvPr id="5" name="TextBox 4"/>
-          <p:cNvSpPr txBox="1"/>
-          <p:nvPr/>
-        </p:nvSpPr>
-        <p:spPr>
-          <a:xfrm>
-            <a:off x="11338560" y="6263640"/>
-            <a:ext cx="548640" cy="274320"/>
-          </a:xfrm>
-          <a:prstGeom prst="rect">
-            <a:avLst/>
-          </a:prstGeom>
-          <a:noFill/>
-        </p:spPr>
-        <p:txBody>
-          <a:bodyPr wrap="square" lIns="0" rIns="0" tIns="0" bIns="0">
-            <a:spAutoFit/>
-          </a:bodyPr>
-          <a:lstStyle/>
-          <a:p>
-            <a:pPr algn="r">
-              <a:spcBef>
-                <a:spcPts val="0"/>
-              </a:spcBef>
-              <a:spcAft>
-                <a:spcPts val="0"/>
-              </a:spcAft>
-            </a:pPr>
-            <a:r>
-              <a:rPr sz="1100" b="0" i="0">
-                <a:solidFill>
-                  <a:srgbClr val="868D96"/>
-                </a:solidFill>
-                <a:latin typeface="Consolas"/>
-              </a:rPr>
-              <a:t>IV</a:t>
             </a:r>
           </a:p>
         </p:txBody>
@@ -8429,7 +8638,7 @@
                 </a:solidFill>
                 <a:latin typeface="Consolas"/>
               </a:rPr>
-              <a:t>IMPLICATION 2 · COVERAGE GAPS ARE MORE FUNDAMENTAL THAN CONSTRUCT CHOICE</a:t>
+              <a:t>THE DISCONNECT</a:t>
             </a:r>
           </a:p>
         </p:txBody>
@@ -8474,7 +8683,7 @@
                 </a:solidFill>
                 <a:latin typeface="Georgia"/>
               </a:rPr>
-              <a:t>Social trust: why you cannot fix a measurement by measuring better</a:t>
+              <a:t>These frameworks work for development. They do not work for wellbeing.</a:t>
             </a:r>
           </a:p>
         </p:txBody>
@@ -8519,7 +8728,7 @@
                 </a:solidFill>
                 <a:latin typeface="Calibri"/>
               </a:rPr>
-              <a:t>Social trust is the most tentative finding here. The ESS is Europe-only, across 36 countries, and relies on a single item. That bounds the claim: the pattern holds in Europe, with a wellbeing survey, on a self-report basis. It does not claim universality.</a:t>
+              <a:t>The HDI and SDG frameworks do not answer the question 'what makes people's lives better?' any more than a global income statistics database answers 'what makes a person happy?' They were designed to track development, measured at the aggregate level, with indicators chosen before the question of individual wellbeing was systematically tested. That is not a design failure; it is the intended scope.</a:t>
             </a:r>
           </a:p>
           <a:p>
@@ -8541,29 +8750,7 @@
                 </a:solidFill>
                 <a:latin typeface="Calibri"/>
               </a:rPr>
-              <a:t>But the reason it is tentative points to the deepest problem: trust is not collected at global scale in either framework. The SDG database has 13 series adjacent to trust, but they measure institutional confidence, not interpersonal trust, and they are intermittent (147 of 163 country-series have fewer than four years of data). This is not a construct-choice problem that better measurement can solve. It is a coverage gap that requires deciding to collect the data in the first place.</a:t>
-            </a:r>
-          </a:p>
-          <a:p>
-            <a:pPr>
-              <a:lnSpc>
-                <a:spcPct val="132000"/>
-              </a:lnSpc>
-              <a:spcBef>
-                <a:spcPts val="0"/>
-              </a:spcBef>
-              <a:spcAft>
-                <a:spcPts val="1100"/>
-              </a:spcAft>
-            </a:pPr>
-            <a:r>
-              <a:rPr sz="1400" b="0" i="0">
-                <a:solidFill>
-                  <a:srgbClr val="5A6068"/>
-                </a:solidFill>
-                <a:latin typeface="Calibri"/>
-              </a:rPr>
-              <a:t>For wellbeing-conscious development monitoring, this suggests either building interpersonal-trust measurement into the core frameworks, or acknowledging that other surveys (the ESS, Gallup World Poll, World Values Survey) may be more suitable for understanding what shapes lived experience.</a:t>
+              <a:t>But it means the gap is structural. Education's access indicators work; pooling them with constructs that do not does not fix wellbeing prediction — it just builds a worse measure. Choosing a variable for health that is closer to saturated than the outcome it predicts is a measurement choice, not an incurable problem. And when a domain is never collected, no amount of better construction on the others will reach it.</a:t>
             </a:r>
           </a:p>
         </p:txBody>
@@ -8673,7 +8860,7 @@
                 </a:solidFill>
                 <a:latin typeface="Consolas"/>
               </a:rPr>
-              <a:t>CONCLUSION</a:t>
+              <a:t>IMPLICATION 1 · MEASUREMENT CHOICES CONSTRAIN WHAT FRAMEWORKS CAN SEE</a:t>
             </a:r>
           </a:p>
         </p:txBody>
@@ -8718,7 +8905,7 @@
                 </a:solidFill>
                 <a:latin typeface="Georgia"/>
               </a:rPr>
-              <a:t>A question rather than a prescription</a:t>
+              <a:t>Education and health: the case for measurement specificity</a:t>
             </a:r>
           </a:p>
         </p:txBody>
@@ -8763,7 +8950,7 @@
                 </a:solidFill>
                 <a:latin typeface="Calibri"/>
               </a:rPr>
-              <a:t>The evidence shows a consistent pattern: which domain looks most consequential for wellbeing depends on which framework measures it and what variable they chose. This is not about the domains; it is about the tools.</a:t>
+              <a:t>Education is significant everywhere it is measured as attainment, but nearly invisible in SDG4 because most indicators measure something else. Health is nearly invisible in the HDI because life expectancy has saturated. Neither domain has changed; the frameworks' construction choices have.</a:t>
             </a:r>
           </a:p>
           <a:p>
@@ -8785,29 +8972,7 @@
                 </a:solidFill>
                 <a:latin typeface="Calibri"/>
               </a:rPr>
-              <a:t>Whether development frameworks should be redesigned around wellbeing is outside the scope here. But if they were, this finding suggests the question to ask: should measurement choices be made with explicit reference to which variables still move and still matter for lived experience? Should coverage be built in for domains the frameworks discovered only by studying something else?</a:t>
-            </a:r>
-          </a:p>
-          <a:p>
-            <a:pPr>
-              <a:lnSpc>
-                <a:spcPct val="132000"/>
-              </a:lnSpc>
-              <a:spcBef>
-                <a:spcPts val="0"/>
-              </a:spcBef>
-              <a:spcAft>
-                <a:spcPts val="1100"/>
-              </a:spcAft>
-            </a:pPr>
-            <a:r>
-              <a:rPr sz="1400" b="0" i="0">
-                <a:solidFill>
-                  <a:srgbClr val="5A6068"/>
-                </a:solidFill>
-                <a:latin typeface="Calibri"/>
-              </a:rPr>
-              <a:t>The frameworks work well for their stated purpose. The question is whether wellbeing should become part of that purpose — and if it does, whether the measurement that comes from that intent should be different from the aggregate, development-first measurement in place today.</a:t>
+              <a:t>For education, this suggests development measurement should weigh access and completion more heavily than parity ratios in wellbeing contexts — not universally, but with explicit construction choices that account for what is known to matter. For health, it suggests that wellbeing-motivated measurement may need different variables at different development levels: life expectancy in lower-income settings, self-reported health or specific conditions in saturated ones.</a:t>
             </a:r>
           </a:p>
         </p:txBody>
@@ -8868,7 +9033,7 @@
     <p:bg>
       <p:bgPr>
         <a:solidFill>
-          <a:srgbClr val="E8EBEF"/>
+          <a:srgbClr val="FCFCFB"/>
         </a:solidFill>
         <a:effectLst/>
       </p:bgPr>
@@ -8882,45 +9047,43 @@
       <p:grpSpPr/>
       <p:sp>
         <p:nvSpPr>
-          <p:cNvPr id="2" name="Rectangle 1"/>
-          <p:cNvSpPr/>
-          <p:nvPr/>
-        </p:nvSpPr>
-        <p:spPr>
-          <a:xfrm>
-            <a:off x="566928" y="2103120"/>
-            <a:ext cx="54864" cy="2377440"/>
-          </a:xfrm>
-          <a:prstGeom prst="rect">
-            <a:avLst/>
-          </a:prstGeom>
-          <a:solidFill>
-            <a:srgbClr val="17549E"/>
-          </a:solidFill>
-          <a:ln>
-            <a:noFill/>
-          </a:ln>
-          <a:effectLst/>
-        </p:spPr>
-        <p:style>
-          <a:lnRef idx="1">
-            <a:schemeClr val="accent1"/>
-          </a:lnRef>
-          <a:fillRef idx="3">
-            <a:schemeClr val="accent1"/>
-          </a:fillRef>
-          <a:effectRef idx="2">
-            <a:schemeClr val="accent1"/>
-          </a:effectRef>
-          <a:fontRef idx="minor">
-            <a:schemeClr val="lt1"/>
-          </a:fontRef>
-        </p:style>
-        <p:txBody>
-          <a:bodyPr rtlCol="0" anchor="ctr"/>
-          <a:lstStyle/>
-          <a:p>
-            <a:pPr algn="ctr"/>
+          <p:cNvPr id="2" name="TextBox 1"/>
+          <p:cNvSpPr txBox="1"/>
+          <p:nvPr/>
+        </p:nvSpPr>
+        <p:spPr>
+          <a:xfrm>
+            <a:off x="566928" y="502920"/>
+            <a:ext cx="8595360" cy="274320"/>
+          </a:xfrm>
+          <a:prstGeom prst="rect">
+            <a:avLst/>
+          </a:prstGeom>
+          <a:noFill/>
+        </p:spPr>
+        <p:txBody>
+          <a:bodyPr wrap="square" lIns="0" rIns="0" tIns="0" bIns="0">
+            <a:spAutoFit/>
+          </a:bodyPr>
+          <a:lstStyle/>
+          <a:p>
+            <a:pPr>
+              <a:spcBef>
+                <a:spcPts val="0"/>
+              </a:spcBef>
+              <a:spcAft>
+                <a:spcPts val="0"/>
+              </a:spcAft>
+            </a:pPr>
+            <a:r>
+              <a:rPr sz="1000" b="0" i="0">
+                <a:solidFill>
+                  <a:srgbClr val="A63A30"/>
+                </a:solidFill>
+                <a:latin typeface="Consolas"/>
+              </a:rPr>
+              <a:t>IMPLICATION 2 · COVERAGE GAPS ARE MORE FUNDAMENTAL THAN CONSTRUCT CHOICE</a:t>
+            </a:r>
           </a:p>
         </p:txBody>
       </p:sp>
@@ -8932,21 +9095,155 @@
         </p:nvSpPr>
         <p:spPr>
           <a:xfrm>
-            <a:off x="914400" y="1600200"/>
-            <a:ext cx="8686800" cy="274320"/>
-          </a:xfrm>
-          <a:prstGeom prst="rect">
-            <a:avLst/>
-          </a:prstGeom>
-          <a:noFill/>
-        </p:spPr>
-        <p:txBody>
-          <a:bodyPr wrap="square" lIns="0" rIns="0" tIns="0" bIns="0">
-            <a:spAutoFit/>
-          </a:bodyPr>
-          <a:lstStyle/>
-          <a:p>
-            <a:pPr>
+            <a:off x="566928" y="914400"/>
+            <a:ext cx="8595360" cy="1371600"/>
+          </a:xfrm>
+          <a:prstGeom prst="rect">
+            <a:avLst/>
+          </a:prstGeom>
+          <a:noFill/>
+        </p:spPr>
+        <p:txBody>
+          <a:bodyPr wrap="square" lIns="0" rIns="0" tIns="0" bIns="0">
+            <a:spAutoFit/>
+          </a:bodyPr>
+          <a:lstStyle/>
+          <a:p>
+            <a:pPr>
+              <a:lnSpc>
+                <a:spcPct val="108000"/>
+              </a:lnSpc>
+              <a:spcBef>
+                <a:spcPts val="0"/>
+              </a:spcBef>
+              <a:spcAft>
+                <a:spcPts val="0"/>
+              </a:spcAft>
+            </a:pPr>
+            <a:r>
+              <a:rPr sz="2700" b="0" i="0">
+                <a:solidFill>
+                  <a:srgbClr val="14171C"/>
+                </a:solidFill>
+                <a:latin typeface="Georgia"/>
+              </a:rPr>
+              <a:t>Social trust: why you cannot fix a measurement by measuring better</a:t>
+            </a:r>
+          </a:p>
+        </p:txBody>
+      </p:sp>
+      <p:sp>
+        <p:nvSpPr>
+          <p:cNvPr id="4" name="TextBox 3"/>
+          <p:cNvSpPr txBox="1"/>
+          <p:nvPr/>
+        </p:nvSpPr>
+        <p:spPr>
+          <a:xfrm>
+            <a:off x="566928" y="2286000"/>
+            <a:ext cx="8595360" cy="3840480"/>
+          </a:xfrm>
+          <a:prstGeom prst="rect">
+            <a:avLst/>
+          </a:prstGeom>
+          <a:noFill/>
+        </p:spPr>
+        <p:txBody>
+          <a:bodyPr wrap="square" lIns="0" rIns="0" tIns="0" bIns="0">
+            <a:spAutoFit/>
+          </a:bodyPr>
+          <a:lstStyle/>
+          <a:p>
+            <a:pPr>
+              <a:lnSpc>
+                <a:spcPct val="132000"/>
+              </a:lnSpc>
+              <a:spcBef>
+                <a:spcPts val="0"/>
+              </a:spcBef>
+              <a:spcAft>
+                <a:spcPts val="1100"/>
+              </a:spcAft>
+            </a:pPr>
+            <a:r>
+              <a:rPr sz="1400" b="0" i="0">
+                <a:solidFill>
+                  <a:srgbClr val="5A6068"/>
+                </a:solidFill>
+                <a:latin typeface="Calibri"/>
+              </a:rPr>
+              <a:t>Social trust is the most tentative finding here. The ESS is Europe-only, across 36 countries, and relies on a single item. That bounds the claim: the pattern holds in Europe, with a wellbeing survey, on a self-report basis. It does not claim universality.</a:t>
+            </a:r>
+          </a:p>
+          <a:p>
+            <a:pPr>
+              <a:lnSpc>
+                <a:spcPct val="132000"/>
+              </a:lnSpc>
+              <a:spcBef>
+                <a:spcPts val="0"/>
+              </a:spcBef>
+              <a:spcAft>
+                <a:spcPts val="1100"/>
+              </a:spcAft>
+            </a:pPr>
+            <a:r>
+              <a:rPr sz="1400" b="0" i="0">
+                <a:solidFill>
+                  <a:srgbClr val="5A6068"/>
+                </a:solidFill>
+                <a:latin typeface="Calibri"/>
+              </a:rPr>
+              <a:t>But the reason it is tentative points to the deepest problem: trust is not collected at global scale in either framework. The SDG database has 13 series adjacent to trust, but they measure institutional confidence, not interpersonal trust, and they are intermittent (147 of 163 country-series have fewer than four years of data). This is not a construct-choice problem that better measurement can solve. It is a coverage gap that requires deciding to collect the data in the first place.</a:t>
+            </a:r>
+          </a:p>
+          <a:p>
+            <a:pPr>
+              <a:lnSpc>
+                <a:spcPct val="132000"/>
+              </a:lnSpc>
+              <a:spcBef>
+                <a:spcPts val="0"/>
+              </a:spcBef>
+              <a:spcAft>
+                <a:spcPts val="1100"/>
+              </a:spcAft>
+            </a:pPr>
+            <a:r>
+              <a:rPr sz="1400" b="0" i="0">
+                <a:solidFill>
+                  <a:srgbClr val="5A6068"/>
+                </a:solidFill>
+                <a:latin typeface="Calibri"/>
+              </a:rPr>
+              <a:t>For wellbeing-conscious development monitoring, this suggests either building interpersonal-trust measurement into the core frameworks, or acknowledging that other surveys (the ESS, Gallup World Poll, World Values Survey) may be more suitable for understanding what shapes lived experience.</a:t>
+            </a:r>
+          </a:p>
+        </p:txBody>
+      </p:sp>
+      <p:sp>
+        <p:nvSpPr>
+          <p:cNvPr id="5" name="TextBox 4"/>
+          <p:cNvSpPr txBox="1"/>
+          <p:nvPr/>
+        </p:nvSpPr>
+        <p:spPr>
+          <a:xfrm>
+            <a:off x="11338560" y="6263640"/>
+            <a:ext cx="548640" cy="274320"/>
+          </a:xfrm>
+          <a:prstGeom prst="rect">
+            <a:avLst/>
+          </a:prstGeom>
+          <a:noFill/>
+        </p:spPr>
+        <p:txBody>
+          <a:bodyPr wrap="square" lIns="0" rIns="0" tIns="0" bIns="0">
+            <a:spAutoFit/>
+          </a:bodyPr>
+          <a:lstStyle/>
+          <a:p>
+            <a:pPr algn="r">
               <a:spcBef>
                 <a:spcPts val="0"/>
               </a:spcBef>
@@ -8957,56 +9254,11 @@
             <a:r>
               <a:rPr sz="1100" b="0" i="0">
                 <a:solidFill>
-                  <a:srgbClr val="17549E"/>
+                  <a:srgbClr val="868D96"/>
                 </a:solidFill>
                 <a:latin typeface="Consolas"/>
               </a:rPr>
-              <a:t>WHERE ACT IV LEAVES US</a:t>
-            </a:r>
-          </a:p>
-        </p:txBody>
-      </p:sp>
-      <p:sp>
-        <p:nvSpPr>
-          <p:cNvPr id="4" name="TextBox 3"/>
-          <p:cNvSpPr txBox="1"/>
-          <p:nvPr/>
-        </p:nvSpPr>
-        <p:spPr>
-          <a:xfrm>
-            <a:off x="914400" y="2148840"/>
-            <a:ext cx="9509760" cy="2926080"/>
-          </a:xfrm>
-          <a:prstGeom prst="rect">
-            <a:avLst/>
-          </a:prstGeom>
-          <a:noFill/>
-        </p:spPr>
-        <p:txBody>
-          <a:bodyPr wrap="square" lIns="0" rIns="0" tIns="0" bIns="0">
-            <a:spAutoFit/>
-          </a:bodyPr>
-          <a:lstStyle/>
-          <a:p>
-            <a:pPr>
-              <a:lnSpc>
-                <a:spcPct val="135000"/>
-              </a:lnSpc>
-              <a:spcBef>
-                <a:spcPts val="0"/>
-              </a:spcBef>
-              <a:spcAft>
-                <a:spcPts val="0"/>
-              </a:spcAft>
-            </a:pPr>
-            <a:r>
-              <a:rPr sz="2100" b="0" i="0">
-                <a:solidFill>
-                  <a:srgbClr val="14171C"/>
-                </a:solidFill>
-                <a:latin typeface="Georgia"/>
-              </a:rPr>
-              <a:t>Whether development measurement should be redesigned with wellbeing in mind is beyond this scope. But if it is, this evidence suggests the measurement should be different: more attentive to which variables still move, which constructs predict outcomes, and which domains are collected at all.</a:t>
+              <a:t>IV</a:t>
             </a:r>
           </a:p>
         </p:txBody>
@@ -9046,68 +9298,251 @@
         <p:spPr>
           <a:xfrm>
             <a:off x="566928" y="502920"/>
-            <a:ext cx="8229600" cy="822960"/>
-          </a:xfrm>
-          <a:prstGeom prst="rect">
-            <a:avLst/>
-          </a:prstGeom>
-          <a:noFill/>
-        </p:spPr>
-        <p:txBody>
-          <a:bodyPr wrap="square" lIns="0" rIns="0" tIns="0" bIns="0">
-            <a:spAutoFit/>
-          </a:bodyPr>
-          <a:lstStyle/>
-          <a:p>
-            <a:pPr>
-              <a:spcBef>
-                <a:spcPts val="0"/>
-              </a:spcBef>
-              <a:spcAft>
-                <a:spcPts val="600"/>
-              </a:spcAft>
-            </a:pPr>
-            <a:r>
-              <a:rPr sz="3200" b="0" i="0">
+            <a:ext cx="8595360" cy="274320"/>
+          </a:xfrm>
+          <a:prstGeom prst="rect">
+            <a:avLst/>
+          </a:prstGeom>
+          <a:noFill/>
+        </p:spPr>
+        <p:txBody>
+          <a:bodyPr wrap="square" lIns="0" rIns="0" tIns="0" bIns="0">
+            <a:spAutoFit/>
+          </a:bodyPr>
+          <a:lstStyle/>
+          <a:p>
+            <a:pPr>
+              <a:spcBef>
+                <a:spcPts val="0"/>
+              </a:spcBef>
+              <a:spcAft>
+                <a:spcPts val="0"/>
+              </a:spcAft>
+            </a:pPr>
+            <a:r>
+              <a:rPr sz="1000" b="0" i="0">
+                <a:solidFill>
+                  <a:srgbClr val="A63A30"/>
+                </a:solidFill>
+                <a:latin typeface="Consolas"/>
+              </a:rPr>
+              <a:t>CONCLUSION</a:t>
+            </a:r>
+          </a:p>
+        </p:txBody>
+      </p:sp>
+      <p:sp>
+        <p:nvSpPr>
+          <p:cNvPr id="3" name="TextBox 2"/>
+          <p:cNvSpPr txBox="1"/>
+          <p:nvPr/>
+        </p:nvSpPr>
+        <p:spPr>
+          <a:xfrm>
+            <a:off x="566928" y="914400"/>
+            <a:ext cx="8595360" cy="1371600"/>
+          </a:xfrm>
+          <a:prstGeom prst="rect">
+            <a:avLst/>
+          </a:prstGeom>
+          <a:noFill/>
+        </p:spPr>
+        <p:txBody>
+          <a:bodyPr wrap="square" lIns="0" rIns="0" tIns="0" bIns="0">
+            <a:spAutoFit/>
+          </a:bodyPr>
+          <a:lstStyle/>
+          <a:p>
+            <a:pPr>
+              <a:lnSpc>
+                <a:spcPct val="108000"/>
+              </a:lnSpc>
+              <a:spcBef>
+                <a:spcPts val="0"/>
+              </a:spcBef>
+              <a:spcAft>
+                <a:spcPts val="0"/>
+              </a:spcAft>
+            </a:pPr>
+            <a:r>
+              <a:rPr sz="2700" b="0" i="0">
                 <a:solidFill>
                   <a:srgbClr val="14171C"/>
                 </a:solidFill>
                 <a:latin typeface="Georgia"/>
               </a:rPr>
-              <a:t>Decisions for the team</a:t>
-            </a:r>
-          </a:p>
-          <a:p>
-            <a:pPr>
-              <a:spcBef>
-                <a:spcPts val="0"/>
-              </a:spcBef>
-              <a:spcAft>
-                <a:spcPts val="0"/>
-              </a:spcAft>
-            </a:pPr>
-            <a:r>
-              <a:rPr sz="1300" b="0" i="0">
+              <a:t>A question rather than a prescription</a:t>
+            </a:r>
+          </a:p>
+        </p:txBody>
+      </p:sp>
+      <p:sp>
+        <p:nvSpPr>
+          <p:cNvPr id="4" name="TextBox 3"/>
+          <p:cNvSpPr txBox="1"/>
+          <p:nvPr/>
+        </p:nvSpPr>
+        <p:spPr>
+          <a:xfrm>
+            <a:off x="566928" y="2286000"/>
+            <a:ext cx="8595360" cy="3840480"/>
+          </a:xfrm>
+          <a:prstGeom prst="rect">
+            <a:avLst/>
+          </a:prstGeom>
+          <a:noFill/>
+        </p:spPr>
+        <p:txBody>
+          <a:bodyPr wrap="square" lIns="0" rIns="0" tIns="0" bIns="0">
+            <a:spAutoFit/>
+          </a:bodyPr>
+          <a:lstStyle/>
+          <a:p>
+            <a:pPr>
+              <a:lnSpc>
+                <a:spcPct val="132000"/>
+              </a:lnSpc>
+              <a:spcBef>
+                <a:spcPts val="0"/>
+              </a:spcBef>
+              <a:spcAft>
+                <a:spcPts val="1100"/>
+              </a:spcAft>
+            </a:pPr>
+            <a:r>
+              <a:rPr sz="1400" b="0" i="0">
                 <a:solidFill>
                   <a:srgbClr val="5A6068"/>
                 </a:solidFill>
                 <a:latin typeface="Calibri"/>
               </a:rPr>
-              <a:t>4 things the acts do not settle, in the order they block drafting.</a:t>
-            </a:r>
-          </a:p>
-        </p:txBody>
-      </p:sp>
-      <p:sp>
-        <p:nvSpPr>
-          <p:cNvPr id="3" name="Rectangle 2"/>
+              <a:t>The evidence shows a consistent pattern: which domain looks most consequential for wellbeing depends on which framework measures it and what variable they chose. This is not about the domains; it is about the tools.</a:t>
+            </a:r>
+          </a:p>
+          <a:p>
+            <a:pPr>
+              <a:lnSpc>
+                <a:spcPct val="132000"/>
+              </a:lnSpc>
+              <a:spcBef>
+                <a:spcPts val="0"/>
+              </a:spcBef>
+              <a:spcAft>
+                <a:spcPts val="1100"/>
+              </a:spcAft>
+            </a:pPr>
+            <a:r>
+              <a:rPr sz="1400" b="0" i="0">
+                <a:solidFill>
+                  <a:srgbClr val="5A6068"/>
+                </a:solidFill>
+                <a:latin typeface="Calibri"/>
+              </a:rPr>
+              <a:t>Whether development frameworks should be redesigned around wellbeing is outside the scope here. But if they were, this finding suggests the question to ask: should measurement choices be made with explicit reference to which variables still move and still matter for lived experience? Should coverage be built in for domains the frameworks discovered only by studying something else?</a:t>
+            </a:r>
+          </a:p>
+          <a:p>
+            <a:pPr>
+              <a:lnSpc>
+                <a:spcPct val="132000"/>
+              </a:lnSpc>
+              <a:spcBef>
+                <a:spcPts val="0"/>
+              </a:spcBef>
+              <a:spcAft>
+                <a:spcPts val="1100"/>
+              </a:spcAft>
+            </a:pPr>
+            <a:r>
+              <a:rPr sz="1400" b="0" i="0">
+                <a:solidFill>
+                  <a:srgbClr val="5A6068"/>
+                </a:solidFill>
+                <a:latin typeface="Calibri"/>
+              </a:rPr>
+              <a:t>The frameworks work well for their stated purpose. The question is whether wellbeing should become part of that purpose — and if it does, whether the measurement that comes from that intent should be different from the aggregate, development-first measurement in place today.</a:t>
+            </a:r>
+          </a:p>
+        </p:txBody>
+      </p:sp>
+      <p:sp>
+        <p:nvSpPr>
+          <p:cNvPr id="5" name="TextBox 4"/>
+          <p:cNvSpPr txBox="1"/>
+          <p:nvPr/>
+        </p:nvSpPr>
+        <p:spPr>
+          <a:xfrm>
+            <a:off x="11338560" y="6263640"/>
+            <a:ext cx="548640" cy="274320"/>
+          </a:xfrm>
+          <a:prstGeom prst="rect">
+            <a:avLst/>
+          </a:prstGeom>
+          <a:noFill/>
+        </p:spPr>
+        <p:txBody>
+          <a:bodyPr wrap="square" lIns="0" rIns="0" tIns="0" bIns="0">
+            <a:spAutoFit/>
+          </a:bodyPr>
+          <a:lstStyle/>
+          <a:p>
+            <a:pPr algn="r">
+              <a:spcBef>
+                <a:spcPts val="0"/>
+              </a:spcBef>
+              <a:spcAft>
+                <a:spcPts val="0"/>
+              </a:spcAft>
+            </a:pPr>
+            <a:r>
+              <a:rPr sz="1100" b="0" i="0">
+                <a:solidFill>
+                  <a:srgbClr val="868D96"/>
+                </a:solidFill>
+                <a:latin typeface="Consolas"/>
+              </a:rPr>
+              <a:t>IV</a:t>
+            </a:r>
+          </a:p>
+        </p:txBody>
+      </p:sp>
+    </p:spTree>
+  </p:cSld>
+  <p:clrMapOvr>
+    <a:masterClrMapping/>
+  </p:clrMapOvr>
+</p:sld>
+</file>
+
+<file path=ppt/slides/slide29.xml><?xml version="1.0" encoding="utf-8"?>
+<p:sld xmlns:a="http://schemas.openxmlformats.org/drawingml/2006/main" xmlns:p="http://schemas.openxmlformats.org/presentationml/2006/main" xmlns:r="http://schemas.openxmlformats.org/officeDocument/2006/relationships">
+  <p:cSld>
+    <p:bg>
+      <p:bgPr>
+        <a:solidFill>
+          <a:srgbClr val="E8EBEF"/>
+        </a:solidFill>
+        <a:effectLst/>
+      </p:bgPr>
+    </p:bg>
+    <p:spTree>
+      <p:nvGrpSpPr>
+        <p:cNvPr id="1" name=""/>
+        <p:cNvGrpSpPr/>
+        <p:nvPr/>
+      </p:nvGrpSpPr>
+      <p:grpSpPr/>
+      <p:sp>
+        <p:nvSpPr>
+          <p:cNvPr id="2" name="Rectangle 1"/>
           <p:cNvSpPr/>
           <p:nvPr/>
         </p:nvSpPr>
         <p:spPr>
           <a:xfrm>
-            <a:off x="566928" y="1828800"/>
-            <a:ext cx="3472586" cy="25400"/>
+            <a:off x="566928" y="2103120"/>
+            <a:ext cx="54864" cy="2377440"/>
           </a:xfrm>
           <a:prstGeom prst="rect">
             <a:avLst/>
@@ -9144,458 +9579,67 @@
       </p:sp>
       <p:sp>
         <p:nvSpPr>
+          <p:cNvPr id="3" name="TextBox 2"/>
+          <p:cNvSpPr txBox="1"/>
+          <p:nvPr/>
+        </p:nvSpPr>
+        <p:spPr>
+          <a:xfrm>
+            <a:off x="914400" y="1600200"/>
+            <a:ext cx="8686800" cy="274320"/>
+          </a:xfrm>
+          <a:prstGeom prst="rect">
+            <a:avLst/>
+          </a:prstGeom>
+          <a:noFill/>
+        </p:spPr>
+        <p:txBody>
+          <a:bodyPr wrap="square" lIns="0" rIns="0" tIns="0" bIns="0">
+            <a:spAutoFit/>
+          </a:bodyPr>
+          <a:lstStyle/>
+          <a:p>
+            <a:pPr>
+              <a:spcBef>
+                <a:spcPts val="0"/>
+              </a:spcBef>
+              <a:spcAft>
+                <a:spcPts val="0"/>
+              </a:spcAft>
+            </a:pPr>
+            <a:r>
+              <a:rPr sz="1100" b="0" i="0">
+                <a:solidFill>
+                  <a:srgbClr val="17549E"/>
+                </a:solidFill>
+                <a:latin typeface="Consolas"/>
+              </a:rPr>
+              <a:t>WHERE ACT IV LEAVES US</a:t>
+            </a:r>
+          </a:p>
+        </p:txBody>
+      </p:sp>
+      <p:sp>
+        <p:nvSpPr>
           <p:cNvPr id="4" name="TextBox 3"/>
           <p:cNvSpPr txBox="1"/>
           <p:nvPr/>
         </p:nvSpPr>
         <p:spPr>
           <a:xfrm>
-            <a:off x="566928" y="2011680"/>
-            <a:ext cx="3472586" cy="1828800"/>
-          </a:xfrm>
-          <a:prstGeom prst="rect">
-            <a:avLst/>
-          </a:prstGeom>
-          <a:noFill/>
-        </p:spPr>
-        <p:txBody>
-          <a:bodyPr wrap="square" lIns="0" rIns="0" tIns="0" bIns="0">
-            <a:spAutoFit/>
-          </a:bodyPr>
-          <a:lstStyle/>
-          <a:p>
-            <a:pPr>
-              <a:spcBef>
-                <a:spcPts val="0"/>
-              </a:spcBef>
-              <a:spcAft>
-                <a:spcPts val="700"/>
-              </a:spcAft>
-            </a:pPr>
-            <a:r>
-              <a:rPr sz="1050" b="0" i="0">
-                <a:solidFill>
-                  <a:srgbClr val="17549E"/>
-                </a:solidFill>
-                <a:latin typeface="Consolas"/>
-              </a:rPr>
-              <a:t>FIGURE COUNT</a:t>
-            </a:r>
-          </a:p>
-          <a:p>
-            <a:pPr>
-              <a:lnSpc>
-                <a:spcPct val="130000"/>
-              </a:lnSpc>
-              <a:spcBef>
-                <a:spcPts val="0"/>
-              </a:spcBef>
-              <a:spcAft>
-                <a:spcPts val="0"/>
-              </a:spcAft>
-            </a:pPr>
-            <a:r>
-              <a:rPr sz="1100" b="0" i="0">
-                <a:solidFill>
-                  <a:srgbClr val="5A6068"/>
-                </a:solidFill>
-                <a:latin typeface="Calibri"/>
-              </a:rPr>
-              <a:t>Commentaries allow one or two. Proposed: three-panel composite as Figure 1 and domain scorecard as Figure 2. Everything else supplementary.</a:t>
-            </a:r>
-          </a:p>
-        </p:txBody>
-      </p:sp>
-      <p:sp>
-        <p:nvSpPr>
-          <p:cNvPr id="5" name="Rectangle 4"/>
-          <p:cNvSpPr/>
-          <p:nvPr/>
-        </p:nvSpPr>
-        <p:spPr>
-          <a:xfrm>
-            <a:off x="4359554" y="1828800"/>
-            <a:ext cx="3472586" cy="25400"/>
-          </a:xfrm>
-          <a:prstGeom prst="rect">
-            <a:avLst/>
-          </a:prstGeom>
-          <a:solidFill>
-            <a:srgbClr val="17549E"/>
-          </a:solidFill>
-          <a:ln>
-            <a:noFill/>
-          </a:ln>
-          <a:effectLst/>
-        </p:spPr>
-        <p:style>
-          <a:lnRef idx="1">
-            <a:schemeClr val="accent1"/>
-          </a:lnRef>
-          <a:fillRef idx="3">
-            <a:schemeClr val="accent1"/>
-          </a:fillRef>
-          <a:effectRef idx="2">
-            <a:schemeClr val="accent1"/>
-          </a:effectRef>
-          <a:fontRef idx="minor">
-            <a:schemeClr val="lt1"/>
-          </a:fontRef>
-        </p:style>
-        <p:txBody>
-          <a:bodyPr rtlCol="0" anchor="ctr"/>
-          <a:lstStyle/>
-          <a:p>
-            <a:pPr algn="ctr"/>
-          </a:p>
-        </p:txBody>
-      </p:sp>
-      <p:sp>
-        <p:nvSpPr>
-          <p:cNvPr id="6" name="TextBox 5"/>
-          <p:cNvSpPr txBox="1"/>
-          <p:nvPr/>
-        </p:nvSpPr>
-        <p:spPr>
-          <a:xfrm>
-            <a:off x="4359554" y="2011680"/>
-            <a:ext cx="3472586" cy="1828800"/>
-          </a:xfrm>
-          <a:prstGeom prst="rect">
-            <a:avLst/>
-          </a:prstGeom>
-          <a:noFill/>
-        </p:spPr>
-        <p:txBody>
-          <a:bodyPr wrap="square" lIns="0" rIns="0" tIns="0" bIns="0">
-            <a:spAutoFit/>
-          </a:bodyPr>
-          <a:lstStyle/>
-          <a:p>
-            <a:pPr>
-              <a:spcBef>
-                <a:spcPts val="0"/>
-              </a:spcBef>
-              <a:spcAft>
-                <a:spcPts val="700"/>
-              </a:spcAft>
-            </a:pPr>
-            <a:r>
-              <a:rPr sz="1050" b="0" i="0">
-                <a:solidFill>
-                  <a:srgbClr val="17549E"/>
-                </a:solidFill>
-                <a:latin typeface="Consolas"/>
-              </a:rPr>
-              <a:t>SCOPE OF TRUST FINDINGS</a:t>
-            </a:r>
-          </a:p>
-          <a:p>
-            <a:pPr>
-              <a:lnSpc>
-                <a:spcPct val="130000"/>
-              </a:lnSpc>
-              <a:spcBef>
-                <a:spcPts val="0"/>
-              </a:spcBef>
-              <a:spcAft>
-                <a:spcPts val="0"/>
-              </a:spcAft>
-            </a:pPr>
-            <a:r>
-              <a:rPr sz="1100" b="0" i="0">
-                <a:solidFill>
-                  <a:srgbClr val="5A6068"/>
-                </a:solidFill>
-                <a:latin typeface="Calibri"/>
-              </a:rPr>
-              <a:t>Trust findings rest on ESS (36 European countries, individual-level). The design requires ≥4 years per country-series; only 16 of 163 SDG trust-adjacent series have that coverage, and 1 is significant. Tested cross-sectionally, 9 of 13 series are usable and 4 are significant, but all fall below HDI components on the same countries. The claim is Europe-only and rests on one instrument in each framework; it is the most tentative of the three.</a:t>
-            </a:r>
-          </a:p>
-        </p:txBody>
-      </p:sp>
-      <p:sp>
-        <p:nvSpPr>
-          <p:cNvPr id="7" name="Rectangle 6"/>
-          <p:cNvSpPr/>
-          <p:nvPr/>
-        </p:nvSpPr>
-        <p:spPr>
-          <a:xfrm>
-            <a:off x="8152180" y="1828800"/>
-            <a:ext cx="3472586" cy="25400"/>
-          </a:xfrm>
-          <a:prstGeom prst="rect">
-            <a:avLst/>
-          </a:prstGeom>
-          <a:solidFill>
-            <a:srgbClr val="17549E"/>
-          </a:solidFill>
-          <a:ln>
-            <a:noFill/>
-          </a:ln>
-          <a:effectLst/>
-        </p:spPr>
-        <p:style>
-          <a:lnRef idx="1">
-            <a:schemeClr val="accent1"/>
-          </a:lnRef>
-          <a:fillRef idx="3">
-            <a:schemeClr val="accent1"/>
-          </a:fillRef>
-          <a:effectRef idx="2">
-            <a:schemeClr val="accent1"/>
-          </a:effectRef>
-          <a:fontRef idx="minor">
-            <a:schemeClr val="lt1"/>
-          </a:fontRef>
-        </p:style>
-        <p:txBody>
-          <a:bodyPr rtlCol="0" anchor="ctr"/>
-          <a:lstStyle/>
-          <a:p>
-            <a:pPr algn="ctr"/>
-          </a:p>
-        </p:txBody>
-      </p:sp>
-      <p:sp>
-        <p:nvSpPr>
-          <p:cNvPr id="8" name="TextBox 7"/>
-          <p:cNvSpPr txBox="1"/>
-          <p:nvPr/>
-        </p:nvSpPr>
-        <p:spPr>
-          <a:xfrm>
-            <a:off x="8152180" y="2011680"/>
-            <a:ext cx="3472586" cy="1828800"/>
-          </a:xfrm>
-          <a:prstGeom prst="rect">
-            <a:avLst/>
-          </a:prstGeom>
-          <a:noFill/>
-        </p:spPr>
-        <p:txBody>
-          <a:bodyPr wrap="square" lIns="0" rIns="0" tIns="0" bIns="0">
-            <a:spAutoFit/>
-          </a:bodyPr>
-          <a:lstStyle/>
-          <a:p>
-            <a:pPr>
-              <a:spcBef>
-                <a:spcPts val="0"/>
-              </a:spcBef>
-              <a:spcAft>
-                <a:spcPts val="700"/>
-              </a:spcAft>
-            </a:pPr>
-            <a:r>
-              <a:rPr sz="1050" b="0" i="0">
-                <a:solidFill>
-                  <a:srgbClr val="17549E"/>
-                </a:solidFill>
-                <a:latin typeface="Consolas"/>
-              </a:rPr>
-              <a:t>INSTITUTIONAL CONFIDENCE VS. INTERPERSONAL TRUST</a:t>
-            </a:r>
-          </a:p>
-          <a:p>
-            <a:pPr>
-              <a:lnSpc>
-                <a:spcPct val="130000"/>
-              </a:lnSpc>
-              <a:spcBef>
-                <a:spcPts val="0"/>
-              </a:spcBef>
-              <a:spcAft>
-                <a:spcPts val="0"/>
-              </a:spcAft>
-            </a:pPr>
-            <a:r>
-              <a:rPr sz="1100" b="0" i="0">
-                <a:solidFill>
-                  <a:srgbClr val="5A6068"/>
-                </a:solidFill>
-                <a:latin typeface="Calibri"/>
-              </a:rPr>
-              <a:t>The SDG's Goal 16 trust series measure satisfaction with public services, perceived bribery, and perceived inclusiveness in decision-making — institutional confidence, not interpersonal trust ('most people can be trusted'). These are conceptually distinct. The commentarymust be explicit that SDG16 is not a direct analogue for the ESS trust item.</a:t>
-            </a:r>
-          </a:p>
-        </p:txBody>
-      </p:sp>
-      <p:sp>
-        <p:nvSpPr>
-          <p:cNvPr id="9" name="Rectangle 8"/>
-          <p:cNvSpPr/>
-          <p:nvPr/>
-        </p:nvSpPr>
-        <p:spPr>
-          <a:xfrm>
-            <a:off x="566928" y="4069080"/>
-            <a:ext cx="3472586" cy="25400"/>
-          </a:xfrm>
-          <a:prstGeom prst="rect">
-            <a:avLst/>
-          </a:prstGeom>
-          <a:solidFill>
-            <a:srgbClr val="17549E"/>
-          </a:solidFill>
-          <a:ln>
-            <a:noFill/>
-          </a:ln>
-          <a:effectLst/>
-        </p:spPr>
-        <p:style>
-          <a:lnRef idx="1">
-            <a:schemeClr val="accent1"/>
-          </a:lnRef>
-          <a:fillRef idx="3">
-            <a:schemeClr val="accent1"/>
-          </a:fillRef>
-          <a:effectRef idx="2">
-            <a:schemeClr val="accent1"/>
-          </a:effectRef>
-          <a:fontRef idx="minor">
-            <a:schemeClr val="lt1"/>
-          </a:fontRef>
-        </p:style>
-        <p:txBody>
-          <a:bodyPr rtlCol="0" anchor="ctr"/>
-          <a:lstStyle/>
-          <a:p>
-            <a:pPr algn="ctr"/>
-          </a:p>
-        </p:txBody>
-      </p:sp>
-      <p:sp>
-        <p:nvSpPr>
-          <p:cNvPr id="10" name="TextBox 9"/>
-          <p:cNvSpPr txBox="1"/>
-          <p:nvPr/>
-        </p:nvSpPr>
-        <p:spPr>
-          <a:xfrm>
-            <a:off x="566928" y="4251960"/>
-            <a:ext cx="3472586" cy="1828800"/>
-          </a:xfrm>
-          <a:prstGeom prst="rect">
-            <a:avLst/>
-          </a:prstGeom>
-          <a:noFill/>
-        </p:spPr>
-        <p:txBody>
-          <a:bodyPr wrap="square" lIns="0" rIns="0" tIns="0" bIns="0">
-            <a:spAutoFit/>
-          </a:bodyPr>
-          <a:lstStyle/>
-          <a:p>
-            <a:pPr>
-              <a:spcBef>
-                <a:spcPts val="0"/>
-              </a:spcBef>
-              <a:spcAft>
-                <a:spcPts val="700"/>
-              </a:spcAft>
-            </a:pPr>
-            <a:r>
-              <a:rPr sz="1050" b="0" i="0">
-                <a:solidFill>
-                  <a:srgbClr val="17549E"/>
-                </a:solidFill>
-                <a:latin typeface="Consolas"/>
-              </a:rPr>
-              <a:t>THREE FAILURE MODES FRAME</a:t>
-            </a:r>
-          </a:p>
-          <a:p>
-            <a:pPr>
-              <a:lnSpc>
-                <a:spcPct val="130000"/>
-              </a:lnSpc>
-              <a:spcBef>
-                <a:spcPts val="0"/>
-              </a:spcBef>
-              <a:spcAft>
-                <a:spcPts val="0"/>
-              </a:spcAft>
-            </a:pPr>
-            <a:r>
-              <a:rPr sz="1100" b="0" i="0">
-                <a:solidFill>
-                  <a:srgbClr val="5A6068"/>
-                </a:solidFill>
-                <a:latin typeface="Calibri"/>
-              </a:rPr>
-              <a:t>The narrative positions education's, health's, and trust's findings as evidence of three different ways frameworks lose sight of domains that matter: wrong construct, saturated variable, coverage gap. This is a meta-finding about measurement, not about the domains themselves.</a:t>
-            </a:r>
-          </a:p>
-        </p:txBody>
-      </p:sp>
-    </p:spTree>
-  </p:cSld>
-  <p:clrMapOvr>
-    <a:masterClrMapping/>
-  </p:clrMapOvr>
-</p:sld>
-</file>
-
-<file path=ppt/slides/slide29.xml><?xml version="1.0" encoding="utf-8"?>
-<p:sld xmlns:a="http://schemas.openxmlformats.org/drawingml/2006/main" xmlns:p="http://schemas.openxmlformats.org/presentationml/2006/main" xmlns:r="http://schemas.openxmlformats.org/officeDocument/2006/relationships">
-  <p:cSld>
-    <p:bg>
-      <p:bgPr>
-        <a:solidFill>
-          <a:srgbClr val="14171C"/>
-        </a:solidFill>
-        <a:effectLst/>
-      </p:bgPr>
-    </p:bg>
-    <p:spTree>
-      <p:nvGrpSpPr>
-        <p:cNvPr id="1" name=""/>
-        <p:cNvGrpSpPr/>
-        <p:nvPr/>
-      </p:nvGrpSpPr>
-      <p:grpSpPr/>
-      <p:sp>
-        <p:nvSpPr>
-          <p:cNvPr id="2" name="TextBox 1"/>
-          <p:cNvSpPr txBox="1"/>
-          <p:nvPr/>
-        </p:nvSpPr>
-        <p:spPr>
-          <a:xfrm>
-            <a:off x="566928" y="2743200"/>
-            <a:ext cx="8229600" cy="1371600"/>
-          </a:xfrm>
-          <a:prstGeom prst="rect">
-            <a:avLst/>
-          </a:prstGeom>
-          <a:noFill/>
-        </p:spPr>
-        <p:txBody>
-          <a:bodyPr wrap="square" lIns="0" rIns="0" tIns="0" bIns="0">
-            <a:spAutoFit/>
-          </a:bodyPr>
-          <a:lstStyle/>
-          <a:p>
-            <a:pPr>
-              <a:spcBef>
-                <a:spcPts val="0"/>
-              </a:spcBef>
-              <a:spcAft>
-                <a:spcPts val="1000"/>
-              </a:spcAft>
-            </a:pPr>
-            <a:r>
-              <a:rPr sz="4000" b="0" i="0">
-                <a:solidFill>
-                  <a:srgbClr val="FCFCFB"/>
-                </a:solidFill>
-                <a:latin typeface="Georgia"/>
-              </a:rPr>
-              <a:t>Evidence appendix</a:t>
-            </a:r>
-          </a:p>
+            <a:off x="914400" y="2148840"/>
+            <a:ext cx="9509760" cy="2926080"/>
+          </a:xfrm>
+          <a:prstGeom prst="rect">
+            <a:avLst/>
+          </a:prstGeom>
+          <a:noFill/>
+        </p:spPr>
+        <p:txBody>
+          <a:bodyPr wrap="square" lIns="0" rIns="0" tIns="0" bIns="0">
+            <a:spAutoFit/>
+          </a:bodyPr>
+          <a:lstStyle/>
           <a:p>
             <a:pPr>
               <a:lnSpc>
@@ -9609,13 +9653,13 @@
               </a:spcAft>
             </a:pPr>
             <a:r>
-              <a:rPr sz="1400" b="0" i="0">
-                <a:solidFill>
-                  <a:srgbClr val="9AA4B0"/>
-                </a:solidFill>
-                <a:latin typeface="Calibri"/>
-              </a:rPr>
-              <a:t>Everything the three acts rest on but do not carry. In submission these become supplementary material.</a:t>
+              <a:rPr sz="2100" b="0" i="0">
+                <a:solidFill>
+                  <a:srgbClr val="14171C"/>
+                </a:solidFill>
+                <a:latin typeface="Georgia"/>
+              </a:rPr>
+              <a:t>Whether development measurement should be redesigned with wellbeing in mind is beyond this scope. But if it is, this evidence suggests the measurement should be different: more attentive to which variables still move, which constructs predict outcomes, and which domains are collected at all.</a:t>
             </a:r>
           </a:p>
         </p:txBody>
@@ -10052,6 +10096,615 @@
                 <a:latin typeface="Calibri"/>
               </a:rPr>
               <a:t>of cells, against the ESS wellbeing survey</a:t>
+            </a:r>
+          </a:p>
+        </p:txBody>
+      </p:sp>
+    </p:spTree>
+  </p:cSld>
+  <p:clrMapOvr>
+    <a:masterClrMapping/>
+  </p:clrMapOvr>
+</p:sld>
+</file>
+
+<file path=ppt/slides/slide30.xml><?xml version="1.0" encoding="utf-8"?>
+<p:sld xmlns:a="http://schemas.openxmlformats.org/drawingml/2006/main" xmlns:p="http://schemas.openxmlformats.org/presentationml/2006/main" xmlns:r="http://schemas.openxmlformats.org/officeDocument/2006/relationships">
+  <p:cSld>
+    <p:bg>
+      <p:bgPr>
+        <a:solidFill>
+          <a:srgbClr val="FCFCFB"/>
+        </a:solidFill>
+        <a:effectLst/>
+      </p:bgPr>
+    </p:bg>
+    <p:spTree>
+      <p:nvGrpSpPr>
+        <p:cNvPr id="1" name=""/>
+        <p:cNvGrpSpPr/>
+        <p:nvPr/>
+      </p:nvGrpSpPr>
+      <p:grpSpPr/>
+      <p:sp>
+        <p:nvSpPr>
+          <p:cNvPr id="2" name="TextBox 1"/>
+          <p:cNvSpPr txBox="1"/>
+          <p:nvPr/>
+        </p:nvSpPr>
+        <p:spPr>
+          <a:xfrm>
+            <a:off x="566928" y="502920"/>
+            <a:ext cx="8229600" cy="822960"/>
+          </a:xfrm>
+          <a:prstGeom prst="rect">
+            <a:avLst/>
+          </a:prstGeom>
+          <a:noFill/>
+        </p:spPr>
+        <p:txBody>
+          <a:bodyPr wrap="square" lIns="0" rIns="0" tIns="0" bIns="0">
+            <a:spAutoFit/>
+          </a:bodyPr>
+          <a:lstStyle/>
+          <a:p>
+            <a:pPr>
+              <a:spcBef>
+                <a:spcPts val="0"/>
+              </a:spcBef>
+              <a:spcAft>
+                <a:spcPts val="600"/>
+              </a:spcAft>
+            </a:pPr>
+            <a:r>
+              <a:rPr sz="3200" b="0" i="0">
+                <a:solidFill>
+                  <a:srgbClr val="14171C"/>
+                </a:solidFill>
+                <a:latin typeface="Georgia"/>
+              </a:rPr>
+              <a:t>Decisions for the team</a:t>
+            </a:r>
+          </a:p>
+          <a:p>
+            <a:pPr>
+              <a:spcBef>
+                <a:spcPts val="0"/>
+              </a:spcBef>
+              <a:spcAft>
+                <a:spcPts val="0"/>
+              </a:spcAft>
+            </a:pPr>
+            <a:r>
+              <a:rPr sz="1300" b="0" i="0">
+                <a:solidFill>
+                  <a:srgbClr val="5A6068"/>
+                </a:solidFill>
+                <a:latin typeface="Calibri"/>
+              </a:rPr>
+              <a:t>4 things the acts do not settle, in the order they block drafting.</a:t>
+            </a:r>
+          </a:p>
+        </p:txBody>
+      </p:sp>
+      <p:sp>
+        <p:nvSpPr>
+          <p:cNvPr id="3" name="Rectangle 2"/>
+          <p:cNvSpPr/>
+          <p:nvPr/>
+        </p:nvSpPr>
+        <p:spPr>
+          <a:xfrm>
+            <a:off x="566928" y="1828800"/>
+            <a:ext cx="3472586" cy="25400"/>
+          </a:xfrm>
+          <a:prstGeom prst="rect">
+            <a:avLst/>
+          </a:prstGeom>
+          <a:solidFill>
+            <a:srgbClr val="17549E"/>
+          </a:solidFill>
+          <a:ln>
+            <a:noFill/>
+          </a:ln>
+          <a:effectLst/>
+        </p:spPr>
+        <p:style>
+          <a:lnRef idx="1">
+            <a:schemeClr val="accent1"/>
+          </a:lnRef>
+          <a:fillRef idx="3">
+            <a:schemeClr val="accent1"/>
+          </a:fillRef>
+          <a:effectRef idx="2">
+            <a:schemeClr val="accent1"/>
+          </a:effectRef>
+          <a:fontRef idx="minor">
+            <a:schemeClr val="lt1"/>
+          </a:fontRef>
+        </p:style>
+        <p:txBody>
+          <a:bodyPr rtlCol="0" anchor="ctr"/>
+          <a:lstStyle/>
+          <a:p>
+            <a:pPr algn="ctr"/>
+          </a:p>
+        </p:txBody>
+      </p:sp>
+      <p:sp>
+        <p:nvSpPr>
+          <p:cNvPr id="4" name="TextBox 3"/>
+          <p:cNvSpPr txBox="1"/>
+          <p:nvPr/>
+        </p:nvSpPr>
+        <p:spPr>
+          <a:xfrm>
+            <a:off x="566928" y="2011680"/>
+            <a:ext cx="3472586" cy="1828800"/>
+          </a:xfrm>
+          <a:prstGeom prst="rect">
+            <a:avLst/>
+          </a:prstGeom>
+          <a:noFill/>
+        </p:spPr>
+        <p:txBody>
+          <a:bodyPr wrap="square" lIns="0" rIns="0" tIns="0" bIns="0">
+            <a:spAutoFit/>
+          </a:bodyPr>
+          <a:lstStyle/>
+          <a:p>
+            <a:pPr>
+              <a:spcBef>
+                <a:spcPts val="0"/>
+              </a:spcBef>
+              <a:spcAft>
+                <a:spcPts val="700"/>
+              </a:spcAft>
+            </a:pPr>
+            <a:r>
+              <a:rPr sz="1050" b="0" i="0">
+                <a:solidFill>
+                  <a:srgbClr val="17549E"/>
+                </a:solidFill>
+                <a:latin typeface="Consolas"/>
+              </a:rPr>
+              <a:t>FIGURE COUNT</a:t>
+            </a:r>
+          </a:p>
+          <a:p>
+            <a:pPr>
+              <a:lnSpc>
+                <a:spcPct val="130000"/>
+              </a:lnSpc>
+              <a:spcBef>
+                <a:spcPts val="0"/>
+              </a:spcBef>
+              <a:spcAft>
+                <a:spcPts val="0"/>
+              </a:spcAft>
+            </a:pPr>
+            <a:r>
+              <a:rPr sz="1100" b="0" i="0">
+                <a:solidFill>
+                  <a:srgbClr val="5A6068"/>
+                </a:solidFill>
+                <a:latin typeface="Calibri"/>
+              </a:rPr>
+              <a:t>Commentaries allow one or two. Proposed: three-panel composite as Figure 1 and domain scorecard as Figure 2. Everything else supplementary.</a:t>
+            </a:r>
+          </a:p>
+        </p:txBody>
+      </p:sp>
+      <p:sp>
+        <p:nvSpPr>
+          <p:cNvPr id="5" name="Rectangle 4"/>
+          <p:cNvSpPr/>
+          <p:nvPr/>
+        </p:nvSpPr>
+        <p:spPr>
+          <a:xfrm>
+            <a:off x="4359554" y="1828800"/>
+            <a:ext cx="3472586" cy="25400"/>
+          </a:xfrm>
+          <a:prstGeom prst="rect">
+            <a:avLst/>
+          </a:prstGeom>
+          <a:solidFill>
+            <a:srgbClr val="17549E"/>
+          </a:solidFill>
+          <a:ln>
+            <a:noFill/>
+          </a:ln>
+          <a:effectLst/>
+        </p:spPr>
+        <p:style>
+          <a:lnRef idx="1">
+            <a:schemeClr val="accent1"/>
+          </a:lnRef>
+          <a:fillRef idx="3">
+            <a:schemeClr val="accent1"/>
+          </a:fillRef>
+          <a:effectRef idx="2">
+            <a:schemeClr val="accent1"/>
+          </a:effectRef>
+          <a:fontRef idx="minor">
+            <a:schemeClr val="lt1"/>
+          </a:fontRef>
+        </p:style>
+        <p:txBody>
+          <a:bodyPr rtlCol="0" anchor="ctr"/>
+          <a:lstStyle/>
+          <a:p>
+            <a:pPr algn="ctr"/>
+          </a:p>
+        </p:txBody>
+      </p:sp>
+      <p:sp>
+        <p:nvSpPr>
+          <p:cNvPr id="6" name="TextBox 5"/>
+          <p:cNvSpPr txBox="1"/>
+          <p:nvPr/>
+        </p:nvSpPr>
+        <p:spPr>
+          <a:xfrm>
+            <a:off x="4359554" y="2011680"/>
+            <a:ext cx="3472586" cy="1828800"/>
+          </a:xfrm>
+          <a:prstGeom prst="rect">
+            <a:avLst/>
+          </a:prstGeom>
+          <a:noFill/>
+        </p:spPr>
+        <p:txBody>
+          <a:bodyPr wrap="square" lIns="0" rIns="0" tIns="0" bIns="0">
+            <a:spAutoFit/>
+          </a:bodyPr>
+          <a:lstStyle/>
+          <a:p>
+            <a:pPr>
+              <a:spcBef>
+                <a:spcPts val="0"/>
+              </a:spcBef>
+              <a:spcAft>
+                <a:spcPts val="700"/>
+              </a:spcAft>
+            </a:pPr>
+            <a:r>
+              <a:rPr sz="1050" b="0" i="0">
+                <a:solidFill>
+                  <a:srgbClr val="17549E"/>
+                </a:solidFill>
+                <a:latin typeface="Consolas"/>
+              </a:rPr>
+              <a:t>SCOPE OF TRUST FINDINGS</a:t>
+            </a:r>
+          </a:p>
+          <a:p>
+            <a:pPr>
+              <a:lnSpc>
+                <a:spcPct val="130000"/>
+              </a:lnSpc>
+              <a:spcBef>
+                <a:spcPts val="0"/>
+              </a:spcBef>
+              <a:spcAft>
+                <a:spcPts val="0"/>
+              </a:spcAft>
+            </a:pPr>
+            <a:r>
+              <a:rPr sz="1100" b="0" i="0">
+                <a:solidFill>
+                  <a:srgbClr val="5A6068"/>
+                </a:solidFill>
+                <a:latin typeface="Calibri"/>
+              </a:rPr>
+              <a:t>Trust findings rest on ESS (36 European countries, individual-level). The design requires ≥4 years per country-series; only 16 of 163 SDG trust-adjacent series have that coverage, and 1 is significant. Tested cross-sectionally, 9 of 13 series are usable and 4 are significant, but all fall below HDI components on the same countries. The claim is Europe-only and rests on one instrument in each framework; it is the most tentative of the three.</a:t>
+            </a:r>
+          </a:p>
+        </p:txBody>
+      </p:sp>
+      <p:sp>
+        <p:nvSpPr>
+          <p:cNvPr id="7" name="Rectangle 6"/>
+          <p:cNvSpPr/>
+          <p:nvPr/>
+        </p:nvSpPr>
+        <p:spPr>
+          <a:xfrm>
+            <a:off x="8152180" y="1828800"/>
+            <a:ext cx="3472586" cy="25400"/>
+          </a:xfrm>
+          <a:prstGeom prst="rect">
+            <a:avLst/>
+          </a:prstGeom>
+          <a:solidFill>
+            <a:srgbClr val="17549E"/>
+          </a:solidFill>
+          <a:ln>
+            <a:noFill/>
+          </a:ln>
+          <a:effectLst/>
+        </p:spPr>
+        <p:style>
+          <a:lnRef idx="1">
+            <a:schemeClr val="accent1"/>
+          </a:lnRef>
+          <a:fillRef idx="3">
+            <a:schemeClr val="accent1"/>
+          </a:fillRef>
+          <a:effectRef idx="2">
+            <a:schemeClr val="accent1"/>
+          </a:effectRef>
+          <a:fontRef idx="minor">
+            <a:schemeClr val="lt1"/>
+          </a:fontRef>
+        </p:style>
+        <p:txBody>
+          <a:bodyPr rtlCol="0" anchor="ctr"/>
+          <a:lstStyle/>
+          <a:p>
+            <a:pPr algn="ctr"/>
+          </a:p>
+        </p:txBody>
+      </p:sp>
+      <p:sp>
+        <p:nvSpPr>
+          <p:cNvPr id="8" name="TextBox 7"/>
+          <p:cNvSpPr txBox="1"/>
+          <p:nvPr/>
+        </p:nvSpPr>
+        <p:spPr>
+          <a:xfrm>
+            <a:off x="8152180" y="2011680"/>
+            <a:ext cx="3472586" cy="1828800"/>
+          </a:xfrm>
+          <a:prstGeom prst="rect">
+            <a:avLst/>
+          </a:prstGeom>
+          <a:noFill/>
+        </p:spPr>
+        <p:txBody>
+          <a:bodyPr wrap="square" lIns="0" rIns="0" tIns="0" bIns="0">
+            <a:spAutoFit/>
+          </a:bodyPr>
+          <a:lstStyle/>
+          <a:p>
+            <a:pPr>
+              <a:spcBef>
+                <a:spcPts val="0"/>
+              </a:spcBef>
+              <a:spcAft>
+                <a:spcPts val="700"/>
+              </a:spcAft>
+            </a:pPr>
+            <a:r>
+              <a:rPr sz="1050" b="0" i="0">
+                <a:solidFill>
+                  <a:srgbClr val="17549E"/>
+                </a:solidFill>
+                <a:latin typeface="Consolas"/>
+              </a:rPr>
+              <a:t>INSTITUTIONAL CONFIDENCE VS. INTERPERSONAL TRUST</a:t>
+            </a:r>
+          </a:p>
+          <a:p>
+            <a:pPr>
+              <a:lnSpc>
+                <a:spcPct val="130000"/>
+              </a:lnSpc>
+              <a:spcBef>
+                <a:spcPts val="0"/>
+              </a:spcBef>
+              <a:spcAft>
+                <a:spcPts val="0"/>
+              </a:spcAft>
+            </a:pPr>
+            <a:r>
+              <a:rPr sz="1100" b="0" i="0">
+                <a:solidFill>
+                  <a:srgbClr val="5A6068"/>
+                </a:solidFill>
+                <a:latin typeface="Calibri"/>
+              </a:rPr>
+              <a:t>The SDG's Goal 16 trust series measure satisfaction with public services, perceived bribery, and perceived inclusiveness in decision-making — institutional confidence, not interpersonal trust ('most people can be trusted'). These are conceptually distinct. The commentarymust be explicit that SDG16 is not a direct analogue for the ESS trust item.</a:t>
+            </a:r>
+          </a:p>
+        </p:txBody>
+      </p:sp>
+      <p:sp>
+        <p:nvSpPr>
+          <p:cNvPr id="9" name="Rectangle 8"/>
+          <p:cNvSpPr/>
+          <p:nvPr/>
+        </p:nvSpPr>
+        <p:spPr>
+          <a:xfrm>
+            <a:off x="566928" y="4069080"/>
+            <a:ext cx="3472586" cy="25400"/>
+          </a:xfrm>
+          <a:prstGeom prst="rect">
+            <a:avLst/>
+          </a:prstGeom>
+          <a:solidFill>
+            <a:srgbClr val="17549E"/>
+          </a:solidFill>
+          <a:ln>
+            <a:noFill/>
+          </a:ln>
+          <a:effectLst/>
+        </p:spPr>
+        <p:style>
+          <a:lnRef idx="1">
+            <a:schemeClr val="accent1"/>
+          </a:lnRef>
+          <a:fillRef idx="3">
+            <a:schemeClr val="accent1"/>
+          </a:fillRef>
+          <a:effectRef idx="2">
+            <a:schemeClr val="accent1"/>
+          </a:effectRef>
+          <a:fontRef idx="minor">
+            <a:schemeClr val="lt1"/>
+          </a:fontRef>
+        </p:style>
+        <p:txBody>
+          <a:bodyPr rtlCol="0" anchor="ctr"/>
+          <a:lstStyle/>
+          <a:p>
+            <a:pPr algn="ctr"/>
+          </a:p>
+        </p:txBody>
+      </p:sp>
+      <p:sp>
+        <p:nvSpPr>
+          <p:cNvPr id="10" name="TextBox 9"/>
+          <p:cNvSpPr txBox="1"/>
+          <p:nvPr/>
+        </p:nvSpPr>
+        <p:spPr>
+          <a:xfrm>
+            <a:off x="566928" y="4251960"/>
+            <a:ext cx="3472586" cy="1828800"/>
+          </a:xfrm>
+          <a:prstGeom prst="rect">
+            <a:avLst/>
+          </a:prstGeom>
+          <a:noFill/>
+        </p:spPr>
+        <p:txBody>
+          <a:bodyPr wrap="square" lIns="0" rIns="0" tIns="0" bIns="0">
+            <a:spAutoFit/>
+          </a:bodyPr>
+          <a:lstStyle/>
+          <a:p>
+            <a:pPr>
+              <a:spcBef>
+                <a:spcPts val="0"/>
+              </a:spcBef>
+              <a:spcAft>
+                <a:spcPts val="700"/>
+              </a:spcAft>
+            </a:pPr>
+            <a:r>
+              <a:rPr sz="1050" b="0" i="0">
+                <a:solidFill>
+                  <a:srgbClr val="17549E"/>
+                </a:solidFill>
+                <a:latin typeface="Consolas"/>
+              </a:rPr>
+              <a:t>THREE FAILURE MODES FRAME</a:t>
+            </a:r>
+          </a:p>
+          <a:p>
+            <a:pPr>
+              <a:lnSpc>
+                <a:spcPct val="130000"/>
+              </a:lnSpc>
+              <a:spcBef>
+                <a:spcPts val="0"/>
+              </a:spcBef>
+              <a:spcAft>
+                <a:spcPts val="0"/>
+              </a:spcAft>
+            </a:pPr>
+            <a:r>
+              <a:rPr sz="1100" b="0" i="0">
+                <a:solidFill>
+                  <a:srgbClr val="5A6068"/>
+                </a:solidFill>
+                <a:latin typeface="Calibri"/>
+              </a:rPr>
+              <a:t>The narrative positions education's, health's, and trust's findings as evidence of three different ways frameworks lose sight of domains that matter: wrong construct, saturated variable, coverage gap. This is a meta-finding about measurement, not about the domains themselves.</a:t>
+            </a:r>
+          </a:p>
+        </p:txBody>
+      </p:sp>
+    </p:spTree>
+  </p:cSld>
+  <p:clrMapOvr>
+    <a:masterClrMapping/>
+  </p:clrMapOvr>
+</p:sld>
+</file>
+
+<file path=ppt/slides/slide31.xml><?xml version="1.0" encoding="utf-8"?>
+<p:sld xmlns:a="http://schemas.openxmlformats.org/drawingml/2006/main" xmlns:p="http://schemas.openxmlformats.org/presentationml/2006/main" xmlns:r="http://schemas.openxmlformats.org/officeDocument/2006/relationships">
+  <p:cSld>
+    <p:bg>
+      <p:bgPr>
+        <a:solidFill>
+          <a:srgbClr val="14171C"/>
+        </a:solidFill>
+        <a:effectLst/>
+      </p:bgPr>
+    </p:bg>
+    <p:spTree>
+      <p:nvGrpSpPr>
+        <p:cNvPr id="1" name=""/>
+        <p:cNvGrpSpPr/>
+        <p:nvPr/>
+      </p:nvGrpSpPr>
+      <p:grpSpPr/>
+      <p:sp>
+        <p:nvSpPr>
+          <p:cNvPr id="2" name="TextBox 1"/>
+          <p:cNvSpPr txBox="1"/>
+          <p:nvPr/>
+        </p:nvSpPr>
+        <p:spPr>
+          <a:xfrm>
+            <a:off x="566928" y="2743200"/>
+            <a:ext cx="8229600" cy="1371600"/>
+          </a:xfrm>
+          <a:prstGeom prst="rect">
+            <a:avLst/>
+          </a:prstGeom>
+          <a:noFill/>
+        </p:spPr>
+        <p:txBody>
+          <a:bodyPr wrap="square" lIns="0" rIns="0" tIns="0" bIns="0">
+            <a:spAutoFit/>
+          </a:bodyPr>
+          <a:lstStyle/>
+          <a:p>
+            <a:pPr>
+              <a:spcBef>
+                <a:spcPts val="0"/>
+              </a:spcBef>
+              <a:spcAft>
+                <a:spcPts val="1000"/>
+              </a:spcAft>
+            </a:pPr>
+            <a:r>
+              <a:rPr sz="4000" b="0" i="0">
+                <a:solidFill>
+                  <a:srgbClr val="FCFCFB"/>
+                </a:solidFill>
+                <a:latin typeface="Georgia"/>
+              </a:rPr>
+              <a:t>Evidence appendix</a:t>
+            </a:r>
+          </a:p>
+          <a:p>
+            <a:pPr>
+              <a:lnSpc>
+                <a:spcPct val="135000"/>
+              </a:lnSpc>
+              <a:spcBef>
+                <a:spcPts val="0"/>
+              </a:spcBef>
+              <a:spcAft>
+                <a:spcPts val="0"/>
+              </a:spcAft>
+            </a:pPr>
+            <a:r>
+              <a:rPr sz="1400" b="0" i="0">
+                <a:solidFill>
+                  <a:srgbClr val="9AA4B0"/>
+                </a:solidFill>
+                <a:latin typeface="Calibri"/>
+              </a:rPr>
+              <a:t>Everything the three acts rest on but do not carry. In submission these become supplementary material.</a:t>
             </a:r>
           </a:p>
         </p:txBody>

--- a/deck/Measured_Where_It_Varies.pptx
+++ b/deck/Measured_Where_It_Varies.pptx
@@ -31,11 +31,6 @@
     <p:sldId id="279" r:id="rId30"/>
     <p:sldId id="280" r:id="rId31"/>
     <p:sldId id="281" r:id="rId32"/>
-    <p:sldId id="282" r:id="rId33"/>
-    <p:sldId id="283" r:id="rId34"/>
-    <p:sldId id="284" r:id="rId35"/>
-    <p:sldId id="285" r:id="rId36"/>
-    <p:sldId id="286" r:id="rId37"/>
   </p:sldIdLst>
   <p:sldSz cx="12191695" cy="6858000" type="screen4x3"/>
   <p:notesSz cx="6858000" cy="9144000"/>
@@ -3429,7 +3424,7 @@
                 </a:solidFill>
                 <a:latin typeface="Consolas"/>
               </a:rPr>
-              <a:t>ALL THREE MATTER</a:t>
+              <a:t>RESULT 1 · EDUCATION</a:t>
             </a:r>
           </a:p>
         </p:txBody>
@@ -3474,7 +3469,7 @@
                 </a:solidFill>
                 <a:latin typeface="Georgia"/>
               </a:rPr>
-              <a:t>Education, health, and social trust all significantly predict life satisfaction</a:t>
+              <a:t>Significant in 92% of ESS countries, but only when measured as attainment</a:t>
             </a:r>
           </a:p>
         </p:txBody>
@@ -3519,7 +3514,29 @@
                 </a:solidFill>
                 <a:latin typeface="Calibri"/>
               </a:rPr>
-              <a:t>In the European Social Survey, where all three are measured at the individual level, all three are significant in the majority of countries. But which framework can see all three? Which sees only some? The answer depends on three different failure modes.</a:t>
+              <a:t>Expected years of schooling predicts life satisfaction in 34% of HDI countries — the highest among the five HDI components, but still a minority. In the ESS individual data, education (measured as years attained) is significant in 92% of countries. The difference is not about the data; it is about which construct you count.</a:t>
+            </a:r>
+          </a:p>
+          <a:p>
+            <a:pPr>
+              <a:lnSpc>
+                <a:spcPct val="132000"/>
+              </a:lnSpc>
+              <a:spcBef>
+                <a:spcPts val="0"/>
+              </a:spcBef>
+              <a:spcAft>
+                <a:spcPts val="1100"/>
+              </a:spcAft>
+            </a:pPr>
+            <a:r>
+              <a:rPr sz="1150" b="0" i="0">
+                <a:solidFill>
+                  <a:srgbClr val="5A6068"/>
+                </a:solidFill>
+                <a:latin typeface="Calibri"/>
+              </a:rPr>
+              <a:t>The SDG framework's education goal is 35 indicators spanning access, attainment, equity (parity ratios), learning outcomes, infrastructure, and financing. Pooled, 3.3% of country-indicator pairs are significant. But access indicators alone (primary and secondary enrollment, completion rates) reach 12.7% — because they measure participation, the closest SDG analogue to HDI attainment. Parity ratios, learning outcomes, and infrastructure contribute little to wellbeing, so pooling them masks the signal from access.</a:t>
             </a:r>
           </a:p>
         </p:txBody>
@@ -3568,7 +3585,7 @@
       </p:sp>
       <p:pic>
         <p:nvPicPr>
-          <p:cNvPr id="6" name="Picture 5" descr="domains_at_levels_comparison.png"/>
+          <p:cNvPr id="6" name="Picture 5" descr="education_levels_comparison.png"/>
           <p:cNvPicPr>
             <a:picLocks noChangeAspect="1"/>
           </p:cNvPicPr>
@@ -3582,8 +3599,8 @@
         </p:blipFill>
         <p:spPr>
           <a:xfrm>
-            <a:off x="5120640" y="2028335"/>
-            <a:ext cx="6537960" cy="2334985"/>
+            <a:off x="5120640" y="1412748"/>
+            <a:ext cx="6537960" cy="3566160"/>
           </a:xfrm>
           <a:prstGeom prst="rect">
             <a:avLst/>
@@ -3630,7 +3647,7 @@
                 </a:solidFill>
                 <a:latin typeface="Calibri"/>
               </a:rPr>
-              <a:t>% of countries where each domain significantly predicts wellbeing at levels. ESS: 36 countries. HDI: 150 countries. SDG: country-indicator pairs.</a:t>
+              <a:t>Education's R² (% of countries significant at levels) across three frameworks. SDG4's pooled rate (3.3%) includes all 35 constructs; access alone reaches 12.7%.</a:t>
             </a:r>
           </a:p>
         </p:txBody>
@@ -3698,7 +3715,7 @@
                 </a:solidFill>
                 <a:latin typeface="Consolas"/>
               </a:rPr>
-              <a:t>RESULT 1 · EDUCATION</a:t>
+              <a:t>ACCESS CHECK · WHY EDUCATION'S RANK SWINGS</a:t>
             </a:r>
           </a:p>
         </p:txBody>
@@ -3743,7 +3760,7 @@
                 </a:solidFill>
                 <a:latin typeface="Georgia"/>
               </a:rPr>
-              <a:t>Significant in 92% of ESS countries, but only when measured as attainment</a:t>
+              <a:t>The difference between measuring attainment and measuring parity</a:t>
             </a:r>
           </a:p>
         </p:txBody>
@@ -3788,29 +3805,7 @@
                 </a:solidFill>
                 <a:latin typeface="Calibri"/>
               </a:rPr>
-              <a:t>Expected years of schooling predicts life satisfaction in 34% of HDI countries — the highest among the five HDI components, but still a minority. In the ESS individual data, education (measured as years attained) is significant in 92% of countries. The difference is not about the data; it is about which construct you count.</a:t>
-            </a:r>
-          </a:p>
-          <a:p>
-            <a:pPr>
-              <a:lnSpc>
-                <a:spcPct val="132000"/>
-              </a:lnSpc>
-              <a:spcBef>
-                <a:spcPts val="0"/>
-              </a:spcBef>
-              <a:spcAft>
-                <a:spcPts val="1100"/>
-              </a:spcAft>
-            </a:pPr>
-            <a:r>
-              <a:rPr sz="1150" b="0" i="0">
-                <a:solidFill>
-                  <a:srgbClr val="5A6068"/>
-                </a:solidFill>
-                <a:latin typeface="Calibri"/>
-              </a:rPr>
-              <a:t>The SDG framework's education goal is 35 indicators spanning access, attainment, equity (parity ratios), learning outcomes, infrastructure, and financing. Pooled, 3.3% of country-indicator pairs are significant. But access indicators alone (primary and secondary enrollment, completion rates) reach 12.7% — because they measure participation, the closest SDG analogue to HDI attainment. Parity ratios, learning outcomes, and infrastructure contribute little to wellbeing, so pooling them masks the signal from access.</a:t>
+              <a:t>When the SDG framework pools constructs, it weights all equally by series count. Parity ratios are 18 of 35 series but carry almost no signal for wellbeing. Learning outcomes (6 series, 0.9% significant), infrastructure (7 series, 2.0%), and financing (1 series, 11.5%) together drive the pooled rate below what access alone achieves. This is not a discovery about education; it is a mechanical artifact of construction.</a:t>
             </a:r>
           </a:p>
         </p:txBody>
@@ -3859,7 +3854,7 @@
       </p:sp>
       <p:pic>
         <p:nvPicPr>
-          <p:cNvPr id="6" name="Picture 5" descr="education_levels_comparison.png"/>
+          <p:cNvPr id="6" name="Picture 5" descr="sdg4_unpooled.png"/>
           <p:cNvPicPr>
             <a:picLocks noChangeAspect="1"/>
           </p:cNvPicPr>
@@ -3873,8 +3868,8 @@
         </p:blipFill>
         <p:spPr>
           <a:xfrm>
-            <a:off x="5120640" y="1412748"/>
-            <a:ext cx="6537960" cy="3566160"/>
+            <a:off x="5120640" y="1103208"/>
+            <a:ext cx="6537960" cy="4185240"/>
           </a:xfrm>
           <a:prstGeom prst="rect">
             <a:avLst/>
@@ -3921,7 +3916,7 @@
                 </a:solidFill>
                 <a:latin typeface="Calibri"/>
               </a:rPr>
-              <a:t>Education's R² (% of countries significant at levels) across three frameworks. SDG4's pooled rate (3.3%) includes all 35 constructs; access alone reaches 12.7%.</a:t>
+              <a:t>SDG4 by construct: access and participation (12.7%) vs. equity/parity ratios (2.5%), learning outcomes (0.9%), and others.</a:t>
             </a:r>
           </a:p>
         </p:txBody>
@@ -3989,7 +3984,7 @@
                 </a:solidFill>
                 <a:latin typeface="Consolas"/>
               </a:rPr>
-              <a:t>ACCESS CHECK · WHY EDUCATION'S RANK SWINGS</a:t>
+              <a:t>RESULT 2 · HEALTH</a:t>
             </a:r>
           </a:p>
         </p:txBody>
@@ -4034,7 +4029,7 @@
                 </a:solidFill>
                 <a:latin typeface="Georgia"/>
               </a:rPr>
-              <a:t>The difference between measuring attainment and measuring parity</a:t>
+              <a:t>Significant in 100% of ESS countries, weak in the HDI, strong in the SDGs</a:t>
             </a:r>
           </a:p>
         </p:txBody>
@@ -4073,13 +4068,35 @@
               </a:spcAft>
             </a:pPr>
             <a:r>
-              <a:rPr sz="1150" b="0" i="0">
+              <a:rPr sz="1050" b="0" i="0">
                 <a:solidFill>
                   <a:srgbClr val="5A6068"/>
                 </a:solidFill>
                 <a:latin typeface="Calibri"/>
               </a:rPr>
-              <a:t>When the SDG framework pools constructs, it weights all equally by series count. Parity ratios are 18 of 35 series but carry almost no signal for wellbeing. Learning outcomes (6 series, 0.9% significant), infrastructure (7 series, 2.0%), and financing (1 series, 11.5%) together drive the pooled rate below what access alone achieves. This is not a discovery about education; it is a mechanical artifact of construction.</a:t>
+              <a:t>Self-rated health is the single strongest predictor of life satisfaction in the ESS: 100% of countries significant at the individual level, median R² = 0.091 (four times education's). In the HDI, health's proxy is life expectancy, and it is the weakest of five components — only 20% of countries significant. In the SDG database, health (Goal 3) reaches 11.5% of country-indicator pairs, fourth of 17 goals.</a:t>
+            </a:r>
+          </a:p>
+          <a:p>
+            <a:pPr>
+              <a:lnSpc>
+                <a:spcPct val="132000"/>
+              </a:lnSpc>
+              <a:spcBef>
+                <a:spcPts val="0"/>
+              </a:spcBef>
+              <a:spcAft>
+                <a:spcPts val="1100"/>
+              </a:spcAft>
+            </a:pPr>
+            <a:r>
+              <a:rPr sz="1050" b="0" i="0">
+                <a:solidFill>
+                  <a:srgbClr val="5A6068"/>
+                </a:solidFill>
+                <a:latin typeface="Calibri"/>
+              </a:rPr>
+              <a:t>Life expectancy is close to saturated in developed countries: the top 100 countries range from 81 to 85 years. The variance that remains is so small that between-country differences add little predictive power. This is not health's problem; it is the specific HDI indicator's problem. Within the SDG database's vast landscape of 661 series across 42 countries, health indicators dominate the top-ranked individual series, with 16 of the top 25 most predictive SDG series falling under Goal 3 — survival measures like infant mortality, under-five mortality, stunting, and sanitation. The low 11.5% rate for health is not evidence that health doesn't matter; it is evidence that most of the SDG database does not predict wellbeing. Within that context, health ranks high.</a:t>
             </a:r>
           </a:p>
         </p:txBody>
@@ -4128,7 +4145,7 @@
       </p:sp>
       <p:pic>
         <p:nvPicPr>
-          <p:cNvPr id="6" name="Picture 5" descr="sdg4_unpooled.png"/>
+          <p:cNvPr id="6" name="Picture 5" descr="health_levels_comparison.png"/>
           <p:cNvPicPr>
             <a:picLocks noChangeAspect="1"/>
           </p:cNvPicPr>
@@ -4142,8 +4159,8 @@
         </p:blipFill>
         <p:spPr>
           <a:xfrm>
-            <a:off x="5120640" y="1103208"/>
-            <a:ext cx="6537960" cy="4185240"/>
+            <a:off x="5120640" y="1234440"/>
+            <a:ext cx="6537960" cy="3922776"/>
           </a:xfrm>
           <a:prstGeom prst="rect">
             <a:avLst/>
@@ -4190,7 +4207,7 @@
                 </a:solidFill>
                 <a:latin typeface="Calibri"/>
               </a:rPr>
-              <a:t>SDG4 by construct: access and participation (12.7%) vs. equity/parity ratios (2.5%), learning outcomes (0.9%), and others.</a:t>
+              <a:t>Health's R² (% of countries significant at levels) across three frameworks. Self-rated health in ESS dominates; external HDI proxy (life expectancy) is weak.</a:t>
             </a:r>
           </a:p>
         </p:txBody>
@@ -4258,7 +4275,7 @@
                 </a:solidFill>
                 <a:latin typeface="Consolas"/>
               </a:rPr>
-              <a:t>RESULT 2 · HEALTH</a:t>
+              <a:t>RESULT 3 · SOCIAL TRUST</a:t>
             </a:r>
           </a:p>
         </p:txBody>
@@ -4303,7 +4320,7 @@
                 </a:solidFill>
                 <a:latin typeface="Georgia"/>
               </a:rPr>
-              <a:t>Significant in 100% of ESS countries, weak in the HDI, strong in the SDGs</a:t>
+              <a:t>Social trust leads the ESS, is nearly invisible to development frameworks</a:t>
             </a:r>
           </a:p>
         </p:txBody>
@@ -4342,13 +4359,13 @@
               </a:spcAft>
             </a:pPr>
             <a:r>
-              <a:rPr sz="1150" b="0" i="0">
+              <a:rPr sz="950" b="0" i="0">
                 <a:solidFill>
                   <a:srgbClr val="5A6068"/>
                 </a:solidFill>
                 <a:latin typeface="Calibri"/>
               </a:rPr>
-              <a:t>Self-rated health is the single strongest predictor of life satisfaction in the ESS: 100% of countries significant at the individual level, median R² = 0.091 (four times education's). In the HDI, health's proxy is life expectancy, and it is the weakest of five components — only 20% of countries significant. In the SDG database, health (Goal 3) reaches 11.5% of country-indicator pairs, fourth of 17 goals.</a:t>
+              <a:t>Social trust — 'most people can be trusted' — is significant in 94% of ESS countries, third strongest domain after health and income, with median R² = 0.041. Neither the HDI nor the SDG framework measures it at all.</a:t>
             </a:r>
           </a:p>
           <a:p>
@@ -4364,13 +4381,35 @@
               </a:spcAft>
             </a:pPr>
             <a:r>
-              <a:rPr sz="1150" b="0" i="0">
+              <a:rPr sz="950" b="0" i="0">
                 <a:solidFill>
                   <a:srgbClr val="5A6068"/>
                 </a:solidFill>
                 <a:latin typeface="Calibri"/>
               </a:rPr>
-              <a:t>Life expectancy is close to saturated in developed countries: the top 100 countries range from 81 to 85 years. The variance that remains is so small that between-country differences add little predictive power. This is not health's problem; it is the specific HDI indicator's problem. The gap between frameworks shows the importance of variable choice, not of health itself.</a:t>
+              <a:t>The SDG database does carry 13 trust- and satisfaction-adjacent series under Goal 16, but the detail reveals why they fail to capture interpersonal trust. First, coverage: only nine of thirteen can be tested across countries, and four are significant — weaker than the development indicators the frameworks already carry. Second, construct: bribery (individuals and firms) and decision-making inclusiveness predict wellbeing; satisfaction with healthcare, government services, and secondary education do not. These measure institutional confidence, not interpersonal trust. Third, when you control for income — net of log GNI per capita — nearly all SDG trust series disappear. This is a known artifact of subjective institutional scales; interpersonal trust, by contrast, shows robust signal independent of income controls.</a:t>
+            </a:r>
+          </a:p>
+          <a:p>
+            <a:pPr>
+              <a:lnSpc>
+                <a:spcPct val="132000"/>
+              </a:lnSpc>
+              <a:spcBef>
+                <a:spcPts val="0"/>
+              </a:spcBef>
+              <a:spcAft>
+                <a:spcPts val="1100"/>
+              </a:spcAft>
+            </a:pPr>
+            <a:r>
+              <a:rPr sz="950" b="0" i="0">
+                <a:solidFill>
+                  <a:srgbClr val="5A6068"/>
+                </a:solidFill>
+                <a:latin typeface="Calibri"/>
+              </a:rPr>
+              <a:t>Education's and health's problems are about which variable to count within a domain. Trust's problem is different: it is not in the frameworks at all. That is a coverage gap that cannot be fixed by choosing the right variable, because no variable was ever measured.</a:t>
             </a:r>
           </a:p>
         </p:txBody>
@@ -4419,7 +4458,7 @@
       </p:sp>
       <p:pic>
         <p:nvPicPr>
-          <p:cNvPr id="6" name="Picture 5" descr="health_levels_comparison.png"/>
+          <p:cNvPr id="6" name="Picture 5" descr="K1_sdg_trust_cross_section.png"/>
           <p:cNvPicPr>
             <a:picLocks noChangeAspect="1"/>
           </p:cNvPicPr>
@@ -4433,8 +4472,8 @@
         </p:blipFill>
         <p:spPr>
           <a:xfrm>
-            <a:off x="5120640" y="1234440"/>
-            <a:ext cx="6537960" cy="3922776"/>
+            <a:off x="5120640" y="1690377"/>
+            <a:ext cx="6537960" cy="3010902"/>
           </a:xfrm>
           <a:prstGeom prst="rect">
             <a:avLst/>
@@ -4481,7 +4520,7 @@
                 </a:solidFill>
                 <a:latin typeface="Calibri"/>
               </a:rPr>
-              <a:t>Health's R² (% of countries significant at levels) across three frameworks. Self-rated health in ESS dominates; external HDI proxy (life expectancy) is weak.</a:t>
+              <a:t>SDG16 trust series can barely be tested (9 of 13 measurable, 4 significant) and collapse when controlled for income. Interpersonal trust only appears in ESS.</a:t>
             </a:r>
           </a:p>
         </p:txBody>
@@ -4549,7 +4588,7 @@
                 </a:solidFill>
                 <a:latin typeface="Consolas"/>
               </a:rPr>
-              <a:t>SDG INDICATOR RANKINGS · WHY HEALTH MATTERS DESPITE LOW %</a:t>
+              <a:t>SYNTHESIS</a:t>
             </a:r>
           </a:p>
         </p:txBody>
@@ -4594,7 +4633,7 @@
                 </a:solidFill>
                 <a:latin typeface="Georgia"/>
               </a:rPr>
-              <a:t>Health indicators rank 4th among 17 SDG goals; the low percentage reflects weak overall SDG signal</a:t>
+              <a:t>Three domains, three frameworks, three different blind spots</a:t>
             </a:r>
           </a:p>
         </p:txBody>
@@ -4633,13 +4672,13 @@
               </a:spcAft>
             </a:pPr>
             <a:r>
-              <a:rPr sz="1150" b="0" i="0">
+              <a:rPr sz="1100" b="0" i="0">
                 <a:solidFill>
                   <a:srgbClr val="5A6068"/>
                 </a:solidFill>
                 <a:latin typeface="Calibri"/>
               </a:rPr>
-              <a:t>The SDG database is vast: 661 series across 42 countries testing 17 goals. The overall significance rate is low — only 3-4% of all country-indicator pairs are significant. At the goal level, health (Goal 3) reaches 11.5% of country-indicator pairs, ranking fourth of 17 goals. Within that sparse landscape, health indicators dominate the top-ranked individual series, with 16 of the top 25 most predictive SDG series falling under Goal 3. These are survival measures: infant mortality, under-five mortality, stunting, neonatal mortality, sanitation, drinking water — all objective, externally measured.</a:t>
+              <a:t>Education's rank depends on which construct you count: attainment works, but parity ratios and learning outcomes do not, so pooling dilutes the signal. Health's rank depends on whether your chosen variable still varies: life expectancy does not, but self-rated health does, so the HDI's choice costs it. Social trust's rank is zero because it is not collected at scale in development frameworks at all — a coverage gap that cannot be fixed by choosing the right variable, because no variable was ever measured.</a:t>
             </a:r>
           </a:p>
           <a:p>
@@ -4655,13 +4694,13 @@
               </a:spcAft>
             </a:pPr>
             <a:r>
-              <a:rPr sz="1150" b="0" i="0">
+              <a:rPr sz="1100" b="0" i="0">
                 <a:solidFill>
                   <a:srgbClr val="5A6068"/>
                 </a:solidFill>
                 <a:latin typeface="Calibri"/>
               </a:rPr>
-              <a:t>The low 11.5% rate for health is not evidence that health doesn't matter. It is evidence that most of the SDG database does not predict wellbeing. Within that context, health ranks high.</a:t>
+              <a:t>These are not criticisms of the frameworks; they were built to track development, and they do. Education is testable in all three frameworks but its rank depends entirely on which construct was chosen. Health is testable everywhere and leads wherever it is measured something that still varies — a robust signal despite the HDI's proxy choice. Social trust is testable in one instrument only: the ESS, where it emerges as third strongest. It does not appear in the HDI at all, and the SDG framework measures institutional confidence instead, a different construct entirely.</a:t>
             </a:r>
           </a:p>
         </p:txBody>
@@ -4710,7 +4749,7 @@
       </p:sp>
       <p:pic>
         <p:nvPicPr>
-          <p:cNvPr id="6" name="Picture 5" descr="sdg_indicator_top20.png"/>
+          <p:cNvPr id="6" name="Picture 5" descr="domain_scorecard.png"/>
           <p:cNvPicPr>
             <a:picLocks noChangeAspect="1"/>
           </p:cNvPicPr>
@@ -4724,8 +4763,8 @@
         </p:blipFill>
         <p:spPr>
           <a:xfrm>
-            <a:off x="5279547" y="658368"/>
-            <a:ext cx="6220145" cy="5074920"/>
+            <a:off x="5120640" y="1469807"/>
+            <a:ext cx="6537960" cy="3452042"/>
           </a:xfrm>
           <a:prstGeom prst="rect">
             <a:avLst/>
@@ -4772,7 +4811,7 @@
                 </a:solidFill>
                 <a:latin typeface="Calibri"/>
               </a:rPr>
-              <a:t>Top 25 SDG indicators by significance. Health (Goal 3) dominates: 16 of 25 top series.</a:t>
+              <a:t>Which frameworks can test each domain (green = tracks wellbeing, yellow = measurable but weak signal, gray = framework cannot test it).</a:t>
             </a:r>
           </a:p>
         </p:txBody>
@@ -4791,7 +4830,7 @@
     <p:bg>
       <p:bgPr>
         <a:solidFill>
-          <a:srgbClr val="FCFCFB"/>
+          <a:srgbClr val="E8EBEF"/>
         </a:solidFill>
         <a:effectLst/>
       </p:bgPr>
@@ -4805,56 +4844,100 @@
       <p:grpSpPr/>
       <p:sp>
         <p:nvSpPr>
-          <p:cNvPr id="2" name="TextBox 1"/>
-          <p:cNvSpPr txBox="1"/>
-          <p:nvPr/>
-        </p:nvSpPr>
-        <p:spPr>
-          <a:xfrm>
-            <a:off x="566928" y="502920"/>
-            <a:ext cx="4160520" cy="274320"/>
-          </a:xfrm>
-          <a:prstGeom prst="rect">
-            <a:avLst/>
-          </a:prstGeom>
-          <a:noFill/>
-        </p:spPr>
-        <p:txBody>
-          <a:bodyPr wrap="square" lIns="0" rIns="0" tIns="0" bIns="0">
-            <a:spAutoFit/>
-          </a:bodyPr>
-          <a:lstStyle/>
-          <a:p>
-            <a:pPr>
-              <a:spcBef>
-                <a:spcPts val="0"/>
-              </a:spcBef>
-              <a:spcAft>
-                <a:spcPts val="0"/>
-              </a:spcAft>
-            </a:pPr>
-            <a:r>
-              <a:rPr sz="1000" b="0" i="0">
-                <a:solidFill>
-                  <a:srgbClr val="A63A30"/>
+          <p:cNvPr id="2" name="Rectangle 1"/>
+          <p:cNvSpPr/>
+          <p:nvPr/>
+        </p:nvSpPr>
+        <p:spPr>
+          <a:xfrm>
+            <a:off x="566928" y="2103120"/>
+            <a:ext cx="54864" cy="2377440"/>
+          </a:xfrm>
+          <a:prstGeom prst="rect">
+            <a:avLst/>
+          </a:prstGeom>
+          <a:solidFill>
+            <a:srgbClr val="17549E"/>
+          </a:solidFill>
+          <a:ln>
+            <a:noFill/>
+          </a:ln>
+          <a:effectLst/>
+        </p:spPr>
+        <p:style>
+          <a:lnRef idx="1">
+            <a:schemeClr val="accent1"/>
+          </a:lnRef>
+          <a:fillRef idx="3">
+            <a:schemeClr val="accent1"/>
+          </a:fillRef>
+          <a:effectRef idx="2">
+            <a:schemeClr val="accent1"/>
+          </a:effectRef>
+          <a:fontRef idx="minor">
+            <a:schemeClr val="lt1"/>
+          </a:fontRef>
+        </p:style>
+        <p:txBody>
+          <a:bodyPr rtlCol="0" anchor="ctr"/>
+          <a:lstStyle/>
+          <a:p>
+            <a:pPr algn="ctr"/>
+          </a:p>
+        </p:txBody>
+      </p:sp>
+      <p:sp>
+        <p:nvSpPr>
+          <p:cNvPr id="3" name="TextBox 2"/>
+          <p:cNvSpPr txBox="1"/>
+          <p:nvPr/>
+        </p:nvSpPr>
+        <p:spPr>
+          <a:xfrm>
+            <a:off x="914400" y="1600200"/>
+            <a:ext cx="8686800" cy="274320"/>
+          </a:xfrm>
+          <a:prstGeom prst="rect">
+            <a:avLst/>
+          </a:prstGeom>
+          <a:noFill/>
+        </p:spPr>
+        <p:txBody>
+          <a:bodyPr wrap="square" lIns="0" rIns="0" tIns="0" bIns="0">
+            <a:spAutoFit/>
+          </a:bodyPr>
+          <a:lstStyle/>
+          <a:p>
+            <a:pPr>
+              <a:spcBef>
+                <a:spcPts val="0"/>
+              </a:spcBef>
+              <a:spcAft>
+                <a:spcPts val="0"/>
+              </a:spcAft>
+            </a:pPr>
+            <a:r>
+              <a:rPr sz="1100" b="0" i="0">
+                <a:solidFill>
+                  <a:srgbClr val="17549E"/>
                 </a:solidFill>
                 <a:latin typeface="Consolas"/>
               </a:rPr>
-              <a:t>RESULT 3 · SOCIAL TRUST</a:t>
-            </a:r>
-          </a:p>
-        </p:txBody>
-      </p:sp>
-      <p:sp>
-        <p:nvSpPr>
-          <p:cNvPr id="3" name="TextBox 2"/>
-          <p:cNvSpPr txBox="1"/>
-          <p:nvPr/>
-        </p:nvSpPr>
-        <p:spPr>
-          <a:xfrm>
-            <a:off x="566928" y="914400"/>
-            <a:ext cx="4160520" cy="1371600"/>
+              <a:t>WHERE ACT II LEAVES US</a:t>
+            </a:r>
+          </a:p>
+        </p:txBody>
+      </p:sp>
+      <p:sp>
+        <p:nvSpPr>
+          <p:cNvPr id="4" name="TextBox 3"/>
+          <p:cNvSpPr txBox="1"/>
+          <p:nvPr/>
+        </p:nvSpPr>
+        <p:spPr>
+          <a:xfrm>
+            <a:off x="914400" y="2148840"/>
+            <a:ext cx="9509760" cy="2926080"/>
           </a:xfrm>
           <a:prstGeom prst="rect">
             <a:avLst/>
@@ -4869,7 +4952,7 @@
           <a:p>
             <a:pPr>
               <a:lnSpc>
-                <a:spcPct val="108000"/>
+                <a:spcPct val="135000"/>
               </a:lnSpc>
               <a:spcBef>
                 <a:spcPts val="0"/>
@@ -4879,213 +4962,13 @@
               </a:spcAft>
             </a:pPr>
             <a:r>
-              <a:rPr sz="2300" b="0" i="0">
+              <a:rPr sz="2100" b="0" i="0">
                 <a:solidFill>
                   <a:srgbClr val="14171C"/>
                 </a:solidFill>
                 <a:latin typeface="Georgia"/>
               </a:rPr>
-              <a:t>Social trust leads the ESS, is nearly invisible to development frameworks</a:t>
-            </a:r>
-          </a:p>
-        </p:txBody>
-      </p:sp>
-      <p:sp>
-        <p:nvSpPr>
-          <p:cNvPr id="4" name="TextBox 3"/>
-          <p:cNvSpPr txBox="1"/>
-          <p:nvPr/>
-        </p:nvSpPr>
-        <p:spPr>
-          <a:xfrm>
-            <a:off x="566928" y="2331720"/>
-            <a:ext cx="4160520" cy="3840480"/>
-          </a:xfrm>
-          <a:prstGeom prst="rect">
-            <a:avLst/>
-          </a:prstGeom>
-          <a:noFill/>
-        </p:spPr>
-        <p:txBody>
-          <a:bodyPr wrap="square" lIns="0" rIns="0" tIns="0" bIns="0">
-            <a:spAutoFit/>
-          </a:bodyPr>
-          <a:lstStyle/>
-          <a:p>
-            <a:pPr>
-              <a:lnSpc>
-                <a:spcPct val="132000"/>
-              </a:lnSpc>
-              <a:spcBef>
-                <a:spcPts val="0"/>
-              </a:spcBef>
-              <a:spcAft>
-                <a:spcPts val="1100"/>
-              </a:spcAft>
-            </a:pPr>
-            <a:r>
-              <a:rPr sz="1150" b="0" i="0">
-                <a:solidFill>
-                  <a:srgbClr val="5A6068"/>
-                </a:solidFill>
-                <a:latin typeface="Calibri"/>
-              </a:rPr>
-              <a:t>Social trust — 'most people can be trusted' — is significant in 94% of ESS countries, third strongest domain after health and income, with median R² = 0.041. Neither the HDI nor the SDG framework measures it at all.</a:t>
-            </a:r>
-          </a:p>
-          <a:p>
-            <a:pPr>
-              <a:lnSpc>
-                <a:spcPct val="132000"/>
-              </a:lnSpc>
-              <a:spcBef>
-                <a:spcPts val="0"/>
-              </a:spcBef>
-              <a:spcAft>
-                <a:spcPts val="1100"/>
-              </a:spcAft>
-            </a:pPr>
-            <a:r>
-              <a:rPr sz="1150" b="0" i="0">
-                <a:solidFill>
-                  <a:srgbClr val="5A6068"/>
-                </a:solidFill>
-                <a:latin typeface="Calibri"/>
-              </a:rPr>
-              <a:t>The SDG database does carry 13 trust- and satisfaction-adjacent series under Goal 16: satisfaction with public services, perception of bribery, perceived decision-making inclusiveness. But these measure institutional confidence, not interpersonal trust — a different construct, and one that correlates more weakly with life satisfaction even when tested across countries. Moreover, their median coverage is one observation per country-series against six for the database as a whole; 147 of 163 country-series cannot support a time-series design.</a:t>
-            </a:r>
-          </a:p>
-          <a:p>
-            <a:pPr>
-              <a:lnSpc>
-                <a:spcPct val="132000"/>
-              </a:lnSpc>
-              <a:spcBef>
-                <a:spcPts val="0"/>
-              </a:spcBef>
-              <a:spcAft>
-                <a:spcPts val="1100"/>
-              </a:spcAft>
-            </a:pPr>
-            <a:r>
-              <a:rPr sz="1150" b="0" i="0">
-                <a:solidFill>
-                  <a:srgbClr val="5A6068"/>
-                </a:solidFill>
-                <a:latin typeface="Calibri"/>
-              </a:rPr>
-              <a:t>Education's and health's problems are about which variable to count within a domain. Trust's problem is different: it is not in the frameworks at all. That is a coverage gap, not a measurement problem.</a:t>
-            </a:r>
-          </a:p>
-        </p:txBody>
-      </p:sp>
-      <p:sp>
-        <p:nvSpPr>
-          <p:cNvPr id="5" name="TextBox 4"/>
-          <p:cNvSpPr txBox="1"/>
-          <p:nvPr/>
-        </p:nvSpPr>
-        <p:spPr>
-          <a:xfrm>
-            <a:off x="11338560" y="6263640"/>
-            <a:ext cx="548640" cy="274320"/>
-          </a:xfrm>
-          <a:prstGeom prst="rect">
-            <a:avLst/>
-          </a:prstGeom>
-          <a:noFill/>
-        </p:spPr>
-        <p:txBody>
-          <a:bodyPr wrap="square" lIns="0" rIns="0" tIns="0" bIns="0">
-            <a:spAutoFit/>
-          </a:bodyPr>
-          <a:lstStyle/>
-          <a:p>
-            <a:pPr algn="r">
-              <a:spcBef>
-                <a:spcPts val="0"/>
-              </a:spcBef>
-              <a:spcAft>
-                <a:spcPts val="0"/>
-              </a:spcAft>
-            </a:pPr>
-            <a:r>
-              <a:rPr sz="1100" b="0" i="0">
-                <a:solidFill>
-                  <a:srgbClr val="868D96"/>
-                </a:solidFill>
-                <a:latin typeface="Consolas"/>
-              </a:rPr>
-              <a:t>II</a:t>
-            </a:r>
-          </a:p>
-        </p:txBody>
-      </p:sp>
-      <p:pic>
-        <p:nvPicPr>
-          <p:cNvPr id="6" name="Picture 5" descr="trust_coverage_comparison.png"/>
-          <p:cNvPicPr>
-            <a:picLocks noChangeAspect="1"/>
-          </p:cNvPicPr>
-          <p:nvPr/>
-        </p:nvPicPr>
-        <p:blipFill>
-          <a:blip r:embed="rId2"/>
-          <a:stretch>
-            <a:fillRect/>
-          </a:stretch>
-        </p:blipFill>
-        <p:spPr>
-          <a:xfrm>
-            <a:off x="5120640" y="1234440"/>
-            <a:ext cx="6537960" cy="3922776"/>
-          </a:xfrm>
-          <a:prstGeom prst="rect">
-            <a:avLst/>
-          </a:prstGeom>
-        </p:spPr>
-      </p:pic>
-      <p:sp>
-        <p:nvSpPr>
-          <p:cNvPr id="7" name="TextBox 6"/>
-          <p:cNvSpPr txBox="1"/>
-          <p:nvPr/>
-        </p:nvSpPr>
-        <p:spPr>
-          <a:xfrm>
-            <a:off x="5120640" y="5897880"/>
-            <a:ext cx="6537960" cy="731520"/>
-          </a:xfrm>
-          <a:prstGeom prst="rect">
-            <a:avLst/>
-          </a:prstGeom>
-          <a:noFill/>
-        </p:spPr>
-        <p:txBody>
-          <a:bodyPr wrap="square" lIns="0" rIns="0" tIns="0" bIns="0">
-            <a:spAutoFit/>
-          </a:bodyPr>
-          <a:lstStyle/>
-          <a:p>
-            <a:pPr>
-              <a:lnSpc>
-                <a:spcPct val="125000"/>
-              </a:lnSpc>
-              <a:spcBef>
-                <a:spcPts val="0"/>
-              </a:spcBef>
-              <a:spcAft>
-                <a:spcPts val="0"/>
-              </a:spcAft>
-            </a:pPr>
-            <a:r>
-              <a:rPr sz="900" b="0" i="0">
-                <a:solidFill>
-                  <a:srgbClr val="868D96"/>
-                </a:solidFill>
-                <a:latin typeface="Calibri"/>
-              </a:rPr>
-              <a:t>Social trust: 94% of ESS countries significant (individual level), 1.5% of SDG16 country-indicator pairs (institutional confidence, not interpersonal trust), not measured in the HDI.</a:t>
+              <a:t>The problem is not the domains; the problem is the measurement. Frameworks designed for development, with aggregate indicators measured at long intervals, structurally cannot see what matters for individual lived experience.</a:t>
             </a:r>
           </a:p>
         </p:txBody>
@@ -5104,7 +4987,7 @@
     <p:bg>
       <p:bgPr>
         <a:solidFill>
-          <a:srgbClr val="FCFCFB"/>
+          <a:srgbClr val="14171C"/>
         </a:solidFill>
         <a:effectLst/>
       </p:bgPr>
@@ -5124,21 +5007,261 @@
         </p:nvSpPr>
         <p:spPr>
           <a:xfrm>
-            <a:off x="566928" y="502920"/>
-            <a:ext cx="4160520" cy="274320"/>
-          </a:xfrm>
-          <a:prstGeom prst="rect">
-            <a:avLst/>
-          </a:prstGeom>
-          <a:noFill/>
-        </p:spPr>
-        <p:txBody>
-          <a:bodyPr wrap="square" lIns="0" rIns="0" tIns="0" bIns="0">
-            <a:spAutoFit/>
-          </a:bodyPr>
-          <a:lstStyle/>
-          <a:p>
-            <a:pPr>
+            <a:off x="8229600" y="822960"/>
+            <a:ext cx="3291840" cy="4114800"/>
+          </a:xfrm>
+          <a:prstGeom prst="rect">
+            <a:avLst/>
+          </a:prstGeom>
+          <a:noFill/>
+        </p:spPr>
+        <p:txBody>
+          <a:bodyPr wrap="square" lIns="0" rIns="0" tIns="0" bIns="0">
+            <a:spAutoFit/>
+          </a:bodyPr>
+          <a:lstStyle/>
+          <a:p>
+            <a:pPr algn="r">
+              <a:spcBef>
+                <a:spcPts val="0"/>
+              </a:spcBef>
+              <a:spcAft>
+                <a:spcPts val="0"/>
+              </a:spcAft>
+            </a:pPr>
+            <a:r>
+              <a:rPr sz="20000" b="0" i="0">
+                <a:solidFill>
+                  <a:srgbClr val="2A3340"/>
+                </a:solidFill>
+                <a:latin typeface="Georgia"/>
+              </a:rPr>
+              <a:t>III</a:t>
+            </a:r>
+          </a:p>
+        </p:txBody>
+      </p:sp>
+      <p:sp>
+        <p:nvSpPr>
+          <p:cNvPr id="3" name="Rectangle 2"/>
+          <p:cNvSpPr/>
+          <p:nvPr/>
+        </p:nvSpPr>
+        <p:spPr>
+          <a:xfrm>
+            <a:off x="566928" y="1371600"/>
+            <a:ext cx="7315200" cy="25400"/>
+          </a:xfrm>
+          <a:prstGeom prst="rect">
+            <a:avLst/>
+          </a:prstGeom>
+          <a:solidFill>
+            <a:srgbClr val="C9D8EC"/>
+          </a:solidFill>
+          <a:ln>
+            <a:noFill/>
+          </a:ln>
+          <a:effectLst/>
+        </p:spPr>
+        <p:style>
+          <a:lnRef idx="1">
+            <a:schemeClr val="accent1"/>
+          </a:lnRef>
+          <a:fillRef idx="3">
+            <a:schemeClr val="accent1"/>
+          </a:fillRef>
+          <a:effectRef idx="2">
+            <a:schemeClr val="accent1"/>
+          </a:effectRef>
+          <a:fontRef idx="minor">
+            <a:schemeClr val="lt1"/>
+          </a:fontRef>
+        </p:style>
+        <p:txBody>
+          <a:bodyPr rtlCol="0" anchor="ctr"/>
+          <a:lstStyle/>
+          <a:p>
+            <a:pPr algn="ctr"/>
+          </a:p>
+        </p:txBody>
+      </p:sp>
+      <p:sp>
+        <p:nvSpPr>
+          <p:cNvPr id="4" name="TextBox 3"/>
+          <p:cNvSpPr txBox="1"/>
+          <p:nvPr/>
+        </p:nvSpPr>
+        <p:spPr>
+          <a:xfrm>
+            <a:off x="566928" y="960120"/>
+            <a:ext cx="5486400" cy="274320"/>
+          </a:xfrm>
+          <a:prstGeom prst="rect">
+            <a:avLst/>
+          </a:prstGeom>
+          <a:noFill/>
+        </p:spPr>
+        <p:txBody>
+          <a:bodyPr wrap="square" lIns="0" rIns="0" tIns="0" bIns="0">
+            <a:spAutoFit/>
+          </a:bodyPr>
+          <a:lstStyle/>
+          <a:p>
+            <a:pPr>
+              <a:spcBef>
+                <a:spcPts val="0"/>
+              </a:spcBef>
+              <a:spcAft>
+                <a:spcPts val="0"/>
+              </a:spcAft>
+            </a:pPr>
+            <a:r>
+              <a:rPr sz="1100" b="0" i="0">
+                <a:solidFill>
+                  <a:srgbClr val="C9D8EC"/>
+                </a:solidFill>
+                <a:latin typeface="Consolas"/>
+              </a:rPr>
+              <a:t>ACT III</a:t>
+            </a:r>
+          </a:p>
+        </p:txBody>
+      </p:sp>
+      <p:sp>
+        <p:nvSpPr>
+          <p:cNvPr id="5" name="TextBox 4"/>
+          <p:cNvSpPr txBox="1"/>
+          <p:nvPr/>
+        </p:nvSpPr>
+        <p:spPr>
+          <a:xfrm>
+            <a:off x="566928" y="1783080"/>
+            <a:ext cx="7223760" cy="1828800"/>
+          </a:xfrm>
+          <a:prstGeom prst="rect">
+            <a:avLst/>
+          </a:prstGeom>
+          <a:noFill/>
+        </p:spPr>
+        <p:txBody>
+          <a:bodyPr wrap="square" lIns="0" rIns="0" tIns="0" bIns="0">
+            <a:spAutoFit/>
+          </a:bodyPr>
+          <a:lstStyle/>
+          <a:p>
+            <a:pPr>
+              <a:lnSpc>
+                <a:spcPct val="102000"/>
+              </a:lnSpc>
+              <a:spcBef>
+                <a:spcPts val="0"/>
+              </a:spcBef>
+              <a:spcAft>
+                <a:spcPts val="0"/>
+              </a:spcAft>
+            </a:pPr>
+            <a:r>
+              <a:rPr sz="4000" b="0" i="0">
+                <a:solidFill>
+                  <a:srgbClr val="FCFCFB"/>
+                </a:solidFill>
+                <a:latin typeface="Georgia"/>
+              </a:rPr>
+              <a:t>Within-country evidence: Why measurement type matters</a:t>
+            </a:r>
+          </a:p>
+        </p:txBody>
+      </p:sp>
+      <p:sp>
+        <p:nvSpPr>
+          <p:cNvPr id="6" name="TextBox 5"/>
+          <p:cNvSpPr txBox="1"/>
+          <p:nvPr/>
+        </p:nvSpPr>
+        <p:spPr>
+          <a:xfrm>
+            <a:off x="566928" y="3886200"/>
+            <a:ext cx="6766560" cy="1463040"/>
+          </a:xfrm>
+          <a:prstGeom prst="rect">
+            <a:avLst/>
+          </a:prstGeom>
+          <a:noFill/>
+        </p:spPr>
+        <p:txBody>
+          <a:bodyPr wrap="square" lIns="0" rIns="0" tIns="0" bIns="0">
+            <a:spAutoFit/>
+          </a:bodyPr>
+          <a:lstStyle/>
+          <a:p>
+            <a:pPr>
+              <a:lnSpc>
+                <a:spcPct val="135000"/>
+              </a:lnSpc>
+              <a:spcBef>
+                <a:spcPts val="0"/>
+              </a:spcBef>
+              <a:spcAft>
+                <a:spcPts val="0"/>
+              </a:spcAft>
+            </a:pPr>
+            <a:r>
+              <a:rPr sz="1275" b="0" i="1">
+                <a:solidFill>
+                  <a:srgbClr val="9AA4B0"/>
+                </a:solidFill>
+                <a:latin typeface="Georgia"/>
+              </a:rPr>
+              <a:t>Individual-level, self-reported data shows a fundamentally different pattern. Unlike administrative development frameworks, ESS captures year-to-year variation within countries. This is not a measurement failure; it is a structural consequence of how development is measured — at the country level, with long intervals. Social trust emerges not because frameworks miss it, but because development frameworks measure at the wrong temporal and individual resolution where trust varies.</a:t>
+            </a:r>
+          </a:p>
+        </p:txBody>
+      </p:sp>
+      <p:sp>
+        <p:nvSpPr>
+          <p:cNvPr id="7" name="TextBox 6"/>
+          <p:cNvSpPr txBox="1"/>
+          <p:nvPr/>
+        </p:nvSpPr>
+        <p:spPr>
+          <a:xfrm>
+            <a:off x="566928" y="5623560"/>
+            <a:ext cx="3503066" cy="914400"/>
+          </a:xfrm>
+          <a:prstGeom prst="rect">
+            <a:avLst/>
+          </a:prstGeom>
+          <a:noFill/>
+        </p:spPr>
+        <p:txBody>
+          <a:bodyPr wrap="square" lIns="0" rIns="0" tIns="0" bIns="0">
+            <a:spAutoFit/>
+          </a:bodyPr>
+          <a:lstStyle/>
+          <a:p>
+            <a:pPr>
+              <a:spcBef>
+                <a:spcPts val="0"/>
+              </a:spcBef>
+              <a:spcAft>
+                <a:spcPts val="400"/>
+              </a:spcAft>
+            </a:pPr>
+            <a:r>
+              <a:rPr sz="2200" b="0" i="0">
+                <a:solidFill>
+                  <a:srgbClr val="FCFCFB"/>
+                </a:solidFill>
+                <a:latin typeface="Consolas"/>
+              </a:rPr>
+              <a:t>69% → 64%</a:t>
+            </a:r>
+          </a:p>
+          <a:p>
+            <a:pPr>
+              <a:lnSpc>
+                <a:spcPct val="120000"/>
+              </a:lnSpc>
               <a:spcBef>
                 <a:spcPts val="0"/>
               </a:spcBef>
@@ -5149,40 +5272,59 @@
             <a:r>
               <a:rPr sz="1000" b="0" i="0">
                 <a:solidFill>
-                  <a:srgbClr val="A63A30"/>
+                  <a:srgbClr val="8A94A0"/>
+                </a:solidFill>
+                <a:latin typeface="Calibri"/>
+              </a:rPr>
+              <a:t>ESS levels → differences (NOT collapsed)</a:t>
+            </a:r>
+          </a:p>
+        </p:txBody>
+      </p:sp>
+      <p:sp>
+        <p:nvSpPr>
+          <p:cNvPr id="8" name="TextBox 7"/>
+          <p:cNvSpPr txBox="1"/>
+          <p:nvPr/>
+        </p:nvSpPr>
+        <p:spPr>
+          <a:xfrm>
+            <a:off x="4344314" y="5623560"/>
+            <a:ext cx="3503066" cy="914400"/>
+          </a:xfrm>
+          <a:prstGeom prst="rect">
+            <a:avLst/>
+          </a:prstGeom>
+          <a:noFill/>
+        </p:spPr>
+        <p:txBody>
+          <a:bodyPr wrap="square" lIns="0" rIns="0" tIns="0" bIns="0">
+            <a:spAutoFit/>
+          </a:bodyPr>
+          <a:lstStyle/>
+          <a:p>
+            <a:pPr>
+              <a:spcBef>
+                <a:spcPts val="0"/>
+              </a:spcBef>
+              <a:spcAft>
+                <a:spcPts val="400"/>
+              </a:spcAft>
+            </a:pPr>
+            <a:r>
+              <a:rPr sz="2200" b="0" i="0">
+                <a:solidFill>
+                  <a:srgbClr val="FCFCFB"/>
                 </a:solidFill>
                 <a:latin typeface="Consolas"/>
               </a:rPr>
-              <a:t>SYNTHESIS</a:t>
-            </a:r>
-          </a:p>
-        </p:txBody>
-      </p:sp>
-      <p:sp>
-        <p:nvSpPr>
-          <p:cNvPr id="3" name="TextBox 2"/>
-          <p:cNvSpPr txBox="1"/>
-          <p:nvPr/>
-        </p:nvSpPr>
-        <p:spPr>
-          <a:xfrm>
-            <a:off x="566928" y="914400"/>
-            <a:ext cx="4160520" cy="1371600"/>
-          </a:xfrm>
-          <a:prstGeom prst="rect">
-            <a:avLst/>
-          </a:prstGeom>
-          <a:noFill/>
-        </p:spPr>
-        <p:txBody>
-          <a:bodyPr wrap="square" lIns="0" rIns="0" tIns="0" bIns="0">
-            <a:spAutoFit/>
-          </a:bodyPr>
-          <a:lstStyle/>
+              <a:t>71% → 5%</a:t>
+            </a:r>
+          </a:p>
           <a:p>
             <a:pPr>
               <a:lnSpc>
-                <a:spcPct val="108000"/>
+                <a:spcPct val="120000"/>
               </a:lnSpc>
               <a:spcBef>
                 <a:spcPts val="0"/>
@@ -5192,191 +5334,77 @@
               </a:spcAft>
             </a:pPr>
             <a:r>
-              <a:rPr sz="2300" b="0" i="0">
-                <a:solidFill>
-                  <a:srgbClr val="14171C"/>
-                </a:solidFill>
-                <a:latin typeface="Georgia"/>
-              </a:rPr>
-              <a:t>Three domains, three ways frameworks lose sight of what matters</a:t>
-            </a:r>
-          </a:p>
-        </p:txBody>
-      </p:sp>
-      <p:sp>
-        <p:nvSpPr>
-          <p:cNvPr id="4" name="TextBox 3"/>
-          <p:cNvSpPr txBox="1"/>
-          <p:nvPr/>
-        </p:nvSpPr>
-        <p:spPr>
-          <a:xfrm>
-            <a:off x="566928" y="2331720"/>
-            <a:ext cx="4160520" cy="3840480"/>
-          </a:xfrm>
-          <a:prstGeom prst="rect">
-            <a:avLst/>
-          </a:prstGeom>
-          <a:noFill/>
-        </p:spPr>
-        <p:txBody>
-          <a:bodyPr wrap="square" lIns="0" rIns="0" tIns="0" bIns="0">
-            <a:spAutoFit/>
-          </a:bodyPr>
-          <a:lstStyle/>
+              <a:rPr sz="1000" b="0" i="0">
+                <a:solidFill>
+                  <a:srgbClr val="8A94A0"/>
+                </a:solidFill>
+                <a:latin typeface="Calibri"/>
+              </a:rPr>
+              <a:t>SDG levels → differences (collapsed)</a:t>
+            </a:r>
+          </a:p>
+        </p:txBody>
+      </p:sp>
+      <p:sp>
+        <p:nvSpPr>
+          <p:cNvPr id="9" name="TextBox 8"/>
+          <p:cNvSpPr txBox="1"/>
+          <p:nvPr/>
+        </p:nvSpPr>
+        <p:spPr>
+          <a:xfrm>
+            <a:off x="8121700" y="5623560"/>
+            <a:ext cx="3503066" cy="914400"/>
+          </a:xfrm>
+          <a:prstGeom prst="rect">
+            <a:avLst/>
+          </a:prstGeom>
+          <a:noFill/>
+        </p:spPr>
+        <p:txBody>
+          <a:bodyPr wrap="square" lIns="0" rIns="0" tIns="0" bIns="0">
+            <a:spAutoFit/>
+          </a:bodyPr>
+          <a:lstStyle/>
+          <a:p>
+            <a:pPr>
+              <a:spcBef>
+                <a:spcPts val="0"/>
+              </a:spcBef>
+              <a:spcAft>
+                <a:spcPts val="400"/>
+              </a:spcAft>
+            </a:pPr>
+            <a:r>
+              <a:rPr sz="2200" b="0" i="0">
+                <a:solidFill>
+                  <a:srgbClr val="FCFCFB"/>
+                </a:solidFill>
+                <a:latin typeface="Consolas"/>
+              </a:rPr>
+              <a:t>42% → 2%</a:t>
+            </a:r>
+          </a:p>
           <a:p>
             <a:pPr>
               <a:lnSpc>
-                <a:spcPct val="132000"/>
+                <a:spcPct val="120000"/>
               </a:lnSpc>
               <a:spcBef>
                 <a:spcPts val="0"/>
               </a:spcBef>
               <a:spcAft>
-                <a:spcPts val="1100"/>
-              </a:spcAft>
-            </a:pPr>
-            <a:r>
-              <a:rPr sz="1150" b="0" i="0">
-                <a:solidFill>
-                  <a:srgbClr val="5A6068"/>
+                <a:spcPts val="0"/>
+              </a:spcAft>
+            </a:pPr>
+            <a:r>
+              <a:rPr sz="1000" b="0" i="0">
+                <a:solidFill>
+                  <a:srgbClr val="8A94A0"/>
                 </a:solidFill>
                 <a:latin typeface="Calibri"/>
               </a:rPr>
-              <a:t>Education's rank depends on which construct you count: attainment works, but parity ratios and learning outcomes do not, so pooling dilutes the signal. Health's rank depends on whether your chosen variable still varies: life expectancy does not, but self-rated health does, so the HDI's choice costs it. Social trust's rank is zero because it is not collected at scale in development frameworks at all — a coverage gap that cannot be fixed by choosing the right variable, because no variable was ever measured.</a:t>
-            </a:r>
-          </a:p>
-          <a:p>
-            <a:pPr>
-              <a:lnSpc>
-                <a:spcPct val="132000"/>
-              </a:lnSpc>
-              <a:spcBef>
-                <a:spcPts val="0"/>
-              </a:spcBef>
-              <a:spcAft>
-                <a:spcPts val="1100"/>
-              </a:spcAft>
-            </a:pPr>
-            <a:r>
-              <a:rPr sz="1150" b="0" i="0">
-                <a:solidFill>
-                  <a:srgbClr val="5A6068"/>
-                </a:solidFill>
-                <a:latin typeface="Calibri"/>
-              </a:rPr>
-              <a:t>These are not criticisms of the frameworks; they were built to track development, and they do. But which components look most consequential for lived experience is not the question they were built to answer.</a:t>
-            </a:r>
-          </a:p>
-        </p:txBody>
-      </p:sp>
-      <p:sp>
-        <p:nvSpPr>
-          <p:cNvPr id="5" name="TextBox 4"/>
-          <p:cNvSpPr txBox="1"/>
-          <p:nvPr/>
-        </p:nvSpPr>
-        <p:spPr>
-          <a:xfrm>
-            <a:off x="11338560" y="6263640"/>
-            <a:ext cx="548640" cy="274320"/>
-          </a:xfrm>
-          <a:prstGeom prst="rect">
-            <a:avLst/>
-          </a:prstGeom>
-          <a:noFill/>
-        </p:spPr>
-        <p:txBody>
-          <a:bodyPr wrap="square" lIns="0" rIns="0" tIns="0" bIns="0">
-            <a:spAutoFit/>
-          </a:bodyPr>
-          <a:lstStyle/>
-          <a:p>
-            <a:pPr algn="r">
-              <a:spcBef>
-                <a:spcPts val="0"/>
-              </a:spcBef>
-              <a:spcAft>
-                <a:spcPts val="0"/>
-              </a:spcAft>
-            </a:pPr>
-            <a:r>
-              <a:rPr sz="1100" b="0" i="0">
-                <a:solidFill>
-                  <a:srgbClr val="868D96"/>
-                </a:solidFill>
-                <a:latin typeface="Consolas"/>
-              </a:rPr>
-              <a:t>II</a:t>
-            </a:r>
-          </a:p>
-        </p:txBody>
-      </p:sp>
-      <p:pic>
-        <p:nvPicPr>
-          <p:cNvPr id="6" name="Picture 5" descr="domain_horse_race.png"/>
-          <p:cNvPicPr>
-            <a:picLocks noChangeAspect="1"/>
-          </p:cNvPicPr>
-          <p:nvPr/>
-        </p:nvPicPr>
-        <p:blipFill>
-          <a:blip r:embed="rId2"/>
-          <a:stretch>
-            <a:fillRect/>
-          </a:stretch>
-        </p:blipFill>
-        <p:spPr>
-          <a:xfrm>
-            <a:off x="5120640" y="1433421"/>
-            <a:ext cx="6537960" cy="3524813"/>
-          </a:xfrm>
-          <a:prstGeom prst="rect">
-            <a:avLst/>
-          </a:prstGeom>
-        </p:spPr>
-      </p:pic>
-      <p:sp>
-        <p:nvSpPr>
-          <p:cNvPr id="7" name="TextBox 6"/>
-          <p:cNvSpPr txBox="1"/>
-          <p:nvPr/>
-        </p:nvSpPr>
-        <p:spPr>
-          <a:xfrm>
-            <a:off x="5120640" y="5897880"/>
-            <a:ext cx="6537960" cy="731520"/>
-          </a:xfrm>
-          <a:prstGeom prst="rect">
-            <a:avLst/>
-          </a:prstGeom>
-          <a:noFill/>
-        </p:spPr>
-        <p:txBody>
-          <a:bodyPr wrap="square" lIns="0" rIns="0" tIns="0" bIns="0">
-            <a:spAutoFit/>
-          </a:bodyPr>
-          <a:lstStyle/>
-          <a:p>
-            <a:pPr>
-              <a:lnSpc>
-                <a:spcPct val="125000"/>
-              </a:lnSpc>
-              <a:spcBef>
-                <a:spcPts val="0"/>
-              </a:spcBef>
-              <a:spcAft>
-                <a:spcPts val="0"/>
-              </a:spcAft>
-            </a:pPr>
-            <a:r>
-              <a:rPr sz="900" b="0" i="0">
-                <a:solidFill>
-                  <a:srgbClr val="868D96"/>
-                </a:solidFill>
-                <a:latin typeface="Calibri"/>
-              </a:rPr>
-              <a:t>Domains competing within one instrument (ESS), at two levels of aggregation. Individual level (left) and country means (right).</a:t>
+              <a:t>HDI levels → differences (collapsed)</a:t>
             </a:r>
           </a:p>
         </p:txBody>
@@ -5444,7 +5472,7 @@
                 </a:solidFill>
                 <a:latin typeface="Consolas"/>
               </a:rPr>
-              <a:t>FRAMEWORK BLIND SPOTS · DOMAIN BY DOMAIN</a:t>
+              <a:t>WITHIN-COUNTRY EVIDENCE</a:t>
             </a:r>
           </a:p>
         </p:txBody>
@@ -5489,7 +5517,7 @@
                 </a:solidFill>
                 <a:latin typeface="Georgia"/>
               </a:rPr>
-              <a:t>Education, health and social trust — and which frameworks can see them</a:t>
+              <a:t>Individual-level, self-reported data captures year-to-year change that administrative frameworks miss</a:t>
             </a:r>
           </a:p>
         </p:txBody>
@@ -5528,13 +5556,79 @@
               </a:spcAft>
             </a:pPr>
             <a:r>
-              <a:rPr sz="1150" b="0" i="0">
+              <a:rPr sz="850" b="0" i="0">
                 <a:solidFill>
                   <a:srgbClr val="5A6068"/>
                 </a:solidFill>
                 <a:latin typeface="Calibri"/>
               </a:rPr>
-              <a:t>A summary of the blind spots: which frameworks can test which domains, and whether the test yields a signal. Education is testable in all three frameworks but its rank depends entirely on which construct the framework chose to count. Health is testable everywhere and leads wherever it is measured somewhere it still varies — a robust signal despite the HDI's poor choice of proxy. Social trust is testable in one instrument only: the ESS. It does not appear in the HDI at all, and the SDG framework measures institutional confidence instead, which is a different construct and a weaker predictor.</a:t>
+              <a:t>Here is the critical observation that reshapes the question: unlike SDG (71% levels → 5% differences) and HDI (42% → 2%), the ESS shows 69% levels → 64% differences. The association persists within countries over time. This is not because development frameworks are poorly designed; it is because they measure aggregate, administrative data at long intervals (annual at best for HDI and SDG). Individual survey responses capture year-to-year variation in how people experience their lives.</a:t>
+            </a:r>
+          </a:p>
+          <a:p>
+            <a:pPr>
+              <a:lnSpc>
+                <a:spcPct val="132000"/>
+              </a:lnSpc>
+              <a:spcBef>
+                <a:spcPts val="0"/>
+              </a:spcBef>
+              <a:spcAft>
+                <a:spcPts val="1100"/>
+              </a:spcAft>
+            </a:pPr>
+            <a:r>
+              <a:rPr sz="850" b="0" i="0">
+                <a:solidFill>
+                  <a:srgbClr val="5A6068"/>
+                </a:solidFill>
+                <a:latin typeface="Calibri"/>
+              </a:rPr>
+              <a:t>This is why social trust emerges here. At the country level, the SDG database carries 13 trust-adjacent series, but only nine can be tested, four are significant, and nearly all disappear when controlling for income. They measure institutional confidence, not interpersonal trust. In the HDI, trust is not measured at all. But at the individual level, within countries, the ESS shows interpersonal trust is significant in 94% of countries and drives year-to-year change in wellbeing. The three domains emerge not because the frameworks reveal them, but because ESS measures them where people actually experience variation: in themselves, over time.</a:t>
+            </a:r>
+          </a:p>
+          <a:p>
+            <a:pPr>
+              <a:lnSpc>
+                <a:spcPct val="132000"/>
+              </a:lnSpc>
+              <a:spcBef>
+                <a:spcPts val="0"/>
+              </a:spcBef>
+              <a:spcAft>
+                <a:spcPts val="1100"/>
+              </a:spcAft>
+            </a:pPr>
+            <a:r>
+              <a:rPr sz="850" b="0" i="0">
+                <a:solidFill>
+                  <a:srgbClr val="5A6068"/>
+                </a:solidFill>
+                <a:latin typeface="Calibri"/>
+              </a:rPr>
+              <a:t>This is not about measurement error. It is structural. Frameworks designed for tracking aggregate national progress cannot see individual experience responsive to change. At regional scale, the collapse persists: across 167 subnational regions within ESS countries with ≥5 survey years, life satisfaction and regional development show the same pattern as national data — strong levels associations, weak differences associations. The problem is not aggregation; it is temporal resolution and individual measurement.</a:t>
+            </a:r>
+          </a:p>
+          <a:p>
+            <a:pPr>
+              <a:lnSpc>
+                <a:spcPct val="132000"/>
+              </a:lnSpc>
+              <a:spcBef>
+                <a:spcPts val="0"/>
+              </a:spcBef>
+              <a:spcAft>
+                <a:spcPts val="1100"/>
+              </a:spcAft>
+            </a:pPr>
+            <a:r>
+              <a:rPr sz="850" b="0" i="0">
+                <a:solidFill>
+                  <a:srgbClr val="5A6068"/>
+                </a:solidFill>
+                <a:latin typeface="Calibri"/>
+              </a:rPr>
+              <a:t>The caveats are substantial: 36 European countries, self-reported measures, annual cycles. But the implication is clear. Development frameworks' blindness to social trust is not because trust does not matter for wellbeing; it is because development was never designed to measure individual experience at the temporal resolution where people and places change.</a:t>
             </a:r>
           </a:p>
         </p:txBody>
@@ -5576,14 +5670,14 @@
                 </a:solidFill>
                 <a:latin typeface="Consolas"/>
               </a:rPr>
-              <a:t>II</a:t>
+              <a:t>III</a:t>
             </a:r>
           </a:p>
         </p:txBody>
       </p:sp>
       <p:pic>
         <p:nvPicPr>
-          <p:cNvPr id="6" name="Picture 5" descr="domain_scorecard.png"/>
+          <p:cNvPr id="6" name="Picture 5" descr="collapse_shdi_ess_regional.png"/>
           <p:cNvPicPr>
             <a:picLocks noChangeAspect="1"/>
           </p:cNvPicPr>
@@ -5597,8 +5691,8 @@
         </p:blipFill>
         <p:spPr>
           <a:xfrm>
-            <a:off x="5120640" y="1469807"/>
-            <a:ext cx="6537960" cy="3452042"/>
+            <a:off x="5546146" y="658368"/>
+            <a:ext cx="5686948" cy="5074919"/>
           </a:xfrm>
           <a:prstGeom prst="rect">
             <a:avLst/>
@@ -5645,7 +5739,7 @@
                 </a:solidFill>
                 <a:latin typeface="Calibri"/>
               </a:rPr>
-              <a:t>Which frameworks can test each domain (green = tracks wellbeing, yellow = measurable but weak signal, gray = framework cannot test it).</a:t>
+              <a:t>Regional collapse: 167 subnational regions, levels vs. differences. ESS persists; collapse confirms it is not an artifact of national aggregation but of measurement type.</a:t>
             </a:r>
           </a:p>
         </p:txBody>
@@ -5757,7 +5851,7 @@
                 </a:solidFill>
                 <a:latin typeface="Consolas"/>
               </a:rPr>
-              <a:t>WHERE ACT II LEAVES US</a:t>
+              <a:t>WHERE ACT III LEAVES US</a:t>
             </a:r>
           </a:p>
         </p:txBody>
@@ -5802,7 +5896,7 @@
                 </a:solidFill>
                 <a:latin typeface="Georgia"/>
               </a:rPr>
-              <a:t>The problem is not the domains; the problem is the measurement. Frameworks designed for development, with aggregate indicators measured at long intervals, structurally cannot see what matters for individual lived experience.</a:t>
+              <a:t>The three domains predict wellbeing differently depending on where and how you measure. Development frameworks' blindness is not incurable; it is structural. Frameworks designed for tracking aggregate national progress cannot see individual experience responsive to change.</a:t>
             </a:r>
           </a:p>
         </p:txBody>
@@ -5870,7 +5964,7 @@
                 </a:solidFill>
                 <a:latin typeface="Georgia"/>
               </a:rPr>
-              <a:t>III</a:t>
+              <a:t>IV</a:t>
             </a:r>
           </a:p>
         </p:txBody>
@@ -5956,7 +6050,7 @@
                 </a:solidFill>
                 <a:latin typeface="Consolas"/>
               </a:rPr>
-              <a:t>ACT III</a:t>
+              <a:t>ACT IV</a:t>
             </a:r>
           </a:p>
         </p:txBody>
@@ -6001,7 +6095,7 @@
                 </a:solidFill>
                 <a:latin typeface="Georgia"/>
               </a:rPr>
-              <a:t>Within-country evidence: Why measurement type matters</a:t>
+              <a:t>What this means for development frameworks</a:t>
             </a:r>
           </a:p>
         </p:txBody>
@@ -6040,13 +6134,13 @@
               </a:spcAft>
             </a:pPr>
             <a:r>
-              <a:rPr sz="1275" b="0" i="1">
+              <a:rPr sz="1550" b="0" i="1">
                 <a:solidFill>
                   <a:srgbClr val="9AA4B0"/>
                 </a:solidFill>
                 <a:latin typeface="Georgia"/>
               </a:rPr>
-              <a:t>Individual-level, self-reported data shows a fundamentally different pattern. Unlike administrative development frameworks, ESS captures year-to-year variation within countries. This is not a measurement failure; it is a structural consequence of how development is measured — at the country level, with long intervals. Social trust emerges not because frameworks miss it, but because development frameworks measure at the wrong temporal and individual resolution where trust varies.</a:t>
+              <a:t>The disconnect is real and worth naming. Development frameworks have done their job of tracking progress on development. But the components that predict individual lived experience are ones these frameworks are not currently built to see — because of construction choices, variable saturation, or coverage that was never collected.</a:t>
             </a:r>
           </a:p>
         </p:txBody>
@@ -6088,7 +6182,7 @@
                 </a:solidFill>
                 <a:latin typeface="Consolas"/>
               </a:rPr>
-              <a:t>69% → 64%</a:t>
+              <a:t>3 vs. 1</a:t>
             </a:r>
           </a:p>
           <a:p>
@@ -6110,7 +6204,7 @@
                 </a:solidFill>
                 <a:latin typeface="Calibri"/>
               </a:rPr>
-              <a:t>ESS levels → differences (NOT collapsed)</a:t>
+              <a:t>domains the HDI can test for wellbeing, vs. social trust</a:t>
             </a:r>
           </a:p>
         </p:txBody>
@@ -6152,7 +6246,7 @@
                 </a:solidFill>
                 <a:latin typeface="Consolas"/>
               </a:rPr>
-              <a:t>71% → 5%</a:t>
+              <a:t>42 vs. 661</a:t>
             </a:r>
           </a:p>
           <a:p>
@@ -6174,7 +6268,7 @@
                 </a:solidFill>
                 <a:latin typeface="Calibri"/>
               </a:rPr>
-              <a:t>SDG levels → differences (collapsed)</a:t>
+              <a:t>countries with SDG data, vs. series in the database</a:t>
             </a:r>
           </a:p>
         </p:txBody>
@@ -6216,7 +6310,7 @@
                 </a:solidFill>
                 <a:latin typeface="Consolas"/>
               </a:rPr>
-              <a:t>42% → 2%</a:t>
+              <a:t>0.041</a:t>
             </a:r>
           </a:p>
           <a:p>
@@ -6238,7 +6332,7 @@
                 </a:solidFill>
                 <a:latin typeface="Calibri"/>
               </a:rPr>
-              <a:t>HDI levels → differences (collapsed)</a:t>
+              <a:t>median R² for trust — below income, health, education individually, above none</a:t>
             </a:r>
           </a:p>
         </p:txBody>
@@ -7122,7 +7216,7 @@
         <p:spPr>
           <a:xfrm>
             <a:off x="566928" y="502920"/>
-            <a:ext cx="4160520" cy="274320"/>
+            <a:ext cx="8595360" cy="274320"/>
           </a:xfrm>
           <a:prstGeom prst="rect">
             <a:avLst/>
@@ -7150,7 +7244,7 @@
                 </a:solidFill>
                 <a:latin typeface="Consolas"/>
               </a:rPr>
-              <a:t>METHOD MATTERS · WHAT SURVIVES</a:t>
+              <a:t>THE DISCONNECT</a:t>
             </a:r>
           </a:p>
         </p:txBody>
@@ -7164,7 +7258,7 @@
         <p:spPr>
           <a:xfrm>
             <a:off x="566928" y="914400"/>
-            <a:ext cx="4160520" cy="1371600"/>
+            <a:ext cx="8595360" cy="1371600"/>
           </a:xfrm>
           <a:prstGeom prst="rect">
             <a:avLst/>
@@ -7189,13 +7283,13 @@
               </a:spcAft>
             </a:pPr>
             <a:r>
-              <a:rPr sz="2300" b="0" i="0">
+              <a:rPr sz="2700" b="0" i="0">
                 <a:solidFill>
                   <a:srgbClr val="14171C"/>
                 </a:solidFill>
                 <a:latin typeface="Georgia"/>
               </a:rPr>
-              <a:t>Health survives both measurement methods. Social trust does not.</a:t>
+              <a:t>These frameworks work for development. They do not work for wellbeing.</a:t>
             </a:r>
           </a:p>
         </p:txBody>
@@ -7208,8 +7302,8 @@
         </p:nvSpPr>
         <p:spPr>
           <a:xfrm>
-            <a:off x="566928" y="2331720"/>
-            <a:ext cx="4160520" cy="3840480"/>
+            <a:off x="566928" y="2286000"/>
+            <a:ext cx="8595360" cy="3840480"/>
           </a:xfrm>
           <a:prstGeom prst="rect">
             <a:avLst/>
@@ -7234,13 +7328,35 @@
               </a:spcAft>
             </a:pPr>
             <a:r>
-              <a:rPr sz="1150" b="0" i="0">
+              <a:rPr sz="1400" b="0" i="0">
                 <a:solidFill>
                   <a:srgbClr val="5A6068"/>
                 </a:solidFill>
                 <a:latin typeface="Calibri"/>
               </a:rPr>
-              <a:t>A critical test: which domains actually predict wellbeing regardless of how you measure development? Health is significant in both administrative sources (SDG, 11.5% of country-indicator pairs) and self-reported sources (ESS, median R² = 0.091). This is robust. Education shows weak signal in both (SDG 3.3%, ESS R² = 0.0098), so the issue is not method-dependent but measurement-dependent. Social trust, however, only appears in self-reported data: 94% of ESS countries (median R² = 0.041) versus 1.5% of SDG16 country-pairs measuring institutional confidence instead. The three domains do not behave the same way across measurement methods.</a:t>
+              <a:t>The HDI and SDG frameworks do not answer the question 'what makes people's lives better?' any more than a global income statistics database answers 'what makes a person happy?' They were designed to track development, measured at the aggregate level, with indicators chosen before the question of individual wellbeing was systematically tested. That is not a design failure; it is the intended scope.</a:t>
+            </a:r>
+          </a:p>
+          <a:p>
+            <a:pPr>
+              <a:lnSpc>
+                <a:spcPct val="132000"/>
+              </a:lnSpc>
+              <a:spcBef>
+                <a:spcPts val="0"/>
+              </a:spcBef>
+              <a:spcAft>
+                <a:spcPts val="1100"/>
+              </a:spcAft>
+            </a:pPr>
+            <a:r>
+              <a:rPr sz="1400" b="0" i="0">
+                <a:solidFill>
+                  <a:srgbClr val="5A6068"/>
+                </a:solidFill>
+                <a:latin typeface="Calibri"/>
+              </a:rPr>
+              <a:t>But it means the gap is structural. Education's access indicators work; pooling them with constructs that do not does not fix wellbeing prediction — it just builds a worse measure. Choosing a variable for health that is closer to saturated than the outcome it predicts is a measurement choice, not an incurable problem. And when a domain is never collected, no amount of better construction on the others will reach it.</a:t>
             </a:r>
           </a:p>
         </p:txBody>
@@ -7282,76 +7398,7 @@
                 </a:solidFill>
                 <a:latin typeface="Consolas"/>
               </a:rPr>
-              <a:t>III</a:t>
-            </a:r>
-          </a:p>
-        </p:txBody>
-      </p:sp>
-      <p:pic>
-        <p:nvPicPr>
-          <p:cNvPr id="6" name="Picture 5" descr="health_trust_corroboration.png"/>
-          <p:cNvPicPr>
-            <a:picLocks noChangeAspect="1"/>
-          </p:cNvPicPr>
-          <p:nvPr/>
-        </p:nvPicPr>
-        <p:blipFill>
-          <a:blip r:embed="rId2"/>
-          <a:stretch>
-            <a:fillRect/>
-          </a:stretch>
-        </p:blipFill>
-        <p:spPr>
-          <a:xfrm>
-            <a:off x="5120640" y="1858518"/>
-            <a:ext cx="6537960" cy="2674620"/>
-          </a:xfrm>
-          <a:prstGeom prst="rect">
-            <a:avLst/>
-          </a:prstGeom>
-        </p:spPr>
-      </p:pic>
-      <p:sp>
-        <p:nvSpPr>
-          <p:cNvPr id="7" name="TextBox 6"/>
-          <p:cNvSpPr txBox="1"/>
-          <p:nvPr/>
-        </p:nvSpPr>
-        <p:spPr>
-          <a:xfrm>
-            <a:off x="5120640" y="5897880"/>
-            <a:ext cx="6537960" cy="731520"/>
-          </a:xfrm>
-          <a:prstGeom prst="rect">
-            <a:avLst/>
-          </a:prstGeom>
-          <a:noFill/>
-        </p:spPr>
-        <p:txBody>
-          <a:bodyPr wrap="square" lIns="0" rIns="0" tIns="0" bIns="0">
-            <a:spAutoFit/>
-          </a:bodyPr>
-          <a:lstStyle/>
-          <a:p>
-            <a:pPr>
-              <a:lnSpc>
-                <a:spcPct val="125000"/>
-              </a:lnSpc>
-              <a:spcBef>
-                <a:spcPts val="0"/>
-              </a:spcBef>
-              <a:spcAft>
-                <a:spcPts val="0"/>
-              </a:spcAft>
-            </a:pPr>
-            <a:r>
-              <a:rPr sz="900" b="0" i="0">
-                <a:solidFill>
-                  <a:srgbClr val="868D96"/>
-                </a:solidFill>
-                <a:latin typeface="Calibri"/>
-              </a:rPr>
-              <a:t>Health is robust across administrative and self-reported sources. Education is weak in both. Social trust appears only in self-reported individual-level data.</a:t>
+              <a:t>IV</a:t>
             </a:r>
           </a:p>
         </p:txBody>
@@ -7391,7 +7438,7 @@
         <p:spPr>
           <a:xfrm>
             <a:off x="566928" y="502920"/>
-            <a:ext cx="4160520" cy="274320"/>
+            <a:ext cx="8595360" cy="274320"/>
           </a:xfrm>
           <a:prstGeom prst="rect">
             <a:avLst/>
@@ -7419,7 +7466,7 @@
                 </a:solidFill>
                 <a:latin typeface="Consolas"/>
               </a:rPr>
-              <a:t>WITHIN-COUNTRY EVIDENCE</a:t>
+              <a:t>IMPLICATION 1 · MEASUREMENT CHOICES CONSTRAIN WHAT FRAMEWORKS CAN SEE</a:t>
             </a:r>
           </a:p>
         </p:txBody>
@@ -7433,7 +7480,7 @@
         <p:spPr>
           <a:xfrm>
             <a:off x="566928" y="914400"/>
-            <a:ext cx="4160520" cy="1371600"/>
+            <a:ext cx="8595360" cy="1371600"/>
           </a:xfrm>
           <a:prstGeom prst="rect">
             <a:avLst/>
@@ -7458,13 +7505,13 @@
               </a:spcAft>
             </a:pPr>
             <a:r>
-              <a:rPr sz="2300" b="0" i="0">
+              <a:rPr sz="2700" b="0" i="0">
                 <a:solidFill>
                   <a:srgbClr val="14171C"/>
                 </a:solidFill>
                 <a:latin typeface="Georgia"/>
               </a:rPr>
-              <a:t>Individual-level, self-reported data captures year-to-year change that administrative frameworks miss</a:t>
+              <a:t>Education and health: the case for measurement specificity</a:t>
             </a:r>
           </a:p>
         </p:txBody>
@@ -7477,8 +7524,8 @@
         </p:nvSpPr>
         <p:spPr>
           <a:xfrm>
-            <a:off x="566928" y="2331720"/>
-            <a:ext cx="4160520" cy="3840480"/>
+            <a:off x="566928" y="2286000"/>
+            <a:ext cx="8595360" cy="3840480"/>
           </a:xfrm>
           <a:prstGeom prst="rect">
             <a:avLst/>
@@ -7503,13 +7550,13 @@
               </a:spcAft>
             </a:pPr>
             <a:r>
-              <a:rPr sz="975" b="0" i="0">
+              <a:rPr sz="1400" b="0" i="0">
                 <a:solidFill>
                   <a:srgbClr val="5A6068"/>
                 </a:solidFill>
                 <a:latin typeface="Calibri"/>
               </a:rPr>
-              <a:t>Here is the critical observation that reshapes the question: unlike SDG (71% levels → 5% differences) and HDI (42% → 2%), the ESS shows 69% levels → 64% differences. The association persists within countries over time. This is not because development frameworks are poorly designed; it is because they measure aggregate, administrative data at long intervals (annual at best for HDI and SDG). Individual survey responses capture year-to-year variation in how people experience their lives.</a:t>
+              <a:t>Education is significant everywhere it is measured as attainment, but nearly invisible in SDG4 because most indicators measure something else. Health is nearly invisible in the HDI because life expectancy has saturated. Neither domain has changed; the frameworks' construction choices have.</a:t>
             </a:r>
           </a:p>
           <a:p>
@@ -7525,35 +7572,13 @@
               </a:spcAft>
             </a:pPr>
             <a:r>
-              <a:rPr sz="975" b="0" i="0">
+              <a:rPr sz="1400" b="0" i="0">
                 <a:solidFill>
                   <a:srgbClr val="5A6068"/>
                 </a:solidFill>
                 <a:latin typeface="Calibri"/>
               </a:rPr>
-              <a:t>This matters for social trust most of all. At the country level, SDG has almost no trust coverage; in the HDI, none. But at the individual level, within countries, ESS shows trust is significant in 94% of countries and drives year-to-year change in how satisfied people report being. The three domains emerge not because the frameworks reveal them, but because ESS measures them where people actually experience variation: in themselves, over time.</a:t>
-            </a:r>
-          </a:p>
-          <a:p>
-            <a:pPr>
-              <a:lnSpc>
-                <a:spcPct val="132000"/>
-              </a:lnSpc>
-              <a:spcBef>
-                <a:spcPts val="0"/>
-              </a:spcBef>
-              <a:spcAft>
-                <a:spcPts val="1100"/>
-              </a:spcAft>
-            </a:pPr>
-            <a:r>
-              <a:rPr sz="975" b="0" i="0">
-                <a:solidFill>
-                  <a:srgbClr val="5A6068"/>
-                </a:solidFill>
-                <a:latin typeface="Calibri"/>
-              </a:rPr>
-              <a:t>The caveats are substantial: 36 European countries, self-reported measures, annual cycles. But the implication is clear. Development frameworks' blindness to social trust is not because trust does not matter for wellbeing; it is because development was never designed to measure individual experience at the temporal resolution where people change.</a:t>
+              <a:t>For education, this suggests development measurement should weigh access and completion more heavily than parity ratios in wellbeing contexts — not universally, but with explicit construction choices that account for what is known to matter. For health, it suggests that wellbeing-motivated measurement may need different variables at different development levels: life expectancy in lower-income settings, self-reported health or specific conditions in saturated ones.</a:t>
             </a:r>
           </a:p>
         </p:txBody>
@@ -7595,76 +7620,7 @@
                 </a:solidFill>
                 <a:latin typeface="Consolas"/>
               </a:rPr>
-              <a:t>III</a:t>
-            </a:r>
-          </a:p>
-        </p:txBody>
-      </p:sp>
-      <p:pic>
-        <p:nvPicPr>
-          <p:cNvPr id="6" name="Picture 5" descr="collapse_shdi_ess_regional.png"/>
-          <p:cNvPicPr>
-            <a:picLocks noChangeAspect="1"/>
-          </p:cNvPicPr>
-          <p:nvPr/>
-        </p:nvPicPr>
-        <p:blipFill>
-          <a:blip r:embed="rId2"/>
-          <a:stretch>
-            <a:fillRect/>
-          </a:stretch>
-        </p:blipFill>
-        <p:spPr>
-          <a:xfrm>
-            <a:off x="5546146" y="658368"/>
-            <a:ext cx="5686948" cy="5074919"/>
-          </a:xfrm>
-          <a:prstGeom prst="rect">
-            <a:avLst/>
-          </a:prstGeom>
-        </p:spPr>
-      </p:pic>
-      <p:sp>
-        <p:nvSpPr>
-          <p:cNvPr id="7" name="TextBox 6"/>
-          <p:cNvSpPr txBox="1"/>
-          <p:nvPr/>
-        </p:nvSpPr>
-        <p:spPr>
-          <a:xfrm>
-            <a:off x="5120640" y="5897880"/>
-            <a:ext cx="6537960" cy="731520"/>
-          </a:xfrm>
-          <a:prstGeom prst="rect">
-            <a:avLst/>
-          </a:prstGeom>
-          <a:noFill/>
-        </p:spPr>
-        <p:txBody>
-          <a:bodyPr wrap="square" lIns="0" rIns="0" tIns="0" bIns="0">
-            <a:spAutoFit/>
-          </a:bodyPr>
-          <a:lstStyle/>
-          <a:p>
-            <a:pPr>
-              <a:lnSpc>
-                <a:spcPct val="125000"/>
-              </a:lnSpc>
-              <a:spcBef>
-                <a:spcPts val="0"/>
-              </a:spcBef>
-              <a:spcAft>
-                <a:spcPts val="0"/>
-              </a:spcAft>
-            </a:pPr>
-            <a:r>
-              <a:rPr sz="900" b="0" i="0">
-                <a:solidFill>
-                  <a:srgbClr val="868D96"/>
-                </a:solidFill>
-                <a:latin typeface="Calibri"/>
-              </a:rPr>
-              <a:t>Regional collapse: 167 subnational regions within ESS countries, levels vs. differences. The collapse persists at regional scale, confirming it is not an artifact of national aggregation.</a:t>
+              <a:t>IV</a:t>
             </a:r>
           </a:p>
         </p:txBody>
@@ -7704,7 +7660,7 @@
         <p:spPr>
           <a:xfrm>
             <a:off x="566928" y="502920"/>
-            <a:ext cx="4160520" cy="274320"/>
+            <a:ext cx="8595360" cy="274320"/>
           </a:xfrm>
           <a:prstGeom prst="rect">
             <a:avLst/>
@@ -7732,7 +7688,7 @@
                 </a:solidFill>
                 <a:latin typeface="Consolas"/>
               </a:rPr>
-              <a:t>WHY SDG'S TRUST DATA DOESN'T WORK</a:t>
+              <a:t>IMPLICATION 2 · COVERAGE GAPS ARE MORE FUNDAMENTAL THAN CONSTRUCT CHOICE</a:t>
             </a:r>
           </a:p>
         </p:txBody>
@@ -7746,7 +7702,7 @@
         <p:spPr>
           <a:xfrm>
             <a:off x="566928" y="914400"/>
-            <a:ext cx="4160520" cy="1371600"/>
+            <a:ext cx="8595360" cy="1371600"/>
           </a:xfrm>
           <a:prstGeom prst="rect">
             <a:avLst/>
@@ -7771,13 +7727,13 @@
               </a:spcAft>
             </a:pPr>
             <a:r>
-              <a:rPr sz="2300" b="0" i="0">
+              <a:rPr sz="2700" b="0" i="0">
                 <a:solidFill>
                   <a:srgbClr val="14171C"/>
                 </a:solidFill>
                 <a:latin typeface="Georgia"/>
               </a:rPr>
-              <a:t>SDG16 measures institutional confidence, not interpersonal trust, and the signal is weak</a:t>
+              <a:t>Social trust: why you cannot fix a measurement by measuring better</a:t>
             </a:r>
           </a:p>
         </p:txBody>
@@ -7790,8 +7746,8 @@
         </p:nvSpPr>
         <p:spPr>
           <a:xfrm>
-            <a:off x="566928" y="2331720"/>
-            <a:ext cx="4160520" cy="3840480"/>
+            <a:off x="566928" y="2286000"/>
+            <a:ext cx="8595360" cy="3840480"/>
           </a:xfrm>
           <a:prstGeom prst="rect">
             <a:avLst/>
@@ -7816,13 +7772,13 @@
               </a:spcAft>
             </a:pPr>
             <a:r>
-              <a:rPr sz="950" b="0" i="0">
+              <a:rPr sz="1400" b="0" i="0">
                 <a:solidFill>
                   <a:srgbClr val="5A6068"/>
                 </a:solidFill>
                 <a:latin typeface="Calibri"/>
               </a:rPr>
-              <a:t>The SDG framework carries 13 trust-adjacent series under Goal 16, but the detail reveals why they fail. First, coverage: only nine of thirteen can be tested across countries, and four are significant — weaker than the development indicators the frameworks already carry. Second, construct: bribery (individuals), bribery (firms), and decision-making inclusiveness predict the Cantril ladder; satisfaction with healthcare, government services, and secondary education do not. These measure satisfaction with institutions, not trust in people.</a:t>
+              <a:t>Social trust is the most tentative finding here. The ESS is Europe-only, across 36 countries, and relies on a single item. That bounds the claim: the pattern holds in Europe, with a wellbeing survey, on a self-report basis. It does not claim universality.</a:t>
             </a:r>
           </a:p>
           <a:p>
@@ -7838,13 +7794,13 @@
               </a:spcAft>
             </a:pPr>
             <a:r>
-              <a:rPr sz="950" b="0" i="0">
+              <a:rPr sz="1400" b="0" i="0">
                 <a:solidFill>
                   <a:srgbClr val="5A6068"/>
                 </a:solidFill>
                 <a:latin typeface="Calibri"/>
               </a:rPr>
-              <a:t>More critically, when you control for income — net of log GNI per capita — nearly all SDG trust series disappear. Bribery stays significant, but satisfaction with government, services, and education vanishes. This is a known artifact of subjective institutional scales across income levels; the same survey administered at different income levels produces structural differences in response patterns unrelated to trust itself. Interpersonal trust, by contrast, shows robust signal independent of income controls.</a:t>
+              <a:t>But the reason it is tentative points to the deepest problem: trust is not collected at global scale in either framework. The SDG database has 13 series adjacent to trust, but they measure institutional confidence, not interpersonal trust, and they are intermittent (147 of 163 country-series have fewer than four years of data). This is not a construct-choice problem that better measurement can solve. It is a coverage gap that requires deciding to collect the data in the first place.</a:t>
             </a:r>
           </a:p>
           <a:p>
@@ -7860,13 +7816,13 @@
               </a:spcAft>
             </a:pPr>
             <a:r>
-              <a:rPr sz="950" b="0" i="0">
+              <a:rPr sz="1400" b="0" i="0">
                 <a:solidFill>
                   <a:srgbClr val="5A6068"/>
                 </a:solidFill>
                 <a:latin typeface="Calibri"/>
               </a:rPr>
-              <a:t>This is not a flaw in the SDG framework's execution. It reflects a fundamental choice: development frameworks measure institutions and systems, not personal relationships. Social trust emerges in individual-level, self-reported data because that is where it lives — in how people experience their immediate world.</a:t>
+              <a:t>For wellbeing-conscious development monitoring, this suggests either building interpersonal-trust measurement into the core frameworks, or acknowledging that other surveys (the ESS, Gallup World Poll, World Values Survey) may be more suitable for understanding what shapes lived experience.</a:t>
             </a:r>
           </a:p>
         </p:txBody>
@@ -7908,76 +7864,7 @@
                 </a:solidFill>
                 <a:latin typeface="Consolas"/>
               </a:rPr>
-              <a:t>III</a:t>
-            </a:r>
-          </a:p>
-        </p:txBody>
-      </p:sp>
-      <p:pic>
-        <p:nvPicPr>
-          <p:cNvPr id="6" name="Picture 5" descr="K1_sdg_trust_cross_section.png"/>
-          <p:cNvPicPr>
-            <a:picLocks noChangeAspect="1"/>
-          </p:cNvPicPr>
-          <p:nvPr/>
-        </p:nvPicPr>
-        <p:blipFill>
-          <a:blip r:embed="rId2"/>
-          <a:stretch>
-            <a:fillRect/>
-          </a:stretch>
-        </p:blipFill>
-        <p:spPr>
-          <a:xfrm>
-            <a:off x="5120640" y="1690377"/>
-            <a:ext cx="6537960" cy="3010902"/>
-          </a:xfrm>
-          <a:prstGeom prst="rect">
-            <a:avLst/>
-          </a:prstGeom>
-        </p:spPr>
-      </p:pic>
-      <p:sp>
-        <p:nvSpPr>
-          <p:cNvPr id="7" name="TextBox 6"/>
-          <p:cNvSpPr txBox="1"/>
-          <p:nvPr/>
-        </p:nvSpPr>
-        <p:spPr>
-          <a:xfrm>
-            <a:off x="5120640" y="5897880"/>
-            <a:ext cx="6537960" cy="731520"/>
-          </a:xfrm>
-          <a:prstGeom prst="rect">
-            <a:avLst/>
-          </a:prstGeom>
-          <a:noFill/>
-        </p:spPr>
-        <p:txBody>
-          <a:bodyPr wrap="square" lIns="0" rIns="0" tIns="0" bIns="0">
-            <a:spAutoFit/>
-          </a:bodyPr>
-          <a:lstStyle/>
-          <a:p>
-            <a:pPr>
-              <a:lnSpc>
-                <a:spcPct val="125000"/>
-              </a:lnSpc>
-              <a:spcBef>
-                <a:spcPts val="0"/>
-              </a:spcBef>
-              <a:spcAft>
-                <a:spcPts val="0"/>
-              </a:spcAft>
-            </a:pPr>
-            <a:r>
-              <a:rPr sz="900" b="0" i="0">
-                <a:solidFill>
-                  <a:srgbClr val="868D96"/>
-                </a:solidFill>
-                <a:latin typeface="Calibri"/>
-              </a:rPr>
-              <a:t>SDG16 trust series can barely be tested (9 of 13 measurable, 4 significant) and collapse when controlled for income. Panel (b) shows bribery persists but satisfaction measures disappear.</a:t>
+              <a:t>IV</a:t>
             </a:r>
           </a:p>
         </p:txBody>
@@ -7991,6 +7878,250 @@
 </file>
 
 <file path=ppt/slides/slide23.xml><?xml version="1.0" encoding="utf-8"?>
+<p:sld xmlns:a="http://schemas.openxmlformats.org/drawingml/2006/main" xmlns:p="http://schemas.openxmlformats.org/presentationml/2006/main" xmlns:r="http://schemas.openxmlformats.org/officeDocument/2006/relationships">
+  <p:cSld>
+    <p:bg>
+      <p:bgPr>
+        <a:solidFill>
+          <a:srgbClr val="FCFCFB"/>
+        </a:solidFill>
+        <a:effectLst/>
+      </p:bgPr>
+    </p:bg>
+    <p:spTree>
+      <p:nvGrpSpPr>
+        <p:cNvPr id="1" name=""/>
+        <p:cNvGrpSpPr/>
+        <p:nvPr/>
+      </p:nvGrpSpPr>
+      <p:grpSpPr/>
+      <p:sp>
+        <p:nvSpPr>
+          <p:cNvPr id="2" name="TextBox 1"/>
+          <p:cNvSpPr txBox="1"/>
+          <p:nvPr/>
+        </p:nvSpPr>
+        <p:spPr>
+          <a:xfrm>
+            <a:off x="566928" y="502920"/>
+            <a:ext cx="8595360" cy="274320"/>
+          </a:xfrm>
+          <a:prstGeom prst="rect">
+            <a:avLst/>
+          </a:prstGeom>
+          <a:noFill/>
+        </p:spPr>
+        <p:txBody>
+          <a:bodyPr wrap="square" lIns="0" rIns="0" tIns="0" bIns="0">
+            <a:spAutoFit/>
+          </a:bodyPr>
+          <a:lstStyle/>
+          <a:p>
+            <a:pPr>
+              <a:spcBef>
+                <a:spcPts val="0"/>
+              </a:spcBef>
+              <a:spcAft>
+                <a:spcPts val="0"/>
+              </a:spcAft>
+            </a:pPr>
+            <a:r>
+              <a:rPr sz="1000" b="0" i="0">
+                <a:solidFill>
+                  <a:srgbClr val="A63A30"/>
+                </a:solidFill>
+                <a:latin typeface="Consolas"/>
+              </a:rPr>
+              <a:t>CONCLUSION</a:t>
+            </a:r>
+          </a:p>
+        </p:txBody>
+      </p:sp>
+      <p:sp>
+        <p:nvSpPr>
+          <p:cNvPr id="3" name="TextBox 2"/>
+          <p:cNvSpPr txBox="1"/>
+          <p:nvPr/>
+        </p:nvSpPr>
+        <p:spPr>
+          <a:xfrm>
+            <a:off x="566928" y="914400"/>
+            <a:ext cx="8595360" cy="1371600"/>
+          </a:xfrm>
+          <a:prstGeom prst="rect">
+            <a:avLst/>
+          </a:prstGeom>
+          <a:noFill/>
+        </p:spPr>
+        <p:txBody>
+          <a:bodyPr wrap="square" lIns="0" rIns="0" tIns="0" bIns="0">
+            <a:spAutoFit/>
+          </a:bodyPr>
+          <a:lstStyle/>
+          <a:p>
+            <a:pPr>
+              <a:lnSpc>
+                <a:spcPct val="108000"/>
+              </a:lnSpc>
+              <a:spcBef>
+                <a:spcPts val="0"/>
+              </a:spcBef>
+              <a:spcAft>
+                <a:spcPts val="0"/>
+              </a:spcAft>
+            </a:pPr>
+            <a:r>
+              <a:rPr sz="2700" b="0" i="0">
+                <a:solidFill>
+                  <a:srgbClr val="14171C"/>
+                </a:solidFill>
+                <a:latin typeface="Georgia"/>
+              </a:rPr>
+              <a:t>A question rather than a prescription</a:t>
+            </a:r>
+          </a:p>
+        </p:txBody>
+      </p:sp>
+      <p:sp>
+        <p:nvSpPr>
+          <p:cNvPr id="4" name="TextBox 3"/>
+          <p:cNvSpPr txBox="1"/>
+          <p:nvPr/>
+        </p:nvSpPr>
+        <p:spPr>
+          <a:xfrm>
+            <a:off x="566928" y="2286000"/>
+            <a:ext cx="8595360" cy="3840480"/>
+          </a:xfrm>
+          <a:prstGeom prst="rect">
+            <a:avLst/>
+          </a:prstGeom>
+          <a:noFill/>
+        </p:spPr>
+        <p:txBody>
+          <a:bodyPr wrap="square" lIns="0" rIns="0" tIns="0" bIns="0">
+            <a:spAutoFit/>
+          </a:bodyPr>
+          <a:lstStyle/>
+          <a:p>
+            <a:pPr>
+              <a:lnSpc>
+                <a:spcPct val="132000"/>
+              </a:lnSpc>
+              <a:spcBef>
+                <a:spcPts val="0"/>
+              </a:spcBef>
+              <a:spcAft>
+                <a:spcPts val="1100"/>
+              </a:spcAft>
+            </a:pPr>
+            <a:r>
+              <a:rPr sz="1400" b="0" i="0">
+                <a:solidFill>
+                  <a:srgbClr val="5A6068"/>
+                </a:solidFill>
+                <a:latin typeface="Calibri"/>
+              </a:rPr>
+              <a:t>The evidence shows a consistent pattern: which domain looks most consequential for wellbeing depends on which framework measures it and what variable they chose. This is not about the domains; it is about the tools.</a:t>
+            </a:r>
+          </a:p>
+          <a:p>
+            <a:pPr>
+              <a:lnSpc>
+                <a:spcPct val="132000"/>
+              </a:lnSpc>
+              <a:spcBef>
+                <a:spcPts val="0"/>
+              </a:spcBef>
+              <a:spcAft>
+                <a:spcPts val="1100"/>
+              </a:spcAft>
+            </a:pPr>
+            <a:r>
+              <a:rPr sz="1400" b="0" i="0">
+                <a:solidFill>
+                  <a:srgbClr val="5A6068"/>
+                </a:solidFill>
+                <a:latin typeface="Calibri"/>
+              </a:rPr>
+              <a:t>Whether development frameworks should be redesigned around wellbeing is outside the scope here. But if they were, this finding suggests the question to ask: should measurement choices be made with explicit reference to which variables still move and still matter for lived experience? Should coverage be built in for domains the frameworks discovered only by studying something else?</a:t>
+            </a:r>
+          </a:p>
+          <a:p>
+            <a:pPr>
+              <a:lnSpc>
+                <a:spcPct val="132000"/>
+              </a:lnSpc>
+              <a:spcBef>
+                <a:spcPts val="0"/>
+              </a:spcBef>
+              <a:spcAft>
+                <a:spcPts val="1100"/>
+              </a:spcAft>
+            </a:pPr>
+            <a:r>
+              <a:rPr sz="1400" b="0" i="0">
+                <a:solidFill>
+                  <a:srgbClr val="5A6068"/>
+                </a:solidFill>
+                <a:latin typeface="Calibri"/>
+              </a:rPr>
+              <a:t>The frameworks work well for their stated purpose. The question is whether wellbeing should become part of that purpose — and if it does, whether the measurement that comes from that intent should be different from the aggregate, development-first measurement in place today.</a:t>
+            </a:r>
+          </a:p>
+        </p:txBody>
+      </p:sp>
+      <p:sp>
+        <p:nvSpPr>
+          <p:cNvPr id="5" name="TextBox 4"/>
+          <p:cNvSpPr txBox="1"/>
+          <p:nvPr/>
+        </p:nvSpPr>
+        <p:spPr>
+          <a:xfrm>
+            <a:off x="11338560" y="6263640"/>
+            <a:ext cx="548640" cy="274320"/>
+          </a:xfrm>
+          <a:prstGeom prst="rect">
+            <a:avLst/>
+          </a:prstGeom>
+          <a:noFill/>
+        </p:spPr>
+        <p:txBody>
+          <a:bodyPr wrap="square" lIns="0" rIns="0" tIns="0" bIns="0">
+            <a:spAutoFit/>
+          </a:bodyPr>
+          <a:lstStyle/>
+          <a:p>
+            <a:pPr algn="r">
+              <a:spcBef>
+                <a:spcPts val="0"/>
+              </a:spcBef>
+              <a:spcAft>
+                <a:spcPts val="0"/>
+              </a:spcAft>
+            </a:pPr>
+            <a:r>
+              <a:rPr sz="1100" b="0" i="0">
+                <a:solidFill>
+                  <a:srgbClr val="868D96"/>
+                </a:solidFill>
+                <a:latin typeface="Consolas"/>
+              </a:rPr>
+              <a:t>IV</a:t>
+            </a:r>
+          </a:p>
+        </p:txBody>
+      </p:sp>
+    </p:spTree>
+  </p:cSld>
+  <p:clrMapOvr>
+    <a:masterClrMapping/>
+  </p:clrMapOvr>
+</p:sld>
+</file>
+
+<file path=ppt/slides/slide24.xml><?xml version="1.0" encoding="utf-8"?>
 <p:sld xmlns:a="http://schemas.openxmlformats.org/drawingml/2006/main" xmlns:p="http://schemas.openxmlformats.org/presentationml/2006/main" xmlns:r="http://schemas.openxmlformats.org/officeDocument/2006/relationships">
   <p:cSld>
     <p:bg>
@@ -8089,7 +8220,7 @@
                 </a:solidFill>
                 <a:latin typeface="Consolas"/>
               </a:rPr>
-              <a:t>WHERE ACT III LEAVES US</a:t>
+              <a:t>WHERE ACT IV LEAVES US</a:t>
             </a:r>
           </a:p>
         </p:txBody>
@@ -8134,443 +8265,7 @@
                 </a:solidFill>
                 <a:latin typeface="Georgia"/>
               </a:rPr>
-              <a:t>The three domains predict wellbeing differently depending on where and how you measure. Development frameworks' blindness is not incurable; it is structural. Frameworks designed for tracking aggregate national progress cannot see individual experience responsive to change.</a:t>
-            </a:r>
-          </a:p>
-        </p:txBody>
-      </p:sp>
-    </p:spTree>
-  </p:cSld>
-  <p:clrMapOvr>
-    <a:masterClrMapping/>
-  </p:clrMapOvr>
-</p:sld>
-</file>
-
-<file path=ppt/slides/slide24.xml><?xml version="1.0" encoding="utf-8"?>
-<p:sld xmlns:a="http://schemas.openxmlformats.org/drawingml/2006/main" xmlns:p="http://schemas.openxmlformats.org/presentationml/2006/main" xmlns:r="http://schemas.openxmlformats.org/officeDocument/2006/relationships">
-  <p:cSld>
-    <p:bg>
-      <p:bgPr>
-        <a:solidFill>
-          <a:srgbClr val="14171C"/>
-        </a:solidFill>
-        <a:effectLst/>
-      </p:bgPr>
-    </p:bg>
-    <p:spTree>
-      <p:nvGrpSpPr>
-        <p:cNvPr id="1" name=""/>
-        <p:cNvGrpSpPr/>
-        <p:nvPr/>
-      </p:nvGrpSpPr>
-      <p:grpSpPr/>
-      <p:sp>
-        <p:nvSpPr>
-          <p:cNvPr id="2" name="TextBox 1"/>
-          <p:cNvSpPr txBox="1"/>
-          <p:nvPr/>
-        </p:nvSpPr>
-        <p:spPr>
-          <a:xfrm>
-            <a:off x="8229600" y="822960"/>
-            <a:ext cx="3291840" cy="4114800"/>
-          </a:xfrm>
-          <a:prstGeom prst="rect">
-            <a:avLst/>
-          </a:prstGeom>
-          <a:noFill/>
-        </p:spPr>
-        <p:txBody>
-          <a:bodyPr wrap="square" lIns="0" rIns="0" tIns="0" bIns="0">
-            <a:spAutoFit/>
-          </a:bodyPr>
-          <a:lstStyle/>
-          <a:p>
-            <a:pPr algn="r">
-              <a:spcBef>
-                <a:spcPts val="0"/>
-              </a:spcBef>
-              <a:spcAft>
-                <a:spcPts val="0"/>
-              </a:spcAft>
-            </a:pPr>
-            <a:r>
-              <a:rPr sz="20000" b="0" i="0">
-                <a:solidFill>
-                  <a:srgbClr val="2A3340"/>
-                </a:solidFill>
-                <a:latin typeface="Georgia"/>
-              </a:rPr>
-              <a:t>IV</a:t>
-            </a:r>
-          </a:p>
-        </p:txBody>
-      </p:sp>
-      <p:sp>
-        <p:nvSpPr>
-          <p:cNvPr id="3" name="Rectangle 2"/>
-          <p:cNvSpPr/>
-          <p:nvPr/>
-        </p:nvSpPr>
-        <p:spPr>
-          <a:xfrm>
-            <a:off x="566928" y="1371600"/>
-            <a:ext cx="7315200" cy="25400"/>
-          </a:xfrm>
-          <a:prstGeom prst="rect">
-            <a:avLst/>
-          </a:prstGeom>
-          <a:solidFill>
-            <a:srgbClr val="C9D8EC"/>
-          </a:solidFill>
-          <a:ln>
-            <a:noFill/>
-          </a:ln>
-          <a:effectLst/>
-        </p:spPr>
-        <p:style>
-          <a:lnRef idx="1">
-            <a:schemeClr val="accent1"/>
-          </a:lnRef>
-          <a:fillRef idx="3">
-            <a:schemeClr val="accent1"/>
-          </a:fillRef>
-          <a:effectRef idx="2">
-            <a:schemeClr val="accent1"/>
-          </a:effectRef>
-          <a:fontRef idx="minor">
-            <a:schemeClr val="lt1"/>
-          </a:fontRef>
-        </p:style>
-        <p:txBody>
-          <a:bodyPr rtlCol="0" anchor="ctr"/>
-          <a:lstStyle/>
-          <a:p>
-            <a:pPr algn="ctr"/>
-          </a:p>
-        </p:txBody>
-      </p:sp>
-      <p:sp>
-        <p:nvSpPr>
-          <p:cNvPr id="4" name="TextBox 3"/>
-          <p:cNvSpPr txBox="1"/>
-          <p:nvPr/>
-        </p:nvSpPr>
-        <p:spPr>
-          <a:xfrm>
-            <a:off x="566928" y="960120"/>
-            <a:ext cx="5486400" cy="274320"/>
-          </a:xfrm>
-          <a:prstGeom prst="rect">
-            <a:avLst/>
-          </a:prstGeom>
-          <a:noFill/>
-        </p:spPr>
-        <p:txBody>
-          <a:bodyPr wrap="square" lIns="0" rIns="0" tIns="0" bIns="0">
-            <a:spAutoFit/>
-          </a:bodyPr>
-          <a:lstStyle/>
-          <a:p>
-            <a:pPr>
-              <a:spcBef>
-                <a:spcPts val="0"/>
-              </a:spcBef>
-              <a:spcAft>
-                <a:spcPts val="0"/>
-              </a:spcAft>
-            </a:pPr>
-            <a:r>
-              <a:rPr sz="1100" b="0" i="0">
-                <a:solidFill>
-                  <a:srgbClr val="C9D8EC"/>
-                </a:solidFill>
-                <a:latin typeface="Consolas"/>
-              </a:rPr>
-              <a:t>ACT IV</a:t>
-            </a:r>
-          </a:p>
-        </p:txBody>
-      </p:sp>
-      <p:sp>
-        <p:nvSpPr>
-          <p:cNvPr id="5" name="TextBox 4"/>
-          <p:cNvSpPr txBox="1"/>
-          <p:nvPr/>
-        </p:nvSpPr>
-        <p:spPr>
-          <a:xfrm>
-            <a:off x="566928" y="1783080"/>
-            <a:ext cx="7223760" cy="1828800"/>
-          </a:xfrm>
-          <a:prstGeom prst="rect">
-            <a:avLst/>
-          </a:prstGeom>
-          <a:noFill/>
-        </p:spPr>
-        <p:txBody>
-          <a:bodyPr wrap="square" lIns="0" rIns="0" tIns="0" bIns="0">
-            <a:spAutoFit/>
-          </a:bodyPr>
-          <a:lstStyle/>
-          <a:p>
-            <a:pPr>
-              <a:lnSpc>
-                <a:spcPct val="102000"/>
-              </a:lnSpc>
-              <a:spcBef>
-                <a:spcPts val="0"/>
-              </a:spcBef>
-              <a:spcAft>
-                <a:spcPts val="0"/>
-              </a:spcAft>
-            </a:pPr>
-            <a:r>
-              <a:rPr sz="4000" b="0" i="0">
-                <a:solidFill>
-                  <a:srgbClr val="FCFCFB"/>
-                </a:solidFill>
-                <a:latin typeface="Georgia"/>
-              </a:rPr>
-              <a:t>What this means for development frameworks</a:t>
-            </a:r>
-          </a:p>
-        </p:txBody>
-      </p:sp>
-      <p:sp>
-        <p:nvSpPr>
-          <p:cNvPr id="6" name="TextBox 5"/>
-          <p:cNvSpPr txBox="1"/>
-          <p:nvPr/>
-        </p:nvSpPr>
-        <p:spPr>
-          <a:xfrm>
-            <a:off x="566928" y="3886200"/>
-            <a:ext cx="6766560" cy="1463040"/>
-          </a:xfrm>
-          <a:prstGeom prst="rect">
-            <a:avLst/>
-          </a:prstGeom>
-          <a:noFill/>
-        </p:spPr>
-        <p:txBody>
-          <a:bodyPr wrap="square" lIns="0" rIns="0" tIns="0" bIns="0">
-            <a:spAutoFit/>
-          </a:bodyPr>
-          <a:lstStyle/>
-          <a:p>
-            <a:pPr>
-              <a:lnSpc>
-                <a:spcPct val="135000"/>
-              </a:lnSpc>
-              <a:spcBef>
-                <a:spcPts val="0"/>
-              </a:spcBef>
-              <a:spcAft>
-                <a:spcPts val="0"/>
-              </a:spcAft>
-            </a:pPr>
-            <a:r>
-              <a:rPr sz="1550" b="0" i="1">
-                <a:solidFill>
-                  <a:srgbClr val="9AA4B0"/>
-                </a:solidFill>
-                <a:latin typeface="Georgia"/>
-              </a:rPr>
-              <a:t>The disconnect is real and worth naming. Development frameworks have done their job of tracking progress on development. But the components that predict individual lived experience are ones these frameworks are not currently built to see — because of construction choices, variable saturation, or coverage that was never collected.</a:t>
-            </a:r>
-          </a:p>
-        </p:txBody>
-      </p:sp>
-      <p:sp>
-        <p:nvSpPr>
-          <p:cNvPr id="7" name="TextBox 6"/>
-          <p:cNvSpPr txBox="1"/>
-          <p:nvPr/>
-        </p:nvSpPr>
-        <p:spPr>
-          <a:xfrm>
-            <a:off x="566928" y="5623560"/>
-            <a:ext cx="3503066" cy="914400"/>
-          </a:xfrm>
-          <a:prstGeom prst="rect">
-            <a:avLst/>
-          </a:prstGeom>
-          <a:noFill/>
-        </p:spPr>
-        <p:txBody>
-          <a:bodyPr wrap="square" lIns="0" rIns="0" tIns="0" bIns="0">
-            <a:spAutoFit/>
-          </a:bodyPr>
-          <a:lstStyle/>
-          <a:p>
-            <a:pPr>
-              <a:spcBef>
-                <a:spcPts val="0"/>
-              </a:spcBef>
-              <a:spcAft>
-                <a:spcPts val="400"/>
-              </a:spcAft>
-            </a:pPr>
-            <a:r>
-              <a:rPr sz="2200" b="0" i="0">
-                <a:solidFill>
-                  <a:srgbClr val="FCFCFB"/>
-                </a:solidFill>
-                <a:latin typeface="Consolas"/>
-              </a:rPr>
-              <a:t>3 vs. 1</a:t>
-            </a:r>
-          </a:p>
-          <a:p>
-            <a:pPr>
-              <a:lnSpc>
-                <a:spcPct val="120000"/>
-              </a:lnSpc>
-              <a:spcBef>
-                <a:spcPts val="0"/>
-              </a:spcBef>
-              <a:spcAft>
-                <a:spcPts val="0"/>
-              </a:spcAft>
-            </a:pPr>
-            <a:r>
-              <a:rPr sz="1000" b="0" i="0">
-                <a:solidFill>
-                  <a:srgbClr val="8A94A0"/>
-                </a:solidFill>
-                <a:latin typeface="Calibri"/>
-              </a:rPr>
-              <a:t>domains the HDI can test for wellbeing, vs. social trust</a:t>
-            </a:r>
-          </a:p>
-        </p:txBody>
-      </p:sp>
-      <p:sp>
-        <p:nvSpPr>
-          <p:cNvPr id="8" name="TextBox 7"/>
-          <p:cNvSpPr txBox="1"/>
-          <p:nvPr/>
-        </p:nvSpPr>
-        <p:spPr>
-          <a:xfrm>
-            <a:off x="4344314" y="5623560"/>
-            <a:ext cx="3503066" cy="914400"/>
-          </a:xfrm>
-          <a:prstGeom prst="rect">
-            <a:avLst/>
-          </a:prstGeom>
-          <a:noFill/>
-        </p:spPr>
-        <p:txBody>
-          <a:bodyPr wrap="square" lIns="0" rIns="0" tIns="0" bIns="0">
-            <a:spAutoFit/>
-          </a:bodyPr>
-          <a:lstStyle/>
-          <a:p>
-            <a:pPr>
-              <a:spcBef>
-                <a:spcPts val="0"/>
-              </a:spcBef>
-              <a:spcAft>
-                <a:spcPts val="400"/>
-              </a:spcAft>
-            </a:pPr>
-            <a:r>
-              <a:rPr sz="2200" b="0" i="0">
-                <a:solidFill>
-                  <a:srgbClr val="FCFCFB"/>
-                </a:solidFill>
-                <a:latin typeface="Consolas"/>
-              </a:rPr>
-              <a:t>42 vs. 661</a:t>
-            </a:r>
-          </a:p>
-          <a:p>
-            <a:pPr>
-              <a:lnSpc>
-                <a:spcPct val="120000"/>
-              </a:lnSpc>
-              <a:spcBef>
-                <a:spcPts val="0"/>
-              </a:spcBef>
-              <a:spcAft>
-                <a:spcPts val="0"/>
-              </a:spcAft>
-            </a:pPr>
-            <a:r>
-              <a:rPr sz="1000" b="0" i="0">
-                <a:solidFill>
-                  <a:srgbClr val="8A94A0"/>
-                </a:solidFill>
-                <a:latin typeface="Calibri"/>
-              </a:rPr>
-              <a:t>countries with SDG data, vs. series in the database</a:t>
-            </a:r>
-          </a:p>
-        </p:txBody>
-      </p:sp>
-      <p:sp>
-        <p:nvSpPr>
-          <p:cNvPr id="9" name="TextBox 8"/>
-          <p:cNvSpPr txBox="1"/>
-          <p:nvPr/>
-        </p:nvSpPr>
-        <p:spPr>
-          <a:xfrm>
-            <a:off x="8121700" y="5623560"/>
-            <a:ext cx="3503066" cy="914400"/>
-          </a:xfrm>
-          <a:prstGeom prst="rect">
-            <a:avLst/>
-          </a:prstGeom>
-          <a:noFill/>
-        </p:spPr>
-        <p:txBody>
-          <a:bodyPr wrap="square" lIns="0" rIns="0" tIns="0" bIns="0">
-            <a:spAutoFit/>
-          </a:bodyPr>
-          <a:lstStyle/>
-          <a:p>
-            <a:pPr>
-              <a:spcBef>
-                <a:spcPts val="0"/>
-              </a:spcBef>
-              <a:spcAft>
-                <a:spcPts val="400"/>
-              </a:spcAft>
-            </a:pPr>
-            <a:r>
-              <a:rPr sz="2200" b="0" i="0">
-                <a:solidFill>
-                  <a:srgbClr val="FCFCFB"/>
-                </a:solidFill>
-                <a:latin typeface="Consolas"/>
-              </a:rPr>
-              <a:t>0.041</a:t>
-            </a:r>
-          </a:p>
-          <a:p>
-            <a:pPr>
-              <a:lnSpc>
-                <a:spcPct val="120000"/>
-              </a:lnSpc>
-              <a:spcBef>
-                <a:spcPts val="0"/>
-              </a:spcBef>
-              <a:spcAft>
-                <a:spcPts val="0"/>
-              </a:spcAft>
-            </a:pPr>
-            <a:r>
-              <a:rPr sz="1000" b="0" i="0">
-                <a:solidFill>
-                  <a:srgbClr val="8A94A0"/>
-                </a:solidFill>
-                <a:latin typeface="Calibri"/>
-              </a:rPr>
-              <a:t>median R² for trust — below income, health, education individually, above none</a:t>
+              <a:t>Whether development measurement should be redesigned with wellbeing in mind is beyond this scope. But if it is, this evidence suggests the measurement should be different: more attentive to which variables still move, which constructs predict outcomes, and which domains are collected at all.</a:t>
             </a:r>
           </a:p>
         </p:txBody>
@@ -8610,64 +8305,146 @@
         <p:spPr>
           <a:xfrm>
             <a:off x="566928" y="502920"/>
-            <a:ext cx="8595360" cy="274320"/>
-          </a:xfrm>
-          <a:prstGeom prst="rect">
-            <a:avLst/>
-          </a:prstGeom>
-          <a:noFill/>
-        </p:spPr>
-        <p:txBody>
-          <a:bodyPr wrap="square" lIns="0" rIns="0" tIns="0" bIns="0">
-            <a:spAutoFit/>
-          </a:bodyPr>
-          <a:lstStyle/>
-          <a:p>
-            <a:pPr>
-              <a:spcBef>
-                <a:spcPts val="0"/>
-              </a:spcBef>
-              <a:spcAft>
-                <a:spcPts val="0"/>
-              </a:spcAft>
-            </a:pPr>
-            <a:r>
-              <a:rPr sz="1000" b="0" i="0">
-                <a:solidFill>
-                  <a:srgbClr val="A63A30"/>
+            <a:ext cx="8229600" cy="822960"/>
+          </a:xfrm>
+          <a:prstGeom prst="rect">
+            <a:avLst/>
+          </a:prstGeom>
+          <a:noFill/>
+        </p:spPr>
+        <p:txBody>
+          <a:bodyPr wrap="square" lIns="0" rIns="0" tIns="0" bIns="0">
+            <a:spAutoFit/>
+          </a:bodyPr>
+          <a:lstStyle/>
+          <a:p>
+            <a:pPr>
+              <a:spcBef>
+                <a:spcPts val="0"/>
+              </a:spcBef>
+              <a:spcAft>
+                <a:spcPts val="600"/>
+              </a:spcAft>
+            </a:pPr>
+            <a:r>
+              <a:rPr sz="3200" b="0" i="0">
+                <a:solidFill>
+                  <a:srgbClr val="14171C"/>
+                </a:solidFill>
+                <a:latin typeface="Georgia"/>
+              </a:rPr>
+              <a:t>Decisions for the team</a:t>
+            </a:r>
+          </a:p>
+          <a:p>
+            <a:pPr>
+              <a:spcBef>
+                <a:spcPts val="0"/>
+              </a:spcBef>
+              <a:spcAft>
+                <a:spcPts val="0"/>
+              </a:spcAft>
+            </a:pPr>
+            <a:r>
+              <a:rPr sz="1300" b="0" i="0">
+                <a:solidFill>
+                  <a:srgbClr val="5A6068"/>
+                </a:solidFill>
+                <a:latin typeface="Calibri"/>
+              </a:rPr>
+              <a:t>4 things the acts do not settle, in the order they block drafting.</a:t>
+            </a:r>
+          </a:p>
+        </p:txBody>
+      </p:sp>
+      <p:sp>
+        <p:nvSpPr>
+          <p:cNvPr id="3" name="Rectangle 2"/>
+          <p:cNvSpPr/>
+          <p:nvPr/>
+        </p:nvSpPr>
+        <p:spPr>
+          <a:xfrm>
+            <a:off x="566928" y="1828800"/>
+            <a:ext cx="3472586" cy="25400"/>
+          </a:xfrm>
+          <a:prstGeom prst="rect">
+            <a:avLst/>
+          </a:prstGeom>
+          <a:solidFill>
+            <a:srgbClr val="17549E"/>
+          </a:solidFill>
+          <a:ln>
+            <a:noFill/>
+          </a:ln>
+          <a:effectLst/>
+        </p:spPr>
+        <p:style>
+          <a:lnRef idx="1">
+            <a:schemeClr val="accent1"/>
+          </a:lnRef>
+          <a:fillRef idx="3">
+            <a:schemeClr val="accent1"/>
+          </a:fillRef>
+          <a:effectRef idx="2">
+            <a:schemeClr val="accent1"/>
+          </a:effectRef>
+          <a:fontRef idx="minor">
+            <a:schemeClr val="lt1"/>
+          </a:fontRef>
+        </p:style>
+        <p:txBody>
+          <a:bodyPr rtlCol="0" anchor="ctr"/>
+          <a:lstStyle/>
+          <a:p>
+            <a:pPr algn="ctr"/>
+          </a:p>
+        </p:txBody>
+      </p:sp>
+      <p:sp>
+        <p:nvSpPr>
+          <p:cNvPr id="4" name="TextBox 3"/>
+          <p:cNvSpPr txBox="1"/>
+          <p:nvPr/>
+        </p:nvSpPr>
+        <p:spPr>
+          <a:xfrm>
+            <a:off x="566928" y="2011680"/>
+            <a:ext cx="3472586" cy="1828800"/>
+          </a:xfrm>
+          <a:prstGeom prst="rect">
+            <a:avLst/>
+          </a:prstGeom>
+          <a:noFill/>
+        </p:spPr>
+        <p:txBody>
+          <a:bodyPr wrap="square" lIns="0" rIns="0" tIns="0" bIns="0">
+            <a:spAutoFit/>
+          </a:bodyPr>
+          <a:lstStyle/>
+          <a:p>
+            <a:pPr>
+              <a:spcBef>
+                <a:spcPts val="0"/>
+              </a:spcBef>
+              <a:spcAft>
+                <a:spcPts val="700"/>
+              </a:spcAft>
+            </a:pPr>
+            <a:r>
+              <a:rPr sz="1050" b="0" i="0">
+                <a:solidFill>
+                  <a:srgbClr val="17549E"/>
                 </a:solidFill>
                 <a:latin typeface="Consolas"/>
               </a:rPr>
-              <a:t>THE DISCONNECT</a:t>
-            </a:r>
-          </a:p>
-        </p:txBody>
-      </p:sp>
-      <p:sp>
-        <p:nvSpPr>
-          <p:cNvPr id="3" name="TextBox 2"/>
-          <p:cNvSpPr txBox="1"/>
-          <p:nvPr/>
-        </p:nvSpPr>
-        <p:spPr>
-          <a:xfrm>
-            <a:off x="566928" y="914400"/>
-            <a:ext cx="8595360" cy="1371600"/>
-          </a:xfrm>
-          <a:prstGeom prst="rect">
-            <a:avLst/>
-          </a:prstGeom>
-          <a:noFill/>
-        </p:spPr>
-        <p:txBody>
-          <a:bodyPr wrap="square" lIns="0" rIns="0" tIns="0" bIns="0">
-            <a:spAutoFit/>
-          </a:bodyPr>
-          <a:lstStyle/>
+              <a:t>FIGURE COUNT</a:t>
+            </a:r>
+          </a:p>
           <a:p>
             <a:pPr>
               <a:lnSpc>
-                <a:spcPct val="108000"/>
+                <a:spcPct val="130000"/>
               </a:lnSpc>
               <a:spcBef>
                 <a:spcPts val="0"/>
@@ -8677,107 +8454,322 @@
               </a:spcAft>
             </a:pPr>
             <a:r>
-              <a:rPr sz="2700" b="0" i="0">
-                <a:solidFill>
-                  <a:srgbClr val="14171C"/>
-                </a:solidFill>
-                <a:latin typeface="Georgia"/>
-              </a:rPr>
-              <a:t>These frameworks work for development. They do not work for wellbeing.</a:t>
-            </a:r>
-          </a:p>
-        </p:txBody>
-      </p:sp>
-      <p:sp>
-        <p:nvSpPr>
-          <p:cNvPr id="4" name="TextBox 3"/>
-          <p:cNvSpPr txBox="1"/>
-          <p:nvPr/>
-        </p:nvSpPr>
-        <p:spPr>
-          <a:xfrm>
-            <a:off x="566928" y="2286000"/>
-            <a:ext cx="8595360" cy="3840480"/>
-          </a:xfrm>
-          <a:prstGeom prst="rect">
-            <a:avLst/>
-          </a:prstGeom>
-          <a:noFill/>
-        </p:spPr>
-        <p:txBody>
-          <a:bodyPr wrap="square" lIns="0" rIns="0" tIns="0" bIns="0">
-            <a:spAutoFit/>
-          </a:bodyPr>
-          <a:lstStyle/>
+              <a:rPr sz="1100" b="0" i="0">
+                <a:solidFill>
+                  <a:srgbClr val="5A6068"/>
+                </a:solidFill>
+                <a:latin typeface="Calibri"/>
+              </a:rPr>
+              <a:t>Commentaries allow one or two. Proposed: three-panel composite as Figure 1 and domain scorecard as Figure 2. Everything else supplementary.</a:t>
+            </a:r>
+          </a:p>
+        </p:txBody>
+      </p:sp>
+      <p:sp>
+        <p:nvSpPr>
+          <p:cNvPr id="5" name="Rectangle 4"/>
+          <p:cNvSpPr/>
+          <p:nvPr/>
+        </p:nvSpPr>
+        <p:spPr>
+          <a:xfrm>
+            <a:off x="4359554" y="1828800"/>
+            <a:ext cx="3472586" cy="25400"/>
+          </a:xfrm>
+          <a:prstGeom prst="rect">
+            <a:avLst/>
+          </a:prstGeom>
+          <a:solidFill>
+            <a:srgbClr val="17549E"/>
+          </a:solidFill>
+          <a:ln>
+            <a:noFill/>
+          </a:ln>
+          <a:effectLst/>
+        </p:spPr>
+        <p:style>
+          <a:lnRef idx="1">
+            <a:schemeClr val="accent1"/>
+          </a:lnRef>
+          <a:fillRef idx="3">
+            <a:schemeClr val="accent1"/>
+          </a:fillRef>
+          <a:effectRef idx="2">
+            <a:schemeClr val="accent1"/>
+          </a:effectRef>
+          <a:fontRef idx="minor">
+            <a:schemeClr val="lt1"/>
+          </a:fontRef>
+        </p:style>
+        <p:txBody>
+          <a:bodyPr rtlCol="0" anchor="ctr"/>
+          <a:lstStyle/>
+          <a:p>
+            <a:pPr algn="ctr"/>
+          </a:p>
+        </p:txBody>
+      </p:sp>
+      <p:sp>
+        <p:nvSpPr>
+          <p:cNvPr id="6" name="TextBox 5"/>
+          <p:cNvSpPr txBox="1"/>
+          <p:nvPr/>
+        </p:nvSpPr>
+        <p:spPr>
+          <a:xfrm>
+            <a:off x="4359554" y="2011680"/>
+            <a:ext cx="3472586" cy="1828800"/>
+          </a:xfrm>
+          <a:prstGeom prst="rect">
+            <a:avLst/>
+          </a:prstGeom>
+          <a:noFill/>
+        </p:spPr>
+        <p:txBody>
+          <a:bodyPr wrap="square" lIns="0" rIns="0" tIns="0" bIns="0">
+            <a:spAutoFit/>
+          </a:bodyPr>
+          <a:lstStyle/>
+          <a:p>
+            <a:pPr>
+              <a:spcBef>
+                <a:spcPts val="0"/>
+              </a:spcBef>
+              <a:spcAft>
+                <a:spcPts val="700"/>
+              </a:spcAft>
+            </a:pPr>
+            <a:r>
+              <a:rPr sz="1050" b="0" i="0">
+                <a:solidFill>
+                  <a:srgbClr val="17549E"/>
+                </a:solidFill>
+                <a:latin typeface="Consolas"/>
+              </a:rPr>
+              <a:t>SCOPE OF TRUST FINDINGS</a:t>
+            </a:r>
+          </a:p>
           <a:p>
             <a:pPr>
               <a:lnSpc>
-                <a:spcPct val="132000"/>
+                <a:spcPct val="130000"/>
               </a:lnSpc>
               <a:spcBef>
                 <a:spcPts val="0"/>
               </a:spcBef>
               <a:spcAft>
-                <a:spcPts val="1100"/>
-              </a:spcAft>
-            </a:pPr>
-            <a:r>
-              <a:rPr sz="1400" b="0" i="0">
+                <a:spcPts val="0"/>
+              </a:spcAft>
+            </a:pPr>
+            <a:r>
+              <a:rPr sz="1100" b="0" i="0">
                 <a:solidFill>
                   <a:srgbClr val="5A6068"/>
                 </a:solidFill>
                 <a:latin typeface="Calibri"/>
               </a:rPr>
-              <a:t>The HDI and SDG frameworks do not answer the question 'what makes people's lives better?' any more than a global income statistics database answers 'what makes a person happy?' They were designed to track development, measured at the aggregate level, with indicators chosen before the question of individual wellbeing was systematically tested. That is not a design failure; it is the intended scope.</a:t>
+              <a:t>Trust findings rest on ESS (36 European countries, individual-level). The design requires ≥4 years per country-series; only 16 of 163 SDG trust-adjacent series have that coverage, and 1 is significant. Tested cross-sectionally, 9 of 13 series are usable and 4 are significant, but all fall below HDI components on the same countries. The claim is Europe-only and rests on one instrument in each framework; it is the most tentative of the three.</a:t>
+            </a:r>
+          </a:p>
+        </p:txBody>
+      </p:sp>
+      <p:sp>
+        <p:nvSpPr>
+          <p:cNvPr id="7" name="Rectangle 6"/>
+          <p:cNvSpPr/>
+          <p:nvPr/>
+        </p:nvSpPr>
+        <p:spPr>
+          <a:xfrm>
+            <a:off x="8152180" y="1828800"/>
+            <a:ext cx="3472586" cy="25400"/>
+          </a:xfrm>
+          <a:prstGeom prst="rect">
+            <a:avLst/>
+          </a:prstGeom>
+          <a:solidFill>
+            <a:srgbClr val="17549E"/>
+          </a:solidFill>
+          <a:ln>
+            <a:noFill/>
+          </a:ln>
+          <a:effectLst/>
+        </p:spPr>
+        <p:style>
+          <a:lnRef idx="1">
+            <a:schemeClr val="accent1"/>
+          </a:lnRef>
+          <a:fillRef idx="3">
+            <a:schemeClr val="accent1"/>
+          </a:fillRef>
+          <a:effectRef idx="2">
+            <a:schemeClr val="accent1"/>
+          </a:effectRef>
+          <a:fontRef idx="minor">
+            <a:schemeClr val="lt1"/>
+          </a:fontRef>
+        </p:style>
+        <p:txBody>
+          <a:bodyPr rtlCol="0" anchor="ctr"/>
+          <a:lstStyle/>
+          <a:p>
+            <a:pPr algn="ctr"/>
+          </a:p>
+        </p:txBody>
+      </p:sp>
+      <p:sp>
+        <p:nvSpPr>
+          <p:cNvPr id="8" name="TextBox 7"/>
+          <p:cNvSpPr txBox="1"/>
+          <p:nvPr/>
+        </p:nvSpPr>
+        <p:spPr>
+          <a:xfrm>
+            <a:off x="8152180" y="2011680"/>
+            <a:ext cx="3472586" cy="1828800"/>
+          </a:xfrm>
+          <a:prstGeom prst="rect">
+            <a:avLst/>
+          </a:prstGeom>
+          <a:noFill/>
+        </p:spPr>
+        <p:txBody>
+          <a:bodyPr wrap="square" lIns="0" rIns="0" tIns="0" bIns="0">
+            <a:spAutoFit/>
+          </a:bodyPr>
+          <a:lstStyle/>
+          <a:p>
+            <a:pPr>
+              <a:spcBef>
+                <a:spcPts val="0"/>
+              </a:spcBef>
+              <a:spcAft>
+                <a:spcPts val="700"/>
+              </a:spcAft>
+            </a:pPr>
+            <a:r>
+              <a:rPr sz="1050" b="0" i="0">
+                <a:solidFill>
+                  <a:srgbClr val="17549E"/>
+                </a:solidFill>
+                <a:latin typeface="Consolas"/>
+              </a:rPr>
+              <a:t>INSTITUTIONAL CONFIDENCE VS. INTERPERSONAL TRUST</a:t>
             </a:r>
           </a:p>
           <a:p>
             <a:pPr>
               <a:lnSpc>
-                <a:spcPct val="132000"/>
+                <a:spcPct val="130000"/>
               </a:lnSpc>
               <a:spcBef>
                 <a:spcPts val="0"/>
               </a:spcBef>
               <a:spcAft>
-                <a:spcPts val="1100"/>
-              </a:spcAft>
-            </a:pPr>
-            <a:r>
-              <a:rPr sz="1400" b="0" i="0">
+                <a:spcPts val="0"/>
+              </a:spcAft>
+            </a:pPr>
+            <a:r>
+              <a:rPr sz="1100" b="0" i="0">
                 <a:solidFill>
                   <a:srgbClr val="5A6068"/>
                 </a:solidFill>
                 <a:latin typeface="Calibri"/>
               </a:rPr>
-              <a:t>But it means the gap is structural. Education's access indicators work; pooling them with constructs that do not does not fix wellbeing prediction — it just builds a worse measure. Choosing a variable for health that is closer to saturated than the outcome it predicts is a measurement choice, not an incurable problem. And when a domain is never collected, no amount of better construction on the others will reach it.</a:t>
-            </a:r>
-          </a:p>
-        </p:txBody>
-      </p:sp>
-      <p:sp>
-        <p:nvSpPr>
-          <p:cNvPr id="5" name="TextBox 4"/>
-          <p:cNvSpPr txBox="1"/>
-          <p:nvPr/>
-        </p:nvSpPr>
-        <p:spPr>
-          <a:xfrm>
-            <a:off x="11338560" y="6263640"/>
-            <a:ext cx="548640" cy="274320"/>
-          </a:xfrm>
-          <a:prstGeom prst="rect">
-            <a:avLst/>
-          </a:prstGeom>
-          <a:noFill/>
-        </p:spPr>
-        <p:txBody>
-          <a:bodyPr wrap="square" lIns="0" rIns="0" tIns="0" bIns="0">
-            <a:spAutoFit/>
-          </a:bodyPr>
-          <a:lstStyle/>
-          <a:p>
-            <a:pPr algn="r">
+              <a:t>The SDG's Goal 16 trust series measure satisfaction with public services, perceived bribery, and perceived inclusiveness in decision-making — institutional confidence, not interpersonal trust ('most people can be trusted'). These are conceptually distinct. The commentarymust be explicit that SDG16 is not a direct analogue for the ESS trust item.</a:t>
+            </a:r>
+          </a:p>
+        </p:txBody>
+      </p:sp>
+      <p:sp>
+        <p:nvSpPr>
+          <p:cNvPr id="9" name="Rectangle 8"/>
+          <p:cNvSpPr/>
+          <p:nvPr/>
+        </p:nvSpPr>
+        <p:spPr>
+          <a:xfrm>
+            <a:off x="566928" y="4069080"/>
+            <a:ext cx="3472586" cy="25400"/>
+          </a:xfrm>
+          <a:prstGeom prst="rect">
+            <a:avLst/>
+          </a:prstGeom>
+          <a:solidFill>
+            <a:srgbClr val="17549E"/>
+          </a:solidFill>
+          <a:ln>
+            <a:noFill/>
+          </a:ln>
+          <a:effectLst/>
+        </p:spPr>
+        <p:style>
+          <a:lnRef idx="1">
+            <a:schemeClr val="accent1"/>
+          </a:lnRef>
+          <a:fillRef idx="3">
+            <a:schemeClr val="accent1"/>
+          </a:fillRef>
+          <a:effectRef idx="2">
+            <a:schemeClr val="accent1"/>
+          </a:effectRef>
+          <a:fontRef idx="minor">
+            <a:schemeClr val="lt1"/>
+          </a:fontRef>
+        </p:style>
+        <p:txBody>
+          <a:bodyPr rtlCol="0" anchor="ctr"/>
+          <a:lstStyle/>
+          <a:p>
+            <a:pPr algn="ctr"/>
+          </a:p>
+        </p:txBody>
+      </p:sp>
+      <p:sp>
+        <p:nvSpPr>
+          <p:cNvPr id="10" name="TextBox 9"/>
+          <p:cNvSpPr txBox="1"/>
+          <p:nvPr/>
+        </p:nvSpPr>
+        <p:spPr>
+          <a:xfrm>
+            <a:off x="566928" y="4251960"/>
+            <a:ext cx="3472586" cy="1828800"/>
+          </a:xfrm>
+          <a:prstGeom prst="rect">
+            <a:avLst/>
+          </a:prstGeom>
+          <a:noFill/>
+        </p:spPr>
+        <p:txBody>
+          <a:bodyPr wrap="square" lIns="0" rIns="0" tIns="0" bIns="0">
+            <a:spAutoFit/>
+          </a:bodyPr>
+          <a:lstStyle/>
+          <a:p>
+            <a:pPr>
+              <a:spcBef>
+                <a:spcPts val="0"/>
+              </a:spcBef>
+              <a:spcAft>
+                <a:spcPts val="700"/>
+              </a:spcAft>
+            </a:pPr>
+            <a:r>
+              <a:rPr sz="1050" b="0" i="0">
+                <a:solidFill>
+                  <a:srgbClr val="17549E"/>
+                </a:solidFill>
+                <a:latin typeface="Consolas"/>
+              </a:rPr>
+              <a:t>THREE FAILURE MODES FRAME</a:t>
+            </a:r>
+          </a:p>
+          <a:p>
+            <a:pPr>
+              <a:lnSpc>
+                <a:spcPct val="130000"/>
+              </a:lnSpc>
               <a:spcBef>
                 <a:spcPts val="0"/>
               </a:spcBef>
@@ -8788,11 +8780,11 @@
             <a:r>
               <a:rPr sz="1100" b="0" i="0">
                 <a:solidFill>
-                  <a:srgbClr val="868D96"/>
-                </a:solidFill>
-                <a:latin typeface="Consolas"/>
-              </a:rPr>
-              <a:t>IV</a:t>
+                  <a:srgbClr val="5A6068"/>
+                </a:solidFill>
+                <a:latin typeface="Calibri"/>
+              </a:rPr>
+              <a:t>The narrative positions education's, health's, and trust's findings as evidence of three different ways frameworks lose sight of domains that matter: wrong construct, saturated variable, coverage gap. This is a meta-finding about measurement, not about the domains themselves.</a:t>
             </a:r>
           </a:p>
         </p:txBody>
@@ -8811,7 +8803,7 @@
     <p:bg>
       <p:bgPr>
         <a:solidFill>
-          <a:srgbClr val="FCFCFB"/>
+          <a:srgbClr val="14171C"/>
         </a:solidFill>
         <a:effectLst/>
       </p:bgPr>
@@ -8831,815 +8823,38 @@
         </p:nvSpPr>
         <p:spPr>
           <a:xfrm>
-            <a:off x="566928" y="502920"/>
-            <a:ext cx="8595360" cy="274320"/>
-          </a:xfrm>
-          <a:prstGeom prst="rect">
-            <a:avLst/>
-          </a:prstGeom>
-          <a:noFill/>
-        </p:spPr>
-        <p:txBody>
-          <a:bodyPr wrap="square" lIns="0" rIns="0" tIns="0" bIns="0">
-            <a:spAutoFit/>
-          </a:bodyPr>
-          <a:lstStyle/>
-          <a:p>
-            <a:pPr>
-              <a:spcBef>
-                <a:spcPts val="0"/>
-              </a:spcBef>
-              <a:spcAft>
-                <a:spcPts val="0"/>
-              </a:spcAft>
-            </a:pPr>
-            <a:r>
-              <a:rPr sz="1000" b="0" i="0">
-                <a:solidFill>
-                  <a:srgbClr val="A63A30"/>
-                </a:solidFill>
-                <a:latin typeface="Consolas"/>
-              </a:rPr>
-              <a:t>IMPLICATION 1 · MEASUREMENT CHOICES CONSTRAIN WHAT FRAMEWORKS CAN SEE</a:t>
-            </a:r>
-          </a:p>
-        </p:txBody>
-      </p:sp>
-      <p:sp>
-        <p:nvSpPr>
-          <p:cNvPr id="3" name="TextBox 2"/>
-          <p:cNvSpPr txBox="1"/>
-          <p:nvPr/>
-        </p:nvSpPr>
-        <p:spPr>
-          <a:xfrm>
-            <a:off x="566928" y="914400"/>
-            <a:ext cx="8595360" cy="1371600"/>
-          </a:xfrm>
-          <a:prstGeom prst="rect">
-            <a:avLst/>
-          </a:prstGeom>
-          <a:noFill/>
-        </p:spPr>
-        <p:txBody>
-          <a:bodyPr wrap="square" lIns="0" rIns="0" tIns="0" bIns="0">
-            <a:spAutoFit/>
-          </a:bodyPr>
-          <a:lstStyle/>
-          <a:p>
-            <a:pPr>
-              <a:lnSpc>
-                <a:spcPct val="108000"/>
-              </a:lnSpc>
-              <a:spcBef>
-                <a:spcPts val="0"/>
-              </a:spcBef>
-              <a:spcAft>
-                <a:spcPts val="0"/>
-              </a:spcAft>
-            </a:pPr>
-            <a:r>
-              <a:rPr sz="2700" b="0" i="0">
-                <a:solidFill>
-                  <a:srgbClr val="14171C"/>
+            <a:off x="566928" y="2743200"/>
+            <a:ext cx="8229600" cy="1371600"/>
+          </a:xfrm>
+          <a:prstGeom prst="rect">
+            <a:avLst/>
+          </a:prstGeom>
+          <a:noFill/>
+        </p:spPr>
+        <p:txBody>
+          <a:bodyPr wrap="square" lIns="0" rIns="0" tIns="0" bIns="0">
+            <a:spAutoFit/>
+          </a:bodyPr>
+          <a:lstStyle/>
+          <a:p>
+            <a:pPr>
+              <a:spcBef>
+                <a:spcPts val="0"/>
+              </a:spcBef>
+              <a:spcAft>
+                <a:spcPts val="1000"/>
+              </a:spcAft>
+            </a:pPr>
+            <a:r>
+              <a:rPr sz="4000" b="0" i="0">
+                <a:solidFill>
+                  <a:srgbClr val="FCFCFB"/>
                 </a:solidFill>
                 <a:latin typeface="Georgia"/>
               </a:rPr>
-              <a:t>Education and health: the case for measurement specificity</a:t>
-            </a:r>
-          </a:p>
-        </p:txBody>
-      </p:sp>
-      <p:sp>
-        <p:nvSpPr>
-          <p:cNvPr id="4" name="TextBox 3"/>
-          <p:cNvSpPr txBox="1"/>
-          <p:nvPr/>
-        </p:nvSpPr>
-        <p:spPr>
-          <a:xfrm>
-            <a:off x="566928" y="2286000"/>
-            <a:ext cx="8595360" cy="3840480"/>
-          </a:xfrm>
-          <a:prstGeom prst="rect">
-            <a:avLst/>
-          </a:prstGeom>
-          <a:noFill/>
-        </p:spPr>
-        <p:txBody>
-          <a:bodyPr wrap="square" lIns="0" rIns="0" tIns="0" bIns="0">
-            <a:spAutoFit/>
-          </a:bodyPr>
-          <a:lstStyle/>
-          <a:p>
-            <a:pPr>
-              <a:lnSpc>
-                <a:spcPct val="132000"/>
-              </a:lnSpc>
-              <a:spcBef>
-                <a:spcPts val="0"/>
-              </a:spcBef>
-              <a:spcAft>
-                <a:spcPts val="1100"/>
-              </a:spcAft>
-            </a:pPr>
-            <a:r>
-              <a:rPr sz="1400" b="0" i="0">
-                <a:solidFill>
-                  <a:srgbClr val="5A6068"/>
-                </a:solidFill>
-                <a:latin typeface="Calibri"/>
-              </a:rPr>
-              <a:t>Education is significant everywhere it is measured as attainment, but nearly invisible in SDG4 because most indicators measure something else. Health is nearly invisible in the HDI because life expectancy has saturated. Neither domain has changed; the frameworks' construction choices have.</a:t>
-            </a:r>
-          </a:p>
-          <a:p>
-            <a:pPr>
-              <a:lnSpc>
-                <a:spcPct val="132000"/>
-              </a:lnSpc>
-              <a:spcBef>
-                <a:spcPts val="0"/>
-              </a:spcBef>
-              <a:spcAft>
-                <a:spcPts val="1100"/>
-              </a:spcAft>
-            </a:pPr>
-            <a:r>
-              <a:rPr sz="1400" b="0" i="0">
-                <a:solidFill>
-                  <a:srgbClr val="5A6068"/>
-                </a:solidFill>
-                <a:latin typeface="Calibri"/>
-              </a:rPr>
-              <a:t>For education, this suggests development measurement should weigh access and completion more heavily than parity ratios in wellbeing contexts — not universally, but with explicit construction choices that account for what is known to matter. For health, it suggests that wellbeing-motivated measurement may need different variables at different development levels: life expectancy in lower-income settings, self-reported health or specific conditions in saturated ones.</a:t>
-            </a:r>
-          </a:p>
-        </p:txBody>
-      </p:sp>
-      <p:sp>
-        <p:nvSpPr>
-          <p:cNvPr id="5" name="TextBox 4"/>
-          <p:cNvSpPr txBox="1"/>
-          <p:nvPr/>
-        </p:nvSpPr>
-        <p:spPr>
-          <a:xfrm>
-            <a:off x="11338560" y="6263640"/>
-            <a:ext cx="548640" cy="274320"/>
-          </a:xfrm>
-          <a:prstGeom prst="rect">
-            <a:avLst/>
-          </a:prstGeom>
-          <a:noFill/>
-        </p:spPr>
-        <p:txBody>
-          <a:bodyPr wrap="square" lIns="0" rIns="0" tIns="0" bIns="0">
-            <a:spAutoFit/>
-          </a:bodyPr>
-          <a:lstStyle/>
-          <a:p>
-            <a:pPr algn="r">
-              <a:spcBef>
-                <a:spcPts val="0"/>
-              </a:spcBef>
-              <a:spcAft>
-                <a:spcPts val="0"/>
-              </a:spcAft>
-            </a:pPr>
-            <a:r>
-              <a:rPr sz="1100" b="0" i="0">
-                <a:solidFill>
-                  <a:srgbClr val="868D96"/>
-                </a:solidFill>
-                <a:latin typeface="Consolas"/>
-              </a:rPr>
-              <a:t>IV</a:t>
-            </a:r>
-          </a:p>
-        </p:txBody>
-      </p:sp>
-    </p:spTree>
-  </p:cSld>
-  <p:clrMapOvr>
-    <a:masterClrMapping/>
-  </p:clrMapOvr>
-</p:sld>
-</file>
-
-<file path=ppt/slides/slide27.xml><?xml version="1.0" encoding="utf-8"?>
-<p:sld xmlns:a="http://schemas.openxmlformats.org/drawingml/2006/main" xmlns:p="http://schemas.openxmlformats.org/presentationml/2006/main" xmlns:r="http://schemas.openxmlformats.org/officeDocument/2006/relationships">
-  <p:cSld>
-    <p:bg>
-      <p:bgPr>
-        <a:solidFill>
-          <a:srgbClr val="FCFCFB"/>
-        </a:solidFill>
-        <a:effectLst/>
-      </p:bgPr>
-    </p:bg>
-    <p:spTree>
-      <p:nvGrpSpPr>
-        <p:cNvPr id="1" name=""/>
-        <p:cNvGrpSpPr/>
-        <p:nvPr/>
-      </p:nvGrpSpPr>
-      <p:grpSpPr/>
-      <p:sp>
-        <p:nvSpPr>
-          <p:cNvPr id="2" name="TextBox 1"/>
-          <p:cNvSpPr txBox="1"/>
-          <p:nvPr/>
-        </p:nvSpPr>
-        <p:spPr>
-          <a:xfrm>
-            <a:off x="566928" y="502920"/>
-            <a:ext cx="8595360" cy="274320"/>
-          </a:xfrm>
-          <a:prstGeom prst="rect">
-            <a:avLst/>
-          </a:prstGeom>
-          <a:noFill/>
-        </p:spPr>
-        <p:txBody>
-          <a:bodyPr wrap="square" lIns="0" rIns="0" tIns="0" bIns="0">
-            <a:spAutoFit/>
-          </a:bodyPr>
-          <a:lstStyle/>
-          <a:p>
-            <a:pPr>
-              <a:spcBef>
-                <a:spcPts val="0"/>
-              </a:spcBef>
-              <a:spcAft>
-                <a:spcPts val="0"/>
-              </a:spcAft>
-            </a:pPr>
-            <a:r>
-              <a:rPr sz="1000" b="0" i="0">
-                <a:solidFill>
-                  <a:srgbClr val="A63A30"/>
-                </a:solidFill>
-                <a:latin typeface="Consolas"/>
-              </a:rPr>
-              <a:t>IMPLICATION 2 · COVERAGE GAPS ARE MORE FUNDAMENTAL THAN CONSTRUCT CHOICE</a:t>
-            </a:r>
-          </a:p>
-        </p:txBody>
-      </p:sp>
-      <p:sp>
-        <p:nvSpPr>
-          <p:cNvPr id="3" name="TextBox 2"/>
-          <p:cNvSpPr txBox="1"/>
-          <p:nvPr/>
-        </p:nvSpPr>
-        <p:spPr>
-          <a:xfrm>
-            <a:off x="566928" y="914400"/>
-            <a:ext cx="8595360" cy="1371600"/>
-          </a:xfrm>
-          <a:prstGeom prst="rect">
-            <a:avLst/>
-          </a:prstGeom>
-          <a:noFill/>
-        </p:spPr>
-        <p:txBody>
-          <a:bodyPr wrap="square" lIns="0" rIns="0" tIns="0" bIns="0">
-            <a:spAutoFit/>
-          </a:bodyPr>
-          <a:lstStyle/>
-          <a:p>
-            <a:pPr>
-              <a:lnSpc>
-                <a:spcPct val="108000"/>
-              </a:lnSpc>
-              <a:spcBef>
-                <a:spcPts val="0"/>
-              </a:spcBef>
-              <a:spcAft>
-                <a:spcPts val="0"/>
-              </a:spcAft>
-            </a:pPr>
-            <a:r>
-              <a:rPr sz="2700" b="0" i="0">
-                <a:solidFill>
-                  <a:srgbClr val="14171C"/>
-                </a:solidFill>
-                <a:latin typeface="Georgia"/>
-              </a:rPr>
-              <a:t>Social trust: why you cannot fix a measurement by measuring better</a:t>
-            </a:r>
-          </a:p>
-        </p:txBody>
-      </p:sp>
-      <p:sp>
-        <p:nvSpPr>
-          <p:cNvPr id="4" name="TextBox 3"/>
-          <p:cNvSpPr txBox="1"/>
-          <p:nvPr/>
-        </p:nvSpPr>
-        <p:spPr>
-          <a:xfrm>
-            <a:off x="566928" y="2286000"/>
-            <a:ext cx="8595360" cy="3840480"/>
-          </a:xfrm>
-          <a:prstGeom prst="rect">
-            <a:avLst/>
-          </a:prstGeom>
-          <a:noFill/>
-        </p:spPr>
-        <p:txBody>
-          <a:bodyPr wrap="square" lIns="0" rIns="0" tIns="0" bIns="0">
-            <a:spAutoFit/>
-          </a:bodyPr>
-          <a:lstStyle/>
-          <a:p>
-            <a:pPr>
-              <a:lnSpc>
-                <a:spcPct val="132000"/>
-              </a:lnSpc>
-              <a:spcBef>
-                <a:spcPts val="0"/>
-              </a:spcBef>
-              <a:spcAft>
-                <a:spcPts val="1100"/>
-              </a:spcAft>
-            </a:pPr>
-            <a:r>
-              <a:rPr sz="1400" b="0" i="0">
-                <a:solidFill>
-                  <a:srgbClr val="5A6068"/>
-                </a:solidFill>
-                <a:latin typeface="Calibri"/>
-              </a:rPr>
-              <a:t>Social trust is the most tentative finding here. The ESS is Europe-only, across 36 countries, and relies on a single item. That bounds the claim: the pattern holds in Europe, with a wellbeing survey, on a self-report basis. It does not claim universality.</a:t>
-            </a:r>
-          </a:p>
-          <a:p>
-            <a:pPr>
-              <a:lnSpc>
-                <a:spcPct val="132000"/>
-              </a:lnSpc>
-              <a:spcBef>
-                <a:spcPts val="0"/>
-              </a:spcBef>
-              <a:spcAft>
-                <a:spcPts val="1100"/>
-              </a:spcAft>
-            </a:pPr>
-            <a:r>
-              <a:rPr sz="1400" b="0" i="0">
-                <a:solidFill>
-                  <a:srgbClr val="5A6068"/>
-                </a:solidFill>
-                <a:latin typeface="Calibri"/>
-              </a:rPr>
-              <a:t>But the reason it is tentative points to the deepest problem: trust is not collected at global scale in either framework. The SDG database has 13 series adjacent to trust, but they measure institutional confidence, not interpersonal trust, and they are intermittent (147 of 163 country-series have fewer than four years of data). This is not a construct-choice problem that better measurement can solve. It is a coverage gap that requires deciding to collect the data in the first place.</a:t>
-            </a:r>
-          </a:p>
-          <a:p>
-            <a:pPr>
-              <a:lnSpc>
-                <a:spcPct val="132000"/>
-              </a:lnSpc>
-              <a:spcBef>
-                <a:spcPts val="0"/>
-              </a:spcBef>
-              <a:spcAft>
-                <a:spcPts val="1100"/>
-              </a:spcAft>
-            </a:pPr>
-            <a:r>
-              <a:rPr sz="1400" b="0" i="0">
-                <a:solidFill>
-                  <a:srgbClr val="5A6068"/>
-                </a:solidFill>
-                <a:latin typeface="Calibri"/>
-              </a:rPr>
-              <a:t>For wellbeing-conscious development monitoring, this suggests either building interpersonal-trust measurement into the core frameworks, or acknowledging that other surveys (the ESS, Gallup World Poll, World Values Survey) may be more suitable for understanding what shapes lived experience.</a:t>
-            </a:r>
-          </a:p>
-        </p:txBody>
-      </p:sp>
-      <p:sp>
-        <p:nvSpPr>
-          <p:cNvPr id="5" name="TextBox 4"/>
-          <p:cNvSpPr txBox="1"/>
-          <p:nvPr/>
-        </p:nvSpPr>
-        <p:spPr>
-          <a:xfrm>
-            <a:off x="11338560" y="6263640"/>
-            <a:ext cx="548640" cy="274320"/>
-          </a:xfrm>
-          <a:prstGeom prst="rect">
-            <a:avLst/>
-          </a:prstGeom>
-          <a:noFill/>
-        </p:spPr>
-        <p:txBody>
-          <a:bodyPr wrap="square" lIns="0" rIns="0" tIns="0" bIns="0">
-            <a:spAutoFit/>
-          </a:bodyPr>
-          <a:lstStyle/>
-          <a:p>
-            <a:pPr algn="r">
-              <a:spcBef>
-                <a:spcPts val="0"/>
-              </a:spcBef>
-              <a:spcAft>
-                <a:spcPts val="0"/>
-              </a:spcAft>
-            </a:pPr>
-            <a:r>
-              <a:rPr sz="1100" b="0" i="0">
-                <a:solidFill>
-                  <a:srgbClr val="868D96"/>
-                </a:solidFill>
-                <a:latin typeface="Consolas"/>
-              </a:rPr>
-              <a:t>IV</a:t>
-            </a:r>
-          </a:p>
-        </p:txBody>
-      </p:sp>
-    </p:spTree>
-  </p:cSld>
-  <p:clrMapOvr>
-    <a:masterClrMapping/>
-  </p:clrMapOvr>
-</p:sld>
-</file>
-
-<file path=ppt/slides/slide28.xml><?xml version="1.0" encoding="utf-8"?>
-<p:sld xmlns:a="http://schemas.openxmlformats.org/drawingml/2006/main" xmlns:p="http://schemas.openxmlformats.org/presentationml/2006/main" xmlns:r="http://schemas.openxmlformats.org/officeDocument/2006/relationships">
-  <p:cSld>
-    <p:bg>
-      <p:bgPr>
-        <a:solidFill>
-          <a:srgbClr val="FCFCFB"/>
-        </a:solidFill>
-        <a:effectLst/>
-      </p:bgPr>
-    </p:bg>
-    <p:spTree>
-      <p:nvGrpSpPr>
-        <p:cNvPr id="1" name=""/>
-        <p:cNvGrpSpPr/>
-        <p:nvPr/>
-      </p:nvGrpSpPr>
-      <p:grpSpPr/>
-      <p:sp>
-        <p:nvSpPr>
-          <p:cNvPr id="2" name="TextBox 1"/>
-          <p:cNvSpPr txBox="1"/>
-          <p:nvPr/>
-        </p:nvSpPr>
-        <p:spPr>
-          <a:xfrm>
-            <a:off x="566928" y="502920"/>
-            <a:ext cx="8595360" cy="274320"/>
-          </a:xfrm>
-          <a:prstGeom prst="rect">
-            <a:avLst/>
-          </a:prstGeom>
-          <a:noFill/>
-        </p:spPr>
-        <p:txBody>
-          <a:bodyPr wrap="square" lIns="0" rIns="0" tIns="0" bIns="0">
-            <a:spAutoFit/>
-          </a:bodyPr>
-          <a:lstStyle/>
-          <a:p>
-            <a:pPr>
-              <a:spcBef>
-                <a:spcPts val="0"/>
-              </a:spcBef>
-              <a:spcAft>
-                <a:spcPts val="0"/>
-              </a:spcAft>
-            </a:pPr>
-            <a:r>
-              <a:rPr sz="1000" b="0" i="0">
-                <a:solidFill>
-                  <a:srgbClr val="A63A30"/>
-                </a:solidFill>
-                <a:latin typeface="Consolas"/>
-              </a:rPr>
-              <a:t>CONCLUSION</a:t>
-            </a:r>
-          </a:p>
-        </p:txBody>
-      </p:sp>
-      <p:sp>
-        <p:nvSpPr>
-          <p:cNvPr id="3" name="TextBox 2"/>
-          <p:cNvSpPr txBox="1"/>
-          <p:nvPr/>
-        </p:nvSpPr>
-        <p:spPr>
-          <a:xfrm>
-            <a:off x="566928" y="914400"/>
-            <a:ext cx="8595360" cy="1371600"/>
-          </a:xfrm>
-          <a:prstGeom prst="rect">
-            <a:avLst/>
-          </a:prstGeom>
-          <a:noFill/>
-        </p:spPr>
-        <p:txBody>
-          <a:bodyPr wrap="square" lIns="0" rIns="0" tIns="0" bIns="0">
-            <a:spAutoFit/>
-          </a:bodyPr>
-          <a:lstStyle/>
-          <a:p>
-            <a:pPr>
-              <a:lnSpc>
-                <a:spcPct val="108000"/>
-              </a:lnSpc>
-              <a:spcBef>
-                <a:spcPts val="0"/>
-              </a:spcBef>
-              <a:spcAft>
-                <a:spcPts val="0"/>
-              </a:spcAft>
-            </a:pPr>
-            <a:r>
-              <a:rPr sz="2700" b="0" i="0">
-                <a:solidFill>
-                  <a:srgbClr val="14171C"/>
-                </a:solidFill>
-                <a:latin typeface="Georgia"/>
-              </a:rPr>
-              <a:t>A question rather than a prescription</a:t>
-            </a:r>
-          </a:p>
-        </p:txBody>
-      </p:sp>
-      <p:sp>
-        <p:nvSpPr>
-          <p:cNvPr id="4" name="TextBox 3"/>
-          <p:cNvSpPr txBox="1"/>
-          <p:nvPr/>
-        </p:nvSpPr>
-        <p:spPr>
-          <a:xfrm>
-            <a:off x="566928" y="2286000"/>
-            <a:ext cx="8595360" cy="3840480"/>
-          </a:xfrm>
-          <a:prstGeom prst="rect">
-            <a:avLst/>
-          </a:prstGeom>
-          <a:noFill/>
-        </p:spPr>
-        <p:txBody>
-          <a:bodyPr wrap="square" lIns="0" rIns="0" tIns="0" bIns="0">
-            <a:spAutoFit/>
-          </a:bodyPr>
-          <a:lstStyle/>
-          <a:p>
-            <a:pPr>
-              <a:lnSpc>
-                <a:spcPct val="132000"/>
-              </a:lnSpc>
-              <a:spcBef>
-                <a:spcPts val="0"/>
-              </a:spcBef>
-              <a:spcAft>
-                <a:spcPts val="1100"/>
-              </a:spcAft>
-            </a:pPr>
-            <a:r>
-              <a:rPr sz="1400" b="0" i="0">
-                <a:solidFill>
-                  <a:srgbClr val="5A6068"/>
-                </a:solidFill>
-                <a:latin typeface="Calibri"/>
-              </a:rPr>
-              <a:t>The evidence shows a consistent pattern: which domain looks most consequential for wellbeing depends on which framework measures it and what variable they chose. This is not about the domains; it is about the tools.</a:t>
-            </a:r>
-          </a:p>
-          <a:p>
-            <a:pPr>
-              <a:lnSpc>
-                <a:spcPct val="132000"/>
-              </a:lnSpc>
-              <a:spcBef>
-                <a:spcPts val="0"/>
-              </a:spcBef>
-              <a:spcAft>
-                <a:spcPts val="1100"/>
-              </a:spcAft>
-            </a:pPr>
-            <a:r>
-              <a:rPr sz="1400" b="0" i="0">
-                <a:solidFill>
-                  <a:srgbClr val="5A6068"/>
-                </a:solidFill>
-                <a:latin typeface="Calibri"/>
-              </a:rPr>
-              <a:t>Whether development frameworks should be redesigned around wellbeing is outside the scope here. But if they were, this finding suggests the question to ask: should measurement choices be made with explicit reference to which variables still move and still matter for lived experience? Should coverage be built in for domains the frameworks discovered only by studying something else?</a:t>
-            </a:r>
-          </a:p>
-          <a:p>
-            <a:pPr>
-              <a:lnSpc>
-                <a:spcPct val="132000"/>
-              </a:lnSpc>
-              <a:spcBef>
-                <a:spcPts val="0"/>
-              </a:spcBef>
-              <a:spcAft>
-                <a:spcPts val="1100"/>
-              </a:spcAft>
-            </a:pPr>
-            <a:r>
-              <a:rPr sz="1400" b="0" i="0">
-                <a:solidFill>
-                  <a:srgbClr val="5A6068"/>
-                </a:solidFill>
-                <a:latin typeface="Calibri"/>
-              </a:rPr>
-              <a:t>The frameworks work well for their stated purpose. The question is whether wellbeing should become part of that purpose — and if it does, whether the measurement that comes from that intent should be different from the aggregate, development-first measurement in place today.</a:t>
-            </a:r>
-          </a:p>
-        </p:txBody>
-      </p:sp>
-      <p:sp>
-        <p:nvSpPr>
-          <p:cNvPr id="5" name="TextBox 4"/>
-          <p:cNvSpPr txBox="1"/>
-          <p:nvPr/>
-        </p:nvSpPr>
-        <p:spPr>
-          <a:xfrm>
-            <a:off x="11338560" y="6263640"/>
-            <a:ext cx="548640" cy="274320"/>
-          </a:xfrm>
-          <a:prstGeom prst="rect">
-            <a:avLst/>
-          </a:prstGeom>
-          <a:noFill/>
-        </p:spPr>
-        <p:txBody>
-          <a:bodyPr wrap="square" lIns="0" rIns="0" tIns="0" bIns="0">
-            <a:spAutoFit/>
-          </a:bodyPr>
-          <a:lstStyle/>
-          <a:p>
-            <a:pPr algn="r">
-              <a:spcBef>
-                <a:spcPts val="0"/>
-              </a:spcBef>
-              <a:spcAft>
-                <a:spcPts val="0"/>
-              </a:spcAft>
-            </a:pPr>
-            <a:r>
-              <a:rPr sz="1100" b="0" i="0">
-                <a:solidFill>
-                  <a:srgbClr val="868D96"/>
-                </a:solidFill>
-                <a:latin typeface="Consolas"/>
-              </a:rPr>
-              <a:t>IV</a:t>
-            </a:r>
-          </a:p>
-        </p:txBody>
-      </p:sp>
-    </p:spTree>
-  </p:cSld>
-  <p:clrMapOvr>
-    <a:masterClrMapping/>
-  </p:clrMapOvr>
-</p:sld>
-</file>
-
-<file path=ppt/slides/slide29.xml><?xml version="1.0" encoding="utf-8"?>
-<p:sld xmlns:a="http://schemas.openxmlformats.org/drawingml/2006/main" xmlns:p="http://schemas.openxmlformats.org/presentationml/2006/main" xmlns:r="http://schemas.openxmlformats.org/officeDocument/2006/relationships">
-  <p:cSld>
-    <p:bg>
-      <p:bgPr>
-        <a:solidFill>
-          <a:srgbClr val="E8EBEF"/>
-        </a:solidFill>
-        <a:effectLst/>
-      </p:bgPr>
-    </p:bg>
-    <p:spTree>
-      <p:nvGrpSpPr>
-        <p:cNvPr id="1" name=""/>
-        <p:cNvGrpSpPr/>
-        <p:nvPr/>
-      </p:nvGrpSpPr>
-      <p:grpSpPr/>
-      <p:sp>
-        <p:nvSpPr>
-          <p:cNvPr id="2" name="Rectangle 1"/>
-          <p:cNvSpPr/>
-          <p:nvPr/>
-        </p:nvSpPr>
-        <p:spPr>
-          <a:xfrm>
-            <a:off x="566928" y="2103120"/>
-            <a:ext cx="54864" cy="2377440"/>
-          </a:xfrm>
-          <a:prstGeom prst="rect">
-            <a:avLst/>
-          </a:prstGeom>
-          <a:solidFill>
-            <a:srgbClr val="17549E"/>
-          </a:solidFill>
-          <a:ln>
-            <a:noFill/>
-          </a:ln>
-          <a:effectLst/>
-        </p:spPr>
-        <p:style>
-          <a:lnRef idx="1">
-            <a:schemeClr val="accent1"/>
-          </a:lnRef>
-          <a:fillRef idx="3">
-            <a:schemeClr val="accent1"/>
-          </a:fillRef>
-          <a:effectRef idx="2">
-            <a:schemeClr val="accent1"/>
-          </a:effectRef>
-          <a:fontRef idx="minor">
-            <a:schemeClr val="lt1"/>
-          </a:fontRef>
-        </p:style>
-        <p:txBody>
-          <a:bodyPr rtlCol="0" anchor="ctr"/>
-          <a:lstStyle/>
-          <a:p>
-            <a:pPr algn="ctr"/>
-          </a:p>
-        </p:txBody>
-      </p:sp>
-      <p:sp>
-        <p:nvSpPr>
-          <p:cNvPr id="3" name="TextBox 2"/>
-          <p:cNvSpPr txBox="1"/>
-          <p:nvPr/>
-        </p:nvSpPr>
-        <p:spPr>
-          <a:xfrm>
-            <a:off x="914400" y="1600200"/>
-            <a:ext cx="8686800" cy="274320"/>
-          </a:xfrm>
-          <a:prstGeom prst="rect">
-            <a:avLst/>
-          </a:prstGeom>
-          <a:noFill/>
-        </p:spPr>
-        <p:txBody>
-          <a:bodyPr wrap="square" lIns="0" rIns="0" tIns="0" bIns="0">
-            <a:spAutoFit/>
-          </a:bodyPr>
-          <a:lstStyle/>
-          <a:p>
-            <a:pPr>
-              <a:spcBef>
-                <a:spcPts val="0"/>
-              </a:spcBef>
-              <a:spcAft>
-                <a:spcPts val="0"/>
-              </a:spcAft>
-            </a:pPr>
-            <a:r>
-              <a:rPr sz="1100" b="0" i="0">
-                <a:solidFill>
-                  <a:srgbClr val="17549E"/>
-                </a:solidFill>
-                <a:latin typeface="Consolas"/>
-              </a:rPr>
-              <a:t>WHERE ACT IV LEAVES US</a:t>
-            </a:r>
-          </a:p>
-        </p:txBody>
-      </p:sp>
-      <p:sp>
-        <p:nvSpPr>
-          <p:cNvPr id="4" name="TextBox 3"/>
-          <p:cNvSpPr txBox="1"/>
-          <p:nvPr/>
-        </p:nvSpPr>
-        <p:spPr>
-          <a:xfrm>
-            <a:off x="914400" y="2148840"/>
-            <a:ext cx="9509760" cy="2926080"/>
-          </a:xfrm>
-          <a:prstGeom prst="rect">
-            <a:avLst/>
-          </a:prstGeom>
-          <a:noFill/>
-        </p:spPr>
-        <p:txBody>
-          <a:bodyPr wrap="square" lIns="0" rIns="0" tIns="0" bIns="0">
-            <a:spAutoFit/>
-          </a:bodyPr>
-          <a:lstStyle/>
+              <a:t>Evidence appendix</a:t>
+            </a:r>
+          </a:p>
           <a:p>
             <a:pPr>
               <a:lnSpc>
@@ -9653,13 +8868,13 @@
               </a:spcAft>
             </a:pPr>
             <a:r>
-              <a:rPr sz="2100" b="0" i="0">
-                <a:solidFill>
-                  <a:srgbClr val="14171C"/>
-                </a:solidFill>
-                <a:latin typeface="Georgia"/>
-              </a:rPr>
-              <a:t>Whether development measurement should be redesigned with wellbeing in mind is beyond this scope. But if it is, this evidence suggests the measurement should be different: more attentive to which variables still move, which constructs predict outcomes, and which domains are collected at all.</a:t>
+              <a:rPr sz="1400" b="0" i="0">
+                <a:solidFill>
+                  <a:srgbClr val="9AA4B0"/>
+                </a:solidFill>
+                <a:latin typeface="Calibri"/>
+              </a:rPr>
+              <a:t>Everything the three acts rest on but do not carry. In submission these become supplementary material.</a:t>
             </a:r>
           </a:p>
         </p:txBody>
@@ -10108,615 +9323,6 @@
 </p:sld>
 </file>
 
-<file path=ppt/slides/slide30.xml><?xml version="1.0" encoding="utf-8"?>
-<p:sld xmlns:a="http://schemas.openxmlformats.org/drawingml/2006/main" xmlns:p="http://schemas.openxmlformats.org/presentationml/2006/main" xmlns:r="http://schemas.openxmlformats.org/officeDocument/2006/relationships">
-  <p:cSld>
-    <p:bg>
-      <p:bgPr>
-        <a:solidFill>
-          <a:srgbClr val="FCFCFB"/>
-        </a:solidFill>
-        <a:effectLst/>
-      </p:bgPr>
-    </p:bg>
-    <p:spTree>
-      <p:nvGrpSpPr>
-        <p:cNvPr id="1" name=""/>
-        <p:cNvGrpSpPr/>
-        <p:nvPr/>
-      </p:nvGrpSpPr>
-      <p:grpSpPr/>
-      <p:sp>
-        <p:nvSpPr>
-          <p:cNvPr id="2" name="TextBox 1"/>
-          <p:cNvSpPr txBox="1"/>
-          <p:nvPr/>
-        </p:nvSpPr>
-        <p:spPr>
-          <a:xfrm>
-            <a:off x="566928" y="502920"/>
-            <a:ext cx="8229600" cy="822960"/>
-          </a:xfrm>
-          <a:prstGeom prst="rect">
-            <a:avLst/>
-          </a:prstGeom>
-          <a:noFill/>
-        </p:spPr>
-        <p:txBody>
-          <a:bodyPr wrap="square" lIns="0" rIns="0" tIns="0" bIns="0">
-            <a:spAutoFit/>
-          </a:bodyPr>
-          <a:lstStyle/>
-          <a:p>
-            <a:pPr>
-              <a:spcBef>
-                <a:spcPts val="0"/>
-              </a:spcBef>
-              <a:spcAft>
-                <a:spcPts val="600"/>
-              </a:spcAft>
-            </a:pPr>
-            <a:r>
-              <a:rPr sz="3200" b="0" i="0">
-                <a:solidFill>
-                  <a:srgbClr val="14171C"/>
-                </a:solidFill>
-                <a:latin typeface="Georgia"/>
-              </a:rPr>
-              <a:t>Decisions for the team</a:t>
-            </a:r>
-          </a:p>
-          <a:p>
-            <a:pPr>
-              <a:spcBef>
-                <a:spcPts val="0"/>
-              </a:spcBef>
-              <a:spcAft>
-                <a:spcPts val="0"/>
-              </a:spcAft>
-            </a:pPr>
-            <a:r>
-              <a:rPr sz="1300" b="0" i="0">
-                <a:solidFill>
-                  <a:srgbClr val="5A6068"/>
-                </a:solidFill>
-                <a:latin typeface="Calibri"/>
-              </a:rPr>
-              <a:t>4 things the acts do not settle, in the order they block drafting.</a:t>
-            </a:r>
-          </a:p>
-        </p:txBody>
-      </p:sp>
-      <p:sp>
-        <p:nvSpPr>
-          <p:cNvPr id="3" name="Rectangle 2"/>
-          <p:cNvSpPr/>
-          <p:nvPr/>
-        </p:nvSpPr>
-        <p:spPr>
-          <a:xfrm>
-            <a:off x="566928" y="1828800"/>
-            <a:ext cx="3472586" cy="25400"/>
-          </a:xfrm>
-          <a:prstGeom prst="rect">
-            <a:avLst/>
-          </a:prstGeom>
-          <a:solidFill>
-            <a:srgbClr val="17549E"/>
-          </a:solidFill>
-          <a:ln>
-            <a:noFill/>
-          </a:ln>
-          <a:effectLst/>
-        </p:spPr>
-        <p:style>
-          <a:lnRef idx="1">
-            <a:schemeClr val="accent1"/>
-          </a:lnRef>
-          <a:fillRef idx="3">
-            <a:schemeClr val="accent1"/>
-          </a:fillRef>
-          <a:effectRef idx="2">
-            <a:schemeClr val="accent1"/>
-          </a:effectRef>
-          <a:fontRef idx="minor">
-            <a:schemeClr val="lt1"/>
-          </a:fontRef>
-        </p:style>
-        <p:txBody>
-          <a:bodyPr rtlCol="0" anchor="ctr"/>
-          <a:lstStyle/>
-          <a:p>
-            <a:pPr algn="ctr"/>
-          </a:p>
-        </p:txBody>
-      </p:sp>
-      <p:sp>
-        <p:nvSpPr>
-          <p:cNvPr id="4" name="TextBox 3"/>
-          <p:cNvSpPr txBox="1"/>
-          <p:nvPr/>
-        </p:nvSpPr>
-        <p:spPr>
-          <a:xfrm>
-            <a:off x="566928" y="2011680"/>
-            <a:ext cx="3472586" cy="1828800"/>
-          </a:xfrm>
-          <a:prstGeom prst="rect">
-            <a:avLst/>
-          </a:prstGeom>
-          <a:noFill/>
-        </p:spPr>
-        <p:txBody>
-          <a:bodyPr wrap="square" lIns="0" rIns="0" tIns="0" bIns="0">
-            <a:spAutoFit/>
-          </a:bodyPr>
-          <a:lstStyle/>
-          <a:p>
-            <a:pPr>
-              <a:spcBef>
-                <a:spcPts val="0"/>
-              </a:spcBef>
-              <a:spcAft>
-                <a:spcPts val="700"/>
-              </a:spcAft>
-            </a:pPr>
-            <a:r>
-              <a:rPr sz="1050" b="0" i="0">
-                <a:solidFill>
-                  <a:srgbClr val="17549E"/>
-                </a:solidFill>
-                <a:latin typeface="Consolas"/>
-              </a:rPr>
-              <a:t>FIGURE COUNT</a:t>
-            </a:r>
-          </a:p>
-          <a:p>
-            <a:pPr>
-              <a:lnSpc>
-                <a:spcPct val="130000"/>
-              </a:lnSpc>
-              <a:spcBef>
-                <a:spcPts val="0"/>
-              </a:spcBef>
-              <a:spcAft>
-                <a:spcPts val="0"/>
-              </a:spcAft>
-            </a:pPr>
-            <a:r>
-              <a:rPr sz="1100" b="0" i="0">
-                <a:solidFill>
-                  <a:srgbClr val="5A6068"/>
-                </a:solidFill>
-                <a:latin typeface="Calibri"/>
-              </a:rPr>
-              <a:t>Commentaries allow one or two. Proposed: three-panel composite as Figure 1 and domain scorecard as Figure 2. Everything else supplementary.</a:t>
-            </a:r>
-          </a:p>
-        </p:txBody>
-      </p:sp>
-      <p:sp>
-        <p:nvSpPr>
-          <p:cNvPr id="5" name="Rectangle 4"/>
-          <p:cNvSpPr/>
-          <p:nvPr/>
-        </p:nvSpPr>
-        <p:spPr>
-          <a:xfrm>
-            <a:off x="4359554" y="1828800"/>
-            <a:ext cx="3472586" cy="25400"/>
-          </a:xfrm>
-          <a:prstGeom prst="rect">
-            <a:avLst/>
-          </a:prstGeom>
-          <a:solidFill>
-            <a:srgbClr val="17549E"/>
-          </a:solidFill>
-          <a:ln>
-            <a:noFill/>
-          </a:ln>
-          <a:effectLst/>
-        </p:spPr>
-        <p:style>
-          <a:lnRef idx="1">
-            <a:schemeClr val="accent1"/>
-          </a:lnRef>
-          <a:fillRef idx="3">
-            <a:schemeClr val="accent1"/>
-          </a:fillRef>
-          <a:effectRef idx="2">
-            <a:schemeClr val="accent1"/>
-          </a:effectRef>
-          <a:fontRef idx="minor">
-            <a:schemeClr val="lt1"/>
-          </a:fontRef>
-        </p:style>
-        <p:txBody>
-          <a:bodyPr rtlCol="0" anchor="ctr"/>
-          <a:lstStyle/>
-          <a:p>
-            <a:pPr algn="ctr"/>
-          </a:p>
-        </p:txBody>
-      </p:sp>
-      <p:sp>
-        <p:nvSpPr>
-          <p:cNvPr id="6" name="TextBox 5"/>
-          <p:cNvSpPr txBox="1"/>
-          <p:nvPr/>
-        </p:nvSpPr>
-        <p:spPr>
-          <a:xfrm>
-            <a:off x="4359554" y="2011680"/>
-            <a:ext cx="3472586" cy="1828800"/>
-          </a:xfrm>
-          <a:prstGeom prst="rect">
-            <a:avLst/>
-          </a:prstGeom>
-          <a:noFill/>
-        </p:spPr>
-        <p:txBody>
-          <a:bodyPr wrap="square" lIns="0" rIns="0" tIns="0" bIns="0">
-            <a:spAutoFit/>
-          </a:bodyPr>
-          <a:lstStyle/>
-          <a:p>
-            <a:pPr>
-              <a:spcBef>
-                <a:spcPts val="0"/>
-              </a:spcBef>
-              <a:spcAft>
-                <a:spcPts val="700"/>
-              </a:spcAft>
-            </a:pPr>
-            <a:r>
-              <a:rPr sz="1050" b="0" i="0">
-                <a:solidFill>
-                  <a:srgbClr val="17549E"/>
-                </a:solidFill>
-                <a:latin typeface="Consolas"/>
-              </a:rPr>
-              <a:t>SCOPE OF TRUST FINDINGS</a:t>
-            </a:r>
-          </a:p>
-          <a:p>
-            <a:pPr>
-              <a:lnSpc>
-                <a:spcPct val="130000"/>
-              </a:lnSpc>
-              <a:spcBef>
-                <a:spcPts val="0"/>
-              </a:spcBef>
-              <a:spcAft>
-                <a:spcPts val="0"/>
-              </a:spcAft>
-            </a:pPr>
-            <a:r>
-              <a:rPr sz="1100" b="0" i="0">
-                <a:solidFill>
-                  <a:srgbClr val="5A6068"/>
-                </a:solidFill>
-                <a:latin typeface="Calibri"/>
-              </a:rPr>
-              <a:t>Trust findings rest on ESS (36 European countries, individual-level). The design requires ≥4 years per country-series; only 16 of 163 SDG trust-adjacent series have that coverage, and 1 is significant. Tested cross-sectionally, 9 of 13 series are usable and 4 are significant, but all fall below HDI components on the same countries. The claim is Europe-only and rests on one instrument in each framework; it is the most tentative of the three.</a:t>
-            </a:r>
-          </a:p>
-        </p:txBody>
-      </p:sp>
-      <p:sp>
-        <p:nvSpPr>
-          <p:cNvPr id="7" name="Rectangle 6"/>
-          <p:cNvSpPr/>
-          <p:nvPr/>
-        </p:nvSpPr>
-        <p:spPr>
-          <a:xfrm>
-            <a:off x="8152180" y="1828800"/>
-            <a:ext cx="3472586" cy="25400"/>
-          </a:xfrm>
-          <a:prstGeom prst="rect">
-            <a:avLst/>
-          </a:prstGeom>
-          <a:solidFill>
-            <a:srgbClr val="17549E"/>
-          </a:solidFill>
-          <a:ln>
-            <a:noFill/>
-          </a:ln>
-          <a:effectLst/>
-        </p:spPr>
-        <p:style>
-          <a:lnRef idx="1">
-            <a:schemeClr val="accent1"/>
-          </a:lnRef>
-          <a:fillRef idx="3">
-            <a:schemeClr val="accent1"/>
-          </a:fillRef>
-          <a:effectRef idx="2">
-            <a:schemeClr val="accent1"/>
-          </a:effectRef>
-          <a:fontRef idx="minor">
-            <a:schemeClr val="lt1"/>
-          </a:fontRef>
-        </p:style>
-        <p:txBody>
-          <a:bodyPr rtlCol="0" anchor="ctr"/>
-          <a:lstStyle/>
-          <a:p>
-            <a:pPr algn="ctr"/>
-          </a:p>
-        </p:txBody>
-      </p:sp>
-      <p:sp>
-        <p:nvSpPr>
-          <p:cNvPr id="8" name="TextBox 7"/>
-          <p:cNvSpPr txBox="1"/>
-          <p:nvPr/>
-        </p:nvSpPr>
-        <p:spPr>
-          <a:xfrm>
-            <a:off x="8152180" y="2011680"/>
-            <a:ext cx="3472586" cy="1828800"/>
-          </a:xfrm>
-          <a:prstGeom prst="rect">
-            <a:avLst/>
-          </a:prstGeom>
-          <a:noFill/>
-        </p:spPr>
-        <p:txBody>
-          <a:bodyPr wrap="square" lIns="0" rIns="0" tIns="0" bIns="0">
-            <a:spAutoFit/>
-          </a:bodyPr>
-          <a:lstStyle/>
-          <a:p>
-            <a:pPr>
-              <a:spcBef>
-                <a:spcPts val="0"/>
-              </a:spcBef>
-              <a:spcAft>
-                <a:spcPts val="700"/>
-              </a:spcAft>
-            </a:pPr>
-            <a:r>
-              <a:rPr sz="1050" b="0" i="0">
-                <a:solidFill>
-                  <a:srgbClr val="17549E"/>
-                </a:solidFill>
-                <a:latin typeface="Consolas"/>
-              </a:rPr>
-              <a:t>INSTITUTIONAL CONFIDENCE VS. INTERPERSONAL TRUST</a:t>
-            </a:r>
-          </a:p>
-          <a:p>
-            <a:pPr>
-              <a:lnSpc>
-                <a:spcPct val="130000"/>
-              </a:lnSpc>
-              <a:spcBef>
-                <a:spcPts val="0"/>
-              </a:spcBef>
-              <a:spcAft>
-                <a:spcPts val="0"/>
-              </a:spcAft>
-            </a:pPr>
-            <a:r>
-              <a:rPr sz="1100" b="0" i="0">
-                <a:solidFill>
-                  <a:srgbClr val="5A6068"/>
-                </a:solidFill>
-                <a:latin typeface="Calibri"/>
-              </a:rPr>
-              <a:t>The SDG's Goal 16 trust series measure satisfaction with public services, perceived bribery, and perceived inclusiveness in decision-making — institutional confidence, not interpersonal trust ('most people can be trusted'). These are conceptually distinct. The commentarymust be explicit that SDG16 is not a direct analogue for the ESS trust item.</a:t>
-            </a:r>
-          </a:p>
-        </p:txBody>
-      </p:sp>
-      <p:sp>
-        <p:nvSpPr>
-          <p:cNvPr id="9" name="Rectangle 8"/>
-          <p:cNvSpPr/>
-          <p:nvPr/>
-        </p:nvSpPr>
-        <p:spPr>
-          <a:xfrm>
-            <a:off x="566928" y="4069080"/>
-            <a:ext cx="3472586" cy="25400"/>
-          </a:xfrm>
-          <a:prstGeom prst="rect">
-            <a:avLst/>
-          </a:prstGeom>
-          <a:solidFill>
-            <a:srgbClr val="17549E"/>
-          </a:solidFill>
-          <a:ln>
-            <a:noFill/>
-          </a:ln>
-          <a:effectLst/>
-        </p:spPr>
-        <p:style>
-          <a:lnRef idx="1">
-            <a:schemeClr val="accent1"/>
-          </a:lnRef>
-          <a:fillRef idx="3">
-            <a:schemeClr val="accent1"/>
-          </a:fillRef>
-          <a:effectRef idx="2">
-            <a:schemeClr val="accent1"/>
-          </a:effectRef>
-          <a:fontRef idx="minor">
-            <a:schemeClr val="lt1"/>
-          </a:fontRef>
-        </p:style>
-        <p:txBody>
-          <a:bodyPr rtlCol="0" anchor="ctr"/>
-          <a:lstStyle/>
-          <a:p>
-            <a:pPr algn="ctr"/>
-          </a:p>
-        </p:txBody>
-      </p:sp>
-      <p:sp>
-        <p:nvSpPr>
-          <p:cNvPr id="10" name="TextBox 9"/>
-          <p:cNvSpPr txBox="1"/>
-          <p:nvPr/>
-        </p:nvSpPr>
-        <p:spPr>
-          <a:xfrm>
-            <a:off x="566928" y="4251960"/>
-            <a:ext cx="3472586" cy="1828800"/>
-          </a:xfrm>
-          <a:prstGeom prst="rect">
-            <a:avLst/>
-          </a:prstGeom>
-          <a:noFill/>
-        </p:spPr>
-        <p:txBody>
-          <a:bodyPr wrap="square" lIns="0" rIns="0" tIns="0" bIns="0">
-            <a:spAutoFit/>
-          </a:bodyPr>
-          <a:lstStyle/>
-          <a:p>
-            <a:pPr>
-              <a:spcBef>
-                <a:spcPts val="0"/>
-              </a:spcBef>
-              <a:spcAft>
-                <a:spcPts val="700"/>
-              </a:spcAft>
-            </a:pPr>
-            <a:r>
-              <a:rPr sz="1050" b="0" i="0">
-                <a:solidFill>
-                  <a:srgbClr val="17549E"/>
-                </a:solidFill>
-                <a:latin typeface="Consolas"/>
-              </a:rPr>
-              <a:t>THREE FAILURE MODES FRAME</a:t>
-            </a:r>
-          </a:p>
-          <a:p>
-            <a:pPr>
-              <a:lnSpc>
-                <a:spcPct val="130000"/>
-              </a:lnSpc>
-              <a:spcBef>
-                <a:spcPts val="0"/>
-              </a:spcBef>
-              <a:spcAft>
-                <a:spcPts val="0"/>
-              </a:spcAft>
-            </a:pPr>
-            <a:r>
-              <a:rPr sz="1100" b="0" i="0">
-                <a:solidFill>
-                  <a:srgbClr val="5A6068"/>
-                </a:solidFill>
-                <a:latin typeface="Calibri"/>
-              </a:rPr>
-              <a:t>The narrative positions education's, health's, and trust's findings as evidence of three different ways frameworks lose sight of domains that matter: wrong construct, saturated variable, coverage gap. This is a meta-finding about measurement, not about the domains themselves.</a:t>
-            </a:r>
-          </a:p>
-        </p:txBody>
-      </p:sp>
-    </p:spTree>
-  </p:cSld>
-  <p:clrMapOvr>
-    <a:masterClrMapping/>
-  </p:clrMapOvr>
-</p:sld>
-</file>
-
-<file path=ppt/slides/slide31.xml><?xml version="1.0" encoding="utf-8"?>
-<p:sld xmlns:a="http://schemas.openxmlformats.org/drawingml/2006/main" xmlns:p="http://schemas.openxmlformats.org/presentationml/2006/main" xmlns:r="http://schemas.openxmlformats.org/officeDocument/2006/relationships">
-  <p:cSld>
-    <p:bg>
-      <p:bgPr>
-        <a:solidFill>
-          <a:srgbClr val="14171C"/>
-        </a:solidFill>
-        <a:effectLst/>
-      </p:bgPr>
-    </p:bg>
-    <p:spTree>
-      <p:nvGrpSpPr>
-        <p:cNvPr id="1" name=""/>
-        <p:cNvGrpSpPr/>
-        <p:nvPr/>
-      </p:nvGrpSpPr>
-      <p:grpSpPr/>
-      <p:sp>
-        <p:nvSpPr>
-          <p:cNvPr id="2" name="TextBox 1"/>
-          <p:cNvSpPr txBox="1"/>
-          <p:nvPr/>
-        </p:nvSpPr>
-        <p:spPr>
-          <a:xfrm>
-            <a:off x="566928" y="2743200"/>
-            <a:ext cx="8229600" cy="1371600"/>
-          </a:xfrm>
-          <a:prstGeom prst="rect">
-            <a:avLst/>
-          </a:prstGeom>
-          <a:noFill/>
-        </p:spPr>
-        <p:txBody>
-          <a:bodyPr wrap="square" lIns="0" rIns="0" tIns="0" bIns="0">
-            <a:spAutoFit/>
-          </a:bodyPr>
-          <a:lstStyle/>
-          <a:p>
-            <a:pPr>
-              <a:spcBef>
-                <a:spcPts val="0"/>
-              </a:spcBef>
-              <a:spcAft>
-                <a:spcPts val="1000"/>
-              </a:spcAft>
-            </a:pPr>
-            <a:r>
-              <a:rPr sz="4000" b="0" i="0">
-                <a:solidFill>
-                  <a:srgbClr val="FCFCFB"/>
-                </a:solidFill>
-                <a:latin typeface="Georgia"/>
-              </a:rPr>
-              <a:t>Evidence appendix</a:t>
-            </a:r>
-          </a:p>
-          <a:p>
-            <a:pPr>
-              <a:lnSpc>
-                <a:spcPct val="135000"/>
-              </a:lnSpc>
-              <a:spcBef>
-                <a:spcPts val="0"/>
-              </a:spcBef>
-              <a:spcAft>
-                <a:spcPts val="0"/>
-              </a:spcAft>
-            </a:pPr>
-            <a:r>
-              <a:rPr sz="1400" b="0" i="0">
-                <a:solidFill>
-                  <a:srgbClr val="9AA4B0"/>
-                </a:solidFill>
-                <a:latin typeface="Calibri"/>
-              </a:rPr>
-              <a:t>Everything the three acts rest on but do not carry. In submission these become supplementary material.</a:t>
-            </a:r>
-          </a:p>
-        </p:txBody>
-      </p:sp>
-    </p:spTree>
-  </p:cSld>
-  <p:clrMapOvr>
-    <a:masterClrMapping/>
-  </p:clrMapOvr>
-</p:sld>
-</file>
-
 <file path=ppt/slides/slide4.xml><?xml version="1.0" encoding="utf-8"?>
 <p:sld xmlns:a="http://schemas.openxmlformats.org/drawingml/2006/main" xmlns:p="http://schemas.openxmlformats.org/presentationml/2006/main" xmlns:r="http://schemas.openxmlformats.org/officeDocument/2006/relationships">
   <p:cSld>
@@ -12238,7 +10844,7 @@
                 </a:solidFill>
                 <a:latin typeface="Consolas"/>
               </a:rPr>
-              <a:t>FRAMEWORK COMPARISON</a:t>
+              <a:t>ALL THREE MATTER</a:t>
             </a:r>
           </a:p>
         </p:txBody>
@@ -12283,7 +10889,7 @@
                 </a:solidFill>
                 <a:latin typeface="Georgia"/>
               </a:rPr>
-              <a:t>How the frameworks compare on detection, budget-match, and per-indicator basis</a:t>
+              <a:t>Education, health, and social trust all significantly predict life satisfaction</a:t>
             </a:r>
           </a:p>
         </p:txBody>
@@ -12328,7 +10934,7 @@
                 </a:solidFill>
                 <a:latin typeface="Calibri"/>
               </a:rPr>
-              <a:t>Before we ask what matters, we need to understand how these frameworks differ. The SDG database detects significance in more countries (71% raw) than the HDI (51% raw), but when both are given the same budget — five indicators across 42 countries — the HDI's edge becomes real but modest (30% vs 51% among those 42 countries). When normalized per indicator, the HDI dominates: most SDG series sit in the zero-significance tail, while HDI indicators cluster higher. This is context we need before asking which components matter most.</a:t>
+              <a:t>In the European Social Survey, where all three are measured at the individual level, all three are significant in the majority of countries. But which framework can see all three? Which sees only some? The answer depends on three different failure modes.</a:t>
             </a:r>
           </a:p>
         </p:txBody>
@@ -12377,7 +10983,7 @@
       </p:sp>
       <p:pic>
         <p:nvPicPr>
-          <p:cNvPr id="6" name="Picture 5" descr="framework_three_comparisons.png"/>
+          <p:cNvPr id="6" name="Picture 5" descr="domains_at_levels_comparison.png"/>
           <p:cNvPicPr>
             <a:picLocks noChangeAspect="1"/>
           </p:cNvPicPr>
@@ -12391,8 +10997,8 @@
         </p:blipFill>
         <p:spPr>
           <a:xfrm>
-            <a:off x="5120640" y="2093715"/>
-            <a:ext cx="6537960" cy="2204226"/>
+            <a:off x="5120640" y="2028335"/>
+            <a:ext cx="6537960" cy="2334985"/>
           </a:xfrm>
           <a:prstGeom prst="rect">
             <a:avLst/>
@@ -12439,7 +11045,7 @@
                 </a:solidFill>
                 <a:latin typeface="Calibri"/>
               </a:rPr>
-              <a:t>How SDG and HDI frameworks compare on detection rate, budget-matched analysis, and per-indicator significance distribution.</a:t>
+              <a:t>% of countries where each domain significantly predicts wellbeing at levels. ESS: 36 countries. HDI: 150 countries. SDG: country-indicator pairs.</a:t>
             </a:r>
           </a:p>
         </p:txBody>

--- a/deck/Measured_Where_It_Varies.pptx
+++ b/deck/Measured_Where_It_Varies.pptx
@@ -6400,7 +6400,7 @@
                 </a:solidFill>
                 <a:latin typeface="Consolas"/>
               </a:rPr>
-              <a:t>THE SETUP</a:t>
+              <a:t>THREE QUESTIONS ABOUT MEASUREMENT</a:t>
             </a:r>
           </a:p>
         </p:txBody>
@@ -6445,7 +6445,7 @@
                 </a:solidFill>
                 <a:latin typeface="Georgia"/>
               </a:rPr>
-              <a:t>Development rose almost everywhere. Wellbeing did not follow it.</a:t>
+              <a:t>What actually matters for individual lived experience, and are development frameworks measuring it?</a:t>
             </a:r>
           </a:p>
         </p:txBody>
@@ -6484,13 +6484,13 @@
               </a:spcAft>
             </a:pPr>
             <a:r>
-              <a:rPr sz="1075" b="0" i="0">
+              <a:rPr sz="1050" b="0" i="0">
                 <a:solidFill>
                   <a:srgbClr val="5A6068"/>
                 </a:solidFill>
                 <a:latin typeface="Calibri"/>
               </a:rPr>
-              <a:t>The SDG paper now under review makes a narrow, awkward claim: the association between development indicators and happiness is strong when countries are compared with one another, and close to absent when each is compared with its own past. Thirty of 42 countries are significant in levels. Two are in year-to-year changes.</a:t>
+              <a:t>Development measurement has a wellbeing problem. Frameworks like the SDG and HDI were built to track progress on development goals, not to understand what predicts how people experience their lives. But if development is meant to improve wellbeing, we should ask: Do the frameworks capture what actually matters? What does matter at the individual level? And if they don't align, how should development measurement change?</a:t>
             </a:r>
           </a:p>
           <a:p>
@@ -6506,13 +6506,13 @@
               </a:spcAft>
             </a:pPr>
             <a:r>
-              <a:rPr sz="1075" b="0" i="0">
+              <a:rPr sz="1050" b="0" i="0">
                 <a:solidFill>
                   <a:srgbClr val="5A6068"/>
                 </a:solidFill>
                 <a:latin typeface="Calibri"/>
               </a:rPr>
-              <a:t>There is an obvious way to dismiss that. The SDG framework is a sprawling, negotiated instrument with uneven coverage; a null inside it says as much about the framework as about the world. This commentary closes that escape route by asking: which parts of development track lived experience at all? And why do some frameworks capture them while others systematically miss them?</a:t>
+              <a:t>The SDG paper under review provides the opening: the association between development indicators and happiness is strong between countries but nearly absent within them year-to-year. Thirty of 42 countries are significant in levels. Two are in differences. The obvious dismissal: the SDG framework is sprawling and unevenly covered; a null says as much about the framework as the world.</a:t>
             </a:r>
           </a:p>
           <a:p>
@@ -6528,13 +6528,13 @@
               </a:spcAft>
             </a:pPr>
             <a:r>
-              <a:rPr sz="1075" b="0" i="0">
+              <a:rPr sz="1050" b="0" i="0">
                 <a:solidFill>
                   <a:srgbClr val="5A6068"/>
                 </a:solidFill>
                 <a:latin typeface="Calibri"/>
               </a:rPr>
-              <a:t>The answer turns out to be about the frameworks' construction choices, not about development itself. Education, health, and social trust all matter — but which one you find depends on which framework you measure with, which construct you count, and whether you collected the data in the first place.</a:t>
+              <a:t>This commentary answers the three questions by testing them across frameworks. We replicate the collapse on the HDI, test it against individual-level wellbeing data (the ESS), and ask what domains actually predict life satisfaction when measured at the right level and resolution. The answer: education, health, and social trust all matter. But which framework sees them depends entirely on construction choices—which construct you count, which variable you measure, which domains you collect. Based on that evidence, we suggest how development measurement could evolve.</a:t>
             </a:r>
           </a:p>
         </p:txBody>
@@ -6854,7 +6854,7 @@
                 </a:solidFill>
                 <a:latin typeface="Calibri"/>
               </a:rPr>
-              <a:t>At the levels: three domains, three failure modes.</a:t>
+              <a:t>At the levels: what actually matters for lived experience?</a:t>
             </a:r>
           </a:p>
           <a:p>
@@ -6876,7 +6876,7 @@
                 </a:solidFill>
                 <a:latin typeface="Calibri"/>
               </a:rPr>
-              <a:t>Education, health, and social trust all matter. But frameworks see them differently because of construction choices, variable saturation, or missing coverage.</a:t>
+              <a:t>Three domains predict life satisfaction: education, health, and social trust. But frameworks see them differently because of construction choices, variable saturation, or missing coverage. This is what measurement shows matters.</a:t>
             </a:r>
           </a:p>
         </p:txBody>
@@ -7004,7 +7004,7 @@
                 </a:solidFill>
                 <a:latin typeface="Calibri"/>
               </a:rPr>
-              <a:t>Within-country evidence: why measurement type matters.</a:t>
+              <a:t>Why measurement type matters: within-country evidence.</a:t>
             </a:r>
           </a:p>
           <a:p>
@@ -7026,7 +7026,7 @@
                 </a:solidFill>
                 <a:latin typeface="Calibri"/>
               </a:rPr>
-              <a:t>Individual-level, self-reported data shows ESS captures year-to-year change. Development frameworks measure at the wrong temporal and individual resolution.</a:t>
+              <a:t>Individual-level, self-reported data captures year-to-year change that administrative frameworks miss. Development frameworks measure at the wrong temporal and individual resolution to see lived experience.</a:t>
             </a:r>
           </a:p>
         </p:txBody>
@@ -7154,7 +7154,7 @@
                 </a:solidFill>
                 <a:latin typeface="Calibri"/>
               </a:rPr>
-              <a:t>What this means for how we measure development.</a:t>
+              <a:t>How development frameworks could evolve.</a:t>
             </a:r>
           </a:p>
           <a:p>
@@ -7176,7 +7176,7 @@
                 </a:solidFill>
                 <a:latin typeface="Calibri"/>
               </a:rPr>
-              <a:t>A structural disconnect between how development is measured and what predicts lived experience, with implications for each domain and method.</a:t>
+              <a:t>Based on what matters for individual wellbeing, specific recommendations for education, health, and social trust. A roadmap for aligning development measurement with what research shows actually predicts lived experience.</a:t>
             </a:r>
           </a:p>
         </p:txBody>
@@ -7244,7 +7244,7 @@
                 </a:solidFill>
                 <a:latin typeface="Consolas"/>
               </a:rPr>
-              <a:t>THE DISCONNECT</a:t>
+              <a:t>THE STRUCTURAL DISCONNECT</a:t>
             </a:r>
           </a:p>
         </p:txBody>
@@ -7289,7 +7289,7 @@
                 </a:solidFill>
                 <a:latin typeface="Georgia"/>
               </a:rPr>
-              <a:t>These frameworks work for development. They do not work for wellbeing.</a:t>
+              <a:t>These frameworks were built to measure development, not to capture what predicts wellbeing</a:t>
             </a:r>
           </a:p>
         </p:txBody>
@@ -7334,7 +7334,7 @@
                 </a:solidFill>
                 <a:latin typeface="Calibri"/>
               </a:rPr>
-              <a:t>The HDI and SDG frameworks do not answer the question 'what makes people's lives better?' any more than a global income statistics database answers 'what makes a person happy?' They were designed to track development, measured at the aggregate level, with indicators chosen before the question of individual wellbeing was systematically tested. That is not a design failure; it is the intended scope.</a:t>
+              <a:t>The HDI and SDG frameworks do not answer the question 'what makes people's lives better?' They were designed to track development at the aggregate level, with indicators chosen before the question of individual wellbeing was systematically tested. That is not a design failure; it is the intended scope. But it creates a structural gap: frameworks measuring aggregate, infrequent administrative data cannot see individual experience that responds to change.</a:t>
             </a:r>
           </a:p>
           <a:p>
@@ -7356,7 +7356,7 @@
                 </a:solidFill>
                 <a:latin typeface="Calibri"/>
               </a:rPr>
-              <a:t>But it means the gap is structural. Education's access indicators work; pooling them with constructs that do not does not fix wellbeing prediction — it just builds a worse measure. Choosing a variable for health that is closer to saturated than the outcome it predicts is a measurement choice, not an incurable problem. And when a domain is never collected, no amount of better construction on the others will reach it.</a:t>
+              <a:t>The gap is not incurable. It is built on three concrete, fixable problems: wrong constructs for some domains, saturated variables for others, and missing coverage for those not measured at all. This commentary suggests how to fix each.</a:t>
             </a:r>
           </a:p>
         </p:txBody>
@@ -7466,7 +7466,7 @@
                 </a:solidFill>
                 <a:latin typeface="Consolas"/>
               </a:rPr>
-              <a:t>IMPLICATION 1 · MEASUREMENT CHOICES CONSTRAIN WHAT FRAMEWORKS CAN SEE</a:t>
+              <a:t>IMPLICATION 1 · FIX WRONG CONSTRUCTS</a:t>
             </a:r>
           </a:p>
         </p:txBody>
@@ -7511,7 +7511,7 @@
                 </a:solidFill>
                 <a:latin typeface="Georgia"/>
               </a:rPr>
-              <a:t>Education and health: the case for measurement specificity</a:t>
+              <a:t>Education and health: measurement specificity based on what predicts wellbeing</a:t>
             </a:r>
           </a:p>
         </p:txBody>
@@ -7556,7 +7556,7 @@
                 </a:solidFill>
                 <a:latin typeface="Calibri"/>
               </a:rPr>
-              <a:t>Education is significant everywhere it is measured as attainment, but nearly invisible in SDG4 because most indicators measure something else. Health is nearly invisible in the HDI because life expectancy has saturated. Neither domain has changed; the frameworks' construction choices have.</a:t>
+              <a:t>Education is significant everywhere it is measured as attainment (92% in ESS, 34% in HDI, 12.7% in SDG4 access alone). But SDG4 averages it with parity ratios and learning outcomes, which do not predict wellbeing, collapsing the pooled rate to 3.3%. The fix: development frameworks should make construction choices with explicit reference to what research shows matters for lived experience. For education in wellbeing contexts, this means weighting access and completion more heavily than equity ratios.</a:t>
             </a:r>
           </a:p>
           <a:p>
@@ -7578,7 +7578,7 @@
                 </a:solidFill>
                 <a:latin typeface="Calibri"/>
               </a:rPr>
-              <a:t>For education, this suggests development measurement should weigh access and completion more heavily than parity ratios in wellbeing contexts — not universally, but with explicit construction choices that account for what is known to matter. For health, it suggests that wellbeing-motivated measurement may need different variables at different development levels: life expectancy in lower-income settings, self-reported health or specific conditions in saturated ones.</a:t>
+              <a:t>Health is nearly invisible in the HDI (20% significant) because life expectancy is saturated in developed countries — the top 100 range from 81–85 years. Yet self-rated health is significant in 100% of ESS countries. The fix: use different variables at different income levels. Life expectancy for lower-income settings where it still varies; self-reported health, or condition-specific mortality (maternal, neonatal, under-five), in saturated ones.</a:t>
             </a:r>
           </a:p>
         </p:txBody>
@@ -7688,7 +7688,7 @@
                 </a:solidFill>
                 <a:latin typeface="Consolas"/>
               </a:rPr>
-              <a:t>IMPLICATION 2 · COVERAGE GAPS ARE MORE FUNDAMENTAL THAN CONSTRUCT CHOICE</a:t>
+              <a:t>IMPLICATION 2 · ADD MISSING COVERAGE</a:t>
             </a:r>
           </a:p>
         </p:txBody>
@@ -7733,7 +7733,7 @@
                 </a:solidFill>
                 <a:latin typeface="Georgia"/>
               </a:rPr>
-              <a:t>Social trust: why you cannot fix a measurement by measuring better</a:t>
+              <a:t>Social trust: why coverage gaps cannot be fixed by better measurement of wrong things</a:t>
             </a:r>
           </a:p>
         </p:txBody>
@@ -7778,7 +7778,7 @@
                 </a:solidFill>
                 <a:latin typeface="Calibri"/>
               </a:rPr>
-              <a:t>Social trust is the most tentative finding here. The ESS is Europe-only, across 36 countries, and relies on a single item. That bounds the claim: the pattern holds in Europe, with a wellbeing survey, on a self-report basis. It does not claim universality.</a:t>
+              <a:t>Social trust is significant in 94% of ESS countries and is the third-strongest predictor after health and income. Neither the HDI nor the SDG framework measures it. The SDG database has 13 series under Goal 16, but they measure institutional confidence—satisfaction with government, healthcare, education—not interpersonal trust. Moreover, 147 of 163 country-series have fewer than four years of data, making time-series designs impossible.</a:t>
             </a:r>
           </a:p>
           <a:p>
@@ -7800,29 +7800,7 @@
                 </a:solidFill>
                 <a:latin typeface="Calibri"/>
               </a:rPr>
-              <a:t>But the reason it is tentative points to the deepest problem: trust is not collected at global scale in either framework. The SDG database has 13 series adjacent to trust, but they measure institutional confidence, not interpersonal trust, and they are intermittent (147 of 163 country-series have fewer than four years of data). This is not a construct-choice problem that better measurement can solve. It is a coverage gap that requires deciding to collect the data in the first place.</a:t>
-            </a:r>
-          </a:p>
-          <a:p>
-            <a:pPr>
-              <a:lnSpc>
-                <a:spcPct val="132000"/>
-              </a:lnSpc>
-              <a:spcBef>
-                <a:spcPts val="0"/>
-              </a:spcBef>
-              <a:spcAft>
-                <a:spcPts val="1100"/>
-              </a:spcAft>
-            </a:pPr>
-            <a:r>
-              <a:rPr sz="1400" b="0" i="0">
-                <a:solidFill>
-                  <a:srgbClr val="5A6068"/>
-                </a:solidFill>
-                <a:latin typeface="Calibri"/>
-              </a:rPr>
-              <a:t>For wellbeing-conscious development monitoring, this suggests either building interpersonal-trust measurement into the core frameworks, or acknowledging that other surveys (the ESS, Gallup World Poll, World Values Survey) may be more suitable for understanding what shapes lived experience.</a:t>
+              <a:t>The fix: development frameworks cannot discover what matters by measuring something else and hoping it correlates. If wellbeing is part of development measurement's purpose, interpersonal trust must be collected at scale. This could mean building social trust into core frameworks, or integrating data from surveys designed to measure individual experience (ESS, Gallup World Poll, World Values Survey). The scope of trust findings—36 European countries, individual-level—is tentative. But tentative is better than absent.</a:t>
             </a:r>
           </a:p>
         </p:txBody>
@@ -7977,7 +7955,7 @@
                 </a:solidFill>
                 <a:latin typeface="Georgia"/>
               </a:rPr>
-              <a:t>A question rather than a prescription</a:t>
+              <a:t>From evidence to redesign</a:t>
             </a:r>
           </a:p>
         </p:txBody>
@@ -8022,7 +8000,7 @@
                 </a:solidFill>
                 <a:latin typeface="Calibri"/>
               </a:rPr>
-              <a:t>The evidence shows a consistent pattern: which domain looks most consequential for wellbeing depends on which framework measures it and what variable they chose. This is not about the domains; it is about the tools.</a:t>
+              <a:t>The evidence is clear: which domain predicts life satisfaction depends on which framework measures it and what variable they chose. This is not about the domains; it is about the tools. Development frameworks work well for their stated purpose — tracking aggregate progress toward development goals. But if that purpose is understood to include supporting lived experience, the measurement needs to change.</a:t>
             </a:r>
           </a:p>
           <a:p>
@@ -8044,7 +8022,7 @@
                 </a:solidFill>
                 <a:latin typeface="Calibri"/>
               </a:rPr>
-              <a:t>Whether development frameworks should be redesigned around wellbeing is outside the scope here. But if they were, this finding suggests the question to ask: should measurement choices be made with explicit reference to which variables still move and still matter for lived experience? Should coverage be built in for domains the frameworks discovered only by studying something else?</a:t>
+              <a:t>The three implications suggest where to start: make construction choices based on what research shows matters (education's access, health's variation, not saturation); choose variables that still move at the development levels being measured; and collect data for domains that matter but are currently missing. This is not a complete redesign. It is targeted adjustment rooted in evidence about what predicts individual wellbeing.</a:t>
             </a:r>
           </a:p>
           <a:p>
@@ -8066,7 +8044,7 @@
                 </a:solidFill>
                 <a:latin typeface="Calibri"/>
               </a:rPr>
-              <a:t>The frameworks work well for their stated purpose. The question is whether wellbeing should become part of that purpose — and if it does, whether the measurement that comes from that intent should be different from the aggregate, development-first measurement in place today.</a:t>
+              <a:t>The underlying question remains: Should development measurement be redesigned with lived experience in mind? If yes, should it measure at the individual level, with shorter intervals, using variables chosen for their responsiveness to change and their evidence of predicting wellbeing? The frameworks in place today are built for a different answer. These findings suggest what a different answer might measure.</a:t>
             </a:r>
           </a:p>
         </p:txBody>

--- a/deck/Measured_Where_It_Varies.pptx
+++ b/deck/Measured_Where_It_Varies.pptx
@@ -31,6 +31,11 @@
     <p:sldId id="279" r:id="rId30"/>
     <p:sldId id="280" r:id="rId31"/>
     <p:sldId id="281" r:id="rId32"/>
+    <p:sldId id="282" r:id="rId33"/>
+    <p:sldId id="283" r:id="rId34"/>
+    <p:sldId id="284" r:id="rId35"/>
+    <p:sldId id="285" r:id="rId36"/>
+    <p:sldId id="286" r:id="rId37"/>
   </p:sldIdLst>
   <p:sldSz cx="12191695" cy="6858000" type="screen4x3"/>
   <p:notesSz cx="6858000" cy="9144000"/>
@@ -3424,7 +3429,7 @@
                 </a:solidFill>
                 <a:latin typeface="Consolas"/>
               </a:rPr>
-              <a:t>RESULT 1 · EDUCATION</a:t>
+              <a:t>ALL THREE MATTER</a:t>
             </a:r>
           </a:p>
         </p:txBody>
@@ -3469,7 +3474,7 @@
                 </a:solidFill>
                 <a:latin typeface="Georgia"/>
               </a:rPr>
-              <a:t>Significant in 92% of ESS countries, but only when measured as attainment</a:t>
+              <a:t>Education, health, and social trust all significantly predict life satisfaction</a:t>
             </a:r>
           </a:p>
         </p:txBody>
@@ -3514,29 +3519,7 @@
                 </a:solidFill>
                 <a:latin typeface="Calibri"/>
               </a:rPr>
-              <a:t>Expected years of schooling predicts life satisfaction in 34% of HDI countries — the highest among the five HDI components, but still a minority. In the ESS individual data, education (measured as years attained) is significant in 92% of countries. The difference is not about the data; it is about which construct you count.</a:t>
-            </a:r>
-          </a:p>
-          <a:p>
-            <a:pPr>
-              <a:lnSpc>
-                <a:spcPct val="132000"/>
-              </a:lnSpc>
-              <a:spcBef>
-                <a:spcPts val="0"/>
-              </a:spcBef>
-              <a:spcAft>
-                <a:spcPts val="1100"/>
-              </a:spcAft>
-            </a:pPr>
-            <a:r>
-              <a:rPr sz="1150" b="0" i="0">
-                <a:solidFill>
-                  <a:srgbClr val="5A6068"/>
-                </a:solidFill>
-                <a:latin typeface="Calibri"/>
-              </a:rPr>
-              <a:t>The SDG framework's education goal is 35 indicators spanning access, attainment, equity (parity ratios), learning outcomes, infrastructure, and financing. Pooled, 3.3% of country-indicator pairs are significant. But access indicators alone (primary and secondary enrollment, completion rates) reach 12.7% — because they measure participation, the closest SDG analogue to HDI attainment. Parity ratios, learning outcomes, and infrastructure contribute little to wellbeing, so pooling them masks the signal from access.</a:t>
+              <a:t>In the European Social Survey, where all three are measured at the individual level, all three are significant in the majority of countries. But which framework can see all three? Which sees only some? The answer depends on three different failure modes.</a:t>
             </a:r>
           </a:p>
         </p:txBody>
@@ -3585,7 +3568,7 @@
       </p:sp>
       <p:pic>
         <p:nvPicPr>
-          <p:cNvPr id="6" name="Picture 5" descr="education_levels_comparison.png"/>
+          <p:cNvPr id="6" name="Picture 5" descr="domains_at_levels_comparison.png"/>
           <p:cNvPicPr>
             <a:picLocks noChangeAspect="1"/>
           </p:cNvPicPr>
@@ -3599,8 +3582,8 @@
         </p:blipFill>
         <p:spPr>
           <a:xfrm>
-            <a:off x="5120640" y="1412748"/>
-            <a:ext cx="6537960" cy="3566160"/>
+            <a:off x="5120640" y="2028335"/>
+            <a:ext cx="6537960" cy="2334985"/>
           </a:xfrm>
           <a:prstGeom prst="rect">
             <a:avLst/>
@@ -3647,7 +3630,7 @@
                 </a:solidFill>
                 <a:latin typeface="Calibri"/>
               </a:rPr>
-              <a:t>Education's R² (% of countries significant at levels) across three frameworks. SDG4's pooled rate (3.3%) includes all 35 constructs; access alone reaches 12.7%.</a:t>
+              <a:t>% of countries where each domain significantly predicts wellbeing at levels. ESS: 36 countries. HDI: 150 countries. SDG: country-indicator pairs.</a:t>
             </a:r>
           </a:p>
         </p:txBody>
@@ -3715,7 +3698,7 @@
                 </a:solidFill>
                 <a:latin typeface="Consolas"/>
               </a:rPr>
-              <a:t>ACCESS CHECK · WHY EDUCATION'S RANK SWINGS</a:t>
+              <a:t>RESULT 1 · EDUCATION</a:t>
             </a:r>
           </a:p>
         </p:txBody>
@@ -3760,7 +3743,7 @@
                 </a:solidFill>
                 <a:latin typeface="Georgia"/>
               </a:rPr>
-              <a:t>The difference between measuring attainment and measuring parity</a:t>
+              <a:t>Significant in 92% of ESS countries, but only when measured as attainment</a:t>
             </a:r>
           </a:p>
         </p:txBody>
@@ -3805,7 +3788,29 @@
                 </a:solidFill>
                 <a:latin typeface="Calibri"/>
               </a:rPr>
-              <a:t>When the SDG framework pools constructs, it weights all equally by series count. Parity ratios are 18 of 35 series but carry almost no signal for wellbeing. Learning outcomes (6 series, 0.9% significant), infrastructure (7 series, 2.0%), and financing (1 series, 11.5%) together drive the pooled rate below what access alone achieves. This is not a discovery about education; it is a mechanical artifact of construction.</a:t>
+              <a:t>Expected years of schooling predicts life satisfaction in 34% of HDI countries — the highest among the five HDI components, but still a minority. In the ESS individual data, education (measured as years attained) is significant in 92% of countries. The difference is not about the data; it is about which construct you count.</a:t>
+            </a:r>
+          </a:p>
+          <a:p>
+            <a:pPr>
+              <a:lnSpc>
+                <a:spcPct val="132000"/>
+              </a:lnSpc>
+              <a:spcBef>
+                <a:spcPts val="0"/>
+              </a:spcBef>
+              <a:spcAft>
+                <a:spcPts val="1100"/>
+              </a:spcAft>
+            </a:pPr>
+            <a:r>
+              <a:rPr sz="1150" b="0" i="0">
+                <a:solidFill>
+                  <a:srgbClr val="5A6068"/>
+                </a:solidFill>
+                <a:latin typeface="Calibri"/>
+              </a:rPr>
+              <a:t>The SDG framework's education goal is 35 indicators spanning access, attainment, equity (parity ratios), learning outcomes, infrastructure, and financing. Pooled, 3.3% of country-indicator pairs are significant. But access indicators alone (primary and secondary enrollment, completion rates) reach 12.7% — because they measure participation, the closest SDG analogue to HDI attainment. Parity ratios, learning outcomes, and infrastructure contribute little to wellbeing, so pooling them masks the signal from access.</a:t>
             </a:r>
           </a:p>
         </p:txBody>
@@ -3854,7 +3859,7 @@
       </p:sp>
       <p:pic>
         <p:nvPicPr>
-          <p:cNvPr id="6" name="Picture 5" descr="sdg4_unpooled.png"/>
+          <p:cNvPr id="6" name="Picture 5" descr="education_levels_comparison.png"/>
           <p:cNvPicPr>
             <a:picLocks noChangeAspect="1"/>
           </p:cNvPicPr>
@@ -3868,8 +3873,8 @@
         </p:blipFill>
         <p:spPr>
           <a:xfrm>
-            <a:off x="5120640" y="1103208"/>
-            <a:ext cx="6537960" cy="4185240"/>
+            <a:off x="5120640" y="1412748"/>
+            <a:ext cx="6537960" cy="3566160"/>
           </a:xfrm>
           <a:prstGeom prst="rect">
             <a:avLst/>
@@ -3916,7 +3921,7 @@
                 </a:solidFill>
                 <a:latin typeface="Calibri"/>
               </a:rPr>
-              <a:t>SDG4 by construct: access and participation (12.7%) vs. equity/parity ratios (2.5%), learning outcomes (0.9%), and others.</a:t>
+              <a:t>Education's R² (% of countries significant at levels) across three frameworks. SDG4's pooled rate (3.3%) includes all 35 constructs; access alone reaches 12.7%.</a:t>
             </a:r>
           </a:p>
         </p:txBody>
@@ -3984,7 +3989,7 @@
                 </a:solidFill>
                 <a:latin typeface="Consolas"/>
               </a:rPr>
-              <a:t>RESULT 2 · HEALTH</a:t>
+              <a:t>ACCESS CHECK · WHY EDUCATION'S RANK SWINGS</a:t>
             </a:r>
           </a:p>
         </p:txBody>
@@ -4029,7 +4034,7 @@
                 </a:solidFill>
                 <a:latin typeface="Georgia"/>
               </a:rPr>
-              <a:t>Significant in 100% of ESS countries, weak in the HDI, strong in the SDGs</a:t>
+              <a:t>The difference between measuring attainment and measuring parity</a:t>
             </a:r>
           </a:p>
         </p:txBody>
@@ -4068,35 +4073,13 @@
               </a:spcAft>
             </a:pPr>
             <a:r>
-              <a:rPr sz="1050" b="0" i="0">
+              <a:rPr sz="1150" b="0" i="0">
                 <a:solidFill>
                   <a:srgbClr val="5A6068"/>
                 </a:solidFill>
                 <a:latin typeface="Calibri"/>
               </a:rPr>
-              <a:t>Self-rated health is the single strongest predictor of life satisfaction in the ESS: 100% of countries significant at the individual level, median R² = 0.091 (four times education's). In the HDI, health's proxy is life expectancy, and it is the weakest of five components — only 20% of countries significant. In the SDG database, health (Goal 3) reaches 11.5% of country-indicator pairs, fourth of 17 goals.</a:t>
-            </a:r>
-          </a:p>
-          <a:p>
-            <a:pPr>
-              <a:lnSpc>
-                <a:spcPct val="132000"/>
-              </a:lnSpc>
-              <a:spcBef>
-                <a:spcPts val="0"/>
-              </a:spcBef>
-              <a:spcAft>
-                <a:spcPts val="1100"/>
-              </a:spcAft>
-            </a:pPr>
-            <a:r>
-              <a:rPr sz="1050" b="0" i="0">
-                <a:solidFill>
-                  <a:srgbClr val="5A6068"/>
-                </a:solidFill>
-                <a:latin typeface="Calibri"/>
-              </a:rPr>
-              <a:t>Life expectancy is close to saturated in developed countries: the top 100 countries range from 81 to 85 years. The variance that remains is so small that between-country differences add little predictive power. This is not health's problem; it is the specific HDI indicator's problem. Within the SDG database's vast landscape of 661 series across 42 countries, health indicators dominate the top-ranked individual series, with 16 of the top 25 most predictive SDG series falling under Goal 3 — survival measures like infant mortality, under-five mortality, stunting, and sanitation. The low 11.5% rate for health is not evidence that health doesn't matter; it is evidence that most of the SDG database does not predict wellbeing. Within that context, health ranks high.</a:t>
+              <a:t>When the SDG framework pools constructs, it weights all equally by series count. Parity ratios are 18 of 35 series but carry almost no signal for wellbeing. Learning outcomes (6 series, 0.9% significant), infrastructure (7 series, 2.0%), and financing (1 series, 11.5%) together drive the pooled rate below what access alone achieves. This is not a discovery about education; it is a mechanical artifact of construction.</a:t>
             </a:r>
           </a:p>
         </p:txBody>
@@ -4145,7 +4128,7 @@
       </p:sp>
       <p:pic>
         <p:nvPicPr>
-          <p:cNvPr id="6" name="Picture 5" descr="health_levels_comparison.png"/>
+          <p:cNvPr id="6" name="Picture 5" descr="sdg4_unpooled.png"/>
           <p:cNvPicPr>
             <a:picLocks noChangeAspect="1"/>
           </p:cNvPicPr>
@@ -4159,8 +4142,8 @@
         </p:blipFill>
         <p:spPr>
           <a:xfrm>
-            <a:off x="5120640" y="1234440"/>
-            <a:ext cx="6537960" cy="3922776"/>
+            <a:off x="5120640" y="1103208"/>
+            <a:ext cx="6537960" cy="4185240"/>
           </a:xfrm>
           <a:prstGeom prst="rect">
             <a:avLst/>
@@ -4207,7 +4190,7 @@
                 </a:solidFill>
                 <a:latin typeface="Calibri"/>
               </a:rPr>
-              <a:t>Health's R² (% of countries significant at levels) across three frameworks. Self-rated health in ESS dominates; external HDI proxy (life expectancy) is weak.</a:t>
+              <a:t>SDG4 by construct: access and participation (12.7%) vs. equity/parity ratios (2.5%), learning outcomes (0.9%), and others.</a:t>
             </a:r>
           </a:p>
         </p:txBody>
@@ -4275,7 +4258,7 @@
                 </a:solidFill>
                 <a:latin typeface="Consolas"/>
               </a:rPr>
-              <a:t>RESULT 3 · SOCIAL TRUST</a:t>
+              <a:t>RESULT 2 · HEALTH</a:t>
             </a:r>
           </a:p>
         </p:txBody>
@@ -4320,7 +4303,7 @@
                 </a:solidFill>
                 <a:latin typeface="Georgia"/>
               </a:rPr>
-              <a:t>Social trust leads the ESS, is nearly invisible to development frameworks</a:t>
+              <a:t>Significant in 100% of ESS countries, weak in the HDI, strong in the SDGs</a:t>
             </a:r>
           </a:p>
         </p:txBody>
@@ -4359,13 +4342,13 @@
               </a:spcAft>
             </a:pPr>
             <a:r>
-              <a:rPr sz="950" b="0" i="0">
+              <a:rPr sz="1150" b="0" i="0">
                 <a:solidFill>
                   <a:srgbClr val="5A6068"/>
                 </a:solidFill>
                 <a:latin typeface="Calibri"/>
               </a:rPr>
-              <a:t>Social trust — 'most people can be trusted' — is significant in 94% of ESS countries, third strongest domain after health and income, with median R² = 0.041. Neither the HDI nor the SDG framework measures it at all.</a:t>
+              <a:t>Self-rated health is the single strongest predictor of life satisfaction in the ESS: 100% of countries significant at the individual level, median R² = 0.091 (four times education's). In the HDI, health's proxy is life expectancy, and it is the weakest of five components — only 20% of countries significant. In the SDG database, health (Goal 3) reaches 11.5% of country-indicator pairs, fourth of 17 goals.</a:t>
             </a:r>
           </a:p>
           <a:p>
@@ -4381,35 +4364,13 @@
               </a:spcAft>
             </a:pPr>
             <a:r>
-              <a:rPr sz="950" b="0" i="0">
+              <a:rPr sz="1150" b="0" i="0">
                 <a:solidFill>
                   <a:srgbClr val="5A6068"/>
                 </a:solidFill>
                 <a:latin typeface="Calibri"/>
               </a:rPr>
-              <a:t>The SDG database does carry 13 trust- and satisfaction-adjacent series under Goal 16, but the detail reveals why they fail to capture interpersonal trust. First, coverage: only nine of thirteen can be tested across countries, and four are significant — weaker than the development indicators the frameworks already carry. Second, construct: bribery (individuals and firms) and decision-making inclusiveness predict wellbeing; satisfaction with healthcare, government services, and secondary education do not. These measure institutional confidence, not interpersonal trust. Third, when you control for income — net of log GNI per capita — nearly all SDG trust series disappear. This is a known artifact of subjective institutional scales; interpersonal trust, by contrast, shows robust signal independent of income controls.</a:t>
-            </a:r>
-          </a:p>
-          <a:p>
-            <a:pPr>
-              <a:lnSpc>
-                <a:spcPct val="132000"/>
-              </a:lnSpc>
-              <a:spcBef>
-                <a:spcPts val="0"/>
-              </a:spcBef>
-              <a:spcAft>
-                <a:spcPts val="1100"/>
-              </a:spcAft>
-            </a:pPr>
-            <a:r>
-              <a:rPr sz="950" b="0" i="0">
-                <a:solidFill>
-                  <a:srgbClr val="5A6068"/>
-                </a:solidFill>
-                <a:latin typeface="Calibri"/>
-              </a:rPr>
-              <a:t>Education's and health's problems are about which variable to count within a domain. Trust's problem is different: it is not in the frameworks at all. That is a coverage gap that cannot be fixed by choosing the right variable, because no variable was ever measured.</a:t>
+              <a:t>Life expectancy is close to saturated in developed countries: the top 100 countries range from 81 to 85 years. The variance that remains is so small that between-country differences add little predictive power. This is not health's problem; it is the specific HDI indicator's problem. The gap between frameworks shows the importance of variable choice, not of health itself.</a:t>
             </a:r>
           </a:p>
         </p:txBody>
@@ -4458,7 +4419,7 @@
       </p:sp>
       <p:pic>
         <p:nvPicPr>
-          <p:cNvPr id="6" name="Picture 5" descr="K1_sdg_trust_cross_section.png"/>
+          <p:cNvPr id="6" name="Picture 5" descr="health_levels_comparison.png"/>
           <p:cNvPicPr>
             <a:picLocks noChangeAspect="1"/>
           </p:cNvPicPr>
@@ -4472,8 +4433,8 @@
         </p:blipFill>
         <p:spPr>
           <a:xfrm>
-            <a:off x="5120640" y="1690377"/>
-            <a:ext cx="6537960" cy="3010902"/>
+            <a:off x="5120640" y="1234440"/>
+            <a:ext cx="6537960" cy="3922776"/>
           </a:xfrm>
           <a:prstGeom prst="rect">
             <a:avLst/>
@@ -4520,7 +4481,7 @@
                 </a:solidFill>
                 <a:latin typeface="Calibri"/>
               </a:rPr>
-              <a:t>SDG16 trust series can barely be tested (9 of 13 measurable, 4 significant) and collapse when controlled for income. Interpersonal trust only appears in ESS.</a:t>
+              <a:t>Health's R² (% of countries significant at levels) across three frameworks. Self-rated health in ESS dominates; external HDI proxy (life expectancy) is weak.</a:t>
             </a:r>
           </a:p>
         </p:txBody>
@@ -4588,7 +4549,7 @@
                 </a:solidFill>
                 <a:latin typeface="Consolas"/>
               </a:rPr>
-              <a:t>SYNTHESIS</a:t>
+              <a:t>SDG INDICATOR RANKINGS · WHY HEALTH MATTERS DESPITE LOW %</a:t>
             </a:r>
           </a:p>
         </p:txBody>
@@ -4633,7 +4594,7 @@
                 </a:solidFill>
                 <a:latin typeface="Georgia"/>
               </a:rPr>
-              <a:t>Three domains, three frameworks, three different blind spots</a:t>
+              <a:t>Health indicators rank 4th among 17 SDG goals; the low percentage reflects weak overall SDG signal</a:t>
             </a:r>
           </a:p>
         </p:txBody>
@@ -4672,13 +4633,13 @@
               </a:spcAft>
             </a:pPr>
             <a:r>
-              <a:rPr sz="1100" b="0" i="0">
+              <a:rPr sz="1150" b="0" i="0">
                 <a:solidFill>
                   <a:srgbClr val="5A6068"/>
                 </a:solidFill>
                 <a:latin typeface="Calibri"/>
               </a:rPr>
-              <a:t>Education's rank depends on which construct you count: attainment works, but parity ratios and learning outcomes do not, so pooling dilutes the signal. Health's rank depends on whether your chosen variable still varies: life expectancy does not, but self-rated health does, so the HDI's choice costs it. Social trust's rank is zero because it is not collected at scale in development frameworks at all — a coverage gap that cannot be fixed by choosing the right variable, because no variable was ever measured.</a:t>
+              <a:t>The SDG database is vast: 661 series across 42 countries testing 17 goals. The overall significance rate is low — only 3-4% of all country-indicator pairs are significant. At the goal level, health (Goal 3) reaches 11.5% of country-indicator pairs, ranking fourth of 17 goals. Within that sparse landscape, health indicators dominate the top-ranked individual series, with 16 of the top 25 most predictive SDG series falling under Goal 3. These are survival measures: infant mortality, under-five mortality, stunting, neonatal mortality, sanitation, drinking water — all objective, externally measured.</a:t>
             </a:r>
           </a:p>
           <a:p>
@@ -4694,13 +4655,13 @@
               </a:spcAft>
             </a:pPr>
             <a:r>
-              <a:rPr sz="1100" b="0" i="0">
+              <a:rPr sz="1150" b="0" i="0">
                 <a:solidFill>
                   <a:srgbClr val="5A6068"/>
                 </a:solidFill>
                 <a:latin typeface="Calibri"/>
               </a:rPr>
-              <a:t>These are not criticisms of the frameworks; they were built to track development, and they do. Education is testable in all three frameworks but its rank depends entirely on which construct was chosen. Health is testable everywhere and leads wherever it is measured something that still varies — a robust signal despite the HDI's proxy choice. Social trust is testable in one instrument only: the ESS, where it emerges as third strongest. It does not appear in the HDI at all, and the SDG framework measures institutional confidence instead, a different construct entirely.</a:t>
+              <a:t>The low 11.5% rate for health is not evidence that health doesn't matter. It is evidence that most of the SDG database does not predict wellbeing. Within that context, health ranks high.</a:t>
             </a:r>
           </a:p>
         </p:txBody>
@@ -4749,7 +4710,7 @@
       </p:sp>
       <p:pic>
         <p:nvPicPr>
-          <p:cNvPr id="6" name="Picture 5" descr="domain_scorecard.png"/>
+          <p:cNvPr id="6" name="Picture 5" descr="sdg_indicator_top20.png"/>
           <p:cNvPicPr>
             <a:picLocks noChangeAspect="1"/>
           </p:cNvPicPr>
@@ -4763,8 +4724,8 @@
         </p:blipFill>
         <p:spPr>
           <a:xfrm>
-            <a:off x="5120640" y="1469807"/>
-            <a:ext cx="6537960" cy="3452042"/>
+            <a:off x="5279547" y="658368"/>
+            <a:ext cx="6220145" cy="5074920"/>
           </a:xfrm>
           <a:prstGeom prst="rect">
             <a:avLst/>
@@ -4811,7 +4772,7 @@
                 </a:solidFill>
                 <a:latin typeface="Calibri"/>
               </a:rPr>
-              <a:t>Which frameworks can test each domain (green = tracks wellbeing, yellow = measurable but weak signal, gray = framework cannot test it).</a:t>
+              <a:t>Top 25 SDG indicators by significance. Health (Goal 3) dominates: 16 of 25 top series.</a:t>
             </a:r>
           </a:p>
         </p:txBody>
@@ -4830,7 +4791,7 @@
     <p:bg>
       <p:bgPr>
         <a:solidFill>
-          <a:srgbClr val="E8EBEF"/>
+          <a:srgbClr val="FCFCFB"/>
         </a:solidFill>
         <a:effectLst/>
       </p:bgPr>
@@ -4844,45 +4805,43 @@
       <p:grpSpPr/>
       <p:sp>
         <p:nvSpPr>
-          <p:cNvPr id="2" name="Rectangle 1"/>
-          <p:cNvSpPr/>
-          <p:nvPr/>
-        </p:nvSpPr>
-        <p:spPr>
-          <a:xfrm>
-            <a:off x="566928" y="2103120"/>
-            <a:ext cx="54864" cy="2377440"/>
-          </a:xfrm>
-          <a:prstGeom prst="rect">
-            <a:avLst/>
-          </a:prstGeom>
-          <a:solidFill>
-            <a:srgbClr val="17549E"/>
-          </a:solidFill>
-          <a:ln>
-            <a:noFill/>
-          </a:ln>
-          <a:effectLst/>
-        </p:spPr>
-        <p:style>
-          <a:lnRef idx="1">
-            <a:schemeClr val="accent1"/>
-          </a:lnRef>
-          <a:fillRef idx="3">
-            <a:schemeClr val="accent1"/>
-          </a:fillRef>
-          <a:effectRef idx="2">
-            <a:schemeClr val="accent1"/>
-          </a:effectRef>
-          <a:fontRef idx="minor">
-            <a:schemeClr val="lt1"/>
-          </a:fontRef>
-        </p:style>
-        <p:txBody>
-          <a:bodyPr rtlCol="0" anchor="ctr"/>
-          <a:lstStyle/>
-          <a:p>
-            <a:pPr algn="ctr"/>
+          <p:cNvPr id="2" name="TextBox 1"/>
+          <p:cNvSpPr txBox="1"/>
+          <p:nvPr/>
+        </p:nvSpPr>
+        <p:spPr>
+          <a:xfrm>
+            <a:off x="566928" y="502920"/>
+            <a:ext cx="4160520" cy="274320"/>
+          </a:xfrm>
+          <a:prstGeom prst="rect">
+            <a:avLst/>
+          </a:prstGeom>
+          <a:noFill/>
+        </p:spPr>
+        <p:txBody>
+          <a:bodyPr wrap="square" lIns="0" rIns="0" tIns="0" bIns="0">
+            <a:spAutoFit/>
+          </a:bodyPr>
+          <a:lstStyle/>
+          <a:p>
+            <a:pPr>
+              <a:spcBef>
+                <a:spcPts val="0"/>
+              </a:spcBef>
+              <a:spcAft>
+                <a:spcPts val="0"/>
+              </a:spcAft>
+            </a:pPr>
+            <a:r>
+              <a:rPr sz="1000" b="0" i="0">
+                <a:solidFill>
+                  <a:srgbClr val="A63A30"/>
+                </a:solidFill>
+                <a:latin typeface="Consolas"/>
+              </a:rPr>
+              <a:t>RESULT 3 · SOCIAL TRUST</a:t>
+            </a:r>
           </a:p>
         </p:txBody>
       </p:sp>
@@ -4894,21 +4853,155 @@
         </p:nvSpPr>
         <p:spPr>
           <a:xfrm>
-            <a:off x="914400" y="1600200"/>
-            <a:ext cx="8686800" cy="274320"/>
-          </a:xfrm>
-          <a:prstGeom prst="rect">
-            <a:avLst/>
-          </a:prstGeom>
-          <a:noFill/>
-        </p:spPr>
-        <p:txBody>
-          <a:bodyPr wrap="square" lIns="0" rIns="0" tIns="0" bIns="0">
-            <a:spAutoFit/>
-          </a:bodyPr>
-          <a:lstStyle/>
-          <a:p>
-            <a:pPr>
+            <a:off x="566928" y="914400"/>
+            <a:ext cx="4160520" cy="1371600"/>
+          </a:xfrm>
+          <a:prstGeom prst="rect">
+            <a:avLst/>
+          </a:prstGeom>
+          <a:noFill/>
+        </p:spPr>
+        <p:txBody>
+          <a:bodyPr wrap="square" lIns="0" rIns="0" tIns="0" bIns="0">
+            <a:spAutoFit/>
+          </a:bodyPr>
+          <a:lstStyle/>
+          <a:p>
+            <a:pPr>
+              <a:lnSpc>
+                <a:spcPct val="108000"/>
+              </a:lnSpc>
+              <a:spcBef>
+                <a:spcPts val="0"/>
+              </a:spcBef>
+              <a:spcAft>
+                <a:spcPts val="0"/>
+              </a:spcAft>
+            </a:pPr>
+            <a:r>
+              <a:rPr sz="2300" b="0" i="0">
+                <a:solidFill>
+                  <a:srgbClr val="14171C"/>
+                </a:solidFill>
+                <a:latin typeface="Georgia"/>
+              </a:rPr>
+              <a:t>Social trust leads the ESS, is nearly invisible to development frameworks</a:t>
+            </a:r>
+          </a:p>
+        </p:txBody>
+      </p:sp>
+      <p:sp>
+        <p:nvSpPr>
+          <p:cNvPr id="4" name="TextBox 3"/>
+          <p:cNvSpPr txBox="1"/>
+          <p:nvPr/>
+        </p:nvSpPr>
+        <p:spPr>
+          <a:xfrm>
+            <a:off x="566928" y="2331720"/>
+            <a:ext cx="4160520" cy="3840480"/>
+          </a:xfrm>
+          <a:prstGeom prst="rect">
+            <a:avLst/>
+          </a:prstGeom>
+          <a:noFill/>
+        </p:spPr>
+        <p:txBody>
+          <a:bodyPr wrap="square" lIns="0" rIns="0" tIns="0" bIns="0">
+            <a:spAutoFit/>
+          </a:bodyPr>
+          <a:lstStyle/>
+          <a:p>
+            <a:pPr>
+              <a:lnSpc>
+                <a:spcPct val="132000"/>
+              </a:lnSpc>
+              <a:spcBef>
+                <a:spcPts val="0"/>
+              </a:spcBef>
+              <a:spcAft>
+                <a:spcPts val="1100"/>
+              </a:spcAft>
+            </a:pPr>
+            <a:r>
+              <a:rPr sz="1150" b="0" i="0">
+                <a:solidFill>
+                  <a:srgbClr val="5A6068"/>
+                </a:solidFill>
+                <a:latin typeface="Calibri"/>
+              </a:rPr>
+              <a:t>Social trust — 'most people can be trusted' — is significant in 94% of ESS countries, third strongest domain after health and income, with median R² = 0.041. Neither the HDI nor the SDG framework measures it at all.</a:t>
+            </a:r>
+          </a:p>
+          <a:p>
+            <a:pPr>
+              <a:lnSpc>
+                <a:spcPct val="132000"/>
+              </a:lnSpc>
+              <a:spcBef>
+                <a:spcPts val="0"/>
+              </a:spcBef>
+              <a:spcAft>
+                <a:spcPts val="1100"/>
+              </a:spcAft>
+            </a:pPr>
+            <a:r>
+              <a:rPr sz="1150" b="0" i="0">
+                <a:solidFill>
+                  <a:srgbClr val="5A6068"/>
+                </a:solidFill>
+                <a:latin typeface="Calibri"/>
+              </a:rPr>
+              <a:t>The SDG database does carry 13 trust- and satisfaction-adjacent series under Goal 16: satisfaction with public services, perception of bribery, perceived decision-making inclusiveness. But these measure institutional confidence, not interpersonal trust — a different construct, and one that correlates more weakly with life satisfaction even when tested across countries. Moreover, their median coverage is one observation per country-series against six for the database as a whole; 147 of 163 country-series cannot support a time-series design.</a:t>
+            </a:r>
+          </a:p>
+          <a:p>
+            <a:pPr>
+              <a:lnSpc>
+                <a:spcPct val="132000"/>
+              </a:lnSpc>
+              <a:spcBef>
+                <a:spcPts val="0"/>
+              </a:spcBef>
+              <a:spcAft>
+                <a:spcPts val="1100"/>
+              </a:spcAft>
+            </a:pPr>
+            <a:r>
+              <a:rPr sz="1150" b="0" i="0">
+                <a:solidFill>
+                  <a:srgbClr val="5A6068"/>
+                </a:solidFill>
+                <a:latin typeface="Calibri"/>
+              </a:rPr>
+              <a:t>Education's and health's problems are about which variable to count within a domain. Trust's problem is different: it is not in the frameworks at all. That is a coverage gap, not a measurement problem.</a:t>
+            </a:r>
+          </a:p>
+        </p:txBody>
+      </p:sp>
+      <p:sp>
+        <p:nvSpPr>
+          <p:cNvPr id="5" name="TextBox 4"/>
+          <p:cNvSpPr txBox="1"/>
+          <p:nvPr/>
+        </p:nvSpPr>
+        <p:spPr>
+          <a:xfrm>
+            <a:off x="11338560" y="6263640"/>
+            <a:ext cx="548640" cy="274320"/>
+          </a:xfrm>
+          <a:prstGeom prst="rect">
+            <a:avLst/>
+          </a:prstGeom>
+          <a:noFill/>
+        </p:spPr>
+        <p:txBody>
+          <a:bodyPr wrap="square" lIns="0" rIns="0" tIns="0" bIns="0">
+            <a:spAutoFit/>
+          </a:bodyPr>
+          <a:lstStyle/>
+          <a:p>
+            <a:pPr algn="r">
               <a:spcBef>
                 <a:spcPts val="0"/>
               </a:spcBef>
@@ -4919,25 +5012,49 @@
             <a:r>
               <a:rPr sz="1100" b="0" i="0">
                 <a:solidFill>
-                  <a:srgbClr val="17549E"/>
+                  <a:srgbClr val="868D96"/>
                 </a:solidFill>
                 <a:latin typeface="Consolas"/>
               </a:rPr>
-              <a:t>WHERE ACT II LEAVES US</a:t>
-            </a:r>
-          </a:p>
-        </p:txBody>
-      </p:sp>
-      <p:sp>
-        <p:nvSpPr>
-          <p:cNvPr id="4" name="TextBox 3"/>
-          <p:cNvSpPr txBox="1"/>
-          <p:nvPr/>
-        </p:nvSpPr>
-        <p:spPr>
-          <a:xfrm>
-            <a:off x="914400" y="2148840"/>
-            <a:ext cx="9509760" cy="2926080"/>
+              <a:t>II</a:t>
+            </a:r>
+          </a:p>
+        </p:txBody>
+      </p:sp>
+      <p:pic>
+        <p:nvPicPr>
+          <p:cNvPr id="6" name="Picture 5" descr="trust_coverage_comparison.png"/>
+          <p:cNvPicPr>
+            <a:picLocks noChangeAspect="1"/>
+          </p:cNvPicPr>
+          <p:nvPr/>
+        </p:nvPicPr>
+        <p:blipFill>
+          <a:blip r:embed="rId2"/>
+          <a:stretch>
+            <a:fillRect/>
+          </a:stretch>
+        </p:blipFill>
+        <p:spPr>
+          <a:xfrm>
+            <a:off x="5120640" y="1234440"/>
+            <a:ext cx="6537960" cy="3922776"/>
+          </a:xfrm>
+          <a:prstGeom prst="rect">
+            <a:avLst/>
+          </a:prstGeom>
+        </p:spPr>
+      </p:pic>
+      <p:sp>
+        <p:nvSpPr>
+          <p:cNvPr id="7" name="TextBox 6"/>
+          <p:cNvSpPr txBox="1"/>
+          <p:nvPr/>
+        </p:nvSpPr>
+        <p:spPr>
+          <a:xfrm>
+            <a:off x="5120640" y="5897880"/>
+            <a:ext cx="6537960" cy="731520"/>
           </a:xfrm>
           <a:prstGeom prst="rect">
             <a:avLst/>
@@ -4952,7 +5069,7 @@
           <a:p>
             <a:pPr>
               <a:lnSpc>
-                <a:spcPct val="135000"/>
+                <a:spcPct val="125000"/>
               </a:lnSpc>
               <a:spcBef>
                 <a:spcPts val="0"/>
@@ -4962,13 +5079,13 @@
               </a:spcAft>
             </a:pPr>
             <a:r>
-              <a:rPr sz="2100" b="0" i="0">
-                <a:solidFill>
-                  <a:srgbClr val="14171C"/>
-                </a:solidFill>
-                <a:latin typeface="Georgia"/>
-              </a:rPr>
-              <a:t>The problem is not the domains; the problem is the measurement. Frameworks designed for development, with aggregate indicators measured at long intervals, structurally cannot see what matters for individual lived experience.</a:t>
+              <a:rPr sz="900" b="0" i="0">
+                <a:solidFill>
+                  <a:srgbClr val="868D96"/>
+                </a:solidFill>
+                <a:latin typeface="Calibri"/>
+              </a:rPr>
+              <a:t>Social trust: 94% of ESS countries significant (individual level), 1.5% of SDG16 country-indicator pairs (institutional confidence, not interpersonal trust), not measured in the HDI.</a:t>
             </a:r>
           </a:p>
         </p:txBody>
@@ -4987,7 +5104,7 @@
     <p:bg>
       <p:bgPr>
         <a:solidFill>
-          <a:srgbClr val="14171C"/>
+          <a:srgbClr val="FCFCFB"/>
         </a:solidFill>
         <a:effectLst/>
       </p:bgPr>
@@ -5007,8 +5124,162 @@
         </p:nvSpPr>
         <p:spPr>
           <a:xfrm>
-            <a:off x="8229600" y="822960"/>
-            <a:ext cx="3291840" cy="4114800"/>
+            <a:off x="566928" y="502920"/>
+            <a:ext cx="4160520" cy="274320"/>
+          </a:xfrm>
+          <a:prstGeom prst="rect">
+            <a:avLst/>
+          </a:prstGeom>
+          <a:noFill/>
+        </p:spPr>
+        <p:txBody>
+          <a:bodyPr wrap="square" lIns="0" rIns="0" tIns="0" bIns="0">
+            <a:spAutoFit/>
+          </a:bodyPr>
+          <a:lstStyle/>
+          <a:p>
+            <a:pPr>
+              <a:spcBef>
+                <a:spcPts val="0"/>
+              </a:spcBef>
+              <a:spcAft>
+                <a:spcPts val="0"/>
+              </a:spcAft>
+            </a:pPr>
+            <a:r>
+              <a:rPr sz="1000" b="0" i="0">
+                <a:solidFill>
+                  <a:srgbClr val="A63A30"/>
+                </a:solidFill>
+                <a:latin typeface="Consolas"/>
+              </a:rPr>
+              <a:t>SYNTHESIS</a:t>
+            </a:r>
+          </a:p>
+        </p:txBody>
+      </p:sp>
+      <p:sp>
+        <p:nvSpPr>
+          <p:cNvPr id="3" name="TextBox 2"/>
+          <p:cNvSpPr txBox="1"/>
+          <p:nvPr/>
+        </p:nvSpPr>
+        <p:spPr>
+          <a:xfrm>
+            <a:off x="566928" y="914400"/>
+            <a:ext cx="4160520" cy="1371600"/>
+          </a:xfrm>
+          <a:prstGeom prst="rect">
+            <a:avLst/>
+          </a:prstGeom>
+          <a:noFill/>
+        </p:spPr>
+        <p:txBody>
+          <a:bodyPr wrap="square" lIns="0" rIns="0" tIns="0" bIns="0">
+            <a:spAutoFit/>
+          </a:bodyPr>
+          <a:lstStyle/>
+          <a:p>
+            <a:pPr>
+              <a:lnSpc>
+                <a:spcPct val="108000"/>
+              </a:lnSpc>
+              <a:spcBef>
+                <a:spcPts val="0"/>
+              </a:spcBef>
+              <a:spcAft>
+                <a:spcPts val="0"/>
+              </a:spcAft>
+            </a:pPr>
+            <a:r>
+              <a:rPr sz="2300" b="0" i="0">
+                <a:solidFill>
+                  <a:srgbClr val="14171C"/>
+                </a:solidFill>
+                <a:latin typeface="Georgia"/>
+              </a:rPr>
+              <a:t>Three domains, three ways frameworks lose sight of what matters</a:t>
+            </a:r>
+          </a:p>
+        </p:txBody>
+      </p:sp>
+      <p:sp>
+        <p:nvSpPr>
+          <p:cNvPr id="4" name="TextBox 3"/>
+          <p:cNvSpPr txBox="1"/>
+          <p:nvPr/>
+        </p:nvSpPr>
+        <p:spPr>
+          <a:xfrm>
+            <a:off x="566928" y="2331720"/>
+            <a:ext cx="4160520" cy="3840480"/>
+          </a:xfrm>
+          <a:prstGeom prst="rect">
+            <a:avLst/>
+          </a:prstGeom>
+          <a:noFill/>
+        </p:spPr>
+        <p:txBody>
+          <a:bodyPr wrap="square" lIns="0" rIns="0" tIns="0" bIns="0">
+            <a:spAutoFit/>
+          </a:bodyPr>
+          <a:lstStyle/>
+          <a:p>
+            <a:pPr>
+              <a:lnSpc>
+                <a:spcPct val="132000"/>
+              </a:lnSpc>
+              <a:spcBef>
+                <a:spcPts val="0"/>
+              </a:spcBef>
+              <a:spcAft>
+                <a:spcPts val="1100"/>
+              </a:spcAft>
+            </a:pPr>
+            <a:r>
+              <a:rPr sz="1150" b="0" i="0">
+                <a:solidFill>
+                  <a:srgbClr val="5A6068"/>
+                </a:solidFill>
+                <a:latin typeface="Calibri"/>
+              </a:rPr>
+              <a:t>Education's rank depends on which construct you count: attainment works, but parity ratios and learning outcomes do not, so pooling dilutes the signal. Health's rank depends on whether your chosen variable still varies: life expectancy does not, but self-rated health does, so the HDI's choice costs it. Social trust's rank is zero because it is not collected at scale in development frameworks at all — a coverage gap that cannot be fixed by choosing the right variable, because no variable was ever measured.</a:t>
+            </a:r>
+          </a:p>
+          <a:p>
+            <a:pPr>
+              <a:lnSpc>
+                <a:spcPct val="132000"/>
+              </a:lnSpc>
+              <a:spcBef>
+                <a:spcPts val="0"/>
+              </a:spcBef>
+              <a:spcAft>
+                <a:spcPts val="1100"/>
+              </a:spcAft>
+            </a:pPr>
+            <a:r>
+              <a:rPr sz="1150" b="0" i="0">
+                <a:solidFill>
+                  <a:srgbClr val="5A6068"/>
+                </a:solidFill>
+                <a:latin typeface="Calibri"/>
+              </a:rPr>
+              <a:t>These are not criticisms of the frameworks; they were built to track development, and they do. But which components look most consequential for lived experience is not the question they were built to answer.</a:t>
+            </a:r>
+          </a:p>
+        </p:txBody>
+      </p:sp>
+      <p:sp>
+        <p:nvSpPr>
+          <p:cNvPr id="5" name="TextBox 4"/>
+          <p:cNvSpPr txBox="1"/>
+          <p:nvPr/>
+        </p:nvSpPr>
+        <p:spPr>
+          <a:xfrm>
+            <a:off x="11338560" y="6263640"/>
+            <a:ext cx="548640" cy="274320"/>
           </a:xfrm>
           <a:prstGeom prst="rect">
             <a:avLst/>
@@ -5030,113 +5301,51 @@
               </a:spcAft>
             </a:pPr>
             <a:r>
-              <a:rPr sz="20000" b="0" i="0">
-                <a:solidFill>
-                  <a:srgbClr val="2A3340"/>
-                </a:solidFill>
-                <a:latin typeface="Georgia"/>
-              </a:rPr>
-              <a:t>III</a:t>
-            </a:r>
-          </a:p>
-        </p:txBody>
-      </p:sp>
-      <p:sp>
-        <p:nvSpPr>
-          <p:cNvPr id="3" name="Rectangle 2"/>
-          <p:cNvSpPr/>
-          <p:nvPr/>
-        </p:nvSpPr>
-        <p:spPr>
-          <a:xfrm>
-            <a:off x="566928" y="1371600"/>
-            <a:ext cx="7315200" cy="25400"/>
-          </a:xfrm>
-          <a:prstGeom prst="rect">
-            <a:avLst/>
-          </a:prstGeom>
-          <a:solidFill>
-            <a:srgbClr val="C9D8EC"/>
-          </a:solidFill>
-          <a:ln>
-            <a:noFill/>
-          </a:ln>
-          <a:effectLst/>
-        </p:spPr>
-        <p:style>
-          <a:lnRef idx="1">
-            <a:schemeClr val="accent1"/>
-          </a:lnRef>
-          <a:fillRef idx="3">
-            <a:schemeClr val="accent1"/>
-          </a:fillRef>
-          <a:effectRef idx="2">
-            <a:schemeClr val="accent1"/>
-          </a:effectRef>
-          <a:fontRef idx="minor">
-            <a:schemeClr val="lt1"/>
-          </a:fontRef>
-        </p:style>
-        <p:txBody>
-          <a:bodyPr rtlCol="0" anchor="ctr"/>
-          <a:lstStyle/>
-          <a:p>
-            <a:pPr algn="ctr"/>
-          </a:p>
-        </p:txBody>
-      </p:sp>
-      <p:sp>
-        <p:nvSpPr>
-          <p:cNvPr id="4" name="TextBox 3"/>
-          <p:cNvSpPr txBox="1"/>
-          <p:nvPr/>
-        </p:nvSpPr>
-        <p:spPr>
-          <a:xfrm>
-            <a:off x="566928" y="960120"/>
-            <a:ext cx="5486400" cy="274320"/>
-          </a:xfrm>
-          <a:prstGeom prst="rect">
-            <a:avLst/>
-          </a:prstGeom>
-          <a:noFill/>
-        </p:spPr>
-        <p:txBody>
-          <a:bodyPr wrap="square" lIns="0" rIns="0" tIns="0" bIns="0">
-            <a:spAutoFit/>
-          </a:bodyPr>
-          <a:lstStyle/>
-          <a:p>
-            <a:pPr>
-              <a:spcBef>
-                <a:spcPts val="0"/>
-              </a:spcBef>
-              <a:spcAft>
-                <a:spcPts val="0"/>
-              </a:spcAft>
-            </a:pPr>
-            <a:r>
               <a:rPr sz="1100" b="0" i="0">
                 <a:solidFill>
-                  <a:srgbClr val="C9D8EC"/>
+                  <a:srgbClr val="868D96"/>
                 </a:solidFill>
                 <a:latin typeface="Consolas"/>
               </a:rPr>
-              <a:t>ACT III</a:t>
-            </a:r>
-          </a:p>
-        </p:txBody>
-      </p:sp>
-      <p:sp>
-        <p:nvSpPr>
-          <p:cNvPr id="5" name="TextBox 4"/>
-          <p:cNvSpPr txBox="1"/>
-          <p:nvPr/>
-        </p:nvSpPr>
-        <p:spPr>
-          <a:xfrm>
-            <a:off x="566928" y="1783080"/>
-            <a:ext cx="7223760" cy="1828800"/>
+              <a:t>II</a:t>
+            </a:r>
+          </a:p>
+        </p:txBody>
+      </p:sp>
+      <p:pic>
+        <p:nvPicPr>
+          <p:cNvPr id="6" name="Picture 5" descr="domain_horse_race.png"/>
+          <p:cNvPicPr>
+            <a:picLocks noChangeAspect="1"/>
+          </p:cNvPicPr>
+          <p:nvPr/>
+        </p:nvPicPr>
+        <p:blipFill>
+          <a:blip r:embed="rId2"/>
+          <a:stretch>
+            <a:fillRect/>
+          </a:stretch>
+        </p:blipFill>
+        <p:spPr>
+          <a:xfrm>
+            <a:off x="5120640" y="1433421"/>
+            <a:ext cx="6537960" cy="3524813"/>
+          </a:xfrm>
+          <a:prstGeom prst="rect">
+            <a:avLst/>
+          </a:prstGeom>
+        </p:spPr>
+      </p:pic>
+      <p:sp>
+        <p:nvSpPr>
+          <p:cNvPr id="7" name="TextBox 6"/>
+          <p:cNvSpPr txBox="1"/>
+          <p:nvPr/>
+        </p:nvSpPr>
+        <p:spPr>
+          <a:xfrm>
+            <a:off x="5120640" y="5897880"/>
+            <a:ext cx="6537960" cy="731520"/>
           </a:xfrm>
           <a:prstGeom prst="rect">
             <a:avLst/>
@@ -5151,7 +5360,7 @@
           <a:p>
             <a:pPr>
               <a:lnSpc>
-                <a:spcPct val="102000"/>
+                <a:spcPct val="125000"/>
               </a:lnSpc>
               <a:spcBef>
                 <a:spcPts val="0"/>
@@ -5161,250 +5370,13 @@
               </a:spcAft>
             </a:pPr>
             <a:r>
-              <a:rPr sz="4000" b="0" i="0">
-                <a:solidFill>
-                  <a:srgbClr val="FCFCFB"/>
-                </a:solidFill>
-                <a:latin typeface="Georgia"/>
-              </a:rPr>
-              <a:t>Within-country evidence: Why measurement type matters</a:t>
-            </a:r>
-          </a:p>
-        </p:txBody>
-      </p:sp>
-      <p:sp>
-        <p:nvSpPr>
-          <p:cNvPr id="6" name="TextBox 5"/>
-          <p:cNvSpPr txBox="1"/>
-          <p:nvPr/>
-        </p:nvSpPr>
-        <p:spPr>
-          <a:xfrm>
-            <a:off x="566928" y="3886200"/>
-            <a:ext cx="6766560" cy="1463040"/>
-          </a:xfrm>
-          <a:prstGeom prst="rect">
-            <a:avLst/>
-          </a:prstGeom>
-          <a:noFill/>
-        </p:spPr>
-        <p:txBody>
-          <a:bodyPr wrap="square" lIns="0" rIns="0" tIns="0" bIns="0">
-            <a:spAutoFit/>
-          </a:bodyPr>
-          <a:lstStyle/>
-          <a:p>
-            <a:pPr>
-              <a:lnSpc>
-                <a:spcPct val="135000"/>
-              </a:lnSpc>
-              <a:spcBef>
-                <a:spcPts val="0"/>
-              </a:spcBef>
-              <a:spcAft>
-                <a:spcPts val="0"/>
-              </a:spcAft>
-            </a:pPr>
-            <a:r>
-              <a:rPr sz="1275" b="0" i="1">
-                <a:solidFill>
-                  <a:srgbClr val="9AA4B0"/>
-                </a:solidFill>
-                <a:latin typeface="Georgia"/>
-              </a:rPr>
-              <a:t>Individual-level, self-reported data shows a fundamentally different pattern. Unlike administrative development frameworks, ESS captures year-to-year variation within countries. This is not a measurement failure; it is a structural consequence of how development is measured — at the country level, with long intervals. Social trust emerges not because frameworks miss it, but because development frameworks measure at the wrong temporal and individual resolution where trust varies.</a:t>
-            </a:r>
-          </a:p>
-        </p:txBody>
-      </p:sp>
-      <p:sp>
-        <p:nvSpPr>
-          <p:cNvPr id="7" name="TextBox 6"/>
-          <p:cNvSpPr txBox="1"/>
-          <p:nvPr/>
-        </p:nvSpPr>
-        <p:spPr>
-          <a:xfrm>
-            <a:off x="566928" y="5623560"/>
-            <a:ext cx="3503066" cy="914400"/>
-          </a:xfrm>
-          <a:prstGeom prst="rect">
-            <a:avLst/>
-          </a:prstGeom>
-          <a:noFill/>
-        </p:spPr>
-        <p:txBody>
-          <a:bodyPr wrap="square" lIns="0" rIns="0" tIns="0" bIns="0">
-            <a:spAutoFit/>
-          </a:bodyPr>
-          <a:lstStyle/>
-          <a:p>
-            <a:pPr>
-              <a:spcBef>
-                <a:spcPts val="0"/>
-              </a:spcBef>
-              <a:spcAft>
-                <a:spcPts val="400"/>
-              </a:spcAft>
-            </a:pPr>
-            <a:r>
-              <a:rPr sz="2200" b="0" i="0">
-                <a:solidFill>
-                  <a:srgbClr val="FCFCFB"/>
-                </a:solidFill>
-                <a:latin typeface="Consolas"/>
-              </a:rPr>
-              <a:t>69% → 64%</a:t>
-            </a:r>
-          </a:p>
-          <a:p>
-            <a:pPr>
-              <a:lnSpc>
-                <a:spcPct val="120000"/>
-              </a:lnSpc>
-              <a:spcBef>
-                <a:spcPts val="0"/>
-              </a:spcBef>
-              <a:spcAft>
-                <a:spcPts val="0"/>
-              </a:spcAft>
-            </a:pPr>
-            <a:r>
-              <a:rPr sz="1000" b="0" i="0">
-                <a:solidFill>
-                  <a:srgbClr val="8A94A0"/>
+              <a:rPr sz="900" b="0" i="0">
+                <a:solidFill>
+                  <a:srgbClr val="868D96"/>
                 </a:solidFill>
                 <a:latin typeface="Calibri"/>
               </a:rPr>
-              <a:t>ESS levels → differences (NOT collapsed)</a:t>
-            </a:r>
-          </a:p>
-        </p:txBody>
-      </p:sp>
-      <p:sp>
-        <p:nvSpPr>
-          <p:cNvPr id="8" name="TextBox 7"/>
-          <p:cNvSpPr txBox="1"/>
-          <p:nvPr/>
-        </p:nvSpPr>
-        <p:spPr>
-          <a:xfrm>
-            <a:off x="4344314" y="5623560"/>
-            <a:ext cx="3503066" cy="914400"/>
-          </a:xfrm>
-          <a:prstGeom prst="rect">
-            <a:avLst/>
-          </a:prstGeom>
-          <a:noFill/>
-        </p:spPr>
-        <p:txBody>
-          <a:bodyPr wrap="square" lIns="0" rIns="0" tIns="0" bIns="0">
-            <a:spAutoFit/>
-          </a:bodyPr>
-          <a:lstStyle/>
-          <a:p>
-            <a:pPr>
-              <a:spcBef>
-                <a:spcPts val="0"/>
-              </a:spcBef>
-              <a:spcAft>
-                <a:spcPts val="400"/>
-              </a:spcAft>
-            </a:pPr>
-            <a:r>
-              <a:rPr sz="2200" b="0" i="0">
-                <a:solidFill>
-                  <a:srgbClr val="FCFCFB"/>
-                </a:solidFill>
-                <a:latin typeface="Consolas"/>
-              </a:rPr>
-              <a:t>71% → 5%</a:t>
-            </a:r>
-          </a:p>
-          <a:p>
-            <a:pPr>
-              <a:lnSpc>
-                <a:spcPct val="120000"/>
-              </a:lnSpc>
-              <a:spcBef>
-                <a:spcPts val="0"/>
-              </a:spcBef>
-              <a:spcAft>
-                <a:spcPts val="0"/>
-              </a:spcAft>
-            </a:pPr>
-            <a:r>
-              <a:rPr sz="1000" b="0" i="0">
-                <a:solidFill>
-                  <a:srgbClr val="8A94A0"/>
-                </a:solidFill>
-                <a:latin typeface="Calibri"/>
-              </a:rPr>
-              <a:t>SDG levels → differences (collapsed)</a:t>
-            </a:r>
-          </a:p>
-        </p:txBody>
-      </p:sp>
-      <p:sp>
-        <p:nvSpPr>
-          <p:cNvPr id="9" name="TextBox 8"/>
-          <p:cNvSpPr txBox="1"/>
-          <p:nvPr/>
-        </p:nvSpPr>
-        <p:spPr>
-          <a:xfrm>
-            <a:off x="8121700" y="5623560"/>
-            <a:ext cx="3503066" cy="914400"/>
-          </a:xfrm>
-          <a:prstGeom prst="rect">
-            <a:avLst/>
-          </a:prstGeom>
-          <a:noFill/>
-        </p:spPr>
-        <p:txBody>
-          <a:bodyPr wrap="square" lIns="0" rIns="0" tIns="0" bIns="0">
-            <a:spAutoFit/>
-          </a:bodyPr>
-          <a:lstStyle/>
-          <a:p>
-            <a:pPr>
-              <a:spcBef>
-                <a:spcPts val="0"/>
-              </a:spcBef>
-              <a:spcAft>
-                <a:spcPts val="400"/>
-              </a:spcAft>
-            </a:pPr>
-            <a:r>
-              <a:rPr sz="2200" b="0" i="0">
-                <a:solidFill>
-                  <a:srgbClr val="FCFCFB"/>
-                </a:solidFill>
-                <a:latin typeface="Consolas"/>
-              </a:rPr>
-              <a:t>42% → 2%</a:t>
-            </a:r>
-          </a:p>
-          <a:p>
-            <a:pPr>
-              <a:lnSpc>
-                <a:spcPct val="120000"/>
-              </a:lnSpc>
-              <a:spcBef>
-                <a:spcPts val="0"/>
-              </a:spcBef>
-              <a:spcAft>
-                <a:spcPts val="0"/>
-              </a:spcAft>
-            </a:pPr>
-            <a:r>
-              <a:rPr sz="1000" b="0" i="0">
-                <a:solidFill>
-                  <a:srgbClr val="8A94A0"/>
-                </a:solidFill>
-                <a:latin typeface="Calibri"/>
-              </a:rPr>
-              <a:t>HDI levels → differences (collapsed)</a:t>
+              <a:t>Domains competing within one instrument (ESS), at two levels of aggregation. Individual level (left) and country means (right).</a:t>
             </a:r>
           </a:p>
         </p:txBody>
@@ -5472,7 +5444,7 @@
                 </a:solidFill>
                 <a:latin typeface="Consolas"/>
               </a:rPr>
-              <a:t>WITHIN-COUNTRY EVIDENCE</a:t>
+              <a:t>FRAMEWORK BLIND SPOTS · DOMAIN BY DOMAIN</a:t>
             </a:r>
           </a:p>
         </p:txBody>
@@ -5517,7 +5489,7 @@
                 </a:solidFill>
                 <a:latin typeface="Georgia"/>
               </a:rPr>
-              <a:t>Individual-level, self-reported data captures year-to-year change that administrative frameworks miss</a:t>
+              <a:t>Education, health and social trust — and which frameworks can see them</a:t>
             </a:r>
           </a:p>
         </p:txBody>
@@ -5556,79 +5528,13 @@
               </a:spcAft>
             </a:pPr>
             <a:r>
-              <a:rPr sz="850" b="0" i="0">
+              <a:rPr sz="1150" b="0" i="0">
                 <a:solidFill>
                   <a:srgbClr val="5A6068"/>
                 </a:solidFill>
                 <a:latin typeface="Calibri"/>
               </a:rPr>
-              <a:t>Here is the critical observation that reshapes the question: unlike SDG (71% levels → 5% differences) and HDI (42% → 2%), the ESS shows 69% levels → 64% differences. The association persists within countries over time. This is not because development frameworks are poorly designed; it is because they measure aggregate, administrative data at long intervals (annual at best for HDI and SDG). Individual survey responses capture year-to-year variation in how people experience their lives.</a:t>
-            </a:r>
-          </a:p>
-          <a:p>
-            <a:pPr>
-              <a:lnSpc>
-                <a:spcPct val="132000"/>
-              </a:lnSpc>
-              <a:spcBef>
-                <a:spcPts val="0"/>
-              </a:spcBef>
-              <a:spcAft>
-                <a:spcPts val="1100"/>
-              </a:spcAft>
-            </a:pPr>
-            <a:r>
-              <a:rPr sz="850" b="0" i="0">
-                <a:solidFill>
-                  <a:srgbClr val="5A6068"/>
-                </a:solidFill>
-                <a:latin typeface="Calibri"/>
-              </a:rPr>
-              <a:t>This is why social trust emerges here. At the country level, the SDG database carries 13 trust-adjacent series, but only nine can be tested, four are significant, and nearly all disappear when controlling for income. They measure institutional confidence, not interpersonal trust. In the HDI, trust is not measured at all. But at the individual level, within countries, the ESS shows interpersonal trust is significant in 94% of countries and drives year-to-year change in wellbeing. The three domains emerge not because the frameworks reveal them, but because ESS measures them where people actually experience variation: in themselves, over time.</a:t>
-            </a:r>
-          </a:p>
-          <a:p>
-            <a:pPr>
-              <a:lnSpc>
-                <a:spcPct val="132000"/>
-              </a:lnSpc>
-              <a:spcBef>
-                <a:spcPts val="0"/>
-              </a:spcBef>
-              <a:spcAft>
-                <a:spcPts val="1100"/>
-              </a:spcAft>
-            </a:pPr>
-            <a:r>
-              <a:rPr sz="850" b="0" i="0">
-                <a:solidFill>
-                  <a:srgbClr val="5A6068"/>
-                </a:solidFill>
-                <a:latin typeface="Calibri"/>
-              </a:rPr>
-              <a:t>This is not about measurement error. It is structural. Frameworks designed for tracking aggregate national progress cannot see individual experience responsive to change. At regional scale, the collapse persists: across 167 subnational regions within ESS countries with ≥5 survey years, life satisfaction and regional development show the same pattern as national data — strong levels associations, weak differences associations. The problem is not aggregation; it is temporal resolution and individual measurement.</a:t>
-            </a:r>
-          </a:p>
-          <a:p>
-            <a:pPr>
-              <a:lnSpc>
-                <a:spcPct val="132000"/>
-              </a:lnSpc>
-              <a:spcBef>
-                <a:spcPts val="0"/>
-              </a:spcBef>
-              <a:spcAft>
-                <a:spcPts val="1100"/>
-              </a:spcAft>
-            </a:pPr>
-            <a:r>
-              <a:rPr sz="850" b="0" i="0">
-                <a:solidFill>
-                  <a:srgbClr val="5A6068"/>
-                </a:solidFill>
-                <a:latin typeface="Calibri"/>
-              </a:rPr>
-              <a:t>The caveats are substantial: 36 European countries, self-reported measures, annual cycles. But the implication is clear. Development frameworks' blindness to social trust is not because trust does not matter for wellbeing; it is because development was never designed to measure individual experience at the temporal resolution where people and places change.</a:t>
+              <a:t>A summary of the blind spots: which frameworks can test which domains, and whether the test yields a signal. Education is testable in all three frameworks but its rank depends entirely on which construct the framework chose to count. Health is testable everywhere and leads wherever it is measured somewhere it still varies — a robust signal despite the HDI's poor choice of proxy. Social trust is testable in one instrument only: the ESS. It does not appear in the HDI at all, and the SDG framework measures institutional confidence instead, which is a different construct and a weaker predictor.</a:t>
             </a:r>
           </a:p>
         </p:txBody>
@@ -5670,14 +5576,14 @@
                 </a:solidFill>
                 <a:latin typeface="Consolas"/>
               </a:rPr>
-              <a:t>III</a:t>
+              <a:t>II</a:t>
             </a:r>
           </a:p>
         </p:txBody>
       </p:sp>
       <p:pic>
         <p:nvPicPr>
-          <p:cNvPr id="6" name="Picture 5" descr="collapse_shdi_ess_regional.png"/>
+          <p:cNvPr id="6" name="Picture 5" descr="domain_scorecard.png"/>
           <p:cNvPicPr>
             <a:picLocks noChangeAspect="1"/>
           </p:cNvPicPr>
@@ -5691,8 +5597,8 @@
         </p:blipFill>
         <p:spPr>
           <a:xfrm>
-            <a:off x="5546146" y="658368"/>
-            <a:ext cx="5686948" cy="5074919"/>
+            <a:off x="5120640" y="1469807"/>
+            <a:ext cx="6537960" cy="3452042"/>
           </a:xfrm>
           <a:prstGeom prst="rect">
             <a:avLst/>
@@ -5739,7 +5645,7 @@
                 </a:solidFill>
                 <a:latin typeface="Calibri"/>
               </a:rPr>
-              <a:t>Regional collapse: 167 subnational regions, levels vs. differences. ESS persists; collapse confirms it is not an artifact of national aggregation but of measurement type.</a:t>
+              <a:t>Which frameworks can test each domain (green = tracks wellbeing, yellow = measurable but weak signal, gray = framework cannot test it).</a:t>
             </a:r>
           </a:p>
         </p:txBody>
@@ -5851,7 +5757,7 @@
                 </a:solidFill>
                 <a:latin typeface="Consolas"/>
               </a:rPr>
-              <a:t>WHERE ACT III LEAVES US</a:t>
+              <a:t>WHERE ACT II LEAVES US</a:t>
             </a:r>
           </a:p>
         </p:txBody>
@@ -5896,7 +5802,7 @@
                 </a:solidFill>
                 <a:latin typeface="Georgia"/>
               </a:rPr>
-              <a:t>The three domains predict wellbeing differently depending on where and how you measure. Development frameworks' blindness is not incurable; it is structural. Frameworks designed for tracking aggregate national progress cannot see individual experience responsive to change.</a:t>
+              <a:t>The problem is not the domains; the problem is the measurement. Frameworks designed for development, with aggregate indicators measured at long intervals, structurally cannot see what matters for individual lived experience.</a:t>
             </a:r>
           </a:p>
         </p:txBody>
@@ -5964,7 +5870,7 @@
                 </a:solidFill>
                 <a:latin typeface="Georgia"/>
               </a:rPr>
-              <a:t>IV</a:t>
+              <a:t>III</a:t>
             </a:r>
           </a:p>
         </p:txBody>
@@ -6050,7 +5956,7 @@
                 </a:solidFill>
                 <a:latin typeface="Consolas"/>
               </a:rPr>
-              <a:t>ACT IV</a:t>
+              <a:t>ACT III</a:t>
             </a:r>
           </a:p>
         </p:txBody>
@@ -6095,7 +6001,7 @@
                 </a:solidFill>
                 <a:latin typeface="Georgia"/>
               </a:rPr>
-              <a:t>What this means for development frameworks</a:t>
+              <a:t>Within-country evidence: Why measurement type matters</a:t>
             </a:r>
           </a:p>
         </p:txBody>
@@ -6134,13 +6040,13 @@
               </a:spcAft>
             </a:pPr>
             <a:r>
-              <a:rPr sz="1550" b="0" i="1">
+              <a:rPr sz="1275" b="0" i="1">
                 <a:solidFill>
                   <a:srgbClr val="9AA4B0"/>
                 </a:solidFill>
                 <a:latin typeface="Georgia"/>
               </a:rPr>
-              <a:t>The disconnect is real and worth naming. Development frameworks have done their job of tracking progress on development. But the components that predict individual lived experience are ones these frameworks are not currently built to see — because of construction choices, variable saturation, or coverage that was never collected.</a:t>
+              <a:t>Individual-level, self-reported data shows a fundamentally different pattern. Unlike administrative development frameworks, ESS captures year-to-year variation within countries. This is not a measurement failure; it is a structural consequence of how development is measured — at the country level, with long intervals. Social trust emerges not because frameworks miss it, but because development frameworks measure at the wrong temporal and individual resolution where trust varies.</a:t>
             </a:r>
           </a:p>
         </p:txBody>
@@ -6182,7 +6088,7 @@
                 </a:solidFill>
                 <a:latin typeface="Consolas"/>
               </a:rPr>
-              <a:t>3 vs. 1</a:t>
+              <a:t>69% → 64%</a:t>
             </a:r>
           </a:p>
           <a:p>
@@ -6204,7 +6110,7 @@
                 </a:solidFill>
                 <a:latin typeface="Calibri"/>
               </a:rPr>
-              <a:t>domains the HDI can test for wellbeing, vs. social trust</a:t>
+              <a:t>ESS levels → differences (NOT collapsed)</a:t>
             </a:r>
           </a:p>
         </p:txBody>
@@ -6246,7 +6152,7 @@
                 </a:solidFill>
                 <a:latin typeface="Consolas"/>
               </a:rPr>
-              <a:t>42 vs. 661</a:t>
+              <a:t>71% → 5%</a:t>
             </a:r>
           </a:p>
           <a:p>
@@ -6268,7 +6174,7 @@
                 </a:solidFill>
                 <a:latin typeface="Calibri"/>
               </a:rPr>
-              <a:t>countries with SDG data, vs. series in the database</a:t>
+              <a:t>SDG levels → differences (collapsed)</a:t>
             </a:r>
           </a:p>
         </p:txBody>
@@ -6310,7 +6216,7 @@
                 </a:solidFill>
                 <a:latin typeface="Consolas"/>
               </a:rPr>
-              <a:t>0.041</a:t>
+              <a:t>42% → 2%</a:t>
             </a:r>
           </a:p>
           <a:p>
@@ -6332,7 +6238,7 @@
                 </a:solidFill>
                 <a:latin typeface="Calibri"/>
               </a:rPr>
-              <a:t>median R² for trust — below income, health, education individually, above none</a:t>
+              <a:t>HDI levels → differences (collapsed)</a:t>
             </a:r>
           </a:p>
         </p:txBody>
@@ -7216,7 +7122,7 @@
         <p:spPr>
           <a:xfrm>
             <a:off x="566928" y="502920"/>
-            <a:ext cx="8595360" cy="274320"/>
+            <a:ext cx="4160520" cy="274320"/>
           </a:xfrm>
           <a:prstGeom prst="rect">
             <a:avLst/>
@@ -7244,7 +7150,7 @@
                 </a:solidFill>
                 <a:latin typeface="Consolas"/>
               </a:rPr>
-              <a:t>THE STRUCTURAL DISCONNECT</a:t>
+              <a:t>METHOD MATTERS · WHAT SURVIVES</a:t>
             </a:r>
           </a:p>
         </p:txBody>
@@ -7258,7 +7164,7 @@
         <p:spPr>
           <a:xfrm>
             <a:off x="566928" y="914400"/>
-            <a:ext cx="8595360" cy="1371600"/>
+            <a:ext cx="4160520" cy="1371600"/>
           </a:xfrm>
           <a:prstGeom prst="rect">
             <a:avLst/>
@@ -7283,13 +7189,13 @@
               </a:spcAft>
             </a:pPr>
             <a:r>
-              <a:rPr sz="2700" b="0" i="0">
+              <a:rPr sz="2300" b="0" i="0">
                 <a:solidFill>
                   <a:srgbClr val="14171C"/>
                 </a:solidFill>
                 <a:latin typeface="Georgia"/>
               </a:rPr>
-              <a:t>These frameworks were built to measure development, not to capture what predicts wellbeing</a:t>
+              <a:t>Health survives both measurement methods. Social trust does not.</a:t>
             </a:r>
           </a:p>
         </p:txBody>
@@ -7302,8 +7208,8 @@
         </p:nvSpPr>
         <p:spPr>
           <a:xfrm>
-            <a:off x="566928" y="2286000"/>
-            <a:ext cx="8595360" cy="3840480"/>
+            <a:off x="566928" y="2331720"/>
+            <a:ext cx="4160520" cy="3840480"/>
           </a:xfrm>
           <a:prstGeom prst="rect">
             <a:avLst/>
@@ -7328,35 +7234,13 @@
               </a:spcAft>
             </a:pPr>
             <a:r>
-              <a:rPr sz="1400" b="0" i="0">
+              <a:rPr sz="1150" b="0" i="0">
                 <a:solidFill>
                   <a:srgbClr val="5A6068"/>
                 </a:solidFill>
                 <a:latin typeface="Calibri"/>
               </a:rPr>
-              <a:t>The HDI and SDG frameworks do not answer the question 'what makes people's lives better?' They were designed to track development at the aggregate level, with indicators chosen before the question of individual wellbeing was systematically tested. That is not a design failure; it is the intended scope. But it creates a structural gap: frameworks measuring aggregate, infrequent administrative data cannot see individual experience that responds to change.</a:t>
-            </a:r>
-          </a:p>
-          <a:p>
-            <a:pPr>
-              <a:lnSpc>
-                <a:spcPct val="132000"/>
-              </a:lnSpc>
-              <a:spcBef>
-                <a:spcPts val="0"/>
-              </a:spcBef>
-              <a:spcAft>
-                <a:spcPts val="1100"/>
-              </a:spcAft>
-            </a:pPr>
-            <a:r>
-              <a:rPr sz="1400" b="0" i="0">
-                <a:solidFill>
-                  <a:srgbClr val="5A6068"/>
-                </a:solidFill>
-                <a:latin typeface="Calibri"/>
-              </a:rPr>
-              <a:t>The gap is not incurable. It is built on three concrete, fixable problems: wrong constructs for some domains, saturated variables for others, and missing coverage for those not measured at all. This commentary suggests how to fix each.</a:t>
+              <a:t>A critical test: which domains actually predict wellbeing regardless of how you measure development? Health is significant in both administrative sources (SDG, 11.5% of country-indicator pairs) and self-reported sources (ESS, median R² = 0.091). This is robust. Education shows weak signal in both (SDG 3.3%, ESS R² = 0.0098), so the issue is not method-dependent but measurement-dependent. Social trust, however, only appears in self-reported data: 94% of ESS countries (median R² = 0.041) versus 1.5% of SDG16 country-pairs measuring institutional confidence instead. The three domains do not behave the same way across measurement methods.</a:t>
             </a:r>
           </a:p>
         </p:txBody>
@@ -7398,7 +7282,76 @@
                 </a:solidFill>
                 <a:latin typeface="Consolas"/>
               </a:rPr>
-              <a:t>IV</a:t>
+              <a:t>III</a:t>
+            </a:r>
+          </a:p>
+        </p:txBody>
+      </p:sp>
+      <p:pic>
+        <p:nvPicPr>
+          <p:cNvPr id="6" name="Picture 5" descr="health_trust_corroboration.png"/>
+          <p:cNvPicPr>
+            <a:picLocks noChangeAspect="1"/>
+          </p:cNvPicPr>
+          <p:nvPr/>
+        </p:nvPicPr>
+        <p:blipFill>
+          <a:blip r:embed="rId2"/>
+          <a:stretch>
+            <a:fillRect/>
+          </a:stretch>
+        </p:blipFill>
+        <p:spPr>
+          <a:xfrm>
+            <a:off x="5120640" y="1858518"/>
+            <a:ext cx="6537960" cy="2674620"/>
+          </a:xfrm>
+          <a:prstGeom prst="rect">
+            <a:avLst/>
+          </a:prstGeom>
+        </p:spPr>
+      </p:pic>
+      <p:sp>
+        <p:nvSpPr>
+          <p:cNvPr id="7" name="TextBox 6"/>
+          <p:cNvSpPr txBox="1"/>
+          <p:nvPr/>
+        </p:nvSpPr>
+        <p:spPr>
+          <a:xfrm>
+            <a:off x="5120640" y="5897880"/>
+            <a:ext cx="6537960" cy="731520"/>
+          </a:xfrm>
+          <a:prstGeom prst="rect">
+            <a:avLst/>
+          </a:prstGeom>
+          <a:noFill/>
+        </p:spPr>
+        <p:txBody>
+          <a:bodyPr wrap="square" lIns="0" rIns="0" tIns="0" bIns="0">
+            <a:spAutoFit/>
+          </a:bodyPr>
+          <a:lstStyle/>
+          <a:p>
+            <a:pPr>
+              <a:lnSpc>
+                <a:spcPct val="125000"/>
+              </a:lnSpc>
+              <a:spcBef>
+                <a:spcPts val="0"/>
+              </a:spcBef>
+              <a:spcAft>
+                <a:spcPts val="0"/>
+              </a:spcAft>
+            </a:pPr>
+            <a:r>
+              <a:rPr sz="900" b="0" i="0">
+                <a:solidFill>
+                  <a:srgbClr val="868D96"/>
+                </a:solidFill>
+                <a:latin typeface="Calibri"/>
+              </a:rPr>
+              <a:t>Health is robust across administrative and self-reported sources. Education is weak in both. Social trust appears only in self-reported individual-level data.</a:t>
             </a:r>
           </a:p>
         </p:txBody>
@@ -7438,7 +7391,7 @@
         <p:spPr>
           <a:xfrm>
             <a:off x="566928" y="502920"/>
-            <a:ext cx="8595360" cy="274320"/>
+            <a:ext cx="4160520" cy="274320"/>
           </a:xfrm>
           <a:prstGeom prst="rect">
             <a:avLst/>
@@ -7466,7 +7419,7 @@
                 </a:solidFill>
                 <a:latin typeface="Consolas"/>
               </a:rPr>
-              <a:t>IMPLICATION 1 · FIX WRONG CONSTRUCTS</a:t>
+              <a:t>WITHIN-COUNTRY EVIDENCE</a:t>
             </a:r>
           </a:p>
         </p:txBody>
@@ -7480,7 +7433,7 @@
         <p:spPr>
           <a:xfrm>
             <a:off x="566928" y="914400"/>
-            <a:ext cx="8595360" cy="1371600"/>
+            <a:ext cx="4160520" cy="1371600"/>
           </a:xfrm>
           <a:prstGeom prst="rect">
             <a:avLst/>
@@ -7505,13 +7458,13 @@
               </a:spcAft>
             </a:pPr>
             <a:r>
-              <a:rPr sz="2700" b="0" i="0">
+              <a:rPr sz="2300" b="0" i="0">
                 <a:solidFill>
                   <a:srgbClr val="14171C"/>
                 </a:solidFill>
                 <a:latin typeface="Georgia"/>
               </a:rPr>
-              <a:t>Education and health: measurement specificity based on what predicts wellbeing</a:t>
+              <a:t>Individual-level, self-reported data captures year-to-year change that administrative frameworks miss</a:t>
             </a:r>
           </a:p>
         </p:txBody>
@@ -7524,8 +7477,8 @@
         </p:nvSpPr>
         <p:spPr>
           <a:xfrm>
-            <a:off x="566928" y="2286000"/>
-            <a:ext cx="8595360" cy="3840480"/>
+            <a:off x="566928" y="2331720"/>
+            <a:ext cx="4160520" cy="3840480"/>
           </a:xfrm>
           <a:prstGeom prst="rect">
             <a:avLst/>
@@ -7550,13 +7503,13 @@
               </a:spcAft>
             </a:pPr>
             <a:r>
-              <a:rPr sz="1400" b="0" i="0">
+              <a:rPr sz="975" b="0" i="0">
                 <a:solidFill>
                   <a:srgbClr val="5A6068"/>
                 </a:solidFill>
                 <a:latin typeface="Calibri"/>
               </a:rPr>
-              <a:t>Education is significant everywhere it is measured as attainment (92% in ESS, 34% in HDI, 12.7% in SDG4 access alone). But SDG4 averages it with parity ratios and learning outcomes, which do not predict wellbeing, collapsing the pooled rate to 3.3%. The fix: development frameworks should make construction choices with explicit reference to what research shows matters for lived experience. For education in wellbeing contexts, this means weighting access and completion more heavily than equity ratios.</a:t>
+              <a:t>Here is the critical observation that reshapes the question: unlike SDG (71% levels → 5% differences) and HDI (42% → 2%), the ESS shows 69% levels → 64% differences. The association persists within countries over time. This is not because development frameworks are poorly designed; it is because they measure aggregate, administrative data at long intervals (annual at best for HDI and SDG). Individual survey responses capture year-to-year variation in how people experience their lives.</a:t>
             </a:r>
           </a:p>
           <a:p>
@@ -7572,13 +7525,35 @@
               </a:spcAft>
             </a:pPr>
             <a:r>
-              <a:rPr sz="1400" b="0" i="0">
+              <a:rPr sz="975" b="0" i="0">
                 <a:solidFill>
                   <a:srgbClr val="5A6068"/>
                 </a:solidFill>
                 <a:latin typeface="Calibri"/>
               </a:rPr>
-              <a:t>Health is nearly invisible in the HDI (20% significant) because life expectancy is saturated in developed countries — the top 100 range from 81–85 years. Yet self-rated health is significant in 100% of ESS countries. The fix: use different variables at different income levels. Life expectancy for lower-income settings where it still varies; self-reported health, or condition-specific mortality (maternal, neonatal, under-five), in saturated ones.</a:t>
+              <a:t>This matters for social trust most of all. At the country level, SDG has almost no trust coverage; in the HDI, none. But at the individual level, within countries, ESS shows trust is significant in 94% of countries and drives year-to-year change in how satisfied people report being. The three domains emerge not because the frameworks reveal them, but because ESS measures them where people actually experience variation: in themselves, over time.</a:t>
+            </a:r>
+          </a:p>
+          <a:p>
+            <a:pPr>
+              <a:lnSpc>
+                <a:spcPct val="132000"/>
+              </a:lnSpc>
+              <a:spcBef>
+                <a:spcPts val="0"/>
+              </a:spcBef>
+              <a:spcAft>
+                <a:spcPts val="1100"/>
+              </a:spcAft>
+            </a:pPr>
+            <a:r>
+              <a:rPr sz="975" b="0" i="0">
+                <a:solidFill>
+                  <a:srgbClr val="5A6068"/>
+                </a:solidFill>
+                <a:latin typeface="Calibri"/>
+              </a:rPr>
+              <a:t>The caveats are substantial: 36 European countries, self-reported measures, annual cycles. But the implication is clear. Development frameworks' blindness to social trust is not because trust does not matter for wellbeing; it is because development was never designed to measure individual experience at the temporal resolution where people change.</a:t>
             </a:r>
           </a:p>
         </p:txBody>
@@ -7620,7 +7595,76 @@
                 </a:solidFill>
                 <a:latin typeface="Consolas"/>
               </a:rPr>
-              <a:t>IV</a:t>
+              <a:t>III</a:t>
+            </a:r>
+          </a:p>
+        </p:txBody>
+      </p:sp>
+      <p:pic>
+        <p:nvPicPr>
+          <p:cNvPr id="6" name="Picture 5" descr="collapse_shdi_ess_regional.png"/>
+          <p:cNvPicPr>
+            <a:picLocks noChangeAspect="1"/>
+          </p:cNvPicPr>
+          <p:nvPr/>
+        </p:nvPicPr>
+        <p:blipFill>
+          <a:blip r:embed="rId2"/>
+          <a:stretch>
+            <a:fillRect/>
+          </a:stretch>
+        </p:blipFill>
+        <p:spPr>
+          <a:xfrm>
+            <a:off x="5546146" y="658368"/>
+            <a:ext cx="5686948" cy="5074919"/>
+          </a:xfrm>
+          <a:prstGeom prst="rect">
+            <a:avLst/>
+          </a:prstGeom>
+        </p:spPr>
+      </p:pic>
+      <p:sp>
+        <p:nvSpPr>
+          <p:cNvPr id="7" name="TextBox 6"/>
+          <p:cNvSpPr txBox="1"/>
+          <p:nvPr/>
+        </p:nvSpPr>
+        <p:spPr>
+          <a:xfrm>
+            <a:off x="5120640" y="5897880"/>
+            <a:ext cx="6537960" cy="731520"/>
+          </a:xfrm>
+          <a:prstGeom prst="rect">
+            <a:avLst/>
+          </a:prstGeom>
+          <a:noFill/>
+        </p:spPr>
+        <p:txBody>
+          <a:bodyPr wrap="square" lIns="0" rIns="0" tIns="0" bIns="0">
+            <a:spAutoFit/>
+          </a:bodyPr>
+          <a:lstStyle/>
+          <a:p>
+            <a:pPr>
+              <a:lnSpc>
+                <a:spcPct val="125000"/>
+              </a:lnSpc>
+              <a:spcBef>
+                <a:spcPts val="0"/>
+              </a:spcBef>
+              <a:spcAft>
+                <a:spcPts val="0"/>
+              </a:spcAft>
+            </a:pPr>
+            <a:r>
+              <a:rPr sz="900" b="0" i="0">
+                <a:solidFill>
+                  <a:srgbClr val="868D96"/>
+                </a:solidFill>
+                <a:latin typeface="Calibri"/>
+              </a:rPr>
+              <a:t>Regional collapse: 167 subnational regions within ESS countries, levels vs. differences. The collapse persists at regional scale, confirming it is not an artifact of national aggregation.</a:t>
             </a:r>
           </a:p>
         </p:txBody>
@@ -7660,7 +7704,7 @@
         <p:spPr>
           <a:xfrm>
             <a:off x="566928" y="502920"/>
-            <a:ext cx="8595360" cy="274320"/>
+            <a:ext cx="4160520" cy="274320"/>
           </a:xfrm>
           <a:prstGeom prst="rect">
             <a:avLst/>
@@ -7688,7 +7732,7 @@
                 </a:solidFill>
                 <a:latin typeface="Consolas"/>
               </a:rPr>
-              <a:t>IMPLICATION 2 · ADD MISSING COVERAGE</a:t>
+              <a:t>WHY SDG'S TRUST DATA DOESN'T WORK</a:t>
             </a:r>
           </a:p>
         </p:txBody>
@@ -7702,7 +7746,7 @@
         <p:spPr>
           <a:xfrm>
             <a:off x="566928" y="914400"/>
-            <a:ext cx="8595360" cy="1371600"/>
+            <a:ext cx="4160520" cy="1371600"/>
           </a:xfrm>
           <a:prstGeom prst="rect">
             <a:avLst/>
@@ -7727,13 +7771,13 @@
               </a:spcAft>
             </a:pPr>
             <a:r>
-              <a:rPr sz="2700" b="0" i="0">
+              <a:rPr sz="2300" b="0" i="0">
                 <a:solidFill>
                   <a:srgbClr val="14171C"/>
                 </a:solidFill>
                 <a:latin typeface="Georgia"/>
               </a:rPr>
-              <a:t>Social trust: why coverage gaps cannot be fixed by better measurement of wrong things</a:t>
+              <a:t>SDG16 measures institutional confidence, not interpersonal trust, and the signal is weak</a:t>
             </a:r>
           </a:p>
         </p:txBody>
@@ -7746,8 +7790,8 @@
         </p:nvSpPr>
         <p:spPr>
           <a:xfrm>
-            <a:off x="566928" y="2286000"/>
-            <a:ext cx="8595360" cy="3840480"/>
+            <a:off x="566928" y="2331720"/>
+            <a:ext cx="4160520" cy="3840480"/>
           </a:xfrm>
           <a:prstGeom prst="rect">
             <a:avLst/>
@@ -7772,13 +7816,13 @@
               </a:spcAft>
             </a:pPr>
             <a:r>
-              <a:rPr sz="1400" b="0" i="0">
+              <a:rPr sz="950" b="0" i="0">
                 <a:solidFill>
                   <a:srgbClr val="5A6068"/>
                 </a:solidFill>
                 <a:latin typeface="Calibri"/>
               </a:rPr>
-              <a:t>Social trust is significant in 94% of ESS countries and is the third-strongest predictor after health and income. Neither the HDI nor the SDG framework measures it. The SDG database has 13 series under Goal 16, but they measure institutional confidence—satisfaction with government, healthcare, education—not interpersonal trust. Moreover, 147 of 163 country-series have fewer than four years of data, making time-series designs impossible.</a:t>
+              <a:t>The SDG framework carries 13 trust-adjacent series under Goal 16, but the detail reveals why they fail. First, coverage: only nine of thirteen can be tested across countries, and four are significant — weaker than the development indicators the frameworks already carry. Second, construct: bribery (individuals), bribery (firms), and decision-making inclusiveness predict the Cantril ladder; satisfaction with healthcare, government services, and secondary education do not. These measure satisfaction with institutions, not trust in people.</a:t>
             </a:r>
           </a:p>
           <a:p>
@@ -7794,13 +7838,35 @@
               </a:spcAft>
             </a:pPr>
             <a:r>
-              <a:rPr sz="1400" b="0" i="0">
+              <a:rPr sz="950" b="0" i="0">
                 <a:solidFill>
                   <a:srgbClr val="5A6068"/>
                 </a:solidFill>
                 <a:latin typeface="Calibri"/>
               </a:rPr>
-              <a:t>The fix: development frameworks cannot discover what matters by measuring something else and hoping it correlates. If wellbeing is part of development measurement's purpose, interpersonal trust must be collected at scale. This could mean building social trust into core frameworks, or integrating data from surveys designed to measure individual experience (ESS, Gallup World Poll, World Values Survey). The scope of trust findings—36 European countries, individual-level—is tentative. But tentative is better than absent.</a:t>
+              <a:t>More critically, when you control for income — net of log GNI per capita — nearly all SDG trust series disappear. Bribery stays significant, but satisfaction with government, services, and education vanishes. This is a known artifact of subjective institutional scales across income levels; the same survey administered at different income levels produces structural differences in response patterns unrelated to trust itself. Interpersonal trust, by contrast, shows robust signal independent of income controls.</a:t>
+            </a:r>
+          </a:p>
+          <a:p>
+            <a:pPr>
+              <a:lnSpc>
+                <a:spcPct val="132000"/>
+              </a:lnSpc>
+              <a:spcBef>
+                <a:spcPts val="0"/>
+              </a:spcBef>
+              <a:spcAft>
+                <a:spcPts val="1100"/>
+              </a:spcAft>
+            </a:pPr>
+            <a:r>
+              <a:rPr sz="950" b="0" i="0">
+                <a:solidFill>
+                  <a:srgbClr val="5A6068"/>
+                </a:solidFill>
+                <a:latin typeface="Calibri"/>
+              </a:rPr>
+              <a:t>This is not a flaw in the SDG framework's execution. It reflects a fundamental choice: development frameworks measure institutions and systems, not personal relationships. Social trust emerges in individual-level, self-reported data because that is where it lives — in how people experience their immediate world.</a:t>
             </a:r>
           </a:p>
         </p:txBody>
@@ -7842,7 +7908,76 @@
                 </a:solidFill>
                 <a:latin typeface="Consolas"/>
               </a:rPr>
-              <a:t>IV</a:t>
+              <a:t>III</a:t>
+            </a:r>
+          </a:p>
+        </p:txBody>
+      </p:sp>
+      <p:pic>
+        <p:nvPicPr>
+          <p:cNvPr id="6" name="Picture 5" descr="K1_sdg_trust_cross_section.png"/>
+          <p:cNvPicPr>
+            <a:picLocks noChangeAspect="1"/>
+          </p:cNvPicPr>
+          <p:nvPr/>
+        </p:nvPicPr>
+        <p:blipFill>
+          <a:blip r:embed="rId2"/>
+          <a:stretch>
+            <a:fillRect/>
+          </a:stretch>
+        </p:blipFill>
+        <p:spPr>
+          <a:xfrm>
+            <a:off x="5120640" y="1690377"/>
+            <a:ext cx="6537960" cy="3010902"/>
+          </a:xfrm>
+          <a:prstGeom prst="rect">
+            <a:avLst/>
+          </a:prstGeom>
+        </p:spPr>
+      </p:pic>
+      <p:sp>
+        <p:nvSpPr>
+          <p:cNvPr id="7" name="TextBox 6"/>
+          <p:cNvSpPr txBox="1"/>
+          <p:nvPr/>
+        </p:nvSpPr>
+        <p:spPr>
+          <a:xfrm>
+            <a:off x="5120640" y="5897880"/>
+            <a:ext cx="6537960" cy="731520"/>
+          </a:xfrm>
+          <a:prstGeom prst="rect">
+            <a:avLst/>
+          </a:prstGeom>
+          <a:noFill/>
+        </p:spPr>
+        <p:txBody>
+          <a:bodyPr wrap="square" lIns="0" rIns="0" tIns="0" bIns="0">
+            <a:spAutoFit/>
+          </a:bodyPr>
+          <a:lstStyle/>
+          <a:p>
+            <a:pPr>
+              <a:lnSpc>
+                <a:spcPct val="125000"/>
+              </a:lnSpc>
+              <a:spcBef>
+                <a:spcPts val="0"/>
+              </a:spcBef>
+              <a:spcAft>
+                <a:spcPts val="0"/>
+              </a:spcAft>
+            </a:pPr>
+            <a:r>
+              <a:rPr sz="900" b="0" i="0">
+                <a:solidFill>
+                  <a:srgbClr val="868D96"/>
+                </a:solidFill>
+                <a:latin typeface="Calibri"/>
+              </a:rPr>
+              <a:t>SDG16 trust series can barely be tested (9 of 13 measurable, 4 significant) and collapse when controlled for income. Panel (b) shows bribery persists but satisfaction measures disappear.</a:t>
             </a:r>
           </a:p>
         </p:txBody>
@@ -7856,250 +7991,6 @@
 </file>
 
 <file path=ppt/slides/slide23.xml><?xml version="1.0" encoding="utf-8"?>
-<p:sld xmlns:a="http://schemas.openxmlformats.org/drawingml/2006/main" xmlns:p="http://schemas.openxmlformats.org/presentationml/2006/main" xmlns:r="http://schemas.openxmlformats.org/officeDocument/2006/relationships">
-  <p:cSld>
-    <p:bg>
-      <p:bgPr>
-        <a:solidFill>
-          <a:srgbClr val="FCFCFB"/>
-        </a:solidFill>
-        <a:effectLst/>
-      </p:bgPr>
-    </p:bg>
-    <p:spTree>
-      <p:nvGrpSpPr>
-        <p:cNvPr id="1" name=""/>
-        <p:cNvGrpSpPr/>
-        <p:nvPr/>
-      </p:nvGrpSpPr>
-      <p:grpSpPr/>
-      <p:sp>
-        <p:nvSpPr>
-          <p:cNvPr id="2" name="TextBox 1"/>
-          <p:cNvSpPr txBox="1"/>
-          <p:nvPr/>
-        </p:nvSpPr>
-        <p:spPr>
-          <a:xfrm>
-            <a:off x="566928" y="502920"/>
-            <a:ext cx="8595360" cy="274320"/>
-          </a:xfrm>
-          <a:prstGeom prst="rect">
-            <a:avLst/>
-          </a:prstGeom>
-          <a:noFill/>
-        </p:spPr>
-        <p:txBody>
-          <a:bodyPr wrap="square" lIns="0" rIns="0" tIns="0" bIns="0">
-            <a:spAutoFit/>
-          </a:bodyPr>
-          <a:lstStyle/>
-          <a:p>
-            <a:pPr>
-              <a:spcBef>
-                <a:spcPts val="0"/>
-              </a:spcBef>
-              <a:spcAft>
-                <a:spcPts val="0"/>
-              </a:spcAft>
-            </a:pPr>
-            <a:r>
-              <a:rPr sz="1000" b="0" i="0">
-                <a:solidFill>
-                  <a:srgbClr val="A63A30"/>
-                </a:solidFill>
-                <a:latin typeface="Consolas"/>
-              </a:rPr>
-              <a:t>CONCLUSION</a:t>
-            </a:r>
-          </a:p>
-        </p:txBody>
-      </p:sp>
-      <p:sp>
-        <p:nvSpPr>
-          <p:cNvPr id="3" name="TextBox 2"/>
-          <p:cNvSpPr txBox="1"/>
-          <p:nvPr/>
-        </p:nvSpPr>
-        <p:spPr>
-          <a:xfrm>
-            <a:off x="566928" y="914400"/>
-            <a:ext cx="8595360" cy="1371600"/>
-          </a:xfrm>
-          <a:prstGeom prst="rect">
-            <a:avLst/>
-          </a:prstGeom>
-          <a:noFill/>
-        </p:spPr>
-        <p:txBody>
-          <a:bodyPr wrap="square" lIns="0" rIns="0" tIns="0" bIns="0">
-            <a:spAutoFit/>
-          </a:bodyPr>
-          <a:lstStyle/>
-          <a:p>
-            <a:pPr>
-              <a:lnSpc>
-                <a:spcPct val="108000"/>
-              </a:lnSpc>
-              <a:spcBef>
-                <a:spcPts val="0"/>
-              </a:spcBef>
-              <a:spcAft>
-                <a:spcPts val="0"/>
-              </a:spcAft>
-            </a:pPr>
-            <a:r>
-              <a:rPr sz="2700" b="0" i="0">
-                <a:solidFill>
-                  <a:srgbClr val="14171C"/>
-                </a:solidFill>
-                <a:latin typeface="Georgia"/>
-              </a:rPr>
-              <a:t>From evidence to redesign</a:t>
-            </a:r>
-          </a:p>
-        </p:txBody>
-      </p:sp>
-      <p:sp>
-        <p:nvSpPr>
-          <p:cNvPr id="4" name="TextBox 3"/>
-          <p:cNvSpPr txBox="1"/>
-          <p:nvPr/>
-        </p:nvSpPr>
-        <p:spPr>
-          <a:xfrm>
-            <a:off x="566928" y="2286000"/>
-            <a:ext cx="8595360" cy="3840480"/>
-          </a:xfrm>
-          <a:prstGeom prst="rect">
-            <a:avLst/>
-          </a:prstGeom>
-          <a:noFill/>
-        </p:spPr>
-        <p:txBody>
-          <a:bodyPr wrap="square" lIns="0" rIns="0" tIns="0" bIns="0">
-            <a:spAutoFit/>
-          </a:bodyPr>
-          <a:lstStyle/>
-          <a:p>
-            <a:pPr>
-              <a:lnSpc>
-                <a:spcPct val="132000"/>
-              </a:lnSpc>
-              <a:spcBef>
-                <a:spcPts val="0"/>
-              </a:spcBef>
-              <a:spcAft>
-                <a:spcPts val="1100"/>
-              </a:spcAft>
-            </a:pPr>
-            <a:r>
-              <a:rPr sz="1400" b="0" i="0">
-                <a:solidFill>
-                  <a:srgbClr val="5A6068"/>
-                </a:solidFill>
-                <a:latin typeface="Calibri"/>
-              </a:rPr>
-              <a:t>The evidence is clear: which domain predicts life satisfaction depends on which framework measures it and what variable they chose. This is not about the domains; it is about the tools. Development frameworks work well for their stated purpose — tracking aggregate progress toward development goals. But if that purpose is understood to include supporting lived experience, the measurement needs to change.</a:t>
-            </a:r>
-          </a:p>
-          <a:p>
-            <a:pPr>
-              <a:lnSpc>
-                <a:spcPct val="132000"/>
-              </a:lnSpc>
-              <a:spcBef>
-                <a:spcPts val="0"/>
-              </a:spcBef>
-              <a:spcAft>
-                <a:spcPts val="1100"/>
-              </a:spcAft>
-            </a:pPr>
-            <a:r>
-              <a:rPr sz="1400" b="0" i="0">
-                <a:solidFill>
-                  <a:srgbClr val="5A6068"/>
-                </a:solidFill>
-                <a:latin typeface="Calibri"/>
-              </a:rPr>
-              <a:t>The three implications suggest where to start: make construction choices based on what research shows matters (education's access, health's variation, not saturation); choose variables that still move at the development levels being measured; and collect data for domains that matter but are currently missing. This is not a complete redesign. It is targeted adjustment rooted in evidence about what predicts individual wellbeing.</a:t>
-            </a:r>
-          </a:p>
-          <a:p>
-            <a:pPr>
-              <a:lnSpc>
-                <a:spcPct val="132000"/>
-              </a:lnSpc>
-              <a:spcBef>
-                <a:spcPts val="0"/>
-              </a:spcBef>
-              <a:spcAft>
-                <a:spcPts val="1100"/>
-              </a:spcAft>
-            </a:pPr>
-            <a:r>
-              <a:rPr sz="1400" b="0" i="0">
-                <a:solidFill>
-                  <a:srgbClr val="5A6068"/>
-                </a:solidFill>
-                <a:latin typeface="Calibri"/>
-              </a:rPr>
-              <a:t>The underlying question remains: Should development measurement be redesigned with lived experience in mind? If yes, should it measure at the individual level, with shorter intervals, using variables chosen for their responsiveness to change and their evidence of predicting wellbeing? The frameworks in place today are built for a different answer. These findings suggest what a different answer might measure.</a:t>
-            </a:r>
-          </a:p>
-        </p:txBody>
-      </p:sp>
-      <p:sp>
-        <p:nvSpPr>
-          <p:cNvPr id="5" name="TextBox 4"/>
-          <p:cNvSpPr txBox="1"/>
-          <p:nvPr/>
-        </p:nvSpPr>
-        <p:spPr>
-          <a:xfrm>
-            <a:off x="11338560" y="6263640"/>
-            <a:ext cx="548640" cy="274320"/>
-          </a:xfrm>
-          <a:prstGeom prst="rect">
-            <a:avLst/>
-          </a:prstGeom>
-          <a:noFill/>
-        </p:spPr>
-        <p:txBody>
-          <a:bodyPr wrap="square" lIns="0" rIns="0" tIns="0" bIns="0">
-            <a:spAutoFit/>
-          </a:bodyPr>
-          <a:lstStyle/>
-          <a:p>
-            <a:pPr algn="r">
-              <a:spcBef>
-                <a:spcPts val="0"/>
-              </a:spcBef>
-              <a:spcAft>
-                <a:spcPts val="0"/>
-              </a:spcAft>
-            </a:pPr>
-            <a:r>
-              <a:rPr sz="1100" b="0" i="0">
-                <a:solidFill>
-                  <a:srgbClr val="868D96"/>
-                </a:solidFill>
-                <a:latin typeface="Consolas"/>
-              </a:rPr>
-              <a:t>IV</a:t>
-            </a:r>
-          </a:p>
-        </p:txBody>
-      </p:sp>
-    </p:spTree>
-  </p:cSld>
-  <p:clrMapOvr>
-    <a:masterClrMapping/>
-  </p:clrMapOvr>
-</p:sld>
-</file>
-
-<file path=ppt/slides/slide24.xml><?xml version="1.0" encoding="utf-8"?>
 <p:sld xmlns:a="http://schemas.openxmlformats.org/drawingml/2006/main" xmlns:p="http://schemas.openxmlformats.org/presentationml/2006/main" xmlns:r="http://schemas.openxmlformats.org/officeDocument/2006/relationships">
   <p:cSld>
     <p:bg>
@@ -8198,7 +8089,7 @@
                 </a:solidFill>
                 <a:latin typeface="Consolas"/>
               </a:rPr>
-              <a:t>WHERE ACT IV LEAVES US</a:t>
+              <a:t>WHERE ACT III LEAVES US</a:t>
             </a:r>
           </a:p>
         </p:txBody>
@@ -8243,7 +8134,443 @@
                 </a:solidFill>
                 <a:latin typeface="Georgia"/>
               </a:rPr>
-              <a:t>Whether development measurement should be redesigned with wellbeing in mind is beyond this scope. But if it is, this evidence suggests the measurement should be different: more attentive to which variables still move, which constructs predict outcomes, and which domains are collected at all.</a:t>
+              <a:t>The three domains predict wellbeing differently depending on where and how you measure. Development frameworks' blindness is not incurable; it is structural. Frameworks designed for tracking aggregate national progress cannot see individual experience responsive to change.</a:t>
+            </a:r>
+          </a:p>
+        </p:txBody>
+      </p:sp>
+    </p:spTree>
+  </p:cSld>
+  <p:clrMapOvr>
+    <a:masterClrMapping/>
+  </p:clrMapOvr>
+</p:sld>
+</file>
+
+<file path=ppt/slides/slide24.xml><?xml version="1.0" encoding="utf-8"?>
+<p:sld xmlns:a="http://schemas.openxmlformats.org/drawingml/2006/main" xmlns:p="http://schemas.openxmlformats.org/presentationml/2006/main" xmlns:r="http://schemas.openxmlformats.org/officeDocument/2006/relationships">
+  <p:cSld>
+    <p:bg>
+      <p:bgPr>
+        <a:solidFill>
+          <a:srgbClr val="14171C"/>
+        </a:solidFill>
+        <a:effectLst/>
+      </p:bgPr>
+    </p:bg>
+    <p:spTree>
+      <p:nvGrpSpPr>
+        <p:cNvPr id="1" name=""/>
+        <p:cNvGrpSpPr/>
+        <p:nvPr/>
+      </p:nvGrpSpPr>
+      <p:grpSpPr/>
+      <p:sp>
+        <p:nvSpPr>
+          <p:cNvPr id="2" name="TextBox 1"/>
+          <p:cNvSpPr txBox="1"/>
+          <p:nvPr/>
+        </p:nvSpPr>
+        <p:spPr>
+          <a:xfrm>
+            <a:off x="8229600" y="822960"/>
+            <a:ext cx="3291840" cy="4114800"/>
+          </a:xfrm>
+          <a:prstGeom prst="rect">
+            <a:avLst/>
+          </a:prstGeom>
+          <a:noFill/>
+        </p:spPr>
+        <p:txBody>
+          <a:bodyPr wrap="square" lIns="0" rIns="0" tIns="0" bIns="0">
+            <a:spAutoFit/>
+          </a:bodyPr>
+          <a:lstStyle/>
+          <a:p>
+            <a:pPr algn="r">
+              <a:spcBef>
+                <a:spcPts val="0"/>
+              </a:spcBef>
+              <a:spcAft>
+                <a:spcPts val="0"/>
+              </a:spcAft>
+            </a:pPr>
+            <a:r>
+              <a:rPr sz="20000" b="0" i="0">
+                <a:solidFill>
+                  <a:srgbClr val="2A3340"/>
+                </a:solidFill>
+                <a:latin typeface="Georgia"/>
+              </a:rPr>
+              <a:t>IV</a:t>
+            </a:r>
+          </a:p>
+        </p:txBody>
+      </p:sp>
+      <p:sp>
+        <p:nvSpPr>
+          <p:cNvPr id="3" name="Rectangle 2"/>
+          <p:cNvSpPr/>
+          <p:nvPr/>
+        </p:nvSpPr>
+        <p:spPr>
+          <a:xfrm>
+            <a:off x="566928" y="1371600"/>
+            <a:ext cx="7315200" cy="25400"/>
+          </a:xfrm>
+          <a:prstGeom prst="rect">
+            <a:avLst/>
+          </a:prstGeom>
+          <a:solidFill>
+            <a:srgbClr val="C9D8EC"/>
+          </a:solidFill>
+          <a:ln>
+            <a:noFill/>
+          </a:ln>
+          <a:effectLst/>
+        </p:spPr>
+        <p:style>
+          <a:lnRef idx="1">
+            <a:schemeClr val="accent1"/>
+          </a:lnRef>
+          <a:fillRef idx="3">
+            <a:schemeClr val="accent1"/>
+          </a:fillRef>
+          <a:effectRef idx="2">
+            <a:schemeClr val="accent1"/>
+          </a:effectRef>
+          <a:fontRef idx="minor">
+            <a:schemeClr val="lt1"/>
+          </a:fontRef>
+        </p:style>
+        <p:txBody>
+          <a:bodyPr rtlCol="0" anchor="ctr"/>
+          <a:lstStyle/>
+          <a:p>
+            <a:pPr algn="ctr"/>
+          </a:p>
+        </p:txBody>
+      </p:sp>
+      <p:sp>
+        <p:nvSpPr>
+          <p:cNvPr id="4" name="TextBox 3"/>
+          <p:cNvSpPr txBox="1"/>
+          <p:nvPr/>
+        </p:nvSpPr>
+        <p:spPr>
+          <a:xfrm>
+            <a:off x="566928" y="960120"/>
+            <a:ext cx="5486400" cy="274320"/>
+          </a:xfrm>
+          <a:prstGeom prst="rect">
+            <a:avLst/>
+          </a:prstGeom>
+          <a:noFill/>
+        </p:spPr>
+        <p:txBody>
+          <a:bodyPr wrap="square" lIns="0" rIns="0" tIns="0" bIns="0">
+            <a:spAutoFit/>
+          </a:bodyPr>
+          <a:lstStyle/>
+          <a:p>
+            <a:pPr>
+              <a:spcBef>
+                <a:spcPts val="0"/>
+              </a:spcBef>
+              <a:spcAft>
+                <a:spcPts val="0"/>
+              </a:spcAft>
+            </a:pPr>
+            <a:r>
+              <a:rPr sz="1100" b="0" i="0">
+                <a:solidFill>
+                  <a:srgbClr val="C9D8EC"/>
+                </a:solidFill>
+                <a:latin typeface="Consolas"/>
+              </a:rPr>
+              <a:t>ACT IV</a:t>
+            </a:r>
+          </a:p>
+        </p:txBody>
+      </p:sp>
+      <p:sp>
+        <p:nvSpPr>
+          <p:cNvPr id="5" name="TextBox 4"/>
+          <p:cNvSpPr txBox="1"/>
+          <p:nvPr/>
+        </p:nvSpPr>
+        <p:spPr>
+          <a:xfrm>
+            <a:off x="566928" y="1783080"/>
+            <a:ext cx="7223760" cy="1828800"/>
+          </a:xfrm>
+          <a:prstGeom prst="rect">
+            <a:avLst/>
+          </a:prstGeom>
+          <a:noFill/>
+        </p:spPr>
+        <p:txBody>
+          <a:bodyPr wrap="square" lIns="0" rIns="0" tIns="0" bIns="0">
+            <a:spAutoFit/>
+          </a:bodyPr>
+          <a:lstStyle/>
+          <a:p>
+            <a:pPr>
+              <a:lnSpc>
+                <a:spcPct val="102000"/>
+              </a:lnSpc>
+              <a:spcBef>
+                <a:spcPts val="0"/>
+              </a:spcBef>
+              <a:spcAft>
+                <a:spcPts val="0"/>
+              </a:spcAft>
+            </a:pPr>
+            <a:r>
+              <a:rPr sz="4000" b="0" i="0">
+                <a:solidFill>
+                  <a:srgbClr val="FCFCFB"/>
+                </a:solidFill>
+                <a:latin typeface="Georgia"/>
+              </a:rPr>
+              <a:t>What this means for development frameworks</a:t>
+            </a:r>
+          </a:p>
+        </p:txBody>
+      </p:sp>
+      <p:sp>
+        <p:nvSpPr>
+          <p:cNvPr id="6" name="TextBox 5"/>
+          <p:cNvSpPr txBox="1"/>
+          <p:nvPr/>
+        </p:nvSpPr>
+        <p:spPr>
+          <a:xfrm>
+            <a:off x="566928" y="3886200"/>
+            <a:ext cx="6766560" cy="1463040"/>
+          </a:xfrm>
+          <a:prstGeom prst="rect">
+            <a:avLst/>
+          </a:prstGeom>
+          <a:noFill/>
+        </p:spPr>
+        <p:txBody>
+          <a:bodyPr wrap="square" lIns="0" rIns="0" tIns="0" bIns="0">
+            <a:spAutoFit/>
+          </a:bodyPr>
+          <a:lstStyle/>
+          <a:p>
+            <a:pPr>
+              <a:lnSpc>
+                <a:spcPct val="135000"/>
+              </a:lnSpc>
+              <a:spcBef>
+                <a:spcPts val="0"/>
+              </a:spcBef>
+              <a:spcAft>
+                <a:spcPts val="0"/>
+              </a:spcAft>
+            </a:pPr>
+            <a:r>
+              <a:rPr sz="1550" b="0" i="1">
+                <a:solidFill>
+                  <a:srgbClr val="9AA4B0"/>
+                </a:solidFill>
+                <a:latin typeface="Georgia"/>
+              </a:rPr>
+              <a:t>The disconnect is real and worth naming. Development frameworks have done their job of tracking progress on development. But the components that predict individual lived experience are ones these frameworks are not currently built to see — because of construction choices, variable saturation, or coverage that was never collected.</a:t>
+            </a:r>
+          </a:p>
+        </p:txBody>
+      </p:sp>
+      <p:sp>
+        <p:nvSpPr>
+          <p:cNvPr id="7" name="TextBox 6"/>
+          <p:cNvSpPr txBox="1"/>
+          <p:nvPr/>
+        </p:nvSpPr>
+        <p:spPr>
+          <a:xfrm>
+            <a:off x="566928" y="5623560"/>
+            <a:ext cx="3503066" cy="914400"/>
+          </a:xfrm>
+          <a:prstGeom prst="rect">
+            <a:avLst/>
+          </a:prstGeom>
+          <a:noFill/>
+        </p:spPr>
+        <p:txBody>
+          <a:bodyPr wrap="square" lIns="0" rIns="0" tIns="0" bIns="0">
+            <a:spAutoFit/>
+          </a:bodyPr>
+          <a:lstStyle/>
+          <a:p>
+            <a:pPr>
+              <a:spcBef>
+                <a:spcPts val="0"/>
+              </a:spcBef>
+              <a:spcAft>
+                <a:spcPts val="400"/>
+              </a:spcAft>
+            </a:pPr>
+            <a:r>
+              <a:rPr sz="2200" b="0" i="0">
+                <a:solidFill>
+                  <a:srgbClr val="FCFCFB"/>
+                </a:solidFill>
+                <a:latin typeface="Consolas"/>
+              </a:rPr>
+              <a:t>3 vs. 1</a:t>
+            </a:r>
+          </a:p>
+          <a:p>
+            <a:pPr>
+              <a:lnSpc>
+                <a:spcPct val="120000"/>
+              </a:lnSpc>
+              <a:spcBef>
+                <a:spcPts val="0"/>
+              </a:spcBef>
+              <a:spcAft>
+                <a:spcPts val="0"/>
+              </a:spcAft>
+            </a:pPr>
+            <a:r>
+              <a:rPr sz="1000" b="0" i="0">
+                <a:solidFill>
+                  <a:srgbClr val="8A94A0"/>
+                </a:solidFill>
+                <a:latin typeface="Calibri"/>
+              </a:rPr>
+              <a:t>domains the HDI can test for wellbeing, vs. social trust</a:t>
+            </a:r>
+          </a:p>
+        </p:txBody>
+      </p:sp>
+      <p:sp>
+        <p:nvSpPr>
+          <p:cNvPr id="8" name="TextBox 7"/>
+          <p:cNvSpPr txBox="1"/>
+          <p:nvPr/>
+        </p:nvSpPr>
+        <p:spPr>
+          <a:xfrm>
+            <a:off x="4344314" y="5623560"/>
+            <a:ext cx="3503066" cy="914400"/>
+          </a:xfrm>
+          <a:prstGeom prst="rect">
+            <a:avLst/>
+          </a:prstGeom>
+          <a:noFill/>
+        </p:spPr>
+        <p:txBody>
+          <a:bodyPr wrap="square" lIns="0" rIns="0" tIns="0" bIns="0">
+            <a:spAutoFit/>
+          </a:bodyPr>
+          <a:lstStyle/>
+          <a:p>
+            <a:pPr>
+              <a:spcBef>
+                <a:spcPts val="0"/>
+              </a:spcBef>
+              <a:spcAft>
+                <a:spcPts val="400"/>
+              </a:spcAft>
+            </a:pPr>
+            <a:r>
+              <a:rPr sz="2200" b="0" i="0">
+                <a:solidFill>
+                  <a:srgbClr val="FCFCFB"/>
+                </a:solidFill>
+                <a:latin typeface="Consolas"/>
+              </a:rPr>
+              <a:t>42 vs. 661</a:t>
+            </a:r>
+          </a:p>
+          <a:p>
+            <a:pPr>
+              <a:lnSpc>
+                <a:spcPct val="120000"/>
+              </a:lnSpc>
+              <a:spcBef>
+                <a:spcPts val="0"/>
+              </a:spcBef>
+              <a:spcAft>
+                <a:spcPts val="0"/>
+              </a:spcAft>
+            </a:pPr>
+            <a:r>
+              <a:rPr sz="1000" b="0" i="0">
+                <a:solidFill>
+                  <a:srgbClr val="8A94A0"/>
+                </a:solidFill>
+                <a:latin typeface="Calibri"/>
+              </a:rPr>
+              <a:t>countries with SDG data, vs. series in the database</a:t>
+            </a:r>
+          </a:p>
+        </p:txBody>
+      </p:sp>
+      <p:sp>
+        <p:nvSpPr>
+          <p:cNvPr id="9" name="TextBox 8"/>
+          <p:cNvSpPr txBox="1"/>
+          <p:nvPr/>
+        </p:nvSpPr>
+        <p:spPr>
+          <a:xfrm>
+            <a:off x="8121700" y="5623560"/>
+            <a:ext cx="3503066" cy="914400"/>
+          </a:xfrm>
+          <a:prstGeom prst="rect">
+            <a:avLst/>
+          </a:prstGeom>
+          <a:noFill/>
+        </p:spPr>
+        <p:txBody>
+          <a:bodyPr wrap="square" lIns="0" rIns="0" tIns="0" bIns="0">
+            <a:spAutoFit/>
+          </a:bodyPr>
+          <a:lstStyle/>
+          <a:p>
+            <a:pPr>
+              <a:spcBef>
+                <a:spcPts val="0"/>
+              </a:spcBef>
+              <a:spcAft>
+                <a:spcPts val="400"/>
+              </a:spcAft>
+            </a:pPr>
+            <a:r>
+              <a:rPr sz="2200" b="0" i="0">
+                <a:solidFill>
+                  <a:srgbClr val="FCFCFB"/>
+                </a:solidFill>
+                <a:latin typeface="Consolas"/>
+              </a:rPr>
+              <a:t>0.041</a:t>
+            </a:r>
+          </a:p>
+          <a:p>
+            <a:pPr>
+              <a:lnSpc>
+                <a:spcPct val="120000"/>
+              </a:lnSpc>
+              <a:spcBef>
+                <a:spcPts val="0"/>
+              </a:spcBef>
+              <a:spcAft>
+                <a:spcPts val="0"/>
+              </a:spcAft>
+            </a:pPr>
+            <a:r>
+              <a:rPr sz="1000" b="0" i="0">
+                <a:solidFill>
+                  <a:srgbClr val="8A94A0"/>
+                </a:solidFill>
+                <a:latin typeface="Calibri"/>
+              </a:rPr>
+              <a:t>median R² for trust — below income, health, education individually, above none</a:t>
             </a:r>
           </a:p>
         </p:txBody>
@@ -8283,68 +8610,961 @@
         <p:spPr>
           <a:xfrm>
             <a:off x="566928" y="502920"/>
-            <a:ext cx="8229600" cy="822960"/>
-          </a:xfrm>
-          <a:prstGeom prst="rect">
-            <a:avLst/>
-          </a:prstGeom>
-          <a:noFill/>
-        </p:spPr>
-        <p:txBody>
-          <a:bodyPr wrap="square" lIns="0" rIns="0" tIns="0" bIns="0">
-            <a:spAutoFit/>
-          </a:bodyPr>
-          <a:lstStyle/>
-          <a:p>
-            <a:pPr>
-              <a:spcBef>
-                <a:spcPts val="0"/>
-              </a:spcBef>
-              <a:spcAft>
-                <a:spcPts val="600"/>
-              </a:spcAft>
-            </a:pPr>
-            <a:r>
-              <a:rPr sz="3200" b="0" i="0">
+            <a:ext cx="8595360" cy="274320"/>
+          </a:xfrm>
+          <a:prstGeom prst="rect">
+            <a:avLst/>
+          </a:prstGeom>
+          <a:noFill/>
+        </p:spPr>
+        <p:txBody>
+          <a:bodyPr wrap="square" lIns="0" rIns="0" tIns="0" bIns="0">
+            <a:spAutoFit/>
+          </a:bodyPr>
+          <a:lstStyle/>
+          <a:p>
+            <a:pPr>
+              <a:spcBef>
+                <a:spcPts val="0"/>
+              </a:spcBef>
+              <a:spcAft>
+                <a:spcPts val="0"/>
+              </a:spcAft>
+            </a:pPr>
+            <a:r>
+              <a:rPr sz="1000" b="0" i="0">
+                <a:solidFill>
+                  <a:srgbClr val="A63A30"/>
+                </a:solidFill>
+                <a:latin typeface="Consolas"/>
+              </a:rPr>
+              <a:t>THE DISCONNECT</a:t>
+            </a:r>
+          </a:p>
+        </p:txBody>
+      </p:sp>
+      <p:sp>
+        <p:nvSpPr>
+          <p:cNvPr id="3" name="TextBox 2"/>
+          <p:cNvSpPr txBox="1"/>
+          <p:nvPr/>
+        </p:nvSpPr>
+        <p:spPr>
+          <a:xfrm>
+            <a:off x="566928" y="914400"/>
+            <a:ext cx="8595360" cy="1371600"/>
+          </a:xfrm>
+          <a:prstGeom prst="rect">
+            <a:avLst/>
+          </a:prstGeom>
+          <a:noFill/>
+        </p:spPr>
+        <p:txBody>
+          <a:bodyPr wrap="square" lIns="0" rIns="0" tIns="0" bIns="0">
+            <a:spAutoFit/>
+          </a:bodyPr>
+          <a:lstStyle/>
+          <a:p>
+            <a:pPr>
+              <a:lnSpc>
+                <a:spcPct val="108000"/>
+              </a:lnSpc>
+              <a:spcBef>
+                <a:spcPts val="0"/>
+              </a:spcBef>
+              <a:spcAft>
+                <a:spcPts val="0"/>
+              </a:spcAft>
+            </a:pPr>
+            <a:r>
+              <a:rPr sz="2700" b="0" i="0">
                 <a:solidFill>
                   <a:srgbClr val="14171C"/>
                 </a:solidFill>
                 <a:latin typeface="Georgia"/>
               </a:rPr>
-              <a:t>Decisions for the team</a:t>
-            </a:r>
-          </a:p>
-          <a:p>
-            <a:pPr>
-              <a:spcBef>
-                <a:spcPts val="0"/>
-              </a:spcBef>
-              <a:spcAft>
-                <a:spcPts val="0"/>
-              </a:spcAft>
-            </a:pPr>
-            <a:r>
-              <a:rPr sz="1300" b="0" i="0">
+              <a:t>Development frameworks and wellbeing frameworks are solving different problems</a:t>
+            </a:r>
+          </a:p>
+        </p:txBody>
+      </p:sp>
+      <p:sp>
+        <p:nvSpPr>
+          <p:cNvPr id="4" name="TextBox 3"/>
+          <p:cNvSpPr txBox="1"/>
+          <p:nvPr/>
+        </p:nvSpPr>
+        <p:spPr>
+          <a:xfrm>
+            <a:off x="566928" y="2286000"/>
+            <a:ext cx="8595360" cy="3840480"/>
+          </a:xfrm>
+          <a:prstGeom prst="rect">
+            <a:avLst/>
+          </a:prstGeom>
+          <a:noFill/>
+        </p:spPr>
+        <p:txBody>
+          <a:bodyPr wrap="square" lIns="0" rIns="0" tIns="0" bIns="0">
+            <a:spAutoFit/>
+          </a:bodyPr>
+          <a:lstStyle/>
+          <a:p>
+            <a:pPr>
+              <a:lnSpc>
+                <a:spcPct val="132000"/>
+              </a:lnSpc>
+              <a:spcBef>
+                <a:spcPts val="0"/>
+              </a:spcBef>
+              <a:spcAft>
+                <a:spcPts val="1100"/>
+              </a:spcAft>
+            </a:pPr>
+            <a:r>
+              <a:rPr sz="1400" b="0" i="0">
                 <a:solidFill>
                   <a:srgbClr val="5A6068"/>
                 </a:solidFill>
                 <a:latin typeface="Calibri"/>
               </a:rPr>
-              <a:t>4 things the acts do not settle, in the order they block drafting.</a:t>
-            </a:r>
-          </a:p>
-        </p:txBody>
-      </p:sp>
-      <p:sp>
-        <p:nvSpPr>
-          <p:cNvPr id="3" name="Rectangle 2"/>
+              <a:t>The HDI and SDG frameworks do not answer the question 'what makes people's lives better?' any more than a global income statistics database answers 'what makes a person happy?' They were designed to track development, measured at the aggregate level, with indicators chosen before the question of individual wellbeing was systematically tested. That is not a design failure; it is the intended scope. The problem is that these two questions — how development progresses, and what shapes lived experience — are not the same question.</a:t>
+            </a:r>
+          </a:p>
+          <a:p>
+            <a:pPr>
+              <a:lnSpc>
+                <a:spcPct val="132000"/>
+              </a:lnSpc>
+              <a:spcBef>
+                <a:spcPts val="0"/>
+              </a:spcBef>
+              <a:spcAft>
+                <a:spcPts val="1100"/>
+              </a:spcAft>
+            </a:pPr>
+            <a:r>
+              <a:rPr sz="1400" b="0" i="0">
+                <a:solidFill>
+                  <a:srgbClr val="5A6068"/>
+                </a:solidFill>
+                <a:latin typeface="Calibri"/>
+              </a:rPr>
+              <a:t>The gap is structural and manifests in three ways. Education's access indicators predict wellbeing; its parity ratios do not. Pooling them does not fix the problem; it just averages out the signal. For health, life expectancy is saturated in developed countries; choosing it as the universal proxy sacrifices prediction where it matters most for wellbeing measurement. And social trust is not collected at scale in either framework, so no measurement choice can recover what was never measured. These are not failures to improve. They are features of frameworks built to answer a different question.</a:t>
+            </a:r>
+          </a:p>
+        </p:txBody>
+      </p:sp>
+      <p:sp>
+        <p:nvSpPr>
+          <p:cNvPr id="5" name="TextBox 4"/>
+          <p:cNvSpPr txBox="1"/>
+          <p:nvPr/>
+        </p:nvSpPr>
+        <p:spPr>
+          <a:xfrm>
+            <a:off x="11338560" y="6263640"/>
+            <a:ext cx="548640" cy="274320"/>
+          </a:xfrm>
+          <a:prstGeom prst="rect">
+            <a:avLst/>
+          </a:prstGeom>
+          <a:noFill/>
+        </p:spPr>
+        <p:txBody>
+          <a:bodyPr wrap="square" lIns="0" rIns="0" tIns="0" bIns="0">
+            <a:spAutoFit/>
+          </a:bodyPr>
+          <a:lstStyle/>
+          <a:p>
+            <a:pPr algn="r">
+              <a:spcBef>
+                <a:spcPts val="0"/>
+              </a:spcBef>
+              <a:spcAft>
+                <a:spcPts val="0"/>
+              </a:spcAft>
+            </a:pPr>
+            <a:r>
+              <a:rPr sz="1100" b="0" i="0">
+                <a:solidFill>
+                  <a:srgbClr val="868D96"/>
+                </a:solidFill>
+                <a:latin typeface="Consolas"/>
+              </a:rPr>
+              <a:t>IV</a:t>
+            </a:r>
+          </a:p>
+        </p:txBody>
+      </p:sp>
+    </p:spTree>
+  </p:cSld>
+  <p:clrMapOvr>
+    <a:masterClrMapping/>
+  </p:clrMapOvr>
+</p:sld>
+</file>
+
+<file path=ppt/slides/slide26.xml><?xml version="1.0" encoding="utf-8"?>
+<p:sld xmlns:a="http://schemas.openxmlformats.org/drawingml/2006/main" xmlns:p="http://schemas.openxmlformats.org/presentationml/2006/main" xmlns:r="http://schemas.openxmlformats.org/officeDocument/2006/relationships">
+  <p:cSld>
+    <p:bg>
+      <p:bgPr>
+        <a:solidFill>
+          <a:srgbClr val="FCFCFB"/>
+        </a:solidFill>
+        <a:effectLst/>
+      </p:bgPr>
+    </p:bg>
+    <p:spTree>
+      <p:nvGrpSpPr>
+        <p:cNvPr id="1" name=""/>
+        <p:cNvGrpSpPr/>
+        <p:nvPr/>
+      </p:nvGrpSpPr>
+      <p:grpSpPr/>
+      <p:sp>
+        <p:nvSpPr>
+          <p:cNvPr id="2" name="TextBox 1"/>
+          <p:cNvSpPr txBox="1"/>
+          <p:nvPr/>
+        </p:nvSpPr>
+        <p:spPr>
+          <a:xfrm>
+            <a:off x="566928" y="502920"/>
+            <a:ext cx="8595360" cy="274320"/>
+          </a:xfrm>
+          <a:prstGeom prst="rect">
+            <a:avLst/>
+          </a:prstGeom>
+          <a:noFill/>
+        </p:spPr>
+        <p:txBody>
+          <a:bodyPr wrap="square" lIns="0" rIns="0" tIns="0" bIns="0">
+            <a:spAutoFit/>
+          </a:bodyPr>
+          <a:lstStyle/>
+          <a:p>
+            <a:pPr>
+              <a:spcBef>
+                <a:spcPts val="0"/>
+              </a:spcBef>
+              <a:spcAft>
+                <a:spcPts val="0"/>
+              </a:spcAft>
+            </a:pPr>
+            <a:r>
+              <a:rPr sz="1000" b="0" i="0">
+                <a:solidFill>
+                  <a:srgbClr val="A63A30"/>
+                </a:solidFill>
+                <a:latin typeface="Consolas"/>
+              </a:rPr>
+              <a:t>IMPLICATION 1 · MEASUREMENT CHOICES CONSTRAIN WHAT FRAMEWORKS CAN SEE</a:t>
+            </a:r>
+          </a:p>
+        </p:txBody>
+      </p:sp>
+      <p:sp>
+        <p:nvSpPr>
+          <p:cNvPr id="3" name="TextBox 2"/>
+          <p:cNvSpPr txBox="1"/>
+          <p:nvPr/>
+        </p:nvSpPr>
+        <p:spPr>
+          <a:xfrm>
+            <a:off x="566928" y="914400"/>
+            <a:ext cx="8595360" cy="1371600"/>
+          </a:xfrm>
+          <a:prstGeom prst="rect">
+            <a:avLst/>
+          </a:prstGeom>
+          <a:noFill/>
+        </p:spPr>
+        <p:txBody>
+          <a:bodyPr wrap="square" lIns="0" rIns="0" tIns="0" bIns="0">
+            <a:spAutoFit/>
+          </a:bodyPr>
+          <a:lstStyle/>
+          <a:p>
+            <a:pPr>
+              <a:lnSpc>
+                <a:spcPct val="108000"/>
+              </a:lnSpc>
+              <a:spcBef>
+                <a:spcPts val="0"/>
+              </a:spcBef>
+              <a:spcAft>
+                <a:spcPts val="0"/>
+              </a:spcAft>
+            </a:pPr>
+            <a:r>
+              <a:rPr sz="2700" b="0" i="0">
+                <a:solidFill>
+                  <a:srgbClr val="14171C"/>
+                </a:solidFill>
+                <a:latin typeface="Georgia"/>
+              </a:rPr>
+              <a:t>Education and health: what prescriptive measurement looks like</a:t>
+            </a:r>
+          </a:p>
+        </p:txBody>
+      </p:sp>
+      <p:sp>
+        <p:nvSpPr>
+          <p:cNvPr id="4" name="TextBox 3"/>
+          <p:cNvSpPr txBox="1"/>
+          <p:nvPr/>
+        </p:nvSpPr>
+        <p:spPr>
+          <a:xfrm>
+            <a:off x="566928" y="2286000"/>
+            <a:ext cx="8595360" cy="3840480"/>
+          </a:xfrm>
+          <a:prstGeom prst="rect">
+            <a:avLst/>
+          </a:prstGeom>
+          <a:noFill/>
+        </p:spPr>
+        <p:txBody>
+          <a:bodyPr wrap="square" lIns="0" rIns="0" tIns="0" bIns="0">
+            <a:spAutoFit/>
+          </a:bodyPr>
+          <a:lstStyle/>
+          <a:p>
+            <a:pPr>
+              <a:lnSpc>
+                <a:spcPct val="132000"/>
+              </a:lnSpc>
+              <a:spcBef>
+                <a:spcPts val="0"/>
+              </a:spcBef>
+              <a:spcAft>
+                <a:spcPts val="1100"/>
+              </a:spcAft>
+            </a:pPr>
+            <a:r>
+              <a:rPr sz="1400" b="0" i="0">
+                <a:solidFill>
+                  <a:srgbClr val="5A6068"/>
+                </a:solidFill>
+                <a:latin typeface="Calibri"/>
+              </a:rPr>
+              <a:t>Education is significant everywhere it is measured as attainment, but nearly invisible in SDG4 because most indicators measure something else. Health is nearly invisible in the HDI because life expectancy has saturated. Neither domain has changed; the frameworks' construction choices have. The evidence suggests three concrete shifts.</a:t>
+            </a:r>
+          </a:p>
+          <a:p>
+            <a:pPr>
+              <a:lnSpc>
+                <a:spcPct val="132000"/>
+              </a:lnSpc>
+              <a:spcBef>
+                <a:spcPts val="0"/>
+              </a:spcBef>
+              <a:spcAft>
+                <a:spcPts val="1100"/>
+              </a:spcAft>
+            </a:pPr>
+            <a:r>
+              <a:rPr sz="1400" b="0" i="0">
+                <a:solidFill>
+                  <a:srgbClr val="5A6068"/>
+                </a:solidFill>
+                <a:latin typeface="Calibri"/>
+              </a:rPr>
+              <a:t>For education: development measurement should prioritize access and completion over parity ratios and learning outcomes when the intent is tracking lived experience. The data shows access indicators reach 12.7% significance in predicting wellbeing; equity parity ratios reach 2.5%. Weighting constructs explicitly by their wellbeing correlation, rather than equally by series count, would surface what actually matters.</a:t>
+            </a:r>
+          </a:p>
+          <a:p>
+            <a:pPr>
+              <a:lnSpc>
+                <a:spcPct val="132000"/>
+              </a:lnSpc>
+              <a:spcBef>
+                <a:spcPts val="0"/>
+              </a:spcBef>
+              <a:spcAft>
+                <a:spcPts val="1100"/>
+              </a:spcAft>
+            </a:pPr>
+            <a:r>
+              <a:rPr sz="1400" b="0" i="0">
+                <a:solidFill>
+                  <a:srgbClr val="5A6068"/>
+                </a:solidFill>
+                <a:latin typeface="Calibri"/>
+              </a:rPr>
+              <a:t>For health: measurement should become adaptive, varying by development context. Life expectancy works as a proxy in lower-income settings where variance remains; in saturated regions, self-reported health or diagnosis-specific conditions (depression, chronic conditions) capture variation life expectancy misses. This is not suggesting two separate frameworks; it is suggesting that the same domain — health — should be measured differently where the same variable no longer moves.</a:t>
+            </a:r>
+          </a:p>
+        </p:txBody>
+      </p:sp>
+      <p:sp>
+        <p:nvSpPr>
+          <p:cNvPr id="5" name="TextBox 4"/>
+          <p:cNvSpPr txBox="1"/>
+          <p:nvPr/>
+        </p:nvSpPr>
+        <p:spPr>
+          <a:xfrm>
+            <a:off x="11338560" y="6263640"/>
+            <a:ext cx="548640" cy="274320"/>
+          </a:xfrm>
+          <a:prstGeom prst="rect">
+            <a:avLst/>
+          </a:prstGeom>
+          <a:noFill/>
+        </p:spPr>
+        <p:txBody>
+          <a:bodyPr wrap="square" lIns="0" rIns="0" tIns="0" bIns="0">
+            <a:spAutoFit/>
+          </a:bodyPr>
+          <a:lstStyle/>
+          <a:p>
+            <a:pPr algn="r">
+              <a:spcBef>
+                <a:spcPts val="0"/>
+              </a:spcBef>
+              <a:spcAft>
+                <a:spcPts val="0"/>
+              </a:spcAft>
+            </a:pPr>
+            <a:r>
+              <a:rPr sz="1100" b="0" i="0">
+                <a:solidFill>
+                  <a:srgbClr val="868D96"/>
+                </a:solidFill>
+                <a:latin typeface="Consolas"/>
+              </a:rPr>
+              <a:t>IV</a:t>
+            </a:r>
+          </a:p>
+        </p:txBody>
+      </p:sp>
+    </p:spTree>
+  </p:cSld>
+  <p:clrMapOvr>
+    <a:masterClrMapping/>
+  </p:clrMapOvr>
+</p:sld>
+</file>
+
+<file path=ppt/slides/slide27.xml><?xml version="1.0" encoding="utf-8"?>
+<p:sld xmlns:a="http://schemas.openxmlformats.org/drawingml/2006/main" xmlns:p="http://schemas.openxmlformats.org/presentationml/2006/main" xmlns:r="http://schemas.openxmlformats.org/officeDocument/2006/relationships">
+  <p:cSld>
+    <p:bg>
+      <p:bgPr>
+        <a:solidFill>
+          <a:srgbClr val="FCFCFB"/>
+        </a:solidFill>
+        <a:effectLst/>
+      </p:bgPr>
+    </p:bg>
+    <p:spTree>
+      <p:nvGrpSpPr>
+        <p:cNvPr id="1" name=""/>
+        <p:cNvGrpSpPr/>
+        <p:nvPr/>
+      </p:nvGrpSpPr>
+      <p:grpSpPr/>
+      <p:sp>
+        <p:nvSpPr>
+          <p:cNvPr id="2" name="TextBox 1"/>
+          <p:cNvSpPr txBox="1"/>
+          <p:nvPr/>
+        </p:nvSpPr>
+        <p:spPr>
+          <a:xfrm>
+            <a:off x="566928" y="502920"/>
+            <a:ext cx="8595360" cy="274320"/>
+          </a:xfrm>
+          <a:prstGeom prst="rect">
+            <a:avLst/>
+          </a:prstGeom>
+          <a:noFill/>
+        </p:spPr>
+        <p:txBody>
+          <a:bodyPr wrap="square" lIns="0" rIns="0" tIns="0" bIns="0">
+            <a:spAutoFit/>
+          </a:bodyPr>
+          <a:lstStyle/>
+          <a:p>
+            <a:pPr>
+              <a:spcBef>
+                <a:spcPts val="0"/>
+              </a:spcBef>
+              <a:spcAft>
+                <a:spcPts val="0"/>
+              </a:spcAft>
+            </a:pPr>
+            <a:r>
+              <a:rPr sz="1000" b="0" i="0">
+                <a:solidFill>
+                  <a:srgbClr val="A63A30"/>
+                </a:solidFill>
+                <a:latin typeface="Consolas"/>
+              </a:rPr>
+              <a:t>IMPLICATION 2 · COVERAGE GAPS ARE MORE FUNDAMENTAL THAN CONSTRUCT CHOICE</a:t>
+            </a:r>
+          </a:p>
+        </p:txBody>
+      </p:sp>
+      <p:sp>
+        <p:nvSpPr>
+          <p:cNvPr id="3" name="TextBox 2"/>
+          <p:cNvSpPr txBox="1"/>
+          <p:nvPr/>
+        </p:nvSpPr>
+        <p:spPr>
+          <a:xfrm>
+            <a:off x="566928" y="914400"/>
+            <a:ext cx="8595360" cy="1371600"/>
+          </a:xfrm>
+          <a:prstGeom prst="rect">
+            <a:avLst/>
+          </a:prstGeom>
+          <a:noFill/>
+        </p:spPr>
+        <p:txBody>
+          <a:bodyPr wrap="square" lIns="0" rIns="0" tIns="0" bIns="0">
+            <a:spAutoFit/>
+          </a:bodyPr>
+          <a:lstStyle/>
+          <a:p>
+            <a:pPr>
+              <a:lnSpc>
+                <a:spcPct val="108000"/>
+              </a:lnSpc>
+              <a:spcBef>
+                <a:spcPts val="0"/>
+              </a:spcBef>
+              <a:spcAft>
+                <a:spcPts val="0"/>
+              </a:spcAft>
+            </a:pPr>
+            <a:r>
+              <a:rPr sz="2700" b="0" i="0">
+                <a:solidFill>
+                  <a:srgbClr val="14171C"/>
+                </a:solidFill>
+                <a:latin typeface="Georgia"/>
+              </a:rPr>
+              <a:t>Social trust: building what was never measured</a:t>
+            </a:r>
+          </a:p>
+        </p:txBody>
+      </p:sp>
+      <p:sp>
+        <p:nvSpPr>
+          <p:cNvPr id="4" name="TextBox 3"/>
+          <p:cNvSpPr txBox="1"/>
+          <p:nvPr/>
+        </p:nvSpPr>
+        <p:spPr>
+          <a:xfrm>
+            <a:off x="566928" y="2286000"/>
+            <a:ext cx="8595360" cy="3840480"/>
+          </a:xfrm>
+          <a:prstGeom prst="rect">
+            <a:avLst/>
+          </a:prstGeom>
+          <a:noFill/>
+        </p:spPr>
+        <p:txBody>
+          <a:bodyPr wrap="square" lIns="0" rIns="0" tIns="0" bIns="0">
+            <a:spAutoFit/>
+          </a:bodyPr>
+          <a:lstStyle/>
+          <a:p>
+            <a:pPr>
+              <a:lnSpc>
+                <a:spcPct val="132000"/>
+              </a:lnSpc>
+              <a:spcBef>
+                <a:spcPts val="0"/>
+              </a:spcBef>
+              <a:spcAft>
+                <a:spcPts val="1100"/>
+              </a:spcAft>
+            </a:pPr>
+            <a:r>
+              <a:rPr sz="1400" b="0" i="0">
+                <a:solidFill>
+                  <a:srgbClr val="5A6068"/>
+                </a:solidFill>
+                <a:latin typeface="Calibri"/>
+              </a:rPr>
+              <a:t>Social trust is the most tentative finding here. The ESS is Europe-only, across 36 countries, and relies on a single item. That bounds the claim: the pattern holds in Europe, with a wellbeing survey, on a self-report basis. It does not claim universality.</a:t>
+            </a:r>
+          </a:p>
+          <a:p>
+            <a:pPr>
+              <a:lnSpc>
+                <a:spcPct val="132000"/>
+              </a:lnSpc>
+              <a:spcBef>
+                <a:spcPts val="0"/>
+              </a:spcBef>
+              <a:spcAft>
+                <a:spcPts val="1100"/>
+              </a:spcAft>
+            </a:pPr>
+            <a:r>
+              <a:rPr sz="1400" b="0" i="0">
+                <a:solidFill>
+                  <a:srgbClr val="5A6068"/>
+                </a:solidFill>
+                <a:latin typeface="Calibri"/>
+              </a:rPr>
+              <a:t>But the reason it is tentative points to the deepest problem: trust is not collected at global scale in either framework. The SDG database has 13 series adjacent to trust, but they measure institutional confidence, not interpersonal trust, and they are intermittent (147 of 163 country-series have fewer than four years of data). This is not a construct-choice problem that better measurement can solve. It is a coverage gap, and the prescription follows directly: if wellbeing-conscious development monitoring is the intent, interpersonal trust must be collected at scale.</a:t>
+            </a:r>
+          </a:p>
+          <a:p>
+            <a:pPr>
+              <a:lnSpc>
+                <a:spcPct val="132000"/>
+              </a:lnSpc>
+              <a:spcBef>
+                <a:spcPts val="0"/>
+              </a:spcBef>
+              <a:spcAft>
+                <a:spcPts val="1100"/>
+              </a:spcAft>
+            </a:pPr>
+            <a:r>
+              <a:rPr sz="1400" b="0" i="0">
+                <a:solidFill>
+                  <a:srgbClr val="5A6068"/>
+                </a:solidFill>
+                <a:latin typeface="Calibri"/>
+              </a:rPr>
+              <a:t>This does not mean overloading the HDI or SDG questionnaires. It could mean systematic linkage between core development frameworks and dedicated wellbeing surveys — the ESS in Europe, Gallup World Poll and World Values Survey globally — that measure trust at individual level and can be integrated into country-level assessments. The evidence suggests this is not optional if the goal is understanding what shapes lived experience.</a:t>
+            </a:r>
+          </a:p>
+        </p:txBody>
+      </p:sp>
+      <p:sp>
+        <p:nvSpPr>
+          <p:cNvPr id="5" name="TextBox 4"/>
+          <p:cNvSpPr txBox="1"/>
+          <p:nvPr/>
+        </p:nvSpPr>
+        <p:spPr>
+          <a:xfrm>
+            <a:off x="11338560" y="6263640"/>
+            <a:ext cx="548640" cy="274320"/>
+          </a:xfrm>
+          <a:prstGeom prst="rect">
+            <a:avLst/>
+          </a:prstGeom>
+          <a:noFill/>
+        </p:spPr>
+        <p:txBody>
+          <a:bodyPr wrap="square" lIns="0" rIns="0" tIns="0" bIns="0">
+            <a:spAutoFit/>
+          </a:bodyPr>
+          <a:lstStyle/>
+          <a:p>
+            <a:pPr algn="r">
+              <a:spcBef>
+                <a:spcPts val="0"/>
+              </a:spcBef>
+              <a:spcAft>
+                <a:spcPts val="0"/>
+              </a:spcAft>
+            </a:pPr>
+            <a:r>
+              <a:rPr sz="1100" b="0" i="0">
+                <a:solidFill>
+                  <a:srgbClr val="868D96"/>
+                </a:solidFill>
+                <a:latin typeface="Consolas"/>
+              </a:rPr>
+              <a:t>IV</a:t>
+            </a:r>
+          </a:p>
+        </p:txBody>
+      </p:sp>
+    </p:spTree>
+  </p:cSld>
+  <p:clrMapOvr>
+    <a:masterClrMapping/>
+  </p:clrMapOvr>
+</p:sld>
+</file>
+
+<file path=ppt/slides/slide28.xml><?xml version="1.0" encoding="utf-8"?>
+<p:sld xmlns:a="http://schemas.openxmlformats.org/drawingml/2006/main" xmlns:p="http://schemas.openxmlformats.org/presentationml/2006/main" xmlns:r="http://schemas.openxmlformats.org/officeDocument/2006/relationships">
+  <p:cSld>
+    <p:bg>
+      <p:bgPr>
+        <a:solidFill>
+          <a:srgbClr val="FCFCFB"/>
+        </a:solidFill>
+        <a:effectLst/>
+      </p:bgPr>
+    </p:bg>
+    <p:spTree>
+      <p:nvGrpSpPr>
+        <p:cNvPr id="1" name=""/>
+        <p:cNvGrpSpPr/>
+        <p:nvPr/>
+      </p:nvGrpSpPr>
+      <p:grpSpPr/>
+      <p:sp>
+        <p:nvSpPr>
+          <p:cNvPr id="2" name="TextBox 1"/>
+          <p:cNvSpPr txBox="1"/>
+          <p:nvPr/>
+        </p:nvSpPr>
+        <p:spPr>
+          <a:xfrm>
+            <a:off x="566928" y="502920"/>
+            <a:ext cx="8595360" cy="274320"/>
+          </a:xfrm>
+          <a:prstGeom prst="rect">
+            <a:avLst/>
+          </a:prstGeom>
+          <a:noFill/>
+        </p:spPr>
+        <p:txBody>
+          <a:bodyPr wrap="square" lIns="0" rIns="0" tIns="0" bIns="0">
+            <a:spAutoFit/>
+          </a:bodyPr>
+          <a:lstStyle/>
+          <a:p>
+            <a:pPr>
+              <a:spcBef>
+                <a:spcPts val="0"/>
+              </a:spcBef>
+              <a:spcAft>
+                <a:spcPts val="0"/>
+              </a:spcAft>
+            </a:pPr>
+            <a:r>
+              <a:rPr sz="1000" b="0" i="0">
+                <a:solidFill>
+                  <a:srgbClr val="A63A30"/>
+                </a:solidFill>
+                <a:latin typeface="Consolas"/>
+              </a:rPr>
+              <a:t>CONCLUSION</a:t>
+            </a:r>
+          </a:p>
+        </p:txBody>
+      </p:sp>
+      <p:sp>
+        <p:nvSpPr>
+          <p:cNvPr id="3" name="TextBox 2"/>
+          <p:cNvSpPr txBox="1"/>
+          <p:nvPr/>
+        </p:nvSpPr>
+        <p:spPr>
+          <a:xfrm>
+            <a:off x="566928" y="914400"/>
+            <a:ext cx="8595360" cy="1371600"/>
+          </a:xfrm>
+          <a:prstGeom prst="rect">
+            <a:avLst/>
+          </a:prstGeom>
+          <a:noFill/>
+        </p:spPr>
+        <p:txBody>
+          <a:bodyPr wrap="square" lIns="0" rIns="0" tIns="0" bIns="0">
+            <a:spAutoFit/>
+          </a:bodyPr>
+          <a:lstStyle/>
+          <a:p>
+            <a:pPr>
+              <a:lnSpc>
+                <a:spcPct val="108000"/>
+              </a:lnSpc>
+              <a:spcBef>
+                <a:spcPts val="0"/>
+              </a:spcBef>
+              <a:spcAft>
+                <a:spcPts val="0"/>
+              </a:spcAft>
+            </a:pPr>
+            <a:r>
+              <a:rPr sz="2700" b="0" i="0">
+                <a:solidFill>
+                  <a:srgbClr val="14171C"/>
+                </a:solidFill>
+                <a:latin typeface="Georgia"/>
+              </a:rPr>
+              <a:t>From evidence to intent: what should wellbeing measurement look like?</a:t>
+            </a:r>
+          </a:p>
+        </p:txBody>
+      </p:sp>
+      <p:sp>
+        <p:nvSpPr>
+          <p:cNvPr id="4" name="TextBox 3"/>
+          <p:cNvSpPr txBox="1"/>
+          <p:nvPr/>
+        </p:nvSpPr>
+        <p:spPr>
+          <a:xfrm>
+            <a:off x="566928" y="2286000"/>
+            <a:ext cx="8595360" cy="3840480"/>
+          </a:xfrm>
+          <a:prstGeom prst="rect">
+            <a:avLst/>
+          </a:prstGeom>
+          <a:noFill/>
+        </p:spPr>
+        <p:txBody>
+          <a:bodyPr wrap="square" lIns="0" rIns="0" tIns="0" bIns="0">
+            <a:spAutoFit/>
+          </a:bodyPr>
+          <a:lstStyle/>
+          <a:p>
+            <a:pPr>
+              <a:lnSpc>
+                <a:spcPct val="132000"/>
+              </a:lnSpc>
+              <a:spcBef>
+                <a:spcPts val="0"/>
+              </a:spcBef>
+              <a:spcAft>
+                <a:spcPts val="1100"/>
+              </a:spcAft>
+            </a:pPr>
+            <a:r>
+              <a:rPr sz="1325" b="0" i="0">
+                <a:solidFill>
+                  <a:srgbClr val="5A6068"/>
+                </a:solidFill>
+                <a:latin typeface="Calibri"/>
+              </a:rPr>
+              <a:t>The evidence shows a consistent pattern: which domain looks most consequential for wellbeing depends on which framework measures it and what variable they chose. This is not about the domains; it is about the tools. And if the tools were redesigned with wellbeing in mind, the evidence points to concrete changes.</a:t>
+            </a:r>
+          </a:p>
+          <a:p>
+            <a:pPr>
+              <a:lnSpc>
+                <a:spcPct val="132000"/>
+              </a:lnSpc>
+              <a:spcBef>
+                <a:spcPts val="0"/>
+              </a:spcBef>
+              <a:spcAft>
+                <a:spcPts val="1100"/>
+              </a:spcAft>
+            </a:pPr>
+            <a:r>
+              <a:rPr sz="1325" b="0" i="0">
+                <a:solidFill>
+                  <a:srgbClr val="5A6068"/>
+                </a:solidFill>
+                <a:latin typeface="Calibri"/>
+              </a:rPr>
+              <a:t>Three recommendations emerge from this analysis. First: for education, construct measurement choices explicitly to favor access and completion over equity parity ratios when the intent is tracking lived experience. Second: for health, make variable choice adaptive — life expectancy where variance remains, self-reported measures or condition-specific indicators where it does not. Third: for social trust, build interpersonal-trust measurement into development frameworks, either directly or through systematic integration with wellbeing surveys that capture it.</a:t>
+            </a:r>
+          </a:p>
+          <a:p>
+            <a:pPr>
+              <a:lnSpc>
+                <a:spcPct val="132000"/>
+              </a:lnSpc>
+              <a:spcBef>
+                <a:spcPts val="0"/>
+              </a:spcBef>
+              <a:spcAft>
+                <a:spcPts val="1100"/>
+              </a:spcAft>
+            </a:pPr>
+            <a:r>
+              <a:rPr sz="1325" b="0" i="0">
+                <a:solidFill>
+                  <a:srgbClr val="5A6068"/>
+                </a:solidFill>
+                <a:latin typeface="Calibri"/>
+              </a:rPr>
+              <a:t>Whether development frameworks should take on wellbeing as part of their purpose remains a choice, not a necessity. These frameworks have done important work tracking development. But if the intent is understanding what actually shapes how people experience their lives, the evidence suggests the measurement that serves that intent should be different — more granular in which constructs to count, more responsive to where variables still move, and more systematic about collecting domains that matter but have never been measured at scale.</a:t>
+            </a:r>
+          </a:p>
+        </p:txBody>
+      </p:sp>
+      <p:sp>
+        <p:nvSpPr>
+          <p:cNvPr id="5" name="TextBox 4"/>
+          <p:cNvSpPr txBox="1"/>
+          <p:nvPr/>
+        </p:nvSpPr>
+        <p:spPr>
+          <a:xfrm>
+            <a:off x="11338560" y="6263640"/>
+            <a:ext cx="548640" cy="274320"/>
+          </a:xfrm>
+          <a:prstGeom prst="rect">
+            <a:avLst/>
+          </a:prstGeom>
+          <a:noFill/>
+        </p:spPr>
+        <p:txBody>
+          <a:bodyPr wrap="square" lIns="0" rIns="0" tIns="0" bIns="0">
+            <a:spAutoFit/>
+          </a:bodyPr>
+          <a:lstStyle/>
+          <a:p>
+            <a:pPr algn="r">
+              <a:spcBef>
+                <a:spcPts val="0"/>
+              </a:spcBef>
+              <a:spcAft>
+                <a:spcPts val="0"/>
+              </a:spcAft>
+            </a:pPr>
+            <a:r>
+              <a:rPr sz="1100" b="0" i="0">
+                <a:solidFill>
+                  <a:srgbClr val="868D96"/>
+                </a:solidFill>
+                <a:latin typeface="Consolas"/>
+              </a:rPr>
+              <a:t>IV</a:t>
+            </a:r>
+          </a:p>
+        </p:txBody>
+      </p:sp>
+    </p:spTree>
+  </p:cSld>
+  <p:clrMapOvr>
+    <a:masterClrMapping/>
+  </p:clrMapOvr>
+</p:sld>
+</file>
+
+<file path=ppt/slides/slide29.xml><?xml version="1.0" encoding="utf-8"?>
+<p:sld xmlns:a="http://schemas.openxmlformats.org/drawingml/2006/main" xmlns:p="http://schemas.openxmlformats.org/presentationml/2006/main" xmlns:r="http://schemas.openxmlformats.org/officeDocument/2006/relationships">
+  <p:cSld>
+    <p:bg>
+      <p:bgPr>
+        <a:solidFill>
+          <a:srgbClr val="E8EBEF"/>
+        </a:solidFill>
+        <a:effectLst/>
+      </p:bgPr>
+    </p:bg>
+    <p:spTree>
+      <p:nvGrpSpPr>
+        <p:cNvPr id="1" name=""/>
+        <p:cNvGrpSpPr/>
+        <p:nvPr/>
+      </p:nvGrpSpPr>
+      <p:grpSpPr/>
+      <p:sp>
+        <p:nvSpPr>
+          <p:cNvPr id="2" name="Rectangle 1"/>
           <p:cNvSpPr/>
           <p:nvPr/>
         </p:nvSpPr>
         <p:spPr>
           <a:xfrm>
-            <a:off x="566928" y="1828800"/>
-            <a:ext cx="3472586" cy="25400"/>
+            <a:off x="566928" y="2103120"/>
+            <a:ext cx="54864" cy="2377440"/>
           </a:xfrm>
           <a:prstGeom prst="rect">
             <a:avLst/>
@@ -8381,458 +9601,67 @@
       </p:sp>
       <p:sp>
         <p:nvSpPr>
+          <p:cNvPr id="3" name="TextBox 2"/>
+          <p:cNvSpPr txBox="1"/>
+          <p:nvPr/>
+        </p:nvSpPr>
+        <p:spPr>
+          <a:xfrm>
+            <a:off x="914400" y="1600200"/>
+            <a:ext cx="8686800" cy="274320"/>
+          </a:xfrm>
+          <a:prstGeom prst="rect">
+            <a:avLst/>
+          </a:prstGeom>
+          <a:noFill/>
+        </p:spPr>
+        <p:txBody>
+          <a:bodyPr wrap="square" lIns="0" rIns="0" tIns="0" bIns="0">
+            <a:spAutoFit/>
+          </a:bodyPr>
+          <a:lstStyle/>
+          <a:p>
+            <a:pPr>
+              <a:spcBef>
+                <a:spcPts val="0"/>
+              </a:spcBef>
+              <a:spcAft>
+                <a:spcPts val="0"/>
+              </a:spcAft>
+            </a:pPr>
+            <a:r>
+              <a:rPr sz="1100" b="0" i="0">
+                <a:solidFill>
+                  <a:srgbClr val="17549E"/>
+                </a:solidFill>
+                <a:latin typeface="Consolas"/>
+              </a:rPr>
+              <a:t>WHERE ACT IV LEAVES US</a:t>
+            </a:r>
+          </a:p>
+        </p:txBody>
+      </p:sp>
+      <p:sp>
+        <p:nvSpPr>
           <p:cNvPr id="4" name="TextBox 3"/>
           <p:cNvSpPr txBox="1"/>
           <p:nvPr/>
         </p:nvSpPr>
         <p:spPr>
           <a:xfrm>
-            <a:off x="566928" y="2011680"/>
-            <a:ext cx="3472586" cy="1828800"/>
-          </a:xfrm>
-          <a:prstGeom prst="rect">
-            <a:avLst/>
-          </a:prstGeom>
-          <a:noFill/>
-        </p:spPr>
-        <p:txBody>
-          <a:bodyPr wrap="square" lIns="0" rIns="0" tIns="0" bIns="0">
-            <a:spAutoFit/>
-          </a:bodyPr>
-          <a:lstStyle/>
-          <a:p>
-            <a:pPr>
-              <a:spcBef>
-                <a:spcPts val="0"/>
-              </a:spcBef>
-              <a:spcAft>
-                <a:spcPts val="700"/>
-              </a:spcAft>
-            </a:pPr>
-            <a:r>
-              <a:rPr sz="1050" b="0" i="0">
-                <a:solidFill>
-                  <a:srgbClr val="17549E"/>
-                </a:solidFill>
-                <a:latin typeface="Consolas"/>
-              </a:rPr>
-              <a:t>FIGURE COUNT</a:t>
-            </a:r>
-          </a:p>
-          <a:p>
-            <a:pPr>
-              <a:lnSpc>
-                <a:spcPct val="130000"/>
-              </a:lnSpc>
-              <a:spcBef>
-                <a:spcPts val="0"/>
-              </a:spcBef>
-              <a:spcAft>
-                <a:spcPts val="0"/>
-              </a:spcAft>
-            </a:pPr>
-            <a:r>
-              <a:rPr sz="1100" b="0" i="0">
-                <a:solidFill>
-                  <a:srgbClr val="5A6068"/>
-                </a:solidFill>
-                <a:latin typeface="Calibri"/>
-              </a:rPr>
-              <a:t>Commentaries allow one or two. Proposed: three-panel composite as Figure 1 and domain scorecard as Figure 2. Everything else supplementary.</a:t>
-            </a:r>
-          </a:p>
-        </p:txBody>
-      </p:sp>
-      <p:sp>
-        <p:nvSpPr>
-          <p:cNvPr id="5" name="Rectangle 4"/>
-          <p:cNvSpPr/>
-          <p:nvPr/>
-        </p:nvSpPr>
-        <p:spPr>
-          <a:xfrm>
-            <a:off x="4359554" y="1828800"/>
-            <a:ext cx="3472586" cy="25400"/>
-          </a:xfrm>
-          <a:prstGeom prst="rect">
-            <a:avLst/>
-          </a:prstGeom>
-          <a:solidFill>
-            <a:srgbClr val="17549E"/>
-          </a:solidFill>
-          <a:ln>
-            <a:noFill/>
-          </a:ln>
-          <a:effectLst/>
-        </p:spPr>
-        <p:style>
-          <a:lnRef idx="1">
-            <a:schemeClr val="accent1"/>
-          </a:lnRef>
-          <a:fillRef idx="3">
-            <a:schemeClr val="accent1"/>
-          </a:fillRef>
-          <a:effectRef idx="2">
-            <a:schemeClr val="accent1"/>
-          </a:effectRef>
-          <a:fontRef idx="minor">
-            <a:schemeClr val="lt1"/>
-          </a:fontRef>
-        </p:style>
-        <p:txBody>
-          <a:bodyPr rtlCol="0" anchor="ctr"/>
-          <a:lstStyle/>
-          <a:p>
-            <a:pPr algn="ctr"/>
-          </a:p>
-        </p:txBody>
-      </p:sp>
-      <p:sp>
-        <p:nvSpPr>
-          <p:cNvPr id="6" name="TextBox 5"/>
-          <p:cNvSpPr txBox="1"/>
-          <p:nvPr/>
-        </p:nvSpPr>
-        <p:spPr>
-          <a:xfrm>
-            <a:off x="4359554" y="2011680"/>
-            <a:ext cx="3472586" cy="1828800"/>
-          </a:xfrm>
-          <a:prstGeom prst="rect">
-            <a:avLst/>
-          </a:prstGeom>
-          <a:noFill/>
-        </p:spPr>
-        <p:txBody>
-          <a:bodyPr wrap="square" lIns="0" rIns="0" tIns="0" bIns="0">
-            <a:spAutoFit/>
-          </a:bodyPr>
-          <a:lstStyle/>
-          <a:p>
-            <a:pPr>
-              <a:spcBef>
-                <a:spcPts val="0"/>
-              </a:spcBef>
-              <a:spcAft>
-                <a:spcPts val="700"/>
-              </a:spcAft>
-            </a:pPr>
-            <a:r>
-              <a:rPr sz="1050" b="0" i="0">
-                <a:solidFill>
-                  <a:srgbClr val="17549E"/>
-                </a:solidFill>
-                <a:latin typeface="Consolas"/>
-              </a:rPr>
-              <a:t>SCOPE OF TRUST FINDINGS</a:t>
-            </a:r>
-          </a:p>
-          <a:p>
-            <a:pPr>
-              <a:lnSpc>
-                <a:spcPct val="130000"/>
-              </a:lnSpc>
-              <a:spcBef>
-                <a:spcPts val="0"/>
-              </a:spcBef>
-              <a:spcAft>
-                <a:spcPts val="0"/>
-              </a:spcAft>
-            </a:pPr>
-            <a:r>
-              <a:rPr sz="1100" b="0" i="0">
-                <a:solidFill>
-                  <a:srgbClr val="5A6068"/>
-                </a:solidFill>
-                <a:latin typeface="Calibri"/>
-              </a:rPr>
-              <a:t>Trust findings rest on ESS (36 European countries, individual-level). The design requires ≥4 years per country-series; only 16 of 163 SDG trust-adjacent series have that coverage, and 1 is significant. Tested cross-sectionally, 9 of 13 series are usable and 4 are significant, but all fall below HDI components on the same countries. The claim is Europe-only and rests on one instrument in each framework; it is the most tentative of the three.</a:t>
-            </a:r>
-          </a:p>
-        </p:txBody>
-      </p:sp>
-      <p:sp>
-        <p:nvSpPr>
-          <p:cNvPr id="7" name="Rectangle 6"/>
-          <p:cNvSpPr/>
-          <p:nvPr/>
-        </p:nvSpPr>
-        <p:spPr>
-          <a:xfrm>
-            <a:off x="8152180" y="1828800"/>
-            <a:ext cx="3472586" cy="25400"/>
-          </a:xfrm>
-          <a:prstGeom prst="rect">
-            <a:avLst/>
-          </a:prstGeom>
-          <a:solidFill>
-            <a:srgbClr val="17549E"/>
-          </a:solidFill>
-          <a:ln>
-            <a:noFill/>
-          </a:ln>
-          <a:effectLst/>
-        </p:spPr>
-        <p:style>
-          <a:lnRef idx="1">
-            <a:schemeClr val="accent1"/>
-          </a:lnRef>
-          <a:fillRef idx="3">
-            <a:schemeClr val="accent1"/>
-          </a:fillRef>
-          <a:effectRef idx="2">
-            <a:schemeClr val="accent1"/>
-          </a:effectRef>
-          <a:fontRef idx="minor">
-            <a:schemeClr val="lt1"/>
-          </a:fontRef>
-        </p:style>
-        <p:txBody>
-          <a:bodyPr rtlCol="0" anchor="ctr"/>
-          <a:lstStyle/>
-          <a:p>
-            <a:pPr algn="ctr"/>
-          </a:p>
-        </p:txBody>
-      </p:sp>
-      <p:sp>
-        <p:nvSpPr>
-          <p:cNvPr id="8" name="TextBox 7"/>
-          <p:cNvSpPr txBox="1"/>
-          <p:nvPr/>
-        </p:nvSpPr>
-        <p:spPr>
-          <a:xfrm>
-            <a:off x="8152180" y="2011680"/>
-            <a:ext cx="3472586" cy="1828800"/>
-          </a:xfrm>
-          <a:prstGeom prst="rect">
-            <a:avLst/>
-          </a:prstGeom>
-          <a:noFill/>
-        </p:spPr>
-        <p:txBody>
-          <a:bodyPr wrap="square" lIns="0" rIns="0" tIns="0" bIns="0">
-            <a:spAutoFit/>
-          </a:bodyPr>
-          <a:lstStyle/>
-          <a:p>
-            <a:pPr>
-              <a:spcBef>
-                <a:spcPts val="0"/>
-              </a:spcBef>
-              <a:spcAft>
-                <a:spcPts val="700"/>
-              </a:spcAft>
-            </a:pPr>
-            <a:r>
-              <a:rPr sz="1050" b="0" i="0">
-                <a:solidFill>
-                  <a:srgbClr val="17549E"/>
-                </a:solidFill>
-                <a:latin typeface="Consolas"/>
-              </a:rPr>
-              <a:t>INSTITUTIONAL CONFIDENCE VS. INTERPERSONAL TRUST</a:t>
-            </a:r>
-          </a:p>
-          <a:p>
-            <a:pPr>
-              <a:lnSpc>
-                <a:spcPct val="130000"/>
-              </a:lnSpc>
-              <a:spcBef>
-                <a:spcPts val="0"/>
-              </a:spcBef>
-              <a:spcAft>
-                <a:spcPts val="0"/>
-              </a:spcAft>
-            </a:pPr>
-            <a:r>
-              <a:rPr sz="1100" b="0" i="0">
-                <a:solidFill>
-                  <a:srgbClr val="5A6068"/>
-                </a:solidFill>
-                <a:latin typeface="Calibri"/>
-              </a:rPr>
-              <a:t>The SDG's Goal 16 trust series measure satisfaction with public services, perceived bribery, and perceived inclusiveness in decision-making — institutional confidence, not interpersonal trust ('most people can be trusted'). These are conceptually distinct. The commentarymust be explicit that SDG16 is not a direct analogue for the ESS trust item.</a:t>
-            </a:r>
-          </a:p>
-        </p:txBody>
-      </p:sp>
-      <p:sp>
-        <p:nvSpPr>
-          <p:cNvPr id="9" name="Rectangle 8"/>
-          <p:cNvSpPr/>
-          <p:nvPr/>
-        </p:nvSpPr>
-        <p:spPr>
-          <a:xfrm>
-            <a:off x="566928" y="4069080"/>
-            <a:ext cx="3472586" cy="25400"/>
-          </a:xfrm>
-          <a:prstGeom prst="rect">
-            <a:avLst/>
-          </a:prstGeom>
-          <a:solidFill>
-            <a:srgbClr val="17549E"/>
-          </a:solidFill>
-          <a:ln>
-            <a:noFill/>
-          </a:ln>
-          <a:effectLst/>
-        </p:spPr>
-        <p:style>
-          <a:lnRef idx="1">
-            <a:schemeClr val="accent1"/>
-          </a:lnRef>
-          <a:fillRef idx="3">
-            <a:schemeClr val="accent1"/>
-          </a:fillRef>
-          <a:effectRef idx="2">
-            <a:schemeClr val="accent1"/>
-          </a:effectRef>
-          <a:fontRef idx="minor">
-            <a:schemeClr val="lt1"/>
-          </a:fontRef>
-        </p:style>
-        <p:txBody>
-          <a:bodyPr rtlCol="0" anchor="ctr"/>
-          <a:lstStyle/>
-          <a:p>
-            <a:pPr algn="ctr"/>
-          </a:p>
-        </p:txBody>
-      </p:sp>
-      <p:sp>
-        <p:nvSpPr>
-          <p:cNvPr id="10" name="TextBox 9"/>
-          <p:cNvSpPr txBox="1"/>
-          <p:nvPr/>
-        </p:nvSpPr>
-        <p:spPr>
-          <a:xfrm>
-            <a:off x="566928" y="4251960"/>
-            <a:ext cx="3472586" cy="1828800"/>
-          </a:xfrm>
-          <a:prstGeom prst="rect">
-            <a:avLst/>
-          </a:prstGeom>
-          <a:noFill/>
-        </p:spPr>
-        <p:txBody>
-          <a:bodyPr wrap="square" lIns="0" rIns="0" tIns="0" bIns="0">
-            <a:spAutoFit/>
-          </a:bodyPr>
-          <a:lstStyle/>
-          <a:p>
-            <a:pPr>
-              <a:spcBef>
-                <a:spcPts val="0"/>
-              </a:spcBef>
-              <a:spcAft>
-                <a:spcPts val="700"/>
-              </a:spcAft>
-            </a:pPr>
-            <a:r>
-              <a:rPr sz="1050" b="0" i="0">
-                <a:solidFill>
-                  <a:srgbClr val="17549E"/>
-                </a:solidFill>
-                <a:latin typeface="Consolas"/>
-              </a:rPr>
-              <a:t>THREE FAILURE MODES FRAME</a:t>
-            </a:r>
-          </a:p>
-          <a:p>
-            <a:pPr>
-              <a:lnSpc>
-                <a:spcPct val="130000"/>
-              </a:lnSpc>
-              <a:spcBef>
-                <a:spcPts val="0"/>
-              </a:spcBef>
-              <a:spcAft>
-                <a:spcPts val="0"/>
-              </a:spcAft>
-            </a:pPr>
-            <a:r>
-              <a:rPr sz="1100" b="0" i="0">
-                <a:solidFill>
-                  <a:srgbClr val="5A6068"/>
-                </a:solidFill>
-                <a:latin typeface="Calibri"/>
-              </a:rPr>
-              <a:t>The narrative positions education's, health's, and trust's findings as evidence of three different ways frameworks lose sight of domains that matter: wrong construct, saturated variable, coverage gap. This is a meta-finding about measurement, not about the domains themselves.</a:t>
-            </a:r>
-          </a:p>
-        </p:txBody>
-      </p:sp>
-    </p:spTree>
-  </p:cSld>
-  <p:clrMapOvr>
-    <a:masterClrMapping/>
-  </p:clrMapOvr>
-</p:sld>
-</file>
-
-<file path=ppt/slides/slide26.xml><?xml version="1.0" encoding="utf-8"?>
-<p:sld xmlns:a="http://schemas.openxmlformats.org/drawingml/2006/main" xmlns:p="http://schemas.openxmlformats.org/presentationml/2006/main" xmlns:r="http://schemas.openxmlformats.org/officeDocument/2006/relationships">
-  <p:cSld>
-    <p:bg>
-      <p:bgPr>
-        <a:solidFill>
-          <a:srgbClr val="14171C"/>
-        </a:solidFill>
-        <a:effectLst/>
-      </p:bgPr>
-    </p:bg>
-    <p:spTree>
-      <p:nvGrpSpPr>
-        <p:cNvPr id="1" name=""/>
-        <p:cNvGrpSpPr/>
-        <p:nvPr/>
-      </p:nvGrpSpPr>
-      <p:grpSpPr/>
-      <p:sp>
-        <p:nvSpPr>
-          <p:cNvPr id="2" name="TextBox 1"/>
-          <p:cNvSpPr txBox="1"/>
-          <p:nvPr/>
-        </p:nvSpPr>
-        <p:spPr>
-          <a:xfrm>
-            <a:off x="566928" y="2743200"/>
-            <a:ext cx="8229600" cy="1371600"/>
-          </a:xfrm>
-          <a:prstGeom prst="rect">
-            <a:avLst/>
-          </a:prstGeom>
-          <a:noFill/>
-        </p:spPr>
-        <p:txBody>
-          <a:bodyPr wrap="square" lIns="0" rIns="0" tIns="0" bIns="0">
-            <a:spAutoFit/>
-          </a:bodyPr>
-          <a:lstStyle/>
-          <a:p>
-            <a:pPr>
-              <a:spcBef>
-                <a:spcPts val="0"/>
-              </a:spcBef>
-              <a:spcAft>
-                <a:spcPts val="1000"/>
-              </a:spcAft>
-            </a:pPr>
-            <a:r>
-              <a:rPr sz="4000" b="0" i="0">
-                <a:solidFill>
-                  <a:srgbClr val="FCFCFB"/>
-                </a:solidFill>
-                <a:latin typeface="Georgia"/>
-              </a:rPr>
-              <a:t>Evidence appendix</a:t>
-            </a:r>
-          </a:p>
+            <a:off x="914400" y="2148840"/>
+            <a:ext cx="9509760" cy="2926080"/>
+          </a:xfrm>
+          <a:prstGeom prst="rect">
+            <a:avLst/>
+          </a:prstGeom>
+          <a:noFill/>
+        </p:spPr>
+        <p:txBody>
+          <a:bodyPr wrap="square" lIns="0" rIns="0" tIns="0" bIns="0">
+            <a:spAutoFit/>
+          </a:bodyPr>
+          <a:lstStyle/>
           <a:p>
             <a:pPr>
               <a:lnSpc>
@@ -8846,13 +9675,13 @@
               </a:spcAft>
             </a:pPr>
             <a:r>
-              <a:rPr sz="1400" b="0" i="0">
-                <a:solidFill>
-                  <a:srgbClr val="9AA4B0"/>
-                </a:solidFill>
-                <a:latin typeface="Calibri"/>
-              </a:rPr>
-              <a:t>Everything the three acts rest on but do not carry. In submission these become supplementary material.</a:t>
+              <a:rPr sz="2100" b="0" i="0">
+                <a:solidFill>
+                  <a:srgbClr val="14171C"/>
+                </a:solidFill>
+                <a:latin typeface="Georgia"/>
+              </a:rPr>
+              <a:t>Whether development measurement should be redesigned with wellbeing in mind is beyond this scope. But if it is, this evidence suggests the measurement should be different: more attentive to which variables still move, which constructs predict outcomes, and which domains are collected at all.</a:t>
             </a:r>
           </a:p>
         </p:txBody>
@@ -9301,6 +10130,615 @@
 </p:sld>
 </file>
 
+<file path=ppt/slides/slide30.xml><?xml version="1.0" encoding="utf-8"?>
+<p:sld xmlns:a="http://schemas.openxmlformats.org/drawingml/2006/main" xmlns:p="http://schemas.openxmlformats.org/presentationml/2006/main" xmlns:r="http://schemas.openxmlformats.org/officeDocument/2006/relationships">
+  <p:cSld>
+    <p:bg>
+      <p:bgPr>
+        <a:solidFill>
+          <a:srgbClr val="FCFCFB"/>
+        </a:solidFill>
+        <a:effectLst/>
+      </p:bgPr>
+    </p:bg>
+    <p:spTree>
+      <p:nvGrpSpPr>
+        <p:cNvPr id="1" name=""/>
+        <p:cNvGrpSpPr/>
+        <p:nvPr/>
+      </p:nvGrpSpPr>
+      <p:grpSpPr/>
+      <p:sp>
+        <p:nvSpPr>
+          <p:cNvPr id="2" name="TextBox 1"/>
+          <p:cNvSpPr txBox="1"/>
+          <p:nvPr/>
+        </p:nvSpPr>
+        <p:spPr>
+          <a:xfrm>
+            <a:off x="566928" y="502920"/>
+            <a:ext cx="8229600" cy="822960"/>
+          </a:xfrm>
+          <a:prstGeom prst="rect">
+            <a:avLst/>
+          </a:prstGeom>
+          <a:noFill/>
+        </p:spPr>
+        <p:txBody>
+          <a:bodyPr wrap="square" lIns="0" rIns="0" tIns="0" bIns="0">
+            <a:spAutoFit/>
+          </a:bodyPr>
+          <a:lstStyle/>
+          <a:p>
+            <a:pPr>
+              <a:spcBef>
+                <a:spcPts val="0"/>
+              </a:spcBef>
+              <a:spcAft>
+                <a:spcPts val="600"/>
+              </a:spcAft>
+            </a:pPr>
+            <a:r>
+              <a:rPr sz="3200" b="0" i="0">
+                <a:solidFill>
+                  <a:srgbClr val="14171C"/>
+                </a:solidFill>
+                <a:latin typeface="Georgia"/>
+              </a:rPr>
+              <a:t>Decisions for the team</a:t>
+            </a:r>
+          </a:p>
+          <a:p>
+            <a:pPr>
+              <a:spcBef>
+                <a:spcPts val="0"/>
+              </a:spcBef>
+              <a:spcAft>
+                <a:spcPts val="0"/>
+              </a:spcAft>
+            </a:pPr>
+            <a:r>
+              <a:rPr sz="1300" b="0" i="0">
+                <a:solidFill>
+                  <a:srgbClr val="5A6068"/>
+                </a:solidFill>
+                <a:latin typeface="Calibri"/>
+              </a:rPr>
+              <a:t>4 things the acts do not settle, in the order they block drafting.</a:t>
+            </a:r>
+          </a:p>
+        </p:txBody>
+      </p:sp>
+      <p:sp>
+        <p:nvSpPr>
+          <p:cNvPr id="3" name="Rectangle 2"/>
+          <p:cNvSpPr/>
+          <p:nvPr/>
+        </p:nvSpPr>
+        <p:spPr>
+          <a:xfrm>
+            <a:off x="566928" y="1828800"/>
+            <a:ext cx="3472586" cy="25400"/>
+          </a:xfrm>
+          <a:prstGeom prst="rect">
+            <a:avLst/>
+          </a:prstGeom>
+          <a:solidFill>
+            <a:srgbClr val="17549E"/>
+          </a:solidFill>
+          <a:ln>
+            <a:noFill/>
+          </a:ln>
+          <a:effectLst/>
+        </p:spPr>
+        <p:style>
+          <a:lnRef idx="1">
+            <a:schemeClr val="accent1"/>
+          </a:lnRef>
+          <a:fillRef idx="3">
+            <a:schemeClr val="accent1"/>
+          </a:fillRef>
+          <a:effectRef idx="2">
+            <a:schemeClr val="accent1"/>
+          </a:effectRef>
+          <a:fontRef idx="minor">
+            <a:schemeClr val="lt1"/>
+          </a:fontRef>
+        </p:style>
+        <p:txBody>
+          <a:bodyPr rtlCol="0" anchor="ctr"/>
+          <a:lstStyle/>
+          <a:p>
+            <a:pPr algn="ctr"/>
+          </a:p>
+        </p:txBody>
+      </p:sp>
+      <p:sp>
+        <p:nvSpPr>
+          <p:cNvPr id="4" name="TextBox 3"/>
+          <p:cNvSpPr txBox="1"/>
+          <p:nvPr/>
+        </p:nvSpPr>
+        <p:spPr>
+          <a:xfrm>
+            <a:off x="566928" y="2011680"/>
+            <a:ext cx="3472586" cy="1828800"/>
+          </a:xfrm>
+          <a:prstGeom prst="rect">
+            <a:avLst/>
+          </a:prstGeom>
+          <a:noFill/>
+        </p:spPr>
+        <p:txBody>
+          <a:bodyPr wrap="square" lIns="0" rIns="0" tIns="0" bIns="0">
+            <a:spAutoFit/>
+          </a:bodyPr>
+          <a:lstStyle/>
+          <a:p>
+            <a:pPr>
+              <a:spcBef>
+                <a:spcPts val="0"/>
+              </a:spcBef>
+              <a:spcAft>
+                <a:spcPts val="700"/>
+              </a:spcAft>
+            </a:pPr>
+            <a:r>
+              <a:rPr sz="1050" b="0" i="0">
+                <a:solidFill>
+                  <a:srgbClr val="17549E"/>
+                </a:solidFill>
+                <a:latin typeface="Consolas"/>
+              </a:rPr>
+              <a:t>FIGURE COUNT</a:t>
+            </a:r>
+          </a:p>
+          <a:p>
+            <a:pPr>
+              <a:lnSpc>
+                <a:spcPct val="130000"/>
+              </a:lnSpc>
+              <a:spcBef>
+                <a:spcPts val="0"/>
+              </a:spcBef>
+              <a:spcAft>
+                <a:spcPts val="0"/>
+              </a:spcAft>
+            </a:pPr>
+            <a:r>
+              <a:rPr sz="1100" b="0" i="0">
+                <a:solidFill>
+                  <a:srgbClr val="5A6068"/>
+                </a:solidFill>
+                <a:latin typeface="Calibri"/>
+              </a:rPr>
+              <a:t>Commentaries allow one or two. Proposed: three-panel composite as Figure 1 and domain scorecard as Figure 2. Everything else supplementary.</a:t>
+            </a:r>
+          </a:p>
+        </p:txBody>
+      </p:sp>
+      <p:sp>
+        <p:nvSpPr>
+          <p:cNvPr id="5" name="Rectangle 4"/>
+          <p:cNvSpPr/>
+          <p:nvPr/>
+        </p:nvSpPr>
+        <p:spPr>
+          <a:xfrm>
+            <a:off x="4359554" y="1828800"/>
+            <a:ext cx="3472586" cy="25400"/>
+          </a:xfrm>
+          <a:prstGeom prst="rect">
+            <a:avLst/>
+          </a:prstGeom>
+          <a:solidFill>
+            <a:srgbClr val="17549E"/>
+          </a:solidFill>
+          <a:ln>
+            <a:noFill/>
+          </a:ln>
+          <a:effectLst/>
+        </p:spPr>
+        <p:style>
+          <a:lnRef idx="1">
+            <a:schemeClr val="accent1"/>
+          </a:lnRef>
+          <a:fillRef idx="3">
+            <a:schemeClr val="accent1"/>
+          </a:fillRef>
+          <a:effectRef idx="2">
+            <a:schemeClr val="accent1"/>
+          </a:effectRef>
+          <a:fontRef idx="minor">
+            <a:schemeClr val="lt1"/>
+          </a:fontRef>
+        </p:style>
+        <p:txBody>
+          <a:bodyPr rtlCol="0" anchor="ctr"/>
+          <a:lstStyle/>
+          <a:p>
+            <a:pPr algn="ctr"/>
+          </a:p>
+        </p:txBody>
+      </p:sp>
+      <p:sp>
+        <p:nvSpPr>
+          <p:cNvPr id="6" name="TextBox 5"/>
+          <p:cNvSpPr txBox="1"/>
+          <p:nvPr/>
+        </p:nvSpPr>
+        <p:spPr>
+          <a:xfrm>
+            <a:off x="4359554" y="2011680"/>
+            <a:ext cx="3472586" cy="1828800"/>
+          </a:xfrm>
+          <a:prstGeom prst="rect">
+            <a:avLst/>
+          </a:prstGeom>
+          <a:noFill/>
+        </p:spPr>
+        <p:txBody>
+          <a:bodyPr wrap="square" lIns="0" rIns="0" tIns="0" bIns="0">
+            <a:spAutoFit/>
+          </a:bodyPr>
+          <a:lstStyle/>
+          <a:p>
+            <a:pPr>
+              <a:spcBef>
+                <a:spcPts val="0"/>
+              </a:spcBef>
+              <a:spcAft>
+                <a:spcPts val="700"/>
+              </a:spcAft>
+            </a:pPr>
+            <a:r>
+              <a:rPr sz="1050" b="0" i="0">
+                <a:solidFill>
+                  <a:srgbClr val="17549E"/>
+                </a:solidFill>
+                <a:latin typeface="Consolas"/>
+              </a:rPr>
+              <a:t>SCOPE OF TRUST FINDINGS</a:t>
+            </a:r>
+          </a:p>
+          <a:p>
+            <a:pPr>
+              <a:lnSpc>
+                <a:spcPct val="130000"/>
+              </a:lnSpc>
+              <a:spcBef>
+                <a:spcPts val="0"/>
+              </a:spcBef>
+              <a:spcAft>
+                <a:spcPts val="0"/>
+              </a:spcAft>
+            </a:pPr>
+            <a:r>
+              <a:rPr sz="1100" b="0" i="0">
+                <a:solidFill>
+                  <a:srgbClr val="5A6068"/>
+                </a:solidFill>
+                <a:latin typeface="Calibri"/>
+              </a:rPr>
+              <a:t>Trust findings rest on ESS (36 European countries, individual-level). The design requires ≥4 years per country-series; only 16 of 163 SDG trust-adjacent series have that coverage, and 1 is significant. Tested cross-sectionally, 9 of 13 series are usable and 4 are significant, but all fall below HDI components on the same countries. The claim is Europe-only and rests on one instrument in each framework; it is the most tentative of the three.</a:t>
+            </a:r>
+          </a:p>
+        </p:txBody>
+      </p:sp>
+      <p:sp>
+        <p:nvSpPr>
+          <p:cNvPr id="7" name="Rectangle 6"/>
+          <p:cNvSpPr/>
+          <p:nvPr/>
+        </p:nvSpPr>
+        <p:spPr>
+          <a:xfrm>
+            <a:off x="8152180" y="1828800"/>
+            <a:ext cx="3472586" cy="25400"/>
+          </a:xfrm>
+          <a:prstGeom prst="rect">
+            <a:avLst/>
+          </a:prstGeom>
+          <a:solidFill>
+            <a:srgbClr val="17549E"/>
+          </a:solidFill>
+          <a:ln>
+            <a:noFill/>
+          </a:ln>
+          <a:effectLst/>
+        </p:spPr>
+        <p:style>
+          <a:lnRef idx="1">
+            <a:schemeClr val="accent1"/>
+          </a:lnRef>
+          <a:fillRef idx="3">
+            <a:schemeClr val="accent1"/>
+          </a:fillRef>
+          <a:effectRef idx="2">
+            <a:schemeClr val="accent1"/>
+          </a:effectRef>
+          <a:fontRef idx="minor">
+            <a:schemeClr val="lt1"/>
+          </a:fontRef>
+        </p:style>
+        <p:txBody>
+          <a:bodyPr rtlCol="0" anchor="ctr"/>
+          <a:lstStyle/>
+          <a:p>
+            <a:pPr algn="ctr"/>
+          </a:p>
+        </p:txBody>
+      </p:sp>
+      <p:sp>
+        <p:nvSpPr>
+          <p:cNvPr id="8" name="TextBox 7"/>
+          <p:cNvSpPr txBox="1"/>
+          <p:nvPr/>
+        </p:nvSpPr>
+        <p:spPr>
+          <a:xfrm>
+            <a:off x="8152180" y="2011680"/>
+            <a:ext cx="3472586" cy="1828800"/>
+          </a:xfrm>
+          <a:prstGeom prst="rect">
+            <a:avLst/>
+          </a:prstGeom>
+          <a:noFill/>
+        </p:spPr>
+        <p:txBody>
+          <a:bodyPr wrap="square" lIns="0" rIns="0" tIns="0" bIns="0">
+            <a:spAutoFit/>
+          </a:bodyPr>
+          <a:lstStyle/>
+          <a:p>
+            <a:pPr>
+              <a:spcBef>
+                <a:spcPts val="0"/>
+              </a:spcBef>
+              <a:spcAft>
+                <a:spcPts val="700"/>
+              </a:spcAft>
+            </a:pPr>
+            <a:r>
+              <a:rPr sz="1050" b="0" i="0">
+                <a:solidFill>
+                  <a:srgbClr val="17549E"/>
+                </a:solidFill>
+                <a:latin typeface="Consolas"/>
+              </a:rPr>
+              <a:t>INSTITUTIONAL CONFIDENCE VS. INTERPERSONAL TRUST</a:t>
+            </a:r>
+          </a:p>
+          <a:p>
+            <a:pPr>
+              <a:lnSpc>
+                <a:spcPct val="130000"/>
+              </a:lnSpc>
+              <a:spcBef>
+                <a:spcPts val="0"/>
+              </a:spcBef>
+              <a:spcAft>
+                <a:spcPts val="0"/>
+              </a:spcAft>
+            </a:pPr>
+            <a:r>
+              <a:rPr sz="1100" b="0" i="0">
+                <a:solidFill>
+                  <a:srgbClr val="5A6068"/>
+                </a:solidFill>
+                <a:latin typeface="Calibri"/>
+              </a:rPr>
+              <a:t>The SDG's Goal 16 trust series measure satisfaction with public services, perceived bribery, and perceived inclusiveness in decision-making — institutional confidence, not interpersonal trust ('most people can be trusted'). These are conceptually distinct. The commentarymust be explicit that SDG16 is not a direct analogue for the ESS trust item.</a:t>
+            </a:r>
+          </a:p>
+        </p:txBody>
+      </p:sp>
+      <p:sp>
+        <p:nvSpPr>
+          <p:cNvPr id="9" name="Rectangle 8"/>
+          <p:cNvSpPr/>
+          <p:nvPr/>
+        </p:nvSpPr>
+        <p:spPr>
+          <a:xfrm>
+            <a:off x="566928" y="4069080"/>
+            <a:ext cx="3472586" cy="25400"/>
+          </a:xfrm>
+          <a:prstGeom prst="rect">
+            <a:avLst/>
+          </a:prstGeom>
+          <a:solidFill>
+            <a:srgbClr val="17549E"/>
+          </a:solidFill>
+          <a:ln>
+            <a:noFill/>
+          </a:ln>
+          <a:effectLst/>
+        </p:spPr>
+        <p:style>
+          <a:lnRef idx="1">
+            <a:schemeClr val="accent1"/>
+          </a:lnRef>
+          <a:fillRef idx="3">
+            <a:schemeClr val="accent1"/>
+          </a:fillRef>
+          <a:effectRef idx="2">
+            <a:schemeClr val="accent1"/>
+          </a:effectRef>
+          <a:fontRef idx="minor">
+            <a:schemeClr val="lt1"/>
+          </a:fontRef>
+        </p:style>
+        <p:txBody>
+          <a:bodyPr rtlCol="0" anchor="ctr"/>
+          <a:lstStyle/>
+          <a:p>
+            <a:pPr algn="ctr"/>
+          </a:p>
+        </p:txBody>
+      </p:sp>
+      <p:sp>
+        <p:nvSpPr>
+          <p:cNvPr id="10" name="TextBox 9"/>
+          <p:cNvSpPr txBox="1"/>
+          <p:nvPr/>
+        </p:nvSpPr>
+        <p:spPr>
+          <a:xfrm>
+            <a:off x="566928" y="4251960"/>
+            <a:ext cx="3472586" cy="1828800"/>
+          </a:xfrm>
+          <a:prstGeom prst="rect">
+            <a:avLst/>
+          </a:prstGeom>
+          <a:noFill/>
+        </p:spPr>
+        <p:txBody>
+          <a:bodyPr wrap="square" lIns="0" rIns="0" tIns="0" bIns="0">
+            <a:spAutoFit/>
+          </a:bodyPr>
+          <a:lstStyle/>
+          <a:p>
+            <a:pPr>
+              <a:spcBef>
+                <a:spcPts val="0"/>
+              </a:spcBef>
+              <a:spcAft>
+                <a:spcPts val="700"/>
+              </a:spcAft>
+            </a:pPr>
+            <a:r>
+              <a:rPr sz="1050" b="0" i="0">
+                <a:solidFill>
+                  <a:srgbClr val="17549E"/>
+                </a:solidFill>
+                <a:latin typeface="Consolas"/>
+              </a:rPr>
+              <a:t>THREE FAILURE MODES FRAME</a:t>
+            </a:r>
+          </a:p>
+          <a:p>
+            <a:pPr>
+              <a:lnSpc>
+                <a:spcPct val="130000"/>
+              </a:lnSpc>
+              <a:spcBef>
+                <a:spcPts val="0"/>
+              </a:spcBef>
+              <a:spcAft>
+                <a:spcPts val="0"/>
+              </a:spcAft>
+            </a:pPr>
+            <a:r>
+              <a:rPr sz="1100" b="0" i="0">
+                <a:solidFill>
+                  <a:srgbClr val="5A6068"/>
+                </a:solidFill>
+                <a:latin typeface="Calibri"/>
+              </a:rPr>
+              <a:t>The narrative positions education's, health's, and trust's findings as evidence of three different ways frameworks lose sight of domains that matter: wrong construct, saturated variable, coverage gap. This is a meta-finding about measurement, not about the domains themselves.</a:t>
+            </a:r>
+          </a:p>
+        </p:txBody>
+      </p:sp>
+    </p:spTree>
+  </p:cSld>
+  <p:clrMapOvr>
+    <a:masterClrMapping/>
+  </p:clrMapOvr>
+</p:sld>
+</file>
+
+<file path=ppt/slides/slide31.xml><?xml version="1.0" encoding="utf-8"?>
+<p:sld xmlns:a="http://schemas.openxmlformats.org/drawingml/2006/main" xmlns:p="http://schemas.openxmlformats.org/presentationml/2006/main" xmlns:r="http://schemas.openxmlformats.org/officeDocument/2006/relationships">
+  <p:cSld>
+    <p:bg>
+      <p:bgPr>
+        <a:solidFill>
+          <a:srgbClr val="14171C"/>
+        </a:solidFill>
+        <a:effectLst/>
+      </p:bgPr>
+    </p:bg>
+    <p:spTree>
+      <p:nvGrpSpPr>
+        <p:cNvPr id="1" name=""/>
+        <p:cNvGrpSpPr/>
+        <p:nvPr/>
+      </p:nvGrpSpPr>
+      <p:grpSpPr/>
+      <p:sp>
+        <p:nvSpPr>
+          <p:cNvPr id="2" name="TextBox 1"/>
+          <p:cNvSpPr txBox="1"/>
+          <p:nvPr/>
+        </p:nvSpPr>
+        <p:spPr>
+          <a:xfrm>
+            <a:off x="566928" y="2743200"/>
+            <a:ext cx="8229600" cy="1371600"/>
+          </a:xfrm>
+          <a:prstGeom prst="rect">
+            <a:avLst/>
+          </a:prstGeom>
+          <a:noFill/>
+        </p:spPr>
+        <p:txBody>
+          <a:bodyPr wrap="square" lIns="0" rIns="0" tIns="0" bIns="0">
+            <a:spAutoFit/>
+          </a:bodyPr>
+          <a:lstStyle/>
+          <a:p>
+            <a:pPr>
+              <a:spcBef>
+                <a:spcPts val="0"/>
+              </a:spcBef>
+              <a:spcAft>
+                <a:spcPts val="1000"/>
+              </a:spcAft>
+            </a:pPr>
+            <a:r>
+              <a:rPr sz="4000" b="0" i="0">
+                <a:solidFill>
+                  <a:srgbClr val="FCFCFB"/>
+                </a:solidFill>
+                <a:latin typeface="Georgia"/>
+              </a:rPr>
+              <a:t>Evidence appendix</a:t>
+            </a:r>
+          </a:p>
+          <a:p>
+            <a:pPr>
+              <a:lnSpc>
+                <a:spcPct val="135000"/>
+              </a:lnSpc>
+              <a:spcBef>
+                <a:spcPts val="0"/>
+              </a:spcBef>
+              <a:spcAft>
+                <a:spcPts val="0"/>
+              </a:spcAft>
+            </a:pPr>
+            <a:r>
+              <a:rPr sz="1400" b="0" i="0">
+                <a:solidFill>
+                  <a:srgbClr val="9AA4B0"/>
+                </a:solidFill>
+                <a:latin typeface="Calibri"/>
+              </a:rPr>
+              <a:t>Everything the three acts rest on but do not carry. In submission these become supplementary material.</a:t>
+            </a:r>
+          </a:p>
+        </p:txBody>
+      </p:sp>
+    </p:spTree>
+  </p:cSld>
+  <p:clrMapOvr>
+    <a:masterClrMapping/>
+  </p:clrMapOvr>
+</p:sld>
+</file>
+
 <file path=ppt/slides/slide4.xml><?xml version="1.0" encoding="utf-8"?>
 <p:sld xmlns:a="http://schemas.openxmlformats.org/drawingml/2006/main" xmlns:p="http://schemas.openxmlformats.org/presentationml/2006/main" xmlns:r="http://schemas.openxmlformats.org/officeDocument/2006/relationships">
   <p:cSld>
@@ -10822,7 +12260,7 @@
                 </a:solidFill>
                 <a:latin typeface="Consolas"/>
               </a:rPr>
-              <a:t>ALL THREE MATTER</a:t>
+              <a:t>FRAMEWORK COMPARISON</a:t>
             </a:r>
           </a:p>
         </p:txBody>
@@ -10867,7 +12305,7 @@
                 </a:solidFill>
                 <a:latin typeface="Georgia"/>
               </a:rPr>
-              <a:t>Education, health, and social trust all significantly predict life satisfaction</a:t>
+              <a:t>How the frameworks compare on detection, budget-match, and per-indicator basis</a:t>
             </a:r>
           </a:p>
         </p:txBody>
@@ -10912,7 +12350,7 @@
                 </a:solidFill>
                 <a:latin typeface="Calibri"/>
               </a:rPr>
-              <a:t>In the European Social Survey, where all three are measured at the individual level, all three are significant in the majority of countries. But which framework can see all three? Which sees only some? The answer depends on three different failure modes.</a:t>
+              <a:t>Before we ask what matters, we need to understand how these frameworks differ. The SDG database detects significance in more countries (71% raw) than the HDI (51% raw), but when both are given the same budget — five indicators across 42 countries — the HDI's edge becomes real but modest (30% vs 51% among those 42 countries). When normalized per indicator, the HDI dominates: most SDG series sit in the zero-significance tail, while HDI indicators cluster higher. This is context we need before asking which components matter most.</a:t>
             </a:r>
           </a:p>
         </p:txBody>
@@ -10961,7 +12399,7 @@
       </p:sp>
       <p:pic>
         <p:nvPicPr>
-          <p:cNvPr id="6" name="Picture 5" descr="domains_at_levels_comparison.png"/>
+          <p:cNvPr id="6" name="Picture 5" descr="framework_three_comparisons.png"/>
           <p:cNvPicPr>
             <a:picLocks noChangeAspect="1"/>
           </p:cNvPicPr>
@@ -10975,8 +12413,8 @@
         </p:blipFill>
         <p:spPr>
           <a:xfrm>
-            <a:off x="5120640" y="2028335"/>
-            <a:ext cx="6537960" cy="2334985"/>
+            <a:off x="5120640" y="2093715"/>
+            <a:ext cx="6537960" cy="2204226"/>
           </a:xfrm>
           <a:prstGeom prst="rect">
             <a:avLst/>
@@ -11023,7 +12461,7 @@
                 </a:solidFill>
                 <a:latin typeface="Calibri"/>
               </a:rPr>
-              <a:t>% of countries where each domain significantly predicts wellbeing at levels. ESS: 36 countries. HDI: 150 countries. SDG: country-indicator pairs.</a:t>
+              <a:t>How SDG and HDI frameworks compare on detection rate, budget-matched analysis, and per-indicator significance distribution.</a:t>
             </a:r>
           </a:p>
         </p:txBody>

--- a/deck/Measured_Where_It_Varies.pptx
+++ b/deck/Measured_Where_It_Varies.pptx
@@ -36,6 +36,11 @@
     <p:sldId id="284" r:id="rId35"/>
     <p:sldId id="285" r:id="rId36"/>
     <p:sldId id="286" r:id="rId37"/>
+    <p:sldId id="287" r:id="rId38"/>
+    <p:sldId id="288" r:id="rId39"/>
+    <p:sldId id="289" r:id="rId40"/>
+    <p:sldId id="290" r:id="rId41"/>
+    <p:sldId id="291" r:id="rId42"/>
   </p:sldIdLst>
   <p:sldSz cx="12191695" cy="6858000" type="screen4x3"/>
   <p:notesSz cx="6858000" cy="9144000"/>
@@ -3297,7 +3302,7 @@
                 </a:solidFill>
                 <a:latin typeface="Georgia"/>
               </a:rPr>
-              <a:t>A commentary in three acts. What tracks individual lived experience when development is measured: education, health, and social trust. And why the frameworks built to monitor development systematically miss some of them.</a:t>
+              <a:t>Development indicators predict wellbeing between countries and not within them. Working through why: which domains actually track lived experience, and which of them the frameworks built to monitor development are able to see.</a:t>
             </a:r>
           </a:p>
         </p:txBody>
@@ -3361,7 +3366,7 @@
                 </a:solidFill>
                 <a:latin typeface="Consolas"/>
               </a:rPr>
-              <a:t>SDG: 42 countries, 661 series · HDI × World Happiness Report: 151 countries, 2011–2023 · Subnational HDI &amp; sub-indices: 239 regions · European Social Survey: 36 countries, 351,023 respondents, rounds 5–11 (2010–2023)</a:t>
+              <a:t>SDG: 42 countries, 661 series · HDI × World Happiness Report: 150 countries, 2011–2023 · Subnational HDI: 167 regions · European Social Survey: 36 countries, 351,023 respondents, rounds 5–11 (2010–2023) · All tests Benjamini–Hochberg FDR at q &lt; .05</a:t>
             </a:r>
           </a:p>
         </p:txBody>
@@ -3429,7 +3434,7 @@
                 </a:solidFill>
                 <a:latin typeface="Consolas"/>
               </a:rPr>
-              <a:t>ALL THREE MATTER</a:t>
+              <a:t>INSIDE THE SDGS</a:t>
             </a:r>
           </a:p>
         </p:txBody>
@@ -3474,7 +3479,7 @@
                 </a:solidFill>
                 <a:latin typeface="Georgia"/>
               </a:rPr>
-              <a:t>Education, health, and social trust all significantly predict life satisfaction</a:t>
+              <a:t>Health ranks 4th of 17 goals; education ranks 12th</a:t>
             </a:r>
           </a:p>
         </p:txBody>
@@ -3513,13 +3518,57 @@
               </a:spcAft>
             </a:pPr>
             <a:r>
-              <a:rPr sz="1150" b="0" i="0">
+              <a:rPr sz="1050" b="0" i="0">
                 <a:solidFill>
                   <a:srgbClr val="5A6068"/>
                 </a:solidFill>
                 <a:latin typeface="Calibri"/>
               </a:rPr>
-              <a:t>In the European Social Survey, where all three are measured at the individual level, all three are significant in the majority of countries. But which framework can see all three? Which sees only some? The answer depends on three different failure modes.</a:t>
+              <a:t>The same question of the SDG side. Pooled within each goal, health (Goal 3) reaches 11.5% of country-indicator pairs — fourth of seventeen, and first among the goals with substantive coverage. Health also dominates the individual-series ranking: 16 of the 25 most predictive series in the whole database fall under Goal 3, and they are survival measures — infant and under-five mortality, stunting, neonatal mortality, sanitation, drinking water.</a:t>
+            </a:r>
+          </a:p>
+          <a:p>
+            <a:pPr>
+              <a:lnSpc>
+                <a:spcPct val="132000"/>
+              </a:lnSpc>
+              <a:spcBef>
+                <a:spcPts val="0"/>
+              </a:spcBef>
+              <a:spcAft>
+                <a:spcPts val="1100"/>
+              </a:spcAft>
+            </a:pPr>
+            <a:r>
+              <a:rPr sz="1050" b="0" i="0">
+                <a:solidFill>
+                  <a:srgbClr val="5A6068"/>
+                </a:solidFill>
+                <a:latin typeface="Calibri"/>
+              </a:rPr>
+              <a:t>Education comes twelfth, at 3.3%. Taken at face value that says education barely matters for wellbeing — which contradicts the HDI, where schooling is the strongest component there is. Both cannot be right, and the next slide is why.</a:t>
+            </a:r>
+          </a:p>
+          <a:p>
+            <a:pPr>
+              <a:lnSpc>
+                <a:spcPct val="132000"/>
+              </a:lnSpc>
+              <a:spcBef>
+                <a:spcPts val="0"/>
+              </a:spcBef>
+              <a:spcAft>
+                <a:spcPts val="1100"/>
+              </a:spcAft>
+            </a:pPr>
+            <a:r>
+              <a:rPr sz="1050" b="0" i="0">
+                <a:solidFill>
+                  <a:srgbClr val="5A6068"/>
+                </a:solidFill>
+                <a:latin typeface="Calibri"/>
+              </a:rPr>
+              <a:t>One caveat worth stating here rather than later: Goal 16 is where anything trust-shaped would live, and it comes fifteenth at 1.5%. But its thirteen trust-adjacent series measure satisfaction with public services, perceived bribery, and perceived inclusiveness in decision-making. That is confidence in institutions, not trust in other people. It is a different construct, and the low rank should not be read as evidence about interpersonal trust.</a:t>
             </a:r>
           </a:p>
         </p:txBody>
@@ -3568,7 +3617,7 @@
       </p:sp>
       <p:pic>
         <p:nvPicPr>
-          <p:cNvPr id="6" name="Picture 5" descr="domains_at_levels_comparison.png"/>
+          <p:cNvPr id="6" name="Picture 5" descr="sdg_indicator_top20.png"/>
           <p:cNvPicPr>
             <a:picLocks noChangeAspect="1"/>
           </p:cNvPicPr>
@@ -3582,8 +3631,8 @@
         </p:blipFill>
         <p:spPr>
           <a:xfrm>
-            <a:off x="5120640" y="2028335"/>
-            <a:ext cx="6537960" cy="2334985"/>
+            <a:off x="5279547" y="658368"/>
+            <a:ext cx="6220145" cy="5074920"/>
           </a:xfrm>
           <a:prstGeom prst="rect">
             <a:avLst/>
@@ -3630,7 +3679,7 @@
                 </a:solidFill>
                 <a:latin typeface="Calibri"/>
               </a:rPr>
-              <a:t>% of countries where each domain significantly predicts wellbeing at levels. ESS: 36 countries. HDI: 150 countries. SDG: country-indicator pairs.</a:t>
+              <a:t>The 25 most predictive individual SDG series. Sixteen are Goal 3 health indicators, nearly all of them survival measures.</a:t>
             </a:r>
           </a:p>
         </p:txBody>
@@ -3698,7 +3747,7 @@
                 </a:solidFill>
                 <a:latin typeface="Consolas"/>
               </a:rPr>
-              <a:t>RESULT 1 · EDUCATION</a:t>
+              <a:t>ACCESS CHECK</a:t>
             </a:r>
           </a:p>
         </p:txBody>
@@ -3743,7 +3792,7 @@
                 </a:solidFill>
                 <a:latin typeface="Georgia"/>
               </a:rPr>
-              <a:t>Significant in 92% of ESS countries, but only when measured as attainment</a:t>
+              <a:t>Education's 3.3% is a pooling artefact: access alone reaches 12.7%</a:t>
             </a:r>
           </a:p>
         </p:txBody>
@@ -3788,7 +3837,7 @@
                 </a:solidFill>
                 <a:latin typeface="Calibri"/>
               </a:rPr>
-              <a:t>Expected years of schooling predicts life satisfaction in 34% of HDI countries — the highest among the five HDI components, but still a minority. In the ESS individual data, education (measured as years attained) is significant in 92% of countries. The difference is not about the data; it is about which construct you count.</a:t>
+              <a:t>SDG4 is 35 series measuring six different things. Split them and they do not agree: access and participation 12.7%, financing 11.5%, attainment and completion 3.8%, equity and parity ratios 2.5%, infrastructure 2.0%, learning outcomes 0.9%.</a:t>
             </a:r>
           </a:p>
           <a:p>
@@ -3810,7 +3859,7 @@
                 </a:solidFill>
                 <a:latin typeface="Calibri"/>
               </a:rPr>
-              <a:t>The SDG framework's education goal is 35 indicators spanning access, attainment, equity (parity ratios), learning outcomes, infrastructure, and financing. Pooled, 3.3% of country-indicator pairs are significant. But access indicators alone (primary and secondary enrollment, completion rates) reach 12.7% — because they measure participation, the closest SDG analogue to HDI attainment. Parity ratios, learning outcomes, and infrastructure contribute little to wellbeing, so pooling them masks the signal from access.</a:t>
+              <a:t>Parity ratios are 18 of the 35 series. Pooling weights every series equally, so the half of the goal that carries no wellbeing signal drags the whole goal below the part that does. Unpooled, education would rank third among the seventeen goals rather than twelfth — and it would agree with the HDI instead of contradicting it.</a:t>
             </a:r>
           </a:p>
         </p:txBody>
@@ -3859,7 +3908,7 @@
       </p:sp>
       <p:pic>
         <p:nvPicPr>
-          <p:cNvPr id="6" name="Picture 5" descr="education_levels_comparison.png"/>
+          <p:cNvPr id="6" name="Picture 5" descr="sdg4_unpooled.png"/>
           <p:cNvPicPr>
             <a:picLocks noChangeAspect="1"/>
           </p:cNvPicPr>
@@ -3873,8 +3922,8 @@
         </p:blipFill>
         <p:spPr>
           <a:xfrm>
-            <a:off x="5120640" y="1412748"/>
-            <a:ext cx="6537960" cy="3566160"/>
+            <a:off x="5120640" y="1103208"/>
+            <a:ext cx="6537960" cy="4185240"/>
           </a:xfrm>
           <a:prstGeom prst="rect">
             <a:avLst/>
@@ -3921,7 +3970,7 @@
                 </a:solidFill>
                 <a:latin typeface="Calibri"/>
               </a:rPr>
-              <a:t>Education's R² (% of countries significant at levels) across three frameworks. SDG4's pooled rate (3.3%) includes all 35 constructs; access alone reaches 12.7%.</a:t>
+              <a:t>SDG4 split by construct. Access and participation (12.7%) against equity and parity ratios (2.5%), infrastructure (2.0%) and learning outcomes (0.9%).</a:t>
             </a:r>
           </a:p>
         </p:txBody>
@@ -3940,7 +3989,7 @@
     <p:bg>
       <p:bgPr>
         <a:solidFill>
-          <a:srgbClr val="FCFCFB"/>
+          <a:srgbClr val="E8EBEF"/>
         </a:solidFill>
         <a:effectLst/>
       </p:bgPr>
@@ -3954,56 +4003,100 @@
       <p:grpSpPr/>
       <p:sp>
         <p:nvSpPr>
-          <p:cNvPr id="2" name="TextBox 1"/>
-          <p:cNvSpPr txBox="1"/>
-          <p:nvPr/>
-        </p:nvSpPr>
-        <p:spPr>
-          <a:xfrm>
-            <a:off x="566928" y="502920"/>
-            <a:ext cx="4160520" cy="274320"/>
-          </a:xfrm>
-          <a:prstGeom prst="rect">
-            <a:avLst/>
-          </a:prstGeom>
-          <a:noFill/>
-        </p:spPr>
-        <p:txBody>
-          <a:bodyPr wrap="square" lIns="0" rIns="0" tIns="0" bIns="0">
-            <a:spAutoFit/>
-          </a:bodyPr>
-          <a:lstStyle/>
-          <a:p>
-            <a:pPr>
-              <a:spcBef>
-                <a:spcPts val="0"/>
-              </a:spcBef>
-              <a:spcAft>
-                <a:spcPts val="0"/>
-              </a:spcAft>
-            </a:pPr>
-            <a:r>
-              <a:rPr sz="1000" b="0" i="0">
-                <a:solidFill>
-                  <a:srgbClr val="A63A30"/>
+          <p:cNvPr id="2" name="Rectangle 1"/>
+          <p:cNvSpPr/>
+          <p:nvPr/>
+        </p:nvSpPr>
+        <p:spPr>
+          <a:xfrm>
+            <a:off x="566928" y="2103120"/>
+            <a:ext cx="54864" cy="2377440"/>
+          </a:xfrm>
+          <a:prstGeom prst="rect">
+            <a:avLst/>
+          </a:prstGeom>
+          <a:solidFill>
+            <a:srgbClr val="17549E"/>
+          </a:solidFill>
+          <a:ln>
+            <a:noFill/>
+          </a:ln>
+          <a:effectLst/>
+        </p:spPr>
+        <p:style>
+          <a:lnRef idx="1">
+            <a:schemeClr val="accent1"/>
+          </a:lnRef>
+          <a:fillRef idx="3">
+            <a:schemeClr val="accent1"/>
+          </a:fillRef>
+          <a:effectRef idx="2">
+            <a:schemeClr val="accent1"/>
+          </a:effectRef>
+          <a:fontRef idx="minor">
+            <a:schemeClr val="lt1"/>
+          </a:fontRef>
+        </p:style>
+        <p:txBody>
+          <a:bodyPr rtlCol="0" anchor="ctr"/>
+          <a:lstStyle/>
+          <a:p>
+            <a:pPr algn="ctr"/>
+          </a:p>
+        </p:txBody>
+      </p:sp>
+      <p:sp>
+        <p:nvSpPr>
+          <p:cNvPr id="3" name="TextBox 2"/>
+          <p:cNvSpPr txBox="1"/>
+          <p:nvPr/>
+        </p:nvSpPr>
+        <p:spPr>
+          <a:xfrm>
+            <a:off x="914400" y="1600200"/>
+            <a:ext cx="8686800" cy="274320"/>
+          </a:xfrm>
+          <a:prstGeom prst="rect">
+            <a:avLst/>
+          </a:prstGeom>
+          <a:noFill/>
+        </p:spPr>
+        <p:txBody>
+          <a:bodyPr wrap="square" lIns="0" rIns="0" tIns="0" bIns="0">
+            <a:spAutoFit/>
+          </a:bodyPr>
+          <a:lstStyle/>
+          <a:p>
+            <a:pPr>
+              <a:spcBef>
+                <a:spcPts val="0"/>
+              </a:spcBef>
+              <a:spcAft>
+                <a:spcPts val="0"/>
+              </a:spcAft>
+            </a:pPr>
+            <a:r>
+              <a:rPr sz="1100" b="0" i="0">
+                <a:solidFill>
+                  <a:srgbClr val="17549E"/>
                 </a:solidFill>
                 <a:latin typeface="Consolas"/>
               </a:rPr>
-              <a:t>ACCESS CHECK · WHY EDUCATION'S RANK SWINGS</a:t>
-            </a:r>
-          </a:p>
-        </p:txBody>
-      </p:sp>
-      <p:sp>
-        <p:nvSpPr>
-          <p:cNvPr id="3" name="TextBox 2"/>
-          <p:cNvSpPr txBox="1"/>
-          <p:nvPr/>
-        </p:nvSpPr>
-        <p:spPr>
-          <a:xfrm>
-            <a:off x="566928" y="914400"/>
-            <a:ext cx="4160520" cy="1371600"/>
+              <a:t>WHERE ACT II LEAVES US</a:t>
+            </a:r>
+          </a:p>
+        </p:txBody>
+      </p:sp>
+      <p:sp>
+        <p:nvSpPr>
+          <p:cNvPr id="4" name="TextBox 3"/>
+          <p:cNvSpPr txBox="1"/>
+          <p:nvPr/>
+        </p:nvSpPr>
+        <p:spPr>
+          <a:xfrm>
+            <a:off x="914400" y="2148840"/>
+            <a:ext cx="9509760" cy="2926080"/>
           </a:xfrm>
           <a:prstGeom prst="rect">
             <a:avLst/>
@@ -4018,7 +4111,7 @@
           <a:p>
             <a:pPr>
               <a:lnSpc>
-                <a:spcPct val="108000"/>
+                <a:spcPct val="135000"/>
               </a:lnSpc>
               <a:spcBef>
                 <a:spcPts val="0"/>
@@ -4028,169 +4121,13 @@
               </a:spcAft>
             </a:pPr>
             <a:r>
-              <a:rPr sz="2300" b="0" i="0">
+              <a:rPr sz="2100" b="0" i="0">
                 <a:solidFill>
                   <a:srgbClr val="14171C"/>
                 </a:solidFill>
                 <a:latin typeface="Georgia"/>
               </a:rPr>
-              <a:t>The difference between measuring attainment and measuring parity</a:t>
-            </a:r>
-          </a:p>
-        </p:txBody>
-      </p:sp>
-      <p:sp>
-        <p:nvSpPr>
-          <p:cNvPr id="4" name="TextBox 3"/>
-          <p:cNvSpPr txBox="1"/>
-          <p:nvPr/>
-        </p:nvSpPr>
-        <p:spPr>
-          <a:xfrm>
-            <a:off x="566928" y="2331720"/>
-            <a:ext cx="4160520" cy="3840480"/>
-          </a:xfrm>
-          <a:prstGeom prst="rect">
-            <a:avLst/>
-          </a:prstGeom>
-          <a:noFill/>
-        </p:spPr>
-        <p:txBody>
-          <a:bodyPr wrap="square" lIns="0" rIns="0" tIns="0" bIns="0">
-            <a:spAutoFit/>
-          </a:bodyPr>
-          <a:lstStyle/>
-          <a:p>
-            <a:pPr>
-              <a:lnSpc>
-                <a:spcPct val="132000"/>
-              </a:lnSpc>
-              <a:spcBef>
-                <a:spcPts val="0"/>
-              </a:spcBef>
-              <a:spcAft>
-                <a:spcPts val="1100"/>
-              </a:spcAft>
-            </a:pPr>
-            <a:r>
-              <a:rPr sz="1150" b="0" i="0">
-                <a:solidFill>
-                  <a:srgbClr val="5A6068"/>
-                </a:solidFill>
-                <a:latin typeface="Calibri"/>
-              </a:rPr>
-              <a:t>When the SDG framework pools constructs, it weights all equally by series count. Parity ratios are 18 of 35 series but carry almost no signal for wellbeing. Learning outcomes (6 series, 0.9% significant), infrastructure (7 series, 2.0%), and financing (1 series, 11.5%) together drive the pooled rate below what access alone achieves. This is not a discovery about education; it is a mechanical artifact of construction.</a:t>
-            </a:r>
-          </a:p>
-        </p:txBody>
-      </p:sp>
-      <p:sp>
-        <p:nvSpPr>
-          <p:cNvPr id="5" name="TextBox 4"/>
-          <p:cNvSpPr txBox="1"/>
-          <p:nvPr/>
-        </p:nvSpPr>
-        <p:spPr>
-          <a:xfrm>
-            <a:off x="11338560" y="6263640"/>
-            <a:ext cx="548640" cy="274320"/>
-          </a:xfrm>
-          <a:prstGeom prst="rect">
-            <a:avLst/>
-          </a:prstGeom>
-          <a:noFill/>
-        </p:spPr>
-        <p:txBody>
-          <a:bodyPr wrap="square" lIns="0" rIns="0" tIns="0" bIns="0">
-            <a:spAutoFit/>
-          </a:bodyPr>
-          <a:lstStyle/>
-          <a:p>
-            <a:pPr algn="r">
-              <a:spcBef>
-                <a:spcPts val="0"/>
-              </a:spcBef>
-              <a:spcAft>
-                <a:spcPts val="0"/>
-              </a:spcAft>
-            </a:pPr>
-            <a:r>
-              <a:rPr sz="1100" b="0" i="0">
-                <a:solidFill>
-                  <a:srgbClr val="868D96"/>
-                </a:solidFill>
-                <a:latin typeface="Consolas"/>
-              </a:rPr>
-              <a:t>II</a:t>
-            </a:r>
-          </a:p>
-        </p:txBody>
-      </p:sp>
-      <p:pic>
-        <p:nvPicPr>
-          <p:cNvPr id="6" name="Picture 5" descr="sdg4_unpooled.png"/>
-          <p:cNvPicPr>
-            <a:picLocks noChangeAspect="1"/>
-          </p:cNvPicPr>
-          <p:nvPr/>
-        </p:nvPicPr>
-        <p:blipFill>
-          <a:blip r:embed="rId2"/>
-          <a:stretch>
-            <a:fillRect/>
-          </a:stretch>
-        </p:blipFill>
-        <p:spPr>
-          <a:xfrm>
-            <a:off x="5120640" y="1103208"/>
-            <a:ext cx="6537960" cy="4185240"/>
-          </a:xfrm>
-          <a:prstGeom prst="rect">
-            <a:avLst/>
-          </a:prstGeom>
-        </p:spPr>
-      </p:pic>
-      <p:sp>
-        <p:nvSpPr>
-          <p:cNvPr id="7" name="TextBox 6"/>
-          <p:cNvSpPr txBox="1"/>
-          <p:nvPr/>
-        </p:nvSpPr>
-        <p:spPr>
-          <a:xfrm>
-            <a:off x="5120640" y="5897880"/>
-            <a:ext cx="6537960" cy="731520"/>
-          </a:xfrm>
-          <a:prstGeom prst="rect">
-            <a:avLst/>
-          </a:prstGeom>
-          <a:noFill/>
-        </p:spPr>
-        <p:txBody>
-          <a:bodyPr wrap="square" lIns="0" rIns="0" tIns="0" bIns="0">
-            <a:spAutoFit/>
-          </a:bodyPr>
-          <a:lstStyle/>
-          <a:p>
-            <a:pPr>
-              <a:lnSpc>
-                <a:spcPct val="125000"/>
-              </a:lnSpc>
-              <a:spcBef>
-                <a:spcPts val="0"/>
-              </a:spcBef>
-              <a:spcAft>
-                <a:spcPts val="0"/>
-              </a:spcAft>
-            </a:pPr>
-            <a:r>
-              <a:rPr sz="900" b="0" i="0">
-                <a:solidFill>
-                  <a:srgbClr val="868D96"/>
-                </a:solidFill>
-                <a:latin typeface="Calibri"/>
-              </a:rPr>
-              <a:t>SDG4 by construct: access and participation (12.7%) vs. equity/parity ratios (2.5%), learning outcomes (0.9%), and others.</a:t>
+              <a:t>Health and education are what the frameworks can see at the levels. Health registers wherever it is measured somewhere that still varies; education registers only when the construct being counted is access. That is two domains — and it is everything these frameworks are able to test.</a:t>
             </a:r>
           </a:p>
         </p:txBody>
@@ -4209,7 +4146,7 @@
     <p:bg>
       <p:bgPr>
         <a:solidFill>
-          <a:srgbClr val="FCFCFB"/>
+          <a:srgbClr val="14171C"/>
         </a:solidFill>
         <a:effectLst/>
       </p:bgPr>
@@ -4229,21 +4166,261 @@
         </p:nvSpPr>
         <p:spPr>
           <a:xfrm>
-            <a:off x="566928" y="502920"/>
-            <a:ext cx="4160520" cy="274320"/>
-          </a:xfrm>
-          <a:prstGeom prst="rect">
-            <a:avLst/>
-          </a:prstGeom>
-          <a:noFill/>
-        </p:spPr>
-        <p:txBody>
-          <a:bodyPr wrap="square" lIns="0" rIns="0" tIns="0" bIns="0">
-            <a:spAutoFit/>
-          </a:bodyPr>
-          <a:lstStyle/>
-          <a:p>
-            <a:pPr>
+            <a:off x="7680960" y="822960"/>
+            <a:ext cx="3840480" cy="4114800"/>
+          </a:xfrm>
+          <a:prstGeom prst="rect">
+            <a:avLst/>
+          </a:prstGeom>
+          <a:noFill/>
+        </p:spPr>
+        <p:txBody>
+          <a:bodyPr wrap="square" lIns="0" rIns="0" tIns="0" bIns="0">
+            <a:spAutoFit/>
+          </a:bodyPr>
+          <a:lstStyle/>
+          <a:p>
+            <a:pPr algn="r">
+              <a:spcBef>
+                <a:spcPts val="0"/>
+              </a:spcBef>
+              <a:spcAft>
+                <a:spcPts val="0"/>
+              </a:spcAft>
+            </a:pPr>
+            <a:r>
+              <a:rPr sz="12000" b="0" i="0">
+                <a:solidFill>
+                  <a:srgbClr val="2A3340"/>
+                </a:solidFill>
+                <a:latin typeface="Georgia"/>
+              </a:rPr>
+              <a:t>II-a</a:t>
+            </a:r>
+          </a:p>
+        </p:txBody>
+      </p:sp>
+      <p:sp>
+        <p:nvSpPr>
+          <p:cNvPr id="3" name="Rectangle 2"/>
+          <p:cNvSpPr/>
+          <p:nvPr/>
+        </p:nvSpPr>
+        <p:spPr>
+          <a:xfrm>
+            <a:off x="566928" y="1371600"/>
+            <a:ext cx="7315200" cy="25400"/>
+          </a:xfrm>
+          <a:prstGeom prst="rect">
+            <a:avLst/>
+          </a:prstGeom>
+          <a:solidFill>
+            <a:srgbClr val="C9D8EC"/>
+          </a:solidFill>
+          <a:ln>
+            <a:noFill/>
+          </a:ln>
+          <a:effectLst/>
+        </p:spPr>
+        <p:style>
+          <a:lnRef idx="1">
+            <a:schemeClr val="accent1"/>
+          </a:lnRef>
+          <a:fillRef idx="3">
+            <a:schemeClr val="accent1"/>
+          </a:fillRef>
+          <a:effectRef idx="2">
+            <a:schemeClr val="accent1"/>
+          </a:effectRef>
+          <a:fontRef idx="minor">
+            <a:schemeClr val="lt1"/>
+          </a:fontRef>
+        </p:style>
+        <p:txBody>
+          <a:bodyPr rtlCol="0" anchor="ctr"/>
+          <a:lstStyle/>
+          <a:p>
+            <a:pPr algn="ctr"/>
+          </a:p>
+        </p:txBody>
+      </p:sp>
+      <p:sp>
+        <p:nvSpPr>
+          <p:cNvPr id="4" name="TextBox 3"/>
+          <p:cNvSpPr txBox="1"/>
+          <p:nvPr/>
+        </p:nvSpPr>
+        <p:spPr>
+          <a:xfrm>
+            <a:off x="566928" y="960120"/>
+            <a:ext cx="5486400" cy="274320"/>
+          </a:xfrm>
+          <a:prstGeom prst="rect">
+            <a:avLst/>
+          </a:prstGeom>
+          <a:noFill/>
+        </p:spPr>
+        <p:txBody>
+          <a:bodyPr wrap="square" lIns="0" rIns="0" tIns="0" bIns="0">
+            <a:spAutoFit/>
+          </a:bodyPr>
+          <a:lstStyle/>
+          <a:p>
+            <a:pPr>
+              <a:spcBef>
+                <a:spcPts val="0"/>
+              </a:spcBef>
+              <a:spcAft>
+                <a:spcPts val="0"/>
+              </a:spcAft>
+            </a:pPr>
+            <a:r>
+              <a:rPr sz="1100" b="0" i="0">
+                <a:solidFill>
+                  <a:srgbClr val="C9D8EC"/>
+                </a:solidFill>
+                <a:latin typeface="Consolas"/>
+              </a:rPr>
+              <a:t>ACT II-A</a:t>
+            </a:r>
+          </a:p>
+        </p:txBody>
+      </p:sp>
+      <p:sp>
+        <p:nvSpPr>
+          <p:cNvPr id="5" name="TextBox 4"/>
+          <p:cNvSpPr txBox="1"/>
+          <p:nvPr/>
+        </p:nvSpPr>
+        <p:spPr>
+          <a:xfrm>
+            <a:off x="566928" y="1783080"/>
+            <a:ext cx="7223760" cy="1828800"/>
+          </a:xfrm>
+          <a:prstGeom prst="rect">
+            <a:avLst/>
+          </a:prstGeom>
+          <a:noFill/>
+        </p:spPr>
+        <p:txBody>
+          <a:bodyPr wrap="square" lIns="0" rIns="0" tIns="0" bIns="0">
+            <a:spAutoFit/>
+          </a:bodyPr>
+          <a:lstStyle/>
+          <a:p>
+            <a:pPr>
+              <a:lnSpc>
+                <a:spcPct val="102000"/>
+              </a:lnSpc>
+              <a:spcBef>
+                <a:spcPts val="0"/>
+              </a:spcBef>
+              <a:spcAft>
+                <a:spcPts val="0"/>
+              </a:spcAft>
+            </a:pPr>
+            <a:r>
+              <a:rPr sz="4000" b="0" i="0">
+                <a:solidFill>
+                  <a:srgbClr val="FCFCFB"/>
+                </a:solidFill>
+                <a:latin typeface="Georgia"/>
+              </a:rPr>
+              <a:t>Now measure the same domains on people</a:t>
+            </a:r>
+          </a:p>
+        </p:txBody>
+      </p:sp>
+      <p:sp>
+        <p:nvSpPr>
+          <p:cNvPr id="6" name="TextBox 5"/>
+          <p:cNvSpPr txBox="1"/>
+          <p:nvPr/>
+        </p:nvSpPr>
+        <p:spPr>
+          <a:xfrm>
+            <a:off x="566928" y="3886200"/>
+            <a:ext cx="6766560" cy="1463040"/>
+          </a:xfrm>
+          <a:prstGeom prst="rect">
+            <a:avLst/>
+          </a:prstGeom>
+          <a:noFill/>
+        </p:spPr>
+        <p:txBody>
+          <a:bodyPr wrap="square" lIns="0" rIns="0" tIns="0" bIns="0">
+            <a:spAutoFit/>
+          </a:bodyPr>
+          <a:lstStyle/>
+          <a:p>
+            <a:pPr>
+              <a:lnSpc>
+                <a:spcPct val="135000"/>
+              </a:lnSpc>
+              <a:spcBef>
+                <a:spcPts val="0"/>
+              </a:spcBef>
+              <a:spcAft>
+                <a:spcPts val="0"/>
+              </a:spcAft>
+            </a:pPr>
+            <a:r>
+              <a:rPr sz="1450" b="0" i="1">
+                <a:solidFill>
+                  <a:srgbClr val="9AA4B0"/>
+                </a:solidFill>
+                <a:latin typeface="Georgia"/>
+              </a:rPr>
+              <a:t>Everything so far is national aggregates against national aggregates. The ESS carries the same three domains asked directly of individuals — self-rated health, years of schooling, and whether most people can be trusted. Estimated across respondents and demeaned within country-round, so the association is within-country and within-year by construction.</a:t>
+            </a:r>
+          </a:p>
+        </p:txBody>
+      </p:sp>
+      <p:sp>
+        <p:nvSpPr>
+          <p:cNvPr id="7" name="TextBox 6"/>
+          <p:cNvSpPr txBox="1"/>
+          <p:nvPr/>
+        </p:nvSpPr>
+        <p:spPr>
+          <a:xfrm>
+            <a:off x="566928" y="5623560"/>
+            <a:ext cx="3503066" cy="914400"/>
+          </a:xfrm>
+          <a:prstGeom prst="rect">
+            <a:avLst/>
+          </a:prstGeom>
+          <a:noFill/>
+        </p:spPr>
+        <p:txBody>
+          <a:bodyPr wrap="square" lIns="0" rIns="0" tIns="0" bIns="0">
+            <a:spAutoFit/>
+          </a:bodyPr>
+          <a:lstStyle/>
+          <a:p>
+            <a:pPr>
+              <a:spcBef>
+                <a:spcPts val="0"/>
+              </a:spcBef>
+              <a:spcAft>
+                <a:spcPts val="400"/>
+              </a:spcAft>
+            </a:pPr>
+            <a:r>
+              <a:rPr sz="2200" b="0" i="0">
+                <a:solidFill>
+                  <a:srgbClr val="FCFCFB"/>
+                </a:solidFill>
+                <a:latin typeface="Consolas"/>
+              </a:rPr>
+              <a:t>100% / 97% / 89%</a:t>
+            </a:r>
+          </a:p>
+          <a:p>
+            <a:pPr>
+              <a:lnSpc>
+                <a:spcPct val="120000"/>
+              </a:lnSpc>
               <a:spcBef>
                 <a:spcPts val="0"/>
               </a:spcBef>
@@ -4254,40 +4431,59 @@
             <a:r>
               <a:rPr sz="1000" b="0" i="0">
                 <a:solidFill>
-                  <a:srgbClr val="A63A30"/>
+                  <a:srgbClr val="8A94A0"/>
+                </a:solidFill>
+                <a:latin typeface="Calibri"/>
+              </a:rPr>
+              <a:t>ESS countries significant: health, trust, education</a:t>
+            </a:r>
+          </a:p>
+        </p:txBody>
+      </p:sp>
+      <p:sp>
+        <p:nvSpPr>
+          <p:cNvPr id="8" name="TextBox 7"/>
+          <p:cNvSpPr txBox="1"/>
+          <p:nvPr/>
+        </p:nvSpPr>
+        <p:spPr>
+          <a:xfrm>
+            <a:off x="4344314" y="5623560"/>
+            <a:ext cx="3503066" cy="914400"/>
+          </a:xfrm>
+          <a:prstGeom prst="rect">
+            <a:avLst/>
+          </a:prstGeom>
+          <a:noFill/>
+        </p:spPr>
+        <p:txBody>
+          <a:bodyPr wrap="square" lIns="0" rIns="0" tIns="0" bIns="0">
+            <a:spAutoFit/>
+          </a:bodyPr>
+          <a:lstStyle/>
+          <a:p>
+            <a:pPr>
+              <a:spcBef>
+                <a:spcPts val="0"/>
+              </a:spcBef>
+              <a:spcAft>
+                <a:spcPts val="400"/>
+              </a:spcAft>
+            </a:pPr>
+            <a:r>
+              <a:rPr sz="2200" b="0" i="0">
+                <a:solidFill>
+                  <a:srgbClr val="FCFCFB"/>
                 </a:solidFill>
                 <a:latin typeface="Consolas"/>
               </a:rPr>
-              <a:t>RESULT 2 · HEALTH</a:t>
-            </a:r>
-          </a:p>
-        </p:txBody>
-      </p:sp>
-      <p:sp>
-        <p:nvSpPr>
-          <p:cNvPr id="3" name="TextBox 2"/>
-          <p:cNvSpPr txBox="1"/>
-          <p:nvPr/>
-        </p:nvSpPr>
-        <p:spPr>
-          <a:xfrm>
-            <a:off x="566928" y="914400"/>
-            <a:ext cx="4160520" cy="1371600"/>
-          </a:xfrm>
-          <a:prstGeom prst="rect">
-            <a:avLst/>
-          </a:prstGeom>
-          <a:noFill/>
-        </p:spPr>
-        <p:txBody>
-          <a:bodyPr wrap="square" lIns="0" rIns="0" tIns="0" bIns="0">
-            <a:spAutoFit/>
-          </a:bodyPr>
-          <a:lstStyle/>
+              <a:t>0.092 / 0.039 / 0.006</a:t>
+            </a:r>
+          </a:p>
           <a:p>
             <a:pPr>
               <a:lnSpc>
-                <a:spcPct val="108000"/>
+                <a:spcPct val="120000"/>
               </a:lnSpc>
               <a:spcBef>
                 <a:spcPts val="0"/>
@@ -4297,191 +4493,77 @@
               </a:spcAft>
             </a:pPr>
             <a:r>
-              <a:rPr sz="2300" b="0" i="0">
-                <a:solidFill>
-                  <a:srgbClr val="14171C"/>
-                </a:solidFill>
-                <a:latin typeface="Georgia"/>
-              </a:rPr>
-              <a:t>Significant in 100% of ESS countries, weak in the HDI, strong in the SDGs</a:t>
-            </a:r>
-          </a:p>
-        </p:txBody>
-      </p:sp>
-      <p:sp>
-        <p:nvSpPr>
-          <p:cNvPr id="4" name="TextBox 3"/>
-          <p:cNvSpPr txBox="1"/>
-          <p:nvPr/>
-        </p:nvSpPr>
-        <p:spPr>
-          <a:xfrm>
-            <a:off x="566928" y="2331720"/>
-            <a:ext cx="4160520" cy="3840480"/>
-          </a:xfrm>
-          <a:prstGeom prst="rect">
-            <a:avLst/>
-          </a:prstGeom>
-          <a:noFill/>
-        </p:spPr>
-        <p:txBody>
-          <a:bodyPr wrap="square" lIns="0" rIns="0" tIns="0" bIns="0">
-            <a:spAutoFit/>
-          </a:bodyPr>
-          <a:lstStyle/>
+              <a:rPr sz="1000" b="0" i="0">
+                <a:solidFill>
+                  <a:srgbClr val="8A94A0"/>
+                </a:solidFill>
+                <a:latin typeface="Calibri"/>
+              </a:rPr>
+              <a:t>median individual R² for the same three</a:t>
+            </a:r>
+          </a:p>
+        </p:txBody>
+      </p:sp>
+      <p:sp>
+        <p:nvSpPr>
+          <p:cNvPr id="9" name="TextBox 8"/>
+          <p:cNvSpPr txBox="1"/>
+          <p:nvPr/>
+        </p:nvSpPr>
+        <p:spPr>
+          <a:xfrm>
+            <a:off x="8121700" y="5623560"/>
+            <a:ext cx="3503066" cy="914400"/>
+          </a:xfrm>
+          <a:prstGeom prst="rect">
+            <a:avLst/>
+          </a:prstGeom>
+          <a:noFill/>
+        </p:spPr>
+        <p:txBody>
+          <a:bodyPr wrap="square" lIns="0" rIns="0" tIns="0" bIns="0">
+            <a:spAutoFit/>
+          </a:bodyPr>
+          <a:lstStyle/>
+          <a:p>
+            <a:pPr>
+              <a:spcBef>
+                <a:spcPts val="0"/>
+              </a:spcBef>
+              <a:spcAft>
+                <a:spcPts val="400"/>
+              </a:spcAft>
+            </a:pPr>
+            <a:r>
+              <a:rPr sz="2200" b="0" i="0">
+                <a:solidFill>
+                  <a:srgbClr val="FCFCFB"/>
+                </a:solidFill>
+                <a:latin typeface="Consolas"/>
+              </a:rPr>
+              <a:t>351,023</a:t>
+            </a:r>
+          </a:p>
           <a:p>
             <a:pPr>
               <a:lnSpc>
-                <a:spcPct val="132000"/>
+                <a:spcPct val="120000"/>
               </a:lnSpc>
               <a:spcBef>
                 <a:spcPts val="0"/>
               </a:spcBef>
               <a:spcAft>
-                <a:spcPts val="1100"/>
-              </a:spcAft>
-            </a:pPr>
-            <a:r>
-              <a:rPr sz="1150" b="0" i="0">
-                <a:solidFill>
-                  <a:srgbClr val="5A6068"/>
+                <a:spcPts val="0"/>
+              </a:spcAft>
+            </a:pPr>
+            <a:r>
+              <a:rPr sz="1000" b="0" i="0">
+                <a:solidFill>
+                  <a:srgbClr val="8A94A0"/>
                 </a:solidFill>
                 <a:latin typeface="Calibri"/>
               </a:rPr>
-              <a:t>Self-rated health is the single strongest predictor of life satisfaction in the ESS: 100% of countries significant at the individual level, median R² = 0.091 (four times education's). In the HDI, health's proxy is life expectancy, and it is the weakest of five components — only 20% of countries significant. In the SDG database, health (Goal 3) reaches 11.5% of country-indicator pairs, fourth of 17 goals.</a:t>
-            </a:r>
-          </a:p>
-          <a:p>
-            <a:pPr>
-              <a:lnSpc>
-                <a:spcPct val="132000"/>
-              </a:lnSpc>
-              <a:spcBef>
-                <a:spcPts val="0"/>
-              </a:spcBef>
-              <a:spcAft>
-                <a:spcPts val="1100"/>
-              </a:spcAft>
-            </a:pPr>
-            <a:r>
-              <a:rPr sz="1150" b="0" i="0">
-                <a:solidFill>
-                  <a:srgbClr val="5A6068"/>
-                </a:solidFill>
-                <a:latin typeface="Calibri"/>
-              </a:rPr>
-              <a:t>Life expectancy is close to saturated in developed countries: the top 100 countries range from 81 to 85 years. The variance that remains is so small that between-country differences add little predictive power. This is not health's problem; it is the specific HDI indicator's problem. The gap between frameworks shows the importance of variable choice, not of health itself.</a:t>
-            </a:r>
-          </a:p>
-        </p:txBody>
-      </p:sp>
-      <p:sp>
-        <p:nvSpPr>
-          <p:cNvPr id="5" name="TextBox 4"/>
-          <p:cNvSpPr txBox="1"/>
-          <p:nvPr/>
-        </p:nvSpPr>
-        <p:spPr>
-          <a:xfrm>
-            <a:off x="11338560" y="6263640"/>
-            <a:ext cx="548640" cy="274320"/>
-          </a:xfrm>
-          <a:prstGeom prst="rect">
-            <a:avLst/>
-          </a:prstGeom>
-          <a:noFill/>
-        </p:spPr>
-        <p:txBody>
-          <a:bodyPr wrap="square" lIns="0" rIns="0" tIns="0" bIns="0">
-            <a:spAutoFit/>
-          </a:bodyPr>
-          <a:lstStyle/>
-          <a:p>
-            <a:pPr algn="r">
-              <a:spcBef>
-                <a:spcPts val="0"/>
-              </a:spcBef>
-              <a:spcAft>
-                <a:spcPts val="0"/>
-              </a:spcAft>
-            </a:pPr>
-            <a:r>
-              <a:rPr sz="1100" b="0" i="0">
-                <a:solidFill>
-                  <a:srgbClr val="868D96"/>
-                </a:solidFill>
-                <a:latin typeface="Consolas"/>
-              </a:rPr>
-              <a:t>II</a:t>
-            </a:r>
-          </a:p>
-        </p:txBody>
-      </p:sp>
-      <p:pic>
-        <p:nvPicPr>
-          <p:cNvPr id="6" name="Picture 5" descr="health_levels_comparison.png"/>
-          <p:cNvPicPr>
-            <a:picLocks noChangeAspect="1"/>
-          </p:cNvPicPr>
-          <p:nvPr/>
-        </p:nvPicPr>
-        <p:blipFill>
-          <a:blip r:embed="rId2"/>
-          <a:stretch>
-            <a:fillRect/>
-          </a:stretch>
-        </p:blipFill>
-        <p:spPr>
-          <a:xfrm>
-            <a:off x="5120640" y="1234440"/>
-            <a:ext cx="6537960" cy="3922776"/>
-          </a:xfrm>
-          <a:prstGeom prst="rect">
-            <a:avLst/>
-          </a:prstGeom>
-        </p:spPr>
-      </p:pic>
-      <p:sp>
-        <p:nvSpPr>
-          <p:cNvPr id="7" name="TextBox 6"/>
-          <p:cNvSpPr txBox="1"/>
-          <p:nvPr/>
-        </p:nvSpPr>
-        <p:spPr>
-          <a:xfrm>
-            <a:off x="5120640" y="5897880"/>
-            <a:ext cx="6537960" cy="731520"/>
-          </a:xfrm>
-          <a:prstGeom prst="rect">
-            <a:avLst/>
-          </a:prstGeom>
-          <a:noFill/>
-        </p:spPr>
-        <p:txBody>
-          <a:bodyPr wrap="square" lIns="0" rIns="0" tIns="0" bIns="0">
-            <a:spAutoFit/>
-          </a:bodyPr>
-          <a:lstStyle/>
-          <a:p>
-            <a:pPr>
-              <a:lnSpc>
-                <a:spcPct val="125000"/>
-              </a:lnSpc>
-              <a:spcBef>
-                <a:spcPts val="0"/>
-              </a:spcBef>
-              <a:spcAft>
-                <a:spcPts val="0"/>
-              </a:spcAft>
-            </a:pPr>
-            <a:r>
-              <a:rPr sz="900" b="0" i="0">
-                <a:solidFill>
-                  <a:srgbClr val="868D96"/>
-                </a:solidFill>
-                <a:latin typeface="Calibri"/>
-              </a:rPr>
-              <a:t>Health's R² (% of countries significant at levels) across three frameworks. Self-rated health in ESS dominates; external HDI proxy (life expectancy) is weak.</a:t>
+              <a:t>respondents, 36 countries, ~10,700 per country</a:t>
             </a:r>
           </a:p>
         </p:txBody>
@@ -4549,7 +4631,7 @@
                 </a:solidFill>
                 <a:latin typeface="Consolas"/>
               </a:rPr>
-              <a:t>SDG INDICATOR RANKINGS · WHY HEALTH MATTERS DESPITE LOW %</a:t>
+              <a:t>THREE DOMAINS, ONE UNIT</a:t>
             </a:r>
           </a:p>
         </p:txBody>
@@ -4594,7 +4676,7 @@
                 </a:solidFill>
                 <a:latin typeface="Georgia"/>
               </a:rPr>
-              <a:t>Health indicators rank 4th among 17 SDG goals; the low percentage reflects weak overall SDG signal</a:t>
+              <a:t>Health, social trust and education all predict life satisfaction — trust is second</a:t>
             </a:r>
           </a:p>
         </p:txBody>
@@ -4633,13 +4715,13 @@
               </a:spcAft>
             </a:pPr>
             <a:r>
-              <a:rPr sz="1150" b="0" i="0">
+              <a:rPr sz="1125" b="0" i="0">
                 <a:solidFill>
                   <a:srgbClr val="5A6068"/>
                 </a:solidFill>
                 <a:latin typeface="Calibri"/>
               </a:rPr>
-              <a:t>The SDG database is vast: 661 series across 42 countries testing 17 goals. The overall significance rate is low — only 3-4% of all country-indicator pairs are significant. At the goal level, health (Goal 3) reaches 11.5% of country-indicator pairs, ranking fourth of 17 goals. Within that sparse landscape, health indicators dominate the top-ranked individual series, with 16 of the top 25 most predictive SDG series falling under Goal 3. These are survival measures: infant mortality, under-five mortality, stunting, neonatal mortality, sanitation, drinking water — all objective, externally measured.</a:t>
+              <a:t>Same FDR test, same unit, now on 351,023 respondents. Self-rated health is significant in 36 of 36 countries, median individual R² 0.092. Interpersonal trust in 35 of 36, median R² 0.039. Years of schooling in 32 of 36, median R² 0.006 — significant almost everywhere but explaining far less per person than either of the others.</a:t>
             </a:r>
           </a:p>
           <a:p>
@@ -4655,13 +4737,35 @@
               </a:spcAft>
             </a:pPr>
             <a:r>
-              <a:rPr sz="1150" b="0" i="0">
+              <a:rPr sz="1125" b="0" i="0">
                 <a:solidFill>
                   <a:srgbClr val="5A6068"/>
                 </a:solidFill>
                 <a:latin typeface="Calibri"/>
               </a:rPr>
-              <a:t>The low 11.5% rate for health is not evidence that health doesn't matter. It is evidence that most of the SDG database does not predict wellbeing. Within that context, health ranks high.</a:t>
+              <a:t>Set against the frameworks, health behaves consistently: strongest on people, and the highest-ranked substantive goal in the SDGs. Education behaves consistently too, once unpooled. Trust is the one that does not appear anywhere else, because there is nowhere else for it to appear — the HDI has no counterpart at all, and SDG16's 1.5% measures confidence in institutions rather than trust in people.</a:t>
+            </a:r>
+          </a:p>
+          <a:p>
+            <a:pPr>
+              <a:lnSpc>
+                <a:spcPct val="132000"/>
+              </a:lnSpc>
+              <a:spcBef>
+                <a:spcPts val="0"/>
+              </a:spcBef>
+              <a:spcAft>
+                <a:spcPts val="1100"/>
+              </a:spcAft>
+            </a:pPr>
+            <a:r>
+              <a:rPr sz="1125" b="0" i="0">
+                <a:solidFill>
+                  <a:srgbClr val="5A6068"/>
+                </a:solidFill>
+                <a:latin typeface="Calibri"/>
+              </a:rPr>
+              <a:t>The caveat is real and bounds the claim: the ESS is 36 European countries, self-reported, one trust item. This is not a global result. It is enough to say that a domain the frameworks never collect outranks one they both do.</a:t>
             </a:r>
           </a:p>
         </p:txBody>
@@ -4703,14 +4807,14 @@
                 </a:solidFill>
                 <a:latin typeface="Consolas"/>
               </a:rPr>
-              <a:t>II</a:t>
+              <a:t>II-a</a:t>
             </a:r>
           </a:p>
         </p:txBody>
       </p:sp>
       <p:pic>
         <p:nvPicPr>
-          <p:cNvPr id="6" name="Picture 5" descr="sdg_indicator_top20.png"/>
+          <p:cNvPr id="6" name="Picture 5" descr="domains_at_levels_comparison.png"/>
           <p:cNvPicPr>
             <a:picLocks noChangeAspect="1"/>
           </p:cNvPicPr>
@@ -4724,8 +4828,8 @@
         </p:blipFill>
         <p:spPr>
           <a:xfrm>
-            <a:off x="5279547" y="658368"/>
-            <a:ext cx="6220145" cy="5074920"/>
+            <a:off x="5120640" y="1934936"/>
+            <a:ext cx="6537960" cy="2521784"/>
           </a:xfrm>
           <a:prstGeom prst="rect">
             <a:avLst/>
@@ -4772,7 +4876,7 @@
                 </a:solidFill>
                 <a:latin typeface="Calibri"/>
               </a:rPr>
-              <a:t>Top 25 SDG indicators by significance. Health (Goal 3) dominates: 16 of 25 top series.</a:t>
+              <a:t>The three domains across all three frameworks, all on % of countries FDR-significant. Trust has no HDI bar because the HDI does not measure it.</a:t>
             </a:r>
           </a:p>
         </p:txBody>
@@ -4840,7 +4944,7 @@
                 </a:solidFill>
                 <a:latin typeface="Consolas"/>
               </a:rPr>
-              <a:t>RESULT 3 · SOCIAL TRUST</a:t>
+              <a:t>EDUCATION, CLOSE UP</a:t>
             </a:r>
           </a:p>
         </p:txBody>
@@ -4885,7 +4989,7 @@
                 </a:solidFill>
                 <a:latin typeface="Georgia"/>
               </a:rPr>
-              <a:t>Social trust leads the ESS, is nearly invisible to development frameworks</a:t>
+              <a:t>Significant on people and in the HDI; invisible in the SDGs only because of pooling</a:t>
             </a:r>
           </a:p>
         </p:txBody>
@@ -4930,7 +5034,7 @@
                 </a:solidFill>
                 <a:latin typeface="Calibri"/>
               </a:rPr>
-              <a:t>Social trust — 'most people can be trusted' — is significant in 94% of ESS countries, third strongest domain after health and income, with median R² = 0.041. Neither the HDI nor the SDG framework measures it at all.</a:t>
+              <a:t>Education across all four ways of measuring it: 89% of ESS countries on individual years of schooling, 33% of HDI countries on expected years of schooling, 12.7% of SDG4 access series, 3.3% pooled across all 35.</a:t>
             </a:r>
           </a:p>
           <a:p>
@@ -4952,29 +5056,7 @@
                 </a:solidFill>
                 <a:latin typeface="Calibri"/>
               </a:rPr>
-              <a:t>The SDG database does carry 13 trust- and satisfaction-adjacent series under Goal 16: satisfaction with public services, perception of bribery, perceived decision-making inclusiveness. But these measure institutional confidence, not interpersonal trust — a different construct, and one that correlates more weakly with life satisfaction even when tested across countries. Moreover, their median coverage is one observation per country-series against six for the database as a whole; 147 of 163 country-series cannot support a time-series design.</a:t>
-            </a:r>
-          </a:p>
-          <a:p>
-            <a:pPr>
-              <a:lnSpc>
-                <a:spcPct val="132000"/>
-              </a:lnSpc>
-              <a:spcBef>
-                <a:spcPts val="0"/>
-              </a:spcBef>
-              <a:spcAft>
-                <a:spcPts val="1100"/>
-              </a:spcAft>
-            </a:pPr>
-            <a:r>
-              <a:rPr sz="1150" b="0" i="0">
-                <a:solidFill>
-                  <a:srgbClr val="5A6068"/>
-                </a:solidFill>
-                <a:latin typeface="Calibri"/>
-              </a:rPr>
-              <a:t>Education's and health's problems are about which variable to count within a domain. Trust's problem is different: it is not in the frameworks at all. That is a coverage gap, not a measurement problem.</a:t>
+              <a:t>Three of those four numbers tell a consistent story and the fourth is a construction choice. Nothing about education changed between the third bar and the fourth — only which series were averaged together. This is the cleanest case in the paper of a framework hiding a domain it does in fact measure.</a:t>
             </a:r>
           </a:p>
         </p:txBody>
@@ -5016,14 +5098,14 @@
                 </a:solidFill>
                 <a:latin typeface="Consolas"/>
               </a:rPr>
-              <a:t>II</a:t>
+              <a:t>II-a</a:t>
             </a:r>
           </a:p>
         </p:txBody>
       </p:sp>
       <p:pic>
         <p:nvPicPr>
-          <p:cNvPr id="6" name="Picture 5" descr="trust_coverage_comparison.png"/>
+          <p:cNvPr id="6" name="Picture 5" descr="education_levels_comparison.png"/>
           <p:cNvPicPr>
             <a:picLocks noChangeAspect="1"/>
           </p:cNvPicPr>
@@ -5037,8 +5119,8 @@
         </p:blipFill>
         <p:spPr>
           <a:xfrm>
-            <a:off x="5120640" y="1234440"/>
-            <a:ext cx="6537960" cy="3922776"/>
+            <a:off x="5120640" y="1412748"/>
+            <a:ext cx="6537960" cy="3566160"/>
           </a:xfrm>
           <a:prstGeom prst="rect">
             <a:avLst/>
@@ -5085,7 +5167,7 @@
                 </a:solidFill>
                 <a:latin typeface="Calibri"/>
               </a:rPr>
-              <a:t>Social trust: 94% of ESS countries significant (individual level), 1.5% of SDG16 country-indicator pairs (institutional confidence, not interpersonal trust), not measured in the HDI.</a:t>
+              <a:t>Education across four measurements. The gap between the last two bars is entirely pooling, not data.</a:t>
             </a:r>
           </a:p>
         </p:txBody>
@@ -5153,7 +5235,7 @@
                 </a:solidFill>
                 <a:latin typeface="Consolas"/>
               </a:rPr>
-              <a:t>SYNTHESIS</a:t>
+              <a:t>HEALTH, CLOSE UP</a:t>
             </a:r>
           </a:p>
         </p:txBody>
@@ -5198,7 +5280,7 @@
                 </a:solidFill>
                 <a:latin typeface="Georgia"/>
               </a:rPr>
-              <a:t>Three domains, three ways frameworks lose sight of what matters</a:t>
+              <a:t>The strongest domain on people, and the weakest component of the HDI</a:t>
             </a:r>
           </a:p>
         </p:txBody>
@@ -5243,7 +5325,7 @@
                 </a:solidFill>
                 <a:latin typeface="Calibri"/>
               </a:rPr>
-              <a:t>Education's rank depends on which construct you count: attainment works, but parity ratios and learning outcomes do not, so pooling dilutes the signal. Health's rank depends on whether your chosen variable still varies: life expectancy does not, but self-rated health does, so the HDI's choice costs it. Social trust's rank is zero because it is not collected at scale in development frameworks at all — a coverage gap that cannot be fixed by choosing the right variable, because no variable was ever measured.</a:t>
+              <a:t>Self-rated health is the single strongest predictor of life satisfaction in the ESS: every country significant, median R² 0.092, roughly fifteen times education's. In the SDGs, health leads the substantive goals at 11.5%. In the HDI it is last of five, at 19%.</a:t>
             </a:r>
           </a:p>
           <a:p>
@@ -5265,7 +5347,7 @@
                 </a:solidFill>
                 <a:latin typeface="Calibri"/>
               </a:rPr>
-              <a:t>These are not criticisms of the frameworks; they were built to track development, and they do. But which components look most consequential for lived experience is not the question they were built to answer.</a:t>
+              <a:t>The domain is not weak; the HDI's chosen proxy for it is. Life expectancy has largely saturated across the countries the index covers, and a variable with almost no variance left cannot predict much. Self-rated health, asked of the same populations, is the strongest thing in the ESS. Same domain, different variable, opposite conclusion.</a:t>
             </a:r>
           </a:p>
         </p:txBody>
@@ -5307,14 +5389,14 @@
                 </a:solidFill>
                 <a:latin typeface="Consolas"/>
               </a:rPr>
-              <a:t>II</a:t>
+              <a:t>II-a</a:t>
             </a:r>
           </a:p>
         </p:txBody>
       </p:sp>
       <p:pic>
         <p:nvPicPr>
-          <p:cNvPr id="6" name="Picture 5" descr="domain_horse_race.png"/>
+          <p:cNvPr id="6" name="Picture 5" descr="health_levels_comparison.png"/>
           <p:cNvPicPr>
             <a:picLocks noChangeAspect="1"/>
           </p:cNvPicPr>
@@ -5328,8 +5410,8 @@
         </p:blipFill>
         <p:spPr>
           <a:xfrm>
-            <a:off x="5120640" y="1433421"/>
-            <a:ext cx="6537960" cy="3524813"/>
+            <a:off x="5120640" y="1234440"/>
+            <a:ext cx="6537960" cy="3922776"/>
           </a:xfrm>
           <a:prstGeom prst="rect">
             <a:avLst/>
@@ -5376,7 +5458,7 @@
                 </a:solidFill>
                 <a:latin typeface="Calibri"/>
               </a:rPr>
-              <a:t>Domains competing within one instrument (ESS), at two levels of aggregation. Individual level (left) and country means (right).</a:t>
+              <a:t>Health measured three ways. The HDI result is about life expectancy's saturation, not about health.</a:t>
             </a:r>
           </a:p>
         </p:txBody>
@@ -5444,7 +5526,7 @@
                 </a:solidFill>
                 <a:latin typeface="Consolas"/>
               </a:rPr>
-              <a:t>FRAMEWORK BLIND SPOTS · DOMAIN BY DOMAIN</a:t>
+              <a:t>SOCIAL TRUST, CLOSE UP</a:t>
             </a:r>
           </a:p>
         </p:txBody>
@@ -5489,7 +5571,7 @@
                 </a:solidFill>
                 <a:latin typeface="Georgia"/>
               </a:rPr>
-              <a:t>Education, health and social trust — and which frameworks can see them</a:t>
+              <a:t>Second strongest on people, and absent from both frameworks</a:t>
             </a:r>
           </a:p>
         </p:txBody>
@@ -5528,13 +5610,57 @@
               </a:spcAft>
             </a:pPr>
             <a:r>
-              <a:rPr sz="1150" b="0" i="0">
+              <a:rPr sz="1100" b="0" i="0">
                 <a:solidFill>
                   <a:srgbClr val="5A6068"/>
                 </a:solidFill>
                 <a:latin typeface="Calibri"/>
               </a:rPr>
-              <a:t>A summary of the blind spots: which frameworks can test which domains, and whether the test yields a signal. Education is testable in all three frameworks but its rank depends entirely on which construct the framework chose to count. Health is testable everywhere and leads wherever it is measured somewhere it still varies — a robust signal despite the HDI's poor choice of proxy. Social trust is testable in one instrument only: the ESS. It does not appear in the HDI at all, and the SDG framework measures institutional confidence instead, which is a different construct and a weaker predictor.</a:t>
+              <a:t>Interpersonal trust — 'generally speaking, would you say that most people can be trusted?' — is significant in 35 of 36 ESS countries, with a median R² of 0.039: below self-rated health, well above years of schooling.</a:t>
+            </a:r>
+          </a:p>
+          <a:p>
+            <a:pPr>
+              <a:lnSpc>
+                <a:spcPct val="132000"/>
+              </a:lnSpc>
+              <a:spcBef>
+                <a:spcPts val="0"/>
+              </a:spcBef>
+              <a:spcAft>
+                <a:spcPts val="1100"/>
+              </a:spcAft>
+            </a:pPr>
+            <a:r>
+              <a:rPr sz="1100" b="0" i="0">
+                <a:solidFill>
+                  <a:srgbClr val="5A6068"/>
+                </a:solidFill>
+                <a:latin typeface="Calibri"/>
+              </a:rPr>
+              <a:t>The HDI does not measure trust in any form. The SDG framework's nearest thing is Goal 16's thirteen series, and they measure something else: satisfaction with public services, perceived bribery, perceived inclusiveness in decision-making. Institutional confidence and interpersonal trust are distinct constructs, and the substitution should not pass silently. Coverage compounds it — median one observation per country-series against six for the database overall, and 147 of 163 country-series cannot support a time-series design at all.</a:t>
+            </a:r>
+          </a:p>
+          <a:p>
+            <a:pPr>
+              <a:lnSpc>
+                <a:spcPct val="132000"/>
+              </a:lnSpc>
+              <a:spcBef>
+                <a:spcPts val="0"/>
+              </a:spcBef>
+              <a:spcAft>
+                <a:spcPts val="1100"/>
+              </a:spcAft>
+            </a:pPr>
+            <a:r>
+              <a:rPr sz="1100" b="0" i="0">
+                <a:solidFill>
+                  <a:srgbClr val="5A6068"/>
+                </a:solidFill>
+                <a:latin typeface="Calibri"/>
+              </a:rPr>
+              <a:t>Education's and health's problems are about which variable to count inside a domain the framework already has. Trust's is categorically different: there is no variable to choose between, because the domain was never collected.</a:t>
             </a:r>
           </a:p>
         </p:txBody>
@@ -5576,14 +5702,14 @@
                 </a:solidFill>
                 <a:latin typeface="Consolas"/>
               </a:rPr>
-              <a:t>II</a:t>
+              <a:t>II-a</a:t>
             </a:r>
           </a:p>
         </p:txBody>
       </p:sp>
       <p:pic>
         <p:nvPicPr>
-          <p:cNvPr id="6" name="Picture 5" descr="domain_scorecard.png"/>
+          <p:cNvPr id="6" name="Picture 5" descr="trust_coverage_comparison.png"/>
           <p:cNvPicPr>
             <a:picLocks noChangeAspect="1"/>
           </p:cNvPicPr>
@@ -5597,8 +5723,8 @@
         </p:blipFill>
         <p:spPr>
           <a:xfrm>
-            <a:off x="5120640" y="1469807"/>
-            <a:ext cx="6537960" cy="3452042"/>
+            <a:off x="5120640" y="1327839"/>
+            <a:ext cx="6537960" cy="3735977"/>
           </a:xfrm>
           <a:prstGeom prst="rect">
             <a:avLst/>
@@ -5645,7 +5771,7 @@
                 </a:solidFill>
                 <a:latin typeface="Calibri"/>
               </a:rPr>
-              <a:t>Which frameworks can test each domain (green = tracks wellbeing, yellow = measurable but weak signal, gray = framework cannot test it).</a:t>
+              <a:t>Interpersonal trust in the ESS against the closest SDG counterpart and an absent HDI one. The asterisked bar is a different construct.</a:t>
             </a:r>
           </a:p>
         </p:txBody>
@@ -5659,6 +5785,319 @@
 </file>
 
 <file path=ppt/slides/slide18.xml><?xml version="1.0" encoding="utf-8"?>
+<p:sld xmlns:a="http://schemas.openxmlformats.org/drawingml/2006/main" xmlns:p="http://schemas.openxmlformats.org/presentationml/2006/main" xmlns:r="http://schemas.openxmlformats.org/officeDocument/2006/relationships">
+  <p:cSld>
+    <p:bg>
+      <p:bgPr>
+        <a:solidFill>
+          <a:srgbClr val="FCFCFB"/>
+        </a:solidFill>
+        <a:effectLst/>
+      </p:bgPr>
+    </p:bg>
+    <p:spTree>
+      <p:nvGrpSpPr>
+        <p:cNvPr id="1" name=""/>
+        <p:cNvGrpSpPr/>
+        <p:nvPr/>
+      </p:nvGrpSpPr>
+      <p:grpSpPr/>
+      <p:sp>
+        <p:nvSpPr>
+          <p:cNvPr id="2" name="TextBox 1"/>
+          <p:cNvSpPr txBox="1"/>
+          <p:nvPr/>
+        </p:nvSpPr>
+        <p:spPr>
+          <a:xfrm>
+            <a:off x="566928" y="502920"/>
+            <a:ext cx="4160520" cy="274320"/>
+          </a:xfrm>
+          <a:prstGeom prst="rect">
+            <a:avLst/>
+          </a:prstGeom>
+          <a:noFill/>
+        </p:spPr>
+        <p:txBody>
+          <a:bodyPr wrap="square" lIns="0" rIns="0" tIns="0" bIns="0">
+            <a:spAutoFit/>
+          </a:bodyPr>
+          <a:lstStyle/>
+          <a:p>
+            <a:pPr>
+              <a:spcBef>
+                <a:spcPts val="0"/>
+              </a:spcBef>
+              <a:spcAft>
+                <a:spcPts val="0"/>
+              </a:spcAft>
+            </a:pPr>
+            <a:r>
+              <a:rPr sz="1000" b="0" i="0">
+                <a:solidFill>
+                  <a:srgbClr val="A63A30"/>
+                </a:solidFill>
+                <a:latin typeface="Consolas"/>
+              </a:rPr>
+              <a:t>WHY THE SDG TRUST SERIES CANNOT STAND IN</a:t>
+            </a:r>
+          </a:p>
+        </p:txBody>
+      </p:sp>
+      <p:sp>
+        <p:nvSpPr>
+          <p:cNvPr id="3" name="TextBox 2"/>
+          <p:cNvSpPr txBox="1"/>
+          <p:nvPr/>
+        </p:nvSpPr>
+        <p:spPr>
+          <a:xfrm>
+            <a:off x="566928" y="914400"/>
+            <a:ext cx="4160520" cy="1371600"/>
+          </a:xfrm>
+          <a:prstGeom prst="rect">
+            <a:avLst/>
+          </a:prstGeom>
+          <a:noFill/>
+        </p:spPr>
+        <p:txBody>
+          <a:bodyPr wrap="square" lIns="0" rIns="0" tIns="0" bIns="0">
+            <a:spAutoFit/>
+          </a:bodyPr>
+          <a:lstStyle/>
+          <a:p>
+            <a:pPr>
+              <a:lnSpc>
+                <a:spcPct val="108000"/>
+              </a:lnSpc>
+              <a:spcBef>
+                <a:spcPts val="0"/>
+              </a:spcBef>
+              <a:spcAft>
+                <a:spcPts val="0"/>
+              </a:spcAft>
+            </a:pPr>
+            <a:r>
+              <a:rPr sz="2300" b="0" i="0">
+                <a:solidFill>
+                  <a:srgbClr val="14171C"/>
+                </a:solidFill>
+                <a:latin typeface="Georgia"/>
+              </a:rPr>
+              <a:t>Institutional confidence does not survive an income control; interpersonal trust does</a:t>
+            </a:r>
+          </a:p>
+        </p:txBody>
+      </p:sp>
+      <p:sp>
+        <p:nvSpPr>
+          <p:cNvPr id="4" name="TextBox 3"/>
+          <p:cNvSpPr txBox="1"/>
+          <p:nvPr/>
+        </p:nvSpPr>
+        <p:spPr>
+          <a:xfrm>
+            <a:off x="566928" y="2331720"/>
+            <a:ext cx="4160520" cy="3840480"/>
+          </a:xfrm>
+          <a:prstGeom prst="rect">
+            <a:avLst/>
+          </a:prstGeom>
+          <a:noFill/>
+        </p:spPr>
+        <p:txBody>
+          <a:bodyPr wrap="square" lIns="0" rIns="0" tIns="0" bIns="0">
+            <a:spAutoFit/>
+          </a:bodyPr>
+          <a:lstStyle/>
+          <a:p>
+            <a:pPr>
+              <a:lnSpc>
+                <a:spcPct val="132000"/>
+              </a:lnSpc>
+              <a:spcBef>
+                <a:spcPts val="0"/>
+              </a:spcBef>
+              <a:spcAft>
+                <a:spcPts val="1100"/>
+              </a:spcAft>
+            </a:pPr>
+            <a:r>
+              <a:rPr sz="1150" b="0" i="0">
+                <a:solidFill>
+                  <a:srgbClr val="5A6068"/>
+                </a:solidFill>
+                <a:latin typeface="Calibri"/>
+              </a:rPr>
+              <a:t>Worth testing directly rather than asserting. Of the thirteen Goal 16 trust-adjacent series, nine can be tested cross-sectionally and four are significant. Then control for log GNI per capita: perceived bribery survives, but satisfaction with government services, healthcare and secondary education all vanish.</a:t>
+            </a:r>
+          </a:p>
+          <a:p>
+            <a:pPr>
+              <a:lnSpc>
+                <a:spcPct val="132000"/>
+              </a:lnSpc>
+              <a:spcBef>
+                <a:spcPts val="0"/>
+              </a:spcBef>
+              <a:spcAft>
+                <a:spcPts val="1100"/>
+              </a:spcAft>
+            </a:pPr>
+            <a:r>
+              <a:rPr sz="1150" b="0" i="0">
+                <a:solidFill>
+                  <a:srgbClr val="5A6068"/>
+                </a:solidFill>
+                <a:latin typeface="Calibri"/>
+              </a:rPr>
+              <a:t>That pattern is a known artefact of subjective institutional scales across income levels — the same question administered in richer and poorer countries produces response shifts unrelated to the construct. Interpersonal trust in the ESS does not behave this way.</a:t>
+            </a:r>
+          </a:p>
+          <a:p>
+            <a:pPr>
+              <a:lnSpc>
+                <a:spcPct val="132000"/>
+              </a:lnSpc>
+              <a:spcBef>
+                <a:spcPts val="0"/>
+              </a:spcBef>
+              <a:spcAft>
+                <a:spcPts val="1100"/>
+              </a:spcAft>
+            </a:pPr>
+            <a:r>
+              <a:rPr sz="1150" b="0" i="0">
+                <a:solidFill>
+                  <a:srgbClr val="5A6068"/>
+                </a:solidFill>
+                <a:latin typeface="Calibri"/>
+              </a:rPr>
+              <a:t>So this is not an execution failure in the SDG framework. It reflects what development frameworks are for: they measure institutions and systems. Trust between people is not an institution, and it does not show up when you measure one.</a:t>
+            </a:r>
+          </a:p>
+        </p:txBody>
+      </p:sp>
+      <p:sp>
+        <p:nvSpPr>
+          <p:cNvPr id="5" name="TextBox 4"/>
+          <p:cNvSpPr txBox="1"/>
+          <p:nvPr/>
+        </p:nvSpPr>
+        <p:spPr>
+          <a:xfrm>
+            <a:off x="11338560" y="6263640"/>
+            <a:ext cx="548640" cy="274320"/>
+          </a:xfrm>
+          <a:prstGeom prst="rect">
+            <a:avLst/>
+          </a:prstGeom>
+          <a:noFill/>
+        </p:spPr>
+        <p:txBody>
+          <a:bodyPr wrap="square" lIns="0" rIns="0" tIns="0" bIns="0">
+            <a:spAutoFit/>
+          </a:bodyPr>
+          <a:lstStyle/>
+          <a:p>
+            <a:pPr algn="r">
+              <a:spcBef>
+                <a:spcPts val="0"/>
+              </a:spcBef>
+              <a:spcAft>
+                <a:spcPts val="0"/>
+              </a:spcAft>
+            </a:pPr>
+            <a:r>
+              <a:rPr sz="1100" b="0" i="0">
+                <a:solidFill>
+                  <a:srgbClr val="868D96"/>
+                </a:solidFill>
+                <a:latin typeface="Consolas"/>
+              </a:rPr>
+              <a:t>II-a</a:t>
+            </a:r>
+          </a:p>
+        </p:txBody>
+      </p:sp>
+      <p:pic>
+        <p:nvPicPr>
+          <p:cNvPr id="6" name="Picture 5" descr="K1_sdg_trust_cross_section.png"/>
+          <p:cNvPicPr>
+            <a:picLocks noChangeAspect="1"/>
+          </p:cNvPicPr>
+          <p:nvPr/>
+        </p:nvPicPr>
+        <p:blipFill>
+          <a:blip r:embed="rId2"/>
+          <a:stretch>
+            <a:fillRect/>
+          </a:stretch>
+        </p:blipFill>
+        <p:spPr>
+          <a:xfrm>
+            <a:off x="5120640" y="1690377"/>
+            <a:ext cx="6537960" cy="3010902"/>
+          </a:xfrm>
+          <a:prstGeom prst="rect">
+            <a:avLst/>
+          </a:prstGeom>
+        </p:spPr>
+      </p:pic>
+      <p:sp>
+        <p:nvSpPr>
+          <p:cNvPr id="7" name="TextBox 6"/>
+          <p:cNvSpPr txBox="1"/>
+          <p:nvPr/>
+        </p:nvSpPr>
+        <p:spPr>
+          <a:xfrm>
+            <a:off x="5120640" y="5897880"/>
+            <a:ext cx="6537960" cy="731520"/>
+          </a:xfrm>
+          <a:prstGeom prst="rect">
+            <a:avLst/>
+          </a:prstGeom>
+          <a:noFill/>
+        </p:spPr>
+        <p:txBody>
+          <a:bodyPr wrap="square" lIns="0" rIns="0" tIns="0" bIns="0">
+            <a:spAutoFit/>
+          </a:bodyPr>
+          <a:lstStyle/>
+          <a:p>
+            <a:pPr>
+              <a:lnSpc>
+                <a:spcPct val="125000"/>
+              </a:lnSpc>
+              <a:spcBef>
+                <a:spcPts val="0"/>
+              </a:spcBef>
+              <a:spcAft>
+                <a:spcPts val="0"/>
+              </a:spcAft>
+            </a:pPr>
+            <a:r>
+              <a:rPr sz="900" b="0" i="0">
+                <a:solidFill>
+                  <a:srgbClr val="868D96"/>
+                </a:solidFill>
+                <a:latin typeface="Calibri"/>
+              </a:rPr>
+              <a:t>SDG16 trust series cross-sectionally. Panel (b): net of income, bribery persists and the satisfaction measures do not.</a:t>
+            </a:r>
+          </a:p>
+        </p:txBody>
+      </p:sp>
+    </p:spTree>
+  </p:cSld>
+  <p:clrMapOvr>
+    <a:masterClrMapping/>
+  </p:clrMapOvr>
+</p:sld>
+</file>
+
+<file path=ppt/slides/slide19.xml><?xml version="1.0" encoding="utf-8"?>
 <p:sld xmlns:a="http://schemas.openxmlformats.org/drawingml/2006/main" xmlns:p="http://schemas.openxmlformats.org/presentationml/2006/main" xmlns:r="http://schemas.openxmlformats.org/officeDocument/2006/relationships">
   <p:cSld>
     <p:bg>
@@ -5757,7 +6196,7 @@
                 </a:solidFill>
                 <a:latin typeface="Consolas"/>
               </a:rPr>
-              <a:t>WHERE ACT II LEAVES US</a:t>
+              <a:t>WHERE ACT II-A LEAVES US</a:t>
             </a:r>
           </a:p>
         </p:txBody>
@@ -5802,443 +6241,7 @@
                 </a:solidFill>
                 <a:latin typeface="Georgia"/>
               </a:rPr>
-              <a:t>The problem is not the domains; the problem is the measurement. Frameworks designed for development, with aggregate indicators measured at long intervals, structurally cannot see what matters for individual lived experience.</a:t>
-            </a:r>
-          </a:p>
-        </p:txBody>
-      </p:sp>
-    </p:spTree>
-  </p:cSld>
-  <p:clrMapOvr>
-    <a:masterClrMapping/>
-  </p:clrMapOvr>
-</p:sld>
-</file>
-
-<file path=ppt/slides/slide19.xml><?xml version="1.0" encoding="utf-8"?>
-<p:sld xmlns:a="http://schemas.openxmlformats.org/drawingml/2006/main" xmlns:p="http://schemas.openxmlformats.org/presentationml/2006/main" xmlns:r="http://schemas.openxmlformats.org/officeDocument/2006/relationships">
-  <p:cSld>
-    <p:bg>
-      <p:bgPr>
-        <a:solidFill>
-          <a:srgbClr val="14171C"/>
-        </a:solidFill>
-        <a:effectLst/>
-      </p:bgPr>
-    </p:bg>
-    <p:spTree>
-      <p:nvGrpSpPr>
-        <p:cNvPr id="1" name=""/>
-        <p:cNvGrpSpPr/>
-        <p:nvPr/>
-      </p:nvGrpSpPr>
-      <p:grpSpPr/>
-      <p:sp>
-        <p:nvSpPr>
-          <p:cNvPr id="2" name="TextBox 1"/>
-          <p:cNvSpPr txBox="1"/>
-          <p:nvPr/>
-        </p:nvSpPr>
-        <p:spPr>
-          <a:xfrm>
-            <a:off x="8229600" y="822960"/>
-            <a:ext cx="3291840" cy="4114800"/>
-          </a:xfrm>
-          <a:prstGeom prst="rect">
-            <a:avLst/>
-          </a:prstGeom>
-          <a:noFill/>
-        </p:spPr>
-        <p:txBody>
-          <a:bodyPr wrap="square" lIns="0" rIns="0" tIns="0" bIns="0">
-            <a:spAutoFit/>
-          </a:bodyPr>
-          <a:lstStyle/>
-          <a:p>
-            <a:pPr algn="r">
-              <a:spcBef>
-                <a:spcPts val="0"/>
-              </a:spcBef>
-              <a:spcAft>
-                <a:spcPts val="0"/>
-              </a:spcAft>
-            </a:pPr>
-            <a:r>
-              <a:rPr sz="20000" b="0" i="0">
-                <a:solidFill>
-                  <a:srgbClr val="2A3340"/>
-                </a:solidFill>
-                <a:latin typeface="Georgia"/>
-              </a:rPr>
-              <a:t>III</a:t>
-            </a:r>
-          </a:p>
-        </p:txBody>
-      </p:sp>
-      <p:sp>
-        <p:nvSpPr>
-          <p:cNvPr id="3" name="Rectangle 2"/>
-          <p:cNvSpPr/>
-          <p:nvPr/>
-        </p:nvSpPr>
-        <p:spPr>
-          <a:xfrm>
-            <a:off x="566928" y="1371600"/>
-            <a:ext cx="7315200" cy="25400"/>
-          </a:xfrm>
-          <a:prstGeom prst="rect">
-            <a:avLst/>
-          </a:prstGeom>
-          <a:solidFill>
-            <a:srgbClr val="C9D8EC"/>
-          </a:solidFill>
-          <a:ln>
-            <a:noFill/>
-          </a:ln>
-          <a:effectLst/>
-        </p:spPr>
-        <p:style>
-          <a:lnRef idx="1">
-            <a:schemeClr val="accent1"/>
-          </a:lnRef>
-          <a:fillRef idx="3">
-            <a:schemeClr val="accent1"/>
-          </a:fillRef>
-          <a:effectRef idx="2">
-            <a:schemeClr val="accent1"/>
-          </a:effectRef>
-          <a:fontRef idx="minor">
-            <a:schemeClr val="lt1"/>
-          </a:fontRef>
-        </p:style>
-        <p:txBody>
-          <a:bodyPr rtlCol="0" anchor="ctr"/>
-          <a:lstStyle/>
-          <a:p>
-            <a:pPr algn="ctr"/>
-          </a:p>
-        </p:txBody>
-      </p:sp>
-      <p:sp>
-        <p:nvSpPr>
-          <p:cNvPr id="4" name="TextBox 3"/>
-          <p:cNvSpPr txBox="1"/>
-          <p:nvPr/>
-        </p:nvSpPr>
-        <p:spPr>
-          <a:xfrm>
-            <a:off x="566928" y="960120"/>
-            <a:ext cx="5486400" cy="274320"/>
-          </a:xfrm>
-          <a:prstGeom prst="rect">
-            <a:avLst/>
-          </a:prstGeom>
-          <a:noFill/>
-        </p:spPr>
-        <p:txBody>
-          <a:bodyPr wrap="square" lIns="0" rIns="0" tIns="0" bIns="0">
-            <a:spAutoFit/>
-          </a:bodyPr>
-          <a:lstStyle/>
-          <a:p>
-            <a:pPr>
-              <a:spcBef>
-                <a:spcPts val="0"/>
-              </a:spcBef>
-              <a:spcAft>
-                <a:spcPts val="0"/>
-              </a:spcAft>
-            </a:pPr>
-            <a:r>
-              <a:rPr sz="1100" b="0" i="0">
-                <a:solidFill>
-                  <a:srgbClr val="C9D8EC"/>
-                </a:solidFill>
-                <a:latin typeface="Consolas"/>
-              </a:rPr>
-              <a:t>ACT III</a:t>
-            </a:r>
-          </a:p>
-        </p:txBody>
-      </p:sp>
-      <p:sp>
-        <p:nvSpPr>
-          <p:cNvPr id="5" name="TextBox 4"/>
-          <p:cNvSpPr txBox="1"/>
-          <p:nvPr/>
-        </p:nvSpPr>
-        <p:spPr>
-          <a:xfrm>
-            <a:off x="566928" y="1783080"/>
-            <a:ext cx="7223760" cy="1828800"/>
-          </a:xfrm>
-          <a:prstGeom prst="rect">
-            <a:avLst/>
-          </a:prstGeom>
-          <a:noFill/>
-        </p:spPr>
-        <p:txBody>
-          <a:bodyPr wrap="square" lIns="0" rIns="0" tIns="0" bIns="0">
-            <a:spAutoFit/>
-          </a:bodyPr>
-          <a:lstStyle/>
-          <a:p>
-            <a:pPr>
-              <a:lnSpc>
-                <a:spcPct val="102000"/>
-              </a:lnSpc>
-              <a:spcBef>
-                <a:spcPts val="0"/>
-              </a:spcBef>
-              <a:spcAft>
-                <a:spcPts val="0"/>
-              </a:spcAft>
-            </a:pPr>
-            <a:r>
-              <a:rPr sz="4000" b="0" i="0">
-                <a:solidFill>
-                  <a:srgbClr val="FCFCFB"/>
-                </a:solidFill>
-                <a:latin typeface="Georgia"/>
-              </a:rPr>
-              <a:t>Within-country evidence: Why measurement type matters</a:t>
-            </a:r>
-          </a:p>
-        </p:txBody>
-      </p:sp>
-      <p:sp>
-        <p:nvSpPr>
-          <p:cNvPr id="6" name="TextBox 5"/>
-          <p:cNvSpPr txBox="1"/>
-          <p:nvPr/>
-        </p:nvSpPr>
-        <p:spPr>
-          <a:xfrm>
-            <a:off x="566928" y="3886200"/>
-            <a:ext cx="6766560" cy="1463040"/>
-          </a:xfrm>
-          <a:prstGeom prst="rect">
-            <a:avLst/>
-          </a:prstGeom>
-          <a:noFill/>
-        </p:spPr>
-        <p:txBody>
-          <a:bodyPr wrap="square" lIns="0" rIns="0" tIns="0" bIns="0">
-            <a:spAutoFit/>
-          </a:bodyPr>
-          <a:lstStyle/>
-          <a:p>
-            <a:pPr>
-              <a:lnSpc>
-                <a:spcPct val="135000"/>
-              </a:lnSpc>
-              <a:spcBef>
-                <a:spcPts val="0"/>
-              </a:spcBef>
-              <a:spcAft>
-                <a:spcPts val="0"/>
-              </a:spcAft>
-            </a:pPr>
-            <a:r>
-              <a:rPr sz="1275" b="0" i="1">
-                <a:solidFill>
-                  <a:srgbClr val="9AA4B0"/>
-                </a:solidFill>
-                <a:latin typeface="Georgia"/>
-              </a:rPr>
-              <a:t>Individual-level, self-reported data shows a fundamentally different pattern. Unlike administrative development frameworks, ESS captures year-to-year variation within countries. This is not a measurement failure; it is a structural consequence of how development is measured — at the country level, with long intervals. Social trust emerges not because frameworks miss it, but because development frameworks measure at the wrong temporal and individual resolution where trust varies.</a:t>
-            </a:r>
-          </a:p>
-        </p:txBody>
-      </p:sp>
-      <p:sp>
-        <p:nvSpPr>
-          <p:cNvPr id="7" name="TextBox 6"/>
-          <p:cNvSpPr txBox="1"/>
-          <p:nvPr/>
-        </p:nvSpPr>
-        <p:spPr>
-          <a:xfrm>
-            <a:off x="566928" y="5623560"/>
-            <a:ext cx="3503066" cy="914400"/>
-          </a:xfrm>
-          <a:prstGeom prst="rect">
-            <a:avLst/>
-          </a:prstGeom>
-          <a:noFill/>
-        </p:spPr>
-        <p:txBody>
-          <a:bodyPr wrap="square" lIns="0" rIns="0" tIns="0" bIns="0">
-            <a:spAutoFit/>
-          </a:bodyPr>
-          <a:lstStyle/>
-          <a:p>
-            <a:pPr>
-              <a:spcBef>
-                <a:spcPts val="0"/>
-              </a:spcBef>
-              <a:spcAft>
-                <a:spcPts val="400"/>
-              </a:spcAft>
-            </a:pPr>
-            <a:r>
-              <a:rPr sz="2200" b="0" i="0">
-                <a:solidFill>
-                  <a:srgbClr val="FCFCFB"/>
-                </a:solidFill>
-                <a:latin typeface="Consolas"/>
-              </a:rPr>
-              <a:t>69% → 64%</a:t>
-            </a:r>
-          </a:p>
-          <a:p>
-            <a:pPr>
-              <a:lnSpc>
-                <a:spcPct val="120000"/>
-              </a:lnSpc>
-              <a:spcBef>
-                <a:spcPts val="0"/>
-              </a:spcBef>
-              <a:spcAft>
-                <a:spcPts val="0"/>
-              </a:spcAft>
-            </a:pPr>
-            <a:r>
-              <a:rPr sz="1000" b="0" i="0">
-                <a:solidFill>
-                  <a:srgbClr val="8A94A0"/>
-                </a:solidFill>
-                <a:latin typeface="Calibri"/>
-              </a:rPr>
-              <a:t>ESS levels → differences (NOT collapsed)</a:t>
-            </a:r>
-          </a:p>
-        </p:txBody>
-      </p:sp>
-      <p:sp>
-        <p:nvSpPr>
-          <p:cNvPr id="8" name="TextBox 7"/>
-          <p:cNvSpPr txBox="1"/>
-          <p:nvPr/>
-        </p:nvSpPr>
-        <p:spPr>
-          <a:xfrm>
-            <a:off x="4344314" y="5623560"/>
-            <a:ext cx="3503066" cy="914400"/>
-          </a:xfrm>
-          <a:prstGeom prst="rect">
-            <a:avLst/>
-          </a:prstGeom>
-          <a:noFill/>
-        </p:spPr>
-        <p:txBody>
-          <a:bodyPr wrap="square" lIns="0" rIns="0" tIns="0" bIns="0">
-            <a:spAutoFit/>
-          </a:bodyPr>
-          <a:lstStyle/>
-          <a:p>
-            <a:pPr>
-              <a:spcBef>
-                <a:spcPts val="0"/>
-              </a:spcBef>
-              <a:spcAft>
-                <a:spcPts val="400"/>
-              </a:spcAft>
-            </a:pPr>
-            <a:r>
-              <a:rPr sz="2200" b="0" i="0">
-                <a:solidFill>
-                  <a:srgbClr val="FCFCFB"/>
-                </a:solidFill>
-                <a:latin typeface="Consolas"/>
-              </a:rPr>
-              <a:t>71% → 5%</a:t>
-            </a:r>
-          </a:p>
-          <a:p>
-            <a:pPr>
-              <a:lnSpc>
-                <a:spcPct val="120000"/>
-              </a:lnSpc>
-              <a:spcBef>
-                <a:spcPts val="0"/>
-              </a:spcBef>
-              <a:spcAft>
-                <a:spcPts val="0"/>
-              </a:spcAft>
-            </a:pPr>
-            <a:r>
-              <a:rPr sz="1000" b="0" i="0">
-                <a:solidFill>
-                  <a:srgbClr val="8A94A0"/>
-                </a:solidFill>
-                <a:latin typeface="Calibri"/>
-              </a:rPr>
-              <a:t>SDG levels → differences (collapsed)</a:t>
-            </a:r>
-          </a:p>
-        </p:txBody>
-      </p:sp>
-      <p:sp>
-        <p:nvSpPr>
-          <p:cNvPr id="9" name="TextBox 8"/>
-          <p:cNvSpPr txBox="1"/>
-          <p:nvPr/>
-        </p:nvSpPr>
-        <p:spPr>
-          <a:xfrm>
-            <a:off x="8121700" y="5623560"/>
-            <a:ext cx="3503066" cy="914400"/>
-          </a:xfrm>
-          <a:prstGeom prst="rect">
-            <a:avLst/>
-          </a:prstGeom>
-          <a:noFill/>
-        </p:spPr>
-        <p:txBody>
-          <a:bodyPr wrap="square" lIns="0" rIns="0" tIns="0" bIns="0">
-            <a:spAutoFit/>
-          </a:bodyPr>
-          <a:lstStyle/>
-          <a:p>
-            <a:pPr>
-              <a:spcBef>
-                <a:spcPts val="0"/>
-              </a:spcBef>
-              <a:spcAft>
-                <a:spcPts val="400"/>
-              </a:spcAft>
-            </a:pPr>
-            <a:r>
-              <a:rPr sz="2200" b="0" i="0">
-                <a:solidFill>
-                  <a:srgbClr val="FCFCFB"/>
-                </a:solidFill>
-                <a:latin typeface="Consolas"/>
-              </a:rPr>
-              <a:t>42% → 2%</a:t>
-            </a:r>
-          </a:p>
-          <a:p>
-            <a:pPr>
-              <a:lnSpc>
-                <a:spcPct val="120000"/>
-              </a:lnSpc>
-              <a:spcBef>
-                <a:spcPts val="0"/>
-              </a:spcBef>
-              <a:spcAft>
-                <a:spcPts val="0"/>
-              </a:spcAft>
-            </a:pPr>
-            <a:r>
-              <a:rPr sz="1000" b="0" i="0">
-                <a:solidFill>
-                  <a:srgbClr val="8A94A0"/>
-                </a:solidFill>
-                <a:latin typeface="Calibri"/>
-              </a:rPr>
-              <a:t>HDI levels → differences (collapsed)</a:t>
+              <a:t>Health, trust and education are all significant on people, in almost every country. The ordering is the surprise: interpersonal trust is second, ahead of education, and it is the one domain of the three that neither development framework collects.</a:t>
             </a:r>
           </a:p>
         </p:txBody>
@@ -6306,7 +6309,7 @@
                 </a:solidFill>
                 <a:latin typeface="Consolas"/>
               </a:rPr>
-              <a:t>THREE QUESTIONS ABOUT MEASUREMENT</a:t>
+              <a:t>WHERE THIS STARTS</a:t>
             </a:r>
           </a:p>
         </p:txBody>
@@ -6351,7 +6354,7 @@
                 </a:solidFill>
                 <a:latin typeface="Georgia"/>
               </a:rPr>
-              <a:t>What actually matters for individual lived experience, and are development frameworks measuring it?</a:t>
+              <a:t>The SDG paper found something odd. This is the walk through what it turned out to mean.</a:t>
             </a:r>
           </a:p>
         </p:txBody>
@@ -6396,7 +6399,7 @@
                 </a:solidFill>
                 <a:latin typeface="Calibri"/>
               </a:rPr>
-              <a:t>Development measurement has a wellbeing problem. Frameworks like the SDG and HDI were built to track progress on development goals, not to understand what predicts how people experience their lives. But if development is meant to improve wellbeing, we should ask: Do the frameworks capture what actually matters? What does matter at the individual level? And if they don't align, how should development measurement change?</a:t>
+              <a:t>In the SDG paper, development indicators predict happiness strongly between countries and almost not at all within them year to year. Thirty of 42 countries are significant in levels; two are in differences. The obvious dismissal is that this says more about the SDG framework than about the world — 661 series, uneven coverage, seventeen goals of wildly different maturity.</a:t>
             </a:r>
           </a:p>
           <a:p>
@@ -6418,7 +6421,7 @@
                 </a:solidFill>
                 <a:latin typeface="Calibri"/>
               </a:rPr>
-              <a:t>The SDG paper under review provides the opening: the association between development indicators and happiness is strong between countries but nearly absent within them year-to-year. Thirty of 42 countries are significant in levels. Two are in differences. The obvious dismissal: the SDG framework is sprawling and unevenly covered; a null says as much about the framework as the world.</a:t>
+              <a:t>So we tested that dismissal. Swap the framework for the HDI. Swap the Cantril ladder for the European Social Survey. Go one spatial scale down to subnational regions. The collapse survives all three swaps, which means it is a property of the design, not of the SDGs — and it means the levels are where the signal actually lives.</a:t>
             </a:r>
           </a:p>
           <a:p>
@@ -6440,7 +6443,29 @@
                 </a:solidFill>
                 <a:latin typeface="Calibri"/>
               </a:rPr>
-              <a:t>This commentary answers the three questions by testing them across frameworks. We replicate the collapse on the HDI, test it against individual-level wellbeing data (the ESS), and ask what domains actually predict life satisfaction when measured at the right level and resolution. The answer: education, health, and social trust all matter. But which framework sees them depends entirely on construction choices—which construct you count, which variable you measure, which domains you collect. Based on that evidence, we suggest how development measurement could evolve.</a:t>
+              <a:t>That licenses the next question. If levels are where development and wellbeing meet, which parts of development are doing the work? In the frameworks, health and education both register — but only once you stop pooling education's 35 series together. Then we ask the same question of the ESS, where the domains are measured on people rather than on national aggregates, and a third domain appears that neither framework collects: social trust.</a:t>
+            </a:r>
+          </a:p>
+          <a:p>
+            <a:pPr>
+              <a:lnSpc>
+                <a:spcPct val="134000"/>
+              </a:lnSpc>
+              <a:spcBef>
+                <a:spcPts val="0"/>
+              </a:spcBef>
+              <a:spcAft>
+                <a:spcPts val="1200"/>
+              </a:spcAft>
+            </a:pPr>
+            <a:r>
+              <a:rPr sz="1050" b="0" i="0">
+                <a:solidFill>
+                  <a:srgbClr val="5A6068"/>
+                </a:solidFill>
+                <a:latin typeface="Calibri"/>
+              </a:rPr>
+              <a:t>The last act is what that implies. Not that the SDGs and HDI are bad instruments — they do the job they were built for. The narrower claim is that they may not be capturing what shapes lived experience at the individual level, and the evidence points to fairly specific things one could change about that.</a:t>
             </a:r>
           </a:p>
         </p:txBody>
@@ -6539,8 +6564,8 @@
         </p:nvSpPr>
         <p:spPr>
           <a:xfrm>
-            <a:off x="6720840" y="1170432"/>
-            <a:ext cx="502920" cy="457200"/>
+            <a:off x="6720840" y="1152144"/>
+            <a:ext cx="658368" cy="457200"/>
           </a:xfrm>
           <a:prstGeom prst="rect">
             <a:avLst/>
@@ -6581,8 +6606,8 @@
         </p:nvSpPr>
         <p:spPr>
           <a:xfrm>
-            <a:off x="7360920" y="1170432"/>
-            <a:ext cx="4206240" cy="1097280"/>
+            <a:off x="7498080" y="1152144"/>
+            <a:ext cx="4069080" cy="1097280"/>
           </a:xfrm>
           <a:prstGeom prst="rect">
             <a:avLst/>
@@ -6604,19 +6629,19 @@
               </a:spcAft>
             </a:pPr>
             <a:r>
-              <a:rPr sz="1350" b="1" i="0">
+              <a:rPr sz="1200" b="1" i="0">
                 <a:solidFill>
                   <a:srgbClr val="14171C"/>
                 </a:solidFill>
                 <a:latin typeface="Calibri"/>
               </a:rPr>
-              <a:t>The levels-to-differences collapse is universal.</a:t>
+              <a:t>The collapse is real, and it is not about the SDGs.</a:t>
             </a:r>
           </a:p>
           <a:p>
             <a:pPr>
               <a:lnSpc>
-                <a:spcPct val="125000"/>
+                <a:spcPct val="122000"/>
               </a:lnSpc>
               <a:spcBef>
                 <a:spcPts val="0"/>
@@ -6626,13 +6651,13 @@
               </a:spcAft>
             </a:pPr>
             <a:r>
-              <a:rPr sz="1100" b="0" i="0">
+              <a:rPr sz="950" b="0" i="0">
                 <a:solidFill>
                   <a:srgbClr val="5A6068"/>
                 </a:solidFill>
                 <a:latin typeface="Calibri"/>
               </a:rPr>
-              <a:t>Replicate it on the HDI, against a second wellbeing survey, and one spatial scale down. It holds every time — except in ESS, where individual-level data is responsive to change.</a:t>
+              <a:t>Swap the framework, the wellbeing measure, and the spatial scale. Levels hold every time; differences go to almost nothing every time. So analyse the levels.</a:t>
             </a:r>
           </a:p>
         </p:txBody>
@@ -6645,7 +6670,7 @@
         </p:nvSpPr>
         <p:spPr>
           <a:xfrm>
-            <a:off x="6720840" y="2350008"/>
+            <a:off x="6720840" y="2121408"/>
             <a:ext cx="4846320" cy="9525"/>
           </a:xfrm>
           <a:prstGeom prst="rect">
@@ -6689,8 +6714,8 @@
         </p:nvSpPr>
         <p:spPr>
           <a:xfrm>
-            <a:off x="6720840" y="2496312"/>
-            <a:ext cx="502920" cy="457200"/>
+            <a:off x="6720840" y="2249424"/>
+            <a:ext cx="658368" cy="457200"/>
           </a:xfrm>
           <a:prstGeom prst="rect">
             <a:avLst/>
@@ -6731,8 +6756,8 @@
         </p:nvSpPr>
         <p:spPr>
           <a:xfrm>
-            <a:off x="7360920" y="2496312"/>
-            <a:ext cx="4206240" cy="1097280"/>
+            <a:off x="7498080" y="2249424"/>
+            <a:ext cx="4069080" cy="1097280"/>
           </a:xfrm>
           <a:prstGeom prst="rect">
             <a:avLst/>
@@ -6754,19 +6779,19 @@
               </a:spcAft>
             </a:pPr>
             <a:r>
-              <a:rPr sz="1350" b="1" i="0">
+              <a:rPr sz="1200" b="1" i="0">
                 <a:solidFill>
                   <a:srgbClr val="14171C"/>
                 </a:solidFill>
                 <a:latin typeface="Calibri"/>
               </a:rPr>
-              <a:t>At the levels: what actually matters for lived experience?</a:t>
+              <a:t>At the levels, health and education carry the frameworks.</a:t>
             </a:r>
           </a:p>
           <a:p>
             <a:pPr>
               <a:lnSpc>
-                <a:spcPct val="125000"/>
+                <a:spcPct val="122000"/>
               </a:lnSpc>
               <a:spcBef>
                 <a:spcPts val="0"/>
@@ -6776,13 +6801,13 @@
               </a:spcAft>
             </a:pPr>
             <a:r>
-              <a:rPr sz="1100" b="0" i="0">
+              <a:rPr sz="950" b="0" i="0">
                 <a:solidFill>
                   <a:srgbClr val="5A6068"/>
                 </a:solidFill>
                 <a:latin typeface="Calibri"/>
               </a:rPr>
-              <a:t>Three domains predict life satisfaction: education, health, and social trust. But frameworks see them differently because of construction choices, variable saturation, or missing coverage. This is what measurement shows matters.</a:t>
+              <a:t>The HDI's five components and the SDGs' seventeen goals, ranked. Health is 4th of 17. Education looks 12th — until you unpool it.</a:t>
             </a:r>
           </a:p>
         </p:txBody>
@@ -6795,7 +6820,7 @@
         </p:nvSpPr>
         <p:spPr>
           <a:xfrm>
-            <a:off x="6720840" y="3675888"/>
+            <a:off x="6720840" y="3218688"/>
             <a:ext cx="4846320" cy="9525"/>
           </a:xfrm>
           <a:prstGeom prst="rect">
@@ -6839,36 +6864,36 @@
         </p:nvSpPr>
         <p:spPr>
           <a:xfrm>
-            <a:off x="6720840" y="3822192"/>
-            <a:ext cx="502920" cy="457200"/>
-          </a:xfrm>
-          <a:prstGeom prst="rect">
-            <a:avLst/>
-          </a:prstGeom>
-          <a:noFill/>
-        </p:spPr>
-        <p:txBody>
-          <a:bodyPr wrap="square" lIns="0" rIns="0" tIns="0" bIns="0">
-            <a:spAutoFit/>
-          </a:bodyPr>
-          <a:lstStyle/>
-          <a:p>
-            <a:pPr>
-              <a:spcBef>
-                <a:spcPts val="0"/>
-              </a:spcBef>
-              <a:spcAft>
-                <a:spcPts val="0"/>
-              </a:spcAft>
-            </a:pPr>
-            <a:r>
-              <a:rPr sz="2000" b="0" i="0">
+            <a:off x="6720840" y="3346704"/>
+            <a:ext cx="658368" cy="457200"/>
+          </a:xfrm>
+          <a:prstGeom prst="rect">
+            <a:avLst/>
+          </a:prstGeom>
+          <a:noFill/>
+        </p:spPr>
+        <p:txBody>
+          <a:bodyPr wrap="square" lIns="0" rIns="0" tIns="0" bIns="0">
+            <a:spAutoFit/>
+          </a:bodyPr>
+          <a:lstStyle/>
+          <a:p>
+            <a:pPr>
+              <a:spcBef>
+                <a:spcPts val="0"/>
+              </a:spcBef>
+              <a:spcAft>
+                <a:spcPts val="0"/>
+              </a:spcAft>
+            </a:pPr>
+            <a:r>
+              <a:rPr sz="1700" b="0" i="0">
                 <a:solidFill>
                   <a:srgbClr val="17549E"/>
                 </a:solidFill>
                 <a:latin typeface="Georgia"/>
               </a:rPr>
-              <a:t>III</a:t>
+              <a:t>II-a</a:t>
             </a:r>
           </a:p>
         </p:txBody>
@@ -6881,8 +6906,8 @@
         </p:nvSpPr>
         <p:spPr>
           <a:xfrm>
-            <a:off x="7360920" y="3822192"/>
-            <a:ext cx="4206240" cy="1097280"/>
+            <a:off x="7498080" y="3346704"/>
+            <a:ext cx="4069080" cy="1097280"/>
           </a:xfrm>
           <a:prstGeom prst="rect">
             <a:avLst/>
@@ -6904,19 +6929,19 @@
               </a:spcAft>
             </a:pPr>
             <a:r>
-              <a:rPr sz="1350" b="1" i="0">
+              <a:rPr sz="1200" b="1" i="0">
                 <a:solidFill>
                   <a:srgbClr val="14171C"/>
                 </a:solidFill>
                 <a:latin typeface="Calibri"/>
               </a:rPr>
-              <a:t>Why measurement type matters: within-country evidence.</a:t>
+              <a:t>Measure the same domains on people, and a third one appears.</a:t>
             </a:r>
           </a:p>
           <a:p>
             <a:pPr>
               <a:lnSpc>
-                <a:spcPct val="125000"/>
+                <a:spcPct val="122000"/>
               </a:lnSpc>
               <a:spcBef>
                 <a:spcPts val="0"/>
@@ -6926,13 +6951,13 @@
               </a:spcAft>
             </a:pPr>
             <a:r>
-              <a:rPr sz="1100" b="0" i="0">
+              <a:rPr sz="950" b="0" i="0">
                 <a:solidFill>
                   <a:srgbClr val="5A6068"/>
                 </a:solidFill>
                 <a:latin typeface="Calibri"/>
               </a:rPr>
-              <a:t>Individual-level, self-reported data captures year-to-year change that administrative frameworks miss. Development frameworks measure at the wrong temporal and individual resolution to see lived experience.</a:t>
+              <a:t>In the ESS, health, education and social trust are all significant within countries. Trust is second strongest — and neither framework collects it.</a:t>
             </a:r>
           </a:p>
         </p:txBody>
@@ -6945,7 +6970,7 @@
         </p:nvSpPr>
         <p:spPr>
           <a:xfrm>
-            <a:off x="6720840" y="5001768"/>
+            <a:off x="6720840" y="4315968"/>
             <a:ext cx="4846320" cy="9525"/>
           </a:xfrm>
           <a:prstGeom prst="rect">
@@ -6989,8 +7014,8 @@
         </p:nvSpPr>
         <p:spPr>
           <a:xfrm>
-            <a:off x="6720840" y="5148072"/>
-            <a:ext cx="502920" cy="457200"/>
+            <a:off x="6720840" y="4443984"/>
+            <a:ext cx="658368" cy="457200"/>
           </a:xfrm>
           <a:prstGeom prst="rect">
             <a:avLst/>
@@ -7018,6 +7043,156 @@
                 </a:solidFill>
                 <a:latin typeface="Georgia"/>
               </a:rPr>
+              <a:t>III</a:t>
+            </a:r>
+          </a:p>
+        </p:txBody>
+      </p:sp>
+      <p:sp>
+        <p:nvSpPr>
+          <p:cNvPr id="17" name="TextBox 16"/>
+          <p:cNvSpPr txBox="1"/>
+          <p:nvPr/>
+        </p:nvSpPr>
+        <p:spPr>
+          <a:xfrm>
+            <a:off x="7498080" y="4443984"/>
+            <a:ext cx="4069080" cy="1097280"/>
+          </a:xfrm>
+          <a:prstGeom prst="rect">
+            <a:avLst/>
+          </a:prstGeom>
+          <a:noFill/>
+        </p:spPr>
+        <p:txBody>
+          <a:bodyPr wrap="square" lIns="0" rIns="0" tIns="0" bIns="0">
+            <a:spAutoFit/>
+          </a:bodyPr>
+          <a:lstStyle/>
+          <a:p>
+            <a:pPr>
+              <a:spcBef>
+                <a:spcPts val="0"/>
+              </a:spcBef>
+              <a:spcAft>
+                <a:spcPts val="300"/>
+              </a:spcAft>
+            </a:pPr>
+            <a:r>
+              <a:rPr sz="1200" b="1" i="0">
+                <a:solidFill>
+                  <a:srgbClr val="14171C"/>
+                </a:solidFill>
+                <a:latin typeface="Calibri"/>
+              </a:rPr>
+              <a:t>Three domains, three different reasons frameworks lose them.</a:t>
+            </a:r>
+          </a:p>
+          <a:p>
+            <a:pPr>
+              <a:lnSpc>
+                <a:spcPct val="122000"/>
+              </a:lnSpc>
+              <a:spcBef>
+                <a:spcPts val="0"/>
+              </a:spcBef>
+              <a:spcAft>
+                <a:spcPts val="0"/>
+              </a:spcAft>
+            </a:pPr>
+            <a:r>
+              <a:rPr sz="950" b="0" i="0">
+                <a:solidFill>
+                  <a:srgbClr val="5A6068"/>
+                </a:solidFill>
+                <a:latin typeface="Calibri"/>
+              </a:rPr>
+              <a:t>Wrong construct pooled together, a variable that has stopped varying, and a domain that was never collected at all.</a:t>
+            </a:r>
+          </a:p>
+        </p:txBody>
+      </p:sp>
+      <p:sp>
+        <p:nvSpPr>
+          <p:cNvPr id="18" name="Rectangle 17"/>
+          <p:cNvSpPr/>
+          <p:nvPr/>
+        </p:nvSpPr>
+        <p:spPr>
+          <a:xfrm>
+            <a:off x="6720840" y="5413248"/>
+            <a:ext cx="4846320" cy="9525"/>
+          </a:xfrm>
+          <a:prstGeom prst="rect">
+            <a:avLst/>
+          </a:prstGeom>
+          <a:solidFill>
+            <a:srgbClr val="CDD3DB"/>
+          </a:solidFill>
+          <a:ln>
+            <a:noFill/>
+          </a:ln>
+          <a:effectLst/>
+        </p:spPr>
+        <p:style>
+          <a:lnRef idx="1">
+            <a:schemeClr val="accent1"/>
+          </a:lnRef>
+          <a:fillRef idx="3">
+            <a:schemeClr val="accent1"/>
+          </a:fillRef>
+          <a:effectRef idx="2">
+            <a:schemeClr val="accent1"/>
+          </a:effectRef>
+          <a:fontRef idx="minor">
+            <a:schemeClr val="lt1"/>
+          </a:fontRef>
+        </p:style>
+        <p:txBody>
+          <a:bodyPr rtlCol="0" anchor="ctr"/>
+          <a:lstStyle/>
+          <a:p>
+            <a:pPr algn="ctr"/>
+          </a:p>
+        </p:txBody>
+      </p:sp>
+      <p:sp>
+        <p:nvSpPr>
+          <p:cNvPr id="19" name="TextBox 18"/>
+          <p:cNvSpPr txBox="1"/>
+          <p:nvPr/>
+        </p:nvSpPr>
+        <p:spPr>
+          <a:xfrm>
+            <a:off x="6720840" y="5541264"/>
+            <a:ext cx="658368" cy="457200"/>
+          </a:xfrm>
+          <a:prstGeom prst="rect">
+            <a:avLst/>
+          </a:prstGeom>
+          <a:noFill/>
+        </p:spPr>
+        <p:txBody>
+          <a:bodyPr wrap="square" lIns="0" rIns="0" tIns="0" bIns="0">
+            <a:spAutoFit/>
+          </a:bodyPr>
+          <a:lstStyle/>
+          <a:p>
+            <a:pPr>
+              <a:spcBef>
+                <a:spcPts val="0"/>
+              </a:spcBef>
+              <a:spcAft>
+                <a:spcPts val="0"/>
+              </a:spcAft>
+            </a:pPr>
+            <a:r>
+              <a:rPr sz="2000" b="0" i="0">
+                <a:solidFill>
+                  <a:srgbClr val="17549E"/>
+                </a:solidFill>
+                <a:latin typeface="Georgia"/>
+              </a:rPr>
               <a:t>IV</a:t>
             </a:r>
           </a:p>
@@ -7025,14 +7200,14 @@
       </p:sp>
       <p:sp>
         <p:nvSpPr>
-          <p:cNvPr id="17" name="TextBox 16"/>
-          <p:cNvSpPr txBox="1"/>
-          <p:nvPr/>
-        </p:nvSpPr>
-        <p:spPr>
-          <a:xfrm>
-            <a:off x="7360920" y="5148072"/>
-            <a:ext cx="4206240" cy="1097280"/>
+          <p:cNvPr id="20" name="TextBox 19"/>
+          <p:cNvSpPr txBox="1"/>
+          <p:nvPr/>
+        </p:nvSpPr>
+        <p:spPr>
+          <a:xfrm>
+            <a:off x="7498080" y="5541264"/>
+            <a:ext cx="4069080" cy="1097280"/>
           </a:xfrm>
           <a:prstGeom prst="rect">
             <a:avLst/>
@@ -7054,19 +7229,19 @@
               </a:spcAft>
             </a:pPr>
             <a:r>
-              <a:rPr sz="1350" b="1" i="0">
+              <a:rPr sz="1200" b="1" i="0">
                 <a:solidFill>
                   <a:srgbClr val="14171C"/>
                 </a:solidFill>
                 <a:latin typeface="Calibri"/>
               </a:rPr>
-              <a:t>How development frameworks could evolve.</a:t>
+              <a:t>What this could mean for development frameworks.</a:t>
             </a:r>
           </a:p>
           <a:p>
             <a:pPr>
               <a:lnSpc>
-                <a:spcPct val="125000"/>
+                <a:spcPct val="122000"/>
               </a:lnSpc>
               <a:spcBef>
                 <a:spcPts val="0"/>
@@ -7076,13 +7251,13 @@
               </a:spcAft>
             </a:pPr>
             <a:r>
-              <a:rPr sz="1100" b="0" i="0">
+              <a:rPr sz="950" b="0" i="0">
                 <a:solidFill>
                   <a:srgbClr val="5A6068"/>
                 </a:solidFill>
                 <a:latin typeface="Calibri"/>
               </a:rPr>
-              <a:t>Based on what matters for individual wellbeing, specific recommendations for education, health, and social trust. A roadmap for aligning development measurement with what research shows actually predicts lived experience.</a:t>
+              <a:t>Not a verdict on the SDGs or HDI. A set of specific, evidence-backed things to change if lived experience is meant to be part of what they track.</a:t>
             </a:r>
           </a:p>
         </p:txBody>
@@ -7101,7 +7276,7 @@
     <p:bg>
       <p:bgPr>
         <a:solidFill>
-          <a:srgbClr val="FCFCFB"/>
+          <a:srgbClr val="14171C"/>
         </a:solidFill>
         <a:effectLst/>
       </p:bgPr>
@@ -7121,21 +7296,261 @@
         </p:nvSpPr>
         <p:spPr>
           <a:xfrm>
-            <a:off x="566928" y="502920"/>
-            <a:ext cx="4160520" cy="274320"/>
-          </a:xfrm>
-          <a:prstGeom prst="rect">
-            <a:avLst/>
-          </a:prstGeom>
-          <a:noFill/>
-        </p:spPr>
-        <p:txBody>
-          <a:bodyPr wrap="square" lIns="0" rIns="0" tIns="0" bIns="0">
-            <a:spAutoFit/>
-          </a:bodyPr>
-          <a:lstStyle/>
-          <a:p>
-            <a:pPr>
+            <a:off x="7680960" y="822960"/>
+            <a:ext cx="3840480" cy="4114800"/>
+          </a:xfrm>
+          <a:prstGeom prst="rect">
+            <a:avLst/>
+          </a:prstGeom>
+          <a:noFill/>
+        </p:spPr>
+        <p:txBody>
+          <a:bodyPr wrap="square" lIns="0" rIns="0" tIns="0" bIns="0">
+            <a:spAutoFit/>
+          </a:bodyPr>
+          <a:lstStyle/>
+          <a:p>
+            <a:pPr algn="r">
+              <a:spcBef>
+                <a:spcPts val="0"/>
+              </a:spcBef>
+              <a:spcAft>
+                <a:spcPts val="0"/>
+              </a:spcAft>
+            </a:pPr>
+            <a:r>
+              <a:rPr sz="20000" b="0" i="0">
+                <a:solidFill>
+                  <a:srgbClr val="2A3340"/>
+                </a:solidFill>
+                <a:latin typeface="Georgia"/>
+              </a:rPr>
+              <a:t>III</a:t>
+            </a:r>
+          </a:p>
+        </p:txBody>
+      </p:sp>
+      <p:sp>
+        <p:nvSpPr>
+          <p:cNvPr id="3" name="Rectangle 2"/>
+          <p:cNvSpPr/>
+          <p:nvPr/>
+        </p:nvSpPr>
+        <p:spPr>
+          <a:xfrm>
+            <a:off x="566928" y="1371600"/>
+            <a:ext cx="7315200" cy="25400"/>
+          </a:xfrm>
+          <a:prstGeom prst="rect">
+            <a:avLst/>
+          </a:prstGeom>
+          <a:solidFill>
+            <a:srgbClr val="C9D8EC"/>
+          </a:solidFill>
+          <a:ln>
+            <a:noFill/>
+          </a:ln>
+          <a:effectLst/>
+        </p:spPr>
+        <p:style>
+          <a:lnRef idx="1">
+            <a:schemeClr val="accent1"/>
+          </a:lnRef>
+          <a:fillRef idx="3">
+            <a:schemeClr val="accent1"/>
+          </a:fillRef>
+          <a:effectRef idx="2">
+            <a:schemeClr val="accent1"/>
+          </a:effectRef>
+          <a:fontRef idx="minor">
+            <a:schemeClr val="lt1"/>
+          </a:fontRef>
+        </p:style>
+        <p:txBody>
+          <a:bodyPr rtlCol="0" anchor="ctr"/>
+          <a:lstStyle/>
+          <a:p>
+            <a:pPr algn="ctr"/>
+          </a:p>
+        </p:txBody>
+      </p:sp>
+      <p:sp>
+        <p:nvSpPr>
+          <p:cNvPr id="4" name="TextBox 3"/>
+          <p:cNvSpPr txBox="1"/>
+          <p:nvPr/>
+        </p:nvSpPr>
+        <p:spPr>
+          <a:xfrm>
+            <a:off x="566928" y="960120"/>
+            <a:ext cx="5486400" cy="274320"/>
+          </a:xfrm>
+          <a:prstGeom prst="rect">
+            <a:avLst/>
+          </a:prstGeom>
+          <a:noFill/>
+        </p:spPr>
+        <p:txBody>
+          <a:bodyPr wrap="square" lIns="0" rIns="0" tIns="0" bIns="0">
+            <a:spAutoFit/>
+          </a:bodyPr>
+          <a:lstStyle/>
+          <a:p>
+            <a:pPr>
+              <a:spcBef>
+                <a:spcPts val="0"/>
+              </a:spcBef>
+              <a:spcAft>
+                <a:spcPts val="0"/>
+              </a:spcAft>
+            </a:pPr>
+            <a:r>
+              <a:rPr sz="1100" b="0" i="0">
+                <a:solidFill>
+                  <a:srgbClr val="C9D8EC"/>
+                </a:solidFill>
+                <a:latin typeface="Consolas"/>
+              </a:rPr>
+              <a:t>ACT III</a:t>
+            </a:r>
+          </a:p>
+        </p:txBody>
+      </p:sp>
+      <p:sp>
+        <p:nvSpPr>
+          <p:cNvPr id="5" name="TextBox 4"/>
+          <p:cNvSpPr txBox="1"/>
+          <p:nvPr/>
+        </p:nvSpPr>
+        <p:spPr>
+          <a:xfrm>
+            <a:off x="566928" y="1783080"/>
+            <a:ext cx="7223760" cy="1828800"/>
+          </a:xfrm>
+          <a:prstGeom prst="rect">
+            <a:avLst/>
+          </a:prstGeom>
+          <a:noFill/>
+        </p:spPr>
+        <p:txBody>
+          <a:bodyPr wrap="square" lIns="0" rIns="0" tIns="0" bIns="0">
+            <a:spAutoFit/>
+          </a:bodyPr>
+          <a:lstStyle/>
+          <a:p>
+            <a:pPr>
+              <a:lnSpc>
+                <a:spcPct val="102000"/>
+              </a:lnSpc>
+              <a:spcBef>
+                <a:spcPts val="0"/>
+              </a:spcBef>
+              <a:spcAft>
+                <a:spcPts val="0"/>
+              </a:spcAft>
+            </a:pPr>
+            <a:r>
+              <a:rPr sz="4000" b="0" i="0">
+                <a:solidFill>
+                  <a:srgbClr val="FCFCFB"/>
+                </a:solidFill>
+                <a:latin typeface="Georgia"/>
+              </a:rPr>
+              <a:t>Three domains, three ways a framework loses one</a:t>
+            </a:r>
+          </a:p>
+        </p:txBody>
+      </p:sp>
+      <p:sp>
+        <p:nvSpPr>
+          <p:cNvPr id="6" name="TextBox 5"/>
+          <p:cNvSpPr txBox="1"/>
+          <p:nvPr/>
+        </p:nvSpPr>
+        <p:spPr>
+          <a:xfrm>
+            <a:off x="566928" y="3886200"/>
+            <a:ext cx="6766560" cy="1463040"/>
+          </a:xfrm>
+          <a:prstGeom prst="rect">
+            <a:avLst/>
+          </a:prstGeom>
+          <a:noFill/>
+        </p:spPr>
+        <p:txBody>
+          <a:bodyPr wrap="square" lIns="0" rIns="0" tIns="0" bIns="0">
+            <a:spAutoFit/>
+          </a:bodyPr>
+          <a:lstStyle/>
+          <a:p>
+            <a:pPr>
+              <a:lnSpc>
+                <a:spcPct val="135000"/>
+              </a:lnSpc>
+              <a:spcBef>
+                <a:spcPts val="0"/>
+              </a:spcBef>
+              <a:spcAft>
+                <a:spcPts val="0"/>
+              </a:spcAft>
+            </a:pPr>
+            <a:r>
+              <a:rPr sz="1600" b="0" i="1">
+                <a:solidFill>
+                  <a:srgbClr val="9AA4B0"/>
+                </a:solidFill>
+                <a:latin typeface="Georgia"/>
+              </a:rPr>
+              <a:t>Put the three results together and they are not three findings about three domains. They are three distinct failure modes — and they need different fixes, which is the only reason the distinction matters.</a:t>
+            </a:r>
+          </a:p>
+        </p:txBody>
+      </p:sp>
+      <p:sp>
+        <p:nvSpPr>
+          <p:cNvPr id="7" name="TextBox 6"/>
+          <p:cNvSpPr txBox="1"/>
+          <p:nvPr/>
+        </p:nvSpPr>
+        <p:spPr>
+          <a:xfrm>
+            <a:off x="566928" y="5623560"/>
+            <a:ext cx="3503066" cy="914400"/>
+          </a:xfrm>
+          <a:prstGeom prst="rect">
+            <a:avLst/>
+          </a:prstGeom>
+          <a:noFill/>
+        </p:spPr>
+        <p:txBody>
+          <a:bodyPr wrap="square" lIns="0" rIns="0" tIns="0" bIns="0">
+            <a:spAutoFit/>
+          </a:bodyPr>
+          <a:lstStyle/>
+          <a:p>
+            <a:pPr>
+              <a:spcBef>
+                <a:spcPts val="0"/>
+              </a:spcBef>
+              <a:spcAft>
+                <a:spcPts val="400"/>
+              </a:spcAft>
+            </a:pPr>
+            <a:r>
+              <a:rPr sz="2200" b="0" i="0">
+                <a:solidFill>
+                  <a:srgbClr val="FCFCFB"/>
+                </a:solidFill>
+                <a:latin typeface="Consolas"/>
+              </a:rPr>
+              <a:t>Pooled</a:t>
+            </a:r>
+          </a:p>
+          <a:p>
+            <a:pPr>
+              <a:lnSpc>
+                <a:spcPct val="120000"/>
+              </a:lnSpc>
               <a:spcBef>
                 <a:spcPts val="0"/>
               </a:spcBef>
@@ -7146,40 +7561,59 @@
             <a:r>
               <a:rPr sz="1000" b="0" i="0">
                 <a:solidFill>
-                  <a:srgbClr val="A63A30"/>
+                  <a:srgbClr val="8A94A0"/>
+                </a:solidFill>
+                <a:latin typeface="Calibri"/>
+              </a:rPr>
+              <a:t>education: the right construct averaged away</a:t>
+            </a:r>
+          </a:p>
+        </p:txBody>
+      </p:sp>
+      <p:sp>
+        <p:nvSpPr>
+          <p:cNvPr id="8" name="TextBox 7"/>
+          <p:cNvSpPr txBox="1"/>
+          <p:nvPr/>
+        </p:nvSpPr>
+        <p:spPr>
+          <a:xfrm>
+            <a:off x="4344314" y="5623560"/>
+            <a:ext cx="3503066" cy="914400"/>
+          </a:xfrm>
+          <a:prstGeom prst="rect">
+            <a:avLst/>
+          </a:prstGeom>
+          <a:noFill/>
+        </p:spPr>
+        <p:txBody>
+          <a:bodyPr wrap="square" lIns="0" rIns="0" tIns="0" bIns="0">
+            <a:spAutoFit/>
+          </a:bodyPr>
+          <a:lstStyle/>
+          <a:p>
+            <a:pPr>
+              <a:spcBef>
+                <a:spcPts val="0"/>
+              </a:spcBef>
+              <a:spcAft>
+                <a:spcPts val="400"/>
+              </a:spcAft>
+            </a:pPr>
+            <a:r>
+              <a:rPr sz="2200" b="0" i="0">
+                <a:solidFill>
+                  <a:srgbClr val="FCFCFB"/>
                 </a:solidFill>
                 <a:latin typeface="Consolas"/>
               </a:rPr>
-              <a:t>METHOD MATTERS · WHAT SURVIVES</a:t>
-            </a:r>
-          </a:p>
-        </p:txBody>
-      </p:sp>
-      <p:sp>
-        <p:nvSpPr>
-          <p:cNvPr id="3" name="TextBox 2"/>
-          <p:cNvSpPr txBox="1"/>
-          <p:nvPr/>
-        </p:nvSpPr>
-        <p:spPr>
-          <a:xfrm>
-            <a:off x="566928" y="914400"/>
-            <a:ext cx="4160520" cy="1371600"/>
-          </a:xfrm>
-          <a:prstGeom prst="rect">
-            <a:avLst/>
-          </a:prstGeom>
-          <a:noFill/>
-        </p:spPr>
-        <p:txBody>
-          <a:bodyPr wrap="square" lIns="0" rIns="0" tIns="0" bIns="0">
-            <a:spAutoFit/>
-          </a:bodyPr>
-          <a:lstStyle/>
+              <a:t>Saturated</a:t>
+            </a:r>
+          </a:p>
           <a:p>
             <a:pPr>
               <a:lnSpc>
-                <a:spcPct val="108000"/>
+                <a:spcPct val="120000"/>
               </a:lnSpc>
               <a:spcBef>
                 <a:spcPts val="0"/>
@@ -7189,169 +7623,77 @@
               </a:spcAft>
             </a:pPr>
             <a:r>
-              <a:rPr sz="2300" b="0" i="0">
-                <a:solidFill>
-                  <a:srgbClr val="14171C"/>
-                </a:solidFill>
-                <a:latin typeface="Georgia"/>
-              </a:rPr>
-              <a:t>Health survives both measurement methods. Social trust does not.</a:t>
-            </a:r>
-          </a:p>
-        </p:txBody>
-      </p:sp>
-      <p:sp>
-        <p:nvSpPr>
-          <p:cNvPr id="4" name="TextBox 3"/>
-          <p:cNvSpPr txBox="1"/>
-          <p:nvPr/>
-        </p:nvSpPr>
-        <p:spPr>
-          <a:xfrm>
-            <a:off x="566928" y="2331720"/>
-            <a:ext cx="4160520" cy="3840480"/>
-          </a:xfrm>
-          <a:prstGeom prst="rect">
-            <a:avLst/>
-          </a:prstGeom>
-          <a:noFill/>
-        </p:spPr>
-        <p:txBody>
-          <a:bodyPr wrap="square" lIns="0" rIns="0" tIns="0" bIns="0">
-            <a:spAutoFit/>
-          </a:bodyPr>
-          <a:lstStyle/>
+              <a:rPr sz="1000" b="0" i="0">
+                <a:solidFill>
+                  <a:srgbClr val="8A94A0"/>
+                </a:solidFill>
+                <a:latin typeface="Calibri"/>
+              </a:rPr>
+              <a:t>health: the chosen variable stopped varying</a:t>
+            </a:r>
+          </a:p>
+        </p:txBody>
+      </p:sp>
+      <p:sp>
+        <p:nvSpPr>
+          <p:cNvPr id="9" name="TextBox 8"/>
+          <p:cNvSpPr txBox="1"/>
+          <p:nvPr/>
+        </p:nvSpPr>
+        <p:spPr>
+          <a:xfrm>
+            <a:off x="8121700" y="5623560"/>
+            <a:ext cx="3503066" cy="914400"/>
+          </a:xfrm>
+          <a:prstGeom prst="rect">
+            <a:avLst/>
+          </a:prstGeom>
+          <a:noFill/>
+        </p:spPr>
+        <p:txBody>
+          <a:bodyPr wrap="square" lIns="0" rIns="0" tIns="0" bIns="0">
+            <a:spAutoFit/>
+          </a:bodyPr>
+          <a:lstStyle/>
+          <a:p>
+            <a:pPr>
+              <a:spcBef>
+                <a:spcPts val="0"/>
+              </a:spcBef>
+              <a:spcAft>
+                <a:spcPts val="400"/>
+              </a:spcAft>
+            </a:pPr>
+            <a:r>
+              <a:rPr sz="2200" b="0" i="0">
+                <a:solidFill>
+                  <a:srgbClr val="FCFCFB"/>
+                </a:solidFill>
+                <a:latin typeface="Consolas"/>
+              </a:rPr>
+              <a:t>Never collected</a:t>
+            </a:r>
+          </a:p>
           <a:p>
             <a:pPr>
               <a:lnSpc>
-                <a:spcPct val="132000"/>
+                <a:spcPct val="120000"/>
               </a:lnSpc>
               <a:spcBef>
                 <a:spcPts val="0"/>
               </a:spcBef>
               <a:spcAft>
-                <a:spcPts val="1100"/>
-              </a:spcAft>
-            </a:pPr>
-            <a:r>
-              <a:rPr sz="1150" b="0" i="0">
-                <a:solidFill>
-                  <a:srgbClr val="5A6068"/>
+                <a:spcPts val="0"/>
+              </a:spcAft>
+            </a:pPr>
+            <a:r>
+              <a:rPr sz="1000" b="0" i="0">
+                <a:solidFill>
+                  <a:srgbClr val="8A94A0"/>
                 </a:solidFill>
                 <a:latin typeface="Calibri"/>
               </a:rPr>
-              <a:t>A critical test: which domains actually predict wellbeing regardless of how you measure development? Health is significant in both administrative sources (SDG, 11.5% of country-indicator pairs) and self-reported sources (ESS, median R² = 0.091). This is robust. Education shows weak signal in both (SDG 3.3%, ESS R² = 0.0098), so the issue is not method-dependent but measurement-dependent. Social trust, however, only appears in self-reported data: 94% of ESS countries (median R² = 0.041) versus 1.5% of SDG16 country-pairs measuring institutional confidence instead. The three domains do not behave the same way across measurement methods.</a:t>
-            </a:r>
-          </a:p>
-        </p:txBody>
-      </p:sp>
-      <p:sp>
-        <p:nvSpPr>
-          <p:cNvPr id="5" name="TextBox 4"/>
-          <p:cNvSpPr txBox="1"/>
-          <p:nvPr/>
-        </p:nvSpPr>
-        <p:spPr>
-          <a:xfrm>
-            <a:off x="11338560" y="6263640"/>
-            <a:ext cx="548640" cy="274320"/>
-          </a:xfrm>
-          <a:prstGeom prst="rect">
-            <a:avLst/>
-          </a:prstGeom>
-          <a:noFill/>
-        </p:spPr>
-        <p:txBody>
-          <a:bodyPr wrap="square" lIns="0" rIns="0" tIns="0" bIns="0">
-            <a:spAutoFit/>
-          </a:bodyPr>
-          <a:lstStyle/>
-          <a:p>
-            <a:pPr algn="r">
-              <a:spcBef>
-                <a:spcPts val="0"/>
-              </a:spcBef>
-              <a:spcAft>
-                <a:spcPts val="0"/>
-              </a:spcAft>
-            </a:pPr>
-            <a:r>
-              <a:rPr sz="1100" b="0" i="0">
-                <a:solidFill>
-                  <a:srgbClr val="868D96"/>
-                </a:solidFill>
-                <a:latin typeface="Consolas"/>
-              </a:rPr>
-              <a:t>III</a:t>
-            </a:r>
-          </a:p>
-        </p:txBody>
-      </p:sp>
-      <p:pic>
-        <p:nvPicPr>
-          <p:cNvPr id="6" name="Picture 5" descr="health_trust_corroboration.png"/>
-          <p:cNvPicPr>
-            <a:picLocks noChangeAspect="1"/>
-          </p:cNvPicPr>
-          <p:nvPr/>
-        </p:nvPicPr>
-        <p:blipFill>
-          <a:blip r:embed="rId2"/>
-          <a:stretch>
-            <a:fillRect/>
-          </a:stretch>
-        </p:blipFill>
-        <p:spPr>
-          <a:xfrm>
-            <a:off x="5120640" y="1858518"/>
-            <a:ext cx="6537960" cy="2674620"/>
-          </a:xfrm>
-          <a:prstGeom prst="rect">
-            <a:avLst/>
-          </a:prstGeom>
-        </p:spPr>
-      </p:pic>
-      <p:sp>
-        <p:nvSpPr>
-          <p:cNvPr id="7" name="TextBox 6"/>
-          <p:cNvSpPr txBox="1"/>
-          <p:nvPr/>
-        </p:nvSpPr>
-        <p:spPr>
-          <a:xfrm>
-            <a:off x="5120640" y="5897880"/>
-            <a:ext cx="6537960" cy="731520"/>
-          </a:xfrm>
-          <a:prstGeom prst="rect">
-            <a:avLst/>
-          </a:prstGeom>
-          <a:noFill/>
-        </p:spPr>
-        <p:txBody>
-          <a:bodyPr wrap="square" lIns="0" rIns="0" tIns="0" bIns="0">
-            <a:spAutoFit/>
-          </a:bodyPr>
-          <a:lstStyle/>
-          <a:p>
-            <a:pPr>
-              <a:lnSpc>
-                <a:spcPct val="125000"/>
-              </a:lnSpc>
-              <a:spcBef>
-                <a:spcPts val="0"/>
-              </a:spcBef>
-              <a:spcAft>
-                <a:spcPts val="0"/>
-              </a:spcAft>
-            </a:pPr>
-            <a:r>
-              <a:rPr sz="900" b="0" i="0">
-                <a:solidFill>
-                  <a:srgbClr val="868D96"/>
-                </a:solidFill>
-                <a:latin typeface="Calibri"/>
-              </a:rPr>
-              <a:t>Health is robust across administrative and self-reported sources. Education is weak in both. Social trust appears only in self-reported individual-level data.</a:t>
+              <a:t>trust: no variable to choose between</a:t>
             </a:r>
           </a:p>
         </p:txBody>
@@ -7419,7 +7761,7 @@
                 </a:solidFill>
                 <a:latin typeface="Consolas"/>
               </a:rPr>
-              <a:t>WITHIN-COUNTRY EVIDENCE</a:t>
+              <a:t>THE SYNTHESIS</a:t>
             </a:r>
           </a:p>
         </p:txBody>
@@ -7464,7 +7806,7 @@
                 </a:solidFill>
                 <a:latin typeface="Georgia"/>
               </a:rPr>
-              <a:t>Individual-level, self-reported data captures year-to-year change that administrative frameworks miss</a:t>
+              <a:t>A pooling problem, a saturation problem, and a coverage gap</a:t>
             </a:r>
           </a:p>
         </p:txBody>
@@ -7503,13 +7845,13 @@
               </a:spcAft>
             </a:pPr>
             <a:r>
-              <a:rPr sz="975" b="0" i="0">
+              <a:rPr sz="1150" b="0" i="0">
                 <a:solidFill>
                   <a:srgbClr val="5A6068"/>
                 </a:solidFill>
                 <a:latin typeface="Calibri"/>
               </a:rPr>
-              <a:t>Here is the critical observation that reshapes the question: unlike SDG (71% levels → 5% differences) and HDI (42% → 2%), the ESS shows 69% levels → 64% differences. The association persists within countries over time. This is not because development frameworks are poorly designed; it is because they measure aggregate, administrative data at long intervals (annual at best for HDI and SDG). Individual survey responses capture year-to-year variation in how people experience their lives.</a:t>
+              <a:t>Education is a pooling problem. The framework measures the right thing — access and participation, 12.7% — and then averages it together with 18 parity-ratio series that carry no wellbeing signal, landing at 3.3%. The signal is present in the data and absent from the published number.</a:t>
             </a:r>
           </a:p>
           <a:p>
@@ -7525,13 +7867,13 @@
               </a:spcAft>
             </a:pPr>
             <a:r>
-              <a:rPr sz="975" b="0" i="0">
+              <a:rPr sz="1150" b="0" i="0">
                 <a:solidFill>
                   <a:srgbClr val="5A6068"/>
                 </a:solidFill>
                 <a:latin typeface="Calibri"/>
               </a:rPr>
-              <a:t>This matters for social trust most of all. At the country level, SDG has almost no trust coverage; in the HDI, none. But at the individual level, within countries, ESS shows trust is significant in 94% of countries and drives year-to-year change in how satisfied people report being. The three domains emerge not because the frameworks reveal them, but because ESS measures them where people actually experience variation: in themselves, over time.</a:t>
+              <a:t>Health is a saturation problem. The domain is the strongest of the three on people, but the HDI's proxy for it has run out of range across the countries it covers, so it comes last of five components. A different variable in the same domain reverses the result.</a:t>
             </a:r>
           </a:p>
           <a:p>
@@ -7547,13 +7889,13 @@
               </a:spcAft>
             </a:pPr>
             <a:r>
-              <a:rPr sz="975" b="0" i="0">
+              <a:rPr sz="1150" b="0" i="0">
                 <a:solidFill>
                   <a:srgbClr val="5A6068"/>
                 </a:solidFill>
                 <a:latin typeface="Calibri"/>
               </a:rPr>
-              <a:t>The caveats are substantial: 36 European countries, self-reported measures, annual cycles. But the implication is clear. Development frameworks' blindness to social trust is not because trust does not matter for wellbeing; it is because development was never designed to measure individual experience at the temporal resolution where people change.</a:t>
+              <a:t>Trust is a coverage gap, and it is the one that no amount of better construction reaches. You cannot unpool a series that does not exist or re-specify a variable that was never collected. The only fix available is deciding to collect it.</a:t>
             </a:r>
           </a:p>
         </p:txBody>
@@ -7602,7 +7944,7 @@
       </p:sp>
       <p:pic>
         <p:nvPicPr>
-          <p:cNvPr id="6" name="Picture 5" descr="collapse_shdi_ess_regional.png"/>
+          <p:cNvPr id="6" name="Picture 5" descr="domain_scorecard.png"/>
           <p:cNvPicPr>
             <a:picLocks noChangeAspect="1"/>
           </p:cNvPicPr>
@@ -7616,8 +7958,8 @@
         </p:blipFill>
         <p:spPr>
           <a:xfrm>
-            <a:off x="5546146" y="658368"/>
-            <a:ext cx="5686948" cy="5074919"/>
+            <a:off x="5120640" y="1469807"/>
+            <a:ext cx="6537960" cy="3452042"/>
           </a:xfrm>
           <a:prstGeom prst="rect">
             <a:avLst/>
@@ -7664,7 +8006,7 @@
                 </a:solidFill>
                 <a:latin typeface="Calibri"/>
               </a:rPr>
-              <a:t>Regional collapse: 167 subnational regions within ESS countries, levels vs. differences. The collapse persists at regional scale, confirming it is not an artifact of national aggregation.</a:t>
+              <a:t>Which framework can test which domain, and whether the test returns a signal. Grey is not a weak result — it is no result available.</a:t>
             </a:r>
           </a:p>
         </p:txBody>
@@ -7732,7 +8074,7 @@
                 </a:solidFill>
                 <a:latin typeface="Consolas"/>
               </a:rPr>
-              <a:t>WHY SDG'S TRUST DATA DOESN'T WORK</a:t>
+              <a:t>WHAT SURVIVES WHICH METHOD</a:t>
             </a:r>
           </a:p>
         </p:txBody>
@@ -7777,7 +8119,7 @@
                 </a:solidFill>
                 <a:latin typeface="Georgia"/>
               </a:rPr>
-              <a:t>SDG16 measures institutional confidence, not interpersonal trust, and the signal is weak</a:t>
+              <a:t>Health is robust to how you measure it. Trust only appears when you ask people.</a:t>
             </a:r>
           </a:p>
         </p:txBody>
@@ -7816,13 +8158,13 @@
               </a:spcAft>
             </a:pPr>
             <a:r>
-              <a:rPr sz="950" b="0" i="0">
+              <a:rPr sz="1150" b="0" i="0">
                 <a:solidFill>
                   <a:srgbClr val="5A6068"/>
                 </a:solidFill>
                 <a:latin typeface="Calibri"/>
               </a:rPr>
-              <a:t>The SDG framework carries 13 trust-adjacent series under Goal 16, but the detail reveals why they fail. First, coverage: only nine of thirteen can be tested across countries, and four are significant — weaker than the development indicators the frameworks already carry. Second, construct: bribery (individuals), bribery (firms), and decision-making inclusiveness predict the Cantril ladder; satisfaction with healthcare, government services, and secondary education do not. These measure satisfaction with institutions, not trust in people.</a:t>
+              <a:t>One more cut, because it separates the failure modes cleanly. Health registers in administrative sources (SDG3, 11.5%) and in self-reported ones (ESS, median R² 0.092) alike — it is robust to measurement method, and the HDI's weak result is specific to life expectancy rather than to the domain.</a:t>
             </a:r>
           </a:p>
           <a:p>
@@ -7838,13 +8180,13 @@
               </a:spcAft>
             </a:pPr>
             <a:r>
-              <a:rPr sz="950" b="0" i="0">
+              <a:rPr sz="1150" b="0" i="0">
                 <a:solidFill>
                   <a:srgbClr val="5A6068"/>
                 </a:solidFill>
                 <a:latin typeface="Calibri"/>
               </a:rPr>
-              <a:t>More critically, when you control for income — net of log GNI per capita — nearly all SDG trust series disappear. Bribery stays significant, but satisfaction with government, services, and education vanishes. This is a known artifact of subjective institutional scales across income levels; the same survey administered at different income levels produces structural differences in response patterns unrelated to trust itself. Interpersonal trust, by contrast, shows robust signal independent of income controls.</a:t>
+              <a:t>Education registers in both too, once unpooled, so its problem is construction rather than method. Trust registers in one and only one: 97% of ESS countries against 1.5% of SDG16 country-indicator pairs measuring a different construct.</a:t>
             </a:r>
           </a:p>
           <a:p>
@@ -7860,13 +8202,13 @@
               </a:spcAft>
             </a:pPr>
             <a:r>
-              <a:rPr sz="950" b="0" i="0">
+              <a:rPr sz="1150" b="0" i="0">
                 <a:solidFill>
                   <a:srgbClr val="5A6068"/>
                 </a:solidFill>
                 <a:latin typeface="Calibri"/>
               </a:rPr>
-              <a:t>This is not a flaw in the SDG framework's execution. It reflects a fundamental choice: development frameworks measure institutions and systems, not personal relationships. Social trust emerges in individual-level, self-reported data because that is where it lives — in how people experience their immediate world.</a:t>
+              <a:t>That asymmetry is the argument for why level of measurement matters, and not just which indicator you pick. Some things about a life are legible in national aggregates. Whether you think your neighbours can be trusted is not one of them.</a:t>
             </a:r>
           </a:p>
         </p:txBody>
@@ -7915,7 +8257,7 @@
       </p:sp>
       <p:pic>
         <p:nvPicPr>
-          <p:cNvPr id="6" name="Picture 5" descr="K1_sdg_trust_cross_section.png"/>
+          <p:cNvPr id="6" name="Picture 5" descr="health_trust_corroboration.png"/>
           <p:cNvPicPr>
             <a:picLocks noChangeAspect="1"/>
           </p:cNvPicPr>
@@ -7929,8 +8271,8 @@
         </p:blipFill>
         <p:spPr>
           <a:xfrm>
-            <a:off x="5120640" y="1690377"/>
-            <a:ext cx="6537960" cy="3010902"/>
+            <a:off x="5120640" y="1858518"/>
+            <a:ext cx="6537960" cy="2674620"/>
           </a:xfrm>
           <a:prstGeom prst="rect">
             <a:avLst/>
@@ -7977,7 +8319,7 @@
                 </a:solidFill>
                 <a:latin typeface="Calibri"/>
               </a:rPr>
-              <a:t>SDG16 trust series can barely be tested (9 of 13 measurable, 4 significant) and collapse when controlled for income. Panel (b) shows bribery persists but satisfaction measures disappear.</a:t>
+              <a:t>Health corroborates across administrative and self-reported sources. Trust appears only in individual-level data.</a:t>
             </a:r>
           </a:p>
         </p:txBody>
@@ -8134,7 +8476,7 @@
                 </a:solidFill>
                 <a:latin typeface="Georgia"/>
               </a:rPr>
-              <a:t>The three domains predict wellbeing differently depending on where and how you measure. Development frameworks' blindness is not incurable; it is structural. Frameworks designed for tracking aggregate national progress cannot see individual experience responsive to change.</a:t>
+              <a:t>None of this is a criticism of frameworks built to track development. It is the observation that which domain looks consequential for lived experience depends on construction choices made for other reasons — and that one domain is missing outright.</a:t>
             </a:r>
           </a:p>
         </p:txBody>
@@ -8173,8 +8515,8 @@
         </p:nvSpPr>
         <p:spPr>
           <a:xfrm>
-            <a:off x="8229600" y="822960"/>
-            <a:ext cx="3291840" cy="4114800"/>
+            <a:off x="7680960" y="822960"/>
+            <a:ext cx="3840480" cy="4114800"/>
           </a:xfrm>
           <a:prstGeom prst="rect">
             <a:avLst/>
@@ -8333,7 +8675,7 @@
                 </a:solidFill>
                 <a:latin typeface="Georgia"/>
               </a:rPr>
-              <a:t>What this means for development frameworks</a:t>
+              <a:t>What this could mean for development frameworks</a:t>
             </a:r>
           </a:p>
         </p:txBody>
@@ -8372,13 +8714,13 @@
               </a:spcAft>
             </a:pPr>
             <a:r>
-              <a:rPr sz="1550" b="0" i="1">
+              <a:rPr sz="1600" b="0" i="1">
                 <a:solidFill>
                   <a:srgbClr val="9AA4B0"/>
                 </a:solidFill>
                 <a:latin typeface="Georgia"/>
               </a:rPr>
-              <a:t>The disconnect is real and worth naming. Development frameworks have done their job of tracking progress on development. But the components that predict individual lived experience are ones these frameworks are not currently built to see — because of construction choices, variable saturation, or coverage that was never collected.</a:t>
+              <a:t>The SDGs and the HDI do the job they were built for, and none of this evidence says otherwise. The narrower claim is that they may not be capturing what shapes lived experience at the individual level — and that the evidence points to reasonably specific things one could do about it.</a:t>
             </a:r>
           </a:p>
         </p:txBody>
@@ -8420,7 +8762,7 @@
                 </a:solidFill>
                 <a:latin typeface="Consolas"/>
               </a:rPr>
-              <a:t>3 vs. 1</a:t>
+              <a:t>Unpool</a:t>
             </a:r>
           </a:p>
           <a:p>
@@ -8442,7 +8784,7 @@
                 </a:solidFill>
                 <a:latin typeface="Calibri"/>
               </a:rPr>
-              <a:t>domains the HDI can test for wellbeing, vs. social trust</a:t>
+              <a:t>report SDG4 access separately from parity ratios</a:t>
             </a:r>
           </a:p>
         </p:txBody>
@@ -8484,7 +8826,7 @@
                 </a:solidFill>
                 <a:latin typeface="Consolas"/>
               </a:rPr>
-              <a:t>42 vs. 661</a:t>
+              <a:t>Re-specify</a:t>
             </a:r>
           </a:p>
           <a:p>
@@ -8506,7 +8848,7 @@
                 </a:solidFill>
                 <a:latin typeface="Calibri"/>
               </a:rPr>
-              <a:t>countries with SDG data, vs. series in the database</a:t>
+              <a:t>a health variable that still varies where it is used</a:t>
             </a:r>
           </a:p>
         </p:txBody>
@@ -8548,7 +8890,7 @@
                 </a:solidFill>
                 <a:latin typeface="Consolas"/>
               </a:rPr>
-              <a:t>0.041</a:t>
+              <a:t>Collect</a:t>
             </a:r>
           </a:p>
           <a:p>
@@ -8570,7 +8912,7 @@
                 </a:solidFill>
                 <a:latin typeface="Calibri"/>
               </a:rPr>
-              <a:t>median R² for trust — below income, health, education individually, above none</a:t>
+              <a:t>interpersonal trust, or link to a survey that has it</a:t>
             </a:r>
           </a:p>
         </p:txBody>
@@ -8683,7 +9025,7 @@
                 </a:solidFill>
                 <a:latin typeface="Georgia"/>
               </a:rPr>
-              <a:t>Development frameworks and wellbeing frameworks are solving different problems</a:t>
+              <a:t>Two different questions, and only one of them is being measured</a:t>
             </a:r>
           </a:p>
         </p:txBody>
@@ -8728,7 +9070,7 @@
                 </a:solidFill>
                 <a:latin typeface="Calibri"/>
               </a:rPr>
-              <a:t>The HDI and SDG frameworks do not answer the question 'what makes people's lives better?' any more than a global income statistics database answers 'what makes a person happy?' They were designed to track development, measured at the aggregate level, with indicators chosen before the question of individual wellbeing was systematically tested. That is not a design failure; it is the intended scope. The problem is that these two questions — how development progresses, and what shapes lived experience — are not the same question.</a:t>
+              <a:t>'How is development progressing?' and 'what shapes how people experience their lives?' are not the same question, and the frameworks were built to answer the first. Indicators were chosen before the second was systematically testable, at an aggregate level, on annual or slower cycles. That is scope, not failure.</a:t>
             </a:r>
           </a:p>
           <a:p>
@@ -8750,7 +9092,7 @@
                 </a:solidFill>
                 <a:latin typeface="Calibri"/>
               </a:rPr>
-              <a:t>The gap is structural and manifests in three ways. Education's access indicators predict wellbeing; its parity ratios do not. Pooling them does not fix the problem; it just averages out the signal. For health, life expectancy is saturated in developed countries; choosing it as the universal proxy sacrifices prediction where it matters most for wellbeing measurement. And social trust is not collected at scale in either framework, so no measurement choice can recover what was never measured. These are not failures to improve. They are features of frameworks built to answer a different question.</a:t>
+              <a:t>But the consequence is that a framework can be working exactly as designed and still be a poor guide to lived experience. Two of the three domains that predict life satisfaction in the ESS are present in the frameworks and obscured by construction choices; the third is not present at all. None of that shows up in a framework's own diagnostics, because nothing in those diagnostics is asking about wellbeing.</a:t>
             </a:r>
           </a:p>
         </p:txBody>
@@ -8860,7 +9202,7 @@
                 </a:solidFill>
                 <a:latin typeface="Consolas"/>
               </a:rPr>
-              <a:t>IMPLICATION 1 · MEASUREMENT CHOICES CONSTRAIN WHAT FRAMEWORKS CAN SEE</a:t>
+              <a:t>CHANGE 1 · EDUCATION</a:t>
             </a:r>
           </a:p>
         </p:txBody>
@@ -8905,7 +9247,7 @@
                 </a:solidFill>
                 <a:latin typeface="Georgia"/>
               </a:rPr>
-              <a:t>Education and health: what prescriptive measurement looks like</a:t>
+              <a:t>Report access separately, rather than pooling it into a goal-level average</a:t>
             </a:r>
           </a:p>
         </p:txBody>
@@ -8950,7 +9292,7 @@
                 </a:solidFill>
                 <a:latin typeface="Calibri"/>
               </a:rPr>
-              <a:t>Education is significant everywhere it is measured as attainment, but nearly invisible in SDG4 because most indicators measure something else. Health is nearly invisible in the HDI because life expectancy has saturated. Neither domain has changed; the frameworks' construction choices have. The evidence suggests three concrete shifts.</a:t>
+              <a:t>The cheapest change on this list, because it needs no new data collection. SDG4's access and participation series already reach 12.7%; the published goal-level figure of 3.3% is produced by averaging them with parity ratios, infrastructure and learning outcomes, which reach 2.5%, 2.0% and 0.9%.</a:t>
             </a:r>
           </a:p>
           <a:p>
@@ -8972,29 +9314,7 @@
                 </a:solidFill>
                 <a:latin typeface="Calibri"/>
               </a:rPr>
-              <a:t>For education: development measurement should prioritize access and completion over parity ratios and learning outcomes when the intent is tracking lived experience. The data shows access indicators reach 12.7% significance in predicting wellbeing; equity parity ratios reach 2.5%. Weighting constructs explicitly by their wellbeing correlation, rather than equally by series count, would surface what actually matters.</a:t>
-            </a:r>
-          </a:p>
-          <a:p>
-            <a:pPr>
-              <a:lnSpc>
-                <a:spcPct val="132000"/>
-              </a:lnSpc>
-              <a:spcBef>
-                <a:spcPts val="0"/>
-              </a:spcBef>
-              <a:spcAft>
-                <a:spcPts val="1100"/>
-              </a:spcAft>
-            </a:pPr>
-            <a:r>
-              <a:rPr sz="1400" b="0" i="0">
-                <a:solidFill>
-                  <a:srgbClr val="5A6068"/>
-                </a:solidFill>
-                <a:latin typeface="Calibri"/>
-              </a:rPr>
-              <a:t>For health: measurement should become adaptive, varying by development context. Life expectancy works as a proxy in lower-income settings where variance remains; in saturated regions, self-reported health or diagnosis-specific conditions (depression, chronic conditions) capture variation life expectancy misses. This is not suggesting two separate frameworks; it is suggesting that the same domain — health — should be measured differently where the same variable no longer moves.</a:t>
+              <a:t>So the suggestion is a reporting convention rather than a measurement programme: where a goal pools constructs that behave differently, publish the constituents alongside the pooled rate. Every number needed for this already exists in the database. What it would buy is that education stops looking like a domain that does not matter for wellbeing, which on this evidence it plainly does.</a:t>
             </a:r>
           </a:p>
         </p:txBody>
@@ -9104,7 +9424,7 @@
                 </a:solidFill>
                 <a:latin typeface="Consolas"/>
               </a:rPr>
-              <a:t>IMPLICATION 2 · COVERAGE GAPS ARE MORE FUNDAMENTAL THAN CONSTRUCT CHOICE</a:t>
+              <a:t>CHANGE 2 · HEALTH</a:t>
             </a:r>
           </a:p>
         </p:txBody>
@@ -9149,7 +9469,7 @@
                 </a:solidFill>
                 <a:latin typeface="Georgia"/>
               </a:rPr>
-              <a:t>Social trust: building what was never measured</a:t>
+              <a:t>Use a health variable that still varies where the framework is being applied</a:t>
             </a:r>
           </a:p>
         </p:txBody>
@@ -9194,7 +9514,7 @@
                 </a:solidFill>
                 <a:latin typeface="Calibri"/>
               </a:rPr>
-              <a:t>Social trust is the most tentative finding here. The ESS is Europe-only, across 36 countries, and relies on a single item. That bounds the claim: the pattern holds in Europe, with a wellbeing survey, on a self-report basis. It does not claim universality.</a:t>
+              <a:t>Life expectancy is a good development indicator and a poor wellbeing one in exactly the places where development has already happened. Between 81 and 85 years across the top 100 countries, there is very little variance left for it to explain — which is why it comes last of the HDI's five components at 19%, while self-rated health leads the ESS at 100% of countries.</a:t>
             </a:r>
           </a:p>
           <a:p>
@@ -9216,29 +9536,7 @@
                 </a:solidFill>
                 <a:latin typeface="Calibri"/>
               </a:rPr>
-              <a:t>But the reason it is tentative points to the deepest problem: trust is not collected at global scale in either framework. The SDG database has 13 series adjacent to trust, but they measure institutional confidence, not interpersonal trust, and they are intermittent (147 of 163 country-series have fewer than four years of data). This is not a construct-choice problem that better measurement can solve. It is a coverage gap, and the prescription follows directly: if wellbeing-conscious development monitoring is the intent, interpersonal trust must be collected at scale.</a:t>
-            </a:r>
-          </a:p>
-          <a:p>
-            <a:pPr>
-              <a:lnSpc>
-                <a:spcPct val="132000"/>
-              </a:lnSpc>
-              <a:spcBef>
-                <a:spcPts val="0"/>
-              </a:spcBef>
-              <a:spcAft>
-                <a:spcPts val="1100"/>
-              </a:spcAft>
-            </a:pPr>
-            <a:r>
-              <a:rPr sz="1400" b="0" i="0">
-                <a:solidFill>
-                  <a:srgbClr val="5A6068"/>
-                </a:solidFill>
-                <a:latin typeface="Calibri"/>
-              </a:rPr>
-              <a:t>This does not mean overloading the HDI or SDG questionnaires. It could mean systematic linkage between core development frameworks and dedicated wellbeing surveys — the ESS in Europe, Gallup World Poll and World Values Survey globally — that measure trust at individual level and can be integrated into country-level assessments. The evidence suggests this is not optional if the goal is understanding what shapes lived experience.</a:t>
+              <a:t>The evidence suggests health measurement could be made conditional on context rather than uniform: life expectancy where mortality still varies, and something with range left — self-rated health, or condition-specific measures — where it does not. This is not two frameworks. It is one domain, measured with an instrument chosen to still be sensitive in the setting it is used in.</a:t>
             </a:r>
           </a:p>
         </p:txBody>
@@ -9348,7 +9646,7 @@
                 </a:solidFill>
                 <a:latin typeface="Consolas"/>
               </a:rPr>
-              <a:t>CONCLUSION</a:t>
+              <a:t>CHANGE 3 · SOCIAL TRUST</a:t>
             </a:r>
           </a:p>
         </p:txBody>
@@ -9393,7 +9691,7 @@
                 </a:solidFill>
                 <a:latin typeface="Georgia"/>
               </a:rPr>
-              <a:t>From evidence to intent: what should wellbeing measurement look like?</a:t>
+              <a:t>Collect interpersonal trust, or link systematically to surveys that already do</a:t>
             </a:r>
           </a:p>
         </p:txBody>
@@ -9432,13 +9730,13 @@
               </a:spcAft>
             </a:pPr>
             <a:r>
-              <a:rPr sz="1325" b="0" i="0">
+              <a:rPr sz="1400" b="0" i="0">
                 <a:solidFill>
                   <a:srgbClr val="5A6068"/>
                 </a:solidFill>
                 <a:latin typeface="Calibri"/>
               </a:rPr>
-              <a:t>The evidence shows a consistent pattern: which domain looks most consequential for wellbeing depends on which framework measures it and what variable they chose. This is not about the domains; it is about the tools. And if the tools were redesigned with wellbeing in mind, the evidence points to concrete changes.</a:t>
+              <a:t>This is the expensive one, and the only one that cannot be solved by re-analysing what exists. On the ESS evidence, interpersonal trust is the second strongest of the three domains — ahead of education — and neither framework collects it. SDG16's institutional confidence series are not a substitute: different construct, and they do not survive an income control.</a:t>
             </a:r>
           </a:p>
           <a:p>
@@ -9454,13 +9752,13 @@
               </a:spcAft>
             </a:pPr>
             <a:r>
-              <a:rPr sz="1325" b="0" i="0">
+              <a:rPr sz="1400" b="0" i="0">
                 <a:solidFill>
                   <a:srgbClr val="5A6068"/>
                 </a:solidFill>
                 <a:latin typeface="Calibri"/>
               </a:rPr>
-              <a:t>Three recommendations emerge from this analysis. First: for education, construct measurement choices explicitly to favor access and completion over equity parity ratios when the intent is tracking lived experience. Second: for health, make variable choice adaptive — life expectancy where variance remains, self-reported measures or condition-specific indicators where it does not. Third: for social trust, build interpersonal-trust measurement into development frameworks, either directly or through systematic integration with wellbeing surveys that capture it.</a:t>
+              <a:t>Two routes. Add a trust item to core collection, which is a single well-validated question and cheap per respondent but slow institutionally. Or build systematic linkage to instruments that already carry it — the ESS in Europe, Gallup World Poll and the World Values Survey more broadly — so that country assessments can draw on it without the frameworks having to own the collection.</a:t>
             </a:r>
           </a:p>
           <a:p>
@@ -9476,13 +9774,13 @@
               </a:spcAft>
             </a:pPr>
             <a:r>
-              <a:rPr sz="1325" b="0" i="0">
+              <a:rPr sz="1400" b="0" i="0">
                 <a:solidFill>
                   <a:srgbClr val="5A6068"/>
                 </a:solidFill>
                 <a:latin typeface="Calibri"/>
               </a:rPr>
-              <a:t>Whether development frameworks should take on wellbeing as part of their purpose remains a choice, not a necessity. These frameworks have done important work tracking development. But if the intent is understanding what actually shapes how people experience their lives, the evidence suggests the measurement that serves that intent should be different — more granular in which constructs to count, more responsive to where variables still move, and more systematic about collecting domains that matter but have never been measured at scale.</a:t>
+              <a:t>The honest caveat stays attached: this rests on 36 European countries and one survey item. It is the most tentative finding in the paper. It is also the one where the cost of being right and not measuring is highest, because the gap is invisible from inside the frameworks.</a:t>
             </a:r>
           </a:p>
         </p:txBody>
@@ -9543,7 +9841,7 @@
     <p:bg>
       <p:bgPr>
         <a:solidFill>
-          <a:srgbClr val="E8EBEF"/>
+          <a:srgbClr val="FCFCFB"/>
         </a:solidFill>
         <a:effectLst/>
       </p:bgPr>
@@ -9557,45 +9855,43 @@
       <p:grpSpPr/>
       <p:sp>
         <p:nvSpPr>
-          <p:cNvPr id="2" name="Rectangle 1"/>
-          <p:cNvSpPr/>
-          <p:nvPr/>
-        </p:nvSpPr>
-        <p:spPr>
-          <a:xfrm>
-            <a:off x="566928" y="2103120"/>
-            <a:ext cx="54864" cy="2377440"/>
-          </a:xfrm>
-          <a:prstGeom prst="rect">
-            <a:avLst/>
-          </a:prstGeom>
-          <a:solidFill>
-            <a:srgbClr val="17549E"/>
-          </a:solidFill>
-          <a:ln>
-            <a:noFill/>
-          </a:ln>
-          <a:effectLst/>
-        </p:spPr>
-        <p:style>
-          <a:lnRef idx="1">
-            <a:schemeClr val="accent1"/>
-          </a:lnRef>
-          <a:fillRef idx="3">
-            <a:schemeClr val="accent1"/>
-          </a:fillRef>
-          <a:effectRef idx="2">
-            <a:schemeClr val="accent1"/>
-          </a:effectRef>
-          <a:fontRef idx="minor">
-            <a:schemeClr val="lt1"/>
-          </a:fontRef>
-        </p:style>
-        <p:txBody>
-          <a:bodyPr rtlCol="0" anchor="ctr"/>
-          <a:lstStyle/>
-          <a:p>
-            <a:pPr algn="ctr"/>
+          <p:cNvPr id="2" name="TextBox 1"/>
+          <p:cNvSpPr txBox="1"/>
+          <p:nvPr/>
+        </p:nvSpPr>
+        <p:spPr>
+          <a:xfrm>
+            <a:off x="566928" y="502920"/>
+            <a:ext cx="8595360" cy="274320"/>
+          </a:xfrm>
+          <a:prstGeom prst="rect">
+            <a:avLst/>
+          </a:prstGeom>
+          <a:noFill/>
+        </p:spPr>
+        <p:txBody>
+          <a:bodyPr wrap="square" lIns="0" rIns="0" tIns="0" bIns="0">
+            <a:spAutoFit/>
+          </a:bodyPr>
+          <a:lstStyle/>
+          <a:p>
+            <a:pPr>
+              <a:spcBef>
+                <a:spcPts val="0"/>
+              </a:spcBef>
+              <a:spcAft>
+                <a:spcPts val="0"/>
+              </a:spcAft>
+            </a:pPr>
+            <a:r>
+              <a:rPr sz="1000" b="0" i="0">
+                <a:solidFill>
+                  <a:srgbClr val="A63A30"/>
+                </a:solidFill>
+                <a:latin typeface="Consolas"/>
+              </a:rPr>
+              <a:t>WHERE THIS LEAVES THE ARGUMENT</a:t>
+            </a:r>
           </a:p>
         </p:txBody>
       </p:sp>
@@ -9607,21 +9903,133 @@
         </p:nvSpPr>
         <p:spPr>
           <a:xfrm>
-            <a:off x="914400" y="1600200"/>
-            <a:ext cx="8686800" cy="274320"/>
-          </a:xfrm>
-          <a:prstGeom prst="rect">
-            <a:avLst/>
-          </a:prstGeom>
-          <a:noFill/>
-        </p:spPr>
-        <p:txBody>
-          <a:bodyPr wrap="square" lIns="0" rIns="0" tIns="0" bIns="0">
-            <a:spAutoFit/>
-          </a:bodyPr>
-          <a:lstStyle/>
-          <a:p>
-            <a:pPr>
+            <a:off x="566928" y="914400"/>
+            <a:ext cx="8595360" cy="1371600"/>
+          </a:xfrm>
+          <a:prstGeom prst="rect">
+            <a:avLst/>
+          </a:prstGeom>
+          <a:noFill/>
+        </p:spPr>
+        <p:txBody>
+          <a:bodyPr wrap="square" lIns="0" rIns="0" tIns="0" bIns="0">
+            <a:spAutoFit/>
+          </a:bodyPr>
+          <a:lstStyle/>
+          <a:p>
+            <a:pPr>
+              <a:lnSpc>
+                <a:spcPct val="108000"/>
+              </a:lnSpc>
+              <a:spcBef>
+                <a:spcPts val="0"/>
+              </a:spcBef>
+              <a:spcAft>
+                <a:spcPts val="0"/>
+              </a:spcAft>
+            </a:pPr>
+            <a:r>
+              <a:rPr sz="2700" b="0" i="0">
+                <a:solidFill>
+                  <a:srgbClr val="14171C"/>
+                </a:solidFill>
+                <a:latin typeface="Georgia"/>
+              </a:rPr>
+              <a:t>Not a verdict on the frameworks — a question about what they are for</a:t>
+            </a:r>
+          </a:p>
+        </p:txBody>
+      </p:sp>
+      <p:sp>
+        <p:nvSpPr>
+          <p:cNvPr id="4" name="TextBox 3"/>
+          <p:cNvSpPr txBox="1"/>
+          <p:nvPr/>
+        </p:nvSpPr>
+        <p:spPr>
+          <a:xfrm>
+            <a:off x="566928" y="2286000"/>
+            <a:ext cx="8595360" cy="3840480"/>
+          </a:xfrm>
+          <a:prstGeom prst="rect">
+            <a:avLst/>
+          </a:prstGeom>
+          <a:noFill/>
+        </p:spPr>
+        <p:txBody>
+          <a:bodyPr wrap="square" lIns="0" rIns="0" tIns="0" bIns="0">
+            <a:spAutoFit/>
+          </a:bodyPr>
+          <a:lstStyle/>
+          <a:p>
+            <a:pPr>
+              <a:lnSpc>
+                <a:spcPct val="132000"/>
+              </a:lnSpc>
+              <a:spcBef>
+                <a:spcPts val="0"/>
+              </a:spcBef>
+              <a:spcAft>
+                <a:spcPts val="1100"/>
+              </a:spcAft>
+            </a:pPr>
+            <a:r>
+              <a:rPr sz="1400" b="0" i="0">
+                <a:solidFill>
+                  <a:srgbClr val="5A6068"/>
+                </a:solidFill>
+                <a:latin typeface="Calibri"/>
+              </a:rPr>
+              <a:t>Two of the three changes above are re-analysis of data that already exists. The third is a collection decision. None of them requires accepting that the SDGs or the HDI are failing at what they set out to do.</a:t>
+            </a:r>
+          </a:p>
+          <a:p>
+            <a:pPr>
+              <a:lnSpc>
+                <a:spcPct val="132000"/>
+              </a:lnSpc>
+              <a:spcBef>
+                <a:spcPts val="0"/>
+              </a:spcBef>
+              <a:spcAft>
+                <a:spcPts val="1100"/>
+              </a:spcAft>
+            </a:pPr>
+            <a:r>
+              <a:rPr sz="1400" b="0" i="0">
+                <a:solidFill>
+                  <a:srgbClr val="5A6068"/>
+                </a:solidFill>
+                <a:latin typeface="Calibri"/>
+              </a:rPr>
+              <a:t>What the evidence does support is narrower and, we think, harder to dismiss: which domain looks consequential for lived experience depends heavily on construction choices that were made for other, defensible reasons — and on one domain that was never on the list at all. If wellbeing is meant to be part of what these frameworks track, those choices are now testable rather than conventional, and this is what testing them shows.</a:t>
+            </a:r>
+          </a:p>
+        </p:txBody>
+      </p:sp>
+      <p:sp>
+        <p:nvSpPr>
+          <p:cNvPr id="5" name="TextBox 4"/>
+          <p:cNvSpPr txBox="1"/>
+          <p:nvPr/>
+        </p:nvSpPr>
+        <p:spPr>
+          <a:xfrm>
+            <a:off x="11338560" y="6263640"/>
+            <a:ext cx="548640" cy="274320"/>
+          </a:xfrm>
+          <a:prstGeom prst="rect">
+            <a:avLst/>
+          </a:prstGeom>
+          <a:noFill/>
+        </p:spPr>
+        <p:txBody>
+          <a:bodyPr wrap="square" lIns="0" rIns="0" tIns="0" bIns="0">
+            <a:spAutoFit/>
+          </a:bodyPr>
+          <a:lstStyle/>
+          <a:p>
+            <a:pPr algn="r">
               <a:spcBef>
                 <a:spcPts val="0"/>
               </a:spcBef>
@@ -9632,56 +10040,11 @@
             <a:r>
               <a:rPr sz="1100" b="0" i="0">
                 <a:solidFill>
-                  <a:srgbClr val="17549E"/>
+                  <a:srgbClr val="868D96"/>
                 </a:solidFill>
                 <a:latin typeface="Consolas"/>
               </a:rPr>
-              <a:t>WHERE ACT IV LEAVES US</a:t>
-            </a:r>
-          </a:p>
-        </p:txBody>
-      </p:sp>
-      <p:sp>
-        <p:nvSpPr>
-          <p:cNvPr id="4" name="TextBox 3"/>
-          <p:cNvSpPr txBox="1"/>
-          <p:nvPr/>
-        </p:nvSpPr>
-        <p:spPr>
-          <a:xfrm>
-            <a:off x="914400" y="2148840"/>
-            <a:ext cx="9509760" cy="2926080"/>
-          </a:xfrm>
-          <a:prstGeom prst="rect">
-            <a:avLst/>
-          </a:prstGeom>
-          <a:noFill/>
-        </p:spPr>
-        <p:txBody>
-          <a:bodyPr wrap="square" lIns="0" rIns="0" tIns="0" bIns="0">
-            <a:spAutoFit/>
-          </a:bodyPr>
-          <a:lstStyle/>
-          <a:p>
-            <a:pPr>
-              <a:lnSpc>
-                <a:spcPct val="135000"/>
-              </a:lnSpc>
-              <a:spcBef>
-                <a:spcPts val="0"/>
-              </a:spcBef>
-              <a:spcAft>
-                <a:spcPts val="0"/>
-              </a:spcAft>
-            </a:pPr>
-            <a:r>
-              <a:rPr sz="2100" b="0" i="0">
-                <a:solidFill>
-                  <a:srgbClr val="14171C"/>
-                </a:solidFill>
-                <a:latin typeface="Georgia"/>
-              </a:rPr>
-              <a:t>Whether development measurement should be redesigned with wellbeing in mind is beyond this scope. But if it is, this evidence suggests the measurement should be different: more attentive to which variables still move, which constructs predict outcomes, and which domains are collected at all.</a:t>
+              <a:t>IV</a:t>
             </a:r>
           </a:p>
         </p:txBody>
@@ -9720,8 +10083,8 @@
         </p:nvSpPr>
         <p:spPr>
           <a:xfrm>
-            <a:off x="8229600" y="822960"/>
-            <a:ext cx="3291840" cy="4114800"/>
+            <a:off x="7680960" y="822960"/>
+            <a:ext cx="3840480" cy="4114800"/>
           </a:xfrm>
           <a:prstGeom prst="rect">
             <a:avLst/>
@@ -9880,7 +10243,7 @@
                 </a:solidFill>
                 <a:latin typeface="Georgia"/>
               </a:rPr>
-              <a:t>Replicating the collapse: three frameworks, three data sources</a:t>
+              <a:t>Does the collapse survive when you change the design?</a:t>
             </a:r>
           </a:p>
         </p:txBody>
@@ -9925,7 +10288,7 @@
                 </a:solidFill>
                 <a:latin typeface="Georgia"/>
               </a:rPr>
-              <a:t>Run the original levels-and-differences design on a second development framework, against a second wellbeing instrument, and the collapse appears every time. It is not a property of the SDGs. Once we show the levels are where the signal is, we can drill into what that signal actually is.</a:t>
+              <a:t>The SDG null invites an easy dismissal: sprawling framework, uneven coverage, so the absence of a within-country signal says more about the instrument than about development. Test that by changing one leg of the design at a time. If the collapse is an artefact of the SDGs, it should not survive.</a:t>
             </a:r>
           </a:p>
         </p:txBody>
@@ -9989,7 +10352,7 @@
                 </a:solidFill>
                 <a:latin typeface="Calibri"/>
               </a:rPr>
-              <a:t>of countries significant, SDG levels → differences</a:t>
+              <a:t>SDG × WHR, 42 countries — the original finding</a:t>
             </a:r>
           </a:p>
         </p:txBody>
@@ -10053,7 +10416,7 @@
                 </a:solidFill>
                 <a:latin typeface="Calibri"/>
               </a:rPr>
-              <a:t>the same collapse under the HDI composite</a:t>
+              <a:t>HDI × WHR, 150 countries — swap the framework</a:t>
             </a:r>
           </a:p>
         </p:txBody>
@@ -10095,7 +10458,7 @@
                 </a:solidFill>
                 <a:latin typeface="Consolas"/>
               </a:rPr>
-              <a:t>14% → 8%</a:t>
+              <a:t>47% → 0%</a:t>
             </a:r>
           </a:p>
           <a:p>
@@ -10117,7 +10480,7 @@
                 </a:solidFill>
                 <a:latin typeface="Calibri"/>
               </a:rPr>
-              <a:t>of cells, against the ESS wellbeing survey</a:t>
+              <a:t>SHDI × ESS — swap the wellbeing measure and the scale</a:t>
             </a:r>
           </a:p>
         </p:txBody>
@@ -10131,6 +10494,163 @@
 </file>
 
 <file path=ppt/slides/slide30.xml><?xml version="1.0" encoding="utf-8"?>
+<p:sld xmlns:a="http://schemas.openxmlformats.org/drawingml/2006/main" xmlns:p="http://schemas.openxmlformats.org/presentationml/2006/main" xmlns:r="http://schemas.openxmlformats.org/officeDocument/2006/relationships">
+  <p:cSld>
+    <p:bg>
+      <p:bgPr>
+        <a:solidFill>
+          <a:srgbClr val="E8EBEF"/>
+        </a:solidFill>
+        <a:effectLst/>
+      </p:bgPr>
+    </p:bg>
+    <p:spTree>
+      <p:nvGrpSpPr>
+        <p:cNvPr id="1" name=""/>
+        <p:cNvGrpSpPr/>
+        <p:nvPr/>
+      </p:nvGrpSpPr>
+      <p:grpSpPr/>
+      <p:sp>
+        <p:nvSpPr>
+          <p:cNvPr id="2" name="Rectangle 1"/>
+          <p:cNvSpPr/>
+          <p:nvPr/>
+        </p:nvSpPr>
+        <p:spPr>
+          <a:xfrm>
+            <a:off x="566928" y="2103120"/>
+            <a:ext cx="54864" cy="2377440"/>
+          </a:xfrm>
+          <a:prstGeom prst="rect">
+            <a:avLst/>
+          </a:prstGeom>
+          <a:solidFill>
+            <a:srgbClr val="17549E"/>
+          </a:solidFill>
+          <a:ln>
+            <a:noFill/>
+          </a:ln>
+          <a:effectLst/>
+        </p:spPr>
+        <p:style>
+          <a:lnRef idx="1">
+            <a:schemeClr val="accent1"/>
+          </a:lnRef>
+          <a:fillRef idx="3">
+            <a:schemeClr val="accent1"/>
+          </a:fillRef>
+          <a:effectRef idx="2">
+            <a:schemeClr val="accent1"/>
+          </a:effectRef>
+          <a:fontRef idx="minor">
+            <a:schemeClr val="lt1"/>
+          </a:fontRef>
+        </p:style>
+        <p:txBody>
+          <a:bodyPr rtlCol="0" anchor="ctr"/>
+          <a:lstStyle/>
+          <a:p>
+            <a:pPr algn="ctr"/>
+          </a:p>
+        </p:txBody>
+      </p:sp>
+      <p:sp>
+        <p:nvSpPr>
+          <p:cNvPr id="3" name="TextBox 2"/>
+          <p:cNvSpPr txBox="1"/>
+          <p:nvPr/>
+        </p:nvSpPr>
+        <p:spPr>
+          <a:xfrm>
+            <a:off x="914400" y="1600200"/>
+            <a:ext cx="8686800" cy="274320"/>
+          </a:xfrm>
+          <a:prstGeom prst="rect">
+            <a:avLst/>
+          </a:prstGeom>
+          <a:noFill/>
+        </p:spPr>
+        <p:txBody>
+          <a:bodyPr wrap="square" lIns="0" rIns="0" tIns="0" bIns="0">
+            <a:spAutoFit/>
+          </a:bodyPr>
+          <a:lstStyle/>
+          <a:p>
+            <a:pPr>
+              <a:spcBef>
+                <a:spcPts val="0"/>
+              </a:spcBef>
+              <a:spcAft>
+                <a:spcPts val="0"/>
+              </a:spcAft>
+            </a:pPr>
+            <a:r>
+              <a:rPr sz="1100" b="0" i="0">
+                <a:solidFill>
+                  <a:srgbClr val="17549E"/>
+                </a:solidFill>
+                <a:latin typeface="Consolas"/>
+              </a:rPr>
+              <a:t>WHERE ACT IV LEAVES US</a:t>
+            </a:r>
+          </a:p>
+        </p:txBody>
+      </p:sp>
+      <p:sp>
+        <p:nvSpPr>
+          <p:cNvPr id="4" name="TextBox 3"/>
+          <p:cNvSpPr txBox="1"/>
+          <p:nvPr/>
+        </p:nvSpPr>
+        <p:spPr>
+          <a:xfrm>
+            <a:off x="914400" y="2148840"/>
+            <a:ext cx="9509760" cy="2926080"/>
+          </a:xfrm>
+          <a:prstGeom prst="rect">
+            <a:avLst/>
+          </a:prstGeom>
+          <a:noFill/>
+        </p:spPr>
+        <p:txBody>
+          <a:bodyPr wrap="square" lIns="0" rIns="0" tIns="0" bIns="0">
+            <a:spAutoFit/>
+          </a:bodyPr>
+          <a:lstStyle/>
+          <a:p>
+            <a:pPr>
+              <a:lnSpc>
+                <a:spcPct val="135000"/>
+              </a:lnSpc>
+              <a:spcBef>
+                <a:spcPts val="0"/>
+              </a:spcBef>
+              <a:spcAft>
+                <a:spcPts val="0"/>
+              </a:spcAft>
+            </a:pPr>
+            <a:r>
+              <a:rPr sz="2100" b="0" i="0">
+                <a:solidFill>
+                  <a:srgbClr val="14171C"/>
+                </a:solidFill>
+                <a:latin typeface="Georgia"/>
+              </a:rPr>
+              <a:t>Whether wellbeing belongs in the purpose of a development framework is a choice, not a finding. But if it does, the measurement that follows from that intent looks different from the measurement in place today — and the three changes above are where it would start.</a:t>
+            </a:r>
+          </a:p>
+        </p:txBody>
+      </p:sp>
+    </p:spTree>
+  </p:cSld>
+  <p:clrMapOvr>
+    <a:masterClrMapping/>
+  </p:clrMapOvr>
+</p:sld>
+</file>
+
+<file path=ppt/slides/slide31.xml><?xml version="1.0" encoding="utf-8"?>
 <p:sld xmlns:a="http://schemas.openxmlformats.org/drawingml/2006/main" xmlns:p="http://schemas.openxmlformats.org/presentationml/2006/main" xmlns:r="http://schemas.openxmlformats.org/officeDocument/2006/relationships">
   <p:cSld>
     <p:bg>
@@ -10204,7 +10724,7 @@
                 </a:solidFill>
                 <a:latin typeface="Calibri"/>
               </a:rPr>
-              <a:t>4 things the acts do not settle, in the order they block drafting.</a:t>
+              <a:t>6 things the acts do not settle, in the order they block drafting.</a:t>
             </a:r>
           </a:p>
         </p:txBody>
@@ -10312,7 +10832,7 @@
                 </a:solidFill>
                 <a:latin typeface="Calibri"/>
               </a:rPr>
-              <a:t>Commentaries allow one or two. Proposed: three-panel composite as Figure 1 and domain scorecard as Figure 2. Everything else supplementary.</a:t>
+              <a:t>Commentaries allow one or two. Proposed: the three-way collapse as Figure 1 and the three-domain comparison as Figure 2. Everything else supplementary.</a:t>
             </a:r>
           </a:p>
         </p:txBody>
@@ -10398,7 +10918,7 @@
                 </a:solidFill>
                 <a:latin typeface="Consolas"/>
               </a:rPr>
-              <a:t>SCOPE OF TRUST FINDINGS</a:t>
+              <a:t>ONE UNIT, EVERYWHERE</a:t>
             </a:r>
           </a:p>
           <a:p>
@@ -10420,7 +10940,7 @@
                 </a:solidFill>
                 <a:latin typeface="Calibri"/>
               </a:rPr>
-              <a:t>Trust findings rest on ESS (36 European countries, individual-level). The design requires ≥4 years per country-series; only 16 of 163 SDG trust-adjacent series have that coverage, and 1 is significant. Tested cross-sectionally, 9 of 13 series are usable and 4 are significant, but all fall below HDI components on the same countries. The claim is Europe-only and rests on one instrument in each framework; it is the most tentative of the three.</a:t>
+              <a:t>Every headline number is now % of units FDR-significant at q  0.04 on ~7 country-round means; at that n roughly two-thirds of pure noise clears the bar, which inflated the ESS figures and made the framework comparison meaningless. ESS is now estimated on individual respondents, demeaned within country-round.</a:t>
             </a:r>
           </a:p>
         </p:txBody>
@@ -10506,7 +11026,7 @@
                 </a:solidFill>
                 <a:latin typeface="Consolas"/>
               </a:rPr>
-              <a:t>INSTITUTIONAL CONFIDENCE VS. INTERPERSONAL TRUST</a:t>
+              <a:t>SCOPE OF THE TRUST FINDING</a:t>
             </a:r>
           </a:p>
           <a:p>
@@ -10528,7 +11048,7 @@
                 </a:solidFill>
                 <a:latin typeface="Calibri"/>
               </a:rPr>
-              <a:t>The SDG's Goal 16 trust series measure satisfaction with public services, perceived bribery, and perceived inclusiveness in decision-making — institutional confidence, not interpersonal trust ('most people can be trusted'). These are conceptually distinct. The commentarymust be explicit that SDG16 is not a direct analogue for the ESS trust item.</a:t>
+              <a:t>Trust rests on the ESS: 36 European countries, one item, self-reported. 97% of countries significant with median individual R² 0.039. The SDG16 comparison is cross-sectional because only 16 of 163 country-series have the four years a time-series design needs. This is the most tentative of the three domains and should be framed as such.</a:t>
             </a:r>
           </a:p>
         </p:txBody>
@@ -10614,7 +11134,7 @@
                 </a:solidFill>
                 <a:latin typeface="Consolas"/>
               </a:rPr>
-              <a:t>THREE FAILURE MODES FRAME</a:t>
+              <a:t>INSTITUTIONAL CONFIDENCE IS NOT INTERPERSONAL TRUST</a:t>
             </a:r>
           </a:p>
           <a:p>
@@ -10636,7 +11156,223 @@
                 </a:solidFill>
                 <a:latin typeface="Calibri"/>
               </a:rPr>
-              <a:t>The narrative positions education's, health's, and trust's findings as evidence of three different ways frameworks lose sight of domains that matter: wrong construct, saturated variable, coverage gap. This is a meta-finding about measurement, not about the domains themselves.</a:t>
+              <a:t>SDG16's trust-adjacent series measure satisfaction with public services, perceived bribery and perceived inclusiveness in decision-making. These are conceptually distinct from 'most people can be trusted', and they do not survive an income control while interpersonal trust does. The commentary must be explicit that SDG16 is not a direct analogue, wherever the 1.5% figure appears.</a:t>
+            </a:r>
+          </a:p>
+        </p:txBody>
+      </p:sp>
+      <p:sp>
+        <p:nvSpPr>
+          <p:cNvPr id="11" name="Rectangle 10"/>
+          <p:cNvSpPr/>
+          <p:nvPr/>
+        </p:nvSpPr>
+        <p:spPr>
+          <a:xfrm>
+            <a:off x="4359554" y="4069080"/>
+            <a:ext cx="3472586" cy="25400"/>
+          </a:xfrm>
+          <a:prstGeom prst="rect">
+            <a:avLst/>
+          </a:prstGeom>
+          <a:solidFill>
+            <a:srgbClr val="17549E"/>
+          </a:solidFill>
+          <a:ln>
+            <a:noFill/>
+          </a:ln>
+          <a:effectLst/>
+        </p:spPr>
+        <p:style>
+          <a:lnRef idx="1">
+            <a:schemeClr val="accent1"/>
+          </a:lnRef>
+          <a:fillRef idx="3">
+            <a:schemeClr val="accent1"/>
+          </a:fillRef>
+          <a:effectRef idx="2">
+            <a:schemeClr val="accent1"/>
+          </a:effectRef>
+          <a:fontRef idx="minor">
+            <a:schemeClr val="lt1"/>
+          </a:fontRef>
+        </p:style>
+        <p:txBody>
+          <a:bodyPr rtlCol="0" anchor="ctr"/>
+          <a:lstStyle/>
+          <a:p>
+            <a:pPr algn="ctr"/>
+          </a:p>
+        </p:txBody>
+      </p:sp>
+      <p:sp>
+        <p:nvSpPr>
+          <p:cNvPr id="12" name="TextBox 11"/>
+          <p:cNvSpPr txBox="1"/>
+          <p:nvPr/>
+        </p:nvSpPr>
+        <p:spPr>
+          <a:xfrm>
+            <a:off x="4359554" y="4251960"/>
+            <a:ext cx="3472586" cy="1828800"/>
+          </a:xfrm>
+          <a:prstGeom prst="rect">
+            <a:avLst/>
+          </a:prstGeom>
+          <a:noFill/>
+        </p:spPr>
+        <p:txBody>
+          <a:bodyPr wrap="square" lIns="0" rIns="0" tIns="0" bIns="0">
+            <a:spAutoFit/>
+          </a:bodyPr>
+          <a:lstStyle/>
+          <a:p>
+            <a:pPr>
+              <a:spcBef>
+                <a:spcPts val="0"/>
+              </a:spcBef>
+              <a:spcAft>
+                <a:spcPts val="700"/>
+              </a:spcAft>
+            </a:pPr>
+            <a:r>
+              <a:rPr sz="1050" b="0" i="0">
+                <a:solidFill>
+                  <a:srgbClr val="17549E"/>
+                </a:solidFill>
+                <a:latin typeface="Consolas"/>
+              </a:rPr>
+              <a:t>THREE FAILURE MODES AS THE META-FINDING</a:t>
+            </a:r>
+          </a:p>
+          <a:p>
+            <a:pPr>
+              <a:lnSpc>
+                <a:spcPct val="130000"/>
+              </a:lnSpc>
+              <a:spcBef>
+                <a:spcPts val="0"/>
+              </a:spcBef>
+              <a:spcAft>
+                <a:spcPts val="0"/>
+              </a:spcAft>
+            </a:pPr>
+            <a:r>
+              <a:rPr sz="1100" b="0" i="0">
+                <a:solidFill>
+                  <a:srgbClr val="5A6068"/>
+                </a:solidFill>
+                <a:latin typeface="Calibri"/>
+              </a:rPr>
+              <a:t>The paper's contribution is arguably not the three domains but the three distinct ways a framework loses one: pooled construct, saturated variable, absent coverage. They need different remedies, which is what makes Act IV specific rather than rhetorical.</a:t>
+            </a:r>
+          </a:p>
+        </p:txBody>
+      </p:sp>
+      <p:sp>
+        <p:nvSpPr>
+          <p:cNvPr id="13" name="Rectangle 12"/>
+          <p:cNvSpPr/>
+          <p:nvPr/>
+        </p:nvSpPr>
+        <p:spPr>
+          <a:xfrm>
+            <a:off x="8152180" y="4069080"/>
+            <a:ext cx="3472586" cy="25400"/>
+          </a:xfrm>
+          <a:prstGeom prst="rect">
+            <a:avLst/>
+          </a:prstGeom>
+          <a:solidFill>
+            <a:srgbClr val="17549E"/>
+          </a:solidFill>
+          <a:ln>
+            <a:noFill/>
+          </a:ln>
+          <a:effectLst/>
+        </p:spPr>
+        <p:style>
+          <a:lnRef idx="1">
+            <a:schemeClr val="accent1"/>
+          </a:lnRef>
+          <a:fillRef idx="3">
+            <a:schemeClr val="accent1"/>
+          </a:fillRef>
+          <a:effectRef idx="2">
+            <a:schemeClr val="accent1"/>
+          </a:effectRef>
+          <a:fontRef idx="minor">
+            <a:schemeClr val="lt1"/>
+          </a:fontRef>
+        </p:style>
+        <p:txBody>
+          <a:bodyPr rtlCol="0" anchor="ctr"/>
+          <a:lstStyle/>
+          <a:p>
+            <a:pPr algn="ctr"/>
+          </a:p>
+        </p:txBody>
+      </p:sp>
+      <p:sp>
+        <p:nvSpPr>
+          <p:cNvPr id="14" name="TextBox 13"/>
+          <p:cNvSpPr txBox="1"/>
+          <p:nvPr/>
+        </p:nvSpPr>
+        <p:spPr>
+          <a:xfrm>
+            <a:off x="8152180" y="4251960"/>
+            <a:ext cx="3472586" cy="1828800"/>
+          </a:xfrm>
+          <a:prstGeom prst="rect">
+            <a:avLst/>
+          </a:prstGeom>
+          <a:noFill/>
+        </p:spPr>
+        <p:txBody>
+          <a:bodyPr wrap="square" lIns="0" rIns="0" tIns="0" bIns="0">
+            <a:spAutoFit/>
+          </a:bodyPr>
+          <a:lstStyle/>
+          <a:p>
+            <a:pPr>
+              <a:spcBef>
+                <a:spcPts val="0"/>
+              </a:spcBef>
+              <a:spcAft>
+                <a:spcPts val="700"/>
+              </a:spcAft>
+            </a:pPr>
+            <a:r>
+              <a:rPr sz="1050" b="0" i="0">
+                <a:solidFill>
+                  <a:srgbClr val="17549E"/>
+                </a:solidFill>
+                <a:latin typeface="Consolas"/>
+              </a:rPr>
+              <a:t>WHAT WE ARE NOT CLAIMING</a:t>
+            </a:r>
+          </a:p>
+          <a:p>
+            <a:pPr>
+              <a:lnSpc>
+                <a:spcPct val="130000"/>
+              </a:lnSpc>
+              <a:spcBef>
+                <a:spcPts val="0"/>
+              </a:spcBef>
+              <a:spcAft>
+                <a:spcPts val="0"/>
+              </a:spcAft>
+            </a:pPr>
+            <a:r>
+              <a:rPr sz="1100" b="0" i="0">
+                <a:solidFill>
+                  <a:srgbClr val="5A6068"/>
+                </a:solidFill>
+                <a:latin typeface="Calibri"/>
+              </a:rPr>
+              <a:t>No causal claim, and no verdict on the SDGs or HDI as development instruments. The claim is about what these frameworks can and cannot see when the question is individual lived experience — and it is bounded by ESS coverage on the trust half.</a:t>
             </a:r>
           </a:p>
         </p:txBody>
@@ -10649,7 +11385,7 @@
 </p:sld>
 </file>
 
-<file path=ppt/slides/slide31.xml><?xml version="1.0" encoding="utf-8"?>
+<file path=ppt/slides/slide32.xml><?xml version="1.0" encoding="utf-8"?>
 <p:sld xmlns:a="http://schemas.openxmlformats.org/drawingml/2006/main" xmlns:p="http://schemas.openxmlformats.org/presentationml/2006/main" xmlns:r="http://schemas.openxmlformats.org/officeDocument/2006/relationships">
   <p:cSld>
     <p:bg>
@@ -10731,6 +11467,722 @@
           </a:p>
         </p:txBody>
       </p:sp>
+    </p:spTree>
+  </p:cSld>
+  <p:clrMapOvr>
+    <a:masterClrMapping/>
+  </p:clrMapOvr>
+</p:sld>
+</file>
+
+<file path=ppt/slides/slide33.xml><?xml version="1.0" encoding="utf-8"?>
+<p:sld xmlns:a="http://schemas.openxmlformats.org/drawingml/2006/main" xmlns:p="http://schemas.openxmlformats.org/presentationml/2006/main" xmlns:r="http://schemas.openxmlformats.org/officeDocument/2006/relationships">
+  <p:cSld>
+    <p:bg>
+      <p:bgPr>
+        <a:solidFill>
+          <a:srgbClr val="FCFCFB"/>
+        </a:solidFill>
+        <a:effectLst/>
+      </p:bgPr>
+    </p:bg>
+    <p:spTree>
+      <p:nvGrpSpPr>
+        <p:cNvPr id="1" name=""/>
+        <p:cNvGrpSpPr/>
+        <p:nvPr/>
+      </p:nvGrpSpPr>
+      <p:grpSpPr/>
+      <p:sp>
+        <p:nvSpPr>
+          <p:cNvPr id="2" name="TextBox 1"/>
+          <p:cNvSpPr txBox="1"/>
+          <p:nvPr/>
+        </p:nvSpPr>
+        <p:spPr>
+          <a:xfrm>
+            <a:off x="566928" y="411480"/>
+            <a:ext cx="10515600" cy="320040"/>
+          </a:xfrm>
+          <a:prstGeom prst="rect">
+            <a:avLst/>
+          </a:prstGeom>
+          <a:noFill/>
+        </p:spPr>
+        <p:txBody>
+          <a:bodyPr wrap="square" lIns="0" rIns="0" tIns="0" bIns="0">
+            <a:spAutoFit/>
+          </a:bodyPr>
+          <a:lstStyle/>
+          <a:p>
+            <a:pPr>
+              <a:spcBef>
+                <a:spcPts val="0"/>
+              </a:spcBef>
+              <a:spcAft>
+                <a:spcPts val="0"/>
+              </a:spcAft>
+            </a:pPr>
+            <a:r>
+              <a:rPr sz="1000" b="0" i="0">
+                <a:solidFill>
+                  <a:srgbClr val="868D96"/>
+                </a:solidFill>
+                <a:latin typeface="Consolas"/>
+              </a:rPr>
+              <a:t>APPENDIX</a:t>
+            </a:r>
+          </a:p>
+        </p:txBody>
+      </p:sp>
+      <p:sp>
+        <p:nvSpPr>
+          <p:cNvPr id="3" name="TextBox 2"/>
+          <p:cNvSpPr txBox="1"/>
+          <p:nvPr/>
+        </p:nvSpPr>
+        <p:spPr>
+          <a:xfrm>
+            <a:off x="566928" y="749808"/>
+            <a:ext cx="10515600" cy="457200"/>
+          </a:xfrm>
+          <a:prstGeom prst="rect">
+            <a:avLst/>
+          </a:prstGeom>
+          <a:noFill/>
+        </p:spPr>
+        <p:txBody>
+          <a:bodyPr wrap="square" lIns="0" rIns="0" tIns="0" bIns="0">
+            <a:spAutoFit/>
+          </a:bodyPr>
+          <a:lstStyle/>
+          <a:p>
+            <a:pPr>
+              <a:spcBef>
+                <a:spcPts val="0"/>
+              </a:spcBef>
+              <a:spcAft>
+                <a:spcPts val="0"/>
+              </a:spcAft>
+            </a:pPr>
+            <a:r>
+              <a:rPr sz="2000" b="0" i="0">
+                <a:solidFill>
+                  <a:srgbClr val="14171C"/>
+                </a:solidFill>
+                <a:latin typeface="Georgia"/>
+              </a:rPr>
+              <a:t>The collapse across all three national pairings</a:t>
+            </a:r>
+          </a:p>
+        </p:txBody>
+      </p:sp>
+      <p:sp>
+        <p:nvSpPr>
+          <p:cNvPr id="4" name="TextBox 3"/>
+          <p:cNvSpPr txBox="1"/>
+          <p:nvPr/>
+        </p:nvSpPr>
+        <p:spPr>
+          <a:xfrm>
+            <a:off x="566928" y="1207008"/>
+            <a:ext cx="10515600" cy="457200"/>
+          </a:xfrm>
+          <a:prstGeom prst="rect">
+            <a:avLst/>
+          </a:prstGeom>
+          <a:noFill/>
+        </p:spPr>
+        <p:txBody>
+          <a:bodyPr wrap="square" lIns="0" rIns="0" tIns="0" bIns="0">
+            <a:spAutoFit/>
+          </a:bodyPr>
+          <a:lstStyle/>
+          <a:p>
+            <a:pPr>
+              <a:lnSpc>
+                <a:spcPct val="128000"/>
+              </a:lnSpc>
+              <a:spcBef>
+                <a:spcPts val="0"/>
+              </a:spcBef>
+              <a:spcAft>
+                <a:spcPts val="0"/>
+              </a:spcAft>
+            </a:pPr>
+            <a:r>
+              <a:rPr sz="1100" b="0" i="0">
+                <a:solidFill>
+                  <a:srgbClr val="5A6068"/>
+                </a:solidFill>
+                <a:latin typeface="Calibri"/>
+              </a:rPr>
+              <a:t>Countries FDR-significant at levels versus first differences under the SDG framework, the HDI, and subnational HDI aggregated nationally.</a:t>
+            </a:r>
+          </a:p>
+        </p:txBody>
+      </p:sp>
+      <p:pic>
+        <p:nvPicPr>
+          <p:cNvPr id="5" name="Picture 4" descr="collapse_hdi_shdi_whr.png"/>
+          <p:cNvPicPr>
+            <a:picLocks noChangeAspect="1"/>
+          </p:cNvPicPr>
+          <p:nvPr/>
+        </p:nvPicPr>
+        <p:blipFill>
+          <a:blip r:embed="rId2"/>
+          <a:stretch>
+            <a:fillRect/>
+          </a:stretch>
+        </p:blipFill>
+        <p:spPr>
+          <a:xfrm>
+            <a:off x="2121157" y="1965960"/>
+            <a:ext cx="7949380" cy="4480560"/>
+          </a:xfrm>
+          <a:prstGeom prst="rect">
+            <a:avLst/>
+          </a:prstGeom>
+        </p:spPr>
+      </p:pic>
+    </p:spTree>
+  </p:cSld>
+  <p:clrMapOvr>
+    <a:masterClrMapping/>
+  </p:clrMapOvr>
+</p:sld>
+</file>
+
+<file path=ppt/slides/slide34.xml><?xml version="1.0" encoding="utf-8"?>
+<p:sld xmlns:a="http://schemas.openxmlformats.org/drawingml/2006/main" xmlns:p="http://schemas.openxmlformats.org/presentationml/2006/main" xmlns:r="http://schemas.openxmlformats.org/officeDocument/2006/relationships">
+  <p:cSld>
+    <p:bg>
+      <p:bgPr>
+        <a:solidFill>
+          <a:srgbClr val="FCFCFB"/>
+        </a:solidFill>
+        <a:effectLst/>
+      </p:bgPr>
+    </p:bg>
+    <p:spTree>
+      <p:nvGrpSpPr>
+        <p:cNvPr id="1" name=""/>
+        <p:cNvGrpSpPr/>
+        <p:nvPr/>
+      </p:nvGrpSpPr>
+      <p:grpSpPr/>
+      <p:sp>
+        <p:nvSpPr>
+          <p:cNvPr id="2" name="TextBox 1"/>
+          <p:cNvSpPr txBox="1"/>
+          <p:nvPr/>
+        </p:nvSpPr>
+        <p:spPr>
+          <a:xfrm>
+            <a:off x="566928" y="411480"/>
+            <a:ext cx="10515600" cy="320040"/>
+          </a:xfrm>
+          <a:prstGeom prst="rect">
+            <a:avLst/>
+          </a:prstGeom>
+          <a:noFill/>
+        </p:spPr>
+        <p:txBody>
+          <a:bodyPr wrap="square" lIns="0" rIns="0" tIns="0" bIns="0">
+            <a:spAutoFit/>
+          </a:bodyPr>
+          <a:lstStyle/>
+          <a:p>
+            <a:pPr>
+              <a:spcBef>
+                <a:spcPts val="0"/>
+              </a:spcBef>
+              <a:spcAft>
+                <a:spcPts val="0"/>
+              </a:spcAft>
+            </a:pPr>
+            <a:r>
+              <a:rPr sz="1000" b="0" i="0">
+                <a:solidFill>
+                  <a:srgbClr val="868D96"/>
+                </a:solidFill>
+                <a:latin typeface="Consolas"/>
+              </a:rPr>
+              <a:t>APPENDIX</a:t>
+            </a:r>
+          </a:p>
+        </p:txBody>
+      </p:sp>
+      <p:sp>
+        <p:nvSpPr>
+          <p:cNvPr id="3" name="TextBox 2"/>
+          <p:cNvSpPr txBox="1"/>
+          <p:nvPr/>
+        </p:nvSpPr>
+        <p:spPr>
+          <a:xfrm>
+            <a:off x="566928" y="749808"/>
+            <a:ext cx="10515600" cy="457200"/>
+          </a:xfrm>
+          <a:prstGeom prst="rect">
+            <a:avLst/>
+          </a:prstGeom>
+          <a:noFill/>
+        </p:spPr>
+        <p:txBody>
+          <a:bodyPr wrap="square" lIns="0" rIns="0" tIns="0" bIns="0">
+            <a:spAutoFit/>
+          </a:bodyPr>
+          <a:lstStyle/>
+          <a:p>
+            <a:pPr>
+              <a:spcBef>
+                <a:spcPts val="0"/>
+              </a:spcBef>
+              <a:spcAft>
+                <a:spcPts val="0"/>
+              </a:spcAft>
+            </a:pPr>
+            <a:r>
+              <a:rPr sz="2000" b="0" i="0">
+                <a:solidFill>
+                  <a:srgbClr val="14171C"/>
+                </a:solidFill>
+                <a:latin typeface="Georgia"/>
+              </a:rPr>
+              <a:t>Per-region collapse, subnational HDI against ESS life satisfaction</a:t>
+            </a:r>
+          </a:p>
+        </p:txBody>
+      </p:sp>
+      <p:sp>
+        <p:nvSpPr>
+          <p:cNvPr id="4" name="TextBox 3"/>
+          <p:cNvSpPr txBox="1"/>
+          <p:nvPr/>
+        </p:nvSpPr>
+        <p:spPr>
+          <a:xfrm>
+            <a:off x="566928" y="1207008"/>
+            <a:ext cx="10515600" cy="457200"/>
+          </a:xfrm>
+          <a:prstGeom prst="rect">
+            <a:avLst/>
+          </a:prstGeom>
+          <a:noFill/>
+        </p:spPr>
+        <p:txBody>
+          <a:bodyPr wrap="square" lIns="0" rIns="0" tIns="0" bIns="0">
+            <a:spAutoFit/>
+          </a:bodyPr>
+          <a:lstStyle/>
+          <a:p>
+            <a:pPr>
+              <a:lnSpc>
+                <a:spcPct val="128000"/>
+              </a:lnSpc>
+              <a:spcBef>
+                <a:spcPts val="0"/>
+              </a:spcBef>
+              <a:spcAft>
+                <a:spcPts val="0"/>
+              </a:spcAft>
+            </a:pPr>
+            <a:r>
+              <a:rPr sz="1100" b="0" i="0">
+                <a:solidFill>
+                  <a:srgbClr val="5A6068"/>
+                </a:solidFill>
+                <a:latin typeface="Calibri"/>
+              </a:rPr>
+              <a:t>167 regions with at least five survey rounds. Levels R² on the horizontal axis, across-year differences on the vertical.</a:t>
+            </a:r>
+          </a:p>
+        </p:txBody>
+      </p:sp>
+      <p:pic>
+        <p:nvPicPr>
+          <p:cNvPr id="5" name="Picture 4" descr="collapse_shdi_ess_regional.png"/>
+          <p:cNvPicPr>
+            <a:picLocks noChangeAspect="1"/>
+          </p:cNvPicPr>
+          <p:nvPr/>
+        </p:nvPicPr>
+        <p:blipFill>
+          <a:blip r:embed="rId2"/>
+          <a:stretch>
+            <a:fillRect/>
+          </a:stretch>
+        </p:blipFill>
+        <p:spPr>
+          <a:xfrm>
+            <a:off x="3585393" y="1965960"/>
+            <a:ext cx="5020909" cy="4480560"/>
+          </a:xfrm>
+          <a:prstGeom prst="rect">
+            <a:avLst/>
+          </a:prstGeom>
+        </p:spPr>
+      </p:pic>
+    </p:spTree>
+  </p:cSld>
+  <p:clrMapOvr>
+    <a:masterClrMapping/>
+  </p:clrMapOvr>
+</p:sld>
+</file>
+
+<file path=ppt/slides/slide35.xml><?xml version="1.0" encoding="utf-8"?>
+<p:sld xmlns:a="http://schemas.openxmlformats.org/drawingml/2006/main" xmlns:p="http://schemas.openxmlformats.org/presentationml/2006/main" xmlns:r="http://schemas.openxmlformats.org/officeDocument/2006/relationships">
+  <p:cSld>
+    <p:bg>
+      <p:bgPr>
+        <a:solidFill>
+          <a:srgbClr val="FCFCFB"/>
+        </a:solidFill>
+        <a:effectLst/>
+      </p:bgPr>
+    </p:bg>
+    <p:spTree>
+      <p:nvGrpSpPr>
+        <p:cNvPr id="1" name=""/>
+        <p:cNvGrpSpPr/>
+        <p:nvPr/>
+      </p:nvGrpSpPr>
+      <p:grpSpPr/>
+      <p:sp>
+        <p:nvSpPr>
+          <p:cNvPr id="2" name="TextBox 1"/>
+          <p:cNvSpPr txBox="1"/>
+          <p:nvPr/>
+        </p:nvSpPr>
+        <p:spPr>
+          <a:xfrm>
+            <a:off x="566928" y="411480"/>
+            <a:ext cx="10515600" cy="320040"/>
+          </a:xfrm>
+          <a:prstGeom prst="rect">
+            <a:avLst/>
+          </a:prstGeom>
+          <a:noFill/>
+        </p:spPr>
+        <p:txBody>
+          <a:bodyPr wrap="square" lIns="0" rIns="0" tIns="0" bIns="0">
+            <a:spAutoFit/>
+          </a:bodyPr>
+          <a:lstStyle/>
+          <a:p>
+            <a:pPr>
+              <a:spcBef>
+                <a:spcPts val="0"/>
+              </a:spcBef>
+              <a:spcAft>
+                <a:spcPts val="0"/>
+              </a:spcAft>
+            </a:pPr>
+            <a:r>
+              <a:rPr sz="1000" b="0" i="0">
+                <a:solidFill>
+                  <a:srgbClr val="868D96"/>
+                </a:solidFill>
+                <a:latin typeface="Consolas"/>
+              </a:rPr>
+              <a:t>APPENDIX</a:t>
+            </a:r>
+          </a:p>
+        </p:txBody>
+      </p:sp>
+      <p:sp>
+        <p:nvSpPr>
+          <p:cNvPr id="3" name="TextBox 2"/>
+          <p:cNvSpPr txBox="1"/>
+          <p:nvPr/>
+        </p:nvSpPr>
+        <p:spPr>
+          <a:xfrm>
+            <a:off x="566928" y="749808"/>
+            <a:ext cx="10515600" cy="457200"/>
+          </a:xfrm>
+          <a:prstGeom prst="rect">
+            <a:avLst/>
+          </a:prstGeom>
+          <a:noFill/>
+        </p:spPr>
+        <p:txBody>
+          <a:bodyPr wrap="square" lIns="0" rIns="0" tIns="0" bIns="0">
+            <a:spAutoFit/>
+          </a:bodyPr>
+          <a:lstStyle/>
+          <a:p>
+            <a:pPr>
+              <a:spcBef>
+                <a:spcPts val="0"/>
+              </a:spcBef>
+              <a:spcAft>
+                <a:spcPts val="0"/>
+              </a:spcAft>
+            </a:pPr>
+            <a:r>
+              <a:rPr sz="2000" b="0" i="0">
+                <a:solidFill>
+                  <a:srgbClr val="14171C"/>
+                </a:solidFill>
+                <a:latin typeface="Georgia"/>
+              </a:rPr>
+              <a:t>The three domains competing inside one instrument</a:t>
+            </a:r>
+          </a:p>
+        </p:txBody>
+      </p:sp>
+      <p:sp>
+        <p:nvSpPr>
+          <p:cNvPr id="4" name="TextBox 3"/>
+          <p:cNvSpPr txBox="1"/>
+          <p:nvPr/>
+        </p:nvSpPr>
+        <p:spPr>
+          <a:xfrm>
+            <a:off x="566928" y="1207008"/>
+            <a:ext cx="10515600" cy="457200"/>
+          </a:xfrm>
+          <a:prstGeom prst="rect">
+            <a:avLst/>
+          </a:prstGeom>
+          <a:noFill/>
+        </p:spPr>
+        <p:txBody>
+          <a:bodyPr wrap="square" lIns="0" rIns="0" tIns="0" bIns="0">
+            <a:spAutoFit/>
+          </a:bodyPr>
+          <a:lstStyle/>
+          <a:p>
+            <a:pPr>
+              <a:lnSpc>
+                <a:spcPct val="128000"/>
+              </a:lnSpc>
+              <a:spcBef>
+                <a:spcPts val="0"/>
+              </a:spcBef>
+              <a:spcAft>
+                <a:spcPts val="0"/>
+              </a:spcAft>
+            </a:pPr>
+            <a:r>
+              <a:rPr sz="1100" b="0" i="0">
+                <a:solidFill>
+                  <a:srgbClr val="5A6068"/>
+                </a:solidFill>
+                <a:latin typeface="Calibri"/>
+              </a:rPr>
+              <a:t>ESS only, at two levels of aggregation: individual respondents on the left, country means on the right.</a:t>
+            </a:r>
+          </a:p>
+        </p:txBody>
+      </p:sp>
+      <p:pic>
+        <p:nvPicPr>
+          <p:cNvPr id="5" name="Picture 4" descr="domain_horse_race.png"/>
+          <p:cNvPicPr>
+            <a:picLocks noChangeAspect="1"/>
+          </p:cNvPicPr>
+          <p:nvPr/>
+        </p:nvPicPr>
+        <p:blipFill>
+          <a:blip r:embed="rId2"/>
+          <a:stretch>
+            <a:fillRect/>
+          </a:stretch>
+        </p:blipFill>
+        <p:spPr>
+          <a:xfrm>
+            <a:off x="1940489" y="1965960"/>
+            <a:ext cx="8310716" cy="4480560"/>
+          </a:xfrm>
+          <a:prstGeom prst="rect">
+            <a:avLst/>
+          </a:prstGeom>
+        </p:spPr>
+      </p:pic>
+    </p:spTree>
+  </p:cSld>
+  <p:clrMapOvr>
+    <a:masterClrMapping/>
+  </p:clrMapOvr>
+</p:sld>
+</file>
+
+<file path=ppt/slides/slide36.xml><?xml version="1.0" encoding="utf-8"?>
+<p:sld xmlns:a="http://schemas.openxmlformats.org/drawingml/2006/main" xmlns:p="http://schemas.openxmlformats.org/presentationml/2006/main" xmlns:r="http://schemas.openxmlformats.org/officeDocument/2006/relationships">
+  <p:cSld>
+    <p:bg>
+      <p:bgPr>
+        <a:solidFill>
+          <a:srgbClr val="FCFCFB"/>
+        </a:solidFill>
+        <a:effectLst/>
+      </p:bgPr>
+    </p:bg>
+    <p:spTree>
+      <p:nvGrpSpPr>
+        <p:cNvPr id="1" name=""/>
+        <p:cNvGrpSpPr/>
+        <p:nvPr/>
+      </p:nvGrpSpPr>
+      <p:grpSpPr/>
+      <p:sp>
+        <p:nvSpPr>
+          <p:cNvPr id="2" name="TextBox 1"/>
+          <p:cNvSpPr txBox="1"/>
+          <p:nvPr/>
+        </p:nvSpPr>
+        <p:spPr>
+          <a:xfrm>
+            <a:off x="566928" y="411480"/>
+            <a:ext cx="10515600" cy="320040"/>
+          </a:xfrm>
+          <a:prstGeom prst="rect">
+            <a:avLst/>
+          </a:prstGeom>
+          <a:noFill/>
+        </p:spPr>
+        <p:txBody>
+          <a:bodyPr wrap="square" lIns="0" rIns="0" tIns="0" bIns="0">
+            <a:spAutoFit/>
+          </a:bodyPr>
+          <a:lstStyle/>
+          <a:p>
+            <a:pPr>
+              <a:spcBef>
+                <a:spcPts val="0"/>
+              </a:spcBef>
+              <a:spcAft>
+                <a:spcPts val="0"/>
+              </a:spcAft>
+            </a:pPr>
+            <a:r>
+              <a:rPr sz="1000" b="0" i="0">
+                <a:solidFill>
+                  <a:srgbClr val="868D96"/>
+                </a:solidFill>
+                <a:latin typeface="Consolas"/>
+              </a:rPr>
+              <a:t>APPENDIX</a:t>
+            </a:r>
+          </a:p>
+        </p:txBody>
+      </p:sp>
+      <p:sp>
+        <p:nvSpPr>
+          <p:cNvPr id="3" name="TextBox 2"/>
+          <p:cNvSpPr txBox="1"/>
+          <p:nvPr/>
+        </p:nvSpPr>
+        <p:spPr>
+          <a:xfrm>
+            <a:off x="566928" y="749808"/>
+            <a:ext cx="10515600" cy="457200"/>
+          </a:xfrm>
+          <a:prstGeom prst="rect">
+            <a:avLst/>
+          </a:prstGeom>
+          <a:noFill/>
+        </p:spPr>
+        <p:txBody>
+          <a:bodyPr wrap="square" lIns="0" rIns="0" tIns="0" bIns="0">
+            <a:spAutoFit/>
+          </a:bodyPr>
+          <a:lstStyle/>
+          <a:p>
+            <a:pPr>
+              <a:spcBef>
+                <a:spcPts val="0"/>
+              </a:spcBef>
+              <a:spcAft>
+                <a:spcPts val="0"/>
+              </a:spcAft>
+            </a:pPr>
+            <a:r>
+              <a:rPr sz="2000" b="0" i="0">
+                <a:solidFill>
+                  <a:srgbClr val="14171C"/>
+                </a:solidFill>
+                <a:latin typeface="Georgia"/>
+              </a:rPr>
+              <a:t>Individual-level education by country</a:t>
+            </a:r>
+          </a:p>
+        </p:txBody>
+      </p:sp>
+      <p:sp>
+        <p:nvSpPr>
+          <p:cNvPr id="4" name="TextBox 3"/>
+          <p:cNvSpPr txBox="1"/>
+          <p:nvPr/>
+        </p:nvSpPr>
+        <p:spPr>
+          <a:xfrm>
+            <a:off x="566928" y="1207008"/>
+            <a:ext cx="10515600" cy="457200"/>
+          </a:xfrm>
+          <a:prstGeom prst="rect">
+            <a:avLst/>
+          </a:prstGeom>
+          <a:noFill/>
+        </p:spPr>
+        <p:txBody>
+          <a:bodyPr wrap="square" lIns="0" rIns="0" tIns="0" bIns="0">
+            <a:spAutoFit/>
+          </a:bodyPr>
+          <a:lstStyle/>
+          <a:p>
+            <a:pPr>
+              <a:lnSpc>
+                <a:spcPct val="128000"/>
+              </a:lnSpc>
+              <a:spcBef>
+                <a:spcPts val="0"/>
+              </a:spcBef>
+              <a:spcAft>
+                <a:spcPts val="0"/>
+              </a:spcAft>
+            </a:pPr>
+            <a:r>
+              <a:rPr sz="1100" b="0" i="0">
+                <a:solidFill>
+                  <a:srgbClr val="5A6068"/>
+                </a:solidFill>
+                <a:latin typeface="Calibri"/>
+              </a:rPr>
+              <a:t>The distribution behind the 89% figure — per-country associations between years of schooling and life satisfaction across 351,023 respondents.</a:t>
+            </a:r>
+          </a:p>
+        </p:txBody>
+      </p:sp>
+      <p:pic>
+        <p:nvPicPr>
+          <p:cNvPr id="5" name="Picture 4" descr="ess_individual_education.png"/>
+          <p:cNvPicPr>
+            <a:picLocks noChangeAspect="1"/>
+          </p:cNvPicPr>
+          <p:nvPr/>
+        </p:nvPicPr>
+        <p:blipFill>
+          <a:blip r:embed="rId2"/>
+          <a:stretch>
+            <a:fillRect/>
+          </a:stretch>
+        </p:blipFill>
+        <p:spPr>
+          <a:xfrm>
+            <a:off x="2399046" y="1965960"/>
+            <a:ext cx="7393603" cy="4480560"/>
+          </a:xfrm>
+          <a:prstGeom prst="rect">
+            <a:avLst/>
+          </a:prstGeom>
+        </p:spPr>
+      </p:pic>
     </p:spTree>
   </p:cSld>
   <p:clrMapOvr>
@@ -10794,7 +12246,7 @@
                 </a:solidFill>
                 <a:latin typeface="Consolas"/>
               </a:rPr>
-              <a:t>REPLICATION 1 · THE HDI</a:t>
+              <a:t>WHERE WE START · THE SDG PAPER</a:t>
             </a:r>
           </a:p>
         </p:txBody>
@@ -10839,7 +12291,7 @@
                 </a:solidFill>
                 <a:latin typeface="Georgia"/>
               </a:rPr>
-              <a:t>A deliberately parsimonious index shows the same collapse</a:t>
+              <a:t>Development indicators predict happiness between countries, not within them</a:t>
             </a:r>
           </a:p>
         </p:txBody>
@@ -10884,7 +12336,7 @@
                 </a:solidFill>
                 <a:latin typeface="Calibri"/>
               </a:rPr>
-              <a:t>The Human Development Index is the opposite of the SDG framework in every way the dismissal relies on: three dimensions rather than seventeen goals, a single custodian, a stable definition, near-universal coverage. Substituting it for the SDGs and holding everything else fixed gives 64 of 151 countries FDR-significant in levels and 3 of 151 in first differences — 42% down to 2%.</a:t>
+              <a:t>The original design is a per-country time-series test: within each country, does the SDG indicator move with the Cantril ladder? Run at levels, 30 of 42 countries come back FDR-significant on at least one of 661 series — 71%. Run the identical test on first differences, and 5% survive.</a:t>
             </a:r>
           </a:p>
           <a:p>
@@ -10906,7 +12358,7 @@
                 </a:solidFill>
                 <a:latin typeface="Calibri"/>
               </a:rPr>
-              <a:t>The levels-to-differences ratio is identical in order of magnitude whether you use the SDGs or the HDI. Whatever produces the asymmetry, it is not a property of either framework's scope or construction.</a:t>
+              <a:t>That gap is the whole starting point. A between-country association this strong and a within-country association this weak are hard to hold at once: either development stops mattering once you look inside a country, or the design cannot see it there. Before interpreting it, it is worth checking that it is not simply the SDG framework misbehaving.</a:t>
             </a:r>
           </a:p>
         </p:txBody>
@@ -10955,7 +12407,7 @@
       </p:sp>
       <p:pic>
         <p:nvPicPr>
-          <p:cNvPr id="6" name="Picture 5" descr="collapse_hdi_shdi_whr.png"/>
+          <p:cNvPr id="6" name="Picture 5" descr="sdg_by_goal.png"/>
           <p:cNvPicPr>
             <a:picLocks noChangeAspect="1"/>
           </p:cNvPicPr>
@@ -10969,8 +12421,8 @@
         </p:blipFill>
         <p:spPr>
           <a:xfrm>
-            <a:off x="5120640" y="1353312"/>
-            <a:ext cx="6537960" cy="3685032"/>
+            <a:off x="5120640" y="1156722"/>
+            <a:ext cx="6537960" cy="4078212"/>
           </a:xfrm>
           <a:prstGeom prst="rect">
             <a:avLst/>
@@ -11017,7 +12469,7 @@
                 </a:solidFill>
                 <a:latin typeface="Calibri"/>
               </a:rPr>
-              <a:t>Countries with FDR-significant development–happiness association, levels versus first differences, under the SDG framework and the HDI.</a:t>
+              <a:t>The SDG framework at levels, by goal. Even here the pooled rates are low and uneven — health reaches 11.5%, education 3.3% — which is what makes the framework-artefact dismissal plausible enough to need testing.</a:t>
             </a:r>
           </a:p>
         </p:txBody>
@@ -11085,7 +12537,7 @@
                 </a:solidFill>
                 <a:latin typeface="Consolas"/>
               </a:rPr>
-              <a:t>REPLICATION 2 · THE ESS</a:t>
+              <a:t>SWAP 1 · THE FRAMEWORK</a:t>
             </a:r>
           </a:p>
         </p:txBody>
@@ -11130,7 +12582,7 @@
                 </a:solidFill>
                 <a:latin typeface="Georgia"/>
               </a:rPr>
-              <a:t>Switch the wellbeing measure from the World Happiness Report to the European Social Survey</a:t>
+              <a:t>The HDI is built the opposite way and shows the same collapse</a:t>
             </a:r>
           </a:p>
         </p:txBody>
@@ -11169,13 +12621,13 @@
               </a:spcAft>
             </a:pPr>
             <a:r>
-              <a:rPr sz="1125" b="0" i="0">
+              <a:rPr sz="1150" b="0" i="0">
                 <a:solidFill>
                   <a:srgbClr val="5A6068"/>
                 </a:solidFill>
                 <a:latin typeface="Calibri"/>
               </a:rPr>
-              <a:t>The World Happiness Report compiles a single survey question: the Cantril ladder, 'how satisfied are you with your life on a scale of 0–10?' The European Social Survey asks similar life satisfaction and happiness questions of individuals rather than aggregating them to countries.</a:t>
+              <a:t>The HDI is the SDG framework's opposite on every dimension the dismissal leans on: three dimensions rather than seventeen goals, one custodian, a stable definition, near-universal coverage. Substituting it and holding everything else fixed gives 42% of 150 countries significant at levels and 2% in differences.</a:t>
             </a:r>
           </a:p>
           <a:p>
@@ -11191,13 +12643,13 @@
               </a:spcAft>
             </a:pPr>
             <a:r>
-              <a:rPr sz="1125" b="0" i="0">
+              <a:rPr sz="1150" b="0" i="0">
                 <a:solidFill>
                   <a:srgbClr val="5A6068"/>
                 </a:solidFill>
                 <a:latin typeface="Calibri"/>
               </a:rPr>
-              <a:t>Running the same levels-and-differences design against the ESS — 36 European countries, 351,000 respondents — reveals something unexpected: the collapse does NOT hold here. Both levels and differences show significant associations. Life satisfaction and happiness respond to year-to-year changes in how people report themselves, not just to between-country differences. This is a important caveat to our main finding: self-reported wellbeing measures capture changes that administrative development indicators miss — but only at the temporal and geographic resolution of the ESS (36 European countries, annual cycles). The persistence of the collapse in SDG and HDI suggests their construction choices matter more than the measurement method alone.</a:t>
+              <a:t>The three panels are the fair-comparison check. The SDG framework detects in more countries (71% vs 51%) simply because it has more shots on goal; give it the HDI's five-indicator budget and its advantage disappears; normalise per indicator and the HDI dominates outright, with 54% of SDG series significant in no country at all. Neither framework is the problem — the ratio between levels and differences is the same order of magnitude in both.</a:t>
             </a:r>
           </a:p>
         </p:txBody>
@@ -11246,7 +12698,7 @@
       </p:sp>
       <p:pic>
         <p:nvPicPr>
-          <p:cNvPr id="6" name="Picture 5" descr="ess_levels_diffs_collapse.png"/>
+          <p:cNvPr id="6" name="Picture 5" descr="framework_three_comparisons.png"/>
           <p:cNvPicPr>
             <a:picLocks noChangeAspect="1"/>
           </p:cNvPicPr>
@@ -11260,8 +12712,8 @@
         </p:blipFill>
         <p:spPr>
           <a:xfrm>
-            <a:off x="5120640" y="1264158"/>
-            <a:ext cx="6537960" cy="3863340"/>
+            <a:off x="5120640" y="2093715"/>
+            <a:ext cx="6537960" cy="2204226"/>
           </a:xfrm>
           <a:prstGeom prst="rect">
             <a:avLst/>
@@ -11308,7 +12760,7 @@
                 </a:solidFill>
                 <a:latin typeface="Calibri"/>
               </a:rPr>
-              <a:t>ESS shows persistent associations in differences, unlike SDG and HDI. Caveat: 36 European countries, self-reported measures, annual survey cycles.</a:t>
+              <a:t>HDI versus the SDG framework on detection, on a matched five-indicator budget, and per indicator. The SDG lead is breadth, not sharper instruments.</a:t>
             </a:r>
           </a:p>
         </p:txBody>
@@ -11376,7 +12828,7 @@
                 </a:solidFill>
                 <a:latin typeface="Consolas"/>
               </a:rPr>
-              <a:t>THE COMPOSITE + SUB-COMPONENTS</a:t>
+              <a:t>SWAP 2 AND 3 · THE WELLBEING MEASURE, AND THE SCALE</a:t>
             </a:r>
           </a:p>
         </p:txBody>
@@ -11421,7 +12873,7 @@
                 </a:solidFill>
                 <a:latin typeface="Georgia"/>
               </a:rPr>
-              <a:t>Beneath the composites, the components tell different stories</a:t>
+              <a:t>Change the happiness data and the unit of analysis, and it still collapses</a:t>
             </a:r>
           </a:p>
         </p:txBody>
@@ -11466,7 +12918,7 @@
                 </a:solidFill>
                 <a:latin typeface="Calibri"/>
               </a:rPr>
-              <a:t>Expected years of schooling leads the HDI: highest median R² at levels (0.326) and in differences (0.069), above the composite itself. Income is level with it in levels, weaker in differences. Life expectancy — the HDI's proxy for health — is weakest in levels.</a:t>
+              <a:t>The World Happiness Report is a single Cantril-ladder question aggregated to countries. The European Social Survey asks its own life-satisfaction and happiness items of individuals, on a different sampling frame, in a different institution. And subnational HDI lets us drop one spatial scale below the country.</a:t>
             </a:r>
           </a:p>
           <a:p>
@@ -11488,7 +12940,29 @@
                 </a:solidFill>
                 <a:latin typeface="Calibri"/>
               </a:rPr>
-              <a:t>The HDI still shows the collapse, unlike the ESS, so the question shifts: which components of development are actually strong at the levels, and why does the type of measurement matter? This is the entry point to Act II: which components are actually strong, weak, or invisible when you look at each framework's construction choices rather than its top-line numbers?</a:t>
+              <a:t>Pairing subnational HDI with ESS life satisfaction: across regions inside a country, 47% of countries are FDR-significant at levels. Within each region over survey rounds, 0 of 167 regions survive. The levels result sits right on top of the national one (47% against 42%), and the differences result is, if anything, more complete.</a:t>
+            </a:r>
+          </a:p>
+          <a:p>
+            <a:pPr>
+              <a:lnSpc>
+                <a:spcPct val="132000"/>
+              </a:lnSpc>
+              <a:spcBef>
+                <a:spcPts val="0"/>
+              </a:spcBef>
+              <a:spcAft>
+                <a:spcPts val="1100"/>
+              </a:spcAft>
+            </a:pPr>
+            <a:r>
+              <a:rPr sz="1150" b="0" i="0">
+                <a:solidFill>
+                  <a:srgbClr val="5A6068"/>
+                </a:solidFill>
+                <a:latin typeface="Calibri"/>
+              </a:rPr>
+              <a:t>Three independent swaps — framework, wellbeing instrument, spatial scale — and the same asymmetry each time. Whatever produces it is structural to comparing a slow-moving aggregate against a noisy annual outcome, not specific to any dataset.</a:t>
             </a:r>
           </a:p>
         </p:txBody>
@@ -11537,7 +13011,7 @@
       </p:sp>
       <p:pic>
         <p:nvPicPr>
-          <p:cNvPr id="6" name="Picture 5" descr="hdi_full_structure.png"/>
+          <p:cNvPr id="6" name="Picture 5" descr="ess_levels_diffs_collapse.png"/>
           <p:cNvPicPr>
             <a:picLocks noChangeAspect="1"/>
           </p:cNvPicPr>
@@ -11551,8 +13025,8 @@
         </p:blipFill>
         <p:spPr>
           <a:xfrm>
-            <a:off x="5120640" y="1791377"/>
-            <a:ext cx="6537960" cy="2808901"/>
+            <a:off x="5120640" y="1412748"/>
+            <a:ext cx="6537960" cy="3566160"/>
           </a:xfrm>
           <a:prstGeom prst="rect">
             <a:avLst/>
@@ -11599,7 +13073,7 @@
                 </a:solidFill>
                 <a:latin typeface="Calibri"/>
               </a:rPr>
-              <a:t>HDI composite and sub-components, levels and first differences. Benjamini–Hochberg corrected within each country.</a:t>
+              <a:t>The same FDR test in all three pairings. Levels between 42% and 71%; differences between 0% and 5%.</a:t>
             </a:r>
           </a:p>
         </p:txBody>
@@ -11756,7 +13230,7 @@
                 </a:solidFill>
                 <a:latin typeface="Georgia"/>
               </a:rPr>
-              <a:t>The levels are where development and wellbeing predict each other. Now we can ask: which components of development matter for lived experience?</a:t>
+              <a:t>Three swaps, three collapses. The asymmetry belongs to the design, not to any one framework. Differences are too noisy to carry an argument — so everything that follows is a question about the levels.</a:t>
             </a:r>
           </a:p>
         </p:txBody>
@@ -11795,8 +13269,8 @@
         </p:nvSpPr>
         <p:spPr>
           <a:xfrm>
-            <a:off x="8229600" y="822960"/>
-            <a:ext cx="3291840" cy="4114800"/>
+            <a:off x="7680960" y="822960"/>
+            <a:ext cx="3840480" cy="4114800"/>
           </a:xfrm>
           <a:prstGeom prst="rect">
             <a:avLst/>
@@ -11955,7 +13429,7 @@
                 </a:solidFill>
                 <a:latin typeface="Georgia"/>
               </a:rPr>
-              <a:t>At the levels: three domains, three failure modes</a:t>
+              <a:t>At the levels, what is actually doing the work?</a:t>
             </a:r>
           </a:p>
         </p:txBody>
@@ -12000,7 +13474,7 @@
                 </a:solidFill>
                 <a:latin typeface="Georgia"/>
               </a:rPr>
-              <a:t>Three domains predict life satisfaction. But which frameworks can see them depends entirely on construction choices: which construct you count, which variable you measure, which domains you collect. Each framework's limitations reveal different failure modes, not different realities.</a:t>
+              <a:t>If the levels are where development and wellbeing meet, the useful question is which components are carrying that association. Ask it of both frameworks' internals: the HDI's five components, and the SDGs' seventeen goals. Two domains come out — but one of them only after you stop pooling it.</a:t>
             </a:r>
           </a:p>
         </p:txBody>
@@ -12042,7 +13516,7 @@
                 </a:solidFill>
                 <a:latin typeface="Consolas"/>
               </a:rPr>
-              <a:t>92% vs 34% vs 3.3%</a:t>
+              <a:t>19% vs 41%</a:t>
             </a:r>
           </a:p>
           <a:p>
@@ -12064,7 +13538,7 @@
                 </a:solidFill>
                 <a:latin typeface="Calibri"/>
               </a:rPr>
-              <a:t>countries significant: education in ESS, HDI, and SDG4 pooled</a:t>
+              <a:t>HDI life expectancy vs mean years of schooling, at levels</a:t>
             </a:r>
           </a:p>
         </p:txBody>
@@ -12106,7 +13580,7 @@
                 </a:solidFill>
                 <a:latin typeface="Consolas"/>
               </a:rPr>
-              <a:t>100% vs 20% vs 11.5%</a:t>
+              <a:t>4th of 17</a:t>
             </a:r>
           </a:p>
           <a:p>
@@ -12128,7 +13602,7 @@
                 </a:solidFill>
                 <a:latin typeface="Calibri"/>
               </a:rPr>
-              <a:t>countries significant: health in ESS, HDI, and SDG3</a:t>
+              <a:t>where health ranks among SDG goals (11.5%)</a:t>
             </a:r>
           </a:p>
         </p:txBody>
@@ -12170,7 +13644,7 @@
                 </a:solidFill>
                 <a:latin typeface="Consolas"/>
               </a:rPr>
-              <a:t>94% vs 1.5% vs —</a:t>
+              <a:t>12.7% vs 3.3%</a:t>
             </a:r>
           </a:p>
           <a:p>
@@ -12192,7 +13666,7 @@
                 </a:solidFill>
                 <a:latin typeface="Calibri"/>
               </a:rPr>
-              <a:t>countries significant: social trust in ESS, SDG16, and HDI (not measured)</a:t>
+              <a:t>SDG4 access indicators alone vs all 35 pooled</a:t>
             </a:r>
           </a:p>
         </p:txBody>
@@ -12260,7 +13734,7 @@
                 </a:solidFill>
                 <a:latin typeface="Consolas"/>
               </a:rPr>
-              <a:t>FRAMEWORK COMPARISON</a:t>
+              <a:t>INSIDE THE HDI</a:t>
             </a:r>
           </a:p>
         </p:txBody>
@@ -12305,7 +13779,7 @@
                 </a:solidFill>
                 <a:latin typeface="Georgia"/>
               </a:rPr>
-              <a:t>How the frameworks compare on detection, budget-match, and per-indicator basis</a:t>
+              <a:t>Schooling leads the HDI's components; life expectancy is the weakest of the five</a:t>
             </a:r>
           </a:p>
         </p:txBody>
@@ -12350,7 +13824,29 @@
                 </a:solidFill>
                 <a:latin typeface="Calibri"/>
               </a:rPr>
-              <a:t>Before we ask what matters, we need to understand how these frameworks differ. The SDG database detects significance in more countries (71% raw) than the HDI (51% raw), but when both are given the same budget — five indicators across 42 countries — the HDI's edge becomes real but modest (30% vs 51% among those 42 countries). When normalized per indicator, the HDI dominates: most SDG series sit in the zero-significance tail, while HDI indicators cluster higher. This is context we need before asking which components matter most.</a:t>
+              <a:t>Decompose the composite and the five components separate cleanly at levels: mean years of schooling 41%, income 40%, expected years of schooling 33%, the composite itself 42% — and life expectancy last at 19%. In differences all five sit between 1% and 5%, so the collapse is a property of the composite and of every part of it.</a:t>
+            </a:r>
+          </a:p>
+          <a:p>
+            <a:pPr>
+              <a:lnSpc>
+                <a:spcPct val="132000"/>
+              </a:lnSpc>
+              <a:spcBef>
+                <a:spcPts val="0"/>
+              </a:spcBef>
+              <a:spcAft>
+                <a:spcPts val="1100"/>
+              </a:spcAft>
+            </a:pPr>
+            <a:r>
+              <a:rPr sz="1150" b="0" i="0">
+                <a:solidFill>
+                  <a:srgbClr val="5A6068"/>
+                </a:solidFill>
+                <a:latin typeface="Calibri"/>
+              </a:rPr>
+              <a:t>Life expectancy being the weakest is the first hint that this is about measurement rather than about health. The top 100 countries span 81 to 85 years. A variable with that little range left cannot carry much association, whatever the underlying domain does.</a:t>
             </a:r>
           </a:p>
         </p:txBody>
@@ -12399,7 +13895,7 @@
       </p:sp>
       <p:pic>
         <p:nvPicPr>
-          <p:cNvPr id="6" name="Picture 5" descr="framework_three_comparisons.png"/>
+          <p:cNvPr id="6" name="Picture 5" descr="hdi_full_structure.png"/>
           <p:cNvPicPr>
             <a:picLocks noChangeAspect="1"/>
           </p:cNvPicPr>
@@ -12413,8 +13909,8 @@
         </p:blipFill>
         <p:spPr>
           <a:xfrm>
-            <a:off x="5120640" y="2093715"/>
-            <a:ext cx="6537960" cy="2204226"/>
+            <a:off x="5120640" y="1791377"/>
+            <a:ext cx="6537960" cy="2808901"/>
           </a:xfrm>
           <a:prstGeom prst="rect">
             <a:avLst/>
@@ -12461,7 +13957,7 @@
                 </a:solidFill>
                 <a:latin typeface="Calibri"/>
               </a:rPr>
-              <a:t>How SDG and HDI frameworks compare on detection rate, budget-matched analysis, and per-indicator significance distribution.</a:t>
+              <a:t>HDI composite and its five components, levels and first differences, Benjamini–Hochberg corrected within each country.</a:t>
             </a:r>
           </a:p>
         </p:txBody>

--- a/deck/Measured_Where_It_Varies.pptx
+++ b/deck/Measured_Where_It_Varies.pptx
@@ -6421,7 +6421,7 @@
                 </a:solidFill>
                 <a:latin typeface="Calibri"/>
               </a:rPr>
-              <a:t>So we tested that dismissal. Swap the framework for the HDI. Swap the Cantril ladder for the European Social Survey. Go one spatial scale down to subnational regions. The collapse survives all three swaps, which means it is a property of the design, not of the SDGs — and it means the levels are where the signal actually lives.</a:t>
+              <a:t>So we tested that dismissal. Swap the framework for the HDI — built the opposite way on every dimension the dismissal leans on — and the collapse is just as sharp. Swap the Cantril ladder for the European Social Survey and go one spatial scale down, and the levels association holds on an independent instrument. The asymmetry is a property of the design, not of the SDGs, and the levels are where the signal actually lives.</a:t>
             </a:r>
           </a:p>
           <a:p>
@@ -6657,7 +6657,7 @@
                 </a:solidFill>
                 <a:latin typeface="Calibri"/>
               </a:rPr>
-              <a:t>Swap the framework, the wellbeing measure, and the spatial scale. Levels hold every time; differences go to almost nothing every time. So analyse the levels.</a:t>
+              <a:t>The HDI shows it as sharply as the SDGs do, and an independent wellbeing instrument corroborates the levels half. Differences carry nothing — so analyse the levels.</a:t>
             </a:r>
           </a:p>
         </p:txBody>
@@ -10352,7 +10352,7 @@
                 </a:solidFill>
                 <a:latin typeface="Calibri"/>
               </a:rPr>
-              <a:t>SDG × WHR, 42 countries — the original finding</a:t>
+              <a:t>SDG × WHR, 42 countries, ~13 years — the original finding</a:t>
             </a:r>
           </a:p>
         </p:txBody>
@@ -10416,7 +10416,7 @@
                 </a:solidFill>
                 <a:latin typeface="Calibri"/>
               </a:rPr>
-              <a:t>HDI × WHR, 150 countries — swap the framework</a:t>
+              <a:t>HDI × WHR, 150 countries, ~13 years — swap the framework</a:t>
             </a:r>
           </a:p>
         </p:txBody>
@@ -10458,7 +10458,7 @@
                 </a:solidFill>
                 <a:latin typeface="Consolas"/>
               </a:rPr>
-              <a:t>47% → 0%</a:t>
+              <a:t>47%</a:t>
             </a:r>
           </a:p>
           <a:p>
@@ -10480,7 +10480,7 @@
                 </a:solidFill>
                 <a:latin typeface="Calibri"/>
               </a:rPr>
-              <a:t>SHDI × ESS — swap the wellbeing measure and the scale</a:t>
+              <a:t>SHDI × ESS at levels, across regions — swap the instrument and scale</a:t>
             </a:r>
           </a:p>
         </p:txBody>
@@ -10724,7 +10724,7 @@
                 </a:solidFill>
                 <a:latin typeface="Calibri"/>
               </a:rPr>
-              <a:t>6 things the acts do not settle, in the order they block drafting.</a:t>
+              <a:t>7 things the acts do not settle, in the order they block drafting.</a:t>
             </a:r>
           </a:p>
         </p:txBody>
@@ -11026,7 +11026,7 @@
                 </a:solidFill>
                 <a:latin typeface="Consolas"/>
               </a:rPr>
-              <a:t>SCOPE OF THE TRUST FINDING</a:t>
+              <a:t>WHAT THE ESS PANEL CAN AND CANNOT TEST</a:t>
             </a:r>
           </a:p>
           <a:p>
@@ -11048,7 +11048,7 @@
                 </a:solidFill>
                 <a:latin typeface="Calibri"/>
               </a:rPr>
-              <a:t>Trust rests on the ESS: 36 European countries, one item, self-reported. 97% of countries significant with median individual R² 0.039. The SDG16 comparison is cross-sectional because only 16 of 163 country-series have the four years a time-series design needs. This is the most tentative of the three domains and should be framed as such.</a:t>
+              <a:t>Seven survey rounds is too short for the per-country time-series design. Simulating a REAL correlation and asking how often the test finds it: at seven observations rho = 0.5 is recovered in ~3% of units and rho = 0.7 in ~23%, against ~50% and ~79% at thirteen years. So HDI x ESS returning 8% levels / 16% differences is a null test, not a finding — and the inversion (differences above levels) is itself the tell. We report the bars and flag them rather than dropping them. The ESS levels contribution comes from cross-section instead: 47% of 15 countries across regions, which is well-powered.</a:t>
             </a:r>
           </a:p>
         </p:txBody>
@@ -11134,7 +11134,7 @@
                 </a:solidFill>
                 <a:latin typeface="Consolas"/>
               </a:rPr>
-              <a:t>INSTITUTIONAL CONFIDENCE IS NOT INTERPERSONAL TRUST</a:t>
+              <a:t>SCOPE OF THE TRUST FINDING</a:t>
             </a:r>
           </a:p>
           <a:p>
@@ -11156,7 +11156,7 @@
                 </a:solidFill>
                 <a:latin typeface="Calibri"/>
               </a:rPr>
-              <a:t>SDG16's trust-adjacent series measure satisfaction with public services, perceived bribery and perceived inclusiveness in decision-making. These are conceptually distinct from 'most people can be trusted', and they do not survive an income control while interpersonal trust does. The commentary must be explicit that SDG16 is not a direct analogue, wherever the 1.5% figure appears.</a:t>
+              <a:t>Trust rests on the ESS: 36 European countries, one item, self-reported. 97% of countries significant with median individual R² 0.039. The SDG16 comparison is cross-sectional because only 16 of 163 country-series have the four years a time-series design needs. This is the most tentative of the three domains and should be framed as such.</a:t>
             </a:r>
           </a:p>
         </p:txBody>
@@ -11242,7 +11242,7 @@
                 </a:solidFill>
                 <a:latin typeface="Consolas"/>
               </a:rPr>
-              <a:t>THREE FAILURE MODES AS THE META-FINDING</a:t>
+              <a:t>INSTITUTIONAL CONFIDENCE IS NOT INTERPERSONAL TRUST</a:t>
             </a:r>
           </a:p>
           <a:p>
@@ -11264,7 +11264,7 @@
                 </a:solidFill>
                 <a:latin typeface="Calibri"/>
               </a:rPr>
-              <a:t>The paper's contribution is arguably not the three domains but the three distinct ways a framework loses one: pooled construct, saturated variable, absent coverage. They need different remedies, which is what makes Act IV specific rather than rhetorical.</a:t>
+              <a:t>SDG16's trust-adjacent series measure satisfaction with public services, perceived bribery and perceived inclusiveness in decision-making. These are conceptually distinct from 'most people can be trusted', and they do not survive an income control while interpersonal trust does. The commentary must be explicit that SDG16 is not a direct analogue, wherever the 1.5% figure appears.</a:t>
             </a:r>
           </a:p>
         </p:txBody>
@@ -11322,6 +11322,114 @@
         <p:spPr>
           <a:xfrm>
             <a:off x="8152180" y="4251960"/>
+            <a:ext cx="3472586" cy="1828800"/>
+          </a:xfrm>
+          <a:prstGeom prst="rect">
+            <a:avLst/>
+          </a:prstGeom>
+          <a:noFill/>
+        </p:spPr>
+        <p:txBody>
+          <a:bodyPr wrap="square" lIns="0" rIns="0" tIns="0" bIns="0">
+            <a:spAutoFit/>
+          </a:bodyPr>
+          <a:lstStyle/>
+          <a:p>
+            <a:pPr>
+              <a:spcBef>
+                <a:spcPts val="0"/>
+              </a:spcBef>
+              <a:spcAft>
+                <a:spcPts val="700"/>
+              </a:spcAft>
+            </a:pPr>
+            <a:r>
+              <a:rPr sz="1050" b="0" i="0">
+                <a:solidFill>
+                  <a:srgbClr val="17549E"/>
+                </a:solidFill>
+                <a:latin typeface="Consolas"/>
+              </a:rPr>
+              <a:t>THREE FAILURE MODES AS THE META-FINDING</a:t>
+            </a:r>
+          </a:p>
+          <a:p>
+            <a:pPr>
+              <a:lnSpc>
+                <a:spcPct val="130000"/>
+              </a:lnSpc>
+              <a:spcBef>
+                <a:spcPts val="0"/>
+              </a:spcBef>
+              <a:spcAft>
+                <a:spcPts val="0"/>
+              </a:spcAft>
+            </a:pPr>
+            <a:r>
+              <a:rPr sz="1100" b="0" i="0">
+                <a:solidFill>
+                  <a:srgbClr val="5A6068"/>
+                </a:solidFill>
+                <a:latin typeface="Calibri"/>
+              </a:rPr>
+              <a:t>The paper's contribution is arguably not the three domains but the three distinct ways a framework loses one: pooled construct, saturated variable, absent coverage. They need different remedies, which is what makes Act IV specific rather than rhetorical.</a:t>
+            </a:r>
+          </a:p>
+        </p:txBody>
+      </p:sp>
+      <p:sp>
+        <p:nvSpPr>
+          <p:cNvPr id="15" name="Rectangle 14"/>
+          <p:cNvSpPr/>
+          <p:nvPr/>
+        </p:nvSpPr>
+        <p:spPr>
+          <a:xfrm>
+            <a:off x="566928" y="6309360"/>
+            <a:ext cx="3472586" cy="25400"/>
+          </a:xfrm>
+          <a:prstGeom prst="rect">
+            <a:avLst/>
+          </a:prstGeom>
+          <a:solidFill>
+            <a:srgbClr val="17549E"/>
+          </a:solidFill>
+          <a:ln>
+            <a:noFill/>
+          </a:ln>
+          <a:effectLst/>
+        </p:spPr>
+        <p:style>
+          <a:lnRef idx="1">
+            <a:schemeClr val="accent1"/>
+          </a:lnRef>
+          <a:fillRef idx="3">
+            <a:schemeClr val="accent1"/>
+          </a:fillRef>
+          <a:effectRef idx="2">
+            <a:schemeClr val="accent1"/>
+          </a:effectRef>
+          <a:fontRef idx="minor">
+            <a:schemeClr val="lt1"/>
+          </a:fontRef>
+        </p:style>
+        <p:txBody>
+          <a:bodyPr rtlCol="0" anchor="ctr"/>
+          <a:lstStyle/>
+          <a:p>
+            <a:pPr algn="ctr"/>
+          </a:p>
+        </p:txBody>
+      </p:sp>
+      <p:sp>
+        <p:nvSpPr>
+          <p:cNvPr id="16" name="TextBox 15"/>
+          <p:cNvSpPr txBox="1"/>
+          <p:nvPr/>
+        </p:nvSpPr>
+        <p:spPr>
+          <a:xfrm>
+            <a:off x="566928" y="6492240"/>
             <a:ext cx="3472586" cy="1828800"/>
           </a:xfrm>
           <a:prstGeom prst="rect">
@@ -12828,7 +12936,7 @@
                 </a:solidFill>
                 <a:latin typeface="Consolas"/>
               </a:rPr>
-              <a:t>SWAP 2 AND 3 · THE WELLBEING MEASURE, AND THE SCALE</a:t>
+              <a:t>SWAP 2 · THE WELLBEING MEASURE</a:t>
             </a:r>
           </a:p>
         </p:txBody>
@@ -12873,7 +12981,7 @@
                 </a:solidFill>
                 <a:latin typeface="Georgia"/>
               </a:rPr>
-              <a:t>Change the happiness data and the unit of analysis, and it still collapses</a:t>
+              <a:t>Swapping the Cantril ladder for the ESS: what it can and cannot settle</a:t>
             </a:r>
           </a:p>
         </p:txBody>
@@ -12912,13 +13020,13 @@
               </a:spcAft>
             </a:pPr>
             <a:r>
-              <a:rPr sz="1150" b="0" i="0">
+              <a:rPr sz="950" b="0" i="0">
                 <a:solidFill>
                   <a:srgbClr val="5A6068"/>
                 </a:solidFill>
                 <a:latin typeface="Calibri"/>
               </a:rPr>
-              <a:t>The World Happiness Report is a single Cantril-ladder question aggregated to countries. The European Social Survey asks its own life-satisfaction and happiness items of individuals, on a different sampling frame, in a different institution. And subnational HDI lets us drop one spatial scale below the country.</a:t>
+              <a:t>The World Happiness Report is a single Cantril-ladder question aggregated to countries. The European Social Survey asks its own life-satisfaction item of individuals, on a different sampling frame, run by a different institution. Holding the HDI and the country unit fixed and changing only the wellbeing data isolates that one leg.</a:t>
             </a:r>
           </a:p>
           <a:p>
@@ -12934,13 +13042,13 @@
               </a:spcAft>
             </a:pPr>
             <a:r>
-              <a:rPr sz="1150" b="0" i="0">
+              <a:rPr sz="950" b="0" i="0">
                 <a:solidFill>
                   <a:srgbClr val="5A6068"/>
                 </a:solidFill>
                 <a:latin typeface="Calibri"/>
               </a:rPr>
-              <a:t>Pairing subnational HDI with ESS life satisfaction: across regions inside a country, 47% of countries are FDR-significant at levels. Within each region over survey rounds, 0 of 167 regions survive. The levels result sits right on top of the national one (47% against 42%), and the differences result is, if anything, more complete.</a:t>
+              <a:t>The result is 8% at levels and 16% in differences across 25 countries — and it should be read as a null test rather than a finding in either direction. The ESS runs seven survey rounds where the WHR panels run thirteen years, and differences coming out above levels is not a pattern a real association produces. Panel b is the check: at seven observations, a genuine correlation of 0.5 is recovered in about 3% of units. This design cannot see much at that length, so its silence is not evidence.</a:t>
             </a:r>
           </a:p>
           <a:p>
@@ -12956,13 +13064,13 @@
               </a:spcAft>
             </a:pPr>
             <a:r>
-              <a:rPr sz="1150" b="0" i="0">
+              <a:rPr sz="950" b="0" i="0">
                 <a:solidFill>
                   <a:srgbClr val="5A6068"/>
                 </a:solidFill>
                 <a:latin typeface="Calibri"/>
               </a:rPr>
-              <a:t>Three independent swaps — framework, wellbeing instrument, spatial scale — and the same asymmetry each time. Whatever produces it is structural to comparing a slow-moving aggregate against a noisy annual outcome, not specific to any dataset.</a:t>
+              <a:t>Where the ESS does have power is in cross-section. Pairing subnational HDI with ESS life satisfaction across regions inside each country — many regions per country rather than seven rounds — gives 47% of 15 countries FDR-significant at levels, sitting right on top of the 42% the HDI reaches nationally against the Cantril ladder. So the levels half corroborates on an independent instrument at a finer scale. The differences half rests on the SDG and HDI panels, which is where it always rested.</a:t>
             </a:r>
           </a:p>
         </p:txBody>
@@ -13025,8 +13133,8 @@
         </p:blipFill>
         <p:spPr>
           <a:xfrm>
-            <a:off x="5120640" y="1412748"/>
-            <a:ext cx="6537960" cy="3566160"/>
+            <a:off x="5120640" y="1791377"/>
+            <a:ext cx="6537960" cy="2808901"/>
           </a:xfrm>
           <a:prstGeom prst="rect">
             <a:avLst/>
@@ -13073,7 +13181,7 @@
                 </a:solidFill>
                 <a:latin typeface="Calibri"/>
               </a:rPr>
-              <a:t>The same FDR test in all three pairings. Levels between 42% and 71%; differences between 0% and 5%.</a:t>
+              <a:t>Panel a: the same FDR test, levels and differences on the same units, in all three pairings. Panel b: how much of a genuine association each series length recovers — the reason the hatched bars carry no verdict.</a:t>
             </a:r>
           </a:p>
         </p:txBody>
@@ -13230,7 +13338,7 @@
                 </a:solidFill>
                 <a:latin typeface="Georgia"/>
               </a:rPr>
-              <a:t>Three swaps, three collapses. The asymmetry belongs to the design, not to any one framework. Differences are too noisy to carry an argument — so everything that follows is a question about the levels.</a:t>
+              <a:t>Two well-powered pairings, the same asymmetry in both. The ESS corroborates the levels half with an independent wellbeing instrument, and is too short a panel to rule on differences either way. Differences cannot carry an argument — so everything that follows is a question about the levels.</a:t>
             </a:r>
           </a:p>
         </p:txBody>

--- a/deck/Measured_Where_It_Varies.pptx
+++ b/deck/Measured_Where_It_Varies.pptx
@@ -41,6 +41,7 @@
     <p:sldId id="289" r:id="rId40"/>
     <p:sldId id="290" r:id="rId41"/>
     <p:sldId id="291" r:id="rId42"/>
+    <p:sldId id="292" r:id="rId43"/>
   </p:sldIdLst>
   <p:sldSz cx="12191695" cy="6858000" type="screen4x3"/>
   <p:notesSz cx="6858000" cy="9144000"/>
@@ -4365,13 +4366,13 @@
               </a:spcAft>
             </a:pPr>
             <a:r>
-              <a:rPr sz="1450" b="0" i="1">
+              <a:rPr sz="1400" b="0" i="1">
                 <a:solidFill>
                   <a:srgbClr val="9AA4B0"/>
                 </a:solidFill>
                 <a:latin typeface="Georgia"/>
               </a:rPr>
-              <a:t>Everything so far is national aggregates against national aggregates. The ESS carries the same three domains asked directly of individuals — self-rated health, years of schooling, and whether most people can be trusted. Estimated across respondents and demeaned within country-round, so the association is within-country and within-year by construction.</a:t>
+              <a:t>Everything so far uses a development composite as the predictor. The ESS carries the three domains asked directly of people — self-rated health, years of schooling, and whether most people can be trusted — which lets us change the predictor rather than the outcome. That surfaces a third domain neither framework collects, and it turns out to be where the differences half of the argument finally has something to say.</a:t>
             </a:r>
           </a:p>
         </p:txBody>
@@ -4435,7 +4436,7 @@
                 </a:solidFill>
                 <a:latin typeface="Calibri"/>
               </a:rPr>
-              <a:t>ESS countries significant: health, trust, education</a:t>
+              <a:t>ESS countries significant at levels: health, trust, education</a:t>
             </a:r>
           </a:p>
         </p:txBody>
@@ -4477,7 +4478,7 @@
                 </a:solidFill>
                 <a:latin typeface="Consolas"/>
               </a:rPr>
-              <a:t>0.092 / 0.039 / 0.006</a:t>
+              <a:t>+0.40 / +0.59</a:t>
             </a:r>
           </a:p>
           <a:p>
@@ -4499,7 +4500,7 @@
                 </a:solidFill>
                 <a:latin typeface="Calibri"/>
               </a:rPr>
-              <a:t>median individual R² for the same three</a:t>
+              <a:t>health and trust in first differences, pooled — they survive</a:t>
             </a:r>
           </a:p>
         </p:txBody>
@@ -4541,7 +4542,7 @@
                 </a:solidFill>
                 <a:latin typeface="Consolas"/>
               </a:rPr>
-              <a:t>351,023</a:t>
+              <a:t>+0.03 / −0.02</a:t>
             </a:r>
           </a:p>
           <a:p>
@@ -4563,7 +4564,7 @@
                 </a:solidFill>
                 <a:latin typeface="Calibri"/>
               </a:rPr>
-              <a:t>respondents, 36 countries, ~10,700 per country</a:t>
+              <a:t>education and the HDI in differences — they do not</a:t>
             </a:r>
           </a:p>
         </p:txBody>
@@ -5839,7 +5840,7 @@
                 </a:solidFill>
                 <a:latin typeface="Consolas"/>
               </a:rPr>
-              <a:t>WHY THE SDG TRUST SERIES CANNOT STAND IN</a:t>
+              <a:t>BACK TO DIFFERENCES · WHICH DOMAINS SURVIVE IT</a:t>
             </a:r>
           </a:p>
         </p:txBody>
@@ -5884,7 +5885,7 @@
                 </a:solidFill>
                 <a:latin typeface="Georgia"/>
               </a:rPr>
-              <a:t>Institutional confidence does not survive an income control; interpersonal trust does</a:t>
+              <a:t>The collapse is domain-specific: health tracks wellbeing year to year, development composites do not</a:t>
             </a:r>
           </a:p>
         </p:txBody>
@@ -5923,13 +5924,13 @@
               </a:spcAft>
             </a:pPr>
             <a:r>
-              <a:rPr sz="1150" b="0" i="0">
+              <a:rPr sz="875" b="0" i="0">
                 <a:solidFill>
                   <a:srgbClr val="5A6068"/>
                 </a:solidFill>
                 <a:latin typeface="Calibri"/>
               </a:rPr>
-              <a:t>Worth testing directly rather than asserting. Of the thirteen Goal 16 trust-adjacent series, nine can be tested cross-sectionally and four are significant. Then control for log GNI per capita: perceived bribery survives, but satisfaction with government services, healthcare and secondary education all vanish.</a:t>
+              <a:t>Act I left the differences half unresolved, because the per-country design spends its power on 25 separate tests of seven points each. Pool the same within-country question across all countries and it has the power to answer — and the answer is that the collapse is not a universal property of differencing. It is specific to what you differenced.</a:t>
             </a:r>
           </a:p>
           <a:p>
@@ -5945,13 +5946,13 @@
               </a:spcAft>
             </a:pPr>
             <a:r>
-              <a:rPr sz="1150" b="0" i="0">
+              <a:rPr sz="875" b="0" i="0">
                 <a:solidFill>
                   <a:srgbClr val="5A6068"/>
                 </a:solidFill>
                 <a:latin typeface="Calibri"/>
               </a:rPr>
-              <a:t>That pattern is a known artefact of subjective institutional scales across income levels — the same question administered in richer and poorer countries produces response shifts unrelated to the construct. Interpersonal trust in the ESS does not behave this way.</a:t>
+              <a:t>Within the ESS: health goes from r = +0.56 at levels to +0.40 in first differences, and social trust from +0.51 to +0.59. Both survive. Education goes from +0.29 to +0.03, not significant, and the HDI composite from +0.44 to +0.20. Against the World Happiness Report ladder on the full 150-country panel, the HDI collapses outright: +0.15 at levels to −0.02 in differences across 1,548 country-year changes.</a:t>
             </a:r>
           </a:p>
           <a:p>
@@ -5967,13 +5968,35 @@
               </a:spcAft>
             </a:pPr>
             <a:r>
-              <a:rPr sz="1150" b="0" i="0">
+              <a:rPr sz="875" b="0" i="0">
                 <a:solidFill>
                   <a:srgbClr val="5A6068"/>
                 </a:solidFill>
                 <a:latin typeface="Calibri"/>
               </a:rPr>
-              <a:t>So this is not an execution failure in the SDG framework. It reflects what development frameworks are for: they measure institutions and systems. Trust between people is not an institution, and it does not show up when you measure one.</a:t>
+              <a:t>So when a country's self-rated health rises between rounds, its life satisfaction rises with it. When its HDI rises, that tells you almost nothing. This is the sharpest version of the paper's claim: development composites move too slowly and too smoothly to track how people feel — within a country the HDI moves about a tenth of its between-country spread, where the domain measures move two to three times that.</a:t>
+            </a:r>
+          </a:p>
+          <a:p>
+            <a:pPr>
+              <a:lnSpc>
+                <a:spcPct val="132000"/>
+              </a:lnSpc>
+              <a:spcBef>
+                <a:spcPts val="0"/>
+              </a:spcBef>
+              <a:spcAft>
+                <a:spcPts val="1100"/>
+              </a:spcAft>
+            </a:pPr>
+            <a:r>
+              <a:rPr sz="875" b="0" i="0">
+                <a:solidFill>
+                  <a:srgbClr val="5A6068"/>
+                </a:solidFill>
+                <a:latin typeface="Calibri"/>
+              </a:rPr>
+              <a:t>One caveat has to travel with the trust result. It is strong within the ESS (+0.59) and absent against the independent WHR outcome (+0.06, not significant). Health survives both (+0.40 and +0.20). That difference is the signature of common-method variance — same questionnaire, same respondents — so the trust dynamic is reported as same-survey only, and health is the domain that carries a clean cross-source result.</a:t>
             </a:r>
           </a:p>
         </p:txBody>
@@ -6022,7 +6045,7 @@
       </p:sp>
       <p:pic>
         <p:nvPicPr>
-          <p:cNvPr id="6" name="Picture 5" descr="K1_sdg_trust_cross_section.png"/>
+          <p:cNvPr id="6" name="Picture 5" descr="domains_survive_differences.png"/>
           <p:cNvPicPr>
             <a:picLocks noChangeAspect="1"/>
           </p:cNvPicPr>
@@ -6036,8 +6059,8 @@
         </p:blipFill>
         <p:spPr>
           <a:xfrm>
-            <a:off x="5120640" y="1690377"/>
-            <a:ext cx="6537960" cy="3010902"/>
+            <a:off x="5120640" y="1791377"/>
+            <a:ext cx="6537960" cy="2808901"/>
           </a:xfrm>
           <a:prstGeom prst="rect">
             <a:avLst/>
@@ -6084,7 +6107,7 @@
                 </a:solidFill>
                 <a:latin typeface="Calibri"/>
               </a:rPr>
-              <a:t>SDG16 trust series cross-sectionally. Panel (b): net of income, bribery persists and the satisfaction measures do not.</a:t>
+              <a:t>Pooled within-country correlations, levels against first differences. Panel a within the ESS; panel b against the independent WHR ladder. Health is the only domain significant in differences in both.</a:t>
             </a:r>
           </a:p>
         </p:txBody>
@@ -6103,7 +6126,7 @@
     <p:bg>
       <p:bgPr>
         <a:solidFill>
-          <a:srgbClr val="E8EBEF"/>
+          <a:srgbClr val="FCFCFB"/>
         </a:solidFill>
         <a:effectLst/>
       </p:bgPr>
@@ -6117,45 +6140,43 @@
       <p:grpSpPr/>
       <p:sp>
         <p:nvSpPr>
-          <p:cNvPr id="2" name="Rectangle 1"/>
-          <p:cNvSpPr/>
-          <p:nvPr/>
-        </p:nvSpPr>
-        <p:spPr>
-          <a:xfrm>
-            <a:off x="566928" y="2103120"/>
-            <a:ext cx="54864" cy="2377440"/>
-          </a:xfrm>
-          <a:prstGeom prst="rect">
-            <a:avLst/>
-          </a:prstGeom>
-          <a:solidFill>
-            <a:srgbClr val="17549E"/>
-          </a:solidFill>
-          <a:ln>
-            <a:noFill/>
-          </a:ln>
-          <a:effectLst/>
-        </p:spPr>
-        <p:style>
-          <a:lnRef idx="1">
-            <a:schemeClr val="accent1"/>
-          </a:lnRef>
-          <a:fillRef idx="3">
-            <a:schemeClr val="accent1"/>
-          </a:fillRef>
-          <a:effectRef idx="2">
-            <a:schemeClr val="accent1"/>
-          </a:effectRef>
-          <a:fontRef idx="minor">
-            <a:schemeClr val="lt1"/>
-          </a:fontRef>
-        </p:style>
-        <p:txBody>
-          <a:bodyPr rtlCol="0" anchor="ctr"/>
-          <a:lstStyle/>
-          <a:p>
-            <a:pPr algn="ctr"/>
+          <p:cNvPr id="2" name="TextBox 1"/>
+          <p:cNvSpPr txBox="1"/>
+          <p:nvPr/>
+        </p:nvSpPr>
+        <p:spPr>
+          <a:xfrm>
+            <a:off x="566928" y="502920"/>
+            <a:ext cx="4160520" cy="274320"/>
+          </a:xfrm>
+          <a:prstGeom prst="rect">
+            <a:avLst/>
+          </a:prstGeom>
+          <a:noFill/>
+        </p:spPr>
+        <p:txBody>
+          <a:bodyPr wrap="square" lIns="0" rIns="0" tIns="0" bIns="0">
+            <a:spAutoFit/>
+          </a:bodyPr>
+          <a:lstStyle/>
+          <a:p>
+            <a:pPr>
+              <a:spcBef>
+                <a:spcPts val="0"/>
+              </a:spcBef>
+              <a:spcAft>
+                <a:spcPts val="0"/>
+              </a:spcAft>
+            </a:pPr>
+            <a:r>
+              <a:rPr sz="1000" b="0" i="0">
+                <a:solidFill>
+                  <a:srgbClr val="A63A30"/>
+                </a:solidFill>
+                <a:latin typeface="Consolas"/>
+              </a:rPr>
+              <a:t>WHY THE SDG TRUST SERIES CANNOT STAND IN</a:t>
+            </a:r>
           </a:p>
         </p:txBody>
       </p:sp>
@@ -6167,21 +6188,155 @@
         </p:nvSpPr>
         <p:spPr>
           <a:xfrm>
-            <a:off x="914400" y="1600200"/>
-            <a:ext cx="8686800" cy="274320"/>
-          </a:xfrm>
-          <a:prstGeom prst="rect">
-            <a:avLst/>
-          </a:prstGeom>
-          <a:noFill/>
-        </p:spPr>
-        <p:txBody>
-          <a:bodyPr wrap="square" lIns="0" rIns="0" tIns="0" bIns="0">
-            <a:spAutoFit/>
-          </a:bodyPr>
-          <a:lstStyle/>
-          <a:p>
-            <a:pPr>
+            <a:off x="566928" y="914400"/>
+            <a:ext cx="4160520" cy="1371600"/>
+          </a:xfrm>
+          <a:prstGeom prst="rect">
+            <a:avLst/>
+          </a:prstGeom>
+          <a:noFill/>
+        </p:spPr>
+        <p:txBody>
+          <a:bodyPr wrap="square" lIns="0" rIns="0" tIns="0" bIns="0">
+            <a:spAutoFit/>
+          </a:bodyPr>
+          <a:lstStyle/>
+          <a:p>
+            <a:pPr>
+              <a:lnSpc>
+                <a:spcPct val="108000"/>
+              </a:lnSpc>
+              <a:spcBef>
+                <a:spcPts val="0"/>
+              </a:spcBef>
+              <a:spcAft>
+                <a:spcPts val="0"/>
+              </a:spcAft>
+            </a:pPr>
+            <a:r>
+              <a:rPr sz="2300" b="0" i="0">
+                <a:solidFill>
+                  <a:srgbClr val="14171C"/>
+                </a:solidFill>
+                <a:latin typeface="Georgia"/>
+              </a:rPr>
+              <a:t>Institutional confidence does not survive an income control; interpersonal trust does</a:t>
+            </a:r>
+          </a:p>
+        </p:txBody>
+      </p:sp>
+      <p:sp>
+        <p:nvSpPr>
+          <p:cNvPr id="4" name="TextBox 3"/>
+          <p:cNvSpPr txBox="1"/>
+          <p:nvPr/>
+        </p:nvSpPr>
+        <p:spPr>
+          <a:xfrm>
+            <a:off x="566928" y="2331720"/>
+            <a:ext cx="4160520" cy="3840480"/>
+          </a:xfrm>
+          <a:prstGeom prst="rect">
+            <a:avLst/>
+          </a:prstGeom>
+          <a:noFill/>
+        </p:spPr>
+        <p:txBody>
+          <a:bodyPr wrap="square" lIns="0" rIns="0" tIns="0" bIns="0">
+            <a:spAutoFit/>
+          </a:bodyPr>
+          <a:lstStyle/>
+          <a:p>
+            <a:pPr>
+              <a:lnSpc>
+                <a:spcPct val="132000"/>
+              </a:lnSpc>
+              <a:spcBef>
+                <a:spcPts val="0"/>
+              </a:spcBef>
+              <a:spcAft>
+                <a:spcPts val="1100"/>
+              </a:spcAft>
+            </a:pPr>
+            <a:r>
+              <a:rPr sz="1150" b="0" i="0">
+                <a:solidFill>
+                  <a:srgbClr val="5A6068"/>
+                </a:solidFill>
+                <a:latin typeface="Calibri"/>
+              </a:rPr>
+              <a:t>Worth testing directly rather than asserting. Of the thirteen Goal 16 trust-adjacent series, nine can be tested cross-sectionally and four are significant. Then control for log GNI per capita: perceived bribery survives, but satisfaction with government services, healthcare and secondary education all vanish.</a:t>
+            </a:r>
+          </a:p>
+          <a:p>
+            <a:pPr>
+              <a:lnSpc>
+                <a:spcPct val="132000"/>
+              </a:lnSpc>
+              <a:spcBef>
+                <a:spcPts val="0"/>
+              </a:spcBef>
+              <a:spcAft>
+                <a:spcPts val="1100"/>
+              </a:spcAft>
+            </a:pPr>
+            <a:r>
+              <a:rPr sz="1150" b="0" i="0">
+                <a:solidFill>
+                  <a:srgbClr val="5A6068"/>
+                </a:solidFill>
+                <a:latin typeface="Calibri"/>
+              </a:rPr>
+              <a:t>That pattern is a known artefact of subjective institutional scales across income levels — the same question administered in richer and poorer countries produces response shifts unrelated to the construct. Interpersonal trust in the ESS does not behave this way.</a:t>
+            </a:r>
+          </a:p>
+          <a:p>
+            <a:pPr>
+              <a:lnSpc>
+                <a:spcPct val="132000"/>
+              </a:lnSpc>
+              <a:spcBef>
+                <a:spcPts val="0"/>
+              </a:spcBef>
+              <a:spcAft>
+                <a:spcPts val="1100"/>
+              </a:spcAft>
+            </a:pPr>
+            <a:r>
+              <a:rPr sz="1150" b="0" i="0">
+                <a:solidFill>
+                  <a:srgbClr val="5A6068"/>
+                </a:solidFill>
+                <a:latin typeface="Calibri"/>
+              </a:rPr>
+              <a:t>So this is not an execution failure in the SDG framework. It reflects what development frameworks are for: they measure institutions and systems. Trust between people is not an institution, and it does not show up when you measure one.</a:t>
+            </a:r>
+          </a:p>
+        </p:txBody>
+      </p:sp>
+      <p:sp>
+        <p:nvSpPr>
+          <p:cNvPr id="5" name="TextBox 4"/>
+          <p:cNvSpPr txBox="1"/>
+          <p:nvPr/>
+        </p:nvSpPr>
+        <p:spPr>
+          <a:xfrm>
+            <a:off x="11338560" y="6263640"/>
+            <a:ext cx="548640" cy="274320"/>
+          </a:xfrm>
+          <a:prstGeom prst="rect">
+            <a:avLst/>
+          </a:prstGeom>
+          <a:noFill/>
+        </p:spPr>
+        <p:txBody>
+          <a:bodyPr wrap="square" lIns="0" rIns="0" tIns="0" bIns="0">
+            <a:spAutoFit/>
+          </a:bodyPr>
+          <a:lstStyle/>
+          <a:p>
+            <a:pPr algn="r">
               <a:spcBef>
                 <a:spcPts val="0"/>
               </a:spcBef>
@@ -6192,25 +6347,49 @@
             <a:r>
               <a:rPr sz="1100" b="0" i="0">
                 <a:solidFill>
-                  <a:srgbClr val="17549E"/>
+                  <a:srgbClr val="868D96"/>
                 </a:solidFill>
                 <a:latin typeface="Consolas"/>
               </a:rPr>
-              <a:t>WHERE ACT II-A LEAVES US</a:t>
-            </a:r>
-          </a:p>
-        </p:txBody>
-      </p:sp>
-      <p:sp>
-        <p:nvSpPr>
-          <p:cNvPr id="4" name="TextBox 3"/>
-          <p:cNvSpPr txBox="1"/>
-          <p:nvPr/>
-        </p:nvSpPr>
-        <p:spPr>
-          <a:xfrm>
-            <a:off x="914400" y="2148840"/>
-            <a:ext cx="9509760" cy="2926080"/>
+              <a:t>II-a</a:t>
+            </a:r>
+          </a:p>
+        </p:txBody>
+      </p:sp>
+      <p:pic>
+        <p:nvPicPr>
+          <p:cNvPr id="6" name="Picture 5" descr="K1_sdg_trust_cross_section.png"/>
+          <p:cNvPicPr>
+            <a:picLocks noChangeAspect="1"/>
+          </p:cNvPicPr>
+          <p:nvPr/>
+        </p:nvPicPr>
+        <p:blipFill>
+          <a:blip r:embed="rId2"/>
+          <a:stretch>
+            <a:fillRect/>
+          </a:stretch>
+        </p:blipFill>
+        <p:spPr>
+          <a:xfrm>
+            <a:off x="5120640" y="1690377"/>
+            <a:ext cx="6537960" cy="3010902"/>
+          </a:xfrm>
+          <a:prstGeom prst="rect">
+            <a:avLst/>
+          </a:prstGeom>
+        </p:spPr>
+      </p:pic>
+      <p:sp>
+        <p:nvSpPr>
+          <p:cNvPr id="7" name="TextBox 6"/>
+          <p:cNvSpPr txBox="1"/>
+          <p:nvPr/>
+        </p:nvSpPr>
+        <p:spPr>
+          <a:xfrm>
+            <a:off x="5120640" y="5897880"/>
+            <a:ext cx="6537960" cy="731520"/>
           </a:xfrm>
           <a:prstGeom prst="rect">
             <a:avLst/>
@@ -6225,7 +6404,7 @@
           <a:p>
             <a:pPr>
               <a:lnSpc>
-                <a:spcPct val="135000"/>
+                <a:spcPct val="125000"/>
               </a:lnSpc>
               <a:spcBef>
                 <a:spcPts val="0"/>
@@ -6235,13 +6414,13 @@
               </a:spcAft>
             </a:pPr>
             <a:r>
-              <a:rPr sz="2100" b="0" i="0">
-                <a:solidFill>
-                  <a:srgbClr val="14171C"/>
-                </a:solidFill>
-                <a:latin typeface="Georgia"/>
-              </a:rPr>
-              <a:t>Health, trust and education are all significant on people, in almost every country. The ordering is the surprise: interpersonal trust is second, ahead of education, and it is the one domain of the three that neither development framework collects.</a:t>
+              <a:rPr sz="900" b="0" i="0">
+                <a:solidFill>
+                  <a:srgbClr val="868D96"/>
+                </a:solidFill>
+                <a:latin typeface="Calibri"/>
+              </a:rPr>
+              <a:t>SDG16 trust series cross-sectionally. Panel (b): net of income, bribery persists and the satisfaction measures do not.</a:t>
             </a:r>
           </a:p>
         </p:txBody>
@@ -6957,7 +7136,7 @@
                 </a:solidFill>
                 <a:latin typeface="Calibri"/>
               </a:rPr>
-              <a:t>In the ESS, health, education and social trust are all significant within countries. Trust is second strongest — and neither framework collects it.</a:t>
+              <a:t>Social trust joins health and education, ahead of education. And pooled for power, health and trust keep tracking wellbeing year to year where development composites stop.</a:t>
             </a:r>
           </a:p>
         </p:txBody>
@@ -7271,6 +7450,163 @@
 </file>
 
 <file path=ppt/slides/slide20.xml><?xml version="1.0" encoding="utf-8"?>
+<p:sld xmlns:a="http://schemas.openxmlformats.org/drawingml/2006/main" xmlns:p="http://schemas.openxmlformats.org/presentationml/2006/main" xmlns:r="http://schemas.openxmlformats.org/officeDocument/2006/relationships">
+  <p:cSld>
+    <p:bg>
+      <p:bgPr>
+        <a:solidFill>
+          <a:srgbClr val="E8EBEF"/>
+        </a:solidFill>
+        <a:effectLst/>
+      </p:bgPr>
+    </p:bg>
+    <p:spTree>
+      <p:nvGrpSpPr>
+        <p:cNvPr id="1" name=""/>
+        <p:cNvGrpSpPr/>
+        <p:nvPr/>
+      </p:nvGrpSpPr>
+      <p:grpSpPr/>
+      <p:sp>
+        <p:nvSpPr>
+          <p:cNvPr id="2" name="Rectangle 1"/>
+          <p:cNvSpPr/>
+          <p:nvPr/>
+        </p:nvSpPr>
+        <p:spPr>
+          <a:xfrm>
+            <a:off x="566928" y="2103120"/>
+            <a:ext cx="54864" cy="2377440"/>
+          </a:xfrm>
+          <a:prstGeom prst="rect">
+            <a:avLst/>
+          </a:prstGeom>
+          <a:solidFill>
+            <a:srgbClr val="17549E"/>
+          </a:solidFill>
+          <a:ln>
+            <a:noFill/>
+          </a:ln>
+          <a:effectLst/>
+        </p:spPr>
+        <p:style>
+          <a:lnRef idx="1">
+            <a:schemeClr val="accent1"/>
+          </a:lnRef>
+          <a:fillRef idx="3">
+            <a:schemeClr val="accent1"/>
+          </a:fillRef>
+          <a:effectRef idx="2">
+            <a:schemeClr val="accent1"/>
+          </a:effectRef>
+          <a:fontRef idx="minor">
+            <a:schemeClr val="lt1"/>
+          </a:fontRef>
+        </p:style>
+        <p:txBody>
+          <a:bodyPr rtlCol="0" anchor="ctr"/>
+          <a:lstStyle/>
+          <a:p>
+            <a:pPr algn="ctr"/>
+          </a:p>
+        </p:txBody>
+      </p:sp>
+      <p:sp>
+        <p:nvSpPr>
+          <p:cNvPr id="3" name="TextBox 2"/>
+          <p:cNvSpPr txBox="1"/>
+          <p:nvPr/>
+        </p:nvSpPr>
+        <p:spPr>
+          <a:xfrm>
+            <a:off x="914400" y="1600200"/>
+            <a:ext cx="8686800" cy="274320"/>
+          </a:xfrm>
+          <a:prstGeom prst="rect">
+            <a:avLst/>
+          </a:prstGeom>
+          <a:noFill/>
+        </p:spPr>
+        <p:txBody>
+          <a:bodyPr wrap="square" lIns="0" rIns="0" tIns="0" bIns="0">
+            <a:spAutoFit/>
+          </a:bodyPr>
+          <a:lstStyle/>
+          <a:p>
+            <a:pPr>
+              <a:spcBef>
+                <a:spcPts val="0"/>
+              </a:spcBef>
+              <a:spcAft>
+                <a:spcPts val="0"/>
+              </a:spcAft>
+            </a:pPr>
+            <a:r>
+              <a:rPr sz="1100" b="0" i="0">
+                <a:solidFill>
+                  <a:srgbClr val="17549E"/>
+                </a:solidFill>
+                <a:latin typeface="Consolas"/>
+              </a:rPr>
+              <a:t>WHERE ACT II-A LEAVES US</a:t>
+            </a:r>
+          </a:p>
+        </p:txBody>
+      </p:sp>
+      <p:sp>
+        <p:nvSpPr>
+          <p:cNvPr id="4" name="TextBox 3"/>
+          <p:cNvSpPr txBox="1"/>
+          <p:nvPr/>
+        </p:nvSpPr>
+        <p:spPr>
+          <a:xfrm>
+            <a:off x="914400" y="2148840"/>
+            <a:ext cx="9509760" cy="2926080"/>
+          </a:xfrm>
+          <a:prstGeom prst="rect">
+            <a:avLst/>
+          </a:prstGeom>
+          <a:noFill/>
+        </p:spPr>
+        <p:txBody>
+          <a:bodyPr wrap="square" lIns="0" rIns="0" tIns="0" bIns="0">
+            <a:spAutoFit/>
+          </a:bodyPr>
+          <a:lstStyle/>
+          <a:p>
+            <a:pPr>
+              <a:lnSpc>
+                <a:spcPct val="135000"/>
+              </a:lnSpc>
+              <a:spcBef>
+                <a:spcPts val="0"/>
+              </a:spcBef>
+              <a:spcAft>
+                <a:spcPts val="0"/>
+              </a:spcAft>
+            </a:pPr>
+            <a:r>
+              <a:rPr sz="2100" b="0" i="0">
+                <a:solidFill>
+                  <a:srgbClr val="14171C"/>
+                </a:solidFill>
+                <a:latin typeface="Georgia"/>
+              </a:rPr>
+              <a:t>Health, trust and education are all significant on people, in almost every country, and interpersonal trust — the one domain neither framework collects — outranks education. Pooled for power, health and trust also survive differencing where the HDI does not. The collapse was never about differencing; it was about what the frameworks chose to measure.</a:t>
+            </a:r>
+          </a:p>
+        </p:txBody>
+      </p:sp>
+    </p:spTree>
+  </p:cSld>
+  <p:clrMapOvr>
+    <a:masterClrMapping/>
+  </p:clrMapOvr>
+</p:sld>
+</file>
+
+<file path=ppt/slides/slide21.xml><?xml version="1.0" encoding="utf-8"?>
 <p:sld xmlns:a="http://schemas.openxmlformats.org/drawingml/2006/main" xmlns:p="http://schemas.openxmlformats.org/presentationml/2006/main" xmlns:r="http://schemas.openxmlformats.org/officeDocument/2006/relationships">
   <p:cSld>
     <p:bg>
@@ -7694,319 +8030,6 @@
                 <a:latin typeface="Calibri"/>
               </a:rPr>
               <a:t>trust: no variable to choose between</a:t>
-            </a:r>
-          </a:p>
-        </p:txBody>
-      </p:sp>
-    </p:spTree>
-  </p:cSld>
-  <p:clrMapOvr>
-    <a:masterClrMapping/>
-  </p:clrMapOvr>
-</p:sld>
-</file>
-
-<file path=ppt/slides/slide21.xml><?xml version="1.0" encoding="utf-8"?>
-<p:sld xmlns:a="http://schemas.openxmlformats.org/drawingml/2006/main" xmlns:p="http://schemas.openxmlformats.org/presentationml/2006/main" xmlns:r="http://schemas.openxmlformats.org/officeDocument/2006/relationships">
-  <p:cSld>
-    <p:bg>
-      <p:bgPr>
-        <a:solidFill>
-          <a:srgbClr val="FCFCFB"/>
-        </a:solidFill>
-        <a:effectLst/>
-      </p:bgPr>
-    </p:bg>
-    <p:spTree>
-      <p:nvGrpSpPr>
-        <p:cNvPr id="1" name=""/>
-        <p:cNvGrpSpPr/>
-        <p:nvPr/>
-      </p:nvGrpSpPr>
-      <p:grpSpPr/>
-      <p:sp>
-        <p:nvSpPr>
-          <p:cNvPr id="2" name="TextBox 1"/>
-          <p:cNvSpPr txBox="1"/>
-          <p:nvPr/>
-        </p:nvSpPr>
-        <p:spPr>
-          <a:xfrm>
-            <a:off x="566928" y="502920"/>
-            <a:ext cx="4160520" cy="274320"/>
-          </a:xfrm>
-          <a:prstGeom prst="rect">
-            <a:avLst/>
-          </a:prstGeom>
-          <a:noFill/>
-        </p:spPr>
-        <p:txBody>
-          <a:bodyPr wrap="square" lIns="0" rIns="0" tIns="0" bIns="0">
-            <a:spAutoFit/>
-          </a:bodyPr>
-          <a:lstStyle/>
-          <a:p>
-            <a:pPr>
-              <a:spcBef>
-                <a:spcPts val="0"/>
-              </a:spcBef>
-              <a:spcAft>
-                <a:spcPts val="0"/>
-              </a:spcAft>
-            </a:pPr>
-            <a:r>
-              <a:rPr sz="1000" b="0" i="0">
-                <a:solidFill>
-                  <a:srgbClr val="A63A30"/>
-                </a:solidFill>
-                <a:latin typeface="Consolas"/>
-              </a:rPr>
-              <a:t>THE SYNTHESIS</a:t>
-            </a:r>
-          </a:p>
-        </p:txBody>
-      </p:sp>
-      <p:sp>
-        <p:nvSpPr>
-          <p:cNvPr id="3" name="TextBox 2"/>
-          <p:cNvSpPr txBox="1"/>
-          <p:nvPr/>
-        </p:nvSpPr>
-        <p:spPr>
-          <a:xfrm>
-            <a:off x="566928" y="914400"/>
-            <a:ext cx="4160520" cy="1371600"/>
-          </a:xfrm>
-          <a:prstGeom prst="rect">
-            <a:avLst/>
-          </a:prstGeom>
-          <a:noFill/>
-        </p:spPr>
-        <p:txBody>
-          <a:bodyPr wrap="square" lIns="0" rIns="0" tIns="0" bIns="0">
-            <a:spAutoFit/>
-          </a:bodyPr>
-          <a:lstStyle/>
-          <a:p>
-            <a:pPr>
-              <a:lnSpc>
-                <a:spcPct val="108000"/>
-              </a:lnSpc>
-              <a:spcBef>
-                <a:spcPts val="0"/>
-              </a:spcBef>
-              <a:spcAft>
-                <a:spcPts val="0"/>
-              </a:spcAft>
-            </a:pPr>
-            <a:r>
-              <a:rPr sz="2300" b="0" i="0">
-                <a:solidFill>
-                  <a:srgbClr val="14171C"/>
-                </a:solidFill>
-                <a:latin typeface="Georgia"/>
-              </a:rPr>
-              <a:t>A pooling problem, a saturation problem, and a coverage gap</a:t>
-            </a:r>
-          </a:p>
-        </p:txBody>
-      </p:sp>
-      <p:sp>
-        <p:nvSpPr>
-          <p:cNvPr id="4" name="TextBox 3"/>
-          <p:cNvSpPr txBox="1"/>
-          <p:nvPr/>
-        </p:nvSpPr>
-        <p:spPr>
-          <a:xfrm>
-            <a:off x="566928" y="2331720"/>
-            <a:ext cx="4160520" cy="3840480"/>
-          </a:xfrm>
-          <a:prstGeom prst="rect">
-            <a:avLst/>
-          </a:prstGeom>
-          <a:noFill/>
-        </p:spPr>
-        <p:txBody>
-          <a:bodyPr wrap="square" lIns="0" rIns="0" tIns="0" bIns="0">
-            <a:spAutoFit/>
-          </a:bodyPr>
-          <a:lstStyle/>
-          <a:p>
-            <a:pPr>
-              <a:lnSpc>
-                <a:spcPct val="132000"/>
-              </a:lnSpc>
-              <a:spcBef>
-                <a:spcPts val="0"/>
-              </a:spcBef>
-              <a:spcAft>
-                <a:spcPts val="1100"/>
-              </a:spcAft>
-            </a:pPr>
-            <a:r>
-              <a:rPr sz="1150" b="0" i="0">
-                <a:solidFill>
-                  <a:srgbClr val="5A6068"/>
-                </a:solidFill>
-                <a:latin typeface="Calibri"/>
-              </a:rPr>
-              <a:t>Education is a pooling problem. The framework measures the right thing — access and participation, 12.7% — and then averages it together with 18 parity-ratio series that carry no wellbeing signal, landing at 3.3%. The signal is present in the data and absent from the published number.</a:t>
-            </a:r>
-          </a:p>
-          <a:p>
-            <a:pPr>
-              <a:lnSpc>
-                <a:spcPct val="132000"/>
-              </a:lnSpc>
-              <a:spcBef>
-                <a:spcPts val="0"/>
-              </a:spcBef>
-              <a:spcAft>
-                <a:spcPts val="1100"/>
-              </a:spcAft>
-            </a:pPr>
-            <a:r>
-              <a:rPr sz="1150" b="0" i="0">
-                <a:solidFill>
-                  <a:srgbClr val="5A6068"/>
-                </a:solidFill>
-                <a:latin typeface="Calibri"/>
-              </a:rPr>
-              <a:t>Health is a saturation problem. The domain is the strongest of the three on people, but the HDI's proxy for it has run out of range across the countries it covers, so it comes last of five components. A different variable in the same domain reverses the result.</a:t>
-            </a:r>
-          </a:p>
-          <a:p>
-            <a:pPr>
-              <a:lnSpc>
-                <a:spcPct val="132000"/>
-              </a:lnSpc>
-              <a:spcBef>
-                <a:spcPts val="0"/>
-              </a:spcBef>
-              <a:spcAft>
-                <a:spcPts val="1100"/>
-              </a:spcAft>
-            </a:pPr>
-            <a:r>
-              <a:rPr sz="1150" b="0" i="0">
-                <a:solidFill>
-                  <a:srgbClr val="5A6068"/>
-                </a:solidFill>
-                <a:latin typeface="Calibri"/>
-              </a:rPr>
-              <a:t>Trust is a coverage gap, and it is the one that no amount of better construction reaches. You cannot unpool a series that does not exist or re-specify a variable that was never collected. The only fix available is deciding to collect it.</a:t>
-            </a:r>
-          </a:p>
-        </p:txBody>
-      </p:sp>
-      <p:sp>
-        <p:nvSpPr>
-          <p:cNvPr id="5" name="TextBox 4"/>
-          <p:cNvSpPr txBox="1"/>
-          <p:nvPr/>
-        </p:nvSpPr>
-        <p:spPr>
-          <a:xfrm>
-            <a:off x="11338560" y="6263640"/>
-            <a:ext cx="548640" cy="274320"/>
-          </a:xfrm>
-          <a:prstGeom prst="rect">
-            <a:avLst/>
-          </a:prstGeom>
-          <a:noFill/>
-        </p:spPr>
-        <p:txBody>
-          <a:bodyPr wrap="square" lIns="0" rIns="0" tIns="0" bIns="0">
-            <a:spAutoFit/>
-          </a:bodyPr>
-          <a:lstStyle/>
-          <a:p>
-            <a:pPr algn="r">
-              <a:spcBef>
-                <a:spcPts val="0"/>
-              </a:spcBef>
-              <a:spcAft>
-                <a:spcPts val="0"/>
-              </a:spcAft>
-            </a:pPr>
-            <a:r>
-              <a:rPr sz="1100" b="0" i="0">
-                <a:solidFill>
-                  <a:srgbClr val="868D96"/>
-                </a:solidFill>
-                <a:latin typeface="Consolas"/>
-              </a:rPr>
-              <a:t>III</a:t>
-            </a:r>
-          </a:p>
-        </p:txBody>
-      </p:sp>
-      <p:pic>
-        <p:nvPicPr>
-          <p:cNvPr id="6" name="Picture 5" descr="domain_scorecard.png"/>
-          <p:cNvPicPr>
-            <a:picLocks noChangeAspect="1"/>
-          </p:cNvPicPr>
-          <p:nvPr/>
-        </p:nvPicPr>
-        <p:blipFill>
-          <a:blip r:embed="rId2"/>
-          <a:stretch>
-            <a:fillRect/>
-          </a:stretch>
-        </p:blipFill>
-        <p:spPr>
-          <a:xfrm>
-            <a:off x="5120640" y="1469807"/>
-            <a:ext cx="6537960" cy="3452042"/>
-          </a:xfrm>
-          <a:prstGeom prst="rect">
-            <a:avLst/>
-          </a:prstGeom>
-        </p:spPr>
-      </p:pic>
-      <p:sp>
-        <p:nvSpPr>
-          <p:cNvPr id="7" name="TextBox 6"/>
-          <p:cNvSpPr txBox="1"/>
-          <p:nvPr/>
-        </p:nvSpPr>
-        <p:spPr>
-          <a:xfrm>
-            <a:off x="5120640" y="5897880"/>
-            <a:ext cx="6537960" cy="731520"/>
-          </a:xfrm>
-          <a:prstGeom prst="rect">
-            <a:avLst/>
-          </a:prstGeom>
-          <a:noFill/>
-        </p:spPr>
-        <p:txBody>
-          <a:bodyPr wrap="square" lIns="0" rIns="0" tIns="0" bIns="0">
-            <a:spAutoFit/>
-          </a:bodyPr>
-          <a:lstStyle/>
-          <a:p>
-            <a:pPr>
-              <a:lnSpc>
-                <a:spcPct val="125000"/>
-              </a:lnSpc>
-              <a:spcBef>
-                <a:spcPts val="0"/>
-              </a:spcBef>
-              <a:spcAft>
-                <a:spcPts val="0"/>
-              </a:spcAft>
-            </a:pPr>
-            <a:r>
-              <a:rPr sz="900" b="0" i="0">
-                <a:solidFill>
-                  <a:srgbClr val="868D96"/>
-                </a:solidFill>
-                <a:latin typeface="Calibri"/>
-              </a:rPr>
-              <a:t>Which framework can test which domain, and whether the test returns a signal. Grey is not a weak result — it is no result available.</a:t>
             </a:r>
           </a:p>
         </p:txBody>
@@ -8074,7 +8097,7 @@
                 </a:solidFill>
                 <a:latin typeface="Consolas"/>
               </a:rPr>
-              <a:t>WHAT SURVIVES WHICH METHOD</a:t>
+              <a:t>THE SYNTHESIS</a:t>
             </a:r>
           </a:p>
         </p:txBody>
@@ -8119,7 +8142,7 @@
                 </a:solidFill>
                 <a:latin typeface="Georgia"/>
               </a:rPr>
-              <a:t>Health is robust to how you measure it. Trust only appears when you ask people.</a:t>
+              <a:t>A pooling problem, a saturation problem, and a coverage gap</a:t>
             </a:r>
           </a:p>
         </p:txBody>
@@ -8164,7 +8187,7 @@
                 </a:solidFill>
                 <a:latin typeface="Calibri"/>
               </a:rPr>
-              <a:t>One more cut, because it separates the failure modes cleanly. Health registers in administrative sources (SDG3, 11.5%) and in self-reported ones (ESS, median R² 0.092) alike — it is robust to measurement method, and the HDI's weak result is specific to life expectancy rather than to the domain.</a:t>
+              <a:t>Education is a pooling problem. The framework measures the right thing — access and participation, 12.7% — and then averages it together with 18 parity-ratio series that carry no wellbeing signal, landing at 3.3%. The signal is present in the data and absent from the published number.</a:t>
             </a:r>
           </a:p>
           <a:p>
@@ -8186,7 +8209,7 @@
                 </a:solidFill>
                 <a:latin typeface="Calibri"/>
               </a:rPr>
-              <a:t>Education registers in both too, once unpooled, so its problem is construction rather than method. Trust registers in one and only one: 97% of ESS countries against 1.5% of SDG16 country-indicator pairs measuring a different construct.</a:t>
+              <a:t>Health is a saturation problem. The domain is the strongest of the three on people, but the HDI's proxy for it has run out of range across the countries it covers, so it comes last of five components. A different variable in the same domain reverses the result.</a:t>
             </a:r>
           </a:p>
           <a:p>
@@ -8208,7 +8231,7 @@
                 </a:solidFill>
                 <a:latin typeface="Calibri"/>
               </a:rPr>
-              <a:t>That asymmetry is the argument for why level of measurement matters, and not just which indicator you pick. Some things about a life are legible in national aggregates. Whether you think your neighbours can be trusted is not one of them.</a:t>
+              <a:t>Trust is a coverage gap, and it is the one that no amount of better construction reaches. You cannot unpool a series that does not exist or re-specify a variable that was never collected. The only fix available is deciding to collect it.</a:t>
             </a:r>
           </a:p>
         </p:txBody>
@@ -8257,7 +8280,7 @@
       </p:sp>
       <p:pic>
         <p:nvPicPr>
-          <p:cNvPr id="6" name="Picture 5" descr="health_trust_corroboration.png"/>
+          <p:cNvPr id="6" name="Picture 5" descr="domain_scorecard.png"/>
           <p:cNvPicPr>
             <a:picLocks noChangeAspect="1"/>
           </p:cNvPicPr>
@@ -8271,8 +8294,8 @@
         </p:blipFill>
         <p:spPr>
           <a:xfrm>
-            <a:off x="5120640" y="1858518"/>
-            <a:ext cx="6537960" cy="2674620"/>
+            <a:off x="5120640" y="1469807"/>
+            <a:ext cx="6537960" cy="3452042"/>
           </a:xfrm>
           <a:prstGeom prst="rect">
             <a:avLst/>
@@ -8319,7 +8342,7 @@
                 </a:solidFill>
                 <a:latin typeface="Calibri"/>
               </a:rPr>
-              <a:t>Health corroborates across administrative and self-reported sources. Trust appears only in individual-level data.</a:t>
+              <a:t>Which framework can test which domain, and whether the test returns a signal. Grey is not a weak result — it is no result available.</a:t>
             </a:r>
           </a:p>
         </p:txBody>
@@ -8333,6 +8356,319 @@
 </file>
 
 <file path=ppt/slides/slide23.xml><?xml version="1.0" encoding="utf-8"?>
+<p:sld xmlns:a="http://schemas.openxmlformats.org/drawingml/2006/main" xmlns:p="http://schemas.openxmlformats.org/presentationml/2006/main" xmlns:r="http://schemas.openxmlformats.org/officeDocument/2006/relationships">
+  <p:cSld>
+    <p:bg>
+      <p:bgPr>
+        <a:solidFill>
+          <a:srgbClr val="FCFCFB"/>
+        </a:solidFill>
+        <a:effectLst/>
+      </p:bgPr>
+    </p:bg>
+    <p:spTree>
+      <p:nvGrpSpPr>
+        <p:cNvPr id="1" name=""/>
+        <p:cNvGrpSpPr/>
+        <p:nvPr/>
+      </p:nvGrpSpPr>
+      <p:grpSpPr/>
+      <p:sp>
+        <p:nvSpPr>
+          <p:cNvPr id="2" name="TextBox 1"/>
+          <p:cNvSpPr txBox="1"/>
+          <p:nvPr/>
+        </p:nvSpPr>
+        <p:spPr>
+          <a:xfrm>
+            <a:off x="566928" y="502920"/>
+            <a:ext cx="4160520" cy="274320"/>
+          </a:xfrm>
+          <a:prstGeom prst="rect">
+            <a:avLst/>
+          </a:prstGeom>
+          <a:noFill/>
+        </p:spPr>
+        <p:txBody>
+          <a:bodyPr wrap="square" lIns="0" rIns="0" tIns="0" bIns="0">
+            <a:spAutoFit/>
+          </a:bodyPr>
+          <a:lstStyle/>
+          <a:p>
+            <a:pPr>
+              <a:spcBef>
+                <a:spcPts val="0"/>
+              </a:spcBef>
+              <a:spcAft>
+                <a:spcPts val="0"/>
+              </a:spcAft>
+            </a:pPr>
+            <a:r>
+              <a:rPr sz="1000" b="0" i="0">
+                <a:solidFill>
+                  <a:srgbClr val="A63A30"/>
+                </a:solidFill>
+                <a:latin typeface="Consolas"/>
+              </a:rPr>
+              <a:t>WHAT SURVIVES WHICH METHOD</a:t>
+            </a:r>
+          </a:p>
+        </p:txBody>
+      </p:sp>
+      <p:sp>
+        <p:nvSpPr>
+          <p:cNvPr id="3" name="TextBox 2"/>
+          <p:cNvSpPr txBox="1"/>
+          <p:nvPr/>
+        </p:nvSpPr>
+        <p:spPr>
+          <a:xfrm>
+            <a:off x="566928" y="914400"/>
+            <a:ext cx="4160520" cy="1371600"/>
+          </a:xfrm>
+          <a:prstGeom prst="rect">
+            <a:avLst/>
+          </a:prstGeom>
+          <a:noFill/>
+        </p:spPr>
+        <p:txBody>
+          <a:bodyPr wrap="square" lIns="0" rIns="0" tIns="0" bIns="0">
+            <a:spAutoFit/>
+          </a:bodyPr>
+          <a:lstStyle/>
+          <a:p>
+            <a:pPr>
+              <a:lnSpc>
+                <a:spcPct val="108000"/>
+              </a:lnSpc>
+              <a:spcBef>
+                <a:spcPts val="0"/>
+              </a:spcBef>
+              <a:spcAft>
+                <a:spcPts val="0"/>
+              </a:spcAft>
+            </a:pPr>
+            <a:r>
+              <a:rPr sz="2300" b="0" i="0">
+                <a:solidFill>
+                  <a:srgbClr val="14171C"/>
+                </a:solidFill>
+                <a:latin typeface="Georgia"/>
+              </a:rPr>
+              <a:t>Health is robust to how you measure it. Trust only appears when you ask people.</a:t>
+            </a:r>
+          </a:p>
+        </p:txBody>
+      </p:sp>
+      <p:sp>
+        <p:nvSpPr>
+          <p:cNvPr id="4" name="TextBox 3"/>
+          <p:cNvSpPr txBox="1"/>
+          <p:nvPr/>
+        </p:nvSpPr>
+        <p:spPr>
+          <a:xfrm>
+            <a:off x="566928" y="2331720"/>
+            <a:ext cx="4160520" cy="3840480"/>
+          </a:xfrm>
+          <a:prstGeom prst="rect">
+            <a:avLst/>
+          </a:prstGeom>
+          <a:noFill/>
+        </p:spPr>
+        <p:txBody>
+          <a:bodyPr wrap="square" lIns="0" rIns="0" tIns="0" bIns="0">
+            <a:spAutoFit/>
+          </a:bodyPr>
+          <a:lstStyle/>
+          <a:p>
+            <a:pPr>
+              <a:lnSpc>
+                <a:spcPct val="132000"/>
+              </a:lnSpc>
+              <a:spcBef>
+                <a:spcPts val="0"/>
+              </a:spcBef>
+              <a:spcAft>
+                <a:spcPts val="1100"/>
+              </a:spcAft>
+            </a:pPr>
+            <a:r>
+              <a:rPr sz="1150" b="0" i="0">
+                <a:solidFill>
+                  <a:srgbClr val="5A6068"/>
+                </a:solidFill>
+                <a:latin typeface="Calibri"/>
+              </a:rPr>
+              <a:t>One more cut, because it separates the failure modes cleanly. Health registers in administrative sources (SDG3, 11.5%) and in self-reported ones (ESS, median R² 0.092) alike — it is robust to measurement method, and the HDI's weak result is specific to life expectancy rather than to the domain.</a:t>
+            </a:r>
+          </a:p>
+          <a:p>
+            <a:pPr>
+              <a:lnSpc>
+                <a:spcPct val="132000"/>
+              </a:lnSpc>
+              <a:spcBef>
+                <a:spcPts val="0"/>
+              </a:spcBef>
+              <a:spcAft>
+                <a:spcPts val="1100"/>
+              </a:spcAft>
+            </a:pPr>
+            <a:r>
+              <a:rPr sz="1150" b="0" i="0">
+                <a:solidFill>
+                  <a:srgbClr val="5A6068"/>
+                </a:solidFill>
+                <a:latin typeface="Calibri"/>
+              </a:rPr>
+              <a:t>Education registers in both too, once unpooled, so its problem is construction rather than method. Trust registers in one and only one: 97% of ESS countries against 1.5% of SDG16 country-indicator pairs measuring a different construct.</a:t>
+            </a:r>
+          </a:p>
+          <a:p>
+            <a:pPr>
+              <a:lnSpc>
+                <a:spcPct val="132000"/>
+              </a:lnSpc>
+              <a:spcBef>
+                <a:spcPts val="0"/>
+              </a:spcBef>
+              <a:spcAft>
+                <a:spcPts val="1100"/>
+              </a:spcAft>
+            </a:pPr>
+            <a:r>
+              <a:rPr sz="1150" b="0" i="0">
+                <a:solidFill>
+                  <a:srgbClr val="5A6068"/>
+                </a:solidFill>
+                <a:latin typeface="Calibri"/>
+              </a:rPr>
+              <a:t>That asymmetry is the argument for why level of measurement matters, and not just which indicator you pick. Some things about a life are legible in national aggregates. Whether you think your neighbours can be trusted is not one of them.</a:t>
+            </a:r>
+          </a:p>
+        </p:txBody>
+      </p:sp>
+      <p:sp>
+        <p:nvSpPr>
+          <p:cNvPr id="5" name="TextBox 4"/>
+          <p:cNvSpPr txBox="1"/>
+          <p:nvPr/>
+        </p:nvSpPr>
+        <p:spPr>
+          <a:xfrm>
+            <a:off x="11338560" y="6263640"/>
+            <a:ext cx="548640" cy="274320"/>
+          </a:xfrm>
+          <a:prstGeom prst="rect">
+            <a:avLst/>
+          </a:prstGeom>
+          <a:noFill/>
+        </p:spPr>
+        <p:txBody>
+          <a:bodyPr wrap="square" lIns="0" rIns="0" tIns="0" bIns="0">
+            <a:spAutoFit/>
+          </a:bodyPr>
+          <a:lstStyle/>
+          <a:p>
+            <a:pPr algn="r">
+              <a:spcBef>
+                <a:spcPts val="0"/>
+              </a:spcBef>
+              <a:spcAft>
+                <a:spcPts val="0"/>
+              </a:spcAft>
+            </a:pPr>
+            <a:r>
+              <a:rPr sz="1100" b="0" i="0">
+                <a:solidFill>
+                  <a:srgbClr val="868D96"/>
+                </a:solidFill>
+                <a:latin typeface="Consolas"/>
+              </a:rPr>
+              <a:t>III</a:t>
+            </a:r>
+          </a:p>
+        </p:txBody>
+      </p:sp>
+      <p:pic>
+        <p:nvPicPr>
+          <p:cNvPr id="6" name="Picture 5" descr="health_trust_corroboration.png"/>
+          <p:cNvPicPr>
+            <a:picLocks noChangeAspect="1"/>
+          </p:cNvPicPr>
+          <p:nvPr/>
+        </p:nvPicPr>
+        <p:blipFill>
+          <a:blip r:embed="rId2"/>
+          <a:stretch>
+            <a:fillRect/>
+          </a:stretch>
+        </p:blipFill>
+        <p:spPr>
+          <a:xfrm>
+            <a:off x="5120640" y="1858518"/>
+            <a:ext cx="6537960" cy="2674620"/>
+          </a:xfrm>
+          <a:prstGeom prst="rect">
+            <a:avLst/>
+          </a:prstGeom>
+        </p:spPr>
+      </p:pic>
+      <p:sp>
+        <p:nvSpPr>
+          <p:cNvPr id="7" name="TextBox 6"/>
+          <p:cNvSpPr txBox="1"/>
+          <p:nvPr/>
+        </p:nvSpPr>
+        <p:spPr>
+          <a:xfrm>
+            <a:off x="5120640" y="5897880"/>
+            <a:ext cx="6537960" cy="731520"/>
+          </a:xfrm>
+          <a:prstGeom prst="rect">
+            <a:avLst/>
+          </a:prstGeom>
+          <a:noFill/>
+        </p:spPr>
+        <p:txBody>
+          <a:bodyPr wrap="square" lIns="0" rIns="0" tIns="0" bIns="0">
+            <a:spAutoFit/>
+          </a:bodyPr>
+          <a:lstStyle/>
+          <a:p>
+            <a:pPr>
+              <a:lnSpc>
+                <a:spcPct val="125000"/>
+              </a:lnSpc>
+              <a:spcBef>
+                <a:spcPts val="0"/>
+              </a:spcBef>
+              <a:spcAft>
+                <a:spcPts val="0"/>
+              </a:spcAft>
+            </a:pPr>
+            <a:r>
+              <a:rPr sz="900" b="0" i="0">
+                <a:solidFill>
+                  <a:srgbClr val="868D96"/>
+                </a:solidFill>
+                <a:latin typeface="Calibri"/>
+              </a:rPr>
+              <a:t>Health corroborates across administrative and self-reported sources. Trust appears only in individual-level data.</a:t>
+            </a:r>
+          </a:p>
+        </p:txBody>
+      </p:sp>
+    </p:spTree>
+  </p:cSld>
+  <p:clrMapOvr>
+    <a:masterClrMapping/>
+  </p:clrMapOvr>
+</p:sld>
+</file>
+
+<file path=ppt/slides/slide24.xml><?xml version="1.0" encoding="utf-8"?>
 <p:sld xmlns:a="http://schemas.openxmlformats.org/drawingml/2006/main" xmlns:p="http://schemas.openxmlformats.org/presentationml/2006/main" xmlns:r="http://schemas.openxmlformats.org/officeDocument/2006/relationships">
   <p:cSld>
     <p:bg>
@@ -8476,7 +8812,7 @@
                 </a:solidFill>
                 <a:latin typeface="Georgia"/>
               </a:rPr>
-              <a:t>None of this is a criticism of frameworks built to track development. It is the observation that which domain looks consequential for lived experience depends on construction choices made for other reasons — and that one domain is missing outright.</a:t>
+              <a:t>None of this is a criticism of frameworks built to track development. It is the observation that which domain looks consequential for lived experience depends on construction choices made for other reasons — that one domain is missing outright, and that the domain measures track wellbeing dynamically in a way the composites do not.</a:t>
             </a:r>
           </a:p>
         </p:txBody>
@@ -8489,7 +8825,7 @@
 </p:sld>
 </file>
 
-<file path=ppt/slides/slide24.xml><?xml version="1.0" encoding="utf-8"?>
+<file path=ppt/slides/slide25.xml><?xml version="1.0" encoding="utf-8"?>
 <p:sld xmlns:a="http://schemas.openxmlformats.org/drawingml/2006/main" xmlns:p="http://schemas.openxmlformats.org/presentationml/2006/main" xmlns:r="http://schemas.openxmlformats.org/officeDocument/2006/relationships">
   <p:cSld>
     <p:bg>
@@ -8913,228 +9249,6 @@
                 <a:latin typeface="Calibri"/>
               </a:rPr>
               <a:t>interpersonal trust, or link to a survey that has it</a:t>
-            </a:r>
-          </a:p>
-        </p:txBody>
-      </p:sp>
-    </p:spTree>
-  </p:cSld>
-  <p:clrMapOvr>
-    <a:masterClrMapping/>
-  </p:clrMapOvr>
-</p:sld>
-</file>
-
-<file path=ppt/slides/slide25.xml><?xml version="1.0" encoding="utf-8"?>
-<p:sld xmlns:a="http://schemas.openxmlformats.org/drawingml/2006/main" xmlns:p="http://schemas.openxmlformats.org/presentationml/2006/main" xmlns:r="http://schemas.openxmlformats.org/officeDocument/2006/relationships">
-  <p:cSld>
-    <p:bg>
-      <p:bgPr>
-        <a:solidFill>
-          <a:srgbClr val="FCFCFB"/>
-        </a:solidFill>
-        <a:effectLst/>
-      </p:bgPr>
-    </p:bg>
-    <p:spTree>
-      <p:nvGrpSpPr>
-        <p:cNvPr id="1" name=""/>
-        <p:cNvGrpSpPr/>
-        <p:nvPr/>
-      </p:nvGrpSpPr>
-      <p:grpSpPr/>
-      <p:sp>
-        <p:nvSpPr>
-          <p:cNvPr id="2" name="TextBox 1"/>
-          <p:cNvSpPr txBox="1"/>
-          <p:nvPr/>
-        </p:nvSpPr>
-        <p:spPr>
-          <a:xfrm>
-            <a:off x="566928" y="502920"/>
-            <a:ext cx="8595360" cy="274320"/>
-          </a:xfrm>
-          <a:prstGeom prst="rect">
-            <a:avLst/>
-          </a:prstGeom>
-          <a:noFill/>
-        </p:spPr>
-        <p:txBody>
-          <a:bodyPr wrap="square" lIns="0" rIns="0" tIns="0" bIns="0">
-            <a:spAutoFit/>
-          </a:bodyPr>
-          <a:lstStyle/>
-          <a:p>
-            <a:pPr>
-              <a:spcBef>
-                <a:spcPts val="0"/>
-              </a:spcBef>
-              <a:spcAft>
-                <a:spcPts val="0"/>
-              </a:spcAft>
-            </a:pPr>
-            <a:r>
-              <a:rPr sz="1000" b="0" i="0">
-                <a:solidFill>
-                  <a:srgbClr val="A63A30"/>
-                </a:solidFill>
-                <a:latin typeface="Consolas"/>
-              </a:rPr>
-              <a:t>THE DISCONNECT</a:t>
-            </a:r>
-          </a:p>
-        </p:txBody>
-      </p:sp>
-      <p:sp>
-        <p:nvSpPr>
-          <p:cNvPr id="3" name="TextBox 2"/>
-          <p:cNvSpPr txBox="1"/>
-          <p:nvPr/>
-        </p:nvSpPr>
-        <p:spPr>
-          <a:xfrm>
-            <a:off x="566928" y="914400"/>
-            <a:ext cx="8595360" cy="1371600"/>
-          </a:xfrm>
-          <a:prstGeom prst="rect">
-            <a:avLst/>
-          </a:prstGeom>
-          <a:noFill/>
-        </p:spPr>
-        <p:txBody>
-          <a:bodyPr wrap="square" lIns="0" rIns="0" tIns="0" bIns="0">
-            <a:spAutoFit/>
-          </a:bodyPr>
-          <a:lstStyle/>
-          <a:p>
-            <a:pPr>
-              <a:lnSpc>
-                <a:spcPct val="108000"/>
-              </a:lnSpc>
-              <a:spcBef>
-                <a:spcPts val="0"/>
-              </a:spcBef>
-              <a:spcAft>
-                <a:spcPts val="0"/>
-              </a:spcAft>
-            </a:pPr>
-            <a:r>
-              <a:rPr sz="2700" b="0" i="0">
-                <a:solidFill>
-                  <a:srgbClr val="14171C"/>
-                </a:solidFill>
-                <a:latin typeface="Georgia"/>
-              </a:rPr>
-              <a:t>Two different questions, and only one of them is being measured</a:t>
-            </a:r>
-          </a:p>
-        </p:txBody>
-      </p:sp>
-      <p:sp>
-        <p:nvSpPr>
-          <p:cNvPr id="4" name="TextBox 3"/>
-          <p:cNvSpPr txBox="1"/>
-          <p:nvPr/>
-        </p:nvSpPr>
-        <p:spPr>
-          <a:xfrm>
-            <a:off x="566928" y="2286000"/>
-            <a:ext cx="8595360" cy="3840480"/>
-          </a:xfrm>
-          <a:prstGeom prst="rect">
-            <a:avLst/>
-          </a:prstGeom>
-          <a:noFill/>
-        </p:spPr>
-        <p:txBody>
-          <a:bodyPr wrap="square" lIns="0" rIns="0" tIns="0" bIns="0">
-            <a:spAutoFit/>
-          </a:bodyPr>
-          <a:lstStyle/>
-          <a:p>
-            <a:pPr>
-              <a:lnSpc>
-                <a:spcPct val="132000"/>
-              </a:lnSpc>
-              <a:spcBef>
-                <a:spcPts val="0"/>
-              </a:spcBef>
-              <a:spcAft>
-                <a:spcPts val="1100"/>
-              </a:spcAft>
-            </a:pPr>
-            <a:r>
-              <a:rPr sz="1400" b="0" i="0">
-                <a:solidFill>
-                  <a:srgbClr val="5A6068"/>
-                </a:solidFill>
-                <a:latin typeface="Calibri"/>
-              </a:rPr>
-              <a:t>'How is development progressing?' and 'what shapes how people experience their lives?' are not the same question, and the frameworks were built to answer the first. Indicators were chosen before the second was systematically testable, at an aggregate level, on annual or slower cycles. That is scope, not failure.</a:t>
-            </a:r>
-          </a:p>
-          <a:p>
-            <a:pPr>
-              <a:lnSpc>
-                <a:spcPct val="132000"/>
-              </a:lnSpc>
-              <a:spcBef>
-                <a:spcPts val="0"/>
-              </a:spcBef>
-              <a:spcAft>
-                <a:spcPts val="1100"/>
-              </a:spcAft>
-            </a:pPr>
-            <a:r>
-              <a:rPr sz="1400" b="0" i="0">
-                <a:solidFill>
-                  <a:srgbClr val="5A6068"/>
-                </a:solidFill>
-                <a:latin typeface="Calibri"/>
-              </a:rPr>
-              <a:t>But the consequence is that a framework can be working exactly as designed and still be a poor guide to lived experience. Two of the three domains that predict life satisfaction in the ESS are present in the frameworks and obscured by construction choices; the third is not present at all. None of that shows up in a framework's own diagnostics, because nothing in those diagnostics is asking about wellbeing.</a:t>
-            </a:r>
-          </a:p>
-        </p:txBody>
-      </p:sp>
-      <p:sp>
-        <p:nvSpPr>
-          <p:cNvPr id="5" name="TextBox 4"/>
-          <p:cNvSpPr txBox="1"/>
-          <p:nvPr/>
-        </p:nvSpPr>
-        <p:spPr>
-          <a:xfrm>
-            <a:off x="11338560" y="6263640"/>
-            <a:ext cx="548640" cy="274320"/>
-          </a:xfrm>
-          <a:prstGeom prst="rect">
-            <a:avLst/>
-          </a:prstGeom>
-          <a:noFill/>
-        </p:spPr>
-        <p:txBody>
-          <a:bodyPr wrap="square" lIns="0" rIns="0" tIns="0" bIns="0">
-            <a:spAutoFit/>
-          </a:bodyPr>
-          <a:lstStyle/>
-          <a:p>
-            <a:pPr algn="r">
-              <a:spcBef>
-                <a:spcPts val="0"/>
-              </a:spcBef>
-              <a:spcAft>
-                <a:spcPts val="0"/>
-              </a:spcAft>
-            </a:pPr>
-            <a:r>
-              <a:rPr sz="1100" b="0" i="0">
-                <a:solidFill>
-                  <a:srgbClr val="868D96"/>
-                </a:solidFill>
-                <a:latin typeface="Consolas"/>
-              </a:rPr>
-              <a:t>IV</a:t>
             </a:r>
           </a:p>
         </p:txBody>
@@ -9202,7 +9316,7 @@
                 </a:solidFill>
                 <a:latin typeface="Consolas"/>
               </a:rPr>
-              <a:t>CHANGE 1 · EDUCATION</a:t>
+              <a:t>THE DISCONNECT</a:t>
             </a:r>
           </a:p>
         </p:txBody>
@@ -9247,7 +9361,7 @@
                 </a:solidFill>
                 <a:latin typeface="Georgia"/>
               </a:rPr>
-              <a:t>Report access separately, rather than pooling it into a goal-level average</a:t>
+              <a:t>Two different questions, and only one of them is being measured</a:t>
             </a:r>
           </a:p>
         </p:txBody>
@@ -9292,7 +9406,7 @@
                 </a:solidFill>
                 <a:latin typeface="Calibri"/>
               </a:rPr>
-              <a:t>The cheapest change on this list, because it needs no new data collection. SDG4's access and participation series already reach 12.7%; the published goal-level figure of 3.3% is produced by averaging them with parity ratios, infrastructure and learning outcomes, which reach 2.5%, 2.0% and 0.9%.</a:t>
+              <a:t>'How is development progressing?' and 'what shapes how people experience their lives?' are not the same question, and the frameworks were built to answer the first. Indicators were chosen before the second was systematically testable, at an aggregate level, on annual or slower cycles. That is scope, not failure.</a:t>
             </a:r>
           </a:p>
           <a:p>
@@ -9314,7 +9428,7 @@
                 </a:solidFill>
                 <a:latin typeface="Calibri"/>
               </a:rPr>
-              <a:t>So the suggestion is a reporting convention rather than a measurement programme: where a goal pools constructs that behave differently, publish the constituents alongside the pooled rate. Every number needed for this already exists in the database. What it would buy is that education stops looking like a domain that does not matter for wellbeing, which on this evidence it plainly does.</a:t>
+              <a:t>But the consequence is that a framework can be working exactly as designed and still be a poor guide to lived experience. Two of the three domains that predict life satisfaction in the ESS are present in the frameworks and obscured by construction choices; the third is not present at all. None of that shows up in a framework's own diagnostics, because nothing in those diagnostics is asking about wellbeing.</a:t>
             </a:r>
           </a:p>
         </p:txBody>
@@ -9424,7 +9538,7 @@
                 </a:solidFill>
                 <a:latin typeface="Consolas"/>
               </a:rPr>
-              <a:t>CHANGE 2 · HEALTH</a:t>
+              <a:t>CHANGE 1 · EDUCATION</a:t>
             </a:r>
           </a:p>
         </p:txBody>
@@ -9469,7 +9583,7 @@
                 </a:solidFill>
                 <a:latin typeface="Georgia"/>
               </a:rPr>
-              <a:t>Use a health variable that still varies where the framework is being applied</a:t>
+              <a:t>Report access separately, rather than pooling it into a goal-level average</a:t>
             </a:r>
           </a:p>
         </p:txBody>
@@ -9514,7 +9628,7 @@
                 </a:solidFill>
                 <a:latin typeface="Calibri"/>
               </a:rPr>
-              <a:t>Life expectancy is a good development indicator and a poor wellbeing one in exactly the places where development has already happened. Between 81 and 85 years across the top 100 countries, there is very little variance left for it to explain — which is why it comes last of the HDI's five components at 19%, while self-rated health leads the ESS at 100% of countries.</a:t>
+              <a:t>The cheapest change on this list, because it needs no new data collection. SDG4's access and participation series already reach 12.7%; the published goal-level figure of 3.3% is produced by averaging them with parity ratios, infrastructure and learning outcomes, which reach 2.5%, 2.0% and 0.9%.</a:t>
             </a:r>
           </a:p>
           <a:p>
@@ -9536,7 +9650,7 @@
                 </a:solidFill>
                 <a:latin typeface="Calibri"/>
               </a:rPr>
-              <a:t>The evidence suggests health measurement could be made conditional on context rather than uniform: life expectancy where mortality still varies, and something with range left — self-rated health, or condition-specific measures — where it does not. This is not two frameworks. It is one domain, measured with an instrument chosen to still be sensitive in the setting it is used in.</a:t>
+              <a:t>So the suggestion is a reporting convention rather than a measurement programme: where a goal pools constructs that behave differently, publish the constituents alongside the pooled rate. Every number needed for this already exists in the database. What it would buy is that education stops looking like a domain that does not matter for wellbeing, which on this evidence it plainly does.</a:t>
             </a:r>
           </a:p>
         </p:txBody>
@@ -9646,7 +9760,7 @@
                 </a:solidFill>
                 <a:latin typeface="Consolas"/>
               </a:rPr>
-              <a:t>CHANGE 3 · SOCIAL TRUST</a:t>
+              <a:t>CHANGE 2 · HEALTH</a:t>
             </a:r>
           </a:p>
         </p:txBody>
@@ -9691,7 +9805,7 @@
                 </a:solidFill>
                 <a:latin typeface="Georgia"/>
               </a:rPr>
-              <a:t>Collect interpersonal trust, or link systematically to surveys that already do</a:t>
+              <a:t>Use a health variable that still varies where the framework is being applied</a:t>
             </a:r>
           </a:p>
         </p:txBody>
@@ -9736,7 +9850,7 @@
                 </a:solidFill>
                 <a:latin typeface="Calibri"/>
               </a:rPr>
-              <a:t>This is the expensive one, and the only one that cannot be solved by re-analysing what exists. On the ESS evidence, interpersonal trust is the second strongest of the three domains — ahead of education — and neither framework collects it. SDG16's institutional confidence series are not a substitute: different construct, and they do not survive an income control.</a:t>
+              <a:t>Life expectancy is a good development indicator and a poor wellbeing one in exactly the places where development has already happened. Between 81 and 85 years across the top 100 countries, there is very little variance left for it to explain — which is why it comes last of the HDI's five components at 19%, while self-rated health leads the ESS at 100% of countries.</a:t>
             </a:r>
           </a:p>
           <a:p>
@@ -9758,29 +9872,7 @@
                 </a:solidFill>
                 <a:latin typeface="Calibri"/>
               </a:rPr>
-              <a:t>Two routes. Add a trust item to core collection, which is a single well-validated question and cheap per respondent but slow institutionally. Or build systematic linkage to instruments that already carry it — the ESS in Europe, Gallup World Poll and the World Values Survey more broadly — so that country assessments can draw on it without the frameworks having to own the collection.</a:t>
-            </a:r>
-          </a:p>
-          <a:p>
-            <a:pPr>
-              <a:lnSpc>
-                <a:spcPct val="132000"/>
-              </a:lnSpc>
-              <a:spcBef>
-                <a:spcPts val="0"/>
-              </a:spcBef>
-              <a:spcAft>
-                <a:spcPts val="1100"/>
-              </a:spcAft>
-            </a:pPr>
-            <a:r>
-              <a:rPr sz="1400" b="0" i="0">
-                <a:solidFill>
-                  <a:srgbClr val="5A6068"/>
-                </a:solidFill>
-                <a:latin typeface="Calibri"/>
-              </a:rPr>
-              <a:t>The honest caveat stays attached: this rests on 36 European countries and one survey item. It is the most tentative finding in the paper. It is also the one where the cost of being right and not measuring is highest, because the gap is invisible from inside the frameworks.</a:t>
+              <a:t>The evidence suggests health measurement could be made conditional on context rather than uniform: life expectancy where mortality still varies, and something with range left — self-rated health, or condition-specific measures — where it does not. This is not two frameworks. It is one domain, measured with an instrument chosen to still be sensitive in the setting it is used in.</a:t>
             </a:r>
           </a:p>
         </p:txBody>
@@ -9890,7 +9982,7 @@
                 </a:solidFill>
                 <a:latin typeface="Consolas"/>
               </a:rPr>
-              <a:t>WHERE THIS LEAVES THE ARGUMENT</a:t>
+              <a:t>CHANGE 3 · SOCIAL TRUST</a:t>
             </a:r>
           </a:p>
         </p:txBody>
@@ -9935,7 +10027,7 @@
                 </a:solidFill>
                 <a:latin typeface="Georgia"/>
               </a:rPr>
-              <a:t>Not a verdict on the frameworks — a question about what they are for</a:t>
+              <a:t>Collect interpersonal trust, or link systematically to surveys that already do</a:t>
             </a:r>
           </a:p>
         </p:txBody>
@@ -9980,7 +10072,7 @@
                 </a:solidFill>
                 <a:latin typeface="Calibri"/>
               </a:rPr>
-              <a:t>Two of the three changes above are re-analysis of data that already exists. The third is a collection decision. None of them requires accepting that the SDGs or the HDI are failing at what they set out to do.</a:t>
+              <a:t>This is the expensive one, and the only one that cannot be solved by re-analysing what exists. On the ESS evidence, interpersonal trust is the second strongest of the three domains — ahead of education — and neither framework collects it. SDG16's institutional confidence series are not a substitute: different construct, and they do not survive an income control.</a:t>
             </a:r>
           </a:p>
           <a:p>
@@ -10002,7 +10094,29 @@
                 </a:solidFill>
                 <a:latin typeface="Calibri"/>
               </a:rPr>
-              <a:t>What the evidence does support is narrower and, we think, harder to dismiss: which domain looks consequential for lived experience depends heavily on construction choices that were made for other, defensible reasons — and on one domain that was never on the list at all. If wellbeing is meant to be part of what these frameworks track, those choices are now testable rather than conventional, and this is what testing them shows.</a:t>
+              <a:t>Two routes. Add a trust item to core collection, which is a single well-validated question and cheap per respondent but slow institutionally. Or build systematic linkage to instruments that already carry it — the ESS in Europe, Gallup World Poll and the World Values Survey more broadly — so that country assessments can draw on it without the frameworks having to own the collection.</a:t>
+            </a:r>
+          </a:p>
+          <a:p>
+            <a:pPr>
+              <a:lnSpc>
+                <a:spcPct val="132000"/>
+              </a:lnSpc>
+              <a:spcBef>
+                <a:spcPts val="0"/>
+              </a:spcBef>
+              <a:spcAft>
+                <a:spcPts val="1100"/>
+              </a:spcAft>
+            </a:pPr>
+            <a:r>
+              <a:rPr sz="1400" b="0" i="0">
+                <a:solidFill>
+                  <a:srgbClr val="5A6068"/>
+                </a:solidFill>
+                <a:latin typeface="Calibri"/>
+              </a:rPr>
+              <a:t>The honest caveat stays attached: this rests on 36 European countries and one survey item. It is the most tentative finding in the paper. It is also the one where the cost of being right and not measuring is highest, because the gap is invisible from inside the frameworks.</a:t>
             </a:r>
           </a:p>
         </p:txBody>
@@ -10458,7 +10572,7 @@
                 </a:solidFill>
                 <a:latin typeface="Consolas"/>
               </a:rPr>
-              <a:t>47%</a:t>
+              <a:t>+0.44 → +0.20</a:t>
             </a:r>
           </a:p>
           <a:p>
@@ -10480,7 +10594,7 @@
                 </a:solidFill>
                 <a:latin typeface="Calibri"/>
               </a:rPr>
-              <a:t>SHDI × ESS at levels, across regions — swap the instrument and scale</a:t>
+              <a:t>HDI × ESS pooled, levels → differences — swap the instrument</a:t>
             </a:r>
           </a:p>
         </p:txBody>
@@ -10494,6 +10608,228 @@
 </file>
 
 <file path=ppt/slides/slide30.xml><?xml version="1.0" encoding="utf-8"?>
+<p:sld xmlns:a="http://schemas.openxmlformats.org/drawingml/2006/main" xmlns:p="http://schemas.openxmlformats.org/presentationml/2006/main" xmlns:r="http://schemas.openxmlformats.org/officeDocument/2006/relationships">
+  <p:cSld>
+    <p:bg>
+      <p:bgPr>
+        <a:solidFill>
+          <a:srgbClr val="FCFCFB"/>
+        </a:solidFill>
+        <a:effectLst/>
+      </p:bgPr>
+    </p:bg>
+    <p:spTree>
+      <p:nvGrpSpPr>
+        <p:cNvPr id="1" name=""/>
+        <p:cNvGrpSpPr/>
+        <p:nvPr/>
+      </p:nvGrpSpPr>
+      <p:grpSpPr/>
+      <p:sp>
+        <p:nvSpPr>
+          <p:cNvPr id="2" name="TextBox 1"/>
+          <p:cNvSpPr txBox="1"/>
+          <p:nvPr/>
+        </p:nvSpPr>
+        <p:spPr>
+          <a:xfrm>
+            <a:off x="566928" y="502920"/>
+            <a:ext cx="8595360" cy="274320"/>
+          </a:xfrm>
+          <a:prstGeom prst="rect">
+            <a:avLst/>
+          </a:prstGeom>
+          <a:noFill/>
+        </p:spPr>
+        <p:txBody>
+          <a:bodyPr wrap="square" lIns="0" rIns="0" tIns="0" bIns="0">
+            <a:spAutoFit/>
+          </a:bodyPr>
+          <a:lstStyle/>
+          <a:p>
+            <a:pPr>
+              <a:spcBef>
+                <a:spcPts val="0"/>
+              </a:spcBef>
+              <a:spcAft>
+                <a:spcPts val="0"/>
+              </a:spcAft>
+            </a:pPr>
+            <a:r>
+              <a:rPr sz="1000" b="0" i="0">
+                <a:solidFill>
+                  <a:srgbClr val="A63A30"/>
+                </a:solidFill>
+                <a:latin typeface="Consolas"/>
+              </a:rPr>
+              <a:t>WHERE THIS LEAVES THE ARGUMENT</a:t>
+            </a:r>
+          </a:p>
+        </p:txBody>
+      </p:sp>
+      <p:sp>
+        <p:nvSpPr>
+          <p:cNvPr id="3" name="TextBox 2"/>
+          <p:cNvSpPr txBox="1"/>
+          <p:nvPr/>
+        </p:nvSpPr>
+        <p:spPr>
+          <a:xfrm>
+            <a:off x="566928" y="914400"/>
+            <a:ext cx="8595360" cy="1371600"/>
+          </a:xfrm>
+          <a:prstGeom prst="rect">
+            <a:avLst/>
+          </a:prstGeom>
+          <a:noFill/>
+        </p:spPr>
+        <p:txBody>
+          <a:bodyPr wrap="square" lIns="0" rIns="0" tIns="0" bIns="0">
+            <a:spAutoFit/>
+          </a:bodyPr>
+          <a:lstStyle/>
+          <a:p>
+            <a:pPr>
+              <a:lnSpc>
+                <a:spcPct val="108000"/>
+              </a:lnSpc>
+              <a:spcBef>
+                <a:spcPts val="0"/>
+              </a:spcBef>
+              <a:spcAft>
+                <a:spcPts val="0"/>
+              </a:spcAft>
+            </a:pPr>
+            <a:r>
+              <a:rPr sz="2700" b="0" i="0">
+                <a:solidFill>
+                  <a:srgbClr val="14171C"/>
+                </a:solidFill>
+                <a:latin typeface="Georgia"/>
+              </a:rPr>
+              <a:t>Not a verdict on the frameworks — a question about what they are for</a:t>
+            </a:r>
+          </a:p>
+        </p:txBody>
+      </p:sp>
+      <p:sp>
+        <p:nvSpPr>
+          <p:cNvPr id="4" name="TextBox 3"/>
+          <p:cNvSpPr txBox="1"/>
+          <p:nvPr/>
+        </p:nvSpPr>
+        <p:spPr>
+          <a:xfrm>
+            <a:off x="566928" y="2286000"/>
+            <a:ext cx="8595360" cy="3840480"/>
+          </a:xfrm>
+          <a:prstGeom prst="rect">
+            <a:avLst/>
+          </a:prstGeom>
+          <a:noFill/>
+        </p:spPr>
+        <p:txBody>
+          <a:bodyPr wrap="square" lIns="0" rIns="0" tIns="0" bIns="0">
+            <a:spAutoFit/>
+          </a:bodyPr>
+          <a:lstStyle/>
+          <a:p>
+            <a:pPr>
+              <a:lnSpc>
+                <a:spcPct val="132000"/>
+              </a:lnSpc>
+              <a:spcBef>
+                <a:spcPts val="0"/>
+              </a:spcBef>
+              <a:spcAft>
+                <a:spcPts val="1100"/>
+              </a:spcAft>
+            </a:pPr>
+            <a:r>
+              <a:rPr sz="1400" b="0" i="0">
+                <a:solidFill>
+                  <a:srgbClr val="5A6068"/>
+                </a:solidFill>
+                <a:latin typeface="Calibri"/>
+              </a:rPr>
+              <a:t>Two of the three changes above are re-analysis of data that already exists. The third is a collection decision. None of them requires accepting that the SDGs or the HDI are failing at what they set out to do.</a:t>
+            </a:r>
+          </a:p>
+          <a:p>
+            <a:pPr>
+              <a:lnSpc>
+                <a:spcPct val="132000"/>
+              </a:lnSpc>
+              <a:spcBef>
+                <a:spcPts val="0"/>
+              </a:spcBef>
+              <a:spcAft>
+                <a:spcPts val="1100"/>
+              </a:spcAft>
+            </a:pPr>
+            <a:r>
+              <a:rPr sz="1400" b="0" i="0">
+                <a:solidFill>
+                  <a:srgbClr val="5A6068"/>
+                </a:solidFill>
+                <a:latin typeface="Calibri"/>
+              </a:rPr>
+              <a:t>What the evidence does support is narrower and, we think, harder to dismiss: which domain looks consequential for lived experience depends heavily on construction choices that were made for other, defensible reasons — and on one domain that was never on the list at all. If wellbeing is meant to be part of what these frameworks track, those choices are now testable rather than conventional, and this is what testing them shows.</a:t>
+            </a:r>
+          </a:p>
+        </p:txBody>
+      </p:sp>
+      <p:sp>
+        <p:nvSpPr>
+          <p:cNvPr id="5" name="TextBox 4"/>
+          <p:cNvSpPr txBox="1"/>
+          <p:nvPr/>
+        </p:nvSpPr>
+        <p:spPr>
+          <a:xfrm>
+            <a:off x="11338560" y="6263640"/>
+            <a:ext cx="548640" cy="274320"/>
+          </a:xfrm>
+          <a:prstGeom prst="rect">
+            <a:avLst/>
+          </a:prstGeom>
+          <a:noFill/>
+        </p:spPr>
+        <p:txBody>
+          <a:bodyPr wrap="square" lIns="0" rIns="0" tIns="0" bIns="0">
+            <a:spAutoFit/>
+          </a:bodyPr>
+          <a:lstStyle/>
+          <a:p>
+            <a:pPr algn="r">
+              <a:spcBef>
+                <a:spcPts val="0"/>
+              </a:spcBef>
+              <a:spcAft>
+                <a:spcPts val="0"/>
+              </a:spcAft>
+            </a:pPr>
+            <a:r>
+              <a:rPr sz="1100" b="0" i="0">
+                <a:solidFill>
+                  <a:srgbClr val="868D96"/>
+                </a:solidFill>
+                <a:latin typeface="Consolas"/>
+              </a:rPr>
+              <a:t>IV</a:t>
+            </a:r>
+          </a:p>
+        </p:txBody>
+      </p:sp>
+    </p:spTree>
+  </p:cSld>
+  <p:clrMapOvr>
+    <a:masterClrMapping/>
+  </p:clrMapOvr>
+</p:sld>
+</file>
+
+<file path=ppt/slides/slide31.xml><?xml version="1.0" encoding="utf-8"?>
 <p:sld xmlns:a="http://schemas.openxmlformats.org/drawingml/2006/main" xmlns:p="http://schemas.openxmlformats.org/presentationml/2006/main" xmlns:r="http://schemas.openxmlformats.org/officeDocument/2006/relationships">
   <p:cSld>
     <p:bg>
@@ -10650,7 +10986,7 @@
 </p:sld>
 </file>
 
-<file path=ppt/slides/slide31.xml><?xml version="1.0" encoding="utf-8"?>
+<file path=ppt/slides/slide32.xml><?xml version="1.0" encoding="utf-8"?>
 <p:sld xmlns:a="http://schemas.openxmlformats.org/drawingml/2006/main" xmlns:p="http://schemas.openxmlformats.org/presentationml/2006/main" xmlns:r="http://schemas.openxmlformats.org/officeDocument/2006/relationships">
   <p:cSld>
     <p:bg>
@@ -11493,7 +11829,7 @@
 </p:sld>
 </file>
 
-<file path=ppt/slides/slide32.xml><?xml version="1.0" encoding="utf-8"?>
+<file path=ppt/slides/slide33.xml><?xml version="1.0" encoding="utf-8"?>
 <p:sld xmlns:a="http://schemas.openxmlformats.org/drawingml/2006/main" xmlns:p="http://schemas.openxmlformats.org/presentationml/2006/main" xmlns:r="http://schemas.openxmlformats.org/officeDocument/2006/relationships">
   <p:cSld>
     <p:bg>
@@ -11575,185 +11911,6 @@
           </a:p>
         </p:txBody>
       </p:sp>
-    </p:spTree>
-  </p:cSld>
-  <p:clrMapOvr>
-    <a:masterClrMapping/>
-  </p:clrMapOvr>
-</p:sld>
-</file>
-
-<file path=ppt/slides/slide33.xml><?xml version="1.0" encoding="utf-8"?>
-<p:sld xmlns:a="http://schemas.openxmlformats.org/drawingml/2006/main" xmlns:p="http://schemas.openxmlformats.org/presentationml/2006/main" xmlns:r="http://schemas.openxmlformats.org/officeDocument/2006/relationships">
-  <p:cSld>
-    <p:bg>
-      <p:bgPr>
-        <a:solidFill>
-          <a:srgbClr val="FCFCFB"/>
-        </a:solidFill>
-        <a:effectLst/>
-      </p:bgPr>
-    </p:bg>
-    <p:spTree>
-      <p:nvGrpSpPr>
-        <p:cNvPr id="1" name=""/>
-        <p:cNvGrpSpPr/>
-        <p:nvPr/>
-      </p:nvGrpSpPr>
-      <p:grpSpPr/>
-      <p:sp>
-        <p:nvSpPr>
-          <p:cNvPr id="2" name="TextBox 1"/>
-          <p:cNvSpPr txBox="1"/>
-          <p:nvPr/>
-        </p:nvSpPr>
-        <p:spPr>
-          <a:xfrm>
-            <a:off x="566928" y="411480"/>
-            <a:ext cx="10515600" cy="320040"/>
-          </a:xfrm>
-          <a:prstGeom prst="rect">
-            <a:avLst/>
-          </a:prstGeom>
-          <a:noFill/>
-        </p:spPr>
-        <p:txBody>
-          <a:bodyPr wrap="square" lIns="0" rIns="0" tIns="0" bIns="0">
-            <a:spAutoFit/>
-          </a:bodyPr>
-          <a:lstStyle/>
-          <a:p>
-            <a:pPr>
-              <a:spcBef>
-                <a:spcPts val="0"/>
-              </a:spcBef>
-              <a:spcAft>
-                <a:spcPts val="0"/>
-              </a:spcAft>
-            </a:pPr>
-            <a:r>
-              <a:rPr sz="1000" b="0" i="0">
-                <a:solidFill>
-                  <a:srgbClr val="868D96"/>
-                </a:solidFill>
-                <a:latin typeface="Consolas"/>
-              </a:rPr>
-              <a:t>APPENDIX</a:t>
-            </a:r>
-          </a:p>
-        </p:txBody>
-      </p:sp>
-      <p:sp>
-        <p:nvSpPr>
-          <p:cNvPr id="3" name="TextBox 2"/>
-          <p:cNvSpPr txBox="1"/>
-          <p:nvPr/>
-        </p:nvSpPr>
-        <p:spPr>
-          <a:xfrm>
-            <a:off x="566928" y="749808"/>
-            <a:ext cx="10515600" cy="457200"/>
-          </a:xfrm>
-          <a:prstGeom prst="rect">
-            <a:avLst/>
-          </a:prstGeom>
-          <a:noFill/>
-        </p:spPr>
-        <p:txBody>
-          <a:bodyPr wrap="square" lIns="0" rIns="0" tIns="0" bIns="0">
-            <a:spAutoFit/>
-          </a:bodyPr>
-          <a:lstStyle/>
-          <a:p>
-            <a:pPr>
-              <a:spcBef>
-                <a:spcPts val="0"/>
-              </a:spcBef>
-              <a:spcAft>
-                <a:spcPts val="0"/>
-              </a:spcAft>
-            </a:pPr>
-            <a:r>
-              <a:rPr sz="2000" b="0" i="0">
-                <a:solidFill>
-                  <a:srgbClr val="14171C"/>
-                </a:solidFill>
-                <a:latin typeface="Georgia"/>
-              </a:rPr>
-              <a:t>The collapse across all three national pairings</a:t>
-            </a:r>
-          </a:p>
-        </p:txBody>
-      </p:sp>
-      <p:sp>
-        <p:nvSpPr>
-          <p:cNvPr id="4" name="TextBox 3"/>
-          <p:cNvSpPr txBox="1"/>
-          <p:nvPr/>
-        </p:nvSpPr>
-        <p:spPr>
-          <a:xfrm>
-            <a:off x="566928" y="1207008"/>
-            <a:ext cx="10515600" cy="457200"/>
-          </a:xfrm>
-          <a:prstGeom prst="rect">
-            <a:avLst/>
-          </a:prstGeom>
-          <a:noFill/>
-        </p:spPr>
-        <p:txBody>
-          <a:bodyPr wrap="square" lIns="0" rIns="0" tIns="0" bIns="0">
-            <a:spAutoFit/>
-          </a:bodyPr>
-          <a:lstStyle/>
-          <a:p>
-            <a:pPr>
-              <a:lnSpc>
-                <a:spcPct val="128000"/>
-              </a:lnSpc>
-              <a:spcBef>
-                <a:spcPts val="0"/>
-              </a:spcBef>
-              <a:spcAft>
-                <a:spcPts val="0"/>
-              </a:spcAft>
-            </a:pPr>
-            <a:r>
-              <a:rPr sz="1100" b="0" i="0">
-                <a:solidFill>
-                  <a:srgbClr val="5A6068"/>
-                </a:solidFill>
-                <a:latin typeface="Calibri"/>
-              </a:rPr>
-              <a:t>Countries FDR-significant at levels versus first differences under the SDG framework, the HDI, and subnational HDI aggregated nationally.</a:t>
-            </a:r>
-          </a:p>
-        </p:txBody>
-      </p:sp>
-      <p:pic>
-        <p:nvPicPr>
-          <p:cNvPr id="5" name="Picture 4" descr="collapse_hdi_shdi_whr.png"/>
-          <p:cNvPicPr>
-            <a:picLocks noChangeAspect="1"/>
-          </p:cNvPicPr>
-          <p:nvPr/>
-        </p:nvPicPr>
-        <p:blipFill>
-          <a:blip r:embed="rId2"/>
-          <a:stretch>
-            <a:fillRect/>
-          </a:stretch>
-        </p:blipFill>
-        <p:spPr>
-          <a:xfrm>
-            <a:off x="2121157" y="1965960"/>
-            <a:ext cx="7949380" cy="4480560"/>
-          </a:xfrm>
-          <a:prstGeom prst="rect">
-            <a:avLst/>
-          </a:prstGeom>
-        </p:spPr>
-      </p:pic>
     </p:spTree>
   </p:cSld>
   <p:clrMapOvr>
@@ -11859,7 +12016,7 @@
                 </a:solidFill>
                 <a:latin typeface="Georgia"/>
               </a:rPr>
-              <a:t>Per-region collapse, subnational HDI against ESS life satisfaction</a:t>
+              <a:t>The collapse across all three national pairings</a:t>
             </a:r>
           </a:p>
         </p:txBody>
@@ -11904,14 +12061,14 @@
                 </a:solidFill>
                 <a:latin typeface="Calibri"/>
               </a:rPr>
-              <a:t>167 regions with at least five survey rounds. Levels R² on the horizontal axis, across-year differences on the vertical.</a:t>
+              <a:t>Countries FDR-significant at levels versus first differences under the SDG framework, the HDI, and subnational HDI aggregated nationally.</a:t>
             </a:r>
           </a:p>
         </p:txBody>
       </p:sp>
       <p:pic>
         <p:nvPicPr>
-          <p:cNvPr id="5" name="Picture 4" descr="collapse_shdi_ess_regional.png"/>
+          <p:cNvPr id="5" name="Picture 4" descr="collapse_hdi_shdi_whr.png"/>
           <p:cNvPicPr>
             <a:picLocks noChangeAspect="1"/>
           </p:cNvPicPr>
@@ -11925,8 +12082,8 @@
         </p:blipFill>
         <p:spPr>
           <a:xfrm>
-            <a:off x="3585393" y="1965960"/>
-            <a:ext cx="5020909" cy="4480560"/>
+            <a:off x="2121157" y="1965960"/>
+            <a:ext cx="7949380" cy="4480560"/>
           </a:xfrm>
           <a:prstGeom prst="rect">
             <a:avLst/>
@@ -12038,7 +12195,7 @@
                 </a:solidFill>
                 <a:latin typeface="Georgia"/>
               </a:rPr>
-              <a:t>The three domains competing inside one instrument</a:t>
+              <a:t>Per-region collapse, subnational HDI against ESS life satisfaction</a:t>
             </a:r>
           </a:p>
         </p:txBody>
@@ -12083,14 +12240,14 @@
                 </a:solidFill>
                 <a:latin typeface="Calibri"/>
               </a:rPr>
-              <a:t>ESS only, at two levels of aggregation: individual respondents on the left, country means on the right.</a:t>
+              <a:t>167 regions with at least five survey rounds. Levels R² on the horizontal axis, across-year differences on the vertical.</a:t>
             </a:r>
           </a:p>
         </p:txBody>
       </p:sp>
       <p:pic>
         <p:nvPicPr>
-          <p:cNvPr id="5" name="Picture 4" descr="domain_horse_race.png"/>
+          <p:cNvPr id="5" name="Picture 4" descr="collapse_shdi_ess_regional.png"/>
           <p:cNvPicPr>
             <a:picLocks noChangeAspect="1"/>
           </p:cNvPicPr>
@@ -12104,8 +12261,8 @@
         </p:blipFill>
         <p:spPr>
           <a:xfrm>
-            <a:off x="1940489" y="1965960"/>
-            <a:ext cx="8310716" cy="4480560"/>
+            <a:off x="3585393" y="1965960"/>
+            <a:ext cx="5020909" cy="4480560"/>
           </a:xfrm>
           <a:prstGeom prst="rect">
             <a:avLst/>
@@ -12217,6 +12374,185 @@
                 </a:solidFill>
                 <a:latin typeface="Georgia"/>
               </a:rPr>
+              <a:t>The three domains competing inside one instrument</a:t>
+            </a:r>
+          </a:p>
+        </p:txBody>
+      </p:sp>
+      <p:sp>
+        <p:nvSpPr>
+          <p:cNvPr id="4" name="TextBox 3"/>
+          <p:cNvSpPr txBox="1"/>
+          <p:nvPr/>
+        </p:nvSpPr>
+        <p:spPr>
+          <a:xfrm>
+            <a:off x="566928" y="1207008"/>
+            <a:ext cx="10515600" cy="457200"/>
+          </a:xfrm>
+          <a:prstGeom prst="rect">
+            <a:avLst/>
+          </a:prstGeom>
+          <a:noFill/>
+        </p:spPr>
+        <p:txBody>
+          <a:bodyPr wrap="square" lIns="0" rIns="0" tIns="0" bIns="0">
+            <a:spAutoFit/>
+          </a:bodyPr>
+          <a:lstStyle/>
+          <a:p>
+            <a:pPr>
+              <a:lnSpc>
+                <a:spcPct val="128000"/>
+              </a:lnSpc>
+              <a:spcBef>
+                <a:spcPts val="0"/>
+              </a:spcBef>
+              <a:spcAft>
+                <a:spcPts val="0"/>
+              </a:spcAft>
+            </a:pPr>
+            <a:r>
+              <a:rPr sz="1100" b="0" i="0">
+                <a:solidFill>
+                  <a:srgbClr val="5A6068"/>
+                </a:solidFill>
+                <a:latin typeface="Calibri"/>
+              </a:rPr>
+              <a:t>ESS only, at two levels of aggregation: individual respondents on the left, country means on the right.</a:t>
+            </a:r>
+          </a:p>
+        </p:txBody>
+      </p:sp>
+      <p:pic>
+        <p:nvPicPr>
+          <p:cNvPr id="5" name="Picture 4" descr="domain_horse_race.png"/>
+          <p:cNvPicPr>
+            <a:picLocks noChangeAspect="1"/>
+          </p:cNvPicPr>
+          <p:nvPr/>
+        </p:nvPicPr>
+        <p:blipFill>
+          <a:blip r:embed="rId2"/>
+          <a:stretch>
+            <a:fillRect/>
+          </a:stretch>
+        </p:blipFill>
+        <p:spPr>
+          <a:xfrm>
+            <a:off x="1940489" y="1965960"/>
+            <a:ext cx="8310716" cy="4480560"/>
+          </a:xfrm>
+          <a:prstGeom prst="rect">
+            <a:avLst/>
+          </a:prstGeom>
+        </p:spPr>
+      </p:pic>
+    </p:spTree>
+  </p:cSld>
+  <p:clrMapOvr>
+    <a:masterClrMapping/>
+  </p:clrMapOvr>
+</p:sld>
+</file>
+
+<file path=ppt/slides/slide37.xml><?xml version="1.0" encoding="utf-8"?>
+<p:sld xmlns:a="http://schemas.openxmlformats.org/drawingml/2006/main" xmlns:p="http://schemas.openxmlformats.org/presentationml/2006/main" xmlns:r="http://schemas.openxmlformats.org/officeDocument/2006/relationships">
+  <p:cSld>
+    <p:bg>
+      <p:bgPr>
+        <a:solidFill>
+          <a:srgbClr val="FCFCFB"/>
+        </a:solidFill>
+        <a:effectLst/>
+      </p:bgPr>
+    </p:bg>
+    <p:spTree>
+      <p:nvGrpSpPr>
+        <p:cNvPr id="1" name=""/>
+        <p:cNvGrpSpPr/>
+        <p:nvPr/>
+      </p:nvGrpSpPr>
+      <p:grpSpPr/>
+      <p:sp>
+        <p:nvSpPr>
+          <p:cNvPr id="2" name="TextBox 1"/>
+          <p:cNvSpPr txBox="1"/>
+          <p:nvPr/>
+        </p:nvSpPr>
+        <p:spPr>
+          <a:xfrm>
+            <a:off x="566928" y="411480"/>
+            <a:ext cx="10515600" cy="320040"/>
+          </a:xfrm>
+          <a:prstGeom prst="rect">
+            <a:avLst/>
+          </a:prstGeom>
+          <a:noFill/>
+        </p:spPr>
+        <p:txBody>
+          <a:bodyPr wrap="square" lIns="0" rIns="0" tIns="0" bIns="0">
+            <a:spAutoFit/>
+          </a:bodyPr>
+          <a:lstStyle/>
+          <a:p>
+            <a:pPr>
+              <a:spcBef>
+                <a:spcPts val="0"/>
+              </a:spcBef>
+              <a:spcAft>
+                <a:spcPts val="0"/>
+              </a:spcAft>
+            </a:pPr>
+            <a:r>
+              <a:rPr sz="1000" b="0" i="0">
+                <a:solidFill>
+                  <a:srgbClr val="868D96"/>
+                </a:solidFill>
+                <a:latin typeface="Consolas"/>
+              </a:rPr>
+              <a:t>APPENDIX</a:t>
+            </a:r>
+          </a:p>
+        </p:txBody>
+      </p:sp>
+      <p:sp>
+        <p:nvSpPr>
+          <p:cNvPr id="3" name="TextBox 2"/>
+          <p:cNvSpPr txBox="1"/>
+          <p:nvPr/>
+        </p:nvSpPr>
+        <p:spPr>
+          <a:xfrm>
+            <a:off x="566928" y="749808"/>
+            <a:ext cx="10515600" cy="457200"/>
+          </a:xfrm>
+          <a:prstGeom prst="rect">
+            <a:avLst/>
+          </a:prstGeom>
+          <a:noFill/>
+        </p:spPr>
+        <p:txBody>
+          <a:bodyPr wrap="square" lIns="0" rIns="0" tIns="0" bIns="0">
+            <a:spAutoFit/>
+          </a:bodyPr>
+          <a:lstStyle/>
+          <a:p>
+            <a:pPr>
+              <a:spcBef>
+                <a:spcPts val="0"/>
+              </a:spcBef>
+              <a:spcAft>
+                <a:spcPts val="0"/>
+              </a:spcAft>
+            </a:pPr>
+            <a:r>
+              <a:rPr sz="2000" b="0" i="0">
+                <a:solidFill>
+                  <a:srgbClr val="14171C"/>
+                </a:solidFill>
+                <a:latin typeface="Georgia"/>
+              </a:rPr>
               <a:t>Individual-level education by country</a:t>
             </a:r>
           </a:p>
@@ -13020,7 +13356,7 @@
               </a:spcAft>
             </a:pPr>
             <a:r>
-              <a:rPr sz="950" b="0" i="0">
+              <a:rPr sz="875" b="0" i="0">
                 <a:solidFill>
                   <a:srgbClr val="5A6068"/>
                 </a:solidFill>
@@ -13042,13 +13378,13 @@
               </a:spcAft>
             </a:pPr>
             <a:r>
-              <a:rPr sz="950" b="0" i="0">
+              <a:rPr sz="875" b="0" i="0">
                 <a:solidFill>
                   <a:srgbClr val="5A6068"/>
                 </a:solidFill>
                 <a:latin typeface="Calibri"/>
               </a:rPr>
-              <a:t>The result is 8% at levels and 16% in differences across 25 countries — and it should be read as a null test rather than a finding in either direction. The ESS runs seven survey rounds where the WHR panels run thirteen years, and differences coming out above levels is not a pattern a real association produces. Panel b is the check: at seven observations, a genuine correlation of 0.5 is recovered in about 3% of units. This design cannot see much at that length, so its silence is not evidence.</a:t>
+              <a:t>Run country by country it returns 8% at levels and 16% in differences across 25 countries, which is a null test rather than a finding: the ESS has seven survey rounds where the WHR panels have thirteen years, and panel b shows what that costs — at seven observations a genuine correlation of 0.5 is recovered in about 3% of units. Differences landing above levels is the tell that the test is not working, not a result.</a:t>
             </a:r>
           </a:p>
           <a:p>
@@ -13064,13 +13400,35 @@
               </a:spcAft>
             </a:pPr>
             <a:r>
-              <a:rPr sz="950" b="0" i="0">
+              <a:rPr sz="875" b="0" i="0">
                 <a:solidFill>
                   <a:srgbClr val="5A6068"/>
                 </a:solidFill>
                 <a:latin typeface="Calibri"/>
               </a:rPr>
-              <a:t>Where the ESS does have power is in cross-section. Pairing subnational HDI with ESS life satisfaction across regions inside each country — many regions per country rather than seven rounds — gives 47% of 15 countries FDR-significant at levels, sitting right on top of the 42% the HDI reaches nationally against the Cantril ladder. So the levels half corroborates on an independent instrument at a finer scale. The differences half rests on the SDG and HDI panels, which is where it always rested.</a:t>
+              <a:t>Pooled across countries, where the power is, it does replicate: the HDI's within-country association with ESS life satisfaction falls from r = +0.44 at levels to +0.20 in first differences. The attenuation is sharp, though it stops short of the clean null the Cantril ladder gives on the full panel — there, across 1,548 country-year changes, the HDI goes from +0.15 to −0.02 and is not significant at all.</a:t>
+            </a:r>
+          </a:p>
+          <a:p>
+            <a:pPr>
+              <a:lnSpc>
+                <a:spcPct val="132000"/>
+              </a:lnSpc>
+              <a:spcBef>
+                <a:spcPts val="0"/>
+              </a:spcBef>
+              <a:spcAft>
+                <a:spcPts val="1100"/>
+              </a:spcAft>
+            </a:pPr>
+            <a:r>
+              <a:rPr sz="875" b="0" i="0">
+                <a:solidFill>
+                  <a:srgbClr val="5A6068"/>
+                </a:solidFill>
+                <a:latin typeface="Calibri"/>
+              </a:rPr>
+              <a:t>The ESS also corroborates the levels half in cross-section, where it has plenty of power: subnational HDI predicts ESS life satisfaction across regions inside each country in 47% of 15 countries, sitting on top of the 42% the HDI reaches nationally. So the collapse survives the instrument swap. What it does not survive — and this is Act II-a — is changing the predictor from a development composite to the domain measures themselves.</a:t>
             </a:r>
           </a:p>
         </p:txBody>
@@ -13338,7 +13696,7 @@
                 </a:solidFill>
                 <a:latin typeface="Georgia"/>
               </a:rPr>
-              <a:t>Two well-powered pairings, the same asymmetry in both. The ESS corroborates the levels half with an independent wellbeing instrument, and is too short a panel to rule on differences either way. Differences cannot carry an argument — so everything that follows is a question about the levels.</a:t>
+              <a:t>Three pairings, the same asymmetry in all of them: development composites predict wellbeing between units and barely track it within one over time. That holds whichever framework and whichever wellbeing instrument you use. So the levels are where to look next — and the differences question comes back in Act II-a, once the predictor is no longer a composite.</a:t>
             </a:r>
           </a:p>
         </p:txBody>

--- a/deck/Measured_Where_It_Varies.pptx
+++ b/deck/Measured_Where_It_Varies.pptx
@@ -5924,7 +5924,7 @@
               </a:spcAft>
             </a:pPr>
             <a:r>
-              <a:rPr sz="875" b="0" i="0">
+              <a:rPr sz="850" b="0" i="0">
                 <a:solidFill>
                   <a:srgbClr val="5A6068"/>
                 </a:solidFill>
@@ -5946,7 +5946,7 @@
               </a:spcAft>
             </a:pPr>
             <a:r>
-              <a:rPr sz="875" b="0" i="0">
+              <a:rPr sz="850" b="0" i="0">
                 <a:solidFill>
                   <a:srgbClr val="5A6068"/>
                 </a:solidFill>
@@ -5968,7 +5968,7 @@
               </a:spcAft>
             </a:pPr>
             <a:r>
-              <a:rPr sz="875" b="0" i="0">
+              <a:rPr sz="850" b="0" i="0">
                 <a:solidFill>
                   <a:srgbClr val="5A6068"/>
                 </a:solidFill>
@@ -5990,7 +5990,29 @@
               </a:spcAft>
             </a:pPr>
             <a:r>
-              <a:rPr sz="875" b="0" i="0">
+              <a:rPr sz="850" b="0" i="0">
+                <a:solidFill>
+                  <a:srgbClr val="5A6068"/>
+                </a:solidFill>
+                <a:latin typeface="Calibri"/>
+              </a:rPr>
+              <a:t>The same question one scale down agrees, and shows where the power is. Per region over survey rounds, subnational HDI explains nothing at all — 0 of 167 regions, on seven rounds each. Across regions inside a country it recovers the levels result, 47% of 15 countries. And at the individual level it is decisive: 36 of 36 countries for health, 35 for trust, on ~10,700 respondents each. Region, country and person all tell the same story; only the individual level has the sample to tell it cleanly.</a:t>
+            </a:r>
+          </a:p>
+          <a:p>
+            <a:pPr>
+              <a:lnSpc>
+                <a:spcPct val="132000"/>
+              </a:lnSpc>
+              <a:spcBef>
+                <a:spcPts val="0"/>
+              </a:spcBef>
+              <a:spcAft>
+                <a:spcPts val="1100"/>
+              </a:spcAft>
+            </a:pPr>
+            <a:r>
+              <a:rPr sz="850" b="0" i="0">
                 <a:solidFill>
                   <a:srgbClr val="5A6068"/>
                 </a:solidFill>
@@ -9387,6 +9409,28 @@
             <a:spAutoFit/>
           </a:bodyPr>
           <a:lstStyle/>
+          <a:p>
+            <a:pPr>
+              <a:lnSpc>
+                <a:spcPct val="132000"/>
+              </a:lnSpc>
+              <a:spcBef>
+                <a:spcPts val="0"/>
+              </a:spcBef>
+              <a:spcAft>
+                <a:spcPts val="1100"/>
+              </a:spcAft>
+            </a:pPr>
+            <a:r>
+              <a:rPr sz="1400" b="0" i="0">
+                <a:solidFill>
+                  <a:srgbClr val="5A6068"/>
+                </a:solidFill>
+                <a:latin typeface="Calibri"/>
+              </a:rPr>
+              <a:t>The shape of what follows, before the detail. Two of the three domains are already inside these frameworks — health, and the access half of education — and on this evidence they are the two that track lived experience. The suggestion is not to add a wellbeing pillar but to let those two carry that weight explicitly: elevate them as wellbeing-relevant highlights, measured with variables that still vary, with social trust flagged as a likely third that neither framework can currently see.</a:t>
+            </a:r>
+          </a:p>
           <a:p>
             <a:pPr>
               <a:lnSpc>

--- a/deck/Measured_Where_It_Varies.pptx
+++ b/deck/Measured_Where_It_Varies.pptx
@@ -4478,7 +4478,7 @@
                 </a:solidFill>
                 <a:latin typeface="Consolas"/>
               </a:rPr>
-              <a:t>+0.40 / +0.59</a:t>
+              <a:t>+0.55 / +0.35</a:t>
             </a:r>
           </a:p>
           <a:p>
@@ -4500,7 +4500,7 @@
                 </a:solidFill>
                 <a:latin typeface="Calibri"/>
               </a:rPr>
-              <a:t>health and trust in first differences, pooled — they survive</a:t>
+              <a:t>trust and health in differences with NO shared respondents</a:t>
             </a:r>
           </a:p>
         </p:txBody>
@@ -6018,7 +6018,29 @@
                 </a:solidFill>
                 <a:latin typeface="Calibri"/>
               </a:rPr>
-              <a:t>One caveat has to travel with the trust result. It is strong within the ESS (+0.59) and absent against the independent WHR outcome (+0.06, not significant). Health survives both (+0.40 and +0.20). That difference is the signature of common-method variance — same questionnaire, same respondents — so the trust dynamic is reported as same-survey only, and health is the domain that carries a clean cross-source result.</a:t>
+              <a:t>The obvious objection to the trust result is common-method variance: the same people answer the trust question and the life-satisfaction question in the same sitting, so of course the two move together. That is testable. Split each country-round's respondents at random, take the trust mean from one half and life satisfaction from the other, and no person contributes to both sides while sample, fieldwork and timing stay identical. Trust retains 93% of its estimate (+0.59 to +0.55) and health 88% (+0.40 to +0.35). Education stays null. The association is between people in a country, not inside a questionnaire.</a:t>
+            </a:r>
+          </a:p>
+          <a:p>
+            <a:pPr>
+              <a:lnSpc>
+                <a:spcPct val="132000"/>
+              </a:lnSpc>
+              <a:spcBef>
+                <a:spcPts val="0"/>
+              </a:spcBef>
+              <a:spcAft>
+                <a:spcPts val="1100"/>
+              </a:spcAft>
+            </a:pPr>
+            <a:r>
+              <a:rPr sz="850" b="0" i="0">
+                <a:solidFill>
+                  <a:srgbClr val="5A6068"/>
+                </a:solidFill>
+                <a:latin typeface="Calibri"/>
+              </a:rPr>
+              <a:t>What does bound the trust claim is the cross-source panel. Against the WHR ladder, trust reaches +0.20 at levels and +0.06 in differences, where health reaches +0.51 and +0.20. But that pairing sets ESS rounds against a different sample, with different fieldwork timing and its own sampling error, and differencing amplifies all of it — trust is the weaker signal to begin with, so it has less to lose before vanishing. Read as a bound, not a refutation: trust has not yet been corroborated against an independent wellbeing instrument, and health has.</a:t>
             </a:r>
           </a:p>
         </p:txBody>
@@ -7615,7 +7637,7 @@
                 </a:solidFill>
                 <a:latin typeface="Georgia"/>
               </a:rPr>
-              <a:t>Health, trust and education are all significant on people, in almost every country, and interpersonal trust — the one domain neither framework collects — outranks education. Pooled for power, health and trust also survive differencing where the HDI does not. The collapse was never about differencing; it was about what the frameworks chose to measure.</a:t>
+              <a:t>Health, trust and education are all significant on people, in almost every country, and interpersonal trust — the one domain neither framework collects — outranks education. Pooled for power, health and trust also survive differencing where the HDI does not, and survive a split-half test that rules out the same people answering both questions. The collapse was never about differencing; it was about what the frameworks chose to measure.</a:t>
             </a:r>
           </a:p>
         </p:txBody>
@@ -10110,7 +10132,7 @@
               </a:spcAft>
             </a:pPr>
             <a:r>
-              <a:rPr sz="1400" b="0" i="0">
+              <a:rPr sz="1350" b="0" i="0">
                 <a:solidFill>
                   <a:srgbClr val="5A6068"/>
                 </a:solidFill>
@@ -10132,7 +10154,7 @@
               </a:spcAft>
             </a:pPr>
             <a:r>
-              <a:rPr sz="1400" b="0" i="0">
+              <a:rPr sz="1350" b="0" i="0">
                 <a:solidFill>
                   <a:srgbClr val="5A6068"/>
                 </a:solidFill>
@@ -10154,13 +10176,13 @@
               </a:spcAft>
             </a:pPr>
             <a:r>
-              <a:rPr sz="1400" b="0" i="0">
+              <a:rPr sz="1350" b="0" i="0">
                 <a:solidFill>
                   <a:srgbClr val="5A6068"/>
                 </a:solidFill>
                 <a:latin typeface="Calibri"/>
               </a:rPr>
-              <a:t>The honest caveat stays attached: this rests on 36 European countries and one survey item. It is the most tentative finding in the paper. It is also the one where the cost of being right and not measuring is highest, because the gap is invisible from inside the frameworks.</a:t>
+              <a:t>The caveats stay attached, and they are about coverage rather than about whether the association is real. It rests on 36 European countries and one survey item, and it has not yet been corroborated against an independent wellbeing instrument the way health has. What it is not is a questionnaire artefact: with predictor and outcome taken from different respondents, the within-country result holds at +0.55. So this is the most tentative of the three recommendations on scope, and the one where the cost of being right and not measuring is highest — because a domain no framework collects cannot show up as a gap in any framework's own diagnostics.</a:t>
             </a:r>
           </a:p>
         </p:txBody>
@@ -11536,7 +11558,7 @@
                 </a:solidFill>
                 <a:latin typeface="Calibri"/>
               </a:rPr>
-              <a:t>Trust rests on the ESS: 36 European countries, one item, self-reported. 97% of countries significant with median individual R² 0.039. The SDG16 comparison is cross-sectional because only 16 of 163 country-series have the four years a time-series design needs. This is the most tentative of the three domains and should be framed as such.</a:t>
+              <a:t>Trust rests on the ESS: 36 European countries, one item, self-reported. 97% of countries significant at levels; +0.59 within-country in first differences, and +0.55 with predictor and outcome drawn from disjoint respondents, so it is not a common-method artefact. What is still missing is corroboration against an independent wellbeing instrument: against the WHR ladder it is +0.06 n.s. in differences, plausibly attenuation from pairing two samples with different fieldwork timing, but unproven either way. Health has that corroboration and trust does not — worth stating plainly rather than leaning on trust as hard as on health.</a:t>
             </a:r>
           </a:p>
         </p:txBody>

--- a/deck/Measured_Where_It_Varies.pptx
+++ b/deck/Measured_Where_It_Varies.pptx
@@ -5974,6 +5974,28 @@
                 </a:solidFill>
                 <a:latin typeface="Calibri"/>
               </a:rPr>
+              <a:t>One check before leaning on this. These are 25 European countries over seven rounds, where a common shock — a financial crisis, a pandemic — could move health, trust and wellbeing together and manufacture the correlation. Removing whatever is shared within each survey round leaves health at +0.42 and trust at +0.58, with education still null. The domain results are idiosyncratic country movement, not shared shocks.</a:t>
+            </a:r>
+          </a:p>
+          <a:p>
+            <a:pPr>
+              <a:lnSpc>
+                <a:spcPct val="132000"/>
+              </a:lnSpc>
+              <a:spcBef>
+                <a:spcPts val="0"/>
+              </a:spcBef>
+              <a:spcAft>
+                <a:spcPts val="1100"/>
+              </a:spcAft>
+            </a:pPr>
+            <a:r>
+              <a:rPr sz="850" b="0" i="0">
+                <a:solidFill>
+                  <a:srgbClr val="5A6068"/>
+                </a:solidFill>
+                <a:latin typeface="Calibri"/>
+              </a:rPr>
               <a:t>So when a country's self-rated health rises between rounds, its life satisfaction rises with it. When its HDI rises, that tells you almost nothing. This is the sharpest version of the paper's claim: development composites move too slowly and too smoothly to track how people feel — within a country the HDI moves about a tenth of its between-country spread, where the domain measures move two to three times that.</a:t>
             </a:r>
           </a:p>
@@ -11126,7 +11148,7 @@
                 </a:solidFill>
                 <a:latin typeface="Calibri"/>
               </a:rPr>
-              <a:t>7 things the acts do not settle, in the order they block drafting.</a:t>
+              <a:t>9 things the acts do not settle, in the order they block drafting.</a:t>
             </a:r>
           </a:p>
         </p:txBody>
@@ -11183,30 +11205,30 @@
         </p:nvSpPr>
         <p:spPr>
           <a:xfrm>
-            <a:off x="566928" y="2011680"/>
-            <a:ext cx="3472586" cy="1828800"/>
-          </a:xfrm>
-          <a:prstGeom prst="rect">
-            <a:avLst/>
-          </a:prstGeom>
-          <a:noFill/>
-        </p:spPr>
-        <p:txBody>
-          <a:bodyPr wrap="square" lIns="0" rIns="0" tIns="0" bIns="0">
-            <a:spAutoFit/>
-          </a:bodyPr>
-          <a:lstStyle/>
-          <a:p>
-            <a:pPr>
-              <a:spcBef>
-                <a:spcPts val="0"/>
-              </a:spcBef>
-              <a:spcAft>
-                <a:spcPts val="700"/>
-              </a:spcAft>
-            </a:pPr>
-            <a:r>
-              <a:rPr sz="1050" b="0" i="0">
+            <a:off x="566928" y="1975104"/>
+            <a:ext cx="3472586" cy="1328928"/>
+          </a:xfrm>
+          <a:prstGeom prst="rect">
+            <a:avLst/>
+          </a:prstGeom>
+          <a:noFill/>
+        </p:spPr>
+        <p:txBody>
+          <a:bodyPr wrap="square" lIns="0" rIns="0" tIns="0" bIns="0">
+            <a:spAutoFit/>
+          </a:bodyPr>
+          <a:lstStyle/>
+          <a:p>
+            <a:pPr>
+              <a:spcBef>
+                <a:spcPts val="0"/>
+              </a:spcBef>
+              <a:spcAft>
+                <a:spcPts val="600"/>
+              </a:spcAft>
+            </a:pPr>
+            <a:r>
+              <a:rPr sz="950" b="0" i="0">
                 <a:solidFill>
                   <a:srgbClr val="17549E"/>
                 </a:solidFill>
@@ -11218,7 +11240,7 @@
           <a:p>
             <a:pPr>
               <a:lnSpc>
-                <a:spcPct val="130000"/>
+                <a:spcPct val="128000"/>
               </a:lnSpc>
               <a:spcBef>
                 <a:spcPts val="0"/>
@@ -11228,7 +11250,7 @@
               </a:spcAft>
             </a:pPr>
             <a:r>
-              <a:rPr sz="1100" b="0" i="0">
+              <a:rPr sz="950" b="0" i="0">
                 <a:solidFill>
                   <a:srgbClr val="5A6068"/>
                 </a:solidFill>
@@ -11291,30 +11313,30 @@
         </p:nvSpPr>
         <p:spPr>
           <a:xfrm>
-            <a:off x="4359554" y="2011680"/>
-            <a:ext cx="3472586" cy="1828800"/>
-          </a:xfrm>
-          <a:prstGeom prst="rect">
-            <a:avLst/>
-          </a:prstGeom>
-          <a:noFill/>
-        </p:spPr>
-        <p:txBody>
-          <a:bodyPr wrap="square" lIns="0" rIns="0" tIns="0" bIns="0">
-            <a:spAutoFit/>
-          </a:bodyPr>
-          <a:lstStyle/>
-          <a:p>
-            <a:pPr>
-              <a:spcBef>
-                <a:spcPts val="0"/>
-              </a:spcBef>
-              <a:spcAft>
-                <a:spcPts val="700"/>
-              </a:spcAft>
-            </a:pPr>
-            <a:r>
-              <a:rPr sz="1050" b="0" i="0">
+            <a:off x="4359554" y="1975104"/>
+            <a:ext cx="3472586" cy="1328928"/>
+          </a:xfrm>
+          <a:prstGeom prst="rect">
+            <a:avLst/>
+          </a:prstGeom>
+          <a:noFill/>
+        </p:spPr>
+        <p:txBody>
+          <a:bodyPr wrap="square" lIns="0" rIns="0" tIns="0" bIns="0">
+            <a:spAutoFit/>
+          </a:bodyPr>
+          <a:lstStyle/>
+          <a:p>
+            <a:pPr>
+              <a:spcBef>
+                <a:spcPts val="0"/>
+              </a:spcBef>
+              <a:spcAft>
+                <a:spcPts val="600"/>
+              </a:spcAft>
+            </a:pPr>
+            <a:r>
+              <a:rPr sz="950" b="0" i="0">
                 <a:solidFill>
                   <a:srgbClr val="17549E"/>
                 </a:solidFill>
@@ -11326,7 +11348,7 @@
           <a:p>
             <a:pPr>
               <a:lnSpc>
-                <a:spcPct val="130000"/>
+                <a:spcPct val="128000"/>
               </a:lnSpc>
               <a:spcBef>
                 <a:spcPts val="0"/>
@@ -11336,7 +11358,7 @@
               </a:spcAft>
             </a:pPr>
             <a:r>
-              <a:rPr sz="1100" b="0" i="0">
+              <a:rPr sz="950" b="0" i="0">
                 <a:solidFill>
                   <a:srgbClr val="5A6068"/>
                 </a:solidFill>
@@ -11399,42 +11421,42 @@
         </p:nvSpPr>
         <p:spPr>
           <a:xfrm>
-            <a:off x="8152180" y="2011680"/>
-            <a:ext cx="3472586" cy="1828800"/>
-          </a:xfrm>
-          <a:prstGeom prst="rect">
-            <a:avLst/>
-          </a:prstGeom>
-          <a:noFill/>
-        </p:spPr>
-        <p:txBody>
-          <a:bodyPr wrap="square" lIns="0" rIns="0" tIns="0" bIns="0">
-            <a:spAutoFit/>
-          </a:bodyPr>
-          <a:lstStyle/>
-          <a:p>
-            <a:pPr>
-              <a:spcBef>
-                <a:spcPts val="0"/>
-              </a:spcBef>
-              <a:spcAft>
-                <a:spcPts val="700"/>
-              </a:spcAft>
-            </a:pPr>
-            <a:r>
-              <a:rPr sz="1050" b="0" i="0">
+            <a:off x="8152180" y="1975104"/>
+            <a:ext cx="3472586" cy="1328928"/>
+          </a:xfrm>
+          <a:prstGeom prst="rect">
+            <a:avLst/>
+          </a:prstGeom>
+          <a:noFill/>
+        </p:spPr>
+        <p:txBody>
+          <a:bodyPr wrap="square" lIns="0" rIns="0" tIns="0" bIns="0">
+            <a:spAutoFit/>
+          </a:bodyPr>
+          <a:lstStyle/>
+          <a:p>
+            <a:pPr>
+              <a:spcBef>
+                <a:spcPts val="0"/>
+              </a:spcBef>
+              <a:spcAft>
+                <a:spcPts val="600"/>
+              </a:spcAft>
+            </a:pPr>
+            <a:r>
+              <a:rPr sz="850" b="0" i="0">
                 <a:solidFill>
                   <a:srgbClr val="17549E"/>
                 </a:solidFill>
                 <a:latin typeface="Consolas"/>
               </a:rPr>
-              <a:t>WHAT THE ESS PANEL CAN AND CANNOT TEST</a:t>
+              <a:t>WHICH ESS WELLBEING ITEM, AND WHY</a:t>
             </a:r>
           </a:p>
           <a:p>
             <a:pPr>
               <a:lnSpc>
-                <a:spcPct val="130000"/>
+                <a:spcPct val="128000"/>
               </a:lnSpc>
               <a:spcBef>
                 <a:spcPts val="0"/>
@@ -11444,13 +11466,13 @@
               </a:spcAft>
             </a:pPr>
             <a:r>
-              <a:rPr sz="1100" b="0" i="0">
+              <a:rPr sz="750" b="0" i="0">
                 <a:solidFill>
                   <a:srgbClr val="5A6068"/>
                 </a:solidFill>
                 <a:latin typeface="Calibri"/>
               </a:rPr>
-              <a:t>Seven survey rounds is too short for the per-country time-series design. Simulating a REAL correlation and asking how often the test finds it: at seven observations rho = 0.5 is recovered in ~3% of units and rho = 0.7 in ~23%, against ~50% and ~79% at thirteen years. So HDI x ESS returning 8% levels / 16% differences is a null test, not a finding — and the inversion (differences above levels) is itself the tell. We report the bars and flag them rather than dropping them. The ESS levels contribution comes from cross-section instead: 47% of 15 countries across regions, which is well-powered.</a:t>
+              <a:t>The deck runs on ESS life satisfaction throughout, because the WHR Cantril ladder is a life evaluation and that is the like-for-like analogue. The ESS happiness item was run as a check and agrees (trust +0.59 identical; health +0.26 against +0.40; education null in both), so nothing turns on the choice — with one exception worth knowing: the HDI's differences result against happiness reads +0.31 raw but +0.17 net of survey-round effects, where the life satisfaction result is +0.20 either way. Numbers in processed/differences_robustness.csv.</a:t>
             </a:r>
           </a:p>
         </p:txBody>
@@ -11463,7 +11485,7 @@
         </p:nvSpPr>
         <p:spPr>
           <a:xfrm>
-            <a:off x="566928" y="4069080"/>
+            <a:off x="566928" y="3413760"/>
             <a:ext cx="3472586" cy="25400"/>
           </a:xfrm>
           <a:prstGeom prst="rect">
@@ -11507,42 +11529,42 @@
         </p:nvSpPr>
         <p:spPr>
           <a:xfrm>
-            <a:off x="566928" y="4251960"/>
-            <a:ext cx="3472586" cy="1828800"/>
-          </a:xfrm>
-          <a:prstGeom prst="rect">
-            <a:avLst/>
-          </a:prstGeom>
-          <a:noFill/>
-        </p:spPr>
-        <p:txBody>
-          <a:bodyPr wrap="square" lIns="0" rIns="0" tIns="0" bIns="0">
-            <a:spAutoFit/>
-          </a:bodyPr>
-          <a:lstStyle/>
-          <a:p>
-            <a:pPr>
-              <a:spcBef>
-                <a:spcPts val="0"/>
-              </a:spcBef>
-              <a:spcAft>
-                <a:spcPts val="700"/>
-              </a:spcAft>
-            </a:pPr>
-            <a:r>
-              <a:rPr sz="1050" b="0" i="0">
+            <a:off x="566928" y="3560064"/>
+            <a:ext cx="3472586" cy="1328928"/>
+          </a:xfrm>
+          <a:prstGeom prst="rect">
+            <a:avLst/>
+          </a:prstGeom>
+          <a:noFill/>
+        </p:spPr>
+        <p:txBody>
+          <a:bodyPr wrap="square" lIns="0" rIns="0" tIns="0" bIns="0">
+            <a:spAutoFit/>
+          </a:bodyPr>
+          <a:lstStyle/>
+          <a:p>
+            <a:pPr>
+              <a:spcBef>
+                <a:spcPts val="0"/>
+              </a:spcBef>
+              <a:spcAft>
+                <a:spcPts val="600"/>
+              </a:spcAft>
+            </a:pPr>
+            <a:r>
+              <a:rPr sz="950" b="0" i="0">
                 <a:solidFill>
                   <a:srgbClr val="17549E"/>
                 </a:solidFill>
                 <a:latin typeface="Consolas"/>
               </a:rPr>
-              <a:t>SCOPE OF THE TRUST FINDING</a:t>
+              <a:t>ROBUSTNESS OF THE DIFFERENCES RESULT</a:t>
             </a:r>
           </a:p>
           <a:p>
             <a:pPr>
               <a:lnSpc>
-                <a:spcPct val="130000"/>
+                <a:spcPct val="128000"/>
               </a:lnSpc>
               <a:spcBef>
                 <a:spcPts val="0"/>
@@ -11552,13 +11574,13 @@
               </a:spcAft>
             </a:pPr>
             <a:r>
-              <a:rPr sz="1100" b="0" i="0">
+              <a:rPr sz="850" b="0" i="0">
                 <a:solidFill>
                   <a:srgbClr val="5A6068"/>
                 </a:solidFill>
                 <a:latin typeface="Calibri"/>
               </a:rPr>
-              <a:t>Trust rests on the ESS: 36 European countries, one item, self-reported. 97% of countries significant at levels; +0.59 within-country in first differences, and +0.55 with predictor and outcome drawn from disjoint respondents, so it is not a common-method artefact. What is still missing is corroboration against an independent wellbeing instrument: against the WHR ladder it is +0.06 n.s. in differences, plausibly attenuation from pairing two samples with different fieldwork timing, but unproven either way. Health has that corroboration and trust does not — worth stating plainly rather than leaning on trust as hard as on health.</a:t>
+              <a:t>Two checks beyond the item choice. Removing survey-round effects leaves health and trust intact (+0.42, +0.58) rather than reducing them, so they are idiosyncratic country movement and not shocks common to a round. And the split-half design — predictor and outcome from disjoint respondents — rules out common-method variance, with trust retaining 93%. What remains untested is replication of the trust result on an independent wellbeing instrument.</a:t>
             </a:r>
           </a:p>
         </p:txBody>
@@ -11571,7 +11593,7 @@
         </p:nvSpPr>
         <p:spPr>
           <a:xfrm>
-            <a:off x="4359554" y="4069080"/>
+            <a:off x="4359554" y="3413760"/>
             <a:ext cx="3472586" cy="25400"/>
           </a:xfrm>
           <a:prstGeom prst="rect">
@@ -11615,42 +11637,42 @@
         </p:nvSpPr>
         <p:spPr>
           <a:xfrm>
-            <a:off x="4359554" y="4251960"/>
-            <a:ext cx="3472586" cy="1828800"/>
-          </a:xfrm>
-          <a:prstGeom prst="rect">
-            <a:avLst/>
-          </a:prstGeom>
-          <a:noFill/>
-        </p:spPr>
-        <p:txBody>
-          <a:bodyPr wrap="square" lIns="0" rIns="0" tIns="0" bIns="0">
-            <a:spAutoFit/>
-          </a:bodyPr>
-          <a:lstStyle/>
-          <a:p>
-            <a:pPr>
-              <a:spcBef>
-                <a:spcPts val="0"/>
-              </a:spcBef>
-              <a:spcAft>
-                <a:spcPts val="700"/>
-              </a:spcAft>
-            </a:pPr>
-            <a:r>
-              <a:rPr sz="1050" b="0" i="0">
+            <a:off x="4359554" y="3560064"/>
+            <a:ext cx="3472586" cy="1328928"/>
+          </a:xfrm>
+          <a:prstGeom prst="rect">
+            <a:avLst/>
+          </a:prstGeom>
+          <a:noFill/>
+        </p:spPr>
+        <p:txBody>
+          <a:bodyPr wrap="square" lIns="0" rIns="0" tIns="0" bIns="0">
+            <a:spAutoFit/>
+          </a:bodyPr>
+          <a:lstStyle/>
+          <a:p>
+            <a:pPr>
+              <a:spcBef>
+                <a:spcPts val="0"/>
+              </a:spcBef>
+              <a:spcAft>
+                <a:spcPts val="600"/>
+              </a:spcAft>
+            </a:pPr>
+            <a:r>
+              <a:rPr sz="850" b="0" i="0">
                 <a:solidFill>
                   <a:srgbClr val="17549E"/>
                 </a:solidFill>
                 <a:latin typeface="Consolas"/>
               </a:rPr>
-              <a:t>INSTITUTIONAL CONFIDENCE IS NOT INTERPERSONAL TRUST</a:t>
+              <a:t>WHAT THE ESS PANEL CAN AND CANNOT TEST</a:t>
             </a:r>
           </a:p>
           <a:p>
             <a:pPr>
               <a:lnSpc>
-                <a:spcPct val="130000"/>
+                <a:spcPct val="128000"/>
               </a:lnSpc>
               <a:spcBef>
                 <a:spcPts val="0"/>
@@ -11660,13 +11682,13 @@
               </a:spcAft>
             </a:pPr>
             <a:r>
-              <a:rPr sz="1100" b="0" i="0">
+              <a:rPr sz="750" b="0" i="0">
                 <a:solidFill>
                   <a:srgbClr val="5A6068"/>
                 </a:solidFill>
                 <a:latin typeface="Calibri"/>
               </a:rPr>
-              <a:t>SDG16's trust-adjacent series measure satisfaction with public services, perceived bribery and perceived inclusiveness in decision-making. These are conceptually distinct from 'most people can be trusted', and they do not survive an income control while interpersonal trust does. The commentary must be explicit that SDG16 is not a direct analogue, wherever the 1.5% figure appears.</a:t>
+              <a:t>Seven survey rounds is too short for the per-country time-series design. Simulating a REAL correlation and asking how often the test finds it: at seven observations rho = 0.5 is recovered in ~3% of units and rho = 0.7 in ~23%, against ~50% and ~79% at thirteen years. So HDI x ESS returning 8% levels / 16% differences is a null test, not a finding — and the inversion (differences above levels) is itself the tell. We report the bars and flag them rather than dropping them. The ESS levels contribution comes from cross-section instead: 47% of 15 countries across regions, which is well-powered.</a:t>
             </a:r>
           </a:p>
         </p:txBody>
@@ -11679,7 +11701,7 @@
         </p:nvSpPr>
         <p:spPr>
           <a:xfrm>
-            <a:off x="8152180" y="4069080"/>
+            <a:off x="8152180" y="3413760"/>
             <a:ext cx="3472586" cy="25400"/>
           </a:xfrm>
           <a:prstGeom prst="rect">
@@ -11723,42 +11745,42 @@
         </p:nvSpPr>
         <p:spPr>
           <a:xfrm>
-            <a:off x="8152180" y="4251960"/>
-            <a:ext cx="3472586" cy="1828800"/>
-          </a:xfrm>
-          <a:prstGeom prst="rect">
-            <a:avLst/>
-          </a:prstGeom>
-          <a:noFill/>
-        </p:spPr>
-        <p:txBody>
-          <a:bodyPr wrap="square" lIns="0" rIns="0" tIns="0" bIns="0">
-            <a:spAutoFit/>
-          </a:bodyPr>
-          <a:lstStyle/>
-          <a:p>
-            <a:pPr>
-              <a:spcBef>
-                <a:spcPts val="0"/>
-              </a:spcBef>
-              <a:spcAft>
-                <a:spcPts val="700"/>
-              </a:spcAft>
-            </a:pPr>
-            <a:r>
-              <a:rPr sz="1050" b="0" i="0">
+            <a:off x="8152180" y="3560064"/>
+            <a:ext cx="3472586" cy="1328928"/>
+          </a:xfrm>
+          <a:prstGeom prst="rect">
+            <a:avLst/>
+          </a:prstGeom>
+          <a:noFill/>
+        </p:spPr>
+        <p:txBody>
+          <a:bodyPr wrap="square" lIns="0" rIns="0" tIns="0" bIns="0">
+            <a:spAutoFit/>
+          </a:bodyPr>
+          <a:lstStyle/>
+          <a:p>
+            <a:pPr>
+              <a:spcBef>
+                <a:spcPts val="0"/>
+              </a:spcBef>
+              <a:spcAft>
+                <a:spcPts val="600"/>
+              </a:spcAft>
+            </a:pPr>
+            <a:r>
+              <a:rPr sz="850" b="0" i="0">
                 <a:solidFill>
                   <a:srgbClr val="17549E"/>
                 </a:solidFill>
                 <a:latin typeface="Consolas"/>
               </a:rPr>
-              <a:t>THREE FAILURE MODES AS THE META-FINDING</a:t>
+              <a:t>SCOPE OF THE TRUST FINDING</a:t>
             </a:r>
           </a:p>
           <a:p>
             <a:pPr>
               <a:lnSpc>
-                <a:spcPct val="130000"/>
+                <a:spcPct val="128000"/>
               </a:lnSpc>
               <a:spcBef>
                 <a:spcPts val="0"/>
@@ -11768,13 +11790,13 @@
               </a:spcAft>
             </a:pPr>
             <a:r>
-              <a:rPr sz="1100" b="0" i="0">
+              <a:rPr sz="750" b="0" i="0">
                 <a:solidFill>
                   <a:srgbClr val="5A6068"/>
                 </a:solidFill>
                 <a:latin typeface="Calibri"/>
               </a:rPr>
-              <a:t>The paper's contribution is arguably not the three domains but the three distinct ways a framework loses one: pooled construct, saturated variable, absent coverage. They need different remedies, which is what makes Act IV specific rather than rhetorical.</a:t>
+              <a:t>Trust rests on the ESS: 36 European countries, one item, self-reported. 97% of countries significant at levels; +0.59 within-country in first differences, and +0.55 with predictor and outcome drawn from disjoint respondents, so it is not a common-method artefact. What is still missing is corroboration against an independent wellbeing instrument: against the WHR ladder it is +0.06 n.s. in differences, plausibly attenuation from pairing two samples with different fieldwork timing, but unproven either way. Health has that corroboration and trust does not — worth stating plainly rather than leaning on trust as hard as on health.</a:t>
             </a:r>
           </a:p>
         </p:txBody>
@@ -11787,7 +11809,7 @@
         </p:nvSpPr>
         <p:spPr>
           <a:xfrm>
-            <a:off x="566928" y="6309360"/>
+            <a:off x="566928" y="4998720"/>
             <a:ext cx="3472586" cy="25400"/>
           </a:xfrm>
           <a:prstGeom prst="rect">
@@ -11831,42 +11853,258 @@
         </p:nvSpPr>
         <p:spPr>
           <a:xfrm>
-            <a:off x="566928" y="6492240"/>
-            <a:ext cx="3472586" cy="1828800"/>
-          </a:xfrm>
-          <a:prstGeom prst="rect">
-            <a:avLst/>
-          </a:prstGeom>
-          <a:noFill/>
-        </p:spPr>
-        <p:txBody>
-          <a:bodyPr wrap="square" lIns="0" rIns="0" tIns="0" bIns="0">
-            <a:spAutoFit/>
-          </a:bodyPr>
-          <a:lstStyle/>
-          <a:p>
-            <a:pPr>
-              <a:spcBef>
-                <a:spcPts val="0"/>
-              </a:spcBef>
-              <a:spcAft>
-                <a:spcPts val="700"/>
-              </a:spcAft>
-            </a:pPr>
-            <a:r>
-              <a:rPr sz="1050" b="0" i="0">
+            <a:off x="566928" y="5145024"/>
+            <a:ext cx="3472586" cy="1328928"/>
+          </a:xfrm>
+          <a:prstGeom prst="rect">
+            <a:avLst/>
+          </a:prstGeom>
+          <a:noFill/>
+        </p:spPr>
+        <p:txBody>
+          <a:bodyPr wrap="square" lIns="0" rIns="0" tIns="0" bIns="0">
+            <a:spAutoFit/>
+          </a:bodyPr>
+          <a:lstStyle/>
+          <a:p>
+            <a:pPr>
+              <a:spcBef>
+                <a:spcPts val="0"/>
+              </a:spcBef>
+              <a:spcAft>
+                <a:spcPts val="600"/>
+              </a:spcAft>
+            </a:pPr>
+            <a:r>
+              <a:rPr sz="950" b="0" i="0">
                 <a:solidFill>
                   <a:srgbClr val="17549E"/>
                 </a:solidFill>
                 <a:latin typeface="Consolas"/>
               </a:rPr>
+              <a:t>INSTITUTIONAL CONFIDENCE IS NOT INTERPERSONAL TRUST</a:t>
+            </a:r>
+          </a:p>
+          <a:p>
+            <a:pPr>
+              <a:lnSpc>
+                <a:spcPct val="128000"/>
+              </a:lnSpc>
+              <a:spcBef>
+                <a:spcPts val="0"/>
+              </a:spcBef>
+              <a:spcAft>
+                <a:spcPts val="0"/>
+              </a:spcAft>
+            </a:pPr>
+            <a:r>
+              <a:rPr sz="950" b="0" i="0">
+                <a:solidFill>
+                  <a:srgbClr val="5A6068"/>
+                </a:solidFill>
+                <a:latin typeface="Calibri"/>
+              </a:rPr>
+              <a:t>SDG16's trust-adjacent series measure satisfaction with public services, perceived bribery and perceived inclusiveness in decision-making. These are conceptually distinct from 'most people can be trusted', and they do not survive an income control while interpersonal trust does. The commentary must be explicit that SDG16 is not a direct analogue, wherever the 1.5% figure appears.</a:t>
+            </a:r>
+          </a:p>
+        </p:txBody>
+      </p:sp>
+      <p:sp>
+        <p:nvSpPr>
+          <p:cNvPr id="17" name="Rectangle 16"/>
+          <p:cNvSpPr/>
+          <p:nvPr/>
+        </p:nvSpPr>
+        <p:spPr>
+          <a:xfrm>
+            <a:off x="4359554" y="4998720"/>
+            <a:ext cx="3472586" cy="25400"/>
+          </a:xfrm>
+          <a:prstGeom prst="rect">
+            <a:avLst/>
+          </a:prstGeom>
+          <a:solidFill>
+            <a:srgbClr val="17549E"/>
+          </a:solidFill>
+          <a:ln>
+            <a:noFill/>
+          </a:ln>
+          <a:effectLst/>
+        </p:spPr>
+        <p:style>
+          <a:lnRef idx="1">
+            <a:schemeClr val="accent1"/>
+          </a:lnRef>
+          <a:fillRef idx="3">
+            <a:schemeClr val="accent1"/>
+          </a:fillRef>
+          <a:effectRef idx="2">
+            <a:schemeClr val="accent1"/>
+          </a:effectRef>
+          <a:fontRef idx="minor">
+            <a:schemeClr val="lt1"/>
+          </a:fontRef>
+        </p:style>
+        <p:txBody>
+          <a:bodyPr rtlCol="0" anchor="ctr"/>
+          <a:lstStyle/>
+          <a:p>
+            <a:pPr algn="ctr"/>
+          </a:p>
+        </p:txBody>
+      </p:sp>
+      <p:sp>
+        <p:nvSpPr>
+          <p:cNvPr id="18" name="TextBox 17"/>
+          <p:cNvSpPr txBox="1"/>
+          <p:nvPr/>
+        </p:nvSpPr>
+        <p:spPr>
+          <a:xfrm>
+            <a:off x="4359554" y="5145024"/>
+            <a:ext cx="3472586" cy="1328928"/>
+          </a:xfrm>
+          <a:prstGeom prst="rect">
+            <a:avLst/>
+          </a:prstGeom>
+          <a:noFill/>
+        </p:spPr>
+        <p:txBody>
+          <a:bodyPr wrap="square" lIns="0" rIns="0" tIns="0" bIns="0">
+            <a:spAutoFit/>
+          </a:bodyPr>
+          <a:lstStyle/>
+          <a:p>
+            <a:pPr>
+              <a:spcBef>
+                <a:spcPts val="0"/>
+              </a:spcBef>
+              <a:spcAft>
+                <a:spcPts val="600"/>
+              </a:spcAft>
+            </a:pPr>
+            <a:r>
+              <a:rPr sz="950" b="0" i="0">
+                <a:solidFill>
+                  <a:srgbClr val="17549E"/>
+                </a:solidFill>
+                <a:latin typeface="Consolas"/>
+              </a:rPr>
+              <a:t>THREE FAILURE MODES AS THE META-FINDING</a:t>
+            </a:r>
+          </a:p>
+          <a:p>
+            <a:pPr>
+              <a:lnSpc>
+                <a:spcPct val="128000"/>
+              </a:lnSpc>
+              <a:spcBef>
+                <a:spcPts val="0"/>
+              </a:spcBef>
+              <a:spcAft>
+                <a:spcPts val="0"/>
+              </a:spcAft>
+            </a:pPr>
+            <a:r>
+              <a:rPr sz="950" b="0" i="0">
+                <a:solidFill>
+                  <a:srgbClr val="5A6068"/>
+                </a:solidFill>
+                <a:latin typeface="Calibri"/>
+              </a:rPr>
+              <a:t>The paper's contribution is arguably not the three domains but the three distinct ways a framework loses one: pooled construct, saturated variable, absent coverage. They need different remedies, which is what makes Act IV specific rather than rhetorical.</a:t>
+            </a:r>
+          </a:p>
+        </p:txBody>
+      </p:sp>
+      <p:sp>
+        <p:nvSpPr>
+          <p:cNvPr id="19" name="Rectangle 18"/>
+          <p:cNvSpPr/>
+          <p:nvPr/>
+        </p:nvSpPr>
+        <p:spPr>
+          <a:xfrm>
+            <a:off x="8152180" y="4998720"/>
+            <a:ext cx="3472586" cy="25400"/>
+          </a:xfrm>
+          <a:prstGeom prst="rect">
+            <a:avLst/>
+          </a:prstGeom>
+          <a:solidFill>
+            <a:srgbClr val="17549E"/>
+          </a:solidFill>
+          <a:ln>
+            <a:noFill/>
+          </a:ln>
+          <a:effectLst/>
+        </p:spPr>
+        <p:style>
+          <a:lnRef idx="1">
+            <a:schemeClr val="accent1"/>
+          </a:lnRef>
+          <a:fillRef idx="3">
+            <a:schemeClr val="accent1"/>
+          </a:fillRef>
+          <a:effectRef idx="2">
+            <a:schemeClr val="accent1"/>
+          </a:effectRef>
+          <a:fontRef idx="minor">
+            <a:schemeClr val="lt1"/>
+          </a:fontRef>
+        </p:style>
+        <p:txBody>
+          <a:bodyPr rtlCol="0" anchor="ctr"/>
+          <a:lstStyle/>
+          <a:p>
+            <a:pPr algn="ctr"/>
+          </a:p>
+        </p:txBody>
+      </p:sp>
+      <p:sp>
+        <p:nvSpPr>
+          <p:cNvPr id="20" name="TextBox 19"/>
+          <p:cNvSpPr txBox="1"/>
+          <p:nvPr/>
+        </p:nvSpPr>
+        <p:spPr>
+          <a:xfrm>
+            <a:off x="8152180" y="5145024"/>
+            <a:ext cx="3472586" cy="1328928"/>
+          </a:xfrm>
+          <a:prstGeom prst="rect">
+            <a:avLst/>
+          </a:prstGeom>
+          <a:noFill/>
+        </p:spPr>
+        <p:txBody>
+          <a:bodyPr wrap="square" lIns="0" rIns="0" tIns="0" bIns="0">
+            <a:spAutoFit/>
+          </a:bodyPr>
+          <a:lstStyle/>
+          <a:p>
+            <a:pPr>
+              <a:spcBef>
+                <a:spcPts val="0"/>
+              </a:spcBef>
+              <a:spcAft>
+                <a:spcPts val="600"/>
+              </a:spcAft>
+            </a:pPr>
+            <a:r>
+              <a:rPr sz="950" b="0" i="0">
+                <a:solidFill>
+                  <a:srgbClr val="17549E"/>
+                </a:solidFill>
+                <a:latin typeface="Consolas"/>
+              </a:rPr>
               <a:t>WHAT WE ARE NOT CLAIMING</a:t>
             </a:r>
           </a:p>
           <a:p>
             <a:pPr>
               <a:lnSpc>
-                <a:spcPct val="130000"/>
+                <a:spcPct val="128000"/>
               </a:lnSpc>
               <a:spcBef>
                 <a:spcPts val="0"/>
@@ -11876,7 +12114,7 @@
               </a:spcAft>
             </a:pPr>
             <a:r>
-              <a:rPr sz="1100" b="0" i="0">
+              <a:rPr sz="950" b="0" i="0">
                 <a:solidFill>
                   <a:srgbClr val="5A6068"/>
                 </a:solidFill>
@@ -13422,7 +13660,7 @@
               </a:spcAft>
             </a:pPr>
             <a:r>
-              <a:rPr sz="875" b="0" i="0">
+              <a:rPr sz="850" b="0" i="0">
                 <a:solidFill>
                   <a:srgbClr val="5A6068"/>
                 </a:solidFill>
@@ -13444,7 +13682,7 @@
               </a:spcAft>
             </a:pPr>
             <a:r>
-              <a:rPr sz="875" b="0" i="0">
+              <a:rPr sz="850" b="0" i="0">
                 <a:solidFill>
                   <a:srgbClr val="5A6068"/>
                 </a:solidFill>
@@ -13466,13 +13704,13 @@
               </a:spcAft>
             </a:pPr>
             <a:r>
-              <a:rPr sz="875" b="0" i="0">
+              <a:rPr sz="850" b="0" i="0">
                 <a:solidFill>
                   <a:srgbClr val="5A6068"/>
                 </a:solidFill>
                 <a:latin typeface="Calibri"/>
               </a:rPr>
-              <a:t>Pooled across countries, where the power is, it does replicate: the HDI's within-country association with ESS life satisfaction falls from r = +0.44 at levels to +0.20 in first differences. The attenuation is sharp, though it stops short of the clean null the Cantril ladder gives on the full panel — there, across 1,548 country-year changes, the HDI goes from +0.15 to −0.02 and is not significant at all.</a:t>
+              <a:t>The comparison is like-for-like on the outcome: the Cantril ladder is a life evaluation, so the ESS analogue is its life-satisfaction item rather than its separate happiness question. Pooled across countries, where the power is, the HDI's within-country association falls from r = +0.44 at levels to +0.20 in differences — and stays there (+0.19) once survey-round effects are removed, so it is not a shared shock across European countries.</a:t>
             </a:r>
           </a:p>
           <a:p>
@@ -13488,7 +13726,29 @@
               </a:spcAft>
             </a:pPr>
             <a:r>
-              <a:rPr sz="875" b="0" i="0">
+              <a:rPr sz="850" b="0" i="0">
+                <a:solidFill>
+                  <a:srgbClr val="5A6068"/>
+                </a:solidFill>
+                <a:latin typeface="Calibri"/>
+              </a:rPr>
+              <a:t>So the HDI attenuates by about 55% against ESS life satisfaction — substantial, but short of the clean null the Cantril ladder gives on the full panel, where across 1,548 country-year changes the HDI goes from +0.15 to −0.02 and is not significant at all. The collapse survives the instrument swap in direction and roughly in magnitude, on a much smaller and Europe-only panel.</a:t>
+            </a:r>
+          </a:p>
+          <a:p>
+            <a:pPr>
+              <a:lnSpc>
+                <a:spcPct val="132000"/>
+              </a:lnSpc>
+              <a:spcBef>
+                <a:spcPts val="0"/>
+              </a:spcBef>
+              <a:spcAft>
+                <a:spcPts val="1100"/>
+              </a:spcAft>
+            </a:pPr>
+            <a:r>
+              <a:rPr sz="850" b="0" i="0">
                 <a:solidFill>
                   <a:srgbClr val="5A6068"/>
                 </a:solidFill>

--- a/deck/Measured_Where_It_Varies.pptx
+++ b/deck/Measured_Where_It_Varies.pptx
@@ -3435,7 +3435,7 @@
                 </a:solidFill>
                 <a:latin typeface="Consolas"/>
               </a:rPr>
-              <a:t>INSIDE THE SDGS</a:t>
+              <a:t>EDUCATION, ACROSS FRAMEWORKS</a:t>
             </a:r>
           </a:p>
         </p:txBody>
@@ -3480,7 +3480,7 @@
                 </a:solidFill>
                 <a:latin typeface="Georgia"/>
               </a:rPr>
-              <a:t>Health ranks 4th of 17 goals; education ranks 12th</a:t>
+              <a:t>Strong wherever you measure attainment; the SDGs' 3.3% is the outlier that needs explaining</a:t>
             </a:r>
           </a:p>
         </p:txBody>
@@ -3519,13 +3519,13 @@
               </a:spcAft>
             </a:pPr>
             <a:r>
-              <a:rPr sz="1050" b="0" i="0">
+              <a:rPr sz="1150" b="0" i="0">
                 <a:solidFill>
                   <a:srgbClr val="5A6068"/>
                 </a:solidFill>
                 <a:latin typeface="Calibri"/>
               </a:rPr>
-              <a:t>The same question of the SDG side. Pooled within each goal, health (Goal 3) reaches 11.5% of country-indicator pairs — fourth of seventeen, and first among the goals with substantive coverage. Health also dominates the individual-series ranking: 16 of the 25 most predictive series in the whole database fall under Goal 3, and they are survival measures — infant and under-five mortality, stunting, neonatal mortality, sanitation, drinking water.</a:t>
+              <a:t>Inside the HDI, education is not one component but two, and both lead the index at levels: mean years of schooling 41%, expected years of schooling 33% — both ahead of the composite itself (42% is close, but that's the whole index against two of its five parts). On people, in the ESS, years of schooling is significant in 89% of countries.</a:t>
             </a:r>
           </a:p>
           <a:p>
@@ -3541,35 +3541,13 @@
               </a:spcAft>
             </a:pPr>
             <a:r>
-              <a:rPr sz="1050" b="0" i="0">
+              <a:rPr sz="1150" b="0" i="0">
                 <a:solidFill>
                   <a:srgbClr val="5A6068"/>
                 </a:solidFill>
                 <a:latin typeface="Calibri"/>
               </a:rPr>
-              <a:t>Education comes twelfth, at 3.3%. Taken at face value that says education barely matters for wellbeing — which contradicts the HDI, where schooling is the strongest component there is. Both cannot be right, and the next slide is why.</a:t>
-            </a:r>
-          </a:p>
-          <a:p>
-            <a:pPr>
-              <a:lnSpc>
-                <a:spcPct val="132000"/>
-              </a:lnSpc>
-              <a:spcBef>
-                <a:spcPts val="0"/>
-              </a:spcBef>
-              <a:spcAft>
-                <a:spcPts val="1100"/>
-              </a:spcAft>
-            </a:pPr>
-            <a:r>
-              <a:rPr sz="1050" b="0" i="0">
-                <a:solidFill>
-                  <a:srgbClr val="5A6068"/>
-                </a:solidFill>
-                <a:latin typeface="Calibri"/>
-              </a:rPr>
-              <a:t>One caveat worth stating here rather than later: Goal 16 is where anything trust-shaped would live, and it comes fifteenth at 1.5%. But its thirteen trust-adjacent series measure satisfaction with public services, perceived bribery, and perceived inclusiveness in decision-making. That is confidence in institutions, not trust in other people. It is a different construct, and the low rank should not be read as evidence about interpersonal trust.</a:t>
+              <a:t>Against that, SDG4 pooled across all 35 of its series returns 3.3% — twelfth of seventeen goals, which taken at face value says education barely matters. Three measurements agree and the fourth contradicts them, which is a sign to look inside the fourth rather than to average it in as if it settled anything.</a:t>
             </a:r>
           </a:p>
         </p:txBody>
@@ -3618,7 +3596,7 @@
       </p:sp>
       <p:pic>
         <p:nvPicPr>
-          <p:cNvPr id="6" name="Picture 5" descr="sdg_indicator_top20.png"/>
+          <p:cNvPr id="6" name="Picture 5" descr="education_levels_comparison.png"/>
           <p:cNvPicPr>
             <a:picLocks noChangeAspect="1"/>
           </p:cNvPicPr>
@@ -3632,8 +3610,8 @@
         </p:blipFill>
         <p:spPr>
           <a:xfrm>
-            <a:off x="5279547" y="658368"/>
-            <a:ext cx="6220145" cy="5074920"/>
+            <a:off x="5120640" y="1412748"/>
+            <a:ext cx="6537960" cy="3566160"/>
           </a:xfrm>
           <a:prstGeom prst="rect">
             <a:avLst/>
@@ -3680,7 +3658,7 @@
                 </a:solidFill>
                 <a:latin typeface="Calibri"/>
               </a:rPr>
-              <a:t>The 25 most predictive individual SDG series. Sixteen are Goal 3 health indicators, nearly all of them survival measures.</a:t>
+              <a:t>Education across four measurements: ESS individual, HDI expected years of schooling, SDG4 access only, SDG4 pooled across all 35 series.</a:t>
             </a:r>
           </a:p>
         </p:txBody>
@@ -3860,7 +3838,7 @@
                 </a:solidFill>
                 <a:latin typeface="Calibri"/>
               </a:rPr>
-              <a:t>Parity ratios are 18 of the 35 series. Pooling weights every series equally, so the half of the goal that carries no wellbeing signal drags the whole goal below the part that does. Unpooled, education would rank third among the seventeen goals rather than twelfth — and it would agree with the HDI instead of contradicting it.</a:t>
+              <a:t>Parity ratios are 18 of the 35 series. Pooling weights every series equally, so the half of the goal that carries no wellbeing signal drags the whole goal below the part that does. Unpooled, education's access series would rank third among the seventeen goals rather than twelfth — and would agree with the HDI instead of contradicting it.</a:t>
             </a:r>
           </a:p>
         </p:txBody>
@@ -3985,6 +3963,297 @@
 </file>
 
 <file path=ppt/slides/slide12.xml><?xml version="1.0" encoding="utf-8"?>
+<p:sld xmlns:a="http://schemas.openxmlformats.org/drawingml/2006/main" xmlns:p="http://schemas.openxmlformats.org/presentationml/2006/main" xmlns:r="http://schemas.openxmlformats.org/officeDocument/2006/relationships">
+  <p:cSld>
+    <p:bg>
+      <p:bgPr>
+        <a:solidFill>
+          <a:srgbClr val="FCFCFB"/>
+        </a:solidFill>
+        <a:effectLst/>
+      </p:bgPr>
+    </p:bg>
+    <p:spTree>
+      <p:nvGrpSpPr>
+        <p:cNvPr id="1" name=""/>
+        <p:cNvGrpSpPr/>
+        <p:nvPr/>
+      </p:nvGrpSpPr>
+      <p:grpSpPr/>
+      <p:sp>
+        <p:nvSpPr>
+          <p:cNvPr id="2" name="TextBox 1"/>
+          <p:cNvSpPr txBox="1"/>
+          <p:nvPr/>
+        </p:nvSpPr>
+        <p:spPr>
+          <a:xfrm>
+            <a:off x="566928" y="502920"/>
+            <a:ext cx="4160520" cy="274320"/>
+          </a:xfrm>
+          <a:prstGeom prst="rect">
+            <a:avLst/>
+          </a:prstGeom>
+          <a:noFill/>
+        </p:spPr>
+        <p:txBody>
+          <a:bodyPr wrap="square" lIns="0" rIns="0" tIns="0" bIns="0">
+            <a:spAutoFit/>
+          </a:bodyPr>
+          <a:lstStyle/>
+          <a:p>
+            <a:pPr>
+              <a:spcBef>
+                <a:spcPts val="0"/>
+              </a:spcBef>
+              <a:spcAft>
+                <a:spcPts val="0"/>
+              </a:spcAft>
+            </a:pPr>
+            <a:r>
+              <a:rPr sz="1000" b="0" i="0">
+                <a:solidFill>
+                  <a:srgbClr val="A63A30"/>
+                </a:solidFill>
+                <a:latin typeface="Consolas"/>
+              </a:rPr>
+              <a:t>HEALTH, ACROSS FRAMEWORKS</a:t>
+            </a:r>
+          </a:p>
+        </p:txBody>
+      </p:sp>
+      <p:sp>
+        <p:nvSpPr>
+          <p:cNvPr id="3" name="TextBox 2"/>
+          <p:cNvSpPr txBox="1"/>
+          <p:nvPr/>
+        </p:nvSpPr>
+        <p:spPr>
+          <a:xfrm>
+            <a:off x="566928" y="914400"/>
+            <a:ext cx="4160520" cy="1371600"/>
+          </a:xfrm>
+          <a:prstGeom prst="rect">
+            <a:avLst/>
+          </a:prstGeom>
+          <a:noFill/>
+        </p:spPr>
+        <p:txBody>
+          <a:bodyPr wrap="square" lIns="0" rIns="0" tIns="0" bIns="0">
+            <a:spAutoFit/>
+          </a:bodyPr>
+          <a:lstStyle/>
+          <a:p>
+            <a:pPr>
+              <a:lnSpc>
+                <a:spcPct val="108000"/>
+              </a:lnSpc>
+              <a:spcBef>
+                <a:spcPts val="0"/>
+              </a:spcBef>
+              <a:spcAft>
+                <a:spcPts val="0"/>
+              </a:spcAft>
+            </a:pPr>
+            <a:r>
+              <a:rPr sz="2300" b="0" i="0">
+                <a:solidFill>
+                  <a:srgbClr val="14171C"/>
+                </a:solidFill>
+                <a:latin typeface="Georgia"/>
+              </a:rPr>
+              <a:t>The strongest domain on people; the weakest component of the HDI; still ranks 4th of 17 SDG goals</a:t>
+            </a:r>
+          </a:p>
+        </p:txBody>
+      </p:sp>
+      <p:sp>
+        <p:nvSpPr>
+          <p:cNvPr id="4" name="TextBox 3"/>
+          <p:cNvSpPr txBox="1"/>
+          <p:nvPr/>
+        </p:nvSpPr>
+        <p:spPr>
+          <a:xfrm>
+            <a:off x="566928" y="2331720"/>
+            <a:ext cx="4160520" cy="3840480"/>
+          </a:xfrm>
+          <a:prstGeom prst="rect">
+            <a:avLst/>
+          </a:prstGeom>
+          <a:noFill/>
+        </p:spPr>
+        <p:txBody>
+          <a:bodyPr wrap="square" lIns="0" rIns="0" tIns="0" bIns="0">
+            <a:spAutoFit/>
+          </a:bodyPr>
+          <a:lstStyle/>
+          <a:p>
+            <a:pPr>
+              <a:lnSpc>
+                <a:spcPct val="132000"/>
+              </a:lnSpc>
+              <a:spcBef>
+                <a:spcPts val="0"/>
+              </a:spcBef>
+              <a:spcAft>
+                <a:spcPts val="1100"/>
+              </a:spcAft>
+            </a:pPr>
+            <a:r>
+              <a:rPr sz="1150" b="0" i="0">
+                <a:solidFill>
+                  <a:srgbClr val="5A6068"/>
+                </a:solidFill>
+                <a:latin typeface="Calibri"/>
+              </a:rPr>
+              <a:t>Self-rated health is the single strongest predictor of life satisfaction in the ESS: every country significant, median individual R² 0.092 — roughly fifteen times education's. In the SDGs, health (Goal 3) reaches 11.5% of country-indicator pairs, fourth of seventeen goals and first among the goals with substantive coverage; it also dominates the database's individual-series ranking, with 16 of the top 25 most predictive series falling under Goal 3 — survival measures, infant and under-five mortality, stunting, sanitation, drinking water.</a:t>
+            </a:r>
+          </a:p>
+          <a:p>
+            <a:pPr>
+              <a:lnSpc>
+                <a:spcPct val="132000"/>
+              </a:lnSpc>
+              <a:spcBef>
+                <a:spcPts val="0"/>
+              </a:spcBef>
+              <a:spcAft>
+                <a:spcPts val="1100"/>
+              </a:spcAft>
+            </a:pPr>
+            <a:r>
+              <a:rPr sz="1150" b="0" i="0">
+                <a:solidFill>
+                  <a:srgbClr val="5A6068"/>
+                </a:solidFill>
+                <a:latin typeface="Calibri"/>
+              </a:rPr>
+              <a:t>In the HDI, health's proxy is life expectancy, and it is last of five components at 19%, against 41% for mean years of schooling. The domain is not weak; the HDI's chosen proxy for it is. The top 100 countries span 81 to 85 years of life expectancy, and a variable with that little range left cannot carry much association, whatever the underlying domain does. Same domain, three variables, three very different-looking results — and it is the variable doing the work, not the domain.</a:t>
+            </a:r>
+          </a:p>
+        </p:txBody>
+      </p:sp>
+      <p:sp>
+        <p:nvSpPr>
+          <p:cNvPr id="5" name="TextBox 4"/>
+          <p:cNvSpPr txBox="1"/>
+          <p:nvPr/>
+        </p:nvSpPr>
+        <p:spPr>
+          <a:xfrm>
+            <a:off x="11338560" y="6263640"/>
+            <a:ext cx="548640" cy="274320"/>
+          </a:xfrm>
+          <a:prstGeom prst="rect">
+            <a:avLst/>
+          </a:prstGeom>
+          <a:noFill/>
+        </p:spPr>
+        <p:txBody>
+          <a:bodyPr wrap="square" lIns="0" rIns="0" tIns="0" bIns="0">
+            <a:spAutoFit/>
+          </a:bodyPr>
+          <a:lstStyle/>
+          <a:p>
+            <a:pPr algn="r">
+              <a:spcBef>
+                <a:spcPts val="0"/>
+              </a:spcBef>
+              <a:spcAft>
+                <a:spcPts val="0"/>
+              </a:spcAft>
+            </a:pPr>
+            <a:r>
+              <a:rPr sz="1100" b="0" i="0">
+                <a:solidFill>
+                  <a:srgbClr val="868D96"/>
+                </a:solidFill>
+                <a:latin typeface="Consolas"/>
+              </a:rPr>
+              <a:t>II</a:t>
+            </a:r>
+          </a:p>
+        </p:txBody>
+      </p:sp>
+      <p:pic>
+        <p:nvPicPr>
+          <p:cNvPr id="6" name="Picture 5" descr="health_levels_comparison.png"/>
+          <p:cNvPicPr>
+            <a:picLocks noChangeAspect="1"/>
+          </p:cNvPicPr>
+          <p:nvPr/>
+        </p:nvPicPr>
+        <p:blipFill>
+          <a:blip r:embed="rId2"/>
+          <a:stretch>
+            <a:fillRect/>
+          </a:stretch>
+        </p:blipFill>
+        <p:spPr>
+          <a:xfrm>
+            <a:off x="5120640" y="1234440"/>
+            <a:ext cx="6537960" cy="3922776"/>
+          </a:xfrm>
+          <a:prstGeom prst="rect">
+            <a:avLst/>
+          </a:prstGeom>
+        </p:spPr>
+      </p:pic>
+      <p:sp>
+        <p:nvSpPr>
+          <p:cNvPr id="7" name="TextBox 6"/>
+          <p:cNvSpPr txBox="1"/>
+          <p:nvPr/>
+        </p:nvSpPr>
+        <p:spPr>
+          <a:xfrm>
+            <a:off x="5120640" y="5897880"/>
+            <a:ext cx="6537960" cy="731520"/>
+          </a:xfrm>
+          <a:prstGeom prst="rect">
+            <a:avLst/>
+          </a:prstGeom>
+          <a:noFill/>
+        </p:spPr>
+        <p:txBody>
+          <a:bodyPr wrap="square" lIns="0" rIns="0" tIns="0" bIns="0">
+            <a:spAutoFit/>
+          </a:bodyPr>
+          <a:lstStyle/>
+          <a:p>
+            <a:pPr>
+              <a:lnSpc>
+                <a:spcPct val="125000"/>
+              </a:lnSpc>
+              <a:spcBef>
+                <a:spcPts val="0"/>
+              </a:spcBef>
+              <a:spcAft>
+                <a:spcPts val="0"/>
+              </a:spcAft>
+            </a:pPr>
+            <a:r>
+              <a:rPr sz="900" b="0" i="0">
+                <a:solidFill>
+                  <a:srgbClr val="868D96"/>
+                </a:solidFill>
+                <a:latin typeface="Calibri"/>
+              </a:rPr>
+              <a:t>Health measured three ways. The HDI result is about life expectancy's saturation, not about health.</a:t>
+            </a:r>
+          </a:p>
+        </p:txBody>
+      </p:sp>
+    </p:spTree>
+  </p:cSld>
+  <p:clrMapOvr>
+    <a:masterClrMapping/>
+  </p:clrMapOvr>
+</p:sld>
+</file>
+
+<file path=ppt/slides/slide13.xml><?xml version="1.0" encoding="utf-8"?>
 <p:sld xmlns:a="http://schemas.openxmlformats.org/drawingml/2006/main" xmlns:p="http://schemas.openxmlformats.org/presentationml/2006/main" xmlns:r="http://schemas.openxmlformats.org/officeDocument/2006/relationships">
   <p:cSld>
     <p:bg>
@@ -4128,7 +4397,7 @@
                 </a:solidFill>
                 <a:latin typeface="Georgia"/>
               </a:rPr>
-              <a:t>Health and education are what the frameworks can see at the levels. Health registers wherever it is measured somewhere that still varies; education registers only when the construct being counted is access. That is two domains — and it is everything these frameworks are able to test.</a:t>
+              <a:t>Health and education are what the frameworks can see at the levels. Health registers wherever it is measured somewhere that still varies; education registers only when the construct being counted is access. That is two domains — and, so far, it is everything these frameworks are able to test. The next section is the domain that only appears once you measure people rather than countries.</a:t>
             </a:r>
           </a:p>
         </p:txBody>
@@ -4141,7 +4410,7 @@
 </p:sld>
 </file>
 
-<file path=ppt/slides/slide13.xml><?xml version="1.0" encoding="utf-8"?>
+<file path=ppt/slides/slide14.xml><?xml version="1.0" encoding="utf-8"?>
 <p:sld xmlns:a="http://schemas.openxmlformats.org/drawingml/2006/main" xmlns:p="http://schemas.openxmlformats.org/presentationml/2006/main" xmlns:r="http://schemas.openxmlformats.org/officeDocument/2006/relationships">
   <p:cSld>
     <p:bg>
@@ -4327,7 +4596,7 @@
                 </a:solidFill>
                 <a:latin typeface="Georgia"/>
               </a:rPr>
-              <a:t>Now measure the same domains on people</a:t>
+              <a:t>Trust: the domain only people can report, and what it is worth</a:t>
             </a:r>
           </a:p>
         </p:txBody>
@@ -4366,13 +4635,13 @@
               </a:spcAft>
             </a:pPr>
             <a:r>
-              <a:rPr sz="1400" b="0" i="1">
+              <a:rPr sz="1600" b="0" i="1">
                 <a:solidFill>
                   <a:srgbClr val="9AA4B0"/>
                 </a:solidFill>
                 <a:latin typeface="Georgia"/>
               </a:rPr>
-              <a:t>Everything so far uses a development composite as the predictor. The ESS carries the three domains asked directly of people — self-rated health, years of schooling, and whether most people can be trusted — which lets us change the predictor rather than the outcome. That surfaces a third domain neither framework collects, and it turns out to be where the differences half of the argument finally has something to say.</a:t>
+              <a:t>Neither the HDI nor the SDGs measure interpersonal trust. The ESS does, at the individual level, which is also the level at which the differences half of Act I can finally be answered — not just whether a domain survives differencing, but what a change in it is worth in life-satisfaction points.</a:t>
             </a:r>
           </a:p>
         </p:txBody>
@@ -4414,7 +4683,7 @@
                 </a:solidFill>
                 <a:latin typeface="Consolas"/>
               </a:rPr>
-              <a:t>100% / 97% / 89%</a:t>
+              <a:t>97%</a:t>
             </a:r>
           </a:p>
           <a:p>
@@ -4436,7 +4705,7 @@
                 </a:solidFill>
                 <a:latin typeface="Calibri"/>
               </a:rPr>
-              <a:t>ESS countries significant at levels: health, trust, education</a:t>
+              <a:t>ESS countries where social trust is significant at levels</a:t>
             </a:r>
           </a:p>
         </p:txBody>
@@ -4478,7 +4747,7 @@
                 </a:solidFill>
                 <a:latin typeface="Consolas"/>
               </a:rPr>
-              <a:t>+0.55 / +0.35</a:t>
+              <a:t>+0.20 pts / 59%</a:t>
             </a:r>
           </a:p>
           <a:p>
@@ -4500,7 +4769,7 @@
                 </a:solidFill>
                 <a:latin typeface="Calibri"/>
               </a:rPr>
-              <a:t>trust and health in differences with NO shared respondents</a:t>
+              <a:t>trust's differences effect, share of a typical round-to-round move</a:t>
             </a:r>
           </a:p>
         </p:txBody>
@@ -4542,7 +4811,7 @@
                 </a:solidFill>
                 <a:latin typeface="Consolas"/>
               </a:rPr>
-              <a:t>+0.03 / −0.02</a:t>
+              <a:t>93%</a:t>
             </a:r>
           </a:p>
           <a:p>
@@ -4564,320 +4833,7 @@
                 </a:solidFill>
                 <a:latin typeface="Calibri"/>
               </a:rPr>
-              <a:t>education and the HDI in differences — they do not</a:t>
-            </a:r>
-          </a:p>
-        </p:txBody>
-      </p:sp>
-    </p:spTree>
-  </p:cSld>
-  <p:clrMapOvr>
-    <a:masterClrMapping/>
-  </p:clrMapOvr>
-</p:sld>
-</file>
-
-<file path=ppt/slides/slide14.xml><?xml version="1.0" encoding="utf-8"?>
-<p:sld xmlns:a="http://schemas.openxmlformats.org/drawingml/2006/main" xmlns:p="http://schemas.openxmlformats.org/presentationml/2006/main" xmlns:r="http://schemas.openxmlformats.org/officeDocument/2006/relationships">
-  <p:cSld>
-    <p:bg>
-      <p:bgPr>
-        <a:solidFill>
-          <a:srgbClr val="FCFCFB"/>
-        </a:solidFill>
-        <a:effectLst/>
-      </p:bgPr>
-    </p:bg>
-    <p:spTree>
-      <p:nvGrpSpPr>
-        <p:cNvPr id="1" name=""/>
-        <p:cNvGrpSpPr/>
-        <p:nvPr/>
-      </p:nvGrpSpPr>
-      <p:grpSpPr/>
-      <p:sp>
-        <p:nvSpPr>
-          <p:cNvPr id="2" name="TextBox 1"/>
-          <p:cNvSpPr txBox="1"/>
-          <p:nvPr/>
-        </p:nvSpPr>
-        <p:spPr>
-          <a:xfrm>
-            <a:off x="566928" y="502920"/>
-            <a:ext cx="4160520" cy="274320"/>
-          </a:xfrm>
-          <a:prstGeom prst="rect">
-            <a:avLst/>
-          </a:prstGeom>
-          <a:noFill/>
-        </p:spPr>
-        <p:txBody>
-          <a:bodyPr wrap="square" lIns="0" rIns="0" tIns="0" bIns="0">
-            <a:spAutoFit/>
-          </a:bodyPr>
-          <a:lstStyle/>
-          <a:p>
-            <a:pPr>
-              <a:spcBef>
-                <a:spcPts val="0"/>
-              </a:spcBef>
-              <a:spcAft>
-                <a:spcPts val="0"/>
-              </a:spcAft>
-            </a:pPr>
-            <a:r>
-              <a:rPr sz="1000" b="0" i="0">
-                <a:solidFill>
-                  <a:srgbClr val="A63A30"/>
-                </a:solidFill>
-                <a:latin typeface="Consolas"/>
-              </a:rPr>
-              <a:t>THREE DOMAINS, ONE UNIT</a:t>
-            </a:r>
-          </a:p>
-        </p:txBody>
-      </p:sp>
-      <p:sp>
-        <p:nvSpPr>
-          <p:cNvPr id="3" name="TextBox 2"/>
-          <p:cNvSpPr txBox="1"/>
-          <p:nvPr/>
-        </p:nvSpPr>
-        <p:spPr>
-          <a:xfrm>
-            <a:off x="566928" y="914400"/>
-            <a:ext cx="4160520" cy="1371600"/>
-          </a:xfrm>
-          <a:prstGeom prst="rect">
-            <a:avLst/>
-          </a:prstGeom>
-          <a:noFill/>
-        </p:spPr>
-        <p:txBody>
-          <a:bodyPr wrap="square" lIns="0" rIns="0" tIns="0" bIns="0">
-            <a:spAutoFit/>
-          </a:bodyPr>
-          <a:lstStyle/>
-          <a:p>
-            <a:pPr>
-              <a:lnSpc>
-                <a:spcPct val="108000"/>
-              </a:lnSpc>
-              <a:spcBef>
-                <a:spcPts val="0"/>
-              </a:spcBef>
-              <a:spcAft>
-                <a:spcPts val="0"/>
-              </a:spcAft>
-            </a:pPr>
-            <a:r>
-              <a:rPr sz="2300" b="0" i="0">
-                <a:solidFill>
-                  <a:srgbClr val="14171C"/>
-                </a:solidFill>
-                <a:latin typeface="Georgia"/>
-              </a:rPr>
-              <a:t>Health, social trust and education all predict life satisfaction — trust is second</a:t>
-            </a:r>
-          </a:p>
-        </p:txBody>
-      </p:sp>
-      <p:sp>
-        <p:nvSpPr>
-          <p:cNvPr id="4" name="TextBox 3"/>
-          <p:cNvSpPr txBox="1"/>
-          <p:nvPr/>
-        </p:nvSpPr>
-        <p:spPr>
-          <a:xfrm>
-            <a:off x="566928" y="2331720"/>
-            <a:ext cx="4160520" cy="3840480"/>
-          </a:xfrm>
-          <a:prstGeom prst="rect">
-            <a:avLst/>
-          </a:prstGeom>
-          <a:noFill/>
-        </p:spPr>
-        <p:txBody>
-          <a:bodyPr wrap="square" lIns="0" rIns="0" tIns="0" bIns="0">
-            <a:spAutoFit/>
-          </a:bodyPr>
-          <a:lstStyle/>
-          <a:p>
-            <a:pPr>
-              <a:lnSpc>
-                <a:spcPct val="132000"/>
-              </a:lnSpc>
-              <a:spcBef>
-                <a:spcPts val="0"/>
-              </a:spcBef>
-              <a:spcAft>
-                <a:spcPts val="1100"/>
-              </a:spcAft>
-            </a:pPr>
-            <a:r>
-              <a:rPr sz="1125" b="0" i="0">
-                <a:solidFill>
-                  <a:srgbClr val="5A6068"/>
-                </a:solidFill>
-                <a:latin typeface="Calibri"/>
-              </a:rPr>
-              <a:t>Same FDR test, same unit, now on 351,023 respondents. Self-rated health is significant in 36 of 36 countries, median individual R² 0.092. Interpersonal trust in 35 of 36, median R² 0.039. Years of schooling in 32 of 36, median R² 0.006 — significant almost everywhere but explaining far less per person than either of the others.</a:t>
-            </a:r>
-          </a:p>
-          <a:p>
-            <a:pPr>
-              <a:lnSpc>
-                <a:spcPct val="132000"/>
-              </a:lnSpc>
-              <a:spcBef>
-                <a:spcPts val="0"/>
-              </a:spcBef>
-              <a:spcAft>
-                <a:spcPts val="1100"/>
-              </a:spcAft>
-            </a:pPr>
-            <a:r>
-              <a:rPr sz="1125" b="0" i="0">
-                <a:solidFill>
-                  <a:srgbClr val="5A6068"/>
-                </a:solidFill>
-                <a:latin typeface="Calibri"/>
-              </a:rPr>
-              <a:t>Set against the frameworks, health behaves consistently: strongest on people, and the highest-ranked substantive goal in the SDGs. Education behaves consistently too, once unpooled. Trust is the one that does not appear anywhere else, because there is nowhere else for it to appear — the HDI has no counterpart at all, and SDG16's 1.5% measures confidence in institutions rather than trust in people.</a:t>
-            </a:r>
-          </a:p>
-          <a:p>
-            <a:pPr>
-              <a:lnSpc>
-                <a:spcPct val="132000"/>
-              </a:lnSpc>
-              <a:spcBef>
-                <a:spcPts val="0"/>
-              </a:spcBef>
-              <a:spcAft>
-                <a:spcPts val="1100"/>
-              </a:spcAft>
-            </a:pPr>
-            <a:r>
-              <a:rPr sz="1125" b="0" i="0">
-                <a:solidFill>
-                  <a:srgbClr val="5A6068"/>
-                </a:solidFill>
-                <a:latin typeface="Calibri"/>
-              </a:rPr>
-              <a:t>The caveat is real and bounds the claim: the ESS is 36 European countries, self-reported, one trust item. This is not a global result. It is enough to say that a domain the frameworks never collect outranks one they both do.</a:t>
-            </a:r>
-          </a:p>
-        </p:txBody>
-      </p:sp>
-      <p:sp>
-        <p:nvSpPr>
-          <p:cNvPr id="5" name="TextBox 4"/>
-          <p:cNvSpPr txBox="1"/>
-          <p:nvPr/>
-        </p:nvSpPr>
-        <p:spPr>
-          <a:xfrm>
-            <a:off x="11338560" y="6263640"/>
-            <a:ext cx="548640" cy="274320"/>
-          </a:xfrm>
-          <a:prstGeom prst="rect">
-            <a:avLst/>
-          </a:prstGeom>
-          <a:noFill/>
-        </p:spPr>
-        <p:txBody>
-          <a:bodyPr wrap="square" lIns="0" rIns="0" tIns="0" bIns="0">
-            <a:spAutoFit/>
-          </a:bodyPr>
-          <a:lstStyle/>
-          <a:p>
-            <a:pPr algn="r">
-              <a:spcBef>
-                <a:spcPts val="0"/>
-              </a:spcBef>
-              <a:spcAft>
-                <a:spcPts val="0"/>
-              </a:spcAft>
-            </a:pPr>
-            <a:r>
-              <a:rPr sz="1100" b="0" i="0">
-                <a:solidFill>
-                  <a:srgbClr val="868D96"/>
-                </a:solidFill>
-                <a:latin typeface="Consolas"/>
-              </a:rPr>
-              <a:t>II-a</a:t>
-            </a:r>
-          </a:p>
-        </p:txBody>
-      </p:sp>
-      <p:pic>
-        <p:nvPicPr>
-          <p:cNvPr id="6" name="Picture 5" descr="domains_at_levels_comparison.png"/>
-          <p:cNvPicPr>
-            <a:picLocks noChangeAspect="1"/>
-          </p:cNvPicPr>
-          <p:nvPr/>
-        </p:nvPicPr>
-        <p:blipFill>
-          <a:blip r:embed="rId2"/>
-          <a:stretch>
-            <a:fillRect/>
-          </a:stretch>
-        </p:blipFill>
-        <p:spPr>
-          <a:xfrm>
-            <a:off x="5120640" y="1934936"/>
-            <a:ext cx="6537960" cy="2521784"/>
-          </a:xfrm>
-          <a:prstGeom prst="rect">
-            <a:avLst/>
-          </a:prstGeom>
-        </p:spPr>
-      </p:pic>
-      <p:sp>
-        <p:nvSpPr>
-          <p:cNvPr id="7" name="TextBox 6"/>
-          <p:cNvSpPr txBox="1"/>
-          <p:nvPr/>
-        </p:nvSpPr>
-        <p:spPr>
-          <a:xfrm>
-            <a:off x="5120640" y="5897880"/>
-            <a:ext cx="6537960" cy="731520"/>
-          </a:xfrm>
-          <a:prstGeom prst="rect">
-            <a:avLst/>
-          </a:prstGeom>
-          <a:noFill/>
-        </p:spPr>
-        <p:txBody>
-          <a:bodyPr wrap="square" lIns="0" rIns="0" tIns="0" bIns="0">
-            <a:spAutoFit/>
-          </a:bodyPr>
-          <a:lstStyle/>
-          <a:p>
-            <a:pPr>
-              <a:lnSpc>
-                <a:spcPct val="125000"/>
-              </a:lnSpc>
-              <a:spcBef>
-                <a:spcPts val="0"/>
-              </a:spcBef>
-              <a:spcAft>
-                <a:spcPts val="0"/>
-              </a:spcAft>
-            </a:pPr>
-            <a:r>
-              <a:rPr sz="900" b="0" i="0">
-                <a:solidFill>
-                  <a:srgbClr val="868D96"/>
-                </a:solidFill>
-                <a:latin typeface="Calibri"/>
-              </a:rPr>
-              <a:t>The three domains across all three frameworks, all on % of countries FDR-significant. Trust has no HDI bar because the HDI does not measure it.</a:t>
+              <a:t>of that effect retained with predictor and outcome from disjoint respondents</a:t>
             </a:r>
           </a:p>
         </p:txBody>
@@ -4945,7 +4901,7 @@
                 </a:solidFill>
                 <a:latin typeface="Consolas"/>
               </a:rPr>
-              <a:t>EDUCATION, CLOSE UP</a:t>
+              <a:t>SOCIAL TRUST, AT LEVELS</a:t>
             </a:r>
           </a:p>
         </p:txBody>
@@ -4990,7 +4946,7 @@
                 </a:solidFill>
                 <a:latin typeface="Georgia"/>
               </a:rPr>
-              <a:t>Significant on people and in the HDI; invisible in the SDGs only because of pooling</a:t>
+              <a:t>Second strongest domain on people; absent from both development frameworks</a:t>
             </a:r>
           </a:p>
         </p:txBody>
@@ -5029,13 +4985,13 @@
               </a:spcAft>
             </a:pPr>
             <a:r>
-              <a:rPr sz="1150" b="0" i="0">
+              <a:rPr sz="1100" b="0" i="0">
                 <a:solidFill>
                   <a:srgbClr val="5A6068"/>
                 </a:solidFill>
                 <a:latin typeface="Calibri"/>
               </a:rPr>
-              <a:t>Education across all four ways of measuring it: 89% of ESS countries on individual years of schooling, 33% of HDI countries on expected years of schooling, 12.7% of SDG4 access series, 3.3% pooled across all 35.</a:t>
+              <a:t>Interpersonal trust — 'generally speaking, would you say that most people can be trusted?' — is significant in 35 of 36 ESS countries, with a median individual R² of 0.039: below self-rated health, well above years of schooling.</a:t>
             </a:r>
           </a:p>
           <a:p>
@@ -5051,13 +5007,35 @@
               </a:spcAft>
             </a:pPr>
             <a:r>
-              <a:rPr sz="1150" b="0" i="0">
+              <a:rPr sz="1100" b="0" i="0">
                 <a:solidFill>
                   <a:srgbClr val="5A6068"/>
                 </a:solidFill>
                 <a:latin typeface="Calibri"/>
               </a:rPr>
-              <a:t>Three of those four numbers tell a consistent story and the fourth is a construction choice. Nothing about education changed between the third bar and the fourth — only which series were averaged together. This is the cleanest case in the paper of a framework hiding a domain it does in fact measure.</a:t>
+              <a:t>The HDI does not measure trust in any form. The SDG framework's nearest thing is Goal 16's thirteen series, and they measure something else — satisfaction with public services, perceived bribery, perceived inclusiveness in decision-making. Institutional confidence and interpersonal trust are distinct constructs, and coverage compounds the mismatch: median one observation per country-series against six for the database overall, and 147 of 163 country-series cannot support a time-series design at all.</a:t>
+            </a:r>
+          </a:p>
+          <a:p>
+            <a:pPr>
+              <a:lnSpc>
+                <a:spcPct val="132000"/>
+              </a:lnSpc>
+              <a:spcBef>
+                <a:spcPts val="0"/>
+              </a:spcBef>
+              <a:spcAft>
+                <a:spcPts val="1100"/>
+              </a:spcAft>
+            </a:pPr>
+            <a:r>
+              <a:rPr sz="1100" b="0" i="0">
+                <a:solidFill>
+                  <a:srgbClr val="5A6068"/>
+                </a:solidFill>
+                <a:latin typeface="Calibri"/>
+              </a:rPr>
+              <a:t>Education's and health's problems, in the previous section, were about which variable to count inside a domain the frameworks already have. Trust's is categorically different: there is no variable to choose between, because the domain was never collected in the first place.</a:t>
             </a:r>
           </a:p>
         </p:txBody>
@@ -5106,7 +5084,7 @@
       </p:sp>
       <p:pic>
         <p:nvPicPr>
-          <p:cNvPr id="6" name="Picture 5" descr="education_levels_comparison.png"/>
+          <p:cNvPr id="6" name="Picture 5" descr="trust_coverage_comparison.png"/>
           <p:cNvPicPr>
             <a:picLocks noChangeAspect="1"/>
           </p:cNvPicPr>
@@ -5120,8 +5098,8 @@
         </p:blipFill>
         <p:spPr>
           <a:xfrm>
-            <a:off x="5120640" y="1412748"/>
-            <a:ext cx="6537960" cy="3566160"/>
+            <a:off x="5120640" y="1327839"/>
+            <a:ext cx="6537960" cy="3735977"/>
           </a:xfrm>
           <a:prstGeom prst="rect">
             <a:avLst/>
@@ -5168,7 +5146,7 @@
                 </a:solidFill>
                 <a:latin typeface="Calibri"/>
               </a:rPr>
-              <a:t>Education across four measurements. The gap between the last two bars is entirely pooling, not data.</a:t>
+              <a:t>Interpersonal trust in the ESS against the closest SDG counterpart and an absent HDI one. The asterisked bar is a different construct.</a:t>
             </a:r>
           </a:p>
         </p:txBody>
@@ -5236,7 +5214,7 @@
                 </a:solidFill>
                 <a:latin typeface="Consolas"/>
               </a:rPr>
-              <a:t>HEALTH, CLOSE UP</a:t>
+              <a:t>WHAT TRUST IS WORTH IN DIFFERENCES</a:t>
             </a:r>
           </a:p>
         </p:txBody>
@@ -5281,7 +5259,7 @@
                 </a:solidFill>
                 <a:latin typeface="Georgia"/>
               </a:rPr>
-              <a:t>The strongest domain on people, and the weakest component of the HDI</a:t>
+              <a:t>A country's rising trust predicts rising life satisfaction — and the effect is not small</a:t>
             </a:r>
           </a:p>
         </p:txBody>
@@ -5320,13 +5298,13 @@
               </a:spcAft>
             </a:pPr>
             <a:r>
-              <a:rPr sz="1150" b="0" i="0">
+              <a:rPr sz="850" b="0" i="0">
                 <a:solidFill>
                   <a:srgbClr val="5A6068"/>
                 </a:solidFill>
                 <a:latin typeface="Calibri"/>
               </a:rPr>
-              <a:t>Self-rated health is the single strongest predictor of life satisfaction in the ESS: every country significant, median R² 0.092, roughly fifteen times education's. In the SDGs, health leads the substantive goals at 11.5%. In the HDI it is last of five, at 19%.</a:t>
+              <a:t>Act I left the differences half of the argument unresolved, because the per-country design spends its power on 25 separate tests of seven points each. Pool the same within-country question across all countries and it has the power to answer: the collapse is not a property of differencing in general, it is specific to what you differenced. Development composites collapse. The domain measures do not, all of them.</a:t>
             </a:r>
           </a:p>
           <a:p>
@@ -5342,13 +5320,57 @@
               </a:spcAft>
             </a:pPr>
             <a:r>
-              <a:rPr sz="1150" b="0" i="0">
+              <a:rPr sz="850" b="0" i="0">
                 <a:solidFill>
                   <a:srgbClr val="5A6068"/>
                 </a:solidFill>
                 <a:latin typeface="Calibri"/>
               </a:rPr>
-              <a:t>The domain is not weak; the HDI's chosen proxy for it is. Life expectancy has largely saturated across the countries the index covers, and a variable with almost no variance left cannot predict much. Self-rated health, asked of the same populations, is the strongest thing in the ESS. Same domain, different variable, opposite conclusion.</a:t>
+              <a:t>In points: a one-SD change in a country's trust reading between ESS rounds predicts a +0.20 point change in mean life satisfaction, on the 0–10 scale — 59% of a typical round-to-round swing in life satisfaction itself. Health's equivalent effect is +0.14 points, 41% of a typical swing. Education and the HDI composite are not distinguishable from zero. These are not curiosities; they are the size of the thing.</a:t>
+            </a:r>
+          </a:p>
+          <a:p>
+            <a:pPr>
+              <a:lnSpc>
+                <a:spcPct val="132000"/>
+              </a:lnSpc>
+              <a:spcBef>
+                <a:spcPts val="0"/>
+              </a:spcBef>
+              <a:spcAft>
+                <a:spcPts val="1100"/>
+              </a:spcAft>
+            </a:pPr>
+            <a:r>
+              <a:rPr sz="850" b="0" i="0">
+                <a:solidFill>
+                  <a:srgbClr val="5A6068"/>
+                </a:solidFill>
+                <a:latin typeface="Calibri"/>
+              </a:rPr>
+              <a:t>The obvious objection is common-method variance — the same person answers the trust question and the life-satisfaction question in the same sitting, so of course they move together. That is testable: split each country-round's respondents at random, take the trust mean from one half and life satisfaction from the other, so no person answers both. Trust retains 93% of its estimate this way, health 88%. The association is between people in a country, not inside a questionnaire.</a:t>
+            </a:r>
+          </a:p>
+          <a:p>
+            <a:pPr>
+              <a:lnSpc>
+                <a:spcPct val="132000"/>
+              </a:lnSpc>
+              <a:spcBef>
+                <a:spcPts val="0"/>
+              </a:spcBef>
+              <a:spcAft>
+                <a:spcPts val="1100"/>
+              </a:spcAft>
+            </a:pPr>
+            <a:r>
+              <a:rPr sz="850" b="0" i="0">
+                <a:solidFill>
+                  <a:srgbClr val="5A6068"/>
+                </a:solidFill>
+                <a:latin typeface="Calibri"/>
+              </a:rPr>
+              <a:t>What still bounds the claim is cross-source replication. Against the World Happiness Report ladder, health's differences result survives (+0.20) and trust's does not (+0.06, not significant) — plausibly because that pairing sets ESS rounds against a different sample with its own fieldwork timing, and trust is the weaker signal to begin with, so it has less room before vanishing. Read as a bound, not a refutation: trust has not yet been corroborated on an independent wellbeing instrument, and health has. That is the honest state of the evidence, and it is why the recommendation in Act IV treats trust as the most tentative of the three.</a:t>
             </a:r>
           </a:p>
         </p:txBody>
@@ -5397,7 +5419,7 @@
       </p:sp>
       <p:pic>
         <p:nvPicPr>
-          <p:cNvPr id="6" name="Picture 5" descr="health_levels_comparison.png"/>
+          <p:cNvPr id="6" name="Picture 5" descr="domains_survive_differences.png"/>
           <p:cNvPicPr>
             <a:picLocks noChangeAspect="1"/>
           </p:cNvPicPr>
@@ -5411,8 +5433,8 @@
         </p:blipFill>
         <p:spPr>
           <a:xfrm>
-            <a:off x="5120640" y="1234440"/>
-            <a:ext cx="6537960" cy="3922776"/>
+            <a:off x="5120640" y="1767163"/>
+            <a:ext cx="6537960" cy="2857330"/>
           </a:xfrm>
           <a:prstGeom prst="rect">
             <a:avLst/>
@@ -5459,7 +5481,7 @@
                 </a:solidFill>
                 <a:latin typeface="Calibri"/>
               </a:rPr>
-              <a:t>Health measured three ways. The HDI result is about life expectancy's saturation, not about health.</a:t>
+              <a:t>Panel a: the differences effect converted to life-satisfaction points. Panel b: the correlation evidence behind it, with split-half validation.</a:t>
             </a:r>
           </a:p>
         </p:txBody>
@@ -5527,7 +5549,7 @@
                 </a:solidFill>
                 <a:latin typeface="Consolas"/>
               </a:rPr>
-              <a:t>SOCIAL TRUST, CLOSE UP</a:t>
+              <a:t>WHY THE SDG TRUST SERIES CANNOT STAND IN</a:t>
             </a:r>
           </a:p>
         </p:txBody>
@@ -5572,7 +5594,7 @@
                 </a:solidFill>
                 <a:latin typeface="Georgia"/>
               </a:rPr>
-              <a:t>Second strongest on people, and absent from both frameworks</a:t>
+              <a:t>Institutional confidence does not survive an income control; interpersonal trust does</a:t>
             </a:r>
           </a:p>
         </p:txBody>
@@ -5611,13 +5633,13 @@
               </a:spcAft>
             </a:pPr>
             <a:r>
-              <a:rPr sz="1100" b="0" i="0">
+              <a:rPr sz="1150" b="0" i="0">
                 <a:solidFill>
                   <a:srgbClr val="5A6068"/>
                 </a:solidFill>
                 <a:latin typeface="Calibri"/>
               </a:rPr>
-              <a:t>Interpersonal trust — 'generally speaking, would you say that most people can be trusted?' — is significant in 35 of 36 ESS countries, with a median R² of 0.039: below self-rated health, well above years of schooling.</a:t>
+              <a:t>Worth testing directly rather than asserting. Of the thirteen Goal 16 trust-adjacent series, nine can be tested cross-sectionally and four are significant. Then control for log GNI per capita: perceived bribery survives, but satisfaction with government services, healthcare and secondary education all vanish.</a:t>
             </a:r>
           </a:p>
           <a:p>
@@ -5633,13 +5655,13 @@
               </a:spcAft>
             </a:pPr>
             <a:r>
-              <a:rPr sz="1100" b="0" i="0">
+              <a:rPr sz="1150" b="0" i="0">
                 <a:solidFill>
                   <a:srgbClr val="5A6068"/>
                 </a:solidFill>
                 <a:latin typeface="Calibri"/>
               </a:rPr>
-              <a:t>The HDI does not measure trust in any form. The SDG framework's nearest thing is Goal 16's thirteen series, and they measure something else: satisfaction with public services, perceived bribery, perceived inclusiveness in decision-making. Institutional confidence and interpersonal trust are distinct constructs, and the substitution should not pass silently. Coverage compounds it — median one observation per country-series against six for the database overall, and 147 of 163 country-series cannot support a time-series design at all.</a:t>
+              <a:t>That pattern is a known artefact of subjective institutional scales across income levels — the same question administered in richer and poorer countries produces response shifts unrelated to the construct. Interpersonal trust in the ESS does not behave this way.</a:t>
             </a:r>
           </a:p>
           <a:p>
@@ -5655,13 +5677,13 @@
               </a:spcAft>
             </a:pPr>
             <a:r>
-              <a:rPr sz="1100" b="0" i="0">
+              <a:rPr sz="1150" b="0" i="0">
                 <a:solidFill>
                   <a:srgbClr val="5A6068"/>
                 </a:solidFill>
                 <a:latin typeface="Calibri"/>
               </a:rPr>
-              <a:t>Education's and health's problems are about which variable to count inside a domain the framework already has. Trust's is categorically different: there is no variable to choose between, because the domain was never collected.</a:t>
+              <a:t>So this is not an execution failure in the SDG framework. It reflects what development frameworks are for: they measure institutions and systems. Trust between people is not an institution, and it does not show up when you measure one.</a:t>
             </a:r>
           </a:p>
         </p:txBody>
@@ -5710,7 +5732,7 @@
       </p:sp>
       <p:pic>
         <p:nvPicPr>
-          <p:cNvPr id="6" name="Picture 5" descr="trust_coverage_comparison.png"/>
+          <p:cNvPr id="6" name="Picture 5" descr="K1_sdg_trust_cross_section.png"/>
           <p:cNvPicPr>
             <a:picLocks noChangeAspect="1"/>
           </p:cNvPicPr>
@@ -5724,8 +5746,8 @@
         </p:blipFill>
         <p:spPr>
           <a:xfrm>
-            <a:off x="5120640" y="1327839"/>
-            <a:ext cx="6537960" cy="3735977"/>
+            <a:off x="5120640" y="1690377"/>
+            <a:ext cx="6537960" cy="3010902"/>
           </a:xfrm>
           <a:prstGeom prst="rect">
             <a:avLst/>
@@ -5772,7 +5794,7 @@
                 </a:solidFill>
                 <a:latin typeface="Calibri"/>
               </a:rPr>
-              <a:t>Interpersonal trust in the ESS against the closest SDG counterpart and an absent HDI one. The asterisked bar is a different construct.</a:t>
+              <a:t>SDG16 trust series cross-sectionally. Panel (b): net of income, bribery persists and the satisfaction measures do not.</a:t>
             </a:r>
           </a:p>
         </p:txBody>
@@ -5791,7 +5813,7 @@
     <p:bg>
       <p:bgPr>
         <a:solidFill>
-          <a:srgbClr val="FCFCFB"/>
+          <a:srgbClr val="E8EBEF"/>
         </a:solidFill>
         <a:effectLst/>
       </p:bgPr>
@@ -5805,56 +5827,100 @@
       <p:grpSpPr/>
       <p:sp>
         <p:nvSpPr>
-          <p:cNvPr id="2" name="TextBox 1"/>
-          <p:cNvSpPr txBox="1"/>
-          <p:nvPr/>
-        </p:nvSpPr>
-        <p:spPr>
-          <a:xfrm>
-            <a:off x="566928" y="502920"/>
-            <a:ext cx="4160520" cy="274320"/>
-          </a:xfrm>
-          <a:prstGeom prst="rect">
-            <a:avLst/>
-          </a:prstGeom>
-          <a:noFill/>
-        </p:spPr>
-        <p:txBody>
-          <a:bodyPr wrap="square" lIns="0" rIns="0" tIns="0" bIns="0">
-            <a:spAutoFit/>
-          </a:bodyPr>
-          <a:lstStyle/>
-          <a:p>
-            <a:pPr>
-              <a:spcBef>
-                <a:spcPts val="0"/>
-              </a:spcBef>
-              <a:spcAft>
-                <a:spcPts val="0"/>
-              </a:spcAft>
-            </a:pPr>
-            <a:r>
-              <a:rPr sz="1000" b="0" i="0">
-                <a:solidFill>
-                  <a:srgbClr val="A63A30"/>
+          <p:cNvPr id="2" name="Rectangle 1"/>
+          <p:cNvSpPr/>
+          <p:nvPr/>
+        </p:nvSpPr>
+        <p:spPr>
+          <a:xfrm>
+            <a:off x="566928" y="2103120"/>
+            <a:ext cx="54864" cy="2377440"/>
+          </a:xfrm>
+          <a:prstGeom prst="rect">
+            <a:avLst/>
+          </a:prstGeom>
+          <a:solidFill>
+            <a:srgbClr val="17549E"/>
+          </a:solidFill>
+          <a:ln>
+            <a:noFill/>
+          </a:ln>
+          <a:effectLst/>
+        </p:spPr>
+        <p:style>
+          <a:lnRef idx="1">
+            <a:schemeClr val="accent1"/>
+          </a:lnRef>
+          <a:fillRef idx="3">
+            <a:schemeClr val="accent1"/>
+          </a:fillRef>
+          <a:effectRef idx="2">
+            <a:schemeClr val="accent1"/>
+          </a:effectRef>
+          <a:fontRef idx="minor">
+            <a:schemeClr val="lt1"/>
+          </a:fontRef>
+        </p:style>
+        <p:txBody>
+          <a:bodyPr rtlCol="0" anchor="ctr"/>
+          <a:lstStyle/>
+          <a:p>
+            <a:pPr algn="ctr"/>
+          </a:p>
+        </p:txBody>
+      </p:sp>
+      <p:sp>
+        <p:nvSpPr>
+          <p:cNvPr id="3" name="TextBox 2"/>
+          <p:cNvSpPr txBox="1"/>
+          <p:nvPr/>
+        </p:nvSpPr>
+        <p:spPr>
+          <a:xfrm>
+            <a:off x="914400" y="1600200"/>
+            <a:ext cx="8686800" cy="274320"/>
+          </a:xfrm>
+          <a:prstGeom prst="rect">
+            <a:avLst/>
+          </a:prstGeom>
+          <a:noFill/>
+        </p:spPr>
+        <p:txBody>
+          <a:bodyPr wrap="square" lIns="0" rIns="0" tIns="0" bIns="0">
+            <a:spAutoFit/>
+          </a:bodyPr>
+          <a:lstStyle/>
+          <a:p>
+            <a:pPr>
+              <a:spcBef>
+                <a:spcPts val="0"/>
+              </a:spcBef>
+              <a:spcAft>
+                <a:spcPts val="0"/>
+              </a:spcAft>
+            </a:pPr>
+            <a:r>
+              <a:rPr sz="1100" b="0" i="0">
+                <a:solidFill>
+                  <a:srgbClr val="17549E"/>
                 </a:solidFill>
                 <a:latin typeface="Consolas"/>
               </a:rPr>
-              <a:t>BACK TO DIFFERENCES · WHICH DOMAINS SURVIVE IT</a:t>
-            </a:r>
-          </a:p>
-        </p:txBody>
-      </p:sp>
-      <p:sp>
-        <p:nvSpPr>
-          <p:cNvPr id="3" name="TextBox 2"/>
-          <p:cNvSpPr txBox="1"/>
-          <p:nvPr/>
-        </p:nvSpPr>
-        <p:spPr>
-          <a:xfrm>
-            <a:off x="566928" y="914400"/>
-            <a:ext cx="4160520" cy="1371600"/>
+              <a:t>WHERE ACT II-A LEAVES US</a:t>
+            </a:r>
+          </a:p>
+        </p:txBody>
+      </p:sp>
+      <p:sp>
+        <p:nvSpPr>
+          <p:cNvPr id="4" name="TextBox 3"/>
+          <p:cNvSpPr txBox="1"/>
+          <p:nvPr/>
+        </p:nvSpPr>
+        <p:spPr>
+          <a:xfrm>
+            <a:off x="914400" y="2148840"/>
+            <a:ext cx="9509760" cy="2926080"/>
           </a:xfrm>
           <a:prstGeom prst="rect">
             <a:avLst/>
@@ -5869,7 +5935,7 @@
           <a:p>
             <a:pPr>
               <a:lnSpc>
-                <a:spcPct val="108000"/>
+                <a:spcPct val="135000"/>
               </a:lnSpc>
               <a:spcBef>
                 <a:spcPts val="0"/>
@@ -5879,301 +5945,13 @@
               </a:spcAft>
             </a:pPr>
             <a:r>
-              <a:rPr sz="2300" b="0" i="0">
+              <a:rPr sz="2100" b="0" i="0">
                 <a:solidFill>
                   <a:srgbClr val="14171C"/>
                 </a:solidFill>
                 <a:latin typeface="Georgia"/>
               </a:rPr>
-              <a:t>The collapse is domain-specific: health tracks wellbeing year to year, development composites do not</a:t>
-            </a:r>
-          </a:p>
-        </p:txBody>
-      </p:sp>
-      <p:sp>
-        <p:nvSpPr>
-          <p:cNvPr id="4" name="TextBox 3"/>
-          <p:cNvSpPr txBox="1"/>
-          <p:nvPr/>
-        </p:nvSpPr>
-        <p:spPr>
-          <a:xfrm>
-            <a:off x="566928" y="2331720"/>
-            <a:ext cx="4160520" cy="3840480"/>
-          </a:xfrm>
-          <a:prstGeom prst="rect">
-            <a:avLst/>
-          </a:prstGeom>
-          <a:noFill/>
-        </p:spPr>
-        <p:txBody>
-          <a:bodyPr wrap="square" lIns="0" rIns="0" tIns="0" bIns="0">
-            <a:spAutoFit/>
-          </a:bodyPr>
-          <a:lstStyle/>
-          <a:p>
-            <a:pPr>
-              <a:lnSpc>
-                <a:spcPct val="132000"/>
-              </a:lnSpc>
-              <a:spcBef>
-                <a:spcPts val="0"/>
-              </a:spcBef>
-              <a:spcAft>
-                <a:spcPts val="1100"/>
-              </a:spcAft>
-            </a:pPr>
-            <a:r>
-              <a:rPr sz="850" b="0" i="0">
-                <a:solidFill>
-                  <a:srgbClr val="5A6068"/>
-                </a:solidFill>
-                <a:latin typeface="Calibri"/>
-              </a:rPr>
-              <a:t>Act I left the differences half unresolved, because the per-country design spends its power on 25 separate tests of seven points each. Pool the same within-country question across all countries and it has the power to answer — and the answer is that the collapse is not a universal property of differencing. It is specific to what you differenced.</a:t>
-            </a:r>
-          </a:p>
-          <a:p>
-            <a:pPr>
-              <a:lnSpc>
-                <a:spcPct val="132000"/>
-              </a:lnSpc>
-              <a:spcBef>
-                <a:spcPts val="0"/>
-              </a:spcBef>
-              <a:spcAft>
-                <a:spcPts val="1100"/>
-              </a:spcAft>
-            </a:pPr>
-            <a:r>
-              <a:rPr sz="850" b="0" i="0">
-                <a:solidFill>
-                  <a:srgbClr val="5A6068"/>
-                </a:solidFill>
-                <a:latin typeface="Calibri"/>
-              </a:rPr>
-              <a:t>Within the ESS: health goes from r = +0.56 at levels to +0.40 in first differences, and social trust from +0.51 to +0.59. Both survive. Education goes from +0.29 to +0.03, not significant, and the HDI composite from +0.44 to +0.20. Against the World Happiness Report ladder on the full 150-country panel, the HDI collapses outright: +0.15 at levels to −0.02 in differences across 1,548 country-year changes.</a:t>
-            </a:r>
-          </a:p>
-          <a:p>
-            <a:pPr>
-              <a:lnSpc>
-                <a:spcPct val="132000"/>
-              </a:lnSpc>
-              <a:spcBef>
-                <a:spcPts val="0"/>
-              </a:spcBef>
-              <a:spcAft>
-                <a:spcPts val="1100"/>
-              </a:spcAft>
-            </a:pPr>
-            <a:r>
-              <a:rPr sz="850" b="0" i="0">
-                <a:solidFill>
-                  <a:srgbClr val="5A6068"/>
-                </a:solidFill>
-                <a:latin typeface="Calibri"/>
-              </a:rPr>
-              <a:t>One check before leaning on this. These are 25 European countries over seven rounds, where a common shock — a financial crisis, a pandemic — could move health, trust and wellbeing together and manufacture the correlation. Removing whatever is shared within each survey round leaves health at +0.42 and trust at +0.58, with education still null. The domain results are idiosyncratic country movement, not shared shocks.</a:t>
-            </a:r>
-          </a:p>
-          <a:p>
-            <a:pPr>
-              <a:lnSpc>
-                <a:spcPct val="132000"/>
-              </a:lnSpc>
-              <a:spcBef>
-                <a:spcPts val="0"/>
-              </a:spcBef>
-              <a:spcAft>
-                <a:spcPts val="1100"/>
-              </a:spcAft>
-            </a:pPr>
-            <a:r>
-              <a:rPr sz="850" b="0" i="0">
-                <a:solidFill>
-                  <a:srgbClr val="5A6068"/>
-                </a:solidFill>
-                <a:latin typeface="Calibri"/>
-              </a:rPr>
-              <a:t>So when a country's self-rated health rises between rounds, its life satisfaction rises with it. When its HDI rises, that tells you almost nothing. This is the sharpest version of the paper's claim: development composites move too slowly and too smoothly to track how people feel — within a country the HDI moves about a tenth of its between-country spread, where the domain measures move two to three times that.</a:t>
-            </a:r>
-          </a:p>
-          <a:p>
-            <a:pPr>
-              <a:lnSpc>
-                <a:spcPct val="132000"/>
-              </a:lnSpc>
-              <a:spcBef>
-                <a:spcPts val="0"/>
-              </a:spcBef>
-              <a:spcAft>
-                <a:spcPts val="1100"/>
-              </a:spcAft>
-            </a:pPr>
-            <a:r>
-              <a:rPr sz="850" b="0" i="0">
-                <a:solidFill>
-                  <a:srgbClr val="5A6068"/>
-                </a:solidFill>
-                <a:latin typeface="Calibri"/>
-              </a:rPr>
-              <a:t>The same question one scale down agrees, and shows where the power is. Per region over survey rounds, subnational HDI explains nothing at all — 0 of 167 regions, on seven rounds each. Across regions inside a country it recovers the levels result, 47% of 15 countries. And at the individual level it is decisive: 36 of 36 countries for health, 35 for trust, on ~10,700 respondents each. Region, country and person all tell the same story; only the individual level has the sample to tell it cleanly.</a:t>
-            </a:r>
-          </a:p>
-          <a:p>
-            <a:pPr>
-              <a:lnSpc>
-                <a:spcPct val="132000"/>
-              </a:lnSpc>
-              <a:spcBef>
-                <a:spcPts val="0"/>
-              </a:spcBef>
-              <a:spcAft>
-                <a:spcPts val="1100"/>
-              </a:spcAft>
-            </a:pPr>
-            <a:r>
-              <a:rPr sz="850" b="0" i="0">
-                <a:solidFill>
-                  <a:srgbClr val="5A6068"/>
-                </a:solidFill>
-                <a:latin typeface="Calibri"/>
-              </a:rPr>
-              <a:t>The obvious objection to the trust result is common-method variance: the same people answer the trust question and the life-satisfaction question in the same sitting, so of course the two move together. That is testable. Split each country-round's respondents at random, take the trust mean from one half and life satisfaction from the other, and no person contributes to both sides while sample, fieldwork and timing stay identical. Trust retains 93% of its estimate (+0.59 to +0.55) and health 88% (+0.40 to +0.35). Education stays null. The association is between people in a country, not inside a questionnaire.</a:t>
-            </a:r>
-          </a:p>
-          <a:p>
-            <a:pPr>
-              <a:lnSpc>
-                <a:spcPct val="132000"/>
-              </a:lnSpc>
-              <a:spcBef>
-                <a:spcPts val="0"/>
-              </a:spcBef>
-              <a:spcAft>
-                <a:spcPts val="1100"/>
-              </a:spcAft>
-            </a:pPr>
-            <a:r>
-              <a:rPr sz="850" b="0" i="0">
-                <a:solidFill>
-                  <a:srgbClr val="5A6068"/>
-                </a:solidFill>
-                <a:latin typeface="Calibri"/>
-              </a:rPr>
-              <a:t>What does bound the trust claim is the cross-source panel. Against the WHR ladder, trust reaches +0.20 at levels and +0.06 in differences, where health reaches +0.51 and +0.20. But that pairing sets ESS rounds against a different sample, with different fieldwork timing and its own sampling error, and differencing amplifies all of it — trust is the weaker signal to begin with, so it has less to lose before vanishing. Read as a bound, not a refutation: trust has not yet been corroborated against an independent wellbeing instrument, and health has.</a:t>
-            </a:r>
-          </a:p>
-        </p:txBody>
-      </p:sp>
-      <p:sp>
-        <p:nvSpPr>
-          <p:cNvPr id="5" name="TextBox 4"/>
-          <p:cNvSpPr txBox="1"/>
-          <p:nvPr/>
-        </p:nvSpPr>
-        <p:spPr>
-          <a:xfrm>
-            <a:off x="11338560" y="6263640"/>
-            <a:ext cx="548640" cy="274320"/>
-          </a:xfrm>
-          <a:prstGeom prst="rect">
-            <a:avLst/>
-          </a:prstGeom>
-          <a:noFill/>
-        </p:spPr>
-        <p:txBody>
-          <a:bodyPr wrap="square" lIns="0" rIns="0" tIns="0" bIns="0">
-            <a:spAutoFit/>
-          </a:bodyPr>
-          <a:lstStyle/>
-          <a:p>
-            <a:pPr algn="r">
-              <a:spcBef>
-                <a:spcPts val="0"/>
-              </a:spcBef>
-              <a:spcAft>
-                <a:spcPts val="0"/>
-              </a:spcAft>
-            </a:pPr>
-            <a:r>
-              <a:rPr sz="1100" b="0" i="0">
-                <a:solidFill>
-                  <a:srgbClr val="868D96"/>
-                </a:solidFill>
-                <a:latin typeface="Consolas"/>
-              </a:rPr>
-              <a:t>II-a</a:t>
-            </a:r>
-          </a:p>
-        </p:txBody>
-      </p:sp>
-      <p:pic>
-        <p:nvPicPr>
-          <p:cNvPr id="6" name="Picture 5" descr="domains_survive_differences.png"/>
-          <p:cNvPicPr>
-            <a:picLocks noChangeAspect="1"/>
-          </p:cNvPicPr>
-          <p:nvPr/>
-        </p:nvPicPr>
-        <p:blipFill>
-          <a:blip r:embed="rId2"/>
-          <a:stretch>
-            <a:fillRect/>
-          </a:stretch>
-        </p:blipFill>
-        <p:spPr>
-          <a:xfrm>
-            <a:off x="5120640" y="1791377"/>
-            <a:ext cx="6537960" cy="2808901"/>
-          </a:xfrm>
-          <a:prstGeom prst="rect">
-            <a:avLst/>
-          </a:prstGeom>
-        </p:spPr>
-      </p:pic>
-      <p:sp>
-        <p:nvSpPr>
-          <p:cNvPr id="7" name="TextBox 6"/>
-          <p:cNvSpPr txBox="1"/>
-          <p:nvPr/>
-        </p:nvSpPr>
-        <p:spPr>
-          <a:xfrm>
-            <a:off x="5120640" y="5897880"/>
-            <a:ext cx="6537960" cy="731520"/>
-          </a:xfrm>
-          <a:prstGeom prst="rect">
-            <a:avLst/>
-          </a:prstGeom>
-          <a:noFill/>
-        </p:spPr>
-        <p:txBody>
-          <a:bodyPr wrap="square" lIns="0" rIns="0" tIns="0" bIns="0">
-            <a:spAutoFit/>
-          </a:bodyPr>
-          <a:lstStyle/>
-          <a:p>
-            <a:pPr>
-              <a:lnSpc>
-                <a:spcPct val="125000"/>
-              </a:lnSpc>
-              <a:spcBef>
-                <a:spcPts val="0"/>
-              </a:spcBef>
-              <a:spcAft>
-                <a:spcPts val="0"/>
-              </a:spcAft>
-            </a:pPr>
-            <a:r>
-              <a:rPr sz="900" b="0" i="0">
-                <a:solidFill>
-                  <a:srgbClr val="868D96"/>
-                </a:solidFill>
-                <a:latin typeface="Calibri"/>
-              </a:rPr>
-              <a:t>Pooled within-country correlations, levels against first differences. Panel a within the ESS; panel b against the independent WHR ladder. Health is the only domain significant in differences in both.</a:t>
+              <a:t>Social trust is the second-strongest domain on people, ahead of education, and it is the one domain neither development framework collects. It also survives differencing where development composites do not: a country whose trust rises between ESS rounds sees life satisfaction rise with it, by an amount worth more than half of what life satisfaction typically moves round to round — and that holds with no person answering both questions.</a:t>
             </a:r>
           </a:p>
         </p:txBody>
@@ -6192,7 +5970,7 @@
     <p:bg>
       <p:bgPr>
         <a:solidFill>
-          <a:srgbClr val="FCFCFB"/>
+          <a:srgbClr val="14171C"/>
         </a:solidFill>
         <a:effectLst/>
       </p:bgPr>
@@ -6212,21 +5990,261 @@
         </p:nvSpPr>
         <p:spPr>
           <a:xfrm>
-            <a:off x="566928" y="502920"/>
-            <a:ext cx="4160520" cy="274320"/>
-          </a:xfrm>
-          <a:prstGeom prst="rect">
-            <a:avLst/>
-          </a:prstGeom>
-          <a:noFill/>
-        </p:spPr>
-        <p:txBody>
-          <a:bodyPr wrap="square" lIns="0" rIns="0" tIns="0" bIns="0">
-            <a:spAutoFit/>
-          </a:bodyPr>
-          <a:lstStyle/>
-          <a:p>
-            <a:pPr>
+            <a:off x="7680960" y="822960"/>
+            <a:ext cx="3840480" cy="4114800"/>
+          </a:xfrm>
+          <a:prstGeom prst="rect">
+            <a:avLst/>
+          </a:prstGeom>
+          <a:noFill/>
+        </p:spPr>
+        <p:txBody>
+          <a:bodyPr wrap="square" lIns="0" rIns="0" tIns="0" bIns="0">
+            <a:spAutoFit/>
+          </a:bodyPr>
+          <a:lstStyle/>
+          <a:p>
+            <a:pPr algn="r">
+              <a:spcBef>
+                <a:spcPts val="0"/>
+              </a:spcBef>
+              <a:spcAft>
+                <a:spcPts val="0"/>
+              </a:spcAft>
+            </a:pPr>
+            <a:r>
+              <a:rPr sz="20000" b="0" i="0">
+                <a:solidFill>
+                  <a:srgbClr val="2A3340"/>
+                </a:solidFill>
+                <a:latin typeface="Georgia"/>
+              </a:rPr>
+              <a:t>III</a:t>
+            </a:r>
+          </a:p>
+        </p:txBody>
+      </p:sp>
+      <p:sp>
+        <p:nvSpPr>
+          <p:cNvPr id="3" name="Rectangle 2"/>
+          <p:cNvSpPr/>
+          <p:nvPr/>
+        </p:nvSpPr>
+        <p:spPr>
+          <a:xfrm>
+            <a:off x="566928" y="1371600"/>
+            <a:ext cx="7315200" cy="25400"/>
+          </a:xfrm>
+          <a:prstGeom prst="rect">
+            <a:avLst/>
+          </a:prstGeom>
+          <a:solidFill>
+            <a:srgbClr val="C9D8EC"/>
+          </a:solidFill>
+          <a:ln>
+            <a:noFill/>
+          </a:ln>
+          <a:effectLst/>
+        </p:spPr>
+        <p:style>
+          <a:lnRef idx="1">
+            <a:schemeClr val="accent1"/>
+          </a:lnRef>
+          <a:fillRef idx="3">
+            <a:schemeClr val="accent1"/>
+          </a:fillRef>
+          <a:effectRef idx="2">
+            <a:schemeClr val="accent1"/>
+          </a:effectRef>
+          <a:fontRef idx="minor">
+            <a:schemeClr val="lt1"/>
+          </a:fontRef>
+        </p:style>
+        <p:txBody>
+          <a:bodyPr rtlCol="0" anchor="ctr"/>
+          <a:lstStyle/>
+          <a:p>
+            <a:pPr algn="ctr"/>
+          </a:p>
+        </p:txBody>
+      </p:sp>
+      <p:sp>
+        <p:nvSpPr>
+          <p:cNvPr id="4" name="TextBox 3"/>
+          <p:cNvSpPr txBox="1"/>
+          <p:nvPr/>
+        </p:nvSpPr>
+        <p:spPr>
+          <a:xfrm>
+            <a:off x="566928" y="960120"/>
+            <a:ext cx="5486400" cy="274320"/>
+          </a:xfrm>
+          <a:prstGeom prst="rect">
+            <a:avLst/>
+          </a:prstGeom>
+          <a:noFill/>
+        </p:spPr>
+        <p:txBody>
+          <a:bodyPr wrap="square" lIns="0" rIns="0" tIns="0" bIns="0">
+            <a:spAutoFit/>
+          </a:bodyPr>
+          <a:lstStyle/>
+          <a:p>
+            <a:pPr>
+              <a:spcBef>
+                <a:spcPts val="0"/>
+              </a:spcBef>
+              <a:spcAft>
+                <a:spcPts val="0"/>
+              </a:spcAft>
+            </a:pPr>
+            <a:r>
+              <a:rPr sz="1100" b="0" i="0">
+                <a:solidFill>
+                  <a:srgbClr val="C9D8EC"/>
+                </a:solidFill>
+                <a:latin typeface="Consolas"/>
+              </a:rPr>
+              <a:t>ACT III</a:t>
+            </a:r>
+          </a:p>
+        </p:txBody>
+      </p:sp>
+      <p:sp>
+        <p:nvSpPr>
+          <p:cNvPr id="5" name="TextBox 4"/>
+          <p:cNvSpPr txBox="1"/>
+          <p:nvPr/>
+        </p:nvSpPr>
+        <p:spPr>
+          <a:xfrm>
+            <a:off x="566928" y="1783080"/>
+            <a:ext cx="7223760" cy="1828800"/>
+          </a:xfrm>
+          <a:prstGeom prst="rect">
+            <a:avLst/>
+          </a:prstGeom>
+          <a:noFill/>
+        </p:spPr>
+        <p:txBody>
+          <a:bodyPr wrap="square" lIns="0" rIns="0" tIns="0" bIns="0">
+            <a:spAutoFit/>
+          </a:bodyPr>
+          <a:lstStyle/>
+          <a:p>
+            <a:pPr>
+              <a:lnSpc>
+                <a:spcPct val="102000"/>
+              </a:lnSpc>
+              <a:spcBef>
+                <a:spcPts val="0"/>
+              </a:spcBef>
+              <a:spcAft>
+                <a:spcPts val="0"/>
+              </a:spcAft>
+            </a:pPr>
+            <a:r>
+              <a:rPr sz="4000" b="0" i="0">
+                <a:solidFill>
+                  <a:srgbClr val="FCFCFB"/>
+                </a:solidFill>
+                <a:latin typeface="Georgia"/>
+              </a:rPr>
+              <a:t>Three domains, three ways a framework loses one</a:t>
+            </a:r>
+          </a:p>
+        </p:txBody>
+      </p:sp>
+      <p:sp>
+        <p:nvSpPr>
+          <p:cNvPr id="6" name="TextBox 5"/>
+          <p:cNvSpPr txBox="1"/>
+          <p:nvPr/>
+        </p:nvSpPr>
+        <p:spPr>
+          <a:xfrm>
+            <a:off x="566928" y="3886200"/>
+            <a:ext cx="6766560" cy="1463040"/>
+          </a:xfrm>
+          <a:prstGeom prst="rect">
+            <a:avLst/>
+          </a:prstGeom>
+          <a:noFill/>
+        </p:spPr>
+        <p:txBody>
+          <a:bodyPr wrap="square" lIns="0" rIns="0" tIns="0" bIns="0">
+            <a:spAutoFit/>
+          </a:bodyPr>
+          <a:lstStyle/>
+          <a:p>
+            <a:pPr>
+              <a:lnSpc>
+                <a:spcPct val="135000"/>
+              </a:lnSpc>
+              <a:spcBef>
+                <a:spcPts val="0"/>
+              </a:spcBef>
+              <a:spcAft>
+                <a:spcPts val="0"/>
+              </a:spcAft>
+            </a:pPr>
+            <a:r>
+              <a:rPr sz="1600" b="0" i="1">
+                <a:solidFill>
+                  <a:srgbClr val="9AA4B0"/>
+                </a:solidFill>
+                <a:latin typeface="Georgia"/>
+              </a:rPr>
+              <a:t>Put the three results together and they are not three findings about three domains. They are three distinct failure modes — and they need different fixes, which is the only reason the distinction matters.</a:t>
+            </a:r>
+          </a:p>
+        </p:txBody>
+      </p:sp>
+      <p:sp>
+        <p:nvSpPr>
+          <p:cNvPr id="7" name="TextBox 6"/>
+          <p:cNvSpPr txBox="1"/>
+          <p:nvPr/>
+        </p:nvSpPr>
+        <p:spPr>
+          <a:xfrm>
+            <a:off x="566928" y="5623560"/>
+            <a:ext cx="3503066" cy="914400"/>
+          </a:xfrm>
+          <a:prstGeom prst="rect">
+            <a:avLst/>
+          </a:prstGeom>
+          <a:noFill/>
+        </p:spPr>
+        <p:txBody>
+          <a:bodyPr wrap="square" lIns="0" rIns="0" tIns="0" bIns="0">
+            <a:spAutoFit/>
+          </a:bodyPr>
+          <a:lstStyle/>
+          <a:p>
+            <a:pPr>
+              <a:spcBef>
+                <a:spcPts val="0"/>
+              </a:spcBef>
+              <a:spcAft>
+                <a:spcPts val="400"/>
+              </a:spcAft>
+            </a:pPr>
+            <a:r>
+              <a:rPr sz="2200" b="0" i="0">
+                <a:solidFill>
+                  <a:srgbClr val="FCFCFB"/>
+                </a:solidFill>
+                <a:latin typeface="Consolas"/>
+              </a:rPr>
+              <a:t>Pooled</a:t>
+            </a:r>
+          </a:p>
+          <a:p>
+            <a:pPr>
+              <a:lnSpc>
+                <a:spcPct val="120000"/>
+              </a:lnSpc>
               <a:spcBef>
                 <a:spcPts val="0"/>
               </a:spcBef>
@@ -6237,40 +6255,59 @@
             <a:r>
               <a:rPr sz="1000" b="0" i="0">
                 <a:solidFill>
-                  <a:srgbClr val="A63A30"/>
+                  <a:srgbClr val="8A94A0"/>
+                </a:solidFill>
+                <a:latin typeface="Calibri"/>
+              </a:rPr>
+              <a:t>education: the right construct averaged away</a:t>
+            </a:r>
+          </a:p>
+        </p:txBody>
+      </p:sp>
+      <p:sp>
+        <p:nvSpPr>
+          <p:cNvPr id="8" name="TextBox 7"/>
+          <p:cNvSpPr txBox="1"/>
+          <p:nvPr/>
+        </p:nvSpPr>
+        <p:spPr>
+          <a:xfrm>
+            <a:off x="4344314" y="5623560"/>
+            <a:ext cx="3503066" cy="914400"/>
+          </a:xfrm>
+          <a:prstGeom prst="rect">
+            <a:avLst/>
+          </a:prstGeom>
+          <a:noFill/>
+        </p:spPr>
+        <p:txBody>
+          <a:bodyPr wrap="square" lIns="0" rIns="0" tIns="0" bIns="0">
+            <a:spAutoFit/>
+          </a:bodyPr>
+          <a:lstStyle/>
+          <a:p>
+            <a:pPr>
+              <a:spcBef>
+                <a:spcPts val="0"/>
+              </a:spcBef>
+              <a:spcAft>
+                <a:spcPts val="400"/>
+              </a:spcAft>
+            </a:pPr>
+            <a:r>
+              <a:rPr sz="2200" b="0" i="0">
+                <a:solidFill>
+                  <a:srgbClr val="FCFCFB"/>
                 </a:solidFill>
                 <a:latin typeface="Consolas"/>
               </a:rPr>
-              <a:t>WHY THE SDG TRUST SERIES CANNOT STAND IN</a:t>
-            </a:r>
-          </a:p>
-        </p:txBody>
-      </p:sp>
-      <p:sp>
-        <p:nvSpPr>
-          <p:cNvPr id="3" name="TextBox 2"/>
-          <p:cNvSpPr txBox="1"/>
-          <p:nvPr/>
-        </p:nvSpPr>
-        <p:spPr>
-          <a:xfrm>
-            <a:off x="566928" y="914400"/>
-            <a:ext cx="4160520" cy="1371600"/>
-          </a:xfrm>
-          <a:prstGeom prst="rect">
-            <a:avLst/>
-          </a:prstGeom>
-          <a:noFill/>
-        </p:spPr>
-        <p:txBody>
-          <a:bodyPr wrap="square" lIns="0" rIns="0" tIns="0" bIns="0">
-            <a:spAutoFit/>
-          </a:bodyPr>
-          <a:lstStyle/>
+              <a:t>Saturated</a:t>
+            </a:r>
+          </a:p>
           <a:p>
             <a:pPr>
               <a:lnSpc>
-                <a:spcPct val="108000"/>
+                <a:spcPct val="120000"/>
               </a:lnSpc>
               <a:spcBef>
                 <a:spcPts val="0"/>
@@ -6280,213 +6317,77 @@
               </a:spcAft>
             </a:pPr>
             <a:r>
-              <a:rPr sz="2300" b="0" i="0">
-                <a:solidFill>
-                  <a:srgbClr val="14171C"/>
-                </a:solidFill>
-                <a:latin typeface="Georgia"/>
-              </a:rPr>
-              <a:t>Institutional confidence does not survive an income control; interpersonal trust does</a:t>
-            </a:r>
-          </a:p>
-        </p:txBody>
-      </p:sp>
-      <p:sp>
-        <p:nvSpPr>
-          <p:cNvPr id="4" name="TextBox 3"/>
-          <p:cNvSpPr txBox="1"/>
-          <p:nvPr/>
-        </p:nvSpPr>
-        <p:spPr>
-          <a:xfrm>
-            <a:off x="566928" y="2331720"/>
-            <a:ext cx="4160520" cy="3840480"/>
-          </a:xfrm>
-          <a:prstGeom prst="rect">
-            <a:avLst/>
-          </a:prstGeom>
-          <a:noFill/>
-        </p:spPr>
-        <p:txBody>
-          <a:bodyPr wrap="square" lIns="0" rIns="0" tIns="0" bIns="0">
-            <a:spAutoFit/>
-          </a:bodyPr>
-          <a:lstStyle/>
+              <a:rPr sz="1000" b="0" i="0">
+                <a:solidFill>
+                  <a:srgbClr val="8A94A0"/>
+                </a:solidFill>
+                <a:latin typeface="Calibri"/>
+              </a:rPr>
+              <a:t>health: the chosen variable stopped varying</a:t>
+            </a:r>
+          </a:p>
+        </p:txBody>
+      </p:sp>
+      <p:sp>
+        <p:nvSpPr>
+          <p:cNvPr id="9" name="TextBox 8"/>
+          <p:cNvSpPr txBox="1"/>
+          <p:nvPr/>
+        </p:nvSpPr>
+        <p:spPr>
+          <a:xfrm>
+            <a:off x="8121700" y="5623560"/>
+            <a:ext cx="3503066" cy="914400"/>
+          </a:xfrm>
+          <a:prstGeom prst="rect">
+            <a:avLst/>
+          </a:prstGeom>
+          <a:noFill/>
+        </p:spPr>
+        <p:txBody>
+          <a:bodyPr wrap="square" lIns="0" rIns="0" tIns="0" bIns="0">
+            <a:spAutoFit/>
+          </a:bodyPr>
+          <a:lstStyle/>
+          <a:p>
+            <a:pPr>
+              <a:spcBef>
+                <a:spcPts val="0"/>
+              </a:spcBef>
+              <a:spcAft>
+                <a:spcPts val="400"/>
+              </a:spcAft>
+            </a:pPr>
+            <a:r>
+              <a:rPr sz="2200" b="0" i="0">
+                <a:solidFill>
+                  <a:srgbClr val="FCFCFB"/>
+                </a:solidFill>
+                <a:latin typeface="Consolas"/>
+              </a:rPr>
+              <a:t>Never collected</a:t>
+            </a:r>
+          </a:p>
           <a:p>
             <a:pPr>
               <a:lnSpc>
-                <a:spcPct val="132000"/>
+                <a:spcPct val="120000"/>
               </a:lnSpc>
               <a:spcBef>
                 <a:spcPts val="0"/>
               </a:spcBef>
               <a:spcAft>
-                <a:spcPts val="1100"/>
-              </a:spcAft>
-            </a:pPr>
-            <a:r>
-              <a:rPr sz="1150" b="0" i="0">
-                <a:solidFill>
-                  <a:srgbClr val="5A6068"/>
+                <a:spcPts val="0"/>
+              </a:spcAft>
+            </a:pPr>
+            <a:r>
+              <a:rPr sz="1000" b="0" i="0">
+                <a:solidFill>
+                  <a:srgbClr val="8A94A0"/>
                 </a:solidFill>
                 <a:latin typeface="Calibri"/>
               </a:rPr>
-              <a:t>Worth testing directly rather than asserting. Of the thirteen Goal 16 trust-adjacent series, nine can be tested cross-sectionally and four are significant. Then control for log GNI per capita: perceived bribery survives, but satisfaction with government services, healthcare and secondary education all vanish.</a:t>
-            </a:r>
-          </a:p>
-          <a:p>
-            <a:pPr>
-              <a:lnSpc>
-                <a:spcPct val="132000"/>
-              </a:lnSpc>
-              <a:spcBef>
-                <a:spcPts val="0"/>
-              </a:spcBef>
-              <a:spcAft>
-                <a:spcPts val="1100"/>
-              </a:spcAft>
-            </a:pPr>
-            <a:r>
-              <a:rPr sz="1150" b="0" i="0">
-                <a:solidFill>
-                  <a:srgbClr val="5A6068"/>
-                </a:solidFill>
-                <a:latin typeface="Calibri"/>
-              </a:rPr>
-              <a:t>That pattern is a known artefact of subjective institutional scales across income levels — the same question administered in richer and poorer countries produces response shifts unrelated to the construct. Interpersonal trust in the ESS does not behave this way.</a:t>
-            </a:r>
-          </a:p>
-          <a:p>
-            <a:pPr>
-              <a:lnSpc>
-                <a:spcPct val="132000"/>
-              </a:lnSpc>
-              <a:spcBef>
-                <a:spcPts val="0"/>
-              </a:spcBef>
-              <a:spcAft>
-                <a:spcPts val="1100"/>
-              </a:spcAft>
-            </a:pPr>
-            <a:r>
-              <a:rPr sz="1150" b="0" i="0">
-                <a:solidFill>
-                  <a:srgbClr val="5A6068"/>
-                </a:solidFill>
-                <a:latin typeface="Calibri"/>
-              </a:rPr>
-              <a:t>So this is not an execution failure in the SDG framework. It reflects what development frameworks are for: they measure institutions and systems. Trust between people is not an institution, and it does not show up when you measure one.</a:t>
-            </a:r>
-          </a:p>
-        </p:txBody>
-      </p:sp>
-      <p:sp>
-        <p:nvSpPr>
-          <p:cNvPr id="5" name="TextBox 4"/>
-          <p:cNvSpPr txBox="1"/>
-          <p:nvPr/>
-        </p:nvSpPr>
-        <p:spPr>
-          <a:xfrm>
-            <a:off x="11338560" y="6263640"/>
-            <a:ext cx="548640" cy="274320"/>
-          </a:xfrm>
-          <a:prstGeom prst="rect">
-            <a:avLst/>
-          </a:prstGeom>
-          <a:noFill/>
-        </p:spPr>
-        <p:txBody>
-          <a:bodyPr wrap="square" lIns="0" rIns="0" tIns="0" bIns="0">
-            <a:spAutoFit/>
-          </a:bodyPr>
-          <a:lstStyle/>
-          <a:p>
-            <a:pPr algn="r">
-              <a:spcBef>
-                <a:spcPts val="0"/>
-              </a:spcBef>
-              <a:spcAft>
-                <a:spcPts val="0"/>
-              </a:spcAft>
-            </a:pPr>
-            <a:r>
-              <a:rPr sz="1100" b="0" i="0">
-                <a:solidFill>
-                  <a:srgbClr val="868D96"/>
-                </a:solidFill>
-                <a:latin typeface="Consolas"/>
-              </a:rPr>
-              <a:t>II-a</a:t>
-            </a:r>
-          </a:p>
-        </p:txBody>
-      </p:sp>
-      <p:pic>
-        <p:nvPicPr>
-          <p:cNvPr id="6" name="Picture 5" descr="K1_sdg_trust_cross_section.png"/>
-          <p:cNvPicPr>
-            <a:picLocks noChangeAspect="1"/>
-          </p:cNvPicPr>
-          <p:nvPr/>
-        </p:nvPicPr>
-        <p:blipFill>
-          <a:blip r:embed="rId2"/>
-          <a:stretch>
-            <a:fillRect/>
-          </a:stretch>
-        </p:blipFill>
-        <p:spPr>
-          <a:xfrm>
-            <a:off x="5120640" y="1690377"/>
-            <a:ext cx="6537960" cy="3010902"/>
-          </a:xfrm>
-          <a:prstGeom prst="rect">
-            <a:avLst/>
-          </a:prstGeom>
-        </p:spPr>
-      </p:pic>
-      <p:sp>
-        <p:nvSpPr>
-          <p:cNvPr id="7" name="TextBox 6"/>
-          <p:cNvSpPr txBox="1"/>
-          <p:nvPr/>
-        </p:nvSpPr>
-        <p:spPr>
-          <a:xfrm>
-            <a:off x="5120640" y="5897880"/>
-            <a:ext cx="6537960" cy="731520"/>
-          </a:xfrm>
-          <a:prstGeom prst="rect">
-            <a:avLst/>
-          </a:prstGeom>
-          <a:noFill/>
-        </p:spPr>
-        <p:txBody>
-          <a:bodyPr wrap="square" lIns="0" rIns="0" tIns="0" bIns="0">
-            <a:spAutoFit/>
-          </a:bodyPr>
-          <a:lstStyle/>
-          <a:p>
-            <a:pPr>
-              <a:lnSpc>
-                <a:spcPct val="125000"/>
-              </a:lnSpc>
-              <a:spcBef>
-                <a:spcPts val="0"/>
-              </a:spcBef>
-              <a:spcAft>
-                <a:spcPts val="0"/>
-              </a:spcAft>
-            </a:pPr>
-            <a:r>
-              <a:rPr sz="900" b="0" i="0">
-                <a:solidFill>
-                  <a:srgbClr val="868D96"/>
-                </a:solidFill>
-                <a:latin typeface="Calibri"/>
-              </a:rPr>
-              <a:t>SDG16 trust series cross-sectionally. Panel (b): net of income, bribery persists and the satisfaction measures do not.</a:t>
+              <a:t>trust: no variable to choose between</a:t>
             </a:r>
           </a:p>
         </p:txBody>
@@ -7030,7 +6931,7 @@
                 </a:solidFill>
                 <a:latin typeface="Calibri"/>
               </a:rPr>
-              <a:t>At the levels, health and education carry the frameworks.</a:t>
+              <a:t>At the levels, education and health carry the frameworks.</a:t>
             </a:r>
           </a:p>
           <a:p>
@@ -7052,7 +6953,7 @@
                 </a:solidFill>
                 <a:latin typeface="Calibri"/>
               </a:rPr>
-              <a:t>The HDI's five components and the SDGs' seventeen goals, ranked. Health is 4th of 17. Education looks 12th — until you unpool it.</a:t>
+              <a:t>Both domains, across all three frameworks at once. Health is 4th of 17 SDG goals and the weakest HDI component; education looks 12th of 17 — until you unpool it.</a:t>
             </a:r>
           </a:p>
         </p:txBody>
@@ -7180,7 +7081,7 @@
                 </a:solidFill>
                 <a:latin typeface="Calibri"/>
               </a:rPr>
-              <a:t>Measure the same domains on people, and a third one appears.</a:t>
+              <a:t>Trust: the domain only people can report, and what it is worth.</a:t>
             </a:r>
           </a:p>
           <a:p>
@@ -7202,7 +7103,7 @@
                 </a:solidFill>
                 <a:latin typeface="Calibri"/>
               </a:rPr>
-              <a:t>Social trust joins health and education, ahead of education. And pooled for power, health and trust keep tracking wellbeing year to year where development composites stop.</a:t>
+              <a:t>Second strongest on people, ahead of education, and invisible to both development frameworks. It also survives differencing — worth +0.20 life-satisfaction points, with no person answering both questions.</a:t>
             </a:r>
           </a:p>
         </p:txBody>
@@ -7516,6 +7417,632 @@
 </file>
 
 <file path=ppt/slides/slide20.xml><?xml version="1.0" encoding="utf-8"?>
+<p:sld xmlns:a="http://schemas.openxmlformats.org/drawingml/2006/main" xmlns:p="http://schemas.openxmlformats.org/presentationml/2006/main" xmlns:r="http://schemas.openxmlformats.org/officeDocument/2006/relationships">
+  <p:cSld>
+    <p:bg>
+      <p:bgPr>
+        <a:solidFill>
+          <a:srgbClr val="FCFCFB"/>
+        </a:solidFill>
+        <a:effectLst/>
+      </p:bgPr>
+    </p:bg>
+    <p:spTree>
+      <p:nvGrpSpPr>
+        <p:cNvPr id="1" name=""/>
+        <p:cNvGrpSpPr/>
+        <p:nvPr/>
+      </p:nvGrpSpPr>
+      <p:grpSpPr/>
+      <p:sp>
+        <p:nvSpPr>
+          <p:cNvPr id="2" name="TextBox 1"/>
+          <p:cNvSpPr txBox="1"/>
+          <p:nvPr/>
+        </p:nvSpPr>
+        <p:spPr>
+          <a:xfrm>
+            <a:off x="566928" y="502920"/>
+            <a:ext cx="4160520" cy="274320"/>
+          </a:xfrm>
+          <a:prstGeom prst="rect">
+            <a:avLst/>
+          </a:prstGeom>
+          <a:noFill/>
+        </p:spPr>
+        <p:txBody>
+          <a:bodyPr wrap="square" lIns="0" rIns="0" tIns="0" bIns="0">
+            <a:spAutoFit/>
+          </a:bodyPr>
+          <a:lstStyle/>
+          <a:p>
+            <a:pPr>
+              <a:spcBef>
+                <a:spcPts val="0"/>
+              </a:spcBef>
+              <a:spcAft>
+                <a:spcPts val="0"/>
+              </a:spcAft>
+            </a:pPr>
+            <a:r>
+              <a:rPr sz="1000" b="0" i="0">
+                <a:solidFill>
+                  <a:srgbClr val="A63A30"/>
+                </a:solidFill>
+                <a:latin typeface="Consolas"/>
+              </a:rPr>
+              <a:t>THE SYNTHESIS</a:t>
+            </a:r>
+          </a:p>
+        </p:txBody>
+      </p:sp>
+      <p:sp>
+        <p:nvSpPr>
+          <p:cNvPr id="3" name="TextBox 2"/>
+          <p:cNvSpPr txBox="1"/>
+          <p:nvPr/>
+        </p:nvSpPr>
+        <p:spPr>
+          <a:xfrm>
+            <a:off x="566928" y="914400"/>
+            <a:ext cx="4160520" cy="1371600"/>
+          </a:xfrm>
+          <a:prstGeom prst="rect">
+            <a:avLst/>
+          </a:prstGeom>
+          <a:noFill/>
+        </p:spPr>
+        <p:txBody>
+          <a:bodyPr wrap="square" lIns="0" rIns="0" tIns="0" bIns="0">
+            <a:spAutoFit/>
+          </a:bodyPr>
+          <a:lstStyle/>
+          <a:p>
+            <a:pPr>
+              <a:lnSpc>
+                <a:spcPct val="108000"/>
+              </a:lnSpc>
+              <a:spcBef>
+                <a:spcPts val="0"/>
+              </a:spcBef>
+              <a:spcAft>
+                <a:spcPts val="0"/>
+              </a:spcAft>
+            </a:pPr>
+            <a:r>
+              <a:rPr sz="2300" b="0" i="0">
+                <a:solidFill>
+                  <a:srgbClr val="14171C"/>
+                </a:solidFill>
+                <a:latin typeface="Georgia"/>
+              </a:rPr>
+              <a:t>A pooling problem, a saturation problem, and a coverage gap</a:t>
+            </a:r>
+          </a:p>
+        </p:txBody>
+      </p:sp>
+      <p:sp>
+        <p:nvSpPr>
+          <p:cNvPr id="4" name="TextBox 3"/>
+          <p:cNvSpPr txBox="1"/>
+          <p:nvPr/>
+        </p:nvSpPr>
+        <p:spPr>
+          <a:xfrm>
+            <a:off x="566928" y="2331720"/>
+            <a:ext cx="4160520" cy="3840480"/>
+          </a:xfrm>
+          <a:prstGeom prst="rect">
+            <a:avLst/>
+          </a:prstGeom>
+          <a:noFill/>
+        </p:spPr>
+        <p:txBody>
+          <a:bodyPr wrap="square" lIns="0" rIns="0" tIns="0" bIns="0">
+            <a:spAutoFit/>
+          </a:bodyPr>
+          <a:lstStyle/>
+          <a:p>
+            <a:pPr>
+              <a:lnSpc>
+                <a:spcPct val="132000"/>
+              </a:lnSpc>
+              <a:spcBef>
+                <a:spcPts val="0"/>
+              </a:spcBef>
+              <a:spcAft>
+                <a:spcPts val="1100"/>
+              </a:spcAft>
+            </a:pPr>
+            <a:r>
+              <a:rPr sz="1150" b="0" i="0">
+                <a:solidFill>
+                  <a:srgbClr val="5A6068"/>
+                </a:solidFill>
+                <a:latin typeface="Calibri"/>
+              </a:rPr>
+              <a:t>Education is a pooling problem. The framework measures the right thing — access and participation, 12.7% — and then averages it together with 18 parity-ratio series that carry no wellbeing signal, landing at 3.3%. The signal is present in the data and absent from the published number.</a:t>
+            </a:r>
+          </a:p>
+          <a:p>
+            <a:pPr>
+              <a:lnSpc>
+                <a:spcPct val="132000"/>
+              </a:lnSpc>
+              <a:spcBef>
+                <a:spcPts val="0"/>
+              </a:spcBef>
+              <a:spcAft>
+                <a:spcPts val="1100"/>
+              </a:spcAft>
+            </a:pPr>
+            <a:r>
+              <a:rPr sz="1150" b="0" i="0">
+                <a:solidFill>
+                  <a:srgbClr val="5A6068"/>
+                </a:solidFill>
+                <a:latin typeface="Calibri"/>
+              </a:rPr>
+              <a:t>Health is a saturation problem. The domain is the strongest of the three on people, but the HDI's proxy for it has run out of range across the countries it covers, so it comes last of five components. A different variable in the same domain reverses the result.</a:t>
+            </a:r>
+          </a:p>
+          <a:p>
+            <a:pPr>
+              <a:lnSpc>
+                <a:spcPct val="132000"/>
+              </a:lnSpc>
+              <a:spcBef>
+                <a:spcPts val="0"/>
+              </a:spcBef>
+              <a:spcAft>
+                <a:spcPts val="1100"/>
+              </a:spcAft>
+            </a:pPr>
+            <a:r>
+              <a:rPr sz="1150" b="0" i="0">
+                <a:solidFill>
+                  <a:srgbClr val="5A6068"/>
+                </a:solidFill>
+                <a:latin typeface="Calibri"/>
+              </a:rPr>
+              <a:t>Trust is a coverage gap, and it is the one that no amount of better construction reaches. You cannot unpool a series that does not exist or re-specify a variable that was never collected. The only fix available is deciding to collect it.</a:t>
+            </a:r>
+          </a:p>
+        </p:txBody>
+      </p:sp>
+      <p:sp>
+        <p:nvSpPr>
+          <p:cNvPr id="5" name="TextBox 4"/>
+          <p:cNvSpPr txBox="1"/>
+          <p:nvPr/>
+        </p:nvSpPr>
+        <p:spPr>
+          <a:xfrm>
+            <a:off x="11338560" y="6263640"/>
+            <a:ext cx="548640" cy="274320"/>
+          </a:xfrm>
+          <a:prstGeom prst="rect">
+            <a:avLst/>
+          </a:prstGeom>
+          <a:noFill/>
+        </p:spPr>
+        <p:txBody>
+          <a:bodyPr wrap="square" lIns="0" rIns="0" tIns="0" bIns="0">
+            <a:spAutoFit/>
+          </a:bodyPr>
+          <a:lstStyle/>
+          <a:p>
+            <a:pPr algn="r">
+              <a:spcBef>
+                <a:spcPts val="0"/>
+              </a:spcBef>
+              <a:spcAft>
+                <a:spcPts val="0"/>
+              </a:spcAft>
+            </a:pPr>
+            <a:r>
+              <a:rPr sz="1100" b="0" i="0">
+                <a:solidFill>
+                  <a:srgbClr val="868D96"/>
+                </a:solidFill>
+                <a:latin typeface="Consolas"/>
+              </a:rPr>
+              <a:t>III</a:t>
+            </a:r>
+          </a:p>
+        </p:txBody>
+      </p:sp>
+      <p:pic>
+        <p:nvPicPr>
+          <p:cNvPr id="6" name="Picture 5" descr="domain_scorecard.png"/>
+          <p:cNvPicPr>
+            <a:picLocks noChangeAspect="1"/>
+          </p:cNvPicPr>
+          <p:nvPr/>
+        </p:nvPicPr>
+        <p:blipFill>
+          <a:blip r:embed="rId2"/>
+          <a:stretch>
+            <a:fillRect/>
+          </a:stretch>
+        </p:blipFill>
+        <p:spPr>
+          <a:xfrm>
+            <a:off x="5120640" y="1469807"/>
+            <a:ext cx="6537960" cy="3452042"/>
+          </a:xfrm>
+          <a:prstGeom prst="rect">
+            <a:avLst/>
+          </a:prstGeom>
+        </p:spPr>
+      </p:pic>
+      <p:sp>
+        <p:nvSpPr>
+          <p:cNvPr id="7" name="TextBox 6"/>
+          <p:cNvSpPr txBox="1"/>
+          <p:nvPr/>
+        </p:nvSpPr>
+        <p:spPr>
+          <a:xfrm>
+            <a:off x="5120640" y="5897880"/>
+            <a:ext cx="6537960" cy="731520"/>
+          </a:xfrm>
+          <a:prstGeom prst="rect">
+            <a:avLst/>
+          </a:prstGeom>
+          <a:noFill/>
+        </p:spPr>
+        <p:txBody>
+          <a:bodyPr wrap="square" lIns="0" rIns="0" tIns="0" bIns="0">
+            <a:spAutoFit/>
+          </a:bodyPr>
+          <a:lstStyle/>
+          <a:p>
+            <a:pPr>
+              <a:lnSpc>
+                <a:spcPct val="125000"/>
+              </a:lnSpc>
+              <a:spcBef>
+                <a:spcPts val="0"/>
+              </a:spcBef>
+              <a:spcAft>
+                <a:spcPts val="0"/>
+              </a:spcAft>
+            </a:pPr>
+            <a:r>
+              <a:rPr sz="900" b="0" i="0">
+                <a:solidFill>
+                  <a:srgbClr val="868D96"/>
+                </a:solidFill>
+                <a:latin typeface="Calibri"/>
+              </a:rPr>
+              <a:t>Which framework can test which domain, and whether the test returns a signal. Grey is not a weak result — it is no result available.</a:t>
+            </a:r>
+          </a:p>
+        </p:txBody>
+      </p:sp>
+    </p:spTree>
+  </p:cSld>
+  <p:clrMapOvr>
+    <a:masterClrMapping/>
+  </p:clrMapOvr>
+</p:sld>
+</file>
+
+<file path=ppt/slides/slide21.xml><?xml version="1.0" encoding="utf-8"?>
+<p:sld xmlns:a="http://schemas.openxmlformats.org/drawingml/2006/main" xmlns:p="http://schemas.openxmlformats.org/presentationml/2006/main" xmlns:r="http://schemas.openxmlformats.org/officeDocument/2006/relationships">
+  <p:cSld>
+    <p:bg>
+      <p:bgPr>
+        <a:solidFill>
+          <a:srgbClr val="FCFCFB"/>
+        </a:solidFill>
+        <a:effectLst/>
+      </p:bgPr>
+    </p:bg>
+    <p:spTree>
+      <p:nvGrpSpPr>
+        <p:cNvPr id="1" name=""/>
+        <p:cNvGrpSpPr/>
+        <p:nvPr/>
+      </p:nvGrpSpPr>
+      <p:grpSpPr/>
+      <p:sp>
+        <p:nvSpPr>
+          <p:cNvPr id="2" name="TextBox 1"/>
+          <p:cNvSpPr txBox="1"/>
+          <p:nvPr/>
+        </p:nvSpPr>
+        <p:spPr>
+          <a:xfrm>
+            <a:off x="566928" y="502920"/>
+            <a:ext cx="4160520" cy="274320"/>
+          </a:xfrm>
+          <a:prstGeom prst="rect">
+            <a:avLst/>
+          </a:prstGeom>
+          <a:noFill/>
+        </p:spPr>
+        <p:txBody>
+          <a:bodyPr wrap="square" lIns="0" rIns="0" tIns="0" bIns="0">
+            <a:spAutoFit/>
+          </a:bodyPr>
+          <a:lstStyle/>
+          <a:p>
+            <a:pPr>
+              <a:spcBef>
+                <a:spcPts val="0"/>
+              </a:spcBef>
+              <a:spcAft>
+                <a:spcPts val="0"/>
+              </a:spcAft>
+            </a:pPr>
+            <a:r>
+              <a:rPr sz="1000" b="0" i="0">
+                <a:solidFill>
+                  <a:srgbClr val="A63A30"/>
+                </a:solidFill>
+                <a:latin typeface="Consolas"/>
+              </a:rPr>
+              <a:t>WHAT SURVIVES WHICH METHOD</a:t>
+            </a:r>
+          </a:p>
+        </p:txBody>
+      </p:sp>
+      <p:sp>
+        <p:nvSpPr>
+          <p:cNvPr id="3" name="TextBox 2"/>
+          <p:cNvSpPr txBox="1"/>
+          <p:nvPr/>
+        </p:nvSpPr>
+        <p:spPr>
+          <a:xfrm>
+            <a:off x="566928" y="914400"/>
+            <a:ext cx="4160520" cy="1371600"/>
+          </a:xfrm>
+          <a:prstGeom prst="rect">
+            <a:avLst/>
+          </a:prstGeom>
+          <a:noFill/>
+        </p:spPr>
+        <p:txBody>
+          <a:bodyPr wrap="square" lIns="0" rIns="0" tIns="0" bIns="0">
+            <a:spAutoFit/>
+          </a:bodyPr>
+          <a:lstStyle/>
+          <a:p>
+            <a:pPr>
+              <a:lnSpc>
+                <a:spcPct val="108000"/>
+              </a:lnSpc>
+              <a:spcBef>
+                <a:spcPts val="0"/>
+              </a:spcBef>
+              <a:spcAft>
+                <a:spcPts val="0"/>
+              </a:spcAft>
+            </a:pPr>
+            <a:r>
+              <a:rPr sz="2300" b="0" i="0">
+                <a:solidFill>
+                  <a:srgbClr val="14171C"/>
+                </a:solidFill>
+                <a:latin typeface="Georgia"/>
+              </a:rPr>
+              <a:t>Health is robust to how you measure it. Trust only appears when you ask people.</a:t>
+            </a:r>
+          </a:p>
+        </p:txBody>
+      </p:sp>
+      <p:sp>
+        <p:nvSpPr>
+          <p:cNvPr id="4" name="TextBox 3"/>
+          <p:cNvSpPr txBox="1"/>
+          <p:nvPr/>
+        </p:nvSpPr>
+        <p:spPr>
+          <a:xfrm>
+            <a:off x="566928" y="2331720"/>
+            <a:ext cx="4160520" cy="3840480"/>
+          </a:xfrm>
+          <a:prstGeom prst="rect">
+            <a:avLst/>
+          </a:prstGeom>
+          <a:noFill/>
+        </p:spPr>
+        <p:txBody>
+          <a:bodyPr wrap="square" lIns="0" rIns="0" tIns="0" bIns="0">
+            <a:spAutoFit/>
+          </a:bodyPr>
+          <a:lstStyle/>
+          <a:p>
+            <a:pPr>
+              <a:lnSpc>
+                <a:spcPct val="132000"/>
+              </a:lnSpc>
+              <a:spcBef>
+                <a:spcPts val="0"/>
+              </a:spcBef>
+              <a:spcAft>
+                <a:spcPts val="1100"/>
+              </a:spcAft>
+            </a:pPr>
+            <a:r>
+              <a:rPr sz="1150" b="0" i="0">
+                <a:solidFill>
+                  <a:srgbClr val="5A6068"/>
+                </a:solidFill>
+                <a:latin typeface="Calibri"/>
+              </a:rPr>
+              <a:t>One more cut, because it separates the failure modes cleanly. Health registers in administrative sources (SDG3, 11.5%) and in self-reported ones (ESS, median R² 0.092) alike — it is robust to measurement method, and the HDI's weak result is specific to life expectancy rather than to the domain.</a:t>
+            </a:r>
+          </a:p>
+          <a:p>
+            <a:pPr>
+              <a:lnSpc>
+                <a:spcPct val="132000"/>
+              </a:lnSpc>
+              <a:spcBef>
+                <a:spcPts val="0"/>
+              </a:spcBef>
+              <a:spcAft>
+                <a:spcPts val="1100"/>
+              </a:spcAft>
+            </a:pPr>
+            <a:r>
+              <a:rPr sz="1150" b="0" i="0">
+                <a:solidFill>
+                  <a:srgbClr val="5A6068"/>
+                </a:solidFill>
+                <a:latin typeface="Calibri"/>
+              </a:rPr>
+              <a:t>Education registers in both too, once unpooled, so its problem is construction rather than method. Trust registers in one and only one: 97% of ESS countries against 1.5% of SDG16 country-indicator pairs measuring a different construct.</a:t>
+            </a:r>
+          </a:p>
+          <a:p>
+            <a:pPr>
+              <a:lnSpc>
+                <a:spcPct val="132000"/>
+              </a:lnSpc>
+              <a:spcBef>
+                <a:spcPts val="0"/>
+              </a:spcBef>
+              <a:spcAft>
+                <a:spcPts val="1100"/>
+              </a:spcAft>
+            </a:pPr>
+            <a:r>
+              <a:rPr sz="1150" b="0" i="0">
+                <a:solidFill>
+                  <a:srgbClr val="5A6068"/>
+                </a:solidFill>
+                <a:latin typeface="Calibri"/>
+              </a:rPr>
+              <a:t>That asymmetry is the argument for why level of measurement matters, and not just which indicator you pick. Some things about a life are legible in national aggregates. Whether you think your neighbours can be trusted is not one of them.</a:t>
+            </a:r>
+          </a:p>
+        </p:txBody>
+      </p:sp>
+      <p:sp>
+        <p:nvSpPr>
+          <p:cNvPr id="5" name="TextBox 4"/>
+          <p:cNvSpPr txBox="1"/>
+          <p:nvPr/>
+        </p:nvSpPr>
+        <p:spPr>
+          <a:xfrm>
+            <a:off x="11338560" y="6263640"/>
+            <a:ext cx="548640" cy="274320"/>
+          </a:xfrm>
+          <a:prstGeom prst="rect">
+            <a:avLst/>
+          </a:prstGeom>
+          <a:noFill/>
+        </p:spPr>
+        <p:txBody>
+          <a:bodyPr wrap="square" lIns="0" rIns="0" tIns="0" bIns="0">
+            <a:spAutoFit/>
+          </a:bodyPr>
+          <a:lstStyle/>
+          <a:p>
+            <a:pPr algn="r">
+              <a:spcBef>
+                <a:spcPts val="0"/>
+              </a:spcBef>
+              <a:spcAft>
+                <a:spcPts val="0"/>
+              </a:spcAft>
+            </a:pPr>
+            <a:r>
+              <a:rPr sz="1100" b="0" i="0">
+                <a:solidFill>
+                  <a:srgbClr val="868D96"/>
+                </a:solidFill>
+                <a:latin typeface="Consolas"/>
+              </a:rPr>
+              <a:t>III</a:t>
+            </a:r>
+          </a:p>
+        </p:txBody>
+      </p:sp>
+      <p:pic>
+        <p:nvPicPr>
+          <p:cNvPr id="6" name="Picture 5" descr="health_trust_corroboration.png"/>
+          <p:cNvPicPr>
+            <a:picLocks noChangeAspect="1"/>
+          </p:cNvPicPr>
+          <p:nvPr/>
+        </p:nvPicPr>
+        <p:blipFill>
+          <a:blip r:embed="rId2"/>
+          <a:stretch>
+            <a:fillRect/>
+          </a:stretch>
+        </p:blipFill>
+        <p:spPr>
+          <a:xfrm>
+            <a:off x="5120640" y="1858518"/>
+            <a:ext cx="6537960" cy="2674620"/>
+          </a:xfrm>
+          <a:prstGeom prst="rect">
+            <a:avLst/>
+          </a:prstGeom>
+        </p:spPr>
+      </p:pic>
+      <p:sp>
+        <p:nvSpPr>
+          <p:cNvPr id="7" name="TextBox 6"/>
+          <p:cNvSpPr txBox="1"/>
+          <p:nvPr/>
+        </p:nvSpPr>
+        <p:spPr>
+          <a:xfrm>
+            <a:off x="5120640" y="5897880"/>
+            <a:ext cx="6537960" cy="731520"/>
+          </a:xfrm>
+          <a:prstGeom prst="rect">
+            <a:avLst/>
+          </a:prstGeom>
+          <a:noFill/>
+        </p:spPr>
+        <p:txBody>
+          <a:bodyPr wrap="square" lIns="0" rIns="0" tIns="0" bIns="0">
+            <a:spAutoFit/>
+          </a:bodyPr>
+          <a:lstStyle/>
+          <a:p>
+            <a:pPr>
+              <a:lnSpc>
+                <a:spcPct val="125000"/>
+              </a:lnSpc>
+              <a:spcBef>
+                <a:spcPts val="0"/>
+              </a:spcBef>
+              <a:spcAft>
+                <a:spcPts val="0"/>
+              </a:spcAft>
+            </a:pPr>
+            <a:r>
+              <a:rPr sz="900" b="0" i="0">
+                <a:solidFill>
+                  <a:srgbClr val="868D96"/>
+                </a:solidFill>
+                <a:latin typeface="Calibri"/>
+              </a:rPr>
+              <a:t>Health corroborates across administrative and self-reported sources. Trust appears only in individual-level data.</a:t>
+            </a:r>
+          </a:p>
+        </p:txBody>
+      </p:sp>
+    </p:spTree>
+  </p:cSld>
+  <p:clrMapOvr>
+    <a:masterClrMapping/>
+  </p:clrMapOvr>
+</p:sld>
+</file>
+
+<file path=ppt/slides/slide22.xml><?xml version="1.0" encoding="utf-8"?>
 <p:sld xmlns:a="http://schemas.openxmlformats.org/drawingml/2006/main" xmlns:p="http://schemas.openxmlformats.org/presentationml/2006/main" xmlns:r="http://schemas.openxmlformats.org/officeDocument/2006/relationships">
   <p:cSld>
     <p:bg>
@@ -7614,7 +8141,7 @@
                 </a:solidFill>
                 <a:latin typeface="Consolas"/>
               </a:rPr>
-              <a:t>WHERE ACT II-A LEAVES US</a:t>
+              <a:t>WHERE ACT III LEAVES US</a:t>
             </a:r>
           </a:p>
         </p:txBody>
@@ -7659,7 +8186,7 @@
                 </a:solidFill>
                 <a:latin typeface="Georgia"/>
               </a:rPr>
-              <a:t>Health, trust and education are all significant on people, in almost every country, and interpersonal trust — the one domain neither framework collects — outranks education. Pooled for power, health and trust also survive differencing where the HDI does not, and survive a split-half test that rules out the same people answering both questions. The collapse was never about differencing; it was about what the frameworks chose to measure.</a:t>
+              <a:t>None of this is a criticism of frameworks built to track development. It is the observation that which domain looks consequential for lived experience depends on construction choices made for other reasons — that one domain is missing outright, and that the domain measures track wellbeing dynamically in a way the composites do not.</a:t>
             </a:r>
           </a:p>
         </p:txBody>
@@ -7672,7 +8199,7 @@
 </p:sld>
 </file>
 
-<file path=ppt/slides/slide21.xml><?xml version="1.0" encoding="utf-8"?>
+<file path=ppt/slides/slide23.xml><?xml version="1.0" encoding="utf-8"?>
 <p:sld xmlns:a="http://schemas.openxmlformats.org/drawingml/2006/main" xmlns:p="http://schemas.openxmlformats.org/presentationml/2006/main" xmlns:r="http://schemas.openxmlformats.org/officeDocument/2006/relationships">
   <p:cSld>
     <p:bg>
@@ -7727,7 +8254,7 @@
                 </a:solidFill>
                 <a:latin typeface="Georgia"/>
               </a:rPr>
-              <a:t>III</a:t>
+              <a:t>IV</a:t>
             </a:r>
           </a:p>
         </p:txBody>
@@ -7813,7 +8340,7 @@
                 </a:solidFill>
                 <a:latin typeface="Consolas"/>
               </a:rPr>
-              <a:t>ACT III</a:t>
+              <a:t>ACT IV</a:t>
             </a:r>
           </a:p>
         </p:txBody>
@@ -7858,7 +8385,7 @@
                 </a:solidFill>
                 <a:latin typeface="Georgia"/>
               </a:rPr>
-              <a:t>Three domains, three ways a framework loses one</a:t>
+              <a:t>What this could mean for development frameworks</a:t>
             </a:r>
           </a:p>
         </p:txBody>
@@ -7903,7 +8430,7 @@
                 </a:solidFill>
                 <a:latin typeface="Georgia"/>
               </a:rPr>
-              <a:t>Put the three results together and they are not three findings about three domains. They are three distinct failure modes — and they need different fixes, which is the only reason the distinction matters.</a:t>
+              <a:t>The SDGs and the HDI do the job they were built for, and none of this evidence says otherwise. The narrower claim is that they may not be capturing what shapes lived experience at the individual level — and that the evidence points to reasonably specific things one could do about it.</a:t>
             </a:r>
           </a:p>
         </p:txBody>
@@ -7945,7 +8472,7 @@
                 </a:solidFill>
                 <a:latin typeface="Consolas"/>
               </a:rPr>
-              <a:t>Pooled</a:t>
+              <a:t>Unpool</a:t>
             </a:r>
           </a:p>
           <a:p>
@@ -7967,7 +8494,7 @@
                 </a:solidFill>
                 <a:latin typeface="Calibri"/>
               </a:rPr>
-              <a:t>education: the right construct averaged away</a:t>
+              <a:t>report SDG4 access separately from parity ratios</a:t>
             </a:r>
           </a:p>
         </p:txBody>
@@ -8009,7 +8536,7 @@
                 </a:solidFill>
                 <a:latin typeface="Consolas"/>
               </a:rPr>
-              <a:t>Saturated</a:t>
+              <a:t>Re-specify</a:t>
             </a:r>
           </a:p>
           <a:p>
@@ -8031,7 +8558,7 @@
                 </a:solidFill>
                 <a:latin typeface="Calibri"/>
               </a:rPr>
-              <a:t>health: the chosen variable stopped varying</a:t>
+              <a:t>a health variable that still varies where it is used</a:t>
             </a:r>
           </a:p>
         </p:txBody>
@@ -8073,7 +8600,7 @@
                 </a:solidFill>
                 <a:latin typeface="Consolas"/>
               </a:rPr>
-              <a:t>Never collected</a:t>
+              <a:t>Collect</a:t>
             </a:r>
           </a:p>
           <a:p>
@@ -8095,7 +8622,7 @@
                 </a:solidFill>
                 <a:latin typeface="Calibri"/>
               </a:rPr>
-              <a:t>trust: no variable to choose between</a:t>
+              <a:t>interpersonal trust, or link to a survey that has it</a:t>
             </a:r>
           </a:p>
         </p:txBody>
@@ -8108,7 +8635,7 @@
 </p:sld>
 </file>
 
-<file path=ppt/slides/slide22.xml><?xml version="1.0" encoding="utf-8"?>
+<file path=ppt/slides/slide24.xml><?xml version="1.0" encoding="utf-8"?>
 <p:sld xmlns:a="http://schemas.openxmlformats.org/drawingml/2006/main" xmlns:p="http://schemas.openxmlformats.org/presentationml/2006/main" xmlns:r="http://schemas.openxmlformats.org/officeDocument/2006/relationships">
   <p:cSld>
     <p:bg>
@@ -8135,7 +8662,7 @@
         <p:spPr>
           <a:xfrm>
             <a:off x="566928" y="502920"/>
-            <a:ext cx="4160520" cy="274320"/>
+            <a:ext cx="8595360" cy="274320"/>
           </a:xfrm>
           <a:prstGeom prst="rect">
             <a:avLst/>
@@ -8163,7 +8690,7 @@
                 </a:solidFill>
                 <a:latin typeface="Consolas"/>
               </a:rPr>
-              <a:t>THE SYNTHESIS</a:t>
+              <a:t>THE DISCONNECT</a:t>
             </a:r>
           </a:p>
         </p:txBody>
@@ -8177,7 +8704,7 @@
         <p:spPr>
           <a:xfrm>
             <a:off x="566928" y="914400"/>
-            <a:ext cx="4160520" cy="1371600"/>
+            <a:ext cx="8595360" cy="1371600"/>
           </a:xfrm>
           <a:prstGeom prst="rect">
             <a:avLst/>
@@ -8202,13 +8729,13 @@
               </a:spcAft>
             </a:pPr>
             <a:r>
-              <a:rPr sz="2300" b="0" i="0">
+              <a:rPr sz="2700" b="0" i="0">
                 <a:solidFill>
                   <a:srgbClr val="14171C"/>
                 </a:solidFill>
                 <a:latin typeface="Georgia"/>
               </a:rPr>
-              <a:t>A pooling problem, a saturation problem, and a coverage gap</a:t>
+              <a:t>Two different questions, and only one of them is being measured</a:t>
             </a:r>
           </a:p>
         </p:txBody>
@@ -8221,8 +8748,8 @@
         </p:nvSpPr>
         <p:spPr>
           <a:xfrm>
-            <a:off x="566928" y="2331720"/>
-            <a:ext cx="4160520" cy="3840480"/>
+            <a:off x="566928" y="2286000"/>
+            <a:ext cx="8595360" cy="3840480"/>
           </a:xfrm>
           <a:prstGeom prst="rect">
             <a:avLst/>
@@ -8247,13 +8774,13 @@
               </a:spcAft>
             </a:pPr>
             <a:r>
-              <a:rPr sz="1150" b="0" i="0">
+              <a:rPr sz="1400" b="0" i="0">
                 <a:solidFill>
                   <a:srgbClr val="5A6068"/>
                 </a:solidFill>
                 <a:latin typeface="Calibri"/>
               </a:rPr>
-              <a:t>Education is a pooling problem. The framework measures the right thing — access and participation, 12.7% — and then averages it together with 18 parity-ratio series that carry no wellbeing signal, landing at 3.3%. The signal is present in the data and absent from the published number.</a:t>
+              <a:t>The shape of what follows, before the detail. Two of the three domains are already inside these frameworks — health, and the access half of education — and on this evidence they are the two that track lived experience. The suggestion is not to add a wellbeing pillar but to let those two carry that weight explicitly: elevate them as wellbeing-relevant highlights, measured with variables that still vary, with social trust flagged as a likely third that neither framework can currently see.</a:t>
             </a:r>
           </a:p>
           <a:p>
@@ -8269,13 +8796,13 @@
               </a:spcAft>
             </a:pPr>
             <a:r>
-              <a:rPr sz="1150" b="0" i="0">
+              <a:rPr sz="1400" b="0" i="0">
                 <a:solidFill>
                   <a:srgbClr val="5A6068"/>
                 </a:solidFill>
                 <a:latin typeface="Calibri"/>
               </a:rPr>
-              <a:t>Health is a saturation problem. The domain is the strongest of the three on people, but the HDI's proxy for it has run out of range across the countries it covers, so it comes last of five components. A different variable in the same domain reverses the result.</a:t>
+              <a:t>'How is development progressing?' and 'what shapes how people experience their lives?' are not the same question, and the frameworks were built to answer the first. Indicators were chosen before the second was systematically testable, at an aggregate level, on annual or slower cycles. That is scope, not failure.</a:t>
             </a:r>
           </a:p>
           <a:p>
@@ -8291,13 +8818,13 @@
               </a:spcAft>
             </a:pPr>
             <a:r>
-              <a:rPr sz="1150" b="0" i="0">
+              <a:rPr sz="1400" b="0" i="0">
                 <a:solidFill>
                   <a:srgbClr val="5A6068"/>
                 </a:solidFill>
                 <a:latin typeface="Calibri"/>
               </a:rPr>
-              <a:t>Trust is a coverage gap, and it is the one that no amount of better construction reaches. You cannot unpool a series that does not exist or re-specify a variable that was never collected. The only fix available is deciding to collect it.</a:t>
+              <a:t>But the consequence is that a framework can be working exactly as designed and still be a poor guide to lived experience. Two of the three domains that predict life satisfaction in the ESS are present in the frameworks and obscured by construction choices; the third is not present at all. None of that shows up in a framework's own diagnostics, because nothing in those diagnostics is asking about wellbeing.</a:t>
             </a:r>
           </a:p>
         </p:txBody>
@@ -8339,76 +8866,7 @@
                 </a:solidFill>
                 <a:latin typeface="Consolas"/>
               </a:rPr>
-              <a:t>III</a:t>
-            </a:r>
-          </a:p>
-        </p:txBody>
-      </p:sp>
-      <p:pic>
-        <p:nvPicPr>
-          <p:cNvPr id="6" name="Picture 5" descr="domain_scorecard.png"/>
-          <p:cNvPicPr>
-            <a:picLocks noChangeAspect="1"/>
-          </p:cNvPicPr>
-          <p:nvPr/>
-        </p:nvPicPr>
-        <p:blipFill>
-          <a:blip r:embed="rId2"/>
-          <a:stretch>
-            <a:fillRect/>
-          </a:stretch>
-        </p:blipFill>
-        <p:spPr>
-          <a:xfrm>
-            <a:off x="5120640" y="1469807"/>
-            <a:ext cx="6537960" cy="3452042"/>
-          </a:xfrm>
-          <a:prstGeom prst="rect">
-            <a:avLst/>
-          </a:prstGeom>
-        </p:spPr>
-      </p:pic>
-      <p:sp>
-        <p:nvSpPr>
-          <p:cNvPr id="7" name="TextBox 6"/>
-          <p:cNvSpPr txBox="1"/>
-          <p:nvPr/>
-        </p:nvSpPr>
-        <p:spPr>
-          <a:xfrm>
-            <a:off x="5120640" y="5897880"/>
-            <a:ext cx="6537960" cy="731520"/>
-          </a:xfrm>
-          <a:prstGeom prst="rect">
-            <a:avLst/>
-          </a:prstGeom>
-          <a:noFill/>
-        </p:spPr>
-        <p:txBody>
-          <a:bodyPr wrap="square" lIns="0" rIns="0" tIns="0" bIns="0">
-            <a:spAutoFit/>
-          </a:bodyPr>
-          <a:lstStyle/>
-          <a:p>
-            <a:pPr>
-              <a:lnSpc>
-                <a:spcPct val="125000"/>
-              </a:lnSpc>
-              <a:spcBef>
-                <a:spcPts val="0"/>
-              </a:spcBef>
-              <a:spcAft>
-                <a:spcPts val="0"/>
-              </a:spcAft>
-            </a:pPr>
-            <a:r>
-              <a:rPr sz="900" b="0" i="0">
-                <a:solidFill>
-                  <a:srgbClr val="868D96"/>
-                </a:solidFill>
-                <a:latin typeface="Calibri"/>
-              </a:rPr>
-              <a:t>Which framework can test which domain, and whether the test returns a signal. Grey is not a weak result — it is no result available.</a:t>
+              <a:t>IV</a:t>
             </a:r>
           </a:p>
         </p:txBody>
@@ -8421,7 +8879,7 @@
 </p:sld>
 </file>
 
-<file path=ppt/slides/slide23.xml><?xml version="1.0" encoding="utf-8"?>
+<file path=ppt/slides/slide25.xml><?xml version="1.0" encoding="utf-8"?>
 <p:sld xmlns:a="http://schemas.openxmlformats.org/drawingml/2006/main" xmlns:p="http://schemas.openxmlformats.org/presentationml/2006/main" xmlns:r="http://schemas.openxmlformats.org/officeDocument/2006/relationships">
   <p:cSld>
     <p:bg>
@@ -8448,7 +8906,7 @@
         <p:spPr>
           <a:xfrm>
             <a:off x="566928" y="502920"/>
-            <a:ext cx="4160520" cy="274320"/>
+            <a:ext cx="8595360" cy="274320"/>
           </a:xfrm>
           <a:prstGeom prst="rect">
             <a:avLst/>
@@ -8476,7 +8934,7 @@
                 </a:solidFill>
                 <a:latin typeface="Consolas"/>
               </a:rPr>
-              <a:t>WHAT SURVIVES WHICH METHOD</a:t>
+              <a:t>CHANGE 1 · EDUCATION</a:t>
             </a:r>
           </a:p>
         </p:txBody>
@@ -8490,7 +8948,7 @@
         <p:spPr>
           <a:xfrm>
             <a:off x="566928" y="914400"/>
-            <a:ext cx="4160520" cy="1371600"/>
+            <a:ext cx="8595360" cy="1371600"/>
           </a:xfrm>
           <a:prstGeom prst="rect">
             <a:avLst/>
@@ -8515,13 +8973,13 @@
               </a:spcAft>
             </a:pPr>
             <a:r>
-              <a:rPr sz="2300" b="0" i="0">
+              <a:rPr sz="2700" b="0" i="0">
                 <a:solidFill>
                   <a:srgbClr val="14171C"/>
                 </a:solidFill>
                 <a:latin typeface="Georgia"/>
               </a:rPr>
-              <a:t>Health is robust to how you measure it. Trust only appears when you ask people.</a:t>
+              <a:t>Report access separately, rather than pooling it into a goal-level average</a:t>
             </a:r>
           </a:p>
         </p:txBody>
@@ -8534,8 +8992,8 @@
         </p:nvSpPr>
         <p:spPr>
           <a:xfrm>
-            <a:off x="566928" y="2331720"/>
-            <a:ext cx="4160520" cy="3840480"/>
+            <a:off x="566928" y="2286000"/>
+            <a:ext cx="8595360" cy="3840480"/>
           </a:xfrm>
           <a:prstGeom prst="rect">
             <a:avLst/>
@@ -8560,13 +9018,13 @@
               </a:spcAft>
             </a:pPr>
             <a:r>
-              <a:rPr sz="1150" b="0" i="0">
+              <a:rPr sz="1400" b="0" i="0">
                 <a:solidFill>
                   <a:srgbClr val="5A6068"/>
                 </a:solidFill>
                 <a:latin typeface="Calibri"/>
               </a:rPr>
-              <a:t>One more cut, because it separates the failure modes cleanly. Health registers in administrative sources (SDG3, 11.5%) and in self-reported ones (ESS, median R² 0.092) alike — it is robust to measurement method, and the HDI's weak result is specific to life expectancy rather than to the domain.</a:t>
+              <a:t>The cheapest change on this list, because it needs no new data collection. SDG4's access and participation series already reach 12.7%; the published goal-level figure of 3.3% is produced by averaging them with parity ratios, infrastructure and learning outcomes, which reach 2.5%, 2.0% and 0.9%.</a:t>
             </a:r>
           </a:p>
           <a:p>
@@ -8582,35 +9040,13 @@
               </a:spcAft>
             </a:pPr>
             <a:r>
-              <a:rPr sz="1150" b="0" i="0">
+              <a:rPr sz="1400" b="0" i="0">
                 <a:solidFill>
                   <a:srgbClr val="5A6068"/>
                 </a:solidFill>
                 <a:latin typeface="Calibri"/>
               </a:rPr>
-              <a:t>Education registers in both too, once unpooled, so its problem is construction rather than method. Trust registers in one and only one: 97% of ESS countries against 1.5% of SDG16 country-indicator pairs measuring a different construct.</a:t>
-            </a:r>
-          </a:p>
-          <a:p>
-            <a:pPr>
-              <a:lnSpc>
-                <a:spcPct val="132000"/>
-              </a:lnSpc>
-              <a:spcBef>
-                <a:spcPts val="0"/>
-              </a:spcBef>
-              <a:spcAft>
-                <a:spcPts val="1100"/>
-              </a:spcAft>
-            </a:pPr>
-            <a:r>
-              <a:rPr sz="1150" b="0" i="0">
-                <a:solidFill>
-                  <a:srgbClr val="5A6068"/>
-                </a:solidFill>
-                <a:latin typeface="Calibri"/>
-              </a:rPr>
-              <a:t>That asymmetry is the argument for why level of measurement matters, and not just which indicator you pick. Some things about a life are legible in national aggregates. Whether you think your neighbours can be trusted is not one of them.</a:t>
+              <a:t>So the suggestion is a reporting convention rather than a measurement programme: where a goal pools constructs that behave differently, publish the constituents alongside the pooled rate. Every number needed for this already exists in the database. What it would buy is that education stops looking like a domain that does not matter for wellbeing, which on this evidence it plainly does.</a:t>
             </a:r>
           </a:p>
         </p:txBody>
@@ -8652,669 +9088,7 @@
                 </a:solidFill>
                 <a:latin typeface="Consolas"/>
               </a:rPr>
-              <a:t>III</a:t>
-            </a:r>
-          </a:p>
-        </p:txBody>
-      </p:sp>
-      <p:pic>
-        <p:nvPicPr>
-          <p:cNvPr id="6" name="Picture 5" descr="health_trust_corroboration.png"/>
-          <p:cNvPicPr>
-            <a:picLocks noChangeAspect="1"/>
-          </p:cNvPicPr>
-          <p:nvPr/>
-        </p:nvPicPr>
-        <p:blipFill>
-          <a:blip r:embed="rId2"/>
-          <a:stretch>
-            <a:fillRect/>
-          </a:stretch>
-        </p:blipFill>
-        <p:spPr>
-          <a:xfrm>
-            <a:off x="5120640" y="1858518"/>
-            <a:ext cx="6537960" cy="2674620"/>
-          </a:xfrm>
-          <a:prstGeom prst="rect">
-            <a:avLst/>
-          </a:prstGeom>
-        </p:spPr>
-      </p:pic>
-      <p:sp>
-        <p:nvSpPr>
-          <p:cNvPr id="7" name="TextBox 6"/>
-          <p:cNvSpPr txBox="1"/>
-          <p:nvPr/>
-        </p:nvSpPr>
-        <p:spPr>
-          <a:xfrm>
-            <a:off x="5120640" y="5897880"/>
-            <a:ext cx="6537960" cy="731520"/>
-          </a:xfrm>
-          <a:prstGeom prst="rect">
-            <a:avLst/>
-          </a:prstGeom>
-          <a:noFill/>
-        </p:spPr>
-        <p:txBody>
-          <a:bodyPr wrap="square" lIns="0" rIns="0" tIns="0" bIns="0">
-            <a:spAutoFit/>
-          </a:bodyPr>
-          <a:lstStyle/>
-          <a:p>
-            <a:pPr>
-              <a:lnSpc>
-                <a:spcPct val="125000"/>
-              </a:lnSpc>
-              <a:spcBef>
-                <a:spcPts val="0"/>
-              </a:spcBef>
-              <a:spcAft>
-                <a:spcPts val="0"/>
-              </a:spcAft>
-            </a:pPr>
-            <a:r>
-              <a:rPr sz="900" b="0" i="0">
-                <a:solidFill>
-                  <a:srgbClr val="868D96"/>
-                </a:solidFill>
-                <a:latin typeface="Calibri"/>
-              </a:rPr>
-              <a:t>Health corroborates across administrative and self-reported sources. Trust appears only in individual-level data.</a:t>
-            </a:r>
-          </a:p>
-        </p:txBody>
-      </p:sp>
-    </p:spTree>
-  </p:cSld>
-  <p:clrMapOvr>
-    <a:masterClrMapping/>
-  </p:clrMapOvr>
-</p:sld>
-</file>
-
-<file path=ppt/slides/slide24.xml><?xml version="1.0" encoding="utf-8"?>
-<p:sld xmlns:a="http://schemas.openxmlformats.org/drawingml/2006/main" xmlns:p="http://schemas.openxmlformats.org/presentationml/2006/main" xmlns:r="http://schemas.openxmlformats.org/officeDocument/2006/relationships">
-  <p:cSld>
-    <p:bg>
-      <p:bgPr>
-        <a:solidFill>
-          <a:srgbClr val="E8EBEF"/>
-        </a:solidFill>
-        <a:effectLst/>
-      </p:bgPr>
-    </p:bg>
-    <p:spTree>
-      <p:nvGrpSpPr>
-        <p:cNvPr id="1" name=""/>
-        <p:cNvGrpSpPr/>
-        <p:nvPr/>
-      </p:nvGrpSpPr>
-      <p:grpSpPr/>
-      <p:sp>
-        <p:nvSpPr>
-          <p:cNvPr id="2" name="Rectangle 1"/>
-          <p:cNvSpPr/>
-          <p:nvPr/>
-        </p:nvSpPr>
-        <p:spPr>
-          <a:xfrm>
-            <a:off x="566928" y="2103120"/>
-            <a:ext cx="54864" cy="2377440"/>
-          </a:xfrm>
-          <a:prstGeom prst="rect">
-            <a:avLst/>
-          </a:prstGeom>
-          <a:solidFill>
-            <a:srgbClr val="17549E"/>
-          </a:solidFill>
-          <a:ln>
-            <a:noFill/>
-          </a:ln>
-          <a:effectLst/>
-        </p:spPr>
-        <p:style>
-          <a:lnRef idx="1">
-            <a:schemeClr val="accent1"/>
-          </a:lnRef>
-          <a:fillRef idx="3">
-            <a:schemeClr val="accent1"/>
-          </a:fillRef>
-          <a:effectRef idx="2">
-            <a:schemeClr val="accent1"/>
-          </a:effectRef>
-          <a:fontRef idx="minor">
-            <a:schemeClr val="lt1"/>
-          </a:fontRef>
-        </p:style>
-        <p:txBody>
-          <a:bodyPr rtlCol="0" anchor="ctr"/>
-          <a:lstStyle/>
-          <a:p>
-            <a:pPr algn="ctr"/>
-          </a:p>
-        </p:txBody>
-      </p:sp>
-      <p:sp>
-        <p:nvSpPr>
-          <p:cNvPr id="3" name="TextBox 2"/>
-          <p:cNvSpPr txBox="1"/>
-          <p:nvPr/>
-        </p:nvSpPr>
-        <p:spPr>
-          <a:xfrm>
-            <a:off x="914400" y="1600200"/>
-            <a:ext cx="8686800" cy="274320"/>
-          </a:xfrm>
-          <a:prstGeom prst="rect">
-            <a:avLst/>
-          </a:prstGeom>
-          <a:noFill/>
-        </p:spPr>
-        <p:txBody>
-          <a:bodyPr wrap="square" lIns="0" rIns="0" tIns="0" bIns="0">
-            <a:spAutoFit/>
-          </a:bodyPr>
-          <a:lstStyle/>
-          <a:p>
-            <a:pPr>
-              <a:spcBef>
-                <a:spcPts val="0"/>
-              </a:spcBef>
-              <a:spcAft>
-                <a:spcPts val="0"/>
-              </a:spcAft>
-            </a:pPr>
-            <a:r>
-              <a:rPr sz="1100" b="0" i="0">
-                <a:solidFill>
-                  <a:srgbClr val="17549E"/>
-                </a:solidFill>
-                <a:latin typeface="Consolas"/>
-              </a:rPr>
-              <a:t>WHERE ACT III LEAVES US</a:t>
-            </a:r>
-          </a:p>
-        </p:txBody>
-      </p:sp>
-      <p:sp>
-        <p:nvSpPr>
-          <p:cNvPr id="4" name="TextBox 3"/>
-          <p:cNvSpPr txBox="1"/>
-          <p:nvPr/>
-        </p:nvSpPr>
-        <p:spPr>
-          <a:xfrm>
-            <a:off x="914400" y="2148840"/>
-            <a:ext cx="9509760" cy="2926080"/>
-          </a:xfrm>
-          <a:prstGeom prst="rect">
-            <a:avLst/>
-          </a:prstGeom>
-          <a:noFill/>
-        </p:spPr>
-        <p:txBody>
-          <a:bodyPr wrap="square" lIns="0" rIns="0" tIns="0" bIns="0">
-            <a:spAutoFit/>
-          </a:bodyPr>
-          <a:lstStyle/>
-          <a:p>
-            <a:pPr>
-              <a:lnSpc>
-                <a:spcPct val="135000"/>
-              </a:lnSpc>
-              <a:spcBef>
-                <a:spcPts val="0"/>
-              </a:spcBef>
-              <a:spcAft>
-                <a:spcPts val="0"/>
-              </a:spcAft>
-            </a:pPr>
-            <a:r>
-              <a:rPr sz="2100" b="0" i="0">
-                <a:solidFill>
-                  <a:srgbClr val="14171C"/>
-                </a:solidFill>
-                <a:latin typeface="Georgia"/>
-              </a:rPr>
-              <a:t>None of this is a criticism of frameworks built to track development. It is the observation that which domain looks consequential for lived experience depends on construction choices made for other reasons — that one domain is missing outright, and that the domain measures track wellbeing dynamically in a way the composites do not.</a:t>
-            </a:r>
-          </a:p>
-        </p:txBody>
-      </p:sp>
-    </p:spTree>
-  </p:cSld>
-  <p:clrMapOvr>
-    <a:masterClrMapping/>
-  </p:clrMapOvr>
-</p:sld>
-</file>
-
-<file path=ppt/slides/slide25.xml><?xml version="1.0" encoding="utf-8"?>
-<p:sld xmlns:a="http://schemas.openxmlformats.org/drawingml/2006/main" xmlns:p="http://schemas.openxmlformats.org/presentationml/2006/main" xmlns:r="http://schemas.openxmlformats.org/officeDocument/2006/relationships">
-  <p:cSld>
-    <p:bg>
-      <p:bgPr>
-        <a:solidFill>
-          <a:srgbClr val="14171C"/>
-        </a:solidFill>
-        <a:effectLst/>
-      </p:bgPr>
-    </p:bg>
-    <p:spTree>
-      <p:nvGrpSpPr>
-        <p:cNvPr id="1" name=""/>
-        <p:cNvGrpSpPr/>
-        <p:nvPr/>
-      </p:nvGrpSpPr>
-      <p:grpSpPr/>
-      <p:sp>
-        <p:nvSpPr>
-          <p:cNvPr id="2" name="TextBox 1"/>
-          <p:cNvSpPr txBox="1"/>
-          <p:nvPr/>
-        </p:nvSpPr>
-        <p:spPr>
-          <a:xfrm>
-            <a:off x="7680960" y="822960"/>
-            <a:ext cx="3840480" cy="4114800"/>
-          </a:xfrm>
-          <a:prstGeom prst="rect">
-            <a:avLst/>
-          </a:prstGeom>
-          <a:noFill/>
-        </p:spPr>
-        <p:txBody>
-          <a:bodyPr wrap="square" lIns="0" rIns="0" tIns="0" bIns="0">
-            <a:spAutoFit/>
-          </a:bodyPr>
-          <a:lstStyle/>
-          <a:p>
-            <a:pPr algn="r">
-              <a:spcBef>
-                <a:spcPts val="0"/>
-              </a:spcBef>
-              <a:spcAft>
-                <a:spcPts val="0"/>
-              </a:spcAft>
-            </a:pPr>
-            <a:r>
-              <a:rPr sz="20000" b="0" i="0">
-                <a:solidFill>
-                  <a:srgbClr val="2A3340"/>
-                </a:solidFill>
-                <a:latin typeface="Georgia"/>
-              </a:rPr>
               <a:t>IV</a:t>
-            </a:r>
-          </a:p>
-        </p:txBody>
-      </p:sp>
-      <p:sp>
-        <p:nvSpPr>
-          <p:cNvPr id="3" name="Rectangle 2"/>
-          <p:cNvSpPr/>
-          <p:nvPr/>
-        </p:nvSpPr>
-        <p:spPr>
-          <a:xfrm>
-            <a:off x="566928" y="1371600"/>
-            <a:ext cx="7315200" cy="25400"/>
-          </a:xfrm>
-          <a:prstGeom prst="rect">
-            <a:avLst/>
-          </a:prstGeom>
-          <a:solidFill>
-            <a:srgbClr val="C9D8EC"/>
-          </a:solidFill>
-          <a:ln>
-            <a:noFill/>
-          </a:ln>
-          <a:effectLst/>
-        </p:spPr>
-        <p:style>
-          <a:lnRef idx="1">
-            <a:schemeClr val="accent1"/>
-          </a:lnRef>
-          <a:fillRef idx="3">
-            <a:schemeClr val="accent1"/>
-          </a:fillRef>
-          <a:effectRef idx="2">
-            <a:schemeClr val="accent1"/>
-          </a:effectRef>
-          <a:fontRef idx="minor">
-            <a:schemeClr val="lt1"/>
-          </a:fontRef>
-        </p:style>
-        <p:txBody>
-          <a:bodyPr rtlCol="0" anchor="ctr"/>
-          <a:lstStyle/>
-          <a:p>
-            <a:pPr algn="ctr"/>
-          </a:p>
-        </p:txBody>
-      </p:sp>
-      <p:sp>
-        <p:nvSpPr>
-          <p:cNvPr id="4" name="TextBox 3"/>
-          <p:cNvSpPr txBox="1"/>
-          <p:nvPr/>
-        </p:nvSpPr>
-        <p:spPr>
-          <a:xfrm>
-            <a:off x="566928" y="960120"/>
-            <a:ext cx="5486400" cy="274320"/>
-          </a:xfrm>
-          <a:prstGeom prst="rect">
-            <a:avLst/>
-          </a:prstGeom>
-          <a:noFill/>
-        </p:spPr>
-        <p:txBody>
-          <a:bodyPr wrap="square" lIns="0" rIns="0" tIns="0" bIns="0">
-            <a:spAutoFit/>
-          </a:bodyPr>
-          <a:lstStyle/>
-          <a:p>
-            <a:pPr>
-              <a:spcBef>
-                <a:spcPts val="0"/>
-              </a:spcBef>
-              <a:spcAft>
-                <a:spcPts val="0"/>
-              </a:spcAft>
-            </a:pPr>
-            <a:r>
-              <a:rPr sz="1100" b="0" i="0">
-                <a:solidFill>
-                  <a:srgbClr val="C9D8EC"/>
-                </a:solidFill>
-                <a:latin typeface="Consolas"/>
-              </a:rPr>
-              <a:t>ACT IV</a:t>
-            </a:r>
-          </a:p>
-        </p:txBody>
-      </p:sp>
-      <p:sp>
-        <p:nvSpPr>
-          <p:cNvPr id="5" name="TextBox 4"/>
-          <p:cNvSpPr txBox="1"/>
-          <p:nvPr/>
-        </p:nvSpPr>
-        <p:spPr>
-          <a:xfrm>
-            <a:off x="566928" y="1783080"/>
-            <a:ext cx="7223760" cy="1828800"/>
-          </a:xfrm>
-          <a:prstGeom prst="rect">
-            <a:avLst/>
-          </a:prstGeom>
-          <a:noFill/>
-        </p:spPr>
-        <p:txBody>
-          <a:bodyPr wrap="square" lIns="0" rIns="0" tIns="0" bIns="0">
-            <a:spAutoFit/>
-          </a:bodyPr>
-          <a:lstStyle/>
-          <a:p>
-            <a:pPr>
-              <a:lnSpc>
-                <a:spcPct val="102000"/>
-              </a:lnSpc>
-              <a:spcBef>
-                <a:spcPts val="0"/>
-              </a:spcBef>
-              <a:spcAft>
-                <a:spcPts val="0"/>
-              </a:spcAft>
-            </a:pPr>
-            <a:r>
-              <a:rPr sz="4000" b="0" i="0">
-                <a:solidFill>
-                  <a:srgbClr val="FCFCFB"/>
-                </a:solidFill>
-                <a:latin typeface="Georgia"/>
-              </a:rPr>
-              <a:t>What this could mean for development frameworks</a:t>
-            </a:r>
-          </a:p>
-        </p:txBody>
-      </p:sp>
-      <p:sp>
-        <p:nvSpPr>
-          <p:cNvPr id="6" name="TextBox 5"/>
-          <p:cNvSpPr txBox="1"/>
-          <p:nvPr/>
-        </p:nvSpPr>
-        <p:spPr>
-          <a:xfrm>
-            <a:off x="566928" y="3886200"/>
-            <a:ext cx="6766560" cy="1463040"/>
-          </a:xfrm>
-          <a:prstGeom prst="rect">
-            <a:avLst/>
-          </a:prstGeom>
-          <a:noFill/>
-        </p:spPr>
-        <p:txBody>
-          <a:bodyPr wrap="square" lIns="0" rIns="0" tIns="0" bIns="0">
-            <a:spAutoFit/>
-          </a:bodyPr>
-          <a:lstStyle/>
-          <a:p>
-            <a:pPr>
-              <a:lnSpc>
-                <a:spcPct val="135000"/>
-              </a:lnSpc>
-              <a:spcBef>
-                <a:spcPts val="0"/>
-              </a:spcBef>
-              <a:spcAft>
-                <a:spcPts val="0"/>
-              </a:spcAft>
-            </a:pPr>
-            <a:r>
-              <a:rPr sz="1600" b="0" i="1">
-                <a:solidFill>
-                  <a:srgbClr val="9AA4B0"/>
-                </a:solidFill>
-                <a:latin typeface="Georgia"/>
-              </a:rPr>
-              <a:t>The SDGs and the HDI do the job they were built for, and none of this evidence says otherwise. The narrower claim is that they may not be capturing what shapes lived experience at the individual level — and that the evidence points to reasonably specific things one could do about it.</a:t>
-            </a:r>
-          </a:p>
-        </p:txBody>
-      </p:sp>
-      <p:sp>
-        <p:nvSpPr>
-          <p:cNvPr id="7" name="TextBox 6"/>
-          <p:cNvSpPr txBox="1"/>
-          <p:nvPr/>
-        </p:nvSpPr>
-        <p:spPr>
-          <a:xfrm>
-            <a:off x="566928" y="5623560"/>
-            <a:ext cx="3503066" cy="914400"/>
-          </a:xfrm>
-          <a:prstGeom prst="rect">
-            <a:avLst/>
-          </a:prstGeom>
-          <a:noFill/>
-        </p:spPr>
-        <p:txBody>
-          <a:bodyPr wrap="square" lIns="0" rIns="0" tIns="0" bIns="0">
-            <a:spAutoFit/>
-          </a:bodyPr>
-          <a:lstStyle/>
-          <a:p>
-            <a:pPr>
-              <a:spcBef>
-                <a:spcPts val="0"/>
-              </a:spcBef>
-              <a:spcAft>
-                <a:spcPts val="400"/>
-              </a:spcAft>
-            </a:pPr>
-            <a:r>
-              <a:rPr sz="2200" b="0" i="0">
-                <a:solidFill>
-                  <a:srgbClr val="FCFCFB"/>
-                </a:solidFill>
-                <a:latin typeface="Consolas"/>
-              </a:rPr>
-              <a:t>Unpool</a:t>
-            </a:r>
-          </a:p>
-          <a:p>
-            <a:pPr>
-              <a:lnSpc>
-                <a:spcPct val="120000"/>
-              </a:lnSpc>
-              <a:spcBef>
-                <a:spcPts val="0"/>
-              </a:spcBef>
-              <a:spcAft>
-                <a:spcPts val="0"/>
-              </a:spcAft>
-            </a:pPr>
-            <a:r>
-              <a:rPr sz="1000" b="0" i="0">
-                <a:solidFill>
-                  <a:srgbClr val="8A94A0"/>
-                </a:solidFill>
-                <a:latin typeface="Calibri"/>
-              </a:rPr>
-              <a:t>report SDG4 access separately from parity ratios</a:t>
-            </a:r>
-          </a:p>
-        </p:txBody>
-      </p:sp>
-      <p:sp>
-        <p:nvSpPr>
-          <p:cNvPr id="8" name="TextBox 7"/>
-          <p:cNvSpPr txBox="1"/>
-          <p:nvPr/>
-        </p:nvSpPr>
-        <p:spPr>
-          <a:xfrm>
-            <a:off x="4344314" y="5623560"/>
-            <a:ext cx="3503066" cy="914400"/>
-          </a:xfrm>
-          <a:prstGeom prst="rect">
-            <a:avLst/>
-          </a:prstGeom>
-          <a:noFill/>
-        </p:spPr>
-        <p:txBody>
-          <a:bodyPr wrap="square" lIns="0" rIns="0" tIns="0" bIns="0">
-            <a:spAutoFit/>
-          </a:bodyPr>
-          <a:lstStyle/>
-          <a:p>
-            <a:pPr>
-              <a:spcBef>
-                <a:spcPts val="0"/>
-              </a:spcBef>
-              <a:spcAft>
-                <a:spcPts val="400"/>
-              </a:spcAft>
-            </a:pPr>
-            <a:r>
-              <a:rPr sz="2200" b="0" i="0">
-                <a:solidFill>
-                  <a:srgbClr val="FCFCFB"/>
-                </a:solidFill>
-                <a:latin typeface="Consolas"/>
-              </a:rPr>
-              <a:t>Re-specify</a:t>
-            </a:r>
-          </a:p>
-          <a:p>
-            <a:pPr>
-              <a:lnSpc>
-                <a:spcPct val="120000"/>
-              </a:lnSpc>
-              <a:spcBef>
-                <a:spcPts val="0"/>
-              </a:spcBef>
-              <a:spcAft>
-                <a:spcPts val="0"/>
-              </a:spcAft>
-            </a:pPr>
-            <a:r>
-              <a:rPr sz="1000" b="0" i="0">
-                <a:solidFill>
-                  <a:srgbClr val="8A94A0"/>
-                </a:solidFill>
-                <a:latin typeface="Calibri"/>
-              </a:rPr>
-              <a:t>a health variable that still varies where it is used</a:t>
-            </a:r>
-          </a:p>
-        </p:txBody>
-      </p:sp>
-      <p:sp>
-        <p:nvSpPr>
-          <p:cNvPr id="9" name="TextBox 8"/>
-          <p:cNvSpPr txBox="1"/>
-          <p:nvPr/>
-        </p:nvSpPr>
-        <p:spPr>
-          <a:xfrm>
-            <a:off x="8121700" y="5623560"/>
-            <a:ext cx="3503066" cy="914400"/>
-          </a:xfrm>
-          <a:prstGeom prst="rect">
-            <a:avLst/>
-          </a:prstGeom>
-          <a:noFill/>
-        </p:spPr>
-        <p:txBody>
-          <a:bodyPr wrap="square" lIns="0" rIns="0" tIns="0" bIns="0">
-            <a:spAutoFit/>
-          </a:bodyPr>
-          <a:lstStyle/>
-          <a:p>
-            <a:pPr>
-              <a:spcBef>
-                <a:spcPts val="0"/>
-              </a:spcBef>
-              <a:spcAft>
-                <a:spcPts val="400"/>
-              </a:spcAft>
-            </a:pPr>
-            <a:r>
-              <a:rPr sz="2200" b="0" i="0">
-                <a:solidFill>
-                  <a:srgbClr val="FCFCFB"/>
-                </a:solidFill>
-                <a:latin typeface="Consolas"/>
-              </a:rPr>
-              <a:t>Collect</a:t>
-            </a:r>
-          </a:p>
-          <a:p>
-            <a:pPr>
-              <a:lnSpc>
-                <a:spcPct val="120000"/>
-              </a:lnSpc>
-              <a:spcBef>
-                <a:spcPts val="0"/>
-              </a:spcBef>
-              <a:spcAft>
-                <a:spcPts val="0"/>
-              </a:spcAft>
-            </a:pPr>
-            <a:r>
-              <a:rPr sz="1000" b="0" i="0">
-                <a:solidFill>
-                  <a:srgbClr val="8A94A0"/>
-                </a:solidFill>
-                <a:latin typeface="Calibri"/>
-              </a:rPr>
-              <a:t>interpersonal trust, or link to a survey that has it</a:t>
             </a:r>
           </a:p>
         </p:txBody>
@@ -9382,7 +9156,7 @@
                 </a:solidFill>
                 <a:latin typeface="Consolas"/>
               </a:rPr>
-              <a:t>THE DISCONNECT</a:t>
+              <a:t>CHANGE 2 · HEALTH</a:t>
             </a:r>
           </a:p>
         </p:txBody>
@@ -9427,7 +9201,7 @@
                 </a:solidFill>
                 <a:latin typeface="Georgia"/>
               </a:rPr>
-              <a:t>Two different questions, and only one of them is being measured</a:t>
+              <a:t>Use a health variable that still varies where the framework is being applied</a:t>
             </a:r>
           </a:p>
         </p:txBody>
@@ -9472,7 +9246,7 @@
                 </a:solidFill>
                 <a:latin typeface="Calibri"/>
               </a:rPr>
-              <a:t>The shape of what follows, before the detail. Two of the three domains are already inside these frameworks — health, and the access half of education — and on this evidence they are the two that track lived experience. The suggestion is not to add a wellbeing pillar but to let those two carry that weight explicitly: elevate them as wellbeing-relevant highlights, measured with variables that still vary, with social trust flagged as a likely third that neither framework can currently see.</a:t>
+              <a:t>Life expectancy is a good development indicator and a poor wellbeing one in exactly the places where development has already happened. Between 81 and 85 years across the top 100 countries, there is very little variance left for it to explain — which is why it comes last of the HDI's five components at 19%, while self-rated health leads the ESS at 100% of countries.</a:t>
             </a:r>
           </a:p>
           <a:p>
@@ -9494,29 +9268,7 @@
                 </a:solidFill>
                 <a:latin typeface="Calibri"/>
               </a:rPr>
-              <a:t>'How is development progressing?' and 'what shapes how people experience their lives?' are not the same question, and the frameworks were built to answer the first. Indicators were chosen before the second was systematically testable, at an aggregate level, on annual or slower cycles. That is scope, not failure.</a:t>
-            </a:r>
-          </a:p>
-          <a:p>
-            <a:pPr>
-              <a:lnSpc>
-                <a:spcPct val="132000"/>
-              </a:lnSpc>
-              <a:spcBef>
-                <a:spcPts val="0"/>
-              </a:spcBef>
-              <a:spcAft>
-                <a:spcPts val="1100"/>
-              </a:spcAft>
-            </a:pPr>
-            <a:r>
-              <a:rPr sz="1400" b="0" i="0">
-                <a:solidFill>
-                  <a:srgbClr val="5A6068"/>
-                </a:solidFill>
-                <a:latin typeface="Calibri"/>
-              </a:rPr>
-              <a:t>But the consequence is that a framework can be working exactly as designed and still be a poor guide to lived experience. Two of the three domains that predict life satisfaction in the ESS are present in the frameworks and obscured by construction choices; the third is not present at all. None of that shows up in a framework's own diagnostics, because nothing in those diagnostics is asking about wellbeing.</a:t>
+              <a:t>The evidence suggests health measurement could be made conditional on context rather than uniform: life expectancy where mortality still varies, and something with range left — self-rated health, or condition-specific measures — where it does not. This is not two frameworks. It is one domain, measured with an instrument chosen to still be sensitive in the setting it is used in.</a:t>
             </a:r>
           </a:p>
         </p:txBody>
@@ -9626,7 +9378,7 @@
                 </a:solidFill>
                 <a:latin typeface="Consolas"/>
               </a:rPr>
-              <a:t>CHANGE 1 · EDUCATION</a:t>
+              <a:t>CHANGE 3 · SOCIAL TRUST</a:t>
             </a:r>
           </a:p>
         </p:txBody>
@@ -9671,7 +9423,7 @@
                 </a:solidFill>
                 <a:latin typeface="Georgia"/>
               </a:rPr>
-              <a:t>Report access separately, rather than pooling it into a goal-level average</a:t>
+              <a:t>Collect interpersonal trust, or link systematically to surveys that already do</a:t>
             </a:r>
           </a:p>
         </p:txBody>
@@ -9710,13 +9462,13 @@
               </a:spcAft>
             </a:pPr>
             <a:r>
-              <a:rPr sz="1400" b="0" i="0">
+              <a:rPr sz="1350" b="0" i="0">
                 <a:solidFill>
                   <a:srgbClr val="5A6068"/>
                 </a:solidFill>
                 <a:latin typeface="Calibri"/>
               </a:rPr>
-              <a:t>The cheapest change on this list, because it needs no new data collection. SDG4's access and participation series already reach 12.7%; the published goal-level figure of 3.3% is produced by averaging them with parity ratios, infrastructure and learning outcomes, which reach 2.5%, 2.0% and 0.9%.</a:t>
+              <a:t>This is the expensive one, and the only one that cannot be solved by re-analysing what exists. On the ESS evidence, interpersonal trust is the second strongest of the three domains — ahead of education — and neither framework collects it. SDG16's institutional confidence series are not a substitute: different construct, and they do not survive an income control.</a:t>
             </a:r>
           </a:p>
           <a:p>
@@ -9732,13 +9484,35 @@
               </a:spcAft>
             </a:pPr>
             <a:r>
-              <a:rPr sz="1400" b="0" i="0">
+              <a:rPr sz="1350" b="0" i="0">
                 <a:solidFill>
                   <a:srgbClr val="5A6068"/>
                 </a:solidFill>
                 <a:latin typeface="Calibri"/>
               </a:rPr>
-              <a:t>So the suggestion is a reporting convention rather than a measurement programme: where a goal pools constructs that behave differently, publish the constituents alongside the pooled rate. Every number needed for this already exists in the database. What it would buy is that education stops looking like a domain that does not matter for wellbeing, which on this evidence it plainly does.</a:t>
+              <a:t>Two routes. Add a trust item to core collection, which is a single well-validated question and cheap per respondent but slow institutionally. Or build systematic linkage to instruments that already carry it — the ESS in Europe, Gallup World Poll and the World Values Survey more broadly — so that country assessments can draw on it without the frameworks having to own the collection.</a:t>
+            </a:r>
+          </a:p>
+          <a:p>
+            <a:pPr>
+              <a:lnSpc>
+                <a:spcPct val="132000"/>
+              </a:lnSpc>
+              <a:spcBef>
+                <a:spcPts val="0"/>
+              </a:spcBef>
+              <a:spcAft>
+                <a:spcPts val="1100"/>
+              </a:spcAft>
+            </a:pPr>
+            <a:r>
+              <a:rPr sz="1350" b="0" i="0">
+                <a:solidFill>
+                  <a:srgbClr val="5A6068"/>
+                </a:solidFill>
+                <a:latin typeface="Calibri"/>
+              </a:rPr>
+              <a:t>The caveats stay attached, and they are about coverage rather than about whether the association is real. It rests on 36 European countries and one survey item, and it has not yet been corroborated against an independent wellbeing instrument the way health has. What it is not is a questionnaire artefact: with predictor and outcome taken from different respondents, the within-country result holds at +0.55. So this is the most tentative of the three recommendations on scope, and the one where the cost of being right and not measuring is highest — because a domain no framework collects cannot show up as a gap in any framework's own diagnostics.</a:t>
             </a:r>
           </a:p>
         </p:txBody>
@@ -9848,7 +9622,7 @@
                 </a:solidFill>
                 <a:latin typeface="Consolas"/>
               </a:rPr>
-              <a:t>CHANGE 2 · HEALTH</a:t>
+              <a:t>WHERE THIS LEAVES THE ARGUMENT</a:t>
             </a:r>
           </a:p>
         </p:txBody>
@@ -9893,7 +9667,7 @@
                 </a:solidFill>
                 <a:latin typeface="Georgia"/>
               </a:rPr>
-              <a:t>Use a health variable that still varies where the framework is being applied</a:t>
+              <a:t>Not a verdict on the frameworks — a question about what they are for</a:t>
             </a:r>
           </a:p>
         </p:txBody>
@@ -9938,7 +9712,7 @@
                 </a:solidFill>
                 <a:latin typeface="Calibri"/>
               </a:rPr>
-              <a:t>Life expectancy is a good development indicator and a poor wellbeing one in exactly the places where development has already happened. Between 81 and 85 years across the top 100 countries, there is very little variance left for it to explain — which is why it comes last of the HDI's five components at 19%, while self-rated health leads the ESS at 100% of countries.</a:t>
+              <a:t>Two of the three changes above are re-analysis of data that already exists. The third is a collection decision. None of them requires accepting that the SDGs or the HDI are failing at what they set out to do.</a:t>
             </a:r>
           </a:p>
           <a:p>
@@ -9960,7 +9734,7 @@
                 </a:solidFill>
                 <a:latin typeface="Calibri"/>
               </a:rPr>
-              <a:t>The evidence suggests health measurement could be made conditional on context rather than uniform: life expectancy where mortality still varies, and something with range left — self-rated health, or condition-specific measures — where it does not. This is not two frameworks. It is one domain, measured with an instrument chosen to still be sensitive in the setting it is used in.</a:t>
+              <a:t>What the evidence does support is narrower and, we think, harder to dismiss: which domain looks consequential for lived experience depends heavily on construction choices that were made for other, defensible reasons — and on one domain that was never on the list at all. If wellbeing is meant to be part of what these frameworks track, those choices are now testable rather than conventional, and this is what testing them shows.</a:t>
             </a:r>
           </a:p>
         </p:txBody>
@@ -10021,7 +9795,7 @@
     <p:bg>
       <p:bgPr>
         <a:solidFill>
-          <a:srgbClr val="FCFCFB"/>
+          <a:srgbClr val="E8EBEF"/>
         </a:solidFill>
         <a:effectLst/>
       </p:bgPr>
@@ -10035,56 +9809,100 @@
       <p:grpSpPr/>
       <p:sp>
         <p:nvSpPr>
-          <p:cNvPr id="2" name="TextBox 1"/>
-          <p:cNvSpPr txBox="1"/>
-          <p:nvPr/>
-        </p:nvSpPr>
-        <p:spPr>
-          <a:xfrm>
-            <a:off x="566928" y="502920"/>
-            <a:ext cx="8595360" cy="274320"/>
-          </a:xfrm>
-          <a:prstGeom prst="rect">
-            <a:avLst/>
-          </a:prstGeom>
-          <a:noFill/>
-        </p:spPr>
-        <p:txBody>
-          <a:bodyPr wrap="square" lIns="0" rIns="0" tIns="0" bIns="0">
-            <a:spAutoFit/>
-          </a:bodyPr>
-          <a:lstStyle/>
-          <a:p>
-            <a:pPr>
-              <a:spcBef>
-                <a:spcPts val="0"/>
-              </a:spcBef>
-              <a:spcAft>
-                <a:spcPts val="0"/>
-              </a:spcAft>
-            </a:pPr>
-            <a:r>
-              <a:rPr sz="1000" b="0" i="0">
-                <a:solidFill>
-                  <a:srgbClr val="A63A30"/>
+          <p:cNvPr id="2" name="Rectangle 1"/>
+          <p:cNvSpPr/>
+          <p:nvPr/>
+        </p:nvSpPr>
+        <p:spPr>
+          <a:xfrm>
+            <a:off x="566928" y="2103120"/>
+            <a:ext cx="54864" cy="2377440"/>
+          </a:xfrm>
+          <a:prstGeom prst="rect">
+            <a:avLst/>
+          </a:prstGeom>
+          <a:solidFill>
+            <a:srgbClr val="17549E"/>
+          </a:solidFill>
+          <a:ln>
+            <a:noFill/>
+          </a:ln>
+          <a:effectLst/>
+        </p:spPr>
+        <p:style>
+          <a:lnRef idx="1">
+            <a:schemeClr val="accent1"/>
+          </a:lnRef>
+          <a:fillRef idx="3">
+            <a:schemeClr val="accent1"/>
+          </a:fillRef>
+          <a:effectRef idx="2">
+            <a:schemeClr val="accent1"/>
+          </a:effectRef>
+          <a:fontRef idx="minor">
+            <a:schemeClr val="lt1"/>
+          </a:fontRef>
+        </p:style>
+        <p:txBody>
+          <a:bodyPr rtlCol="0" anchor="ctr"/>
+          <a:lstStyle/>
+          <a:p>
+            <a:pPr algn="ctr"/>
+          </a:p>
+        </p:txBody>
+      </p:sp>
+      <p:sp>
+        <p:nvSpPr>
+          <p:cNvPr id="3" name="TextBox 2"/>
+          <p:cNvSpPr txBox="1"/>
+          <p:nvPr/>
+        </p:nvSpPr>
+        <p:spPr>
+          <a:xfrm>
+            <a:off x="914400" y="1600200"/>
+            <a:ext cx="8686800" cy="274320"/>
+          </a:xfrm>
+          <a:prstGeom prst="rect">
+            <a:avLst/>
+          </a:prstGeom>
+          <a:noFill/>
+        </p:spPr>
+        <p:txBody>
+          <a:bodyPr wrap="square" lIns="0" rIns="0" tIns="0" bIns="0">
+            <a:spAutoFit/>
+          </a:bodyPr>
+          <a:lstStyle/>
+          <a:p>
+            <a:pPr>
+              <a:spcBef>
+                <a:spcPts val="0"/>
+              </a:spcBef>
+              <a:spcAft>
+                <a:spcPts val="0"/>
+              </a:spcAft>
+            </a:pPr>
+            <a:r>
+              <a:rPr sz="1100" b="0" i="0">
+                <a:solidFill>
+                  <a:srgbClr val="17549E"/>
                 </a:solidFill>
                 <a:latin typeface="Consolas"/>
               </a:rPr>
-              <a:t>CHANGE 3 · SOCIAL TRUST</a:t>
-            </a:r>
-          </a:p>
-        </p:txBody>
-      </p:sp>
-      <p:sp>
-        <p:nvSpPr>
-          <p:cNvPr id="3" name="TextBox 2"/>
-          <p:cNvSpPr txBox="1"/>
-          <p:nvPr/>
-        </p:nvSpPr>
-        <p:spPr>
-          <a:xfrm>
-            <a:off x="566928" y="914400"/>
-            <a:ext cx="8595360" cy="1371600"/>
+              <a:t>WHERE ACT IV LEAVES US</a:t>
+            </a:r>
+          </a:p>
+        </p:txBody>
+      </p:sp>
+      <p:sp>
+        <p:nvSpPr>
+          <p:cNvPr id="4" name="TextBox 3"/>
+          <p:cNvSpPr txBox="1"/>
+          <p:nvPr/>
+        </p:nvSpPr>
+        <p:spPr>
+          <a:xfrm>
+            <a:off x="914400" y="2148840"/>
+            <a:ext cx="9509760" cy="2926080"/>
           </a:xfrm>
           <a:prstGeom prst="rect">
             <a:avLst/>
@@ -10099,7 +9917,7 @@
           <a:p>
             <a:pPr>
               <a:lnSpc>
-                <a:spcPct val="108000"/>
+                <a:spcPct val="135000"/>
               </a:lnSpc>
               <a:spcBef>
                 <a:spcPts val="0"/>
@@ -10109,144 +9927,13 @@
               </a:spcAft>
             </a:pPr>
             <a:r>
-              <a:rPr sz="2700" b="0" i="0">
+              <a:rPr sz="2100" b="0" i="0">
                 <a:solidFill>
                   <a:srgbClr val="14171C"/>
                 </a:solidFill>
                 <a:latin typeface="Georgia"/>
               </a:rPr>
-              <a:t>Collect interpersonal trust, or link systematically to surveys that already do</a:t>
-            </a:r>
-          </a:p>
-        </p:txBody>
-      </p:sp>
-      <p:sp>
-        <p:nvSpPr>
-          <p:cNvPr id="4" name="TextBox 3"/>
-          <p:cNvSpPr txBox="1"/>
-          <p:nvPr/>
-        </p:nvSpPr>
-        <p:spPr>
-          <a:xfrm>
-            <a:off x="566928" y="2286000"/>
-            <a:ext cx="8595360" cy="3840480"/>
-          </a:xfrm>
-          <a:prstGeom prst="rect">
-            <a:avLst/>
-          </a:prstGeom>
-          <a:noFill/>
-        </p:spPr>
-        <p:txBody>
-          <a:bodyPr wrap="square" lIns="0" rIns="0" tIns="0" bIns="0">
-            <a:spAutoFit/>
-          </a:bodyPr>
-          <a:lstStyle/>
-          <a:p>
-            <a:pPr>
-              <a:lnSpc>
-                <a:spcPct val="132000"/>
-              </a:lnSpc>
-              <a:spcBef>
-                <a:spcPts val="0"/>
-              </a:spcBef>
-              <a:spcAft>
-                <a:spcPts val="1100"/>
-              </a:spcAft>
-            </a:pPr>
-            <a:r>
-              <a:rPr sz="1350" b="0" i="0">
-                <a:solidFill>
-                  <a:srgbClr val="5A6068"/>
-                </a:solidFill>
-                <a:latin typeface="Calibri"/>
-              </a:rPr>
-              <a:t>This is the expensive one, and the only one that cannot be solved by re-analysing what exists. On the ESS evidence, interpersonal trust is the second strongest of the three domains — ahead of education — and neither framework collects it. SDG16's institutional confidence series are not a substitute: different construct, and they do not survive an income control.</a:t>
-            </a:r>
-          </a:p>
-          <a:p>
-            <a:pPr>
-              <a:lnSpc>
-                <a:spcPct val="132000"/>
-              </a:lnSpc>
-              <a:spcBef>
-                <a:spcPts val="0"/>
-              </a:spcBef>
-              <a:spcAft>
-                <a:spcPts val="1100"/>
-              </a:spcAft>
-            </a:pPr>
-            <a:r>
-              <a:rPr sz="1350" b="0" i="0">
-                <a:solidFill>
-                  <a:srgbClr val="5A6068"/>
-                </a:solidFill>
-                <a:latin typeface="Calibri"/>
-              </a:rPr>
-              <a:t>Two routes. Add a trust item to core collection, which is a single well-validated question and cheap per respondent but slow institutionally. Or build systematic linkage to instruments that already carry it — the ESS in Europe, Gallup World Poll and the World Values Survey more broadly — so that country assessments can draw on it without the frameworks having to own the collection.</a:t>
-            </a:r>
-          </a:p>
-          <a:p>
-            <a:pPr>
-              <a:lnSpc>
-                <a:spcPct val="132000"/>
-              </a:lnSpc>
-              <a:spcBef>
-                <a:spcPts val="0"/>
-              </a:spcBef>
-              <a:spcAft>
-                <a:spcPts val="1100"/>
-              </a:spcAft>
-            </a:pPr>
-            <a:r>
-              <a:rPr sz="1350" b="0" i="0">
-                <a:solidFill>
-                  <a:srgbClr val="5A6068"/>
-                </a:solidFill>
-                <a:latin typeface="Calibri"/>
-              </a:rPr>
-              <a:t>The caveats stay attached, and they are about coverage rather than about whether the association is real. It rests on 36 European countries and one survey item, and it has not yet been corroborated against an independent wellbeing instrument the way health has. What it is not is a questionnaire artefact: with predictor and outcome taken from different respondents, the within-country result holds at +0.55. So this is the most tentative of the three recommendations on scope, and the one where the cost of being right and not measuring is highest — because a domain no framework collects cannot show up as a gap in any framework's own diagnostics.</a:t>
-            </a:r>
-          </a:p>
-        </p:txBody>
-      </p:sp>
-      <p:sp>
-        <p:nvSpPr>
-          <p:cNvPr id="5" name="TextBox 4"/>
-          <p:cNvSpPr txBox="1"/>
-          <p:nvPr/>
-        </p:nvSpPr>
-        <p:spPr>
-          <a:xfrm>
-            <a:off x="11338560" y="6263640"/>
-            <a:ext cx="548640" cy="274320"/>
-          </a:xfrm>
-          <a:prstGeom prst="rect">
-            <a:avLst/>
-          </a:prstGeom>
-          <a:noFill/>
-        </p:spPr>
-        <p:txBody>
-          <a:bodyPr wrap="square" lIns="0" rIns="0" tIns="0" bIns="0">
-            <a:spAutoFit/>
-          </a:bodyPr>
-          <a:lstStyle/>
-          <a:p>
-            <a:pPr algn="r">
-              <a:spcBef>
-                <a:spcPts val="0"/>
-              </a:spcBef>
-              <a:spcAft>
-                <a:spcPts val="0"/>
-              </a:spcAft>
-            </a:pPr>
-            <a:r>
-              <a:rPr sz="1100" b="0" i="0">
-                <a:solidFill>
-                  <a:srgbClr val="868D96"/>
-                </a:solidFill>
-                <a:latin typeface="Consolas"/>
-              </a:rPr>
-              <a:t>IV</a:t>
+              <a:t>Whether wellbeing belongs in the purpose of a development framework is a choice, not a finding. But if it does, the measurement that follows from that intent looks different from the measurement in place today — and the three changes above are where it would start.</a:t>
             </a:r>
           </a:p>
         </p:txBody>
@@ -10722,64 +10409,146 @@
         <p:spPr>
           <a:xfrm>
             <a:off x="566928" y="502920"/>
-            <a:ext cx="8595360" cy="274320"/>
-          </a:xfrm>
-          <a:prstGeom prst="rect">
-            <a:avLst/>
-          </a:prstGeom>
-          <a:noFill/>
-        </p:spPr>
-        <p:txBody>
-          <a:bodyPr wrap="square" lIns="0" rIns="0" tIns="0" bIns="0">
-            <a:spAutoFit/>
-          </a:bodyPr>
-          <a:lstStyle/>
-          <a:p>
-            <a:pPr>
-              <a:spcBef>
-                <a:spcPts val="0"/>
-              </a:spcBef>
-              <a:spcAft>
-                <a:spcPts val="0"/>
-              </a:spcAft>
-            </a:pPr>
-            <a:r>
-              <a:rPr sz="1000" b="0" i="0">
-                <a:solidFill>
-                  <a:srgbClr val="A63A30"/>
+            <a:ext cx="8229600" cy="822960"/>
+          </a:xfrm>
+          <a:prstGeom prst="rect">
+            <a:avLst/>
+          </a:prstGeom>
+          <a:noFill/>
+        </p:spPr>
+        <p:txBody>
+          <a:bodyPr wrap="square" lIns="0" rIns="0" tIns="0" bIns="0">
+            <a:spAutoFit/>
+          </a:bodyPr>
+          <a:lstStyle/>
+          <a:p>
+            <a:pPr>
+              <a:spcBef>
+                <a:spcPts val="0"/>
+              </a:spcBef>
+              <a:spcAft>
+                <a:spcPts val="600"/>
+              </a:spcAft>
+            </a:pPr>
+            <a:r>
+              <a:rPr sz="3200" b="0" i="0">
+                <a:solidFill>
+                  <a:srgbClr val="14171C"/>
+                </a:solidFill>
+                <a:latin typeface="Georgia"/>
+              </a:rPr>
+              <a:t>Decisions for the team</a:t>
+            </a:r>
+          </a:p>
+          <a:p>
+            <a:pPr>
+              <a:spcBef>
+                <a:spcPts val="0"/>
+              </a:spcBef>
+              <a:spcAft>
+                <a:spcPts val="0"/>
+              </a:spcAft>
+            </a:pPr>
+            <a:r>
+              <a:rPr sz="1300" b="0" i="0">
+                <a:solidFill>
+                  <a:srgbClr val="5A6068"/>
+                </a:solidFill>
+                <a:latin typeface="Calibri"/>
+              </a:rPr>
+              <a:t>10 things the acts do not settle, in the order they block drafting.</a:t>
+            </a:r>
+          </a:p>
+        </p:txBody>
+      </p:sp>
+      <p:sp>
+        <p:nvSpPr>
+          <p:cNvPr id="3" name="Rectangle 2"/>
+          <p:cNvSpPr/>
+          <p:nvPr/>
+        </p:nvSpPr>
+        <p:spPr>
+          <a:xfrm>
+            <a:off x="566928" y="1828800"/>
+            <a:ext cx="3472586" cy="25400"/>
+          </a:xfrm>
+          <a:prstGeom prst="rect">
+            <a:avLst/>
+          </a:prstGeom>
+          <a:solidFill>
+            <a:srgbClr val="17549E"/>
+          </a:solidFill>
+          <a:ln>
+            <a:noFill/>
+          </a:ln>
+          <a:effectLst/>
+        </p:spPr>
+        <p:style>
+          <a:lnRef idx="1">
+            <a:schemeClr val="accent1"/>
+          </a:lnRef>
+          <a:fillRef idx="3">
+            <a:schemeClr val="accent1"/>
+          </a:fillRef>
+          <a:effectRef idx="2">
+            <a:schemeClr val="accent1"/>
+          </a:effectRef>
+          <a:fontRef idx="minor">
+            <a:schemeClr val="lt1"/>
+          </a:fontRef>
+        </p:style>
+        <p:txBody>
+          <a:bodyPr rtlCol="0" anchor="ctr"/>
+          <a:lstStyle/>
+          <a:p>
+            <a:pPr algn="ctr"/>
+          </a:p>
+        </p:txBody>
+      </p:sp>
+      <p:sp>
+        <p:nvSpPr>
+          <p:cNvPr id="4" name="TextBox 3"/>
+          <p:cNvSpPr txBox="1"/>
+          <p:nvPr/>
+        </p:nvSpPr>
+        <p:spPr>
+          <a:xfrm>
+            <a:off x="566928" y="1975104"/>
+            <a:ext cx="3472586" cy="932688"/>
+          </a:xfrm>
+          <a:prstGeom prst="rect">
+            <a:avLst/>
+          </a:prstGeom>
+          <a:noFill/>
+        </p:spPr>
+        <p:txBody>
+          <a:bodyPr wrap="square" lIns="0" rIns="0" tIns="0" bIns="0">
+            <a:spAutoFit/>
+          </a:bodyPr>
+          <a:lstStyle/>
+          <a:p>
+            <a:pPr>
+              <a:spcBef>
+                <a:spcPts val="0"/>
+              </a:spcBef>
+              <a:spcAft>
+                <a:spcPts val="600"/>
+              </a:spcAft>
+            </a:pPr>
+            <a:r>
+              <a:rPr sz="950" b="0" i="0">
+                <a:solidFill>
+                  <a:srgbClr val="17549E"/>
                 </a:solidFill>
                 <a:latin typeface="Consolas"/>
               </a:rPr>
-              <a:t>WHERE THIS LEAVES THE ARGUMENT</a:t>
-            </a:r>
-          </a:p>
-        </p:txBody>
-      </p:sp>
-      <p:sp>
-        <p:nvSpPr>
-          <p:cNvPr id="3" name="TextBox 2"/>
-          <p:cNvSpPr txBox="1"/>
-          <p:nvPr/>
-        </p:nvSpPr>
-        <p:spPr>
-          <a:xfrm>
-            <a:off x="566928" y="914400"/>
-            <a:ext cx="8595360" cy="1371600"/>
-          </a:xfrm>
-          <a:prstGeom prst="rect">
-            <a:avLst/>
-          </a:prstGeom>
-          <a:noFill/>
-        </p:spPr>
-        <p:txBody>
-          <a:bodyPr wrap="square" lIns="0" rIns="0" tIns="0" bIns="0">
-            <a:spAutoFit/>
-          </a:bodyPr>
-          <a:lstStyle/>
+              <a:t>FIGURE COUNT</a:t>
+            </a:r>
+          </a:p>
           <a:p>
             <a:pPr>
               <a:lnSpc>
-                <a:spcPct val="108000"/>
+                <a:spcPct val="128000"/>
               </a:lnSpc>
               <a:spcBef>
                 <a:spcPts val="0"/>
@@ -10789,122 +10558,985 @@
               </a:spcAft>
             </a:pPr>
             <a:r>
-              <a:rPr sz="2700" b="0" i="0">
-                <a:solidFill>
-                  <a:srgbClr val="14171C"/>
-                </a:solidFill>
-                <a:latin typeface="Georgia"/>
-              </a:rPr>
-              <a:t>Not a verdict on the frameworks — a question about what they are for</a:t>
-            </a:r>
-          </a:p>
-        </p:txBody>
-      </p:sp>
-      <p:sp>
-        <p:nvSpPr>
-          <p:cNvPr id="4" name="TextBox 3"/>
-          <p:cNvSpPr txBox="1"/>
-          <p:nvPr/>
-        </p:nvSpPr>
-        <p:spPr>
-          <a:xfrm>
-            <a:off x="566928" y="2286000"/>
-            <a:ext cx="8595360" cy="3840480"/>
-          </a:xfrm>
-          <a:prstGeom prst="rect">
-            <a:avLst/>
-          </a:prstGeom>
-          <a:noFill/>
-        </p:spPr>
-        <p:txBody>
-          <a:bodyPr wrap="square" lIns="0" rIns="0" tIns="0" bIns="0">
-            <a:spAutoFit/>
-          </a:bodyPr>
-          <a:lstStyle/>
+              <a:rPr sz="950" b="0" i="0">
+                <a:solidFill>
+                  <a:srgbClr val="5A6068"/>
+                </a:solidFill>
+                <a:latin typeface="Calibri"/>
+              </a:rPr>
+              <a:t>Commentaries allow one or two. Proposed: the three-way collapse as Figure 1 and the three-domain comparison as Figure 2. Everything else supplementary.</a:t>
+            </a:r>
+          </a:p>
+        </p:txBody>
+      </p:sp>
+      <p:sp>
+        <p:nvSpPr>
+          <p:cNvPr id="5" name="Rectangle 4"/>
+          <p:cNvSpPr/>
+          <p:nvPr/>
+        </p:nvSpPr>
+        <p:spPr>
+          <a:xfrm>
+            <a:off x="4359554" y="1828800"/>
+            <a:ext cx="3472586" cy="25400"/>
+          </a:xfrm>
+          <a:prstGeom prst="rect">
+            <a:avLst/>
+          </a:prstGeom>
+          <a:solidFill>
+            <a:srgbClr val="17549E"/>
+          </a:solidFill>
+          <a:ln>
+            <a:noFill/>
+          </a:ln>
+          <a:effectLst/>
+        </p:spPr>
+        <p:style>
+          <a:lnRef idx="1">
+            <a:schemeClr val="accent1"/>
+          </a:lnRef>
+          <a:fillRef idx="3">
+            <a:schemeClr val="accent1"/>
+          </a:fillRef>
+          <a:effectRef idx="2">
+            <a:schemeClr val="accent1"/>
+          </a:effectRef>
+          <a:fontRef idx="minor">
+            <a:schemeClr val="lt1"/>
+          </a:fontRef>
+        </p:style>
+        <p:txBody>
+          <a:bodyPr rtlCol="0" anchor="ctr"/>
+          <a:lstStyle/>
+          <a:p>
+            <a:pPr algn="ctr"/>
+          </a:p>
+        </p:txBody>
+      </p:sp>
+      <p:sp>
+        <p:nvSpPr>
+          <p:cNvPr id="6" name="TextBox 5"/>
+          <p:cNvSpPr txBox="1"/>
+          <p:nvPr/>
+        </p:nvSpPr>
+        <p:spPr>
+          <a:xfrm>
+            <a:off x="4359554" y="1975104"/>
+            <a:ext cx="3472586" cy="932688"/>
+          </a:xfrm>
+          <a:prstGeom prst="rect">
+            <a:avLst/>
+          </a:prstGeom>
+          <a:noFill/>
+        </p:spPr>
+        <p:txBody>
+          <a:bodyPr wrap="square" lIns="0" rIns="0" tIns="0" bIns="0">
+            <a:spAutoFit/>
+          </a:bodyPr>
+          <a:lstStyle/>
+          <a:p>
+            <a:pPr>
+              <a:spcBef>
+                <a:spcPts val="0"/>
+              </a:spcBef>
+              <a:spcAft>
+                <a:spcPts val="600"/>
+              </a:spcAft>
+            </a:pPr>
+            <a:r>
+              <a:rPr sz="950" b="0" i="0">
+                <a:solidFill>
+                  <a:srgbClr val="17549E"/>
+                </a:solidFill>
+                <a:latin typeface="Consolas"/>
+              </a:rPr>
+              <a:t>ONE UNIT, EVERYWHERE</a:t>
+            </a:r>
+          </a:p>
           <a:p>
             <a:pPr>
               <a:lnSpc>
-                <a:spcPct val="132000"/>
+                <a:spcPct val="128000"/>
               </a:lnSpc>
               <a:spcBef>
                 <a:spcPts val="0"/>
               </a:spcBef>
               <a:spcAft>
-                <a:spcPts val="1100"/>
-              </a:spcAft>
-            </a:pPr>
-            <a:r>
-              <a:rPr sz="1400" b="0" i="0">
+                <a:spcPts val="0"/>
+              </a:spcAft>
+            </a:pPr>
+            <a:r>
+              <a:rPr sz="850" b="0" i="0">
                 <a:solidFill>
                   <a:srgbClr val="5A6068"/>
                 </a:solidFill>
                 <a:latin typeface="Calibri"/>
               </a:rPr>
-              <a:t>Two of the three changes above are re-analysis of data that already exists. The third is a collection decision. None of them requires accepting that the SDGs or the HDI are failing at what they set out to do.</a:t>
+              <a:t>Every headline number is now % of units FDR-significant at q  0.04 on ~7 country-round means; at that n roughly two-thirds of pure noise clears the bar, which inflated the ESS figures and made the framework comparison meaningless. ESS is now estimated on individual respondents, demeaned within country-round.</a:t>
+            </a:r>
+          </a:p>
+        </p:txBody>
+      </p:sp>
+      <p:sp>
+        <p:nvSpPr>
+          <p:cNvPr id="7" name="Rectangle 6"/>
+          <p:cNvSpPr/>
+          <p:nvPr/>
+        </p:nvSpPr>
+        <p:spPr>
+          <a:xfrm>
+            <a:off x="8152180" y="1828800"/>
+            <a:ext cx="3472586" cy="25400"/>
+          </a:xfrm>
+          <a:prstGeom prst="rect">
+            <a:avLst/>
+          </a:prstGeom>
+          <a:solidFill>
+            <a:srgbClr val="17549E"/>
+          </a:solidFill>
+          <a:ln>
+            <a:noFill/>
+          </a:ln>
+          <a:effectLst/>
+        </p:spPr>
+        <p:style>
+          <a:lnRef idx="1">
+            <a:schemeClr val="accent1"/>
+          </a:lnRef>
+          <a:fillRef idx="3">
+            <a:schemeClr val="accent1"/>
+          </a:fillRef>
+          <a:effectRef idx="2">
+            <a:schemeClr val="accent1"/>
+          </a:effectRef>
+          <a:fontRef idx="minor">
+            <a:schemeClr val="lt1"/>
+          </a:fontRef>
+        </p:style>
+        <p:txBody>
+          <a:bodyPr rtlCol="0" anchor="ctr"/>
+          <a:lstStyle/>
+          <a:p>
+            <a:pPr algn="ctr"/>
+          </a:p>
+        </p:txBody>
+      </p:sp>
+      <p:sp>
+        <p:nvSpPr>
+          <p:cNvPr id="8" name="TextBox 7"/>
+          <p:cNvSpPr txBox="1"/>
+          <p:nvPr/>
+        </p:nvSpPr>
+        <p:spPr>
+          <a:xfrm>
+            <a:off x="8152180" y="1975104"/>
+            <a:ext cx="3472586" cy="932688"/>
+          </a:xfrm>
+          <a:prstGeom prst="rect">
+            <a:avLst/>
+          </a:prstGeom>
+          <a:noFill/>
+        </p:spPr>
+        <p:txBody>
+          <a:bodyPr wrap="square" lIns="0" rIns="0" tIns="0" bIns="0">
+            <a:spAutoFit/>
+          </a:bodyPr>
+          <a:lstStyle/>
+          <a:p>
+            <a:pPr>
+              <a:spcBef>
+                <a:spcPts val="0"/>
+              </a:spcBef>
+              <a:spcAft>
+                <a:spcPts val="600"/>
+              </a:spcAft>
+            </a:pPr>
+            <a:r>
+              <a:rPr sz="850" b="0" i="0">
+                <a:solidFill>
+                  <a:srgbClr val="17549E"/>
+                </a:solidFill>
+                <a:latin typeface="Consolas"/>
+              </a:rPr>
+              <a:t>WHICH ESS WELLBEING ITEM, AND WHY</a:t>
             </a:r>
           </a:p>
           <a:p>
             <a:pPr>
               <a:lnSpc>
-                <a:spcPct val="132000"/>
+                <a:spcPct val="128000"/>
               </a:lnSpc>
               <a:spcBef>
                 <a:spcPts val="0"/>
               </a:spcBef>
               <a:spcAft>
-                <a:spcPts val="1100"/>
-              </a:spcAft>
-            </a:pPr>
-            <a:r>
-              <a:rPr sz="1400" b="0" i="0">
+                <a:spcPts val="0"/>
+              </a:spcAft>
+            </a:pPr>
+            <a:r>
+              <a:rPr sz="750" b="0" i="0">
                 <a:solidFill>
                   <a:srgbClr val="5A6068"/>
                 </a:solidFill>
                 <a:latin typeface="Calibri"/>
               </a:rPr>
-              <a:t>What the evidence does support is narrower and, we think, harder to dismiss: which domain looks consequential for lived experience depends heavily on construction choices that were made for other, defensible reasons — and on one domain that was never on the list at all. If wellbeing is meant to be part of what these frameworks track, those choices are now testable rather than conventional, and this is what testing them shows.</a:t>
-            </a:r>
-          </a:p>
-        </p:txBody>
-      </p:sp>
-      <p:sp>
-        <p:nvSpPr>
-          <p:cNvPr id="5" name="TextBox 4"/>
-          <p:cNvSpPr txBox="1"/>
-          <p:nvPr/>
-        </p:nvSpPr>
-        <p:spPr>
-          <a:xfrm>
-            <a:off x="11338560" y="6263640"/>
-            <a:ext cx="548640" cy="274320"/>
-          </a:xfrm>
-          <a:prstGeom prst="rect">
-            <a:avLst/>
-          </a:prstGeom>
-          <a:noFill/>
-        </p:spPr>
-        <p:txBody>
-          <a:bodyPr wrap="square" lIns="0" rIns="0" tIns="0" bIns="0">
-            <a:spAutoFit/>
-          </a:bodyPr>
-          <a:lstStyle/>
-          <a:p>
-            <a:pPr algn="r">
-              <a:spcBef>
-                <a:spcPts val="0"/>
-              </a:spcBef>
-              <a:spcAft>
-                <a:spcPts val="0"/>
-              </a:spcAft>
-            </a:pPr>
-            <a:r>
-              <a:rPr sz="1100" b="0" i="0">
-                <a:solidFill>
-                  <a:srgbClr val="868D96"/>
+              <a:t>The deck runs on ESS life satisfaction throughout, because the WHR Cantril ladder is a life evaluation and that is the like-for-like analogue. The ESS happiness item was run as a check and agrees (trust +0.59 identical; health +0.26 against +0.40; education null in both), so nothing turns on the choice — with one exception worth knowing: the HDI's differences result against happiness reads +0.31 raw but +0.17 net of survey-round effects, where the life satisfaction result is +0.20 either way. Numbers in processed/differences_robustness.csv.</a:t>
+            </a:r>
+          </a:p>
+        </p:txBody>
+      </p:sp>
+      <p:sp>
+        <p:nvSpPr>
+          <p:cNvPr id="9" name="Rectangle 8"/>
+          <p:cNvSpPr/>
+          <p:nvPr/>
+        </p:nvSpPr>
+        <p:spPr>
+          <a:xfrm>
+            <a:off x="566928" y="3017520"/>
+            <a:ext cx="3472586" cy="25400"/>
+          </a:xfrm>
+          <a:prstGeom prst="rect">
+            <a:avLst/>
+          </a:prstGeom>
+          <a:solidFill>
+            <a:srgbClr val="17549E"/>
+          </a:solidFill>
+          <a:ln>
+            <a:noFill/>
+          </a:ln>
+          <a:effectLst/>
+        </p:spPr>
+        <p:style>
+          <a:lnRef idx="1">
+            <a:schemeClr val="accent1"/>
+          </a:lnRef>
+          <a:fillRef idx="3">
+            <a:schemeClr val="accent1"/>
+          </a:fillRef>
+          <a:effectRef idx="2">
+            <a:schemeClr val="accent1"/>
+          </a:effectRef>
+          <a:fontRef idx="minor">
+            <a:schemeClr val="lt1"/>
+          </a:fontRef>
+        </p:style>
+        <p:txBody>
+          <a:bodyPr rtlCol="0" anchor="ctr"/>
+          <a:lstStyle/>
+          <a:p>
+            <a:pPr algn="ctr"/>
+          </a:p>
+        </p:txBody>
+      </p:sp>
+      <p:sp>
+        <p:nvSpPr>
+          <p:cNvPr id="10" name="TextBox 9"/>
+          <p:cNvSpPr txBox="1"/>
+          <p:nvPr/>
+        </p:nvSpPr>
+        <p:spPr>
+          <a:xfrm>
+            <a:off x="566928" y="3163824"/>
+            <a:ext cx="3472586" cy="932688"/>
+          </a:xfrm>
+          <a:prstGeom prst="rect">
+            <a:avLst/>
+          </a:prstGeom>
+          <a:noFill/>
+        </p:spPr>
+        <p:txBody>
+          <a:bodyPr wrap="square" lIns="0" rIns="0" tIns="0" bIns="0">
+            <a:spAutoFit/>
+          </a:bodyPr>
+          <a:lstStyle/>
+          <a:p>
+            <a:pPr>
+              <a:spcBef>
+                <a:spcPts val="0"/>
+              </a:spcBef>
+              <a:spcAft>
+                <a:spcPts val="600"/>
+              </a:spcAft>
+            </a:pPr>
+            <a:r>
+              <a:rPr sz="850" b="0" i="0">
+                <a:solidFill>
+                  <a:srgbClr val="17549E"/>
                 </a:solidFill>
                 <a:latin typeface="Consolas"/>
               </a:rPr>
-              <a:t>IV</a:t>
+              <a:t>ROBUSTNESS OF THE DIFFERENCES RESULT</a:t>
+            </a:r>
+          </a:p>
+          <a:p>
+            <a:pPr>
+              <a:lnSpc>
+                <a:spcPct val="128000"/>
+              </a:lnSpc>
+              <a:spcBef>
+                <a:spcPts val="0"/>
+              </a:spcBef>
+              <a:spcAft>
+                <a:spcPts val="0"/>
+              </a:spcAft>
+            </a:pPr>
+            <a:r>
+              <a:rPr sz="750" b="0" i="0">
+                <a:solidFill>
+                  <a:srgbClr val="5A6068"/>
+                </a:solidFill>
+                <a:latin typeface="Calibri"/>
+              </a:rPr>
+              <a:t>Two checks beyond the item choice. Removing survey-round effects leaves health and trust intact (+0.42, +0.58) rather than reducing them, so they are idiosyncratic country movement and not shocks common to a round. And the split-half design — predictor and outcome from disjoint respondents — rules out common-method variance, with trust retaining 93%. What remains untested is replication of the trust result on an independent wellbeing instrument.</a:t>
+            </a:r>
+          </a:p>
+        </p:txBody>
+      </p:sp>
+      <p:sp>
+        <p:nvSpPr>
+          <p:cNvPr id="11" name="Rectangle 10"/>
+          <p:cNvSpPr/>
+          <p:nvPr/>
+        </p:nvSpPr>
+        <p:spPr>
+          <a:xfrm>
+            <a:off x="4359554" y="3017520"/>
+            <a:ext cx="3472586" cy="25400"/>
+          </a:xfrm>
+          <a:prstGeom prst="rect">
+            <a:avLst/>
+          </a:prstGeom>
+          <a:solidFill>
+            <a:srgbClr val="17549E"/>
+          </a:solidFill>
+          <a:ln>
+            <a:noFill/>
+          </a:ln>
+          <a:effectLst/>
+        </p:spPr>
+        <p:style>
+          <a:lnRef idx="1">
+            <a:schemeClr val="accent1"/>
+          </a:lnRef>
+          <a:fillRef idx="3">
+            <a:schemeClr val="accent1"/>
+          </a:fillRef>
+          <a:effectRef idx="2">
+            <a:schemeClr val="accent1"/>
+          </a:effectRef>
+          <a:fontRef idx="minor">
+            <a:schemeClr val="lt1"/>
+          </a:fontRef>
+        </p:style>
+        <p:txBody>
+          <a:bodyPr rtlCol="0" anchor="ctr"/>
+          <a:lstStyle/>
+          <a:p>
+            <a:pPr algn="ctr"/>
+          </a:p>
+        </p:txBody>
+      </p:sp>
+      <p:sp>
+        <p:nvSpPr>
+          <p:cNvPr id="12" name="TextBox 11"/>
+          <p:cNvSpPr txBox="1"/>
+          <p:nvPr/>
+        </p:nvSpPr>
+        <p:spPr>
+          <a:xfrm>
+            <a:off x="4359554" y="3163824"/>
+            <a:ext cx="3472586" cy="932688"/>
+          </a:xfrm>
+          <a:prstGeom prst="rect">
+            <a:avLst/>
+          </a:prstGeom>
+          <a:noFill/>
+        </p:spPr>
+        <p:txBody>
+          <a:bodyPr wrap="square" lIns="0" rIns="0" tIns="0" bIns="0">
+            <a:spAutoFit/>
+          </a:bodyPr>
+          <a:lstStyle/>
+          <a:p>
+            <a:pPr>
+              <a:spcBef>
+                <a:spcPts val="0"/>
+              </a:spcBef>
+              <a:spcAft>
+                <a:spcPts val="600"/>
+              </a:spcAft>
+            </a:pPr>
+            <a:r>
+              <a:rPr sz="850" b="0" i="0">
+                <a:solidFill>
+                  <a:srgbClr val="17549E"/>
+                </a:solidFill>
+                <a:latin typeface="Consolas"/>
+              </a:rPr>
+              <a:t>WHERE THE EFFECT-SIZE NUMBERS COME FROM</a:t>
+            </a:r>
+          </a:p>
+          <a:p>
+            <a:pPr>
+              <a:lnSpc>
+                <a:spcPct val="128000"/>
+              </a:lnSpc>
+              <a:spcBef>
+                <a:spcPts val="0"/>
+              </a:spcBef>
+              <a:spcAft>
+                <a:spcPts val="0"/>
+              </a:spcAft>
+            </a:pPr>
+            <a:r>
+              <a:rPr sz="750" b="0" i="0">
+                <a:solidFill>
+                  <a:srgbClr val="5A6068"/>
+                </a:solidFill>
+                <a:latin typeface="Calibri"/>
+              </a:rPr>
+              <a:t>Act II-a's '+0.20 pts / 59%' is OLS of the change in ESS life satisfaction on the change in the predictor, round fixed effects, SEs clustered by country (processed/differences_effect_sizes.csv). Trust: b=0.56 per point of trust (t=6.2), health: b=1.59 per point of good-health (t=2.7). Effect per 1 SD of the predictor's typical round-to-round move, benchmarked against 0.35 pts, the SD of life satisfaction's own round-to-round move. Education and the HDI composite are not distinguishable from zero at conventional significance.</a:t>
+            </a:r>
+          </a:p>
+        </p:txBody>
+      </p:sp>
+      <p:sp>
+        <p:nvSpPr>
+          <p:cNvPr id="13" name="Rectangle 12"/>
+          <p:cNvSpPr/>
+          <p:nvPr/>
+        </p:nvSpPr>
+        <p:spPr>
+          <a:xfrm>
+            <a:off x="8152180" y="3017520"/>
+            <a:ext cx="3472586" cy="25400"/>
+          </a:xfrm>
+          <a:prstGeom prst="rect">
+            <a:avLst/>
+          </a:prstGeom>
+          <a:solidFill>
+            <a:srgbClr val="17549E"/>
+          </a:solidFill>
+          <a:ln>
+            <a:noFill/>
+          </a:ln>
+          <a:effectLst/>
+        </p:spPr>
+        <p:style>
+          <a:lnRef idx="1">
+            <a:schemeClr val="accent1"/>
+          </a:lnRef>
+          <a:fillRef idx="3">
+            <a:schemeClr val="accent1"/>
+          </a:fillRef>
+          <a:effectRef idx="2">
+            <a:schemeClr val="accent1"/>
+          </a:effectRef>
+          <a:fontRef idx="minor">
+            <a:schemeClr val="lt1"/>
+          </a:fontRef>
+        </p:style>
+        <p:txBody>
+          <a:bodyPr rtlCol="0" anchor="ctr"/>
+          <a:lstStyle/>
+          <a:p>
+            <a:pPr algn="ctr"/>
+          </a:p>
+        </p:txBody>
+      </p:sp>
+      <p:sp>
+        <p:nvSpPr>
+          <p:cNvPr id="14" name="TextBox 13"/>
+          <p:cNvSpPr txBox="1"/>
+          <p:nvPr/>
+        </p:nvSpPr>
+        <p:spPr>
+          <a:xfrm>
+            <a:off x="8152180" y="3163824"/>
+            <a:ext cx="3472586" cy="932688"/>
+          </a:xfrm>
+          <a:prstGeom prst="rect">
+            <a:avLst/>
+          </a:prstGeom>
+          <a:noFill/>
+        </p:spPr>
+        <p:txBody>
+          <a:bodyPr wrap="square" lIns="0" rIns="0" tIns="0" bIns="0">
+            <a:spAutoFit/>
+          </a:bodyPr>
+          <a:lstStyle/>
+          <a:p>
+            <a:pPr>
+              <a:spcBef>
+                <a:spcPts val="0"/>
+              </a:spcBef>
+              <a:spcAft>
+                <a:spcPts val="600"/>
+              </a:spcAft>
+            </a:pPr>
+            <a:r>
+              <a:rPr sz="850" b="0" i="0">
+                <a:solidFill>
+                  <a:srgbClr val="17549E"/>
+                </a:solidFill>
+                <a:latin typeface="Consolas"/>
+              </a:rPr>
+              <a:t>WHAT THE ESS PANEL CAN AND CANNOT TEST</a:t>
+            </a:r>
+          </a:p>
+          <a:p>
+            <a:pPr>
+              <a:lnSpc>
+                <a:spcPct val="128000"/>
+              </a:lnSpc>
+              <a:spcBef>
+                <a:spcPts val="0"/>
+              </a:spcBef>
+              <a:spcAft>
+                <a:spcPts val="0"/>
+              </a:spcAft>
+            </a:pPr>
+            <a:r>
+              <a:rPr sz="750" b="0" i="0">
+                <a:solidFill>
+                  <a:srgbClr val="5A6068"/>
+                </a:solidFill>
+                <a:latin typeface="Calibri"/>
+              </a:rPr>
+              <a:t>Seven survey rounds is too short for the per-country time-series design. Simulating a REAL correlation and asking how often the test finds it: at seven observations rho = 0.5 is recovered in ~3% of units and rho = 0.7 in ~23%, against ~50% and ~79% at thirteen years. So HDI x ESS returning 8% levels / 16% differences is a null test, not a finding — and the inversion (differences above levels) is itself the tell. We report the bars and flag them rather than dropping them. The ESS levels contribution comes from cross-section instead: 47% of 15 countries across regions, which is well-powered.</a:t>
+            </a:r>
+          </a:p>
+        </p:txBody>
+      </p:sp>
+      <p:sp>
+        <p:nvSpPr>
+          <p:cNvPr id="15" name="Rectangle 14"/>
+          <p:cNvSpPr/>
+          <p:nvPr/>
+        </p:nvSpPr>
+        <p:spPr>
+          <a:xfrm>
+            <a:off x="566928" y="4206240"/>
+            <a:ext cx="3472586" cy="25400"/>
+          </a:xfrm>
+          <a:prstGeom prst="rect">
+            <a:avLst/>
+          </a:prstGeom>
+          <a:solidFill>
+            <a:srgbClr val="17549E"/>
+          </a:solidFill>
+          <a:ln>
+            <a:noFill/>
+          </a:ln>
+          <a:effectLst/>
+        </p:spPr>
+        <p:style>
+          <a:lnRef idx="1">
+            <a:schemeClr val="accent1"/>
+          </a:lnRef>
+          <a:fillRef idx="3">
+            <a:schemeClr val="accent1"/>
+          </a:fillRef>
+          <a:effectRef idx="2">
+            <a:schemeClr val="accent1"/>
+          </a:effectRef>
+          <a:fontRef idx="minor">
+            <a:schemeClr val="lt1"/>
+          </a:fontRef>
+        </p:style>
+        <p:txBody>
+          <a:bodyPr rtlCol="0" anchor="ctr"/>
+          <a:lstStyle/>
+          <a:p>
+            <a:pPr algn="ctr"/>
+          </a:p>
+        </p:txBody>
+      </p:sp>
+      <p:sp>
+        <p:nvSpPr>
+          <p:cNvPr id="16" name="TextBox 15"/>
+          <p:cNvSpPr txBox="1"/>
+          <p:nvPr/>
+        </p:nvSpPr>
+        <p:spPr>
+          <a:xfrm>
+            <a:off x="566928" y="4352544"/>
+            <a:ext cx="3472586" cy="932688"/>
+          </a:xfrm>
+          <a:prstGeom prst="rect">
+            <a:avLst/>
+          </a:prstGeom>
+          <a:noFill/>
+        </p:spPr>
+        <p:txBody>
+          <a:bodyPr wrap="square" lIns="0" rIns="0" tIns="0" bIns="0">
+            <a:spAutoFit/>
+          </a:bodyPr>
+          <a:lstStyle/>
+          <a:p>
+            <a:pPr>
+              <a:spcBef>
+                <a:spcPts val="0"/>
+              </a:spcBef>
+              <a:spcAft>
+                <a:spcPts val="600"/>
+              </a:spcAft>
+            </a:pPr>
+            <a:r>
+              <a:rPr sz="850" b="0" i="0">
+                <a:solidFill>
+                  <a:srgbClr val="17549E"/>
+                </a:solidFill>
+                <a:latin typeface="Consolas"/>
+              </a:rPr>
+              <a:t>SCOPE OF THE TRUST FINDING</a:t>
+            </a:r>
+          </a:p>
+          <a:p>
+            <a:pPr>
+              <a:lnSpc>
+                <a:spcPct val="128000"/>
+              </a:lnSpc>
+              <a:spcBef>
+                <a:spcPts val="0"/>
+              </a:spcBef>
+              <a:spcAft>
+                <a:spcPts val="0"/>
+              </a:spcAft>
+            </a:pPr>
+            <a:r>
+              <a:rPr sz="750" b="0" i="0">
+                <a:solidFill>
+                  <a:srgbClr val="5A6068"/>
+                </a:solidFill>
+                <a:latin typeface="Calibri"/>
+              </a:rPr>
+              <a:t>Trust rests on the ESS: 36 European countries, one item, self-reported. 97% of countries significant at levels; +0.59 within-country in first differences, and +0.55 with predictor and outcome drawn from disjoint respondents, so it is not a common-method artefact. What is still missing is corroboration against an independent wellbeing instrument: against the WHR ladder it is +0.06 n.s. in differences, plausibly attenuation from pairing two samples with different fieldwork timing, but unproven either way. Health has that corroboration and trust does not — worth stating plainly rather than leaning on trust as hard as on health.</a:t>
+            </a:r>
+          </a:p>
+        </p:txBody>
+      </p:sp>
+      <p:sp>
+        <p:nvSpPr>
+          <p:cNvPr id="17" name="Rectangle 16"/>
+          <p:cNvSpPr/>
+          <p:nvPr/>
+        </p:nvSpPr>
+        <p:spPr>
+          <a:xfrm>
+            <a:off x="4359554" y="4206240"/>
+            <a:ext cx="3472586" cy="25400"/>
+          </a:xfrm>
+          <a:prstGeom prst="rect">
+            <a:avLst/>
+          </a:prstGeom>
+          <a:solidFill>
+            <a:srgbClr val="17549E"/>
+          </a:solidFill>
+          <a:ln>
+            <a:noFill/>
+          </a:ln>
+          <a:effectLst/>
+        </p:spPr>
+        <p:style>
+          <a:lnRef idx="1">
+            <a:schemeClr val="accent1"/>
+          </a:lnRef>
+          <a:fillRef idx="3">
+            <a:schemeClr val="accent1"/>
+          </a:fillRef>
+          <a:effectRef idx="2">
+            <a:schemeClr val="accent1"/>
+          </a:effectRef>
+          <a:fontRef idx="minor">
+            <a:schemeClr val="lt1"/>
+          </a:fontRef>
+        </p:style>
+        <p:txBody>
+          <a:bodyPr rtlCol="0" anchor="ctr"/>
+          <a:lstStyle/>
+          <a:p>
+            <a:pPr algn="ctr"/>
+          </a:p>
+        </p:txBody>
+      </p:sp>
+      <p:sp>
+        <p:nvSpPr>
+          <p:cNvPr id="18" name="TextBox 17"/>
+          <p:cNvSpPr txBox="1"/>
+          <p:nvPr/>
+        </p:nvSpPr>
+        <p:spPr>
+          <a:xfrm>
+            <a:off x="4359554" y="4352544"/>
+            <a:ext cx="3472586" cy="932688"/>
+          </a:xfrm>
+          <a:prstGeom prst="rect">
+            <a:avLst/>
+          </a:prstGeom>
+          <a:noFill/>
+        </p:spPr>
+        <p:txBody>
+          <a:bodyPr wrap="square" lIns="0" rIns="0" tIns="0" bIns="0">
+            <a:spAutoFit/>
+          </a:bodyPr>
+          <a:lstStyle/>
+          <a:p>
+            <a:pPr>
+              <a:spcBef>
+                <a:spcPts val="0"/>
+              </a:spcBef>
+              <a:spcAft>
+                <a:spcPts val="600"/>
+              </a:spcAft>
+            </a:pPr>
+            <a:r>
+              <a:rPr sz="850" b="0" i="0">
+                <a:solidFill>
+                  <a:srgbClr val="17549E"/>
+                </a:solidFill>
+                <a:latin typeface="Consolas"/>
+              </a:rPr>
+              <a:t>INSTITUTIONAL CONFIDENCE IS NOT INTERPERSONAL TRUST</a:t>
+            </a:r>
+          </a:p>
+          <a:p>
+            <a:pPr>
+              <a:lnSpc>
+                <a:spcPct val="128000"/>
+              </a:lnSpc>
+              <a:spcBef>
+                <a:spcPts val="0"/>
+              </a:spcBef>
+              <a:spcAft>
+                <a:spcPts val="0"/>
+              </a:spcAft>
+            </a:pPr>
+            <a:r>
+              <a:rPr sz="750" b="0" i="0">
+                <a:solidFill>
+                  <a:srgbClr val="5A6068"/>
+                </a:solidFill>
+                <a:latin typeface="Calibri"/>
+              </a:rPr>
+              <a:t>SDG16's trust-adjacent series measure satisfaction with public services, perceived bribery and perceived inclusiveness in decision-making. These are conceptually distinct from 'most people can be trusted', and they do not survive an income control while interpersonal trust does. The commentary must be explicit that SDG16 is not a direct analogue, wherever the 1.5% figure appears.</a:t>
+            </a:r>
+          </a:p>
+        </p:txBody>
+      </p:sp>
+      <p:sp>
+        <p:nvSpPr>
+          <p:cNvPr id="19" name="Rectangle 18"/>
+          <p:cNvSpPr/>
+          <p:nvPr/>
+        </p:nvSpPr>
+        <p:spPr>
+          <a:xfrm>
+            <a:off x="8152180" y="4206240"/>
+            <a:ext cx="3472586" cy="25400"/>
+          </a:xfrm>
+          <a:prstGeom prst="rect">
+            <a:avLst/>
+          </a:prstGeom>
+          <a:solidFill>
+            <a:srgbClr val="17549E"/>
+          </a:solidFill>
+          <a:ln>
+            <a:noFill/>
+          </a:ln>
+          <a:effectLst/>
+        </p:spPr>
+        <p:style>
+          <a:lnRef idx="1">
+            <a:schemeClr val="accent1"/>
+          </a:lnRef>
+          <a:fillRef idx="3">
+            <a:schemeClr val="accent1"/>
+          </a:fillRef>
+          <a:effectRef idx="2">
+            <a:schemeClr val="accent1"/>
+          </a:effectRef>
+          <a:fontRef idx="minor">
+            <a:schemeClr val="lt1"/>
+          </a:fontRef>
+        </p:style>
+        <p:txBody>
+          <a:bodyPr rtlCol="0" anchor="ctr"/>
+          <a:lstStyle/>
+          <a:p>
+            <a:pPr algn="ctr"/>
+          </a:p>
+        </p:txBody>
+      </p:sp>
+      <p:sp>
+        <p:nvSpPr>
+          <p:cNvPr id="20" name="TextBox 19"/>
+          <p:cNvSpPr txBox="1"/>
+          <p:nvPr/>
+        </p:nvSpPr>
+        <p:spPr>
+          <a:xfrm>
+            <a:off x="8152180" y="4352544"/>
+            <a:ext cx="3472586" cy="932688"/>
+          </a:xfrm>
+          <a:prstGeom prst="rect">
+            <a:avLst/>
+          </a:prstGeom>
+          <a:noFill/>
+        </p:spPr>
+        <p:txBody>
+          <a:bodyPr wrap="square" lIns="0" rIns="0" tIns="0" bIns="0">
+            <a:spAutoFit/>
+          </a:bodyPr>
+          <a:lstStyle/>
+          <a:p>
+            <a:pPr>
+              <a:spcBef>
+                <a:spcPts val="0"/>
+              </a:spcBef>
+              <a:spcAft>
+                <a:spcPts val="600"/>
+              </a:spcAft>
+            </a:pPr>
+            <a:r>
+              <a:rPr sz="950" b="0" i="0">
+                <a:solidFill>
+                  <a:srgbClr val="17549E"/>
+                </a:solidFill>
+                <a:latin typeface="Consolas"/>
+              </a:rPr>
+              <a:t>THREE FAILURE MODES AS THE META-FINDING</a:t>
+            </a:r>
+          </a:p>
+          <a:p>
+            <a:pPr>
+              <a:lnSpc>
+                <a:spcPct val="128000"/>
+              </a:lnSpc>
+              <a:spcBef>
+                <a:spcPts val="0"/>
+              </a:spcBef>
+              <a:spcAft>
+                <a:spcPts val="0"/>
+              </a:spcAft>
+            </a:pPr>
+            <a:r>
+              <a:rPr sz="875" b="0" i="0">
+                <a:solidFill>
+                  <a:srgbClr val="5A6068"/>
+                </a:solidFill>
+                <a:latin typeface="Calibri"/>
+              </a:rPr>
+              <a:t>The paper's contribution is arguably not the three domains but the three distinct ways a framework loses one: pooled construct, saturated variable, absent coverage. They need different remedies, which is what makes Act IV specific rather than rhetorical.</a:t>
+            </a:r>
+          </a:p>
+        </p:txBody>
+      </p:sp>
+      <p:sp>
+        <p:nvSpPr>
+          <p:cNvPr id="21" name="Rectangle 20"/>
+          <p:cNvSpPr/>
+          <p:nvPr/>
+        </p:nvSpPr>
+        <p:spPr>
+          <a:xfrm>
+            <a:off x="566928" y="5394960"/>
+            <a:ext cx="3472586" cy="25400"/>
+          </a:xfrm>
+          <a:prstGeom prst="rect">
+            <a:avLst/>
+          </a:prstGeom>
+          <a:solidFill>
+            <a:srgbClr val="17549E"/>
+          </a:solidFill>
+          <a:ln>
+            <a:noFill/>
+          </a:ln>
+          <a:effectLst/>
+        </p:spPr>
+        <p:style>
+          <a:lnRef idx="1">
+            <a:schemeClr val="accent1"/>
+          </a:lnRef>
+          <a:fillRef idx="3">
+            <a:schemeClr val="accent1"/>
+          </a:fillRef>
+          <a:effectRef idx="2">
+            <a:schemeClr val="accent1"/>
+          </a:effectRef>
+          <a:fontRef idx="minor">
+            <a:schemeClr val="lt1"/>
+          </a:fontRef>
+        </p:style>
+        <p:txBody>
+          <a:bodyPr rtlCol="0" anchor="ctr"/>
+          <a:lstStyle/>
+          <a:p>
+            <a:pPr algn="ctr"/>
+          </a:p>
+        </p:txBody>
+      </p:sp>
+      <p:sp>
+        <p:nvSpPr>
+          <p:cNvPr id="22" name="TextBox 21"/>
+          <p:cNvSpPr txBox="1"/>
+          <p:nvPr/>
+        </p:nvSpPr>
+        <p:spPr>
+          <a:xfrm>
+            <a:off x="566928" y="5541264"/>
+            <a:ext cx="3472586" cy="932688"/>
+          </a:xfrm>
+          <a:prstGeom prst="rect">
+            <a:avLst/>
+          </a:prstGeom>
+          <a:noFill/>
+        </p:spPr>
+        <p:txBody>
+          <a:bodyPr wrap="square" lIns="0" rIns="0" tIns="0" bIns="0">
+            <a:spAutoFit/>
+          </a:bodyPr>
+          <a:lstStyle/>
+          <a:p>
+            <a:pPr>
+              <a:spcBef>
+                <a:spcPts val="0"/>
+              </a:spcBef>
+              <a:spcAft>
+                <a:spcPts val="600"/>
+              </a:spcAft>
+            </a:pPr>
+            <a:r>
+              <a:rPr sz="950" b="0" i="0">
+                <a:solidFill>
+                  <a:srgbClr val="17549E"/>
+                </a:solidFill>
+                <a:latin typeface="Consolas"/>
+              </a:rPr>
+              <a:t>WHAT WE ARE NOT CLAIMING</a:t>
+            </a:r>
+          </a:p>
+          <a:p>
+            <a:pPr>
+              <a:lnSpc>
+                <a:spcPct val="128000"/>
+              </a:lnSpc>
+              <a:spcBef>
+                <a:spcPts val="0"/>
+              </a:spcBef>
+              <a:spcAft>
+                <a:spcPts val="0"/>
+              </a:spcAft>
+            </a:pPr>
+            <a:r>
+              <a:rPr sz="875" b="0" i="0">
+                <a:solidFill>
+                  <a:srgbClr val="5A6068"/>
+                </a:solidFill>
+                <a:latin typeface="Calibri"/>
+              </a:rPr>
+              <a:t>No causal claim, and no verdict on the SDGs or HDI as development instruments. The claim is about what these frameworks can and cannot see when the question is individual lived experience — and it is bounded by ESS coverage on the trust half.</a:t>
             </a:r>
           </a:p>
         </p:txBody>
@@ -10923,7 +11555,7 @@
     <p:bg>
       <p:bgPr>
         <a:solidFill>
-          <a:srgbClr val="E8EBEF"/>
+          <a:srgbClr val="14171C"/>
         </a:solidFill>
         <a:effectLst/>
       </p:bgPr>
@@ -10937,111 +11569,44 @@
       <p:grpSpPr/>
       <p:sp>
         <p:nvSpPr>
-          <p:cNvPr id="2" name="Rectangle 1"/>
-          <p:cNvSpPr/>
-          <p:nvPr/>
-        </p:nvSpPr>
-        <p:spPr>
-          <a:xfrm>
-            <a:off x="566928" y="2103120"/>
-            <a:ext cx="54864" cy="2377440"/>
-          </a:xfrm>
-          <a:prstGeom prst="rect">
-            <a:avLst/>
-          </a:prstGeom>
-          <a:solidFill>
-            <a:srgbClr val="17549E"/>
-          </a:solidFill>
-          <a:ln>
-            <a:noFill/>
-          </a:ln>
-          <a:effectLst/>
-        </p:spPr>
-        <p:style>
-          <a:lnRef idx="1">
-            <a:schemeClr val="accent1"/>
-          </a:lnRef>
-          <a:fillRef idx="3">
-            <a:schemeClr val="accent1"/>
-          </a:fillRef>
-          <a:effectRef idx="2">
-            <a:schemeClr val="accent1"/>
-          </a:effectRef>
-          <a:fontRef idx="minor">
-            <a:schemeClr val="lt1"/>
-          </a:fontRef>
-        </p:style>
-        <p:txBody>
-          <a:bodyPr rtlCol="0" anchor="ctr"/>
-          <a:lstStyle/>
-          <a:p>
-            <a:pPr algn="ctr"/>
-          </a:p>
-        </p:txBody>
-      </p:sp>
-      <p:sp>
-        <p:nvSpPr>
-          <p:cNvPr id="3" name="TextBox 2"/>
-          <p:cNvSpPr txBox="1"/>
-          <p:nvPr/>
-        </p:nvSpPr>
-        <p:spPr>
-          <a:xfrm>
-            <a:off x="914400" y="1600200"/>
-            <a:ext cx="8686800" cy="274320"/>
-          </a:xfrm>
-          <a:prstGeom prst="rect">
-            <a:avLst/>
-          </a:prstGeom>
-          <a:noFill/>
-        </p:spPr>
-        <p:txBody>
-          <a:bodyPr wrap="square" lIns="0" rIns="0" tIns="0" bIns="0">
-            <a:spAutoFit/>
-          </a:bodyPr>
-          <a:lstStyle/>
-          <a:p>
-            <a:pPr>
-              <a:spcBef>
-                <a:spcPts val="0"/>
-              </a:spcBef>
-              <a:spcAft>
-                <a:spcPts val="0"/>
-              </a:spcAft>
-            </a:pPr>
-            <a:r>
-              <a:rPr sz="1100" b="0" i="0">
-                <a:solidFill>
-                  <a:srgbClr val="17549E"/>
-                </a:solidFill>
-                <a:latin typeface="Consolas"/>
-              </a:rPr>
-              <a:t>WHERE ACT IV LEAVES US</a:t>
-            </a:r>
-          </a:p>
-        </p:txBody>
-      </p:sp>
-      <p:sp>
-        <p:nvSpPr>
-          <p:cNvPr id="4" name="TextBox 3"/>
-          <p:cNvSpPr txBox="1"/>
-          <p:nvPr/>
-        </p:nvSpPr>
-        <p:spPr>
-          <a:xfrm>
-            <a:off x="914400" y="2148840"/>
-            <a:ext cx="9509760" cy="2926080"/>
-          </a:xfrm>
-          <a:prstGeom prst="rect">
-            <a:avLst/>
-          </a:prstGeom>
-          <a:noFill/>
-        </p:spPr>
-        <p:txBody>
-          <a:bodyPr wrap="square" lIns="0" rIns="0" tIns="0" bIns="0">
-            <a:spAutoFit/>
-          </a:bodyPr>
-          <a:lstStyle/>
+          <p:cNvPr id="2" name="TextBox 1"/>
+          <p:cNvSpPr txBox="1"/>
+          <p:nvPr/>
+        </p:nvSpPr>
+        <p:spPr>
+          <a:xfrm>
+            <a:off x="566928" y="2743200"/>
+            <a:ext cx="8229600" cy="1371600"/>
+          </a:xfrm>
+          <a:prstGeom prst="rect">
+            <a:avLst/>
+          </a:prstGeom>
+          <a:noFill/>
+        </p:spPr>
+        <p:txBody>
+          <a:bodyPr wrap="square" lIns="0" rIns="0" tIns="0" bIns="0">
+            <a:spAutoFit/>
+          </a:bodyPr>
+          <a:lstStyle/>
+          <a:p>
+            <a:pPr>
+              <a:spcBef>
+                <a:spcPts val="0"/>
+              </a:spcBef>
+              <a:spcAft>
+                <a:spcPts val="1000"/>
+              </a:spcAft>
+            </a:pPr>
+            <a:r>
+              <a:rPr sz="4000" b="0" i="0">
+                <a:solidFill>
+                  <a:srgbClr val="FCFCFB"/>
+                </a:solidFill>
+                <a:latin typeface="Georgia"/>
+              </a:rPr>
+              <a:t>Evidence appendix</a:t>
+            </a:r>
+          </a:p>
           <a:p>
             <a:pPr>
               <a:lnSpc>
@@ -11055,13 +11620,13 @@
               </a:spcAft>
             </a:pPr>
             <a:r>
-              <a:rPr sz="2100" b="0" i="0">
-                <a:solidFill>
-                  <a:srgbClr val="14171C"/>
-                </a:solidFill>
-                <a:latin typeface="Georgia"/>
-              </a:rPr>
-              <a:t>Whether wellbeing belongs in the purpose of a development framework is a choice, not a finding. But if it does, the measurement that follows from that intent looks different from the measurement in place today — and the three changes above are where it would start.</a:t>
+              <a:rPr sz="1400" b="0" i="0">
+                <a:solidFill>
+                  <a:srgbClr val="9AA4B0"/>
+                </a:solidFill>
+                <a:latin typeface="Calibri"/>
+              </a:rPr>
+              <a:t>Everything the three acts rest on but do not carry. In submission these become supplementary material.</a:t>
             </a:r>
           </a:p>
         </p:txBody>
@@ -11100,100 +11665,79 @@
         </p:nvSpPr>
         <p:spPr>
           <a:xfrm>
-            <a:off x="566928" y="502920"/>
-            <a:ext cx="8229600" cy="822960"/>
-          </a:xfrm>
-          <a:prstGeom prst="rect">
-            <a:avLst/>
-          </a:prstGeom>
-          <a:noFill/>
-        </p:spPr>
-        <p:txBody>
-          <a:bodyPr wrap="square" lIns="0" rIns="0" tIns="0" bIns="0">
-            <a:spAutoFit/>
-          </a:bodyPr>
-          <a:lstStyle/>
-          <a:p>
-            <a:pPr>
-              <a:spcBef>
-                <a:spcPts val="0"/>
-              </a:spcBef>
-              <a:spcAft>
-                <a:spcPts val="600"/>
-              </a:spcAft>
-            </a:pPr>
-            <a:r>
-              <a:rPr sz="3200" b="0" i="0">
+            <a:off x="566928" y="411480"/>
+            <a:ext cx="10515600" cy="320040"/>
+          </a:xfrm>
+          <a:prstGeom prst="rect">
+            <a:avLst/>
+          </a:prstGeom>
+          <a:noFill/>
+        </p:spPr>
+        <p:txBody>
+          <a:bodyPr wrap="square" lIns="0" rIns="0" tIns="0" bIns="0">
+            <a:spAutoFit/>
+          </a:bodyPr>
+          <a:lstStyle/>
+          <a:p>
+            <a:pPr>
+              <a:spcBef>
+                <a:spcPts val="0"/>
+              </a:spcBef>
+              <a:spcAft>
+                <a:spcPts val="0"/>
+              </a:spcAft>
+            </a:pPr>
+            <a:r>
+              <a:rPr sz="1000" b="0" i="0">
+                <a:solidFill>
+                  <a:srgbClr val="868D96"/>
+                </a:solidFill>
+                <a:latin typeface="Consolas"/>
+              </a:rPr>
+              <a:t>APPENDIX</a:t>
+            </a:r>
+          </a:p>
+        </p:txBody>
+      </p:sp>
+      <p:sp>
+        <p:nvSpPr>
+          <p:cNvPr id="3" name="TextBox 2"/>
+          <p:cNvSpPr txBox="1"/>
+          <p:nvPr/>
+        </p:nvSpPr>
+        <p:spPr>
+          <a:xfrm>
+            <a:off x="566928" y="749808"/>
+            <a:ext cx="10515600" cy="457200"/>
+          </a:xfrm>
+          <a:prstGeom prst="rect">
+            <a:avLst/>
+          </a:prstGeom>
+          <a:noFill/>
+        </p:spPr>
+        <p:txBody>
+          <a:bodyPr wrap="square" lIns="0" rIns="0" tIns="0" bIns="0">
+            <a:spAutoFit/>
+          </a:bodyPr>
+          <a:lstStyle/>
+          <a:p>
+            <a:pPr>
+              <a:spcBef>
+                <a:spcPts val="0"/>
+              </a:spcBef>
+              <a:spcAft>
+                <a:spcPts val="0"/>
+              </a:spcAft>
+            </a:pPr>
+            <a:r>
+              <a:rPr sz="2000" b="0" i="0">
                 <a:solidFill>
                   <a:srgbClr val="14171C"/>
                 </a:solidFill>
                 <a:latin typeface="Georgia"/>
               </a:rPr>
-              <a:t>Decisions for the team</a:t>
-            </a:r>
-          </a:p>
-          <a:p>
-            <a:pPr>
-              <a:spcBef>
-                <a:spcPts val="0"/>
-              </a:spcBef>
-              <a:spcAft>
-                <a:spcPts val="0"/>
-              </a:spcAft>
-            </a:pPr>
-            <a:r>
-              <a:rPr sz="1300" b="0" i="0">
-                <a:solidFill>
-                  <a:srgbClr val="5A6068"/>
-                </a:solidFill>
-                <a:latin typeface="Calibri"/>
-              </a:rPr>
-              <a:t>9 things the acts do not settle, in the order they block drafting.</a:t>
-            </a:r>
-          </a:p>
-        </p:txBody>
-      </p:sp>
-      <p:sp>
-        <p:nvSpPr>
-          <p:cNvPr id="3" name="Rectangle 2"/>
-          <p:cNvSpPr/>
-          <p:nvPr/>
-        </p:nvSpPr>
-        <p:spPr>
-          <a:xfrm>
-            <a:off x="566928" y="1828800"/>
-            <a:ext cx="3472586" cy="25400"/>
-          </a:xfrm>
-          <a:prstGeom prst="rect">
-            <a:avLst/>
-          </a:prstGeom>
-          <a:solidFill>
-            <a:srgbClr val="17549E"/>
-          </a:solidFill>
-          <a:ln>
-            <a:noFill/>
-          </a:ln>
-          <a:effectLst/>
-        </p:spPr>
-        <p:style>
-          <a:lnRef idx="1">
-            <a:schemeClr val="accent1"/>
-          </a:lnRef>
-          <a:fillRef idx="3">
-            <a:schemeClr val="accent1"/>
-          </a:fillRef>
-          <a:effectRef idx="2">
-            <a:schemeClr val="accent1"/>
-          </a:effectRef>
-          <a:fontRef idx="minor">
-            <a:schemeClr val="lt1"/>
-          </a:fontRef>
-        </p:style>
-        <p:txBody>
-          <a:bodyPr rtlCol="0" anchor="ctr"/>
-          <a:lstStyle/>
-          <a:p>
-            <a:pPr algn="ctr"/>
+              <a:t>HDI composite and its five components, in full</a:t>
+            </a:r>
           </a:p>
         </p:txBody>
       </p:sp>
@@ -11205,38 +11749,19 @@
         </p:nvSpPr>
         <p:spPr>
           <a:xfrm>
-            <a:off x="566928" y="1975104"/>
-            <a:ext cx="3472586" cy="1328928"/>
-          </a:xfrm>
-          <a:prstGeom prst="rect">
-            <a:avLst/>
-          </a:prstGeom>
-          <a:noFill/>
-        </p:spPr>
-        <p:txBody>
-          <a:bodyPr wrap="square" lIns="0" rIns="0" tIns="0" bIns="0">
-            <a:spAutoFit/>
-          </a:bodyPr>
-          <a:lstStyle/>
-          <a:p>
-            <a:pPr>
-              <a:spcBef>
-                <a:spcPts val="0"/>
-              </a:spcBef>
-              <a:spcAft>
-                <a:spcPts val="600"/>
-              </a:spcAft>
-            </a:pPr>
-            <a:r>
-              <a:rPr sz="950" b="0" i="0">
-                <a:solidFill>
-                  <a:srgbClr val="17549E"/>
-                </a:solidFill>
-                <a:latin typeface="Consolas"/>
-              </a:rPr>
-              <a:t>FIGURE COUNT</a:t>
-            </a:r>
-          </a:p>
+            <a:off x="566928" y="1207008"/>
+            <a:ext cx="10515600" cy="457200"/>
+          </a:xfrm>
+          <a:prstGeom prst="rect">
+            <a:avLst/>
+          </a:prstGeom>
+          <a:noFill/>
+        </p:spPr>
+        <p:txBody>
+          <a:bodyPr wrap="square" lIns="0" rIns="0" tIns="0" bIns="0">
+            <a:spAutoFit/>
+          </a:bodyPr>
+          <a:lstStyle/>
           <a:p>
             <a:pPr>
               <a:lnSpc>
@@ -11250,881 +11775,41 @@
               </a:spcAft>
             </a:pPr>
             <a:r>
-              <a:rPr sz="950" b="0" i="0">
+              <a:rPr sz="1100" b="0" i="0">
                 <a:solidFill>
                   <a:srgbClr val="5A6068"/>
                 </a:solidFill>
                 <a:latin typeface="Calibri"/>
               </a:rPr>
-              <a:t>Commentaries allow one or two. Proposed: the three-way collapse as Figure 1 and the three-domain comparison as Figure 2. Everything else supplementary.</a:t>
-            </a:r>
-          </a:p>
-        </p:txBody>
-      </p:sp>
-      <p:sp>
-        <p:nvSpPr>
-          <p:cNvPr id="5" name="Rectangle 4"/>
-          <p:cNvSpPr/>
-          <p:nvPr/>
-        </p:nvSpPr>
-        <p:spPr>
-          <a:xfrm>
-            <a:off x="4359554" y="1828800"/>
-            <a:ext cx="3472586" cy="25400"/>
-          </a:xfrm>
-          <a:prstGeom prst="rect">
-            <a:avLst/>
-          </a:prstGeom>
-          <a:solidFill>
-            <a:srgbClr val="17549E"/>
-          </a:solidFill>
-          <a:ln>
-            <a:noFill/>
-          </a:ln>
-          <a:effectLst/>
-        </p:spPr>
-        <p:style>
-          <a:lnRef idx="1">
-            <a:schemeClr val="accent1"/>
-          </a:lnRef>
-          <a:fillRef idx="3">
-            <a:schemeClr val="accent1"/>
-          </a:fillRef>
-          <a:effectRef idx="2">
-            <a:schemeClr val="accent1"/>
-          </a:effectRef>
-          <a:fontRef idx="minor">
-            <a:schemeClr val="lt1"/>
-          </a:fontRef>
-        </p:style>
-        <p:txBody>
-          <a:bodyPr rtlCol="0" anchor="ctr"/>
-          <a:lstStyle/>
-          <a:p>
-            <a:pPr algn="ctr"/>
-          </a:p>
-        </p:txBody>
-      </p:sp>
-      <p:sp>
-        <p:nvSpPr>
-          <p:cNvPr id="6" name="TextBox 5"/>
-          <p:cNvSpPr txBox="1"/>
-          <p:nvPr/>
-        </p:nvSpPr>
-        <p:spPr>
-          <a:xfrm>
-            <a:off x="4359554" y="1975104"/>
-            <a:ext cx="3472586" cy="1328928"/>
-          </a:xfrm>
-          <a:prstGeom prst="rect">
-            <a:avLst/>
-          </a:prstGeom>
-          <a:noFill/>
-        </p:spPr>
-        <p:txBody>
-          <a:bodyPr wrap="square" lIns="0" rIns="0" tIns="0" bIns="0">
-            <a:spAutoFit/>
-          </a:bodyPr>
-          <a:lstStyle/>
-          <a:p>
-            <a:pPr>
-              <a:spcBef>
-                <a:spcPts val="0"/>
-              </a:spcBef>
-              <a:spcAft>
-                <a:spcPts val="600"/>
-              </a:spcAft>
-            </a:pPr>
-            <a:r>
-              <a:rPr sz="950" b="0" i="0">
-                <a:solidFill>
-                  <a:srgbClr val="17549E"/>
-                </a:solidFill>
-                <a:latin typeface="Consolas"/>
-              </a:rPr>
-              <a:t>ONE UNIT, EVERYWHERE</a:t>
-            </a:r>
-          </a:p>
-          <a:p>
-            <a:pPr>
-              <a:lnSpc>
-                <a:spcPct val="128000"/>
-              </a:lnSpc>
-              <a:spcBef>
-                <a:spcPts val="0"/>
-              </a:spcBef>
-              <a:spcAft>
-                <a:spcPts val="0"/>
-              </a:spcAft>
-            </a:pPr>
-            <a:r>
-              <a:rPr sz="950" b="0" i="0">
-                <a:solidFill>
-                  <a:srgbClr val="5A6068"/>
-                </a:solidFill>
-                <a:latin typeface="Calibri"/>
-              </a:rPr>
-              <a:t>Every headline number is now % of units FDR-significant at q  0.04 on ~7 country-round means; at that n roughly two-thirds of pure noise clears the bar, which inflated the ESS figures and made the framework comparison meaningless. ESS is now estimated on individual respondents, demeaned within country-round.</a:t>
-            </a:r>
-          </a:p>
-        </p:txBody>
-      </p:sp>
-      <p:sp>
-        <p:nvSpPr>
-          <p:cNvPr id="7" name="Rectangle 6"/>
-          <p:cNvSpPr/>
-          <p:nvPr/>
-        </p:nvSpPr>
-        <p:spPr>
-          <a:xfrm>
-            <a:off x="8152180" y="1828800"/>
-            <a:ext cx="3472586" cy="25400"/>
-          </a:xfrm>
-          <a:prstGeom prst="rect">
-            <a:avLst/>
-          </a:prstGeom>
-          <a:solidFill>
-            <a:srgbClr val="17549E"/>
-          </a:solidFill>
-          <a:ln>
-            <a:noFill/>
-          </a:ln>
-          <a:effectLst/>
-        </p:spPr>
-        <p:style>
-          <a:lnRef idx="1">
-            <a:schemeClr val="accent1"/>
-          </a:lnRef>
-          <a:fillRef idx="3">
-            <a:schemeClr val="accent1"/>
-          </a:fillRef>
-          <a:effectRef idx="2">
-            <a:schemeClr val="accent1"/>
-          </a:effectRef>
-          <a:fontRef idx="minor">
-            <a:schemeClr val="lt1"/>
-          </a:fontRef>
-        </p:style>
-        <p:txBody>
-          <a:bodyPr rtlCol="0" anchor="ctr"/>
-          <a:lstStyle/>
-          <a:p>
-            <a:pPr algn="ctr"/>
-          </a:p>
-        </p:txBody>
-      </p:sp>
-      <p:sp>
-        <p:nvSpPr>
-          <p:cNvPr id="8" name="TextBox 7"/>
-          <p:cNvSpPr txBox="1"/>
-          <p:nvPr/>
-        </p:nvSpPr>
-        <p:spPr>
-          <a:xfrm>
-            <a:off x="8152180" y="1975104"/>
-            <a:ext cx="3472586" cy="1328928"/>
-          </a:xfrm>
-          <a:prstGeom prst="rect">
-            <a:avLst/>
-          </a:prstGeom>
-          <a:noFill/>
-        </p:spPr>
-        <p:txBody>
-          <a:bodyPr wrap="square" lIns="0" rIns="0" tIns="0" bIns="0">
-            <a:spAutoFit/>
-          </a:bodyPr>
-          <a:lstStyle/>
-          <a:p>
-            <a:pPr>
-              <a:spcBef>
-                <a:spcPts val="0"/>
-              </a:spcBef>
-              <a:spcAft>
-                <a:spcPts val="600"/>
-              </a:spcAft>
-            </a:pPr>
-            <a:r>
-              <a:rPr sz="850" b="0" i="0">
-                <a:solidFill>
-                  <a:srgbClr val="17549E"/>
-                </a:solidFill>
-                <a:latin typeface="Consolas"/>
-              </a:rPr>
-              <a:t>WHICH ESS WELLBEING ITEM, AND WHY</a:t>
-            </a:r>
-          </a:p>
-          <a:p>
-            <a:pPr>
-              <a:lnSpc>
-                <a:spcPct val="128000"/>
-              </a:lnSpc>
-              <a:spcBef>
-                <a:spcPts val="0"/>
-              </a:spcBef>
-              <a:spcAft>
-                <a:spcPts val="0"/>
-              </a:spcAft>
-            </a:pPr>
-            <a:r>
-              <a:rPr sz="750" b="0" i="0">
-                <a:solidFill>
-                  <a:srgbClr val="5A6068"/>
-                </a:solidFill>
-                <a:latin typeface="Calibri"/>
-              </a:rPr>
-              <a:t>The deck runs on ESS life satisfaction throughout, because the WHR Cantril ladder is a life evaluation and that is the like-for-like analogue. The ESS happiness item was run as a check and agrees (trust +0.59 identical; health +0.26 against +0.40; education null in both), so nothing turns on the choice — with one exception worth knowing: the HDI's differences result against happiness reads +0.31 raw but +0.17 net of survey-round effects, where the life satisfaction result is +0.20 either way. Numbers in processed/differences_robustness.csv.</a:t>
-            </a:r>
-          </a:p>
-        </p:txBody>
-      </p:sp>
-      <p:sp>
-        <p:nvSpPr>
-          <p:cNvPr id="9" name="Rectangle 8"/>
-          <p:cNvSpPr/>
-          <p:nvPr/>
-        </p:nvSpPr>
-        <p:spPr>
-          <a:xfrm>
-            <a:off x="566928" y="3413760"/>
-            <a:ext cx="3472586" cy="25400"/>
-          </a:xfrm>
-          <a:prstGeom prst="rect">
-            <a:avLst/>
-          </a:prstGeom>
-          <a:solidFill>
-            <a:srgbClr val="17549E"/>
-          </a:solidFill>
-          <a:ln>
-            <a:noFill/>
-          </a:ln>
-          <a:effectLst/>
-        </p:spPr>
-        <p:style>
-          <a:lnRef idx="1">
-            <a:schemeClr val="accent1"/>
-          </a:lnRef>
-          <a:fillRef idx="3">
-            <a:schemeClr val="accent1"/>
-          </a:fillRef>
-          <a:effectRef idx="2">
-            <a:schemeClr val="accent1"/>
-          </a:effectRef>
-          <a:fontRef idx="minor">
-            <a:schemeClr val="lt1"/>
-          </a:fontRef>
-        </p:style>
-        <p:txBody>
-          <a:bodyPr rtlCol="0" anchor="ctr"/>
-          <a:lstStyle/>
-          <a:p>
-            <a:pPr algn="ctr"/>
-          </a:p>
-        </p:txBody>
-      </p:sp>
-      <p:sp>
-        <p:nvSpPr>
-          <p:cNvPr id="10" name="TextBox 9"/>
-          <p:cNvSpPr txBox="1"/>
-          <p:nvPr/>
-        </p:nvSpPr>
-        <p:spPr>
-          <a:xfrm>
-            <a:off x="566928" y="3560064"/>
-            <a:ext cx="3472586" cy="1328928"/>
-          </a:xfrm>
-          <a:prstGeom prst="rect">
-            <a:avLst/>
-          </a:prstGeom>
-          <a:noFill/>
-        </p:spPr>
-        <p:txBody>
-          <a:bodyPr wrap="square" lIns="0" rIns="0" tIns="0" bIns="0">
-            <a:spAutoFit/>
-          </a:bodyPr>
-          <a:lstStyle/>
-          <a:p>
-            <a:pPr>
-              <a:spcBef>
-                <a:spcPts val="0"/>
-              </a:spcBef>
-              <a:spcAft>
-                <a:spcPts val="600"/>
-              </a:spcAft>
-            </a:pPr>
-            <a:r>
-              <a:rPr sz="950" b="0" i="0">
-                <a:solidFill>
-                  <a:srgbClr val="17549E"/>
-                </a:solidFill>
-                <a:latin typeface="Consolas"/>
-              </a:rPr>
-              <a:t>ROBUSTNESS OF THE DIFFERENCES RESULT</a:t>
-            </a:r>
-          </a:p>
-          <a:p>
-            <a:pPr>
-              <a:lnSpc>
-                <a:spcPct val="128000"/>
-              </a:lnSpc>
-              <a:spcBef>
-                <a:spcPts val="0"/>
-              </a:spcBef>
-              <a:spcAft>
-                <a:spcPts val="0"/>
-              </a:spcAft>
-            </a:pPr>
-            <a:r>
-              <a:rPr sz="850" b="0" i="0">
-                <a:solidFill>
-                  <a:srgbClr val="5A6068"/>
-                </a:solidFill>
-                <a:latin typeface="Calibri"/>
-              </a:rPr>
-              <a:t>Two checks beyond the item choice. Removing survey-round effects leaves health and trust intact (+0.42, +0.58) rather than reducing them, so they are idiosyncratic country movement and not shocks common to a round. And the split-half design — predictor and outcome from disjoint respondents — rules out common-method variance, with trust retaining 93%. What remains untested is replication of the trust result on an independent wellbeing instrument.</a:t>
-            </a:r>
-          </a:p>
-        </p:txBody>
-      </p:sp>
-      <p:sp>
-        <p:nvSpPr>
-          <p:cNvPr id="11" name="Rectangle 10"/>
-          <p:cNvSpPr/>
-          <p:nvPr/>
-        </p:nvSpPr>
-        <p:spPr>
-          <a:xfrm>
-            <a:off x="4359554" y="3413760"/>
-            <a:ext cx="3472586" cy="25400"/>
-          </a:xfrm>
-          <a:prstGeom prst="rect">
-            <a:avLst/>
-          </a:prstGeom>
-          <a:solidFill>
-            <a:srgbClr val="17549E"/>
-          </a:solidFill>
-          <a:ln>
-            <a:noFill/>
-          </a:ln>
-          <a:effectLst/>
-        </p:spPr>
-        <p:style>
-          <a:lnRef idx="1">
-            <a:schemeClr val="accent1"/>
-          </a:lnRef>
-          <a:fillRef idx="3">
-            <a:schemeClr val="accent1"/>
-          </a:fillRef>
-          <a:effectRef idx="2">
-            <a:schemeClr val="accent1"/>
-          </a:effectRef>
-          <a:fontRef idx="minor">
-            <a:schemeClr val="lt1"/>
-          </a:fontRef>
-        </p:style>
-        <p:txBody>
-          <a:bodyPr rtlCol="0" anchor="ctr"/>
-          <a:lstStyle/>
-          <a:p>
-            <a:pPr algn="ctr"/>
-          </a:p>
-        </p:txBody>
-      </p:sp>
-      <p:sp>
-        <p:nvSpPr>
-          <p:cNvPr id="12" name="TextBox 11"/>
-          <p:cNvSpPr txBox="1"/>
-          <p:nvPr/>
-        </p:nvSpPr>
-        <p:spPr>
-          <a:xfrm>
-            <a:off x="4359554" y="3560064"/>
-            <a:ext cx="3472586" cy="1328928"/>
-          </a:xfrm>
-          <a:prstGeom prst="rect">
-            <a:avLst/>
-          </a:prstGeom>
-          <a:noFill/>
-        </p:spPr>
-        <p:txBody>
-          <a:bodyPr wrap="square" lIns="0" rIns="0" tIns="0" bIns="0">
-            <a:spAutoFit/>
-          </a:bodyPr>
-          <a:lstStyle/>
-          <a:p>
-            <a:pPr>
-              <a:spcBef>
-                <a:spcPts val="0"/>
-              </a:spcBef>
-              <a:spcAft>
-                <a:spcPts val="600"/>
-              </a:spcAft>
-            </a:pPr>
-            <a:r>
-              <a:rPr sz="850" b="0" i="0">
-                <a:solidFill>
-                  <a:srgbClr val="17549E"/>
-                </a:solidFill>
-                <a:latin typeface="Consolas"/>
-              </a:rPr>
-              <a:t>WHAT THE ESS PANEL CAN AND CANNOT TEST</a:t>
-            </a:r>
-          </a:p>
-          <a:p>
-            <a:pPr>
-              <a:lnSpc>
-                <a:spcPct val="128000"/>
-              </a:lnSpc>
-              <a:spcBef>
-                <a:spcPts val="0"/>
-              </a:spcBef>
-              <a:spcAft>
-                <a:spcPts val="0"/>
-              </a:spcAft>
-            </a:pPr>
-            <a:r>
-              <a:rPr sz="750" b="0" i="0">
-                <a:solidFill>
-                  <a:srgbClr val="5A6068"/>
-                </a:solidFill>
-                <a:latin typeface="Calibri"/>
-              </a:rPr>
-              <a:t>Seven survey rounds is too short for the per-country time-series design. Simulating a REAL correlation and asking how often the test finds it: at seven observations rho = 0.5 is recovered in ~3% of units and rho = 0.7 in ~23%, against ~50% and ~79% at thirteen years. So HDI x ESS returning 8% levels / 16% differences is a null test, not a finding — and the inversion (differences above levels) is itself the tell. We report the bars and flag them rather than dropping them. The ESS levels contribution comes from cross-section instead: 47% of 15 countries across regions, which is well-powered.</a:t>
-            </a:r>
-          </a:p>
-        </p:txBody>
-      </p:sp>
-      <p:sp>
-        <p:nvSpPr>
-          <p:cNvPr id="13" name="Rectangle 12"/>
-          <p:cNvSpPr/>
-          <p:nvPr/>
-        </p:nvSpPr>
-        <p:spPr>
-          <a:xfrm>
-            <a:off x="8152180" y="3413760"/>
-            <a:ext cx="3472586" cy="25400"/>
-          </a:xfrm>
-          <a:prstGeom prst="rect">
-            <a:avLst/>
-          </a:prstGeom>
-          <a:solidFill>
-            <a:srgbClr val="17549E"/>
-          </a:solidFill>
-          <a:ln>
-            <a:noFill/>
-          </a:ln>
-          <a:effectLst/>
-        </p:spPr>
-        <p:style>
-          <a:lnRef idx="1">
-            <a:schemeClr val="accent1"/>
-          </a:lnRef>
-          <a:fillRef idx="3">
-            <a:schemeClr val="accent1"/>
-          </a:fillRef>
-          <a:effectRef idx="2">
-            <a:schemeClr val="accent1"/>
-          </a:effectRef>
-          <a:fontRef idx="minor">
-            <a:schemeClr val="lt1"/>
-          </a:fontRef>
-        </p:style>
-        <p:txBody>
-          <a:bodyPr rtlCol="0" anchor="ctr"/>
-          <a:lstStyle/>
-          <a:p>
-            <a:pPr algn="ctr"/>
-          </a:p>
-        </p:txBody>
-      </p:sp>
-      <p:sp>
-        <p:nvSpPr>
-          <p:cNvPr id="14" name="TextBox 13"/>
-          <p:cNvSpPr txBox="1"/>
-          <p:nvPr/>
-        </p:nvSpPr>
-        <p:spPr>
-          <a:xfrm>
-            <a:off x="8152180" y="3560064"/>
-            <a:ext cx="3472586" cy="1328928"/>
-          </a:xfrm>
-          <a:prstGeom prst="rect">
-            <a:avLst/>
-          </a:prstGeom>
-          <a:noFill/>
-        </p:spPr>
-        <p:txBody>
-          <a:bodyPr wrap="square" lIns="0" rIns="0" tIns="0" bIns="0">
-            <a:spAutoFit/>
-          </a:bodyPr>
-          <a:lstStyle/>
-          <a:p>
-            <a:pPr>
-              <a:spcBef>
-                <a:spcPts val="0"/>
-              </a:spcBef>
-              <a:spcAft>
-                <a:spcPts val="600"/>
-              </a:spcAft>
-            </a:pPr>
-            <a:r>
-              <a:rPr sz="850" b="0" i="0">
-                <a:solidFill>
-                  <a:srgbClr val="17549E"/>
-                </a:solidFill>
-                <a:latin typeface="Consolas"/>
-              </a:rPr>
-              <a:t>SCOPE OF THE TRUST FINDING</a:t>
-            </a:r>
-          </a:p>
-          <a:p>
-            <a:pPr>
-              <a:lnSpc>
-                <a:spcPct val="128000"/>
-              </a:lnSpc>
-              <a:spcBef>
-                <a:spcPts val="0"/>
-              </a:spcBef>
-              <a:spcAft>
-                <a:spcPts val="0"/>
-              </a:spcAft>
-            </a:pPr>
-            <a:r>
-              <a:rPr sz="750" b="0" i="0">
-                <a:solidFill>
-                  <a:srgbClr val="5A6068"/>
-                </a:solidFill>
-                <a:latin typeface="Calibri"/>
-              </a:rPr>
-              <a:t>Trust rests on the ESS: 36 European countries, one item, self-reported. 97% of countries significant at levels; +0.59 within-country in first differences, and +0.55 with predictor and outcome drawn from disjoint respondents, so it is not a common-method artefact. What is still missing is corroboration against an independent wellbeing instrument: against the WHR ladder it is +0.06 n.s. in differences, plausibly attenuation from pairing two samples with different fieldwork timing, but unproven either way. Health has that corroboration and trust does not — worth stating plainly rather than leaning on trust as hard as on health.</a:t>
-            </a:r>
-          </a:p>
-        </p:txBody>
-      </p:sp>
-      <p:sp>
-        <p:nvSpPr>
-          <p:cNvPr id="15" name="Rectangle 14"/>
-          <p:cNvSpPr/>
-          <p:nvPr/>
-        </p:nvSpPr>
-        <p:spPr>
-          <a:xfrm>
-            <a:off x="566928" y="4998720"/>
-            <a:ext cx="3472586" cy="25400"/>
-          </a:xfrm>
-          <a:prstGeom prst="rect">
-            <a:avLst/>
-          </a:prstGeom>
-          <a:solidFill>
-            <a:srgbClr val="17549E"/>
-          </a:solidFill>
-          <a:ln>
-            <a:noFill/>
-          </a:ln>
-          <a:effectLst/>
-        </p:spPr>
-        <p:style>
-          <a:lnRef idx="1">
-            <a:schemeClr val="accent1"/>
-          </a:lnRef>
-          <a:fillRef idx="3">
-            <a:schemeClr val="accent1"/>
-          </a:fillRef>
-          <a:effectRef idx="2">
-            <a:schemeClr val="accent1"/>
-          </a:effectRef>
-          <a:fontRef idx="minor">
-            <a:schemeClr val="lt1"/>
-          </a:fontRef>
-        </p:style>
-        <p:txBody>
-          <a:bodyPr rtlCol="0" anchor="ctr"/>
-          <a:lstStyle/>
-          <a:p>
-            <a:pPr algn="ctr"/>
-          </a:p>
-        </p:txBody>
-      </p:sp>
-      <p:sp>
-        <p:nvSpPr>
-          <p:cNvPr id="16" name="TextBox 15"/>
-          <p:cNvSpPr txBox="1"/>
-          <p:nvPr/>
-        </p:nvSpPr>
-        <p:spPr>
-          <a:xfrm>
-            <a:off x="566928" y="5145024"/>
-            <a:ext cx="3472586" cy="1328928"/>
-          </a:xfrm>
-          <a:prstGeom prst="rect">
-            <a:avLst/>
-          </a:prstGeom>
-          <a:noFill/>
-        </p:spPr>
-        <p:txBody>
-          <a:bodyPr wrap="square" lIns="0" rIns="0" tIns="0" bIns="0">
-            <a:spAutoFit/>
-          </a:bodyPr>
-          <a:lstStyle/>
-          <a:p>
-            <a:pPr>
-              <a:spcBef>
-                <a:spcPts val="0"/>
-              </a:spcBef>
-              <a:spcAft>
-                <a:spcPts val="600"/>
-              </a:spcAft>
-            </a:pPr>
-            <a:r>
-              <a:rPr sz="950" b="0" i="0">
-                <a:solidFill>
-                  <a:srgbClr val="17549E"/>
-                </a:solidFill>
-                <a:latin typeface="Consolas"/>
-              </a:rPr>
-              <a:t>INSTITUTIONAL CONFIDENCE IS NOT INTERPERSONAL TRUST</a:t>
-            </a:r>
-          </a:p>
-          <a:p>
-            <a:pPr>
-              <a:lnSpc>
-                <a:spcPct val="128000"/>
-              </a:lnSpc>
-              <a:spcBef>
-                <a:spcPts val="0"/>
-              </a:spcBef>
-              <a:spcAft>
-                <a:spcPts val="0"/>
-              </a:spcAft>
-            </a:pPr>
-            <a:r>
-              <a:rPr sz="950" b="0" i="0">
-                <a:solidFill>
-                  <a:srgbClr val="5A6068"/>
-                </a:solidFill>
-                <a:latin typeface="Calibri"/>
-              </a:rPr>
-              <a:t>SDG16's trust-adjacent series measure satisfaction with public services, perceived bribery and perceived inclusiveness in decision-making. These are conceptually distinct from 'most people can be trusted', and they do not survive an income control while interpersonal trust does. The commentary must be explicit that SDG16 is not a direct analogue, wherever the 1.5% figure appears.</a:t>
-            </a:r>
-          </a:p>
-        </p:txBody>
-      </p:sp>
-      <p:sp>
-        <p:nvSpPr>
-          <p:cNvPr id="17" name="Rectangle 16"/>
-          <p:cNvSpPr/>
-          <p:nvPr/>
-        </p:nvSpPr>
-        <p:spPr>
-          <a:xfrm>
-            <a:off x="4359554" y="4998720"/>
-            <a:ext cx="3472586" cy="25400"/>
-          </a:xfrm>
-          <a:prstGeom prst="rect">
-            <a:avLst/>
-          </a:prstGeom>
-          <a:solidFill>
-            <a:srgbClr val="17549E"/>
-          </a:solidFill>
-          <a:ln>
-            <a:noFill/>
-          </a:ln>
-          <a:effectLst/>
-        </p:spPr>
-        <p:style>
-          <a:lnRef idx="1">
-            <a:schemeClr val="accent1"/>
-          </a:lnRef>
-          <a:fillRef idx="3">
-            <a:schemeClr val="accent1"/>
-          </a:fillRef>
-          <a:effectRef idx="2">
-            <a:schemeClr val="accent1"/>
-          </a:effectRef>
-          <a:fontRef idx="minor">
-            <a:schemeClr val="lt1"/>
-          </a:fontRef>
-        </p:style>
-        <p:txBody>
-          <a:bodyPr rtlCol="0" anchor="ctr"/>
-          <a:lstStyle/>
-          <a:p>
-            <a:pPr algn="ctr"/>
-          </a:p>
-        </p:txBody>
-      </p:sp>
-      <p:sp>
-        <p:nvSpPr>
-          <p:cNvPr id="18" name="TextBox 17"/>
-          <p:cNvSpPr txBox="1"/>
-          <p:nvPr/>
-        </p:nvSpPr>
-        <p:spPr>
-          <a:xfrm>
-            <a:off x="4359554" y="5145024"/>
-            <a:ext cx="3472586" cy="1328928"/>
-          </a:xfrm>
-          <a:prstGeom prst="rect">
-            <a:avLst/>
-          </a:prstGeom>
-          <a:noFill/>
-        </p:spPr>
-        <p:txBody>
-          <a:bodyPr wrap="square" lIns="0" rIns="0" tIns="0" bIns="0">
-            <a:spAutoFit/>
-          </a:bodyPr>
-          <a:lstStyle/>
-          <a:p>
-            <a:pPr>
-              <a:spcBef>
-                <a:spcPts val="0"/>
-              </a:spcBef>
-              <a:spcAft>
-                <a:spcPts val="600"/>
-              </a:spcAft>
-            </a:pPr>
-            <a:r>
-              <a:rPr sz="950" b="0" i="0">
-                <a:solidFill>
-                  <a:srgbClr val="17549E"/>
-                </a:solidFill>
-                <a:latin typeface="Consolas"/>
-              </a:rPr>
-              <a:t>THREE FAILURE MODES AS THE META-FINDING</a:t>
-            </a:r>
-          </a:p>
-          <a:p>
-            <a:pPr>
-              <a:lnSpc>
-                <a:spcPct val="128000"/>
-              </a:lnSpc>
-              <a:spcBef>
-                <a:spcPts val="0"/>
-              </a:spcBef>
-              <a:spcAft>
-                <a:spcPts val="0"/>
-              </a:spcAft>
-            </a:pPr>
-            <a:r>
-              <a:rPr sz="950" b="0" i="0">
-                <a:solidFill>
-                  <a:srgbClr val="5A6068"/>
-                </a:solidFill>
-                <a:latin typeface="Calibri"/>
-              </a:rPr>
-              <a:t>The paper's contribution is arguably not the three domains but the three distinct ways a framework loses one: pooled construct, saturated variable, absent coverage. They need different remedies, which is what makes Act IV specific rather than rhetorical.</a:t>
-            </a:r>
-          </a:p>
-        </p:txBody>
-      </p:sp>
-      <p:sp>
-        <p:nvSpPr>
-          <p:cNvPr id="19" name="Rectangle 18"/>
-          <p:cNvSpPr/>
-          <p:nvPr/>
-        </p:nvSpPr>
-        <p:spPr>
-          <a:xfrm>
-            <a:off x="8152180" y="4998720"/>
-            <a:ext cx="3472586" cy="25400"/>
-          </a:xfrm>
-          <a:prstGeom prst="rect">
-            <a:avLst/>
-          </a:prstGeom>
-          <a:solidFill>
-            <a:srgbClr val="17549E"/>
-          </a:solidFill>
-          <a:ln>
-            <a:noFill/>
-          </a:ln>
-          <a:effectLst/>
-        </p:spPr>
-        <p:style>
-          <a:lnRef idx="1">
-            <a:schemeClr val="accent1"/>
-          </a:lnRef>
-          <a:fillRef idx="3">
-            <a:schemeClr val="accent1"/>
-          </a:fillRef>
-          <a:effectRef idx="2">
-            <a:schemeClr val="accent1"/>
-          </a:effectRef>
-          <a:fontRef idx="minor">
-            <a:schemeClr val="lt1"/>
-          </a:fontRef>
-        </p:style>
-        <p:txBody>
-          <a:bodyPr rtlCol="0" anchor="ctr"/>
-          <a:lstStyle/>
-          <a:p>
-            <a:pPr algn="ctr"/>
-          </a:p>
-        </p:txBody>
-      </p:sp>
-      <p:sp>
-        <p:nvSpPr>
-          <p:cNvPr id="20" name="TextBox 19"/>
-          <p:cNvSpPr txBox="1"/>
-          <p:nvPr/>
-        </p:nvSpPr>
-        <p:spPr>
-          <a:xfrm>
-            <a:off x="8152180" y="5145024"/>
-            <a:ext cx="3472586" cy="1328928"/>
-          </a:xfrm>
-          <a:prstGeom prst="rect">
-            <a:avLst/>
-          </a:prstGeom>
-          <a:noFill/>
-        </p:spPr>
-        <p:txBody>
-          <a:bodyPr wrap="square" lIns="0" rIns="0" tIns="0" bIns="0">
-            <a:spAutoFit/>
-          </a:bodyPr>
-          <a:lstStyle/>
-          <a:p>
-            <a:pPr>
-              <a:spcBef>
-                <a:spcPts val="0"/>
-              </a:spcBef>
-              <a:spcAft>
-                <a:spcPts val="600"/>
-              </a:spcAft>
-            </a:pPr>
-            <a:r>
-              <a:rPr sz="950" b="0" i="0">
-                <a:solidFill>
-                  <a:srgbClr val="17549E"/>
-                </a:solidFill>
-                <a:latin typeface="Consolas"/>
-              </a:rPr>
-              <a:t>WHAT WE ARE NOT CLAIMING</a:t>
-            </a:r>
-          </a:p>
-          <a:p>
-            <a:pPr>
-              <a:lnSpc>
-                <a:spcPct val="128000"/>
-              </a:lnSpc>
-              <a:spcBef>
-                <a:spcPts val="0"/>
-              </a:spcBef>
-              <a:spcAft>
-                <a:spcPts val="0"/>
-              </a:spcAft>
-            </a:pPr>
-            <a:r>
-              <a:rPr sz="950" b="0" i="0">
-                <a:solidFill>
-                  <a:srgbClr val="5A6068"/>
-                </a:solidFill>
-                <a:latin typeface="Calibri"/>
-              </a:rPr>
-              <a:t>No causal claim, and no verdict on the SDGs or HDI as development instruments. The claim is about what these frameworks can and cannot see when the question is individual lived experience — and it is bounded by ESS coverage on the trust half.</a:t>
-            </a:r>
-          </a:p>
-        </p:txBody>
-      </p:sp>
+              <a:t>Levels and first differences for all five, Benjamini–Hochberg corrected within each country. The source for the 41%/33%/19% component figures cited in Act II.</a:t>
+            </a:r>
+          </a:p>
+        </p:txBody>
+      </p:sp>
+      <p:pic>
+        <p:nvPicPr>
+          <p:cNvPr id="5" name="Picture 4" descr="hdi_full_structure.png"/>
+          <p:cNvPicPr>
+            <a:picLocks noChangeAspect="1"/>
+          </p:cNvPicPr>
+          <p:nvPr/>
+        </p:nvPicPr>
+        <p:blipFill>
+          <a:blip r:embed="rId2"/>
+          <a:stretch>
+            <a:fillRect/>
+          </a:stretch>
+        </p:blipFill>
+        <p:spPr>
+          <a:xfrm>
+            <a:off x="881403" y="1965960"/>
+            <a:ext cx="10428889" cy="4480560"/>
+          </a:xfrm>
+          <a:prstGeom prst="rect">
+            <a:avLst/>
+          </a:prstGeom>
+        </p:spPr>
+      </p:pic>
     </p:spTree>
   </p:cSld>
   <p:clrMapOvr>
@@ -12139,7 +11824,7 @@
     <p:bg>
       <p:bgPr>
         <a:solidFill>
-          <a:srgbClr val="14171C"/>
+          <a:srgbClr val="FCFCFB"/>
         </a:solidFill>
         <a:effectLst/>
       </p:bgPr>
@@ -12159,42 +11844,107 @@
         </p:nvSpPr>
         <p:spPr>
           <a:xfrm>
-            <a:off x="566928" y="2743200"/>
-            <a:ext cx="8229600" cy="1371600"/>
-          </a:xfrm>
-          <a:prstGeom prst="rect">
-            <a:avLst/>
-          </a:prstGeom>
-          <a:noFill/>
-        </p:spPr>
-        <p:txBody>
-          <a:bodyPr wrap="square" lIns="0" rIns="0" tIns="0" bIns="0">
-            <a:spAutoFit/>
-          </a:bodyPr>
-          <a:lstStyle/>
-          <a:p>
-            <a:pPr>
-              <a:spcBef>
-                <a:spcPts val="0"/>
-              </a:spcBef>
-              <a:spcAft>
-                <a:spcPts val="1000"/>
-              </a:spcAft>
-            </a:pPr>
-            <a:r>
-              <a:rPr sz="4000" b="0" i="0">
-                <a:solidFill>
-                  <a:srgbClr val="FCFCFB"/>
+            <a:off x="566928" y="411480"/>
+            <a:ext cx="10515600" cy="320040"/>
+          </a:xfrm>
+          <a:prstGeom prst="rect">
+            <a:avLst/>
+          </a:prstGeom>
+          <a:noFill/>
+        </p:spPr>
+        <p:txBody>
+          <a:bodyPr wrap="square" lIns="0" rIns="0" tIns="0" bIns="0">
+            <a:spAutoFit/>
+          </a:bodyPr>
+          <a:lstStyle/>
+          <a:p>
+            <a:pPr>
+              <a:spcBef>
+                <a:spcPts val="0"/>
+              </a:spcBef>
+              <a:spcAft>
+                <a:spcPts val="0"/>
+              </a:spcAft>
+            </a:pPr>
+            <a:r>
+              <a:rPr sz="1000" b="0" i="0">
+                <a:solidFill>
+                  <a:srgbClr val="868D96"/>
+                </a:solidFill>
+                <a:latin typeface="Consolas"/>
+              </a:rPr>
+              <a:t>APPENDIX</a:t>
+            </a:r>
+          </a:p>
+        </p:txBody>
+      </p:sp>
+      <p:sp>
+        <p:nvSpPr>
+          <p:cNvPr id="3" name="TextBox 2"/>
+          <p:cNvSpPr txBox="1"/>
+          <p:nvPr/>
+        </p:nvSpPr>
+        <p:spPr>
+          <a:xfrm>
+            <a:off x="566928" y="749808"/>
+            <a:ext cx="10515600" cy="457200"/>
+          </a:xfrm>
+          <a:prstGeom prst="rect">
+            <a:avLst/>
+          </a:prstGeom>
+          <a:noFill/>
+        </p:spPr>
+        <p:txBody>
+          <a:bodyPr wrap="square" lIns="0" rIns="0" tIns="0" bIns="0">
+            <a:spAutoFit/>
+          </a:bodyPr>
+          <a:lstStyle/>
+          <a:p>
+            <a:pPr>
+              <a:spcBef>
+                <a:spcPts val="0"/>
+              </a:spcBef>
+              <a:spcAft>
+                <a:spcPts val="0"/>
+              </a:spcAft>
+            </a:pPr>
+            <a:r>
+              <a:rPr sz="2000" b="0" i="0">
+                <a:solidFill>
+                  <a:srgbClr val="14171C"/>
                 </a:solidFill>
                 <a:latin typeface="Georgia"/>
               </a:rPr>
-              <a:t>Evidence appendix</a:t>
-            </a:r>
-          </a:p>
+              <a:t>Top 25 SDG series by levels significance</a:t>
+            </a:r>
+          </a:p>
+        </p:txBody>
+      </p:sp>
+      <p:sp>
+        <p:nvSpPr>
+          <p:cNvPr id="4" name="TextBox 3"/>
+          <p:cNvSpPr txBox="1"/>
+          <p:nvPr/>
+        </p:nvSpPr>
+        <p:spPr>
+          <a:xfrm>
+            <a:off x="566928" y="1207008"/>
+            <a:ext cx="10515600" cy="457200"/>
+          </a:xfrm>
+          <a:prstGeom prst="rect">
+            <a:avLst/>
+          </a:prstGeom>
+          <a:noFill/>
+        </p:spPr>
+        <p:txBody>
+          <a:bodyPr wrap="square" lIns="0" rIns="0" tIns="0" bIns="0">
+            <a:spAutoFit/>
+          </a:bodyPr>
+          <a:lstStyle/>
           <a:p>
             <a:pPr>
               <a:lnSpc>
-                <a:spcPct val="135000"/>
+                <a:spcPct val="128000"/>
               </a:lnSpc>
               <a:spcBef>
                 <a:spcPts val="0"/>
@@ -12204,17 +11954,41 @@
               </a:spcAft>
             </a:pPr>
             <a:r>
-              <a:rPr sz="1400" b="0" i="0">
-                <a:solidFill>
-                  <a:srgbClr val="9AA4B0"/>
+              <a:rPr sz="1100" b="0" i="0">
+                <a:solidFill>
+                  <a:srgbClr val="5A6068"/>
                 </a:solidFill>
                 <a:latin typeface="Calibri"/>
               </a:rPr>
-              <a:t>Everything the three acts rest on but do not carry. In submission these become supplementary material.</a:t>
-            </a:r>
-          </a:p>
-        </p:txBody>
-      </p:sp>
+              <a:t>Sixteen of the 25 most predictive individual series in the whole SDG database are Goal 3 health indicators — the source for Act II's health ranking.</a:t>
+            </a:r>
+          </a:p>
+        </p:txBody>
+      </p:sp>
+      <p:pic>
+        <p:nvPicPr>
+          <p:cNvPr id="5" name="Picture 4" descr="sdg_indicator_top20.png"/>
+          <p:cNvPicPr>
+            <a:picLocks noChangeAspect="1"/>
+          </p:cNvPicPr>
+          <p:nvPr/>
+        </p:nvPicPr>
+        <p:blipFill>
+          <a:blip r:embed="rId2"/>
+          <a:stretch>
+            <a:fillRect/>
+          </a:stretch>
+        </p:blipFill>
+        <p:spPr>
+          <a:xfrm>
+            <a:off x="3350018" y="1965960"/>
+            <a:ext cx="5491659" cy="4480560"/>
+          </a:xfrm>
+          <a:prstGeom prst="rect">
+            <a:avLst/>
+          </a:prstGeom>
+        </p:spPr>
+      </p:pic>
     </p:spTree>
   </p:cSld>
   <p:clrMapOvr>
@@ -14221,7 +13995,7 @@
                 </a:solidFill>
                 <a:latin typeface="Georgia"/>
               </a:rPr>
-              <a:t>At the levels, what is actually doing the work?</a:t>
+              <a:t>At the levels: education and health, across three frameworks</a:t>
             </a:r>
           </a:p>
         </p:txBody>
@@ -14260,13 +14034,13 @@
               </a:spcAft>
             </a:pPr>
             <a:r>
-              <a:rPr sz="1600" b="0" i="1">
+              <a:rPr sz="1525" b="0" i="1">
                 <a:solidFill>
                   <a:srgbClr val="9AA4B0"/>
                 </a:solidFill>
                 <a:latin typeface="Georgia"/>
               </a:rPr>
-              <a:t>If the levels are where development and wellbeing meet, the useful question is which components are carrying that association. Ask it of both frameworks' internals: the HDI's five components, and the SDGs' seventeen goals. Two domains come out — but one of them only after you stop pooling it.</a:t>
+              <a:t>If the levels are where development and wellbeing meet, the useful question is which components are carrying that association — asked of all three frameworks at once, domain by domain, rather than one framework's internals at a time. Two domains come out: education and health. Both need a second look before they agree with each other.</a:t>
             </a:r>
           </a:p>
         </p:txBody>
@@ -14308,7 +14082,7 @@
                 </a:solidFill>
                 <a:latin typeface="Consolas"/>
               </a:rPr>
-              <a:t>19% vs 41%</a:t>
+              <a:t>41% vs 19%</a:t>
             </a:r>
           </a:p>
           <a:p>
@@ -14330,7 +14104,7 @@
                 </a:solidFill>
                 <a:latin typeface="Calibri"/>
               </a:rPr>
-              <a:t>HDI life expectancy vs mean years of schooling, at levels</a:t>
+              <a:t>HDI: mean years of schooling leads, life expectancy is weakest</a:t>
             </a:r>
           </a:p>
         </p:txBody>
@@ -14372,7 +14146,7 @@
                 </a:solidFill>
                 <a:latin typeface="Consolas"/>
               </a:rPr>
-              <a:t>4th of 17</a:t>
+              <a:t>12.7% vs 3.3%</a:t>
             </a:r>
           </a:p>
           <a:p>
@@ -14394,7 +14168,7 @@
                 </a:solidFill>
                 <a:latin typeface="Calibri"/>
               </a:rPr>
-              <a:t>where health ranks among SDG goals (11.5%)</a:t>
+              <a:t>SDG4 access indicators alone vs all 35 pooled</a:t>
             </a:r>
           </a:p>
         </p:txBody>
@@ -14436,7 +14210,7 @@
                 </a:solidFill>
                 <a:latin typeface="Consolas"/>
               </a:rPr>
-              <a:t>12.7% vs 3.3%</a:t>
+              <a:t>89% / 100%</a:t>
             </a:r>
           </a:p>
           <a:p>
@@ -14458,7 +14232,7 @@
                 </a:solidFill>
                 <a:latin typeface="Calibri"/>
               </a:rPr>
-              <a:t>SDG4 access indicators alone vs all 35 pooled</a:t>
+              <a:t>ESS countries significant on people: education / health</a:t>
             </a:r>
           </a:p>
         </p:txBody>
@@ -14526,7 +14300,7 @@
                 </a:solidFill>
                 <a:latin typeface="Consolas"/>
               </a:rPr>
-              <a:t>INSIDE THE HDI</a:t>
+              <a:t>ALL THREE DOMAINS, AT THE LEVELS</a:t>
             </a:r>
           </a:p>
         </p:txBody>
@@ -14571,7 +14345,7 @@
                 </a:solidFill>
                 <a:latin typeface="Georgia"/>
               </a:rPr>
-              <a:t>Schooling leads the HDI's components; life expectancy is the weakest of the five</a:t>
+              <a:t>Education, health and social trust all predict life satisfaction — where they can be measured</a:t>
             </a:r>
           </a:p>
         </p:txBody>
@@ -14616,7 +14390,7 @@
                 </a:solidFill>
                 <a:latin typeface="Calibri"/>
               </a:rPr>
-              <a:t>Decompose the composite and the five components separate cleanly at levels: mean years of schooling 41%, income 40%, expected years of schooling 33%, the composite itself 42% — and life expectancy last at 19%. In differences all five sit between 1% and 5%, so the collapse is a property of the composite and of every part of it.</a:t>
+              <a:t>Before drilling into any one domain, the shape of the whole result. Test each of education, health and social trust against wellbeing at the levels, in every framework that measures it, on one comparable unit: % of countries FDR-significant. Where a framework can test a domain, the domain matters — the question that varies is which frameworks can test which domains.</a:t>
             </a:r>
           </a:p>
           <a:p>
@@ -14638,7 +14412,7 @@
                 </a:solidFill>
                 <a:latin typeface="Calibri"/>
               </a:rPr>
-              <a:t>Life expectancy being the weakest is the first hint that this is about measurement rather than about health. The top 100 countries span 81 to 85 years. A variable with that little range left cannot carry much association, whatever the underlying domain does.</a:t>
+              <a:t>The HDI and the SDGs can both test education and health, and both find something, though not always in agreement with each other at face value. Neither can test social trust at all — there is no HDI bar for it, and the SDGs' nearest series measure a different construct. That gap is the subject of the next section. This one is about the two domains every framework here can at least attempt.</a:t>
             </a:r>
           </a:p>
         </p:txBody>
@@ -14687,7 +14461,7 @@
       </p:sp>
       <p:pic>
         <p:nvPicPr>
-          <p:cNvPr id="6" name="Picture 5" descr="hdi_full_structure.png"/>
+          <p:cNvPr id="6" name="Picture 5" descr="domains_at_levels_comparison.png"/>
           <p:cNvPicPr>
             <a:picLocks noChangeAspect="1"/>
           </p:cNvPicPr>
@@ -14701,8 +14475,8 @@
         </p:blipFill>
         <p:spPr>
           <a:xfrm>
-            <a:off x="5120640" y="1791377"/>
-            <a:ext cx="6537960" cy="2808901"/>
+            <a:off x="5120640" y="1934936"/>
+            <a:ext cx="6537960" cy="2521784"/>
           </a:xfrm>
           <a:prstGeom prst="rect">
             <a:avLst/>
@@ -14749,7 +14523,7 @@
                 </a:solidFill>
                 <a:latin typeface="Calibri"/>
               </a:rPr>
-              <a:t>HDI composite and its five components, levels and first differences, Benjamini–Hochberg corrected within each country.</a:t>
+              <a:t>All three domains across all three frameworks, all on % of countries FDR-significant. Trust has no HDI bar because the HDI does not measure it.</a:t>
             </a:r>
           </a:p>
         </p:txBody>

--- a/deck/Measured_Where_It_Varies.pptx
+++ b/deck/Measured_Where_It_Varies.pptx
@@ -13462,7 +13462,7 @@
                 </a:solidFill>
                 <a:latin typeface="Calibri"/>
               </a:rPr>
-              <a:t>Run country by country it returns 8% at levels and 16% in differences across 25 countries, which is a null test rather than a finding: the ESS has seven survey rounds where the WHR panels have thirteen years, and panel b shows what that costs — at seven observations a genuine correlation of 0.5 is recovered in about 3% of units. Differences landing above levels is the tell that the test is not working, not a result.</a:t>
+              <a:t>Run country by country it returns 8% at levels and 16% in differences across 25 countries. Read that as a null test rather than a finding: the ESS has seven survey rounds where the WHR panels have thirteen years, and differences landing above levels is the signature of an underpowered test, not a real result — a genuine effect does not get easier to detect once you difference it.</a:t>
             </a:r>
           </a:p>
           <a:p>
@@ -13591,8 +13591,8 @@
         </p:blipFill>
         <p:spPr>
           <a:xfrm>
-            <a:off x="5120640" y="1791377"/>
-            <a:ext cx="6537960" cy="2808901"/>
+            <a:off x="5120640" y="1353312"/>
+            <a:ext cx="6537960" cy="3685032"/>
           </a:xfrm>
           <a:prstGeom prst="rect">
             <a:avLst/>
@@ -13639,7 +13639,7 @@
                 </a:solidFill>
                 <a:latin typeface="Calibri"/>
               </a:rPr>
-              <a:t>Panel a: the same FDR test, levels and differences on the same units, in all three pairings. Panel b: how much of a genuine association each series length recovers — the reason the hatched bars carry no verdict.</a:t>
+              <a:t>The same FDR test, levels and differences on the same units, in all three pairings. The hatched bars carry no verdict — seven survey rounds is too short a panel for this design to see anything, in either direction.</a:t>
             </a:r>
           </a:p>
         </p:txBody>
